--- a/reports/ssg-quickcommerce-onepager.pptx
+++ b/reports/ssg-quickcommerce-onepager.pptx
@@ -3256,6 +3256,43 @@
         <p:spPr>
           <a:xfrm>
             <a:off x="406799" y="1080000"/>
+            <a:ext cx="9093600" cy="251999"/>
+          </a:xfrm>
+          <a:prstGeom prst="rect">
+            <a:avLst/>
+          </a:prstGeom>
+          <a:noFill/>
+        </p:spPr>
+        <p:txBody>
+          <a:bodyPr wrap="square" anchor="t" lIns="0" rIns="0" tIns="0" bIns="0">
+            <a:spAutoFit/>
+          </a:bodyPr>
+          <a:lstStyle/>
+          <a:p>
+            <a:pPr algn="l"/>
+            <a:r>
+              <a:rPr sz="1400" b="1">
+                <a:solidFill>
+                  <a:srgbClr val="222222"/>
+                </a:solidFill>
+                <a:latin typeface="맑은 고딕"/>
+                <a:ea typeface="맑은 고딕"/>
+                <a:cs typeface="맑은 고딕"/>
+              </a:rPr>
+              <a:t>'26. 7. 9. 이마트 양재·하남점 '2시간 내 배송' 시범 도입 — 대용량 장보기 수요 공략, PP센터 가동률 제고</a:t>
+            </a:r>
+          </a:p>
+        </p:txBody>
+      </p:sp>
+      <p:sp>
+        <p:nvSpPr>
+          <p:cNvPr id="7" name="TextBox 6"/>
+          <p:cNvSpPr txBox="1"/>
+          <p:nvPr/>
+        </p:nvSpPr>
+        <p:spPr>
+          <a:xfrm>
+            <a:off x="406799" y="1440000"/>
             <a:ext cx="9093600" cy="198000"/>
           </a:xfrm>
           <a:prstGeom prst="rect">
@@ -3273,26 +3310,26 @@
             <a:r>
               <a:rPr sz="1300" b="1">
                 <a:solidFill>
-                  <a:srgbClr val="000066"/>
+                  <a:srgbClr val="222222"/>
                 </a:solidFill>
                 <a:latin typeface="맑은 고딕"/>
                 <a:ea typeface="맑은 고딕"/>
                 <a:cs typeface="맑은 고딕"/>
               </a:rPr>
-              <a:t>□ 핵심 요약</a:t>
-            </a:r>
-          </a:p>
-        </p:txBody>
-      </p:sp>
-      <p:sp>
-        <p:nvSpPr>
-          <p:cNvPr id="7" name="TextBox 6"/>
+              <a:t>□ 도입 배경</a:t>
+            </a:r>
+          </a:p>
+        </p:txBody>
+      </p:sp>
+      <p:sp>
+        <p:nvSpPr>
+          <p:cNvPr id="8" name="TextBox 7"/>
           <p:cNvSpPr txBox="1"/>
           <p:nvPr/>
         </p:nvSpPr>
         <p:spPr>
           <a:xfrm>
-            <a:off x="604800" y="1278000"/>
+            <a:off x="604800" y="1638000"/>
             <a:ext cx="8895600" cy="180000"/>
           </a:xfrm>
           <a:prstGeom prst="rect">
@@ -3316,20 +3353,20 @@
                 <a:ea typeface="맑은 고딕"/>
                 <a:cs typeface="맑은 고딕"/>
               </a:rPr>
-              <a:t>- '26. 7. 9. 이마트 양재점·하남점 인근 대상 '2시간 내 배송' 시범 운영 개시 (오후 8시 주문 마감, 결제 후 2시간 내 완료, 예약배송 병행 선택 가능)</a:t>
-            </a:r>
-          </a:p>
-        </p:txBody>
-      </p:sp>
-      <p:sp>
-        <p:nvSpPr>
-          <p:cNvPr id="8" name="TextBox 7"/>
+              <a:t>- 이륜차 퀵커머스(바로퀵)는 적재량 한계로 소량 배송에 한정 → 대형마트 주력인 3~4인 가구 대용량 장보기 공백</a:t>
+            </a:r>
+          </a:p>
+        </p:txBody>
+      </p:sp>
+      <p:sp>
+        <p:nvSpPr>
+          <p:cNvPr id="9" name="TextBox 8"/>
           <p:cNvSpPr txBox="1"/>
           <p:nvPr/>
         </p:nvSpPr>
         <p:spPr>
           <a:xfrm>
-            <a:off x="604800" y="1458000"/>
+            <a:off x="604800" y="1818000"/>
             <a:ext cx="8895600" cy="180000"/>
           </a:xfrm>
           <a:prstGeom prst="rect">
@@ -3353,20 +3390,20 @@
                 <a:ea typeface="맑은 고딕"/>
                 <a:cs typeface="맑은 고딕"/>
               </a:rPr>
-              <a:t>- 이륜차 퀵커머스(바로퀵)가 못 담는 3~4인 가구 대용량 장보기를 사륜차로 흡수 + 새벽배송 막힌 PP센터의 낮 시간대 가동률 제고 포석</a:t>
-            </a:r>
-          </a:p>
-        </p:txBody>
-      </p:sp>
-      <p:sp>
-        <p:nvSpPr>
-          <p:cNvPr id="9" name="TextBox 8"/>
+              <a:t>- 바로퀵 6월 매출 1월 대비 197% 증가로 온디맨드 수요 실증 → 1시간(소량·이륜차) / 2시간(대용량·사륜차) 세분화 대응 (B마트도 대용량 확대 중)</a:t>
+            </a:r>
+          </a:p>
+        </p:txBody>
+      </p:sp>
+      <p:sp>
+        <p:nvSpPr>
+          <p:cNvPr id="10" name="TextBox 9"/>
           <p:cNvSpPr txBox="1"/>
           <p:nvPr/>
         </p:nvSpPr>
         <p:spPr>
           <a:xfrm>
-            <a:off x="406799" y="1728000"/>
+            <a:off x="406799" y="2106000"/>
             <a:ext cx="9093600" cy="198000"/>
           </a:xfrm>
           <a:prstGeom prst="rect">
@@ -3384,7 +3421,118 @@
             <a:r>
               <a:rPr sz="1300" b="1">
                 <a:solidFill>
-                  <a:srgbClr val="000066"/>
+                  <a:srgbClr val="222222"/>
+                </a:solidFill>
+                <a:latin typeface="맑은 고딕"/>
+                <a:ea typeface="맑은 고딕"/>
+                <a:cs typeface="맑은 고딕"/>
+              </a:rPr>
+              <a:t>□ 시범 운영 개요</a:t>
+            </a:r>
+          </a:p>
+        </p:txBody>
+      </p:sp>
+      <p:sp>
+        <p:nvSpPr>
+          <p:cNvPr id="11" name="TextBox 10"/>
+          <p:cNvSpPr txBox="1"/>
+          <p:nvPr/>
+        </p:nvSpPr>
+        <p:spPr>
+          <a:xfrm>
+            <a:off x="604800" y="2304000"/>
+            <a:ext cx="8895600" cy="180000"/>
+          </a:xfrm>
+          <a:prstGeom prst="rect">
+            <a:avLst/>
+          </a:prstGeom>
+          <a:noFill/>
+        </p:spPr>
+        <p:txBody>
+          <a:bodyPr wrap="square" anchor="t" lIns="0" rIns="0" tIns="0" bIns="0">
+            <a:spAutoFit/>
+          </a:bodyPr>
+          <a:lstStyle/>
+          <a:p>
+            <a:pPr algn="l"/>
+            <a:r>
+              <a:rPr sz="1050" b="0">
+                <a:solidFill>
+                  <a:srgbClr val="000000"/>
+                </a:solidFill>
+                <a:latin typeface="맑은 고딕"/>
+                <a:ea typeface="맑은 고딕"/>
+                <a:cs typeface="맑은 고딕"/>
+              </a:rPr>
+              <a:t>- 오후 8시까지 주문 시 결제 시점 기준 2시간 내 배송 완료, 기존 예약배송 병행 선택 가능</a:t>
+            </a:r>
+          </a:p>
+        </p:txBody>
+      </p:sp>
+      <p:sp>
+        <p:nvSpPr>
+          <p:cNvPr id="12" name="TextBox 11"/>
+          <p:cNvSpPr txBox="1"/>
+          <p:nvPr/>
+        </p:nvSpPr>
+        <p:spPr>
+          <a:xfrm>
+            <a:off x="604800" y="2484000"/>
+            <a:ext cx="8895600" cy="180000"/>
+          </a:xfrm>
+          <a:prstGeom prst="rect">
+            <a:avLst/>
+          </a:prstGeom>
+          <a:noFill/>
+        </p:spPr>
+        <p:txBody>
+          <a:bodyPr wrap="square" anchor="t" lIns="0" rIns="0" tIns="0" bIns="0">
+            <a:spAutoFit/>
+          </a:bodyPr>
+          <a:lstStyle/>
+          <a:p>
+            <a:pPr algn="l"/>
+            <a:r>
+              <a:rPr sz="1050" b="0">
+                <a:solidFill>
+                  <a:srgbClr val="000000"/>
+                </a:solidFill>
+                <a:latin typeface="맑은 고딕"/>
+                <a:ea typeface="맑은 고딕"/>
+                <a:cs typeface="맑은 고딕"/>
+              </a:rPr>
+              <a:t>- 쓱배송 사륜 차량 활용으로 무거운 대용량 상품까지 즉시 배송 — 점포당 약 15만 종 상품이 기반</a:t>
+            </a:r>
+          </a:p>
+        </p:txBody>
+      </p:sp>
+      <p:sp>
+        <p:nvSpPr>
+          <p:cNvPr id="13" name="TextBox 12"/>
+          <p:cNvSpPr txBox="1"/>
+          <p:nvPr/>
+        </p:nvSpPr>
+        <p:spPr>
+          <a:xfrm>
+            <a:off x="406799" y="2790000"/>
+            <a:ext cx="9093600" cy="198000"/>
+          </a:xfrm>
+          <a:prstGeom prst="rect">
+            <a:avLst/>
+          </a:prstGeom>
+          <a:noFill/>
+        </p:spPr>
+        <p:txBody>
+          <a:bodyPr wrap="square" anchor="t" lIns="0" rIns="0" tIns="0" bIns="0">
+            <a:spAutoFit/>
+          </a:bodyPr>
+          <a:lstStyle/>
+          <a:p>
+            <a:pPr algn="l"/>
+            <a:r>
+              <a:rPr sz="1300" b="1">
+                <a:solidFill>
+                  <a:srgbClr val="222222"/>
                 </a:solidFill>
                 <a:latin typeface="맑은 고딕"/>
                 <a:ea typeface="맑은 고딕"/>
@@ -3397,14 +3545,14 @@
       </p:sp>
       <p:graphicFrame>
         <p:nvGraphicFramePr>
-          <p:cNvPr id="10" name="Table 9"/>
+          <p:cNvPr id="14" name="Table 13"/>
           <p:cNvGraphicFramePr>
             <a:graphicFrameLocks noGrp="1"/>
           </p:cNvGraphicFramePr>
           <p:nvPr/>
         </p:nvGraphicFramePr>
         <p:xfrm>
-          <a:off x="406799" y="1925999"/>
+          <a:off x="406799" y="2988000"/>
           <a:ext cx="9093600" cy="1728000"/>
         </p:xfrm>
         <a:graphic>
@@ -4188,124 +4336,13 @@
       </p:graphicFrame>
       <p:sp>
         <p:nvSpPr>
-          <p:cNvPr id="11" name="TextBox 10"/>
+          <p:cNvPr id="15" name="TextBox 14"/>
           <p:cNvSpPr txBox="1"/>
           <p:nvPr/>
         </p:nvSpPr>
         <p:spPr>
           <a:xfrm>
-            <a:off x="406799" y="3780000"/>
-            <a:ext cx="9093600" cy="198000"/>
-          </a:xfrm>
-          <a:prstGeom prst="rect">
-            <a:avLst/>
-          </a:prstGeom>
-          <a:noFill/>
-        </p:spPr>
-        <p:txBody>
-          <a:bodyPr wrap="square" anchor="t" lIns="0" rIns="0" tIns="0" bIns="0">
-            <a:spAutoFit/>
-          </a:bodyPr>
-          <a:lstStyle/>
-          <a:p>
-            <a:pPr algn="l"/>
-            <a:r>
-              <a:rPr sz="1300" b="1">
-                <a:solidFill>
-                  <a:srgbClr val="000066"/>
-                </a:solidFill>
-                <a:latin typeface="맑은 고딕"/>
-                <a:ea typeface="맑은 고딕"/>
-                <a:cs typeface="맑은 고딕"/>
-              </a:rPr>
-              <a:t>□ 도입 배경</a:t>
-            </a:r>
-          </a:p>
-        </p:txBody>
-      </p:sp>
-      <p:sp>
-        <p:nvSpPr>
-          <p:cNvPr id="12" name="TextBox 11"/>
-          <p:cNvSpPr txBox="1"/>
-          <p:nvPr/>
-        </p:nvSpPr>
-        <p:spPr>
-          <a:xfrm>
-            <a:off x="604800" y="3978000"/>
-            <a:ext cx="8895600" cy="180000"/>
-          </a:xfrm>
-          <a:prstGeom prst="rect">
-            <a:avLst/>
-          </a:prstGeom>
-          <a:noFill/>
-        </p:spPr>
-        <p:txBody>
-          <a:bodyPr wrap="square" anchor="t" lIns="0" rIns="0" tIns="0" bIns="0">
-            <a:spAutoFit/>
-          </a:bodyPr>
-          <a:lstStyle/>
-          <a:p>
-            <a:pPr algn="l"/>
-            <a:r>
-              <a:rPr sz="1050" b="0">
-                <a:solidFill>
-                  <a:srgbClr val="000000"/>
-                </a:solidFill>
-                <a:latin typeface="맑은 고딕"/>
-                <a:ea typeface="맑은 고딕"/>
-                <a:cs typeface="맑은 고딕"/>
-              </a:rPr>
-              <a:t>- 이륜차 적재량 한계로 소량 배송에 갇힌 퀵커머스 → 대형마트 주력인 가족 단위 대용량 장보기 공백 공략</a:t>
-            </a:r>
-          </a:p>
-        </p:txBody>
-      </p:sp>
-      <p:sp>
-        <p:nvSpPr>
-          <p:cNvPr id="13" name="TextBox 12"/>
-          <p:cNvSpPr txBox="1"/>
-          <p:nvPr/>
-        </p:nvSpPr>
-        <p:spPr>
-          <a:xfrm>
-            <a:off x="604800" y="4158000"/>
-            <a:ext cx="8895600" cy="180000"/>
-          </a:xfrm>
-          <a:prstGeom prst="rect">
-            <a:avLst/>
-          </a:prstGeom>
-          <a:noFill/>
-        </p:spPr>
-        <p:txBody>
-          <a:bodyPr wrap="square" anchor="t" lIns="0" rIns="0" tIns="0" bIns="0">
-            <a:spAutoFit/>
-          </a:bodyPr>
-          <a:lstStyle/>
-          <a:p>
-            <a:pPr algn="l"/>
-            <a:r>
-              <a:rPr sz="1050" b="0">
-                <a:solidFill>
-                  <a:srgbClr val="000000"/>
-                </a:solidFill>
-                <a:latin typeface="맑은 고딕"/>
-                <a:ea typeface="맑은 고딕"/>
-                <a:cs typeface="맑은 고딕"/>
-              </a:rPr>
-              <a:t>- 바로퀵 매출 급증으로 온디맨드 장보기 수요 실증 → 1시간(소량·이륜차) / 2시간(대용량·사륜차) 세분화 대응 (B마트도 대용량 확대 중)</a:t>
-            </a:r>
-          </a:p>
-        </p:txBody>
-      </p:sp>
-      <p:sp>
-        <p:nvSpPr>
-          <p:cNvPr id="14" name="TextBox 13"/>
-          <p:cNvSpPr txBox="1"/>
-          <p:nvPr/>
-        </p:nvSpPr>
-        <p:spPr>
-          <a:xfrm>
-            <a:off x="406799" y="4608000"/>
+            <a:off x="406799" y="4806000"/>
             <a:ext cx="4428000" cy="198000"/>
           </a:xfrm>
           <a:prstGeom prst="rect">
@@ -4323,7 +4360,7 @@
             <a:r>
               <a:rPr sz="1300" b="1">
                 <a:solidFill>
-                  <a:srgbClr val="000066"/>
+                  <a:srgbClr val="222222"/>
                 </a:solidFill>
                 <a:latin typeface="맑은 고딕"/>
                 <a:ea typeface="맑은 고딕"/>
@@ -4336,15 +4373,15 @@
       </p:sp>
       <p:graphicFrame>
         <p:nvGraphicFramePr>
-          <p:cNvPr id="15" name="Table 14"/>
+          <p:cNvPr id="16" name="Table 15"/>
           <p:cNvGraphicFramePr>
             <a:graphicFrameLocks noGrp="1"/>
           </p:cNvGraphicFramePr>
           <p:nvPr/>
         </p:nvGraphicFramePr>
         <p:xfrm>
-          <a:off x="406799" y="4806000"/>
-          <a:ext cx="4428000" cy="1152000"/>
+          <a:off x="406799" y="5004000"/>
+          <a:ext cx="4428000" cy="1080000"/>
         </p:xfrm>
         <a:graphic>
           <a:graphicData uri="http://schemas.openxmlformats.org/drawingml/2006/table">
@@ -4357,7 +4394,7 @@
                 <a:gridCol w="1296000"/>
                 <a:gridCol w="1872000"/>
               </a:tblGrid>
-              <a:tr h="288000">
+              <a:tr h="270000">
                 <a:tc>
                   <a:txBody>
                     <a:bodyPr wrap="square"/>
@@ -4434,7 +4471,7 @@
                   </a:tcPr>
                 </a:tc>
               </a:tr>
-              <a:tr h="288000">
+              <a:tr h="270000">
                 <a:tc>
                   <a:txBody>
                     <a:bodyPr wrap="square"/>
@@ -4511,7 +4548,7 @@
                   </a:tcPr>
                 </a:tc>
               </a:tr>
-              <a:tr h="288000">
+              <a:tr h="270000">
                 <a:tc>
                   <a:txBody>
                     <a:bodyPr wrap="square"/>
@@ -4588,7 +4625,7 @@
                   </a:tcPr>
                 </a:tc>
               </a:tr>
-              <a:tr h="288000">
+              <a:tr h="270000">
                 <a:tc>
                   <a:txBody>
                     <a:bodyPr wrap="square"/>
@@ -4671,13 +4708,13 @@
       </p:graphicFrame>
       <p:sp>
         <p:nvSpPr>
-          <p:cNvPr id="16" name="TextBox 15"/>
+          <p:cNvPr id="17" name="TextBox 16"/>
           <p:cNvSpPr txBox="1"/>
           <p:nvPr/>
         </p:nvSpPr>
         <p:spPr>
           <a:xfrm>
-            <a:off x="5072400" y="4608000"/>
+            <a:off x="5072400" y="4806000"/>
             <a:ext cx="4428000" cy="198000"/>
           </a:xfrm>
           <a:prstGeom prst="rect">
@@ -4695,7 +4732,7 @@
             <a:r>
               <a:rPr sz="1300" b="1">
                 <a:solidFill>
-                  <a:srgbClr val="000066"/>
+                  <a:srgbClr val="222222"/>
                 </a:solidFill>
                 <a:latin typeface="맑은 고딕"/>
                 <a:ea typeface="맑은 고딕"/>
@@ -4708,15 +4745,15 @@
       </p:sp>
       <p:graphicFrame>
         <p:nvGraphicFramePr>
-          <p:cNvPr id="17" name="Table 16"/>
+          <p:cNvPr id="18" name="Table 17"/>
           <p:cNvGraphicFramePr>
             <a:graphicFrameLocks noGrp="1"/>
           </p:cNvGraphicFramePr>
           <p:nvPr/>
         </p:nvGraphicFramePr>
         <p:xfrm>
-          <a:off x="5072400" y="4806000"/>
-          <a:ext cx="4428000" cy="1152000"/>
+          <a:off x="5072400" y="5004000"/>
+          <a:ext cx="4428000" cy="1080000"/>
         </p:xfrm>
         <a:graphic>
           <a:graphicData uri="http://schemas.openxmlformats.org/drawingml/2006/table">
@@ -4728,7 +4765,7 @@
                 <a:gridCol w="1404000"/>
                 <a:gridCol w="3024000"/>
               </a:tblGrid>
-              <a:tr h="288000">
+              <a:tr h="270000">
                 <a:tc>
                   <a:txBody>
                     <a:bodyPr wrap="square"/>
@@ -4780,7 +4817,7 @@
                   </a:tcPr>
                 </a:tc>
               </a:tr>
-              <a:tr h="288000">
+              <a:tr h="270000">
                 <a:tc>
                   <a:txBody>
                     <a:bodyPr wrap="square"/>
@@ -4832,7 +4869,7 @@
                   </a:tcPr>
                 </a:tc>
               </a:tr>
-              <a:tr h="288000">
+              <a:tr h="270000">
                 <a:tc>
                   <a:txBody>
                     <a:bodyPr wrap="square"/>
@@ -4884,7 +4921,7 @@
                   </a:tcPr>
                 </a:tc>
               </a:tr>
-              <a:tr h="288000">
+              <a:tr h="270000">
                 <a:tc>
                   <a:txBody>
                     <a:bodyPr wrap="square"/>
@@ -4942,13 +4979,13 @@
       </p:graphicFrame>
       <p:sp>
         <p:nvSpPr>
-          <p:cNvPr id="18" name="TextBox 17"/>
+          <p:cNvPr id="19" name="TextBox 18"/>
           <p:cNvSpPr txBox="1"/>
           <p:nvPr/>
         </p:nvSpPr>
         <p:spPr>
           <a:xfrm>
-            <a:off x="406799" y="6102000"/>
+            <a:off x="406799" y="6156000"/>
             <a:ext cx="9093600" cy="180000"/>
           </a:xfrm>
           <a:prstGeom prst="rect">

--- a/reports/ssg-quickcommerce-onepager.pptx
+++ b/reports/ssg-quickcommerce-onepager.pptx
@@ -3144,6 +3144,43 @@
         </p:nvSpPr>
         <p:spPr>
           <a:xfrm>
+            <a:off x="417600" y="835200"/>
+            <a:ext cx="7848000" cy="234000"/>
+          </a:xfrm>
+          <a:prstGeom prst="rect">
+            <a:avLst/>
+          </a:prstGeom>
+          <a:noFill/>
+        </p:spPr>
+        <p:txBody>
+          <a:bodyPr wrap="square" anchor="t" lIns="0" rIns="0" tIns="0" bIns="0">
+            <a:spAutoFit/>
+          </a:bodyPr>
+          <a:lstStyle/>
+          <a:p>
+            <a:pPr algn="l"/>
+            <a:r>
+              <a:rPr sz="1400" b="1">
+                <a:solidFill>
+                  <a:srgbClr val="000000"/>
+                </a:solidFill>
+                <a:latin typeface="맑은 고딕"/>
+                <a:ea typeface="맑은 고딕"/>
+                <a:cs typeface="맑은 고딕"/>
+              </a:rPr>
+              <a:t>■ 양재·하남점 '2시간 내 배송' 시범 도입 — 대용량 장보기 공략, PP센터 가동률 제고</a:t>
+            </a:r>
+          </a:p>
+        </p:txBody>
+      </p:sp>
+      <p:sp>
+        <p:nvSpPr>
+          <p:cNvPr id="4" name="TextBox 3"/>
+          <p:cNvSpPr txBox="1"/>
+          <p:nvPr/>
+        </p:nvSpPr>
+        <p:spPr>
+          <a:xfrm>
             <a:off x="8316000" y="846000"/>
             <a:ext cx="1188000" cy="216000"/>
           </a:xfrm>
@@ -3175,7 +3212,7 @@
       </p:sp>
       <p:sp>
         <p:nvSpPr>
-          <p:cNvPr id="4" name="TextBox 3"/>
+          <p:cNvPr id="5" name="TextBox 4"/>
           <p:cNvSpPr txBox="1"/>
           <p:nvPr/>
         </p:nvSpPr>
@@ -3212,7 +3249,7 @@
       </p:sp>
       <p:sp>
         <p:nvSpPr>
-          <p:cNvPr id="5" name="TextBox 4"/>
+          <p:cNvPr id="6" name="TextBox 5"/>
           <p:cNvSpPr txBox="1"/>
           <p:nvPr/>
         </p:nvSpPr>
@@ -3249,50 +3286,13 @@
       </p:sp>
       <p:sp>
         <p:nvSpPr>
-          <p:cNvPr id="6" name="TextBox 5"/>
-          <p:cNvSpPr txBox="1"/>
-          <p:nvPr/>
-        </p:nvSpPr>
-        <p:spPr>
-          <a:xfrm>
-            <a:off x="406799" y="1080000"/>
-            <a:ext cx="9093600" cy="251999"/>
-          </a:xfrm>
-          <a:prstGeom prst="rect">
-            <a:avLst/>
-          </a:prstGeom>
-          <a:noFill/>
-        </p:spPr>
-        <p:txBody>
-          <a:bodyPr wrap="square" anchor="t" lIns="0" rIns="0" tIns="0" bIns="0">
-            <a:spAutoFit/>
-          </a:bodyPr>
-          <a:lstStyle/>
-          <a:p>
-            <a:pPr algn="l"/>
-            <a:r>
-              <a:rPr sz="1400" b="1">
-                <a:solidFill>
-                  <a:srgbClr val="222222"/>
-                </a:solidFill>
-                <a:latin typeface="맑은 고딕"/>
-                <a:ea typeface="맑은 고딕"/>
-                <a:cs typeface="맑은 고딕"/>
-              </a:rPr>
-              <a:t>'26. 7. 9. 이마트 양재·하남점 '2시간 내 배송' 시범 도입 — 대용량 장보기 수요 공략, PP센터 가동률 제고</a:t>
-            </a:r>
-          </a:p>
-        </p:txBody>
-      </p:sp>
-      <p:sp>
-        <p:nvSpPr>
           <p:cNvPr id="7" name="TextBox 6"/>
           <p:cNvSpPr txBox="1"/>
           <p:nvPr/>
         </p:nvSpPr>
         <p:spPr>
           <a:xfrm>
-            <a:off x="406799" y="1440000"/>
+            <a:off x="406799" y="1188000"/>
             <a:ext cx="9093600" cy="198000"/>
           </a:xfrm>
           <a:prstGeom prst="rect">
@@ -3329,7 +3329,7 @@
         </p:nvSpPr>
         <p:spPr>
           <a:xfrm>
-            <a:off x="604800" y="1638000"/>
+            <a:off x="604800" y="1386000"/>
             <a:ext cx="8895600" cy="180000"/>
           </a:xfrm>
           <a:prstGeom prst="rect">
@@ -3366,7 +3366,7 @@
         </p:nvSpPr>
         <p:spPr>
           <a:xfrm>
-            <a:off x="604800" y="1818000"/>
+            <a:off x="604800" y="1565999"/>
             <a:ext cx="8895600" cy="180000"/>
           </a:xfrm>
           <a:prstGeom prst="rect">
@@ -3403,7 +3403,7 @@
         </p:nvSpPr>
         <p:spPr>
           <a:xfrm>
-            <a:off x="406799" y="2106000"/>
+            <a:off x="406799" y="1854000"/>
             <a:ext cx="9093600" cy="198000"/>
           </a:xfrm>
           <a:prstGeom prst="rect">
@@ -3440,7 +3440,7 @@
         </p:nvSpPr>
         <p:spPr>
           <a:xfrm>
-            <a:off x="604800" y="2304000"/>
+            <a:off x="604800" y="2052000"/>
             <a:ext cx="8895600" cy="180000"/>
           </a:xfrm>
           <a:prstGeom prst="rect">
@@ -3477,7 +3477,7 @@
         </p:nvSpPr>
         <p:spPr>
           <a:xfrm>
-            <a:off x="604800" y="2484000"/>
+            <a:off x="604800" y="2232000"/>
             <a:ext cx="8895600" cy="180000"/>
           </a:xfrm>
           <a:prstGeom prst="rect">
@@ -3514,7 +3514,7 @@
         </p:nvSpPr>
         <p:spPr>
           <a:xfrm>
-            <a:off x="406799" y="2790000"/>
+            <a:off x="406799" y="2538000"/>
             <a:ext cx="9093600" cy="198000"/>
           </a:xfrm>
           <a:prstGeom prst="rect">
@@ -3552,7 +3552,7 @@
           <p:nvPr/>
         </p:nvGraphicFramePr>
         <p:xfrm>
-          <a:off x="406799" y="2988000"/>
+          <a:off x="406799" y="2736000"/>
           <a:ext cx="9093600" cy="1728000"/>
         </p:xfrm>
         <a:graphic>
@@ -4342,7 +4342,7 @@
         </p:nvSpPr>
         <p:spPr>
           <a:xfrm>
-            <a:off x="406799" y="4806000"/>
+            <a:off x="406799" y="4644000"/>
             <a:ext cx="4428000" cy="198000"/>
           </a:xfrm>
           <a:prstGeom prst="rect">
@@ -4380,7 +4380,7 @@
           <p:nvPr/>
         </p:nvGraphicFramePr>
         <p:xfrm>
-          <a:off x="406799" y="5004000"/>
+          <a:off x="406799" y="4842000"/>
           <a:ext cx="4428000" cy="1080000"/>
         </p:xfrm>
         <a:graphic>
@@ -4714,7 +4714,7 @@
         </p:nvSpPr>
         <p:spPr>
           <a:xfrm>
-            <a:off x="5072400" y="4806000"/>
+            <a:off x="5072400" y="4644000"/>
             <a:ext cx="4428000" cy="198000"/>
           </a:xfrm>
           <a:prstGeom prst="rect">
@@ -4752,7 +4752,7 @@
           <p:nvPr/>
         </p:nvGraphicFramePr>
         <p:xfrm>
-          <a:off x="5072400" y="5004000"/>
+          <a:off x="5072400" y="4842000"/>
           <a:ext cx="4428000" cy="1080000"/>
         </p:xfrm>
         <a:graphic>
@@ -4985,7 +4985,7 @@
         </p:nvSpPr>
         <p:spPr>
           <a:xfrm>
-            <a:off x="406799" y="6156000"/>
+            <a:off x="406799" y="6030000"/>
             <a:ext cx="9093600" cy="180000"/>
           </a:xfrm>
           <a:prstGeom prst="rect">

--- a/reports/ssg-quickcommerce-onepager.pptx
+++ b/reports/ssg-quickcommerce-onepager.pptx
@@ -3144,7 +3144,7 @@
         </p:nvSpPr>
         <p:spPr>
           <a:xfrm>
-            <a:off x="417600" y="835200"/>
+            <a:off x="417600" y="1044000"/>
             <a:ext cx="7848000" cy="234000"/>
           </a:xfrm>
           <a:prstGeom prst="rect">
@@ -3292,7 +3292,7 @@
         </p:nvSpPr>
         <p:spPr>
           <a:xfrm>
-            <a:off x="406799" y="1188000"/>
+            <a:off x="406799" y="1475999"/>
             <a:ext cx="9093600" cy="198000"/>
           </a:xfrm>
           <a:prstGeom prst="rect">
@@ -3329,8 +3329,8 @@
         </p:nvSpPr>
         <p:spPr>
           <a:xfrm>
-            <a:off x="604800" y="1386000"/>
-            <a:ext cx="8895600" cy="180000"/>
+            <a:off x="604800" y="1673999"/>
+            <a:ext cx="8895600" cy="172800"/>
           </a:xfrm>
           <a:prstGeom prst="rect">
             <a:avLst/>
@@ -3366,8 +3366,8 @@
         </p:nvSpPr>
         <p:spPr>
           <a:xfrm>
-            <a:off x="604800" y="1565999"/>
-            <a:ext cx="8895600" cy="180000"/>
+            <a:off x="604800" y="1846799"/>
+            <a:ext cx="8895600" cy="172800"/>
           </a:xfrm>
           <a:prstGeom prst="rect">
             <a:avLst/>
@@ -3403,7 +3403,7 @@
         </p:nvSpPr>
         <p:spPr>
           <a:xfrm>
-            <a:off x="406799" y="1854000"/>
+            <a:off x="406799" y="2199600"/>
             <a:ext cx="9093600" cy="198000"/>
           </a:xfrm>
           <a:prstGeom prst="rect">
@@ -3440,8 +3440,8 @@
         </p:nvSpPr>
         <p:spPr>
           <a:xfrm>
-            <a:off x="604800" y="2052000"/>
-            <a:ext cx="8895600" cy="180000"/>
+            <a:off x="604800" y="2397599"/>
+            <a:ext cx="8895600" cy="172800"/>
           </a:xfrm>
           <a:prstGeom prst="rect">
             <a:avLst/>
@@ -3477,8 +3477,8 @@
         </p:nvSpPr>
         <p:spPr>
           <a:xfrm>
-            <a:off x="604800" y="2232000"/>
-            <a:ext cx="8895600" cy="180000"/>
+            <a:off x="604800" y="2570399"/>
+            <a:ext cx="8895600" cy="172800"/>
           </a:xfrm>
           <a:prstGeom prst="rect">
             <a:avLst/>
@@ -3514,7 +3514,7 @@
         </p:nvSpPr>
         <p:spPr>
           <a:xfrm>
-            <a:off x="406799" y="2538000"/>
+            <a:off x="406799" y="2923199"/>
             <a:ext cx="9093600" cy="198000"/>
           </a:xfrm>
           <a:prstGeom prst="rect">
@@ -3552,8 +3552,8 @@
           <p:nvPr/>
         </p:nvGraphicFramePr>
         <p:xfrm>
-          <a:off x="406799" y="2736000"/>
-          <a:ext cx="9093600" cy="1728000"/>
+          <a:off x="406799" y="3121200"/>
+          <a:ext cx="9093600" cy="1620000"/>
         </p:xfrm>
         <a:graphic>
           <a:graphicData uri="http://schemas.openxmlformats.org/drawingml/2006/table">
@@ -3568,7 +3568,7 @@
                 <a:gridCol w="1296000"/>
                 <a:gridCol w="3585600"/>
               </a:tblGrid>
-              <a:tr h="288000">
+              <a:tr h="270000">
                 <a:tc>
                   <a:txBody>
                     <a:bodyPr wrap="square"/>
@@ -3695,7 +3695,7 @@
                   </a:tcPr>
                 </a:tc>
               </a:tr>
-              <a:tr h="288000">
+              <a:tr h="270000">
                 <a:tc>
                   <a:txBody>
                     <a:bodyPr wrap="square"/>
@@ -3822,7 +3822,7 @@
                   </a:tcPr>
                 </a:tc>
               </a:tr>
-              <a:tr h="288000">
+              <a:tr h="270000">
                 <a:tc>
                   <a:txBody>
                     <a:bodyPr wrap="square"/>
@@ -3949,7 +3949,7 @@
                   </a:tcPr>
                 </a:tc>
               </a:tr>
-              <a:tr h="288000">
+              <a:tr h="270000">
                 <a:tc>
                   <a:txBody>
                     <a:bodyPr wrap="square"/>
@@ -4076,7 +4076,7 @@
                   </a:tcPr>
                 </a:tc>
               </a:tr>
-              <a:tr h="288000">
+              <a:tr h="270000">
                 <a:tc>
                   <a:txBody>
                     <a:bodyPr wrap="square"/>
@@ -4203,7 +4203,7 @@
                   </a:tcPr>
                 </a:tc>
               </a:tr>
-              <a:tr h="288000">
+              <a:tr h="270000">
                 <a:tc>
                   <a:txBody>
                     <a:bodyPr wrap="square"/>
@@ -4342,7 +4342,7 @@
         </p:nvSpPr>
         <p:spPr>
           <a:xfrm>
-            <a:off x="406799" y="4644000"/>
+            <a:off x="406799" y="4921199"/>
             <a:ext cx="4428000" cy="198000"/>
           </a:xfrm>
           <a:prstGeom prst="rect">
@@ -4380,8 +4380,8 @@
           <p:nvPr/>
         </p:nvGraphicFramePr>
         <p:xfrm>
-          <a:off x="406799" y="4842000"/>
-          <a:ext cx="4428000" cy="1080000"/>
+          <a:off x="406799" y="5119200"/>
+          <a:ext cx="4428000" cy="936000"/>
         </p:xfrm>
         <a:graphic>
           <a:graphicData uri="http://schemas.openxmlformats.org/drawingml/2006/table">
@@ -4394,7 +4394,7 @@
                 <a:gridCol w="1296000"/>
                 <a:gridCol w="1872000"/>
               </a:tblGrid>
-              <a:tr h="270000">
+              <a:tr h="234000">
                 <a:tc>
                   <a:txBody>
                     <a:bodyPr wrap="square"/>
@@ -4471,7 +4471,7 @@
                   </a:tcPr>
                 </a:tc>
               </a:tr>
-              <a:tr h="270000">
+              <a:tr h="234000">
                 <a:tc>
                   <a:txBody>
                     <a:bodyPr wrap="square"/>
@@ -4548,7 +4548,7 @@
                   </a:tcPr>
                 </a:tc>
               </a:tr>
-              <a:tr h="270000">
+              <a:tr h="234000">
                 <a:tc>
                   <a:txBody>
                     <a:bodyPr wrap="square"/>
@@ -4625,7 +4625,7 @@
                   </a:tcPr>
                 </a:tc>
               </a:tr>
-              <a:tr h="270000">
+              <a:tr h="234000">
                 <a:tc>
                   <a:txBody>
                     <a:bodyPr wrap="square"/>
@@ -4714,7 +4714,7 @@
         </p:nvSpPr>
         <p:spPr>
           <a:xfrm>
-            <a:off x="5072400" y="4644000"/>
+            <a:off x="5072400" y="4921199"/>
             <a:ext cx="4428000" cy="198000"/>
           </a:xfrm>
           <a:prstGeom prst="rect">
@@ -4752,8 +4752,8 @@
           <p:nvPr/>
         </p:nvGraphicFramePr>
         <p:xfrm>
-          <a:off x="5072400" y="4842000"/>
-          <a:ext cx="4428000" cy="1080000"/>
+          <a:off x="5072400" y="5119200"/>
+          <a:ext cx="4428000" cy="936000"/>
         </p:xfrm>
         <a:graphic>
           <a:graphicData uri="http://schemas.openxmlformats.org/drawingml/2006/table">
@@ -4765,7 +4765,7 @@
                 <a:gridCol w="1404000"/>
                 <a:gridCol w="3024000"/>
               </a:tblGrid>
-              <a:tr h="270000">
+              <a:tr h="234000">
                 <a:tc>
                   <a:txBody>
                     <a:bodyPr wrap="square"/>
@@ -4817,7 +4817,7 @@
                   </a:tcPr>
                 </a:tc>
               </a:tr>
-              <a:tr h="270000">
+              <a:tr h="234000">
                 <a:tc>
                   <a:txBody>
                     <a:bodyPr wrap="square"/>
@@ -4869,7 +4869,7 @@
                   </a:tcPr>
                 </a:tc>
               </a:tr>
-              <a:tr h="270000">
+              <a:tr h="234000">
                 <a:tc>
                   <a:txBody>
                     <a:bodyPr wrap="square"/>
@@ -4921,7 +4921,7 @@
                   </a:tcPr>
                 </a:tc>
               </a:tr>
-              <a:tr h="270000">
+              <a:tr h="234000">
                 <a:tc>
                   <a:txBody>
                     <a:bodyPr wrap="square"/>
@@ -4985,8 +4985,8 @@
         </p:nvSpPr>
         <p:spPr>
           <a:xfrm>
-            <a:off x="406799" y="6030000"/>
-            <a:ext cx="9093600" cy="180000"/>
+            <a:off x="406799" y="6235200"/>
+            <a:ext cx="9093600" cy="172800"/>
           </a:xfrm>
           <a:prstGeom prst="rect">
             <a:avLst/>

--- a/reports/ssg-quickcommerce-onepager.pptx
+++ b/reports/ssg-quickcommerce-onepager.pptx
@@ -3112,7 +3112,7 @@
           <a:p>
             <a:pPr algn="l"/>
             <a:r>
-              <a:rPr sz="2800" b="1">
+              <a:rPr sz="2000" b="1">
                 <a:solidFill>
                   <a:srgbClr val="222222"/>
                 </a:solidFill>
@@ -3123,7 +3123,7 @@
               <a:t>[이마트 퀵커머스] </a:t>
             </a:r>
             <a:r>
-              <a:rPr sz="2800" b="1">
+              <a:rPr sz="2000" b="1">
                 <a:solidFill>
                   <a:srgbClr val="222222"/>
                 </a:solidFill>
@@ -3589,6 +3589,26 @@
                     </a:p>
                   </a:txBody>
                   <a:tcPr anchor="ctr" marL="36000" marR="36000" marT="0" marB="0">
+                    <a:lnL w="9525" cap="flat">
+                      <a:solidFill>
+                        <a:srgbClr val="BFBFBF"/>
+                      </a:solidFill>
+                    </a:lnL>
+                    <a:lnR w="9525" cap="flat">
+                      <a:solidFill>
+                        <a:srgbClr val="BFBFBF"/>
+                      </a:solidFill>
+                    </a:lnR>
+                    <a:lnT w="9525" cap="flat">
+                      <a:solidFill>
+                        <a:srgbClr val="BFBFBF"/>
+                      </a:solidFill>
+                    </a:lnT>
+                    <a:lnB w="9525" cap="flat">
+                      <a:solidFill>
+                        <a:srgbClr val="BFBFBF"/>
+                      </a:solidFill>
+                    </a:lnB>
                     <a:solidFill>
                       <a:srgbClr val="EAEEF6"/>
                     </a:solidFill>
@@ -3614,6 +3634,26 @@
                     </a:p>
                   </a:txBody>
                   <a:tcPr anchor="ctr" marL="36000" marR="36000" marT="0" marB="0">
+                    <a:lnL w="9525" cap="flat">
+                      <a:solidFill>
+                        <a:srgbClr val="BFBFBF"/>
+                      </a:solidFill>
+                    </a:lnL>
+                    <a:lnR w="9525" cap="flat">
+                      <a:solidFill>
+                        <a:srgbClr val="BFBFBF"/>
+                      </a:solidFill>
+                    </a:lnR>
+                    <a:lnT w="9525" cap="flat">
+                      <a:solidFill>
+                        <a:srgbClr val="BFBFBF"/>
+                      </a:solidFill>
+                    </a:lnT>
+                    <a:lnB w="9525" cap="flat">
+                      <a:solidFill>
+                        <a:srgbClr val="BFBFBF"/>
+                      </a:solidFill>
+                    </a:lnB>
                     <a:solidFill>
                       <a:srgbClr val="EAEEF6"/>
                     </a:solidFill>
@@ -3639,6 +3679,26 @@
                     </a:p>
                   </a:txBody>
                   <a:tcPr anchor="ctr" marL="36000" marR="36000" marT="0" marB="0">
+                    <a:lnL w="9525" cap="flat">
+                      <a:solidFill>
+                        <a:srgbClr val="BFBFBF"/>
+                      </a:solidFill>
+                    </a:lnL>
+                    <a:lnR w="9525" cap="flat">
+                      <a:solidFill>
+                        <a:srgbClr val="BFBFBF"/>
+                      </a:solidFill>
+                    </a:lnR>
+                    <a:lnT w="9525" cap="flat">
+                      <a:solidFill>
+                        <a:srgbClr val="BFBFBF"/>
+                      </a:solidFill>
+                    </a:lnT>
+                    <a:lnB w="9525" cap="flat">
+                      <a:solidFill>
+                        <a:srgbClr val="BFBFBF"/>
+                      </a:solidFill>
+                    </a:lnB>
                     <a:solidFill>
                       <a:srgbClr val="EAEEF6"/>
                     </a:solidFill>
@@ -3664,6 +3724,26 @@
                     </a:p>
                   </a:txBody>
                   <a:tcPr anchor="ctr" marL="36000" marR="36000" marT="0" marB="0">
+                    <a:lnL w="9525" cap="flat">
+                      <a:solidFill>
+                        <a:srgbClr val="BFBFBF"/>
+                      </a:solidFill>
+                    </a:lnL>
+                    <a:lnR w="9525" cap="flat">
+                      <a:solidFill>
+                        <a:srgbClr val="BFBFBF"/>
+                      </a:solidFill>
+                    </a:lnR>
+                    <a:lnT w="9525" cap="flat">
+                      <a:solidFill>
+                        <a:srgbClr val="BFBFBF"/>
+                      </a:solidFill>
+                    </a:lnT>
+                    <a:lnB w="9525" cap="flat">
+                      <a:solidFill>
+                        <a:srgbClr val="BFBFBF"/>
+                      </a:solidFill>
+                    </a:lnB>
                     <a:solidFill>
                       <a:srgbClr val="EAEEF6"/>
                     </a:solidFill>
@@ -3689,6 +3769,26 @@
                     </a:p>
                   </a:txBody>
                   <a:tcPr anchor="ctr" marL="36000" marR="36000" marT="0" marB="0">
+                    <a:lnL w="9525" cap="flat">
+                      <a:solidFill>
+                        <a:srgbClr val="BFBFBF"/>
+                      </a:solidFill>
+                    </a:lnL>
+                    <a:lnR w="9525" cap="flat">
+                      <a:solidFill>
+                        <a:srgbClr val="BFBFBF"/>
+                      </a:solidFill>
+                    </a:lnR>
+                    <a:lnT w="9525" cap="flat">
+                      <a:solidFill>
+                        <a:srgbClr val="BFBFBF"/>
+                      </a:solidFill>
+                    </a:lnT>
+                    <a:lnB w="9525" cap="flat">
+                      <a:solidFill>
+                        <a:srgbClr val="BFBFBF"/>
+                      </a:solidFill>
+                    </a:lnB>
                     <a:solidFill>
                       <a:srgbClr val="EAEEF6"/>
                     </a:solidFill>
@@ -3716,6 +3816,26 @@
                     </a:p>
                   </a:txBody>
                   <a:tcPr anchor="ctr" marL="36000" marR="36000" marT="0" marB="0">
+                    <a:lnL w="9525" cap="flat">
+                      <a:solidFill>
+                        <a:srgbClr val="BFBFBF"/>
+                      </a:solidFill>
+                    </a:lnL>
+                    <a:lnR w="9525" cap="flat">
+                      <a:solidFill>
+                        <a:srgbClr val="BFBFBF"/>
+                      </a:solidFill>
+                    </a:lnR>
+                    <a:lnT w="9525" cap="flat">
+                      <a:solidFill>
+                        <a:srgbClr val="BFBFBF"/>
+                      </a:solidFill>
+                    </a:lnT>
+                    <a:lnB w="9525" cap="flat">
+                      <a:solidFill>
+                        <a:srgbClr val="BFBFBF"/>
+                      </a:solidFill>
+                    </a:lnB>
                     <a:solidFill>
                       <a:srgbClr val="FFFFFF"/>
                     </a:solidFill>
@@ -3741,6 +3861,26 @@
                     </a:p>
                   </a:txBody>
                   <a:tcPr anchor="ctr" marL="36000" marR="36000" marT="0" marB="0">
+                    <a:lnL w="9525" cap="flat">
+                      <a:solidFill>
+                        <a:srgbClr val="BFBFBF"/>
+                      </a:solidFill>
+                    </a:lnL>
+                    <a:lnR w="9525" cap="flat">
+                      <a:solidFill>
+                        <a:srgbClr val="BFBFBF"/>
+                      </a:solidFill>
+                    </a:lnR>
+                    <a:lnT w="9525" cap="flat">
+                      <a:solidFill>
+                        <a:srgbClr val="BFBFBF"/>
+                      </a:solidFill>
+                    </a:lnT>
+                    <a:lnB w="9525" cap="flat">
+                      <a:solidFill>
+                        <a:srgbClr val="BFBFBF"/>
+                      </a:solidFill>
+                    </a:lnB>
                     <a:solidFill>
                       <a:srgbClr val="FFFFFF"/>
                     </a:solidFill>
@@ -3766,6 +3906,26 @@
                     </a:p>
                   </a:txBody>
                   <a:tcPr anchor="ctr" marL="36000" marR="36000" marT="0" marB="0">
+                    <a:lnL w="9525" cap="flat">
+                      <a:solidFill>
+                        <a:srgbClr val="BFBFBF"/>
+                      </a:solidFill>
+                    </a:lnL>
+                    <a:lnR w="9525" cap="flat">
+                      <a:solidFill>
+                        <a:srgbClr val="BFBFBF"/>
+                      </a:solidFill>
+                    </a:lnR>
+                    <a:lnT w="9525" cap="flat">
+                      <a:solidFill>
+                        <a:srgbClr val="BFBFBF"/>
+                      </a:solidFill>
+                    </a:lnT>
+                    <a:lnB w="9525" cap="flat">
+                      <a:solidFill>
+                        <a:srgbClr val="BFBFBF"/>
+                      </a:solidFill>
+                    </a:lnB>
                     <a:solidFill>
                       <a:srgbClr val="FFFFFF"/>
                     </a:solidFill>
@@ -3791,6 +3951,26 @@
                     </a:p>
                   </a:txBody>
                   <a:tcPr anchor="ctr" marL="36000" marR="36000" marT="0" marB="0">
+                    <a:lnL w="9525" cap="flat">
+                      <a:solidFill>
+                        <a:srgbClr val="BFBFBF"/>
+                      </a:solidFill>
+                    </a:lnL>
+                    <a:lnR w="9525" cap="flat">
+                      <a:solidFill>
+                        <a:srgbClr val="BFBFBF"/>
+                      </a:solidFill>
+                    </a:lnR>
+                    <a:lnT w="9525" cap="flat">
+                      <a:solidFill>
+                        <a:srgbClr val="BFBFBF"/>
+                      </a:solidFill>
+                    </a:lnT>
+                    <a:lnB w="9525" cap="flat">
+                      <a:solidFill>
+                        <a:srgbClr val="BFBFBF"/>
+                      </a:solidFill>
+                    </a:lnB>
                     <a:solidFill>
                       <a:srgbClr val="FFFFFF"/>
                     </a:solidFill>
@@ -3816,6 +3996,26 @@
                     </a:p>
                   </a:txBody>
                   <a:tcPr anchor="ctr" marL="36000" marR="36000" marT="0" marB="0">
+                    <a:lnL w="9525" cap="flat">
+                      <a:solidFill>
+                        <a:srgbClr val="BFBFBF"/>
+                      </a:solidFill>
+                    </a:lnL>
+                    <a:lnR w="9525" cap="flat">
+                      <a:solidFill>
+                        <a:srgbClr val="BFBFBF"/>
+                      </a:solidFill>
+                    </a:lnR>
+                    <a:lnT w="9525" cap="flat">
+                      <a:solidFill>
+                        <a:srgbClr val="BFBFBF"/>
+                      </a:solidFill>
+                    </a:lnT>
+                    <a:lnB w="9525" cap="flat">
+                      <a:solidFill>
+                        <a:srgbClr val="BFBFBF"/>
+                      </a:solidFill>
+                    </a:lnB>
                     <a:solidFill>
                       <a:srgbClr val="FFFFFF"/>
                     </a:solidFill>
@@ -3843,6 +4043,26 @@
                     </a:p>
                   </a:txBody>
                   <a:tcPr anchor="ctr" marL="36000" marR="36000" marT="0" marB="0">
+                    <a:lnL w="9525" cap="flat">
+                      <a:solidFill>
+                        <a:srgbClr val="BFBFBF"/>
+                      </a:solidFill>
+                    </a:lnL>
+                    <a:lnR w="9525" cap="flat">
+                      <a:solidFill>
+                        <a:srgbClr val="BFBFBF"/>
+                      </a:solidFill>
+                    </a:lnR>
+                    <a:lnT w="9525" cap="flat">
+                      <a:solidFill>
+                        <a:srgbClr val="BFBFBF"/>
+                      </a:solidFill>
+                    </a:lnT>
+                    <a:lnB w="9525" cap="flat">
+                      <a:solidFill>
+                        <a:srgbClr val="BFBFBF"/>
+                      </a:solidFill>
+                    </a:lnB>
                     <a:solidFill>
                       <a:srgbClr val="FFFFFF"/>
                     </a:solidFill>
@@ -3868,6 +4088,26 @@
                     </a:p>
                   </a:txBody>
                   <a:tcPr anchor="ctr" marL="36000" marR="36000" marT="0" marB="0">
+                    <a:lnL w="9525" cap="flat">
+                      <a:solidFill>
+                        <a:srgbClr val="BFBFBF"/>
+                      </a:solidFill>
+                    </a:lnL>
+                    <a:lnR w="9525" cap="flat">
+                      <a:solidFill>
+                        <a:srgbClr val="BFBFBF"/>
+                      </a:solidFill>
+                    </a:lnR>
+                    <a:lnT w="9525" cap="flat">
+                      <a:solidFill>
+                        <a:srgbClr val="BFBFBF"/>
+                      </a:solidFill>
+                    </a:lnT>
+                    <a:lnB w="9525" cap="flat">
+                      <a:solidFill>
+                        <a:srgbClr val="BFBFBF"/>
+                      </a:solidFill>
+                    </a:lnB>
                     <a:solidFill>
                       <a:srgbClr val="FFFFFF"/>
                     </a:solidFill>
@@ -3893,6 +4133,26 @@
                     </a:p>
                   </a:txBody>
                   <a:tcPr anchor="ctr" marL="36000" marR="36000" marT="0" marB="0">
+                    <a:lnL w="9525" cap="flat">
+                      <a:solidFill>
+                        <a:srgbClr val="BFBFBF"/>
+                      </a:solidFill>
+                    </a:lnL>
+                    <a:lnR w="9525" cap="flat">
+                      <a:solidFill>
+                        <a:srgbClr val="BFBFBF"/>
+                      </a:solidFill>
+                    </a:lnR>
+                    <a:lnT w="9525" cap="flat">
+                      <a:solidFill>
+                        <a:srgbClr val="BFBFBF"/>
+                      </a:solidFill>
+                    </a:lnT>
+                    <a:lnB w="9525" cap="flat">
+                      <a:solidFill>
+                        <a:srgbClr val="BFBFBF"/>
+                      </a:solidFill>
+                    </a:lnB>
                     <a:solidFill>
                       <a:srgbClr val="FFFFFF"/>
                     </a:solidFill>
@@ -3918,6 +4178,26 @@
                     </a:p>
                   </a:txBody>
                   <a:tcPr anchor="ctr" marL="36000" marR="36000" marT="0" marB="0">
+                    <a:lnL w="9525" cap="flat">
+                      <a:solidFill>
+                        <a:srgbClr val="BFBFBF"/>
+                      </a:solidFill>
+                    </a:lnL>
+                    <a:lnR w="9525" cap="flat">
+                      <a:solidFill>
+                        <a:srgbClr val="BFBFBF"/>
+                      </a:solidFill>
+                    </a:lnR>
+                    <a:lnT w="9525" cap="flat">
+                      <a:solidFill>
+                        <a:srgbClr val="BFBFBF"/>
+                      </a:solidFill>
+                    </a:lnT>
+                    <a:lnB w="9525" cap="flat">
+                      <a:solidFill>
+                        <a:srgbClr val="BFBFBF"/>
+                      </a:solidFill>
+                    </a:lnB>
                     <a:solidFill>
                       <a:srgbClr val="FFFFFF"/>
                     </a:solidFill>
@@ -3943,6 +4223,26 @@
                     </a:p>
                   </a:txBody>
                   <a:tcPr anchor="ctr" marL="36000" marR="36000" marT="0" marB="0">
+                    <a:lnL w="9525" cap="flat">
+                      <a:solidFill>
+                        <a:srgbClr val="BFBFBF"/>
+                      </a:solidFill>
+                    </a:lnL>
+                    <a:lnR w="9525" cap="flat">
+                      <a:solidFill>
+                        <a:srgbClr val="BFBFBF"/>
+                      </a:solidFill>
+                    </a:lnR>
+                    <a:lnT w="9525" cap="flat">
+                      <a:solidFill>
+                        <a:srgbClr val="BFBFBF"/>
+                      </a:solidFill>
+                    </a:lnT>
+                    <a:lnB w="9525" cap="flat">
+                      <a:solidFill>
+                        <a:srgbClr val="BFBFBF"/>
+                      </a:solidFill>
+                    </a:lnB>
                     <a:solidFill>
                       <a:srgbClr val="FFFFFF"/>
                     </a:solidFill>
@@ -3970,6 +4270,26 @@
                     </a:p>
                   </a:txBody>
                   <a:tcPr anchor="ctr" marL="36000" marR="36000" marT="0" marB="0">
+                    <a:lnL w="9525" cap="flat">
+                      <a:solidFill>
+                        <a:srgbClr val="BFBFBF"/>
+                      </a:solidFill>
+                    </a:lnL>
+                    <a:lnR w="9525" cap="flat">
+                      <a:solidFill>
+                        <a:srgbClr val="BFBFBF"/>
+                      </a:solidFill>
+                    </a:lnR>
+                    <a:lnT w="9525" cap="flat">
+                      <a:solidFill>
+                        <a:srgbClr val="BFBFBF"/>
+                      </a:solidFill>
+                    </a:lnT>
+                    <a:lnB w="9525" cap="flat">
+                      <a:solidFill>
+                        <a:srgbClr val="BFBFBF"/>
+                      </a:solidFill>
+                    </a:lnB>
                     <a:solidFill>
                       <a:srgbClr val="FFFFFF"/>
                     </a:solidFill>
@@ -3995,6 +4315,26 @@
                     </a:p>
                   </a:txBody>
                   <a:tcPr anchor="ctr" marL="36000" marR="36000" marT="0" marB="0">
+                    <a:lnL w="9525" cap="flat">
+                      <a:solidFill>
+                        <a:srgbClr val="BFBFBF"/>
+                      </a:solidFill>
+                    </a:lnL>
+                    <a:lnR w="9525" cap="flat">
+                      <a:solidFill>
+                        <a:srgbClr val="BFBFBF"/>
+                      </a:solidFill>
+                    </a:lnR>
+                    <a:lnT w="9525" cap="flat">
+                      <a:solidFill>
+                        <a:srgbClr val="BFBFBF"/>
+                      </a:solidFill>
+                    </a:lnT>
+                    <a:lnB w="9525" cap="flat">
+                      <a:solidFill>
+                        <a:srgbClr val="BFBFBF"/>
+                      </a:solidFill>
+                    </a:lnB>
                     <a:solidFill>
                       <a:srgbClr val="FFFFFF"/>
                     </a:solidFill>
@@ -4020,6 +4360,26 @@
                     </a:p>
                   </a:txBody>
                   <a:tcPr anchor="ctr" marL="36000" marR="36000" marT="0" marB="0">
+                    <a:lnL w="9525" cap="flat">
+                      <a:solidFill>
+                        <a:srgbClr val="BFBFBF"/>
+                      </a:solidFill>
+                    </a:lnL>
+                    <a:lnR w="9525" cap="flat">
+                      <a:solidFill>
+                        <a:srgbClr val="BFBFBF"/>
+                      </a:solidFill>
+                    </a:lnR>
+                    <a:lnT w="9525" cap="flat">
+                      <a:solidFill>
+                        <a:srgbClr val="BFBFBF"/>
+                      </a:solidFill>
+                    </a:lnT>
+                    <a:lnB w="9525" cap="flat">
+                      <a:solidFill>
+                        <a:srgbClr val="BFBFBF"/>
+                      </a:solidFill>
+                    </a:lnB>
                     <a:solidFill>
                       <a:srgbClr val="FFFFFF"/>
                     </a:solidFill>
@@ -4045,6 +4405,26 @@
                     </a:p>
                   </a:txBody>
                   <a:tcPr anchor="ctr" marL="36000" marR="36000" marT="0" marB="0">
+                    <a:lnL w="9525" cap="flat">
+                      <a:solidFill>
+                        <a:srgbClr val="BFBFBF"/>
+                      </a:solidFill>
+                    </a:lnL>
+                    <a:lnR w="9525" cap="flat">
+                      <a:solidFill>
+                        <a:srgbClr val="BFBFBF"/>
+                      </a:solidFill>
+                    </a:lnR>
+                    <a:lnT w="9525" cap="flat">
+                      <a:solidFill>
+                        <a:srgbClr val="BFBFBF"/>
+                      </a:solidFill>
+                    </a:lnT>
+                    <a:lnB w="9525" cap="flat">
+                      <a:solidFill>
+                        <a:srgbClr val="BFBFBF"/>
+                      </a:solidFill>
+                    </a:lnB>
                     <a:solidFill>
                       <a:srgbClr val="FFFFFF"/>
                     </a:solidFill>
@@ -4070,6 +4450,26 @@
                     </a:p>
                   </a:txBody>
                   <a:tcPr anchor="ctr" marL="36000" marR="36000" marT="0" marB="0">
+                    <a:lnL w="9525" cap="flat">
+                      <a:solidFill>
+                        <a:srgbClr val="BFBFBF"/>
+                      </a:solidFill>
+                    </a:lnL>
+                    <a:lnR w="9525" cap="flat">
+                      <a:solidFill>
+                        <a:srgbClr val="BFBFBF"/>
+                      </a:solidFill>
+                    </a:lnR>
+                    <a:lnT w="9525" cap="flat">
+                      <a:solidFill>
+                        <a:srgbClr val="BFBFBF"/>
+                      </a:solidFill>
+                    </a:lnT>
+                    <a:lnB w="9525" cap="flat">
+                      <a:solidFill>
+                        <a:srgbClr val="BFBFBF"/>
+                      </a:solidFill>
+                    </a:lnB>
                     <a:solidFill>
                       <a:srgbClr val="FFFFFF"/>
                     </a:solidFill>
@@ -4097,6 +4497,26 @@
                     </a:p>
                   </a:txBody>
                   <a:tcPr anchor="ctr" marL="36000" marR="36000" marT="0" marB="0">
+                    <a:lnL w="9525" cap="flat">
+                      <a:solidFill>
+                        <a:srgbClr val="BFBFBF"/>
+                      </a:solidFill>
+                    </a:lnL>
+                    <a:lnR w="9525" cap="flat">
+                      <a:solidFill>
+                        <a:srgbClr val="BFBFBF"/>
+                      </a:solidFill>
+                    </a:lnR>
+                    <a:lnT w="9525" cap="flat">
+                      <a:solidFill>
+                        <a:srgbClr val="BFBFBF"/>
+                      </a:solidFill>
+                    </a:lnT>
+                    <a:lnB w="9525" cap="flat">
+                      <a:solidFill>
+                        <a:srgbClr val="BFBFBF"/>
+                      </a:solidFill>
+                    </a:lnB>
                     <a:solidFill>
                       <a:srgbClr val="FFFFFF"/>
                     </a:solidFill>
@@ -4122,6 +4542,26 @@
                     </a:p>
                   </a:txBody>
                   <a:tcPr anchor="ctr" marL="36000" marR="36000" marT="0" marB="0">
+                    <a:lnL w="9525" cap="flat">
+                      <a:solidFill>
+                        <a:srgbClr val="BFBFBF"/>
+                      </a:solidFill>
+                    </a:lnL>
+                    <a:lnR w="9525" cap="flat">
+                      <a:solidFill>
+                        <a:srgbClr val="BFBFBF"/>
+                      </a:solidFill>
+                    </a:lnR>
+                    <a:lnT w="9525" cap="flat">
+                      <a:solidFill>
+                        <a:srgbClr val="BFBFBF"/>
+                      </a:solidFill>
+                    </a:lnT>
+                    <a:lnB w="9525" cap="flat">
+                      <a:solidFill>
+                        <a:srgbClr val="BFBFBF"/>
+                      </a:solidFill>
+                    </a:lnB>
                     <a:solidFill>
                       <a:srgbClr val="FFFFFF"/>
                     </a:solidFill>
@@ -4147,6 +4587,26 @@
                     </a:p>
                   </a:txBody>
                   <a:tcPr anchor="ctr" marL="36000" marR="36000" marT="0" marB="0">
+                    <a:lnL w="9525" cap="flat">
+                      <a:solidFill>
+                        <a:srgbClr val="BFBFBF"/>
+                      </a:solidFill>
+                    </a:lnL>
+                    <a:lnR w="9525" cap="flat">
+                      <a:solidFill>
+                        <a:srgbClr val="BFBFBF"/>
+                      </a:solidFill>
+                    </a:lnR>
+                    <a:lnT w="9525" cap="flat">
+                      <a:solidFill>
+                        <a:srgbClr val="BFBFBF"/>
+                      </a:solidFill>
+                    </a:lnT>
+                    <a:lnB w="9525" cap="flat">
+                      <a:solidFill>
+                        <a:srgbClr val="BFBFBF"/>
+                      </a:solidFill>
+                    </a:lnB>
                     <a:solidFill>
                       <a:srgbClr val="FFFFFF"/>
                     </a:solidFill>
@@ -4172,6 +4632,26 @@
                     </a:p>
                   </a:txBody>
                   <a:tcPr anchor="ctr" marL="36000" marR="36000" marT="0" marB="0">
+                    <a:lnL w="9525" cap="flat">
+                      <a:solidFill>
+                        <a:srgbClr val="BFBFBF"/>
+                      </a:solidFill>
+                    </a:lnL>
+                    <a:lnR w="9525" cap="flat">
+                      <a:solidFill>
+                        <a:srgbClr val="BFBFBF"/>
+                      </a:solidFill>
+                    </a:lnR>
+                    <a:lnT w="9525" cap="flat">
+                      <a:solidFill>
+                        <a:srgbClr val="BFBFBF"/>
+                      </a:solidFill>
+                    </a:lnT>
+                    <a:lnB w="9525" cap="flat">
+                      <a:solidFill>
+                        <a:srgbClr val="BFBFBF"/>
+                      </a:solidFill>
+                    </a:lnB>
                     <a:solidFill>
                       <a:srgbClr val="FFFFFF"/>
                     </a:solidFill>
@@ -4197,6 +4677,26 @@
                     </a:p>
                   </a:txBody>
                   <a:tcPr anchor="ctr" marL="36000" marR="36000" marT="0" marB="0">
+                    <a:lnL w="9525" cap="flat">
+                      <a:solidFill>
+                        <a:srgbClr val="BFBFBF"/>
+                      </a:solidFill>
+                    </a:lnL>
+                    <a:lnR w="9525" cap="flat">
+                      <a:solidFill>
+                        <a:srgbClr val="BFBFBF"/>
+                      </a:solidFill>
+                    </a:lnR>
+                    <a:lnT w="9525" cap="flat">
+                      <a:solidFill>
+                        <a:srgbClr val="BFBFBF"/>
+                      </a:solidFill>
+                    </a:lnT>
+                    <a:lnB w="9525" cap="flat">
+                      <a:solidFill>
+                        <a:srgbClr val="BFBFBF"/>
+                      </a:solidFill>
+                    </a:lnB>
                     <a:solidFill>
                       <a:srgbClr val="FFFFFF"/>
                     </a:solidFill>
@@ -4224,6 +4724,26 @@
                     </a:p>
                   </a:txBody>
                   <a:tcPr anchor="ctr" marL="36000" marR="36000" marT="0" marB="0">
+                    <a:lnL w="9525" cap="flat">
+                      <a:solidFill>
+                        <a:srgbClr val="BFBFBF"/>
+                      </a:solidFill>
+                    </a:lnL>
+                    <a:lnR w="9525" cap="flat">
+                      <a:solidFill>
+                        <a:srgbClr val="BFBFBF"/>
+                      </a:solidFill>
+                    </a:lnR>
+                    <a:lnT w="9525" cap="flat">
+                      <a:solidFill>
+                        <a:srgbClr val="BFBFBF"/>
+                      </a:solidFill>
+                    </a:lnT>
+                    <a:lnB w="9525" cap="flat">
+                      <a:solidFill>
+                        <a:srgbClr val="BFBFBF"/>
+                      </a:solidFill>
+                    </a:lnB>
                     <a:solidFill>
                       <a:srgbClr val="FFFFFF"/>
                     </a:solidFill>
@@ -4249,6 +4769,26 @@
                     </a:p>
                   </a:txBody>
                   <a:tcPr anchor="ctr" marL="36000" marR="36000" marT="0" marB="0">
+                    <a:lnL w="9525" cap="flat">
+                      <a:solidFill>
+                        <a:srgbClr val="BFBFBF"/>
+                      </a:solidFill>
+                    </a:lnL>
+                    <a:lnR w="9525" cap="flat">
+                      <a:solidFill>
+                        <a:srgbClr val="BFBFBF"/>
+                      </a:solidFill>
+                    </a:lnR>
+                    <a:lnT w="9525" cap="flat">
+                      <a:solidFill>
+                        <a:srgbClr val="BFBFBF"/>
+                      </a:solidFill>
+                    </a:lnT>
+                    <a:lnB w="9525" cap="flat">
+                      <a:solidFill>
+                        <a:srgbClr val="BFBFBF"/>
+                      </a:solidFill>
+                    </a:lnB>
                     <a:solidFill>
                       <a:srgbClr val="FFFFFF"/>
                     </a:solidFill>
@@ -4274,6 +4814,26 @@
                     </a:p>
                   </a:txBody>
                   <a:tcPr anchor="ctr" marL="36000" marR="36000" marT="0" marB="0">
+                    <a:lnL w="9525" cap="flat">
+                      <a:solidFill>
+                        <a:srgbClr val="BFBFBF"/>
+                      </a:solidFill>
+                    </a:lnL>
+                    <a:lnR w="9525" cap="flat">
+                      <a:solidFill>
+                        <a:srgbClr val="BFBFBF"/>
+                      </a:solidFill>
+                    </a:lnR>
+                    <a:lnT w="9525" cap="flat">
+                      <a:solidFill>
+                        <a:srgbClr val="BFBFBF"/>
+                      </a:solidFill>
+                    </a:lnT>
+                    <a:lnB w="9525" cap="flat">
+                      <a:solidFill>
+                        <a:srgbClr val="BFBFBF"/>
+                      </a:solidFill>
+                    </a:lnB>
                     <a:solidFill>
                       <a:srgbClr val="FFFFFF"/>
                     </a:solidFill>
@@ -4299,6 +4859,26 @@
                     </a:p>
                   </a:txBody>
                   <a:tcPr anchor="ctr" marL="36000" marR="36000" marT="0" marB="0">
+                    <a:lnL w="9525" cap="flat">
+                      <a:solidFill>
+                        <a:srgbClr val="BFBFBF"/>
+                      </a:solidFill>
+                    </a:lnL>
+                    <a:lnR w="9525" cap="flat">
+                      <a:solidFill>
+                        <a:srgbClr val="BFBFBF"/>
+                      </a:solidFill>
+                    </a:lnR>
+                    <a:lnT w="9525" cap="flat">
+                      <a:solidFill>
+                        <a:srgbClr val="BFBFBF"/>
+                      </a:solidFill>
+                    </a:lnT>
+                    <a:lnB w="9525" cap="flat">
+                      <a:solidFill>
+                        <a:srgbClr val="BFBFBF"/>
+                      </a:solidFill>
+                    </a:lnB>
                     <a:solidFill>
                       <a:srgbClr val="FFFFFF"/>
                     </a:solidFill>
@@ -4324,6 +4904,26 @@
                     </a:p>
                   </a:txBody>
                   <a:tcPr anchor="ctr" marL="36000" marR="36000" marT="0" marB="0">
+                    <a:lnL w="9525" cap="flat">
+                      <a:solidFill>
+                        <a:srgbClr val="BFBFBF"/>
+                      </a:solidFill>
+                    </a:lnL>
+                    <a:lnR w="9525" cap="flat">
+                      <a:solidFill>
+                        <a:srgbClr val="BFBFBF"/>
+                      </a:solidFill>
+                    </a:lnR>
+                    <a:lnT w="9525" cap="flat">
+                      <a:solidFill>
+                        <a:srgbClr val="BFBFBF"/>
+                      </a:solidFill>
+                    </a:lnT>
+                    <a:lnB w="9525" cap="flat">
+                      <a:solidFill>
+                        <a:srgbClr val="BFBFBF"/>
+                      </a:solidFill>
+                    </a:lnB>
                     <a:solidFill>
                       <a:srgbClr val="FFFFFF"/>
                     </a:solidFill>
@@ -4415,6 +5015,26 @@
                     </a:p>
                   </a:txBody>
                   <a:tcPr anchor="ctr" marL="36000" marR="36000" marT="0" marB="0">
+                    <a:lnL w="9525" cap="flat">
+                      <a:solidFill>
+                        <a:srgbClr val="BFBFBF"/>
+                      </a:solidFill>
+                    </a:lnL>
+                    <a:lnR w="9525" cap="flat">
+                      <a:solidFill>
+                        <a:srgbClr val="BFBFBF"/>
+                      </a:solidFill>
+                    </a:lnR>
+                    <a:lnT w="9525" cap="flat">
+                      <a:solidFill>
+                        <a:srgbClr val="BFBFBF"/>
+                      </a:solidFill>
+                    </a:lnT>
+                    <a:lnB w="9525" cap="flat">
+                      <a:solidFill>
+                        <a:srgbClr val="BFBFBF"/>
+                      </a:solidFill>
+                    </a:lnB>
                     <a:solidFill>
                       <a:srgbClr val="D8E0EC"/>
                     </a:solidFill>
@@ -4440,6 +5060,26 @@
                     </a:p>
                   </a:txBody>
                   <a:tcPr anchor="ctr" marL="36000" marR="36000" marT="0" marB="0">
+                    <a:lnL w="9525" cap="flat">
+                      <a:solidFill>
+                        <a:srgbClr val="BFBFBF"/>
+                      </a:solidFill>
+                    </a:lnL>
+                    <a:lnR w="9525" cap="flat">
+                      <a:solidFill>
+                        <a:srgbClr val="BFBFBF"/>
+                      </a:solidFill>
+                    </a:lnR>
+                    <a:lnT w="9525" cap="flat">
+                      <a:solidFill>
+                        <a:srgbClr val="BFBFBF"/>
+                      </a:solidFill>
+                    </a:lnT>
+                    <a:lnB w="9525" cap="flat">
+                      <a:solidFill>
+                        <a:srgbClr val="BFBFBF"/>
+                      </a:solidFill>
+                    </a:lnB>
                     <a:solidFill>
                       <a:srgbClr val="D8E0EC"/>
                     </a:solidFill>
@@ -4465,6 +5105,26 @@
                     </a:p>
                   </a:txBody>
                   <a:tcPr anchor="ctr" marL="36000" marR="36000" marT="0" marB="0">
+                    <a:lnL w="9525" cap="flat">
+                      <a:solidFill>
+                        <a:srgbClr val="BFBFBF"/>
+                      </a:solidFill>
+                    </a:lnL>
+                    <a:lnR w="9525" cap="flat">
+                      <a:solidFill>
+                        <a:srgbClr val="BFBFBF"/>
+                      </a:solidFill>
+                    </a:lnR>
+                    <a:lnT w="9525" cap="flat">
+                      <a:solidFill>
+                        <a:srgbClr val="BFBFBF"/>
+                      </a:solidFill>
+                    </a:lnT>
+                    <a:lnB w="9525" cap="flat">
+                      <a:solidFill>
+                        <a:srgbClr val="BFBFBF"/>
+                      </a:solidFill>
+                    </a:lnB>
                     <a:solidFill>
                       <a:srgbClr val="D8E0EC"/>
                     </a:solidFill>
@@ -4492,6 +5152,26 @@
                     </a:p>
                   </a:txBody>
                   <a:tcPr anchor="ctr" marL="36000" marR="36000" marT="0" marB="0">
+                    <a:lnL w="9525" cap="flat">
+                      <a:solidFill>
+                        <a:srgbClr val="BFBFBF"/>
+                      </a:solidFill>
+                    </a:lnL>
+                    <a:lnR w="9525" cap="flat">
+                      <a:solidFill>
+                        <a:srgbClr val="BFBFBF"/>
+                      </a:solidFill>
+                    </a:lnR>
+                    <a:lnT w="9525" cap="flat">
+                      <a:solidFill>
+                        <a:srgbClr val="BFBFBF"/>
+                      </a:solidFill>
+                    </a:lnT>
+                    <a:lnB w="9525" cap="flat">
+                      <a:solidFill>
+                        <a:srgbClr val="BFBFBF"/>
+                      </a:solidFill>
+                    </a:lnB>
                     <a:solidFill>
                       <a:srgbClr val="FFFFFF"/>
                     </a:solidFill>
@@ -4517,6 +5197,26 @@
                     </a:p>
                   </a:txBody>
                   <a:tcPr anchor="ctr" marL="36000" marR="36000" marT="0" marB="0">
+                    <a:lnL w="9525" cap="flat">
+                      <a:solidFill>
+                        <a:srgbClr val="BFBFBF"/>
+                      </a:solidFill>
+                    </a:lnL>
+                    <a:lnR w="9525" cap="flat">
+                      <a:solidFill>
+                        <a:srgbClr val="BFBFBF"/>
+                      </a:solidFill>
+                    </a:lnR>
+                    <a:lnT w="9525" cap="flat">
+                      <a:solidFill>
+                        <a:srgbClr val="BFBFBF"/>
+                      </a:solidFill>
+                    </a:lnT>
+                    <a:lnB w="9525" cap="flat">
+                      <a:solidFill>
+                        <a:srgbClr val="BFBFBF"/>
+                      </a:solidFill>
+                    </a:lnB>
                     <a:solidFill>
                       <a:srgbClr val="FFFFFF"/>
                     </a:solidFill>
@@ -4542,6 +5242,26 @@
                     </a:p>
                   </a:txBody>
                   <a:tcPr anchor="ctr" marL="36000" marR="36000" marT="0" marB="0">
+                    <a:lnL w="9525" cap="flat">
+                      <a:solidFill>
+                        <a:srgbClr val="BFBFBF"/>
+                      </a:solidFill>
+                    </a:lnL>
+                    <a:lnR w="9525" cap="flat">
+                      <a:solidFill>
+                        <a:srgbClr val="BFBFBF"/>
+                      </a:solidFill>
+                    </a:lnR>
+                    <a:lnT w="9525" cap="flat">
+                      <a:solidFill>
+                        <a:srgbClr val="BFBFBF"/>
+                      </a:solidFill>
+                    </a:lnT>
+                    <a:lnB w="9525" cap="flat">
+                      <a:solidFill>
+                        <a:srgbClr val="BFBFBF"/>
+                      </a:solidFill>
+                    </a:lnB>
                     <a:solidFill>
                       <a:srgbClr val="FFFFFF"/>
                     </a:solidFill>
@@ -4569,6 +5289,26 @@
                     </a:p>
                   </a:txBody>
                   <a:tcPr anchor="ctr" marL="36000" marR="36000" marT="0" marB="0">
+                    <a:lnL w="9525" cap="flat">
+                      <a:solidFill>
+                        <a:srgbClr val="BFBFBF"/>
+                      </a:solidFill>
+                    </a:lnL>
+                    <a:lnR w="9525" cap="flat">
+                      <a:solidFill>
+                        <a:srgbClr val="BFBFBF"/>
+                      </a:solidFill>
+                    </a:lnR>
+                    <a:lnT w="9525" cap="flat">
+                      <a:solidFill>
+                        <a:srgbClr val="BFBFBF"/>
+                      </a:solidFill>
+                    </a:lnT>
+                    <a:lnB w="9525" cap="flat">
+                      <a:solidFill>
+                        <a:srgbClr val="BFBFBF"/>
+                      </a:solidFill>
+                    </a:lnB>
                     <a:solidFill>
                       <a:srgbClr val="FFFFFF"/>
                     </a:solidFill>
@@ -4594,6 +5334,26 @@
                     </a:p>
                   </a:txBody>
                   <a:tcPr anchor="ctr" marL="36000" marR="36000" marT="0" marB="0">
+                    <a:lnL w="9525" cap="flat">
+                      <a:solidFill>
+                        <a:srgbClr val="BFBFBF"/>
+                      </a:solidFill>
+                    </a:lnL>
+                    <a:lnR w="9525" cap="flat">
+                      <a:solidFill>
+                        <a:srgbClr val="BFBFBF"/>
+                      </a:solidFill>
+                    </a:lnR>
+                    <a:lnT w="9525" cap="flat">
+                      <a:solidFill>
+                        <a:srgbClr val="BFBFBF"/>
+                      </a:solidFill>
+                    </a:lnT>
+                    <a:lnB w="9525" cap="flat">
+                      <a:solidFill>
+                        <a:srgbClr val="BFBFBF"/>
+                      </a:solidFill>
+                    </a:lnB>
                     <a:solidFill>
                       <a:srgbClr val="FFFFFF"/>
                     </a:solidFill>
@@ -4619,6 +5379,26 @@
                     </a:p>
                   </a:txBody>
                   <a:tcPr anchor="ctr" marL="36000" marR="36000" marT="0" marB="0">
+                    <a:lnL w="9525" cap="flat">
+                      <a:solidFill>
+                        <a:srgbClr val="BFBFBF"/>
+                      </a:solidFill>
+                    </a:lnL>
+                    <a:lnR w="9525" cap="flat">
+                      <a:solidFill>
+                        <a:srgbClr val="BFBFBF"/>
+                      </a:solidFill>
+                    </a:lnR>
+                    <a:lnT w="9525" cap="flat">
+                      <a:solidFill>
+                        <a:srgbClr val="BFBFBF"/>
+                      </a:solidFill>
+                    </a:lnT>
+                    <a:lnB w="9525" cap="flat">
+                      <a:solidFill>
+                        <a:srgbClr val="BFBFBF"/>
+                      </a:solidFill>
+                    </a:lnB>
                     <a:solidFill>
                       <a:srgbClr val="FFFFFF"/>
                     </a:solidFill>
@@ -4646,6 +5426,26 @@
                     </a:p>
                   </a:txBody>
                   <a:tcPr anchor="ctr" marL="36000" marR="36000" marT="0" marB="0">
+                    <a:lnL w="9525" cap="flat">
+                      <a:solidFill>
+                        <a:srgbClr val="BFBFBF"/>
+                      </a:solidFill>
+                    </a:lnL>
+                    <a:lnR w="9525" cap="flat">
+                      <a:solidFill>
+                        <a:srgbClr val="BFBFBF"/>
+                      </a:solidFill>
+                    </a:lnR>
+                    <a:lnT w="9525" cap="flat">
+                      <a:solidFill>
+                        <a:srgbClr val="BFBFBF"/>
+                      </a:solidFill>
+                    </a:lnT>
+                    <a:lnB w="9525" cap="flat">
+                      <a:solidFill>
+                        <a:srgbClr val="BFBFBF"/>
+                      </a:solidFill>
+                    </a:lnB>
                     <a:solidFill>
                       <a:srgbClr val="FFFFFF"/>
                     </a:solidFill>
@@ -4671,6 +5471,26 @@
                     </a:p>
                   </a:txBody>
                   <a:tcPr anchor="ctr" marL="36000" marR="36000" marT="0" marB="0">
+                    <a:lnL w="9525" cap="flat">
+                      <a:solidFill>
+                        <a:srgbClr val="BFBFBF"/>
+                      </a:solidFill>
+                    </a:lnL>
+                    <a:lnR w="9525" cap="flat">
+                      <a:solidFill>
+                        <a:srgbClr val="BFBFBF"/>
+                      </a:solidFill>
+                    </a:lnR>
+                    <a:lnT w="9525" cap="flat">
+                      <a:solidFill>
+                        <a:srgbClr val="BFBFBF"/>
+                      </a:solidFill>
+                    </a:lnT>
+                    <a:lnB w="9525" cap="flat">
+                      <a:solidFill>
+                        <a:srgbClr val="BFBFBF"/>
+                      </a:solidFill>
+                    </a:lnB>
                     <a:solidFill>
                       <a:srgbClr val="FFFFFF"/>
                     </a:solidFill>
@@ -4696,6 +5516,26 @@
                     </a:p>
                   </a:txBody>
                   <a:tcPr anchor="ctr" marL="36000" marR="36000" marT="0" marB="0">
+                    <a:lnL w="9525" cap="flat">
+                      <a:solidFill>
+                        <a:srgbClr val="BFBFBF"/>
+                      </a:solidFill>
+                    </a:lnL>
+                    <a:lnR w="9525" cap="flat">
+                      <a:solidFill>
+                        <a:srgbClr val="BFBFBF"/>
+                      </a:solidFill>
+                    </a:lnR>
+                    <a:lnT w="9525" cap="flat">
+                      <a:solidFill>
+                        <a:srgbClr val="BFBFBF"/>
+                      </a:solidFill>
+                    </a:lnT>
+                    <a:lnB w="9525" cap="flat">
+                      <a:solidFill>
+                        <a:srgbClr val="BFBFBF"/>
+                      </a:solidFill>
+                    </a:lnB>
                     <a:solidFill>
                       <a:srgbClr val="FFFFFF"/>
                     </a:solidFill>
@@ -4786,6 +5626,26 @@
                     </a:p>
                   </a:txBody>
                   <a:tcPr anchor="ctr" marL="36000" marR="36000" marT="0" marB="0">
+                    <a:lnL w="9525" cap="flat">
+                      <a:solidFill>
+                        <a:srgbClr val="BFBFBF"/>
+                      </a:solidFill>
+                    </a:lnL>
+                    <a:lnR w="9525" cap="flat">
+                      <a:solidFill>
+                        <a:srgbClr val="BFBFBF"/>
+                      </a:solidFill>
+                    </a:lnR>
+                    <a:lnT w="9525" cap="flat">
+                      <a:solidFill>
+                        <a:srgbClr val="BFBFBF"/>
+                      </a:solidFill>
+                    </a:lnT>
+                    <a:lnB w="9525" cap="flat">
+                      <a:solidFill>
+                        <a:srgbClr val="BFBFBF"/>
+                      </a:solidFill>
+                    </a:lnB>
                     <a:solidFill>
                       <a:srgbClr val="D8E0EC"/>
                     </a:solidFill>
@@ -4811,6 +5671,26 @@
                     </a:p>
                   </a:txBody>
                   <a:tcPr anchor="ctr" marL="36000" marR="36000" marT="0" marB="0">
+                    <a:lnL w="9525" cap="flat">
+                      <a:solidFill>
+                        <a:srgbClr val="BFBFBF"/>
+                      </a:solidFill>
+                    </a:lnL>
+                    <a:lnR w="9525" cap="flat">
+                      <a:solidFill>
+                        <a:srgbClr val="BFBFBF"/>
+                      </a:solidFill>
+                    </a:lnR>
+                    <a:lnT w="9525" cap="flat">
+                      <a:solidFill>
+                        <a:srgbClr val="BFBFBF"/>
+                      </a:solidFill>
+                    </a:lnT>
+                    <a:lnB w="9525" cap="flat">
+                      <a:solidFill>
+                        <a:srgbClr val="BFBFBF"/>
+                      </a:solidFill>
+                    </a:lnB>
                     <a:solidFill>
                       <a:srgbClr val="D8E0EC"/>
                     </a:solidFill>
@@ -4838,6 +5718,26 @@
                     </a:p>
                   </a:txBody>
                   <a:tcPr anchor="ctr" marL="36000" marR="36000" marT="0" marB="0">
+                    <a:lnL w="9525" cap="flat">
+                      <a:solidFill>
+                        <a:srgbClr val="BFBFBF"/>
+                      </a:solidFill>
+                    </a:lnL>
+                    <a:lnR w="9525" cap="flat">
+                      <a:solidFill>
+                        <a:srgbClr val="BFBFBF"/>
+                      </a:solidFill>
+                    </a:lnR>
+                    <a:lnT w="9525" cap="flat">
+                      <a:solidFill>
+                        <a:srgbClr val="BFBFBF"/>
+                      </a:solidFill>
+                    </a:lnT>
+                    <a:lnB w="9525" cap="flat">
+                      <a:solidFill>
+                        <a:srgbClr val="BFBFBF"/>
+                      </a:solidFill>
+                    </a:lnB>
                     <a:solidFill>
                       <a:srgbClr val="FFFFFF"/>
                     </a:solidFill>
@@ -4863,6 +5763,26 @@
                     </a:p>
                   </a:txBody>
                   <a:tcPr anchor="ctr" marL="36000" marR="36000" marT="0" marB="0">
+                    <a:lnL w="9525" cap="flat">
+                      <a:solidFill>
+                        <a:srgbClr val="BFBFBF"/>
+                      </a:solidFill>
+                    </a:lnL>
+                    <a:lnR w="9525" cap="flat">
+                      <a:solidFill>
+                        <a:srgbClr val="BFBFBF"/>
+                      </a:solidFill>
+                    </a:lnR>
+                    <a:lnT w="9525" cap="flat">
+                      <a:solidFill>
+                        <a:srgbClr val="BFBFBF"/>
+                      </a:solidFill>
+                    </a:lnT>
+                    <a:lnB w="9525" cap="flat">
+                      <a:solidFill>
+                        <a:srgbClr val="BFBFBF"/>
+                      </a:solidFill>
+                    </a:lnB>
                     <a:solidFill>
                       <a:srgbClr val="FFFFFF"/>
                     </a:solidFill>
@@ -4890,6 +5810,26 @@
                     </a:p>
                   </a:txBody>
                   <a:tcPr anchor="ctr" marL="36000" marR="36000" marT="0" marB="0">
+                    <a:lnL w="9525" cap="flat">
+                      <a:solidFill>
+                        <a:srgbClr val="BFBFBF"/>
+                      </a:solidFill>
+                    </a:lnL>
+                    <a:lnR w="9525" cap="flat">
+                      <a:solidFill>
+                        <a:srgbClr val="BFBFBF"/>
+                      </a:solidFill>
+                    </a:lnR>
+                    <a:lnT w="9525" cap="flat">
+                      <a:solidFill>
+                        <a:srgbClr val="BFBFBF"/>
+                      </a:solidFill>
+                    </a:lnT>
+                    <a:lnB w="9525" cap="flat">
+                      <a:solidFill>
+                        <a:srgbClr val="BFBFBF"/>
+                      </a:solidFill>
+                    </a:lnB>
                     <a:solidFill>
                       <a:srgbClr val="FFFFFF"/>
                     </a:solidFill>
@@ -4915,6 +5855,26 @@
                     </a:p>
                   </a:txBody>
                   <a:tcPr anchor="ctr" marL="36000" marR="36000" marT="0" marB="0">
+                    <a:lnL w="9525" cap="flat">
+                      <a:solidFill>
+                        <a:srgbClr val="BFBFBF"/>
+                      </a:solidFill>
+                    </a:lnL>
+                    <a:lnR w="9525" cap="flat">
+                      <a:solidFill>
+                        <a:srgbClr val="BFBFBF"/>
+                      </a:solidFill>
+                    </a:lnR>
+                    <a:lnT w="9525" cap="flat">
+                      <a:solidFill>
+                        <a:srgbClr val="BFBFBF"/>
+                      </a:solidFill>
+                    </a:lnT>
+                    <a:lnB w="9525" cap="flat">
+                      <a:solidFill>
+                        <a:srgbClr val="BFBFBF"/>
+                      </a:solidFill>
+                    </a:lnB>
                     <a:solidFill>
                       <a:srgbClr val="FFFFFF"/>
                     </a:solidFill>
@@ -4942,6 +5902,26 @@
                     </a:p>
                   </a:txBody>
                   <a:tcPr anchor="ctr" marL="36000" marR="36000" marT="0" marB="0">
+                    <a:lnL w="9525" cap="flat">
+                      <a:solidFill>
+                        <a:srgbClr val="BFBFBF"/>
+                      </a:solidFill>
+                    </a:lnL>
+                    <a:lnR w="9525" cap="flat">
+                      <a:solidFill>
+                        <a:srgbClr val="BFBFBF"/>
+                      </a:solidFill>
+                    </a:lnR>
+                    <a:lnT w="9525" cap="flat">
+                      <a:solidFill>
+                        <a:srgbClr val="BFBFBF"/>
+                      </a:solidFill>
+                    </a:lnT>
+                    <a:lnB w="9525" cap="flat">
+                      <a:solidFill>
+                        <a:srgbClr val="BFBFBF"/>
+                      </a:solidFill>
+                    </a:lnB>
                     <a:solidFill>
                       <a:srgbClr val="FFFFFF"/>
                     </a:solidFill>
@@ -4967,6 +5947,26 @@
                     </a:p>
                   </a:txBody>
                   <a:tcPr anchor="ctr" marL="36000" marR="36000" marT="0" marB="0">
+                    <a:lnL w="9525" cap="flat">
+                      <a:solidFill>
+                        <a:srgbClr val="BFBFBF"/>
+                      </a:solidFill>
+                    </a:lnL>
+                    <a:lnR w="9525" cap="flat">
+                      <a:solidFill>
+                        <a:srgbClr val="BFBFBF"/>
+                      </a:solidFill>
+                    </a:lnR>
+                    <a:lnT w="9525" cap="flat">
+                      <a:solidFill>
+                        <a:srgbClr val="BFBFBF"/>
+                      </a:solidFill>
+                    </a:lnT>
+                    <a:lnB w="9525" cap="flat">
+                      <a:solidFill>
+                        <a:srgbClr val="BFBFBF"/>
+                      </a:solidFill>
+                    </a:lnB>
                     <a:solidFill>
                       <a:srgbClr val="FFFFFF"/>
                     </a:solidFill>

--- a/reports/ssg-quickcommerce-onepager.pptx
+++ b/reports/ssg-quickcommerce-onepager.pptx
@@ -3181,43 +3181,6 @@
         </p:nvSpPr>
         <p:spPr>
           <a:xfrm>
-            <a:off x="8316000" y="846000"/>
-            <a:ext cx="1188000" cy="216000"/>
-          </a:xfrm>
-          <a:prstGeom prst="rect">
-            <a:avLst/>
-          </a:prstGeom>
-          <a:noFill/>
-        </p:spPr>
-        <p:txBody>
-          <a:bodyPr wrap="square" anchor="t" lIns="0" rIns="0" tIns="0" bIns="0">
-            <a:spAutoFit/>
-          </a:bodyPr>
-          <a:lstStyle/>
-          <a:p>
-            <a:pPr algn="r"/>
-            <a:r>
-              <a:rPr sz="1000" b="1">
-                <a:solidFill>
-                  <a:srgbClr val="000000"/>
-                </a:solidFill>
-                <a:latin typeface="맑은 고딕"/>
-                <a:ea typeface="맑은 고딕"/>
-                <a:cs typeface="맑은 고딕"/>
-              </a:rPr>
-              <a:t>(기준 : '26. 7월)</a:t>
-            </a:r>
-          </a:p>
-        </p:txBody>
-      </p:sp>
-      <p:sp>
-        <p:nvSpPr>
-          <p:cNvPr id="5" name="TextBox 4"/>
-          <p:cNvSpPr txBox="1"/>
-          <p:nvPr/>
-        </p:nvSpPr>
-        <p:spPr>
-          <a:xfrm>
             <a:off x="374400" y="6443999"/>
             <a:ext cx="6480000" cy="198000"/>
           </a:xfrm>
@@ -3249,7 +3212,7 @@
       </p:sp>
       <p:sp>
         <p:nvSpPr>
-          <p:cNvPr id="6" name="TextBox 5"/>
+          <p:cNvPr id="5" name="TextBox 4"/>
           <p:cNvSpPr txBox="1"/>
           <p:nvPr/>
         </p:nvSpPr>
@@ -3286,7 +3249,7 @@
       </p:sp>
       <p:sp>
         <p:nvSpPr>
-          <p:cNvPr id="7" name="TextBox 6"/>
+          <p:cNvPr id="6" name="TextBox 5"/>
           <p:cNvSpPr txBox="1"/>
           <p:nvPr/>
         </p:nvSpPr>
@@ -3316,14 +3279,14 @@
                 <a:ea typeface="맑은 고딕"/>
                 <a:cs typeface="맑은 고딕"/>
               </a:rPr>
-              <a:t>□ 도입 배경</a:t>
-            </a:r>
-          </a:p>
-        </p:txBody>
-      </p:sp>
-      <p:sp>
-        <p:nvSpPr>
-          <p:cNvPr id="8" name="TextBox 7"/>
+              <a:t>• 도입 배경</a:t>
+            </a:r>
+          </a:p>
+        </p:txBody>
+      </p:sp>
+      <p:sp>
+        <p:nvSpPr>
+          <p:cNvPr id="7" name="TextBox 6"/>
           <p:cNvSpPr txBox="1"/>
           <p:nvPr/>
         </p:nvSpPr>
@@ -3360,7 +3323,7 @@
       </p:sp>
       <p:sp>
         <p:nvSpPr>
-          <p:cNvPr id="9" name="TextBox 8"/>
+          <p:cNvPr id="8" name="TextBox 7"/>
           <p:cNvSpPr txBox="1"/>
           <p:nvPr/>
         </p:nvSpPr>
@@ -3397,7 +3360,7 @@
       </p:sp>
       <p:sp>
         <p:nvSpPr>
-          <p:cNvPr id="10" name="TextBox 9"/>
+          <p:cNvPr id="9" name="TextBox 8"/>
           <p:cNvSpPr txBox="1"/>
           <p:nvPr/>
         </p:nvSpPr>
@@ -3427,14 +3390,14 @@
                 <a:ea typeface="맑은 고딕"/>
                 <a:cs typeface="맑은 고딕"/>
               </a:rPr>
-              <a:t>□ 시범 운영 개요</a:t>
-            </a:r>
-          </a:p>
-        </p:txBody>
-      </p:sp>
-      <p:sp>
-        <p:nvSpPr>
-          <p:cNvPr id="11" name="TextBox 10"/>
+              <a:t>• 시범 운영 개요</a:t>
+            </a:r>
+          </a:p>
+        </p:txBody>
+      </p:sp>
+      <p:sp>
+        <p:nvSpPr>
+          <p:cNvPr id="10" name="TextBox 9"/>
           <p:cNvSpPr txBox="1"/>
           <p:nvPr/>
         </p:nvSpPr>
@@ -3471,7 +3434,7 @@
       </p:sp>
       <p:sp>
         <p:nvSpPr>
-          <p:cNvPr id="12" name="TextBox 11"/>
+          <p:cNvPr id="11" name="TextBox 10"/>
           <p:cNvSpPr txBox="1"/>
           <p:nvPr/>
         </p:nvSpPr>
@@ -3508,7 +3471,7 @@
       </p:sp>
       <p:sp>
         <p:nvSpPr>
-          <p:cNvPr id="13" name="TextBox 12"/>
+          <p:cNvPr id="12" name="TextBox 11"/>
           <p:cNvSpPr txBox="1"/>
           <p:nvPr/>
         </p:nvSpPr>
@@ -3538,14 +3501,14 @@
                 <a:ea typeface="맑은 고딕"/>
                 <a:cs typeface="맑은 고딕"/>
               </a:rPr>
-              <a:t>□ 이마트·SSG닷컴 배송 서비스 비교</a:t>
+              <a:t>• 이마트·SSG닷컴 배송 서비스 비교</a:t>
             </a:r>
           </a:p>
         </p:txBody>
       </p:sp>
       <p:graphicFrame>
         <p:nvGraphicFramePr>
-          <p:cNvPr id="14" name="Table 13"/>
+          <p:cNvPr id="13" name="Table 12"/>
           <p:cNvGraphicFramePr>
             <a:graphicFrameLocks noGrp="1"/>
           </p:cNvGraphicFramePr>
@@ -4936,7 +4899,7 @@
       </p:graphicFrame>
       <p:sp>
         <p:nvSpPr>
-          <p:cNvPr id="15" name="TextBox 14"/>
+          <p:cNvPr id="14" name="TextBox 13"/>
           <p:cNvSpPr txBox="1"/>
           <p:nvPr/>
         </p:nvSpPr>
@@ -4966,14 +4929,14 @@
                 <a:ea typeface="맑은 고딕"/>
                 <a:cs typeface="맑은 고딕"/>
               </a:rPr>
-              <a:t>□ 취급 품목 수 비교</a:t>
+              <a:t>• 취급 품목 수 비교</a:t>
             </a:r>
           </a:p>
         </p:txBody>
       </p:sp>
       <p:graphicFrame>
         <p:nvGraphicFramePr>
-          <p:cNvPr id="16" name="Table 15"/>
+          <p:cNvPr id="15" name="Table 14"/>
           <p:cNvGraphicFramePr>
             <a:graphicFrameLocks noGrp="1"/>
           </p:cNvGraphicFramePr>
@@ -5548,7 +5511,7 @@
       </p:graphicFrame>
       <p:sp>
         <p:nvSpPr>
-          <p:cNvPr id="17" name="TextBox 16"/>
+          <p:cNvPr id="16" name="TextBox 15"/>
           <p:cNvSpPr txBox="1"/>
           <p:nvPr/>
         </p:nvSpPr>
@@ -5578,14 +5541,14 @@
                 <a:ea typeface="맑은 고딕"/>
                 <a:cs typeface="맑은 고딕"/>
               </a:rPr>
-              <a:t>□ 확대 로드맵</a:t>
+              <a:t>• 확대 로드맵</a:t>
             </a:r>
           </a:p>
         </p:txBody>
       </p:sp>
       <p:graphicFrame>
         <p:nvGraphicFramePr>
-          <p:cNvPr id="18" name="Table 17"/>
+          <p:cNvPr id="17" name="Table 16"/>
           <p:cNvGraphicFramePr>
             <a:graphicFrameLocks noGrp="1"/>
           </p:cNvGraphicFramePr>
@@ -5979,7 +5942,7 @@
       </p:graphicFrame>
       <p:sp>
         <p:nvSpPr>
-          <p:cNvPr id="19" name="TextBox 18"/>
+          <p:cNvPr id="18" name="TextBox 17"/>
           <p:cNvSpPr txBox="1"/>
           <p:nvPr/>
         </p:nvSpPr>

--- a/reports/ssg-quickcommerce-onepager.pptx
+++ b/reports/ssg-quickcommerce-onepager.pptx
@@ -3271,7 +3271,7 @@
           <a:p>
             <a:pPr algn="l"/>
             <a:r>
-              <a:rPr sz="1300" b="1">
+              <a:rPr sz="1200" b="1">
                 <a:solidFill>
                   <a:srgbClr val="222222"/>
                 </a:solidFill>
@@ -3308,7 +3308,7 @@
           <a:p>
             <a:pPr algn="l"/>
             <a:r>
-              <a:rPr sz="1050" b="0">
+              <a:rPr sz="1100" b="0">
                 <a:solidFill>
                   <a:srgbClr val="000000"/>
                 </a:solidFill>
@@ -3345,7 +3345,7 @@
           <a:p>
             <a:pPr algn="l"/>
             <a:r>
-              <a:rPr sz="1050" b="0">
+              <a:rPr sz="1100" b="0">
                 <a:solidFill>
                   <a:srgbClr val="000000"/>
                 </a:solidFill>
@@ -3353,7 +3353,7 @@
                 <a:ea typeface="맑은 고딕"/>
                 <a:cs typeface="맑은 고딕"/>
               </a:rPr>
-              <a:t>- 바로퀵 6월 매출 1월 대비 197% 증가로 온디맨드 수요 실증 → 1시간(소량·이륜차) / 2시간(대용량·사륜차) 세분화 대응 (B마트도 대용량 확대 중)</a:t>
+              <a:t>- 바로퀵 6월 매출 1월 대비 197% 증가로 온디맨드 수요 실증 → 1시간(소량·이륜차) / 2시간(대용량·사륜차) 세분화 대응</a:t>
             </a:r>
           </a:p>
         </p:txBody>
@@ -3382,7 +3382,7 @@
           <a:p>
             <a:pPr algn="l"/>
             <a:r>
-              <a:rPr sz="1300" b="1">
+              <a:rPr sz="1200" b="1">
                 <a:solidFill>
                   <a:srgbClr val="222222"/>
                 </a:solidFill>
@@ -3419,7 +3419,7 @@
           <a:p>
             <a:pPr algn="l"/>
             <a:r>
-              <a:rPr sz="1050" b="0">
+              <a:rPr sz="1100" b="0">
                 <a:solidFill>
                   <a:srgbClr val="000000"/>
                 </a:solidFill>
@@ -3456,7 +3456,7 @@
           <a:p>
             <a:pPr algn="l"/>
             <a:r>
-              <a:rPr sz="1050" b="0">
+              <a:rPr sz="1100" b="0">
                 <a:solidFill>
                   <a:srgbClr val="000000"/>
                 </a:solidFill>
@@ -3493,7 +3493,7 @@
           <a:p>
             <a:pPr algn="l"/>
             <a:r>
-              <a:rPr sz="1300" b="1">
+              <a:rPr sz="1200" b="1">
                 <a:solidFill>
                   <a:srgbClr val="222222"/>
                 </a:solidFill>
@@ -4921,7 +4921,7 @@
           <a:p>
             <a:pPr algn="l"/>
             <a:r>
-              <a:rPr sz="1300" b="1">
+              <a:rPr sz="1200" b="1">
                 <a:solidFill>
                   <a:srgbClr val="222222"/>
                 </a:solidFill>
@@ -5533,7 +5533,7 @@
           <a:p>
             <a:pPr algn="l"/>
             <a:r>
-              <a:rPr sz="1300" b="1">
+              <a:rPr sz="1200" b="1">
                 <a:solidFill>
                   <a:srgbClr val="222222"/>
                 </a:solidFill>
@@ -5964,7 +5964,7 @@
           <a:p>
             <a:pPr algn="l"/>
             <a:r>
-              <a:rPr sz="950" b="0">
+              <a:rPr sz="1000" b="0">
                 <a:solidFill>
                   <a:srgbClr val="C30C3E"/>
                 </a:solidFill>

--- a/reports/ssg-quickcommerce-onepager.pptx
+++ b/reports/ssg-quickcommerce-onepager.pptx
@@ -3764,7 +3764,7 @@
                     <a:bodyPr wrap="square"/>
                     <a:lstStyle/>
                     <a:p>
-                      <a:pPr algn="l"/>
+                      <a:pPr algn="ctr"/>
                       <a:r>
                         <a:rPr sz="1000" b="1">
                           <a:solidFill>
@@ -3809,7 +3809,7 @@
                     <a:bodyPr wrap="square"/>
                     <a:lstStyle/>
                     <a:p>
-                      <a:pPr algn="l"/>
+                      <a:pPr algn="ctr"/>
                       <a:r>
                         <a:rPr sz="1000" b="0">
                           <a:solidFill>
@@ -3854,7 +3854,7 @@
                     <a:bodyPr wrap="square"/>
                     <a:lstStyle/>
                     <a:p>
-                      <a:pPr algn="r"/>
+                      <a:pPr algn="ctr"/>
                       <a:r>
                         <a:rPr sz="1000" b="0">
                           <a:solidFill>
@@ -3899,7 +3899,7 @@
                     <a:bodyPr wrap="square"/>
                     <a:lstStyle/>
                     <a:p>
-                      <a:pPr algn="l"/>
+                      <a:pPr algn="ctr"/>
                       <a:r>
                         <a:rPr sz="1000" b="0">
                           <a:solidFill>
@@ -3944,7 +3944,7 @@
                     <a:bodyPr wrap="square"/>
                     <a:lstStyle/>
                     <a:p>
-                      <a:pPr algn="l"/>
+                      <a:pPr algn="ctr"/>
                       <a:r>
                         <a:rPr sz="1000" b="0">
                           <a:solidFill>
@@ -3991,7 +3991,7 @@
                     <a:bodyPr wrap="square"/>
                     <a:lstStyle/>
                     <a:p>
-                      <a:pPr algn="l"/>
+                      <a:pPr algn="ctr"/>
                       <a:r>
                         <a:rPr sz="1000" b="1">
                           <a:solidFill>
@@ -4036,7 +4036,7 @@
                     <a:bodyPr wrap="square"/>
                     <a:lstStyle/>
                     <a:p>
-                      <a:pPr algn="l"/>
+                      <a:pPr algn="ctr"/>
                       <a:r>
                         <a:rPr sz="1000" b="0">
                           <a:solidFill>
@@ -4081,7 +4081,7 @@
                     <a:bodyPr wrap="square"/>
                     <a:lstStyle/>
                     <a:p>
-                      <a:pPr algn="r"/>
+                      <a:pPr algn="ctr"/>
                       <a:r>
                         <a:rPr sz="1000" b="0">
                           <a:solidFill>
@@ -4126,7 +4126,7 @@
                     <a:bodyPr wrap="square"/>
                     <a:lstStyle/>
                     <a:p>
-                      <a:pPr algn="l"/>
+                      <a:pPr algn="ctr"/>
                       <a:r>
                         <a:rPr sz="1000" b="0">
                           <a:solidFill>
@@ -4171,7 +4171,7 @@
                     <a:bodyPr wrap="square"/>
                     <a:lstStyle/>
                     <a:p>
-                      <a:pPr algn="l"/>
+                      <a:pPr algn="ctr"/>
                       <a:r>
                         <a:rPr sz="1000" b="0">
                           <a:solidFill>
@@ -4218,7 +4218,7 @@
                     <a:bodyPr wrap="square"/>
                     <a:lstStyle/>
                     <a:p>
-                      <a:pPr algn="l"/>
+                      <a:pPr algn="ctr"/>
                       <a:r>
                         <a:rPr sz="1000" b="1">
                           <a:solidFill>
@@ -4263,7 +4263,7 @@
                     <a:bodyPr wrap="square"/>
                     <a:lstStyle/>
                     <a:p>
-                      <a:pPr algn="l"/>
+                      <a:pPr algn="ctr"/>
                       <a:r>
                         <a:rPr sz="1000" b="0">
                           <a:solidFill>
@@ -4308,7 +4308,7 @@
                     <a:bodyPr wrap="square"/>
                     <a:lstStyle/>
                     <a:p>
-                      <a:pPr algn="r"/>
+                      <a:pPr algn="ctr"/>
                       <a:r>
                         <a:rPr sz="1000" b="0">
                           <a:solidFill>
@@ -4353,7 +4353,7 @@
                     <a:bodyPr wrap="square"/>
                     <a:lstStyle/>
                     <a:p>
-                      <a:pPr algn="l"/>
+                      <a:pPr algn="ctr"/>
                       <a:r>
                         <a:rPr sz="1000" b="0">
                           <a:solidFill>
@@ -4398,7 +4398,7 @@
                     <a:bodyPr wrap="square"/>
                     <a:lstStyle/>
                     <a:p>
-                      <a:pPr algn="l"/>
+                      <a:pPr algn="ctr"/>
                       <a:r>
                         <a:rPr sz="1000" b="0">
                           <a:solidFill>
@@ -4445,7 +4445,7 @@
                     <a:bodyPr wrap="square"/>
                     <a:lstStyle/>
                     <a:p>
-                      <a:pPr algn="l"/>
+                      <a:pPr algn="ctr"/>
                       <a:r>
                         <a:rPr sz="1000" b="1">
                           <a:solidFill>
@@ -4490,7 +4490,7 @@
                     <a:bodyPr wrap="square"/>
                     <a:lstStyle/>
                     <a:p>
-                      <a:pPr algn="l"/>
+                      <a:pPr algn="ctr"/>
                       <a:r>
                         <a:rPr sz="1000" b="0">
                           <a:solidFill>
@@ -4535,7 +4535,7 @@
                     <a:bodyPr wrap="square"/>
                     <a:lstStyle/>
                     <a:p>
-                      <a:pPr algn="r"/>
+                      <a:pPr algn="ctr"/>
                       <a:r>
                         <a:rPr sz="1000" b="0">
                           <a:solidFill>
@@ -4580,7 +4580,7 @@
                     <a:bodyPr wrap="square"/>
                     <a:lstStyle/>
                     <a:p>
-                      <a:pPr algn="l"/>
+                      <a:pPr algn="ctr"/>
                       <a:r>
                         <a:rPr sz="1000" b="0">
                           <a:solidFill>
@@ -4625,7 +4625,7 @@
                     <a:bodyPr wrap="square"/>
                     <a:lstStyle/>
                     <a:p>
-                      <a:pPr algn="l"/>
+                      <a:pPr algn="ctr"/>
                       <a:r>
                         <a:rPr sz="1000" b="0">
                           <a:solidFill>
@@ -4672,7 +4672,7 @@
                     <a:bodyPr wrap="square"/>
                     <a:lstStyle/>
                     <a:p>
-                      <a:pPr algn="l"/>
+                      <a:pPr algn="ctr"/>
                       <a:r>
                         <a:rPr sz="1000" b="1">
                           <a:solidFill>
@@ -4717,7 +4717,7 @@
                     <a:bodyPr wrap="square"/>
                     <a:lstStyle/>
                     <a:p>
-                      <a:pPr algn="l"/>
+                      <a:pPr algn="ctr"/>
                       <a:r>
                         <a:rPr sz="1000" b="0">
                           <a:solidFill>
@@ -4762,7 +4762,7 @@
                     <a:bodyPr wrap="square"/>
                     <a:lstStyle/>
                     <a:p>
-                      <a:pPr algn="r"/>
+                      <a:pPr algn="ctr"/>
                       <a:r>
                         <a:rPr sz="1000" b="0">
                           <a:solidFill>
@@ -4807,7 +4807,7 @@
                     <a:bodyPr wrap="square"/>
                     <a:lstStyle/>
                     <a:p>
-                      <a:pPr algn="l"/>
+                      <a:pPr algn="ctr"/>
                       <a:r>
                         <a:rPr sz="1000" b="0">
                           <a:solidFill>
@@ -4852,7 +4852,7 @@
                     <a:bodyPr wrap="square"/>
                     <a:lstStyle/>
                     <a:p>
-                      <a:pPr algn="l"/>
+                      <a:pPr algn="ctr"/>
                       <a:r>
                         <a:rPr sz="1000" b="0">
                           <a:solidFill>
@@ -5100,7 +5100,7 @@
                     <a:bodyPr wrap="square"/>
                     <a:lstStyle/>
                     <a:p>
-                      <a:pPr algn="l"/>
+                      <a:pPr algn="ctr"/>
                       <a:r>
                         <a:rPr sz="1000" b="1">
                           <a:solidFill>
@@ -5190,7 +5190,7 @@
                     <a:bodyPr wrap="square"/>
                     <a:lstStyle/>
                     <a:p>
-                      <a:pPr algn="l"/>
+                      <a:pPr algn="ctr"/>
                       <a:r>
                         <a:rPr sz="1000" b="0">
                           <a:solidFill>
@@ -5237,7 +5237,7 @@
                     <a:bodyPr wrap="square"/>
                     <a:lstStyle/>
                     <a:p>
-                      <a:pPr algn="l"/>
+                      <a:pPr algn="ctr"/>
                       <a:r>
                         <a:rPr sz="1000" b="1">
                           <a:solidFill>
@@ -5327,7 +5327,7 @@
                     <a:bodyPr wrap="square"/>
                     <a:lstStyle/>
                     <a:p>
-                      <a:pPr algn="l"/>
+                      <a:pPr algn="ctr"/>
                       <a:r>
                         <a:rPr sz="1000" b="0">
                           <a:solidFill>
@@ -5374,7 +5374,7 @@
                     <a:bodyPr wrap="square"/>
                     <a:lstStyle/>
                     <a:p>
-                      <a:pPr algn="l"/>
+                      <a:pPr algn="ctr"/>
                       <a:r>
                         <a:rPr sz="1000" b="1">
                           <a:solidFill>
@@ -5464,7 +5464,7 @@
                     <a:bodyPr wrap="square"/>
                     <a:lstStyle/>
                     <a:p>
-                      <a:pPr algn="l"/>
+                      <a:pPr algn="ctr"/>
                       <a:r>
                         <a:rPr sz="1000" b="0">
                           <a:solidFill>
@@ -5666,7 +5666,7 @@
                     <a:bodyPr wrap="square"/>
                     <a:lstStyle/>
                     <a:p>
-                      <a:pPr algn="l"/>
+                      <a:pPr algn="ctr"/>
                       <a:r>
                         <a:rPr sz="1000" b="1">
                           <a:solidFill>
@@ -5711,7 +5711,7 @@
                     <a:bodyPr wrap="square"/>
                     <a:lstStyle/>
                     <a:p>
-                      <a:pPr algn="l"/>
+                      <a:pPr algn="ctr"/>
                       <a:r>
                         <a:rPr sz="1000" b="0">
                           <a:solidFill>
@@ -5758,7 +5758,7 @@
                     <a:bodyPr wrap="square"/>
                     <a:lstStyle/>
                     <a:p>
-                      <a:pPr algn="l"/>
+                      <a:pPr algn="ctr"/>
                       <a:r>
                         <a:rPr sz="1000" b="1">
                           <a:solidFill>
@@ -5803,7 +5803,7 @@
                     <a:bodyPr wrap="square"/>
                     <a:lstStyle/>
                     <a:p>
-                      <a:pPr algn="l"/>
+                      <a:pPr algn="ctr"/>
                       <a:r>
                         <a:rPr sz="1000" b="0">
                           <a:solidFill>
@@ -5850,7 +5850,7 @@
                     <a:bodyPr wrap="square"/>
                     <a:lstStyle/>
                     <a:p>
-                      <a:pPr algn="l"/>
+                      <a:pPr algn="ctr"/>
                       <a:r>
                         <a:rPr sz="1000" b="1">
                           <a:solidFill>
@@ -5895,7 +5895,7 @@
                     <a:bodyPr wrap="square"/>
                     <a:lstStyle/>
                     <a:p>
-                      <a:pPr algn="l"/>
+                      <a:pPr algn="ctr"/>
                       <a:r>
                         <a:rPr sz="1000" b="0">
                           <a:solidFill>

--- a/reports/ssg-quickcommerce-onepager.pptx
+++ b/reports/ssg-quickcommerce-onepager.pptx
@@ -3096,8 +3096,8 @@
         </p:nvSpPr>
         <p:spPr>
           <a:xfrm>
-            <a:off x="417600" y="432000"/>
-            <a:ext cx="9086400" cy="324000"/>
+            <a:off x="435600" y="432000"/>
+            <a:ext cx="9050400" cy="324000"/>
           </a:xfrm>
           <a:prstGeom prst="rect">
             <a:avLst/>
@@ -3144,8 +3144,8 @@
         </p:nvSpPr>
         <p:spPr>
           <a:xfrm>
-            <a:off x="417600" y="1044000"/>
-            <a:ext cx="7848000" cy="234000"/>
+            <a:off x="435600" y="1044000"/>
+            <a:ext cx="7830000" cy="234000"/>
           </a:xfrm>
           <a:prstGeom prst="rect">
             <a:avLst/>
@@ -3168,7 +3168,7 @@
                 <a:ea typeface="맑은 고딕"/>
                 <a:cs typeface="맑은 고딕"/>
               </a:rPr>
-              <a:t>■ 양재·하남점 '2시간 내 배송' 시범 도입 — 대용량 장보기 공략, PP센터 가동률 제고</a:t>
+              <a:t>■ 양재·하남점 '2시간 배송' 시범 도입 — 대용량 장보기 공략·PP센터 가동률 제고</a:t>
             </a:r>
           </a:p>
         </p:txBody>
@@ -3181,7 +3181,7 @@
         </p:nvSpPr>
         <p:spPr>
           <a:xfrm>
-            <a:off x="374400" y="6443999"/>
+            <a:off x="392400" y="6443999"/>
             <a:ext cx="6480000" cy="198000"/>
           </a:xfrm>
           <a:prstGeom prst="rect">
@@ -3205,7 +3205,7 @@
                 <a:ea typeface="맑은 고딕"/>
                 <a:cs typeface="맑은 고딕"/>
               </a:rPr>
-              <a:t>※ 출처 : 비즈워치 「SSG닷컴, '2시간 실험'에 나선 진짜 이유는」('26. 7. 10. 정혜인 기자)</a:t>
+              <a:t>※ 출처 : 비즈워치 「SSG닷컴, '2시간 실험'에 나선 진짜 이유는」('26. 7. 10.)</a:t>
             </a:r>
           </a:p>
         </p:txBody>
@@ -3218,45 +3218,8 @@
         </p:nvSpPr>
         <p:spPr>
           <a:xfrm>
-            <a:off x="9151200" y="6562800"/>
-            <a:ext cx="756000" cy="216000"/>
-          </a:xfrm>
-          <a:prstGeom prst="rect">
-            <a:avLst/>
-          </a:prstGeom>
-          <a:noFill/>
-        </p:spPr>
-        <p:txBody>
-          <a:bodyPr wrap="square" anchor="t" lIns="0" rIns="0" tIns="0" bIns="0">
-            <a:spAutoFit/>
-          </a:bodyPr>
-          <a:lstStyle/>
-          <a:p>
-            <a:pPr algn="r"/>
-            <a:r>
-              <a:rPr sz="1000" b="0">
-                <a:solidFill>
-                  <a:srgbClr val="000000"/>
-                </a:solidFill>
-                <a:latin typeface="맑은 고딕"/>
-                <a:ea typeface="맑은 고딕"/>
-                <a:cs typeface="맑은 고딕"/>
-              </a:rPr>
-              <a:t>1/1</a:t>
-            </a:r>
-          </a:p>
-        </p:txBody>
-      </p:sp>
-      <p:sp>
-        <p:nvSpPr>
-          <p:cNvPr id="6" name="TextBox 5"/>
-          <p:cNvSpPr txBox="1"/>
-          <p:nvPr/>
-        </p:nvSpPr>
-        <p:spPr>
-          <a:xfrm>
-            <a:off x="406799" y="1475999"/>
-            <a:ext cx="9093600" cy="198000"/>
+            <a:off x="424800" y="1475999"/>
+            <a:ext cx="9057600" cy="198000"/>
           </a:xfrm>
           <a:prstGeom prst="rect">
             <a:avLst/>
@@ -3286,14 +3249,14 @@
       </p:sp>
       <p:sp>
         <p:nvSpPr>
-          <p:cNvPr id="7" name="TextBox 6"/>
+          <p:cNvPr id="6" name="TextBox 5"/>
           <p:cNvSpPr txBox="1"/>
           <p:nvPr/>
         </p:nvSpPr>
         <p:spPr>
           <a:xfrm>
-            <a:off x="604800" y="1673999"/>
-            <a:ext cx="8895600" cy="172800"/>
+            <a:off x="622800" y="1673999"/>
+            <a:ext cx="8859600" cy="172800"/>
           </a:xfrm>
           <a:prstGeom prst="rect">
             <a:avLst/>
@@ -3316,21 +3279,21 @@
                 <a:ea typeface="맑은 고딕"/>
                 <a:cs typeface="맑은 고딕"/>
               </a:rPr>
-              <a:t>- 이륜차 퀵커머스(바로퀵)는 적재량 한계로 소량 배송에 한정 → 대형마트 주력인 3~4인 가구 대용량 장보기 공백</a:t>
-            </a:r>
-          </a:p>
-        </p:txBody>
-      </p:sp>
-      <p:sp>
-        <p:nvSpPr>
-          <p:cNvPr id="8" name="TextBox 7"/>
+              <a:t>- 이륜차 퀵커머스는 소량 한정 → 3~4인 가구 대용량 장보기 공백</a:t>
+            </a:r>
+          </a:p>
+        </p:txBody>
+      </p:sp>
+      <p:sp>
+        <p:nvSpPr>
+          <p:cNvPr id="7" name="TextBox 6"/>
           <p:cNvSpPr txBox="1"/>
           <p:nvPr/>
         </p:nvSpPr>
         <p:spPr>
           <a:xfrm>
-            <a:off x="604800" y="1846799"/>
-            <a:ext cx="8895600" cy="172800"/>
+            <a:off x="622800" y="1846799"/>
+            <a:ext cx="8859600" cy="172800"/>
           </a:xfrm>
           <a:prstGeom prst="rect">
             <a:avLst/>
@@ -3353,21 +3316,21 @@
                 <a:ea typeface="맑은 고딕"/>
                 <a:cs typeface="맑은 고딕"/>
               </a:rPr>
-              <a:t>- 바로퀵 6월 매출 1월 대비 197% 증가로 온디맨드 수요 실증 → 1시간(소량·이륜차) / 2시간(대용량·사륜차) 세분화 대응</a:t>
-            </a:r>
-          </a:p>
-        </p:txBody>
-      </p:sp>
-      <p:sp>
-        <p:nvSpPr>
-          <p:cNvPr id="9" name="TextBox 8"/>
+              <a:t>- 바로퀵 매출 197%↑(6월, 1월比) → 온디맨드 수요 실증</a:t>
+            </a:r>
+          </a:p>
+        </p:txBody>
+      </p:sp>
+      <p:sp>
+        <p:nvSpPr>
+          <p:cNvPr id="8" name="TextBox 7"/>
           <p:cNvSpPr txBox="1"/>
           <p:nvPr/>
         </p:nvSpPr>
         <p:spPr>
           <a:xfrm>
-            <a:off x="406799" y="2199600"/>
-            <a:ext cx="9093600" cy="198000"/>
+            <a:off x="424800" y="2199600"/>
+            <a:ext cx="9057600" cy="198000"/>
           </a:xfrm>
           <a:prstGeom prst="rect">
             <a:avLst/>
@@ -3390,21 +3353,21 @@
                 <a:ea typeface="맑은 고딕"/>
                 <a:cs typeface="맑은 고딕"/>
               </a:rPr>
-              <a:t>• 시범 운영 개요</a:t>
-            </a:r>
-          </a:p>
-        </p:txBody>
-      </p:sp>
-      <p:sp>
-        <p:nvSpPr>
-          <p:cNvPr id="10" name="TextBox 9"/>
+              <a:t>• 시범 운영 개요 ('26. 7. 9. 개시)</a:t>
+            </a:r>
+          </a:p>
+        </p:txBody>
+      </p:sp>
+      <p:sp>
+        <p:nvSpPr>
+          <p:cNvPr id="9" name="TextBox 8"/>
           <p:cNvSpPr txBox="1"/>
           <p:nvPr/>
         </p:nvSpPr>
         <p:spPr>
           <a:xfrm>
-            <a:off x="604800" y="2397599"/>
-            <a:ext cx="8895600" cy="172800"/>
+            <a:off x="622800" y="2397599"/>
+            <a:ext cx="8859600" cy="172800"/>
           </a:xfrm>
           <a:prstGeom prst="rect">
             <a:avLst/>
@@ -3427,21 +3390,21 @@
                 <a:ea typeface="맑은 고딕"/>
                 <a:cs typeface="맑은 고딕"/>
               </a:rPr>
-              <a:t>- 오후 8시까지 주문 시 결제 시점 기준 2시간 내 배송 완료, 기존 예약배송 병행 선택 가능</a:t>
-            </a:r>
-          </a:p>
-        </p:txBody>
-      </p:sp>
-      <p:sp>
-        <p:nvSpPr>
-          <p:cNvPr id="11" name="TextBox 10"/>
+              <a:t>- 20시까지 주문 → 결제 후 2시간 내 배송, 예약배송 병행 가능</a:t>
+            </a:r>
+          </a:p>
+        </p:txBody>
+      </p:sp>
+      <p:sp>
+        <p:nvSpPr>
+          <p:cNvPr id="10" name="TextBox 9"/>
           <p:cNvSpPr txBox="1"/>
           <p:nvPr/>
         </p:nvSpPr>
         <p:spPr>
           <a:xfrm>
-            <a:off x="604800" y="2570399"/>
-            <a:ext cx="8895600" cy="172800"/>
+            <a:off x="622800" y="2570399"/>
+            <a:ext cx="8859600" cy="172800"/>
           </a:xfrm>
           <a:prstGeom prst="rect">
             <a:avLst/>
@@ -3464,21 +3427,21 @@
                 <a:ea typeface="맑은 고딕"/>
                 <a:cs typeface="맑은 고딕"/>
               </a:rPr>
-              <a:t>- 쓱배송 사륜 차량 활용으로 무거운 대용량 상품까지 즉시 배송 — 점포당 약 15만 종 상품이 기반</a:t>
-            </a:r>
-          </a:p>
-        </p:txBody>
-      </p:sp>
-      <p:sp>
-        <p:nvSpPr>
-          <p:cNvPr id="12" name="TextBox 11"/>
+              <a:t>- 사륜차로 대용량·중량 상품 즉시 배송 (약 15만 종 기반)</a:t>
+            </a:r>
+          </a:p>
+        </p:txBody>
+      </p:sp>
+      <p:sp>
+        <p:nvSpPr>
+          <p:cNvPr id="11" name="TextBox 10"/>
           <p:cNvSpPr txBox="1"/>
           <p:nvPr/>
         </p:nvSpPr>
         <p:spPr>
           <a:xfrm>
-            <a:off x="406799" y="2923199"/>
-            <a:ext cx="9093600" cy="198000"/>
+            <a:off x="424800" y="2923199"/>
+            <a:ext cx="9057600" cy="198000"/>
           </a:xfrm>
           <a:prstGeom prst="rect">
             <a:avLst/>
@@ -3508,15 +3471,15 @@
       </p:sp>
       <p:graphicFrame>
         <p:nvGraphicFramePr>
-          <p:cNvPr id="13" name="Table 12"/>
+          <p:cNvPr id="12" name="Table 11"/>
           <p:cNvGraphicFramePr>
             <a:graphicFrameLocks noGrp="1"/>
           </p:cNvGraphicFramePr>
           <p:nvPr/>
         </p:nvGraphicFramePr>
         <p:xfrm>
-          <a:off x="406799" y="3121200"/>
-          <a:ext cx="9093600" cy="1620000"/>
+          <a:off x="424800" y="3121200"/>
+          <a:ext cx="9057600" cy="1620000"/>
         </p:xfrm>
         <a:graphic>
           <a:graphicData uri="http://schemas.openxmlformats.org/drawingml/2006/table">
@@ -3529,7 +3492,7 @@
                 <a:gridCol w="1908000"/>
                 <a:gridCol w="900000"/>
                 <a:gridCol w="1296000"/>
-                <a:gridCol w="3585600"/>
+                <a:gridCol w="3549600"/>
               </a:tblGrid>
               <a:tr h="270000">
                 <a:tc>
@@ -3819,7 +3782,7 @@
                           <a:ea typeface="맑은 고딕"/>
                           <a:cs typeface="맑은 고딕"/>
                         </a:rPr>
-                        <a:t>예약배송 (구간당 4~5시간)</a:t>
+                        <a:t>예약배송 (4~5시간)</a:t>
                       </a:r>
                     </a:p>
                   </a:txBody>
@@ -3954,7 +3917,7 @@
                           <a:ea typeface="맑은 고딕"/>
                           <a:cs typeface="맑은 고딕"/>
                         </a:rPr>
-                        <a:t>지역별 2~5개 시간 구간</a:t>
+                        <a:t>지역별 2~5개 구간</a:t>
                       </a:r>
                     </a:p>
                   </a:txBody>
@@ -4136,7 +4099,7 @@
                           <a:ea typeface="맑은 고딕"/>
                           <a:cs typeface="맑은 고딕"/>
                         </a:rPr>
-                        <a:t>네오 취급 상품</a:t>
+                        <a:t>네오 상품</a:t>
                       </a:r>
                     </a:p>
                   </a:txBody>
@@ -4181,7 +4144,7 @@
                           <a:ea typeface="맑은 고딕"/>
                           <a:cs typeface="맑은 고딕"/>
                         </a:rPr>
-                        <a:t>물류센터 '네오' 한정 (PP센터 불가)</a:t>
+                        <a:t>네오 한정 (PP센터 불가)</a:t>
                       </a:r>
                     </a:p>
                   </a:txBody>
@@ -4408,7 +4371,7 @@
                           <a:ea typeface="맑은 고딕"/>
                           <a:cs typeface="맑은 고딕"/>
                         </a:rPr>
-                        <a:t>쓱배송의 한 축</a:t>
+                        <a:t>—</a:t>
                       </a:r>
                     </a:p>
                   </a:txBody>
@@ -4500,7 +4463,7 @@
                           <a:ea typeface="맑은 고딕"/>
                           <a:cs typeface="맑은 고딕"/>
                         </a:rPr>
-                        <a:t>1시간 내외 (반경 약 3km)</a:t>
+                        <a:t>1시간 내 (3km)</a:t>
                       </a:r>
                     </a:p>
                   </a:txBody>
@@ -4635,7 +4598,7 @@
                           <a:ea typeface="맑은 고딕"/>
                           <a:cs typeface="맑은 고딕"/>
                         </a:rPr>
-                        <a:t>소량·1~2인 가구, 6월 매출 1월比 197%↑</a:t>
+                        <a:t>소량·1~2인 가구</a:t>
                       </a:r>
                     </a:p>
                   </a:txBody>
@@ -4727,7 +4690,7 @@
                           <a:ea typeface="맑은 고딕"/>
                           <a:cs typeface="맑은 고딕"/>
                         </a:rPr>
-                        <a:t>2시간 이내 (20시 마감)</a:t>
+                        <a:t>2시간 내 (20시 마감)</a:t>
                       </a:r>
                     </a:p>
                   </a:txBody>
@@ -4817,7 +4780,7 @@
                           <a:ea typeface="맑은 고딕"/>
                           <a:cs typeface="맑은 고딕"/>
                         </a:rPr>
-                        <a:t>약 15만 종 기반</a:t>
+                        <a:t>약 15만 종</a:t>
                       </a:r>
                     </a:p>
                   </a:txBody>
@@ -4899,14 +4862,14 @@
       </p:graphicFrame>
       <p:sp>
         <p:nvSpPr>
-          <p:cNvPr id="14" name="TextBox 13"/>
+          <p:cNvPr id="13" name="TextBox 12"/>
           <p:cNvSpPr txBox="1"/>
           <p:nvPr/>
         </p:nvSpPr>
         <p:spPr>
           <a:xfrm>
-            <a:off x="406799" y="4921199"/>
-            <a:ext cx="4428000" cy="198000"/>
+            <a:off x="424800" y="4921199"/>
+            <a:ext cx="4410000" cy="198000"/>
           </a:xfrm>
           <a:prstGeom prst="rect">
             <a:avLst/>
@@ -4936,15 +4899,15 @@
       </p:sp>
       <p:graphicFrame>
         <p:nvGraphicFramePr>
-          <p:cNvPr id="15" name="Table 14"/>
+          <p:cNvPr id="14" name="Table 13"/>
           <p:cNvGraphicFramePr>
             <a:graphicFrameLocks noGrp="1"/>
           </p:cNvGraphicFramePr>
           <p:nvPr/>
         </p:nvGraphicFramePr>
         <p:xfrm>
-          <a:off x="406799" y="5119200"/>
-          <a:ext cx="4428000" cy="936000"/>
+          <a:off x="424800" y="5119200"/>
+          <a:ext cx="4410000" cy="936000"/>
         </p:xfrm>
         <a:graphic>
           <a:graphicData uri="http://schemas.openxmlformats.org/drawingml/2006/table">
@@ -4955,7 +4918,7 @@
               <a:tblGrid>
                 <a:gridCol w="1260000"/>
                 <a:gridCol w="1296000"/>
-                <a:gridCol w="1872000"/>
+                <a:gridCol w="1854000"/>
               </a:tblGrid>
               <a:tr h="234000">
                 <a:tc>
@@ -5511,14 +5474,14 @@
       </p:graphicFrame>
       <p:sp>
         <p:nvSpPr>
-          <p:cNvPr id="16" name="TextBox 15"/>
+          <p:cNvPr id="15" name="TextBox 14"/>
           <p:cNvSpPr txBox="1"/>
           <p:nvPr/>
         </p:nvSpPr>
         <p:spPr>
           <a:xfrm>
             <a:off x="5072400" y="4921199"/>
-            <a:ext cx="4428000" cy="198000"/>
+            <a:ext cx="4410000" cy="198000"/>
           </a:xfrm>
           <a:prstGeom prst="rect">
             <a:avLst/>
@@ -5548,7 +5511,7 @@
       </p:sp>
       <p:graphicFrame>
         <p:nvGraphicFramePr>
-          <p:cNvPr id="17" name="Table 16"/>
+          <p:cNvPr id="16" name="Table 15"/>
           <p:cNvGraphicFramePr>
             <a:graphicFrameLocks noGrp="1"/>
           </p:cNvGraphicFramePr>
@@ -5556,7 +5519,7 @@
         </p:nvGraphicFramePr>
         <p:xfrm>
           <a:off x="5072400" y="5119200"/>
-          <a:ext cx="4428000" cy="936000"/>
+          <a:ext cx="4410000" cy="936000"/>
         </p:xfrm>
         <a:graphic>
           <a:graphicData uri="http://schemas.openxmlformats.org/drawingml/2006/table">
@@ -5566,7 +5529,7 @@
               </a:tblPr>
               <a:tblGrid>
                 <a:gridCol w="1404000"/>
-                <a:gridCol w="3024000"/>
+                <a:gridCol w="3006000"/>
               </a:tblGrid>
               <a:tr h="234000">
                 <a:tc>
@@ -5721,7 +5684,7 @@
                           <a:ea typeface="맑은 고딕"/>
                           <a:cs typeface="맑은 고딕"/>
                         </a:rPr>
-                        <a:t>양재·하남점 시범 운영 (7. 9.)</a:t>
+                        <a:t>양재·하남점 시범 운영</a:t>
                       </a:r>
                     </a:p>
                   </a:txBody>
@@ -5905,7 +5868,7 @@
                           <a:ea typeface="맑은 고딕"/>
                           <a:cs typeface="맑은 고딕"/>
                         </a:rPr>
-                        <a:t>전국 확대 → 50여 개 점포 목표</a:t>
+                        <a:t>전국 확대 → 50여 개 점포</a:t>
                       </a:r>
                     </a:p>
                   </a:txBody>
@@ -5942,14 +5905,14 @@
       </p:graphicFrame>
       <p:sp>
         <p:nvSpPr>
-          <p:cNvPr id="18" name="TextBox 17"/>
+          <p:cNvPr id="17" name="TextBox 16"/>
           <p:cNvSpPr txBox="1"/>
           <p:nvPr/>
         </p:nvSpPr>
         <p:spPr>
           <a:xfrm>
-            <a:off x="406799" y="6235200"/>
-            <a:ext cx="9093600" cy="172800"/>
+            <a:off x="424800" y="6235200"/>
+            <a:ext cx="9057600" cy="172800"/>
           </a:xfrm>
           <a:prstGeom prst="rect">
             <a:avLst/>
@@ -5972,7 +5935,7 @@
                 <a:ea typeface="맑은 고딕"/>
                 <a:cs typeface="맑은 고딕"/>
               </a:rPr>
-              <a:t>※ 유통산업발전법('12년) : 대형마트 영업 자정~오전 10시 제한·월 2회 의무휴업 → 전국 160여 PP센터 새벽배송 불가, 규제 완화 개정 시 새벽배송 확장 여지</a:t>
+              <a:t>※ 유통산업발전법 : 영업 0~10시 제한·월 2회 휴업 → PP센터 새벽배송 불가 (규제 완화 시 확장 여지)</a:t>
             </a:r>
           </a:p>
         </p:txBody>

--- a/reports/ssg-quickcommerce-onepager.pptx
+++ b/reports/ssg-quickcommerce-onepager.pptx
@@ -3212,14 +3212,58 @@
       </p:sp>
       <p:sp>
         <p:nvSpPr>
-          <p:cNvPr id="5" name="TextBox 4"/>
-          <p:cNvSpPr txBox="1"/>
+          <p:cNvPr id="5" name="Rectangle 4"/>
+          <p:cNvSpPr/>
           <p:nvPr/>
         </p:nvSpPr>
         <p:spPr>
           <a:xfrm>
             <a:off x="424800" y="1475999"/>
-            <a:ext cx="9057600" cy="198000"/>
+            <a:ext cx="792000" cy="522000"/>
+          </a:xfrm>
+          <a:prstGeom prst="rect">
+            <a:avLst/>
+          </a:prstGeom>
+          <a:solidFill>
+            <a:srgbClr val="7F7F7F"/>
+          </a:solidFill>
+          <a:ln>
+            <a:noFill/>
+          </a:ln>
+          <a:effectLst/>
+        </p:spPr>
+        <p:style>
+          <a:lnRef idx="1">
+            <a:schemeClr val="accent1"/>
+          </a:lnRef>
+          <a:fillRef idx="3">
+            <a:schemeClr val="accent1"/>
+          </a:fillRef>
+          <a:effectRef idx="2">
+            <a:schemeClr val="accent1"/>
+          </a:effectRef>
+          <a:fontRef idx="minor">
+            <a:schemeClr val="lt1"/>
+          </a:fontRef>
+        </p:style>
+        <p:txBody>
+          <a:bodyPr rtlCol="0" anchor="ctr"/>
+          <a:lstStyle/>
+          <a:p>
+            <a:pPr algn="ctr"/>
+          </a:p>
+        </p:txBody>
+      </p:sp>
+      <p:sp>
+        <p:nvSpPr>
+          <p:cNvPr id="6" name="TextBox 5"/>
+          <p:cNvSpPr txBox="1"/>
+          <p:nvPr/>
+        </p:nvSpPr>
+        <p:spPr>
+          <a:xfrm>
+            <a:off x="424800" y="1475999"/>
+            <a:ext cx="792000" cy="522000"/>
           </a:xfrm>
           <a:prstGeom prst="rect">
             <a:avLst/>
@@ -3227,36 +3271,36 @@
           <a:noFill/>
         </p:spPr>
         <p:txBody>
-          <a:bodyPr wrap="square" anchor="t" lIns="0" rIns="0" tIns="0" bIns="0">
+          <a:bodyPr wrap="square" anchor="ctr" lIns="0" rIns="0" tIns="0" bIns="0">
             <a:spAutoFit/>
           </a:bodyPr>
           <a:lstStyle/>
           <a:p>
-            <a:pPr algn="l"/>
-            <a:r>
-              <a:rPr sz="1200" b="1">
+            <a:pPr algn="ctr"/>
+            <a:r>
+              <a:rPr sz="1100" b="1">
                 <a:solidFill>
-                  <a:srgbClr val="222222"/>
+                  <a:srgbClr val="FFFFFF"/>
                 </a:solidFill>
                 <a:latin typeface="맑은 고딕"/>
                 <a:ea typeface="맑은 고딕"/>
                 <a:cs typeface="맑은 고딕"/>
               </a:rPr>
-              <a:t>• 도입 배경</a:t>
-            </a:r>
-          </a:p>
-        </p:txBody>
-      </p:sp>
-      <p:sp>
-        <p:nvSpPr>
-          <p:cNvPr id="6" name="TextBox 5"/>
+              <a:t>배경</a:t>
+            </a:r>
+          </a:p>
+        </p:txBody>
+      </p:sp>
+      <p:sp>
+        <p:nvSpPr>
+          <p:cNvPr id="7" name="TextBox 6"/>
           <p:cNvSpPr txBox="1"/>
           <p:nvPr/>
         </p:nvSpPr>
         <p:spPr>
           <a:xfrm>
-            <a:off x="622800" y="1673999"/>
-            <a:ext cx="8859600" cy="172800"/>
+            <a:off x="1324800" y="1519200"/>
+            <a:ext cx="8157600" cy="172800"/>
           </a:xfrm>
           <a:prstGeom prst="rect">
             <a:avLst/>
@@ -3286,14 +3330,14 @@
       </p:sp>
       <p:sp>
         <p:nvSpPr>
-          <p:cNvPr id="7" name="TextBox 6"/>
+          <p:cNvPr id="8" name="TextBox 7"/>
           <p:cNvSpPr txBox="1"/>
           <p:nvPr/>
         </p:nvSpPr>
         <p:spPr>
           <a:xfrm>
-            <a:off x="622800" y="1846799"/>
-            <a:ext cx="8859600" cy="172800"/>
+            <a:off x="1324800" y="1717199"/>
+            <a:ext cx="8157600" cy="172800"/>
           </a:xfrm>
           <a:prstGeom prst="rect">
             <a:avLst/>
@@ -3323,14 +3367,58 @@
       </p:sp>
       <p:sp>
         <p:nvSpPr>
-          <p:cNvPr id="8" name="TextBox 7"/>
+          <p:cNvPr id="9" name="Rectangle 8"/>
+          <p:cNvSpPr/>
+          <p:nvPr/>
+        </p:nvSpPr>
+        <p:spPr>
+          <a:xfrm>
+            <a:off x="424800" y="2106000"/>
+            <a:ext cx="792000" cy="702000"/>
+          </a:xfrm>
+          <a:prstGeom prst="rect">
+            <a:avLst/>
+          </a:prstGeom>
+          <a:solidFill>
+            <a:srgbClr val="7F7F7F"/>
+          </a:solidFill>
+          <a:ln>
+            <a:noFill/>
+          </a:ln>
+          <a:effectLst/>
+        </p:spPr>
+        <p:style>
+          <a:lnRef idx="1">
+            <a:schemeClr val="accent1"/>
+          </a:lnRef>
+          <a:fillRef idx="3">
+            <a:schemeClr val="accent1"/>
+          </a:fillRef>
+          <a:effectRef idx="2">
+            <a:schemeClr val="accent1"/>
+          </a:effectRef>
+          <a:fontRef idx="minor">
+            <a:schemeClr val="lt1"/>
+          </a:fontRef>
+        </p:style>
+        <p:txBody>
+          <a:bodyPr rtlCol="0" anchor="ctr"/>
+          <a:lstStyle/>
+          <a:p>
+            <a:pPr algn="ctr"/>
+          </a:p>
+        </p:txBody>
+      </p:sp>
+      <p:sp>
+        <p:nvSpPr>
+          <p:cNvPr id="10" name="TextBox 9"/>
           <p:cNvSpPr txBox="1"/>
           <p:nvPr/>
         </p:nvSpPr>
         <p:spPr>
           <a:xfrm>
-            <a:off x="424800" y="2199600"/>
-            <a:ext cx="9057600" cy="198000"/>
+            <a:off x="424800" y="2106000"/>
+            <a:ext cx="792000" cy="702000"/>
           </a:xfrm>
           <a:prstGeom prst="rect">
             <a:avLst/>
@@ -3338,36 +3426,80 @@
           <a:noFill/>
         </p:spPr>
         <p:txBody>
-          <a:bodyPr wrap="square" anchor="t" lIns="0" rIns="0" tIns="0" bIns="0">
+          <a:bodyPr wrap="square" anchor="ctr" lIns="0" rIns="0" tIns="0" bIns="0">
             <a:spAutoFit/>
           </a:bodyPr>
           <a:lstStyle/>
           <a:p>
-            <a:pPr algn="l"/>
-            <a:r>
-              <a:rPr sz="1200" b="1">
+            <a:pPr algn="ctr"/>
+            <a:r>
+              <a:rPr sz="1100" b="1">
                 <a:solidFill>
-                  <a:srgbClr val="222222"/>
+                  <a:srgbClr val="FFFFFF"/>
                 </a:solidFill>
                 <a:latin typeface="맑은 고딕"/>
                 <a:ea typeface="맑은 고딕"/>
                 <a:cs typeface="맑은 고딕"/>
               </a:rPr>
-              <a:t>• 시범 운영 개요 ('26. 7. 9. 개시)</a:t>
-            </a:r>
-          </a:p>
-        </p:txBody>
-      </p:sp>
-      <p:sp>
-        <p:nvSpPr>
-          <p:cNvPr id="9" name="TextBox 8"/>
+              <a:t>핵심</a:t>
+            </a:r>
+          </a:p>
+        </p:txBody>
+      </p:sp>
+      <p:sp>
+        <p:nvSpPr>
+          <p:cNvPr id="11" name="Rectangle 10"/>
+          <p:cNvSpPr/>
+          <p:nvPr/>
+        </p:nvSpPr>
+        <p:spPr>
+          <a:xfrm>
+            <a:off x="1324800" y="2106000"/>
+            <a:ext cx="2647199" cy="702000"/>
+          </a:xfrm>
+          <a:prstGeom prst="rect">
+            <a:avLst/>
+          </a:prstGeom>
+          <a:solidFill>
+            <a:srgbClr val="F2F2F2"/>
+          </a:solidFill>
+          <a:ln>
+            <a:noFill/>
+          </a:ln>
+          <a:effectLst/>
+        </p:spPr>
+        <p:style>
+          <a:lnRef idx="1">
+            <a:schemeClr val="accent1"/>
+          </a:lnRef>
+          <a:fillRef idx="3">
+            <a:schemeClr val="accent1"/>
+          </a:fillRef>
+          <a:effectRef idx="2">
+            <a:schemeClr val="accent1"/>
+          </a:effectRef>
+          <a:fontRef idx="minor">
+            <a:schemeClr val="lt1"/>
+          </a:fontRef>
+        </p:style>
+        <p:txBody>
+          <a:bodyPr rtlCol="0" anchor="ctr"/>
+          <a:lstStyle/>
+          <a:p>
+            <a:pPr algn="ctr"/>
+          </a:p>
+        </p:txBody>
+      </p:sp>
+      <p:sp>
+        <p:nvSpPr>
+          <p:cNvPr id="12" name="TextBox 11"/>
           <p:cNvSpPr txBox="1"/>
           <p:nvPr/>
         </p:nvSpPr>
         <p:spPr>
           <a:xfrm>
-            <a:off x="622800" y="2397599"/>
-            <a:ext cx="8859600" cy="172800"/>
+            <a:off x="1324800" y="2160000"/>
+            <a:ext cx="2647199" cy="144000"/>
           </a:xfrm>
           <a:prstGeom prst="rect">
             <a:avLst/>
@@ -3380,9 +3512,46 @@
           </a:bodyPr>
           <a:lstStyle/>
           <a:p>
-            <a:pPr algn="l"/>
-            <a:r>
-              <a:rPr sz="1100" b="0">
+            <a:pPr algn="ctr"/>
+            <a:r>
+              <a:rPr sz="900" b="0">
+                <a:solidFill>
+                  <a:srgbClr val="595959"/>
+                </a:solidFill>
+                <a:latin typeface="맑은 고딕"/>
+                <a:ea typeface="맑은 고딕"/>
+                <a:cs typeface="맑은 고딕"/>
+              </a:rPr>
+              <a:t>배송 속도</a:t>
+            </a:r>
+          </a:p>
+        </p:txBody>
+      </p:sp>
+      <p:sp>
+        <p:nvSpPr>
+          <p:cNvPr id="13" name="TextBox 12"/>
+          <p:cNvSpPr txBox="1"/>
+          <p:nvPr/>
+        </p:nvSpPr>
+        <p:spPr>
+          <a:xfrm>
+            <a:off x="1324800" y="2322000"/>
+            <a:ext cx="2647199" cy="198000"/>
+          </a:xfrm>
+          <a:prstGeom prst="rect">
+            <a:avLst/>
+          </a:prstGeom>
+          <a:noFill/>
+        </p:spPr>
+        <p:txBody>
+          <a:bodyPr wrap="square" anchor="t" lIns="0" rIns="0" tIns="0" bIns="0">
+            <a:spAutoFit/>
+          </a:bodyPr>
+          <a:lstStyle/>
+          <a:p>
+            <a:pPr algn="ctr"/>
+            <a:r>
+              <a:rPr sz="1100" b="1">
                 <a:solidFill>
                   <a:srgbClr val="000000"/>
                 </a:solidFill>
@@ -3390,21 +3559,21 @@
                 <a:ea typeface="맑은 고딕"/>
                 <a:cs typeface="맑은 고딕"/>
               </a:rPr>
-              <a:t>- 20시까지 주문 → 결제 후 2시간 내 배송, 예약배송 병행 가능</a:t>
-            </a:r>
-          </a:p>
-        </p:txBody>
-      </p:sp>
-      <p:sp>
-        <p:nvSpPr>
-          <p:cNvPr id="10" name="TextBox 9"/>
+              <a:t>결제 후 2시간 내</a:t>
+            </a:r>
+          </a:p>
+        </p:txBody>
+      </p:sp>
+      <p:sp>
+        <p:nvSpPr>
+          <p:cNvPr id="14" name="TextBox 13"/>
           <p:cNvSpPr txBox="1"/>
           <p:nvPr/>
         </p:nvSpPr>
         <p:spPr>
           <a:xfrm>
-            <a:off x="622800" y="2570399"/>
-            <a:ext cx="8859600" cy="172800"/>
+            <a:off x="1324800" y="2538000"/>
+            <a:ext cx="2647199" cy="144000"/>
           </a:xfrm>
           <a:prstGeom prst="rect">
             <a:avLst/>
@@ -3417,9 +3586,127 @@
           </a:bodyPr>
           <a:lstStyle/>
           <a:p>
-            <a:pPr algn="l"/>
-            <a:r>
-              <a:rPr sz="1100" b="0">
+            <a:pPr algn="ctr"/>
+            <a:r>
+              <a:rPr sz="900" b="0">
+                <a:solidFill>
+                  <a:srgbClr val="595959"/>
+                </a:solidFill>
+                <a:latin typeface="맑은 고딕"/>
+                <a:ea typeface="맑은 고딕"/>
+                <a:cs typeface="맑은 고딕"/>
+              </a:rPr>
+              <a:t>20시 주문 마감</a:t>
+            </a:r>
+          </a:p>
+        </p:txBody>
+      </p:sp>
+      <p:sp>
+        <p:nvSpPr>
+          <p:cNvPr id="15" name="Rectangle 14"/>
+          <p:cNvSpPr/>
+          <p:nvPr/>
+        </p:nvSpPr>
+        <p:spPr>
+          <a:xfrm>
+            <a:off x="4079999" y="2106000"/>
+            <a:ext cx="2647199" cy="702000"/>
+          </a:xfrm>
+          <a:prstGeom prst="rect">
+            <a:avLst/>
+          </a:prstGeom>
+          <a:solidFill>
+            <a:srgbClr val="F2F2F2"/>
+          </a:solidFill>
+          <a:ln>
+            <a:noFill/>
+          </a:ln>
+          <a:effectLst/>
+        </p:spPr>
+        <p:style>
+          <a:lnRef idx="1">
+            <a:schemeClr val="accent1"/>
+          </a:lnRef>
+          <a:fillRef idx="3">
+            <a:schemeClr val="accent1"/>
+          </a:fillRef>
+          <a:effectRef idx="2">
+            <a:schemeClr val="accent1"/>
+          </a:effectRef>
+          <a:fontRef idx="minor">
+            <a:schemeClr val="lt1"/>
+          </a:fontRef>
+        </p:style>
+        <p:txBody>
+          <a:bodyPr rtlCol="0" anchor="ctr"/>
+          <a:lstStyle/>
+          <a:p>
+            <a:pPr algn="ctr"/>
+          </a:p>
+        </p:txBody>
+      </p:sp>
+      <p:sp>
+        <p:nvSpPr>
+          <p:cNvPr id="16" name="TextBox 15"/>
+          <p:cNvSpPr txBox="1"/>
+          <p:nvPr/>
+        </p:nvSpPr>
+        <p:spPr>
+          <a:xfrm>
+            <a:off x="4079999" y="2160000"/>
+            <a:ext cx="2647199" cy="144000"/>
+          </a:xfrm>
+          <a:prstGeom prst="rect">
+            <a:avLst/>
+          </a:prstGeom>
+          <a:noFill/>
+        </p:spPr>
+        <p:txBody>
+          <a:bodyPr wrap="square" anchor="t" lIns="0" rIns="0" tIns="0" bIns="0">
+            <a:spAutoFit/>
+          </a:bodyPr>
+          <a:lstStyle/>
+          <a:p>
+            <a:pPr algn="ctr"/>
+            <a:r>
+              <a:rPr sz="900" b="0">
+                <a:solidFill>
+                  <a:srgbClr val="595959"/>
+                </a:solidFill>
+                <a:latin typeface="맑은 고딕"/>
+                <a:ea typeface="맑은 고딕"/>
+                <a:cs typeface="맑은 고딕"/>
+              </a:rPr>
+              <a:t>운송·적재</a:t>
+            </a:r>
+          </a:p>
+        </p:txBody>
+      </p:sp>
+      <p:sp>
+        <p:nvSpPr>
+          <p:cNvPr id="17" name="TextBox 16"/>
+          <p:cNvSpPr txBox="1"/>
+          <p:nvPr/>
+        </p:nvSpPr>
+        <p:spPr>
+          <a:xfrm>
+            <a:off x="4079999" y="2322000"/>
+            <a:ext cx="2647199" cy="198000"/>
+          </a:xfrm>
+          <a:prstGeom prst="rect">
+            <a:avLst/>
+          </a:prstGeom>
+          <a:noFill/>
+        </p:spPr>
+        <p:txBody>
+          <a:bodyPr wrap="square" anchor="t" lIns="0" rIns="0" tIns="0" bIns="0">
+            <a:spAutoFit/>
+          </a:bodyPr>
+          <a:lstStyle/>
+          <a:p>
+            <a:pPr algn="ctr"/>
+            <a:r>
+              <a:rPr sz="1100" b="1">
                 <a:solidFill>
                   <a:srgbClr val="000000"/>
                 </a:solidFill>
@@ -3427,21 +3714,21 @@
                 <a:ea typeface="맑은 고딕"/>
                 <a:cs typeface="맑은 고딕"/>
               </a:rPr>
-              <a:t>- 사륜차로 대용량·중량 상품 즉시 배송 (약 15만 종 기반)</a:t>
-            </a:r>
-          </a:p>
-        </p:txBody>
-      </p:sp>
-      <p:sp>
-        <p:nvSpPr>
-          <p:cNvPr id="11" name="TextBox 10"/>
+              <a:t>사륜차 대용량</a:t>
+            </a:r>
+          </a:p>
+        </p:txBody>
+      </p:sp>
+      <p:sp>
+        <p:nvSpPr>
+          <p:cNvPr id="18" name="TextBox 17"/>
           <p:cNvSpPr txBox="1"/>
           <p:nvPr/>
         </p:nvSpPr>
         <p:spPr>
           <a:xfrm>
-            <a:off x="424800" y="2923199"/>
-            <a:ext cx="9057600" cy="198000"/>
+            <a:off x="4079999" y="2538000"/>
+            <a:ext cx="2647199" cy="144000"/>
           </a:xfrm>
           <a:prstGeom prst="rect">
             <a:avLst/>
@@ -3454,32 +3741,282 @@
           </a:bodyPr>
           <a:lstStyle/>
           <a:p>
-            <a:pPr algn="l"/>
-            <a:r>
-              <a:rPr sz="1200" b="1">
+            <a:pPr algn="ctr"/>
+            <a:r>
+              <a:rPr sz="900" b="0">
                 <a:solidFill>
-                  <a:srgbClr val="222222"/>
+                  <a:srgbClr val="595959"/>
                 </a:solidFill>
                 <a:latin typeface="맑은 고딕"/>
                 <a:ea typeface="맑은 고딕"/>
                 <a:cs typeface="맑은 고딕"/>
               </a:rPr>
-              <a:t>• 이마트·SSG닷컴 배송 서비스 비교</a:t>
+              <a:t>중량 상품 즉시 배송</a:t>
+            </a:r>
+          </a:p>
+        </p:txBody>
+      </p:sp>
+      <p:sp>
+        <p:nvSpPr>
+          <p:cNvPr id="19" name="Rectangle 18"/>
+          <p:cNvSpPr/>
+          <p:nvPr/>
+        </p:nvSpPr>
+        <p:spPr>
+          <a:xfrm>
+            <a:off x="6835199" y="2106000"/>
+            <a:ext cx="2647199" cy="702000"/>
+          </a:xfrm>
+          <a:prstGeom prst="rect">
+            <a:avLst/>
+          </a:prstGeom>
+          <a:solidFill>
+            <a:srgbClr val="F2F2F2"/>
+          </a:solidFill>
+          <a:ln>
+            <a:noFill/>
+          </a:ln>
+          <a:effectLst/>
+        </p:spPr>
+        <p:style>
+          <a:lnRef idx="1">
+            <a:schemeClr val="accent1"/>
+          </a:lnRef>
+          <a:fillRef idx="3">
+            <a:schemeClr val="accent1"/>
+          </a:fillRef>
+          <a:effectRef idx="2">
+            <a:schemeClr val="accent1"/>
+          </a:effectRef>
+          <a:fontRef idx="minor">
+            <a:schemeClr val="lt1"/>
+          </a:fontRef>
+        </p:style>
+        <p:txBody>
+          <a:bodyPr rtlCol="0" anchor="ctr"/>
+          <a:lstStyle/>
+          <a:p>
+            <a:pPr algn="ctr"/>
+          </a:p>
+        </p:txBody>
+      </p:sp>
+      <p:sp>
+        <p:nvSpPr>
+          <p:cNvPr id="20" name="TextBox 19"/>
+          <p:cNvSpPr txBox="1"/>
+          <p:nvPr/>
+        </p:nvSpPr>
+        <p:spPr>
+          <a:xfrm>
+            <a:off x="6835199" y="2160000"/>
+            <a:ext cx="2647199" cy="144000"/>
+          </a:xfrm>
+          <a:prstGeom prst="rect">
+            <a:avLst/>
+          </a:prstGeom>
+          <a:noFill/>
+        </p:spPr>
+        <p:txBody>
+          <a:bodyPr wrap="square" anchor="t" lIns="0" rIns="0" tIns="0" bIns="0">
+            <a:spAutoFit/>
+          </a:bodyPr>
+          <a:lstStyle/>
+          <a:p>
+            <a:pPr algn="ctr"/>
+            <a:r>
+              <a:rPr sz="900" b="0">
+                <a:solidFill>
+                  <a:srgbClr val="595959"/>
+                </a:solidFill>
+                <a:latin typeface="맑은 고딕"/>
+                <a:ea typeface="맑은 고딕"/>
+                <a:cs typeface="맑은 고딕"/>
+              </a:rPr>
+              <a:t>상품 구색</a:t>
+            </a:r>
+          </a:p>
+        </p:txBody>
+      </p:sp>
+      <p:sp>
+        <p:nvSpPr>
+          <p:cNvPr id="21" name="TextBox 20"/>
+          <p:cNvSpPr txBox="1"/>
+          <p:nvPr/>
+        </p:nvSpPr>
+        <p:spPr>
+          <a:xfrm>
+            <a:off x="6835199" y="2322000"/>
+            <a:ext cx="2647199" cy="198000"/>
+          </a:xfrm>
+          <a:prstGeom prst="rect">
+            <a:avLst/>
+          </a:prstGeom>
+          <a:noFill/>
+        </p:spPr>
+        <p:txBody>
+          <a:bodyPr wrap="square" anchor="t" lIns="0" rIns="0" tIns="0" bIns="0">
+            <a:spAutoFit/>
+          </a:bodyPr>
+          <a:lstStyle/>
+          <a:p>
+            <a:pPr algn="ctr"/>
+            <a:r>
+              <a:rPr sz="1100" b="1">
+                <a:solidFill>
+                  <a:srgbClr val="000000"/>
+                </a:solidFill>
+                <a:latin typeface="맑은 고딕"/>
+                <a:ea typeface="맑은 고딕"/>
+                <a:cs typeface="맑은 고딕"/>
+              </a:rPr>
+              <a:t>약 15만 종</a:t>
+            </a:r>
+          </a:p>
+        </p:txBody>
+      </p:sp>
+      <p:sp>
+        <p:nvSpPr>
+          <p:cNvPr id="22" name="TextBox 21"/>
+          <p:cNvSpPr txBox="1"/>
+          <p:nvPr/>
+        </p:nvSpPr>
+        <p:spPr>
+          <a:xfrm>
+            <a:off x="6835199" y="2538000"/>
+            <a:ext cx="2647199" cy="144000"/>
+          </a:xfrm>
+          <a:prstGeom prst="rect">
+            <a:avLst/>
+          </a:prstGeom>
+          <a:noFill/>
+        </p:spPr>
+        <p:txBody>
+          <a:bodyPr wrap="square" anchor="t" lIns="0" rIns="0" tIns="0" bIns="0">
+            <a:spAutoFit/>
+          </a:bodyPr>
+          <a:lstStyle/>
+          <a:p>
+            <a:pPr algn="ctr"/>
+            <a:r>
+              <a:rPr sz="900" b="0">
+                <a:solidFill>
+                  <a:srgbClr val="595959"/>
+                </a:solidFill>
+                <a:latin typeface="맑은 고딕"/>
+                <a:ea typeface="맑은 고딕"/>
+                <a:cs typeface="맑은 고딕"/>
+              </a:rPr>
+              <a:t>바로퀵 1만 · B마트 2만</a:t>
+            </a:r>
+          </a:p>
+        </p:txBody>
+      </p:sp>
+      <p:sp>
+        <p:nvSpPr>
+          <p:cNvPr id="23" name="Rectangle 22"/>
+          <p:cNvSpPr/>
+          <p:nvPr/>
+        </p:nvSpPr>
+        <p:spPr>
+          <a:xfrm>
+            <a:off x="424800" y="2916000"/>
+            <a:ext cx="792000" cy="1800000"/>
+          </a:xfrm>
+          <a:prstGeom prst="rect">
+            <a:avLst/>
+          </a:prstGeom>
+          <a:solidFill>
+            <a:srgbClr val="7F7F7F"/>
+          </a:solidFill>
+          <a:ln>
+            <a:noFill/>
+          </a:ln>
+          <a:effectLst/>
+        </p:spPr>
+        <p:style>
+          <a:lnRef idx="1">
+            <a:schemeClr val="accent1"/>
+          </a:lnRef>
+          <a:fillRef idx="3">
+            <a:schemeClr val="accent1"/>
+          </a:fillRef>
+          <a:effectRef idx="2">
+            <a:schemeClr val="accent1"/>
+          </a:effectRef>
+          <a:fontRef idx="minor">
+            <a:schemeClr val="lt1"/>
+          </a:fontRef>
+        </p:style>
+        <p:txBody>
+          <a:bodyPr rtlCol="0" anchor="ctr"/>
+          <a:lstStyle/>
+          <a:p>
+            <a:pPr algn="ctr"/>
+          </a:p>
+        </p:txBody>
+      </p:sp>
+      <p:sp>
+        <p:nvSpPr>
+          <p:cNvPr id="24" name="TextBox 23"/>
+          <p:cNvSpPr txBox="1"/>
+          <p:nvPr/>
+        </p:nvSpPr>
+        <p:spPr>
+          <a:xfrm>
+            <a:off x="424800" y="2916000"/>
+            <a:ext cx="792000" cy="1800000"/>
+          </a:xfrm>
+          <a:prstGeom prst="rect">
+            <a:avLst/>
+          </a:prstGeom>
+          <a:noFill/>
+        </p:spPr>
+        <p:txBody>
+          <a:bodyPr wrap="square" anchor="ctr" lIns="0" rIns="0" tIns="0" bIns="0">
+            <a:spAutoFit/>
+          </a:bodyPr>
+          <a:lstStyle/>
+          <a:p>
+            <a:pPr algn="ctr"/>
+            <a:r>
+              <a:rPr sz="1100" b="1">
+                <a:solidFill>
+                  <a:srgbClr val="FFFFFF"/>
+                </a:solidFill>
+                <a:latin typeface="맑은 고딕"/>
+                <a:ea typeface="맑은 고딕"/>
+                <a:cs typeface="맑은 고딕"/>
+              </a:rPr>
+              <a:t>서비스</a:t>
+            </a:r>
+          </a:p>
+          <a:p>
+            <a:pPr algn="ctr"/>
+            <a:r>
+              <a:rPr sz="1100" b="1">
+                <a:solidFill>
+                  <a:srgbClr val="FFFFFF"/>
+                </a:solidFill>
+                <a:latin typeface="맑은 고딕"/>
+                <a:ea typeface="맑은 고딕"/>
+                <a:cs typeface="맑은 고딕"/>
+              </a:rPr>
+              <a:t>체계</a:t>
             </a:r>
           </a:p>
         </p:txBody>
       </p:sp>
       <p:graphicFrame>
         <p:nvGraphicFramePr>
-          <p:cNvPr id="12" name="Table 11"/>
+          <p:cNvPr id="25" name="Table 24"/>
           <p:cNvGraphicFramePr>
             <a:graphicFrameLocks noGrp="1"/>
           </p:cNvGraphicFramePr>
           <p:nvPr/>
         </p:nvGraphicFramePr>
         <p:xfrm>
-          <a:off x="424800" y="3121200"/>
-          <a:ext cx="9057600" cy="1620000"/>
+          <a:off x="1324800" y="2916000"/>
+          <a:ext cx="8157599" cy="1800000"/>
         </p:xfrm>
         <a:graphic>
           <a:graphicData uri="http://schemas.openxmlformats.org/drawingml/2006/table">
@@ -3488,13 +4025,13 @@
                 <a:tableStyleId>{5C22544A-7EE6-4342-B048-85BDC9FD1C3A}</a:tableStyleId>
               </a:tblPr>
               <a:tblGrid>
-                <a:gridCol w="1404000"/>
-                <a:gridCol w="1908000"/>
-                <a:gridCol w="900000"/>
                 <a:gridCol w="1296000"/>
-                <a:gridCol w="3549600"/>
+                <a:gridCol w="1655999"/>
+                <a:gridCol w="864000"/>
+                <a:gridCol w="1188000"/>
+                <a:gridCol w="3153600"/>
               </a:tblGrid>
-              <a:tr h="270000">
+              <a:tr h="300000">
                 <a:tc>
                   <a:txBody>
                     <a:bodyPr wrap="square"/>
@@ -3721,7 +4258,7 @@
                   </a:tcPr>
                 </a:tc>
               </a:tr>
-              <a:tr h="270000">
+              <a:tr h="300000">
                 <a:tc>
                   <a:txBody>
                     <a:bodyPr wrap="square"/>
@@ -3948,7 +4485,7 @@
                   </a:tcPr>
                 </a:tc>
               </a:tr>
-              <a:tr h="270000">
+              <a:tr h="300000">
                 <a:tc>
                   <a:txBody>
                     <a:bodyPr wrap="square"/>
@@ -4175,7 +4712,7 @@
                   </a:tcPr>
                 </a:tc>
               </a:tr>
-              <a:tr h="270000">
+              <a:tr h="300000">
                 <a:tc>
                   <a:txBody>
                     <a:bodyPr wrap="square"/>
@@ -4402,7 +4939,7 @@
                   </a:tcPr>
                 </a:tc>
               </a:tr>
-              <a:tr h="270000">
+              <a:tr h="300000">
                 <a:tc>
                   <a:txBody>
                     <a:bodyPr wrap="square"/>
@@ -4629,7 +5166,7 @@
                   </a:tcPr>
                 </a:tc>
               </a:tr>
-              <a:tr h="270000">
+              <a:tr h="300000">
                 <a:tc>
                   <a:txBody>
                     <a:bodyPr wrap="square"/>
@@ -4862,14 +5399,58 @@
       </p:graphicFrame>
       <p:sp>
         <p:nvSpPr>
-          <p:cNvPr id="13" name="TextBox 12"/>
+          <p:cNvPr id="26" name="Rectangle 25"/>
+          <p:cNvSpPr/>
+          <p:nvPr/>
+        </p:nvSpPr>
+        <p:spPr>
+          <a:xfrm>
+            <a:off x="424800" y="4823999"/>
+            <a:ext cx="792000" cy="702000"/>
+          </a:xfrm>
+          <a:prstGeom prst="rect">
+            <a:avLst/>
+          </a:prstGeom>
+          <a:solidFill>
+            <a:srgbClr val="7F7F7F"/>
+          </a:solidFill>
+          <a:ln>
+            <a:noFill/>
+          </a:ln>
+          <a:effectLst/>
+        </p:spPr>
+        <p:style>
+          <a:lnRef idx="1">
+            <a:schemeClr val="accent1"/>
+          </a:lnRef>
+          <a:fillRef idx="3">
+            <a:schemeClr val="accent1"/>
+          </a:fillRef>
+          <a:effectRef idx="2">
+            <a:schemeClr val="accent1"/>
+          </a:effectRef>
+          <a:fontRef idx="minor">
+            <a:schemeClr val="lt1"/>
+          </a:fontRef>
+        </p:style>
+        <p:txBody>
+          <a:bodyPr rtlCol="0" anchor="ctr"/>
+          <a:lstStyle/>
+          <a:p>
+            <a:pPr algn="ctr"/>
+          </a:p>
+        </p:txBody>
+      </p:sp>
+      <p:sp>
+        <p:nvSpPr>
+          <p:cNvPr id="27" name="TextBox 26"/>
           <p:cNvSpPr txBox="1"/>
           <p:nvPr/>
         </p:nvSpPr>
         <p:spPr>
           <a:xfrm>
-            <a:off x="424800" y="4921199"/>
-            <a:ext cx="4410000" cy="198000"/>
+            <a:off x="424800" y="4823999"/>
+            <a:ext cx="792000" cy="702000"/>
           </a:xfrm>
           <a:prstGeom prst="rect">
             <a:avLst/>
@@ -4877,611 +5458,80 @@
           <a:noFill/>
         </p:spPr>
         <p:txBody>
-          <a:bodyPr wrap="square" anchor="t" lIns="0" rIns="0" tIns="0" bIns="0">
+          <a:bodyPr wrap="square" anchor="ctr" lIns="0" rIns="0" tIns="0" bIns="0">
             <a:spAutoFit/>
           </a:bodyPr>
           <a:lstStyle/>
           <a:p>
-            <a:pPr algn="l"/>
-            <a:r>
-              <a:rPr sz="1200" b="1">
+            <a:pPr algn="ctr"/>
+            <a:r>
+              <a:rPr sz="1100" b="1">
                 <a:solidFill>
-                  <a:srgbClr val="222222"/>
+                  <a:srgbClr val="FFFFFF"/>
                 </a:solidFill>
                 <a:latin typeface="맑은 고딕"/>
                 <a:ea typeface="맑은 고딕"/>
                 <a:cs typeface="맑은 고딕"/>
               </a:rPr>
-              <a:t>• 취급 품목 수 비교</a:t>
-            </a:r>
-          </a:p>
-        </p:txBody>
-      </p:sp>
-      <p:graphicFrame>
-        <p:nvGraphicFramePr>
-          <p:cNvPr id="14" name="Table 13"/>
-          <p:cNvGraphicFramePr>
-            <a:graphicFrameLocks noGrp="1"/>
-          </p:cNvGraphicFramePr>
+              <a:t>로드맵</a:t>
+            </a:r>
+          </a:p>
+        </p:txBody>
+      </p:sp>
+      <p:sp>
+        <p:nvSpPr>
+          <p:cNvPr id="28" name="Rectangle 27"/>
+          <p:cNvSpPr/>
           <p:nvPr/>
-        </p:nvGraphicFramePr>
-        <p:xfrm>
-          <a:off x="424800" y="5119200"/>
-          <a:ext cx="4410000" cy="936000"/>
-        </p:xfrm>
-        <a:graphic>
-          <a:graphicData uri="http://schemas.openxmlformats.org/drawingml/2006/table">
-            <a:tbl>
-              <a:tblPr>
-                <a:tableStyleId>{5C22544A-7EE6-4342-B048-85BDC9FD1C3A}</a:tableStyleId>
-              </a:tblPr>
-              <a:tblGrid>
-                <a:gridCol w="1260000"/>
-                <a:gridCol w="1296000"/>
-                <a:gridCol w="1854000"/>
-              </a:tblGrid>
-              <a:tr h="234000">
-                <a:tc>
-                  <a:txBody>
-                    <a:bodyPr wrap="square"/>
-                    <a:lstStyle/>
-                    <a:p>
-                      <a:pPr algn="ctr"/>
-                      <a:r>
-                        <a:rPr sz="1000" b="1">
-                          <a:solidFill>
-                            <a:srgbClr val="000066"/>
-                          </a:solidFill>
-                          <a:latin typeface="맑은 고딕"/>
-                          <a:ea typeface="맑은 고딕"/>
-                          <a:cs typeface="맑은 고딕"/>
-                        </a:rPr>
-                        <a:t>구분</a:t>
-                      </a:r>
-                    </a:p>
-                  </a:txBody>
-                  <a:tcPr anchor="ctr" marL="36000" marR="36000" marT="0" marB="0">
-                    <a:lnL w="9525" cap="flat">
-                      <a:solidFill>
-                        <a:srgbClr val="BFBFBF"/>
-                      </a:solidFill>
-                    </a:lnL>
-                    <a:lnR w="9525" cap="flat">
-                      <a:solidFill>
-                        <a:srgbClr val="BFBFBF"/>
-                      </a:solidFill>
-                    </a:lnR>
-                    <a:lnT w="9525" cap="flat">
-                      <a:solidFill>
-                        <a:srgbClr val="BFBFBF"/>
-                      </a:solidFill>
-                    </a:lnT>
-                    <a:lnB w="9525" cap="flat">
-                      <a:solidFill>
-                        <a:srgbClr val="BFBFBF"/>
-                      </a:solidFill>
-                    </a:lnB>
-                    <a:solidFill>
-                      <a:srgbClr val="D8E0EC"/>
-                    </a:solidFill>
-                  </a:tcPr>
-                </a:tc>
-                <a:tc>
-                  <a:txBody>
-                    <a:bodyPr wrap="square"/>
-                    <a:lstStyle/>
-                    <a:p>
-                      <a:pPr algn="ctr"/>
-                      <a:r>
-                        <a:rPr sz="1000" b="1">
-                          <a:solidFill>
-                            <a:srgbClr val="000066"/>
-                          </a:solidFill>
-                          <a:latin typeface="맑은 고딕"/>
-                          <a:ea typeface="맑은 고딕"/>
-                          <a:cs typeface="맑은 고딕"/>
-                        </a:rPr>
-                        <a:t>품목 수</a:t>
-                      </a:r>
-                    </a:p>
-                  </a:txBody>
-                  <a:tcPr anchor="ctr" marL="36000" marR="36000" marT="0" marB="0">
-                    <a:lnL w="9525" cap="flat">
-                      <a:solidFill>
-                        <a:srgbClr val="BFBFBF"/>
-                      </a:solidFill>
-                    </a:lnL>
-                    <a:lnR w="9525" cap="flat">
-                      <a:solidFill>
-                        <a:srgbClr val="BFBFBF"/>
-                      </a:solidFill>
-                    </a:lnR>
-                    <a:lnT w="9525" cap="flat">
-                      <a:solidFill>
-                        <a:srgbClr val="BFBFBF"/>
-                      </a:solidFill>
-                    </a:lnT>
-                    <a:lnB w="9525" cap="flat">
-                      <a:solidFill>
-                        <a:srgbClr val="BFBFBF"/>
-                      </a:solidFill>
-                    </a:lnB>
-                    <a:solidFill>
-                      <a:srgbClr val="D8E0EC"/>
-                    </a:solidFill>
-                  </a:tcPr>
-                </a:tc>
-                <a:tc>
-                  <a:txBody>
-                    <a:bodyPr wrap="square"/>
-                    <a:lstStyle/>
-                    <a:p>
-                      <a:pPr algn="ctr"/>
-                      <a:r>
-                        <a:rPr sz="1000" b="1">
-                          <a:solidFill>
-                            <a:srgbClr val="000066"/>
-                          </a:solidFill>
-                          <a:latin typeface="맑은 고딕"/>
-                          <a:ea typeface="맑은 고딕"/>
-                          <a:cs typeface="맑은 고딕"/>
-                        </a:rPr>
-                        <a:t>비고</a:t>
-                      </a:r>
-                    </a:p>
-                  </a:txBody>
-                  <a:tcPr anchor="ctr" marL="36000" marR="36000" marT="0" marB="0">
-                    <a:lnL w="9525" cap="flat">
-                      <a:solidFill>
-                        <a:srgbClr val="BFBFBF"/>
-                      </a:solidFill>
-                    </a:lnL>
-                    <a:lnR w="9525" cap="flat">
-                      <a:solidFill>
-                        <a:srgbClr val="BFBFBF"/>
-                      </a:solidFill>
-                    </a:lnR>
-                    <a:lnT w="9525" cap="flat">
-                      <a:solidFill>
-                        <a:srgbClr val="BFBFBF"/>
-                      </a:solidFill>
-                    </a:lnT>
-                    <a:lnB w="9525" cap="flat">
-                      <a:solidFill>
-                        <a:srgbClr val="BFBFBF"/>
-                      </a:solidFill>
-                    </a:lnB>
-                    <a:solidFill>
-                      <a:srgbClr val="D8E0EC"/>
-                    </a:solidFill>
-                  </a:tcPr>
-                </a:tc>
-              </a:tr>
-              <a:tr h="234000">
-                <a:tc>
-                  <a:txBody>
-                    <a:bodyPr wrap="square"/>
-                    <a:lstStyle/>
-                    <a:p>
-                      <a:pPr algn="ctr"/>
-                      <a:r>
-                        <a:rPr sz="1000" b="1">
-                          <a:solidFill>
-                            <a:srgbClr val="000000"/>
-                          </a:solidFill>
-                          <a:latin typeface="맑은 고딕"/>
-                          <a:ea typeface="맑은 고딕"/>
-                          <a:cs typeface="맑은 고딕"/>
-                        </a:rPr>
-                        <a:t>이마트 점포</a:t>
-                      </a:r>
-                    </a:p>
-                  </a:txBody>
-                  <a:tcPr anchor="ctr" marL="36000" marR="36000" marT="0" marB="0">
-                    <a:lnL w="9525" cap="flat">
-                      <a:solidFill>
-                        <a:srgbClr val="BFBFBF"/>
-                      </a:solidFill>
-                    </a:lnL>
-                    <a:lnR w="9525" cap="flat">
-                      <a:solidFill>
-                        <a:srgbClr val="BFBFBF"/>
-                      </a:solidFill>
-                    </a:lnR>
-                    <a:lnT w="9525" cap="flat">
-                      <a:solidFill>
-                        <a:srgbClr val="BFBFBF"/>
-                      </a:solidFill>
-                    </a:lnT>
-                    <a:lnB w="9525" cap="flat">
-                      <a:solidFill>
-                        <a:srgbClr val="BFBFBF"/>
-                      </a:solidFill>
-                    </a:lnB>
-                    <a:solidFill>
-                      <a:srgbClr val="FFFFFF"/>
-                    </a:solidFill>
-                  </a:tcPr>
-                </a:tc>
-                <a:tc>
-                  <a:txBody>
-                    <a:bodyPr wrap="square"/>
-                    <a:lstStyle/>
-                    <a:p>
-                      <a:pPr algn="r"/>
-                      <a:r>
-                        <a:rPr sz="1000" b="0">
-                          <a:solidFill>
-                            <a:srgbClr val="000000"/>
-                          </a:solidFill>
-                          <a:latin typeface="맑은 고딕"/>
-                          <a:ea typeface="맑은 고딕"/>
-                          <a:cs typeface="맑은 고딕"/>
-                        </a:rPr>
-                        <a:t>약 150,000</a:t>
-                      </a:r>
-                    </a:p>
-                  </a:txBody>
-                  <a:tcPr anchor="ctr" marL="36000" marR="36000" marT="0" marB="0">
-                    <a:lnL w="9525" cap="flat">
-                      <a:solidFill>
-                        <a:srgbClr val="BFBFBF"/>
-                      </a:solidFill>
-                    </a:lnL>
-                    <a:lnR w="9525" cap="flat">
-                      <a:solidFill>
-                        <a:srgbClr val="BFBFBF"/>
-                      </a:solidFill>
-                    </a:lnR>
-                    <a:lnT w="9525" cap="flat">
-                      <a:solidFill>
-                        <a:srgbClr val="BFBFBF"/>
-                      </a:solidFill>
-                    </a:lnT>
-                    <a:lnB w="9525" cap="flat">
-                      <a:solidFill>
-                        <a:srgbClr val="BFBFBF"/>
-                      </a:solidFill>
-                    </a:lnB>
-                    <a:solidFill>
-                      <a:srgbClr val="FFFFFF"/>
-                    </a:solidFill>
-                  </a:tcPr>
-                </a:tc>
-                <a:tc>
-                  <a:txBody>
-                    <a:bodyPr wrap="square"/>
-                    <a:lstStyle/>
-                    <a:p>
-                      <a:pPr algn="ctr"/>
-                      <a:r>
-                        <a:rPr sz="1000" b="0">
-                          <a:solidFill>
-                            <a:srgbClr val="000000"/>
-                          </a:solidFill>
-                          <a:latin typeface="맑은 고딕"/>
-                          <a:ea typeface="맑은 고딕"/>
-                          <a:cs typeface="맑은 고딕"/>
-                        </a:rPr>
-                        <a:t>2시간 배송 기반</a:t>
-                      </a:r>
-                    </a:p>
-                  </a:txBody>
-                  <a:tcPr anchor="ctr" marL="36000" marR="36000" marT="0" marB="0">
-                    <a:lnL w="9525" cap="flat">
-                      <a:solidFill>
-                        <a:srgbClr val="BFBFBF"/>
-                      </a:solidFill>
-                    </a:lnL>
-                    <a:lnR w="9525" cap="flat">
-                      <a:solidFill>
-                        <a:srgbClr val="BFBFBF"/>
-                      </a:solidFill>
-                    </a:lnR>
-                    <a:lnT w="9525" cap="flat">
-                      <a:solidFill>
-                        <a:srgbClr val="BFBFBF"/>
-                      </a:solidFill>
-                    </a:lnT>
-                    <a:lnB w="9525" cap="flat">
-                      <a:solidFill>
-                        <a:srgbClr val="BFBFBF"/>
-                      </a:solidFill>
-                    </a:lnB>
-                    <a:solidFill>
-                      <a:srgbClr val="FFFFFF"/>
-                    </a:solidFill>
-                  </a:tcPr>
-                </a:tc>
-              </a:tr>
-              <a:tr h="234000">
-                <a:tc>
-                  <a:txBody>
-                    <a:bodyPr wrap="square"/>
-                    <a:lstStyle/>
-                    <a:p>
-                      <a:pPr algn="ctr"/>
-                      <a:r>
-                        <a:rPr sz="1000" b="1">
-                          <a:solidFill>
-                            <a:srgbClr val="000000"/>
-                          </a:solidFill>
-                          <a:latin typeface="맑은 고딕"/>
-                          <a:ea typeface="맑은 고딕"/>
-                          <a:cs typeface="맑은 고딕"/>
-                        </a:rPr>
-                        <a:t>바로퀵</a:t>
-                      </a:r>
-                    </a:p>
-                  </a:txBody>
-                  <a:tcPr anchor="ctr" marL="36000" marR="36000" marT="0" marB="0">
-                    <a:lnL w="9525" cap="flat">
-                      <a:solidFill>
-                        <a:srgbClr val="BFBFBF"/>
-                      </a:solidFill>
-                    </a:lnL>
-                    <a:lnR w="9525" cap="flat">
-                      <a:solidFill>
-                        <a:srgbClr val="BFBFBF"/>
-                      </a:solidFill>
-                    </a:lnR>
-                    <a:lnT w="9525" cap="flat">
-                      <a:solidFill>
-                        <a:srgbClr val="BFBFBF"/>
-                      </a:solidFill>
-                    </a:lnT>
-                    <a:lnB w="9525" cap="flat">
-                      <a:solidFill>
-                        <a:srgbClr val="BFBFBF"/>
-                      </a:solidFill>
-                    </a:lnB>
-                    <a:solidFill>
-                      <a:srgbClr val="FFFFFF"/>
-                    </a:solidFill>
-                  </a:tcPr>
-                </a:tc>
-                <a:tc>
-                  <a:txBody>
-                    <a:bodyPr wrap="square"/>
-                    <a:lstStyle/>
-                    <a:p>
-                      <a:pPr algn="r"/>
-                      <a:r>
-                        <a:rPr sz="1000" b="0">
-                          <a:solidFill>
-                            <a:srgbClr val="000000"/>
-                          </a:solidFill>
-                          <a:latin typeface="맑은 고딕"/>
-                          <a:ea typeface="맑은 고딕"/>
-                          <a:cs typeface="맑은 고딕"/>
-                        </a:rPr>
-                        <a:t>약 10,000</a:t>
-                      </a:r>
-                    </a:p>
-                  </a:txBody>
-                  <a:tcPr anchor="ctr" marL="36000" marR="36000" marT="0" marB="0">
-                    <a:lnL w="9525" cap="flat">
-                      <a:solidFill>
-                        <a:srgbClr val="BFBFBF"/>
-                      </a:solidFill>
-                    </a:lnL>
-                    <a:lnR w="9525" cap="flat">
-                      <a:solidFill>
-                        <a:srgbClr val="BFBFBF"/>
-                      </a:solidFill>
-                    </a:lnR>
-                    <a:lnT w="9525" cap="flat">
-                      <a:solidFill>
-                        <a:srgbClr val="BFBFBF"/>
-                      </a:solidFill>
-                    </a:lnT>
-                    <a:lnB w="9525" cap="flat">
-                      <a:solidFill>
-                        <a:srgbClr val="BFBFBF"/>
-                      </a:solidFill>
-                    </a:lnB>
-                    <a:solidFill>
-                      <a:srgbClr val="FFFFFF"/>
-                    </a:solidFill>
-                  </a:tcPr>
-                </a:tc>
-                <a:tc>
-                  <a:txBody>
-                    <a:bodyPr wrap="square"/>
-                    <a:lstStyle/>
-                    <a:p>
-                      <a:pPr algn="ctr"/>
-                      <a:r>
-                        <a:rPr sz="1000" b="0">
-                          <a:solidFill>
-                            <a:srgbClr val="000000"/>
-                          </a:solidFill>
-                          <a:latin typeface="맑은 고딕"/>
-                          <a:ea typeface="맑은 고딕"/>
-                          <a:cs typeface="맑은 고딕"/>
-                        </a:rPr>
-                        <a:t>이륜차 적재 한계</a:t>
-                      </a:r>
-                    </a:p>
-                  </a:txBody>
-                  <a:tcPr anchor="ctr" marL="36000" marR="36000" marT="0" marB="0">
-                    <a:lnL w="9525" cap="flat">
-                      <a:solidFill>
-                        <a:srgbClr val="BFBFBF"/>
-                      </a:solidFill>
-                    </a:lnL>
-                    <a:lnR w="9525" cap="flat">
-                      <a:solidFill>
-                        <a:srgbClr val="BFBFBF"/>
-                      </a:solidFill>
-                    </a:lnR>
-                    <a:lnT w="9525" cap="flat">
-                      <a:solidFill>
-                        <a:srgbClr val="BFBFBF"/>
-                      </a:solidFill>
-                    </a:lnT>
-                    <a:lnB w="9525" cap="flat">
-                      <a:solidFill>
-                        <a:srgbClr val="BFBFBF"/>
-                      </a:solidFill>
-                    </a:lnB>
-                    <a:solidFill>
-                      <a:srgbClr val="FFFFFF"/>
-                    </a:solidFill>
-                  </a:tcPr>
-                </a:tc>
-              </a:tr>
-              <a:tr h="234000">
-                <a:tc>
-                  <a:txBody>
-                    <a:bodyPr wrap="square"/>
-                    <a:lstStyle/>
-                    <a:p>
-                      <a:pPr algn="ctr"/>
-                      <a:r>
-                        <a:rPr sz="1000" b="1">
-                          <a:solidFill>
-                            <a:srgbClr val="000000"/>
-                          </a:solidFill>
-                          <a:latin typeface="맑은 고딕"/>
-                          <a:ea typeface="맑은 고딕"/>
-                          <a:cs typeface="맑은 고딕"/>
-                        </a:rPr>
-                        <a:t>B마트</a:t>
-                      </a:r>
-                    </a:p>
-                  </a:txBody>
-                  <a:tcPr anchor="ctr" marL="36000" marR="36000" marT="0" marB="0">
-                    <a:lnL w="9525" cap="flat">
-                      <a:solidFill>
-                        <a:srgbClr val="BFBFBF"/>
-                      </a:solidFill>
-                    </a:lnL>
-                    <a:lnR w="9525" cap="flat">
-                      <a:solidFill>
-                        <a:srgbClr val="BFBFBF"/>
-                      </a:solidFill>
-                    </a:lnR>
-                    <a:lnT w="9525" cap="flat">
-                      <a:solidFill>
-                        <a:srgbClr val="BFBFBF"/>
-                      </a:solidFill>
-                    </a:lnT>
-                    <a:lnB w="9525" cap="flat">
-                      <a:solidFill>
-                        <a:srgbClr val="BFBFBF"/>
-                      </a:solidFill>
-                    </a:lnB>
-                    <a:solidFill>
-                      <a:srgbClr val="FFFFFF"/>
-                    </a:solidFill>
-                  </a:tcPr>
-                </a:tc>
-                <a:tc>
-                  <a:txBody>
-                    <a:bodyPr wrap="square"/>
-                    <a:lstStyle/>
-                    <a:p>
-                      <a:pPr algn="r"/>
-                      <a:r>
-                        <a:rPr sz="1000" b="0">
-                          <a:solidFill>
-                            <a:srgbClr val="000000"/>
-                          </a:solidFill>
-                          <a:latin typeface="맑은 고딕"/>
-                          <a:ea typeface="맑은 고딕"/>
-                          <a:cs typeface="맑은 고딕"/>
-                        </a:rPr>
-                        <a:t>약 20,000</a:t>
-                      </a:r>
-                    </a:p>
-                  </a:txBody>
-                  <a:tcPr anchor="ctr" marL="36000" marR="36000" marT="0" marB="0">
-                    <a:lnL w="9525" cap="flat">
-                      <a:solidFill>
-                        <a:srgbClr val="BFBFBF"/>
-                      </a:solidFill>
-                    </a:lnL>
-                    <a:lnR w="9525" cap="flat">
-                      <a:solidFill>
-                        <a:srgbClr val="BFBFBF"/>
-                      </a:solidFill>
-                    </a:lnR>
-                    <a:lnT w="9525" cap="flat">
-                      <a:solidFill>
-                        <a:srgbClr val="BFBFBF"/>
-                      </a:solidFill>
-                    </a:lnT>
-                    <a:lnB w="9525" cap="flat">
-                      <a:solidFill>
-                        <a:srgbClr val="BFBFBF"/>
-                      </a:solidFill>
-                    </a:lnB>
-                    <a:solidFill>
-                      <a:srgbClr val="FFFFFF"/>
-                    </a:solidFill>
-                  </a:tcPr>
-                </a:tc>
-                <a:tc>
-                  <a:txBody>
-                    <a:bodyPr wrap="square"/>
-                    <a:lstStyle/>
-                    <a:p>
-                      <a:pPr algn="ctr"/>
-                      <a:r>
-                        <a:rPr sz="1000" b="0">
-                          <a:solidFill>
-                            <a:srgbClr val="000000"/>
-                          </a:solidFill>
-                          <a:latin typeface="맑은 고딕"/>
-                          <a:ea typeface="맑은 고딕"/>
-                          <a:cs typeface="맑은 고딕"/>
-                        </a:rPr>
-                        <a:t>퀵커머스 1위</a:t>
-                      </a:r>
-                    </a:p>
-                  </a:txBody>
-                  <a:tcPr anchor="ctr" marL="36000" marR="36000" marT="0" marB="0">
-                    <a:lnL w="9525" cap="flat">
-                      <a:solidFill>
-                        <a:srgbClr val="BFBFBF"/>
-                      </a:solidFill>
-                    </a:lnL>
-                    <a:lnR w="9525" cap="flat">
-                      <a:solidFill>
-                        <a:srgbClr val="BFBFBF"/>
-                      </a:solidFill>
-                    </a:lnR>
-                    <a:lnT w="9525" cap="flat">
-                      <a:solidFill>
-                        <a:srgbClr val="BFBFBF"/>
-                      </a:solidFill>
-                    </a:lnT>
-                    <a:lnB w="9525" cap="flat">
-                      <a:solidFill>
-                        <a:srgbClr val="BFBFBF"/>
-                      </a:solidFill>
-                    </a:lnB>
-                    <a:solidFill>
-                      <a:srgbClr val="FFFFFF"/>
-                    </a:solidFill>
-                  </a:tcPr>
-                </a:tc>
-              </a:tr>
-            </a:tbl>
-          </a:graphicData>
-        </a:graphic>
-      </p:graphicFrame>
-      <p:sp>
-        <p:nvSpPr>
-          <p:cNvPr id="15" name="TextBox 14"/>
+        </p:nvSpPr>
+        <p:spPr>
+          <a:xfrm>
+            <a:off x="1324800" y="4823999"/>
+            <a:ext cx="1958400" cy="702000"/>
+          </a:xfrm>
+          <a:prstGeom prst="rect">
+            <a:avLst/>
+          </a:prstGeom>
+          <a:solidFill>
+            <a:srgbClr val="000066"/>
+          </a:solidFill>
+          <a:ln>
+            <a:noFill/>
+          </a:ln>
+          <a:effectLst/>
+        </p:spPr>
+        <p:style>
+          <a:lnRef idx="1">
+            <a:schemeClr val="accent1"/>
+          </a:lnRef>
+          <a:fillRef idx="3">
+            <a:schemeClr val="accent1"/>
+          </a:fillRef>
+          <a:effectRef idx="2">
+            <a:schemeClr val="accent1"/>
+          </a:effectRef>
+          <a:fontRef idx="minor">
+            <a:schemeClr val="lt1"/>
+          </a:fontRef>
+        </p:style>
+        <p:txBody>
+          <a:bodyPr rtlCol="0" anchor="ctr"/>
+          <a:lstStyle/>
+          <a:p>
+            <a:pPr algn="ctr"/>
+          </a:p>
+        </p:txBody>
+      </p:sp>
+      <p:sp>
+        <p:nvSpPr>
+          <p:cNvPr id="29" name="TextBox 28"/>
           <p:cNvSpPr txBox="1"/>
           <p:nvPr/>
         </p:nvSpPr>
         <p:spPr>
           <a:xfrm>
-            <a:off x="5072400" y="4921199"/>
-            <a:ext cx="4410000" cy="198000"/>
+            <a:off x="1324800" y="4878000"/>
+            <a:ext cx="1958400" cy="144000"/>
           </a:xfrm>
           <a:prstGeom prst="rect">
             <a:avLst/>
@@ -5494,424 +5544,569 @@
           </a:bodyPr>
           <a:lstStyle/>
           <a:p>
-            <a:pPr algn="l"/>
-            <a:r>
-              <a:rPr sz="1200" b="1">
+            <a:pPr algn="ctr"/>
+            <a:r>
+              <a:rPr sz="900" b="0">
                 <a:solidFill>
-                  <a:srgbClr val="222222"/>
+                  <a:srgbClr val="FFFFFF"/>
                 </a:solidFill>
                 <a:latin typeface="맑은 고딕"/>
                 <a:ea typeface="맑은 고딕"/>
                 <a:cs typeface="맑은 고딕"/>
               </a:rPr>
-              <a:t>• 확대 로드맵</a:t>
-            </a:r>
-          </a:p>
-        </p:txBody>
-      </p:sp>
-      <p:graphicFrame>
-        <p:nvGraphicFramePr>
-          <p:cNvPr id="16" name="Table 15"/>
-          <p:cNvGraphicFramePr>
-            <a:graphicFrameLocks noGrp="1"/>
-          </p:cNvGraphicFramePr>
-          <p:nvPr/>
-        </p:nvGraphicFramePr>
-        <p:xfrm>
-          <a:off x="5072400" y="5119200"/>
-          <a:ext cx="4410000" cy="936000"/>
-        </p:xfrm>
-        <a:graphic>
-          <a:graphicData uri="http://schemas.openxmlformats.org/drawingml/2006/table">
-            <a:tbl>
-              <a:tblPr>
-                <a:tableStyleId>{5C22544A-7EE6-4342-B048-85BDC9FD1C3A}</a:tableStyleId>
-              </a:tblPr>
-              <a:tblGrid>
-                <a:gridCol w="1404000"/>
-                <a:gridCol w="3006000"/>
-              </a:tblGrid>
-              <a:tr h="234000">
-                <a:tc>
-                  <a:txBody>
-                    <a:bodyPr wrap="square"/>
-                    <a:lstStyle/>
-                    <a:p>
-                      <a:pPr algn="ctr"/>
-                      <a:r>
-                        <a:rPr sz="1000" b="1">
-                          <a:solidFill>
-                            <a:srgbClr val="000066"/>
-                          </a:solidFill>
-                          <a:latin typeface="맑은 고딕"/>
-                          <a:ea typeface="맑은 고딕"/>
-                          <a:cs typeface="맑은 고딕"/>
-                        </a:rPr>
-                        <a:t>시기</a:t>
-                      </a:r>
-                    </a:p>
-                  </a:txBody>
-                  <a:tcPr anchor="ctr" marL="36000" marR="36000" marT="0" marB="0">
-                    <a:lnL w="9525" cap="flat">
-                      <a:solidFill>
-                        <a:srgbClr val="BFBFBF"/>
-                      </a:solidFill>
-                    </a:lnL>
-                    <a:lnR w="9525" cap="flat">
-                      <a:solidFill>
-                        <a:srgbClr val="BFBFBF"/>
-                      </a:solidFill>
-                    </a:lnR>
-                    <a:lnT w="9525" cap="flat">
-                      <a:solidFill>
-                        <a:srgbClr val="BFBFBF"/>
-                      </a:solidFill>
-                    </a:lnT>
-                    <a:lnB w="9525" cap="flat">
-                      <a:solidFill>
-                        <a:srgbClr val="BFBFBF"/>
-                      </a:solidFill>
-                    </a:lnB>
-                    <a:solidFill>
-                      <a:srgbClr val="D8E0EC"/>
-                    </a:solidFill>
-                  </a:tcPr>
-                </a:tc>
-                <a:tc>
-                  <a:txBody>
-                    <a:bodyPr wrap="square"/>
-                    <a:lstStyle/>
-                    <a:p>
-                      <a:pPr algn="ctr"/>
-                      <a:r>
-                        <a:rPr sz="1000" b="1">
-                          <a:solidFill>
-                            <a:srgbClr val="000066"/>
-                          </a:solidFill>
-                          <a:latin typeface="맑은 고딕"/>
-                          <a:ea typeface="맑은 고딕"/>
-                          <a:cs typeface="맑은 고딕"/>
-                        </a:rPr>
-                        <a:t>계획</a:t>
-                      </a:r>
-                    </a:p>
-                  </a:txBody>
-                  <a:tcPr anchor="ctr" marL="36000" marR="36000" marT="0" marB="0">
-                    <a:lnL w="9525" cap="flat">
-                      <a:solidFill>
-                        <a:srgbClr val="BFBFBF"/>
-                      </a:solidFill>
-                    </a:lnL>
-                    <a:lnR w="9525" cap="flat">
-                      <a:solidFill>
-                        <a:srgbClr val="BFBFBF"/>
-                      </a:solidFill>
-                    </a:lnR>
-                    <a:lnT w="9525" cap="flat">
-                      <a:solidFill>
-                        <a:srgbClr val="BFBFBF"/>
-                      </a:solidFill>
-                    </a:lnT>
-                    <a:lnB w="9525" cap="flat">
-                      <a:solidFill>
-                        <a:srgbClr val="BFBFBF"/>
-                      </a:solidFill>
-                    </a:lnB>
-                    <a:solidFill>
-                      <a:srgbClr val="D8E0EC"/>
-                    </a:solidFill>
-                  </a:tcPr>
-                </a:tc>
-              </a:tr>
-              <a:tr h="234000">
-                <a:tc>
-                  <a:txBody>
-                    <a:bodyPr wrap="square"/>
-                    <a:lstStyle/>
-                    <a:p>
-                      <a:pPr algn="ctr"/>
-                      <a:r>
-                        <a:rPr sz="1000" b="1">
-                          <a:solidFill>
-                            <a:srgbClr val="000000"/>
-                          </a:solidFill>
-                          <a:latin typeface="맑은 고딕"/>
-                          <a:ea typeface="맑은 고딕"/>
-                          <a:cs typeface="맑은 고딕"/>
-                        </a:rPr>
-                        <a:t>'26. 7월</a:t>
-                      </a:r>
-                    </a:p>
-                  </a:txBody>
-                  <a:tcPr anchor="ctr" marL="36000" marR="36000" marT="0" marB="0">
-                    <a:lnL w="9525" cap="flat">
-                      <a:solidFill>
-                        <a:srgbClr val="BFBFBF"/>
-                      </a:solidFill>
-                    </a:lnL>
-                    <a:lnR w="9525" cap="flat">
-                      <a:solidFill>
-                        <a:srgbClr val="BFBFBF"/>
-                      </a:solidFill>
-                    </a:lnR>
-                    <a:lnT w="9525" cap="flat">
-                      <a:solidFill>
-                        <a:srgbClr val="BFBFBF"/>
-                      </a:solidFill>
-                    </a:lnT>
-                    <a:lnB w="9525" cap="flat">
-                      <a:solidFill>
-                        <a:srgbClr val="BFBFBF"/>
-                      </a:solidFill>
-                    </a:lnB>
-                    <a:solidFill>
-                      <a:srgbClr val="FFFFFF"/>
-                    </a:solidFill>
-                  </a:tcPr>
-                </a:tc>
-                <a:tc>
-                  <a:txBody>
-                    <a:bodyPr wrap="square"/>
-                    <a:lstStyle/>
-                    <a:p>
-                      <a:pPr algn="ctr"/>
-                      <a:r>
-                        <a:rPr sz="1000" b="0">
-                          <a:solidFill>
-                            <a:srgbClr val="000000"/>
-                          </a:solidFill>
-                          <a:latin typeface="맑은 고딕"/>
-                          <a:ea typeface="맑은 고딕"/>
-                          <a:cs typeface="맑은 고딕"/>
-                        </a:rPr>
-                        <a:t>양재·하남점 시범 운영</a:t>
-                      </a:r>
-                    </a:p>
-                  </a:txBody>
-                  <a:tcPr anchor="ctr" marL="36000" marR="36000" marT="0" marB="0">
-                    <a:lnL w="9525" cap="flat">
-                      <a:solidFill>
-                        <a:srgbClr val="BFBFBF"/>
-                      </a:solidFill>
-                    </a:lnL>
-                    <a:lnR w="9525" cap="flat">
-                      <a:solidFill>
-                        <a:srgbClr val="BFBFBF"/>
-                      </a:solidFill>
-                    </a:lnR>
-                    <a:lnT w="9525" cap="flat">
-                      <a:solidFill>
-                        <a:srgbClr val="BFBFBF"/>
-                      </a:solidFill>
-                    </a:lnT>
-                    <a:lnB w="9525" cap="flat">
-                      <a:solidFill>
-                        <a:srgbClr val="BFBFBF"/>
-                      </a:solidFill>
-                    </a:lnB>
-                    <a:solidFill>
-                      <a:srgbClr val="FFFFFF"/>
-                    </a:solidFill>
-                  </a:tcPr>
-                </a:tc>
-              </a:tr>
-              <a:tr h="234000">
-                <a:tc>
-                  <a:txBody>
-                    <a:bodyPr wrap="square"/>
-                    <a:lstStyle/>
-                    <a:p>
-                      <a:pPr algn="ctr"/>
-                      <a:r>
-                        <a:rPr sz="1000" b="1">
-                          <a:solidFill>
-                            <a:srgbClr val="000000"/>
-                          </a:solidFill>
-                          <a:latin typeface="맑은 고딕"/>
-                          <a:ea typeface="맑은 고딕"/>
-                          <a:cs typeface="맑은 고딕"/>
-                        </a:rPr>
-                        <a:t>'26. 8월</a:t>
-                      </a:r>
-                    </a:p>
-                  </a:txBody>
-                  <a:tcPr anchor="ctr" marL="36000" marR="36000" marT="0" marB="0">
-                    <a:lnL w="9525" cap="flat">
-                      <a:solidFill>
-                        <a:srgbClr val="BFBFBF"/>
-                      </a:solidFill>
-                    </a:lnL>
-                    <a:lnR w="9525" cap="flat">
-                      <a:solidFill>
-                        <a:srgbClr val="BFBFBF"/>
-                      </a:solidFill>
-                    </a:lnR>
-                    <a:lnT w="9525" cap="flat">
-                      <a:solidFill>
-                        <a:srgbClr val="BFBFBF"/>
-                      </a:solidFill>
-                    </a:lnT>
-                    <a:lnB w="9525" cap="flat">
-                      <a:solidFill>
-                        <a:srgbClr val="BFBFBF"/>
-                      </a:solidFill>
-                    </a:lnB>
-                    <a:solidFill>
-                      <a:srgbClr val="FFFFFF"/>
-                    </a:solidFill>
-                  </a:tcPr>
-                </a:tc>
-                <a:tc>
-                  <a:txBody>
-                    <a:bodyPr wrap="square"/>
-                    <a:lstStyle/>
-                    <a:p>
-                      <a:pPr algn="ctr"/>
-                      <a:r>
-                        <a:rPr sz="1000" b="0">
-                          <a:solidFill>
-                            <a:srgbClr val="000000"/>
-                          </a:solidFill>
-                          <a:latin typeface="맑은 고딕"/>
-                          <a:ea typeface="맑은 고딕"/>
-                          <a:cs typeface="맑은 고딕"/>
-                        </a:rPr>
-                        <a:t>서울 주요 지역 확대</a:t>
-                      </a:r>
-                    </a:p>
-                  </a:txBody>
-                  <a:tcPr anchor="ctr" marL="36000" marR="36000" marT="0" marB="0">
-                    <a:lnL w="9525" cap="flat">
-                      <a:solidFill>
-                        <a:srgbClr val="BFBFBF"/>
-                      </a:solidFill>
-                    </a:lnL>
-                    <a:lnR w="9525" cap="flat">
-                      <a:solidFill>
-                        <a:srgbClr val="BFBFBF"/>
-                      </a:solidFill>
-                    </a:lnR>
-                    <a:lnT w="9525" cap="flat">
-                      <a:solidFill>
-                        <a:srgbClr val="BFBFBF"/>
-                      </a:solidFill>
-                    </a:lnT>
-                    <a:lnB w="9525" cap="flat">
-                      <a:solidFill>
-                        <a:srgbClr val="BFBFBF"/>
-                      </a:solidFill>
-                    </a:lnB>
-                    <a:solidFill>
-                      <a:srgbClr val="FFFFFF"/>
-                    </a:solidFill>
-                  </a:tcPr>
-                </a:tc>
-              </a:tr>
-              <a:tr h="234000">
-                <a:tc>
-                  <a:txBody>
-                    <a:bodyPr wrap="square"/>
-                    <a:lstStyle/>
-                    <a:p>
-                      <a:pPr algn="ctr"/>
-                      <a:r>
-                        <a:rPr sz="1000" b="1">
-                          <a:solidFill>
-                            <a:srgbClr val="000000"/>
-                          </a:solidFill>
-                          <a:latin typeface="맑은 고딕"/>
-                          <a:ea typeface="맑은 고딕"/>
-                          <a:cs typeface="맑은 고딕"/>
-                        </a:rPr>
-                        <a:t>'26. 9월 → 연말</a:t>
-                      </a:r>
-                    </a:p>
-                  </a:txBody>
-                  <a:tcPr anchor="ctr" marL="36000" marR="36000" marT="0" marB="0">
-                    <a:lnL w="9525" cap="flat">
-                      <a:solidFill>
-                        <a:srgbClr val="BFBFBF"/>
-                      </a:solidFill>
-                    </a:lnL>
-                    <a:lnR w="9525" cap="flat">
-                      <a:solidFill>
-                        <a:srgbClr val="BFBFBF"/>
-                      </a:solidFill>
-                    </a:lnR>
-                    <a:lnT w="9525" cap="flat">
-                      <a:solidFill>
-                        <a:srgbClr val="BFBFBF"/>
-                      </a:solidFill>
-                    </a:lnT>
-                    <a:lnB w="9525" cap="flat">
-                      <a:solidFill>
-                        <a:srgbClr val="BFBFBF"/>
-                      </a:solidFill>
-                    </a:lnB>
-                    <a:solidFill>
-                      <a:srgbClr val="FFFFFF"/>
-                    </a:solidFill>
-                  </a:tcPr>
-                </a:tc>
-                <a:tc>
-                  <a:txBody>
-                    <a:bodyPr wrap="square"/>
-                    <a:lstStyle/>
-                    <a:p>
-                      <a:pPr algn="ctr"/>
-                      <a:r>
-                        <a:rPr sz="1000" b="0">
-                          <a:solidFill>
-                            <a:srgbClr val="000000"/>
-                          </a:solidFill>
-                          <a:latin typeface="맑은 고딕"/>
-                          <a:ea typeface="맑은 고딕"/>
-                          <a:cs typeface="맑은 고딕"/>
-                        </a:rPr>
-                        <a:t>전국 확대 → 50여 개 점포</a:t>
-                      </a:r>
-                    </a:p>
-                  </a:txBody>
-                  <a:tcPr anchor="ctr" marL="36000" marR="36000" marT="0" marB="0">
-                    <a:lnL w="9525" cap="flat">
-                      <a:solidFill>
-                        <a:srgbClr val="BFBFBF"/>
-                      </a:solidFill>
-                    </a:lnL>
-                    <a:lnR w="9525" cap="flat">
-                      <a:solidFill>
-                        <a:srgbClr val="BFBFBF"/>
-                      </a:solidFill>
-                    </a:lnR>
-                    <a:lnT w="9525" cap="flat">
-                      <a:solidFill>
-                        <a:srgbClr val="BFBFBF"/>
-                      </a:solidFill>
-                    </a:lnT>
-                    <a:lnB w="9525" cap="flat">
-                      <a:solidFill>
-                        <a:srgbClr val="BFBFBF"/>
-                      </a:solidFill>
-                    </a:lnB>
-                    <a:solidFill>
-                      <a:srgbClr val="FFFFFF"/>
-                    </a:solidFill>
-                  </a:tcPr>
-                </a:tc>
-              </a:tr>
-            </a:tbl>
-          </a:graphicData>
-        </a:graphic>
-      </p:graphicFrame>
-      <p:sp>
-        <p:nvSpPr>
-          <p:cNvPr id="17" name="TextBox 16"/>
+              <a:t>'26. 7월</a:t>
+            </a:r>
+          </a:p>
+        </p:txBody>
+      </p:sp>
+      <p:sp>
+        <p:nvSpPr>
+          <p:cNvPr id="30" name="TextBox 29"/>
           <p:cNvSpPr txBox="1"/>
           <p:nvPr/>
         </p:nvSpPr>
         <p:spPr>
           <a:xfrm>
-            <a:off x="424800" y="6235200"/>
+            <a:off x="1324800" y="5039999"/>
+            <a:ext cx="1958400" cy="198000"/>
+          </a:xfrm>
+          <a:prstGeom prst="rect">
+            <a:avLst/>
+          </a:prstGeom>
+          <a:noFill/>
+        </p:spPr>
+        <p:txBody>
+          <a:bodyPr wrap="square" anchor="t" lIns="0" rIns="0" tIns="0" bIns="0">
+            <a:spAutoFit/>
+          </a:bodyPr>
+          <a:lstStyle/>
+          <a:p>
+            <a:pPr algn="ctr"/>
+            <a:r>
+              <a:rPr sz="1100" b="1">
+                <a:solidFill>
+                  <a:srgbClr val="FFFFFF"/>
+                </a:solidFill>
+                <a:latin typeface="맑은 고딕"/>
+                <a:ea typeface="맑은 고딕"/>
+                <a:cs typeface="맑은 고딕"/>
+              </a:rPr>
+              <a:t>양재·하남 시범</a:t>
+            </a:r>
+          </a:p>
+        </p:txBody>
+      </p:sp>
+      <p:sp>
+        <p:nvSpPr>
+          <p:cNvPr id="31" name="TextBox 30"/>
+          <p:cNvSpPr txBox="1"/>
+          <p:nvPr/>
+        </p:nvSpPr>
+        <p:spPr>
+          <a:xfrm>
+            <a:off x="1324800" y="5255999"/>
+            <a:ext cx="1958400" cy="144000"/>
+          </a:xfrm>
+          <a:prstGeom prst="rect">
+            <a:avLst/>
+          </a:prstGeom>
+          <a:noFill/>
+        </p:spPr>
+        <p:txBody>
+          <a:bodyPr wrap="square" anchor="t" lIns="0" rIns="0" tIns="0" bIns="0">
+            <a:spAutoFit/>
+          </a:bodyPr>
+          <a:lstStyle/>
+          <a:p>
+            <a:pPr algn="ctr"/>
+            <a:r>
+              <a:rPr sz="900" b="0">
+                <a:solidFill>
+                  <a:srgbClr val="FFFFFF"/>
+                </a:solidFill>
+                <a:latin typeface="맑은 고딕"/>
+                <a:ea typeface="맑은 고딕"/>
+                <a:cs typeface="맑은 고딕"/>
+              </a:rPr>
+              <a:t>7. 9. 개시</a:t>
+            </a:r>
+          </a:p>
+        </p:txBody>
+      </p:sp>
+      <p:sp>
+        <p:nvSpPr>
+          <p:cNvPr id="32" name="Rectangle 31"/>
+          <p:cNvSpPr/>
+          <p:nvPr/>
+        </p:nvSpPr>
+        <p:spPr>
+          <a:xfrm>
+            <a:off x="3391200" y="4823999"/>
+            <a:ext cx="1958400" cy="702000"/>
+          </a:xfrm>
+          <a:prstGeom prst="rect">
+            <a:avLst/>
+          </a:prstGeom>
+          <a:solidFill>
+            <a:srgbClr val="F2F2F2"/>
+          </a:solidFill>
+          <a:ln>
+            <a:noFill/>
+          </a:ln>
+          <a:effectLst/>
+        </p:spPr>
+        <p:style>
+          <a:lnRef idx="1">
+            <a:schemeClr val="accent1"/>
+          </a:lnRef>
+          <a:fillRef idx="3">
+            <a:schemeClr val="accent1"/>
+          </a:fillRef>
+          <a:effectRef idx="2">
+            <a:schemeClr val="accent1"/>
+          </a:effectRef>
+          <a:fontRef idx="minor">
+            <a:schemeClr val="lt1"/>
+          </a:fontRef>
+        </p:style>
+        <p:txBody>
+          <a:bodyPr rtlCol="0" anchor="ctr"/>
+          <a:lstStyle/>
+          <a:p>
+            <a:pPr algn="ctr"/>
+          </a:p>
+        </p:txBody>
+      </p:sp>
+      <p:sp>
+        <p:nvSpPr>
+          <p:cNvPr id="33" name="TextBox 32"/>
+          <p:cNvSpPr txBox="1"/>
+          <p:nvPr/>
+        </p:nvSpPr>
+        <p:spPr>
+          <a:xfrm>
+            <a:off x="3391200" y="4878000"/>
+            <a:ext cx="1958400" cy="144000"/>
+          </a:xfrm>
+          <a:prstGeom prst="rect">
+            <a:avLst/>
+          </a:prstGeom>
+          <a:noFill/>
+        </p:spPr>
+        <p:txBody>
+          <a:bodyPr wrap="square" anchor="t" lIns="0" rIns="0" tIns="0" bIns="0">
+            <a:spAutoFit/>
+          </a:bodyPr>
+          <a:lstStyle/>
+          <a:p>
+            <a:pPr algn="ctr"/>
+            <a:r>
+              <a:rPr sz="900" b="0">
+                <a:solidFill>
+                  <a:srgbClr val="595959"/>
+                </a:solidFill>
+                <a:latin typeface="맑은 고딕"/>
+                <a:ea typeface="맑은 고딕"/>
+                <a:cs typeface="맑은 고딕"/>
+              </a:rPr>
+              <a:t>'26. 8월</a:t>
+            </a:r>
+          </a:p>
+        </p:txBody>
+      </p:sp>
+      <p:sp>
+        <p:nvSpPr>
+          <p:cNvPr id="34" name="TextBox 33"/>
+          <p:cNvSpPr txBox="1"/>
+          <p:nvPr/>
+        </p:nvSpPr>
+        <p:spPr>
+          <a:xfrm>
+            <a:off x="3391200" y="5039999"/>
+            <a:ext cx="1958400" cy="198000"/>
+          </a:xfrm>
+          <a:prstGeom prst="rect">
+            <a:avLst/>
+          </a:prstGeom>
+          <a:noFill/>
+        </p:spPr>
+        <p:txBody>
+          <a:bodyPr wrap="square" anchor="t" lIns="0" rIns="0" tIns="0" bIns="0">
+            <a:spAutoFit/>
+          </a:bodyPr>
+          <a:lstStyle/>
+          <a:p>
+            <a:pPr algn="ctr"/>
+            <a:r>
+              <a:rPr sz="1100" b="1">
+                <a:solidFill>
+                  <a:srgbClr val="000000"/>
+                </a:solidFill>
+                <a:latin typeface="맑은 고딕"/>
+                <a:ea typeface="맑은 고딕"/>
+                <a:cs typeface="맑은 고딕"/>
+              </a:rPr>
+              <a:t>서울 확대</a:t>
+            </a:r>
+          </a:p>
+        </p:txBody>
+      </p:sp>
+      <p:sp>
+        <p:nvSpPr>
+          <p:cNvPr id="35" name="TextBox 34"/>
+          <p:cNvSpPr txBox="1"/>
+          <p:nvPr/>
+        </p:nvSpPr>
+        <p:spPr>
+          <a:xfrm>
+            <a:off x="3391200" y="5255999"/>
+            <a:ext cx="1958400" cy="144000"/>
+          </a:xfrm>
+          <a:prstGeom prst="rect">
+            <a:avLst/>
+          </a:prstGeom>
+          <a:noFill/>
+        </p:spPr>
+        <p:txBody>
+          <a:bodyPr wrap="square" anchor="t" lIns="0" rIns="0" tIns="0" bIns="0">
+            <a:spAutoFit/>
+          </a:bodyPr>
+          <a:lstStyle/>
+          <a:p>
+            <a:pPr algn="ctr"/>
+            <a:r>
+              <a:rPr sz="900" b="0">
+                <a:solidFill>
+                  <a:srgbClr val="595959"/>
+                </a:solidFill>
+                <a:latin typeface="맑은 고딕"/>
+                <a:ea typeface="맑은 고딕"/>
+                <a:cs typeface="맑은 고딕"/>
+              </a:rPr>
+              <a:t>주요 지역</a:t>
+            </a:r>
+          </a:p>
+        </p:txBody>
+      </p:sp>
+      <p:sp>
+        <p:nvSpPr>
+          <p:cNvPr id="36" name="Rectangle 35"/>
+          <p:cNvSpPr/>
+          <p:nvPr/>
+        </p:nvSpPr>
+        <p:spPr>
+          <a:xfrm>
+            <a:off x="5457600" y="4823999"/>
+            <a:ext cx="1958400" cy="702000"/>
+          </a:xfrm>
+          <a:prstGeom prst="rect">
+            <a:avLst/>
+          </a:prstGeom>
+          <a:solidFill>
+            <a:srgbClr val="F2F2F2"/>
+          </a:solidFill>
+          <a:ln>
+            <a:noFill/>
+          </a:ln>
+          <a:effectLst/>
+        </p:spPr>
+        <p:style>
+          <a:lnRef idx="1">
+            <a:schemeClr val="accent1"/>
+          </a:lnRef>
+          <a:fillRef idx="3">
+            <a:schemeClr val="accent1"/>
+          </a:fillRef>
+          <a:effectRef idx="2">
+            <a:schemeClr val="accent1"/>
+          </a:effectRef>
+          <a:fontRef idx="minor">
+            <a:schemeClr val="lt1"/>
+          </a:fontRef>
+        </p:style>
+        <p:txBody>
+          <a:bodyPr rtlCol="0" anchor="ctr"/>
+          <a:lstStyle/>
+          <a:p>
+            <a:pPr algn="ctr"/>
+          </a:p>
+        </p:txBody>
+      </p:sp>
+      <p:sp>
+        <p:nvSpPr>
+          <p:cNvPr id="37" name="TextBox 36"/>
+          <p:cNvSpPr txBox="1"/>
+          <p:nvPr/>
+        </p:nvSpPr>
+        <p:spPr>
+          <a:xfrm>
+            <a:off x="5457600" y="4878000"/>
+            <a:ext cx="1958400" cy="144000"/>
+          </a:xfrm>
+          <a:prstGeom prst="rect">
+            <a:avLst/>
+          </a:prstGeom>
+          <a:noFill/>
+        </p:spPr>
+        <p:txBody>
+          <a:bodyPr wrap="square" anchor="t" lIns="0" rIns="0" tIns="0" bIns="0">
+            <a:spAutoFit/>
+          </a:bodyPr>
+          <a:lstStyle/>
+          <a:p>
+            <a:pPr algn="ctr"/>
+            <a:r>
+              <a:rPr sz="900" b="0">
+                <a:solidFill>
+                  <a:srgbClr val="595959"/>
+                </a:solidFill>
+                <a:latin typeface="맑은 고딕"/>
+                <a:ea typeface="맑은 고딕"/>
+                <a:cs typeface="맑은 고딕"/>
+              </a:rPr>
+              <a:t>'26. 9월</a:t>
+            </a:r>
+          </a:p>
+        </p:txBody>
+      </p:sp>
+      <p:sp>
+        <p:nvSpPr>
+          <p:cNvPr id="38" name="TextBox 37"/>
+          <p:cNvSpPr txBox="1"/>
+          <p:nvPr/>
+        </p:nvSpPr>
+        <p:spPr>
+          <a:xfrm>
+            <a:off x="5457600" y="5039999"/>
+            <a:ext cx="1958400" cy="198000"/>
+          </a:xfrm>
+          <a:prstGeom prst="rect">
+            <a:avLst/>
+          </a:prstGeom>
+          <a:noFill/>
+        </p:spPr>
+        <p:txBody>
+          <a:bodyPr wrap="square" anchor="t" lIns="0" rIns="0" tIns="0" bIns="0">
+            <a:spAutoFit/>
+          </a:bodyPr>
+          <a:lstStyle/>
+          <a:p>
+            <a:pPr algn="ctr"/>
+            <a:r>
+              <a:rPr sz="1100" b="1">
+                <a:solidFill>
+                  <a:srgbClr val="000000"/>
+                </a:solidFill>
+                <a:latin typeface="맑은 고딕"/>
+                <a:ea typeface="맑은 고딕"/>
+                <a:cs typeface="맑은 고딕"/>
+              </a:rPr>
+              <a:t>전국 확대</a:t>
+            </a:r>
+          </a:p>
+        </p:txBody>
+      </p:sp>
+      <p:sp>
+        <p:nvSpPr>
+          <p:cNvPr id="39" name="TextBox 38"/>
+          <p:cNvSpPr txBox="1"/>
+          <p:nvPr/>
+        </p:nvSpPr>
+        <p:spPr>
+          <a:xfrm>
+            <a:off x="5457600" y="5255999"/>
+            <a:ext cx="1958400" cy="144000"/>
+          </a:xfrm>
+          <a:prstGeom prst="rect">
+            <a:avLst/>
+          </a:prstGeom>
+          <a:noFill/>
+        </p:spPr>
+        <p:txBody>
+          <a:bodyPr wrap="square" anchor="t" lIns="0" rIns="0" tIns="0" bIns="0">
+            <a:spAutoFit/>
+          </a:bodyPr>
+          <a:lstStyle/>
+          <a:p>
+            <a:pPr algn="ctr"/>
+            <a:r>
+              <a:rPr sz="900" b="0">
+                <a:solidFill>
+                  <a:srgbClr val="595959"/>
+                </a:solidFill>
+                <a:latin typeface="맑은 고딕"/>
+                <a:ea typeface="맑은 고딕"/>
+                <a:cs typeface="맑은 고딕"/>
+              </a:rPr>
+              <a:t>쓱배송 권역</a:t>
+            </a:r>
+          </a:p>
+        </p:txBody>
+      </p:sp>
+      <p:sp>
+        <p:nvSpPr>
+          <p:cNvPr id="40" name="Rectangle 39"/>
+          <p:cNvSpPr/>
+          <p:nvPr/>
+        </p:nvSpPr>
+        <p:spPr>
+          <a:xfrm>
+            <a:off x="7523999" y="4823999"/>
+            <a:ext cx="1958400" cy="702000"/>
+          </a:xfrm>
+          <a:prstGeom prst="rect">
+            <a:avLst/>
+          </a:prstGeom>
+          <a:solidFill>
+            <a:srgbClr val="F2F2F2"/>
+          </a:solidFill>
+          <a:ln>
+            <a:noFill/>
+          </a:ln>
+          <a:effectLst/>
+        </p:spPr>
+        <p:style>
+          <a:lnRef idx="1">
+            <a:schemeClr val="accent1"/>
+          </a:lnRef>
+          <a:fillRef idx="3">
+            <a:schemeClr val="accent1"/>
+          </a:fillRef>
+          <a:effectRef idx="2">
+            <a:schemeClr val="accent1"/>
+          </a:effectRef>
+          <a:fontRef idx="minor">
+            <a:schemeClr val="lt1"/>
+          </a:fontRef>
+        </p:style>
+        <p:txBody>
+          <a:bodyPr rtlCol="0" anchor="ctr"/>
+          <a:lstStyle/>
+          <a:p>
+            <a:pPr algn="ctr"/>
+          </a:p>
+        </p:txBody>
+      </p:sp>
+      <p:sp>
+        <p:nvSpPr>
+          <p:cNvPr id="41" name="TextBox 40"/>
+          <p:cNvSpPr txBox="1"/>
+          <p:nvPr/>
+        </p:nvSpPr>
+        <p:spPr>
+          <a:xfrm>
+            <a:off x="7523999" y="4878000"/>
+            <a:ext cx="1958400" cy="144000"/>
+          </a:xfrm>
+          <a:prstGeom prst="rect">
+            <a:avLst/>
+          </a:prstGeom>
+          <a:noFill/>
+        </p:spPr>
+        <p:txBody>
+          <a:bodyPr wrap="square" anchor="t" lIns="0" rIns="0" tIns="0" bIns="0">
+            <a:spAutoFit/>
+          </a:bodyPr>
+          <a:lstStyle/>
+          <a:p>
+            <a:pPr algn="ctr"/>
+            <a:r>
+              <a:rPr sz="900" b="0">
+                <a:solidFill>
+                  <a:srgbClr val="595959"/>
+                </a:solidFill>
+                <a:latin typeface="맑은 고딕"/>
+                <a:ea typeface="맑은 고딕"/>
+                <a:cs typeface="맑은 고딕"/>
+              </a:rPr>
+              <a:t>'26. 연말</a:t>
+            </a:r>
+          </a:p>
+        </p:txBody>
+      </p:sp>
+      <p:sp>
+        <p:nvSpPr>
+          <p:cNvPr id="42" name="TextBox 41"/>
+          <p:cNvSpPr txBox="1"/>
+          <p:nvPr/>
+        </p:nvSpPr>
+        <p:spPr>
+          <a:xfrm>
+            <a:off x="7523999" y="5039999"/>
+            <a:ext cx="1958400" cy="198000"/>
+          </a:xfrm>
+          <a:prstGeom prst="rect">
+            <a:avLst/>
+          </a:prstGeom>
+          <a:noFill/>
+        </p:spPr>
+        <p:txBody>
+          <a:bodyPr wrap="square" anchor="t" lIns="0" rIns="0" tIns="0" bIns="0">
+            <a:spAutoFit/>
+          </a:bodyPr>
+          <a:lstStyle/>
+          <a:p>
+            <a:pPr algn="ctr"/>
+            <a:r>
+              <a:rPr sz="1100" b="1">
+                <a:solidFill>
+                  <a:srgbClr val="000000"/>
+                </a:solidFill>
+                <a:latin typeface="맑은 고딕"/>
+                <a:ea typeface="맑은 고딕"/>
+                <a:cs typeface="맑은 고딕"/>
+              </a:rPr>
+              <a:t>50여 개 점포</a:t>
+            </a:r>
+          </a:p>
+        </p:txBody>
+      </p:sp>
+      <p:sp>
+        <p:nvSpPr>
+          <p:cNvPr id="43" name="TextBox 42"/>
+          <p:cNvSpPr txBox="1"/>
+          <p:nvPr/>
+        </p:nvSpPr>
+        <p:spPr>
+          <a:xfrm>
+            <a:off x="7523999" y="5255999"/>
+            <a:ext cx="1958400" cy="144000"/>
+          </a:xfrm>
+          <a:prstGeom prst="rect">
+            <a:avLst/>
+          </a:prstGeom>
+          <a:noFill/>
+        </p:spPr>
+        <p:txBody>
+          <a:bodyPr wrap="square" anchor="t" lIns="0" rIns="0" tIns="0" bIns="0">
+            <a:spAutoFit/>
+          </a:bodyPr>
+          <a:lstStyle/>
+          <a:p>
+            <a:pPr algn="ctr"/>
+            <a:r>
+              <a:rPr sz="900" b="0">
+                <a:solidFill>
+                  <a:srgbClr val="595959"/>
+                </a:solidFill>
+                <a:latin typeface="맑은 고딕"/>
+                <a:ea typeface="맑은 고딕"/>
+                <a:cs typeface="맑은 고딕"/>
+              </a:rPr>
+              <a:t>운영 목표</a:t>
+            </a:r>
+          </a:p>
+        </p:txBody>
+      </p:sp>
+      <p:sp>
+        <p:nvSpPr>
+          <p:cNvPr id="44" name="TextBox 43"/>
+          <p:cNvSpPr txBox="1"/>
+          <p:nvPr/>
+        </p:nvSpPr>
+        <p:spPr>
+          <a:xfrm>
+            <a:off x="424800" y="5688000"/>
             <a:ext cx="9057600" cy="172800"/>
           </a:xfrm>
           <a:prstGeom prst="rect">

--- a/reports/ssg-quickcommerce-onepager.pptx
+++ b/reports/ssg-quickcommerce-onepager.pptx
@@ -3212,58 +3212,14 @@
       </p:sp>
       <p:sp>
         <p:nvSpPr>
-          <p:cNvPr id="5" name="Rectangle 4"/>
-          <p:cNvSpPr/>
+          <p:cNvPr id="5" name="TextBox 4"/>
+          <p:cNvSpPr txBox="1"/>
           <p:nvPr/>
         </p:nvSpPr>
         <p:spPr>
           <a:xfrm>
             <a:off x="424800" y="1475999"/>
-            <a:ext cx="792000" cy="522000"/>
-          </a:xfrm>
-          <a:prstGeom prst="rect">
-            <a:avLst/>
-          </a:prstGeom>
-          <a:solidFill>
-            <a:srgbClr val="7F7F7F"/>
-          </a:solidFill>
-          <a:ln>
-            <a:noFill/>
-          </a:ln>
-          <a:effectLst/>
-        </p:spPr>
-        <p:style>
-          <a:lnRef idx="1">
-            <a:schemeClr val="accent1"/>
-          </a:lnRef>
-          <a:fillRef idx="3">
-            <a:schemeClr val="accent1"/>
-          </a:fillRef>
-          <a:effectRef idx="2">
-            <a:schemeClr val="accent1"/>
-          </a:effectRef>
-          <a:fontRef idx="minor">
-            <a:schemeClr val="lt1"/>
-          </a:fontRef>
-        </p:style>
-        <p:txBody>
-          <a:bodyPr rtlCol="0" anchor="ctr"/>
-          <a:lstStyle/>
-          <a:p>
-            <a:pPr algn="ctr"/>
-          </a:p>
-        </p:txBody>
-      </p:sp>
-      <p:sp>
-        <p:nvSpPr>
-          <p:cNvPr id="6" name="TextBox 5"/>
-          <p:cNvSpPr txBox="1"/>
-          <p:nvPr/>
-        </p:nvSpPr>
-        <p:spPr>
-          <a:xfrm>
-            <a:off x="424800" y="1475999"/>
-            <a:ext cx="792000" cy="522000"/>
+            <a:ext cx="4410000" cy="198000"/>
           </a:xfrm>
           <a:prstGeom prst="rect">
             <a:avLst/>
@@ -3271,36 +3227,36 @@
           <a:noFill/>
         </p:spPr>
         <p:txBody>
-          <a:bodyPr wrap="square" anchor="ctr" lIns="0" rIns="0" tIns="0" bIns="0">
+          <a:bodyPr wrap="square" anchor="t" lIns="0" rIns="0" tIns="0" bIns="0">
             <a:spAutoFit/>
           </a:bodyPr>
           <a:lstStyle/>
           <a:p>
-            <a:pPr algn="ctr"/>
-            <a:r>
-              <a:rPr sz="1100" b="1">
+            <a:pPr algn="l"/>
+            <a:r>
+              <a:rPr sz="1200" b="1">
                 <a:solidFill>
-                  <a:srgbClr val="FFFFFF"/>
+                  <a:srgbClr val="222222"/>
                 </a:solidFill>
                 <a:latin typeface="맑은 고딕"/>
                 <a:ea typeface="맑은 고딕"/>
                 <a:cs typeface="맑은 고딕"/>
               </a:rPr>
-              <a:t>배경</a:t>
-            </a:r>
-          </a:p>
-        </p:txBody>
-      </p:sp>
-      <p:sp>
-        <p:nvSpPr>
-          <p:cNvPr id="7" name="TextBox 6"/>
+              <a:t>• 도입 배경</a:t>
+            </a:r>
+          </a:p>
+        </p:txBody>
+      </p:sp>
+      <p:sp>
+        <p:nvSpPr>
+          <p:cNvPr id="6" name="TextBox 5"/>
           <p:cNvSpPr txBox="1"/>
           <p:nvPr/>
         </p:nvSpPr>
         <p:spPr>
           <a:xfrm>
-            <a:off x="1324800" y="1519200"/>
-            <a:ext cx="8157600" cy="172800"/>
+            <a:off x="622800" y="1673999"/>
+            <a:ext cx="4212000" cy="172800"/>
           </a:xfrm>
           <a:prstGeom prst="rect">
             <a:avLst/>
@@ -3323,21 +3279,21 @@
                 <a:ea typeface="맑은 고딕"/>
                 <a:cs typeface="맑은 고딕"/>
               </a:rPr>
-              <a:t>- 이륜차 퀵커머스는 소량 한정 → 3~4인 가구 대용량 장보기 공백</a:t>
-            </a:r>
-          </a:p>
-        </p:txBody>
-      </p:sp>
-      <p:sp>
-        <p:nvSpPr>
-          <p:cNvPr id="8" name="TextBox 7"/>
+              <a:t>- 이륜차 퀵커머스 소량 한정 → 대용량 공백</a:t>
+            </a:r>
+          </a:p>
+        </p:txBody>
+      </p:sp>
+      <p:sp>
+        <p:nvSpPr>
+          <p:cNvPr id="7" name="TextBox 6"/>
           <p:cNvSpPr txBox="1"/>
           <p:nvPr/>
         </p:nvSpPr>
         <p:spPr>
           <a:xfrm>
-            <a:off x="1324800" y="1717199"/>
-            <a:ext cx="8157600" cy="172800"/>
+            <a:off x="622800" y="1846799"/>
+            <a:ext cx="4212000" cy="172800"/>
           </a:xfrm>
           <a:prstGeom prst="rect">
             <a:avLst/>
@@ -3360,65 +3316,21 @@
                 <a:ea typeface="맑은 고딕"/>
                 <a:cs typeface="맑은 고딕"/>
               </a:rPr>
-              <a:t>- 바로퀵 매출 197%↑(6월, 1월比) → 온디맨드 수요 실증</a:t>
-            </a:r>
-          </a:p>
-        </p:txBody>
-      </p:sp>
-      <p:sp>
-        <p:nvSpPr>
-          <p:cNvPr id="9" name="Rectangle 8"/>
-          <p:cNvSpPr/>
+              <a:t>- 바로퀵 매출 197%↑(6월) → 수요 실증</a:t>
+            </a:r>
+          </a:p>
+        </p:txBody>
+      </p:sp>
+      <p:sp>
+        <p:nvSpPr>
+          <p:cNvPr id="8" name="TextBox 7"/>
+          <p:cNvSpPr txBox="1"/>
           <p:nvPr/>
         </p:nvSpPr>
         <p:spPr>
           <a:xfrm>
-            <a:off x="424800" y="2106000"/>
-            <a:ext cx="792000" cy="702000"/>
-          </a:xfrm>
-          <a:prstGeom prst="rect">
-            <a:avLst/>
-          </a:prstGeom>
-          <a:solidFill>
-            <a:srgbClr val="7F7F7F"/>
-          </a:solidFill>
-          <a:ln>
-            <a:noFill/>
-          </a:ln>
-          <a:effectLst/>
-        </p:spPr>
-        <p:style>
-          <a:lnRef idx="1">
-            <a:schemeClr val="accent1"/>
-          </a:lnRef>
-          <a:fillRef idx="3">
-            <a:schemeClr val="accent1"/>
-          </a:fillRef>
-          <a:effectRef idx="2">
-            <a:schemeClr val="accent1"/>
-          </a:effectRef>
-          <a:fontRef idx="minor">
-            <a:schemeClr val="lt1"/>
-          </a:fontRef>
-        </p:style>
-        <p:txBody>
-          <a:bodyPr rtlCol="0" anchor="ctr"/>
-          <a:lstStyle/>
-          <a:p>
-            <a:pPr algn="ctr"/>
-          </a:p>
-        </p:txBody>
-      </p:sp>
-      <p:sp>
-        <p:nvSpPr>
-          <p:cNvPr id="10" name="TextBox 9"/>
-          <p:cNvSpPr txBox="1"/>
-          <p:nvPr/>
-        </p:nvSpPr>
-        <p:spPr>
-          <a:xfrm>
-            <a:off x="424800" y="2106000"/>
-            <a:ext cx="792000" cy="702000"/>
+            <a:off x="5072400" y="1475999"/>
+            <a:ext cx="4410000" cy="198000"/>
           </a:xfrm>
           <a:prstGeom prst="rect">
             <a:avLst/>
@@ -3426,80 +3338,36 @@
           <a:noFill/>
         </p:spPr>
         <p:txBody>
-          <a:bodyPr wrap="square" anchor="ctr" lIns="0" rIns="0" tIns="0" bIns="0">
+          <a:bodyPr wrap="square" anchor="t" lIns="0" rIns="0" tIns="0" bIns="0">
             <a:spAutoFit/>
           </a:bodyPr>
           <a:lstStyle/>
           <a:p>
-            <a:pPr algn="ctr"/>
-            <a:r>
-              <a:rPr sz="1100" b="1">
+            <a:pPr algn="l"/>
+            <a:r>
+              <a:rPr sz="1200" b="1">
                 <a:solidFill>
-                  <a:srgbClr val="FFFFFF"/>
+                  <a:srgbClr val="222222"/>
                 </a:solidFill>
                 <a:latin typeface="맑은 고딕"/>
                 <a:ea typeface="맑은 고딕"/>
                 <a:cs typeface="맑은 고딕"/>
               </a:rPr>
-              <a:t>핵심</a:t>
-            </a:r>
-          </a:p>
-        </p:txBody>
-      </p:sp>
-      <p:sp>
-        <p:nvSpPr>
-          <p:cNvPr id="11" name="Rectangle 10"/>
-          <p:cNvSpPr/>
+              <a:t>• 시범 운영 개요 (7. 9. 개시)</a:t>
+            </a:r>
+          </a:p>
+        </p:txBody>
+      </p:sp>
+      <p:sp>
+        <p:nvSpPr>
+          <p:cNvPr id="9" name="TextBox 8"/>
+          <p:cNvSpPr txBox="1"/>
           <p:nvPr/>
         </p:nvSpPr>
         <p:spPr>
           <a:xfrm>
-            <a:off x="1324800" y="2106000"/>
-            <a:ext cx="2647199" cy="702000"/>
-          </a:xfrm>
-          <a:prstGeom prst="rect">
-            <a:avLst/>
-          </a:prstGeom>
-          <a:solidFill>
-            <a:srgbClr val="F2F2F2"/>
-          </a:solidFill>
-          <a:ln>
-            <a:noFill/>
-          </a:ln>
-          <a:effectLst/>
-        </p:spPr>
-        <p:style>
-          <a:lnRef idx="1">
-            <a:schemeClr val="accent1"/>
-          </a:lnRef>
-          <a:fillRef idx="3">
-            <a:schemeClr val="accent1"/>
-          </a:fillRef>
-          <a:effectRef idx="2">
-            <a:schemeClr val="accent1"/>
-          </a:effectRef>
-          <a:fontRef idx="minor">
-            <a:schemeClr val="lt1"/>
-          </a:fontRef>
-        </p:style>
-        <p:txBody>
-          <a:bodyPr rtlCol="0" anchor="ctr"/>
-          <a:lstStyle/>
-          <a:p>
-            <a:pPr algn="ctr"/>
-          </a:p>
-        </p:txBody>
-      </p:sp>
-      <p:sp>
-        <p:nvSpPr>
-          <p:cNvPr id="12" name="TextBox 11"/>
-          <p:cNvSpPr txBox="1"/>
-          <p:nvPr/>
-        </p:nvSpPr>
-        <p:spPr>
-          <a:xfrm>
-            <a:off x="1324800" y="2160000"/>
-            <a:ext cx="2647199" cy="144000"/>
+            <a:off x="5270400" y="1673999"/>
+            <a:ext cx="4212000" cy="172800"/>
           </a:xfrm>
           <a:prstGeom prst="rect">
             <a:avLst/>
@@ -3512,46 +3380,9 @@
           </a:bodyPr>
           <a:lstStyle/>
           <a:p>
-            <a:pPr algn="ctr"/>
-            <a:r>
-              <a:rPr sz="900" b="0">
-                <a:solidFill>
-                  <a:srgbClr val="595959"/>
-                </a:solidFill>
-                <a:latin typeface="맑은 고딕"/>
-                <a:ea typeface="맑은 고딕"/>
-                <a:cs typeface="맑은 고딕"/>
-              </a:rPr>
-              <a:t>배송 속도</a:t>
-            </a:r>
-          </a:p>
-        </p:txBody>
-      </p:sp>
-      <p:sp>
-        <p:nvSpPr>
-          <p:cNvPr id="13" name="TextBox 12"/>
-          <p:cNvSpPr txBox="1"/>
-          <p:nvPr/>
-        </p:nvSpPr>
-        <p:spPr>
-          <a:xfrm>
-            <a:off x="1324800" y="2322000"/>
-            <a:ext cx="2647199" cy="198000"/>
-          </a:xfrm>
-          <a:prstGeom prst="rect">
-            <a:avLst/>
-          </a:prstGeom>
-          <a:noFill/>
-        </p:spPr>
-        <p:txBody>
-          <a:bodyPr wrap="square" anchor="t" lIns="0" rIns="0" tIns="0" bIns="0">
-            <a:spAutoFit/>
-          </a:bodyPr>
-          <a:lstStyle/>
-          <a:p>
-            <a:pPr algn="ctr"/>
-            <a:r>
-              <a:rPr sz="1100" b="1">
+            <a:pPr algn="l"/>
+            <a:r>
+              <a:rPr sz="1100" b="0">
                 <a:solidFill>
                   <a:srgbClr val="000000"/>
                 </a:solidFill>
@@ -3559,21 +3390,21 @@
                 <a:ea typeface="맑은 고딕"/>
                 <a:cs typeface="맑은 고딕"/>
               </a:rPr>
-              <a:t>결제 후 2시간 내</a:t>
-            </a:r>
-          </a:p>
-        </p:txBody>
-      </p:sp>
-      <p:sp>
-        <p:nvSpPr>
-          <p:cNvPr id="14" name="TextBox 13"/>
+              <a:t>- 20시 주문 마감 → 2시간 내 배송</a:t>
+            </a:r>
+          </a:p>
+        </p:txBody>
+      </p:sp>
+      <p:sp>
+        <p:nvSpPr>
+          <p:cNvPr id="10" name="TextBox 9"/>
           <p:cNvSpPr txBox="1"/>
           <p:nvPr/>
         </p:nvSpPr>
         <p:spPr>
           <a:xfrm>
-            <a:off x="1324800" y="2538000"/>
-            <a:ext cx="2647199" cy="144000"/>
+            <a:off x="5270400" y="1846799"/>
+            <a:ext cx="4212000" cy="172800"/>
           </a:xfrm>
           <a:prstGeom prst="rect">
             <a:avLst/>
@@ -3586,127 +3417,9 @@
           </a:bodyPr>
           <a:lstStyle/>
           <a:p>
-            <a:pPr algn="ctr"/>
-            <a:r>
-              <a:rPr sz="900" b="0">
-                <a:solidFill>
-                  <a:srgbClr val="595959"/>
-                </a:solidFill>
-                <a:latin typeface="맑은 고딕"/>
-                <a:ea typeface="맑은 고딕"/>
-                <a:cs typeface="맑은 고딕"/>
-              </a:rPr>
-              <a:t>20시 주문 마감</a:t>
-            </a:r>
-          </a:p>
-        </p:txBody>
-      </p:sp>
-      <p:sp>
-        <p:nvSpPr>
-          <p:cNvPr id="15" name="Rectangle 14"/>
-          <p:cNvSpPr/>
-          <p:nvPr/>
-        </p:nvSpPr>
-        <p:spPr>
-          <a:xfrm>
-            <a:off x="4079999" y="2106000"/>
-            <a:ext cx="2647199" cy="702000"/>
-          </a:xfrm>
-          <a:prstGeom prst="rect">
-            <a:avLst/>
-          </a:prstGeom>
-          <a:solidFill>
-            <a:srgbClr val="F2F2F2"/>
-          </a:solidFill>
-          <a:ln>
-            <a:noFill/>
-          </a:ln>
-          <a:effectLst/>
-        </p:spPr>
-        <p:style>
-          <a:lnRef idx="1">
-            <a:schemeClr val="accent1"/>
-          </a:lnRef>
-          <a:fillRef idx="3">
-            <a:schemeClr val="accent1"/>
-          </a:fillRef>
-          <a:effectRef idx="2">
-            <a:schemeClr val="accent1"/>
-          </a:effectRef>
-          <a:fontRef idx="minor">
-            <a:schemeClr val="lt1"/>
-          </a:fontRef>
-        </p:style>
-        <p:txBody>
-          <a:bodyPr rtlCol="0" anchor="ctr"/>
-          <a:lstStyle/>
-          <a:p>
-            <a:pPr algn="ctr"/>
-          </a:p>
-        </p:txBody>
-      </p:sp>
-      <p:sp>
-        <p:nvSpPr>
-          <p:cNvPr id="16" name="TextBox 15"/>
-          <p:cNvSpPr txBox="1"/>
-          <p:nvPr/>
-        </p:nvSpPr>
-        <p:spPr>
-          <a:xfrm>
-            <a:off x="4079999" y="2160000"/>
-            <a:ext cx="2647199" cy="144000"/>
-          </a:xfrm>
-          <a:prstGeom prst="rect">
-            <a:avLst/>
-          </a:prstGeom>
-          <a:noFill/>
-        </p:spPr>
-        <p:txBody>
-          <a:bodyPr wrap="square" anchor="t" lIns="0" rIns="0" tIns="0" bIns="0">
-            <a:spAutoFit/>
-          </a:bodyPr>
-          <a:lstStyle/>
-          <a:p>
-            <a:pPr algn="ctr"/>
-            <a:r>
-              <a:rPr sz="900" b="0">
-                <a:solidFill>
-                  <a:srgbClr val="595959"/>
-                </a:solidFill>
-                <a:latin typeface="맑은 고딕"/>
-                <a:ea typeface="맑은 고딕"/>
-                <a:cs typeface="맑은 고딕"/>
-              </a:rPr>
-              <a:t>운송·적재</a:t>
-            </a:r>
-          </a:p>
-        </p:txBody>
-      </p:sp>
-      <p:sp>
-        <p:nvSpPr>
-          <p:cNvPr id="17" name="TextBox 16"/>
-          <p:cNvSpPr txBox="1"/>
-          <p:nvPr/>
-        </p:nvSpPr>
-        <p:spPr>
-          <a:xfrm>
-            <a:off x="4079999" y="2322000"/>
-            <a:ext cx="2647199" cy="198000"/>
-          </a:xfrm>
-          <a:prstGeom prst="rect">
-            <a:avLst/>
-          </a:prstGeom>
-          <a:noFill/>
-        </p:spPr>
-        <p:txBody>
-          <a:bodyPr wrap="square" anchor="t" lIns="0" rIns="0" tIns="0" bIns="0">
-            <a:spAutoFit/>
-          </a:bodyPr>
-          <a:lstStyle/>
-          <a:p>
-            <a:pPr algn="ctr"/>
-            <a:r>
-              <a:rPr sz="1100" b="1">
+            <a:pPr algn="l"/>
+            <a:r>
+              <a:rPr sz="1100" b="0">
                 <a:solidFill>
                   <a:srgbClr val="000000"/>
                 </a:solidFill>
@@ -3714,21 +3427,21 @@
                 <a:ea typeface="맑은 고딕"/>
                 <a:cs typeface="맑은 고딕"/>
               </a:rPr>
-              <a:t>사륜차 대용량</a:t>
-            </a:r>
-          </a:p>
-        </p:txBody>
-      </p:sp>
-      <p:sp>
-        <p:nvSpPr>
-          <p:cNvPr id="18" name="TextBox 17"/>
+              <a:t>- 사륜차 대용량·중량 상품 즉시 배송</a:t>
+            </a:r>
+          </a:p>
+        </p:txBody>
+      </p:sp>
+      <p:sp>
+        <p:nvSpPr>
+          <p:cNvPr id="11" name="TextBox 10"/>
           <p:cNvSpPr txBox="1"/>
           <p:nvPr/>
         </p:nvSpPr>
         <p:spPr>
           <a:xfrm>
-            <a:off x="4079999" y="2538000"/>
-            <a:ext cx="2647199" cy="144000"/>
+            <a:off x="424800" y="2199600"/>
+            <a:ext cx="9057600" cy="198000"/>
           </a:xfrm>
           <a:prstGeom prst="rect">
             <a:avLst/>
@@ -3741,282 +3454,32 @@
           </a:bodyPr>
           <a:lstStyle/>
           <a:p>
-            <a:pPr algn="ctr"/>
-            <a:r>
-              <a:rPr sz="900" b="0">
+            <a:pPr algn="l"/>
+            <a:r>
+              <a:rPr sz="1200" b="1">
                 <a:solidFill>
-                  <a:srgbClr val="595959"/>
+                  <a:srgbClr val="222222"/>
                 </a:solidFill>
                 <a:latin typeface="맑은 고딕"/>
                 <a:ea typeface="맑은 고딕"/>
                 <a:cs typeface="맑은 고딕"/>
               </a:rPr>
-              <a:t>중량 상품 즉시 배송</a:t>
-            </a:r>
-          </a:p>
-        </p:txBody>
-      </p:sp>
-      <p:sp>
-        <p:nvSpPr>
-          <p:cNvPr id="19" name="Rectangle 18"/>
-          <p:cNvSpPr/>
-          <p:nvPr/>
-        </p:nvSpPr>
-        <p:spPr>
-          <a:xfrm>
-            <a:off x="6835199" y="2106000"/>
-            <a:ext cx="2647199" cy="702000"/>
-          </a:xfrm>
-          <a:prstGeom prst="rect">
-            <a:avLst/>
-          </a:prstGeom>
-          <a:solidFill>
-            <a:srgbClr val="F2F2F2"/>
-          </a:solidFill>
-          <a:ln>
-            <a:noFill/>
-          </a:ln>
-          <a:effectLst/>
-        </p:spPr>
-        <p:style>
-          <a:lnRef idx="1">
-            <a:schemeClr val="accent1"/>
-          </a:lnRef>
-          <a:fillRef idx="3">
-            <a:schemeClr val="accent1"/>
-          </a:fillRef>
-          <a:effectRef idx="2">
-            <a:schemeClr val="accent1"/>
-          </a:effectRef>
-          <a:fontRef idx="minor">
-            <a:schemeClr val="lt1"/>
-          </a:fontRef>
-        </p:style>
-        <p:txBody>
-          <a:bodyPr rtlCol="0" anchor="ctr"/>
-          <a:lstStyle/>
-          <a:p>
-            <a:pPr algn="ctr"/>
-          </a:p>
-        </p:txBody>
-      </p:sp>
-      <p:sp>
-        <p:nvSpPr>
-          <p:cNvPr id="20" name="TextBox 19"/>
-          <p:cNvSpPr txBox="1"/>
-          <p:nvPr/>
-        </p:nvSpPr>
-        <p:spPr>
-          <a:xfrm>
-            <a:off x="6835199" y="2160000"/>
-            <a:ext cx="2647199" cy="144000"/>
-          </a:xfrm>
-          <a:prstGeom prst="rect">
-            <a:avLst/>
-          </a:prstGeom>
-          <a:noFill/>
-        </p:spPr>
-        <p:txBody>
-          <a:bodyPr wrap="square" anchor="t" lIns="0" rIns="0" tIns="0" bIns="0">
-            <a:spAutoFit/>
-          </a:bodyPr>
-          <a:lstStyle/>
-          <a:p>
-            <a:pPr algn="ctr"/>
-            <a:r>
-              <a:rPr sz="900" b="0">
-                <a:solidFill>
-                  <a:srgbClr val="595959"/>
-                </a:solidFill>
-                <a:latin typeface="맑은 고딕"/>
-                <a:ea typeface="맑은 고딕"/>
-                <a:cs typeface="맑은 고딕"/>
-              </a:rPr>
-              <a:t>상품 구색</a:t>
-            </a:r>
-          </a:p>
-        </p:txBody>
-      </p:sp>
-      <p:sp>
-        <p:nvSpPr>
-          <p:cNvPr id="21" name="TextBox 20"/>
-          <p:cNvSpPr txBox="1"/>
-          <p:nvPr/>
-        </p:nvSpPr>
-        <p:spPr>
-          <a:xfrm>
-            <a:off x="6835199" y="2322000"/>
-            <a:ext cx="2647199" cy="198000"/>
-          </a:xfrm>
-          <a:prstGeom prst="rect">
-            <a:avLst/>
-          </a:prstGeom>
-          <a:noFill/>
-        </p:spPr>
-        <p:txBody>
-          <a:bodyPr wrap="square" anchor="t" lIns="0" rIns="0" tIns="0" bIns="0">
-            <a:spAutoFit/>
-          </a:bodyPr>
-          <a:lstStyle/>
-          <a:p>
-            <a:pPr algn="ctr"/>
-            <a:r>
-              <a:rPr sz="1100" b="1">
-                <a:solidFill>
-                  <a:srgbClr val="000000"/>
-                </a:solidFill>
-                <a:latin typeface="맑은 고딕"/>
-                <a:ea typeface="맑은 고딕"/>
-                <a:cs typeface="맑은 고딕"/>
-              </a:rPr>
-              <a:t>약 15만 종</a:t>
-            </a:r>
-          </a:p>
-        </p:txBody>
-      </p:sp>
-      <p:sp>
-        <p:nvSpPr>
-          <p:cNvPr id="22" name="TextBox 21"/>
-          <p:cNvSpPr txBox="1"/>
-          <p:nvPr/>
-        </p:nvSpPr>
-        <p:spPr>
-          <a:xfrm>
-            <a:off x="6835199" y="2538000"/>
-            <a:ext cx="2647199" cy="144000"/>
-          </a:xfrm>
-          <a:prstGeom prst="rect">
-            <a:avLst/>
-          </a:prstGeom>
-          <a:noFill/>
-        </p:spPr>
-        <p:txBody>
-          <a:bodyPr wrap="square" anchor="t" lIns="0" rIns="0" tIns="0" bIns="0">
-            <a:spAutoFit/>
-          </a:bodyPr>
-          <a:lstStyle/>
-          <a:p>
-            <a:pPr algn="ctr"/>
-            <a:r>
-              <a:rPr sz="900" b="0">
-                <a:solidFill>
-                  <a:srgbClr val="595959"/>
-                </a:solidFill>
-                <a:latin typeface="맑은 고딕"/>
-                <a:ea typeface="맑은 고딕"/>
-                <a:cs typeface="맑은 고딕"/>
-              </a:rPr>
-              <a:t>바로퀵 1만 · B마트 2만</a:t>
-            </a:r>
-          </a:p>
-        </p:txBody>
-      </p:sp>
-      <p:sp>
-        <p:nvSpPr>
-          <p:cNvPr id="23" name="Rectangle 22"/>
-          <p:cNvSpPr/>
-          <p:nvPr/>
-        </p:nvSpPr>
-        <p:spPr>
-          <a:xfrm>
-            <a:off x="424800" y="2916000"/>
-            <a:ext cx="792000" cy="1800000"/>
-          </a:xfrm>
-          <a:prstGeom prst="rect">
-            <a:avLst/>
-          </a:prstGeom>
-          <a:solidFill>
-            <a:srgbClr val="7F7F7F"/>
-          </a:solidFill>
-          <a:ln>
-            <a:noFill/>
-          </a:ln>
-          <a:effectLst/>
-        </p:spPr>
-        <p:style>
-          <a:lnRef idx="1">
-            <a:schemeClr val="accent1"/>
-          </a:lnRef>
-          <a:fillRef idx="3">
-            <a:schemeClr val="accent1"/>
-          </a:fillRef>
-          <a:effectRef idx="2">
-            <a:schemeClr val="accent1"/>
-          </a:effectRef>
-          <a:fontRef idx="minor">
-            <a:schemeClr val="lt1"/>
-          </a:fontRef>
-        </p:style>
-        <p:txBody>
-          <a:bodyPr rtlCol="0" anchor="ctr"/>
-          <a:lstStyle/>
-          <a:p>
-            <a:pPr algn="ctr"/>
-          </a:p>
-        </p:txBody>
-      </p:sp>
-      <p:sp>
-        <p:nvSpPr>
-          <p:cNvPr id="24" name="TextBox 23"/>
-          <p:cNvSpPr txBox="1"/>
-          <p:nvPr/>
-        </p:nvSpPr>
-        <p:spPr>
-          <a:xfrm>
-            <a:off x="424800" y="2916000"/>
-            <a:ext cx="792000" cy="1800000"/>
-          </a:xfrm>
-          <a:prstGeom prst="rect">
-            <a:avLst/>
-          </a:prstGeom>
-          <a:noFill/>
-        </p:spPr>
-        <p:txBody>
-          <a:bodyPr wrap="square" anchor="ctr" lIns="0" rIns="0" tIns="0" bIns="0">
-            <a:spAutoFit/>
-          </a:bodyPr>
-          <a:lstStyle/>
-          <a:p>
-            <a:pPr algn="ctr"/>
-            <a:r>
-              <a:rPr sz="1100" b="1">
-                <a:solidFill>
-                  <a:srgbClr val="FFFFFF"/>
-                </a:solidFill>
-                <a:latin typeface="맑은 고딕"/>
-                <a:ea typeface="맑은 고딕"/>
-                <a:cs typeface="맑은 고딕"/>
-              </a:rPr>
-              <a:t>서비스</a:t>
-            </a:r>
-          </a:p>
-          <a:p>
-            <a:pPr algn="ctr"/>
-            <a:r>
-              <a:rPr sz="1100" b="1">
-                <a:solidFill>
-                  <a:srgbClr val="FFFFFF"/>
-                </a:solidFill>
-                <a:latin typeface="맑은 고딕"/>
-                <a:ea typeface="맑은 고딕"/>
-                <a:cs typeface="맑은 고딕"/>
-              </a:rPr>
-              <a:t>체계</a:t>
+              <a:t>• 이마트·SSG닷컴 배송 서비스 비교</a:t>
             </a:r>
           </a:p>
         </p:txBody>
       </p:sp>
       <p:graphicFrame>
         <p:nvGraphicFramePr>
-          <p:cNvPr id="25" name="Table 24"/>
+          <p:cNvPr id="12" name="Table 11"/>
           <p:cNvGraphicFramePr>
             <a:graphicFrameLocks noGrp="1"/>
           </p:cNvGraphicFramePr>
           <p:nvPr/>
         </p:nvGraphicFramePr>
         <p:xfrm>
-          <a:off x="1324800" y="2916000"/>
-          <a:ext cx="8157599" cy="1800000"/>
+          <a:off x="424800" y="2397599"/>
+          <a:ext cx="9057600" cy="1800000"/>
         </p:xfrm>
         <a:graphic>
           <a:graphicData uri="http://schemas.openxmlformats.org/drawingml/2006/table">
@@ -4025,11 +3488,11 @@
                 <a:tableStyleId>{5C22544A-7EE6-4342-B048-85BDC9FD1C3A}</a:tableStyleId>
               </a:tblPr>
               <a:tblGrid>
+                <a:gridCol w="1404000"/>
+                <a:gridCol w="1908000"/>
+                <a:gridCol w="900000"/>
                 <a:gridCol w="1296000"/>
-                <a:gridCol w="1655999"/>
-                <a:gridCol w="864000"/>
-                <a:gridCol w="1188000"/>
-                <a:gridCol w="3153600"/>
+                <a:gridCol w="3549600"/>
               </a:tblGrid>
               <a:tr h="300000">
                 <a:tc>
@@ -5399,58 +4862,14 @@
       </p:graphicFrame>
       <p:sp>
         <p:nvSpPr>
-          <p:cNvPr id="26" name="Rectangle 25"/>
-          <p:cNvSpPr/>
+          <p:cNvPr id="13" name="TextBox 12"/>
+          <p:cNvSpPr txBox="1"/>
           <p:nvPr/>
         </p:nvSpPr>
         <p:spPr>
           <a:xfrm>
-            <a:off x="424800" y="4823999"/>
-            <a:ext cx="792000" cy="702000"/>
-          </a:xfrm>
-          <a:prstGeom prst="rect">
-            <a:avLst/>
-          </a:prstGeom>
-          <a:solidFill>
-            <a:srgbClr val="7F7F7F"/>
-          </a:solidFill>
-          <a:ln>
-            <a:noFill/>
-          </a:ln>
-          <a:effectLst/>
-        </p:spPr>
-        <p:style>
-          <a:lnRef idx="1">
-            <a:schemeClr val="accent1"/>
-          </a:lnRef>
-          <a:fillRef idx="3">
-            <a:schemeClr val="accent1"/>
-          </a:fillRef>
-          <a:effectRef idx="2">
-            <a:schemeClr val="accent1"/>
-          </a:effectRef>
-          <a:fontRef idx="minor">
-            <a:schemeClr val="lt1"/>
-          </a:fontRef>
-        </p:style>
-        <p:txBody>
-          <a:bodyPr rtlCol="0" anchor="ctr"/>
-          <a:lstStyle/>
-          <a:p>
-            <a:pPr algn="ctr"/>
-          </a:p>
-        </p:txBody>
-      </p:sp>
-      <p:sp>
-        <p:nvSpPr>
-          <p:cNvPr id="27" name="TextBox 26"/>
-          <p:cNvSpPr txBox="1"/>
-          <p:nvPr/>
-        </p:nvSpPr>
-        <p:spPr>
-          <a:xfrm>
-            <a:off x="424800" y="4823999"/>
-            <a:ext cx="792000" cy="702000"/>
+            <a:off x="424800" y="4377600"/>
+            <a:ext cx="4410000" cy="198000"/>
           </a:xfrm>
           <a:prstGeom prst="rect">
             <a:avLst/>
@@ -5458,80 +4877,611 @@
           <a:noFill/>
         </p:spPr>
         <p:txBody>
-          <a:bodyPr wrap="square" anchor="ctr" lIns="0" rIns="0" tIns="0" bIns="0">
+          <a:bodyPr wrap="square" anchor="t" lIns="0" rIns="0" tIns="0" bIns="0">
             <a:spAutoFit/>
           </a:bodyPr>
           <a:lstStyle/>
           <a:p>
-            <a:pPr algn="ctr"/>
-            <a:r>
-              <a:rPr sz="1100" b="1">
+            <a:pPr algn="l"/>
+            <a:r>
+              <a:rPr sz="1200" b="1">
                 <a:solidFill>
-                  <a:srgbClr val="FFFFFF"/>
+                  <a:srgbClr val="222222"/>
                 </a:solidFill>
                 <a:latin typeface="맑은 고딕"/>
                 <a:ea typeface="맑은 고딕"/>
                 <a:cs typeface="맑은 고딕"/>
               </a:rPr>
-              <a:t>로드맵</a:t>
-            </a:r>
-          </a:p>
-        </p:txBody>
-      </p:sp>
-      <p:sp>
-        <p:nvSpPr>
-          <p:cNvPr id="28" name="Rectangle 27"/>
-          <p:cNvSpPr/>
+              <a:t>• 취급 품목 수 비교</a:t>
+            </a:r>
+          </a:p>
+        </p:txBody>
+      </p:sp>
+      <p:graphicFrame>
+        <p:nvGraphicFramePr>
+          <p:cNvPr id="14" name="Table 13"/>
+          <p:cNvGraphicFramePr>
+            <a:graphicFrameLocks noGrp="1"/>
+          </p:cNvGraphicFramePr>
+          <p:nvPr/>
+        </p:nvGraphicFramePr>
+        <p:xfrm>
+          <a:off x="424800" y="4575600"/>
+          <a:ext cx="4410000" cy="936000"/>
+        </p:xfrm>
+        <a:graphic>
+          <a:graphicData uri="http://schemas.openxmlformats.org/drawingml/2006/table">
+            <a:tbl>
+              <a:tblPr>
+                <a:tableStyleId>{5C22544A-7EE6-4342-B048-85BDC9FD1C3A}</a:tableStyleId>
+              </a:tblPr>
+              <a:tblGrid>
+                <a:gridCol w="1260000"/>
+                <a:gridCol w="1296000"/>
+                <a:gridCol w="1854000"/>
+              </a:tblGrid>
+              <a:tr h="234000">
+                <a:tc>
+                  <a:txBody>
+                    <a:bodyPr wrap="square"/>
+                    <a:lstStyle/>
+                    <a:p>
+                      <a:pPr algn="ctr"/>
+                      <a:r>
+                        <a:rPr sz="1000" b="1">
+                          <a:solidFill>
+                            <a:srgbClr val="000066"/>
+                          </a:solidFill>
+                          <a:latin typeface="맑은 고딕"/>
+                          <a:ea typeface="맑은 고딕"/>
+                          <a:cs typeface="맑은 고딕"/>
+                        </a:rPr>
+                        <a:t>구분</a:t>
+                      </a:r>
+                    </a:p>
+                  </a:txBody>
+                  <a:tcPr anchor="ctr" marL="36000" marR="36000" marT="0" marB="0">
+                    <a:lnL w="9525" cap="flat">
+                      <a:solidFill>
+                        <a:srgbClr val="BFBFBF"/>
+                      </a:solidFill>
+                    </a:lnL>
+                    <a:lnR w="9525" cap="flat">
+                      <a:solidFill>
+                        <a:srgbClr val="BFBFBF"/>
+                      </a:solidFill>
+                    </a:lnR>
+                    <a:lnT w="9525" cap="flat">
+                      <a:solidFill>
+                        <a:srgbClr val="BFBFBF"/>
+                      </a:solidFill>
+                    </a:lnT>
+                    <a:lnB w="9525" cap="flat">
+                      <a:solidFill>
+                        <a:srgbClr val="BFBFBF"/>
+                      </a:solidFill>
+                    </a:lnB>
+                    <a:solidFill>
+                      <a:srgbClr val="D8E0EC"/>
+                    </a:solidFill>
+                  </a:tcPr>
+                </a:tc>
+                <a:tc>
+                  <a:txBody>
+                    <a:bodyPr wrap="square"/>
+                    <a:lstStyle/>
+                    <a:p>
+                      <a:pPr algn="ctr"/>
+                      <a:r>
+                        <a:rPr sz="1000" b="1">
+                          <a:solidFill>
+                            <a:srgbClr val="000066"/>
+                          </a:solidFill>
+                          <a:latin typeface="맑은 고딕"/>
+                          <a:ea typeface="맑은 고딕"/>
+                          <a:cs typeface="맑은 고딕"/>
+                        </a:rPr>
+                        <a:t>품목 수</a:t>
+                      </a:r>
+                    </a:p>
+                  </a:txBody>
+                  <a:tcPr anchor="ctr" marL="36000" marR="36000" marT="0" marB="0">
+                    <a:lnL w="9525" cap="flat">
+                      <a:solidFill>
+                        <a:srgbClr val="BFBFBF"/>
+                      </a:solidFill>
+                    </a:lnL>
+                    <a:lnR w="9525" cap="flat">
+                      <a:solidFill>
+                        <a:srgbClr val="BFBFBF"/>
+                      </a:solidFill>
+                    </a:lnR>
+                    <a:lnT w="9525" cap="flat">
+                      <a:solidFill>
+                        <a:srgbClr val="BFBFBF"/>
+                      </a:solidFill>
+                    </a:lnT>
+                    <a:lnB w="9525" cap="flat">
+                      <a:solidFill>
+                        <a:srgbClr val="BFBFBF"/>
+                      </a:solidFill>
+                    </a:lnB>
+                    <a:solidFill>
+                      <a:srgbClr val="D8E0EC"/>
+                    </a:solidFill>
+                  </a:tcPr>
+                </a:tc>
+                <a:tc>
+                  <a:txBody>
+                    <a:bodyPr wrap="square"/>
+                    <a:lstStyle/>
+                    <a:p>
+                      <a:pPr algn="ctr"/>
+                      <a:r>
+                        <a:rPr sz="1000" b="1">
+                          <a:solidFill>
+                            <a:srgbClr val="000066"/>
+                          </a:solidFill>
+                          <a:latin typeface="맑은 고딕"/>
+                          <a:ea typeface="맑은 고딕"/>
+                          <a:cs typeface="맑은 고딕"/>
+                        </a:rPr>
+                        <a:t>비고</a:t>
+                      </a:r>
+                    </a:p>
+                  </a:txBody>
+                  <a:tcPr anchor="ctr" marL="36000" marR="36000" marT="0" marB="0">
+                    <a:lnL w="9525" cap="flat">
+                      <a:solidFill>
+                        <a:srgbClr val="BFBFBF"/>
+                      </a:solidFill>
+                    </a:lnL>
+                    <a:lnR w="9525" cap="flat">
+                      <a:solidFill>
+                        <a:srgbClr val="BFBFBF"/>
+                      </a:solidFill>
+                    </a:lnR>
+                    <a:lnT w="9525" cap="flat">
+                      <a:solidFill>
+                        <a:srgbClr val="BFBFBF"/>
+                      </a:solidFill>
+                    </a:lnT>
+                    <a:lnB w="9525" cap="flat">
+                      <a:solidFill>
+                        <a:srgbClr val="BFBFBF"/>
+                      </a:solidFill>
+                    </a:lnB>
+                    <a:solidFill>
+                      <a:srgbClr val="D8E0EC"/>
+                    </a:solidFill>
+                  </a:tcPr>
+                </a:tc>
+              </a:tr>
+              <a:tr h="234000">
+                <a:tc>
+                  <a:txBody>
+                    <a:bodyPr wrap="square"/>
+                    <a:lstStyle/>
+                    <a:p>
+                      <a:pPr algn="ctr"/>
+                      <a:r>
+                        <a:rPr sz="1000" b="1">
+                          <a:solidFill>
+                            <a:srgbClr val="000000"/>
+                          </a:solidFill>
+                          <a:latin typeface="맑은 고딕"/>
+                          <a:ea typeface="맑은 고딕"/>
+                          <a:cs typeface="맑은 고딕"/>
+                        </a:rPr>
+                        <a:t>이마트 점포</a:t>
+                      </a:r>
+                    </a:p>
+                  </a:txBody>
+                  <a:tcPr anchor="ctr" marL="36000" marR="36000" marT="0" marB="0">
+                    <a:lnL w="9525" cap="flat">
+                      <a:solidFill>
+                        <a:srgbClr val="BFBFBF"/>
+                      </a:solidFill>
+                    </a:lnL>
+                    <a:lnR w="9525" cap="flat">
+                      <a:solidFill>
+                        <a:srgbClr val="BFBFBF"/>
+                      </a:solidFill>
+                    </a:lnR>
+                    <a:lnT w="9525" cap="flat">
+                      <a:solidFill>
+                        <a:srgbClr val="BFBFBF"/>
+                      </a:solidFill>
+                    </a:lnT>
+                    <a:lnB w="9525" cap="flat">
+                      <a:solidFill>
+                        <a:srgbClr val="BFBFBF"/>
+                      </a:solidFill>
+                    </a:lnB>
+                    <a:solidFill>
+                      <a:srgbClr val="FFFFFF"/>
+                    </a:solidFill>
+                  </a:tcPr>
+                </a:tc>
+                <a:tc>
+                  <a:txBody>
+                    <a:bodyPr wrap="square"/>
+                    <a:lstStyle/>
+                    <a:p>
+                      <a:pPr algn="r"/>
+                      <a:r>
+                        <a:rPr sz="1000" b="0">
+                          <a:solidFill>
+                            <a:srgbClr val="000000"/>
+                          </a:solidFill>
+                          <a:latin typeface="맑은 고딕"/>
+                          <a:ea typeface="맑은 고딕"/>
+                          <a:cs typeface="맑은 고딕"/>
+                        </a:rPr>
+                        <a:t>약 150,000</a:t>
+                      </a:r>
+                    </a:p>
+                  </a:txBody>
+                  <a:tcPr anchor="ctr" marL="36000" marR="36000" marT="0" marB="0">
+                    <a:lnL w="9525" cap="flat">
+                      <a:solidFill>
+                        <a:srgbClr val="BFBFBF"/>
+                      </a:solidFill>
+                    </a:lnL>
+                    <a:lnR w="9525" cap="flat">
+                      <a:solidFill>
+                        <a:srgbClr val="BFBFBF"/>
+                      </a:solidFill>
+                    </a:lnR>
+                    <a:lnT w="9525" cap="flat">
+                      <a:solidFill>
+                        <a:srgbClr val="BFBFBF"/>
+                      </a:solidFill>
+                    </a:lnT>
+                    <a:lnB w="9525" cap="flat">
+                      <a:solidFill>
+                        <a:srgbClr val="BFBFBF"/>
+                      </a:solidFill>
+                    </a:lnB>
+                    <a:solidFill>
+                      <a:srgbClr val="FFFFFF"/>
+                    </a:solidFill>
+                  </a:tcPr>
+                </a:tc>
+                <a:tc>
+                  <a:txBody>
+                    <a:bodyPr wrap="square"/>
+                    <a:lstStyle/>
+                    <a:p>
+                      <a:pPr algn="ctr"/>
+                      <a:r>
+                        <a:rPr sz="1000" b="0">
+                          <a:solidFill>
+                            <a:srgbClr val="000000"/>
+                          </a:solidFill>
+                          <a:latin typeface="맑은 고딕"/>
+                          <a:ea typeface="맑은 고딕"/>
+                          <a:cs typeface="맑은 고딕"/>
+                        </a:rPr>
+                        <a:t>2시간 배송 기반</a:t>
+                      </a:r>
+                    </a:p>
+                  </a:txBody>
+                  <a:tcPr anchor="ctr" marL="36000" marR="36000" marT="0" marB="0">
+                    <a:lnL w="9525" cap="flat">
+                      <a:solidFill>
+                        <a:srgbClr val="BFBFBF"/>
+                      </a:solidFill>
+                    </a:lnL>
+                    <a:lnR w="9525" cap="flat">
+                      <a:solidFill>
+                        <a:srgbClr val="BFBFBF"/>
+                      </a:solidFill>
+                    </a:lnR>
+                    <a:lnT w="9525" cap="flat">
+                      <a:solidFill>
+                        <a:srgbClr val="BFBFBF"/>
+                      </a:solidFill>
+                    </a:lnT>
+                    <a:lnB w="9525" cap="flat">
+                      <a:solidFill>
+                        <a:srgbClr val="BFBFBF"/>
+                      </a:solidFill>
+                    </a:lnB>
+                    <a:solidFill>
+                      <a:srgbClr val="FFFFFF"/>
+                    </a:solidFill>
+                  </a:tcPr>
+                </a:tc>
+              </a:tr>
+              <a:tr h="234000">
+                <a:tc>
+                  <a:txBody>
+                    <a:bodyPr wrap="square"/>
+                    <a:lstStyle/>
+                    <a:p>
+                      <a:pPr algn="ctr"/>
+                      <a:r>
+                        <a:rPr sz="1000" b="1">
+                          <a:solidFill>
+                            <a:srgbClr val="000000"/>
+                          </a:solidFill>
+                          <a:latin typeface="맑은 고딕"/>
+                          <a:ea typeface="맑은 고딕"/>
+                          <a:cs typeface="맑은 고딕"/>
+                        </a:rPr>
+                        <a:t>바로퀵</a:t>
+                      </a:r>
+                    </a:p>
+                  </a:txBody>
+                  <a:tcPr anchor="ctr" marL="36000" marR="36000" marT="0" marB="0">
+                    <a:lnL w="9525" cap="flat">
+                      <a:solidFill>
+                        <a:srgbClr val="BFBFBF"/>
+                      </a:solidFill>
+                    </a:lnL>
+                    <a:lnR w="9525" cap="flat">
+                      <a:solidFill>
+                        <a:srgbClr val="BFBFBF"/>
+                      </a:solidFill>
+                    </a:lnR>
+                    <a:lnT w="9525" cap="flat">
+                      <a:solidFill>
+                        <a:srgbClr val="BFBFBF"/>
+                      </a:solidFill>
+                    </a:lnT>
+                    <a:lnB w="9525" cap="flat">
+                      <a:solidFill>
+                        <a:srgbClr val="BFBFBF"/>
+                      </a:solidFill>
+                    </a:lnB>
+                    <a:solidFill>
+                      <a:srgbClr val="FFFFFF"/>
+                    </a:solidFill>
+                  </a:tcPr>
+                </a:tc>
+                <a:tc>
+                  <a:txBody>
+                    <a:bodyPr wrap="square"/>
+                    <a:lstStyle/>
+                    <a:p>
+                      <a:pPr algn="r"/>
+                      <a:r>
+                        <a:rPr sz="1000" b="0">
+                          <a:solidFill>
+                            <a:srgbClr val="000000"/>
+                          </a:solidFill>
+                          <a:latin typeface="맑은 고딕"/>
+                          <a:ea typeface="맑은 고딕"/>
+                          <a:cs typeface="맑은 고딕"/>
+                        </a:rPr>
+                        <a:t>약 10,000</a:t>
+                      </a:r>
+                    </a:p>
+                  </a:txBody>
+                  <a:tcPr anchor="ctr" marL="36000" marR="36000" marT="0" marB="0">
+                    <a:lnL w="9525" cap="flat">
+                      <a:solidFill>
+                        <a:srgbClr val="BFBFBF"/>
+                      </a:solidFill>
+                    </a:lnL>
+                    <a:lnR w="9525" cap="flat">
+                      <a:solidFill>
+                        <a:srgbClr val="BFBFBF"/>
+                      </a:solidFill>
+                    </a:lnR>
+                    <a:lnT w="9525" cap="flat">
+                      <a:solidFill>
+                        <a:srgbClr val="BFBFBF"/>
+                      </a:solidFill>
+                    </a:lnT>
+                    <a:lnB w="9525" cap="flat">
+                      <a:solidFill>
+                        <a:srgbClr val="BFBFBF"/>
+                      </a:solidFill>
+                    </a:lnB>
+                    <a:solidFill>
+                      <a:srgbClr val="FFFFFF"/>
+                    </a:solidFill>
+                  </a:tcPr>
+                </a:tc>
+                <a:tc>
+                  <a:txBody>
+                    <a:bodyPr wrap="square"/>
+                    <a:lstStyle/>
+                    <a:p>
+                      <a:pPr algn="ctr"/>
+                      <a:r>
+                        <a:rPr sz="1000" b="0">
+                          <a:solidFill>
+                            <a:srgbClr val="000000"/>
+                          </a:solidFill>
+                          <a:latin typeface="맑은 고딕"/>
+                          <a:ea typeface="맑은 고딕"/>
+                          <a:cs typeface="맑은 고딕"/>
+                        </a:rPr>
+                        <a:t>이륜차 적재 한계</a:t>
+                      </a:r>
+                    </a:p>
+                  </a:txBody>
+                  <a:tcPr anchor="ctr" marL="36000" marR="36000" marT="0" marB="0">
+                    <a:lnL w="9525" cap="flat">
+                      <a:solidFill>
+                        <a:srgbClr val="BFBFBF"/>
+                      </a:solidFill>
+                    </a:lnL>
+                    <a:lnR w="9525" cap="flat">
+                      <a:solidFill>
+                        <a:srgbClr val="BFBFBF"/>
+                      </a:solidFill>
+                    </a:lnR>
+                    <a:lnT w="9525" cap="flat">
+                      <a:solidFill>
+                        <a:srgbClr val="BFBFBF"/>
+                      </a:solidFill>
+                    </a:lnT>
+                    <a:lnB w="9525" cap="flat">
+                      <a:solidFill>
+                        <a:srgbClr val="BFBFBF"/>
+                      </a:solidFill>
+                    </a:lnB>
+                    <a:solidFill>
+                      <a:srgbClr val="FFFFFF"/>
+                    </a:solidFill>
+                  </a:tcPr>
+                </a:tc>
+              </a:tr>
+              <a:tr h="234000">
+                <a:tc>
+                  <a:txBody>
+                    <a:bodyPr wrap="square"/>
+                    <a:lstStyle/>
+                    <a:p>
+                      <a:pPr algn="ctr"/>
+                      <a:r>
+                        <a:rPr sz="1000" b="1">
+                          <a:solidFill>
+                            <a:srgbClr val="000000"/>
+                          </a:solidFill>
+                          <a:latin typeface="맑은 고딕"/>
+                          <a:ea typeface="맑은 고딕"/>
+                          <a:cs typeface="맑은 고딕"/>
+                        </a:rPr>
+                        <a:t>B마트</a:t>
+                      </a:r>
+                    </a:p>
+                  </a:txBody>
+                  <a:tcPr anchor="ctr" marL="36000" marR="36000" marT="0" marB="0">
+                    <a:lnL w="9525" cap="flat">
+                      <a:solidFill>
+                        <a:srgbClr val="BFBFBF"/>
+                      </a:solidFill>
+                    </a:lnL>
+                    <a:lnR w="9525" cap="flat">
+                      <a:solidFill>
+                        <a:srgbClr val="BFBFBF"/>
+                      </a:solidFill>
+                    </a:lnR>
+                    <a:lnT w="9525" cap="flat">
+                      <a:solidFill>
+                        <a:srgbClr val="BFBFBF"/>
+                      </a:solidFill>
+                    </a:lnT>
+                    <a:lnB w="9525" cap="flat">
+                      <a:solidFill>
+                        <a:srgbClr val="BFBFBF"/>
+                      </a:solidFill>
+                    </a:lnB>
+                    <a:solidFill>
+                      <a:srgbClr val="FFFFFF"/>
+                    </a:solidFill>
+                  </a:tcPr>
+                </a:tc>
+                <a:tc>
+                  <a:txBody>
+                    <a:bodyPr wrap="square"/>
+                    <a:lstStyle/>
+                    <a:p>
+                      <a:pPr algn="r"/>
+                      <a:r>
+                        <a:rPr sz="1000" b="0">
+                          <a:solidFill>
+                            <a:srgbClr val="000000"/>
+                          </a:solidFill>
+                          <a:latin typeface="맑은 고딕"/>
+                          <a:ea typeface="맑은 고딕"/>
+                          <a:cs typeface="맑은 고딕"/>
+                        </a:rPr>
+                        <a:t>약 20,000</a:t>
+                      </a:r>
+                    </a:p>
+                  </a:txBody>
+                  <a:tcPr anchor="ctr" marL="36000" marR="36000" marT="0" marB="0">
+                    <a:lnL w="9525" cap="flat">
+                      <a:solidFill>
+                        <a:srgbClr val="BFBFBF"/>
+                      </a:solidFill>
+                    </a:lnL>
+                    <a:lnR w="9525" cap="flat">
+                      <a:solidFill>
+                        <a:srgbClr val="BFBFBF"/>
+                      </a:solidFill>
+                    </a:lnR>
+                    <a:lnT w="9525" cap="flat">
+                      <a:solidFill>
+                        <a:srgbClr val="BFBFBF"/>
+                      </a:solidFill>
+                    </a:lnT>
+                    <a:lnB w="9525" cap="flat">
+                      <a:solidFill>
+                        <a:srgbClr val="BFBFBF"/>
+                      </a:solidFill>
+                    </a:lnB>
+                    <a:solidFill>
+                      <a:srgbClr val="FFFFFF"/>
+                    </a:solidFill>
+                  </a:tcPr>
+                </a:tc>
+                <a:tc>
+                  <a:txBody>
+                    <a:bodyPr wrap="square"/>
+                    <a:lstStyle/>
+                    <a:p>
+                      <a:pPr algn="ctr"/>
+                      <a:r>
+                        <a:rPr sz="1000" b="0">
+                          <a:solidFill>
+                            <a:srgbClr val="000000"/>
+                          </a:solidFill>
+                          <a:latin typeface="맑은 고딕"/>
+                          <a:ea typeface="맑은 고딕"/>
+                          <a:cs typeface="맑은 고딕"/>
+                        </a:rPr>
+                        <a:t>퀵커머스 1위</a:t>
+                      </a:r>
+                    </a:p>
+                  </a:txBody>
+                  <a:tcPr anchor="ctr" marL="36000" marR="36000" marT="0" marB="0">
+                    <a:lnL w="9525" cap="flat">
+                      <a:solidFill>
+                        <a:srgbClr val="BFBFBF"/>
+                      </a:solidFill>
+                    </a:lnL>
+                    <a:lnR w="9525" cap="flat">
+                      <a:solidFill>
+                        <a:srgbClr val="BFBFBF"/>
+                      </a:solidFill>
+                    </a:lnR>
+                    <a:lnT w="9525" cap="flat">
+                      <a:solidFill>
+                        <a:srgbClr val="BFBFBF"/>
+                      </a:solidFill>
+                    </a:lnT>
+                    <a:lnB w="9525" cap="flat">
+                      <a:solidFill>
+                        <a:srgbClr val="BFBFBF"/>
+                      </a:solidFill>
+                    </a:lnB>
+                    <a:solidFill>
+                      <a:srgbClr val="FFFFFF"/>
+                    </a:solidFill>
+                  </a:tcPr>
+                </a:tc>
+              </a:tr>
+            </a:tbl>
+          </a:graphicData>
+        </a:graphic>
+      </p:graphicFrame>
+      <p:sp>
+        <p:nvSpPr>
+          <p:cNvPr id="15" name="TextBox 14"/>
+          <p:cNvSpPr txBox="1"/>
           <p:nvPr/>
         </p:nvSpPr>
         <p:spPr>
           <a:xfrm>
-            <a:off x="1324800" y="4823999"/>
-            <a:ext cx="1958400" cy="702000"/>
-          </a:xfrm>
-          <a:prstGeom prst="rect">
-            <a:avLst/>
-          </a:prstGeom>
-          <a:solidFill>
-            <a:srgbClr val="000066"/>
-          </a:solidFill>
-          <a:ln>
-            <a:noFill/>
-          </a:ln>
-          <a:effectLst/>
-        </p:spPr>
-        <p:style>
-          <a:lnRef idx="1">
-            <a:schemeClr val="accent1"/>
-          </a:lnRef>
-          <a:fillRef idx="3">
-            <a:schemeClr val="accent1"/>
-          </a:fillRef>
-          <a:effectRef idx="2">
-            <a:schemeClr val="accent1"/>
-          </a:effectRef>
-          <a:fontRef idx="minor">
-            <a:schemeClr val="lt1"/>
-          </a:fontRef>
-        </p:style>
-        <p:txBody>
-          <a:bodyPr rtlCol="0" anchor="ctr"/>
-          <a:lstStyle/>
-          <a:p>
-            <a:pPr algn="ctr"/>
-          </a:p>
-        </p:txBody>
-      </p:sp>
-      <p:sp>
-        <p:nvSpPr>
-          <p:cNvPr id="29" name="TextBox 28"/>
-          <p:cNvSpPr txBox="1"/>
-          <p:nvPr/>
-        </p:nvSpPr>
-        <p:spPr>
-          <a:xfrm>
-            <a:off x="1324800" y="4878000"/>
-            <a:ext cx="1958400" cy="144000"/>
+            <a:off x="5072400" y="4377600"/>
+            <a:ext cx="4410000" cy="198000"/>
           </a:xfrm>
           <a:prstGeom prst="rect">
             <a:avLst/>
@@ -5544,569 +5494,424 @@
           </a:bodyPr>
           <a:lstStyle/>
           <a:p>
-            <a:pPr algn="ctr"/>
-            <a:r>
-              <a:rPr sz="900" b="0">
+            <a:pPr algn="l"/>
+            <a:r>
+              <a:rPr sz="1200" b="1">
                 <a:solidFill>
-                  <a:srgbClr val="FFFFFF"/>
+                  <a:srgbClr val="222222"/>
                 </a:solidFill>
                 <a:latin typeface="맑은 고딕"/>
                 <a:ea typeface="맑은 고딕"/>
                 <a:cs typeface="맑은 고딕"/>
               </a:rPr>
-              <a:t>'26. 7월</a:t>
-            </a:r>
-          </a:p>
-        </p:txBody>
-      </p:sp>
-      <p:sp>
-        <p:nvSpPr>
-          <p:cNvPr id="30" name="TextBox 29"/>
+              <a:t>• 확대 로드맵</a:t>
+            </a:r>
+          </a:p>
+        </p:txBody>
+      </p:sp>
+      <p:graphicFrame>
+        <p:nvGraphicFramePr>
+          <p:cNvPr id="16" name="Table 15"/>
+          <p:cNvGraphicFramePr>
+            <a:graphicFrameLocks noGrp="1"/>
+          </p:cNvGraphicFramePr>
+          <p:nvPr/>
+        </p:nvGraphicFramePr>
+        <p:xfrm>
+          <a:off x="5072400" y="4575600"/>
+          <a:ext cx="4410000" cy="936000"/>
+        </p:xfrm>
+        <a:graphic>
+          <a:graphicData uri="http://schemas.openxmlformats.org/drawingml/2006/table">
+            <a:tbl>
+              <a:tblPr>
+                <a:tableStyleId>{5C22544A-7EE6-4342-B048-85BDC9FD1C3A}</a:tableStyleId>
+              </a:tblPr>
+              <a:tblGrid>
+                <a:gridCol w="1404000"/>
+                <a:gridCol w="3006000"/>
+              </a:tblGrid>
+              <a:tr h="234000">
+                <a:tc>
+                  <a:txBody>
+                    <a:bodyPr wrap="square"/>
+                    <a:lstStyle/>
+                    <a:p>
+                      <a:pPr algn="ctr"/>
+                      <a:r>
+                        <a:rPr sz="1000" b="1">
+                          <a:solidFill>
+                            <a:srgbClr val="000066"/>
+                          </a:solidFill>
+                          <a:latin typeface="맑은 고딕"/>
+                          <a:ea typeface="맑은 고딕"/>
+                          <a:cs typeface="맑은 고딕"/>
+                        </a:rPr>
+                        <a:t>시기</a:t>
+                      </a:r>
+                    </a:p>
+                  </a:txBody>
+                  <a:tcPr anchor="ctr" marL="36000" marR="36000" marT="0" marB="0">
+                    <a:lnL w="9525" cap="flat">
+                      <a:solidFill>
+                        <a:srgbClr val="BFBFBF"/>
+                      </a:solidFill>
+                    </a:lnL>
+                    <a:lnR w="9525" cap="flat">
+                      <a:solidFill>
+                        <a:srgbClr val="BFBFBF"/>
+                      </a:solidFill>
+                    </a:lnR>
+                    <a:lnT w="9525" cap="flat">
+                      <a:solidFill>
+                        <a:srgbClr val="BFBFBF"/>
+                      </a:solidFill>
+                    </a:lnT>
+                    <a:lnB w="9525" cap="flat">
+                      <a:solidFill>
+                        <a:srgbClr val="BFBFBF"/>
+                      </a:solidFill>
+                    </a:lnB>
+                    <a:solidFill>
+                      <a:srgbClr val="D8E0EC"/>
+                    </a:solidFill>
+                  </a:tcPr>
+                </a:tc>
+                <a:tc>
+                  <a:txBody>
+                    <a:bodyPr wrap="square"/>
+                    <a:lstStyle/>
+                    <a:p>
+                      <a:pPr algn="ctr"/>
+                      <a:r>
+                        <a:rPr sz="1000" b="1">
+                          <a:solidFill>
+                            <a:srgbClr val="000066"/>
+                          </a:solidFill>
+                          <a:latin typeface="맑은 고딕"/>
+                          <a:ea typeface="맑은 고딕"/>
+                          <a:cs typeface="맑은 고딕"/>
+                        </a:rPr>
+                        <a:t>계획</a:t>
+                      </a:r>
+                    </a:p>
+                  </a:txBody>
+                  <a:tcPr anchor="ctr" marL="36000" marR="36000" marT="0" marB="0">
+                    <a:lnL w="9525" cap="flat">
+                      <a:solidFill>
+                        <a:srgbClr val="BFBFBF"/>
+                      </a:solidFill>
+                    </a:lnL>
+                    <a:lnR w="9525" cap="flat">
+                      <a:solidFill>
+                        <a:srgbClr val="BFBFBF"/>
+                      </a:solidFill>
+                    </a:lnR>
+                    <a:lnT w="9525" cap="flat">
+                      <a:solidFill>
+                        <a:srgbClr val="BFBFBF"/>
+                      </a:solidFill>
+                    </a:lnT>
+                    <a:lnB w="9525" cap="flat">
+                      <a:solidFill>
+                        <a:srgbClr val="BFBFBF"/>
+                      </a:solidFill>
+                    </a:lnB>
+                    <a:solidFill>
+                      <a:srgbClr val="D8E0EC"/>
+                    </a:solidFill>
+                  </a:tcPr>
+                </a:tc>
+              </a:tr>
+              <a:tr h="234000">
+                <a:tc>
+                  <a:txBody>
+                    <a:bodyPr wrap="square"/>
+                    <a:lstStyle/>
+                    <a:p>
+                      <a:pPr algn="ctr"/>
+                      <a:r>
+                        <a:rPr sz="1000" b="1">
+                          <a:solidFill>
+                            <a:srgbClr val="000000"/>
+                          </a:solidFill>
+                          <a:latin typeface="맑은 고딕"/>
+                          <a:ea typeface="맑은 고딕"/>
+                          <a:cs typeface="맑은 고딕"/>
+                        </a:rPr>
+                        <a:t>'26. 7월</a:t>
+                      </a:r>
+                    </a:p>
+                  </a:txBody>
+                  <a:tcPr anchor="ctr" marL="36000" marR="36000" marT="0" marB="0">
+                    <a:lnL w="9525" cap="flat">
+                      <a:solidFill>
+                        <a:srgbClr val="BFBFBF"/>
+                      </a:solidFill>
+                    </a:lnL>
+                    <a:lnR w="9525" cap="flat">
+                      <a:solidFill>
+                        <a:srgbClr val="BFBFBF"/>
+                      </a:solidFill>
+                    </a:lnR>
+                    <a:lnT w="9525" cap="flat">
+                      <a:solidFill>
+                        <a:srgbClr val="BFBFBF"/>
+                      </a:solidFill>
+                    </a:lnT>
+                    <a:lnB w="9525" cap="flat">
+                      <a:solidFill>
+                        <a:srgbClr val="BFBFBF"/>
+                      </a:solidFill>
+                    </a:lnB>
+                    <a:solidFill>
+                      <a:srgbClr val="FFFFFF"/>
+                    </a:solidFill>
+                  </a:tcPr>
+                </a:tc>
+                <a:tc>
+                  <a:txBody>
+                    <a:bodyPr wrap="square"/>
+                    <a:lstStyle/>
+                    <a:p>
+                      <a:pPr algn="ctr"/>
+                      <a:r>
+                        <a:rPr sz="1000" b="0">
+                          <a:solidFill>
+                            <a:srgbClr val="000000"/>
+                          </a:solidFill>
+                          <a:latin typeface="맑은 고딕"/>
+                          <a:ea typeface="맑은 고딕"/>
+                          <a:cs typeface="맑은 고딕"/>
+                        </a:rPr>
+                        <a:t>양재·하남점 시범 운영</a:t>
+                      </a:r>
+                    </a:p>
+                  </a:txBody>
+                  <a:tcPr anchor="ctr" marL="36000" marR="36000" marT="0" marB="0">
+                    <a:lnL w="9525" cap="flat">
+                      <a:solidFill>
+                        <a:srgbClr val="BFBFBF"/>
+                      </a:solidFill>
+                    </a:lnL>
+                    <a:lnR w="9525" cap="flat">
+                      <a:solidFill>
+                        <a:srgbClr val="BFBFBF"/>
+                      </a:solidFill>
+                    </a:lnR>
+                    <a:lnT w="9525" cap="flat">
+                      <a:solidFill>
+                        <a:srgbClr val="BFBFBF"/>
+                      </a:solidFill>
+                    </a:lnT>
+                    <a:lnB w="9525" cap="flat">
+                      <a:solidFill>
+                        <a:srgbClr val="BFBFBF"/>
+                      </a:solidFill>
+                    </a:lnB>
+                    <a:solidFill>
+                      <a:srgbClr val="FFFFFF"/>
+                    </a:solidFill>
+                  </a:tcPr>
+                </a:tc>
+              </a:tr>
+              <a:tr h="234000">
+                <a:tc>
+                  <a:txBody>
+                    <a:bodyPr wrap="square"/>
+                    <a:lstStyle/>
+                    <a:p>
+                      <a:pPr algn="ctr"/>
+                      <a:r>
+                        <a:rPr sz="1000" b="1">
+                          <a:solidFill>
+                            <a:srgbClr val="000000"/>
+                          </a:solidFill>
+                          <a:latin typeface="맑은 고딕"/>
+                          <a:ea typeface="맑은 고딕"/>
+                          <a:cs typeface="맑은 고딕"/>
+                        </a:rPr>
+                        <a:t>'26. 8월</a:t>
+                      </a:r>
+                    </a:p>
+                  </a:txBody>
+                  <a:tcPr anchor="ctr" marL="36000" marR="36000" marT="0" marB="0">
+                    <a:lnL w="9525" cap="flat">
+                      <a:solidFill>
+                        <a:srgbClr val="BFBFBF"/>
+                      </a:solidFill>
+                    </a:lnL>
+                    <a:lnR w="9525" cap="flat">
+                      <a:solidFill>
+                        <a:srgbClr val="BFBFBF"/>
+                      </a:solidFill>
+                    </a:lnR>
+                    <a:lnT w="9525" cap="flat">
+                      <a:solidFill>
+                        <a:srgbClr val="BFBFBF"/>
+                      </a:solidFill>
+                    </a:lnT>
+                    <a:lnB w="9525" cap="flat">
+                      <a:solidFill>
+                        <a:srgbClr val="BFBFBF"/>
+                      </a:solidFill>
+                    </a:lnB>
+                    <a:solidFill>
+                      <a:srgbClr val="FFFFFF"/>
+                    </a:solidFill>
+                  </a:tcPr>
+                </a:tc>
+                <a:tc>
+                  <a:txBody>
+                    <a:bodyPr wrap="square"/>
+                    <a:lstStyle/>
+                    <a:p>
+                      <a:pPr algn="ctr"/>
+                      <a:r>
+                        <a:rPr sz="1000" b="0">
+                          <a:solidFill>
+                            <a:srgbClr val="000000"/>
+                          </a:solidFill>
+                          <a:latin typeface="맑은 고딕"/>
+                          <a:ea typeface="맑은 고딕"/>
+                          <a:cs typeface="맑은 고딕"/>
+                        </a:rPr>
+                        <a:t>서울 주요 지역 확대</a:t>
+                      </a:r>
+                    </a:p>
+                  </a:txBody>
+                  <a:tcPr anchor="ctr" marL="36000" marR="36000" marT="0" marB="0">
+                    <a:lnL w="9525" cap="flat">
+                      <a:solidFill>
+                        <a:srgbClr val="BFBFBF"/>
+                      </a:solidFill>
+                    </a:lnL>
+                    <a:lnR w="9525" cap="flat">
+                      <a:solidFill>
+                        <a:srgbClr val="BFBFBF"/>
+                      </a:solidFill>
+                    </a:lnR>
+                    <a:lnT w="9525" cap="flat">
+                      <a:solidFill>
+                        <a:srgbClr val="BFBFBF"/>
+                      </a:solidFill>
+                    </a:lnT>
+                    <a:lnB w="9525" cap="flat">
+                      <a:solidFill>
+                        <a:srgbClr val="BFBFBF"/>
+                      </a:solidFill>
+                    </a:lnB>
+                    <a:solidFill>
+                      <a:srgbClr val="FFFFFF"/>
+                    </a:solidFill>
+                  </a:tcPr>
+                </a:tc>
+              </a:tr>
+              <a:tr h="234000">
+                <a:tc>
+                  <a:txBody>
+                    <a:bodyPr wrap="square"/>
+                    <a:lstStyle/>
+                    <a:p>
+                      <a:pPr algn="ctr"/>
+                      <a:r>
+                        <a:rPr sz="1000" b="1">
+                          <a:solidFill>
+                            <a:srgbClr val="000000"/>
+                          </a:solidFill>
+                          <a:latin typeface="맑은 고딕"/>
+                          <a:ea typeface="맑은 고딕"/>
+                          <a:cs typeface="맑은 고딕"/>
+                        </a:rPr>
+                        <a:t>'26. 9월 → 연말</a:t>
+                      </a:r>
+                    </a:p>
+                  </a:txBody>
+                  <a:tcPr anchor="ctr" marL="36000" marR="36000" marT="0" marB="0">
+                    <a:lnL w="9525" cap="flat">
+                      <a:solidFill>
+                        <a:srgbClr val="BFBFBF"/>
+                      </a:solidFill>
+                    </a:lnL>
+                    <a:lnR w="9525" cap="flat">
+                      <a:solidFill>
+                        <a:srgbClr val="BFBFBF"/>
+                      </a:solidFill>
+                    </a:lnR>
+                    <a:lnT w="9525" cap="flat">
+                      <a:solidFill>
+                        <a:srgbClr val="BFBFBF"/>
+                      </a:solidFill>
+                    </a:lnT>
+                    <a:lnB w="9525" cap="flat">
+                      <a:solidFill>
+                        <a:srgbClr val="BFBFBF"/>
+                      </a:solidFill>
+                    </a:lnB>
+                    <a:solidFill>
+                      <a:srgbClr val="FFFFFF"/>
+                    </a:solidFill>
+                  </a:tcPr>
+                </a:tc>
+                <a:tc>
+                  <a:txBody>
+                    <a:bodyPr wrap="square"/>
+                    <a:lstStyle/>
+                    <a:p>
+                      <a:pPr algn="ctr"/>
+                      <a:r>
+                        <a:rPr sz="1000" b="0">
+                          <a:solidFill>
+                            <a:srgbClr val="000000"/>
+                          </a:solidFill>
+                          <a:latin typeface="맑은 고딕"/>
+                          <a:ea typeface="맑은 고딕"/>
+                          <a:cs typeface="맑은 고딕"/>
+                        </a:rPr>
+                        <a:t>전국 확대 → 50여 개 점포</a:t>
+                      </a:r>
+                    </a:p>
+                  </a:txBody>
+                  <a:tcPr anchor="ctr" marL="36000" marR="36000" marT="0" marB="0">
+                    <a:lnL w="9525" cap="flat">
+                      <a:solidFill>
+                        <a:srgbClr val="BFBFBF"/>
+                      </a:solidFill>
+                    </a:lnL>
+                    <a:lnR w="9525" cap="flat">
+                      <a:solidFill>
+                        <a:srgbClr val="BFBFBF"/>
+                      </a:solidFill>
+                    </a:lnR>
+                    <a:lnT w="9525" cap="flat">
+                      <a:solidFill>
+                        <a:srgbClr val="BFBFBF"/>
+                      </a:solidFill>
+                    </a:lnT>
+                    <a:lnB w="9525" cap="flat">
+                      <a:solidFill>
+                        <a:srgbClr val="BFBFBF"/>
+                      </a:solidFill>
+                    </a:lnB>
+                    <a:solidFill>
+                      <a:srgbClr val="FFFFFF"/>
+                    </a:solidFill>
+                  </a:tcPr>
+                </a:tc>
+              </a:tr>
+            </a:tbl>
+          </a:graphicData>
+        </a:graphic>
+      </p:graphicFrame>
+      <p:sp>
+        <p:nvSpPr>
+          <p:cNvPr id="17" name="TextBox 16"/>
           <p:cNvSpPr txBox="1"/>
           <p:nvPr/>
         </p:nvSpPr>
         <p:spPr>
           <a:xfrm>
-            <a:off x="1324800" y="5039999"/>
-            <a:ext cx="1958400" cy="198000"/>
-          </a:xfrm>
-          <a:prstGeom prst="rect">
-            <a:avLst/>
-          </a:prstGeom>
-          <a:noFill/>
-        </p:spPr>
-        <p:txBody>
-          <a:bodyPr wrap="square" anchor="t" lIns="0" rIns="0" tIns="0" bIns="0">
-            <a:spAutoFit/>
-          </a:bodyPr>
-          <a:lstStyle/>
-          <a:p>
-            <a:pPr algn="ctr"/>
-            <a:r>
-              <a:rPr sz="1100" b="1">
-                <a:solidFill>
-                  <a:srgbClr val="FFFFFF"/>
-                </a:solidFill>
-                <a:latin typeface="맑은 고딕"/>
-                <a:ea typeface="맑은 고딕"/>
-                <a:cs typeface="맑은 고딕"/>
-              </a:rPr>
-              <a:t>양재·하남 시범</a:t>
-            </a:r>
-          </a:p>
-        </p:txBody>
-      </p:sp>
-      <p:sp>
-        <p:nvSpPr>
-          <p:cNvPr id="31" name="TextBox 30"/>
-          <p:cNvSpPr txBox="1"/>
-          <p:nvPr/>
-        </p:nvSpPr>
-        <p:spPr>
-          <a:xfrm>
-            <a:off x="1324800" y="5255999"/>
-            <a:ext cx="1958400" cy="144000"/>
-          </a:xfrm>
-          <a:prstGeom prst="rect">
-            <a:avLst/>
-          </a:prstGeom>
-          <a:noFill/>
-        </p:spPr>
-        <p:txBody>
-          <a:bodyPr wrap="square" anchor="t" lIns="0" rIns="0" tIns="0" bIns="0">
-            <a:spAutoFit/>
-          </a:bodyPr>
-          <a:lstStyle/>
-          <a:p>
-            <a:pPr algn="ctr"/>
-            <a:r>
-              <a:rPr sz="900" b="0">
-                <a:solidFill>
-                  <a:srgbClr val="FFFFFF"/>
-                </a:solidFill>
-                <a:latin typeface="맑은 고딕"/>
-                <a:ea typeface="맑은 고딕"/>
-                <a:cs typeface="맑은 고딕"/>
-              </a:rPr>
-              <a:t>7. 9. 개시</a:t>
-            </a:r>
-          </a:p>
-        </p:txBody>
-      </p:sp>
-      <p:sp>
-        <p:nvSpPr>
-          <p:cNvPr id="32" name="Rectangle 31"/>
-          <p:cNvSpPr/>
-          <p:nvPr/>
-        </p:nvSpPr>
-        <p:spPr>
-          <a:xfrm>
-            <a:off x="3391200" y="4823999"/>
-            <a:ext cx="1958400" cy="702000"/>
-          </a:xfrm>
-          <a:prstGeom prst="rect">
-            <a:avLst/>
-          </a:prstGeom>
-          <a:solidFill>
-            <a:srgbClr val="F2F2F2"/>
-          </a:solidFill>
-          <a:ln>
-            <a:noFill/>
-          </a:ln>
-          <a:effectLst/>
-        </p:spPr>
-        <p:style>
-          <a:lnRef idx="1">
-            <a:schemeClr val="accent1"/>
-          </a:lnRef>
-          <a:fillRef idx="3">
-            <a:schemeClr val="accent1"/>
-          </a:fillRef>
-          <a:effectRef idx="2">
-            <a:schemeClr val="accent1"/>
-          </a:effectRef>
-          <a:fontRef idx="minor">
-            <a:schemeClr val="lt1"/>
-          </a:fontRef>
-        </p:style>
-        <p:txBody>
-          <a:bodyPr rtlCol="0" anchor="ctr"/>
-          <a:lstStyle/>
-          <a:p>
-            <a:pPr algn="ctr"/>
-          </a:p>
-        </p:txBody>
-      </p:sp>
-      <p:sp>
-        <p:nvSpPr>
-          <p:cNvPr id="33" name="TextBox 32"/>
-          <p:cNvSpPr txBox="1"/>
-          <p:nvPr/>
-        </p:nvSpPr>
-        <p:spPr>
-          <a:xfrm>
-            <a:off x="3391200" y="4878000"/>
-            <a:ext cx="1958400" cy="144000"/>
-          </a:xfrm>
-          <a:prstGeom prst="rect">
-            <a:avLst/>
-          </a:prstGeom>
-          <a:noFill/>
-        </p:spPr>
-        <p:txBody>
-          <a:bodyPr wrap="square" anchor="t" lIns="0" rIns="0" tIns="0" bIns="0">
-            <a:spAutoFit/>
-          </a:bodyPr>
-          <a:lstStyle/>
-          <a:p>
-            <a:pPr algn="ctr"/>
-            <a:r>
-              <a:rPr sz="900" b="0">
-                <a:solidFill>
-                  <a:srgbClr val="595959"/>
-                </a:solidFill>
-                <a:latin typeface="맑은 고딕"/>
-                <a:ea typeface="맑은 고딕"/>
-                <a:cs typeface="맑은 고딕"/>
-              </a:rPr>
-              <a:t>'26. 8월</a:t>
-            </a:r>
-          </a:p>
-        </p:txBody>
-      </p:sp>
-      <p:sp>
-        <p:nvSpPr>
-          <p:cNvPr id="34" name="TextBox 33"/>
-          <p:cNvSpPr txBox="1"/>
-          <p:nvPr/>
-        </p:nvSpPr>
-        <p:spPr>
-          <a:xfrm>
-            <a:off x="3391200" y="5039999"/>
-            <a:ext cx="1958400" cy="198000"/>
-          </a:xfrm>
-          <a:prstGeom prst="rect">
-            <a:avLst/>
-          </a:prstGeom>
-          <a:noFill/>
-        </p:spPr>
-        <p:txBody>
-          <a:bodyPr wrap="square" anchor="t" lIns="0" rIns="0" tIns="0" bIns="0">
-            <a:spAutoFit/>
-          </a:bodyPr>
-          <a:lstStyle/>
-          <a:p>
-            <a:pPr algn="ctr"/>
-            <a:r>
-              <a:rPr sz="1100" b="1">
-                <a:solidFill>
-                  <a:srgbClr val="000000"/>
-                </a:solidFill>
-                <a:latin typeface="맑은 고딕"/>
-                <a:ea typeface="맑은 고딕"/>
-                <a:cs typeface="맑은 고딕"/>
-              </a:rPr>
-              <a:t>서울 확대</a:t>
-            </a:r>
-          </a:p>
-        </p:txBody>
-      </p:sp>
-      <p:sp>
-        <p:nvSpPr>
-          <p:cNvPr id="35" name="TextBox 34"/>
-          <p:cNvSpPr txBox="1"/>
-          <p:nvPr/>
-        </p:nvSpPr>
-        <p:spPr>
-          <a:xfrm>
-            <a:off x="3391200" y="5255999"/>
-            <a:ext cx="1958400" cy="144000"/>
-          </a:xfrm>
-          <a:prstGeom prst="rect">
-            <a:avLst/>
-          </a:prstGeom>
-          <a:noFill/>
-        </p:spPr>
-        <p:txBody>
-          <a:bodyPr wrap="square" anchor="t" lIns="0" rIns="0" tIns="0" bIns="0">
-            <a:spAutoFit/>
-          </a:bodyPr>
-          <a:lstStyle/>
-          <a:p>
-            <a:pPr algn="ctr"/>
-            <a:r>
-              <a:rPr sz="900" b="0">
-                <a:solidFill>
-                  <a:srgbClr val="595959"/>
-                </a:solidFill>
-                <a:latin typeface="맑은 고딕"/>
-                <a:ea typeface="맑은 고딕"/>
-                <a:cs typeface="맑은 고딕"/>
-              </a:rPr>
-              <a:t>주요 지역</a:t>
-            </a:r>
-          </a:p>
-        </p:txBody>
-      </p:sp>
-      <p:sp>
-        <p:nvSpPr>
-          <p:cNvPr id="36" name="Rectangle 35"/>
-          <p:cNvSpPr/>
-          <p:nvPr/>
-        </p:nvSpPr>
-        <p:spPr>
-          <a:xfrm>
-            <a:off x="5457600" y="4823999"/>
-            <a:ext cx="1958400" cy="702000"/>
-          </a:xfrm>
-          <a:prstGeom prst="rect">
-            <a:avLst/>
-          </a:prstGeom>
-          <a:solidFill>
-            <a:srgbClr val="F2F2F2"/>
-          </a:solidFill>
-          <a:ln>
-            <a:noFill/>
-          </a:ln>
-          <a:effectLst/>
-        </p:spPr>
-        <p:style>
-          <a:lnRef idx="1">
-            <a:schemeClr val="accent1"/>
-          </a:lnRef>
-          <a:fillRef idx="3">
-            <a:schemeClr val="accent1"/>
-          </a:fillRef>
-          <a:effectRef idx="2">
-            <a:schemeClr val="accent1"/>
-          </a:effectRef>
-          <a:fontRef idx="minor">
-            <a:schemeClr val="lt1"/>
-          </a:fontRef>
-        </p:style>
-        <p:txBody>
-          <a:bodyPr rtlCol="0" anchor="ctr"/>
-          <a:lstStyle/>
-          <a:p>
-            <a:pPr algn="ctr"/>
-          </a:p>
-        </p:txBody>
-      </p:sp>
-      <p:sp>
-        <p:nvSpPr>
-          <p:cNvPr id="37" name="TextBox 36"/>
-          <p:cNvSpPr txBox="1"/>
-          <p:nvPr/>
-        </p:nvSpPr>
-        <p:spPr>
-          <a:xfrm>
-            <a:off x="5457600" y="4878000"/>
-            <a:ext cx="1958400" cy="144000"/>
-          </a:xfrm>
-          <a:prstGeom prst="rect">
-            <a:avLst/>
-          </a:prstGeom>
-          <a:noFill/>
-        </p:spPr>
-        <p:txBody>
-          <a:bodyPr wrap="square" anchor="t" lIns="0" rIns="0" tIns="0" bIns="0">
-            <a:spAutoFit/>
-          </a:bodyPr>
-          <a:lstStyle/>
-          <a:p>
-            <a:pPr algn="ctr"/>
-            <a:r>
-              <a:rPr sz="900" b="0">
-                <a:solidFill>
-                  <a:srgbClr val="595959"/>
-                </a:solidFill>
-                <a:latin typeface="맑은 고딕"/>
-                <a:ea typeface="맑은 고딕"/>
-                <a:cs typeface="맑은 고딕"/>
-              </a:rPr>
-              <a:t>'26. 9월</a:t>
-            </a:r>
-          </a:p>
-        </p:txBody>
-      </p:sp>
-      <p:sp>
-        <p:nvSpPr>
-          <p:cNvPr id="38" name="TextBox 37"/>
-          <p:cNvSpPr txBox="1"/>
-          <p:nvPr/>
-        </p:nvSpPr>
-        <p:spPr>
-          <a:xfrm>
-            <a:off x="5457600" y="5039999"/>
-            <a:ext cx="1958400" cy="198000"/>
-          </a:xfrm>
-          <a:prstGeom prst="rect">
-            <a:avLst/>
-          </a:prstGeom>
-          <a:noFill/>
-        </p:spPr>
-        <p:txBody>
-          <a:bodyPr wrap="square" anchor="t" lIns="0" rIns="0" tIns="0" bIns="0">
-            <a:spAutoFit/>
-          </a:bodyPr>
-          <a:lstStyle/>
-          <a:p>
-            <a:pPr algn="ctr"/>
-            <a:r>
-              <a:rPr sz="1100" b="1">
-                <a:solidFill>
-                  <a:srgbClr val="000000"/>
-                </a:solidFill>
-                <a:latin typeface="맑은 고딕"/>
-                <a:ea typeface="맑은 고딕"/>
-                <a:cs typeface="맑은 고딕"/>
-              </a:rPr>
-              <a:t>전국 확대</a:t>
-            </a:r>
-          </a:p>
-        </p:txBody>
-      </p:sp>
-      <p:sp>
-        <p:nvSpPr>
-          <p:cNvPr id="39" name="TextBox 38"/>
-          <p:cNvSpPr txBox="1"/>
-          <p:nvPr/>
-        </p:nvSpPr>
-        <p:spPr>
-          <a:xfrm>
-            <a:off x="5457600" y="5255999"/>
-            <a:ext cx="1958400" cy="144000"/>
-          </a:xfrm>
-          <a:prstGeom prst="rect">
-            <a:avLst/>
-          </a:prstGeom>
-          <a:noFill/>
-        </p:spPr>
-        <p:txBody>
-          <a:bodyPr wrap="square" anchor="t" lIns="0" rIns="0" tIns="0" bIns="0">
-            <a:spAutoFit/>
-          </a:bodyPr>
-          <a:lstStyle/>
-          <a:p>
-            <a:pPr algn="ctr"/>
-            <a:r>
-              <a:rPr sz="900" b="0">
-                <a:solidFill>
-                  <a:srgbClr val="595959"/>
-                </a:solidFill>
-                <a:latin typeface="맑은 고딕"/>
-                <a:ea typeface="맑은 고딕"/>
-                <a:cs typeface="맑은 고딕"/>
-              </a:rPr>
-              <a:t>쓱배송 권역</a:t>
-            </a:r>
-          </a:p>
-        </p:txBody>
-      </p:sp>
-      <p:sp>
-        <p:nvSpPr>
-          <p:cNvPr id="40" name="Rectangle 39"/>
-          <p:cNvSpPr/>
-          <p:nvPr/>
-        </p:nvSpPr>
-        <p:spPr>
-          <a:xfrm>
-            <a:off x="7523999" y="4823999"/>
-            <a:ext cx="1958400" cy="702000"/>
-          </a:xfrm>
-          <a:prstGeom prst="rect">
-            <a:avLst/>
-          </a:prstGeom>
-          <a:solidFill>
-            <a:srgbClr val="F2F2F2"/>
-          </a:solidFill>
-          <a:ln>
-            <a:noFill/>
-          </a:ln>
-          <a:effectLst/>
-        </p:spPr>
-        <p:style>
-          <a:lnRef idx="1">
-            <a:schemeClr val="accent1"/>
-          </a:lnRef>
-          <a:fillRef idx="3">
-            <a:schemeClr val="accent1"/>
-          </a:fillRef>
-          <a:effectRef idx="2">
-            <a:schemeClr val="accent1"/>
-          </a:effectRef>
-          <a:fontRef idx="minor">
-            <a:schemeClr val="lt1"/>
-          </a:fontRef>
-        </p:style>
-        <p:txBody>
-          <a:bodyPr rtlCol="0" anchor="ctr"/>
-          <a:lstStyle/>
-          <a:p>
-            <a:pPr algn="ctr"/>
-          </a:p>
-        </p:txBody>
-      </p:sp>
-      <p:sp>
-        <p:nvSpPr>
-          <p:cNvPr id="41" name="TextBox 40"/>
-          <p:cNvSpPr txBox="1"/>
-          <p:nvPr/>
-        </p:nvSpPr>
-        <p:spPr>
-          <a:xfrm>
-            <a:off x="7523999" y="4878000"/>
-            <a:ext cx="1958400" cy="144000"/>
-          </a:xfrm>
-          <a:prstGeom prst="rect">
-            <a:avLst/>
-          </a:prstGeom>
-          <a:noFill/>
-        </p:spPr>
-        <p:txBody>
-          <a:bodyPr wrap="square" anchor="t" lIns="0" rIns="0" tIns="0" bIns="0">
-            <a:spAutoFit/>
-          </a:bodyPr>
-          <a:lstStyle/>
-          <a:p>
-            <a:pPr algn="ctr"/>
-            <a:r>
-              <a:rPr sz="900" b="0">
-                <a:solidFill>
-                  <a:srgbClr val="595959"/>
-                </a:solidFill>
-                <a:latin typeface="맑은 고딕"/>
-                <a:ea typeface="맑은 고딕"/>
-                <a:cs typeface="맑은 고딕"/>
-              </a:rPr>
-              <a:t>'26. 연말</a:t>
-            </a:r>
-          </a:p>
-        </p:txBody>
-      </p:sp>
-      <p:sp>
-        <p:nvSpPr>
-          <p:cNvPr id="42" name="TextBox 41"/>
-          <p:cNvSpPr txBox="1"/>
-          <p:nvPr/>
-        </p:nvSpPr>
-        <p:spPr>
-          <a:xfrm>
-            <a:off x="7523999" y="5039999"/>
-            <a:ext cx="1958400" cy="198000"/>
-          </a:xfrm>
-          <a:prstGeom prst="rect">
-            <a:avLst/>
-          </a:prstGeom>
-          <a:noFill/>
-        </p:spPr>
-        <p:txBody>
-          <a:bodyPr wrap="square" anchor="t" lIns="0" rIns="0" tIns="0" bIns="0">
-            <a:spAutoFit/>
-          </a:bodyPr>
-          <a:lstStyle/>
-          <a:p>
-            <a:pPr algn="ctr"/>
-            <a:r>
-              <a:rPr sz="1100" b="1">
-                <a:solidFill>
-                  <a:srgbClr val="000000"/>
-                </a:solidFill>
-                <a:latin typeface="맑은 고딕"/>
-                <a:ea typeface="맑은 고딕"/>
-                <a:cs typeface="맑은 고딕"/>
-              </a:rPr>
-              <a:t>50여 개 점포</a:t>
-            </a:r>
-          </a:p>
-        </p:txBody>
-      </p:sp>
-      <p:sp>
-        <p:nvSpPr>
-          <p:cNvPr id="43" name="TextBox 42"/>
-          <p:cNvSpPr txBox="1"/>
-          <p:nvPr/>
-        </p:nvSpPr>
-        <p:spPr>
-          <a:xfrm>
-            <a:off x="7523999" y="5255999"/>
-            <a:ext cx="1958400" cy="144000"/>
-          </a:xfrm>
-          <a:prstGeom prst="rect">
-            <a:avLst/>
-          </a:prstGeom>
-          <a:noFill/>
-        </p:spPr>
-        <p:txBody>
-          <a:bodyPr wrap="square" anchor="t" lIns="0" rIns="0" tIns="0" bIns="0">
-            <a:spAutoFit/>
-          </a:bodyPr>
-          <a:lstStyle/>
-          <a:p>
-            <a:pPr algn="ctr"/>
-            <a:r>
-              <a:rPr sz="900" b="0">
-                <a:solidFill>
-                  <a:srgbClr val="595959"/>
-                </a:solidFill>
-                <a:latin typeface="맑은 고딕"/>
-                <a:ea typeface="맑은 고딕"/>
-                <a:cs typeface="맑은 고딕"/>
-              </a:rPr>
-              <a:t>운영 목표</a:t>
-            </a:r>
-          </a:p>
-        </p:txBody>
-      </p:sp>
-      <p:sp>
-        <p:nvSpPr>
-          <p:cNvPr id="44" name="TextBox 43"/>
-          <p:cNvSpPr txBox="1"/>
-          <p:nvPr/>
-        </p:nvSpPr>
-        <p:spPr>
-          <a:xfrm>
-            <a:off x="424800" y="5688000"/>
+            <a:off x="424800" y="5691600"/>
             <a:ext cx="9057600" cy="172800"/>
           </a:xfrm>
           <a:prstGeom prst="rect">

--- a/reports/ssg-quickcommerce-onepager.pptx
+++ b/reports/ssg-quickcommerce-onepager.pptx
@@ -3212,14 +3212,58 @@
       </p:sp>
       <p:sp>
         <p:nvSpPr>
-          <p:cNvPr id="5" name="TextBox 4"/>
-          <p:cNvSpPr txBox="1"/>
+          <p:cNvPr id="5" name="Rectangle 4"/>
+          <p:cNvSpPr/>
           <p:nvPr/>
         </p:nvSpPr>
         <p:spPr>
           <a:xfrm>
             <a:off x="424800" y="1475999"/>
-            <a:ext cx="4410000" cy="198000"/>
+            <a:ext cx="4410000" cy="270000"/>
+          </a:xfrm>
+          <a:prstGeom prst="rect">
+            <a:avLst/>
+          </a:prstGeom>
+          <a:solidFill>
+            <a:srgbClr val="EAEEF6"/>
+          </a:solidFill>
+          <a:ln>
+            <a:noFill/>
+          </a:ln>
+          <a:effectLst/>
+        </p:spPr>
+        <p:style>
+          <a:lnRef idx="1">
+            <a:schemeClr val="accent1"/>
+          </a:lnRef>
+          <a:fillRef idx="3">
+            <a:schemeClr val="accent1"/>
+          </a:fillRef>
+          <a:effectRef idx="2">
+            <a:schemeClr val="accent1"/>
+          </a:effectRef>
+          <a:fontRef idx="minor">
+            <a:schemeClr val="lt1"/>
+          </a:fontRef>
+        </p:style>
+        <p:txBody>
+          <a:bodyPr rtlCol="0" anchor="ctr"/>
+          <a:lstStyle/>
+          <a:p>
+            <a:pPr algn="ctr"/>
+          </a:p>
+        </p:txBody>
+      </p:sp>
+      <p:sp>
+        <p:nvSpPr>
+          <p:cNvPr id="6" name="TextBox 5"/>
+          <p:cNvSpPr txBox="1"/>
+          <p:nvPr/>
+        </p:nvSpPr>
+        <p:spPr>
+          <a:xfrm>
+            <a:off x="424800" y="1475999"/>
+            <a:ext cx="4410000" cy="270000"/>
           </a:xfrm>
           <a:prstGeom prst="rect">
             <a:avLst/>
@@ -3227,6 +3271,124 @@
           <a:noFill/>
         </p:spPr>
         <p:txBody>
+          <a:bodyPr wrap="square" anchor="ctr" lIns="0" rIns="0" tIns="0" bIns="0">
+            <a:spAutoFit/>
+          </a:bodyPr>
+          <a:lstStyle/>
+          <a:p>
+            <a:pPr algn="ctr"/>
+            <a:r>
+              <a:rPr sz="1200" b="1">
+                <a:solidFill>
+                  <a:srgbClr val="000066"/>
+                </a:solidFill>
+                <a:latin typeface="맑은 고딕"/>
+                <a:ea typeface="맑은 고딕"/>
+                <a:cs typeface="맑은 고딕"/>
+              </a:rPr>
+              <a:t>2시간 배송 도입 개요</a:t>
+            </a:r>
+          </a:p>
+        </p:txBody>
+      </p:sp>
+      <p:sp>
+        <p:nvSpPr>
+          <p:cNvPr id="7" name="Rectangle 6"/>
+          <p:cNvSpPr/>
+          <p:nvPr/>
+        </p:nvSpPr>
+        <p:spPr>
+          <a:xfrm>
+            <a:off x="5072400" y="1475999"/>
+            <a:ext cx="4410000" cy="270000"/>
+          </a:xfrm>
+          <a:prstGeom prst="rect">
+            <a:avLst/>
+          </a:prstGeom>
+          <a:solidFill>
+            <a:srgbClr val="EAEEF6"/>
+          </a:solidFill>
+          <a:ln>
+            <a:noFill/>
+          </a:ln>
+          <a:effectLst/>
+        </p:spPr>
+        <p:style>
+          <a:lnRef idx="1">
+            <a:schemeClr val="accent1"/>
+          </a:lnRef>
+          <a:fillRef idx="3">
+            <a:schemeClr val="accent1"/>
+          </a:fillRef>
+          <a:effectRef idx="2">
+            <a:schemeClr val="accent1"/>
+          </a:effectRef>
+          <a:fontRef idx="minor">
+            <a:schemeClr val="lt1"/>
+          </a:fontRef>
+        </p:style>
+        <p:txBody>
+          <a:bodyPr rtlCol="0" anchor="ctr"/>
+          <a:lstStyle/>
+          <a:p>
+            <a:pPr algn="ctr"/>
+          </a:p>
+        </p:txBody>
+      </p:sp>
+      <p:sp>
+        <p:nvSpPr>
+          <p:cNvPr id="8" name="TextBox 7"/>
+          <p:cNvSpPr txBox="1"/>
+          <p:nvPr/>
+        </p:nvSpPr>
+        <p:spPr>
+          <a:xfrm>
+            <a:off x="5072400" y="1475999"/>
+            <a:ext cx="4410000" cy="270000"/>
+          </a:xfrm>
+          <a:prstGeom prst="rect">
+            <a:avLst/>
+          </a:prstGeom>
+          <a:noFill/>
+        </p:spPr>
+        <p:txBody>
+          <a:bodyPr wrap="square" anchor="ctr" lIns="0" rIns="0" tIns="0" bIns="0">
+            <a:spAutoFit/>
+          </a:bodyPr>
+          <a:lstStyle/>
+          <a:p>
+            <a:pPr algn="ctr"/>
+            <a:r>
+              <a:rPr sz="1200" b="1">
+                <a:solidFill>
+                  <a:srgbClr val="000066"/>
+                </a:solidFill>
+                <a:latin typeface="맑은 고딕"/>
+                <a:ea typeface="맑은 고딕"/>
+                <a:cs typeface="맑은 고딕"/>
+              </a:rPr>
+              <a:t>배송 체계 및 확대 계획</a:t>
+            </a:r>
+          </a:p>
+        </p:txBody>
+      </p:sp>
+      <p:sp>
+        <p:nvSpPr>
+          <p:cNvPr id="9" name="TextBox 8"/>
+          <p:cNvSpPr txBox="1"/>
+          <p:nvPr/>
+        </p:nvSpPr>
+        <p:spPr>
+          <a:xfrm>
+            <a:off x="424800" y="1871999"/>
+            <a:ext cx="4410000" cy="172800"/>
+          </a:xfrm>
+          <a:prstGeom prst="rect">
+            <a:avLst/>
+          </a:prstGeom>
+          <a:noFill/>
+        </p:spPr>
+        <p:txBody>
           <a:bodyPr wrap="square" anchor="t" lIns="0" rIns="0" tIns="0" bIns="0">
             <a:spAutoFit/>
           </a:bodyPr>
@@ -3236,7 +3398,7 @@
             <a:r>
               <a:rPr sz="1200" b="1">
                 <a:solidFill>
-                  <a:srgbClr val="222222"/>
+                  <a:srgbClr val="000000"/>
                 </a:solidFill>
                 <a:latin typeface="맑은 고딕"/>
                 <a:ea typeface="맑은 고딕"/>
@@ -3249,13 +3411,13 @@
       </p:sp>
       <p:sp>
         <p:nvSpPr>
-          <p:cNvPr id="6" name="TextBox 5"/>
+          <p:cNvPr id="10" name="TextBox 9"/>
           <p:cNvSpPr txBox="1"/>
           <p:nvPr/>
         </p:nvSpPr>
         <p:spPr>
           <a:xfrm>
-            <a:off x="622800" y="1673999"/>
+            <a:off x="622800" y="2044800"/>
             <a:ext cx="4212000" cy="172800"/>
           </a:xfrm>
           <a:prstGeom prst="rect">
@@ -3286,13 +3448,13 @@
       </p:sp>
       <p:sp>
         <p:nvSpPr>
-          <p:cNvPr id="7" name="TextBox 6"/>
+          <p:cNvPr id="11" name="TextBox 10"/>
           <p:cNvSpPr txBox="1"/>
           <p:nvPr/>
         </p:nvSpPr>
         <p:spPr>
           <a:xfrm>
-            <a:off x="622800" y="1846799"/>
+            <a:off x="622800" y="2217600"/>
             <a:ext cx="4212000" cy="172800"/>
           </a:xfrm>
           <a:prstGeom prst="rect">
@@ -3323,14 +3485,14 @@
       </p:sp>
       <p:sp>
         <p:nvSpPr>
-          <p:cNvPr id="8" name="TextBox 7"/>
+          <p:cNvPr id="12" name="TextBox 11"/>
           <p:cNvSpPr txBox="1"/>
           <p:nvPr/>
         </p:nvSpPr>
         <p:spPr>
           <a:xfrm>
-            <a:off x="5072400" y="1475999"/>
-            <a:ext cx="4410000" cy="198000"/>
+            <a:off x="424800" y="2588400"/>
+            <a:ext cx="4410000" cy="172800"/>
           </a:xfrm>
           <a:prstGeom prst="rect">
             <a:avLst/>
@@ -3347,26 +3509,26 @@
             <a:r>
               <a:rPr sz="1200" b="1">
                 <a:solidFill>
-                  <a:srgbClr val="222222"/>
+                  <a:srgbClr val="000000"/>
                 </a:solidFill>
                 <a:latin typeface="맑은 고딕"/>
                 <a:ea typeface="맑은 고딕"/>
                 <a:cs typeface="맑은 고딕"/>
               </a:rPr>
-              <a:t>• 시범 운영 개요 (7. 9. 개시)</a:t>
-            </a:r>
-          </a:p>
-        </p:txBody>
-      </p:sp>
-      <p:sp>
-        <p:nvSpPr>
-          <p:cNvPr id="9" name="TextBox 8"/>
+              <a:t>• 시범 운영 ('26. 7. 9. 개시)</a:t>
+            </a:r>
+          </a:p>
+        </p:txBody>
+      </p:sp>
+      <p:sp>
+        <p:nvSpPr>
+          <p:cNvPr id="13" name="TextBox 12"/>
           <p:cNvSpPr txBox="1"/>
           <p:nvPr/>
         </p:nvSpPr>
         <p:spPr>
           <a:xfrm>
-            <a:off x="5270400" y="1673999"/>
+            <a:off x="622800" y="2761200"/>
             <a:ext cx="4212000" cy="172800"/>
           </a:xfrm>
           <a:prstGeom prst="rect">
@@ -3390,20 +3552,20 @@
                 <a:ea typeface="맑은 고딕"/>
                 <a:cs typeface="맑은 고딕"/>
               </a:rPr>
-              <a:t>- 20시 주문 마감 → 2시간 내 배송</a:t>
-            </a:r>
-          </a:p>
-        </p:txBody>
-      </p:sp>
-      <p:sp>
-        <p:nvSpPr>
-          <p:cNvPr id="10" name="TextBox 9"/>
+              <a:t>- 20시 주문 마감 → 결제 후 2시간 내 배송</a:t>
+            </a:r>
+          </a:p>
+        </p:txBody>
+      </p:sp>
+      <p:sp>
+        <p:nvSpPr>
+          <p:cNvPr id="14" name="TextBox 13"/>
           <p:cNvSpPr txBox="1"/>
           <p:nvPr/>
         </p:nvSpPr>
         <p:spPr>
           <a:xfrm>
-            <a:off x="5270400" y="1846799"/>
+            <a:off x="622800" y="2934000"/>
             <a:ext cx="4212000" cy="172800"/>
           </a:xfrm>
           <a:prstGeom prst="rect">
@@ -3427,59 +3589,22 @@
                 <a:ea typeface="맑은 고딕"/>
                 <a:cs typeface="맑은 고딕"/>
               </a:rPr>
-              <a:t>- 사륜차 대용량·중량 상품 즉시 배송</a:t>
-            </a:r>
-          </a:p>
-        </p:txBody>
-      </p:sp>
-      <p:sp>
-        <p:nvSpPr>
-          <p:cNvPr id="11" name="TextBox 10"/>
-          <p:cNvSpPr txBox="1"/>
-          <p:nvPr/>
-        </p:nvSpPr>
-        <p:spPr>
-          <a:xfrm>
-            <a:off x="424800" y="2199600"/>
-            <a:ext cx="9057600" cy="198000"/>
-          </a:xfrm>
-          <a:prstGeom prst="rect">
-            <a:avLst/>
-          </a:prstGeom>
-          <a:noFill/>
-        </p:spPr>
-        <p:txBody>
-          <a:bodyPr wrap="square" anchor="t" lIns="0" rIns="0" tIns="0" bIns="0">
-            <a:spAutoFit/>
-          </a:bodyPr>
-          <a:lstStyle/>
-          <a:p>
-            <a:pPr algn="l"/>
-            <a:r>
-              <a:rPr sz="1200" b="1">
-                <a:solidFill>
-                  <a:srgbClr val="222222"/>
-                </a:solidFill>
-                <a:latin typeface="맑은 고딕"/>
-                <a:ea typeface="맑은 고딕"/>
-                <a:cs typeface="맑은 고딕"/>
-              </a:rPr>
-              <a:t>• 이마트·SSG닷컴 배송 서비스 비교</a:t>
+              <a:t>- 예약배송 병행, 사륜차 대용량 대응</a:t>
             </a:r>
           </a:p>
         </p:txBody>
       </p:sp>
       <p:graphicFrame>
         <p:nvGraphicFramePr>
-          <p:cNvPr id="12" name="Table 11"/>
+          <p:cNvPr id="15" name="Table 14"/>
           <p:cNvGraphicFramePr>
             <a:graphicFrameLocks noGrp="1"/>
           </p:cNvGraphicFramePr>
           <p:nvPr/>
         </p:nvGraphicFramePr>
         <p:xfrm>
-          <a:off x="424800" y="2397599"/>
-          <a:ext cx="9057600" cy="1800000"/>
+          <a:off x="424800" y="3304800"/>
+          <a:ext cx="4410000" cy="1080000"/>
         </p:xfrm>
         <a:graphic>
           <a:graphicData uri="http://schemas.openxmlformats.org/drawingml/2006/table">
@@ -3488,13 +3613,11 @@
                 <a:tableStyleId>{5C22544A-7EE6-4342-B048-85BDC9FD1C3A}</a:tableStyleId>
               </a:tblPr>
               <a:tblGrid>
-                <a:gridCol w="1404000"/>
-                <a:gridCol w="1908000"/>
-                <a:gridCol w="900000"/>
-                <a:gridCol w="1296000"/>
-                <a:gridCol w="3549600"/>
+                <a:gridCol w="1224000"/>
+                <a:gridCol w="1224000"/>
+                <a:gridCol w="1962000"/>
               </a:tblGrid>
-              <a:tr h="300000">
+              <a:tr h="270000">
                 <a:tc>
                   <a:txBody>
                     <a:bodyPr wrap="square"/>
@@ -3555,7 +3678,7 @@
                           <a:ea typeface="맑은 고딕"/>
                           <a:cs typeface="맑은 고딕"/>
                         </a:rPr>
-                        <a:t>배송 속도</a:t>
+                        <a:t>품목 수</a:t>
                       </a:r>
                     </a:p>
                   </a:txBody>
@@ -3600,7 +3723,492 @@
                           <a:ea typeface="맑은 고딕"/>
                           <a:cs typeface="맑은 고딕"/>
                         </a:rPr>
-                        <a:t>운송 수단</a:t>
+                        <a:t>비고</a:t>
+                      </a:r>
+                    </a:p>
+                  </a:txBody>
+                  <a:tcPr anchor="ctr" marL="36000" marR="36000" marT="0" marB="0">
+                    <a:lnL w="9525" cap="flat">
+                      <a:solidFill>
+                        <a:srgbClr val="BFBFBF"/>
+                      </a:solidFill>
+                    </a:lnL>
+                    <a:lnR w="9525" cap="flat">
+                      <a:solidFill>
+                        <a:srgbClr val="BFBFBF"/>
+                      </a:solidFill>
+                    </a:lnR>
+                    <a:lnT w="9525" cap="flat">
+                      <a:solidFill>
+                        <a:srgbClr val="BFBFBF"/>
+                      </a:solidFill>
+                    </a:lnT>
+                    <a:lnB w="9525" cap="flat">
+                      <a:solidFill>
+                        <a:srgbClr val="BFBFBF"/>
+                      </a:solidFill>
+                    </a:lnB>
+                    <a:solidFill>
+                      <a:srgbClr val="EAEEF6"/>
+                    </a:solidFill>
+                  </a:tcPr>
+                </a:tc>
+              </a:tr>
+              <a:tr h="270000">
+                <a:tc>
+                  <a:txBody>
+                    <a:bodyPr wrap="square"/>
+                    <a:lstStyle/>
+                    <a:p>
+                      <a:pPr algn="ctr"/>
+                      <a:r>
+                        <a:rPr sz="1000" b="1">
+                          <a:solidFill>
+                            <a:srgbClr val="000000"/>
+                          </a:solidFill>
+                          <a:latin typeface="맑은 고딕"/>
+                          <a:ea typeface="맑은 고딕"/>
+                          <a:cs typeface="맑은 고딕"/>
+                        </a:rPr>
+                        <a:t>이마트 점포</a:t>
+                      </a:r>
+                    </a:p>
+                  </a:txBody>
+                  <a:tcPr anchor="ctr" marL="36000" marR="36000" marT="0" marB="0">
+                    <a:lnL w="9525" cap="flat">
+                      <a:solidFill>
+                        <a:srgbClr val="BFBFBF"/>
+                      </a:solidFill>
+                    </a:lnL>
+                    <a:lnR w="9525" cap="flat">
+                      <a:solidFill>
+                        <a:srgbClr val="BFBFBF"/>
+                      </a:solidFill>
+                    </a:lnR>
+                    <a:lnT w="9525" cap="flat">
+                      <a:solidFill>
+                        <a:srgbClr val="BFBFBF"/>
+                      </a:solidFill>
+                    </a:lnT>
+                    <a:lnB w="9525" cap="flat">
+                      <a:solidFill>
+                        <a:srgbClr val="BFBFBF"/>
+                      </a:solidFill>
+                    </a:lnB>
+                    <a:solidFill>
+                      <a:srgbClr val="FFFFFF"/>
+                    </a:solidFill>
+                  </a:tcPr>
+                </a:tc>
+                <a:tc>
+                  <a:txBody>
+                    <a:bodyPr wrap="square"/>
+                    <a:lstStyle/>
+                    <a:p>
+                      <a:pPr algn="r"/>
+                      <a:r>
+                        <a:rPr sz="1000" b="0">
+                          <a:solidFill>
+                            <a:srgbClr val="000000"/>
+                          </a:solidFill>
+                          <a:latin typeface="맑은 고딕"/>
+                          <a:ea typeface="맑은 고딕"/>
+                          <a:cs typeface="맑은 고딕"/>
+                        </a:rPr>
+                        <a:t>약 150,000</a:t>
+                      </a:r>
+                    </a:p>
+                  </a:txBody>
+                  <a:tcPr anchor="ctr" marL="36000" marR="36000" marT="0" marB="0">
+                    <a:lnL w="9525" cap="flat">
+                      <a:solidFill>
+                        <a:srgbClr val="BFBFBF"/>
+                      </a:solidFill>
+                    </a:lnL>
+                    <a:lnR w="9525" cap="flat">
+                      <a:solidFill>
+                        <a:srgbClr val="BFBFBF"/>
+                      </a:solidFill>
+                    </a:lnR>
+                    <a:lnT w="9525" cap="flat">
+                      <a:solidFill>
+                        <a:srgbClr val="BFBFBF"/>
+                      </a:solidFill>
+                    </a:lnT>
+                    <a:lnB w="9525" cap="flat">
+                      <a:solidFill>
+                        <a:srgbClr val="BFBFBF"/>
+                      </a:solidFill>
+                    </a:lnB>
+                    <a:solidFill>
+                      <a:srgbClr val="FFFFFF"/>
+                    </a:solidFill>
+                  </a:tcPr>
+                </a:tc>
+                <a:tc>
+                  <a:txBody>
+                    <a:bodyPr wrap="square"/>
+                    <a:lstStyle/>
+                    <a:p>
+                      <a:pPr algn="ctr"/>
+                      <a:r>
+                        <a:rPr sz="1000" b="0">
+                          <a:solidFill>
+                            <a:srgbClr val="000000"/>
+                          </a:solidFill>
+                          <a:latin typeface="맑은 고딕"/>
+                          <a:ea typeface="맑은 고딕"/>
+                          <a:cs typeface="맑은 고딕"/>
+                        </a:rPr>
+                        <a:t>2시간 배송 기반</a:t>
+                      </a:r>
+                    </a:p>
+                  </a:txBody>
+                  <a:tcPr anchor="ctr" marL="36000" marR="36000" marT="0" marB="0">
+                    <a:lnL w="9525" cap="flat">
+                      <a:solidFill>
+                        <a:srgbClr val="BFBFBF"/>
+                      </a:solidFill>
+                    </a:lnL>
+                    <a:lnR w="9525" cap="flat">
+                      <a:solidFill>
+                        <a:srgbClr val="BFBFBF"/>
+                      </a:solidFill>
+                    </a:lnR>
+                    <a:lnT w="9525" cap="flat">
+                      <a:solidFill>
+                        <a:srgbClr val="BFBFBF"/>
+                      </a:solidFill>
+                    </a:lnT>
+                    <a:lnB w="9525" cap="flat">
+                      <a:solidFill>
+                        <a:srgbClr val="BFBFBF"/>
+                      </a:solidFill>
+                    </a:lnB>
+                    <a:solidFill>
+                      <a:srgbClr val="FFFFFF"/>
+                    </a:solidFill>
+                  </a:tcPr>
+                </a:tc>
+              </a:tr>
+              <a:tr h="270000">
+                <a:tc>
+                  <a:txBody>
+                    <a:bodyPr wrap="square"/>
+                    <a:lstStyle/>
+                    <a:p>
+                      <a:pPr algn="ctr"/>
+                      <a:r>
+                        <a:rPr sz="1000" b="1">
+                          <a:solidFill>
+                            <a:srgbClr val="000000"/>
+                          </a:solidFill>
+                          <a:latin typeface="맑은 고딕"/>
+                          <a:ea typeface="맑은 고딕"/>
+                          <a:cs typeface="맑은 고딕"/>
+                        </a:rPr>
+                        <a:t>바로퀵</a:t>
+                      </a:r>
+                    </a:p>
+                  </a:txBody>
+                  <a:tcPr anchor="ctr" marL="36000" marR="36000" marT="0" marB="0">
+                    <a:lnL w="9525" cap="flat">
+                      <a:solidFill>
+                        <a:srgbClr val="BFBFBF"/>
+                      </a:solidFill>
+                    </a:lnL>
+                    <a:lnR w="9525" cap="flat">
+                      <a:solidFill>
+                        <a:srgbClr val="BFBFBF"/>
+                      </a:solidFill>
+                    </a:lnR>
+                    <a:lnT w="9525" cap="flat">
+                      <a:solidFill>
+                        <a:srgbClr val="BFBFBF"/>
+                      </a:solidFill>
+                    </a:lnT>
+                    <a:lnB w="9525" cap="flat">
+                      <a:solidFill>
+                        <a:srgbClr val="BFBFBF"/>
+                      </a:solidFill>
+                    </a:lnB>
+                    <a:solidFill>
+                      <a:srgbClr val="FFFFFF"/>
+                    </a:solidFill>
+                  </a:tcPr>
+                </a:tc>
+                <a:tc>
+                  <a:txBody>
+                    <a:bodyPr wrap="square"/>
+                    <a:lstStyle/>
+                    <a:p>
+                      <a:pPr algn="r"/>
+                      <a:r>
+                        <a:rPr sz="1000" b="0">
+                          <a:solidFill>
+                            <a:srgbClr val="000000"/>
+                          </a:solidFill>
+                          <a:latin typeface="맑은 고딕"/>
+                          <a:ea typeface="맑은 고딕"/>
+                          <a:cs typeface="맑은 고딕"/>
+                        </a:rPr>
+                        <a:t>약 10,000</a:t>
+                      </a:r>
+                    </a:p>
+                  </a:txBody>
+                  <a:tcPr anchor="ctr" marL="36000" marR="36000" marT="0" marB="0">
+                    <a:lnL w="9525" cap="flat">
+                      <a:solidFill>
+                        <a:srgbClr val="BFBFBF"/>
+                      </a:solidFill>
+                    </a:lnL>
+                    <a:lnR w="9525" cap="flat">
+                      <a:solidFill>
+                        <a:srgbClr val="BFBFBF"/>
+                      </a:solidFill>
+                    </a:lnR>
+                    <a:lnT w="9525" cap="flat">
+                      <a:solidFill>
+                        <a:srgbClr val="BFBFBF"/>
+                      </a:solidFill>
+                    </a:lnT>
+                    <a:lnB w="9525" cap="flat">
+                      <a:solidFill>
+                        <a:srgbClr val="BFBFBF"/>
+                      </a:solidFill>
+                    </a:lnB>
+                    <a:solidFill>
+                      <a:srgbClr val="FFFFFF"/>
+                    </a:solidFill>
+                  </a:tcPr>
+                </a:tc>
+                <a:tc>
+                  <a:txBody>
+                    <a:bodyPr wrap="square"/>
+                    <a:lstStyle/>
+                    <a:p>
+                      <a:pPr algn="ctr"/>
+                      <a:r>
+                        <a:rPr sz="1000" b="0">
+                          <a:solidFill>
+                            <a:srgbClr val="000000"/>
+                          </a:solidFill>
+                          <a:latin typeface="맑은 고딕"/>
+                          <a:ea typeface="맑은 고딕"/>
+                          <a:cs typeface="맑은 고딕"/>
+                        </a:rPr>
+                        <a:t>이륜차 적재 한계</a:t>
+                      </a:r>
+                    </a:p>
+                  </a:txBody>
+                  <a:tcPr anchor="ctr" marL="36000" marR="36000" marT="0" marB="0">
+                    <a:lnL w="9525" cap="flat">
+                      <a:solidFill>
+                        <a:srgbClr val="BFBFBF"/>
+                      </a:solidFill>
+                    </a:lnL>
+                    <a:lnR w="9525" cap="flat">
+                      <a:solidFill>
+                        <a:srgbClr val="BFBFBF"/>
+                      </a:solidFill>
+                    </a:lnR>
+                    <a:lnT w="9525" cap="flat">
+                      <a:solidFill>
+                        <a:srgbClr val="BFBFBF"/>
+                      </a:solidFill>
+                    </a:lnT>
+                    <a:lnB w="9525" cap="flat">
+                      <a:solidFill>
+                        <a:srgbClr val="BFBFBF"/>
+                      </a:solidFill>
+                    </a:lnB>
+                    <a:solidFill>
+                      <a:srgbClr val="FFFFFF"/>
+                    </a:solidFill>
+                  </a:tcPr>
+                </a:tc>
+              </a:tr>
+              <a:tr h="270000">
+                <a:tc>
+                  <a:txBody>
+                    <a:bodyPr wrap="square"/>
+                    <a:lstStyle/>
+                    <a:p>
+                      <a:pPr algn="ctr"/>
+                      <a:r>
+                        <a:rPr sz="1000" b="1">
+                          <a:solidFill>
+                            <a:srgbClr val="000000"/>
+                          </a:solidFill>
+                          <a:latin typeface="맑은 고딕"/>
+                          <a:ea typeface="맑은 고딕"/>
+                          <a:cs typeface="맑은 고딕"/>
+                        </a:rPr>
+                        <a:t>B마트</a:t>
+                      </a:r>
+                    </a:p>
+                  </a:txBody>
+                  <a:tcPr anchor="ctr" marL="36000" marR="36000" marT="0" marB="0">
+                    <a:lnL w="9525" cap="flat">
+                      <a:solidFill>
+                        <a:srgbClr val="BFBFBF"/>
+                      </a:solidFill>
+                    </a:lnL>
+                    <a:lnR w="9525" cap="flat">
+                      <a:solidFill>
+                        <a:srgbClr val="BFBFBF"/>
+                      </a:solidFill>
+                    </a:lnR>
+                    <a:lnT w="9525" cap="flat">
+                      <a:solidFill>
+                        <a:srgbClr val="BFBFBF"/>
+                      </a:solidFill>
+                    </a:lnT>
+                    <a:lnB w="9525" cap="flat">
+                      <a:solidFill>
+                        <a:srgbClr val="BFBFBF"/>
+                      </a:solidFill>
+                    </a:lnB>
+                    <a:solidFill>
+                      <a:srgbClr val="FFFFFF"/>
+                    </a:solidFill>
+                  </a:tcPr>
+                </a:tc>
+                <a:tc>
+                  <a:txBody>
+                    <a:bodyPr wrap="square"/>
+                    <a:lstStyle/>
+                    <a:p>
+                      <a:pPr algn="r"/>
+                      <a:r>
+                        <a:rPr sz="1000" b="0">
+                          <a:solidFill>
+                            <a:srgbClr val="000000"/>
+                          </a:solidFill>
+                          <a:latin typeface="맑은 고딕"/>
+                          <a:ea typeface="맑은 고딕"/>
+                          <a:cs typeface="맑은 고딕"/>
+                        </a:rPr>
+                        <a:t>약 20,000</a:t>
+                      </a:r>
+                    </a:p>
+                  </a:txBody>
+                  <a:tcPr anchor="ctr" marL="36000" marR="36000" marT="0" marB="0">
+                    <a:lnL w="9525" cap="flat">
+                      <a:solidFill>
+                        <a:srgbClr val="BFBFBF"/>
+                      </a:solidFill>
+                    </a:lnL>
+                    <a:lnR w="9525" cap="flat">
+                      <a:solidFill>
+                        <a:srgbClr val="BFBFBF"/>
+                      </a:solidFill>
+                    </a:lnR>
+                    <a:lnT w="9525" cap="flat">
+                      <a:solidFill>
+                        <a:srgbClr val="BFBFBF"/>
+                      </a:solidFill>
+                    </a:lnT>
+                    <a:lnB w="9525" cap="flat">
+                      <a:solidFill>
+                        <a:srgbClr val="BFBFBF"/>
+                      </a:solidFill>
+                    </a:lnB>
+                    <a:solidFill>
+                      <a:srgbClr val="FFFFFF"/>
+                    </a:solidFill>
+                  </a:tcPr>
+                </a:tc>
+                <a:tc>
+                  <a:txBody>
+                    <a:bodyPr wrap="square"/>
+                    <a:lstStyle/>
+                    <a:p>
+                      <a:pPr algn="ctr"/>
+                      <a:r>
+                        <a:rPr sz="1000" b="0">
+                          <a:solidFill>
+                            <a:srgbClr val="000000"/>
+                          </a:solidFill>
+                          <a:latin typeface="맑은 고딕"/>
+                          <a:ea typeface="맑은 고딕"/>
+                          <a:cs typeface="맑은 고딕"/>
+                        </a:rPr>
+                        <a:t>퀵커머스 1위</a:t>
+                      </a:r>
+                    </a:p>
+                  </a:txBody>
+                  <a:tcPr anchor="ctr" marL="36000" marR="36000" marT="0" marB="0">
+                    <a:lnL w="9525" cap="flat">
+                      <a:solidFill>
+                        <a:srgbClr val="BFBFBF"/>
+                      </a:solidFill>
+                    </a:lnL>
+                    <a:lnR w="9525" cap="flat">
+                      <a:solidFill>
+                        <a:srgbClr val="BFBFBF"/>
+                      </a:solidFill>
+                    </a:lnR>
+                    <a:lnT w="9525" cap="flat">
+                      <a:solidFill>
+                        <a:srgbClr val="BFBFBF"/>
+                      </a:solidFill>
+                    </a:lnT>
+                    <a:lnB w="9525" cap="flat">
+                      <a:solidFill>
+                        <a:srgbClr val="BFBFBF"/>
+                      </a:solidFill>
+                    </a:lnB>
+                    <a:solidFill>
+                      <a:srgbClr val="FFFFFF"/>
+                    </a:solidFill>
+                  </a:tcPr>
+                </a:tc>
+              </a:tr>
+            </a:tbl>
+          </a:graphicData>
+        </a:graphic>
+      </p:graphicFrame>
+      <p:graphicFrame>
+        <p:nvGraphicFramePr>
+          <p:cNvPr id="16" name="Table 15"/>
+          <p:cNvGraphicFramePr>
+            <a:graphicFrameLocks noGrp="1"/>
+          </p:cNvGraphicFramePr>
+          <p:nvPr/>
+        </p:nvGraphicFramePr>
+        <p:xfrm>
+          <a:off x="5072400" y="1871999"/>
+          <a:ext cx="4410000" cy="1584000"/>
+        </p:xfrm>
+        <a:graphic>
+          <a:graphicData uri="http://schemas.openxmlformats.org/drawingml/2006/table">
+            <a:tbl>
+              <a:tblPr>
+                <a:tableStyleId>{5C22544A-7EE6-4342-B048-85BDC9FD1C3A}</a:tableStyleId>
+              </a:tblPr>
+              <a:tblGrid>
+                <a:gridCol w="1224000"/>
+                <a:gridCol w="1404000"/>
+                <a:gridCol w="1782000"/>
+              </a:tblGrid>
+              <a:tr h="264000">
+                <a:tc>
+                  <a:txBody>
+                    <a:bodyPr wrap="square"/>
+                    <a:lstStyle/>
+                    <a:p>
+                      <a:pPr algn="ctr"/>
+                      <a:r>
+                        <a:rPr sz="1000" b="1">
+                          <a:solidFill>
+                            <a:srgbClr val="000066"/>
+                          </a:solidFill>
+                          <a:latin typeface="맑은 고딕"/>
+                          <a:ea typeface="맑은 고딕"/>
+                          <a:cs typeface="맑은 고딕"/>
+                        </a:rPr>
+                        <a:t>구분</a:t>
                       </a:r>
                     </a:p>
                   </a:txBody>
@@ -3645,7 +4253,7 @@
                           <a:ea typeface="맑은 고딕"/>
                           <a:cs typeface="맑은 고딕"/>
                         </a:rPr>
-                        <a:t>취급 품목</a:t>
+                        <a:t>속도 · 수단</a:t>
                       </a:r>
                     </a:p>
                   </a:txBody>
@@ -3721,7 +4329,7 @@
                   </a:tcPr>
                 </a:tc>
               </a:tr>
-              <a:tr h="300000">
+              <a:tr h="264000">
                 <a:tc>
                   <a:txBody>
                     <a:bodyPr wrap="square"/>
@@ -3782,97 +4390,7 @@
                           <a:ea typeface="맑은 고딕"/>
                           <a:cs typeface="맑은 고딕"/>
                         </a:rPr>
-                        <a:t>예약배송 (4~5시간)</a:t>
-                      </a:r>
-                    </a:p>
-                  </a:txBody>
-                  <a:tcPr anchor="ctr" marL="36000" marR="36000" marT="0" marB="0">
-                    <a:lnL w="9525" cap="flat">
-                      <a:solidFill>
-                        <a:srgbClr val="BFBFBF"/>
-                      </a:solidFill>
-                    </a:lnL>
-                    <a:lnR w="9525" cap="flat">
-                      <a:solidFill>
-                        <a:srgbClr val="BFBFBF"/>
-                      </a:solidFill>
-                    </a:lnR>
-                    <a:lnT w="9525" cap="flat">
-                      <a:solidFill>
-                        <a:srgbClr val="BFBFBF"/>
-                      </a:solidFill>
-                    </a:lnT>
-                    <a:lnB w="9525" cap="flat">
-                      <a:solidFill>
-                        <a:srgbClr val="BFBFBF"/>
-                      </a:solidFill>
-                    </a:lnB>
-                    <a:solidFill>
-                      <a:srgbClr val="FFFFFF"/>
-                    </a:solidFill>
-                  </a:tcPr>
-                </a:tc>
-                <a:tc>
-                  <a:txBody>
-                    <a:bodyPr wrap="square"/>
-                    <a:lstStyle/>
-                    <a:p>
-                      <a:pPr algn="ctr"/>
-                      <a:r>
-                        <a:rPr sz="1000" b="0">
-                          <a:solidFill>
-                            <a:srgbClr val="000000"/>
-                          </a:solidFill>
-                          <a:latin typeface="맑은 고딕"/>
-                          <a:ea typeface="맑은 고딕"/>
-                          <a:cs typeface="맑은 고딕"/>
-                        </a:rPr>
-                        <a:t>사륜차</a:t>
-                      </a:r>
-                    </a:p>
-                  </a:txBody>
-                  <a:tcPr anchor="ctr" marL="36000" marR="36000" marT="0" marB="0">
-                    <a:lnL w="9525" cap="flat">
-                      <a:solidFill>
-                        <a:srgbClr val="BFBFBF"/>
-                      </a:solidFill>
-                    </a:lnL>
-                    <a:lnR w="9525" cap="flat">
-                      <a:solidFill>
-                        <a:srgbClr val="BFBFBF"/>
-                      </a:solidFill>
-                    </a:lnR>
-                    <a:lnT w="9525" cap="flat">
-                      <a:solidFill>
-                        <a:srgbClr val="BFBFBF"/>
-                      </a:solidFill>
-                    </a:lnT>
-                    <a:lnB w="9525" cap="flat">
-                      <a:solidFill>
-                        <a:srgbClr val="BFBFBF"/>
-                      </a:solidFill>
-                    </a:lnB>
-                    <a:solidFill>
-                      <a:srgbClr val="FFFFFF"/>
-                    </a:solidFill>
-                  </a:tcPr>
-                </a:tc>
-                <a:tc>
-                  <a:txBody>
-                    <a:bodyPr wrap="square"/>
-                    <a:lstStyle/>
-                    <a:p>
-                      <a:pPr algn="ctr"/>
-                      <a:r>
-                        <a:rPr sz="1000" b="0">
-                          <a:solidFill>
-                            <a:srgbClr val="000000"/>
-                          </a:solidFill>
-                          <a:latin typeface="맑은 고딕"/>
-                          <a:ea typeface="맑은 고딕"/>
-                          <a:cs typeface="맑은 고딕"/>
-                        </a:rPr>
-                        <a:t>점포 상품</a:t>
+                        <a:t>예약 4~5시간 · 사륜</a:t>
                       </a:r>
                     </a:p>
                   </a:txBody>
@@ -3948,7 +4466,7 @@
                   </a:tcPr>
                 </a:tc>
               </a:tr>
-              <a:tr h="300000">
+              <a:tr h="264000">
                 <a:tc>
                   <a:txBody>
                     <a:bodyPr wrap="square"/>
@@ -4009,97 +4527,7 @@
                           <a:ea typeface="맑은 고딕"/>
                           <a:cs typeface="맑은 고딕"/>
                         </a:rPr>
-                        <a:t>새벽 시간대</a:t>
-                      </a:r>
-                    </a:p>
-                  </a:txBody>
-                  <a:tcPr anchor="ctr" marL="36000" marR="36000" marT="0" marB="0">
-                    <a:lnL w="9525" cap="flat">
-                      <a:solidFill>
-                        <a:srgbClr val="BFBFBF"/>
-                      </a:solidFill>
-                    </a:lnL>
-                    <a:lnR w="9525" cap="flat">
-                      <a:solidFill>
-                        <a:srgbClr val="BFBFBF"/>
-                      </a:solidFill>
-                    </a:lnR>
-                    <a:lnT w="9525" cap="flat">
-                      <a:solidFill>
-                        <a:srgbClr val="BFBFBF"/>
-                      </a:solidFill>
-                    </a:lnT>
-                    <a:lnB w="9525" cap="flat">
-                      <a:solidFill>
-                        <a:srgbClr val="BFBFBF"/>
-                      </a:solidFill>
-                    </a:lnB>
-                    <a:solidFill>
-                      <a:srgbClr val="FFFFFF"/>
-                    </a:solidFill>
-                  </a:tcPr>
-                </a:tc>
-                <a:tc>
-                  <a:txBody>
-                    <a:bodyPr wrap="square"/>
-                    <a:lstStyle/>
-                    <a:p>
-                      <a:pPr algn="ctr"/>
-                      <a:r>
-                        <a:rPr sz="1000" b="0">
-                          <a:solidFill>
-                            <a:srgbClr val="000000"/>
-                          </a:solidFill>
-                          <a:latin typeface="맑은 고딕"/>
-                          <a:ea typeface="맑은 고딕"/>
-                          <a:cs typeface="맑은 고딕"/>
-                        </a:rPr>
-                        <a:t>사륜차</a:t>
-                      </a:r>
-                    </a:p>
-                  </a:txBody>
-                  <a:tcPr anchor="ctr" marL="36000" marR="36000" marT="0" marB="0">
-                    <a:lnL w="9525" cap="flat">
-                      <a:solidFill>
-                        <a:srgbClr val="BFBFBF"/>
-                      </a:solidFill>
-                    </a:lnL>
-                    <a:lnR w="9525" cap="flat">
-                      <a:solidFill>
-                        <a:srgbClr val="BFBFBF"/>
-                      </a:solidFill>
-                    </a:lnR>
-                    <a:lnT w="9525" cap="flat">
-                      <a:solidFill>
-                        <a:srgbClr val="BFBFBF"/>
-                      </a:solidFill>
-                    </a:lnT>
-                    <a:lnB w="9525" cap="flat">
-                      <a:solidFill>
-                        <a:srgbClr val="BFBFBF"/>
-                      </a:solidFill>
-                    </a:lnB>
-                    <a:solidFill>
-                      <a:srgbClr val="FFFFFF"/>
-                    </a:solidFill>
-                  </a:tcPr>
-                </a:tc>
-                <a:tc>
-                  <a:txBody>
-                    <a:bodyPr wrap="square"/>
-                    <a:lstStyle/>
-                    <a:p>
-                      <a:pPr algn="ctr"/>
-                      <a:r>
-                        <a:rPr sz="1000" b="0">
-                          <a:solidFill>
-                            <a:srgbClr val="000000"/>
-                          </a:solidFill>
-                          <a:latin typeface="맑은 고딕"/>
-                          <a:ea typeface="맑은 고딕"/>
-                          <a:cs typeface="맑은 고딕"/>
-                        </a:rPr>
-                        <a:t>네오 상품</a:t>
+                        <a:t>새벽 · 사륜</a:t>
                       </a:r>
                     </a:p>
                   </a:txBody>
@@ -4175,7 +4603,7 @@
                   </a:tcPr>
                 </a:tc>
               </a:tr>
-              <a:tr h="300000">
+              <a:tr h="264000">
                 <a:tc>
                   <a:txBody>
                     <a:bodyPr wrap="square"/>
@@ -4236,97 +4664,7 @@
                           <a:ea typeface="맑은 고딕"/>
                           <a:cs typeface="맑은 고딕"/>
                         </a:rPr>
-                        <a:t>예약배송</a:t>
-                      </a:r>
-                    </a:p>
-                  </a:txBody>
-                  <a:tcPr anchor="ctr" marL="36000" marR="36000" marT="0" marB="0">
-                    <a:lnL w="9525" cap="flat">
-                      <a:solidFill>
-                        <a:srgbClr val="BFBFBF"/>
-                      </a:solidFill>
-                    </a:lnL>
-                    <a:lnR w="9525" cap="flat">
-                      <a:solidFill>
-                        <a:srgbClr val="BFBFBF"/>
-                      </a:solidFill>
-                    </a:lnR>
-                    <a:lnT w="9525" cap="flat">
-                      <a:solidFill>
-                        <a:srgbClr val="BFBFBF"/>
-                      </a:solidFill>
-                    </a:lnT>
-                    <a:lnB w="9525" cap="flat">
-                      <a:solidFill>
-                        <a:srgbClr val="BFBFBF"/>
-                      </a:solidFill>
-                    </a:lnB>
-                    <a:solidFill>
-                      <a:srgbClr val="FFFFFF"/>
-                    </a:solidFill>
-                  </a:tcPr>
-                </a:tc>
-                <a:tc>
-                  <a:txBody>
-                    <a:bodyPr wrap="square"/>
-                    <a:lstStyle/>
-                    <a:p>
-                      <a:pPr algn="ctr"/>
-                      <a:r>
-                        <a:rPr sz="1000" b="0">
-                          <a:solidFill>
-                            <a:srgbClr val="000000"/>
-                          </a:solidFill>
-                          <a:latin typeface="맑은 고딕"/>
-                          <a:ea typeface="맑은 고딕"/>
-                          <a:cs typeface="맑은 고딕"/>
-                        </a:rPr>
-                        <a:t>사륜차</a:t>
-                      </a:r>
-                    </a:p>
-                  </a:txBody>
-                  <a:tcPr anchor="ctr" marL="36000" marR="36000" marT="0" marB="0">
-                    <a:lnL w="9525" cap="flat">
-                      <a:solidFill>
-                        <a:srgbClr val="BFBFBF"/>
-                      </a:solidFill>
-                    </a:lnL>
-                    <a:lnR w="9525" cap="flat">
-                      <a:solidFill>
-                        <a:srgbClr val="BFBFBF"/>
-                      </a:solidFill>
-                    </a:lnR>
-                    <a:lnT w="9525" cap="flat">
-                      <a:solidFill>
-                        <a:srgbClr val="BFBFBF"/>
-                      </a:solidFill>
-                    </a:lnT>
-                    <a:lnB w="9525" cap="flat">
-                      <a:solidFill>
-                        <a:srgbClr val="BFBFBF"/>
-                      </a:solidFill>
-                    </a:lnB>
-                    <a:solidFill>
-                      <a:srgbClr val="FFFFFF"/>
-                    </a:solidFill>
-                  </a:tcPr>
-                </a:tc>
-                <a:tc>
-                  <a:txBody>
-                    <a:bodyPr wrap="square"/>
-                    <a:lstStyle/>
-                    <a:p>
-                      <a:pPr algn="ctr"/>
-                      <a:r>
-                        <a:rPr sz="1000" b="0">
-                          <a:solidFill>
-                            <a:srgbClr val="000000"/>
-                          </a:solidFill>
-                          <a:latin typeface="맑은 고딕"/>
-                          <a:ea typeface="맑은 고딕"/>
-                          <a:cs typeface="맑은 고딕"/>
-                        </a:rPr>
-                        <a:t>트레이더스 상품</a:t>
+                        <a:t>예약 · 사륜</a:t>
                       </a:r>
                     </a:p>
                   </a:txBody>
@@ -4402,7 +4740,7 @@
                   </a:tcPr>
                 </a:tc>
               </a:tr>
-              <a:tr h="300000">
+              <a:tr h="264000">
                 <a:tc>
                   <a:txBody>
                     <a:bodyPr wrap="square"/>
@@ -4463,7 +4801,7 @@
                           <a:ea typeface="맑은 고딕"/>
                           <a:cs typeface="맑은 고딕"/>
                         </a:rPr>
-                        <a:t>1시간 내 (3km)</a:t>
+                        <a:t>1시간 · 이륜</a:t>
                       </a:r>
                     </a:p>
                   </a:txBody>
@@ -4508,7 +4846,54 @@
                           <a:ea typeface="맑은 고딕"/>
                           <a:cs typeface="맑은 고딕"/>
                         </a:rPr>
-                        <a:t>이륜차</a:t>
+                        <a:t>소량, 약 1만 종</a:t>
+                      </a:r>
+                    </a:p>
+                  </a:txBody>
+                  <a:tcPr anchor="ctr" marL="36000" marR="36000" marT="0" marB="0">
+                    <a:lnL w="9525" cap="flat">
+                      <a:solidFill>
+                        <a:srgbClr val="BFBFBF"/>
+                      </a:solidFill>
+                    </a:lnL>
+                    <a:lnR w="9525" cap="flat">
+                      <a:solidFill>
+                        <a:srgbClr val="BFBFBF"/>
+                      </a:solidFill>
+                    </a:lnR>
+                    <a:lnT w="9525" cap="flat">
+                      <a:solidFill>
+                        <a:srgbClr val="BFBFBF"/>
+                      </a:solidFill>
+                    </a:lnT>
+                    <a:lnB w="9525" cap="flat">
+                      <a:solidFill>
+                        <a:srgbClr val="BFBFBF"/>
+                      </a:solidFill>
+                    </a:lnB>
+                    <a:solidFill>
+                      <a:srgbClr val="FFFFFF"/>
+                    </a:solidFill>
+                  </a:tcPr>
+                </a:tc>
+              </a:tr>
+              <a:tr h="264000">
+                <a:tc>
+                  <a:txBody>
+                    <a:bodyPr wrap="square"/>
+                    <a:lstStyle/>
+                    <a:p>
+                      <a:pPr algn="ctr"/>
+                      <a:r>
+                        <a:rPr sz="1000" b="1">
+                          <a:solidFill>
+                            <a:srgbClr val="000000"/>
+                          </a:solidFill>
+                          <a:latin typeface="맑은 고딕"/>
+                          <a:ea typeface="맑은 고딕"/>
+                          <a:cs typeface="맑은 고딕"/>
+                        </a:rPr>
+                        <a:t>2시간 배송 (신규)</a:t>
                       </a:r>
                     </a:p>
                   </a:txBody>
@@ -4553,7 +4938,7 @@
                           <a:ea typeface="맑은 고딕"/>
                           <a:cs typeface="맑은 고딕"/>
                         </a:rPr>
-                        <a:t>약 1만 종</a:t>
+                        <a:t>2시간 · 사륜</a:t>
                       </a:r>
                     </a:p>
                   </a:txBody>
@@ -4598,234 +4983,7 @@
                           <a:ea typeface="맑은 고딕"/>
                           <a:cs typeface="맑은 고딕"/>
                         </a:rPr>
-                        <a:t>소량·1~2인 가구</a:t>
-                      </a:r>
-                    </a:p>
-                  </a:txBody>
-                  <a:tcPr anchor="ctr" marL="36000" marR="36000" marT="0" marB="0">
-                    <a:lnL w="9525" cap="flat">
-                      <a:solidFill>
-                        <a:srgbClr val="BFBFBF"/>
-                      </a:solidFill>
-                    </a:lnL>
-                    <a:lnR w="9525" cap="flat">
-                      <a:solidFill>
-                        <a:srgbClr val="BFBFBF"/>
-                      </a:solidFill>
-                    </a:lnR>
-                    <a:lnT w="9525" cap="flat">
-                      <a:solidFill>
-                        <a:srgbClr val="BFBFBF"/>
-                      </a:solidFill>
-                    </a:lnT>
-                    <a:lnB w="9525" cap="flat">
-                      <a:solidFill>
-                        <a:srgbClr val="BFBFBF"/>
-                      </a:solidFill>
-                    </a:lnB>
-                    <a:solidFill>
-                      <a:srgbClr val="FFFFFF"/>
-                    </a:solidFill>
-                  </a:tcPr>
-                </a:tc>
-              </a:tr>
-              <a:tr h="300000">
-                <a:tc>
-                  <a:txBody>
-                    <a:bodyPr wrap="square"/>
-                    <a:lstStyle/>
-                    <a:p>
-                      <a:pPr algn="ctr"/>
-                      <a:r>
-                        <a:rPr sz="1000" b="1">
-                          <a:solidFill>
-                            <a:srgbClr val="000000"/>
-                          </a:solidFill>
-                          <a:latin typeface="맑은 고딕"/>
-                          <a:ea typeface="맑은 고딕"/>
-                          <a:cs typeface="맑은 고딕"/>
-                        </a:rPr>
-                        <a:t>2시간 배송 (신규)</a:t>
-                      </a:r>
-                    </a:p>
-                  </a:txBody>
-                  <a:tcPr anchor="ctr" marL="36000" marR="36000" marT="0" marB="0">
-                    <a:lnL w="9525" cap="flat">
-                      <a:solidFill>
-                        <a:srgbClr val="BFBFBF"/>
-                      </a:solidFill>
-                    </a:lnL>
-                    <a:lnR w="9525" cap="flat">
-                      <a:solidFill>
-                        <a:srgbClr val="BFBFBF"/>
-                      </a:solidFill>
-                    </a:lnR>
-                    <a:lnT w="9525" cap="flat">
-                      <a:solidFill>
-                        <a:srgbClr val="BFBFBF"/>
-                      </a:solidFill>
-                    </a:lnT>
-                    <a:lnB w="9525" cap="flat">
-                      <a:solidFill>
-                        <a:srgbClr val="BFBFBF"/>
-                      </a:solidFill>
-                    </a:lnB>
-                    <a:solidFill>
-                      <a:srgbClr val="FFFFFF"/>
-                    </a:solidFill>
-                  </a:tcPr>
-                </a:tc>
-                <a:tc>
-                  <a:txBody>
-                    <a:bodyPr wrap="square"/>
-                    <a:lstStyle/>
-                    <a:p>
-                      <a:pPr algn="ctr"/>
-                      <a:r>
-                        <a:rPr sz="1000" b="0">
-                          <a:solidFill>
-                            <a:srgbClr val="000000"/>
-                          </a:solidFill>
-                          <a:latin typeface="맑은 고딕"/>
-                          <a:ea typeface="맑은 고딕"/>
-                          <a:cs typeface="맑은 고딕"/>
-                        </a:rPr>
-                        <a:t>2시간 내 (20시 마감)</a:t>
-                      </a:r>
-                    </a:p>
-                  </a:txBody>
-                  <a:tcPr anchor="ctr" marL="36000" marR="36000" marT="0" marB="0">
-                    <a:lnL w="9525" cap="flat">
-                      <a:solidFill>
-                        <a:srgbClr val="BFBFBF"/>
-                      </a:solidFill>
-                    </a:lnL>
-                    <a:lnR w="9525" cap="flat">
-                      <a:solidFill>
-                        <a:srgbClr val="BFBFBF"/>
-                      </a:solidFill>
-                    </a:lnR>
-                    <a:lnT w="9525" cap="flat">
-                      <a:solidFill>
-                        <a:srgbClr val="BFBFBF"/>
-                      </a:solidFill>
-                    </a:lnT>
-                    <a:lnB w="9525" cap="flat">
-                      <a:solidFill>
-                        <a:srgbClr val="BFBFBF"/>
-                      </a:solidFill>
-                    </a:lnB>
-                    <a:solidFill>
-                      <a:srgbClr val="FFFFFF"/>
-                    </a:solidFill>
-                  </a:tcPr>
-                </a:tc>
-                <a:tc>
-                  <a:txBody>
-                    <a:bodyPr wrap="square"/>
-                    <a:lstStyle/>
-                    <a:p>
-                      <a:pPr algn="ctr"/>
-                      <a:r>
-                        <a:rPr sz="1000" b="0">
-                          <a:solidFill>
-                            <a:srgbClr val="000000"/>
-                          </a:solidFill>
-                          <a:latin typeface="맑은 고딕"/>
-                          <a:ea typeface="맑은 고딕"/>
-                          <a:cs typeface="맑은 고딕"/>
-                        </a:rPr>
-                        <a:t>사륜차</a:t>
-                      </a:r>
-                    </a:p>
-                  </a:txBody>
-                  <a:tcPr anchor="ctr" marL="36000" marR="36000" marT="0" marB="0">
-                    <a:lnL w="9525" cap="flat">
-                      <a:solidFill>
-                        <a:srgbClr val="BFBFBF"/>
-                      </a:solidFill>
-                    </a:lnL>
-                    <a:lnR w="9525" cap="flat">
-                      <a:solidFill>
-                        <a:srgbClr val="BFBFBF"/>
-                      </a:solidFill>
-                    </a:lnR>
-                    <a:lnT w="9525" cap="flat">
-                      <a:solidFill>
-                        <a:srgbClr val="BFBFBF"/>
-                      </a:solidFill>
-                    </a:lnT>
-                    <a:lnB w="9525" cap="flat">
-                      <a:solidFill>
-                        <a:srgbClr val="BFBFBF"/>
-                      </a:solidFill>
-                    </a:lnB>
-                    <a:solidFill>
-                      <a:srgbClr val="FFFFFF"/>
-                    </a:solidFill>
-                  </a:tcPr>
-                </a:tc>
-                <a:tc>
-                  <a:txBody>
-                    <a:bodyPr wrap="square"/>
-                    <a:lstStyle/>
-                    <a:p>
-                      <a:pPr algn="ctr"/>
-                      <a:r>
-                        <a:rPr sz="1000" b="0">
-                          <a:solidFill>
-                            <a:srgbClr val="000000"/>
-                          </a:solidFill>
-                          <a:latin typeface="맑은 고딕"/>
-                          <a:ea typeface="맑은 고딕"/>
-                          <a:cs typeface="맑은 고딕"/>
-                        </a:rPr>
-                        <a:t>약 15만 종</a:t>
-                      </a:r>
-                    </a:p>
-                  </a:txBody>
-                  <a:tcPr anchor="ctr" marL="36000" marR="36000" marT="0" marB="0">
-                    <a:lnL w="9525" cap="flat">
-                      <a:solidFill>
-                        <a:srgbClr val="BFBFBF"/>
-                      </a:solidFill>
-                    </a:lnL>
-                    <a:lnR w="9525" cap="flat">
-                      <a:solidFill>
-                        <a:srgbClr val="BFBFBF"/>
-                      </a:solidFill>
-                    </a:lnR>
-                    <a:lnT w="9525" cap="flat">
-                      <a:solidFill>
-                        <a:srgbClr val="BFBFBF"/>
-                      </a:solidFill>
-                    </a:lnT>
-                    <a:lnB w="9525" cap="flat">
-                      <a:solidFill>
-                        <a:srgbClr val="BFBFBF"/>
-                      </a:solidFill>
-                    </a:lnB>
-                    <a:solidFill>
-                      <a:srgbClr val="FFFFFF"/>
-                    </a:solidFill>
-                  </a:tcPr>
-                </a:tc>
-                <a:tc>
-                  <a:txBody>
-                    <a:bodyPr wrap="square"/>
-                    <a:lstStyle/>
-                    <a:p>
-                      <a:pPr algn="ctr"/>
-                      <a:r>
-                        <a:rPr sz="1000" b="0">
-                          <a:solidFill>
-                            <a:srgbClr val="000000"/>
-                          </a:solidFill>
-                          <a:latin typeface="맑은 고딕"/>
-                          <a:ea typeface="맑은 고딕"/>
-                          <a:cs typeface="맑은 고딕"/>
-                        </a:rPr>
-                        <a:t>대용량 즉시배송</a:t>
+                        <a:t>대용량, 약 15만 종</a:t>
                       </a:r>
                     </a:p>
                   </a:txBody>
@@ -4862,14 +5020,14 @@
       </p:graphicFrame>
       <p:sp>
         <p:nvSpPr>
-          <p:cNvPr id="13" name="TextBox 12"/>
+          <p:cNvPr id="17" name="TextBox 16"/>
           <p:cNvSpPr txBox="1"/>
           <p:nvPr/>
         </p:nvSpPr>
         <p:spPr>
           <a:xfrm>
-            <a:off x="424800" y="4377600"/>
-            <a:ext cx="4410000" cy="198000"/>
+            <a:off x="5072400" y="3653999"/>
+            <a:ext cx="4410000" cy="172800"/>
           </a:xfrm>
           <a:prstGeom prst="rect">
             <a:avLst/>
@@ -4886,602 +5044,27 @@
             <a:r>
               <a:rPr sz="1200" b="1">
                 <a:solidFill>
-                  <a:srgbClr val="222222"/>
+                  <a:srgbClr val="000000"/>
                 </a:solidFill>
                 <a:latin typeface="맑은 고딕"/>
                 <a:ea typeface="맑은 고딕"/>
                 <a:cs typeface="맑은 고딕"/>
               </a:rPr>
-              <a:t>• 취급 품목 수 비교</a:t>
-            </a:r>
-          </a:p>
-        </p:txBody>
-      </p:sp>
-      <p:graphicFrame>
-        <p:nvGraphicFramePr>
-          <p:cNvPr id="14" name="Table 13"/>
-          <p:cNvGraphicFramePr>
-            <a:graphicFrameLocks noGrp="1"/>
-          </p:cNvGraphicFramePr>
-          <p:nvPr/>
-        </p:nvGraphicFramePr>
-        <p:xfrm>
-          <a:off x="424800" y="4575600"/>
-          <a:ext cx="4410000" cy="936000"/>
-        </p:xfrm>
-        <a:graphic>
-          <a:graphicData uri="http://schemas.openxmlformats.org/drawingml/2006/table">
-            <a:tbl>
-              <a:tblPr>
-                <a:tableStyleId>{5C22544A-7EE6-4342-B048-85BDC9FD1C3A}</a:tableStyleId>
-              </a:tblPr>
-              <a:tblGrid>
-                <a:gridCol w="1260000"/>
-                <a:gridCol w="1296000"/>
-                <a:gridCol w="1854000"/>
-              </a:tblGrid>
-              <a:tr h="234000">
-                <a:tc>
-                  <a:txBody>
-                    <a:bodyPr wrap="square"/>
-                    <a:lstStyle/>
-                    <a:p>
-                      <a:pPr algn="ctr"/>
-                      <a:r>
-                        <a:rPr sz="1000" b="1">
-                          <a:solidFill>
-                            <a:srgbClr val="000066"/>
-                          </a:solidFill>
-                          <a:latin typeface="맑은 고딕"/>
-                          <a:ea typeface="맑은 고딕"/>
-                          <a:cs typeface="맑은 고딕"/>
-                        </a:rPr>
-                        <a:t>구분</a:t>
-                      </a:r>
-                    </a:p>
-                  </a:txBody>
-                  <a:tcPr anchor="ctr" marL="36000" marR="36000" marT="0" marB="0">
-                    <a:lnL w="9525" cap="flat">
-                      <a:solidFill>
-                        <a:srgbClr val="BFBFBF"/>
-                      </a:solidFill>
-                    </a:lnL>
-                    <a:lnR w="9525" cap="flat">
-                      <a:solidFill>
-                        <a:srgbClr val="BFBFBF"/>
-                      </a:solidFill>
-                    </a:lnR>
-                    <a:lnT w="9525" cap="flat">
-                      <a:solidFill>
-                        <a:srgbClr val="BFBFBF"/>
-                      </a:solidFill>
-                    </a:lnT>
-                    <a:lnB w="9525" cap="flat">
-                      <a:solidFill>
-                        <a:srgbClr val="BFBFBF"/>
-                      </a:solidFill>
-                    </a:lnB>
-                    <a:solidFill>
-                      <a:srgbClr val="D8E0EC"/>
-                    </a:solidFill>
-                  </a:tcPr>
-                </a:tc>
-                <a:tc>
-                  <a:txBody>
-                    <a:bodyPr wrap="square"/>
-                    <a:lstStyle/>
-                    <a:p>
-                      <a:pPr algn="ctr"/>
-                      <a:r>
-                        <a:rPr sz="1000" b="1">
-                          <a:solidFill>
-                            <a:srgbClr val="000066"/>
-                          </a:solidFill>
-                          <a:latin typeface="맑은 고딕"/>
-                          <a:ea typeface="맑은 고딕"/>
-                          <a:cs typeface="맑은 고딕"/>
-                        </a:rPr>
-                        <a:t>품목 수</a:t>
-                      </a:r>
-                    </a:p>
-                  </a:txBody>
-                  <a:tcPr anchor="ctr" marL="36000" marR="36000" marT="0" marB="0">
-                    <a:lnL w="9525" cap="flat">
-                      <a:solidFill>
-                        <a:srgbClr val="BFBFBF"/>
-                      </a:solidFill>
-                    </a:lnL>
-                    <a:lnR w="9525" cap="flat">
-                      <a:solidFill>
-                        <a:srgbClr val="BFBFBF"/>
-                      </a:solidFill>
-                    </a:lnR>
-                    <a:lnT w="9525" cap="flat">
-                      <a:solidFill>
-                        <a:srgbClr val="BFBFBF"/>
-                      </a:solidFill>
-                    </a:lnT>
-                    <a:lnB w="9525" cap="flat">
-                      <a:solidFill>
-                        <a:srgbClr val="BFBFBF"/>
-                      </a:solidFill>
-                    </a:lnB>
-                    <a:solidFill>
-                      <a:srgbClr val="D8E0EC"/>
-                    </a:solidFill>
-                  </a:tcPr>
-                </a:tc>
-                <a:tc>
-                  <a:txBody>
-                    <a:bodyPr wrap="square"/>
-                    <a:lstStyle/>
-                    <a:p>
-                      <a:pPr algn="ctr"/>
-                      <a:r>
-                        <a:rPr sz="1000" b="1">
-                          <a:solidFill>
-                            <a:srgbClr val="000066"/>
-                          </a:solidFill>
-                          <a:latin typeface="맑은 고딕"/>
-                          <a:ea typeface="맑은 고딕"/>
-                          <a:cs typeface="맑은 고딕"/>
-                        </a:rPr>
-                        <a:t>비고</a:t>
-                      </a:r>
-                    </a:p>
-                  </a:txBody>
-                  <a:tcPr anchor="ctr" marL="36000" marR="36000" marT="0" marB="0">
-                    <a:lnL w="9525" cap="flat">
-                      <a:solidFill>
-                        <a:srgbClr val="BFBFBF"/>
-                      </a:solidFill>
-                    </a:lnL>
-                    <a:lnR w="9525" cap="flat">
-                      <a:solidFill>
-                        <a:srgbClr val="BFBFBF"/>
-                      </a:solidFill>
-                    </a:lnR>
-                    <a:lnT w="9525" cap="flat">
-                      <a:solidFill>
-                        <a:srgbClr val="BFBFBF"/>
-                      </a:solidFill>
-                    </a:lnT>
-                    <a:lnB w="9525" cap="flat">
-                      <a:solidFill>
-                        <a:srgbClr val="BFBFBF"/>
-                      </a:solidFill>
-                    </a:lnB>
-                    <a:solidFill>
-                      <a:srgbClr val="D8E0EC"/>
-                    </a:solidFill>
-                  </a:tcPr>
-                </a:tc>
-              </a:tr>
-              <a:tr h="234000">
-                <a:tc>
-                  <a:txBody>
-                    <a:bodyPr wrap="square"/>
-                    <a:lstStyle/>
-                    <a:p>
-                      <a:pPr algn="ctr"/>
-                      <a:r>
-                        <a:rPr sz="1000" b="1">
-                          <a:solidFill>
-                            <a:srgbClr val="000000"/>
-                          </a:solidFill>
-                          <a:latin typeface="맑은 고딕"/>
-                          <a:ea typeface="맑은 고딕"/>
-                          <a:cs typeface="맑은 고딕"/>
-                        </a:rPr>
-                        <a:t>이마트 점포</a:t>
-                      </a:r>
-                    </a:p>
-                  </a:txBody>
-                  <a:tcPr anchor="ctr" marL="36000" marR="36000" marT="0" marB="0">
-                    <a:lnL w="9525" cap="flat">
-                      <a:solidFill>
-                        <a:srgbClr val="BFBFBF"/>
-                      </a:solidFill>
-                    </a:lnL>
-                    <a:lnR w="9525" cap="flat">
-                      <a:solidFill>
-                        <a:srgbClr val="BFBFBF"/>
-                      </a:solidFill>
-                    </a:lnR>
-                    <a:lnT w="9525" cap="flat">
-                      <a:solidFill>
-                        <a:srgbClr val="BFBFBF"/>
-                      </a:solidFill>
-                    </a:lnT>
-                    <a:lnB w="9525" cap="flat">
-                      <a:solidFill>
-                        <a:srgbClr val="BFBFBF"/>
-                      </a:solidFill>
-                    </a:lnB>
-                    <a:solidFill>
-                      <a:srgbClr val="FFFFFF"/>
-                    </a:solidFill>
-                  </a:tcPr>
-                </a:tc>
-                <a:tc>
-                  <a:txBody>
-                    <a:bodyPr wrap="square"/>
-                    <a:lstStyle/>
-                    <a:p>
-                      <a:pPr algn="r"/>
-                      <a:r>
-                        <a:rPr sz="1000" b="0">
-                          <a:solidFill>
-                            <a:srgbClr val="000000"/>
-                          </a:solidFill>
-                          <a:latin typeface="맑은 고딕"/>
-                          <a:ea typeface="맑은 고딕"/>
-                          <a:cs typeface="맑은 고딕"/>
-                        </a:rPr>
-                        <a:t>약 150,000</a:t>
-                      </a:r>
-                    </a:p>
-                  </a:txBody>
-                  <a:tcPr anchor="ctr" marL="36000" marR="36000" marT="0" marB="0">
-                    <a:lnL w="9525" cap="flat">
-                      <a:solidFill>
-                        <a:srgbClr val="BFBFBF"/>
-                      </a:solidFill>
-                    </a:lnL>
-                    <a:lnR w="9525" cap="flat">
-                      <a:solidFill>
-                        <a:srgbClr val="BFBFBF"/>
-                      </a:solidFill>
-                    </a:lnR>
-                    <a:lnT w="9525" cap="flat">
-                      <a:solidFill>
-                        <a:srgbClr val="BFBFBF"/>
-                      </a:solidFill>
-                    </a:lnT>
-                    <a:lnB w="9525" cap="flat">
-                      <a:solidFill>
-                        <a:srgbClr val="BFBFBF"/>
-                      </a:solidFill>
-                    </a:lnB>
-                    <a:solidFill>
-                      <a:srgbClr val="FFFFFF"/>
-                    </a:solidFill>
-                  </a:tcPr>
-                </a:tc>
-                <a:tc>
-                  <a:txBody>
-                    <a:bodyPr wrap="square"/>
-                    <a:lstStyle/>
-                    <a:p>
-                      <a:pPr algn="ctr"/>
-                      <a:r>
-                        <a:rPr sz="1000" b="0">
-                          <a:solidFill>
-                            <a:srgbClr val="000000"/>
-                          </a:solidFill>
-                          <a:latin typeface="맑은 고딕"/>
-                          <a:ea typeface="맑은 고딕"/>
-                          <a:cs typeface="맑은 고딕"/>
-                        </a:rPr>
-                        <a:t>2시간 배송 기반</a:t>
-                      </a:r>
-                    </a:p>
-                  </a:txBody>
-                  <a:tcPr anchor="ctr" marL="36000" marR="36000" marT="0" marB="0">
-                    <a:lnL w="9525" cap="flat">
-                      <a:solidFill>
-                        <a:srgbClr val="BFBFBF"/>
-                      </a:solidFill>
-                    </a:lnL>
-                    <a:lnR w="9525" cap="flat">
-                      <a:solidFill>
-                        <a:srgbClr val="BFBFBF"/>
-                      </a:solidFill>
-                    </a:lnR>
-                    <a:lnT w="9525" cap="flat">
-                      <a:solidFill>
-                        <a:srgbClr val="BFBFBF"/>
-                      </a:solidFill>
-                    </a:lnT>
-                    <a:lnB w="9525" cap="flat">
-                      <a:solidFill>
-                        <a:srgbClr val="BFBFBF"/>
-                      </a:solidFill>
-                    </a:lnB>
-                    <a:solidFill>
-                      <a:srgbClr val="FFFFFF"/>
-                    </a:solidFill>
-                  </a:tcPr>
-                </a:tc>
-              </a:tr>
-              <a:tr h="234000">
-                <a:tc>
-                  <a:txBody>
-                    <a:bodyPr wrap="square"/>
-                    <a:lstStyle/>
-                    <a:p>
-                      <a:pPr algn="ctr"/>
-                      <a:r>
-                        <a:rPr sz="1000" b="1">
-                          <a:solidFill>
-                            <a:srgbClr val="000000"/>
-                          </a:solidFill>
-                          <a:latin typeface="맑은 고딕"/>
-                          <a:ea typeface="맑은 고딕"/>
-                          <a:cs typeface="맑은 고딕"/>
-                        </a:rPr>
-                        <a:t>바로퀵</a:t>
-                      </a:r>
-                    </a:p>
-                  </a:txBody>
-                  <a:tcPr anchor="ctr" marL="36000" marR="36000" marT="0" marB="0">
-                    <a:lnL w="9525" cap="flat">
-                      <a:solidFill>
-                        <a:srgbClr val="BFBFBF"/>
-                      </a:solidFill>
-                    </a:lnL>
-                    <a:lnR w="9525" cap="flat">
-                      <a:solidFill>
-                        <a:srgbClr val="BFBFBF"/>
-                      </a:solidFill>
-                    </a:lnR>
-                    <a:lnT w="9525" cap="flat">
-                      <a:solidFill>
-                        <a:srgbClr val="BFBFBF"/>
-                      </a:solidFill>
-                    </a:lnT>
-                    <a:lnB w="9525" cap="flat">
-                      <a:solidFill>
-                        <a:srgbClr val="BFBFBF"/>
-                      </a:solidFill>
-                    </a:lnB>
-                    <a:solidFill>
-                      <a:srgbClr val="FFFFFF"/>
-                    </a:solidFill>
-                  </a:tcPr>
-                </a:tc>
-                <a:tc>
-                  <a:txBody>
-                    <a:bodyPr wrap="square"/>
-                    <a:lstStyle/>
-                    <a:p>
-                      <a:pPr algn="r"/>
-                      <a:r>
-                        <a:rPr sz="1000" b="0">
-                          <a:solidFill>
-                            <a:srgbClr val="000000"/>
-                          </a:solidFill>
-                          <a:latin typeface="맑은 고딕"/>
-                          <a:ea typeface="맑은 고딕"/>
-                          <a:cs typeface="맑은 고딕"/>
-                        </a:rPr>
-                        <a:t>약 10,000</a:t>
-                      </a:r>
-                    </a:p>
-                  </a:txBody>
-                  <a:tcPr anchor="ctr" marL="36000" marR="36000" marT="0" marB="0">
-                    <a:lnL w="9525" cap="flat">
-                      <a:solidFill>
-                        <a:srgbClr val="BFBFBF"/>
-                      </a:solidFill>
-                    </a:lnL>
-                    <a:lnR w="9525" cap="flat">
-                      <a:solidFill>
-                        <a:srgbClr val="BFBFBF"/>
-                      </a:solidFill>
-                    </a:lnR>
-                    <a:lnT w="9525" cap="flat">
-                      <a:solidFill>
-                        <a:srgbClr val="BFBFBF"/>
-                      </a:solidFill>
-                    </a:lnT>
-                    <a:lnB w="9525" cap="flat">
-                      <a:solidFill>
-                        <a:srgbClr val="BFBFBF"/>
-                      </a:solidFill>
-                    </a:lnB>
-                    <a:solidFill>
-                      <a:srgbClr val="FFFFFF"/>
-                    </a:solidFill>
-                  </a:tcPr>
-                </a:tc>
-                <a:tc>
-                  <a:txBody>
-                    <a:bodyPr wrap="square"/>
-                    <a:lstStyle/>
-                    <a:p>
-                      <a:pPr algn="ctr"/>
-                      <a:r>
-                        <a:rPr sz="1000" b="0">
-                          <a:solidFill>
-                            <a:srgbClr val="000000"/>
-                          </a:solidFill>
-                          <a:latin typeface="맑은 고딕"/>
-                          <a:ea typeface="맑은 고딕"/>
-                          <a:cs typeface="맑은 고딕"/>
-                        </a:rPr>
-                        <a:t>이륜차 적재 한계</a:t>
-                      </a:r>
-                    </a:p>
-                  </a:txBody>
-                  <a:tcPr anchor="ctr" marL="36000" marR="36000" marT="0" marB="0">
-                    <a:lnL w="9525" cap="flat">
-                      <a:solidFill>
-                        <a:srgbClr val="BFBFBF"/>
-                      </a:solidFill>
-                    </a:lnL>
-                    <a:lnR w="9525" cap="flat">
-                      <a:solidFill>
-                        <a:srgbClr val="BFBFBF"/>
-                      </a:solidFill>
-                    </a:lnR>
-                    <a:lnT w="9525" cap="flat">
-                      <a:solidFill>
-                        <a:srgbClr val="BFBFBF"/>
-                      </a:solidFill>
-                    </a:lnT>
-                    <a:lnB w="9525" cap="flat">
-                      <a:solidFill>
-                        <a:srgbClr val="BFBFBF"/>
-                      </a:solidFill>
-                    </a:lnB>
-                    <a:solidFill>
-                      <a:srgbClr val="FFFFFF"/>
-                    </a:solidFill>
-                  </a:tcPr>
-                </a:tc>
-              </a:tr>
-              <a:tr h="234000">
-                <a:tc>
-                  <a:txBody>
-                    <a:bodyPr wrap="square"/>
-                    <a:lstStyle/>
-                    <a:p>
-                      <a:pPr algn="ctr"/>
-                      <a:r>
-                        <a:rPr sz="1000" b="1">
-                          <a:solidFill>
-                            <a:srgbClr val="000000"/>
-                          </a:solidFill>
-                          <a:latin typeface="맑은 고딕"/>
-                          <a:ea typeface="맑은 고딕"/>
-                          <a:cs typeface="맑은 고딕"/>
-                        </a:rPr>
-                        <a:t>B마트</a:t>
-                      </a:r>
-                    </a:p>
-                  </a:txBody>
-                  <a:tcPr anchor="ctr" marL="36000" marR="36000" marT="0" marB="0">
-                    <a:lnL w="9525" cap="flat">
-                      <a:solidFill>
-                        <a:srgbClr val="BFBFBF"/>
-                      </a:solidFill>
-                    </a:lnL>
-                    <a:lnR w="9525" cap="flat">
-                      <a:solidFill>
-                        <a:srgbClr val="BFBFBF"/>
-                      </a:solidFill>
-                    </a:lnR>
-                    <a:lnT w="9525" cap="flat">
-                      <a:solidFill>
-                        <a:srgbClr val="BFBFBF"/>
-                      </a:solidFill>
-                    </a:lnT>
-                    <a:lnB w="9525" cap="flat">
-                      <a:solidFill>
-                        <a:srgbClr val="BFBFBF"/>
-                      </a:solidFill>
-                    </a:lnB>
-                    <a:solidFill>
-                      <a:srgbClr val="FFFFFF"/>
-                    </a:solidFill>
-                  </a:tcPr>
-                </a:tc>
-                <a:tc>
-                  <a:txBody>
-                    <a:bodyPr wrap="square"/>
-                    <a:lstStyle/>
-                    <a:p>
-                      <a:pPr algn="r"/>
-                      <a:r>
-                        <a:rPr sz="1000" b="0">
-                          <a:solidFill>
-                            <a:srgbClr val="000000"/>
-                          </a:solidFill>
-                          <a:latin typeface="맑은 고딕"/>
-                          <a:ea typeface="맑은 고딕"/>
-                          <a:cs typeface="맑은 고딕"/>
-                        </a:rPr>
-                        <a:t>약 20,000</a:t>
-                      </a:r>
-                    </a:p>
-                  </a:txBody>
-                  <a:tcPr anchor="ctr" marL="36000" marR="36000" marT="0" marB="0">
-                    <a:lnL w="9525" cap="flat">
-                      <a:solidFill>
-                        <a:srgbClr val="BFBFBF"/>
-                      </a:solidFill>
-                    </a:lnL>
-                    <a:lnR w="9525" cap="flat">
-                      <a:solidFill>
-                        <a:srgbClr val="BFBFBF"/>
-                      </a:solidFill>
-                    </a:lnR>
-                    <a:lnT w="9525" cap="flat">
-                      <a:solidFill>
-                        <a:srgbClr val="BFBFBF"/>
-                      </a:solidFill>
-                    </a:lnT>
-                    <a:lnB w="9525" cap="flat">
-                      <a:solidFill>
-                        <a:srgbClr val="BFBFBF"/>
-                      </a:solidFill>
-                    </a:lnB>
-                    <a:solidFill>
-                      <a:srgbClr val="FFFFFF"/>
-                    </a:solidFill>
-                  </a:tcPr>
-                </a:tc>
-                <a:tc>
-                  <a:txBody>
-                    <a:bodyPr wrap="square"/>
-                    <a:lstStyle/>
-                    <a:p>
-                      <a:pPr algn="ctr"/>
-                      <a:r>
-                        <a:rPr sz="1000" b="0">
-                          <a:solidFill>
-                            <a:srgbClr val="000000"/>
-                          </a:solidFill>
-                          <a:latin typeface="맑은 고딕"/>
-                          <a:ea typeface="맑은 고딕"/>
-                          <a:cs typeface="맑은 고딕"/>
-                        </a:rPr>
-                        <a:t>퀵커머스 1위</a:t>
-                      </a:r>
-                    </a:p>
-                  </a:txBody>
-                  <a:tcPr anchor="ctr" marL="36000" marR="36000" marT="0" marB="0">
-                    <a:lnL w="9525" cap="flat">
-                      <a:solidFill>
-                        <a:srgbClr val="BFBFBF"/>
-                      </a:solidFill>
-                    </a:lnL>
-                    <a:lnR w="9525" cap="flat">
-                      <a:solidFill>
-                        <a:srgbClr val="BFBFBF"/>
-                      </a:solidFill>
-                    </a:lnR>
-                    <a:lnT w="9525" cap="flat">
-                      <a:solidFill>
-                        <a:srgbClr val="BFBFBF"/>
-                      </a:solidFill>
-                    </a:lnT>
-                    <a:lnB w="9525" cap="flat">
-                      <a:solidFill>
-                        <a:srgbClr val="BFBFBF"/>
-                      </a:solidFill>
-                    </a:lnB>
-                    <a:solidFill>
-                      <a:srgbClr val="FFFFFF"/>
-                    </a:solidFill>
-                  </a:tcPr>
-                </a:tc>
-              </a:tr>
-            </a:tbl>
-          </a:graphicData>
-        </a:graphic>
-      </p:graphicFrame>
-      <p:sp>
-        <p:nvSpPr>
-          <p:cNvPr id="15" name="TextBox 14"/>
+              <a:t>• 확대 로드맵</a:t>
+            </a:r>
+          </a:p>
+        </p:txBody>
+      </p:sp>
+      <p:sp>
+        <p:nvSpPr>
+          <p:cNvPr id="18" name="TextBox 17"/>
           <p:cNvSpPr txBox="1"/>
           <p:nvPr/>
         </p:nvSpPr>
         <p:spPr>
           <a:xfrm>
-            <a:off x="5072400" y="4377600"/>
-            <a:ext cx="4410000" cy="198000"/>
+            <a:off x="5270400" y="3826799"/>
+            <a:ext cx="4212000" cy="172800"/>
           </a:xfrm>
           <a:prstGeom prst="rect">
             <a:avLst/>
@@ -5496,423 +5079,29 @@
           <a:p>
             <a:pPr algn="l"/>
             <a:r>
-              <a:rPr sz="1200" b="1">
+              <a:rPr sz="1100" b="0">
                 <a:solidFill>
-                  <a:srgbClr val="222222"/>
+                  <a:srgbClr val="000000"/>
                 </a:solidFill>
                 <a:latin typeface="맑은 고딕"/>
                 <a:ea typeface="맑은 고딕"/>
                 <a:cs typeface="맑은 고딕"/>
               </a:rPr>
-              <a:t>• 확대 로드맵</a:t>
-            </a:r>
-          </a:p>
-        </p:txBody>
-      </p:sp>
-      <p:graphicFrame>
-        <p:nvGraphicFramePr>
-          <p:cNvPr id="16" name="Table 15"/>
-          <p:cNvGraphicFramePr>
-            <a:graphicFrameLocks noGrp="1"/>
-          </p:cNvGraphicFramePr>
-          <p:nvPr/>
-        </p:nvGraphicFramePr>
-        <p:xfrm>
-          <a:off x="5072400" y="4575600"/>
-          <a:ext cx="4410000" cy="936000"/>
-        </p:xfrm>
-        <a:graphic>
-          <a:graphicData uri="http://schemas.openxmlformats.org/drawingml/2006/table">
-            <a:tbl>
-              <a:tblPr>
-                <a:tableStyleId>{5C22544A-7EE6-4342-B048-85BDC9FD1C3A}</a:tableStyleId>
-              </a:tblPr>
-              <a:tblGrid>
-                <a:gridCol w="1404000"/>
-                <a:gridCol w="3006000"/>
-              </a:tblGrid>
-              <a:tr h="234000">
-                <a:tc>
-                  <a:txBody>
-                    <a:bodyPr wrap="square"/>
-                    <a:lstStyle/>
-                    <a:p>
-                      <a:pPr algn="ctr"/>
-                      <a:r>
-                        <a:rPr sz="1000" b="1">
-                          <a:solidFill>
-                            <a:srgbClr val="000066"/>
-                          </a:solidFill>
-                          <a:latin typeface="맑은 고딕"/>
-                          <a:ea typeface="맑은 고딕"/>
-                          <a:cs typeface="맑은 고딕"/>
-                        </a:rPr>
-                        <a:t>시기</a:t>
-                      </a:r>
-                    </a:p>
-                  </a:txBody>
-                  <a:tcPr anchor="ctr" marL="36000" marR="36000" marT="0" marB="0">
-                    <a:lnL w="9525" cap="flat">
-                      <a:solidFill>
-                        <a:srgbClr val="BFBFBF"/>
-                      </a:solidFill>
-                    </a:lnL>
-                    <a:lnR w="9525" cap="flat">
-                      <a:solidFill>
-                        <a:srgbClr val="BFBFBF"/>
-                      </a:solidFill>
-                    </a:lnR>
-                    <a:lnT w="9525" cap="flat">
-                      <a:solidFill>
-                        <a:srgbClr val="BFBFBF"/>
-                      </a:solidFill>
-                    </a:lnT>
-                    <a:lnB w="9525" cap="flat">
-                      <a:solidFill>
-                        <a:srgbClr val="BFBFBF"/>
-                      </a:solidFill>
-                    </a:lnB>
-                    <a:solidFill>
-                      <a:srgbClr val="D8E0EC"/>
-                    </a:solidFill>
-                  </a:tcPr>
-                </a:tc>
-                <a:tc>
-                  <a:txBody>
-                    <a:bodyPr wrap="square"/>
-                    <a:lstStyle/>
-                    <a:p>
-                      <a:pPr algn="ctr"/>
-                      <a:r>
-                        <a:rPr sz="1000" b="1">
-                          <a:solidFill>
-                            <a:srgbClr val="000066"/>
-                          </a:solidFill>
-                          <a:latin typeface="맑은 고딕"/>
-                          <a:ea typeface="맑은 고딕"/>
-                          <a:cs typeface="맑은 고딕"/>
-                        </a:rPr>
-                        <a:t>계획</a:t>
-                      </a:r>
-                    </a:p>
-                  </a:txBody>
-                  <a:tcPr anchor="ctr" marL="36000" marR="36000" marT="0" marB="0">
-                    <a:lnL w="9525" cap="flat">
-                      <a:solidFill>
-                        <a:srgbClr val="BFBFBF"/>
-                      </a:solidFill>
-                    </a:lnL>
-                    <a:lnR w="9525" cap="flat">
-                      <a:solidFill>
-                        <a:srgbClr val="BFBFBF"/>
-                      </a:solidFill>
-                    </a:lnR>
-                    <a:lnT w="9525" cap="flat">
-                      <a:solidFill>
-                        <a:srgbClr val="BFBFBF"/>
-                      </a:solidFill>
-                    </a:lnT>
-                    <a:lnB w="9525" cap="flat">
-                      <a:solidFill>
-                        <a:srgbClr val="BFBFBF"/>
-                      </a:solidFill>
-                    </a:lnB>
-                    <a:solidFill>
-                      <a:srgbClr val="D8E0EC"/>
-                    </a:solidFill>
-                  </a:tcPr>
-                </a:tc>
-              </a:tr>
-              <a:tr h="234000">
-                <a:tc>
-                  <a:txBody>
-                    <a:bodyPr wrap="square"/>
-                    <a:lstStyle/>
-                    <a:p>
-                      <a:pPr algn="ctr"/>
-                      <a:r>
-                        <a:rPr sz="1000" b="1">
-                          <a:solidFill>
-                            <a:srgbClr val="000000"/>
-                          </a:solidFill>
-                          <a:latin typeface="맑은 고딕"/>
-                          <a:ea typeface="맑은 고딕"/>
-                          <a:cs typeface="맑은 고딕"/>
-                        </a:rPr>
-                        <a:t>'26. 7월</a:t>
-                      </a:r>
-                    </a:p>
-                  </a:txBody>
-                  <a:tcPr anchor="ctr" marL="36000" marR="36000" marT="0" marB="0">
-                    <a:lnL w="9525" cap="flat">
-                      <a:solidFill>
-                        <a:srgbClr val="BFBFBF"/>
-                      </a:solidFill>
-                    </a:lnL>
-                    <a:lnR w="9525" cap="flat">
-                      <a:solidFill>
-                        <a:srgbClr val="BFBFBF"/>
-                      </a:solidFill>
-                    </a:lnR>
-                    <a:lnT w="9525" cap="flat">
-                      <a:solidFill>
-                        <a:srgbClr val="BFBFBF"/>
-                      </a:solidFill>
-                    </a:lnT>
-                    <a:lnB w="9525" cap="flat">
-                      <a:solidFill>
-                        <a:srgbClr val="BFBFBF"/>
-                      </a:solidFill>
-                    </a:lnB>
-                    <a:solidFill>
-                      <a:srgbClr val="FFFFFF"/>
-                    </a:solidFill>
-                  </a:tcPr>
-                </a:tc>
-                <a:tc>
-                  <a:txBody>
-                    <a:bodyPr wrap="square"/>
-                    <a:lstStyle/>
-                    <a:p>
-                      <a:pPr algn="ctr"/>
-                      <a:r>
-                        <a:rPr sz="1000" b="0">
-                          <a:solidFill>
-                            <a:srgbClr val="000000"/>
-                          </a:solidFill>
-                          <a:latin typeface="맑은 고딕"/>
-                          <a:ea typeface="맑은 고딕"/>
-                          <a:cs typeface="맑은 고딕"/>
-                        </a:rPr>
-                        <a:t>양재·하남점 시범 운영</a:t>
-                      </a:r>
-                    </a:p>
-                  </a:txBody>
-                  <a:tcPr anchor="ctr" marL="36000" marR="36000" marT="0" marB="0">
-                    <a:lnL w="9525" cap="flat">
-                      <a:solidFill>
-                        <a:srgbClr val="BFBFBF"/>
-                      </a:solidFill>
-                    </a:lnL>
-                    <a:lnR w="9525" cap="flat">
-                      <a:solidFill>
-                        <a:srgbClr val="BFBFBF"/>
-                      </a:solidFill>
-                    </a:lnR>
-                    <a:lnT w="9525" cap="flat">
-                      <a:solidFill>
-                        <a:srgbClr val="BFBFBF"/>
-                      </a:solidFill>
-                    </a:lnT>
-                    <a:lnB w="9525" cap="flat">
-                      <a:solidFill>
-                        <a:srgbClr val="BFBFBF"/>
-                      </a:solidFill>
-                    </a:lnB>
-                    <a:solidFill>
-                      <a:srgbClr val="FFFFFF"/>
-                    </a:solidFill>
-                  </a:tcPr>
-                </a:tc>
-              </a:tr>
-              <a:tr h="234000">
-                <a:tc>
-                  <a:txBody>
-                    <a:bodyPr wrap="square"/>
-                    <a:lstStyle/>
-                    <a:p>
-                      <a:pPr algn="ctr"/>
-                      <a:r>
-                        <a:rPr sz="1000" b="1">
-                          <a:solidFill>
-                            <a:srgbClr val="000000"/>
-                          </a:solidFill>
-                          <a:latin typeface="맑은 고딕"/>
-                          <a:ea typeface="맑은 고딕"/>
-                          <a:cs typeface="맑은 고딕"/>
-                        </a:rPr>
-                        <a:t>'26. 8월</a:t>
-                      </a:r>
-                    </a:p>
-                  </a:txBody>
-                  <a:tcPr anchor="ctr" marL="36000" marR="36000" marT="0" marB="0">
-                    <a:lnL w="9525" cap="flat">
-                      <a:solidFill>
-                        <a:srgbClr val="BFBFBF"/>
-                      </a:solidFill>
-                    </a:lnL>
-                    <a:lnR w="9525" cap="flat">
-                      <a:solidFill>
-                        <a:srgbClr val="BFBFBF"/>
-                      </a:solidFill>
-                    </a:lnR>
-                    <a:lnT w="9525" cap="flat">
-                      <a:solidFill>
-                        <a:srgbClr val="BFBFBF"/>
-                      </a:solidFill>
-                    </a:lnT>
-                    <a:lnB w="9525" cap="flat">
-                      <a:solidFill>
-                        <a:srgbClr val="BFBFBF"/>
-                      </a:solidFill>
-                    </a:lnB>
-                    <a:solidFill>
-                      <a:srgbClr val="FFFFFF"/>
-                    </a:solidFill>
-                  </a:tcPr>
-                </a:tc>
-                <a:tc>
-                  <a:txBody>
-                    <a:bodyPr wrap="square"/>
-                    <a:lstStyle/>
-                    <a:p>
-                      <a:pPr algn="ctr"/>
-                      <a:r>
-                        <a:rPr sz="1000" b="0">
-                          <a:solidFill>
-                            <a:srgbClr val="000000"/>
-                          </a:solidFill>
-                          <a:latin typeface="맑은 고딕"/>
-                          <a:ea typeface="맑은 고딕"/>
-                          <a:cs typeface="맑은 고딕"/>
-                        </a:rPr>
-                        <a:t>서울 주요 지역 확대</a:t>
-                      </a:r>
-                    </a:p>
-                  </a:txBody>
-                  <a:tcPr anchor="ctr" marL="36000" marR="36000" marT="0" marB="0">
-                    <a:lnL w="9525" cap="flat">
-                      <a:solidFill>
-                        <a:srgbClr val="BFBFBF"/>
-                      </a:solidFill>
-                    </a:lnL>
-                    <a:lnR w="9525" cap="flat">
-                      <a:solidFill>
-                        <a:srgbClr val="BFBFBF"/>
-                      </a:solidFill>
-                    </a:lnR>
-                    <a:lnT w="9525" cap="flat">
-                      <a:solidFill>
-                        <a:srgbClr val="BFBFBF"/>
-                      </a:solidFill>
-                    </a:lnT>
-                    <a:lnB w="9525" cap="flat">
-                      <a:solidFill>
-                        <a:srgbClr val="BFBFBF"/>
-                      </a:solidFill>
-                    </a:lnB>
-                    <a:solidFill>
-                      <a:srgbClr val="FFFFFF"/>
-                    </a:solidFill>
-                  </a:tcPr>
-                </a:tc>
-              </a:tr>
-              <a:tr h="234000">
-                <a:tc>
-                  <a:txBody>
-                    <a:bodyPr wrap="square"/>
-                    <a:lstStyle/>
-                    <a:p>
-                      <a:pPr algn="ctr"/>
-                      <a:r>
-                        <a:rPr sz="1000" b="1">
-                          <a:solidFill>
-                            <a:srgbClr val="000000"/>
-                          </a:solidFill>
-                          <a:latin typeface="맑은 고딕"/>
-                          <a:ea typeface="맑은 고딕"/>
-                          <a:cs typeface="맑은 고딕"/>
-                        </a:rPr>
-                        <a:t>'26. 9월 → 연말</a:t>
-                      </a:r>
-                    </a:p>
-                  </a:txBody>
-                  <a:tcPr anchor="ctr" marL="36000" marR="36000" marT="0" marB="0">
-                    <a:lnL w="9525" cap="flat">
-                      <a:solidFill>
-                        <a:srgbClr val="BFBFBF"/>
-                      </a:solidFill>
-                    </a:lnL>
-                    <a:lnR w="9525" cap="flat">
-                      <a:solidFill>
-                        <a:srgbClr val="BFBFBF"/>
-                      </a:solidFill>
-                    </a:lnR>
-                    <a:lnT w="9525" cap="flat">
-                      <a:solidFill>
-                        <a:srgbClr val="BFBFBF"/>
-                      </a:solidFill>
-                    </a:lnT>
-                    <a:lnB w="9525" cap="flat">
-                      <a:solidFill>
-                        <a:srgbClr val="BFBFBF"/>
-                      </a:solidFill>
-                    </a:lnB>
-                    <a:solidFill>
-                      <a:srgbClr val="FFFFFF"/>
-                    </a:solidFill>
-                  </a:tcPr>
-                </a:tc>
-                <a:tc>
-                  <a:txBody>
-                    <a:bodyPr wrap="square"/>
-                    <a:lstStyle/>
-                    <a:p>
-                      <a:pPr algn="ctr"/>
-                      <a:r>
-                        <a:rPr sz="1000" b="0">
-                          <a:solidFill>
-                            <a:srgbClr val="000000"/>
-                          </a:solidFill>
-                          <a:latin typeface="맑은 고딕"/>
-                          <a:ea typeface="맑은 고딕"/>
-                          <a:cs typeface="맑은 고딕"/>
-                        </a:rPr>
-                        <a:t>전국 확대 → 50여 개 점포</a:t>
-                      </a:r>
-                    </a:p>
-                  </a:txBody>
-                  <a:tcPr anchor="ctr" marL="36000" marR="36000" marT="0" marB="0">
-                    <a:lnL w="9525" cap="flat">
-                      <a:solidFill>
-                        <a:srgbClr val="BFBFBF"/>
-                      </a:solidFill>
-                    </a:lnL>
-                    <a:lnR w="9525" cap="flat">
-                      <a:solidFill>
-                        <a:srgbClr val="BFBFBF"/>
-                      </a:solidFill>
-                    </a:lnR>
-                    <a:lnT w="9525" cap="flat">
-                      <a:solidFill>
-                        <a:srgbClr val="BFBFBF"/>
-                      </a:solidFill>
-                    </a:lnT>
-                    <a:lnB w="9525" cap="flat">
-                      <a:solidFill>
-                        <a:srgbClr val="BFBFBF"/>
-                      </a:solidFill>
-                    </a:lnB>
-                    <a:solidFill>
-                      <a:srgbClr val="FFFFFF"/>
-                    </a:solidFill>
-                  </a:tcPr>
-                </a:tc>
-              </a:tr>
-            </a:tbl>
-          </a:graphicData>
-        </a:graphic>
-      </p:graphicFrame>
-      <p:sp>
-        <p:nvSpPr>
-          <p:cNvPr id="17" name="TextBox 16"/>
+              <a:t>- 7월 양재·하남 → 8월 서울 → 9월 전국</a:t>
+            </a:r>
+          </a:p>
+        </p:txBody>
+      </p:sp>
+      <p:sp>
+        <p:nvSpPr>
+          <p:cNvPr id="19" name="TextBox 18"/>
           <p:cNvSpPr txBox="1"/>
           <p:nvPr/>
         </p:nvSpPr>
         <p:spPr>
           <a:xfrm>
-            <a:off x="424800" y="5691600"/>
-            <a:ext cx="9057600" cy="172800"/>
+            <a:off x="5270400" y="3999600"/>
+            <a:ext cx="4212000" cy="172800"/>
           </a:xfrm>
           <a:prstGeom prst="rect">
             <a:avLst/>
@@ -5927,19 +5116,327 @@
           <a:p>
             <a:pPr algn="l"/>
             <a:r>
-              <a:rPr sz="1000" b="0">
+              <a:rPr sz="1100" b="0">
                 <a:solidFill>
-                  <a:srgbClr val="C30C3E"/>
+                  <a:srgbClr val="000000"/>
                 </a:solidFill>
                 <a:latin typeface="맑은 고딕"/>
                 <a:ea typeface="맑은 고딕"/>
                 <a:cs typeface="맑은 고딕"/>
               </a:rPr>
-              <a:t>※ 유통산업발전법 : 영업 0~10시 제한·월 2회 휴업 → PP센터 새벽배송 불가 (규제 완화 시 확장 여지)</a:t>
-            </a:r>
-          </a:p>
-        </p:txBody>
-      </p:sp>
+              <a:t>- 연말 50여 개 점포 운영 목표</a:t>
+            </a:r>
+          </a:p>
+        </p:txBody>
+      </p:sp>
+      <p:sp>
+        <p:nvSpPr>
+          <p:cNvPr id="20" name="TextBox 19"/>
+          <p:cNvSpPr txBox="1"/>
+          <p:nvPr/>
+        </p:nvSpPr>
+        <p:spPr>
+          <a:xfrm>
+            <a:off x="5072400" y="4370400"/>
+            <a:ext cx="4410000" cy="172800"/>
+          </a:xfrm>
+          <a:prstGeom prst="rect">
+            <a:avLst/>
+          </a:prstGeom>
+          <a:noFill/>
+        </p:spPr>
+        <p:txBody>
+          <a:bodyPr wrap="square" anchor="t" lIns="0" rIns="0" tIns="0" bIns="0">
+            <a:spAutoFit/>
+          </a:bodyPr>
+          <a:lstStyle/>
+          <a:p>
+            <a:pPr algn="l"/>
+            <a:r>
+              <a:rPr sz="1200" b="1">
+                <a:solidFill>
+                  <a:srgbClr val="000000"/>
+                </a:solidFill>
+                <a:latin typeface="맑은 고딕"/>
+                <a:ea typeface="맑은 고딕"/>
+                <a:cs typeface="맑은 고딕"/>
+              </a:rPr>
+              <a:t>• 규제 이슈</a:t>
+            </a:r>
+          </a:p>
+        </p:txBody>
+      </p:sp>
+      <p:sp>
+        <p:nvSpPr>
+          <p:cNvPr id="21" name="TextBox 20"/>
+          <p:cNvSpPr txBox="1"/>
+          <p:nvPr/>
+        </p:nvSpPr>
+        <p:spPr>
+          <a:xfrm>
+            <a:off x="5270400" y="4543200"/>
+            <a:ext cx="4212000" cy="172800"/>
+          </a:xfrm>
+          <a:prstGeom prst="rect">
+            <a:avLst/>
+          </a:prstGeom>
+          <a:noFill/>
+        </p:spPr>
+        <p:txBody>
+          <a:bodyPr wrap="square" anchor="t" lIns="0" rIns="0" tIns="0" bIns="0">
+            <a:spAutoFit/>
+          </a:bodyPr>
+          <a:lstStyle/>
+          <a:p>
+            <a:pPr algn="l"/>
+            <a:r>
+              <a:rPr sz="1100" b="0">
+                <a:solidFill>
+                  <a:srgbClr val="000000"/>
+                </a:solidFill>
+                <a:latin typeface="맑은 고딕"/>
+                <a:ea typeface="맑은 고딕"/>
+                <a:cs typeface="맑은 고딕"/>
+              </a:rPr>
+              <a:t>- 유통법 영업 제한 → PP센터 새벽 불가</a:t>
+            </a:r>
+          </a:p>
+        </p:txBody>
+      </p:sp>
+      <p:sp>
+        <p:nvSpPr>
+          <p:cNvPr id="22" name="TextBox 21"/>
+          <p:cNvSpPr txBox="1"/>
+          <p:nvPr/>
+        </p:nvSpPr>
+        <p:spPr>
+          <a:xfrm>
+            <a:off x="5270400" y="4716000"/>
+            <a:ext cx="4212000" cy="172800"/>
+          </a:xfrm>
+          <a:prstGeom prst="rect">
+            <a:avLst/>
+          </a:prstGeom>
+          <a:noFill/>
+        </p:spPr>
+        <p:txBody>
+          <a:bodyPr wrap="square" anchor="t" lIns="0" rIns="0" tIns="0" bIns="0">
+            <a:spAutoFit/>
+          </a:bodyPr>
+          <a:lstStyle/>
+          <a:p>
+            <a:pPr algn="l"/>
+            <a:r>
+              <a:rPr sz="1100" b="0">
+                <a:solidFill>
+                  <a:srgbClr val="000000"/>
+                </a:solidFill>
+                <a:latin typeface="맑은 고딕"/>
+                <a:ea typeface="맑은 고딕"/>
+                <a:cs typeface="맑은 고딕"/>
+              </a:rPr>
+              <a:t>- 규제 완화 시 새벽배송 확장 여지</a:t>
+            </a:r>
+          </a:p>
+        </p:txBody>
+      </p:sp>
+      <p:sp>
+        <p:nvSpPr>
+          <p:cNvPr id="23" name="Rectangle 22"/>
+          <p:cNvSpPr/>
+          <p:nvPr/>
+        </p:nvSpPr>
+        <p:spPr>
+          <a:xfrm>
+            <a:off x="424800" y="5086800"/>
+            <a:ext cx="4410000" cy="324000"/>
+          </a:xfrm>
+          <a:prstGeom prst="rect">
+            <a:avLst/>
+          </a:prstGeom>
+          <a:solidFill>
+            <a:srgbClr val="000066"/>
+          </a:solidFill>
+          <a:ln>
+            <a:noFill/>
+          </a:ln>
+          <a:effectLst/>
+        </p:spPr>
+        <p:style>
+          <a:lnRef idx="1">
+            <a:schemeClr val="accent1"/>
+          </a:lnRef>
+          <a:fillRef idx="3">
+            <a:schemeClr val="accent1"/>
+          </a:fillRef>
+          <a:effectRef idx="2">
+            <a:schemeClr val="accent1"/>
+          </a:effectRef>
+          <a:fontRef idx="minor">
+            <a:schemeClr val="lt1"/>
+          </a:fontRef>
+        </p:style>
+        <p:txBody>
+          <a:bodyPr rtlCol="0" anchor="ctr"/>
+          <a:lstStyle/>
+          <a:p>
+            <a:pPr algn="ctr"/>
+          </a:p>
+        </p:txBody>
+      </p:sp>
+      <p:sp>
+        <p:nvSpPr>
+          <p:cNvPr id="24" name="TextBox 23"/>
+          <p:cNvSpPr txBox="1"/>
+          <p:nvPr/>
+        </p:nvSpPr>
+        <p:spPr>
+          <a:xfrm>
+            <a:off x="424800" y="5086800"/>
+            <a:ext cx="4410000" cy="324000"/>
+          </a:xfrm>
+          <a:prstGeom prst="rect">
+            <a:avLst/>
+          </a:prstGeom>
+          <a:noFill/>
+        </p:spPr>
+        <p:txBody>
+          <a:bodyPr wrap="square" anchor="ctr" lIns="0" rIns="0" tIns="0" bIns="0">
+            <a:spAutoFit/>
+          </a:bodyPr>
+          <a:lstStyle/>
+          <a:p>
+            <a:pPr algn="ctr"/>
+            <a:r>
+              <a:rPr sz="1100" b="1">
+                <a:solidFill>
+                  <a:srgbClr val="FFFFFF"/>
+                </a:solidFill>
+                <a:latin typeface="맑은 고딕"/>
+                <a:ea typeface="맑은 고딕"/>
+                <a:cs typeface="맑은 고딕"/>
+              </a:rPr>
+              <a:t>사륜차 대용량 즉시배송으로 퀵커머스 공백 흡수</a:t>
+            </a:r>
+          </a:p>
+        </p:txBody>
+      </p:sp>
+      <p:sp>
+        <p:nvSpPr>
+          <p:cNvPr id="25" name="Rectangle 24"/>
+          <p:cNvSpPr/>
+          <p:nvPr/>
+        </p:nvSpPr>
+        <p:spPr>
+          <a:xfrm>
+            <a:off x="5072400" y="5086800"/>
+            <a:ext cx="4410000" cy="324000"/>
+          </a:xfrm>
+          <a:prstGeom prst="rect">
+            <a:avLst/>
+          </a:prstGeom>
+          <a:solidFill>
+            <a:srgbClr val="000066"/>
+          </a:solidFill>
+          <a:ln>
+            <a:noFill/>
+          </a:ln>
+          <a:effectLst/>
+        </p:spPr>
+        <p:style>
+          <a:lnRef idx="1">
+            <a:schemeClr val="accent1"/>
+          </a:lnRef>
+          <a:fillRef idx="3">
+            <a:schemeClr val="accent1"/>
+          </a:fillRef>
+          <a:effectRef idx="2">
+            <a:schemeClr val="accent1"/>
+          </a:effectRef>
+          <a:fontRef idx="minor">
+            <a:schemeClr val="lt1"/>
+          </a:fontRef>
+        </p:style>
+        <p:txBody>
+          <a:bodyPr rtlCol="0" anchor="ctr"/>
+          <a:lstStyle/>
+          <a:p>
+            <a:pPr algn="ctr"/>
+          </a:p>
+        </p:txBody>
+      </p:sp>
+      <p:sp>
+        <p:nvSpPr>
+          <p:cNvPr id="26" name="TextBox 25"/>
+          <p:cNvSpPr txBox="1"/>
+          <p:nvPr/>
+        </p:nvSpPr>
+        <p:spPr>
+          <a:xfrm>
+            <a:off x="5072400" y="5086800"/>
+            <a:ext cx="4410000" cy="324000"/>
+          </a:xfrm>
+          <a:prstGeom prst="rect">
+            <a:avLst/>
+          </a:prstGeom>
+          <a:noFill/>
+        </p:spPr>
+        <p:txBody>
+          <a:bodyPr wrap="square" anchor="ctr" lIns="0" rIns="0" tIns="0" bIns="0">
+            <a:spAutoFit/>
+          </a:bodyPr>
+          <a:lstStyle/>
+          <a:p>
+            <a:pPr algn="ctr"/>
+            <a:r>
+              <a:rPr sz="1100" b="1">
+                <a:solidFill>
+                  <a:srgbClr val="FFFFFF"/>
+                </a:solidFill>
+                <a:latin typeface="맑은 고딕"/>
+                <a:ea typeface="맑은 고딕"/>
+                <a:cs typeface="맑은 고딕"/>
+              </a:rPr>
+              <a:t>연말 50여 개 점포 — 전국 즉시배송 기반 구축</a:t>
+            </a:r>
+          </a:p>
+        </p:txBody>
+      </p:sp>
+      <p:cxnSp>
+        <p:nvCxnSpPr>
+          <p:cNvPr id="27" name="Connector 26"/>
+          <p:cNvCxnSpPr/>
+          <p:nvPr/>
+        </p:nvCxnSpPr>
+        <p:spPr>
+          <a:xfrm>
+            <a:off x="4953600" y="1475999"/>
+            <a:ext cx="0" cy="3934801"/>
+          </a:xfrm>
+          <a:prstGeom prst="bentConnector3">
+            <a:avLst/>
+          </a:prstGeom>
+          <a:ln w="9525">
+            <a:solidFill>
+              <a:srgbClr val="BFBFBF"/>
+            </a:solidFill>
+          </a:ln>
+        </p:spPr>
+        <p:style>
+          <a:lnRef idx="2">
+            <a:schemeClr val="accent1"/>
+          </a:lnRef>
+          <a:fillRef idx="0">
+            <a:schemeClr val="accent1"/>
+          </a:fillRef>
+          <a:effectRef idx="1">
+            <a:schemeClr val="accent1"/>
+          </a:effectRef>
+          <a:fontRef idx="minor">
+            <a:schemeClr val="tx1"/>
+          </a:fontRef>
+        </p:style>
+      </p:cxnSp>
     </p:spTree>
   </p:cSld>
   <p:clrMapOvr>

--- a/reports/ssg-quickcommerce-onepager.pptx
+++ b/reports/ssg-quickcommerce-onepager.pptx
@@ -3280,7 +3280,7 @@
             <a:r>
               <a:rPr sz="1200" b="1">
                 <a:solidFill>
-                  <a:srgbClr val="000066"/>
+                  <a:srgbClr val="000000"/>
                 </a:solidFill>
                 <a:latin typeface="맑은 고딕"/>
                 <a:ea typeface="맑은 고딕"/>
@@ -3361,7 +3361,7 @@
             <a:r>
               <a:rPr sz="1200" b="1">
                 <a:solidFill>
-                  <a:srgbClr val="000066"/>
+                  <a:srgbClr val="000000"/>
                 </a:solidFill>
                 <a:latin typeface="맑은 고딕"/>
                 <a:ea typeface="맑은 고딕"/>
@@ -3627,7 +3627,7 @@
                       <a:r>
                         <a:rPr sz="1000" b="1">
                           <a:solidFill>
-                            <a:srgbClr val="000066"/>
+                            <a:srgbClr val="000000"/>
                           </a:solidFill>
                           <a:latin typeface="맑은 고딕"/>
                           <a:ea typeface="맑은 고딕"/>
@@ -3672,7 +3672,7 @@
                       <a:r>
                         <a:rPr sz="1000" b="1">
                           <a:solidFill>
-                            <a:srgbClr val="000066"/>
+                            <a:srgbClr val="000000"/>
                           </a:solidFill>
                           <a:latin typeface="맑은 고딕"/>
                           <a:ea typeface="맑은 고딕"/>
@@ -3717,7 +3717,7 @@
                       <a:r>
                         <a:rPr sz="1000" b="1">
                           <a:solidFill>
-                            <a:srgbClr val="000066"/>
+                            <a:srgbClr val="000000"/>
                           </a:solidFill>
                           <a:latin typeface="맑은 고딕"/>
                           <a:ea typeface="맑은 고딕"/>
@@ -4202,7 +4202,7 @@
                       <a:r>
                         <a:rPr sz="1000" b="1">
                           <a:solidFill>
-                            <a:srgbClr val="000066"/>
+                            <a:srgbClr val="000000"/>
                           </a:solidFill>
                           <a:latin typeface="맑은 고딕"/>
                           <a:ea typeface="맑은 고딕"/>
@@ -4247,7 +4247,7 @@
                       <a:r>
                         <a:rPr sz="1000" b="1">
                           <a:solidFill>
-                            <a:srgbClr val="000066"/>
+                            <a:srgbClr val="000000"/>
                           </a:solidFill>
                           <a:latin typeface="맑은 고딕"/>
                           <a:ea typeface="맑은 고딕"/>
@@ -4292,7 +4292,7 @@
                       <a:r>
                         <a:rPr sz="1000" b="1">
                           <a:solidFill>
-                            <a:srgbClr val="000066"/>
+                            <a:srgbClr val="000000"/>
                           </a:solidFill>
                           <a:latin typeface="맑은 고딕"/>
                           <a:ea typeface="맑은 고딕"/>

--- a/reports/ssg-quickcommerce-onepager.pptx
+++ b/reports/ssg-quickcommerce-onepager.pptx
@@ -3205,406 +3205,22 @@
                 <a:ea typeface="맑은 고딕"/>
                 <a:cs typeface="맑은 고딕"/>
               </a:rPr>
-              <a:t>※ 출처 : 비즈워치 「SSG닷컴, '2시간 실험'에 나선 진짜 이유는」('26. 7. 10.)</a:t>
-            </a:r>
-          </a:p>
-        </p:txBody>
-      </p:sp>
-      <p:sp>
-        <p:nvSpPr>
-          <p:cNvPr id="5" name="Rectangle 4"/>
-          <p:cNvSpPr/>
-          <p:nvPr/>
-        </p:nvSpPr>
-        <p:spPr>
-          <a:xfrm>
-            <a:off x="424800" y="1475999"/>
-            <a:ext cx="4410000" cy="270000"/>
-          </a:xfrm>
-          <a:prstGeom prst="rect">
-            <a:avLst/>
-          </a:prstGeom>
-          <a:solidFill>
-            <a:srgbClr val="EAEEF6"/>
-          </a:solidFill>
-          <a:ln>
-            <a:noFill/>
-          </a:ln>
-          <a:effectLst/>
-        </p:spPr>
-        <p:style>
-          <a:lnRef idx="1">
-            <a:schemeClr val="accent1"/>
-          </a:lnRef>
-          <a:fillRef idx="3">
-            <a:schemeClr val="accent1"/>
-          </a:fillRef>
-          <a:effectRef idx="2">
-            <a:schemeClr val="accent1"/>
-          </a:effectRef>
-          <a:fontRef idx="minor">
-            <a:schemeClr val="lt1"/>
-          </a:fontRef>
-        </p:style>
-        <p:txBody>
-          <a:bodyPr rtlCol="0" anchor="ctr"/>
-          <a:lstStyle/>
-          <a:p>
-            <a:pPr algn="ctr"/>
-          </a:p>
-        </p:txBody>
-      </p:sp>
-      <p:sp>
-        <p:nvSpPr>
-          <p:cNvPr id="6" name="TextBox 5"/>
-          <p:cNvSpPr txBox="1"/>
-          <p:nvPr/>
-        </p:nvSpPr>
-        <p:spPr>
-          <a:xfrm>
-            <a:off x="424800" y="1475999"/>
-            <a:ext cx="4410000" cy="270000"/>
-          </a:xfrm>
-          <a:prstGeom prst="rect">
-            <a:avLst/>
-          </a:prstGeom>
-          <a:noFill/>
-        </p:spPr>
-        <p:txBody>
-          <a:bodyPr wrap="square" anchor="ctr" lIns="0" rIns="0" tIns="0" bIns="0">
-            <a:spAutoFit/>
-          </a:bodyPr>
-          <a:lstStyle/>
-          <a:p>
-            <a:pPr algn="ctr"/>
-            <a:r>
-              <a:rPr sz="1200" b="1">
-                <a:solidFill>
-                  <a:srgbClr val="000000"/>
-                </a:solidFill>
-                <a:latin typeface="맑은 고딕"/>
-                <a:ea typeface="맑은 고딕"/>
-                <a:cs typeface="맑은 고딕"/>
-              </a:rPr>
-              <a:t>2시간 배송 도입 개요</a:t>
-            </a:r>
-          </a:p>
-        </p:txBody>
-      </p:sp>
-      <p:sp>
-        <p:nvSpPr>
-          <p:cNvPr id="7" name="Rectangle 6"/>
-          <p:cNvSpPr/>
-          <p:nvPr/>
-        </p:nvSpPr>
-        <p:spPr>
-          <a:xfrm>
-            <a:off x="5072400" y="1475999"/>
-            <a:ext cx="4410000" cy="270000"/>
-          </a:xfrm>
-          <a:prstGeom prst="rect">
-            <a:avLst/>
-          </a:prstGeom>
-          <a:solidFill>
-            <a:srgbClr val="EAEEF6"/>
-          </a:solidFill>
-          <a:ln>
-            <a:noFill/>
-          </a:ln>
-          <a:effectLst/>
-        </p:spPr>
-        <p:style>
-          <a:lnRef idx="1">
-            <a:schemeClr val="accent1"/>
-          </a:lnRef>
-          <a:fillRef idx="3">
-            <a:schemeClr val="accent1"/>
-          </a:fillRef>
-          <a:effectRef idx="2">
-            <a:schemeClr val="accent1"/>
-          </a:effectRef>
-          <a:fontRef idx="minor">
-            <a:schemeClr val="lt1"/>
-          </a:fontRef>
-        </p:style>
-        <p:txBody>
-          <a:bodyPr rtlCol="0" anchor="ctr"/>
-          <a:lstStyle/>
-          <a:p>
-            <a:pPr algn="ctr"/>
-          </a:p>
-        </p:txBody>
-      </p:sp>
-      <p:sp>
-        <p:nvSpPr>
-          <p:cNvPr id="8" name="TextBox 7"/>
-          <p:cNvSpPr txBox="1"/>
-          <p:nvPr/>
-        </p:nvSpPr>
-        <p:spPr>
-          <a:xfrm>
-            <a:off x="5072400" y="1475999"/>
-            <a:ext cx="4410000" cy="270000"/>
-          </a:xfrm>
-          <a:prstGeom prst="rect">
-            <a:avLst/>
-          </a:prstGeom>
-          <a:noFill/>
-        </p:spPr>
-        <p:txBody>
-          <a:bodyPr wrap="square" anchor="ctr" lIns="0" rIns="0" tIns="0" bIns="0">
-            <a:spAutoFit/>
-          </a:bodyPr>
-          <a:lstStyle/>
-          <a:p>
-            <a:pPr algn="ctr"/>
-            <a:r>
-              <a:rPr sz="1200" b="1">
-                <a:solidFill>
-                  <a:srgbClr val="000000"/>
-                </a:solidFill>
-                <a:latin typeface="맑은 고딕"/>
-                <a:ea typeface="맑은 고딕"/>
-                <a:cs typeface="맑은 고딕"/>
-              </a:rPr>
-              <a:t>배송 체계 및 확대 계획</a:t>
-            </a:r>
-          </a:p>
-        </p:txBody>
-      </p:sp>
-      <p:sp>
-        <p:nvSpPr>
-          <p:cNvPr id="9" name="TextBox 8"/>
-          <p:cNvSpPr txBox="1"/>
-          <p:nvPr/>
-        </p:nvSpPr>
-        <p:spPr>
-          <a:xfrm>
-            <a:off x="424800" y="1871999"/>
-            <a:ext cx="4410000" cy="172800"/>
-          </a:xfrm>
-          <a:prstGeom prst="rect">
-            <a:avLst/>
-          </a:prstGeom>
-          <a:noFill/>
-        </p:spPr>
-        <p:txBody>
-          <a:bodyPr wrap="square" anchor="t" lIns="0" rIns="0" tIns="0" bIns="0">
-            <a:spAutoFit/>
-          </a:bodyPr>
-          <a:lstStyle/>
-          <a:p>
-            <a:pPr algn="l"/>
-            <a:r>
-              <a:rPr sz="1200" b="1">
-                <a:solidFill>
-                  <a:srgbClr val="000000"/>
-                </a:solidFill>
-                <a:latin typeface="맑은 고딕"/>
-                <a:ea typeface="맑은 고딕"/>
-                <a:cs typeface="맑은 고딕"/>
-              </a:rPr>
-              <a:t>• 도입 배경</a:t>
-            </a:r>
-          </a:p>
-        </p:txBody>
-      </p:sp>
-      <p:sp>
-        <p:nvSpPr>
-          <p:cNvPr id="10" name="TextBox 9"/>
-          <p:cNvSpPr txBox="1"/>
-          <p:nvPr/>
-        </p:nvSpPr>
-        <p:spPr>
-          <a:xfrm>
-            <a:off x="622800" y="2044800"/>
-            <a:ext cx="4212000" cy="172800"/>
-          </a:xfrm>
-          <a:prstGeom prst="rect">
-            <a:avLst/>
-          </a:prstGeom>
-          <a:noFill/>
-        </p:spPr>
-        <p:txBody>
-          <a:bodyPr wrap="square" anchor="t" lIns="0" rIns="0" tIns="0" bIns="0">
-            <a:spAutoFit/>
-          </a:bodyPr>
-          <a:lstStyle/>
-          <a:p>
-            <a:pPr algn="l"/>
-            <a:r>
-              <a:rPr sz="1100" b="0">
-                <a:solidFill>
-                  <a:srgbClr val="000000"/>
-                </a:solidFill>
-                <a:latin typeface="맑은 고딕"/>
-                <a:ea typeface="맑은 고딕"/>
-                <a:cs typeface="맑은 고딕"/>
-              </a:rPr>
-              <a:t>- 이륜차 퀵커머스 소량 한정 → 대용량 공백</a:t>
-            </a:r>
-          </a:p>
-        </p:txBody>
-      </p:sp>
-      <p:sp>
-        <p:nvSpPr>
-          <p:cNvPr id="11" name="TextBox 10"/>
-          <p:cNvSpPr txBox="1"/>
-          <p:nvPr/>
-        </p:nvSpPr>
-        <p:spPr>
-          <a:xfrm>
-            <a:off x="622800" y="2217600"/>
-            <a:ext cx="4212000" cy="172800"/>
-          </a:xfrm>
-          <a:prstGeom prst="rect">
-            <a:avLst/>
-          </a:prstGeom>
-          <a:noFill/>
-        </p:spPr>
-        <p:txBody>
-          <a:bodyPr wrap="square" anchor="t" lIns="0" rIns="0" tIns="0" bIns="0">
-            <a:spAutoFit/>
-          </a:bodyPr>
-          <a:lstStyle/>
-          <a:p>
-            <a:pPr algn="l"/>
-            <a:r>
-              <a:rPr sz="1100" b="0">
-                <a:solidFill>
-                  <a:srgbClr val="000000"/>
-                </a:solidFill>
-                <a:latin typeface="맑은 고딕"/>
-                <a:ea typeface="맑은 고딕"/>
-                <a:cs typeface="맑은 고딕"/>
-              </a:rPr>
-              <a:t>- 바로퀵 매출 197%↑(6월) → 수요 실증</a:t>
-            </a:r>
-          </a:p>
-        </p:txBody>
-      </p:sp>
-      <p:sp>
-        <p:nvSpPr>
-          <p:cNvPr id="12" name="TextBox 11"/>
-          <p:cNvSpPr txBox="1"/>
-          <p:nvPr/>
-        </p:nvSpPr>
-        <p:spPr>
-          <a:xfrm>
-            <a:off x="424800" y="2588400"/>
-            <a:ext cx="4410000" cy="172800"/>
-          </a:xfrm>
-          <a:prstGeom prst="rect">
-            <a:avLst/>
-          </a:prstGeom>
-          <a:noFill/>
-        </p:spPr>
-        <p:txBody>
-          <a:bodyPr wrap="square" anchor="t" lIns="0" rIns="0" tIns="0" bIns="0">
-            <a:spAutoFit/>
-          </a:bodyPr>
-          <a:lstStyle/>
-          <a:p>
-            <a:pPr algn="l"/>
-            <a:r>
-              <a:rPr sz="1200" b="1">
-                <a:solidFill>
-                  <a:srgbClr val="000000"/>
-                </a:solidFill>
-                <a:latin typeface="맑은 고딕"/>
-                <a:ea typeface="맑은 고딕"/>
-                <a:cs typeface="맑은 고딕"/>
-              </a:rPr>
-              <a:t>• 시범 운영 ('26. 7. 9. 개시)</a:t>
-            </a:r>
-          </a:p>
-        </p:txBody>
-      </p:sp>
-      <p:sp>
-        <p:nvSpPr>
-          <p:cNvPr id="13" name="TextBox 12"/>
-          <p:cNvSpPr txBox="1"/>
-          <p:nvPr/>
-        </p:nvSpPr>
-        <p:spPr>
-          <a:xfrm>
-            <a:off x="622800" y="2761200"/>
-            <a:ext cx="4212000" cy="172800"/>
-          </a:xfrm>
-          <a:prstGeom prst="rect">
-            <a:avLst/>
-          </a:prstGeom>
-          <a:noFill/>
-        </p:spPr>
-        <p:txBody>
-          <a:bodyPr wrap="square" anchor="t" lIns="0" rIns="0" tIns="0" bIns="0">
-            <a:spAutoFit/>
-          </a:bodyPr>
-          <a:lstStyle/>
-          <a:p>
-            <a:pPr algn="l"/>
-            <a:r>
-              <a:rPr sz="1100" b="0">
-                <a:solidFill>
-                  <a:srgbClr val="000000"/>
-                </a:solidFill>
-                <a:latin typeface="맑은 고딕"/>
-                <a:ea typeface="맑은 고딕"/>
-                <a:cs typeface="맑은 고딕"/>
-              </a:rPr>
-              <a:t>- 20시 주문 마감 → 결제 후 2시간 내 배송</a:t>
-            </a:r>
-          </a:p>
-        </p:txBody>
-      </p:sp>
-      <p:sp>
-        <p:nvSpPr>
-          <p:cNvPr id="14" name="TextBox 13"/>
-          <p:cNvSpPr txBox="1"/>
-          <p:nvPr/>
-        </p:nvSpPr>
-        <p:spPr>
-          <a:xfrm>
-            <a:off x="622800" y="2934000"/>
-            <a:ext cx="4212000" cy="172800"/>
-          </a:xfrm>
-          <a:prstGeom prst="rect">
-            <a:avLst/>
-          </a:prstGeom>
-          <a:noFill/>
-        </p:spPr>
-        <p:txBody>
-          <a:bodyPr wrap="square" anchor="t" lIns="0" rIns="0" tIns="0" bIns="0">
-            <a:spAutoFit/>
-          </a:bodyPr>
-          <a:lstStyle/>
-          <a:p>
-            <a:pPr algn="l"/>
-            <a:r>
-              <a:rPr sz="1100" b="0">
-                <a:solidFill>
-                  <a:srgbClr val="000000"/>
-                </a:solidFill>
-                <a:latin typeface="맑은 고딕"/>
-                <a:ea typeface="맑은 고딕"/>
-                <a:cs typeface="맑은 고딕"/>
-              </a:rPr>
-              <a:t>- 예약배송 병행, 사륜차 대용량 대응</a:t>
+              <a:t>※ 취급 품목 : 이마트 15만 · 바로퀵 1만 · B마트 2만 종      ※ 출처 : 비즈워치 ('26. 7. 10.)</a:t>
             </a:r>
           </a:p>
         </p:txBody>
       </p:sp>
       <p:graphicFrame>
         <p:nvGraphicFramePr>
-          <p:cNvPr id="15" name="Table 14"/>
+          <p:cNvPr id="5" name="Table 4"/>
           <p:cNvGraphicFramePr>
             <a:graphicFrameLocks noGrp="1"/>
           </p:cNvGraphicFramePr>
           <p:nvPr/>
         </p:nvGraphicFramePr>
         <p:xfrm>
-          <a:off x="424800" y="3304800"/>
-          <a:ext cx="4410000" cy="1080000"/>
+          <a:off x="424800" y="1475999"/>
+          <a:ext cx="9057600" cy="1655999"/>
         </p:xfrm>
         <a:graphic>
           <a:graphicData uri="http://schemas.openxmlformats.org/drawingml/2006/table">
@@ -3613,11 +3229,13 @@
                 <a:tableStyleId>{5C22544A-7EE6-4342-B048-85BDC9FD1C3A}</a:tableStyleId>
               </a:tblPr>
               <a:tblGrid>
-                <a:gridCol w="1224000"/>
-                <a:gridCol w="1224000"/>
-                <a:gridCol w="1962000"/>
+                <a:gridCol w="1404000"/>
+                <a:gridCol w="1908000"/>
+                <a:gridCol w="900000"/>
+                <a:gridCol w="1296000"/>
+                <a:gridCol w="3549600"/>
               </a:tblGrid>
-              <a:tr h="270000">
+              <a:tr h="275999">
                 <a:tc>
                   <a:txBody>
                     <a:bodyPr wrap="square"/>
@@ -3678,7 +3296,7 @@
                           <a:ea typeface="맑은 고딕"/>
                           <a:cs typeface="맑은 고딕"/>
                         </a:rPr>
-                        <a:t>품목 수</a:t>
+                        <a:t>배송 속도</a:t>
                       </a:r>
                     </a:p>
                   </a:txBody>
@@ -3723,492 +3341,7 @@
                           <a:ea typeface="맑은 고딕"/>
                           <a:cs typeface="맑은 고딕"/>
                         </a:rPr>
-                        <a:t>비고</a:t>
-                      </a:r>
-                    </a:p>
-                  </a:txBody>
-                  <a:tcPr anchor="ctr" marL="36000" marR="36000" marT="0" marB="0">
-                    <a:lnL w="9525" cap="flat">
-                      <a:solidFill>
-                        <a:srgbClr val="BFBFBF"/>
-                      </a:solidFill>
-                    </a:lnL>
-                    <a:lnR w="9525" cap="flat">
-                      <a:solidFill>
-                        <a:srgbClr val="BFBFBF"/>
-                      </a:solidFill>
-                    </a:lnR>
-                    <a:lnT w="9525" cap="flat">
-                      <a:solidFill>
-                        <a:srgbClr val="BFBFBF"/>
-                      </a:solidFill>
-                    </a:lnT>
-                    <a:lnB w="9525" cap="flat">
-                      <a:solidFill>
-                        <a:srgbClr val="BFBFBF"/>
-                      </a:solidFill>
-                    </a:lnB>
-                    <a:solidFill>
-                      <a:srgbClr val="EAEEF6"/>
-                    </a:solidFill>
-                  </a:tcPr>
-                </a:tc>
-              </a:tr>
-              <a:tr h="270000">
-                <a:tc>
-                  <a:txBody>
-                    <a:bodyPr wrap="square"/>
-                    <a:lstStyle/>
-                    <a:p>
-                      <a:pPr algn="ctr"/>
-                      <a:r>
-                        <a:rPr sz="1000" b="1">
-                          <a:solidFill>
-                            <a:srgbClr val="000000"/>
-                          </a:solidFill>
-                          <a:latin typeface="맑은 고딕"/>
-                          <a:ea typeface="맑은 고딕"/>
-                          <a:cs typeface="맑은 고딕"/>
-                        </a:rPr>
-                        <a:t>이마트 점포</a:t>
-                      </a:r>
-                    </a:p>
-                  </a:txBody>
-                  <a:tcPr anchor="ctr" marL="36000" marR="36000" marT="0" marB="0">
-                    <a:lnL w="9525" cap="flat">
-                      <a:solidFill>
-                        <a:srgbClr val="BFBFBF"/>
-                      </a:solidFill>
-                    </a:lnL>
-                    <a:lnR w="9525" cap="flat">
-                      <a:solidFill>
-                        <a:srgbClr val="BFBFBF"/>
-                      </a:solidFill>
-                    </a:lnR>
-                    <a:lnT w="9525" cap="flat">
-                      <a:solidFill>
-                        <a:srgbClr val="BFBFBF"/>
-                      </a:solidFill>
-                    </a:lnT>
-                    <a:lnB w="9525" cap="flat">
-                      <a:solidFill>
-                        <a:srgbClr val="BFBFBF"/>
-                      </a:solidFill>
-                    </a:lnB>
-                    <a:solidFill>
-                      <a:srgbClr val="FFFFFF"/>
-                    </a:solidFill>
-                  </a:tcPr>
-                </a:tc>
-                <a:tc>
-                  <a:txBody>
-                    <a:bodyPr wrap="square"/>
-                    <a:lstStyle/>
-                    <a:p>
-                      <a:pPr algn="r"/>
-                      <a:r>
-                        <a:rPr sz="1000" b="0">
-                          <a:solidFill>
-                            <a:srgbClr val="000000"/>
-                          </a:solidFill>
-                          <a:latin typeface="맑은 고딕"/>
-                          <a:ea typeface="맑은 고딕"/>
-                          <a:cs typeface="맑은 고딕"/>
-                        </a:rPr>
-                        <a:t>약 150,000</a:t>
-                      </a:r>
-                    </a:p>
-                  </a:txBody>
-                  <a:tcPr anchor="ctr" marL="36000" marR="36000" marT="0" marB="0">
-                    <a:lnL w="9525" cap="flat">
-                      <a:solidFill>
-                        <a:srgbClr val="BFBFBF"/>
-                      </a:solidFill>
-                    </a:lnL>
-                    <a:lnR w="9525" cap="flat">
-                      <a:solidFill>
-                        <a:srgbClr val="BFBFBF"/>
-                      </a:solidFill>
-                    </a:lnR>
-                    <a:lnT w="9525" cap="flat">
-                      <a:solidFill>
-                        <a:srgbClr val="BFBFBF"/>
-                      </a:solidFill>
-                    </a:lnT>
-                    <a:lnB w="9525" cap="flat">
-                      <a:solidFill>
-                        <a:srgbClr val="BFBFBF"/>
-                      </a:solidFill>
-                    </a:lnB>
-                    <a:solidFill>
-                      <a:srgbClr val="FFFFFF"/>
-                    </a:solidFill>
-                  </a:tcPr>
-                </a:tc>
-                <a:tc>
-                  <a:txBody>
-                    <a:bodyPr wrap="square"/>
-                    <a:lstStyle/>
-                    <a:p>
-                      <a:pPr algn="ctr"/>
-                      <a:r>
-                        <a:rPr sz="1000" b="0">
-                          <a:solidFill>
-                            <a:srgbClr val="000000"/>
-                          </a:solidFill>
-                          <a:latin typeface="맑은 고딕"/>
-                          <a:ea typeface="맑은 고딕"/>
-                          <a:cs typeface="맑은 고딕"/>
-                        </a:rPr>
-                        <a:t>2시간 배송 기반</a:t>
-                      </a:r>
-                    </a:p>
-                  </a:txBody>
-                  <a:tcPr anchor="ctr" marL="36000" marR="36000" marT="0" marB="0">
-                    <a:lnL w="9525" cap="flat">
-                      <a:solidFill>
-                        <a:srgbClr val="BFBFBF"/>
-                      </a:solidFill>
-                    </a:lnL>
-                    <a:lnR w="9525" cap="flat">
-                      <a:solidFill>
-                        <a:srgbClr val="BFBFBF"/>
-                      </a:solidFill>
-                    </a:lnR>
-                    <a:lnT w="9525" cap="flat">
-                      <a:solidFill>
-                        <a:srgbClr val="BFBFBF"/>
-                      </a:solidFill>
-                    </a:lnT>
-                    <a:lnB w="9525" cap="flat">
-                      <a:solidFill>
-                        <a:srgbClr val="BFBFBF"/>
-                      </a:solidFill>
-                    </a:lnB>
-                    <a:solidFill>
-                      <a:srgbClr val="FFFFFF"/>
-                    </a:solidFill>
-                  </a:tcPr>
-                </a:tc>
-              </a:tr>
-              <a:tr h="270000">
-                <a:tc>
-                  <a:txBody>
-                    <a:bodyPr wrap="square"/>
-                    <a:lstStyle/>
-                    <a:p>
-                      <a:pPr algn="ctr"/>
-                      <a:r>
-                        <a:rPr sz="1000" b="1">
-                          <a:solidFill>
-                            <a:srgbClr val="000000"/>
-                          </a:solidFill>
-                          <a:latin typeface="맑은 고딕"/>
-                          <a:ea typeface="맑은 고딕"/>
-                          <a:cs typeface="맑은 고딕"/>
-                        </a:rPr>
-                        <a:t>바로퀵</a:t>
-                      </a:r>
-                    </a:p>
-                  </a:txBody>
-                  <a:tcPr anchor="ctr" marL="36000" marR="36000" marT="0" marB="0">
-                    <a:lnL w="9525" cap="flat">
-                      <a:solidFill>
-                        <a:srgbClr val="BFBFBF"/>
-                      </a:solidFill>
-                    </a:lnL>
-                    <a:lnR w="9525" cap="flat">
-                      <a:solidFill>
-                        <a:srgbClr val="BFBFBF"/>
-                      </a:solidFill>
-                    </a:lnR>
-                    <a:lnT w="9525" cap="flat">
-                      <a:solidFill>
-                        <a:srgbClr val="BFBFBF"/>
-                      </a:solidFill>
-                    </a:lnT>
-                    <a:lnB w="9525" cap="flat">
-                      <a:solidFill>
-                        <a:srgbClr val="BFBFBF"/>
-                      </a:solidFill>
-                    </a:lnB>
-                    <a:solidFill>
-                      <a:srgbClr val="FFFFFF"/>
-                    </a:solidFill>
-                  </a:tcPr>
-                </a:tc>
-                <a:tc>
-                  <a:txBody>
-                    <a:bodyPr wrap="square"/>
-                    <a:lstStyle/>
-                    <a:p>
-                      <a:pPr algn="r"/>
-                      <a:r>
-                        <a:rPr sz="1000" b="0">
-                          <a:solidFill>
-                            <a:srgbClr val="000000"/>
-                          </a:solidFill>
-                          <a:latin typeface="맑은 고딕"/>
-                          <a:ea typeface="맑은 고딕"/>
-                          <a:cs typeface="맑은 고딕"/>
-                        </a:rPr>
-                        <a:t>약 10,000</a:t>
-                      </a:r>
-                    </a:p>
-                  </a:txBody>
-                  <a:tcPr anchor="ctr" marL="36000" marR="36000" marT="0" marB="0">
-                    <a:lnL w="9525" cap="flat">
-                      <a:solidFill>
-                        <a:srgbClr val="BFBFBF"/>
-                      </a:solidFill>
-                    </a:lnL>
-                    <a:lnR w="9525" cap="flat">
-                      <a:solidFill>
-                        <a:srgbClr val="BFBFBF"/>
-                      </a:solidFill>
-                    </a:lnR>
-                    <a:lnT w="9525" cap="flat">
-                      <a:solidFill>
-                        <a:srgbClr val="BFBFBF"/>
-                      </a:solidFill>
-                    </a:lnT>
-                    <a:lnB w="9525" cap="flat">
-                      <a:solidFill>
-                        <a:srgbClr val="BFBFBF"/>
-                      </a:solidFill>
-                    </a:lnB>
-                    <a:solidFill>
-                      <a:srgbClr val="FFFFFF"/>
-                    </a:solidFill>
-                  </a:tcPr>
-                </a:tc>
-                <a:tc>
-                  <a:txBody>
-                    <a:bodyPr wrap="square"/>
-                    <a:lstStyle/>
-                    <a:p>
-                      <a:pPr algn="ctr"/>
-                      <a:r>
-                        <a:rPr sz="1000" b="0">
-                          <a:solidFill>
-                            <a:srgbClr val="000000"/>
-                          </a:solidFill>
-                          <a:latin typeface="맑은 고딕"/>
-                          <a:ea typeface="맑은 고딕"/>
-                          <a:cs typeface="맑은 고딕"/>
-                        </a:rPr>
-                        <a:t>이륜차 적재 한계</a:t>
-                      </a:r>
-                    </a:p>
-                  </a:txBody>
-                  <a:tcPr anchor="ctr" marL="36000" marR="36000" marT="0" marB="0">
-                    <a:lnL w="9525" cap="flat">
-                      <a:solidFill>
-                        <a:srgbClr val="BFBFBF"/>
-                      </a:solidFill>
-                    </a:lnL>
-                    <a:lnR w="9525" cap="flat">
-                      <a:solidFill>
-                        <a:srgbClr val="BFBFBF"/>
-                      </a:solidFill>
-                    </a:lnR>
-                    <a:lnT w="9525" cap="flat">
-                      <a:solidFill>
-                        <a:srgbClr val="BFBFBF"/>
-                      </a:solidFill>
-                    </a:lnT>
-                    <a:lnB w="9525" cap="flat">
-                      <a:solidFill>
-                        <a:srgbClr val="BFBFBF"/>
-                      </a:solidFill>
-                    </a:lnB>
-                    <a:solidFill>
-                      <a:srgbClr val="FFFFFF"/>
-                    </a:solidFill>
-                  </a:tcPr>
-                </a:tc>
-              </a:tr>
-              <a:tr h="270000">
-                <a:tc>
-                  <a:txBody>
-                    <a:bodyPr wrap="square"/>
-                    <a:lstStyle/>
-                    <a:p>
-                      <a:pPr algn="ctr"/>
-                      <a:r>
-                        <a:rPr sz="1000" b="1">
-                          <a:solidFill>
-                            <a:srgbClr val="000000"/>
-                          </a:solidFill>
-                          <a:latin typeface="맑은 고딕"/>
-                          <a:ea typeface="맑은 고딕"/>
-                          <a:cs typeface="맑은 고딕"/>
-                        </a:rPr>
-                        <a:t>B마트</a:t>
-                      </a:r>
-                    </a:p>
-                  </a:txBody>
-                  <a:tcPr anchor="ctr" marL="36000" marR="36000" marT="0" marB="0">
-                    <a:lnL w="9525" cap="flat">
-                      <a:solidFill>
-                        <a:srgbClr val="BFBFBF"/>
-                      </a:solidFill>
-                    </a:lnL>
-                    <a:lnR w="9525" cap="flat">
-                      <a:solidFill>
-                        <a:srgbClr val="BFBFBF"/>
-                      </a:solidFill>
-                    </a:lnR>
-                    <a:lnT w="9525" cap="flat">
-                      <a:solidFill>
-                        <a:srgbClr val="BFBFBF"/>
-                      </a:solidFill>
-                    </a:lnT>
-                    <a:lnB w="9525" cap="flat">
-                      <a:solidFill>
-                        <a:srgbClr val="BFBFBF"/>
-                      </a:solidFill>
-                    </a:lnB>
-                    <a:solidFill>
-                      <a:srgbClr val="FFFFFF"/>
-                    </a:solidFill>
-                  </a:tcPr>
-                </a:tc>
-                <a:tc>
-                  <a:txBody>
-                    <a:bodyPr wrap="square"/>
-                    <a:lstStyle/>
-                    <a:p>
-                      <a:pPr algn="r"/>
-                      <a:r>
-                        <a:rPr sz="1000" b="0">
-                          <a:solidFill>
-                            <a:srgbClr val="000000"/>
-                          </a:solidFill>
-                          <a:latin typeface="맑은 고딕"/>
-                          <a:ea typeface="맑은 고딕"/>
-                          <a:cs typeface="맑은 고딕"/>
-                        </a:rPr>
-                        <a:t>약 20,000</a:t>
-                      </a:r>
-                    </a:p>
-                  </a:txBody>
-                  <a:tcPr anchor="ctr" marL="36000" marR="36000" marT="0" marB="0">
-                    <a:lnL w="9525" cap="flat">
-                      <a:solidFill>
-                        <a:srgbClr val="BFBFBF"/>
-                      </a:solidFill>
-                    </a:lnL>
-                    <a:lnR w="9525" cap="flat">
-                      <a:solidFill>
-                        <a:srgbClr val="BFBFBF"/>
-                      </a:solidFill>
-                    </a:lnR>
-                    <a:lnT w="9525" cap="flat">
-                      <a:solidFill>
-                        <a:srgbClr val="BFBFBF"/>
-                      </a:solidFill>
-                    </a:lnT>
-                    <a:lnB w="9525" cap="flat">
-                      <a:solidFill>
-                        <a:srgbClr val="BFBFBF"/>
-                      </a:solidFill>
-                    </a:lnB>
-                    <a:solidFill>
-                      <a:srgbClr val="FFFFFF"/>
-                    </a:solidFill>
-                  </a:tcPr>
-                </a:tc>
-                <a:tc>
-                  <a:txBody>
-                    <a:bodyPr wrap="square"/>
-                    <a:lstStyle/>
-                    <a:p>
-                      <a:pPr algn="ctr"/>
-                      <a:r>
-                        <a:rPr sz="1000" b="0">
-                          <a:solidFill>
-                            <a:srgbClr val="000000"/>
-                          </a:solidFill>
-                          <a:latin typeface="맑은 고딕"/>
-                          <a:ea typeface="맑은 고딕"/>
-                          <a:cs typeface="맑은 고딕"/>
-                        </a:rPr>
-                        <a:t>퀵커머스 1위</a:t>
-                      </a:r>
-                    </a:p>
-                  </a:txBody>
-                  <a:tcPr anchor="ctr" marL="36000" marR="36000" marT="0" marB="0">
-                    <a:lnL w="9525" cap="flat">
-                      <a:solidFill>
-                        <a:srgbClr val="BFBFBF"/>
-                      </a:solidFill>
-                    </a:lnL>
-                    <a:lnR w="9525" cap="flat">
-                      <a:solidFill>
-                        <a:srgbClr val="BFBFBF"/>
-                      </a:solidFill>
-                    </a:lnR>
-                    <a:lnT w="9525" cap="flat">
-                      <a:solidFill>
-                        <a:srgbClr val="BFBFBF"/>
-                      </a:solidFill>
-                    </a:lnT>
-                    <a:lnB w="9525" cap="flat">
-                      <a:solidFill>
-                        <a:srgbClr val="BFBFBF"/>
-                      </a:solidFill>
-                    </a:lnB>
-                    <a:solidFill>
-                      <a:srgbClr val="FFFFFF"/>
-                    </a:solidFill>
-                  </a:tcPr>
-                </a:tc>
-              </a:tr>
-            </a:tbl>
-          </a:graphicData>
-        </a:graphic>
-      </p:graphicFrame>
-      <p:graphicFrame>
-        <p:nvGraphicFramePr>
-          <p:cNvPr id="16" name="Table 15"/>
-          <p:cNvGraphicFramePr>
-            <a:graphicFrameLocks noGrp="1"/>
-          </p:cNvGraphicFramePr>
-          <p:nvPr/>
-        </p:nvGraphicFramePr>
-        <p:xfrm>
-          <a:off x="5072400" y="1871999"/>
-          <a:ext cx="4410000" cy="1584000"/>
-        </p:xfrm>
-        <a:graphic>
-          <a:graphicData uri="http://schemas.openxmlformats.org/drawingml/2006/table">
-            <a:tbl>
-              <a:tblPr>
-                <a:tableStyleId>{5C22544A-7EE6-4342-B048-85BDC9FD1C3A}</a:tableStyleId>
-              </a:tblPr>
-              <a:tblGrid>
-                <a:gridCol w="1224000"/>
-                <a:gridCol w="1404000"/>
-                <a:gridCol w="1782000"/>
-              </a:tblGrid>
-              <a:tr h="264000">
-                <a:tc>
-                  <a:txBody>
-                    <a:bodyPr wrap="square"/>
-                    <a:lstStyle/>
-                    <a:p>
-                      <a:pPr algn="ctr"/>
-                      <a:r>
-                        <a:rPr sz="1000" b="1">
-                          <a:solidFill>
-                            <a:srgbClr val="000000"/>
-                          </a:solidFill>
-                          <a:latin typeface="맑은 고딕"/>
-                          <a:ea typeface="맑은 고딕"/>
-                          <a:cs typeface="맑은 고딕"/>
-                        </a:rPr>
-                        <a:t>구분</a:t>
+                        <a:t>운송 수단</a:t>
                       </a:r>
                     </a:p>
                   </a:txBody>
@@ -4253,7 +3386,7 @@
                           <a:ea typeface="맑은 고딕"/>
                           <a:cs typeface="맑은 고딕"/>
                         </a:rPr>
-                        <a:t>속도 · 수단</a:t>
+                        <a:t>취급 품목</a:t>
                       </a:r>
                     </a:p>
                   </a:txBody>
@@ -4329,7 +3462,7 @@
                   </a:tcPr>
                 </a:tc>
               </a:tr>
-              <a:tr h="264000">
+              <a:tr h="275999">
                 <a:tc>
                   <a:txBody>
                     <a:bodyPr wrap="square"/>
@@ -4390,7 +3523,97 @@
                           <a:ea typeface="맑은 고딕"/>
                           <a:cs typeface="맑은 고딕"/>
                         </a:rPr>
-                        <a:t>예약 4~5시간 · 사륜</a:t>
+                        <a:t>예약배송 (4~5시간)</a:t>
+                      </a:r>
+                    </a:p>
+                  </a:txBody>
+                  <a:tcPr anchor="ctr" marL="36000" marR="36000" marT="0" marB="0">
+                    <a:lnL w="9525" cap="flat">
+                      <a:solidFill>
+                        <a:srgbClr val="BFBFBF"/>
+                      </a:solidFill>
+                    </a:lnL>
+                    <a:lnR w="9525" cap="flat">
+                      <a:solidFill>
+                        <a:srgbClr val="BFBFBF"/>
+                      </a:solidFill>
+                    </a:lnR>
+                    <a:lnT w="9525" cap="flat">
+                      <a:solidFill>
+                        <a:srgbClr val="BFBFBF"/>
+                      </a:solidFill>
+                    </a:lnT>
+                    <a:lnB w="9525" cap="flat">
+                      <a:solidFill>
+                        <a:srgbClr val="BFBFBF"/>
+                      </a:solidFill>
+                    </a:lnB>
+                    <a:solidFill>
+                      <a:srgbClr val="FFFFFF"/>
+                    </a:solidFill>
+                  </a:tcPr>
+                </a:tc>
+                <a:tc>
+                  <a:txBody>
+                    <a:bodyPr wrap="square"/>
+                    <a:lstStyle/>
+                    <a:p>
+                      <a:pPr algn="ctr"/>
+                      <a:r>
+                        <a:rPr sz="1000" b="0">
+                          <a:solidFill>
+                            <a:srgbClr val="000000"/>
+                          </a:solidFill>
+                          <a:latin typeface="맑은 고딕"/>
+                          <a:ea typeface="맑은 고딕"/>
+                          <a:cs typeface="맑은 고딕"/>
+                        </a:rPr>
+                        <a:t>사륜차</a:t>
+                      </a:r>
+                    </a:p>
+                  </a:txBody>
+                  <a:tcPr anchor="ctr" marL="36000" marR="36000" marT="0" marB="0">
+                    <a:lnL w="9525" cap="flat">
+                      <a:solidFill>
+                        <a:srgbClr val="BFBFBF"/>
+                      </a:solidFill>
+                    </a:lnL>
+                    <a:lnR w="9525" cap="flat">
+                      <a:solidFill>
+                        <a:srgbClr val="BFBFBF"/>
+                      </a:solidFill>
+                    </a:lnR>
+                    <a:lnT w="9525" cap="flat">
+                      <a:solidFill>
+                        <a:srgbClr val="BFBFBF"/>
+                      </a:solidFill>
+                    </a:lnT>
+                    <a:lnB w="9525" cap="flat">
+                      <a:solidFill>
+                        <a:srgbClr val="BFBFBF"/>
+                      </a:solidFill>
+                    </a:lnB>
+                    <a:solidFill>
+                      <a:srgbClr val="FFFFFF"/>
+                    </a:solidFill>
+                  </a:tcPr>
+                </a:tc>
+                <a:tc>
+                  <a:txBody>
+                    <a:bodyPr wrap="square"/>
+                    <a:lstStyle/>
+                    <a:p>
+                      <a:pPr algn="ctr"/>
+                      <a:r>
+                        <a:rPr sz="1000" b="0">
+                          <a:solidFill>
+                            <a:srgbClr val="000000"/>
+                          </a:solidFill>
+                          <a:latin typeface="맑은 고딕"/>
+                          <a:ea typeface="맑은 고딕"/>
+                          <a:cs typeface="맑은 고딕"/>
+                        </a:rPr>
+                        <a:t>점포 상품</a:t>
                       </a:r>
                     </a:p>
                   </a:txBody>
@@ -4466,7 +3689,7 @@
                   </a:tcPr>
                 </a:tc>
               </a:tr>
-              <a:tr h="264000">
+              <a:tr h="275999">
                 <a:tc>
                   <a:txBody>
                     <a:bodyPr wrap="square"/>
@@ -4527,7 +3750,97 @@
                           <a:ea typeface="맑은 고딕"/>
                           <a:cs typeface="맑은 고딕"/>
                         </a:rPr>
-                        <a:t>새벽 · 사륜</a:t>
+                        <a:t>새벽 시간대</a:t>
+                      </a:r>
+                    </a:p>
+                  </a:txBody>
+                  <a:tcPr anchor="ctr" marL="36000" marR="36000" marT="0" marB="0">
+                    <a:lnL w="9525" cap="flat">
+                      <a:solidFill>
+                        <a:srgbClr val="BFBFBF"/>
+                      </a:solidFill>
+                    </a:lnL>
+                    <a:lnR w="9525" cap="flat">
+                      <a:solidFill>
+                        <a:srgbClr val="BFBFBF"/>
+                      </a:solidFill>
+                    </a:lnR>
+                    <a:lnT w="9525" cap="flat">
+                      <a:solidFill>
+                        <a:srgbClr val="BFBFBF"/>
+                      </a:solidFill>
+                    </a:lnT>
+                    <a:lnB w="9525" cap="flat">
+                      <a:solidFill>
+                        <a:srgbClr val="BFBFBF"/>
+                      </a:solidFill>
+                    </a:lnB>
+                    <a:solidFill>
+                      <a:srgbClr val="FFFFFF"/>
+                    </a:solidFill>
+                  </a:tcPr>
+                </a:tc>
+                <a:tc>
+                  <a:txBody>
+                    <a:bodyPr wrap="square"/>
+                    <a:lstStyle/>
+                    <a:p>
+                      <a:pPr algn="ctr"/>
+                      <a:r>
+                        <a:rPr sz="1000" b="0">
+                          <a:solidFill>
+                            <a:srgbClr val="000000"/>
+                          </a:solidFill>
+                          <a:latin typeface="맑은 고딕"/>
+                          <a:ea typeface="맑은 고딕"/>
+                          <a:cs typeface="맑은 고딕"/>
+                        </a:rPr>
+                        <a:t>사륜차</a:t>
+                      </a:r>
+                    </a:p>
+                  </a:txBody>
+                  <a:tcPr anchor="ctr" marL="36000" marR="36000" marT="0" marB="0">
+                    <a:lnL w="9525" cap="flat">
+                      <a:solidFill>
+                        <a:srgbClr val="BFBFBF"/>
+                      </a:solidFill>
+                    </a:lnL>
+                    <a:lnR w="9525" cap="flat">
+                      <a:solidFill>
+                        <a:srgbClr val="BFBFBF"/>
+                      </a:solidFill>
+                    </a:lnR>
+                    <a:lnT w="9525" cap="flat">
+                      <a:solidFill>
+                        <a:srgbClr val="BFBFBF"/>
+                      </a:solidFill>
+                    </a:lnT>
+                    <a:lnB w="9525" cap="flat">
+                      <a:solidFill>
+                        <a:srgbClr val="BFBFBF"/>
+                      </a:solidFill>
+                    </a:lnB>
+                    <a:solidFill>
+                      <a:srgbClr val="FFFFFF"/>
+                    </a:solidFill>
+                  </a:tcPr>
+                </a:tc>
+                <a:tc>
+                  <a:txBody>
+                    <a:bodyPr wrap="square"/>
+                    <a:lstStyle/>
+                    <a:p>
+                      <a:pPr algn="ctr"/>
+                      <a:r>
+                        <a:rPr sz="1000" b="0">
+                          <a:solidFill>
+                            <a:srgbClr val="000000"/>
+                          </a:solidFill>
+                          <a:latin typeface="맑은 고딕"/>
+                          <a:ea typeface="맑은 고딕"/>
+                          <a:cs typeface="맑은 고딕"/>
+                        </a:rPr>
+                        <a:t>네오 상품</a:t>
                       </a:r>
                     </a:p>
                   </a:txBody>
@@ -4603,7 +3916,7 @@
                   </a:tcPr>
                 </a:tc>
               </a:tr>
-              <a:tr h="264000">
+              <a:tr h="275999">
                 <a:tc>
                   <a:txBody>
                     <a:bodyPr wrap="square"/>
@@ -4664,7 +3977,97 @@
                           <a:ea typeface="맑은 고딕"/>
                           <a:cs typeface="맑은 고딕"/>
                         </a:rPr>
-                        <a:t>예약 · 사륜</a:t>
+                        <a:t>예약배송</a:t>
+                      </a:r>
+                    </a:p>
+                  </a:txBody>
+                  <a:tcPr anchor="ctr" marL="36000" marR="36000" marT="0" marB="0">
+                    <a:lnL w="9525" cap="flat">
+                      <a:solidFill>
+                        <a:srgbClr val="BFBFBF"/>
+                      </a:solidFill>
+                    </a:lnL>
+                    <a:lnR w="9525" cap="flat">
+                      <a:solidFill>
+                        <a:srgbClr val="BFBFBF"/>
+                      </a:solidFill>
+                    </a:lnR>
+                    <a:lnT w="9525" cap="flat">
+                      <a:solidFill>
+                        <a:srgbClr val="BFBFBF"/>
+                      </a:solidFill>
+                    </a:lnT>
+                    <a:lnB w="9525" cap="flat">
+                      <a:solidFill>
+                        <a:srgbClr val="BFBFBF"/>
+                      </a:solidFill>
+                    </a:lnB>
+                    <a:solidFill>
+                      <a:srgbClr val="FFFFFF"/>
+                    </a:solidFill>
+                  </a:tcPr>
+                </a:tc>
+                <a:tc>
+                  <a:txBody>
+                    <a:bodyPr wrap="square"/>
+                    <a:lstStyle/>
+                    <a:p>
+                      <a:pPr algn="ctr"/>
+                      <a:r>
+                        <a:rPr sz="1000" b="0">
+                          <a:solidFill>
+                            <a:srgbClr val="000000"/>
+                          </a:solidFill>
+                          <a:latin typeface="맑은 고딕"/>
+                          <a:ea typeface="맑은 고딕"/>
+                          <a:cs typeface="맑은 고딕"/>
+                        </a:rPr>
+                        <a:t>사륜차</a:t>
+                      </a:r>
+                    </a:p>
+                  </a:txBody>
+                  <a:tcPr anchor="ctr" marL="36000" marR="36000" marT="0" marB="0">
+                    <a:lnL w="9525" cap="flat">
+                      <a:solidFill>
+                        <a:srgbClr val="BFBFBF"/>
+                      </a:solidFill>
+                    </a:lnL>
+                    <a:lnR w="9525" cap="flat">
+                      <a:solidFill>
+                        <a:srgbClr val="BFBFBF"/>
+                      </a:solidFill>
+                    </a:lnR>
+                    <a:lnT w="9525" cap="flat">
+                      <a:solidFill>
+                        <a:srgbClr val="BFBFBF"/>
+                      </a:solidFill>
+                    </a:lnT>
+                    <a:lnB w="9525" cap="flat">
+                      <a:solidFill>
+                        <a:srgbClr val="BFBFBF"/>
+                      </a:solidFill>
+                    </a:lnB>
+                    <a:solidFill>
+                      <a:srgbClr val="FFFFFF"/>
+                    </a:solidFill>
+                  </a:tcPr>
+                </a:tc>
+                <a:tc>
+                  <a:txBody>
+                    <a:bodyPr wrap="square"/>
+                    <a:lstStyle/>
+                    <a:p>
+                      <a:pPr algn="ctr"/>
+                      <a:r>
+                        <a:rPr sz="1000" b="0">
+                          <a:solidFill>
+                            <a:srgbClr val="000000"/>
+                          </a:solidFill>
+                          <a:latin typeface="맑은 고딕"/>
+                          <a:ea typeface="맑은 고딕"/>
+                          <a:cs typeface="맑은 고딕"/>
+                        </a:rPr>
+                        <a:t>트레이더스 상품</a:t>
                       </a:r>
                     </a:p>
                   </a:txBody>
@@ -4740,7 +4143,7 @@
                   </a:tcPr>
                 </a:tc>
               </a:tr>
-              <a:tr h="264000">
+              <a:tr h="275999">
                 <a:tc>
                   <a:txBody>
                     <a:bodyPr wrap="square"/>
@@ -4801,7 +4204,7 @@
                           <a:ea typeface="맑은 고딕"/>
                           <a:cs typeface="맑은 고딕"/>
                         </a:rPr>
-                        <a:t>1시간 · 이륜</a:t>
+                        <a:t>1시간 내 (3km)</a:t>
                       </a:r>
                     </a:p>
                   </a:txBody>
@@ -4846,7 +4249,97 @@
                           <a:ea typeface="맑은 고딕"/>
                           <a:cs typeface="맑은 고딕"/>
                         </a:rPr>
-                        <a:t>소량, 약 1만 종</a:t>
+                        <a:t>이륜차</a:t>
+                      </a:r>
+                    </a:p>
+                  </a:txBody>
+                  <a:tcPr anchor="ctr" marL="36000" marR="36000" marT="0" marB="0">
+                    <a:lnL w="9525" cap="flat">
+                      <a:solidFill>
+                        <a:srgbClr val="BFBFBF"/>
+                      </a:solidFill>
+                    </a:lnL>
+                    <a:lnR w="9525" cap="flat">
+                      <a:solidFill>
+                        <a:srgbClr val="BFBFBF"/>
+                      </a:solidFill>
+                    </a:lnR>
+                    <a:lnT w="9525" cap="flat">
+                      <a:solidFill>
+                        <a:srgbClr val="BFBFBF"/>
+                      </a:solidFill>
+                    </a:lnT>
+                    <a:lnB w="9525" cap="flat">
+                      <a:solidFill>
+                        <a:srgbClr val="BFBFBF"/>
+                      </a:solidFill>
+                    </a:lnB>
+                    <a:solidFill>
+                      <a:srgbClr val="FFFFFF"/>
+                    </a:solidFill>
+                  </a:tcPr>
+                </a:tc>
+                <a:tc>
+                  <a:txBody>
+                    <a:bodyPr wrap="square"/>
+                    <a:lstStyle/>
+                    <a:p>
+                      <a:pPr algn="ctr"/>
+                      <a:r>
+                        <a:rPr sz="1000" b="0">
+                          <a:solidFill>
+                            <a:srgbClr val="000000"/>
+                          </a:solidFill>
+                          <a:latin typeface="맑은 고딕"/>
+                          <a:ea typeface="맑은 고딕"/>
+                          <a:cs typeface="맑은 고딕"/>
+                        </a:rPr>
+                        <a:t>약 1만 종</a:t>
+                      </a:r>
+                    </a:p>
+                  </a:txBody>
+                  <a:tcPr anchor="ctr" marL="36000" marR="36000" marT="0" marB="0">
+                    <a:lnL w="9525" cap="flat">
+                      <a:solidFill>
+                        <a:srgbClr val="BFBFBF"/>
+                      </a:solidFill>
+                    </a:lnL>
+                    <a:lnR w="9525" cap="flat">
+                      <a:solidFill>
+                        <a:srgbClr val="BFBFBF"/>
+                      </a:solidFill>
+                    </a:lnR>
+                    <a:lnT w="9525" cap="flat">
+                      <a:solidFill>
+                        <a:srgbClr val="BFBFBF"/>
+                      </a:solidFill>
+                    </a:lnT>
+                    <a:lnB w="9525" cap="flat">
+                      <a:solidFill>
+                        <a:srgbClr val="BFBFBF"/>
+                      </a:solidFill>
+                    </a:lnB>
+                    <a:solidFill>
+                      <a:srgbClr val="FFFFFF"/>
+                    </a:solidFill>
+                  </a:tcPr>
+                </a:tc>
+                <a:tc>
+                  <a:txBody>
+                    <a:bodyPr wrap="square"/>
+                    <a:lstStyle/>
+                    <a:p>
+                      <a:pPr algn="ctr"/>
+                      <a:r>
+                        <a:rPr sz="1000" b="0">
+                          <a:solidFill>
+                            <a:srgbClr val="000000"/>
+                          </a:solidFill>
+                          <a:latin typeface="맑은 고딕"/>
+                          <a:ea typeface="맑은 고딕"/>
+                          <a:cs typeface="맑은 고딕"/>
+                        </a:rPr>
+                        <a:t>소량·1~2인 가구</a:t>
                       </a:r>
                     </a:p>
                   </a:txBody>
@@ -4877,7 +4370,7 @@
                   </a:tcPr>
                 </a:tc>
               </a:tr>
-              <a:tr h="264000">
+              <a:tr h="276004">
                 <a:tc>
                   <a:txBody>
                     <a:bodyPr wrap="square"/>
@@ -4938,7 +4431,7 @@
                           <a:ea typeface="맑은 고딕"/>
                           <a:cs typeface="맑은 고딕"/>
                         </a:rPr>
-                        <a:t>2시간 · 사륜</a:t>
+                        <a:t>2시간 내 (20시 마감)</a:t>
                       </a:r>
                     </a:p>
                   </a:txBody>
@@ -4983,7 +4476,97 @@
                           <a:ea typeface="맑은 고딕"/>
                           <a:cs typeface="맑은 고딕"/>
                         </a:rPr>
-                        <a:t>대용량, 약 15만 종</a:t>
+                        <a:t>사륜차</a:t>
+                      </a:r>
+                    </a:p>
+                  </a:txBody>
+                  <a:tcPr anchor="ctr" marL="36000" marR="36000" marT="0" marB="0">
+                    <a:lnL w="9525" cap="flat">
+                      <a:solidFill>
+                        <a:srgbClr val="BFBFBF"/>
+                      </a:solidFill>
+                    </a:lnL>
+                    <a:lnR w="9525" cap="flat">
+                      <a:solidFill>
+                        <a:srgbClr val="BFBFBF"/>
+                      </a:solidFill>
+                    </a:lnR>
+                    <a:lnT w="9525" cap="flat">
+                      <a:solidFill>
+                        <a:srgbClr val="BFBFBF"/>
+                      </a:solidFill>
+                    </a:lnT>
+                    <a:lnB w="9525" cap="flat">
+                      <a:solidFill>
+                        <a:srgbClr val="BFBFBF"/>
+                      </a:solidFill>
+                    </a:lnB>
+                    <a:solidFill>
+                      <a:srgbClr val="FFFFFF"/>
+                    </a:solidFill>
+                  </a:tcPr>
+                </a:tc>
+                <a:tc>
+                  <a:txBody>
+                    <a:bodyPr wrap="square"/>
+                    <a:lstStyle/>
+                    <a:p>
+                      <a:pPr algn="ctr"/>
+                      <a:r>
+                        <a:rPr sz="1000" b="0">
+                          <a:solidFill>
+                            <a:srgbClr val="000000"/>
+                          </a:solidFill>
+                          <a:latin typeface="맑은 고딕"/>
+                          <a:ea typeface="맑은 고딕"/>
+                          <a:cs typeface="맑은 고딕"/>
+                        </a:rPr>
+                        <a:t>약 15만 종</a:t>
+                      </a:r>
+                    </a:p>
+                  </a:txBody>
+                  <a:tcPr anchor="ctr" marL="36000" marR="36000" marT="0" marB="0">
+                    <a:lnL w="9525" cap="flat">
+                      <a:solidFill>
+                        <a:srgbClr val="BFBFBF"/>
+                      </a:solidFill>
+                    </a:lnL>
+                    <a:lnR w="9525" cap="flat">
+                      <a:solidFill>
+                        <a:srgbClr val="BFBFBF"/>
+                      </a:solidFill>
+                    </a:lnR>
+                    <a:lnT w="9525" cap="flat">
+                      <a:solidFill>
+                        <a:srgbClr val="BFBFBF"/>
+                      </a:solidFill>
+                    </a:lnT>
+                    <a:lnB w="9525" cap="flat">
+                      <a:solidFill>
+                        <a:srgbClr val="BFBFBF"/>
+                      </a:solidFill>
+                    </a:lnB>
+                    <a:solidFill>
+                      <a:srgbClr val="FFFFFF"/>
+                    </a:solidFill>
+                  </a:tcPr>
+                </a:tc>
+                <a:tc>
+                  <a:txBody>
+                    <a:bodyPr wrap="square"/>
+                    <a:lstStyle/>
+                    <a:p>
+                      <a:pPr algn="ctr"/>
+                      <a:r>
+                        <a:rPr sz="1000" b="0">
+                          <a:solidFill>
+                            <a:srgbClr val="000000"/>
+                          </a:solidFill>
+                          <a:latin typeface="맑은 고딕"/>
+                          <a:ea typeface="맑은 고딕"/>
+                          <a:cs typeface="맑은 고딕"/>
+                        </a:rPr>
+                        <a:t>대용량 즉시배송</a:t>
                       </a:r>
                     </a:p>
                   </a:txBody>
@@ -5020,14 +4603,14 @@
       </p:graphicFrame>
       <p:sp>
         <p:nvSpPr>
-          <p:cNvPr id="17" name="TextBox 16"/>
+          <p:cNvPr id="6" name="TextBox 5"/>
           <p:cNvSpPr txBox="1"/>
           <p:nvPr/>
         </p:nvSpPr>
         <p:spPr>
           <a:xfrm>
-            <a:off x="5072400" y="3653999"/>
-            <a:ext cx="4410000" cy="172800"/>
+            <a:off x="424800" y="3330000"/>
+            <a:ext cx="2860800" cy="198000"/>
           </a:xfrm>
           <a:prstGeom prst="rect">
             <a:avLst/>
@@ -5040,7 +4623,7 @@
           </a:bodyPr>
           <a:lstStyle/>
           <a:p>
-            <a:pPr algn="l"/>
+            <a:pPr algn="ctr"/>
             <a:r>
               <a:rPr sz="1200" b="1">
                 <a:solidFill>
@@ -5050,21 +4633,93 @@
                 <a:ea typeface="맑은 고딕"/>
                 <a:cs typeface="맑은 고딕"/>
               </a:rPr>
-              <a:t>• 확대 로드맵</a:t>
-            </a:r>
-          </a:p>
-        </p:txBody>
-      </p:sp>
-      <p:sp>
-        <p:nvSpPr>
-          <p:cNvPr id="18" name="TextBox 17"/>
+              <a:t>도입 배경</a:t>
+            </a:r>
+          </a:p>
+        </p:txBody>
+      </p:sp>
+      <p:cxnSp>
+        <p:nvCxnSpPr>
+          <p:cNvPr id="7" name="Connector 6"/>
+          <p:cNvCxnSpPr/>
+          <p:nvPr/>
+        </p:nvCxnSpPr>
+        <p:spPr>
+          <a:xfrm>
+            <a:off x="424800" y="3553199"/>
+            <a:ext cx="2860800" cy="0"/>
+          </a:xfrm>
+          <a:prstGeom prst="bentConnector3">
+            <a:avLst/>
+          </a:prstGeom>
+          <a:ln w="12700">
+            <a:solidFill>
+              <a:srgbClr val="000000"/>
+            </a:solidFill>
+          </a:ln>
+        </p:spPr>
+        <p:style>
+          <a:lnRef idx="2">
+            <a:schemeClr val="accent1"/>
+          </a:lnRef>
+          <a:fillRef idx="0">
+            <a:schemeClr val="accent1"/>
+          </a:fillRef>
+          <a:effectRef idx="1">
+            <a:schemeClr val="accent1"/>
+          </a:effectRef>
+          <a:fontRef idx="minor">
+            <a:schemeClr val="tx1"/>
+          </a:fontRef>
+        </p:style>
+      </p:cxnSp>
+      <p:sp>
+        <p:nvSpPr>
+          <p:cNvPr id="8" name="TextBox 7"/>
           <p:cNvSpPr txBox="1"/>
           <p:nvPr/>
         </p:nvSpPr>
         <p:spPr>
           <a:xfrm>
-            <a:off x="5270400" y="3826799"/>
-            <a:ext cx="4212000" cy="172800"/>
+            <a:off x="424800" y="3636000"/>
+            <a:ext cx="2860800" cy="187200"/>
+          </a:xfrm>
+          <a:prstGeom prst="rect">
+            <a:avLst/>
+          </a:prstGeom>
+          <a:noFill/>
+        </p:spPr>
+        <p:txBody>
+          <a:bodyPr wrap="square" anchor="t" lIns="0" rIns="0" tIns="0" bIns="0">
+            <a:spAutoFit/>
+          </a:bodyPr>
+          <a:lstStyle/>
+          <a:p>
+            <a:pPr algn="l"/>
+            <a:r>
+              <a:rPr sz="1200" b="1">
+                <a:solidFill>
+                  <a:srgbClr val="000000"/>
+                </a:solidFill>
+                <a:latin typeface="맑은 고딕"/>
+                <a:ea typeface="맑은 고딕"/>
+                <a:cs typeface="맑은 고딕"/>
+              </a:rPr>
+              <a:t>• 대용량 장보기 공백</a:t>
+            </a:r>
+          </a:p>
+        </p:txBody>
+      </p:sp>
+      <p:sp>
+        <p:nvSpPr>
+          <p:cNvPr id="9" name="TextBox 8"/>
+          <p:cNvSpPr txBox="1"/>
+          <p:nvPr/>
+        </p:nvSpPr>
+        <p:spPr>
+          <a:xfrm>
+            <a:off x="622800" y="3823199"/>
+            <a:ext cx="2662800" cy="187200"/>
           </a:xfrm>
           <a:prstGeom prst="rect">
             <a:avLst/>
@@ -5087,21 +4742,58 @@
                 <a:ea typeface="맑은 고딕"/>
                 <a:cs typeface="맑은 고딕"/>
               </a:rPr>
-              <a:t>- 7월 양재·하남 → 8월 서울 → 9월 전국</a:t>
-            </a:r>
-          </a:p>
-        </p:txBody>
-      </p:sp>
-      <p:sp>
-        <p:nvSpPr>
-          <p:cNvPr id="19" name="TextBox 18"/>
+              <a:t>- 이륜차 퀵커머스 소량 한정</a:t>
+            </a:r>
+          </a:p>
+        </p:txBody>
+      </p:sp>
+      <p:sp>
+        <p:nvSpPr>
+          <p:cNvPr id="10" name="TextBox 9"/>
           <p:cNvSpPr txBox="1"/>
           <p:nvPr/>
         </p:nvSpPr>
         <p:spPr>
           <a:xfrm>
-            <a:off x="5270400" y="3999600"/>
-            <a:ext cx="4212000" cy="172800"/>
+            <a:off x="424800" y="4010399"/>
+            <a:ext cx="2860800" cy="187200"/>
+          </a:xfrm>
+          <a:prstGeom prst="rect">
+            <a:avLst/>
+          </a:prstGeom>
+          <a:noFill/>
+        </p:spPr>
+        <p:txBody>
+          <a:bodyPr wrap="square" anchor="t" lIns="0" rIns="0" tIns="0" bIns="0">
+            <a:spAutoFit/>
+          </a:bodyPr>
+          <a:lstStyle/>
+          <a:p>
+            <a:pPr algn="l"/>
+            <a:r>
+              <a:rPr sz="1200" b="1">
+                <a:solidFill>
+                  <a:srgbClr val="000000"/>
+                </a:solidFill>
+                <a:latin typeface="맑은 고딕"/>
+                <a:ea typeface="맑은 고딕"/>
+                <a:cs typeface="맑은 고딕"/>
+              </a:rPr>
+              <a:t>• 온디맨드 수요 실증</a:t>
+            </a:r>
+          </a:p>
+        </p:txBody>
+      </p:sp>
+      <p:sp>
+        <p:nvSpPr>
+          <p:cNvPr id="11" name="TextBox 10"/>
+          <p:cNvSpPr txBox="1"/>
+          <p:nvPr/>
+        </p:nvSpPr>
+        <p:spPr>
+          <a:xfrm>
+            <a:off x="622800" y="4197599"/>
+            <a:ext cx="2662800" cy="187200"/>
           </a:xfrm>
           <a:prstGeom prst="rect">
             <a:avLst/>
@@ -5124,21 +4816,21 @@
                 <a:ea typeface="맑은 고딕"/>
                 <a:cs typeface="맑은 고딕"/>
               </a:rPr>
-              <a:t>- 연말 50여 개 점포 운영 목표</a:t>
-            </a:r>
-          </a:p>
-        </p:txBody>
-      </p:sp>
-      <p:sp>
-        <p:nvSpPr>
-          <p:cNvPr id="20" name="TextBox 19"/>
+              <a:t>- 바로퀵 매출 197%↑ (6월)</a:t>
+            </a:r>
+          </a:p>
+        </p:txBody>
+      </p:sp>
+      <p:sp>
+        <p:nvSpPr>
+          <p:cNvPr id="12" name="TextBox 11"/>
           <p:cNvSpPr txBox="1"/>
           <p:nvPr/>
         </p:nvSpPr>
         <p:spPr>
           <a:xfrm>
-            <a:off x="5072400" y="4370400"/>
-            <a:ext cx="4410000" cy="172800"/>
+            <a:off x="3523199" y="3330000"/>
+            <a:ext cx="2860800" cy="198000"/>
           </a:xfrm>
           <a:prstGeom prst="rect">
             <a:avLst/>
@@ -5151,7 +4843,7 @@
           </a:bodyPr>
           <a:lstStyle/>
           <a:p>
-            <a:pPr algn="l"/>
+            <a:pPr algn="ctr"/>
             <a:r>
               <a:rPr sz="1200" b="1">
                 <a:solidFill>
@@ -5161,21 +4853,93 @@
                 <a:ea typeface="맑은 고딕"/>
                 <a:cs typeface="맑은 고딕"/>
               </a:rPr>
-              <a:t>• 규제 이슈</a:t>
-            </a:r>
-          </a:p>
-        </p:txBody>
-      </p:sp>
-      <p:sp>
-        <p:nvSpPr>
-          <p:cNvPr id="21" name="TextBox 20"/>
+              <a:t>시범 운영 ('26. 7. 9.~)</a:t>
+            </a:r>
+          </a:p>
+        </p:txBody>
+      </p:sp>
+      <p:cxnSp>
+        <p:nvCxnSpPr>
+          <p:cNvPr id="13" name="Connector 12"/>
+          <p:cNvCxnSpPr/>
+          <p:nvPr/>
+        </p:nvCxnSpPr>
+        <p:spPr>
+          <a:xfrm>
+            <a:off x="3523199" y="3553199"/>
+            <a:ext cx="2860800" cy="0"/>
+          </a:xfrm>
+          <a:prstGeom prst="bentConnector3">
+            <a:avLst/>
+          </a:prstGeom>
+          <a:ln w="12700">
+            <a:solidFill>
+              <a:srgbClr val="000000"/>
+            </a:solidFill>
+          </a:ln>
+        </p:spPr>
+        <p:style>
+          <a:lnRef idx="2">
+            <a:schemeClr val="accent1"/>
+          </a:lnRef>
+          <a:fillRef idx="0">
+            <a:schemeClr val="accent1"/>
+          </a:fillRef>
+          <a:effectRef idx="1">
+            <a:schemeClr val="accent1"/>
+          </a:effectRef>
+          <a:fontRef idx="minor">
+            <a:schemeClr val="tx1"/>
+          </a:fontRef>
+        </p:style>
+      </p:cxnSp>
+      <p:sp>
+        <p:nvSpPr>
+          <p:cNvPr id="14" name="TextBox 13"/>
           <p:cNvSpPr txBox="1"/>
           <p:nvPr/>
         </p:nvSpPr>
         <p:spPr>
           <a:xfrm>
-            <a:off x="5270400" y="4543200"/>
-            <a:ext cx="4212000" cy="172800"/>
+            <a:off x="3523199" y="3636000"/>
+            <a:ext cx="2860800" cy="187200"/>
+          </a:xfrm>
+          <a:prstGeom prst="rect">
+            <a:avLst/>
+          </a:prstGeom>
+          <a:noFill/>
+        </p:spPr>
+        <p:txBody>
+          <a:bodyPr wrap="square" anchor="t" lIns="0" rIns="0" tIns="0" bIns="0">
+            <a:spAutoFit/>
+          </a:bodyPr>
+          <a:lstStyle/>
+          <a:p>
+            <a:pPr algn="l"/>
+            <a:r>
+              <a:rPr sz="1200" b="1">
+                <a:solidFill>
+                  <a:srgbClr val="000000"/>
+                </a:solidFill>
+                <a:latin typeface="맑은 고딕"/>
+                <a:ea typeface="맑은 고딕"/>
+                <a:cs typeface="맑은 고딕"/>
+              </a:rPr>
+              <a:t>• 2시간 내 배송</a:t>
+            </a:r>
+          </a:p>
+        </p:txBody>
+      </p:sp>
+      <p:sp>
+        <p:nvSpPr>
+          <p:cNvPr id="15" name="TextBox 14"/>
+          <p:cNvSpPr txBox="1"/>
+          <p:nvPr/>
+        </p:nvSpPr>
+        <p:spPr>
+          <a:xfrm>
+            <a:off x="3721199" y="3823199"/>
+            <a:ext cx="2662800" cy="187200"/>
           </a:xfrm>
           <a:prstGeom prst="rect">
             <a:avLst/>
@@ -5198,21 +4962,58 @@
                 <a:ea typeface="맑은 고딕"/>
                 <a:cs typeface="맑은 고딕"/>
               </a:rPr>
-              <a:t>- 유통법 영업 제한 → PP센터 새벽 불가</a:t>
-            </a:r>
-          </a:p>
-        </p:txBody>
-      </p:sp>
-      <p:sp>
-        <p:nvSpPr>
-          <p:cNvPr id="22" name="TextBox 21"/>
+              <a:t>- 20시 주문 마감, 예약배송 병행</a:t>
+            </a:r>
+          </a:p>
+        </p:txBody>
+      </p:sp>
+      <p:sp>
+        <p:nvSpPr>
+          <p:cNvPr id="16" name="TextBox 15"/>
           <p:cNvSpPr txBox="1"/>
           <p:nvPr/>
         </p:nvSpPr>
         <p:spPr>
           <a:xfrm>
-            <a:off x="5270400" y="4716000"/>
-            <a:ext cx="4212000" cy="172800"/>
+            <a:off x="3523199" y="4010399"/>
+            <a:ext cx="2860800" cy="187200"/>
+          </a:xfrm>
+          <a:prstGeom prst="rect">
+            <a:avLst/>
+          </a:prstGeom>
+          <a:noFill/>
+        </p:spPr>
+        <p:txBody>
+          <a:bodyPr wrap="square" anchor="t" lIns="0" rIns="0" tIns="0" bIns="0">
+            <a:spAutoFit/>
+          </a:bodyPr>
+          <a:lstStyle/>
+          <a:p>
+            <a:pPr algn="l"/>
+            <a:r>
+              <a:rPr sz="1200" b="1">
+                <a:solidFill>
+                  <a:srgbClr val="000000"/>
+                </a:solidFill>
+                <a:latin typeface="맑은 고딕"/>
+                <a:ea typeface="맑은 고딕"/>
+                <a:cs typeface="맑은 고딕"/>
+              </a:rPr>
+              <a:t>• 사륜차 대용량 대응</a:t>
+            </a:r>
+          </a:p>
+        </p:txBody>
+      </p:sp>
+      <p:sp>
+        <p:nvSpPr>
+          <p:cNvPr id="17" name="TextBox 16"/>
+          <p:cNvSpPr txBox="1"/>
+          <p:nvPr/>
+        </p:nvSpPr>
+        <p:spPr>
+          <a:xfrm>
+            <a:off x="3721199" y="4197599"/>
+            <a:ext cx="2662800" cy="187200"/>
           </a:xfrm>
           <a:prstGeom prst="rect">
             <a:avLst/>
@@ -5235,21 +5036,311 @@
                 <a:ea typeface="맑은 고딕"/>
                 <a:cs typeface="맑은 고딕"/>
               </a:rPr>
-              <a:t>- 규제 완화 시 새벽배송 확장 여지</a:t>
-            </a:r>
-          </a:p>
-        </p:txBody>
-      </p:sp>
-      <p:sp>
-        <p:nvSpPr>
-          <p:cNvPr id="23" name="Rectangle 22"/>
+              <a:t>- 점포 15만 종 기반 즉시배송</a:t>
+            </a:r>
+          </a:p>
+        </p:txBody>
+      </p:sp>
+      <p:sp>
+        <p:nvSpPr>
+          <p:cNvPr id="18" name="TextBox 17"/>
+          <p:cNvSpPr txBox="1"/>
+          <p:nvPr/>
+        </p:nvSpPr>
+        <p:spPr>
+          <a:xfrm>
+            <a:off x="6621599" y="3330000"/>
+            <a:ext cx="2860800" cy="198000"/>
+          </a:xfrm>
+          <a:prstGeom prst="rect">
+            <a:avLst/>
+          </a:prstGeom>
+          <a:noFill/>
+        </p:spPr>
+        <p:txBody>
+          <a:bodyPr wrap="square" anchor="t" lIns="0" rIns="0" tIns="0" bIns="0">
+            <a:spAutoFit/>
+          </a:bodyPr>
+          <a:lstStyle/>
+          <a:p>
+            <a:pPr algn="ctr"/>
+            <a:r>
+              <a:rPr sz="1200" b="1">
+                <a:solidFill>
+                  <a:srgbClr val="000000"/>
+                </a:solidFill>
+                <a:latin typeface="맑은 고딕"/>
+                <a:ea typeface="맑은 고딕"/>
+                <a:cs typeface="맑은 고딕"/>
+              </a:rPr>
+              <a:t>확대 로드맵</a:t>
+            </a:r>
+          </a:p>
+        </p:txBody>
+      </p:sp>
+      <p:cxnSp>
+        <p:nvCxnSpPr>
+          <p:cNvPr id="19" name="Connector 18"/>
+          <p:cNvCxnSpPr/>
+          <p:nvPr/>
+        </p:nvCxnSpPr>
+        <p:spPr>
+          <a:xfrm>
+            <a:off x="6621599" y="3553199"/>
+            <a:ext cx="2860800" cy="0"/>
+          </a:xfrm>
+          <a:prstGeom prst="bentConnector3">
+            <a:avLst/>
+          </a:prstGeom>
+          <a:ln w="12700">
+            <a:solidFill>
+              <a:srgbClr val="000000"/>
+            </a:solidFill>
+          </a:ln>
+        </p:spPr>
+        <p:style>
+          <a:lnRef idx="2">
+            <a:schemeClr val="accent1"/>
+          </a:lnRef>
+          <a:fillRef idx="0">
+            <a:schemeClr val="accent1"/>
+          </a:fillRef>
+          <a:effectRef idx="1">
+            <a:schemeClr val="accent1"/>
+          </a:effectRef>
+          <a:fontRef idx="minor">
+            <a:schemeClr val="tx1"/>
+          </a:fontRef>
+        </p:style>
+      </p:cxnSp>
+      <p:sp>
+        <p:nvSpPr>
+          <p:cNvPr id="20" name="TextBox 19"/>
+          <p:cNvSpPr txBox="1"/>
+          <p:nvPr/>
+        </p:nvSpPr>
+        <p:spPr>
+          <a:xfrm>
+            <a:off x="6621599" y="3636000"/>
+            <a:ext cx="2860800" cy="187200"/>
+          </a:xfrm>
+          <a:prstGeom prst="rect">
+            <a:avLst/>
+          </a:prstGeom>
+          <a:noFill/>
+        </p:spPr>
+        <p:txBody>
+          <a:bodyPr wrap="square" anchor="t" lIns="0" rIns="0" tIns="0" bIns="0">
+            <a:spAutoFit/>
+          </a:bodyPr>
+          <a:lstStyle/>
+          <a:p>
+            <a:pPr algn="l"/>
+            <a:r>
+              <a:rPr sz="1200" b="1">
+                <a:solidFill>
+                  <a:srgbClr val="000000"/>
+                </a:solidFill>
+                <a:latin typeface="맑은 고딕"/>
+                <a:ea typeface="맑은 고딕"/>
+                <a:cs typeface="맑은 고딕"/>
+              </a:rPr>
+              <a:t>• 전국 확대</a:t>
+            </a:r>
+          </a:p>
+        </p:txBody>
+      </p:sp>
+      <p:sp>
+        <p:nvSpPr>
+          <p:cNvPr id="21" name="TextBox 20"/>
+          <p:cNvSpPr txBox="1"/>
+          <p:nvPr/>
+        </p:nvSpPr>
+        <p:spPr>
+          <a:xfrm>
+            <a:off x="6819599" y="3823199"/>
+            <a:ext cx="2662800" cy="187200"/>
+          </a:xfrm>
+          <a:prstGeom prst="rect">
+            <a:avLst/>
+          </a:prstGeom>
+          <a:noFill/>
+        </p:spPr>
+        <p:txBody>
+          <a:bodyPr wrap="square" anchor="t" lIns="0" rIns="0" tIns="0" bIns="0">
+            <a:spAutoFit/>
+          </a:bodyPr>
+          <a:lstStyle/>
+          <a:p>
+            <a:pPr algn="l"/>
+            <a:r>
+              <a:rPr sz="1100" b="0">
+                <a:solidFill>
+                  <a:srgbClr val="000000"/>
+                </a:solidFill>
+                <a:latin typeface="맑은 고딕"/>
+                <a:ea typeface="맑은 고딕"/>
+                <a:cs typeface="맑은 고딕"/>
+              </a:rPr>
+              <a:t>- 8월 서울 → 9월 전국</a:t>
+            </a:r>
+          </a:p>
+        </p:txBody>
+      </p:sp>
+      <p:sp>
+        <p:nvSpPr>
+          <p:cNvPr id="22" name="TextBox 21"/>
+          <p:cNvSpPr txBox="1"/>
+          <p:nvPr/>
+        </p:nvSpPr>
+        <p:spPr>
+          <a:xfrm>
+            <a:off x="6819599" y="4010399"/>
+            <a:ext cx="2662800" cy="187200"/>
+          </a:xfrm>
+          <a:prstGeom prst="rect">
+            <a:avLst/>
+          </a:prstGeom>
+          <a:noFill/>
+        </p:spPr>
+        <p:txBody>
+          <a:bodyPr wrap="square" anchor="t" lIns="0" rIns="0" tIns="0" bIns="0">
+            <a:spAutoFit/>
+          </a:bodyPr>
+          <a:lstStyle/>
+          <a:p>
+            <a:pPr algn="l"/>
+            <a:r>
+              <a:rPr sz="1100" b="0">
+                <a:solidFill>
+                  <a:srgbClr val="000000"/>
+                </a:solidFill>
+                <a:latin typeface="맑은 고딕"/>
+                <a:ea typeface="맑은 고딕"/>
+                <a:cs typeface="맑은 고딕"/>
+              </a:rPr>
+              <a:t>- 연말 50여 개 점포 목표</a:t>
+            </a:r>
+          </a:p>
+        </p:txBody>
+      </p:sp>
+      <p:sp>
+        <p:nvSpPr>
+          <p:cNvPr id="23" name="TextBox 22"/>
+          <p:cNvSpPr txBox="1"/>
+          <p:nvPr/>
+        </p:nvSpPr>
+        <p:spPr>
+          <a:xfrm>
+            <a:off x="6621599" y="4197599"/>
+            <a:ext cx="2860800" cy="187200"/>
+          </a:xfrm>
+          <a:prstGeom prst="rect">
+            <a:avLst/>
+          </a:prstGeom>
+          <a:noFill/>
+        </p:spPr>
+        <p:txBody>
+          <a:bodyPr wrap="square" anchor="t" lIns="0" rIns="0" tIns="0" bIns="0">
+            <a:spAutoFit/>
+          </a:bodyPr>
+          <a:lstStyle/>
+          <a:p>
+            <a:pPr algn="l"/>
+            <a:r>
+              <a:rPr sz="1200" b="1">
+                <a:solidFill>
+                  <a:srgbClr val="000000"/>
+                </a:solidFill>
+                <a:latin typeface="맑은 고딕"/>
+                <a:ea typeface="맑은 고딕"/>
+                <a:cs typeface="맑은 고딕"/>
+              </a:rPr>
+              <a:t>• 규제 변수 : PP센터 새벽 불가</a:t>
+            </a:r>
+          </a:p>
+        </p:txBody>
+      </p:sp>
+      <p:cxnSp>
+        <p:nvCxnSpPr>
+          <p:cNvPr id="24" name="Connector 23"/>
+          <p:cNvCxnSpPr/>
+          <p:nvPr/>
+        </p:nvCxnSpPr>
+        <p:spPr>
+          <a:xfrm>
+            <a:off x="3404399" y="3366000"/>
+            <a:ext cx="0" cy="1018799"/>
+          </a:xfrm>
+          <a:prstGeom prst="bentConnector3">
+            <a:avLst/>
+          </a:prstGeom>
+          <a:ln w="9525">
+            <a:solidFill>
+              <a:srgbClr val="BFBFBF"/>
+            </a:solidFill>
+          </a:ln>
+        </p:spPr>
+        <p:style>
+          <a:lnRef idx="2">
+            <a:schemeClr val="accent1"/>
+          </a:lnRef>
+          <a:fillRef idx="0">
+            <a:schemeClr val="accent1"/>
+          </a:fillRef>
+          <a:effectRef idx="1">
+            <a:schemeClr val="accent1"/>
+          </a:effectRef>
+          <a:fontRef idx="minor">
+            <a:schemeClr val="tx1"/>
+          </a:fontRef>
+        </p:style>
+      </p:cxnSp>
+      <p:cxnSp>
+        <p:nvCxnSpPr>
+          <p:cNvPr id="25" name="Connector 24"/>
+          <p:cNvCxnSpPr/>
+          <p:nvPr/>
+        </p:nvCxnSpPr>
+        <p:spPr>
+          <a:xfrm>
+            <a:off x="6502800" y="3366000"/>
+            <a:ext cx="0" cy="1018799"/>
+          </a:xfrm>
+          <a:prstGeom prst="bentConnector3">
+            <a:avLst/>
+          </a:prstGeom>
+          <a:ln w="9525">
+            <a:solidFill>
+              <a:srgbClr val="BFBFBF"/>
+            </a:solidFill>
+          </a:ln>
+        </p:spPr>
+        <p:style>
+          <a:lnRef idx="2">
+            <a:schemeClr val="accent1"/>
+          </a:lnRef>
+          <a:fillRef idx="0">
+            <a:schemeClr val="accent1"/>
+          </a:fillRef>
+          <a:effectRef idx="1">
+            <a:schemeClr val="accent1"/>
+          </a:effectRef>
+          <a:fontRef idx="minor">
+            <a:schemeClr val="tx1"/>
+          </a:fontRef>
+        </p:style>
+      </p:cxnSp>
+      <p:sp>
+        <p:nvSpPr>
+          <p:cNvPr id="26" name="Rectangle 25"/>
           <p:cNvSpPr/>
           <p:nvPr/>
         </p:nvSpPr>
         <p:spPr>
           <a:xfrm>
-            <a:off x="424800" y="5086800"/>
-            <a:ext cx="4410000" cy="324000"/>
+            <a:off x="424800" y="4582799"/>
+            <a:ext cx="9057600" cy="324000"/>
           </a:xfrm>
           <a:prstGeom prst="rect">
             <a:avLst/>
@@ -5286,14 +5377,14 @@
       </p:sp>
       <p:sp>
         <p:nvSpPr>
-          <p:cNvPr id="24" name="TextBox 23"/>
+          <p:cNvPr id="27" name="TextBox 26"/>
           <p:cNvSpPr txBox="1"/>
           <p:nvPr/>
         </p:nvSpPr>
         <p:spPr>
           <a:xfrm>
-            <a:off x="424800" y="5086800"/>
-            <a:ext cx="4410000" cy="324000"/>
+            <a:off x="424800" y="4582799"/>
+            <a:ext cx="9057600" cy="324000"/>
           </a:xfrm>
           <a:prstGeom prst="rect">
             <a:avLst/>
@@ -5316,127 +5407,11 @@
                 <a:ea typeface="맑은 고딕"/>
                 <a:cs typeface="맑은 고딕"/>
               </a:rPr>
-              <a:t>사륜차 대용량 즉시배송으로 퀵커머스 공백 흡수</a:t>
-            </a:r>
-          </a:p>
-        </p:txBody>
-      </p:sp>
-      <p:sp>
-        <p:nvSpPr>
-          <p:cNvPr id="25" name="Rectangle 24"/>
-          <p:cNvSpPr/>
-          <p:nvPr/>
-        </p:nvSpPr>
-        <p:spPr>
-          <a:xfrm>
-            <a:off x="5072400" y="5086800"/>
-            <a:ext cx="4410000" cy="324000"/>
-          </a:xfrm>
-          <a:prstGeom prst="rect">
-            <a:avLst/>
-          </a:prstGeom>
-          <a:solidFill>
-            <a:srgbClr val="000066"/>
-          </a:solidFill>
-          <a:ln>
-            <a:noFill/>
-          </a:ln>
-          <a:effectLst/>
-        </p:spPr>
-        <p:style>
-          <a:lnRef idx="1">
-            <a:schemeClr val="accent1"/>
-          </a:lnRef>
-          <a:fillRef idx="3">
-            <a:schemeClr val="accent1"/>
-          </a:fillRef>
-          <a:effectRef idx="2">
-            <a:schemeClr val="accent1"/>
-          </a:effectRef>
-          <a:fontRef idx="minor">
-            <a:schemeClr val="lt1"/>
-          </a:fontRef>
-        </p:style>
-        <p:txBody>
-          <a:bodyPr rtlCol="0" anchor="ctr"/>
-          <a:lstStyle/>
-          <a:p>
-            <a:pPr algn="ctr"/>
-          </a:p>
-        </p:txBody>
-      </p:sp>
-      <p:sp>
-        <p:nvSpPr>
-          <p:cNvPr id="26" name="TextBox 25"/>
-          <p:cNvSpPr txBox="1"/>
-          <p:nvPr/>
-        </p:nvSpPr>
-        <p:spPr>
-          <a:xfrm>
-            <a:off x="5072400" y="5086800"/>
-            <a:ext cx="4410000" cy="324000"/>
-          </a:xfrm>
-          <a:prstGeom prst="rect">
-            <a:avLst/>
-          </a:prstGeom>
-          <a:noFill/>
-        </p:spPr>
-        <p:txBody>
-          <a:bodyPr wrap="square" anchor="ctr" lIns="0" rIns="0" tIns="0" bIns="0">
-            <a:spAutoFit/>
-          </a:bodyPr>
-          <a:lstStyle/>
-          <a:p>
-            <a:pPr algn="ctr"/>
-            <a:r>
-              <a:rPr sz="1100" b="1">
-                <a:solidFill>
-                  <a:srgbClr val="FFFFFF"/>
-                </a:solidFill>
-                <a:latin typeface="맑은 고딕"/>
-                <a:ea typeface="맑은 고딕"/>
-                <a:cs typeface="맑은 고딕"/>
-              </a:rPr>
-              <a:t>연말 50여 개 점포 — 전국 즉시배송 기반 구축</a:t>
-            </a:r>
-          </a:p>
-        </p:txBody>
-      </p:sp>
-      <p:cxnSp>
-        <p:nvCxnSpPr>
-          <p:cNvPr id="27" name="Connector 26"/>
-          <p:cNvCxnSpPr/>
-          <p:nvPr/>
-        </p:nvCxnSpPr>
-        <p:spPr>
-          <a:xfrm>
-            <a:off x="4953600" y="1475999"/>
-            <a:ext cx="0" cy="3934801"/>
-          </a:xfrm>
-          <a:prstGeom prst="bentConnector3">
-            <a:avLst/>
-          </a:prstGeom>
-          <a:ln w="9525">
-            <a:solidFill>
-              <a:srgbClr val="BFBFBF"/>
-            </a:solidFill>
-          </a:ln>
-        </p:spPr>
-        <p:style>
-          <a:lnRef idx="2">
-            <a:schemeClr val="accent1"/>
-          </a:lnRef>
-          <a:fillRef idx="0">
-            <a:schemeClr val="accent1"/>
-          </a:fillRef>
-          <a:effectRef idx="1">
-            <a:schemeClr val="accent1"/>
-          </a:effectRef>
-          <a:fontRef idx="minor">
-            <a:schemeClr val="tx1"/>
-          </a:fontRef>
-        </p:style>
-      </p:cxnSp>
+              <a:t>사륜차 대용량 즉시배송으로 퀵커머스 공백 흡수 — 연말 50여 개 점포, 전국 즉시배송 기반 구축</a:t>
+            </a:r>
+          </a:p>
+        </p:txBody>
+      </p:sp>
     </p:spTree>
   </p:cSld>
   <p:clrMapOvr>

--- a/reports/ssg-quickcommerce-onepager.pptx
+++ b/reports/ssg-quickcommerce-onepager.pptx
@@ -3220,7 +3220,7 @@
         </p:nvGraphicFramePr>
         <p:xfrm>
           <a:off x="424800" y="1475999"/>
-          <a:ext cx="9057600" cy="1655999"/>
+          <a:ext cx="9057600" cy="2592000"/>
         </p:xfrm>
         <a:graphic>
           <a:graphicData uri="http://schemas.openxmlformats.org/drawingml/2006/table">
@@ -3235,7 +3235,7 @@
                 <a:gridCol w="1296000"/>
                 <a:gridCol w="3549600"/>
               </a:tblGrid>
-              <a:tr h="275999">
+              <a:tr h="432000">
                 <a:tc>
                   <a:txBody>
                     <a:bodyPr wrap="square"/>
@@ -3462,7 +3462,7 @@
                   </a:tcPr>
                 </a:tc>
               </a:tr>
-              <a:tr h="275999">
+              <a:tr h="432000">
                 <a:tc>
                   <a:txBody>
                     <a:bodyPr wrap="square"/>
@@ -3689,7 +3689,7 @@
                   </a:tcPr>
                 </a:tc>
               </a:tr>
-              <a:tr h="275999">
+              <a:tr h="432000">
                 <a:tc>
                   <a:txBody>
                     <a:bodyPr wrap="square"/>
@@ -3916,7 +3916,7 @@
                   </a:tcPr>
                 </a:tc>
               </a:tr>
-              <a:tr h="275999">
+              <a:tr h="432000">
                 <a:tc>
                   <a:txBody>
                     <a:bodyPr wrap="square"/>
@@ -4143,7 +4143,7 @@
                   </a:tcPr>
                 </a:tc>
               </a:tr>
-              <a:tr h="275999">
+              <a:tr h="432000">
                 <a:tc>
                   <a:txBody>
                     <a:bodyPr wrap="square"/>
@@ -4370,7 +4370,7 @@
                   </a:tcPr>
                 </a:tc>
               </a:tr>
-              <a:tr h="276004">
+              <a:tr h="432000">
                 <a:tc>
                   <a:txBody>
                     <a:bodyPr wrap="square"/>
@@ -4609,7 +4609,7 @@
         </p:nvSpPr>
         <p:spPr>
           <a:xfrm>
-            <a:off x="424800" y="3330000"/>
+            <a:off x="424800" y="4338000"/>
             <a:ext cx="2860800" cy="198000"/>
           </a:xfrm>
           <a:prstGeom prst="rect">
@@ -4646,7 +4646,7 @@
         </p:nvCxnSpPr>
         <p:spPr>
           <a:xfrm>
-            <a:off x="424800" y="3553199"/>
+            <a:off x="424800" y="4561200"/>
             <a:ext cx="2860800" cy="0"/>
           </a:xfrm>
           <a:prstGeom prst="bentConnector3">
@@ -4681,8 +4681,8 @@
         </p:nvSpPr>
         <p:spPr>
           <a:xfrm>
-            <a:off x="424800" y="3636000"/>
-            <a:ext cx="2860800" cy="187200"/>
+            <a:off x="424800" y="4662000"/>
+            <a:ext cx="2860800" cy="237600"/>
           </a:xfrm>
           <a:prstGeom prst="rect">
             <a:avLst/>
@@ -4718,8 +4718,8 @@
         </p:nvSpPr>
         <p:spPr>
           <a:xfrm>
-            <a:off x="622800" y="3823199"/>
-            <a:ext cx="2662800" cy="187200"/>
+            <a:off x="622800" y="4899600"/>
+            <a:ext cx="2662800" cy="237600"/>
           </a:xfrm>
           <a:prstGeom prst="rect">
             <a:avLst/>
@@ -4755,8 +4755,8 @@
         </p:nvSpPr>
         <p:spPr>
           <a:xfrm>
-            <a:off x="424800" y="4010399"/>
-            <a:ext cx="2860800" cy="187200"/>
+            <a:off x="424800" y="5137200"/>
+            <a:ext cx="2860800" cy="237600"/>
           </a:xfrm>
           <a:prstGeom prst="rect">
             <a:avLst/>
@@ -4792,8 +4792,8 @@
         </p:nvSpPr>
         <p:spPr>
           <a:xfrm>
-            <a:off x="622800" y="4197599"/>
-            <a:ext cx="2662800" cy="187200"/>
+            <a:off x="622800" y="5374800"/>
+            <a:ext cx="2662800" cy="237600"/>
           </a:xfrm>
           <a:prstGeom prst="rect">
             <a:avLst/>
@@ -4829,7 +4829,7 @@
         </p:nvSpPr>
         <p:spPr>
           <a:xfrm>
-            <a:off x="3523199" y="3330000"/>
+            <a:off x="3523199" y="4338000"/>
             <a:ext cx="2860800" cy="198000"/>
           </a:xfrm>
           <a:prstGeom prst="rect">
@@ -4866,7 +4866,7 @@
         </p:nvCxnSpPr>
         <p:spPr>
           <a:xfrm>
-            <a:off x="3523199" y="3553199"/>
+            <a:off x="3523199" y="4561200"/>
             <a:ext cx="2860800" cy="0"/>
           </a:xfrm>
           <a:prstGeom prst="bentConnector3">
@@ -4901,8 +4901,8 @@
         </p:nvSpPr>
         <p:spPr>
           <a:xfrm>
-            <a:off x="3523199" y="3636000"/>
-            <a:ext cx="2860800" cy="187200"/>
+            <a:off x="3523199" y="4662000"/>
+            <a:ext cx="2860800" cy="237600"/>
           </a:xfrm>
           <a:prstGeom prst="rect">
             <a:avLst/>
@@ -4938,8 +4938,8 @@
         </p:nvSpPr>
         <p:spPr>
           <a:xfrm>
-            <a:off x="3721199" y="3823199"/>
-            <a:ext cx="2662800" cy="187200"/>
+            <a:off x="3721199" y="4899600"/>
+            <a:ext cx="2662800" cy="237600"/>
           </a:xfrm>
           <a:prstGeom prst="rect">
             <a:avLst/>
@@ -4975,8 +4975,8 @@
         </p:nvSpPr>
         <p:spPr>
           <a:xfrm>
-            <a:off x="3523199" y="4010399"/>
-            <a:ext cx="2860800" cy="187200"/>
+            <a:off x="3523199" y="5137200"/>
+            <a:ext cx="2860800" cy="237600"/>
           </a:xfrm>
           <a:prstGeom prst="rect">
             <a:avLst/>
@@ -5012,8 +5012,8 @@
         </p:nvSpPr>
         <p:spPr>
           <a:xfrm>
-            <a:off x="3721199" y="4197599"/>
-            <a:ext cx="2662800" cy="187200"/>
+            <a:off x="3721199" y="5374800"/>
+            <a:ext cx="2662800" cy="237600"/>
           </a:xfrm>
           <a:prstGeom prst="rect">
             <a:avLst/>
@@ -5049,7 +5049,7 @@
         </p:nvSpPr>
         <p:spPr>
           <a:xfrm>
-            <a:off x="6621599" y="3330000"/>
+            <a:off x="6621599" y="4338000"/>
             <a:ext cx="2860800" cy="198000"/>
           </a:xfrm>
           <a:prstGeom prst="rect">
@@ -5086,7 +5086,7 @@
         </p:nvCxnSpPr>
         <p:spPr>
           <a:xfrm>
-            <a:off x="6621599" y="3553199"/>
+            <a:off x="6621599" y="4561200"/>
             <a:ext cx="2860800" cy="0"/>
           </a:xfrm>
           <a:prstGeom prst="bentConnector3">
@@ -5121,8 +5121,8 @@
         </p:nvSpPr>
         <p:spPr>
           <a:xfrm>
-            <a:off x="6621599" y="3636000"/>
-            <a:ext cx="2860800" cy="187200"/>
+            <a:off x="6621599" y="4662000"/>
+            <a:ext cx="2860800" cy="237600"/>
           </a:xfrm>
           <a:prstGeom prst="rect">
             <a:avLst/>
@@ -5158,8 +5158,8 @@
         </p:nvSpPr>
         <p:spPr>
           <a:xfrm>
-            <a:off x="6819599" y="3823199"/>
-            <a:ext cx="2662800" cy="187200"/>
+            <a:off x="6819599" y="4899600"/>
+            <a:ext cx="2662800" cy="237600"/>
           </a:xfrm>
           <a:prstGeom prst="rect">
             <a:avLst/>
@@ -5195,8 +5195,8 @@
         </p:nvSpPr>
         <p:spPr>
           <a:xfrm>
-            <a:off x="6819599" y="4010399"/>
-            <a:ext cx="2662800" cy="187200"/>
+            <a:off x="6819599" y="5137200"/>
+            <a:ext cx="2662800" cy="237600"/>
           </a:xfrm>
           <a:prstGeom prst="rect">
             <a:avLst/>
@@ -5232,8 +5232,8 @@
         </p:nvSpPr>
         <p:spPr>
           <a:xfrm>
-            <a:off x="6621599" y="4197599"/>
-            <a:ext cx="2860800" cy="187200"/>
+            <a:off x="6621599" y="5374800"/>
+            <a:ext cx="2860800" cy="237600"/>
           </a:xfrm>
           <a:prstGeom prst="rect">
             <a:avLst/>
@@ -5269,8 +5269,8 @@
         </p:nvCxnSpPr>
         <p:spPr>
           <a:xfrm>
-            <a:off x="3404399" y="3366000"/>
-            <a:ext cx="0" cy="1018799"/>
+            <a:off x="3404399" y="4374000"/>
+            <a:ext cx="0" cy="1238400"/>
           </a:xfrm>
           <a:prstGeom prst="bentConnector3">
             <a:avLst/>
@@ -5304,8 +5304,8 @@
         </p:nvCxnSpPr>
         <p:spPr>
           <a:xfrm>
-            <a:off x="6502800" y="3366000"/>
-            <a:ext cx="0" cy="1018799"/>
+            <a:off x="6502800" y="4374000"/>
+            <a:ext cx="0" cy="1238400"/>
           </a:xfrm>
           <a:prstGeom prst="bentConnector3">
             <a:avLst/>
@@ -5339,8 +5339,8 @@
         </p:nvSpPr>
         <p:spPr>
           <a:xfrm>
-            <a:off x="424800" y="4582799"/>
-            <a:ext cx="9057600" cy="324000"/>
+            <a:off x="424800" y="5868000"/>
+            <a:ext cx="9057600" cy="360000"/>
           </a:xfrm>
           <a:prstGeom prst="rect">
             <a:avLst/>
@@ -5383,8 +5383,8 @@
         </p:nvSpPr>
         <p:spPr>
           <a:xfrm>
-            <a:off x="424800" y="4582799"/>
-            <a:ext cx="9057600" cy="324000"/>
+            <a:off x="424800" y="5868000"/>
+            <a:ext cx="9057600" cy="360000"/>
           </a:xfrm>
           <a:prstGeom prst="rect">
             <a:avLst/>

--- a/reports/ssg-quickcommerce-onepager.pptx
+++ b/reports/ssg-quickcommerce-onepager.pptx
@@ -3210,17 +3210,237 @@
           </a:p>
         </p:txBody>
       </p:sp>
+      <p:sp>
+        <p:nvSpPr>
+          <p:cNvPr id="5" name="TextBox 4"/>
+          <p:cNvSpPr txBox="1"/>
+          <p:nvPr/>
+        </p:nvSpPr>
+        <p:spPr>
+          <a:xfrm>
+            <a:off x="424800" y="1475999"/>
+            <a:ext cx="4410000" cy="198000"/>
+          </a:xfrm>
+          <a:prstGeom prst="rect">
+            <a:avLst/>
+          </a:prstGeom>
+          <a:noFill/>
+        </p:spPr>
+        <p:txBody>
+          <a:bodyPr wrap="square" anchor="t" lIns="0" rIns="0" tIns="0" bIns="0">
+            <a:spAutoFit/>
+          </a:bodyPr>
+          <a:lstStyle/>
+          <a:p>
+            <a:pPr algn="ctr"/>
+            <a:r>
+              <a:rPr sz="1200" b="1">
+                <a:solidFill>
+                  <a:srgbClr val="000000"/>
+                </a:solidFill>
+                <a:latin typeface="맑은 고딕"/>
+                <a:ea typeface="맑은 고딕"/>
+                <a:cs typeface="맑은 고딕"/>
+              </a:rPr>
+              <a:t>현황 및 도입 배경</a:t>
+            </a:r>
+          </a:p>
+        </p:txBody>
+      </p:sp>
+      <p:cxnSp>
+        <p:nvCxnSpPr>
+          <p:cNvPr id="6" name="Connector 5"/>
+          <p:cNvCxnSpPr/>
+          <p:nvPr/>
+        </p:nvCxnSpPr>
+        <p:spPr>
+          <a:xfrm>
+            <a:off x="424800" y="1699200"/>
+            <a:ext cx="4410000" cy="0"/>
+          </a:xfrm>
+          <a:prstGeom prst="bentConnector3">
+            <a:avLst/>
+          </a:prstGeom>
+          <a:ln w="19050">
+            <a:solidFill>
+              <a:srgbClr val="000000"/>
+            </a:solidFill>
+          </a:ln>
+        </p:spPr>
+        <p:style>
+          <a:lnRef idx="2">
+            <a:schemeClr val="accent1"/>
+          </a:lnRef>
+          <a:fillRef idx="0">
+            <a:schemeClr val="accent1"/>
+          </a:fillRef>
+          <a:effectRef idx="1">
+            <a:schemeClr val="accent1"/>
+          </a:effectRef>
+          <a:fontRef idx="minor">
+            <a:schemeClr val="tx1"/>
+          </a:fontRef>
+        </p:style>
+      </p:cxnSp>
+      <p:sp>
+        <p:nvSpPr>
+          <p:cNvPr id="7" name="TextBox 6"/>
+          <p:cNvSpPr txBox="1"/>
+          <p:nvPr/>
+        </p:nvSpPr>
+        <p:spPr>
+          <a:xfrm>
+            <a:off x="424800" y="1800000"/>
+            <a:ext cx="4410000" cy="273600"/>
+          </a:xfrm>
+          <a:prstGeom prst="rect">
+            <a:avLst/>
+          </a:prstGeom>
+          <a:noFill/>
+        </p:spPr>
+        <p:txBody>
+          <a:bodyPr wrap="square" anchor="t" lIns="0" rIns="0" tIns="0" bIns="0">
+            <a:spAutoFit/>
+          </a:bodyPr>
+          <a:lstStyle/>
+          <a:p>
+            <a:pPr algn="l"/>
+            <a:r>
+              <a:rPr sz="1200" b="1">
+                <a:solidFill>
+                  <a:srgbClr val="000000"/>
+                </a:solidFill>
+                <a:latin typeface="맑은 고딕"/>
+                <a:ea typeface="맑은 고딕"/>
+                <a:cs typeface="맑은 고딕"/>
+              </a:rPr>
+              <a:t>• 퀵커머스 수요 급증 속 공백</a:t>
+            </a:r>
+          </a:p>
+        </p:txBody>
+      </p:sp>
+      <p:sp>
+        <p:nvSpPr>
+          <p:cNvPr id="8" name="TextBox 7"/>
+          <p:cNvSpPr txBox="1"/>
+          <p:nvPr/>
+        </p:nvSpPr>
+        <p:spPr>
+          <a:xfrm>
+            <a:off x="622800" y="2073600"/>
+            <a:ext cx="4212000" cy="273600"/>
+          </a:xfrm>
+          <a:prstGeom prst="rect">
+            <a:avLst/>
+          </a:prstGeom>
+          <a:noFill/>
+        </p:spPr>
+        <p:txBody>
+          <a:bodyPr wrap="square" anchor="t" lIns="0" rIns="0" tIns="0" bIns="0">
+            <a:spAutoFit/>
+          </a:bodyPr>
+          <a:lstStyle/>
+          <a:p>
+            <a:pPr algn="l"/>
+            <a:r>
+              <a:rPr sz="1100" b="0">
+                <a:solidFill>
+                  <a:srgbClr val="000000"/>
+                </a:solidFill>
+                <a:latin typeface="맑은 고딕"/>
+                <a:ea typeface="맑은 고딕"/>
+                <a:cs typeface="맑은 고딕"/>
+              </a:rPr>
+              <a:t>- 이륜차 퀵커머스 소량 한정 → 대용량 공백</a:t>
+            </a:r>
+          </a:p>
+        </p:txBody>
+      </p:sp>
+      <p:sp>
+        <p:nvSpPr>
+          <p:cNvPr id="9" name="TextBox 8"/>
+          <p:cNvSpPr txBox="1"/>
+          <p:nvPr/>
+        </p:nvSpPr>
+        <p:spPr>
+          <a:xfrm>
+            <a:off x="622800" y="2347200"/>
+            <a:ext cx="4212000" cy="273600"/>
+          </a:xfrm>
+          <a:prstGeom prst="rect">
+            <a:avLst/>
+          </a:prstGeom>
+          <a:noFill/>
+        </p:spPr>
+        <p:txBody>
+          <a:bodyPr wrap="square" anchor="t" lIns="0" rIns="0" tIns="0" bIns="0">
+            <a:spAutoFit/>
+          </a:bodyPr>
+          <a:lstStyle/>
+          <a:p>
+            <a:pPr algn="l"/>
+            <a:r>
+              <a:rPr sz="1100" b="0">
+                <a:solidFill>
+                  <a:srgbClr val="000000"/>
+                </a:solidFill>
+                <a:latin typeface="맑은 고딕"/>
+                <a:ea typeface="맑은 고딕"/>
+                <a:cs typeface="맑은 고딕"/>
+              </a:rPr>
+              <a:t>- 바로퀵 매출 197%↑(6월) → 수요 실증</a:t>
+            </a:r>
+          </a:p>
+        </p:txBody>
+      </p:sp>
+      <p:sp>
+        <p:nvSpPr>
+          <p:cNvPr id="10" name="TextBox 9"/>
+          <p:cNvSpPr txBox="1"/>
+          <p:nvPr/>
+        </p:nvSpPr>
+        <p:spPr>
+          <a:xfrm>
+            <a:off x="424800" y="2800800"/>
+            <a:ext cx="4410000" cy="273600"/>
+          </a:xfrm>
+          <a:prstGeom prst="rect">
+            <a:avLst/>
+          </a:prstGeom>
+          <a:noFill/>
+        </p:spPr>
+        <p:txBody>
+          <a:bodyPr wrap="square" anchor="t" lIns="0" rIns="0" tIns="0" bIns="0">
+            <a:spAutoFit/>
+          </a:bodyPr>
+          <a:lstStyle/>
+          <a:p>
+            <a:pPr algn="l"/>
+            <a:r>
+              <a:rPr sz="1200" b="1">
+                <a:solidFill>
+                  <a:srgbClr val="000000"/>
+                </a:solidFill>
+                <a:latin typeface="맑은 고딕"/>
+                <a:ea typeface="맑은 고딕"/>
+                <a:cs typeface="맑은 고딕"/>
+              </a:rPr>
+              <a:t>• 현행 배송 체계의 한계</a:t>
+            </a:r>
+          </a:p>
+        </p:txBody>
+      </p:sp>
       <p:graphicFrame>
         <p:nvGraphicFramePr>
-          <p:cNvPr id="5" name="Table 4"/>
+          <p:cNvPr id="11" name="Table 10"/>
           <p:cNvGraphicFramePr>
             <a:graphicFrameLocks noGrp="1"/>
           </p:cNvGraphicFramePr>
           <p:nvPr/>
         </p:nvGraphicFramePr>
         <p:xfrm>
-          <a:off x="424800" y="1475999"/>
-          <a:ext cx="9057600" cy="2592000"/>
+          <a:off x="424800" y="3074399"/>
+          <a:ext cx="4409999" cy="1728000"/>
         </p:xfrm>
         <a:graphic>
           <a:graphicData uri="http://schemas.openxmlformats.org/drawingml/2006/table">
@@ -3229,13 +3449,11 @@
                 <a:tableStyleId>{5C22544A-7EE6-4342-B048-85BDC9FD1C3A}</a:tableStyleId>
               </a:tblPr>
               <a:tblGrid>
-                <a:gridCol w="1404000"/>
-                <a:gridCol w="1908000"/>
-                <a:gridCol w="900000"/>
-                <a:gridCol w="1296000"/>
-                <a:gridCol w="3549600"/>
+                <a:gridCol w="1152000"/>
+                <a:gridCol w="1512000"/>
+                <a:gridCol w="1745999"/>
               </a:tblGrid>
-              <a:tr h="432000">
+              <a:tr h="345600">
                 <a:tc>
                   <a:txBody>
                     <a:bodyPr wrap="square"/>
@@ -3296,97 +3514,7 @@
                           <a:ea typeface="맑은 고딕"/>
                           <a:cs typeface="맑은 고딕"/>
                         </a:rPr>
-                        <a:t>배송 속도</a:t>
-                      </a:r>
-                    </a:p>
-                  </a:txBody>
-                  <a:tcPr anchor="ctr" marL="36000" marR="36000" marT="0" marB="0">
-                    <a:lnL w="9525" cap="flat">
-                      <a:solidFill>
-                        <a:srgbClr val="BFBFBF"/>
-                      </a:solidFill>
-                    </a:lnL>
-                    <a:lnR w="9525" cap="flat">
-                      <a:solidFill>
-                        <a:srgbClr val="BFBFBF"/>
-                      </a:solidFill>
-                    </a:lnR>
-                    <a:lnT w="9525" cap="flat">
-                      <a:solidFill>
-                        <a:srgbClr val="BFBFBF"/>
-                      </a:solidFill>
-                    </a:lnT>
-                    <a:lnB w="9525" cap="flat">
-                      <a:solidFill>
-                        <a:srgbClr val="BFBFBF"/>
-                      </a:solidFill>
-                    </a:lnB>
-                    <a:solidFill>
-                      <a:srgbClr val="EAEEF6"/>
-                    </a:solidFill>
-                  </a:tcPr>
-                </a:tc>
-                <a:tc>
-                  <a:txBody>
-                    <a:bodyPr wrap="square"/>
-                    <a:lstStyle/>
-                    <a:p>
-                      <a:pPr algn="ctr"/>
-                      <a:r>
-                        <a:rPr sz="1000" b="1">
-                          <a:solidFill>
-                            <a:srgbClr val="000000"/>
-                          </a:solidFill>
-                          <a:latin typeface="맑은 고딕"/>
-                          <a:ea typeface="맑은 고딕"/>
-                          <a:cs typeface="맑은 고딕"/>
-                        </a:rPr>
-                        <a:t>운송 수단</a:t>
-                      </a:r>
-                    </a:p>
-                  </a:txBody>
-                  <a:tcPr anchor="ctr" marL="36000" marR="36000" marT="0" marB="0">
-                    <a:lnL w="9525" cap="flat">
-                      <a:solidFill>
-                        <a:srgbClr val="BFBFBF"/>
-                      </a:solidFill>
-                    </a:lnL>
-                    <a:lnR w="9525" cap="flat">
-                      <a:solidFill>
-                        <a:srgbClr val="BFBFBF"/>
-                      </a:solidFill>
-                    </a:lnR>
-                    <a:lnT w="9525" cap="flat">
-                      <a:solidFill>
-                        <a:srgbClr val="BFBFBF"/>
-                      </a:solidFill>
-                    </a:lnT>
-                    <a:lnB w="9525" cap="flat">
-                      <a:solidFill>
-                        <a:srgbClr val="BFBFBF"/>
-                      </a:solidFill>
-                    </a:lnB>
-                    <a:solidFill>
-                      <a:srgbClr val="EAEEF6"/>
-                    </a:solidFill>
-                  </a:tcPr>
-                </a:tc>
-                <a:tc>
-                  <a:txBody>
-                    <a:bodyPr wrap="square"/>
-                    <a:lstStyle/>
-                    <a:p>
-                      <a:pPr algn="ctr"/>
-                      <a:r>
-                        <a:rPr sz="1000" b="1">
-                          <a:solidFill>
-                            <a:srgbClr val="000000"/>
-                          </a:solidFill>
-                          <a:latin typeface="맑은 고딕"/>
-                          <a:ea typeface="맑은 고딕"/>
-                          <a:cs typeface="맑은 고딕"/>
-                        </a:rPr>
-                        <a:t>취급 품목</a:t>
+                        <a:t>속도 · 수단</a:t>
                       </a:r>
                     </a:p>
                   </a:txBody>
@@ -3462,7 +3590,7 @@
                   </a:tcPr>
                 </a:tc>
               </a:tr>
-              <a:tr h="432000">
+              <a:tr h="345600">
                 <a:tc>
                   <a:txBody>
                     <a:bodyPr wrap="square"/>
@@ -3523,97 +3651,7 @@
                           <a:ea typeface="맑은 고딕"/>
                           <a:cs typeface="맑은 고딕"/>
                         </a:rPr>
-                        <a:t>예약배송 (4~5시간)</a:t>
-                      </a:r>
-                    </a:p>
-                  </a:txBody>
-                  <a:tcPr anchor="ctr" marL="36000" marR="36000" marT="0" marB="0">
-                    <a:lnL w="9525" cap="flat">
-                      <a:solidFill>
-                        <a:srgbClr val="BFBFBF"/>
-                      </a:solidFill>
-                    </a:lnL>
-                    <a:lnR w="9525" cap="flat">
-                      <a:solidFill>
-                        <a:srgbClr val="BFBFBF"/>
-                      </a:solidFill>
-                    </a:lnR>
-                    <a:lnT w="9525" cap="flat">
-                      <a:solidFill>
-                        <a:srgbClr val="BFBFBF"/>
-                      </a:solidFill>
-                    </a:lnT>
-                    <a:lnB w="9525" cap="flat">
-                      <a:solidFill>
-                        <a:srgbClr val="BFBFBF"/>
-                      </a:solidFill>
-                    </a:lnB>
-                    <a:solidFill>
-                      <a:srgbClr val="FFFFFF"/>
-                    </a:solidFill>
-                  </a:tcPr>
-                </a:tc>
-                <a:tc>
-                  <a:txBody>
-                    <a:bodyPr wrap="square"/>
-                    <a:lstStyle/>
-                    <a:p>
-                      <a:pPr algn="ctr"/>
-                      <a:r>
-                        <a:rPr sz="1000" b="0">
-                          <a:solidFill>
-                            <a:srgbClr val="000000"/>
-                          </a:solidFill>
-                          <a:latin typeface="맑은 고딕"/>
-                          <a:ea typeface="맑은 고딕"/>
-                          <a:cs typeface="맑은 고딕"/>
-                        </a:rPr>
-                        <a:t>사륜차</a:t>
-                      </a:r>
-                    </a:p>
-                  </a:txBody>
-                  <a:tcPr anchor="ctr" marL="36000" marR="36000" marT="0" marB="0">
-                    <a:lnL w="9525" cap="flat">
-                      <a:solidFill>
-                        <a:srgbClr val="BFBFBF"/>
-                      </a:solidFill>
-                    </a:lnL>
-                    <a:lnR w="9525" cap="flat">
-                      <a:solidFill>
-                        <a:srgbClr val="BFBFBF"/>
-                      </a:solidFill>
-                    </a:lnR>
-                    <a:lnT w="9525" cap="flat">
-                      <a:solidFill>
-                        <a:srgbClr val="BFBFBF"/>
-                      </a:solidFill>
-                    </a:lnT>
-                    <a:lnB w="9525" cap="flat">
-                      <a:solidFill>
-                        <a:srgbClr val="BFBFBF"/>
-                      </a:solidFill>
-                    </a:lnB>
-                    <a:solidFill>
-                      <a:srgbClr val="FFFFFF"/>
-                    </a:solidFill>
-                  </a:tcPr>
-                </a:tc>
-                <a:tc>
-                  <a:txBody>
-                    <a:bodyPr wrap="square"/>
-                    <a:lstStyle/>
-                    <a:p>
-                      <a:pPr algn="ctr"/>
-                      <a:r>
-                        <a:rPr sz="1000" b="0">
-                          <a:solidFill>
-                            <a:srgbClr val="000000"/>
-                          </a:solidFill>
-                          <a:latin typeface="맑은 고딕"/>
-                          <a:ea typeface="맑은 고딕"/>
-                          <a:cs typeface="맑은 고딕"/>
-                        </a:rPr>
-                        <a:t>점포 상품</a:t>
+                        <a:t>예약 4~5시간 · 사륜</a:t>
                       </a:r>
                     </a:p>
                   </a:txBody>
@@ -3689,7 +3727,7 @@
                   </a:tcPr>
                 </a:tc>
               </a:tr>
-              <a:tr h="432000">
+              <a:tr h="345600">
                 <a:tc>
                   <a:txBody>
                     <a:bodyPr wrap="square"/>
@@ -3750,7 +3788,7 @@
                           <a:ea typeface="맑은 고딕"/>
                           <a:cs typeface="맑은 고딕"/>
                         </a:rPr>
-                        <a:t>새벽 시간대</a:t>
+                        <a:t>새벽 · 사륜</a:t>
                       </a:r>
                     </a:p>
                   </a:txBody>
@@ -3795,7 +3833,54 @@
                           <a:ea typeface="맑은 고딕"/>
                           <a:cs typeface="맑은 고딕"/>
                         </a:rPr>
-                        <a:t>사륜차</a:t>
+                        <a:t>네오 한정</a:t>
+                      </a:r>
+                    </a:p>
+                  </a:txBody>
+                  <a:tcPr anchor="ctr" marL="36000" marR="36000" marT="0" marB="0">
+                    <a:lnL w="9525" cap="flat">
+                      <a:solidFill>
+                        <a:srgbClr val="BFBFBF"/>
+                      </a:solidFill>
+                    </a:lnL>
+                    <a:lnR w="9525" cap="flat">
+                      <a:solidFill>
+                        <a:srgbClr val="BFBFBF"/>
+                      </a:solidFill>
+                    </a:lnR>
+                    <a:lnT w="9525" cap="flat">
+                      <a:solidFill>
+                        <a:srgbClr val="BFBFBF"/>
+                      </a:solidFill>
+                    </a:lnT>
+                    <a:lnB w="9525" cap="flat">
+                      <a:solidFill>
+                        <a:srgbClr val="BFBFBF"/>
+                      </a:solidFill>
+                    </a:lnB>
+                    <a:solidFill>
+                      <a:srgbClr val="FFFFFF"/>
+                    </a:solidFill>
+                  </a:tcPr>
+                </a:tc>
+              </a:tr>
+              <a:tr h="345600">
+                <a:tc>
+                  <a:txBody>
+                    <a:bodyPr wrap="square"/>
+                    <a:lstStyle/>
+                    <a:p>
+                      <a:pPr algn="ctr"/>
+                      <a:r>
+                        <a:rPr sz="1000" b="1">
+                          <a:solidFill>
+                            <a:srgbClr val="000000"/>
+                          </a:solidFill>
+                          <a:latin typeface="맑은 고딕"/>
+                          <a:ea typeface="맑은 고딕"/>
+                          <a:cs typeface="맑은 고딕"/>
+                        </a:rPr>
+                        <a:t>트레이더스배송</a:t>
                       </a:r>
                     </a:p>
                   </a:txBody>
@@ -3840,234 +3925,7 @@
                           <a:ea typeface="맑은 고딕"/>
                           <a:cs typeface="맑은 고딕"/>
                         </a:rPr>
-                        <a:t>네오 상품</a:t>
-                      </a:r>
-                    </a:p>
-                  </a:txBody>
-                  <a:tcPr anchor="ctr" marL="36000" marR="36000" marT="0" marB="0">
-                    <a:lnL w="9525" cap="flat">
-                      <a:solidFill>
-                        <a:srgbClr val="BFBFBF"/>
-                      </a:solidFill>
-                    </a:lnL>
-                    <a:lnR w="9525" cap="flat">
-                      <a:solidFill>
-                        <a:srgbClr val="BFBFBF"/>
-                      </a:solidFill>
-                    </a:lnR>
-                    <a:lnT w="9525" cap="flat">
-                      <a:solidFill>
-                        <a:srgbClr val="BFBFBF"/>
-                      </a:solidFill>
-                    </a:lnT>
-                    <a:lnB w="9525" cap="flat">
-                      <a:solidFill>
-                        <a:srgbClr val="BFBFBF"/>
-                      </a:solidFill>
-                    </a:lnB>
-                    <a:solidFill>
-                      <a:srgbClr val="FFFFFF"/>
-                    </a:solidFill>
-                  </a:tcPr>
-                </a:tc>
-                <a:tc>
-                  <a:txBody>
-                    <a:bodyPr wrap="square"/>
-                    <a:lstStyle/>
-                    <a:p>
-                      <a:pPr algn="ctr"/>
-                      <a:r>
-                        <a:rPr sz="1000" b="0">
-                          <a:solidFill>
-                            <a:srgbClr val="000000"/>
-                          </a:solidFill>
-                          <a:latin typeface="맑은 고딕"/>
-                          <a:ea typeface="맑은 고딕"/>
-                          <a:cs typeface="맑은 고딕"/>
-                        </a:rPr>
-                        <a:t>네오 한정 (PP센터 불가)</a:t>
-                      </a:r>
-                    </a:p>
-                  </a:txBody>
-                  <a:tcPr anchor="ctr" marL="36000" marR="36000" marT="0" marB="0">
-                    <a:lnL w="9525" cap="flat">
-                      <a:solidFill>
-                        <a:srgbClr val="BFBFBF"/>
-                      </a:solidFill>
-                    </a:lnL>
-                    <a:lnR w="9525" cap="flat">
-                      <a:solidFill>
-                        <a:srgbClr val="BFBFBF"/>
-                      </a:solidFill>
-                    </a:lnR>
-                    <a:lnT w="9525" cap="flat">
-                      <a:solidFill>
-                        <a:srgbClr val="BFBFBF"/>
-                      </a:solidFill>
-                    </a:lnT>
-                    <a:lnB w="9525" cap="flat">
-                      <a:solidFill>
-                        <a:srgbClr val="BFBFBF"/>
-                      </a:solidFill>
-                    </a:lnB>
-                    <a:solidFill>
-                      <a:srgbClr val="FFFFFF"/>
-                    </a:solidFill>
-                  </a:tcPr>
-                </a:tc>
-              </a:tr>
-              <a:tr h="432000">
-                <a:tc>
-                  <a:txBody>
-                    <a:bodyPr wrap="square"/>
-                    <a:lstStyle/>
-                    <a:p>
-                      <a:pPr algn="ctr"/>
-                      <a:r>
-                        <a:rPr sz="1000" b="1">
-                          <a:solidFill>
-                            <a:srgbClr val="000000"/>
-                          </a:solidFill>
-                          <a:latin typeface="맑은 고딕"/>
-                          <a:ea typeface="맑은 고딕"/>
-                          <a:cs typeface="맑은 고딕"/>
-                        </a:rPr>
-                        <a:t>트레이더스배송</a:t>
-                      </a:r>
-                    </a:p>
-                  </a:txBody>
-                  <a:tcPr anchor="ctr" marL="36000" marR="36000" marT="0" marB="0">
-                    <a:lnL w="9525" cap="flat">
-                      <a:solidFill>
-                        <a:srgbClr val="BFBFBF"/>
-                      </a:solidFill>
-                    </a:lnL>
-                    <a:lnR w="9525" cap="flat">
-                      <a:solidFill>
-                        <a:srgbClr val="BFBFBF"/>
-                      </a:solidFill>
-                    </a:lnR>
-                    <a:lnT w="9525" cap="flat">
-                      <a:solidFill>
-                        <a:srgbClr val="BFBFBF"/>
-                      </a:solidFill>
-                    </a:lnT>
-                    <a:lnB w="9525" cap="flat">
-                      <a:solidFill>
-                        <a:srgbClr val="BFBFBF"/>
-                      </a:solidFill>
-                    </a:lnB>
-                    <a:solidFill>
-                      <a:srgbClr val="FFFFFF"/>
-                    </a:solidFill>
-                  </a:tcPr>
-                </a:tc>
-                <a:tc>
-                  <a:txBody>
-                    <a:bodyPr wrap="square"/>
-                    <a:lstStyle/>
-                    <a:p>
-                      <a:pPr algn="ctr"/>
-                      <a:r>
-                        <a:rPr sz="1000" b="0">
-                          <a:solidFill>
-                            <a:srgbClr val="000000"/>
-                          </a:solidFill>
-                          <a:latin typeface="맑은 고딕"/>
-                          <a:ea typeface="맑은 고딕"/>
-                          <a:cs typeface="맑은 고딕"/>
-                        </a:rPr>
-                        <a:t>예약배송</a:t>
-                      </a:r>
-                    </a:p>
-                  </a:txBody>
-                  <a:tcPr anchor="ctr" marL="36000" marR="36000" marT="0" marB="0">
-                    <a:lnL w="9525" cap="flat">
-                      <a:solidFill>
-                        <a:srgbClr val="BFBFBF"/>
-                      </a:solidFill>
-                    </a:lnL>
-                    <a:lnR w="9525" cap="flat">
-                      <a:solidFill>
-                        <a:srgbClr val="BFBFBF"/>
-                      </a:solidFill>
-                    </a:lnR>
-                    <a:lnT w="9525" cap="flat">
-                      <a:solidFill>
-                        <a:srgbClr val="BFBFBF"/>
-                      </a:solidFill>
-                    </a:lnT>
-                    <a:lnB w="9525" cap="flat">
-                      <a:solidFill>
-                        <a:srgbClr val="BFBFBF"/>
-                      </a:solidFill>
-                    </a:lnB>
-                    <a:solidFill>
-                      <a:srgbClr val="FFFFFF"/>
-                    </a:solidFill>
-                  </a:tcPr>
-                </a:tc>
-                <a:tc>
-                  <a:txBody>
-                    <a:bodyPr wrap="square"/>
-                    <a:lstStyle/>
-                    <a:p>
-                      <a:pPr algn="ctr"/>
-                      <a:r>
-                        <a:rPr sz="1000" b="0">
-                          <a:solidFill>
-                            <a:srgbClr val="000000"/>
-                          </a:solidFill>
-                          <a:latin typeface="맑은 고딕"/>
-                          <a:ea typeface="맑은 고딕"/>
-                          <a:cs typeface="맑은 고딕"/>
-                        </a:rPr>
-                        <a:t>사륜차</a:t>
-                      </a:r>
-                    </a:p>
-                  </a:txBody>
-                  <a:tcPr anchor="ctr" marL="36000" marR="36000" marT="0" marB="0">
-                    <a:lnL w="9525" cap="flat">
-                      <a:solidFill>
-                        <a:srgbClr val="BFBFBF"/>
-                      </a:solidFill>
-                    </a:lnL>
-                    <a:lnR w="9525" cap="flat">
-                      <a:solidFill>
-                        <a:srgbClr val="BFBFBF"/>
-                      </a:solidFill>
-                    </a:lnR>
-                    <a:lnT w="9525" cap="flat">
-                      <a:solidFill>
-                        <a:srgbClr val="BFBFBF"/>
-                      </a:solidFill>
-                    </a:lnT>
-                    <a:lnB w="9525" cap="flat">
-                      <a:solidFill>
-                        <a:srgbClr val="BFBFBF"/>
-                      </a:solidFill>
-                    </a:lnB>
-                    <a:solidFill>
-                      <a:srgbClr val="FFFFFF"/>
-                    </a:solidFill>
-                  </a:tcPr>
-                </a:tc>
-                <a:tc>
-                  <a:txBody>
-                    <a:bodyPr wrap="square"/>
-                    <a:lstStyle/>
-                    <a:p>
-                      <a:pPr algn="ctr"/>
-                      <a:r>
-                        <a:rPr sz="1000" b="0">
-                          <a:solidFill>
-                            <a:srgbClr val="000000"/>
-                          </a:solidFill>
-                          <a:latin typeface="맑은 고딕"/>
-                          <a:ea typeface="맑은 고딕"/>
-                          <a:cs typeface="맑은 고딕"/>
-                        </a:rPr>
-                        <a:t>트레이더스 상품</a:t>
+                        <a:t>예약 · 사륜</a:t>
                       </a:r>
                     </a:p>
                   </a:txBody>
@@ -4143,7 +4001,7 @@
                   </a:tcPr>
                 </a:tc>
               </a:tr>
-              <a:tr h="432000">
+              <a:tr h="345600">
                 <a:tc>
                   <a:txBody>
                     <a:bodyPr wrap="square"/>
@@ -4204,7 +4062,7 @@
                           <a:ea typeface="맑은 고딕"/>
                           <a:cs typeface="맑은 고딕"/>
                         </a:rPr>
-                        <a:t>1시간 내 (3km)</a:t>
+                        <a:t>1시간 · 이륜</a:t>
                       </a:r>
                     </a:p>
                   </a:txBody>
@@ -4249,7 +4107,577 @@
                           <a:ea typeface="맑은 고딕"/>
                           <a:cs typeface="맑은 고딕"/>
                         </a:rPr>
-                        <a:t>이륜차</a:t>
+                        <a:t>소량, 약 1만 종</a:t>
+                      </a:r>
+                    </a:p>
+                  </a:txBody>
+                  <a:tcPr anchor="ctr" marL="36000" marR="36000" marT="0" marB="0">
+                    <a:lnL w="9525" cap="flat">
+                      <a:solidFill>
+                        <a:srgbClr val="BFBFBF"/>
+                      </a:solidFill>
+                    </a:lnL>
+                    <a:lnR w="9525" cap="flat">
+                      <a:solidFill>
+                        <a:srgbClr val="BFBFBF"/>
+                      </a:solidFill>
+                    </a:lnR>
+                    <a:lnT w="9525" cap="flat">
+                      <a:solidFill>
+                        <a:srgbClr val="BFBFBF"/>
+                      </a:solidFill>
+                    </a:lnT>
+                    <a:lnB w="9525" cap="flat">
+                      <a:solidFill>
+                        <a:srgbClr val="BFBFBF"/>
+                      </a:solidFill>
+                    </a:lnB>
+                    <a:solidFill>
+                      <a:srgbClr val="FFFFFF"/>
+                    </a:solidFill>
+                  </a:tcPr>
+                </a:tc>
+              </a:tr>
+            </a:tbl>
+          </a:graphicData>
+        </a:graphic>
+      </p:graphicFrame>
+      <p:sp>
+        <p:nvSpPr>
+          <p:cNvPr id="12" name="TextBox 11"/>
+          <p:cNvSpPr txBox="1"/>
+          <p:nvPr/>
+        </p:nvSpPr>
+        <p:spPr>
+          <a:xfrm>
+            <a:off x="424800" y="4982400"/>
+            <a:ext cx="4410000" cy="273600"/>
+          </a:xfrm>
+          <a:prstGeom prst="rect">
+            <a:avLst/>
+          </a:prstGeom>
+          <a:noFill/>
+        </p:spPr>
+        <p:txBody>
+          <a:bodyPr wrap="square" anchor="t" lIns="0" rIns="0" tIns="0" bIns="0">
+            <a:spAutoFit/>
+          </a:bodyPr>
+          <a:lstStyle/>
+          <a:p>
+            <a:pPr algn="l"/>
+            <a:r>
+              <a:rPr sz="1200" b="1">
+                <a:solidFill>
+                  <a:srgbClr val="000000"/>
+                </a:solidFill>
+                <a:latin typeface="맑은 고딕"/>
+                <a:ea typeface="맑은 고딕"/>
+                <a:cs typeface="맑은 고딕"/>
+              </a:rPr>
+              <a:t>• 규제 제약</a:t>
+            </a:r>
+          </a:p>
+        </p:txBody>
+      </p:sp>
+      <p:sp>
+        <p:nvSpPr>
+          <p:cNvPr id="13" name="TextBox 12"/>
+          <p:cNvSpPr txBox="1"/>
+          <p:nvPr/>
+        </p:nvSpPr>
+        <p:spPr>
+          <a:xfrm>
+            <a:off x="622800" y="5256000"/>
+            <a:ext cx="4212000" cy="273600"/>
+          </a:xfrm>
+          <a:prstGeom prst="rect">
+            <a:avLst/>
+          </a:prstGeom>
+          <a:noFill/>
+        </p:spPr>
+        <p:txBody>
+          <a:bodyPr wrap="square" anchor="t" lIns="0" rIns="0" tIns="0" bIns="0">
+            <a:spAutoFit/>
+          </a:bodyPr>
+          <a:lstStyle/>
+          <a:p>
+            <a:pPr algn="l"/>
+            <a:r>
+              <a:rPr sz="1100" b="0">
+                <a:solidFill>
+                  <a:srgbClr val="000000"/>
+                </a:solidFill>
+                <a:latin typeface="맑은 고딕"/>
+                <a:ea typeface="맑은 고딕"/>
+                <a:cs typeface="맑은 고딕"/>
+              </a:rPr>
+              <a:t>- 유통산업발전법 → PP센터 새벽배송 불가</a:t>
+            </a:r>
+          </a:p>
+        </p:txBody>
+      </p:sp>
+      <p:sp>
+        <p:nvSpPr>
+          <p:cNvPr id="14" name="TextBox 13"/>
+          <p:cNvSpPr txBox="1"/>
+          <p:nvPr/>
+        </p:nvSpPr>
+        <p:spPr>
+          <a:xfrm>
+            <a:off x="5072400" y="1475999"/>
+            <a:ext cx="4410000" cy="198000"/>
+          </a:xfrm>
+          <a:prstGeom prst="rect">
+            <a:avLst/>
+          </a:prstGeom>
+          <a:noFill/>
+        </p:spPr>
+        <p:txBody>
+          <a:bodyPr wrap="square" anchor="t" lIns="0" rIns="0" tIns="0" bIns="0">
+            <a:spAutoFit/>
+          </a:bodyPr>
+          <a:lstStyle/>
+          <a:p>
+            <a:pPr algn="ctr"/>
+            <a:r>
+              <a:rPr sz="1200" b="1">
+                <a:solidFill>
+                  <a:srgbClr val="000000"/>
+                </a:solidFill>
+                <a:latin typeface="맑은 고딕"/>
+                <a:ea typeface="맑은 고딕"/>
+                <a:cs typeface="맑은 고딕"/>
+              </a:rPr>
+              <a:t>추진 방안 : '2시간 배송'</a:t>
+            </a:r>
+          </a:p>
+        </p:txBody>
+      </p:sp>
+      <p:cxnSp>
+        <p:nvCxnSpPr>
+          <p:cNvPr id="15" name="Connector 14"/>
+          <p:cNvCxnSpPr/>
+          <p:nvPr/>
+        </p:nvCxnSpPr>
+        <p:spPr>
+          <a:xfrm>
+            <a:off x="5072400" y="1699200"/>
+            <a:ext cx="4410000" cy="0"/>
+          </a:xfrm>
+          <a:prstGeom prst="bentConnector3">
+            <a:avLst/>
+          </a:prstGeom>
+          <a:ln w="19050">
+            <a:solidFill>
+              <a:srgbClr val="000000"/>
+            </a:solidFill>
+          </a:ln>
+        </p:spPr>
+        <p:style>
+          <a:lnRef idx="2">
+            <a:schemeClr val="accent1"/>
+          </a:lnRef>
+          <a:fillRef idx="0">
+            <a:schemeClr val="accent1"/>
+          </a:fillRef>
+          <a:effectRef idx="1">
+            <a:schemeClr val="accent1"/>
+          </a:effectRef>
+          <a:fontRef idx="minor">
+            <a:schemeClr val="tx1"/>
+          </a:fontRef>
+        </p:style>
+      </p:cxnSp>
+      <p:sp>
+        <p:nvSpPr>
+          <p:cNvPr id="16" name="TextBox 15"/>
+          <p:cNvSpPr txBox="1"/>
+          <p:nvPr/>
+        </p:nvSpPr>
+        <p:spPr>
+          <a:xfrm>
+            <a:off x="5072400" y="1800000"/>
+            <a:ext cx="4410000" cy="273600"/>
+          </a:xfrm>
+          <a:prstGeom prst="rect">
+            <a:avLst/>
+          </a:prstGeom>
+          <a:noFill/>
+        </p:spPr>
+        <p:txBody>
+          <a:bodyPr wrap="square" anchor="t" lIns="0" rIns="0" tIns="0" bIns="0">
+            <a:spAutoFit/>
+          </a:bodyPr>
+          <a:lstStyle/>
+          <a:p>
+            <a:pPr algn="l"/>
+            <a:r>
+              <a:rPr sz="1200" b="1">
+                <a:solidFill>
+                  <a:srgbClr val="000000"/>
+                </a:solidFill>
+                <a:latin typeface="맑은 고딕"/>
+                <a:ea typeface="맑은 고딕"/>
+                <a:cs typeface="맑은 고딕"/>
+              </a:rPr>
+              <a:t>• 시범 운영 ('26. 7. 9.~)</a:t>
+            </a:r>
+          </a:p>
+        </p:txBody>
+      </p:sp>
+      <p:sp>
+        <p:nvSpPr>
+          <p:cNvPr id="17" name="TextBox 16"/>
+          <p:cNvSpPr txBox="1"/>
+          <p:nvPr/>
+        </p:nvSpPr>
+        <p:spPr>
+          <a:xfrm>
+            <a:off x="5270400" y="2073600"/>
+            <a:ext cx="4212000" cy="273600"/>
+          </a:xfrm>
+          <a:prstGeom prst="rect">
+            <a:avLst/>
+          </a:prstGeom>
+          <a:noFill/>
+        </p:spPr>
+        <p:txBody>
+          <a:bodyPr wrap="square" anchor="t" lIns="0" rIns="0" tIns="0" bIns="0">
+            <a:spAutoFit/>
+          </a:bodyPr>
+          <a:lstStyle/>
+          <a:p>
+            <a:pPr algn="l"/>
+            <a:r>
+              <a:rPr sz="1100" b="0">
+                <a:solidFill>
+                  <a:srgbClr val="000000"/>
+                </a:solidFill>
+                <a:latin typeface="맑은 고딕"/>
+                <a:ea typeface="맑은 고딕"/>
+                <a:cs typeface="맑은 고딕"/>
+              </a:rPr>
+              <a:t>- 20시 주문 마감 → 2시간 내 배송</a:t>
+            </a:r>
+          </a:p>
+        </p:txBody>
+      </p:sp>
+      <p:sp>
+        <p:nvSpPr>
+          <p:cNvPr id="18" name="TextBox 17"/>
+          <p:cNvSpPr txBox="1"/>
+          <p:nvPr/>
+        </p:nvSpPr>
+        <p:spPr>
+          <a:xfrm>
+            <a:off x="5270400" y="2347200"/>
+            <a:ext cx="4212000" cy="273600"/>
+          </a:xfrm>
+          <a:prstGeom prst="rect">
+            <a:avLst/>
+          </a:prstGeom>
+          <a:noFill/>
+        </p:spPr>
+        <p:txBody>
+          <a:bodyPr wrap="square" anchor="t" lIns="0" rIns="0" tIns="0" bIns="0">
+            <a:spAutoFit/>
+          </a:bodyPr>
+          <a:lstStyle/>
+          <a:p>
+            <a:pPr algn="l"/>
+            <a:r>
+              <a:rPr sz="1100" b="0">
+                <a:solidFill>
+                  <a:srgbClr val="000000"/>
+                </a:solidFill>
+                <a:latin typeface="맑은 고딕"/>
+                <a:ea typeface="맑은 고딕"/>
+                <a:cs typeface="맑은 고딕"/>
+              </a:rPr>
+              <a:t>- 사륜차 대용량, 점포 15만 종 기반</a:t>
+            </a:r>
+          </a:p>
+        </p:txBody>
+      </p:sp>
+      <p:sp>
+        <p:nvSpPr>
+          <p:cNvPr id="19" name="TextBox 18"/>
+          <p:cNvSpPr txBox="1"/>
+          <p:nvPr/>
+        </p:nvSpPr>
+        <p:spPr>
+          <a:xfrm>
+            <a:off x="5072400" y="2800800"/>
+            <a:ext cx="4410000" cy="273600"/>
+          </a:xfrm>
+          <a:prstGeom prst="rect">
+            <a:avLst/>
+          </a:prstGeom>
+          <a:noFill/>
+        </p:spPr>
+        <p:txBody>
+          <a:bodyPr wrap="square" anchor="t" lIns="0" rIns="0" tIns="0" bIns="0">
+            <a:spAutoFit/>
+          </a:bodyPr>
+          <a:lstStyle/>
+          <a:p>
+            <a:pPr algn="l"/>
+            <a:r>
+              <a:rPr sz="1200" b="1">
+                <a:solidFill>
+                  <a:srgbClr val="000000"/>
+                </a:solidFill>
+                <a:latin typeface="맑은 고딕"/>
+                <a:ea typeface="맑은 고딕"/>
+                <a:cs typeface="맑은 고딕"/>
+              </a:rPr>
+              <a:t>• 기대 효과</a:t>
+            </a:r>
+          </a:p>
+        </p:txBody>
+      </p:sp>
+      <p:sp>
+        <p:nvSpPr>
+          <p:cNvPr id="20" name="TextBox 19"/>
+          <p:cNvSpPr txBox="1"/>
+          <p:nvPr/>
+        </p:nvSpPr>
+        <p:spPr>
+          <a:xfrm>
+            <a:off x="5270400" y="3074399"/>
+            <a:ext cx="4212000" cy="273600"/>
+          </a:xfrm>
+          <a:prstGeom prst="rect">
+            <a:avLst/>
+          </a:prstGeom>
+          <a:noFill/>
+        </p:spPr>
+        <p:txBody>
+          <a:bodyPr wrap="square" anchor="t" lIns="0" rIns="0" tIns="0" bIns="0">
+            <a:spAutoFit/>
+          </a:bodyPr>
+          <a:lstStyle/>
+          <a:p>
+            <a:pPr algn="l"/>
+            <a:r>
+              <a:rPr sz="1100" b="0">
+                <a:solidFill>
+                  <a:srgbClr val="000000"/>
+                </a:solidFill>
+                <a:latin typeface="맑은 고딕"/>
+                <a:ea typeface="맑은 고딕"/>
+                <a:cs typeface="맑은 고딕"/>
+              </a:rPr>
+              <a:t>- 대용량 즉시배송 공백 흡수</a:t>
+            </a:r>
+          </a:p>
+        </p:txBody>
+      </p:sp>
+      <p:sp>
+        <p:nvSpPr>
+          <p:cNvPr id="21" name="TextBox 20"/>
+          <p:cNvSpPr txBox="1"/>
+          <p:nvPr/>
+        </p:nvSpPr>
+        <p:spPr>
+          <a:xfrm>
+            <a:off x="5270400" y="3347999"/>
+            <a:ext cx="4212000" cy="273600"/>
+          </a:xfrm>
+          <a:prstGeom prst="rect">
+            <a:avLst/>
+          </a:prstGeom>
+          <a:noFill/>
+        </p:spPr>
+        <p:txBody>
+          <a:bodyPr wrap="square" anchor="t" lIns="0" rIns="0" tIns="0" bIns="0">
+            <a:spAutoFit/>
+          </a:bodyPr>
+          <a:lstStyle/>
+          <a:p>
+            <a:pPr algn="l"/>
+            <a:r>
+              <a:rPr sz="1100" b="0">
+                <a:solidFill>
+                  <a:srgbClr val="000000"/>
+                </a:solidFill>
+                <a:latin typeface="맑은 고딕"/>
+                <a:ea typeface="맑은 고딕"/>
+                <a:cs typeface="맑은 고딕"/>
+              </a:rPr>
+              <a:t>- PP센터 낮 시간대 가동률 제고</a:t>
+            </a:r>
+          </a:p>
+        </p:txBody>
+      </p:sp>
+      <p:sp>
+        <p:nvSpPr>
+          <p:cNvPr id="22" name="TextBox 21"/>
+          <p:cNvSpPr txBox="1"/>
+          <p:nvPr/>
+        </p:nvSpPr>
+        <p:spPr>
+          <a:xfrm>
+            <a:off x="5072400" y="3801599"/>
+            <a:ext cx="4410000" cy="273600"/>
+          </a:xfrm>
+          <a:prstGeom prst="rect">
+            <a:avLst/>
+          </a:prstGeom>
+          <a:noFill/>
+        </p:spPr>
+        <p:txBody>
+          <a:bodyPr wrap="square" anchor="t" lIns="0" rIns="0" tIns="0" bIns="0">
+            <a:spAutoFit/>
+          </a:bodyPr>
+          <a:lstStyle/>
+          <a:p>
+            <a:pPr algn="l"/>
+            <a:r>
+              <a:rPr sz="1200" b="1">
+                <a:solidFill>
+                  <a:srgbClr val="000000"/>
+                </a:solidFill>
+                <a:latin typeface="맑은 고딕"/>
+                <a:ea typeface="맑은 고딕"/>
+                <a:cs typeface="맑은 고딕"/>
+              </a:rPr>
+              <a:t>• 확대 로드맵</a:t>
+            </a:r>
+          </a:p>
+        </p:txBody>
+      </p:sp>
+      <p:graphicFrame>
+        <p:nvGraphicFramePr>
+          <p:cNvPr id="23" name="Table 22"/>
+          <p:cNvGraphicFramePr>
+            <a:graphicFrameLocks noGrp="1"/>
+          </p:cNvGraphicFramePr>
+          <p:nvPr/>
+        </p:nvGraphicFramePr>
+        <p:xfrm>
+          <a:off x="5072400" y="4075199"/>
+          <a:ext cx="4410000" cy="1368000"/>
+        </p:xfrm>
+        <a:graphic>
+          <a:graphicData uri="http://schemas.openxmlformats.org/drawingml/2006/table">
+            <a:tbl>
+              <a:tblPr>
+                <a:tableStyleId>{5C22544A-7EE6-4342-B048-85BDC9FD1C3A}</a:tableStyleId>
+              </a:tblPr>
+              <a:tblGrid>
+                <a:gridCol w="1296000"/>
+                <a:gridCol w="3114000"/>
+              </a:tblGrid>
+              <a:tr h="273600">
+                <a:tc>
+                  <a:txBody>
+                    <a:bodyPr wrap="square"/>
+                    <a:lstStyle/>
+                    <a:p>
+                      <a:pPr algn="ctr"/>
+                      <a:r>
+                        <a:rPr sz="1000" b="1">
+                          <a:solidFill>
+                            <a:srgbClr val="000000"/>
+                          </a:solidFill>
+                          <a:latin typeface="맑은 고딕"/>
+                          <a:ea typeface="맑은 고딕"/>
+                          <a:cs typeface="맑은 고딕"/>
+                        </a:rPr>
+                        <a:t>시기</a:t>
+                      </a:r>
+                    </a:p>
+                  </a:txBody>
+                  <a:tcPr anchor="ctr" marL="36000" marR="36000" marT="0" marB="0">
+                    <a:lnL w="9525" cap="flat">
+                      <a:solidFill>
+                        <a:srgbClr val="BFBFBF"/>
+                      </a:solidFill>
+                    </a:lnL>
+                    <a:lnR w="9525" cap="flat">
+                      <a:solidFill>
+                        <a:srgbClr val="BFBFBF"/>
+                      </a:solidFill>
+                    </a:lnR>
+                    <a:lnT w="9525" cap="flat">
+                      <a:solidFill>
+                        <a:srgbClr val="BFBFBF"/>
+                      </a:solidFill>
+                    </a:lnT>
+                    <a:lnB w="9525" cap="flat">
+                      <a:solidFill>
+                        <a:srgbClr val="BFBFBF"/>
+                      </a:solidFill>
+                    </a:lnB>
+                    <a:solidFill>
+                      <a:srgbClr val="EAEEF6"/>
+                    </a:solidFill>
+                  </a:tcPr>
+                </a:tc>
+                <a:tc>
+                  <a:txBody>
+                    <a:bodyPr wrap="square"/>
+                    <a:lstStyle/>
+                    <a:p>
+                      <a:pPr algn="ctr"/>
+                      <a:r>
+                        <a:rPr sz="1000" b="1">
+                          <a:solidFill>
+                            <a:srgbClr val="000000"/>
+                          </a:solidFill>
+                          <a:latin typeface="맑은 고딕"/>
+                          <a:ea typeface="맑은 고딕"/>
+                          <a:cs typeface="맑은 고딕"/>
+                        </a:rPr>
+                        <a:t>계획</a:t>
+                      </a:r>
+                    </a:p>
+                  </a:txBody>
+                  <a:tcPr anchor="ctr" marL="36000" marR="36000" marT="0" marB="0">
+                    <a:lnL w="9525" cap="flat">
+                      <a:solidFill>
+                        <a:srgbClr val="BFBFBF"/>
+                      </a:solidFill>
+                    </a:lnL>
+                    <a:lnR w="9525" cap="flat">
+                      <a:solidFill>
+                        <a:srgbClr val="BFBFBF"/>
+                      </a:solidFill>
+                    </a:lnR>
+                    <a:lnT w="9525" cap="flat">
+                      <a:solidFill>
+                        <a:srgbClr val="BFBFBF"/>
+                      </a:solidFill>
+                    </a:lnT>
+                    <a:lnB w="9525" cap="flat">
+                      <a:solidFill>
+                        <a:srgbClr val="BFBFBF"/>
+                      </a:solidFill>
+                    </a:lnB>
+                    <a:solidFill>
+                      <a:srgbClr val="EAEEF6"/>
+                    </a:solidFill>
+                  </a:tcPr>
+                </a:tc>
+              </a:tr>
+              <a:tr h="273600">
+                <a:tc>
+                  <a:txBody>
+                    <a:bodyPr wrap="square"/>
+                    <a:lstStyle/>
+                    <a:p>
+                      <a:pPr algn="ctr"/>
+                      <a:r>
+                        <a:rPr sz="1000" b="1">
+                          <a:solidFill>
+                            <a:srgbClr val="000000"/>
+                          </a:solidFill>
+                          <a:latin typeface="맑은 고딕"/>
+                          <a:ea typeface="맑은 고딕"/>
+                          <a:cs typeface="맑은 고딕"/>
+                        </a:rPr>
+                        <a:t>'26. 7월</a:t>
                       </a:r>
                     </a:p>
                   </a:txBody>
@@ -4294,7 +4722,54 @@
                           <a:ea typeface="맑은 고딕"/>
                           <a:cs typeface="맑은 고딕"/>
                         </a:rPr>
-                        <a:t>약 1만 종</a:t>
+                        <a:t>양재·하남점 시범 운영</a:t>
+                      </a:r>
+                    </a:p>
+                  </a:txBody>
+                  <a:tcPr anchor="ctr" marL="36000" marR="36000" marT="0" marB="0">
+                    <a:lnL w="9525" cap="flat">
+                      <a:solidFill>
+                        <a:srgbClr val="BFBFBF"/>
+                      </a:solidFill>
+                    </a:lnL>
+                    <a:lnR w="9525" cap="flat">
+                      <a:solidFill>
+                        <a:srgbClr val="BFBFBF"/>
+                      </a:solidFill>
+                    </a:lnR>
+                    <a:lnT w="9525" cap="flat">
+                      <a:solidFill>
+                        <a:srgbClr val="BFBFBF"/>
+                      </a:solidFill>
+                    </a:lnT>
+                    <a:lnB w="9525" cap="flat">
+                      <a:solidFill>
+                        <a:srgbClr val="BFBFBF"/>
+                      </a:solidFill>
+                    </a:lnB>
+                    <a:solidFill>
+                      <a:srgbClr val="FFFFFF"/>
+                    </a:solidFill>
+                  </a:tcPr>
+                </a:tc>
+              </a:tr>
+              <a:tr h="273600">
+                <a:tc>
+                  <a:txBody>
+                    <a:bodyPr wrap="square"/>
+                    <a:lstStyle/>
+                    <a:p>
+                      <a:pPr algn="ctr"/>
+                      <a:r>
+                        <a:rPr sz="1000" b="1">
+                          <a:solidFill>
+                            <a:srgbClr val="000000"/>
+                          </a:solidFill>
+                          <a:latin typeface="맑은 고딕"/>
+                          <a:ea typeface="맑은 고딕"/>
+                          <a:cs typeface="맑은 고딕"/>
+                        </a:rPr>
+                        <a:t>'26. 8월</a:t>
                       </a:r>
                     </a:p>
                   </a:txBody>
@@ -4339,7 +4814,7 @@
                           <a:ea typeface="맑은 고딕"/>
                           <a:cs typeface="맑은 고딕"/>
                         </a:rPr>
-                        <a:t>소량·1~2인 가구</a:t>
+                        <a:t>서울 주요 지역 확대</a:t>
                       </a:r>
                     </a:p>
                   </a:txBody>
@@ -4370,7 +4845,7 @@
                   </a:tcPr>
                 </a:tc>
               </a:tr>
-              <a:tr h="432000">
+              <a:tr h="273600">
                 <a:tc>
                   <a:txBody>
                     <a:bodyPr wrap="square"/>
@@ -4386,7 +4861,7 @@
                           <a:ea typeface="맑은 고딕"/>
                           <a:cs typeface="맑은 고딕"/>
                         </a:rPr>
-                        <a:t>2시간 배송 (신규)</a:t>
+                        <a:t>'26. 9월</a:t>
                       </a:r>
                     </a:p>
                   </a:txBody>
@@ -4431,7 +4906,54 @@
                           <a:ea typeface="맑은 고딕"/>
                           <a:cs typeface="맑은 고딕"/>
                         </a:rPr>
-                        <a:t>2시간 내 (20시 마감)</a:t>
+                        <a:t>전국 확대</a:t>
+                      </a:r>
+                    </a:p>
+                  </a:txBody>
+                  <a:tcPr anchor="ctr" marL="36000" marR="36000" marT="0" marB="0">
+                    <a:lnL w="9525" cap="flat">
+                      <a:solidFill>
+                        <a:srgbClr val="BFBFBF"/>
+                      </a:solidFill>
+                    </a:lnL>
+                    <a:lnR w="9525" cap="flat">
+                      <a:solidFill>
+                        <a:srgbClr val="BFBFBF"/>
+                      </a:solidFill>
+                    </a:lnR>
+                    <a:lnT w="9525" cap="flat">
+                      <a:solidFill>
+                        <a:srgbClr val="BFBFBF"/>
+                      </a:solidFill>
+                    </a:lnT>
+                    <a:lnB w="9525" cap="flat">
+                      <a:solidFill>
+                        <a:srgbClr val="BFBFBF"/>
+                      </a:solidFill>
+                    </a:lnB>
+                    <a:solidFill>
+                      <a:srgbClr val="FFFFFF"/>
+                    </a:solidFill>
+                  </a:tcPr>
+                </a:tc>
+              </a:tr>
+              <a:tr h="273600">
+                <a:tc>
+                  <a:txBody>
+                    <a:bodyPr wrap="square"/>
+                    <a:lstStyle/>
+                    <a:p>
+                      <a:pPr algn="ctr"/>
+                      <a:r>
+                        <a:rPr sz="1000" b="1">
+                          <a:solidFill>
+                            <a:srgbClr val="000000"/>
+                          </a:solidFill>
+                          <a:latin typeface="맑은 고딕"/>
+                          <a:ea typeface="맑은 고딕"/>
+                          <a:cs typeface="맑은 고딕"/>
+                        </a:rPr>
+                        <a:t>'26. 연말</a:t>
                       </a:r>
                     </a:p>
                   </a:txBody>
@@ -4476,97 +4998,7 @@
                           <a:ea typeface="맑은 고딕"/>
                           <a:cs typeface="맑은 고딕"/>
                         </a:rPr>
-                        <a:t>사륜차</a:t>
-                      </a:r>
-                    </a:p>
-                  </a:txBody>
-                  <a:tcPr anchor="ctr" marL="36000" marR="36000" marT="0" marB="0">
-                    <a:lnL w="9525" cap="flat">
-                      <a:solidFill>
-                        <a:srgbClr val="BFBFBF"/>
-                      </a:solidFill>
-                    </a:lnL>
-                    <a:lnR w="9525" cap="flat">
-                      <a:solidFill>
-                        <a:srgbClr val="BFBFBF"/>
-                      </a:solidFill>
-                    </a:lnR>
-                    <a:lnT w="9525" cap="flat">
-                      <a:solidFill>
-                        <a:srgbClr val="BFBFBF"/>
-                      </a:solidFill>
-                    </a:lnT>
-                    <a:lnB w="9525" cap="flat">
-                      <a:solidFill>
-                        <a:srgbClr val="BFBFBF"/>
-                      </a:solidFill>
-                    </a:lnB>
-                    <a:solidFill>
-                      <a:srgbClr val="FFFFFF"/>
-                    </a:solidFill>
-                  </a:tcPr>
-                </a:tc>
-                <a:tc>
-                  <a:txBody>
-                    <a:bodyPr wrap="square"/>
-                    <a:lstStyle/>
-                    <a:p>
-                      <a:pPr algn="ctr"/>
-                      <a:r>
-                        <a:rPr sz="1000" b="0">
-                          <a:solidFill>
-                            <a:srgbClr val="000000"/>
-                          </a:solidFill>
-                          <a:latin typeface="맑은 고딕"/>
-                          <a:ea typeface="맑은 고딕"/>
-                          <a:cs typeface="맑은 고딕"/>
-                        </a:rPr>
-                        <a:t>약 15만 종</a:t>
-                      </a:r>
-                    </a:p>
-                  </a:txBody>
-                  <a:tcPr anchor="ctr" marL="36000" marR="36000" marT="0" marB="0">
-                    <a:lnL w="9525" cap="flat">
-                      <a:solidFill>
-                        <a:srgbClr val="BFBFBF"/>
-                      </a:solidFill>
-                    </a:lnL>
-                    <a:lnR w="9525" cap="flat">
-                      <a:solidFill>
-                        <a:srgbClr val="BFBFBF"/>
-                      </a:solidFill>
-                    </a:lnR>
-                    <a:lnT w="9525" cap="flat">
-                      <a:solidFill>
-                        <a:srgbClr val="BFBFBF"/>
-                      </a:solidFill>
-                    </a:lnT>
-                    <a:lnB w="9525" cap="flat">
-                      <a:solidFill>
-                        <a:srgbClr val="BFBFBF"/>
-                      </a:solidFill>
-                    </a:lnB>
-                    <a:solidFill>
-                      <a:srgbClr val="FFFFFF"/>
-                    </a:solidFill>
-                  </a:tcPr>
-                </a:tc>
-                <a:tc>
-                  <a:txBody>
-                    <a:bodyPr wrap="square"/>
-                    <a:lstStyle/>
-                    <a:p>
-                      <a:pPr algn="ctr"/>
-                      <a:r>
-                        <a:rPr sz="1000" b="0">
-                          <a:solidFill>
-                            <a:srgbClr val="000000"/>
-                          </a:solidFill>
-                          <a:latin typeface="맑은 고딕"/>
-                          <a:ea typeface="맑은 고딕"/>
-                          <a:cs typeface="맑은 고딕"/>
-                        </a:rPr>
-                        <a:t>대용량 즉시배송</a:t>
+                        <a:t>50여 개 점포 운영</a:t>
                       </a:r>
                     </a:p>
                   </a:txBody>
@@ -4601,666 +5033,6 @@
           </a:graphicData>
         </a:graphic>
       </p:graphicFrame>
-      <p:sp>
-        <p:nvSpPr>
-          <p:cNvPr id="6" name="TextBox 5"/>
-          <p:cNvSpPr txBox="1"/>
-          <p:nvPr/>
-        </p:nvSpPr>
-        <p:spPr>
-          <a:xfrm>
-            <a:off x="424800" y="4338000"/>
-            <a:ext cx="2860800" cy="198000"/>
-          </a:xfrm>
-          <a:prstGeom prst="rect">
-            <a:avLst/>
-          </a:prstGeom>
-          <a:noFill/>
-        </p:spPr>
-        <p:txBody>
-          <a:bodyPr wrap="square" anchor="t" lIns="0" rIns="0" tIns="0" bIns="0">
-            <a:spAutoFit/>
-          </a:bodyPr>
-          <a:lstStyle/>
-          <a:p>
-            <a:pPr algn="ctr"/>
-            <a:r>
-              <a:rPr sz="1200" b="1">
-                <a:solidFill>
-                  <a:srgbClr val="000000"/>
-                </a:solidFill>
-                <a:latin typeface="맑은 고딕"/>
-                <a:ea typeface="맑은 고딕"/>
-                <a:cs typeface="맑은 고딕"/>
-              </a:rPr>
-              <a:t>도입 배경</a:t>
-            </a:r>
-          </a:p>
-        </p:txBody>
-      </p:sp>
-      <p:cxnSp>
-        <p:nvCxnSpPr>
-          <p:cNvPr id="7" name="Connector 6"/>
-          <p:cNvCxnSpPr/>
-          <p:nvPr/>
-        </p:nvCxnSpPr>
-        <p:spPr>
-          <a:xfrm>
-            <a:off x="424800" y="4561200"/>
-            <a:ext cx="2860800" cy="0"/>
-          </a:xfrm>
-          <a:prstGeom prst="bentConnector3">
-            <a:avLst/>
-          </a:prstGeom>
-          <a:ln w="12700">
-            <a:solidFill>
-              <a:srgbClr val="000000"/>
-            </a:solidFill>
-          </a:ln>
-        </p:spPr>
-        <p:style>
-          <a:lnRef idx="2">
-            <a:schemeClr val="accent1"/>
-          </a:lnRef>
-          <a:fillRef idx="0">
-            <a:schemeClr val="accent1"/>
-          </a:fillRef>
-          <a:effectRef idx="1">
-            <a:schemeClr val="accent1"/>
-          </a:effectRef>
-          <a:fontRef idx="minor">
-            <a:schemeClr val="tx1"/>
-          </a:fontRef>
-        </p:style>
-      </p:cxnSp>
-      <p:sp>
-        <p:nvSpPr>
-          <p:cNvPr id="8" name="TextBox 7"/>
-          <p:cNvSpPr txBox="1"/>
-          <p:nvPr/>
-        </p:nvSpPr>
-        <p:spPr>
-          <a:xfrm>
-            <a:off x="424800" y="4662000"/>
-            <a:ext cx="2860800" cy="237600"/>
-          </a:xfrm>
-          <a:prstGeom prst="rect">
-            <a:avLst/>
-          </a:prstGeom>
-          <a:noFill/>
-        </p:spPr>
-        <p:txBody>
-          <a:bodyPr wrap="square" anchor="t" lIns="0" rIns="0" tIns="0" bIns="0">
-            <a:spAutoFit/>
-          </a:bodyPr>
-          <a:lstStyle/>
-          <a:p>
-            <a:pPr algn="l"/>
-            <a:r>
-              <a:rPr sz="1200" b="1">
-                <a:solidFill>
-                  <a:srgbClr val="000000"/>
-                </a:solidFill>
-                <a:latin typeface="맑은 고딕"/>
-                <a:ea typeface="맑은 고딕"/>
-                <a:cs typeface="맑은 고딕"/>
-              </a:rPr>
-              <a:t>• 대용량 장보기 공백</a:t>
-            </a:r>
-          </a:p>
-        </p:txBody>
-      </p:sp>
-      <p:sp>
-        <p:nvSpPr>
-          <p:cNvPr id="9" name="TextBox 8"/>
-          <p:cNvSpPr txBox="1"/>
-          <p:nvPr/>
-        </p:nvSpPr>
-        <p:spPr>
-          <a:xfrm>
-            <a:off x="622800" y="4899600"/>
-            <a:ext cx="2662800" cy="237600"/>
-          </a:xfrm>
-          <a:prstGeom prst="rect">
-            <a:avLst/>
-          </a:prstGeom>
-          <a:noFill/>
-        </p:spPr>
-        <p:txBody>
-          <a:bodyPr wrap="square" anchor="t" lIns="0" rIns="0" tIns="0" bIns="0">
-            <a:spAutoFit/>
-          </a:bodyPr>
-          <a:lstStyle/>
-          <a:p>
-            <a:pPr algn="l"/>
-            <a:r>
-              <a:rPr sz="1100" b="0">
-                <a:solidFill>
-                  <a:srgbClr val="000000"/>
-                </a:solidFill>
-                <a:latin typeface="맑은 고딕"/>
-                <a:ea typeface="맑은 고딕"/>
-                <a:cs typeface="맑은 고딕"/>
-              </a:rPr>
-              <a:t>- 이륜차 퀵커머스 소량 한정</a:t>
-            </a:r>
-          </a:p>
-        </p:txBody>
-      </p:sp>
-      <p:sp>
-        <p:nvSpPr>
-          <p:cNvPr id="10" name="TextBox 9"/>
-          <p:cNvSpPr txBox="1"/>
-          <p:nvPr/>
-        </p:nvSpPr>
-        <p:spPr>
-          <a:xfrm>
-            <a:off x="424800" y="5137200"/>
-            <a:ext cx="2860800" cy="237600"/>
-          </a:xfrm>
-          <a:prstGeom prst="rect">
-            <a:avLst/>
-          </a:prstGeom>
-          <a:noFill/>
-        </p:spPr>
-        <p:txBody>
-          <a:bodyPr wrap="square" anchor="t" lIns="0" rIns="0" tIns="0" bIns="0">
-            <a:spAutoFit/>
-          </a:bodyPr>
-          <a:lstStyle/>
-          <a:p>
-            <a:pPr algn="l"/>
-            <a:r>
-              <a:rPr sz="1200" b="1">
-                <a:solidFill>
-                  <a:srgbClr val="000000"/>
-                </a:solidFill>
-                <a:latin typeface="맑은 고딕"/>
-                <a:ea typeface="맑은 고딕"/>
-                <a:cs typeface="맑은 고딕"/>
-              </a:rPr>
-              <a:t>• 온디맨드 수요 실증</a:t>
-            </a:r>
-          </a:p>
-        </p:txBody>
-      </p:sp>
-      <p:sp>
-        <p:nvSpPr>
-          <p:cNvPr id="11" name="TextBox 10"/>
-          <p:cNvSpPr txBox="1"/>
-          <p:nvPr/>
-        </p:nvSpPr>
-        <p:spPr>
-          <a:xfrm>
-            <a:off x="622800" y="5374800"/>
-            <a:ext cx="2662800" cy="237600"/>
-          </a:xfrm>
-          <a:prstGeom prst="rect">
-            <a:avLst/>
-          </a:prstGeom>
-          <a:noFill/>
-        </p:spPr>
-        <p:txBody>
-          <a:bodyPr wrap="square" anchor="t" lIns="0" rIns="0" tIns="0" bIns="0">
-            <a:spAutoFit/>
-          </a:bodyPr>
-          <a:lstStyle/>
-          <a:p>
-            <a:pPr algn="l"/>
-            <a:r>
-              <a:rPr sz="1100" b="0">
-                <a:solidFill>
-                  <a:srgbClr val="000000"/>
-                </a:solidFill>
-                <a:latin typeface="맑은 고딕"/>
-                <a:ea typeface="맑은 고딕"/>
-                <a:cs typeface="맑은 고딕"/>
-              </a:rPr>
-              <a:t>- 바로퀵 매출 197%↑ (6월)</a:t>
-            </a:r>
-          </a:p>
-        </p:txBody>
-      </p:sp>
-      <p:sp>
-        <p:nvSpPr>
-          <p:cNvPr id="12" name="TextBox 11"/>
-          <p:cNvSpPr txBox="1"/>
-          <p:nvPr/>
-        </p:nvSpPr>
-        <p:spPr>
-          <a:xfrm>
-            <a:off x="3523199" y="4338000"/>
-            <a:ext cx="2860800" cy="198000"/>
-          </a:xfrm>
-          <a:prstGeom prst="rect">
-            <a:avLst/>
-          </a:prstGeom>
-          <a:noFill/>
-        </p:spPr>
-        <p:txBody>
-          <a:bodyPr wrap="square" anchor="t" lIns="0" rIns="0" tIns="0" bIns="0">
-            <a:spAutoFit/>
-          </a:bodyPr>
-          <a:lstStyle/>
-          <a:p>
-            <a:pPr algn="ctr"/>
-            <a:r>
-              <a:rPr sz="1200" b="1">
-                <a:solidFill>
-                  <a:srgbClr val="000000"/>
-                </a:solidFill>
-                <a:latin typeface="맑은 고딕"/>
-                <a:ea typeface="맑은 고딕"/>
-                <a:cs typeface="맑은 고딕"/>
-              </a:rPr>
-              <a:t>시범 운영 ('26. 7. 9.~)</a:t>
-            </a:r>
-          </a:p>
-        </p:txBody>
-      </p:sp>
-      <p:cxnSp>
-        <p:nvCxnSpPr>
-          <p:cNvPr id="13" name="Connector 12"/>
-          <p:cNvCxnSpPr/>
-          <p:nvPr/>
-        </p:nvCxnSpPr>
-        <p:spPr>
-          <a:xfrm>
-            <a:off x="3523199" y="4561200"/>
-            <a:ext cx="2860800" cy="0"/>
-          </a:xfrm>
-          <a:prstGeom prst="bentConnector3">
-            <a:avLst/>
-          </a:prstGeom>
-          <a:ln w="12700">
-            <a:solidFill>
-              <a:srgbClr val="000000"/>
-            </a:solidFill>
-          </a:ln>
-        </p:spPr>
-        <p:style>
-          <a:lnRef idx="2">
-            <a:schemeClr val="accent1"/>
-          </a:lnRef>
-          <a:fillRef idx="0">
-            <a:schemeClr val="accent1"/>
-          </a:fillRef>
-          <a:effectRef idx="1">
-            <a:schemeClr val="accent1"/>
-          </a:effectRef>
-          <a:fontRef idx="minor">
-            <a:schemeClr val="tx1"/>
-          </a:fontRef>
-        </p:style>
-      </p:cxnSp>
-      <p:sp>
-        <p:nvSpPr>
-          <p:cNvPr id="14" name="TextBox 13"/>
-          <p:cNvSpPr txBox="1"/>
-          <p:nvPr/>
-        </p:nvSpPr>
-        <p:spPr>
-          <a:xfrm>
-            <a:off x="3523199" y="4662000"/>
-            <a:ext cx="2860800" cy="237600"/>
-          </a:xfrm>
-          <a:prstGeom prst="rect">
-            <a:avLst/>
-          </a:prstGeom>
-          <a:noFill/>
-        </p:spPr>
-        <p:txBody>
-          <a:bodyPr wrap="square" anchor="t" lIns="0" rIns="0" tIns="0" bIns="0">
-            <a:spAutoFit/>
-          </a:bodyPr>
-          <a:lstStyle/>
-          <a:p>
-            <a:pPr algn="l"/>
-            <a:r>
-              <a:rPr sz="1200" b="1">
-                <a:solidFill>
-                  <a:srgbClr val="000000"/>
-                </a:solidFill>
-                <a:latin typeface="맑은 고딕"/>
-                <a:ea typeface="맑은 고딕"/>
-                <a:cs typeface="맑은 고딕"/>
-              </a:rPr>
-              <a:t>• 2시간 내 배송</a:t>
-            </a:r>
-          </a:p>
-        </p:txBody>
-      </p:sp>
-      <p:sp>
-        <p:nvSpPr>
-          <p:cNvPr id="15" name="TextBox 14"/>
-          <p:cNvSpPr txBox="1"/>
-          <p:nvPr/>
-        </p:nvSpPr>
-        <p:spPr>
-          <a:xfrm>
-            <a:off x="3721199" y="4899600"/>
-            <a:ext cx="2662800" cy="237600"/>
-          </a:xfrm>
-          <a:prstGeom prst="rect">
-            <a:avLst/>
-          </a:prstGeom>
-          <a:noFill/>
-        </p:spPr>
-        <p:txBody>
-          <a:bodyPr wrap="square" anchor="t" lIns="0" rIns="0" tIns="0" bIns="0">
-            <a:spAutoFit/>
-          </a:bodyPr>
-          <a:lstStyle/>
-          <a:p>
-            <a:pPr algn="l"/>
-            <a:r>
-              <a:rPr sz="1100" b="0">
-                <a:solidFill>
-                  <a:srgbClr val="000000"/>
-                </a:solidFill>
-                <a:latin typeface="맑은 고딕"/>
-                <a:ea typeface="맑은 고딕"/>
-                <a:cs typeface="맑은 고딕"/>
-              </a:rPr>
-              <a:t>- 20시 주문 마감, 예약배송 병행</a:t>
-            </a:r>
-          </a:p>
-        </p:txBody>
-      </p:sp>
-      <p:sp>
-        <p:nvSpPr>
-          <p:cNvPr id="16" name="TextBox 15"/>
-          <p:cNvSpPr txBox="1"/>
-          <p:nvPr/>
-        </p:nvSpPr>
-        <p:spPr>
-          <a:xfrm>
-            <a:off x="3523199" y="5137200"/>
-            <a:ext cx="2860800" cy="237600"/>
-          </a:xfrm>
-          <a:prstGeom prst="rect">
-            <a:avLst/>
-          </a:prstGeom>
-          <a:noFill/>
-        </p:spPr>
-        <p:txBody>
-          <a:bodyPr wrap="square" anchor="t" lIns="0" rIns="0" tIns="0" bIns="0">
-            <a:spAutoFit/>
-          </a:bodyPr>
-          <a:lstStyle/>
-          <a:p>
-            <a:pPr algn="l"/>
-            <a:r>
-              <a:rPr sz="1200" b="1">
-                <a:solidFill>
-                  <a:srgbClr val="000000"/>
-                </a:solidFill>
-                <a:latin typeface="맑은 고딕"/>
-                <a:ea typeface="맑은 고딕"/>
-                <a:cs typeface="맑은 고딕"/>
-              </a:rPr>
-              <a:t>• 사륜차 대용량 대응</a:t>
-            </a:r>
-          </a:p>
-        </p:txBody>
-      </p:sp>
-      <p:sp>
-        <p:nvSpPr>
-          <p:cNvPr id="17" name="TextBox 16"/>
-          <p:cNvSpPr txBox="1"/>
-          <p:nvPr/>
-        </p:nvSpPr>
-        <p:spPr>
-          <a:xfrm>
-            <a:off x="3721199" y="5374800"/>
-            <a:ext cx="2662800" cy="237600"/>
-          </a:xfrm>
-          <a:prstGeom prst="rect">
-            <a:avLst/>
-          </a:prstGeom>
-          <a:noFill/>
-        </p:spPr>
-        <p:txBody>
-          <a:bodyPr wrap="square" anchor="t" lIns="0" rIns="0" tIns="0" bIns="0">
-            <a:spAutoFit/>
-          </a:bodyPr>
-          <a:lstStyle/>
-          <a:p>
-            <a:pPr algn="l"/>
-            <a:r>
-              <a:rPr sz="1100" b="0">
-                <a:solidFill>
-                  <a:srgbClr val="000000"/>
-                </a:solidFill>
-                <a:latin typeface="맑은 고딕"/>
-                <a:ea typeface="맑은 고딕"/>
-                <a:cs typeface="맑은 고딕"/>
-              </a:rPr>
-              <a:t>- 점포 15만 종 기반 즉시배송</a:t>
-            </a:r>
-          </a:p>
-        </p:txBody>
-      </p:sp>
-      <p:sp>
-        <p:nvSpPr>
-          <p:cNvPr id="18" name="TextBox 17"/>
-          <p:cNvSpPr txBox="1"/>
-          <p:nvPr/>
-        </p:nvSpPr>
-        <p:spPr>
-          <a:xfrm>
-            <a:off x="6621599" y="4338000"/>
-            <a:ext cx="2860800" cy="198000"/>
-          </a:xfrm>
-          <a:prstGeom prst="rect">
-            <a:avLst/>
-          </a:prstGeom>
-          <a:noFill/>
-        </p:spPr>
-        <p:txBody>
-          <a:bodyPr wrap="square" anchor="t" lIns="0" rIns="0" tIns="0" bIns="0">
-            <a:spAutoFit/>
-          </a:bodyPr>
-          <a:lstStyle/>
-          <a:p>
-            <a:pPr algn="ctr"/>
-            <a:r>
-              <a:rPr sz="1200" b="1">
-                <a:solidFill>
-                  <a:srgbClr val="000000"/>
-                </a:solidFill>
-                <a:latin typeface="맑은 고딕"/>
-                <a:ea typeface="맑은 고딕"/>
-                <a:cs typeface="맑은 고딕"/>
-              </a:rPr>
-              <a:t>확대 로드맵</a:t>
-            </a:r>
-          </a:p>
-        </p:txBody>
-      </p:sp>
-      <p:cxnSp>
-        <p:nvCxnSpPr>
-          <p:cNvPr id="19" name="Connector 18"/>
-          <p:cNvCxnSpPr/>
-          <p:nvPr/>
-        </p:nvCxnSpPr>
-        <p:spPr>
-          <a:xfrm>
-            <a:off x="6621599" y="4561200"/>
-            <a:ext cx="2860800" cy="0"/>
-          </a:xfrm>
-          <a:prstGeom prst="bentConnector3">
-            <a:avLst/>
-          </a:prstGeom>
-          <a:ln w="12700">
-            <a:solidFill>
-              <a:srgbClr val="000000"/>
-            </a:solidFill>
-          </a:ln>
-        </p:spPr>
-        <p:style>
-          <a:lnRef idx="2">
-            <a:schemeClr val="accent1"/>
-          </a:lnRef>
-          <a:fillRef idx="0">
-            <a:schemeClr val="accent1"/>
-          </a:fillRef>
-          <a:effectRef idx="1">
-            <a:schemeClr val="accent1"/>
-          </a:effectRef>
-          <a:fontRef idx="minor">
-            <a:schemeClr val="tx1"/>
-          </a:fontRef>
-        </p:style>
-      </p:cxnSp>
-      <p:sp>
-        <p:nvSpPr>
-          <p:cNvPr id="20" name="TextBox 19"/>
-          <p:cNvSpPr txBox="1"/>
-          <p:nvPr/>
-        </p:nvSpPr>
-        <p:spPr>
-          <a:xfrm>
-            <a:off x="6621599" y="4662000"/>
-            <a:ext cx="2860800" cy="237600"/>
-          </a:xfrm>
-          <a:prstGeom prst="rect">
-            <a:avLst/>
-          </a:prstGeom>
-          <a:noFill/>
-        </p:spPr>
-        <p:txBody>
-          <a:bodyPr wrap="square" anchor="t" lIns="0" rIns="0" tIns="0" bIns="0">
-            <a:spAutoFit/>
-          </a:bodyPr>
-          <a:lstStyle/>
-          <a:p>
-            <a:pPr algn="l"/>
-            <a:r>
-              <a:rPr sz="1200" b="1">
-                <a:solidFill>
-                  <a:srgbClr val="000000"/>
-                </a:solidFill>
-                <a:latin typeface="맑은 고딕"/>
-                <a:ea typeface="맑은 고딕"/>
-                <a:cs typeface="맑은 고딕"/>
-              </a:rPr>
-              <a:t>• 전국 확대</a:t>
-            </a:r>
-          </a:p>
-        </p:txBody>
-      </p:sp>
-      <p:sp>
-        <p:nvSpPr>
-          <p:cNvPr id="21" name="TextBox 20"/>
-          <p:cNvSpPr txBox="1"/>
-          <p:nvPr/>
-        </p:nvSpPr>
-        <p:spPr>
-          <a:xfrm>
-            <a:off x="6819599" y="4899600"/>
-            <a:ext cx="2662800" cy="237600"/>
-          </a:xfrm>
-          <a:prstGeom prst="rect">
-            <a:avLst/>
-          </a:prstGeom>
-          <a:noFill/>
-        </p:spPr>
-        <p:txBody>
-          <a:bodyPr wrap="square" anchor="t" lIns="0" rIns="0" tIns="0" bIns="0">
-            <a:spAutoFit/>
-          </a:bodyPr>
-          <a:lstStyle/>
-          <a:p>
-            <a:pPr algn="l"/>
-            <a:r>
-              <a:rPr sz="1100" b="0">
-                <a:solidFill>
-                  <a:srgbClr val="000000"/>
-                </a:solidFill>
-                <a:latin typeface="맑은 고딕"/>
-                <a:ea typeface="맑은 고딕"/>
-                <a:cs typeface="맑은 고딕"/>
-              </a:rPr>
-              <a:t>- 8월 서울 → 9월 전국</a:t>
-            </a:r>
-          </a:p>
-        </p:txBody>
-      </p:sp>
-      <p:sp>
-        <p:nvSpPr>
-          <p:cNvPr id="22" name="TextBox 21"/>
-          <p:cNvSpPr txBox="1"/>
-          <p:nvPr/>
-        </p:nvSpPr>
-        <p:spPr>
-          <a:xfrm>
-            <a:off x="6819599" y="5137200"/>
-            <a:ext cx="2662800" cy="237600"/>
-          </a:xfrm>
-          <a:prstGeom prst="rect">
-            <a:avLst/>
-          </a:prstGeom>
-          <a:noFill/>
-        </p:spPr>
-        <p:txBody>
-          <a:bodyPr wrap="square" anchor="t" lIns="0" rIns="0" tIns="0" bIns="0">
-            <a:spAutoFit/>
-          </a:bodyPr>
-          <a:lstStyle/>
-          <a:p>
-            <a:pPr algn="l"/>
-            <a:r>
-              <a:rPr sz="1100" b="0">
-                <a:solidFill>
-                  <a:srgbClr val="000000"/>
-                </a:solidFill>
-                <a:latin typeface="맑은 고딕"/>
-                <a:ea typeface="맑은 고딕"/>
-                <a:cs typeface="맑은 고딕"/>
-              </a:rPr>
-              <a:t>- 연말 50여 개 점포 목표</a:t>
-            </a:r>
-          </a:p>
-        </p:txBody>
-      </p:sp>
-      <p:sp>
-        <p:nvSpPr>
-          <p:cNvPr id="23" name="TextBox 22"/>
-          <p:cNvSpPr txBox="1"/>
-          <p:nvPr/>
-        </p:nvSpPr>
-        <p:spPr>
-          <a:xfrm>
-            <a:off x="6621599" y="5374800"/>
-            <a:ext cx="2860800" cy="237600"/>
-          </a:xfrm>
-          <a:prstGeom prst="rect">
-            <a:avLst/>
-          </a:prstGeom>
-          <a:noFill/>
-        </p:spPr>
-        <p:txBody>
-          <a:bodyPr wrap="square" anchor="t" lIns="0" rIns="0" tIns="0" bIns="0">
-            <a:spAutoFit/>
-          </a:bodyPr>
-          <a:lstStyle/>
-          <a:p>
-            <a:pPr algn="l"/>
-            <a:r>
-              <a:rPr sz="1200" b="1">
-                <a:solidFill>
-                  <a:srgbClr val="000000"/>
-                </a:solidFill>
-                <a:latin typeface="맑은 고딕"/>
-                <a:ea typeface="맑은 고딕"/>
-                <a:cs typeface="맑은 고딕"/>
-              </a:rPr>
-              <a:t>• 규제 변수 : PP센터 새벽 불가</a:t>
-            </a:r>
-          </a:p>
-        </p:txBody>
-      </p:sp>
       <p:cxnSp>
         <p:nvCxnSpPr>
           <p:cNvPr id="24" name="Connector 23"/>
@@ -5269,8 +5041,8 @@
         </p:nvCxnSpPr>
         <p:spPr>
           <a:xfrm>
-            <a:off x="3404399" y="4374000"/>
-            <a:ext cx="0" cy="1238400"/>
+            <a:off x="4953600" y="1475999"/>
+            <a:ext cx="0" cy="4086001"/>
           </a:xfrm>
           <a:prstGeom prst="bentConnector3">
             <a:avLst/>
@@ -5296,44 +5068,9 @@
           </a:fontRef>
         </p:style>
       </p:cxnSp>
-      <p:cxnSp>
-        <p:nvCxnSpPr>
-          <p:cNvPr id="25" name="Connector 24"/>
-          <p:cNvCxnSpPr/>
-          <p:nvPr/>
-        </p:nvCxnSpPr>
-        <p:spPr>
-          <a:xfrm>
-            <a:off x="6502800" y="4374000"/>
-            <a:ext cx="0" cy="1238400"/>
-          </a:xfrm>
-          <a:prstGeom prst="bentConnector3">
-            <a:avLst/>
-          </a:prstGeom>
-          <a:ln w="9525">
-            <a:solidFill>
-              <a:srgbClr val="BFBFBF"/>
-            </a:solidFill>
-          </a:ln>
-        </p:spPr>
-        <p:style>
-          <a:lnRef idx="2">
-            <a:schemeClr val="accent1"/>
-          </a:lnRef>
-          <a:fillRef idx="0">
-            <a:schemeClr val="accent1"/>
-          </a:fillRef>
-          <a:effectRef idx="1">
-            <a:schemeClr val="accent1"/>
-          </a:effectRef>
-          <a:fontRef idx="minor">
-            <a:schemeClr val="tx1"/>
-          </a:fontRef>
-        </p:style>
-      </p:cxnSp>
-      <p:sp>
-        <p:nvSpPr>
-          <p:cNvPr id="26" name="Rectangle 25"/>
+      <p:sp>
+        <p:nvSpPr>
+          <p:cNvPr id="25" name="Rectangle 24"/>
           <p:cNvSpPr/>
           <p:nvPr/>
         </p:nvSpPr>
@@ -5377,7 +5114,7 @@
       </p:sp>
       <p:sp>
         <p:nvSpPr>
-          <p:cNvPr id="27" name="TextBox 26"/>
+          <p:cNvPr id="26" name="TextBox 25"/>
           <p:cNvSpPr txBox="1"/>
           <p:nvPr/>
         </p:nvSpPr>

--- a/reports/ssg-quickcommerce-onepager.pptx
+++ b/reports/ssg-quickcommerce-onepager.pptx
@@ -4394,7 +4394,7 @@
                 <a:ea typeface="맑은 고딕"/>
                 <a:cs typeface="맑은 고딕"/>
               </a:rPr>
-              <a:t>- 사륜차 대용량, 점포 15만 종 기반</a:t>
+              <a:t>- 기존 예약배송 병행 선택 가능</a:t>
             </a:r>
           </a:p>
         </p:txBody>
@@ -4407,7 +4407,44 @@
         </p:nvSpPr>
         <p:spPr>
           <a:xfrm>
-            <a:off x="5072400" y="2800800"/>
+            <a:off x="5270400" y="2620800"/>
+            <a:ext cx="4212000" cy="273600"/>
+          </a:xfrm>
+          <a:prstGeom prst="rect">
+            <a:avLst/>
+          </a:prstGeom>
+          <a:noFill/>
+        </p:spPr>
+        <p:txBody>
+          <a:bodyPr wrap="square" anchor="t" lIns="0" rIns="0" tIns="0" bIns="0">
+            <a:spAutoFit/>
+          </a:bodyPr>
+          <a:lstStyle/>
+          <a:p>
+            <a:pPr algn="l"/>
+            <a:r>
+              <a:rPr sz="1100" b="0">
+                <a:solidFill>
+                  <a:srgbClr val="000000"/>
+                </a:solidFill>
+                <a:latin typeface="맑은 고딕"/>
+                <a:ea typeface="맑은 고딕"/>
+                <a:cs typeface="맑은 고딕"/>
+              </a:rPr>
+              <a:t>- 사륜차 활용, 대용량·중량 대응</a:t>
+            </a:r>
+          </a:p>
+        </p:txBody>
+      </p:sp>
+      <p:sp>
+        <p:nvSpPr>
+          <p:cNvPr id="20" name="TextBox 19"/>
+          <p:cNvSpPr txBox="1"/>
+          <p:nvPr/>
+        </p:nvSpPr>
+        <p:spPr>
+          <a:xfrm>
+            <a:off x="5072400" y="3074399"/>
             <a:ext cx="4410000" cy="273600"/>
           </a:xfrm>
           <a:prstGeom prst="rect">
@@ -4438,13 +4475,13 @@
       </p:sp>
       <p:sp>
         <p:nvSpPr>
-          <p:cNvPr id="20" name="TextBox 19"/>
+          <p:cNvPr id="21" name="TextBox 20"/>
           <p:cNvSpPr txBox="1"/>
           <p:nvPr/>
         </p:nvSpPr>
         <p:spPr>
           <a:xfrm>
-            <a:off x="5270400" y="3074399"/>
+            <a:off x="5270400" y="3347999"/>
             <a:ext cx="4212000" cy="273600"/>
           </a:xfrm>
           <a:prstGeom prst="rect">
@@ -4475,13 +4512,50 @@
       </p:sp>
       <p:sp>
         <p:nvSpPr>
-          <p:cNvPr id="21" name="TextBox 20"/>
+          <p:cNvPr id="22" name="TextBox 21"/>
           <p:cNvSpPr txBox="1"/>
           <p:nvPr/>
         </p:nvSpPr>
         <p:spPr>
           <a:xfrm>
-            <a:off x="5270400" y="3347999"/>
+            <a:off x="5270400" y="3621599"/>
+            <a:ext cx="4212000" cy="273600"/>
+          </a:xfrm>
+          <a:prstGeom prst="rect">
+            <a:avLst/>
+          </a:prstGeom>
+          <a:noFill/>
+        </p:spPr>
+        <p:txBody>
+          <a:bodyPr wrap="square" anchor="t" lIns="0" rIns="0" tIns="0" bIns="0">
+            <a:spAutoFit/>
+          </a:bodyPr>
+          <a:lstStyle/>
+          <a:p>
+            <a:pPr algn="l"/>
+            <a:r>
+              <a:rPr sz="1100" b="0">
+                <a:solidFill>
+                  <a:srgbClr val="000000"/>
+                </a:solidFill>
+                <a:latin typeface="맑은 고딕"/>
+                <a:ea typeface="맑은 고딕"/>
+                <a:cs typeface="맑은 고딕"/>
+              </a:rPr>
+              <a:t>- 점포 15만 종 구색 → 즉시배송 확장</a:t>
+            </a:r>
+          </a:p>
+        </p:txBody>
+      </p:sp>
+      <p:sp>
+        <p:nvSpPr>
+          <p:cNvPr id="23" name="TextBox 22"/>
+          <p:cNvSpPr txBox="1"/>
+          <p:nvPr/>
+        </p:nvSpPr>
+        <p:spPr>
+          <a:xfrm>
+            <a:off x="5270400" y="3895199"/>
             <a:ext cx="4212000" cy="273600"/>
           </a:xfrm>
           <a:prstGeom prst="rect">
@@ -4512,13 +4586,13 @@
       </p:sp>
       <p:sp>
         <p:nvSpPr>
-          <p:cNvPr id="22" name="TextBox 21"/>
+          <p:cNvPr id="24" name="TextBox 23"/>
           <p:cNvSpPr txBox="1"/>
           <p:nvPr/>
         </p:nvSpPr>
         <p:spPr>
           <a:xfrm>
-            <a:off x="5072400" y="3801599"/>
+            <a:off x="5072400" y="4348799"/>
             <a:ext cx="4410000" cy="273600"/>
           </a:xfrm>
           <a:prstGeom prst="rect">
@@ -4547,510 +4621,25 @@
           </a:p>
         </p:txBody>
       </p:sp>
-      <p:graphicFrame>
-        <p:nvGraphicFramePr>
-          <p:cNvPr id="23" name="Table 22"/>
-          <p:cNvGraphicFramePr>
-            <a:graphicFrameLocks noGrp="1"/>
-          </p:cNvGraphicFramePr>
-          <p:nvPr/>
-        </p:nvGraphicFramePr>
-        <p:xfrm>
-          <a:off x="5072400" y="4075199"/>
-          <a:ext cx="4410000" cy="1368000"/>
-        </p:xfrm>
-        <a:graphic>
-          <a:graphicData uri="http://schemas.openxmlformats.org/drawingml/2006/table">
-            <a:tbl>
-              <a:tblPr>
-                <a:tableStyleId>{5C22544A-7EE6-4342-B048-85BDC9FD1C3A}</a:tableStyleId>
-              </a:tblPr>
-              <a:tblGrid>
-                <a:gridCol w="1296000"/>
-                <a:gridCol w="3114000"/>
-              </a:tblGrid>
-              <a:tr h="273600">
-                <a:tc>
-                  <a:txBody>
-                    <a:bodyPr wrap="square"/>
-                    <a:lstStyle/>
-                    <a:p>
-                      <a:pPr algn="ctr"/>
-                      <a:r>
-                        <a:rPr sz="1000" b="1">
-                          <a:solidFill>
-                            <a:srgbClr val="000000"/>
-                          </a:solidFill>
-                          <a:latin typeface="맑은 고딕"/>
-                          <a:ea typeface="맑은 고딕"/>
-                          <a:cs typeface="맑은 고딕"/>
-                        </a:rPr>
-                        <a:t>시기</a:t>
-                      </a:r>
-                    </a:p>
-                  </a:txBody>
-                  <a:tcPr anchor="ctr" marL="36000" marR="36000" marT="0" marB="0">
-                    <a:lnL w="9525" cap="flat">
-                      <a:solidFill>
-                        <a:srgbClr val="BFBFBF"/>
-                      </a:solidFill>
-                    </a:lnL>
-                    <a:lnR w="9525" cap="flat">
-                      <a:solidFill>
-                        <a:srgbClr val="BFBFBF"/>
-                      </a:solidFill>
-                    </a:lnR>
-                    <a:lnT w="9525" cap="flat">
-                      <a:solidFill>
-                        <a:srgbClr val="BFBFBF"/>
-                      </a:solidFill>
-                    </a:lnT>
-                    <a:lnB w="9525" cap="flat">
-                      <a:solidFill>
-                        <a:srgbClr val="BFBFBF"/>
-                      </a:solidFill>
-                    </a:lnB>
-                    <a:solidFill>
-                      <a:srgbClr val="EAEEF6"/>
-                    </a:solidFill>
-                  </a:tcPr>
-                </a:tc>
-                <a:tc>
-                  <a:txBody>
-                    <a:bodyPr wrap="square"/>
-                    <a:lstStyle/>
-                    <a:p>
-                      <a:pPr algn="ctr"/>
-                      <a:r>
-                        <a:rPr sz="1000" b="1">
-                          <a:solidFill>
-                            <a:srgbClr val="000000"/>
-                          </a:solidFill>
-                          <a:latin typeface="맑은 고딕"/>
-                          <a:ea typeface="맑은 고딕"/>
-                          <a:cs typeface="맑은 고딕"/>
-                        </a:rPr>
-                        <a:t>계획</a:t>
-                      </a:r>
-                    </a:p>
-                  </a:txBody>
-                  <a:tcPr anchor="ctr" marL="36000" marR="36000" marT="0" marB="0">
-                    <a:lnL w="9525" cap="flat">
-                      <a:solidFill>
-                        <a:srgbClr val="BFBFBF"/>
-                      </a:solidFill>
-                    </a:lnL>
-                    <a:lnR w="9525" cap="flat">
-                      <a:solidFill>
-                        <a:srgbClr val="BFBFBF"/>
-                      </a:solidFill>
-                    </a:lnR>
-                    <a:lnT w="9525" cap="flat">
-                      <a:solidFill>
-                        <a:srgbClr val="BFBFBF"/>
-                      </a:solidFill>
-                    </a:lnT>
-                    <a:lnB w="9525" cap="flat">
-                      <a:solidFill>
-                        <a:srgbClr val="BFBFBF"/>
-                      </a:solidFill>
-                    </a:lnB>
-                    <a:solidFill>
-                      <a:srgbClr val="EAEEF6"/>
-                    </a:solidFill>
-                  </a:tcPr>
-                </a:tc>
-              </a:tr>
-              <a:tr h="273600">
-                <a:tc>
-                  <a:txBody>
-                    <a:bodyPr wrap="square"/>
-                    <a:lstStyle/>
-                    <a:p>
-                      <a:pPr algn="ctr"/>
-                      <a:r>
-                        <a:rPr sz="1000" b="1">
-                          <a:solidFill>
-                            <a:srgbClr val="000000"/>
-                          </a:solidFill>
-                          <a:latin typeface="맑은 고딕"/>
-                          <a:ea typeface="맑은 고딕"/>
-                          <a:cs typeface="맑은 고딕"/>
-                        </a:rPr>
-                        <a:t>'26. 7월</a:t>
-                      </a:r>
-                    </a:p>
-                  </a:txBody>
-                  <a:tcPr anchor="ctr" marL="36000" marR="36000" marT="0" marB="0">
-                    <a:lnL w="9525" cap="flat">
-                      <a:solidFill>
-                        <a:srgbClr val="BFBFBF"/>
-                      </a:solidFill>
-                    </a:lnL>
-                    <a:lnR w="9525" cap="flat">
-                      <a:solidFill>
-                        <a:srgbClr val="BFBFBF"/>
-                      </a:solidFill>
-                    </a:lnR>
-                    <a:lnT w="9525" cap="flat">
-                      <a:solidFill>
-                        <a:srgbClr val="BFBFBF"/>
-                      </a:solidFill>
-                    </a:lnT>
-                    <a:lnB w="9525" cap="flat">
-                      <a:solidFill>
-                        <a:srgbClr val="BFBFBF"/>
-                      </a:solidFill>
-                    </a:lnB>
-                    <a:solidFill>
-                      <a:srgbClr val="FFFFFF"/>
-                    </a:solidFill>
-                  </a:tcPr>
-                </a:tc>
-                <a:tc>
-                  <a:txBody>
-                    <a:bodyPr wrap="square"/>
-                    <a:lstStyle/>
-                    <a:p>
-                      <a:pPr algn="ctr"/>
-                      <a:r>
-                        <a:rPr sz="1000" b="0">
-                          <a:solidFill>
-                            <a:srgbClr val="000000"/>
-                          </a:solidFill>
-                          <a:latin typeface="맑은 고딕"/>
-                          <a:ea typeface="맑은 고딕"/>
-                          <a:cs typeface="맑은 고딕"/>
-                        </a:rPr>
-                        <a:t>양재·하남점 시범 운영</a:t>
-                      </a:r>
-                    </a:p>
-                  </a:txBody>
-                  <a:tcPr anchor="ctr" marL="36000" marR="36000" marT="0" marB="0">
-                    <a:lnL w="9525" cap="flat">
-                      <a:solidFill>
-                        <a:srgbClr val="BFBFBF"/>
-                      </a:solidFill>
-                    </a:lnL>
-                    <a:lnR w="9525" cap="flat">
-                      <a:solidFill>
-                        <a:srgbClr val="BFBFBF"/>
-                      </a:solidFill>
-                    </a:lnR>
-                    <a:lnT w="9525" cap="flat">
-                      <a:solidFill>
-                        <a:srgbClr val="BFBFBF"/>
-                      </a:solidFill>
-                    </a:lnT>
-                    <a:lnB w="9525" cap="flat">
-                      <a:solidFill>
-                        <a:srgbClr val="BFBFBF"/>
-                      </a:solidFill>
-                    </a:lnB>
-                    <a:solidFill>
-                      <a:srgbClr val="FFFFFF"/>
-                    </a:solidFill>
-                  </a:tcPr>
-                </a:tc>
-              </a:tr>
-              <a:tr h="273600">
-                <a:tc>
-                  <a:txBody>
-                    <a:bodyPr wrap="square"/>
-                    <a:lstStyle/>
-                    <a:p>
-                      <a:pPr algn="ctr"/>
-                      <a:r>
-                        <a:rPr sz="1000" b="1">
-                          <a:solidFill>
-                            <a:srgbClr val="000000"/>
-                          </a:solidFill>
-                          <a:latin typeface="맑은 고딕"/>
-                          <a:ea typeface="맑은 고딕"/>
-                          <a:cs typeface="맑은 고딕"/>
-                        </a:rPr>
-                        <a:t>'26. 8월</a:t>
-                      </a:r>
-                    </a:p>
-                  </a:txBody>
-                  <a:tcPr anchor="ctr" marL="36000" marR="36000" marT="0" marB="0">
-                    <a:lnL w="9525" cap="flat">
-                      <a:solidFill>
-                        <a:srgbClr val="BFBFBF"/>
-                      </a:solidFill>
-                    </a:lnL>
-                    <a:lnR w="9525" cap="flat">
-                      <a:solidFill>
-                        <a:srgbClr val="BFBFBF"/>
-                      </a:solidFill>
-                    </a:lnR>
-                    <a:lnT w="9525" cap="flat">
-                      <a:solidFill>
-                        <a:srgbClr val="BFBFBF"/>
-                      </a:solidFill>
-                    </a:lnT>
-                    <a:lnB w="9525" cap="flat">
-                      <a:solidFill>
-                        <a:srgbClr val="BFBFBF"/>
-                      </a:solidFill>
-                    </a:lnB>
-                    <a:solidFill>
-                      <a:srgbClr val="FFFFFF"/>
-                    </a:solidFill>
-                  </a:tcPr>
-                </a:tc>
-                <a:tc>
-                  <a:txBody>
-                    <a:bodyPr wrap="square"/>
-                    <a:lstStyle/>
-                    <a:p>
-                      <a:pPr algn="ctr"/>
-                      <a:r>
-                        <a:rPr sz="1000" b="0">
-                          <a:solidFill>
-                            <a:srgbClr val="000000"/>
-                          </a:solidFill>
-                          <a:latin typeface="맑은 고딕"/>
-                          <a:ea typeface="맑은 고딕"/>
-                          <a:cs typeface="맑은 고딕"/>
-                        </a:rPr>
-                        <a:t>서울 주요 지역 확대</a:t>
-                      </a:r>
-                    </a:p>
-                  </a:txBody>
-                  <a:tcPr anchor="ctr" marL="36000" marR="36000" marT="0" marB="0">
-                    <a:lnL w="9525" cap="flat">
-                      <a:solidFill>
-                        <a:srgbClr val="BFBFBF"/>
-                      </a:solidFill>
-                    </a:lnL>
-                    <a:lnR w="9525" cap="flat">
-                      <a:solidFill>
-                        <a:srgbClr val="BFBFBF"/>
-                      </a:solidFill>
-                    </a:lnR>
-                    <a:lnT w="9525" cap="flat">
-                      <a:solidFill>
-                        <a:srgbClr val="BFBFBF"/>
-                      </a:solidFill>
-                    </a:lnT>
-                    <a:lnB w="9525" cap="flat">
-                      <a:solidFill>
-                        <a:srgbClr val="BFBFBF"/>
-                      </a:solidFill>
-                    </a:lnB>
-                    <a:solidFill>
-                      <a:srgbClr val="FFFFFF"/>
-                    </a:solidFill>
-                  </a:tcPr>
-                </a:tc>
-              </a:tr>
-              <a:tr h="273600">
-                <a:tc>
-                  <a:txBody>
-                    <a:bodyPr wrap="square"/>
-                    <a:lstStyle/>
-                    <a:p>
-                      <a:pPr algn="ctr"/>
-                      <a:r>
-                        <a:rPr sz="1000" b="1">
-                          <a:solidFill>
-                            <a:srgbClr val="000000"/>
-                          </a:solidFill>
-                          <a:latin typeface="맑은 고딕"/>
-                          <a:ea typeface="맑은 고딕"/>
-                          <a:cs typeface="맑은 고딕"/>
-                        </a:rPr>
-                        <a:t>'26. 9월</a:t>
-                      </a:r>
-                    </a:p>
-                  </a:txBody>
-                  <a:tcPr anchor="ctr" marL="36000" marR="36000" marT="0" marB="0">
-                    <a:lnL w="9525" cap="flat">
-                      <a:solidFill>
-                        <a:srgbClr val="BFBFBF"/>
-                      </a:solidFill>
-                    </a:lnL>
-                    <a:lnR w="9525" cap="flat">
-                      <a:solidFill>
-                        <a:srgbClr val="BFBFBF"/>
-                      </a:solidFill>
-                    </a:lnR>
-                    <a:lnT w="9525" cap="flat">
-                      <a:solidFill>
-                        <a:srgbClr val="BFBFBF"/>
-                      </a:solidFill>
-                    </a:lnT>
-                    <a:lnB w="9525" cap="flat">
-                      <a:solidFill>
-                        <a:srgbClr val="BFBFBF"/>
-                      </a:solidFill>
-                    </a:lnB>
-                    <a:solidFill>
-                      <a:srgbClr val="FFFFFF"/>
-                    </a:solidFill>
-                  </a:tcPr>
-                </a:tc>
-                <a:tc>
-                  <a:txBody>
-                    <a:bodyPr wrap="square"/>
-                    <a:lstStyle/>
-                    <a:p>
-                      <a:pPr algn="ctr"/>
-                      <a:r>
-                        <a:rPr sz="1000" b="0">
-                          <a:solidFill>
-                            <a:srgbClr val="000000"/>
-                          </a:solidFill>
-                          <a:latin typeface="맑은 고딕"/>
-                          <a:ea typeface="맑은 고딕"/>
-                          <a:cs typeface="맑은 고딕"/>
-                        </a:rPr>
-                        <a:t>전국 확대</a:t>
-                      </a:r>
-                    </a:p>
-                  </a:txBody>
-                  <a:tcPr anchor="ctr" marL="36000" marR="36000" marT="0" marB="0">
-                    <a:lnL w="9525" cap="flat">
-                      <a:solidFill>
-                        <a:srgbClr val="BFBFBF"/>
-                      </a:solidFill>
-                    </a:lnL>
-                    <a:lnR w="9525" cap="flat">
-                      <a:solidFill>
-                        <a:srgbClr val="BFBFBF"/>
-                      </a:solidFill>
-                    </a:lnR>
-                    <a:lnT w="9525" cap="flat">
-                      <a:solidFill>
-                        <a:srgbClr val="BFBFBF"/>
-                      </a:solidFill>
-                    </a:lnT>
-                    <a:lnB w="9525" cap="flat">
-                      <a:solidFill>
-                        <a:srgbClr val="BFBFBF"/>
-                      </a:solidFill>
-                    </a:lnB>
-                    <a:solidFill>
-                      <a:srgbClr val="FFFFFF"/>
-                    </a:solidFill>
-                  </a:tcPr>
-                </a:tc>
-              </a:tr>
-              <a:tr h="273600">
-                <a:tc>
-                  <a:txBody>
-                    <a:bodyPr wrap="square"/>
-                    <a:lstStyle/>
-                    <a:p>
-                      <a:pPr algn="ctr"/>
-                      <a:r>
-                        <a:rPr sz="1000" b="1">
-                          <a:solidFill>
-                            <a:srgbClr val="000000"/>
-                          </a:solidFill>
-                          <a:latin typeface="맑은 고딕"/>
-                          <a:ea typeface="맑은 고딕"/>
-                          <a:cs typeface="맑은 고딕"/>
-                        </a:rPr>
-                        <a:t>'26. 연말</a:t>
-                      </a:r>
-                    </a:p>
-                  </a:txBody>
-                  <a:tcPr anchor="ctr" marL="36000" marR="36000" marT="0" marB="0">
-                    <a:lnL w="9525" cap="flat">
-                      <a:solidFill>
-                        <a:srgbClr val="BFBFBF"/>
-                      </a:solidFill>
-                    </a:lnL>
-                    <a:lnR w="9525" cap="flat">
-                      <a:solidFill>
-                        <a:srgbClr val="BFBFBF"/>
-                      </a:solidFill>
-                    </a:lnR>
-                    <a:lnT w="9525" cap="flat">
-                      <a:solidFill>
-                        <a:srgbClr val="BFBFBF"/>
-                      </a:solidFill>
-                    </a:lnT>
-                    <a:lnB w="9525" cap="flat">
-                      <a:solidFill>
-                        <a:srgbClr val="BFBFBF"/>
-                      </a:solidFill>
-                    </a:lnB>
-                    <a:solidFill>
-                      <a:srgbClr val="FFFFFF"/>
-                    </a:solidFill>
-                  </a:tcPr>
-                </a:tc>
-                <a:tc>
-                  <a:txBody>
-                    <a:bodyPr wrap="square"/>
-                    <a:lstStyle/>
-                    <a:p>
-                      <a:pPr algn="ctr"/>
-                      <a:r>
-                        <a:rPr sz="1000" b="0">
-                          <a:solidFill>
-                            <a:srgbClr val="000000"/>
-                          </a:solidFill>
-                          <a:latin typeface="맑은 고딕"/>
-                          <a:ea typeface="맑은 고딕"/>
-                          <a:cs typeface="맑은 고딕"/>
-                        </a:rPr>
-                        <a:t>50여 개 점포 운영</a:t>
-                      </a:r>
-                    </a:p>
-                  </a:txBody>
-                  <a:tcPr anchor="ctr" marL="36000" marR="36000" marT="0" marB="0">
-                    <a:lnL w="9525" cap="flat">
-                      <a:solidFill>
-                        <a:srgbClr val="BFBFBF"/>
-                      </a:solidFill>
-                    </a:lnL>
-                    <a:lnR w="9525" cap="flat">
-                      <a:solidFill>
-                        <a:srgbClr val="BFBFBF"/>
-                      </a:solidFill>
-                    </a:lnR>
-                    <a:lnT w="9525" cap="flat">
-                      <a:solidFill>
-                        <a:srgbClr val="BFBFBF"/>
-                      </a:solidFill>
-                    </a:lnT>
-                    <a:lnB w="9525" cap="flat">
-                      <a:solidFill>
-                        <a:srgbClr val="BFBFBF"/>
-                      </a:solidFill>
-                    </a:lnB>
-                    <a:solidFill>
-                      <a:srgbClr val="FFFFFF"/>
-                    </a:solidFill>
-                  </a:tcPr>
-                </a:tc>
-              </a:tr>
-            </a:tbl>
-          </a:graphicData>
-        </a:graphic>
-      </p:graphicFrame>
       <p:cxnSp>
         <p:nvCxnSpPr>
-          <p:cNvPr id="24" name="Connector 23"/>
+          <p:cNvPr id="25" name="Connector 24"/>
           <p:cNvCxnSpPr/>
           <p:nvPr/>
         </p:nvCxnSpPr>
         <p:spPr>
           <a:xfrm>
-            <a:off x="4953600" y="1475999"/>
-            <a:ext cx="0" cy="4086001"/>
+            <a:off x="5072400" y="4838400"/>
+            <a:ext cx="4410000" cy="0"/>
           </a:xfrm>
           <a:prstGeom prst="bentConnector3">
             <a:avLst/>
           </a:prstGeom>
-          <a:ln w="9525">
+          <a:ln w="25400">
             <a:solidFill>
-              <a:srgbClr val="BFBFBF"/>
+              <a:srgbClr val="000000"/>
             </a:solidFill>
+            <a:tailEnd type="triangle" w="med" len="med"/>
           </a:ln>
         </p:spPr>
         <p:style>
@@ -5070,23 +4659,25 @@
       </p:cxnSp>
       <p:sp>
         <p:nvSpPr>
-          <p:cNvPr id="25" name="Rectangle 24"/>
+          <p:cNvPr id="26" name="Oval 25"/>
           <p:cNvSpPr/>
           <p:nvPr/>
         </p:nvSpPr>
         <p:spPr>
           <a:xfrm>
-            <a:off x="424800" y="5868000"/>
-            <a:ext cx="9057600" cy="360000"/>
-          </a:xfrm>
-          <a:prstGeom prst="rect">
+            <a:off x="5576850" y="4791600"/>
+            <a:ext cx="93600" cy="93600"/>
+          </a:xfrm>
+          <a:prstGeom prst="ellipse">
             <a:avLst/>
           </a:prstGeom>
           <a:solidFill>
-            <a:srgbClr val="000066"/>
+            <a:srgbClr val="FFFFFF"/>
           </a:solidFill>
-          <a:ln>
-            <a:noFill/>
+          <a:ln w="12700">
+            <a:solidFill>
+              <a:srgbClr val="000000"/>
+            </a:solidFill>
           </a:ln>
           <a:effectLst/>
         </p:spPr>
@@ -5114,7 +4705,520 @@
       </p:sp>
       <p:sp>
         <p:nvSpPr>
-          <p:cNvPr id="26" name="TextBox 25"/>
+          <p:cNvPr id="27" name="TextBox 26"/>
+          <p:cNvSpPr txBox="1"/>
+          <p:nvPr/>
+        </p:nvSpPr>
+        <p:spPr>
+          <a:xfrm>
+            <a:off x="5072400" y="4640400"/>
+            <a:ext cx="1102500" cy="162000"/>
+          </a:xfrm>
+          <a:prstGeom prst="rect">
+            <a:avLst/>
+          </a:prstGeom>
+          <a:noFill/>
+        </p:spPr>
+        <p:txBody>
+          <a:bodyPr wrap="square" anchor="t" lIns="0" rIns="0" tIns="0" bIns="0">
+            <a:spAutoFit/>
+          </a:bodyPr>
+          <a:lstStyle/>
+          <a:p>
+            <a:pPr algn="ctr"/>
+            <a:r>
+              <a:rPr sz="1000" b="1">
+                <a:solidFill>
+                  <a:srgbClr val="595959"/>
+                </a:solidFill>
+                <a:latin typeface="맑은 고딕"/>
+                <a:ea typeface="맑은 고딕"/>
+                <a:cs typeface="맑은 고딕"/>
+              </a:rPr>
+              <a:t>'26. 7월</a:t>
+            </a:r>
+          </a:p>
+        </p:txBody>
+      </p:sp>
+      <p:sp>
+        <p:nvSpPr>
+          <p:cNvPr id="28" name="TextBox 27"/>
+          <p:cNvSpPr txBox="1"/>
+          <p:nvPr/>
+        </p:nvSpPr>
+        <p:spPr>
+          <a:xfrm>
+            <a:off x="5072400" y="4910400"/>
+            <a:ext cx="1102500" cy="198000"/>
+          </a:xfrm>
+          <a:prstGeom prst="rect">
+            <a:avLst/>
+          </a:prstGeom>
+          <a:noFill/>
+        </p:spPr>
+        <p:txBody>
+          <a:bodyPr wrap="square" anchor="t" lIns="0" rIns="0" tIns="0" bIns="0">
+            <a:spAutoFit/>
+          </a:bodyPr>
+          <a:lstStyle/>
+          <a:p>
+            <a:pPr algn="ctr"/>
+            <a:r>
+              <a:rPr sz="1100" b="1">
+                <a:solidFill>
+                  <a:srgbClr val="000000"/>
+                </a:solidFill>
+                <a:latin typeface="맑은 고딕"/>
+                <a:ea typeface="맑은 고딕"/>
+                <a:cs typeface="맑은 고딕"/>
+              </a:rPr>
+              <a:t>양재·하남</a:t>
+            </a:r>
+          </a:p>
+        </p:txBody>
+      </p:sp>
+      <p:sp>
+        <p:nvSpPr>
+          <p:cNvPr id="29" name="Oval 28"/>
+          <p:cNvSpPr/>
+          <p:nvPr/>
+        </p:nvSpPr>
+        <p:spPr>
+          <a:xfrm>
+            <a:off x="6679350" y="4791600"/>
+            <a:ext cx="93600" cy="93600"/>
+          </a:xfrm>
+          <a:prstGeom prst="ellipse">
+            <a:avLst/>
+          </a:prstGeom>
+          <a:solidFill>
+            <a:srgbClr val="FFFFFF"/>
+          </a:solidFill>
+          <a:ln w="12700">
+            <a:solidFill>
+              <a:srgbClr val="000000"/>
+            </a:solidFill>
+          </a:ln>
+          <a:effectLst/>
+        </p:spPr>
+        <p:style>
+          <a:lnRef idx="1">
+            <a:schemeClr val="accent1"/>
+          </a:lnRef>
+          <a:fillRef idx="3">
+            <a:schemeClr val="accent1"/>
+          </a:fillRef>
+          <a:effectRef idx="2">
+            <a:schemeClr val="accent1"/>
+          </a:effectRef>
+          <a:fontRef idx="minor">
+            <a:schemeClr val="lt1"/>
+          </a:fontRef>
+        </p:style>
+        <p:txBody>
+          <a:bodyPr rtlCol="0" anchor="ctr"/>
+          <a:lstStyle/>
+          <a:p>
+            <a:pPr algn="ctr"/>
+          </a:p>
+        </p:txBody>
+      </p:sp>
+      <p:sp>
+        <p:nvSpPr>
+          <p:cNvPr id="30" name="TextBox 29"/>
+          <p:cNvSpPr txBox="1"/>
+          <p:nvPr/>
+        </p:nvSpPr>
+        <p:spPr>
+          <a:xfrm>
+            <a:off x="6174900" y="4640400"/>
+            <a:ext cx="1102500" cy="162000"/>
+          </a:xfrm>
+          <a:prstGeom prst="rect">
+            <a:avLst/>
+          </a:prstGeom>
+          <a:noFill/>
+        </p:spPr>
+        <p:txBody>
+          <a:bodyPr wrap="square" anchor="t" lIns="0" rIns="0" tIns="0" bIns="0">
+            <a:spAutoFit/>
+          </a:bodyPr>
+          <a:lstStyle/>
+          <a:p>
+            <a:pPr algn="ctr"/>
+            <a:r>
+              <a:rPr sz="1000" b="1">
+                <a:solidFill>
+                  <a:srgbClr val="595959"/>
+                </a:solidFill>
+                <a:latin typeface="맑은 고딕"/>
+                <a:ea typeface="맑은 고딕"/>
+                <a:cs typeface="맑은 고딕"/>
+              </a:rPr>
+              <a:t>8월</a:t>
+            </a:r>
+          </a:p>
+        </p:txBody>
+      </p:sp>
+      <p:sp>
+        <p:nvSpPr>
+          <p:cNvPr id="31" name="TextBox 30"/>
+          <p:cNvSpPr txBox="1"/>
+          <p:nvPr/>
+        </p:nvSpPr>
+        <p:spPr>
+          <a:xfrm>
+            <a:off x="6174900" y="4910400"/>
+            <a:ext cx="1102500" cy="198000"/>
+          </a:xfrm>
+          <a:prstGeom prst="rect">
+            <a:avLst/>
+          </a:prstGeom>
+          <a:noFill/>
+        </p:spPr>
+        <p:txBody>
+          <a:bodyPr wrap="square" anchor="t" lIns="0" rIns="0" tIns="0" bIns="0">
+            <a:spAutoFit/>
+          </a:bodyPr>
+          <a:lstStyle/>
+          <a:p>
+            <a:pPr algn="ctr"/>
+            <a:r>
+              <a:rPr sz="1100" b="1">
+                <a:solidFill>
+                  <a:srgbClr val="000000"/>
+                </a:solidFill>
+                <a:latin typeface="맑은 고딕"/>
+                <a:ea typeface="맑은 고딕"/>
+                <a:cs typeface="맑은 고딕"/>
+              </a:rPr>
+              <a:t>서울 확대</a:t>
+            </a:r>
+          </a:p>
+        </p:txBody>
+      </p:sp>
+      <p:sp>
+        <p:nvSpPr>
+          <p:cNvPr id="32" name="Oval 31"/>
+          <p:cNvSpPr/>
+          <p:nvPr/>
+        </p:nvSpPr>
+        <p:spPr>
+          <a:xfrm>
+            <a:off x="7781850" y="4791600"/>
+            <a:ext cx="93600" cy="93600"/>
+          </a:xfrm>
+          <a:prstGeom prst="ellipse">
+            <a:avLst/>
+          </a:prstGeom>
+          <a:solidFill>
+            <a:srgbClr val="FFFFFF"/>
+          </a:solidFill>
+          <a:ln w="12700">
+            <a:solidFill>
+              <a:srgbClr val="000000"/>
+            </a:solidFill>
+          </a:ln>
+          <a:effectLst/>
+        </p:spPr>
+        <p:style>
+          <a:lnRef idx="1">
+            <a:schemeClr val="accent1"/>
+          </a:lnRef>
+          <a:fillRef idx="3">
+            <a:schemeClr val="accent1"/>
+          </a:fillRef>
+          <a:effectRef idx="2">
+            <a:schemeClr val="accent1"/>
+          </a:effectRef>
+          <a:fontRef idx="minor">
+            <a:schemeClr val="lt1"/>
+          </a:fontRef>
+        </p:style>
+        <p:txBody>
+          <a:bodyPr rtlCol="0" anchor="ctr"/>
+          <a:lstStyle/>
+          <a:p>
+            <a:pPr algn="ctr"/>
+          </a:p>
+        </p:txBody>
+      </p:sp>
+      <p:sp>
+        <p:nvSpPr>
+          <p:cNvPr id="33" name="TextBox 32"/>
+          <p:cNvSpPr txBox="1"/>
+          <p:nvPr/>
+        </p:nvSpPr>
+        <p:spPr>
+          <a:xfrm>
+            <a:off x="7277400" y="4640400"/>
+            <a:ext cx="1102500" cy="162000"/>
+          </a:xfrm>
+          <a:prstGeom prst="rect">
+            <a:avLst/>
+          </a:prstGeom>
+          <a:noFill/>
+        </p:spPr>
+        <p:txBody>
+          <a:bodyPr wrap="square" anchor="t" lIns="0" rIns="0" tIns="0" bIns="0">
+            <a:spAutoFit/>
+          </a:bodyPr>
+          <a:lstStyle/>
+          <a:p>
+            <a:pPr algn="ctr"/>
+            <a:r>
+              <a:rPr sz="1000" b="1">
+                <a:solidFill>
+                  <a:srgbClr val="595959"/>
+                </a:solidFill>
+                <a:latin typeface="맑은 고딕"/>
+                <a:ea typeface="맑은 고딕"/>
+                <a:cs typeface="맑은 고딕"/>
+              </a:rPr>
+              <a:t>9월</a:t>
+            </a:r>
+          </a:p>
+        </p:txBody>
+      </p:sp>
+      <p:sp>
+        <p:nvSpPr>
+          <p:cNvPr id="34" name="TextBox 33"/>
+          <p:cNvSpPr txBox="1"/>
+          <p:nvPr/>
+        </p:nvSpPr>
+        <p:spPr>
+          <a:xfrm>
+            <a:off x="7277400" y="4910400"/>
+            <a:ext cx="1102500" cy="198000"/>
+          </a:xfrm>
+          <a:prstGeom prst="rect">
+            <a:avLst/>
+          </a:prstGeom>
+          <a:noFill/>
+        </p:spPr>
+        <p:txBody>
+          <a:bodyPr wrap="square" anchor="t" lIns="0" rIns="0" tIns="0" bIns="0">
+            <a:spAutoFit/>
+          </a:bodyPr>
+          <a:lstStyle/>
+          <a:p>
+            <a:pPr algn="ctr"/>
+            <a:r>
+              <a:rPr sz="1100" b="1">
+                <a:solidFill>
+                  <a:srgbClr val="000000"/>
+                </a:solidFill>
+                <a:latin typeface="맑은 고딕"/>
+                <a:ea typeface="맑은 고딕"/>
+                <a:cs typeface="맑은 고딕"/>
+              </a:rPr>
+              <a:t>전국 확대</a:t>
+            </a:r>
+          </a:p>
+        </p:txBody>
+      </p:sp>
+      <p:sp>
+        <p:nvSpPr>
+          <p:cNvPr id="35" name="Oval 34"/>
+          <p:cNvSpPr/>
+          <p:nvPr/>
+        </p:nvSpPr>
+        <p:spPr>
+          <a:xfrm>
+            <a:off x="8884350" y="4791600"/>
+            <a:ext cx="93600" cy="93600"/>
+          </a:xfrm>
+          <a:prstGeom prst="ellipse">
+            <a:avLst/>
+          </a:prstGeom>
+          <a:solidFill>
+            <a:srgbClr val="FFFFFF"/>
+          </a:solidFill>
+          <a:ln w="12700">
+            <a:solidFill>
+              <a:srgbClr val="000000"/>
+            </a:solidFill>
+          </a:ln>
+          <a:effectLst/>
+        </p:spPr>
+        <p:style>
+          <a:lnRef idx="1">
+            <a:schemeClr val="accent1"/>
+          </a:lnRef>
+          <a:fillRef idx="3">
+            <a:schemeClr val="accent1"/>
+          </a:fillRef>
+          <a:effectRef idx="2">
+            <a:schemeClr val="accent1"/>
+          </a:effectRef>
+          <a:fontRef idx="minor">
+            <a:schemeClr val="lt1"/>
+          </a:fontRef>
+        </p:style>
+        <p:txBody>
+          <a:bodyPr rtlCol="0" anchor="ctr"/>
+          <a:lstStyle/>
+          <a:p>
+            <a:pPr algn="ctr"/>
+          </a:p>
+        </p:txBody>
+      </p:sp>
+      <p:sp>
+        <p:nvSpPr>
+          <p:cNvPr id="36" name="TextBox 35"/>
+          <p:cNvSpPr txBox="1"/>
+          <p:nvPr/>
+        </p:nvSpPr>
+        <p:spPr>
+          <a:xfrm>
+            <a:off x="8379900" y="4640400"/>
+            <a:ext cx="1102500" cy="162000"/>
+          </a:xfrm>
+          <a:prstGeom prst="rect">
+            <a:avLst/>
+          </a:prstGeom>
+          <a:noFill/>
+        </p:spPr>
+        <p:txBody>
+          <a:bodyPr wrap="square" anchor="t" lIns="0" rIns="0" tIns="0" bIns="0">
+            <a:spAutoFit/>
+          </a:bodyPr>
+          <a:lstStyle/>
+          <a:p>
+            <a:pPr algn="ctr"/>
+            <a:r>
+              <a:rPr sz="1000" b="1">
+                <a:solidFill>
+                  <a:srgbClr val="595959"/>
+                </a:solidFill>
+                <a:latin typeface="맑은 고딕"/>
+                <a:ea typeface="맑은 고딕"/>
+                <a:cs typeface="맑은 고딕"/>
+              </a:rPr>
+              <a:t>연말</a:t>
+            </a:r>
+          </a:p>
+        </p:txBody>
+      </p:sp>
+      <p:sp>
+        <p:nvSpPr>
+          <p:cNvPr id="37" name="TextBox 36"/>
+          <p:cNvSpPr txBox="1"/>
+          <p:nvPr/>
+        </p:nvSpPr>
+        <p:spPr>
+          <a:xfrm>
+            <a:off x="8379900" y="4910400"/>
+            <a:ext cx="1102500" cy="198000"/>
+          </a:xfrm>
+          <a:prstGeom prst="rect">
+            <a:avLst/>
+          </a:prstGeom>
+          <a:noFill/>
+        </p:spPr>
+        <p:txBody>
+          <a:bodyPr wrap="square" anchor="t" lIns="0" rIns="0" tIns="0" bIns="0">
+            <a:spAutoFit/>
+          </a:bodyPr>
+          <a:lstStyle/>
+          <a:p>
+            <a:pPr algn="ctr"/>
+            <a:r>
+              <a:rPr sz="1100" b="1">
+                <a:solidFill>
+                  <a:srgbClr val="000000"/>
+                </a:solidFill>
+                <a:latin typeface="맑은 고딕"/>
+                <a:ea typeface="맑은 고딕"/>
+                <a:cs typeface="맑은 고딕"/>
+              </a:rPr>
+              <a:t>50여 점포</a:t>
+            </a:r>
+          </a:p>
+        </p:txBody>
+      </p:sp>
+      <p:cxnSp>
+        <p:nvCxnSpPr>
+          <p:cNvPr id="38" name="Connector 37"/>
+          <p:cNvCxnSpPr/>
+          <p:nvPr/>
+        </p:nvCxnSpPr>
+        <p:spPr>
+          <a:xfrm>
+            <a:off x="4953600" y="1475999"/>
+            <a:ext cx="0" cy="4086001"/>
+          </a:xfrm>
+          <a:prstGeom prst="bentConnector3">
+            <a:avLst/>
+          </a:prstGeom>
+          <a:ln w="9525">
+            <a:solidFill>
+              <a:srgbClr val="BFBFBF"/>
+            </a:solidFill>
+          </a:ln>
+        </p:spPr>
+        <p:style>
+          <a:lnRef idx="2">
+            <a:schemeClr val="accent1"/>
+          </a:lnRef>
+          <a:fillRef idx="0">
+            <a:schemeClr val="accent1"/>
+          </a:fillRef>
+          <a:effectRef idx="1">
+            <a:schemeClr val="accent1"/>
+          </a:effectRef>
+          <a:fontRef idx="minor">
+            <a:schemeClr val="tx1"/>
+          </a:fontRef>
+        </p:style>
+      </p:cxnSp>
+      <p:sp>
+        <p:nvSpPr>
+          <p:cNvPr id="39" name="Rectangle 38"/>
+          <p:cNvSpPr/>
+          <p:nvPr/>
+        </p:nvSpPr>
+        <p:spPr>
+          <a:xfrm>
+            <a:off x="424800" y="5868000"/>
+            <a:ext cx="9057600" cy="360000"/>
+          </a:xfrm>
+          <a:prstGeom prst="rect">
+            <a:avLst/>
+          </a:prstGeom>
+          <a:solidFill>
+            <a:srgbClr val="000066"/>
+          </a:solidFill>
+          <a:ln>
+            <a:noFill/>
+          </a:ln>
+          <a:effectLst/>
+        </p:spPr>
+        <p:style>
+          <a:lnRef idx="1">
+            <a:schemeClr val="accent1"/>
+          </a:lnRef>
+          <a:fillRef idx="3">
+            <a:schemeClr val="accent1"/>
+          </a:fillRef>
+          <a:effectRef idx="2">
+            <a:schemeClr val="accent1"/>
+          </a:effectRef>
+          <a:fontRef idx="minor">
+            <a:schemeClr val="lt1"/>
+          </a:fontRef>
+        </p:style>
+        <p:txBody>
+          <a:bodyPr rtlCol="0" anchor="ctr"/>
+          <a:lstStyle/>
+          <a:p>
+            <a:pPr algn="ctr"/>
+          </a:p>
+        </p:txBody>
+      </p:sp>
+      <p:sp>
+        <p:nvSpPr>
+          <p:cNvPr id="40" name="TextBox 39"/>
           <p:cNvSpPr txBox="1"/>
           <p:nvPr/>
         </p:nvSpPr>

--- a/reports/ssg-quickcommerce-onepager.pptx
+++ b/reports/ssg-quickcommerce-onepager.pptx
@@ -3314,7 +3314,7 @@
                 <a:ea typeface="맑은 고딕"/>
                 <a:cs typeface="맑은 고딕"/>
               </a:rPr>
-              <a:t>• 퀵커머스 수요 급증 속 공백</a:t>
+              <a:t>• 퀵커머스 수요 급증</a:t>
             </a:r>
           </a:p>
         </p:txBody>
@@ -3351,7 +3351,7 @@
                 <a:ea typeface="맑은 고딕"/>
                 <a:cs typeface="맑은 고딕"/>
               </a:rPr>
-              <a:t>- 이륜차 퀵커머스 소량 한정 → 대용량 공백</a:t>
+              <a:t>- 이륜차 퀵커머스 소량 한정 → 대용량 퀵커머스 서비스 공백</a:t>
             </a:r>
           </a:p>
         </p:txBody>
@@ -3425,7 +3425,7 @@
                 <a:ea typeface="맑은 고딕"/>
                 <a:cs typeface="맑은 고딕"/>
               </a:rPr>
-              <a:t>• 현행 배송 체계의 한계</a:t>
+              <a:t>• 현행 배송 체계</a:t>
             </a:r>
           </a:p>
         </p:txBody>
@@ -4505,7 +4505,7 @@
                 <a:ea typeface="맑은 고딕"/>
                 <a:cs typeface="맑은 고딕"/>
               </a:rPr>
-              <a:t>- 대용량 즉시배송 공백 흡수</a:t>
+              <a:t>- 대용량 즉시배송 서비스 공백 흡수</a:t>
             </a:r>
           </a:p>
         </p:txBody>

--- a/reports/ssg-quickcommerce-onepager.pptx
+++ b/reports/ssg-quickcommerce-onepager.pptx
@@ -4150,7 +4150,44 @@
         </p:nvSpPr>
         <p:spPr>
           <a:xfrm>
-            <a:off x="424800" y="4982400"/>
+            <a:off x="622800" y="4874400"/>
+            <a:ext cx="4212000" cy="172800"/>
+          </a:xfrm>
+          <a:prstGeom prst="rect">
+            <a:avLst/>
+          </a:prstGeom>
+          <a:noFill/>
+        </p:spPr>
+        <p:txBody>
+          <a:bodyPr wrap="square" anchor="t" lIns="0" rIns="0" tIns="0" bIns="0">
+            <a:spAutoFit/>
+          </a:bodyPr>
+          <a:lstStyle/>
+          <a:p>
+            <a:pPr algn="l"/>
+            <a:r>
+              <a:rPr sz="1100" b="0">
+                <a:solidFill>
+                  <a:srgbClr val="000000"/>
+                </a:solidFill>
+                <a:latin typeface="맑은 고딕"/>
+                <a:ea typeface="맑은 고딕"/>
+                <a:cs typeface="맑은 고딕"/>
+              </a:rPr>
+              <a:t>→ 즉시배송은 이륜 소량(바로퀵)뿐, 대용량 즉시배송 부재</a:t>
+            </a:r>
+          </a:p>
+        </p:txBody>
+      </p:sp>
+      <p:sp>
+        <p:nvSpPr>
+          <p:cNvPr id="13" name="TextBox 12"/>
+          <p:cNvSpPr txBox="1"/>
+          <p:nvPr/>
+        </p:nvSpPr>
+        <p:spPr>
+          <a:xfrm>
+            <a:off x="424800" y="5256000"/>
             <a:ext cx="4410000" cy="273600"/>
           </a:xfrm>
           <a:prstGeom prst="rect">
@@ -4181,13 +4218,13 @@
       </p:sp>
       <p:sp>
         <p:nvSpPr>
-          <p:cNvPr id="13" name="TextBox 12"/>
+          <p:cNvPr id="14" name="TextBox 13"/>
           <p:cNvSpPr txBox="1"/>
           <p:nvPr/>
         </p:nvSpPr>
         <p:spPr>
           <a:xfrm>
-            <a:off x="622800" y="5256000"/>
+            <a:off x="622800" y="5529600"/>
             <a:ext cx="4212000" cy="273600"/>
           </a:xfrm>
           <a:prstGeom prst="rect">
@@ -4218,7 +4255,7 @@
       </p:sp>
       <p:sp>
         <p:nvSpPr>
-          <p:cNvPr id="14" name="TextBox 13"/>
+          <p:cNvPr id="15" name="TextBox 14"/>
           <p:cNvSpPr txBox="1"/>
           <p:nvPr/>
         </p:nvSpPr>
@@ -4255,7 +4292,7 @@
       </p:sp>
       <p:cxnSp>
         <p:nvCxnSpPr>
-          <p:cNvPr id="15" name="Connector 14"/>
+          <p:cNvPr id="16" name="Connector 15"/>
           <p:cNvCxnSpPr/>
           <p:nvPr/>
         </p:nvCxnSpPr>
@@ -4290,7 +4327,7 @@
       </p:cxnSp>
       <p:sp>
         <p:nvSpPr>
-          <p:cNvPr id="16" name="TextBox 15"/>
+          <p:cNvPr id="17" name="TextBox 16"/>
           <p:cNvSpPr txBox="1"/>
           <p:nvPr/>
         </p:nvSpPr>
@@ -4327,7 +4364,7 @@
       </p:sp>
       <p:sp>
         <p:nvSpPr>
-          <p:cNvPr id="17" name="TextBox 16"/>
+          <p:cNvPr id="18" name="TextBox 17"/>
           <p:cNvSpPr txBox="1"/>
           <p:nvPr/>
         </p:nvSpPr>
@@ -4364,7 +4401,7 @@
       </p:sp>
       <p:sp>
         <p:nvSpPr>
-          <p:cNvPr id="18" name="TextBox 17"/>
+          <p:cNvPr id="19" name="TextBox 18"/>
           <p:cNvSpPr txBox="1"/>
           <p:nvPr/>
         </p:nvSpPr>
@@ -4401,7 +4438,7 @@
       </p:sp>
       <p:sp>
         <p:nvSpPr>
-          <p:cNvPr id="19" name="TextBox 18"/>
+          <p:cNvPr id="20" name="TextBox 19"/>
           <p:cNvSpPr txBox="1"/>
           <p:nvPr/>
         </p:nvSpPr>
@@ -4438,7 +4475,7 @@
       </p:sp>
       <p:sp>
         <p:nvSpPr>
-          <p:cNvPr id="20" name="TextBox 19"/>
+          <p:cNvPr id="21" name="TextBox 20"/>
           <p:cNvSpPr txBox="1"/>
           <p:nvPr/>
         </p:nvSpPr>
@@ -4475,7 +4512,7 @@
       </p:sp>
       <p:sp>
         <p:nvSpPr>
-          <p:cNvPr id="21" name="TextBox 20"/>
+          <p:cNvPr id="22" name="TextBox 21"/>
           <p:cNvSpPr txBox="1"/>
           <p:nvPr/>
         </p:nvSpPr>
@@ -4512,7 +4549,7 @@
       </p:sp>
       <p:sp>
         <p:nvSpPr>
-          <p:cNvPr id="22" name="TextBox 21"/>
+          <p:cNvPr id="23" name="TextBox 22"/>
           <p:cNvSpPr txBox="1"/>
           <p:nvPr/>
         </p:nvSpPr>
@@ -4549,7 +4586,7 @@
       </p:sp>
       <p:sp>
         <p:nvSpPr>
-          <p:cNvPr id="23" name="TextBox 22"/>
+          <p:cNvPr id="24" name="TextBox 23"/>
           <p:cNvSpPr txBox="1"/>
           <p:nvPr/>
         </p:nvSpPr>
@@ -4586,7 +4623,7 @@
       </p:sp>
       <p:sp>
         <p:nvSpPr>
-          <p:cNvPr id="24" name="TextBox 23"/>
+          <p:cNvPr id="25" name="TextBox 24"/>
           <p:cNvSpPr txBox="1"/>
           <p:nvPr/>
         </p:nvSpPr>
@@ -4623,7 +4660,7 @@
       </p:sp>
       <p:cxnSp>
         <p:nvCxnSpPr>
-          <p:cNvPr id="25" name="Connector 24"/>
+          <p:cNvPr id="26" name="Connector 25"/>
           <p:cNvCxnSpPr/>
           <p:nvPr/>
         </p:nvCxnSpPr>
@@ -4659,7 +4696,7 @@
       </p:cxnSp>
       <p:sp>
         <p:nvSpPr>
-          <p:cNvPr id="26" name="Oval 25"/>
+          <p:cNvPr id="27" name="Oval 26"/>
           <p:cNvSpPr/>
           <p:nvPr/>
         </p:nvSpPr>
@@ -4705,7 +4742,7 @@
       </p:sp>
       <p:sp>
         <p:nvSpPr>
-          <p:cNvPr id="27" name="TextBox 26"/>
+          <p:cNvPr id="28" name="TextBox 27"/>
           <p:cNvSpPr txBox="1"/>
           <p:nvPr/>
         </p:nvSpPr>
@@ -4742,7 +4779,7 @@
       </p:sp>
       <p:sp>
         <p:nvSpPr>
-          <p:cNvPr id="28" name="TextBox 27"/>
+          <p:cNvPr id="29" name="TextBox 28"/>
           <p:cNvSpPr txBox="1"/>
           <p:nvPr/>
         </p:nvSpPr>
@@ -4779,7 +4816,7 @@
       </p:sp>
       <p:sp>
         <p:nvSpPr>
-          <p:cNvPr id="29" name="Oval 28"/>
+          <p:cNvPr id="30" name="Oval 29"/>
           <p:cNvSpPr/>
           <p:nvPr/>
         </p:nvSpPr>
@@ -4825,7 +4862,7 @@
       </p:sp>
       <p:sp>
         <p:nvSpPr>
-          <p:cNvPr id="30" name="TextBox 29"/>
+          <p:cNvPr id="31" name="TextBox 30"/>
           <p:cNvSpPr txBox="1"/>
           <p:nvPr/>
         </p:nvSpPr>
@@ -4862,7 +4899,7 @@
       </p:sp>
       <p:sp>
         <p:nvSpPr>
-          <p:cNvPr id="31" name="TextBox 30"/>
+          <p:cNvPr id="32" name="TextBox 31"/>
           <p:cNvSpPr txBox="1"/>
           <p:nvPr/>
         </p:nvSpPr>
@@ -4899,7 +4936,7 @@
       </p:sp>
       <p:sp>
         <p:nvSpPr>
-          <p:cNvPr id="32" name="Oval 31"/>
+          <p:cNvPr id="33" name="Oval 32"/>
           <p:cNvSpPr/>
           <p:nvPr/>
         </p:nvSpPr>
@@ -4945,7 +4982,7 @@
       </p:sp>
       <p:sp>
         <p:nvSpPr>
-          <p:cNvPr id="33" name="TextBox 32"/>
+          <p:cNvPr id="34" name="TextBox 33"/>
           <p:cNvSpPr txBox="1"/>
           <p:nvPr/>
         </p:nvSpPr>
@@ -4982,7 +5019,7 @@
       </p:sp>
       <p:sp>
         <p:nvSpPr>
-          <p:cNvPr id="34" name="TextBox 33"/>
+          <p:cNvPr id="35" name="TextBox 34"/>
           <p:cNvSpPr txBox="1"/>
           <p:nvPr/>
         </p:nvSpPr>
@@ -5019,7 +5056,7 @@
       </p:sp>
       <p:sp>
         <p:nvSpPr>
-          <p:cNvPr id="35" name="Oval 34"/>
+          <p:cNvPr id="36" name="Oval 35"/>
           <p:cNvSpPr/>
           <p:nvPr/>
         </p:nvSpPr>
@@ -5065,7 +5102,7 @@
       </p:sp>
       <p:sp>
         <p:nvSpPr>
-          <p:cNvPr id="36" name="TextBox 35"/>
+          <p:cNvPr id="37" name="TextBox 36"/>
           <p:cNvSpPr txBox="1"/>
           <p:nvPr/>
         </p:nvSpPr>
@@ -5102,7 +5139,7 @@
       </p:sp>
       <p:sp>
         <p:nvSpPr>
-          <p:cNvPr id="37" name="TextBox 36"/>
+          <p:cNvPr id="38" name="TextBox 37"/>
           <p:cNvSpPr txBox="1"/>
           <p:nvPr/>
         </p:nvSpPr>
@@ -5139,7 +5176,7 @@
       </p:sp>
       <p:cxnSp>
         <p:nvCxnSpPr>
-          <p:cNvPr id="38" name="Connector 37"/>
+          <p:cNvPr id="39" name="Connector 38"/>
           <p:cNvCxnSpPr/>
           <p:nvPr/>
         </p:nvCxnSpPr>
@@ -5174,7 +5211,7 @@
       </p:cxnSp>
       <p:sp>
         <p:nvSpPr>
-          <p:cNvPr id="39" name="Rectangle 38"/>
+          <p:cNvPr id="40" name="Rectangle 39"/>
           <p:cNvSpPr/>
           <p:nvPr/>
         </p:nvSpPr>
@@ -5218,7 +5255,7 @@
       </p:sp>
       <p:sp>
         <p:nvSpPr>
-          <p:cNvPr id="40" name="TextBox 39"/>
+          <p:cNvPr id="41" name="TextBox 40"/>
           <p:cNvSpPr txBox="1"/>
           <p:nvPr/>
         </p:nvSpPr>

--- a/reports/ssg-quickcommerce-onepager.pptx
+++ b/reports/ssg-quickcommerce-onepager.pptx
@@ -3351,7 +3351,7 @@
                 <a:ea typeface="맑은 고딕"/>
                 <a:cs typeface="맑은 고딕"/>
               </a:rPr>
-              <a:t>- 이륜차 퀵커머스 소량 한정 → 대용량 퀵커머스 서비스 공백</a:t>
+              <a:t>- 바로퀵 매출 197%↑(6월) → 온디맨드 수요 실증</a:t>
             </a:r>
           </a:p>
         </p:txBody>
@@ -3388,7 +3388,7 @@
                 <a:ea typeface="맑은 고딕"/>
                 <a:cs typeface="맑은 고딕"/>
               </a:rPr>
-              <a:t>- 바로퀵 매출 197%↑(6월) → 수요 실증</a:t>
+              <a:t>- B마트 등 경쟁사도 대용량 품목 확대 추세</a:t>
             </a:r>
           </a:p>
         </p:txBody>
@@ -4174,7 +4174,7 @@
                 <a:ea typeface="맑은 고딕"/>
                 <a:cs typeface="맑은 고딕"/>
               </a:rPr>
-              <a:t>→ 즉시배송은 이륜 소량(바로퀵)뿐, 대용량 즉시배송 부재</a:t>
+              <a:t>→ 즉시배송은 이륜 소량뿐, 대용량 즉시배송 공백</a:t>
             </a:r>
           </a:p>
         </p:txBody>

--- a/reports/ssg-quickcommerce-onepager.pptx
+++ b/reports/ssg-quickcommerce-onepager.pptx
@@ -4481,7 +4481,7 @@
         </p:nvSpPr>
         <p:spPr>
           <a:xfrm>
-            <a:off x="5072400" y="3074399"/>
+            <a:off x="5072400" y="3272400"/>
             <a:ext cx="4410000" cy="273600"/>
           </a:xfrm>
           <a:prstGeom prst="rect">
@@ -4518,7 +4518,7 @@
         </p:nvSpPr>
         <p:spPr>
           <a:xfrm>
-            <a:off x="5270400" y="3347999"/>
+            <a:off x="5270400" y="3546000"/>
             <a:ext cx="4212000" cy="273600"/>
           </a:xfrm>
           <a:prstGeom prst="rect">
@@ -4555,7 +4555,7 @@
         </p:nvSpPr>
         <p:spPr>
           <a:xfrm>
-            <a:off x="5270400" y="3621599"/>
+            <a:off x="5270400" y="3819600"/>
             <a:ext cx="4212000" cy="273600"/>
           </a:xfrm>
           <a:prstGeom prst="rect">
@@ -4592,7 +4592,7 @@
         </p:nvSpPr>
         <p:spPr>
           <a:xfrm>
-            <a:off x="5270400" y="3895199"/>
+            <a:off x="5270400" y="4093199"/>
             <a:ext cx="4212000" cy="273600"/>
           </a:xfrm>
           <a:prstGeom prst="rect">
@@ -4629,7 +4629,7 @@
         </p:nvSpPr>
         <p:spPr>
           <a:xfrm>
-            <a:off x="5072400" y="4348799"/>
+            <a:off x="5072400" y="4744800"/>
             <a:ext cx="4410000" cy="273600"/>
           </a:xfrm>
           <a:prstGeom prst="rect">
@@ -4666,7 +4666,7 @@
         </p:nvCxnSpPr>
         <p:spPr>
           <a:xfrm>
-            <a:off x="5072400" y="4838400"/>
+            <a:off x="5072400" y="5234400"/>
             <a:ext cx="4410000" cy="0"/>
           </a:xfrm>
           <a:prstGeom prst="bentConnector3">
@@ -4702,7 +4702,7 @@
         </p:nvSpPr>
         <p:spPr>
           <a:xfrm>
-            <a:off x="5576850" y="4791600"/>
+            <a:off x="5576850" y="5187600"/>
             <a:ext cx="93600" cy="93600"/>
           </a:xfrm>
           <a:prstGeom prst="ellipse">
@@ -4748,7 +4748,7 @@
         </p:nvSpPr>
         <p:spPr>
           <a:xfrm>
-            <a:off x="5072400" y="4640400"/>
+            <a:off x="5072400" y="5036400"/>
             <a:ext cx="1102500" cy="162000"/>
           </a:xfrm>
           <a:prstGeom prst="rect">
@@ -4785,7 +4785,7 @@
         </p:nvSpPr>
         <p:spPr>
           <a:xfrm>
-            <a:off x="5072400" y="4910400"/>
+            <a:off x="5072400" y="5306400"/>
             <a:ext cx="1102500" cy="198000"/>
           </a:xfrm>
           <a:prstGeom prst="rect">
@@ -4822,7 +4822,7 @@
         </p:nvSpPr>
         <p:spPr>
           <a:xfrm>
-            <a:off x="6679350" y="4791600"/>
+            <a:off x="6679350" y="5187600"/>
             <a:ext cx="93600" cy="93600"/>
           </a:xfrm>
           <a:prstGeom prst="ellipse">
@@ -4868,7 +4868,7 @@
         </p:nvSpPr>
         <p:spPr>
           <a:xfrm>
-            <a:off x="6174900" y="4640400"/>
+            <a:off x="6174900" y="5036400"/>
             <a:ext cx="1102500" cy="162000"/>
           </a:xfrm>
           <a:prstGeom prst="rect">
@@ -4905,7 +4905,7 @@
         </p:nvSpPr>
         <p:spPr>
           <a:xfrm>
-            <a:off x="6174900" y="4910400"/>
+            <a:off x="6174900" y="5306400"/>
             <a:ext cx="1102500" cy="198000"/>
           </a:xfrm>
           <a:prstGeom prst="rect">
@@ -4942,7 +4942,7 @@
         </p:nvSpPr>
         <p:spPr>
           <a:xfrm>
-            <a:off x="7781850" y="4791600"/>
+            <a:off x="7781850" y="5187600"/>
             <a:ext cx="93600" cy="93600"/>
           </a:xfrm>
           <a:prstGeom prst="ellipse">
@@ -4988,7 +4988,7 @@
         </p:nvSpPr>
         <p:spPr>
           <a:xfrm>
-            <a:off x="7277400" y="4640400"/>
+            <a:off x="7277400" y="5036400"/>
             <a:ext cx="1102500" cy="162000"/>
           </a:xfrm>
           <a:prstGeom prst="rect">
@@ -5025,7 +5025,7 @@
         </p:nvSpPr>
         <p:spPr>
           <a:xfrm>
-            <a:off x="7277400" y="4910400"/>
+            <a:off x="7277400" y="5306400"/>
             <a:ext cx="1102500" cy="198000"/>
           </a:xfrm>
           <a:prstGeom prst="rect">
@@ -5062,7 +5062,7 @@
         </p:nvSpPr>
         <p:spPr>
           <a:xfrm>
-            <a:off x="8884350" y="4791600"/>
+            <a:off x="8884350" y="5187600"/>
             <a:ext cx="93600" cy="93600"/>
           </a:xfrm>
           <a:prstGeom prst="ellipse">
@@ -5108,7 +5108,7 @@
         </p:nvSpPr>
         <p:spPr>
           <a:xfrm>
-            <a:off x="8379900" y="4640400"/>
+            <a:off x="8379900" y="5036400"/>
             <a:ext cx="1102500" cy="162000"/>
           </a:xfrm>
           <a:prstGeom prst="rect">
@@ -5145,7 +5145,7 @@
         </p:nvSpPr>
         <p:spPr>
           <a:xfrm>
-            <a:off x="8379900" y="4910400"/>
+            <a:off x="8379900" y="5306400"/>
             <a:ext cx="1102500" cy="198000"/>
           </a:xfrm>
           <a:prstGeom prst="rect">

--- a/reports/ssg-quickcommerce-onepager.pptx
+++ b/reports/ssg-quickcommerce-onepager.pptx
@@ -3291,7 +3291,7 @@
         <p:spPr>
           <a:xfrm>
             <a:off x="424800" y="1800000"/>
-            <a:ext cx="4410000" cy="273600"/>
+            <a:ext cx="4410000" cy="223200"/>
           </a:xfrm>
           <a:prstGeom prst="rect">
             <a:avLst/>
@@ -3327,8 +3327,8 @@
         </p:nvSpPr>
         <p:spPr>
           <a:xfrm>
-            <a:off x="622800" y="2073600"/>
-            <a:ext cx="4212000" cy="273600"/>
+            <a:off x="622800" y="2023200"/>
+            <a:ext cx="4212000" cy="223200"/>
           </a:xfrm>
           <a:prstGeom prst="rect">
             <a:avLst/>
@@ -3364,8 +3364,8 @@
         </p:nvSpPr>
         <p:spPr>
           <a:xfrm>
-            <a:off x="622800" y="2347200"/>
-            <a:ext cx="4212000" cy="273600"/>
+            <a:off x="622800" y="2246400"/>
+            <a:ext cx="4212000" cy="223200"/>
           </a:xfrm>
           <a:prstGeom prst="rect">
             <a:avLst/>
@@ -3401,8 +3401,8 @@
         </p:nvSpPr>
         <p:spPr>
           <a:xfrm>
-            <a:off x="424800" y="2800800"/>
-            <a:ext cx="4410000" cy="273600"/>
+            <a:off x="424800" y="2613600"/>
+            <a:ext cx="4410000" cy="223200"/>
           </a:xfrm>
           <a:prstGeom prst="rect">
             <a:avLst/>
@@ -3439,7 +3439,7 @@
           <p:nvPr/>
         </p:nvGraphicFramePr>
         <p:xfrm>
-          <a:off x="424800" y="3074399"/>
+          <a:off x="424800" y="2836800"/>
           <a:ext cx="4409999" cy="1728000"/>
         </p:xfrm>
         <a:graphic>
@@ -4150,7 +4150,7 @@
         </p:nvSpPr>
         <p:spPr>
           <a:xfrm>
-            <a:off x="622800" y="4874400"/>
+            <a:off x="622800" y="4636800"/>
             <a:ext cx="4212000" cy="172800"/>
           </a:xfrm>
           <a:prstGeom prst="rect">
@@ -4187,8 +4187,8 @@
         </p:nvSpPr>
         <p:spPr>
           <a:xfrm>
-            <a:off x="424800" y="5256000"/>
-            <a:ext cx="4410000" cy="273600"/>
+            <a:off x="424800" y="4932000"/>
+            <a:ext cx="4410000" cy="223200"/>
           </a:xfrm>
           <a:prstGeom prst="rect">
             <a:avLst/>
@@ -4224,8 +4224,8 @@
         </p:nvSpPr>
         <p:spPr>
           <a:xfrm>
-            <a:off x="622800" y="5529600"/>
-            <a:ext cx="4212000" cy="273600"/>
+            <a:off x="622800" y="5155200"/>
+            <a:ext cx="4212000" cy="223200"/>
           </a:xfrm>
           <a:prstGeom prst="rect">
             <a:avLst/>
@@ -4334,7 +4334,7 @@
         <p:spPr>
           <a:xfrm>
             <a:off x="5072400" y="1800000"/>
-            <a:ext cx="4410000" cy="273600"/>
+            <a:ext cx="4410000" cy="223200"/>
           </a:xfrm>
           <a:prstGeom prst="rect">
             <a:avLst/>
@@ -4370,8 +4370,8 @@
         </p:nvSpPr>
         <p:spPr>
           <a:xfrm>
-            <a:off x="5270400" y="2073600"/>
-            <a:ext cx="4212000" cy="273600"/>
+            <a:off x="5270400" y="2023200"/>
+            <a:ext cx="4212000" cy="223200"/>
           </a:xfrm>
           <a:prstGeom prst="rect">
             <a:avLst/>
@@ -4394,7 +4394,7 @@
                 <a:ea typeface="맑은 고딕"/>
                 <a:cs typeface="맑은 고딕"/>
               </a:rPr>
-              <a:t>- 20시 주문 마감 → 2시간 내 배송</a:t>
+              <a:t>- 양재·하남점 인근, 20시 마감 → 2시간 내 배송</a:t>
             </a:r>
           </a:p>
         </p:txBody>
@@ -4407,8 +4407,8 @@
         </p:nvSpPr>
         <p:spPr>
           <a:xfrm>
-            <a:off x="5270400" y="2347200"/>
-            <a:ext cx="4212000" cy="273600"/>
+            <a:off x="5270400" y="2246400"/>
+            <a:ext cx="4212000" cy="223200"/>
           </a:xfrm>
           <a:prstGeom prst="rect">
             <a:avLst/>
@@ -4444,8 +4444,8 @@
         </p:nvSpPr>
         <p:spPr>
           <a:xfrm>
-            <a:off x="5270400" y="2620800"/>
-            <a:ext cx="4212000" cy="273600"/>
+            <a:off x="5270400" y="2469600"/>
+            <a:ext cx="4212000" cy="223200"/>
           </a:xfrm>
           <a:prstGeom prst="rect">
             <a:avLst/>
@@ -4468,7 +4468,7 @@
                 <a:ea typeface="맑은 고딕"/>
                 <a:cs typeface="맑은 고딕"/>
               </a:rPr>
-              <a:t>- 사륜차 활용, 대용량·중량 대응</a:t>
+              <a:t>- 쓱배송 사륜차로 대용량·중량 상품 대응</a:t>
             </a:r>
           </a:p>
         </p:txBody>
@@ -4481,8 +4481,119 @@
         </p:nvSpPr>
         <p:spPr>
           <a:xfrm>
-            <a:off x="5072400" y="3272400"/>
-            <a:ext cx="4410000" cy="273600"/>
+            <a:off x="5072400" y="2818800"/>
+            <a:ext cx="4410000" cy="223200"/>
+          </a:xfrm>
+          <a:prstGeom prst="rect">
+            <a:avLst/>
+          </a:prstGeom>
+          <a:noFill/>
+        </p:spPr>
+        <p:txBody>
+          <a:bodyPr wrap="square" anchor="t" lIns="0" rIns="0" tIns="0" bIns="0">
+            <a:spAutoFit/>
+          </a:bodyPr>
+          <a:lstStyle/>
+          <a:p>
+            <a:pPr algn="l"/>
+            <a:r>
+              <a:rPr sz="1200" b="1">
+                <a:solidFill>
+                  <a:srgbClr val="000000"/>
+                </a:solidFill>
+                <a:latin typeface="맑은 고딕"/>
+                <a:ea typeface="맑은 고딕"/>
+                <a:cs typeface="맑은 고딕"/>
+              </a:rPr>
+              <a:t>• 서비스 세분화</a:t>
+            </a:r>
+          </a:p>
+        </p:txBody>
+      </p:sp>
+      <p:sp>
+        <p:nvSpPr>
+          <p:cNvPr id="22" name="TextBox 21"/>
+          <p:cNvSpPr txBox="1"/>
+          <p:nvPr/>
+        </p:nvSpPr>
+        <p:spPr>
+          <a:xfrm>
+            <a:off x="5270400" y="3041999"/>
+            <a:ext cx="4212000" cy="223200"/>
+          </a:xfrm>
+          <a:prstGeom prst="rect">
+            <a:avLst/>
+          </a:prstGeom>
+          <a:noFill/>
+        </p:spPr>
+        <p:txBody>
+          <a:bodyPr wrap="square" anchor="t" lIns="0" rIns="0" tIns="0" bIns="0">
+            <a:spAutoFit/>
+          </a:bodyPr>
+          <a:lstStyle/>
+          <a:p>
+            <a:pPr algn="l"/>
+            <a:r>
+              <a:rPr sz="1100" b="0">
+                <a:solidFill>
+                  <a:srgbClr val="000000"/>
+                </a:solidFill>
+                <a:latin typeface="맑은 고딕"/>
+                <a:ea typeface="맑은 고딕"/>
+                <a:cs typeface="맑은 고딕"/>
+              </a:rPr>
+              <a:t>- 1시간 바로퀵(소량) / 2시간(대용량) 이원화</a:t>
+            </a:r>
+          </a:p>
+        </p:txBody>
+      </p:sp>
+      <p:sp>
+        <p:nvSpPr>
+          <p:cNvPr id="23" name="TextBox 22"/>
+          <p:cNvSpPr txBox="1"/>
+          <p:nvPr/>
+        </p:nvSpPr>
+        <p:spPr>
+          <a:xfrm>
+            <a:off x="5270400" y="3265199"/>
+            <a:ext cx="4212000" cy="223200"/>
+          </a:xfrm>
+          <a:prstGeom prst="rect">
+            <a:avLst/>
+          </a:prstGeom>
+          <a:noFill/>
+        </p:spPr>
+        <p:txBody>
+          <a:bodyPr wrap="square" anchor="t" lIns="0" rIns="0" tIns="0" bIns="0">
+            <a:spAutoFit/>
+          </a:bodyPr>
+          <a:lstStyle/>
+          <a:p>
+            <a:pPr algn="l"/>
+            <a:r>
+              <a:rPr sz="1100" b="0">
+                <a:solidFill>
+                  <a:srgbClr val="000000"/>
+                </a:solidFill>
+                <a:latin typeface="맑은 고딕"/>
+                <a:ea typeface="맑은 고딕"/>
+                <a:cs typeface="맑은 고딕"/>
+              </a:rPr>
+              <a:t>- 점포 15만 종 구색 기반 (바로퀵의 15배)</a:t>
+            </a:r>
+          </a:p>
+        </p:txBody>
+      </p:sp>
+      <p:sp>
+        <p:nvSpPr>
+          <p:cNvPr id="24" name="TextBox 23"/>
+          <p:cNvSpPr txBox="1"/>
+          <p:nvPr/>
+        </p:nvSpPr>
+        <p:spPr>
+          <a:xfrm>
+            <a:off x="5072400" y="3614399"/>
+            <a:ext cx="4410000" cy="223200"/>
           </a:xfrm>
           <a:prstGeom prst="rect">
             <a:avLst/>
@@ -4512,14 +4623,14 @@
       </p:sp>
       <p:sp>
         <p:nvSpPr>
-          <p:cNvPr id="22" name="TextBox 21"/>
+          <p:cNvPr id="25" name="TextBox 24"/>
           <p:cNvSpPr txBox="1"/>
           <p:nvPr/>
         </p:nvSpPr>
         <p:spPr>
           <a:xfrm>
-            <a:off x="5270400" y="3546000"/>
-            <a:ext cx="4212000" cy="273600"/>
+            <a:off x="5270400" y="3837599"/>
+            <a:ext cx="4212000" cy="223200"/>
           </a:xfrm>
           <a:prstGeom prst="rect">
             <a:avLst/>
@@ -4549,14 +4660,14 @@
       </p:sp>
       <p:sp>
         <p:nvSpPr>
-          <p:cNvPr id="23" name="TextBox 22"/>
+          <p:cNvPr id="26" name="TextBox 25"/>
           <p:cNvSpPr txBox="1"/>
           <p:nvPr/>
         </p:nvSpPr>
         <p:spPr>
           <a:xfrm>
-            <a:off x="5270400" y="3819600"/>
-            <a:ext cx="4212000" cy="273600"/>
+            <a:off x="5270400" y="4060799"/>
+            <a:ext cx="4212000" cy="223200"/>
           </a:xfrm>
           <a:prstGeom prst="rect">
             <a:avLst/>
@@ -4579,21 +4690,21 @@
                 <a:ea typeface="맑은 고딕"/>
                 <a:cs typeface="맑은 고딕"/>
               </a:rPr>
-              <a:t>- 점포 15만 종 구색 → 즉시배송 확장</a:t>
-            </a:r>
-          </a:p>
-        </p:txBody>
-      </p:sp>
-      <p:sp>
-        <p:nvSpPr>
-          <p:cNvPr id="24" name="TextBox 23"/>
+              <a:t>- 160여 PP센터 즉시배송 기지화·낮 가동률 제고</a:t>
+            </a:r>
+          </a:p>
+        </p:txBody>
+      </p:sp>
+      <p:sp>
+        <p:nvSpPr>
+          <p:cNvPr id="27" name="TextBox 26"/>
           <p:cNvSpPr txBox="1"/>
           <p:nvPr/>
         </p:nvSpPr>
         <p:spPr>
           <a:xfrm>
-            <a:off x="5270400" y="4093199"/>
-            <a:ext cx="4212000" cy="273600"/>
+            <a:off x="5270400" y="4283999"/>
+            <a:ext cx="4212000" cy="223200"/>
           </a:xfrm>
           <a:prstGeom prst="rect">
             <a:avLst/>
@@ -4616,21 +4727,21 @@
                 <a:ea typeface="맑은 고딕"/>
                 <a:cs typeface="맑은 고딕"/>
               </a:rPr>
-              <a:t>- PP센터 낮 시간대 가동률 제고</a:t>
-            </a:r>
-          </a:p>
-        </p:txBody>
-      </p:sp>
-      <p:sp>
-        <p:nvSpPr>
-          <p:cNvPr id="25" name="TextBox 24"/>
+              <a:t>- 규제 완화 시 새벽배송 확장 여지</a:t>
+            </a:r>
+          </a:p>
+        </p:txBody>
+      </p:sp>
+      <p:sp>
+        <p:nvSpPr>
+          <p:cNvPr id="28" name="TextBox 27"/>
           <p:cNvSpPr txBox="1"/>
           <p:nvPr/>
         </p:nvSpPr>
         <p:spPr>
           <a:xfrm>
-            <a:off x="5072400" y="4744800"/>
-            <a:ext cx="4410000" cy="273600"/>
+            <a:off x="5072400" y="4633199"/>
+            <a:ext cx="4410000" cy="223200"/>
           </a:xfrm>
           <a:prstGeom prst="rect">
             <a:avLst/>
@@ -4660,13 +4771,13 @@
       </p:sp>
       <p:cxnSp>
         <p:nvCxnSpPr>
-          <p:cNvPr id="26" name="Connector 25"/>
+          <p:cNvPr id="29" name="Connector 28"/>
           <p:cNvCxnSpPr/>
           <p:nvPr/>
         </p:nvCxnSpPr>
         <p:spPr>
           <a:xfrm>
-            <a:off x="5072400" y="5234400"/>
+            <a:off x="5072400" y="5072399"/>
             <a:ext cx="4410000" cy="0"/>
           </a:xfrm>
           <a:prstGeom prst="bentConnector3">
@@ -4696,13 +4807,13 @@
       </p:cxnSp>
       <p:sp>
         <p:nvSpPr>
-          <p:cNvPr id="27" name="Oval 26"/>
+          <p:cNvPr id="30" name="Oval 29"/>
           <p:cNvSpPr/>
           <p:nvPr/>
         </p:nvSpPr>
         <p:spPr>
           <a:xfrm>
-            <a:off x="5576850" y="5187600"/>
+            <a:off x="5576850" y="5025599"/>
             <a:ext cx="93600" cy="93600"/>
           </a:xfrm>
           <a:prstGeom prst="ellipse">
@@ -4742,13 +4853,13 @@
       </p:sp>
       <p:sp>
         <p:nvSpPr>
-          <p:cNvPr id="28" name="TextBox 27"/>
+          <p:cNvPr id="31" name="TextBox 30"/>
           <p:cNvSpPr txBox="1"/>
           <p:nvPr/>
         </p:nvSpPr>
         <p:spPr>
           <a:xfrm>
-            <a:off x="5072400" y="5036400"/>
+            <a:off x="5072400" y="4874399"/>
             <a:ext cx="1102500" cy="162000"/>
           </a:xfrm>
           <a:prstGeom prst="rect">
@@ -4779,13 +4890,13 @@
       </p:sp>
       <p:sp>
         <p:nvSpPr>
-          <p:cNvPr id="29" name="TextBox 28"/>
+          <p:cNvPr id="32" name="TextBox 31"/>
           <p:cNvSpPr txBox="1"/>
           <p:nvPr/>
         </p:nvSpPr>
         <p:spPr>
           <a:xfrm>
-            <a:off x="5072400" y="5306400"/>
+            <a:off x="5072400" y="5144399"/>
             <a:ext cx="1102500" cy="198000"/>
           </a:xfrm>
           <a:prstGeom prst="rect">
@@ -4816,13 +4927,13 @@
       </p:sp>
       <p:sp>
         <p:nvSpPr>
-          <p:cNvPr id="30" name="Oval 29"/>
+          <p:cNvPr id="33" name="Oval 32"/>
           <p:cNvSpPr/>
           <p:nvPr/>
         </p:nvSpPr>
         <p:spPr>
           <a:xfrm>
-            <a:off x="6679350" y="5187600"/>
+            <a:off x="6679350" y="5025599"/>
             <a:ext cx="93600" cy="93600"/>
           </a:xfrm>
           <a:prstGeom prst="ellipse">
@@ -4862,13 +4973,13 @@
       </p:sp>
       <p:sp>
         <p:nvSpPr>
-          <p:cNvPr id="31" name="TextBox 30"/>
+          <p:cNvPr id="34" name="TextBox 33"/>
           <p:cNvSpPr txBox="1"/>
           <p:nvPr/>
         </p:nvSpPr>
         <p:spPr>
           <a:xfrm>
-            <a:off x="6174900" y="5036400"/>
+            <a:off x="6174900" y="4874399"/>
             <a:ext cx="1102500" cy="162000"/>
           </a:xfrm>
           <a:prstGeom prst="rect">
@@ -4899,13 +5010,13 @@
       </p:sp>
       <p:sp>
         <p:nvSpPr>
-          <p:cNvPr id="32" name="TextBox 31"/>
+          <p:cNvPr id="35" name="TextBox 34"/>
           <p:cNvSpPr txBox="1"/>
           <p:nvPr/>
         </p:nvSpPr>
         <p:spPr>
           <a:xfrm>
-            <a:off x="6174900" y="5306400"/>
+            <a:off x="6174900" y="5144399"/>
             <a:ext cx="1102500" cy="198000"/>
           </a:xfrm>
           <a:prstGeom prst="rect">
@@ -4936,13 +5047,13 @@
       </p:sp>
       <p:sp>
         <p:nvSpPr>
-          <p:cNvPr id="33" name="Oval 32"/>
+          <p:cNvPr id="36" name="Oval 35"/>
           <p:cNvSpPr/>
           <p:nvPr/>
         </p:nvSpPr>
         <p:spPr>
           <a:xfrm>
-            <a:off x="7781850" y="5187600"/>
+            <a:off x="7781850" y="5025599"/>
             <a:ext cx="93600" cy="93600"/>
           </a:xfrm>
           <a:prstGeom prst="ellipse">
@@ -4982,13 +5093,13 @@
       </p:sp>
       <p:sp>
         <p:nvSpPr>
-          <p:cNvPr id="34" name="TextBox 33"/>
+          <p:cNvPr id="37" name="TextBox 36"/>
           <p:cNvSpPr txBox="1"/>
           <p:nvPr/>
         </p:nvSpPr>
         <p:spPr>
           <a:xfrm>
-            <a:off x="7277400" y="5036400"/>
+            <a:off x="7277400" y="4874399"/>
             <a:ext cx="1102500" cy="162000"/>
           </a:xfrm>
           <a:prstGeom prst="rect">
@@ -5019,13 +5130,13 @@
       </p:sp>
       <p:sp>
         <p:nvSpPr>
-          <p:cNvPr id="35" name="TextBox 34"/>
+          <p:cNvPr id="38" name="TextBox 37"/>
           <p:cNvSpPr txBox="1"/>
           <p:nvPr/>
         </p:nvSpPr>
         <p:spPr>
           <a:xfrm>
-            <a:off x="7277400" y="5306400"/>
+            <a:off x="7277400" y="5144399"/>
             <a:ext cx="1102500" cy="198000"/>
           </a:xfrm>
           <a:prstGeom prst="rect">
@@ -5056,13 +5167,13 @@
       </p:sp>
       <p:sp>
         <p:nvSpPr>
-          <p:cNvPr id="36" name="Oval 35"/>
+          <p:cNvPr id="39" name="Oval 38"/>
           <p:cNvSpPr/>
           <p:nvPr/>
         </p:nvSpPr>
         <p:spPr>
           <a:xfrm>
-            <a:off x="8884350" y="5187600"/>
+            <a:off x="8884350" y="5025599"/>
             <a:ext cx="93600" cy="93600"/>
           </a:xfrm>
           <a:prstGeom prst="ellipse">
@@ -5102,13 +5213,13 @@
       </p:sp>
       <p:sp>
         <p:nvSpPr>
-          <p:cNvPr id="37" name="TextBox 36"/>
+          <p:cNvPr id="40" name="TextBox 39"/>
           <p:cNvSpPr txBox="1"/>
           <p:nvPr/>
         </p:nvSpPr>
         <p:spPr>
           <a:xfrm>
-            <a:off x="8379900" y="5036400"/>
+            <a:off x="8379900" y="4874399"/>
             <a:ext cx="1102500" cy="162000"/>
           </a:xfrm>
           <a:prstGeom prst="rect">
@@ -5139,13 +5250,13 @@
       </p:sp>
       <p:sp>
         <p:nvSpPr>
-          <p:cNvPr id="38" name="TextBox 37"/>
+          <p:cNvPr id="41" name="TextBox 40"/>
           <p:cNvSpPr txBox="1"/>
           <p:nvPr/>
         </p:nvSpPr>
         <p:spPr>
           <a:xfrm>
-            <a:off x="8379900" y="5306400"/>
+            <a:off x="8379900" y="5144399"/>
             <a:ext cx="1102500" cy="198000"/>
           </a:xfrm>
           <a:prstGeom prst="rect">
@@ -5176,7 +5287,7 @@
       </p:sp>
       <p:cxnSp>
         <p:nvCxnSpPr>
-          <p:cNvPr id="39" name="Connector 38"/>
+          <p:cNvPr id="42" name="Connector 41"/>
           <p:cNvCxnSpPr/>
           <p:nvPr/>
         </p:nvCxnSpPr>
@@ -5211,7 +5322,7 @@
       </p:cxnSp>
       <p:sp>
         <p:nvSpPr>
-          <p:cNvPr id="40" name="Rectangle 39"/>
+          <p:cNvPr id="43" name="Rectangle 42"/>
           <p:cNvSpPr/>
           <p:nvPr/>
         </p:nvSpPr>
@@ -5255,7 +5366,7 @@
       </p:sp>
       <p:sp>
         <p:nvSpPr>
-          <p:cNvPr id="41" name="TextBox 40"/>
+          <p:cNvPr id="44" name="TextBox 43"/>
           <p:cNvSpPr txBox="1"/>
           <p:nvPr/>
         </p:nvSpPr>

--- a/reports/ssg-quickcommerce-onepager.pptx
+++ b/reports/ssg-quickcommerce-onepager.pptx
@@ -3290,7 +3290,7 @@
         </p:nvSpPr>
         <p:spPr>
           <a:xfrm>
-            <a:off x="424800" y="1800000"/>
+            <a:off x="424800" y="1890000"/>
             <a:ext cx="4410000" cy="223200"/>
           </a:xfrm>
           <a:prstGeom prst="rect">
@@ -3327,7 +3327,7 @@
         </p:nvSpPr>
         <p:spPr>
           <a:xfrm>
-            <a:off x="622800" y="2023200"/>
+            <a:off x="622800" y="2113200"/>
             <a:ext cx="4212000" cy="223200"/>
           </a:xfrm>
           <a:prstGeom prst="rect">
@@ -3364,7 +3364,7 @@
         </p:nvSpPr>
         <p:spPr>
           <a:xfrm>
-            <a:off x="622800" y="2246400"/>
+            <a:off x="622800" y="2336400"/>
             <a:ext cx="4212000" cy="223200"/>
           </a:xfrm>
           <a:prstGeom prst="rect">
@@ -3401,7 +3401,7 @@
         </p:nvSpPr>
         <p:spPr>
           <a:xfrm>
-            <a:off x="424800" y="2613600"/>
+            <a:off x="424800" y="2703600"/>
             <a:ext cx="4410000" cy="223200"/>
           </a:xfrm>
           <a:prstGeom prst="rect">
@@ -3439,7 +3439,7 @@
           <p:nvPr/>
         </p:nvGraphicFramePr>
         <p:xfrm>
-          <a:off x="424800" y="2836800"/>
+          <a:off x="424800" y="2926800"/>
           <a:ext cx="4409999" cy="1728000"/>
         </p:xfrm>
         <a:graphic>
@@ -4150,7 +4150,7 @@
         </p:nvSpPr>
         <p:spPr>
           <a:xfrm>
-            <a:off x="622800" y="4636800"/>
+            <a:off x="622800" y="4726800"/>
             <a:ext cx="4212000" cy="172800"/>
           </a:xfrm>
           <a:prstGeom prst="rect">
@@ -4187,7 +4187,7 @@
         </p:nvSpPr>
         <p:spPr>
           <a:xfrm>
-            <a:off x="424800" y="4932000"/>
+            <a:off x="424800" y="5022000"/>
             <a:ext cx="4410000" cy="223200"/>
           </a:xfrm>
           <a:prstGeom prst="rect">
@@ -4224,7 +4224,7 @@
         </p:nvSpPr>
         <p:spPr>
           <a:xfrm>
-            <a:off x="622800" y="5155200"/>
+            <a:off x="622800" y="5245200"/>
             <a:ext cx="4212000" cy="223200"/>
           </a:xfrm>
           <a:prstGeom prst="rect">
@@ -4333,7 +4333,7 @@
         </p:nvSpPr>
         <p:spPr>
           <a:xfrm>
-            <a:off x="5072400" y="1800000"/>
+            <a:off x="5072400" y="1890000"/>
             <a:ext cx="4410000" cy="223200"/>
           </a:xfrm>
           <a:prstGeom prst="rect">
@@ -4370,7 +4370,7 @@
         </p:nvSpPr>
         <p:spPr>
           <a:xfrm>
-            <a:off x="5270400" y="2023200"/>
+            <a:off x="5270400" y="2113200"/>
             <a:ext cx="4212000" cy="223200"/>
           </a:xfrm>
           <a:prstGeom prst="rect">
@@ -4407,7 +4407,7 @@
         </p:nvSpPr>
         <p:spPr>
           <a:xfrm>
-            <a:off x="5270400" y="2246400"/>
+            <a:off x="5270400" y="2336400"/>
             <a:ext cx="4212000" cy="223200"/>
           </a:xfrm>
           <a:prstGeom prst="rect">
@@ -4444,7 +4444,7 @@
         </p:nvSpPr>
         <p:spPr>
           <a:xfrm>
-            <a:off x="5270400" y="2469600"/>
+            <a:off x="5270400" y="2559600"/>
             <a:ext cx="4212000" cy="223200"/>
           </a:xfrm>
           <a:prstGeom prst="rect">
@@ -4481,7 +4481,7 @@
         </p:nvSpPr>
         <p:spPr>
           <a:xfrm>
-            <a:off x="5072400" y="2818800"/>
+            <a:off x="5072400" y="2908800"/>
             <a:ext cx="4410000" cy="223200"/>
           </a:xfrm>
           <a:prstGeom prst="rect">
@@ -4518,7 +4518,7 @@
         </p:nvSpPr>
         <p:spPr>
           <a:xfrm>
-            <a:off x="5270400" y="3041999"/>
+            <a:off x="5270400" y="3131999"/>
             <a:ext cx="4212000" cy="223200"/>
           </a:xfrm>
           <a:prstGeom prst="rect">
@@ -4555,7 +4555,7 @@
         </p:nvSpPr>
         <p:spPr>
           <a:xfrm>
-            <a:off x="5270400" y="3265199"/>
+            <a:off x="5270400" y="3355199"/>
             <a:ext cx="4212000" cy="223200"/>
           </a:xfrm>
           <a:prstGeom prst="rect">
@@ -4592,7 +4592,7 @@
         </p:nvSpPr>
         <p:spPr>
           <a:xfrm>
-            <a:off x="5072400" y="3614399"/>
+            <a:off x="5072400" y="3704399"/>
             <a:ext cx="4410000" cy="223200"/>
           </a:xfrm>
           <a:prstGeom prst="rect">
@@ -4629,7 +4629,7 @@
         </p:nvSpPr>
         <p:spPr>
           <a:xfrm>
-            <a:off x="5270400" y="3837599"/>
+            <a:off x="5270400" y="3927599"/>
             <a:ext cx="4212000" cy="223200"/>
           </a:xfrm>
           <a:prstGeom prst="rect">
@@ -4666,7 +4666,7 @@
         </p:nvSpPr>
         <p:spPr>
           <a:xfrm>
-            <a:off x="5270400" y="4060799"/>
+            <a:off x="5270400" y="4150799"/>
             <a:ext cx="4212000" cy="223200"/>
           </a:xfrm>
           <a:prstGeom prst="rect">
@@ -4703,7 +4703,7 @@
         </p:nvSpPr>
         <p:spPr>
           <a:xfrm>
-            <a:off x="5270400" y="4283999"/>
+            <a:off x="5270400" y="4373999"/>
             <a:ext cx="4212000" cy="223200"/>
           </a:xfrm>
           <a:prstGeom prst="rect">
@@ -4740,7 +4740,7 @@
         </p:nvSpPr>
         <p:spPr>
           <a:xfrm>
-            <a:off x="5072400" y="4633199"/>
+            <a:off x="5072400" y="4723199"/>
             <a:ext cx="4410000" cy="223200"/>
           </a:xfrm>
           <a:prstGeom prst="rect">
@@ -4777,7 +4777,7 @@
         </p:nvCxnSpPr>
         <p:spPr>
           <a:xfrm>
-            <a:off x="5072400" y="5072399"/>
+            <a:off x="5072400" y="5162399"/>
             <a:ext cx="4410000" cy="0"/>
           </a:xfrm>
           <a:prstGeom prst="bentConnector3">
@@ -4813,7 +4813,7 @@
         </p:nvSpPr>
         <p:spPr>
           <a:xfrm>
-            <a:off x="5576850" y="5025599"/>
+            <a:off x="5576850" y="5115599"/>
             <a:ext cx="93600" cy="93600"/>
           </a:xfrm>
           <a:prstGeom prst="ellipse">
@@ -4859,7 +4859,7 @@
         </p:nvSpPr>
         <p:spPr>
           <a:xfrm>
-            <a:off x="5072400" y="4874399"/>
+            <a:off x="5072400" y="4964399"/>
             <a:ext cx="1102500" cy="162000"/>
           </a:xfrm>
           <a:prstGeom prst="rect">
@@ -4896,7 +4896,7 @@
         </p:nvSpPr>
         <p:spPr>
           <a:xfrm>
-            <a:off x="5072400" y="5144399"/>
+            <a:off x="5072400" y="5234399"/>
             <a:ext cx="1102500" cy="198000"/>
           </a:xfrm>
           <a:prstGeom prst="rect">
@@ -4933,7 +4933,7 @@
         </p:nvSpPr>
         <p:spPr>
           <a:xfrm>
-            <a:off x="6679350" y="5025599"/>
+            <a:off x="6679350" y="5115599"/>
             <a:ext cx="93600" cy="93600"/>
           </a:xfrm>
           <a:prstGeom prst="ellipse">
@@ -4979,7 +4979,7 @@
         </p:nvSpPr>
         <p:spPr>
           <a:xfrm>
-            <a:off x="6174900" y="4874399"/>
+            <a:off x="6174900" y="4964399"/>
             <a:ext cx="1102500" cy="162000"/>
           </a:xfrm>
           <a:prstGeom prst="rect">
@@ -5016,7 +5016,7 @@
         </p:nvSpPr>
         <p:spPr>
           <a:xfrm>
-            <a:off x="6174900" y="5144399"/>
+            <a:off x="6174900" y="5234399"/>
             <a:ext cx="1102500" cy="198000"/>
           </a:xfrm>
           <a:prstGeom prst="rect">
@@ -5053,7 +5053,7 @@
         </p:nvSpPr>
         <p:spPr>
           <a:xfrm>
-            <a:off x="7781850" y="5025599"/>
+            <a:off x="7781850" y="5115599"/>
             <a:ext cx="93600" cy="93600"/>
           </a:xfrm>
           <a:prstGeom prst="ellipse">
@@ -5099,7 +5099,7 @@
         </p:nvSpPr>
         <p:spPr>
           <a:xfrm>
-            <a:off x="7277400" y="4874399"/>
+            <a:off x="7277400" y="4964399"/>
             <a:ext cx="1102500" cy="162000"/>
           </a:xfrm>
           <a:prstGeom prst="rect">
@@ -5136,7 +5136,7 @@
         </p:nvSpPr>
         <p:spPr>
           <a:xfrm>
-            <a:off x="7277400" y="5144399"/>
+            <a:off x="7277400" y="5234399"/>
             <a:ext cx="1102500" cy="198000"/>
           </a:xfrm>
           <a:prstGeom prst="rect">
@@ -5173,7 +5173,7 @@
         </p:nvSpPr>
         <p:spPr>
           <a:xfrm>
-            <a:off x="8884350" y="5025599"/>
+            <a:off x="8884350" y="5115599"/>
             <a:ext cx="93600" cy="93600"/>
           </a:xfrm>
           <a:prstGeom prst="ellipse">
@@ -5219,7 +5219,7 @@
         </p:nvSpPr>
         <p:spPr>
           <a:xfrm>
-            <a:off x="8379900" y="4874399"/>
+            <a:off x="8379900" y="4964399"/>
             <a:ext cx="1102500" cy="162000"/>
           </a:xfrm>
           <a:prstGeom prst="rect">
@@ -5256,7 +5256,7 @@
         </p:nvSpPr>
         <p:spPr>
           <a:xfrm>
-            <a:off x="8379900" y="5144399"/>
+            <a:off x="8379900" y="5234399"/>
             <a:ext cx="1102500" cy="198000"/>
           </a:xfrm>
           <a:prstGeom prst="rect">
@@ -5294,7 +5294,7 @@
         <p:spPr>
           <a:xfrm>
             <a:off x="4953600" y="1475999"/>
-            <a:ext cx="0" cy="4086001"/>
+            <a:ext cx="0" cy="4050001"/>
           </a:xfrm>
           <a:prstGeom prst="bentConnector3">
             <a:avLst/>
@@ -5328,7 +5328,7 @@
         </p:nvSpPr>
         <p:spPr>
           <a:xfrm>
-            <a:off x="424800" y="5868000"/>
+            <a:off x="424800" y="5634000"/>
             <a:ext cx="9057600" cy="360000"/>
           </a:xfrm>
           <a:prstGeom prst="rect">
@@ -5372,7 +5372,7 @@
         </p:nvSpPr>
         <p:spPr>
           <a:xfrm>
-            <a:off x="424800" y="5868000"/>
+            <a:off x="424800" y="5634000"/>
             <a:ext cx="9057600" cy="360000"/>
           </a:xfrm>
           <a:prstGeom prst="rect">

--- a/reports/ssg-quickcommerce-onepager.pptx
+++ b/reports/ssg-quickcommerce-onepager.pptx
@@ -3168,7 +3168,7 @@
                 <a:ea typeface="맑은 고딕"/>
                 <a:cs typeface="맑은 고딕"/>
               </a:rPr>
-              <a:t>■ 양재·하남점 '2시간 배송' 시범 도입 — 대용량 장보기 공략·PP센터 가동률 제고</a:t>
+              <a:t>■ 양재·하남점 '2시간 배송' 시범 도입 — 대용량 장보기 공략·점포 물류기지 가동률 제고</a:t>
             </a:r>
           </a:p>
         </p:txBody>
@@ -3351,7 +3351,7 @@
                 <a:ea typeface="맑은 고딕"/>
                 <a:cs typeface="맑은 고딕"/>
               </a:rPr>
-              <a:t>- 바로퀵 매출 197%↑(6월) → 온디맨드 수요 실증</a:t>
+              <a:t>- 1시간 오토바이 배송(바로퀵) 매출 197%↑(6월)</a:t>
             </a:r>
           </a:p>
         </p:txBody>
@@ -3833,7 +3833,7 @@
                           <a:ea typeface="맑은 고딕"/>
                           <a:cs typeface="맑은 고딕"/>
                         </a:rPr>
-                        <a:t>네오 한정</a:t>
+                        <a:t>자체 물류센터 '네오' 한정</a:t>
                       </a:r>
                     </a:p>
                   </a:txBody>
@@ -4248,7 +4248,7 @@
                 <a:ea typeface="맑은 고딕"/>
                 <a:cs typeface="맑은 고딕"/>
               </a:rPr>
-              <a:t>- 유통산업발전법 → PP센터 새벽배송 불가</a:t>
+              <a:t>- 유통산업발전법 → 점포 물류거점(PP센터) 새벽 불가</a:t>
             </a:r>
           </a:p>
         </p:txBody>

--- a/reports/ssg-quickcommerce-onepager.pptx
+++ b/reports/ssg-quickcommerce-onepager.pptx
@@ -3440,7 +3440,7 @@
         </p:nvGraphicFramePr>
         <p:xfrm>
           <a:off x="424800" y="2926800"/>
-          <a:ext cx="4409999" cy="1728000"/>
+          <a:ext cx="4410000" cy="1728000"/>
         </p:xfrm>
         <a:graphic>
           <a:graphicData uri="http://schemas.openxmlformats.org/drawingml/2006/table">
@@ -3449,9 +3449,10 @@
                 <a:tableStyleId>{5C22544A-7EE6-4342-B048-85BDC9FD1C3A}</a:tableStyleId>
               </a:tblPr>
               <a:tblGrid>
-                <a:gridCol w="1152000"/>
-                <a:gridCol w="1512000"/>
-                <a:gridCol w="1745999"/>
+                <a:gridCol w="1080000"/>
+                <a:gridCol w="1404000"/>
+                <a:gridCol w="666000"/>
+                <a:gridCol w="1260000"/>
               </a:tblGrid>
               <a:tr h="345600">
                 <a:tc>
@@ -3514,7 +3515,7 @@
                           <a:ea typeface="맑은 고딕"/>
                           <a:cs typeface="맑은 고딕"/>
                         </a:rPr>
-                        <a:t>속도 · 수단</a:t>
+                        <a:t>배송 형태</a:t>
                       </a:r>
                     </a:p>
                   </a:txBody>
@@ -3559,7 +3560,52 @@
                           <a:ea typeface="맑은 고딕"/>
                           <a:cs typeface="맑은 고딕"/>
                         </a:rPr>
-                        <a:t>특징</a:t>
+                        <a:t>운송 수단</a:t>
+                      </a:r>
+                    </a:p>
+                  </a:txBody>
+                  <a:tcPr anchor="ctr" marL="36000" marR="36000" marT="0" marB="0">
+                    <a:lnL w="9525" cap="flat">
+                      <a:solidFill>
+                        <a:srgbClr val="BFBFBF"/>
+                      </a:solidFill>
+                    </a:lnL>
+                    <a:lnR w="9525" cap="flat">
+                      <a:solidFill>
+                        <a:srgbClr val="BFBFBF"/>
+                      </a:solidFill>
+                    </a:lnR>
+                    <a:lnT w="9525" cap="flat">
+                      <a:solidFill>
+                        <a:srgbClr val="BFBFBF"/>
+                      </a:solidFill>
+                    </a:lnT>
+                    <a:lnB w="9525" cap="flat">
+                      <a:solidFill>
+                        <a:srgbClr val="BFBFBF"/>
+                      </a:solidFill>
+                    </a:lnB>
+                    <a:solidFill>
+                      <a:srgbClr val="EAEEF6"/>
+                    </a:solidFill>
+                  </a:tcPr>
+                </a:tc>
+                <a:tc>
+                  <a:txBody>
+                    <a:bodyPr wrap="square"/>
+                    <a:lstStyle/>
+                    <a:p>
+                      <a:pPr algn="ctr"/>
+                      <a:r>
+                        <a:rPr sz="1000" b="1">
+                          <a:solidFill>
+                            <a:srgbClr val="000000"/>
+                          </a:solidFill>
+                          <a:latin typeface="맑은 고딕"/>
+                          <a:ea typeface="맑은 고딕"/>
+                          <a:cs typeface="맑은 고딕"/>
+                        </a:rPr>
+                        <a:t>취급 규모</a:t>
                       </a:r>
                     </a:p>
                   </a:txBody>
@@ -3651,7 +3697,7 @@
                           <a:ea typeface="맑은 고딕"/>
                           <a:cs typeface="맑은 고딕"/>
                         </a:rPr>
-                        <a:t>예약 4~5시간 · 사륜</a:t>
+                        <a:t>예약 (2~5개 구간)</a:t>
                       </a:r>
                     </a:p>
                   </a:txBody>
@@ -3696,7 +3742,52 @@
                           <a:ea typeface="맑은 고딕"/>
                           <a:cs typeface="맑은 고딕"/>
                         </a:rPr>
-                        <a:t>지역별 2~5개 구간</a:t>
+                        <a:t>사륜차</a:t>
+                      </a:r>
+                    </a:p>
+                  </a:txBody>
+                  <a:tcPr anchor="ctr" marL="36000" marR="36000" marT="0" marB="0">
+                    <a:lnL w="9525" cap="flat">
+                      <a:solidFill>
+                        <a:srgbClr val="BFBFBF"/>
+                      </a:solidFill>
+                    </a:lnL>
+                    <a:lnR w="9525" cap="flat">
+                      <a:solidFill>
+                        <a:srgbClr val="BFBFBF"/>
+                      </a:solidFill>
+                    </a:lnR>
+                    <a:lnT w="9525" cap="flat">
+                      <a:solidFill>
+                        <a:srgbClr val="BFBFBF"/>
+                      </a:solidFill>
+                    </a:lnT>
+                    <a:lnB w="9525" cap="flat">
+                      <a:solidFill>
+                        <a:srgbClr val="BFBFBF"/>
+                      </a:solidFill>
+                    </a:lnB>
+                    <a:solidFill>
+                      <a:srgbClr val="FFFFFF"/>
+                    </a:solidFill>
+                  </a:tcPr>
+                </a:tc>
+                <a:tc>
+                  <a:txBody>
+                    <a:bodyPr wrap="square"/>
+                    <a:lstStyle/>
+                    <a:p>
+                      <a:pPr algn="ctr"/>
+                      <a:r>
+                        <a:rPr sz="1000" b="0">
+                          <a:solidFill>
+                            <a:srgbClr val="000000"/>
+                          </a:solidFill>
+                          <a:latin typeface="맑은 고딕"/>
+                          <a:ea typeface="맑은 고딕"/>
+                          <a:cs typeface="맑은 고딕"/>
+                        </a:rPr>
+                        <a:t>대용량 가능</a:t>
                       </a:r>
                     </a:p>
                   </a:txBody>
@@ -3788,7 +3879,21 @@
                           <a:ea typeface="맑은 고딕"/>
                           <a:cs typeface="맑은 고딕"/>
                         </a:rPr>
-                        <a:t>새벽 · 사륜</a:t>
+                        <a:t>예약 (자체 센터</a:t>
+                      </a:r>
+                    </a:p>
+                    <a:p>
+                      <a:pPr algn="ctr"/>
+                      <a:r>
+                        <a:rPr sz="1000" b="0">
+                          <a:solidFill>
+                            <a:srgbClr val="000000"/>
+                          </a:solidFill>
+                          <a:latin typeface="맑은 고딕"/>
+                          <a:ea typeface="맑은 고딕"/>
+                          <a:cs typeface="맑은 고딕"/>
+                        </a:rPr>
+                        <a:t>'네오' 한정)</a:t>
                       </a:r>
                     </a:p>
                   </a:txBody>
@@ -3833,7 +3938,52 @@
                           <a:ea typeface="맑은 고딕"/>
                           <a:cs typeface="맑은 고딕"/>
                         </a:rPr>
-                        <a:t>자체 물류센터 '네오' 한정</a:t>
+                        <a:t>사륜차</a:t>
+                      </a:r>
+                    </a:p>
+                  </a:txBody>
+                  <a:tcPr anchor="ctr" marL="36000" marR="36000" marT="0" marB="0">
+                    <a:lnL w="9525" cap="flat">
+                      <a:solidFill>
+                        <a:srgbClr val="BFBFBF"/>
+                      </a:solidFill>
+                    </a:lnL>
+                    <a:lnR w="9525" cap="flat">
+                      <a:solidFill>
+                        <a:srgbClr val="BFBFBF"/>
+                      </a:solidFill>
+                    </a:lnR>
+                    <a:lnT w="9525" cap="flat">
+                      <a:solidFill>
+                        <a:srgbClr val="BFBFBF"/>
+                      </a:solidFill>
+                    </a:lnT>
+                    <a:lnB w="9525" cap="flat">
+                      <a:solidFill>
+                        <a:srgbClr val="BFBFBF"/>
+                      </a:solidFill>
+                    </a:lnB>
+                    <a:solidFill>
+                      <a:srgbClr val="FFFFFF"/>
+                    </a:solidFill>
+                  </a:tcPr>
+                </a:tc>
+                <a:tc>
+                  <a:txBody>
+                    <a:bodyPr wrap="square"/>
+                    <a:lstStyle/>
+                    <a:p>
+                      <a:pPr algn="ctr"/>
+                      <a:r>
+                        <a:rPr sz="1000" b="0">
+                          <a:solidFill>
+                            <a:srgbClr val="000000"/>
+                          </a:solidFill>
+                          <a:latin typeface="맑은 고딕"/>
+                          <a:ea typeface="맑은 고딕"/>
+                          <a:cs typeface="맑은 고딕"/>
+                        </a:rPr>
+                        <a:t>대용량 가능</a:t>
                       </a:r>
                     </a:p>
                   </a:txBody>
@@ -3925,7 +4075,7 @@
                           <a:ea typeface="맑은 고딕"/>
                           <a:cs typeface="맑은 고딕"/>
                         </a:rPr>
-                        <a:t>예약 · 사륜</a:t>
+                        <a:t>예약</a:t>
                       </a:r>
                     </a:p>
                   </a:txBody>
@@ -3970,7 +4120,52 @@
                           <a:ea typeface="맑은 고딕"/>
                           <a:cs typeface="맑은 고딕"/>
                         </a:rPr>
-                        <a:t>—</a:t>
+                        <a:t>사륜차</a:t>
+                      </a:r>
+                    </a:p>
+                  </a:txBody>
+                  <a:tcPr anchor="ctr" marL="36000" marR="36000" marT="0" marB="0">
+                    <a:lnL w="9525" cap="flat">
+                      <a:solidFill>
+                        <a:srgbClr val="BFBFBF"/>
+                      </a:solidFill>
+                    </a:lnL>
+                    <a:lnR w="9525" cap="flat">
+                      <a:solidFill>
+                        <a:srgbClr val="BFBFBF"/>
+                      </a:solidFill>
+                    </a:lnR>
+                    <a:lnT w="9525" cap="flat">
+                      <a:solidFill>
+                        <a:srgbClr val="BFBFBF"/>
+                      </a:solidFill>
+                    </a:lnT>
+                    <a:lnB w="9525" cap="flat">
+                      <a:solidFill>
+                        <a:srgbClr val="BFBFBF"/>
+                      </a:solidFill>
+                    </a:lnB>
+                    <a:solidFill>
+                      <a:srgbClr val="FFFFFF"/>
+                    </a:solidFill>
+                  </a:tcPr>
+                </a:tc>
+                <a:tc>
+                  <a:txBody>
+                    <a:bodyPr wrap="square"/>
+                    <a:lstStyle/>
+                    <a:p>
+                      <a:pPr algn="ctr"/>
+                      <a:r>
+                        <a:rPr sz="1000" b="0">
+                          <a:solidFill>
+                            <a:srgbClr val="000000"/>
+                          </a:solidFill>
+                          <a:latin typeface="맑은 고딕"/>
+                          <a:ea typeface="맑은 고딕"/>
+                          <a:cs typeface="맑은 고딕"/>
+                        </a:rPr>
+                        <a:t>대용량 가능</a:t>
                       </a:r>
                     </a:p>
                   </a:txBody>
@@ -4062,7 +4257,7 @@
                           <a:ea typeface="맑은 고딕"/>
                           <a:cs typeface="맑은 고딕"/>
                         </a:rPr>
-                        <a:t>1시간 · 이륜</a:t>
+                        <a:t>즉시 (1시간 내)</a:t>
                       </a:r>
                     </a:p>
                   </a:txBody>
@@ -4107,7 +4302,52 @@
                           <a:ea typeface="맑은 고딕"/>
                           <a:cs typeface="맑은 고딕"/>
                         </a:rPr>
-                        <a:t>소량, 약 1만 종</a:t>
+                        <a:t>이륜차</a:t>
+                      </a:r>
+                    </a:p>
+                  </a:txBody>
+                  <a:tcPr anchor="ctr" marL="36000" marR="36000" marT="0" marB="0">
+                    <a:lnL w="9525" cap="flat">
+                      <a:solidFill>
+                        <a:srgbClr val="BFBFBF"/>
+                      </a:solidFill>
+                    </a:lnL>
+                    <a:lnR w="9525" cap="flat">
+                      <a:solidFill>
+                        <a:srgbClr val="BFBFBF"/>
+                      </a:solidFill>
+                    </a:lnR>
+                    <a:lnT w="9525" cap="flat">
+                      <a:solidFill>
+                        <a:srgbClr val="BFBFBF"/>
+                      </a:solidFill>
+                    </a:lnT>
+                    <a:lnB w="9525" cap="flat">
+                      <a:solidFill>
+                        <a:srgbClr val="BFBFBF"/>
+                      </a:solidFill>
+                    </a:lnB>
+                    <a:solidFill>
+                      <a:srgbClr val="FFFFFF"/>
+                    </a:solidFill>
+                  </a:tcPr>
+                </a:tc>
+                <a:tc>
+                  <a:txBody>
+                    <a:bodyPr wrap="square"/>
+                    <a:lstStyle/>
+                    <a:p>
+                      <a:pPr algn="ctr"/>
+                      <a:r>
+                        <a:rPr sz="1000" b="0">
+                          <a:solidFill>
+                            <a:srgbClr val="000000"/>
+                          </a:solidFill>
+                          <a:latin typeface="맑은 고딕"/>
+                          <a:ea typeface="맑은 고딕"/>
+                          <a:cs typeface="맑은 고딕"/>
+                        </a:rPr>
+                        <a:t>소량 (약 1만 종)</a:t>
                       </a:r>
                     </a:p>
                   </a:txBody>

--- a/reports/ssg-quickcommerce-onepager.pptx
+++ b/reports/ssg-quickcommerce-onepager.pptx
@@ -4634,7 +4634,7 @@
                 <a:ea typeface="맑은 고딕"/>
                 <a:cs typeface="맑은 고딕"/>
               </a:rPr>
-              <a:t>- 양재·하남점 인근, 20시 마감 → 2시간 내 배송</a:t>
+              <a:t>- 20시까지 주문 접수 → 결제 후 2시간 내 배송 완료</a:t>
             </a:r>
           </a:p>
         </p:txBody>

--- a/reports/ssg-quickcommerce-onepager.pptx
+++ b/reports/ssg-quickcommerce-onepager.pptx
@@ -3697,7 +3697,21 @@
                           <a:ea typeface="맑은 고딕"/>
                           <a:cs typeface="맑은 고딕"/>
                         </a:rPr>
-                        <a:t>예약 (2~5개 구간)</a:t>
+                        <a:t>예약 (2~5개 구간,</a:t>
+                      </a:r>
+                    </a:p>
+                    <a:p>
+                      <a:pPr algn="ctr"/>
+                      <a:r>
+                        <a:rPr sz="1000" b="0">
+                          <a:solidFill>
+                            <a:srgbClr val="000000"/>
+                          </a:solidFill>
+                          <a:latin typeface="맑은 고딕"/>
+                          <a:ea typeface="맑은 고딕"/>
+                          <a:cs typeface="맑은 고딕"/>
+                        </a:rPr>
+                        <a:t>점포·네오 거점)</a:t>
                       </a:r>
                     </a:p>
                   </a:txBody>
@@ -4257,7 +4271,21 @@
                           <a:ea typeface="맑은 고딕"/>
                           <a:cs typeface="맑은 고딕"/>
                         </a:rPr>
-                        <a:t>즉시 (1시간 내)</a:t>
+                        <a:t>즉시 (1시간,</a:t>
+                      </a:r>
+                    </a:p>
+                    <a:p>
+                      <a:pPr algn="ctr"/>
+                      <a:r>
+                        <a:rPr sz="1000" b="0">
+                          <a:solidFill>
+                            <a:srgbClr val="000000"/>
+                          </a:solidFill>
+                          <a:latin typeface="맑은 고딕"/>
+                          <a:ea typeface="맑은 고딕"/>
+                          <a:cs typeface="맑은 고딕"/>
+                        </a:rPr>
+                        <a:t>점포 반경 3km)</a:t>
                       </a:r>
                     </a:p>
                   </a:txBody>

--- a/reports/ssg-quickcommerce-onepager.pptx
+++ b/reports/ssg-quickcommerce-onepager.pptx
@@ -3401,7 +3401,7 @@
         </p:nvSpPr>
         <p:spPr>
           <a:xfrm>
-            <a:off x="424800" y="2703600"/>
+            <a:off x="424800" y="2667600"/>
             <a:ext cx="4410000" cy="223200"/>
           </a:xfrm>
           <a:prstGeom prst="rect">
@@ -3439,8 +3439,8 @@
           <p:nvPr/>
         </p:nvGraphicFramePr>
         <p:xfrm>
-          <a:off x="424800" y="2926800"/>
-          <a:ext cx="4410000" cy="1728000"/>
+          <a:off x="424800" y="2890800"/>
+          <a:ext cx="4409999" cy="1800000"/>
         </p:xfrm>
         <a:graphic>
           <a:graphicData uri="http://schemas.openxmlformats.org/drawingml/2006/table">
@@ -3449,12 +3449,13 @@
                 <a:tableStyleId>{5C22544A-7EE6-4342-B048-85BDC9FD1C3A}</a:tableStyleId>
               </a:tblPr>
               <a:tblGrid>
-                <a:gridCol w="1080000"/>
-                <a:gridCol w="1404000"/>
-                <a:gridCol w="666000"/>
-                <a:gridCol w="1260000"/>
+                <a:gridCol w="990000"/>
+                <a:gridCol w="827999"/>
+                <a:gridCol w="1098000"/>
+                <a:gridCol w="576000"/>
+                <a:gridCol w="918000"/>
               </a:tblGrid>
-              <a:tr h="345600">
+              <a:tr h="360000">
                 <a:tc>
                   <a:txBody>
                     <a:bodyPr wrap="square"/>
@@ -3560,6 +3561,51 @@
                           <a:ea typeface="맑은 고딕"/>
                           <a:cs typeface="맑은 고딕"/>
                         </a:rPr>
+                        <a:t>피킹·패킹 거점</a:t>
+                      </a:r>
+                    </a:p>
+                  </a:txBody>
+                  <a:tcPr anchor="ctr" marL="36000" marR="36000" marT="0" marB="0">
+                    <a:lnL w="9525" cap="flat">
+                      <a:solidFill>
+                        <a:srgbClr val="BFBFBF"/>
+                      </a:solidFill>
+                    </a:lnL>
+                    <a:lnR w="9525" cap="flat">
+                      <a:solidFill>
+                        <a:srgbClr val="BFBFBF"/>
+                      </a:solidFill>
+                    </a:lnR>
+                    <a:lnT w="9525" cap="flat">
+                      <a:solidFill>
+                        <a:srgbClr val="BFBFBF"/>
+                      </a:solidFill>
+                    </a:lnT>
+                    <a:lnB w="9525" cap="flat">
+                      <a:solidFill>
+                        <a:srgbClr val="BFBFBF"/>
+                      </a:solidFill>
+                    </a:lnB>
+                    <a:solidFill>
+                      <a:srgbClr val="EAEEF6"/>
+                    </a:solidFill>
+                  </a:tcPr>
+                </a:tc>
+                <a:tc>
+                  <a:txBody>
+                    <a:bodyPr wrap="square"/>
+                    <a:lstStyle/>
+                    <a:p>
+                      <a:pPr algn="ctr"/>
+                      <a:r>
+                        <a:rPr sz="1000" b="1">
+                          <a:solidFill>
+                            <a:srgbClr val="000000"/>
+                          </a:solidFill>
+                          <a:latin typeface="맑은 고딕"/>
+                          <a:ea typeface="맑은 고딕"/>
+                          <a:cs typeface="맑은 고딕"/>
+                        </a:rPr>
                         <a:t>운송 수단</a:t>
                       </a:r>
                     </a:p>
@@ -3636,7 +3682,7 @@
                   </a:tcPr>
                 </a:tc>
               </a:tr>
-              <a:tr h="345600">
+              <a:tr h="360000">
                 <a:tc>
                   <a:txBody>
                     <a:bodyPr wrap="square"/>
@@ -3697,7 +3743,52 @@
                           <a:ea typeface="맑은 고딕"/>
                           <a:cs typeface="맑은 고딕"/>
                         </a:rPr>
-                        <a:t>예약 (2~5개 구간,</a:t>
+                        <a:t>예약</a:t>
+                      </a:r>
+                    </a:p>
+                  </a:txBody>
+                  <a:tcPr anchor="ctr" marL="36000" marR="36000" marT="0" marB="0">
+                    <a:lnL w="9525" cap="flat">
+                      <a:solidFill>
+                        <a:srgbClr val="BFBFBF"/>
+                      </a:solidFill>
+                    </a:lnL>
+                    <a:lnR w="9525" cap="flat">
+                      <a:solidFill>
+                        <a:srgbClr val="BFBFBF"/>
+                      </a:solidFill>
+                    </a:lnR>
+                    <a:lnT w="9525" cap="flat">
+                      <a:solidFill>
+                        <a:srgbClr val="BFBFBF"/>
+                      </a:solidFill>
+                    </a:lnT>
+                    <a:lnB w="9525" cap="flat">
+                      <a:solidFill>
+                        <a:srgbClr val="BFBFBF"/>
+                      </a:solidFill>
+                    </a:lnB>
+                    <a:solidFill>
+                      <a:srgbClr val="FFFFFF"/>
+                    </a:solidFill>
+                  </a:tcPr>
+                </a:tc>
+                <a:tc>
+                  <a:txBody>
+                    <a:bodyPr wrap="square"/>
+                    <a:lstStyle/>
+                    <a:p>
+                      <a:pPr algn="ctr"/>
+                      <a:r>
+                        <a:rPr sz="1000" b="0">
+                          <a:solidFill>
+                            <a:srgbClr val="000000"/>
+                          </a:solidFill>
+                          <a:latin typeface="맑은 고딕"/>
+                          <a:ea typeface="맑은 고딕"/>
+                          <a:cs typeface="맑은 고딕"/>
+                        </a:rPr>
+                        <a:t>'네오' +</a:t>
                       </a:r>
                     </a:p>
                     <a:p>
@@ -3711,7 +3802,7 @@
                           <a:ea typeface="맑은 고딕"/>
                           <a:cs typeface="맑은 고딕"/>
                         </a:rPr>
-                        <a:t>점포·네오 거점)</a:t>
+                        <a:t>이마트 점포</a:t>
                       </a:r>
                     </a:p>
                   </a:txBody>
@@ -3832,7 +3923,7 @@
                   </a:tcPr>
                 </a:tc>
               </a:tr>
-              <a:tr h="345600">
+              <a:tr h="360000">
                 <a:tc>
                   <a:txBody>
                     <a:bodyPr wrap="square"/>
@@ -3893,7 +3984,52 @@
                           <a:ea typeface="맑은 고딕"/>
                           <a:cs typeface="맑은 고딕"/>
                         </a:rPr>
-                        <a:t>예약 (자체 센터</a:t>
+                        <a:t>예약 (새벽)</a:t>
+                      </a:r>
+                    </a:p>
+                  </a:txBody>
+                  <a:tcPr anchor="ctr" marL="36000" marR="36000" marT="0" marB="0">
+                    <a:lnL w="9525" cap="flat">
+                      <a:solidFill>
+                        <a:srgbClr val="BFBFBF"/>
+                      </a:solidFill>
+                    </a:lnL>
+                    <a:lnR w="9525" cap="flat">
+                      <a:solidFill>
+                        <a:srgbClr val="BFBFBF"/>
+                      </a:solidFill>
+                    </a:lnR>
+                    <a:lnT w="9525" cap="flat">
+                      <a:solidFill>
+                        <a:srgbClr val="BFBFBF"/>
+                      </a:solidFill>
+                    </a:lnT>
+                    <a:lnB w="9525" cap="flat">
+                      <a:solidFill>
+                        <a:srgbClr val="BFBFBF"/>
+                      </a:solidFill>
+                    </a:lnB>
+                    <a:solidFill>
+                      <a:srgbClr val="FFFFFF"/>
+                    </a:solidFill>
+                  </a:tcPr>
+                </a:tc>
+                <a:tc>
+                  <a:txBody>
+                    <a:bodyPr wrap="square"/>
+                    <a:lstStyle/>
+                    <a:p>
+                      <a:pPr algn="ctr"/>
+                      <a:r>
+                        <a:rPr sz="1000" b="0">
+                          <a:solidFill>
+                            <a:srgbClr val="000000"/>
+                          </a:solidFill>
+                          <a:latin typeface="맑은 고딕"/>
+                          <a:ea typeface="맑은 고딕"/>
+                          <a:cs typeface="맑은 고딕"/>
+                        </a:rPr>
+                        <a:t>'네오' 한정</a:t>
                       </a:r>
                     </a:p>
                     <a:p>
@@ -3907,7 +4043,7 @@
                           <a:ea typeface="맑은 고딕"/>
                           <a:cs typeface="맑은 고딕"/>
                         </a:rPr>
-                        <a:t>'네오' 한정)</a:t>
+                        <a:t>(점포 불가)</a:t>
                       </a:r>
                     </a:p>
                   </a:txBody>
@@ -4028,7 +4164,7 @@
                   </a:tcPr>
                 </a:tc>
               </a:tr>
-              <a:tr h="345600">
+              <a:tr h="360000">
                 <a:tc>
                   <a:txBody>
                     <a:bodyPr wrap="square"/>
@@ -4134,6 +4270,51 @@
                           <a:ea typeface="맑은 고딕"/>
                           <a:cs typeface="맑은 고딕"/>
                         </a:rPr>
+                        <a:t>트레이더스 점포</a:t>
+                      </a:r>
+                    </a:p>
+                  </a:txBody>
+                  <a:tcPr anchor="ctr" marL="36000" marR="36000" marT="0" marB="0">
+                    <a:lnL w="9525" cap="flat">
+                      <a:solidFill>
+                        <a:srgbClr val="BFBFBF"/>
+                      </a:solidFill>
+                    </a:lnL>
+                    <a:lnR w="9525" cap="flat">
+                      <a:solidFill>
+                        <a:srgbClr val="BFBFBF"/>
+                      </a:solidFill>
+                    </a:lnR>
+                    <a:lnT w="9525" cap="flat">
+                      <a:solidFill>
+                        <a:srgbClr val="BFBFBF"/>
+                      </a:solidFill>
+                    </a:lnT>
+                    <a:lnB w="9525" cap="flat">
+                      <a:solidFill>
+                        <a:srgbClr val="BFBFBF"/>
+                      </a:solidFill>
+                    </a:lnB>
+                    <a:solidFill>
+                      <a:srgbClr val="FFFFFF"/>
+                    </a:solidFill>
+                  </a:tcPr>
+                </a:tc>
+                <a:tc>
+                  <a:txBody>
+                    <a:bodyPr wrap="square"/>
+                    <a:lstStyle/>
+                    <a:p>
+                      <a:pPr algn="ctr"/>
+                      <a:r>
+                        <a:rPr sz="1000" b="0">
+                          <a:solidFill>
+                            <a:srgbClr val="000000"/>
+                          </a:solidFill>
+                          <a:latin typeface="맑은 고딕"/>
+                          <a:ea typeface="맑은 고딕"/>
+                          <a:cs typeface="맑은 고딕"/>
+                        </a:rPr>
                         <a:t>사륜차</a:t>
                       </a:r>
                     </a:p>
@@ -4210,7 +4391,7 @@
                   </a:tcPr>
                 </a:tc>
               </a:tr>
-              <a:tr h="345600">
+              <a:tr h="360000">
                 <a:tc>
                   <a:txBody>
                     <a:bodyPr wrap="square"/>
@@ -4271,7 +4452,7 @@
                           <a:ea typeface="맑은 고딕"/>
                           <a:cs typeface="맑은 고딕"/>
                         </a:rPr>
-                        <a:t>즉시 (1시간,</a:t>
+                        <a:t>즉시</a:t>
                       </a:r>
                     </a:p>
                     <a:p>
@@ -4285,7 +4466,66 @@
                           <a:ea typeface="맑은 고딕"/>
                           <a:cs typeface="맑은 고딕"/>
                         </a:rPr>
-                        <a:t>점포 반경 3km)</a:t>
+                        <a:t>(1시간)</a:t>
+                      </a:r>
+                    </a:p>
+                  </a:txBody>
+                  <a:tcPr anchor="ctr" marL="36000" marR="36000" marT="0" marB="0">
+                    <a:lnL w="9525" cap="flat">
+                      <a:solidFill>
+                        <a:srgbClr val="BFBFBF"/>
+                      </a:solidFill>
+                    </a:lnL>
+                    <a:lnR w="9525" cap="flat">
+                      <a:solidFill>
+                        <a:srgbClr val="BFBFBF"/>
+                      </a:solidFill>
+                    </a:lnR>
+                    <a:lnT w="9525" cap="flat">
+                      <a:solidFill>
+                        <a:srgbClr val="BFBFBF"/>
+                      </a:solidFill>
+                    </a:lnT>
+                    <a:lnB w="9525" cap="flat">
+                      <a:solidFill>
+                        <a:srgbClr val="BFBFBF"/>
+                      </a:solidFill>
+                    </a:lnB>
+                    <a:solidFill>
+                      <a:srgbClr val="FFFFFF"/>
+                    </a:solidFill>
+                  </a:tcPr>
+                </a:tc>
+                <a:tc>
+                  <a:txBody>
+                    <a:bodyPr wrap="square"/>
+                    <a:lstStyle/>
+                    <a:p>
+                      <a:pPr algn="ctr"/>
+                      <a:r>
+                        <a:rPr sz="1000" b="0">
+                          <a:solidFill>
+                            <a:srgbClr val="000000"/>
+                          </a:solidFill>
+                          <a:latin typeface="맑은 고딕"/>
+                          <a:ea typeface="맑은 고딕"/>
+                          <a:cs typeface="맑은 고딕"/>
+                        </a:rPr>
+                        <a:t>이마트 점포</a:t>
+                      </a:r>
+                    </a:p>
+                    <a:p>
+                      <a:pPr algn="ctr"/>
+                      <a:r>
+                        <a:rPr sz="1000" b="0">
+                          <a:solidFill>
+                            <a:srgbClr val="000000"/>
+                          </a:solidFill>
+                          <a:latin typeface="맑은 고딕"/>
+                          <a:ea typeface="맑은 고딕"/>
+                          <a:cs typeface="맑은 고딕"/>
+                        </a:rPr>
+                        <a:t>(반경 3km)</a:t>
                       </a:r>
                     </a:p>
                   </a:txBody>
@@ -4375,7 +4615,7 @@
                           <a:ea typeface="맑은 고딕"/>
                           <a:cs typeface="맑은 고딕"/>
                         </a:rPr>
-                        <a:t>소량 (약 1만 종)</a:t>
+                        <a:t>소량 (1만 종)</a:t>
                       </a:r>
                     </a:p>
                   </a:txBody>
@@ -4418,7 +4658,7 @@
         </p:nvSpPr>
         <p:spPr>
           <a:xfrm>
-            <a:off x="622800" y="4726800"/>
+            <a:off x="622800" y="4798799"/>
             <a:ext cx="4212000" cy="172800"/>
           </a:xfrm>
           <a:prstGeom prst="rect">
@@ -4455,7 +4695,7 @@
         </p:nvSpPr>
         <p:spPr>
           <a:xfrm>
-            <a:off x="424800" y="5022000"/>
+            <a:off x="424800" y="5129999"/>
             <a:ext cx="4410000" cy="223200"/>
           </a:xfrm>
           <a:prstGeom prst="rect">
@@ -4492,7 +4732,7 @@
         </p:nvSpPr>
         <p:spPr>
           <a:xfrm>
-            <a:off x="622800" y="5245200"/>
+            <a:off x="622800" y="5353199"/>
             <a:ext cx="4212000" cy="223200"/>
           </a:xfrm>
           <a:prstGeom prst="rect">
@@ -5562,7 +5802,7 @@
         <p:spPr>
           <a:xfrm>
             <a:off x="4953600" y="1475999"/>
-            <a:ext cx="0" cy="4050001"/>
+            <a:ext cx="0" cy="4140001"/>
           </a:xfrm>
           <a:prstGeom prst="bentConnector3">
             <a:avLst/>
@@ -5596,7 +5836,7 @@
         </p:nvSpPr>
         <p:spPr>
           <a:xfrm>
-            <a:off x="424800" y="5634000"/>
+            <a:off x="424800" y="5706000"/>
             <a:ext cx="9057600" cy="360000"/>
           </a:xfrm>
           <a:prstGeom prst="rect">
@@ -5640,7 +5880,7 @@
         </p:nvSpPr>
         <p:spPr>
           <a:xfrm>
-            <a:off x="424800" y="5634000"/>
+            <a:off x="424800" y="5706000"/>
             <a:ext cx="9057600" cy="360000"/>
           </a:xfrm>
           <a:prstGeom prst="rect">

--- a/reports/ssg-quickcommerce-onepager.pptx
+++ b/reports/ssg-quickcommerce-onepager.pptx
@@ -4658,8 +4658,8 @@
         </p:nvSpPr>
         <p:spPr>
           <a:xfrm>
-            <a:off x="622800" y="4798799"/>
-            <a:ext cx="4212000" cy="172800"/>
+            <a:off x="496799" y="4798799"/>
+            <a:ext cx="4338000" cy="172800"/>
           </a:xfrm>
           <a:prstGeom prst="rect">
             <a:avLst/>
@@ -4682,7 +4682,7 @@
                 <a:ea typeface="맑은 고딕"/>
                 <a:cs typeface="맑은 고딕"/>
               </a:rPr>
-              <a:t>→ 즉시배송은 이륜 소량뿐, 대용량 즉시배송 공백</a:t>
+              <a:t>→ 사륜 차량 2시간 배송 통한, 서비스 공백 해소 (대용량/즉시)</a:t>
             </a:r>
           </a:p>
         </p:txBody>

--- a/reports/ssg-quickcommerce-onepager.pptx
+++ b/reports/ssg-quickcommerce-onepager.pptx
@@ -3218,8 +3218,8 @@
         </p:nvSpPr>
         <p:spPr>
           <a:xfrm>
-            <a:off x="424800" y="1475999"/>
-            <a:ext cx="4410000" cy="198000"/>
+            <a:off x="424800" y="1504800"/>
+            <a:ext cx="4410000" cy="216000"/>
           </a:xfrm>
           <a:prstGeom prst="rect">
             <a:avLst/>
@@ -3234,7 +3234,7 @@
           <a:p>
             <a:pPr algn="ctr"/>
             <a:r>
-              <a:rPr sz="1200" b="1">
+              <a:rPr sz="1400" b="1">
                 <a:solidFill>
                   <a:srgbClr val="000000"/>
                 </a:solidFill>
@@ -3255,7 +3255,7 @@
         </p:nvCxnSpPr>
         <p:spPr>
           <a:xfrm>
-            <a:off x="424800" y="1699200"/>
+            <a:off x="424800" y="1789200"/>
             <a:ext cx="4410000" cy="0"/>
           </a:xfrm>
           <a:prstGeom prst="bentConnector3">
@@ -3290,7 +3290,7 @@
         </p:nvSpPr>
         <p:spPr>
           <a:xfrm>
-            <a:off x="424800" y="1890000"/>
+            <a:off x="424800" y="1962000"/>
             <a:ext cx="4410000" cy="223200"/>
           </a:xfrm>
           <a:prstGeom prst="rect">
@@ -3327,7 +3327,7 @@
         </p:nvSpPr>
         <p:spPr>
           <a:xfrm>
-            <a:off x="622800" y="2113200"/>
+            <a:off x="622800" y="2185200"/>
             <a:ext cx="4212000" cy="223200"/>
           </a:xfrm>
           <a:prstGeom prst="rect">
@@ -3351,7 +3351,7 @@
                 <a:ea typeface="맑은 고딕"/>
                 <a:cs typeface="맑은 고딕"/>
               </a:rPr>
-              <a:t>- 1시간 오토바이 배송(바로퀵) 매출 197%↑(6월)</a:t>
+              <a:t>- 1시간 오토바이 배송(바로퀵) 매출 197%↑ ('26.6월)</a:t>
             </a:r>
           </a:p>
         </p:txBody>
@@ -3364,7 +3364,7 @@
         </p:nvSpPr>
         <p:spPr>
           <a:xfrm>
-            <a:off x="622800" y="2336400"/>
+            <a:off x="622800" y="2408400"/>
             <a:ext cx="4212000" cy="223200"/>
           </a:xfrm>
           <a:prstGeom prst="rect">
@@ -3401,7 +3401,7 @@
         </p:nvSpPr>
         <p:spPr>
           <a:xfrm>
-            <a:off x="424800" y="2667600"/>
+            <a:off x="424800" y="2818800"/>
             <a:ext cx="4410000" cy="223200"/>
           </a:xfrm>
           <a:prstGeom prst="rect">
@@ -3425,7 +3425,7 @@
                 <a:ea typeface="맑은 고딕"/>
                 <a:cs typeface="맑은 고딕"/>
               </a:rPr>
-              <a:t>• 현행 배송 체계</a:t>
+              <a:t>• 이마트 배송 체계</a:t>
             </a:r>
           </a:p>
         </p:txBody>
@@ -3439,8 +3439,8 @@
           <p:nvPr/>
         </p:nvGraphicFramePr>
         <p:xfrm>
-          <a:off x="424800" y="2890800"/>
-          <a:ext cx="4409999" cy="1800000"/>
+          <a:off x="424800" y="3182400"/>
+          <a:ext cx="4409999" cy="1922400"/>
         </p:xfrm>
         <a:graphic>
           <a:graphicData uri="http://schemas.openxmlformats.org/drawingml/2006/table">
@@ -3449,13 +3449,13 @@
                 <a:tableStyleId>{5C22544A-7EE6-4342-B048-85BDC9FD1C3A}</a:tableStyleId>
               </a:tblPr>
               <a:tblGrid>
-                <a:gridCol w="990000"/>
-                <a:gridCol w="827999"/>
-                <a:gridCol w="1098000"/>
-                <a:gridCol w="576000"/>
-                <a:gridCol w="918000"/>
+                <a:gridCol w="691200"/>
+                <a:gridCol w="1126800"/>
+                <a:gridCol w="997200"/>
+                <a:gridCol w="676800"/>
+                <a:gridCol w="917999"/>
               </a:tblGrid>
-              <a:tr h="360000">
+              <a:tr h="320400">
                 <a:tc>
                   <a:txBody>
                     <a:bodyPr wrap="square"/>
@@ -3516,7 +3516,7 @@
                           <a:ea typeface="맑은 고딕"/>
                           <a:cs typeface="맑은 고딕"/>
                         </a:rPr>
-                        <a:t>배송 형태</a:t>
+                        <a:t>서비스명</a:t>
                       </a:r>
                     </a:p>
                   </a:txBody>
@@ -3682,7 +3682,52 @@
                   </a:tcPr>
                 </a:tc>
               </a:tr>
-              <a:tr h="360000">
+              <a:tr h="320400">
+                <a:tc rowSpan="3">
+                  <a:txBody>
+                    <a:bodyPr wrap="square"/>
+                    <a:lstStyle/>
+                    <a:p>
+                      <a:pPr algn="ctr"/>
+                      <a:r>
+                        <a:rPr sz="1000" b="1">
+                          <a:solidFill>
+                            <a:srgbClr val="000000"/>
+                          </a:solidFill>
+                          <a:latin typeface="맑은 고딕"/>
+                          <a:ea typeface="맑은 고딕"/>
+                          <a:cs typeface="맑은 고딕"/>
+                        </a:rPr>
+                        <a:t>예약배송</a:t>
+                      </a:r>
+                    </a:p>
+                  </a:txBody>
+                  <a:tcPr anchor="ctr" marL="36000" marR="36000" marT="0" marB="0">
+                    <a:lnL w="9525" cap="flat">
+                      <a:solidFill>
+                        <a:srgbClr val="BFBFBF"/>
+                      </a:solidFill>
+                    </a:lnL>
+                    <a:lnR w="9525" cap="flat">
+                      <a:solidFill>
+                        <a:srgbClr val="BFBFBF"/>
+                      </a:solidFill>
+                    </a:lnR>
+                    <a:lnT w="9525" cap="flat">
+                      <a:solidFill>
+                        <a:srgbClr val="BFBFBF"/>
+                      </a:solidFill>
+                    </a:lnT>
+                    <a:lnB w="9525" cap="flat">
+                      <a:solidFill>
+                        <a:srgbClr val="BFBFBF"/>
+                      </a:solidFill>
+                    </a:lnB>
+                    <a:solidFill>
+                      <a:srgbClr val="FFFFFF"/>
+                    </a:solidFill>
+                  </a:tcPr>
+                </a:tc>
                 <a:tc>
                   <a:txBody>
                     <a:bodyPr wrap="square"/>
@@ -3743,7 +3788,176 @@
                           <a:ea typeface="맑은 고딕"/>
                           <a:cs typeface="맑은 고딕"/>
                         </a:rPr>
-                        <a:t>예약</a:t>
+                        <a:t>센터+점포</a:t>
+                      </a:r>
+                    </a:p>
+                  </a:txBody>
+                  <a:tcPr anchor="ctr" marL="36000" marR="36000" marT="0" marB="0">
+                    <a:lnL w="9525" cap="flat">
+                      <a:solidFill>
+                        <a:srgbClr val="BFBFBF"/>
+                      </a:solidFill>
+                    </a:lnL>
+                    <a:lnR w="9525" cap="flat">
+                      <a:solidFill>
+                        <a:srgbClr val="BFBFBF"/>
+                      </a:solidFill>
+                    </a:lnR>
+                    <a:lnT w="9525" cap="flat">
+                      <a:solidFill>
+                        <a:srgbClr val="BFBFBF"/>
+                      </a:solidFill>
+                    </a:lnT>
+                    <a:lnB w="9525" cap="flat">
+                      <a:solidFill>
+                        <a:srgbClr val="BFBFBF"/>
+                      </a:solidFill>
+                    </a:lnB>
+                    <a:solidFill>
+                      <a:srgbClr val="FFFFFF"/>
+                    </a:solidFill>
+                  </a:tcPr>
+                </a:tc>
+                <a:tc rowSpan="3">
+                  <a:txBody>
+                    <a:bodyPr wrap="square"/>
+                    <a:lstStyle/>
+                    <a:p>
+                      <a:pPr algn="ctr"/>
+                      <a:r>
+                        <a:rPr sz="1000" b="0">
+                          <a:solidFill>
+                            <a:srgbClr val="000000"/>
+                          </a:solidFill>
+                          <a:latin typeface="맑은 고딕"/>
+                          <a:ea typeface="맑은 고딕"/>
+                          <a:cs typeface="맑은 고딕"/>
+                        </a:rPr>
+                        <a:t>사륜차</a:t>
+                      </a:r>
+                    </a:p>
+                  </a:txBody>
+                  <a:tcPr anchor="ctr" marL="36000" marR="36000" marT="0" marB="0">
+                    <a:lnL w="9525" cap="flat">
+                      <a:solidFill>
+                        <a:srgbClr val="BFBFBF"/>
+                      </a:solidFill>
+                    </a:lnL>
+                    <a:lnR w="9525" cap="flat">
+                      <a:solidFill>
+                        <a:srgbClr val="BFBFBF"/>
+                      </a:solidFill>
+                    </a:lnR>
+                    <a:lnT w="9525" cap="flat">
+                      <a:solidFill>
+                        <a:srgbClr val="BFBFBF"/>
+                      </a:solidFill>
+                    </a:lnT>
+                    <a:lnB w="9525" cap="flat">
+                      <a:solidFill>
+                        <a:srgbClr val="BFBFBF"/>
+                      </a:solidFill>
+                    </a:lnB>
+                    <a:solidFill>
+                      <a:srgbClr val="FFFFFF"/>
+                    </a:solidFill>
+                  </a:tcPr>
+                </a:tc>
+                <a:tc rowSpan="3">
+                  <a:txBody>
+                    <a:bodyPr wrap="square"/>
+                    <a:lstStyle/>
+                    <a:p>
+                      <a:pPr algn="ctr"/>
+                      <a:r>
+                        <a:rPr sz="1000" b="0">
+                          <a:solidFill>
+                            <a:srgbClr val="000000"/>
+                          </a:solidFill>
+                          <a:latin typeface="맑은 고딕"/>
+                          <a:ea typeface="맑은 고딕"/>
+                          <a:cs typeface="맑은 고딕"/>
+                        </a:rPr>
+                        <a:t>대용량</a:t>
+                      </a:r>
+                    </a:p>
+                  </a:txBody>
+                  <a:tcPr anchor="ctr" marL="36000" marR="36000" marT="0" marB="0">
+                    <a:lnL w="9525" cap="flat">
+                      <a:solidFill>
+                        <a:srgbClr val="BFBFBF"/>
+                      </a:solidFill>
+                    </a:lnL>
+                    <a:lnR w="9525" cap="flat">
+                      <a:solidFill>
+                        <a:srgbClr val="BFBFBF"/>
+                      </a:solidFill>
+                    </a:lnR>
+                    <a:lnT w="9525" cap="flat">
+                      <a:solidFill>
+                        <a:srgbClr val="BFBFBF"/>
+                      </a:solidFill>
+                    </a:lnT>
+                    <a:lnB w="9525" cap="flat">
+                      <a:solidFill>
+                        <a:srgbClr val="BFBFBF"/>
+                      </a:solidFill>
+                    </a:lnB>
+                    <a:solidFill>
+                      <a:srgbClr val="FFFFFF"/>
+                    </a:solidFill>
+                  </a:tcPr>
+                </a:tc>
+              </a:tr>
+              <a:tr h="320400">
+                <a:tc vMerge="1">
+                  <a:txBody>
+                    <a:bodyPr wrap="square"/>
+                    <a:lstStyle/>
+                    <a:p/>
+                  </a:txBody>
+                  <a:tcPr anchor="ctr" marL="36000" marR="36000" marT="0" marB="0">
+                    <a:lnL w="9525" cap="flat">
+                      <a:solidFill>
+                        <a:srgbClr val="BFBFBF"/>
+                      </a:solidFill>
+                    </a:lnL>
+                    <a:lnR w="9525" cap="flat">
+                      <a:solidFill>
+                        <a:srgbClr val="BFBFBF"/>
+                      </a:solidFill>
+                    </a:lnR>
+                    <a:lnT w="9525" cap="flat">
+                      <a:solidFill>
+                        <a:srgbClr val="BFBFBF"/>
+                      </a:solidFill>
+                    </a:lnT>
+                    <a:lnB w="9525" cap="flat">
+                      <a:solidFill>
+                        <a:srgbClr val="BFBFBF"/>
+                      </a:solidFill>
+                    </a:lnB>
+                    <a:solidFill>
+                      <a:srgbClr val="FFFFFF"/>
+                    </a:solidFill>
+                  </a:tcPr>
+                </a:tc>
+                <a:tc>
+                  <a:txBody>
+                    <a:bodyPr wrap="square"/>
+                    <a:lstStyle/>
+                    <a:p>
+                      <a:pPr algn="ctr"/>
+                      <a:r>
+                        <a:rPr sz="1000" b="1">
+                          <a:solidFill>
+                            <a:srgbClr val="000000"/>
+                          </a:solidFill>
+                          <a:latin typeface="맑은 고딕"/>
+                          <a:ea typeface="맑은 고딕"/>
+                          <a:cs typeface="맑은 고딕"/>
+                        </a:rPr>
+                        <a:t>새벽배송</a:t>
                       </a:r>
                     </a:p>
                   </a:txBody>
@@ -3788,13 +4002,142 @@
                           <a:ea typeface="맑은 고딕"/>
                           <a:cs typeface="맑은 고딕"/>
                         </a:rPr>
-                        <a:t>'네오' +</a:t>
+                        <a:t>센터</a:t>
                       </a:r>
                     </a:p>
+                  </a:txBody>
+                  <a:tcPr anchor="ctr" marL="36000" marR="36000" marT="0" marB="0">
+                    <a:lnL w="9525" cap="flat">
+                      <a:solidFill>
+                        <a:srgbClr val="BFBFBF"/>
+                      </a:solidFill>
+                    </a:lnL>
+                    <a:lnR w="9525" cap="flat">
+                      <a:solidFill>
+                        <a:srgbClr val="BFBFBF"/>
+                      </a:solidFill>
+                    </a:lnR>
+                    <a:lnT w="9525" cap="flat">
+                      <a:solidFill>
+                        <a:srgbClr val="BFBFBF"/>
+                      </a:solidFill>
+                    </a:lnT>
+                    <a:lnB w="9525" cap="flat">
+                      <a:solidFill>
+                        <a:srgbClr val="BFBFBF"/>
+                      </a:solidFill>
+                    </a:lnB>
+                    <a:solidFill>
+                      <a:srgbClr val="FFFFFF"/>
+                    </a:solidFill>
+                  </a:tcPr>
+                </a:tc>
+                <a:tc vMerge="1">
+                  <a:txBody>
+                    <a:bodyPr wrap="square"/>
+                    <a:lstStyle/>
+                    <a:p/>
+                  </a:txBody>
+                  <a:tcPr anchor="ctr" marL="36000" marR="36000" marT="0" marB="0">
+                    <a:lnL w="9525" cap="flat">
+                      <a:solidFill>
+                        <a:srgbClr val="BFBFBF"/>
+                      </a:solidFill>
+                    </a:lnL>
+                    <a:lnR w="9525" cap="flat">
+                      <a:solidFill>
+                        <a:srgbClr val="BFBFBF"/>
+                      </a:solidFill>
+                    </a:lnR>
+                    <a:lnT w="9525" cap="flat">
+                      <a:solidFill>
+                        <a:srgbClr val="BFBFBF"/>
+                      </a:solidFill>
+                    </a:lnT>
+                    <a:lnB w="9525" cap="flat">
+                      <a:solidFill>
+                        <a:srgbClr val="BFBFBF"/>
+                      </a:solidFill>
+                    </a:lnB>
+                    <a:solidFill>
+                      <a:srgbClr val="FFFFFF"/>
+                    </a:solidFill>
+                  </a:tcPr>
+                </a:tc>
+                <a:tc vMerge="1">
+                  <a:txBody>
+                    <a:bodyPr wrap="square"/>
+                    <a:lstStyle/>
+                    <a:p/>
+                  </a:txBody>
+                  <a:tcPr anchor="ctr" marL="36000" marR="36000" marT="0" marB="0">
+                    <a:lnL w="9525" cap="flat">
+                      <a:solidFill>
+                        <a:srgbClr val="BFBFBF"/>
+                      </a:solidFill>
+                    </a:lnL>
+                    <a:lnR w="9525" cap="flat">
+                      <a:solidFill>
+                        <a:srgbClr val="BFBFBF"/>
+                      </a:solidFill>
+                    </a:lnR>
+                    <a:lnT w="9525" cap="flat">
+                      <a:solidFill>
+                        <a:srgbClr val="BFBFBF"/>
+                      </a:solidFill>
+                    </a:lnT>
+                    <a:lnB w="9525" cap="flat">
+                      <a:solidFill>
+                        <a:srgbClr val="BFBFBF"/>
+                      </a:solidFill>
+                    </a:lnB>
+                    <a:solidFill>
+                      <a:srgbClr val="FFFFFF"/>
+                    </a:solidFill>
+                  </a:tcPr>
+                </a:tc>
+              </a:tr>
+              <a:tr h="320400">
+                <a:tc vMerge="1">
+                  <a:txBody>
+                    <a:bodyPr wrap="square"/>
+                    <a:lstStyle/>
+                    <a:p/>
+                  </a:txBody>
+                  <a:tcPr anchor="ctr" marL="36000" marR="36000" marT="0" marB="0">
+                    <a:lnL w="9525" cap="flat">
+                      <a:solidFill>
+                        <a:srgbClr val="BFBFBF"/>
+                      </a:solidFill>
+                    </a:lnL>
+                    <a:lnR w="9525" cap="flat">
+                      <a:solidFill>
+                        <a:srgbClr val="BFBFBF"/>
+                      </a:solidFill>
+                    </a:lnR>
+                    <a:lnT w="9525" cap="flat">
+                      <a:solidFill>
+                        <a:srgbClr val="BFBFBF"/>
+                      </a:solidFill>
+                    </a:lnT>
+                    <a:lnB w="9525" cap="flat">
+                      <a:solidFill>
+                        <a:srgbClr val="BFBFBF"/>
+                      </a:solidFill>
+                    </a:lnB>
+                    <a:solidFill>
+                      <a:srgbClr val="FFFFFF"/>
+                    </a:solidFill>
+                  </a:tcPr>
+                </a:tc>
+                <a:tc>
+                  <a:txBody>
+                    <a:bodyPr wrap="square"/>
+                    <a:lstStyle/>
                     <a:p>
                       <a:pPr algn="ctr"/>
                       <a:r>
-                        <a:rPr sz="1000" b="0">
+                        <a:rPr sz="1000" b="1">
                           <a:solidFill>
                             <a:srgbClr val="000000"/>
                           </a:solidFill>
@@ -3802,7 +4145,7 @@
                           <a:ea typeface="맑은 고딕"/>
                           <a:cs typeface="맑은 고딕"/>
                         </a:rPr>
-                        <a:t>이마트 점포</a:t>
+                        <a:t>트레이더스 배송</a:t>
                       </a:r>
                     </a:p>
                   </a:txBody>
@@ -3847,7 +4190,163 @@
                           <a:ea typeface="맑은 고딕"/>
                           <a:cs typeface="맑은 고딕"/>
                         </a:rPr>
-                        <a:t>사륜차</a:t>
+                        <a:t>점포</a:t>
+                      </a:r>
+                    </a:p>
+                  </a:txBody>
+                  <a:tcPr anchor="ctr" marL="36000" marR="36000" marT="0" marB="0">
+                    <a:lnL w="9525" cap="flat">
+                      <a:solidFill>
+                        <a:srgbClr val="BFBFBF"/>
+                      </a:solidFill>
+                    </a:lnL>
+                    <a:lnR w="9525" cap="flat">
+                      <a:solidFill>
+                        <a:srgbClr val="BFBFBF"/>
+                      </a:solidFill>
+                    </a:lnR>
+                    <a:lnT w="9525" cap="flat">
+                      <a:solidFill>
+                        <a:srgbClr val="BFBFBF"/>
+                      </a:solidFill>
+                    </a:lnT>
+                    <a:lnB w="9525" cap="flat">
+                      <a:solidFill>
+                        <a:srgbClr val="BFBFBF"/>
+                      </a:solidFill>
+                    </a:lnB>
+                    <a:solidFill>
+                      <a:srgbClr val="FFFFFF"/>
+                    </a:solidFill>
+                  </a:tcPr>
+                </a:tc>
+                <a:tc vMerge="1">
+                  <a:txBody>
+                    <a:bodyPr wrap="square"/>
+                    <a:lstStyle/>
+                    <a:p/>
+                  </a:txBody>
+                  <a:tcPr anchor="ctr" marL="36000" marR="36000" marT="0" marB="0">
+                    <a:lnL w="9525" cap="flat">
+                      <a:solidFill>
+                        <a:srgbClr val="BFBFBF"/>
+                      </a:solidFill>
+                    </a:lnL>
+                    <a:lnR w="9525" cap="flat">
+                      <a:solidFill>
+                        <a:srgbClr val="BFBFBF"/>
+                      </a:solidFill>
+                    </a:lnR>
+                    <a:lnT w="9525" cap="flat">
+                      <a:solidFill>
+                        <a:srgbClr val="BFBFBF"/>
+                      </a:solidFill>
+                    </a:lnT>
+                    <a:lnB w="9525" cap="flat">
+                      <a:solidFill>
+                        <a:srgbClr val="BFBFBF"/>
+                      </a:solidFill>
+                    </a:lnB>
+                    <a:solidFill>
+                      <a:srgbClr val="FFFFFF"/>
+                    </a:solidFill>
+                  </a:tcPr>
+                </a:tc>
+                <a:tc vMerge="1">
+                  <a:txBody>
+                    <a:bodyPr wrap="square"/>
+                    <a:lstStyle/>
+                    <a:p/>
+                  </a:txBody>
+                  <a:tcPr anchor="ctr" marL="36000" marR="36000" marT="0" marB="0">
+                    <a:lnL w="9525" cap="flat">
+                      <a:solidFill>
+                        <a:srgbClr val="BFBFBF"/>
+                      </a:solidFill>
+                    </a:lnL>
+                    <a:lnR w="9525" cap="flat">
+                      <a:solidFill>
+                        <a:srgbClr val="BFBFBF"/>
+                      </a:solidFill>
+                    </a:lnR>
+                    <a:lnT w="9525" cap="flat">
+                      <a:solidFill>
+                        <a:srgbClr val="BFBFBF"/>
+                      </a:solidFill>
+                    </a:lnT>
+                    <a:lnB w="9525" cap="flat">
+                      <a:solidFill>
+                        <a:srgbClr val="BFBFBF"/>
+                      </a:solidFill>
+                    </a:lnB>
+                    <a:solidFill>
+                      <a:srgbClr val="FFFFFF"/>
+                    </a:solidFill>
+                  </a:tcPr>
+                </a:tc>
+              </a:tr>
+              <a:tr h="320400">
+                <a:tc rowSpan="2">
+                  <a:txBody>
+                    <a:bodyPr wrap="square"/>
+                    <a:lstStyle/>
+                    <a:p>
+                      <a:pPr algn="ctr"/>
+                      <a:r>
+                        <a:rPr sz="1000" b="1">
+                          <a:solidFill>
+                            <a:srgbClr val="000000"/>
+                          </a:solidFill>
+                          <a:latin typeface="맑은 고딕"/>
+                          <a:ea typeface="맑은 고딕"/>
+                          <a:cs typeface="맑은 고딕"/>
+                        </a:rPr>
+                        <a:t>퀵커머스</a:t>
+                      </a:r>
+                    </a:p>
+                  </a:txBody>
+                  <a:tcPr anchor="ctr" marL="36000" marR="36000" marT="0" marB="0">
+                    <a:lnL w="9525" cap="flat">
+                      <a:solidFill>
+                        <a:srgbClr val="BFBFBF"/>
+                      </a:solidFill>
+                    </a:lnL>
+                    <a:lnR w="9525" cap="flat">
+                      <a:solidFill>
+                        <a:srgbClr val="BFBFBF"/>
+                      </a:solidFill>
+                    </a:lnR>
+                    <a:lnT w="9525" cap="flat">
+                      <a:solidFill>
+                        <a:srgbClr val="BFBFBF"/>
+                      </a:solidFill>
+                    </a:lnT>
+                    <a:lnB w="9525" cap="flat">
+                      <a:solidFill>
+                        <a:srgbClr val="BFBFBF"/>
+                      </a:solidFill>
+                    </a:lnB>
+                    <a:solidFill>
+                      <a:srgbClr val="FFFFFF"/>
+                    </a:solidFill>
+                  </a:tcPr>
+                </a:tc>
+                <a:tc>
+                  <a:txBody>
+                    <a:bodyPr wrap="square"/>
+                    <a:lstStyle/>
+                    <a:p>
+                      <a:pPr algn="ctr"/>
+                      <a:r>
+                        <a:rPr sz="1000" b="1">
+                          <a:solidFill>
+                            <a:srgbClr val="000000"/>
+                          </a:solidFill>
+                          <a:latin typeface="맑은 고딕"/>
+                          <a:ea typeface="맑은 고딕"/>
+                          <a:cs typeface="맑은 고딕"/>
+                        </a:rPr>
+                        <a:t>바로퀵 (1시간)</a:t>
                       </a:r>
                     </a:p>
                   </a:txBody>
@@ -3892,640 +4391,7 @@
                           <a:ea typeface="맑은 고딕"/>
                           <a:cs typeface="맑은 고딕"/>
                         </a:rPr>
-                        <a:t>대용량 가능</a:t>
-                      </a:r>
-                    </a:p>
-                  </a:txBody>
-                  <a:tcPr anchor="ctr" marL="36000" marR="36000" marT="0" marB="0">
-                    <a:lnL w="9525" cap="flat">
-                      <a:solidFill>
-                        <a:srgbClr val="BFBFBF"/>
-                      </a:solidFill>
-                    </a:lnL>
-                    <a:lnR w="9525" cap="flat">
-                      <a:solidFill>
-                        <a:srgbClr val="BFBFBF"/>
-                      </a:solidFill>
-                    </a:lnR>
-                    <a:lnT w="9525" cap="flat">
-                      <a:solidFill>
-                        <a:srgbClr val="BFBFBF"/>
-                      </a:solidFill>
-                    </a:lnT>
-                    <a:lnB w="9525" cap="flat">
-                      <a:solidFill>
-                        <a:srgbClr val="BFBFBF"/>
-                      </a:solidFill>
-                    </a:lnB>
-                    <a:solidFill>
-                      <a:srgbClr val="FFFFFF"/>
-                    </a:solidFill>
-                  </a:tcPr>
-                </a:tc>
-              </a:tr>
-              <a:tr h="360000">
-                <a:tc>
-                  <a:txBody>
-                    <a:bodyPr wrap="square"/>
-                    <a:lstStyle/>
-                    <a:p>
-                      <a:pPr algn="ctr"/>
-                      <a:r>
-                        <a:rPr sz="1000" b="1">
-                          <a:solidFill>
-                            <a:srgbClr val="000000"/>
-                          </a:solidFill>
-                          <a:latin typeface="맑은 고딕"/>
-                          <a:ea typeface="맑은 고딕"/>
-                          <a:cs typeface="맑은 고딕"/>
-                        </a:rPr>
-                        <a:t>새벽배송</a:t>
-                      </a:r>
-                    </a:p>
-                  </a:txBody>
-                  <a:tcPr anchor="ctr" marL="36000" marR="36000" marT="0" marB="0">
-                    <a:lnL w="9525" cap="flat">
-                      <a:solidFill>
-                        <a:srgbClr val="BFBFBF"/>
-                      </a:solidFill>
-                    </a:lnL>
-                    <a:lnR w="9525" cap="flat">
-                      <a:solidFill>
-                        <a:srgbClr val="BFBFBF"/>
-                      </a:solidFill>
-                    </a:lnR>
-                    <a:lnT w="9525" cap="flat">
-                      <a:solidFill>
-                        <a:srgbClr val="BFBFBF"/>
-                      </a:solidFill>
-                    </a:lnT>
-                    <a:lnB w="9525" cap="flat">
-                      <a:solidFill>
-                        <a:srgbClr val="BFBFBF"/>
-                      </a:solidFill>
-                    </a:lnB>
-                    <a:solidFill>
-                      <a:srgbClr val="FFFFFF"/>
-                    </a:solidFill>
-                  </a:tcPr>
-                </a:tc>
-                <a:tc>
-                  <a:txBody>
-                    <a:bodyPr wrap="square"/>
-                    <a:lstStyle/>
-                    <a:p>
-                      <a:pPr algn="ctr"/>
-                      <a:r>
-                        <a:rPr sz="1000" b="0">
-                          <a:solidFill>
-                            <a:srgbClr val="000000"/>
-                          </a:solidFill>
-                          <a:latin typeface="맑은 고딕"/>
-                          <a:ea typeface="맑은 고딕"/>
-                          <a:cs typeface="맑은 고딕"/>
-                        </a:rPr>
-                        <a:t>예약 (새벽)</a:t>
-                      </a:r>
-                    </a:p>
-                  </a:txBody>
-                  <a:tcPr anchor="ctr" marL="36000" marR="36000" marT="0" marB="0">
-                    <a:lnL w="9525" cap="flat">
-                      <a:solidFill>
-                        <a:srgbClr val="BFBFBF"/>
-                      </a:solidFill>
-                    </a:lnL>
-                    <a:lnR w="9525" cap="flat">
-                      <a:solidFill>
-                        <a:srgbClr val="BFBFBF"/>
-                      </a:solidFill>
-                    </a:lnR>
-                    <a:lnT w="9525" cap="flat">
-                      <a:solidFill>
-                        <a:srgbClr val="BFBFBF"/>
-                      </a:solidFill>
-                    </a:lnT>
-                    <a:lnB w="9525" cap="flat">
-                      <a:solidFill>
-                        <a:srgbClr val="BFBFBF"/>
-                      </a:solidFill>
-                    </a:lnB>
-                    <a:solidFill>
-                      <a:srgbClr val="FFFFFF"/>
-                    </a:solidFill>
-                  </a:tcPr>
-                </a:tc>
-                <a:tc>
-                  <a:txBody>
-                    <a:bodyPr wrap="square"/>
-                    <a:lstStyle/>
-                    <a:p>
-                      <a:pPr algn="ctr"/>
-                      <a:r>
-                        <a:rPr sz="1000" b="0">
-                          <a:solidFill>
-                            <a:srgbClr val="000000"/>
-                          </a:solidFill>
-                          <a:latin typeface="맑은 고딕"/>
-                          <a:ea typeface="맑은 고딕"/>
-                          <a:cs typeface="맑은 고딕"/>
-                        </a:rPr>
-                        <a:t>'네오' 한정</a:t>
-                      </a:r>
-                    </a:p>
-                    <a:p>
-                      <a:pPr algn="ctr"/>
-                      <a:r>
-                        <a:rPr sz="1000" b="0">
-                          <a:solidFill>
-                            <a:srgbClr val="000000"/>
-                          </a:solidFill>
-                          <a:latin typeface="맑은 고딕"/>
-                          <a:ea typeface="맑은 고딕"/>
-                          <a:cs typeface="맑은 고딕"/>
-                        </a:rPr>
-                        <a:t>(점포 불가)</a:t>
-                      </a:r>
-                    </a:p>
-                  </a:txBody>
-                  <a:tcPr anchor="ctr" marL="36000" marR="36000" marT="0" marB="0">
-                    <a:lnL w="9525" cap="flat">
-                      <a:solidFill>
-                        <a:srgbClr val="BFBFBF"/>
-                      </a:solidFill>
-                    </a:lnL>
-                    <a:lnR w="9525" cap="flat">
-                      <a:solidFill>
-                        <a:srgbClr val="BFBFBF"/>
-                      </a:solidFill>
-                    </a:lnR>
-                    <a:lnT w="9525" cap="flat">
-                      <a:solidFill>
-                        <a:srgbClr val="BFBFBF"/>
-                      </a:solidFill>
-                    </a:lnT>
-                    <a:lnB w="9525" cap="flat">
-                      <a:solidFill>
-                        <a:srgbClr val="BFBFBF"/>
-                      </a:solidFill>
-                    </a:lnB>
-                    <a:solidFill>
-                      <a:srgbClr val="FFFFFF"/>
-                    </a:solidFill>
-                  </a:tcPr>
-                </a:tc>
-                <a:tc>
-                  <a:txBody>
-                    <a:bodyPr wrap="square"/>
-                    <a:lstStyle/>
-                    <a:p>
-                      <a:pPr algn="ctr"/>
-                      <a:r>
-                        <a:rPr sz="1000" b="0">
-                          <a:solidFill>
-                            <a:srgbClr val="000000"/>
-                          </a:solidFill>
-                          <a:latin typeface="맑은 고딕"/>
-                          <a:ea typeface="맑은 고딕"/>
-                          <a:cs typeface="맑은 고딕"/>
-                        </a:rPr>
-                        <a:t>사륜차</a:t>
-                      </a:r>
-                    </a:p>
-                  </a:txBody>
-                  <a:tcPr anchor="ctr" marL="36000" marR="36000" marT="0" marB="0">
-                    <a:lnL w="9525" cap="flat">
-                      <a:solidFill>
-                        <a:srgbClr val="BFBFBF"/>
-                      </a:solidFill>
-                    </a:lnL>
-                    <a:lnR w="9525" cap="flat">
-                      <a:solidFill>
-                        <a:srgbClr val="BFBFBF"/>
-                      </a:solidFill>
-                    </a:lnR>
-                    <a:lnT w="9525" cap="flat">
-                      <a:solidFill>
-                        <a:srgbClr val="BFBFBF"/>
-                      </a:solidFill>
-                    </a:lnT>
-                    <a:lnB w="9525" cap="flat">
-                      <a:solidFill>
-                        <a:srgbClr val="BFBFBF"/>
-                      </a:solidFill>
-                    </a:lnB>
-                    <a:solidFill>
-                      <a:srgbClr val="FFFFFF"/>
-                    </a:solidFill>
-                  </a:tcPr>
-                </a:tc>
-                <a:tc>
-                  <a:txBody>
-                    <a:bodyPr wrap="square"/>
-                    <a:lstStyle/>
-                    <a:p>
-                      <a:pPr algn="ctr"/>
-                      <a:r>
-                        <a:rPr sz="1000" b="0">
-                          <a:solidFill>
-                            <a:srgbClr val="000000"/>
-                          </a:solidFill>
-                          <a:latin typeface="맑은 고딕"/>
-                          <a:ea typeface="맑은 고딕"/>
-                          <a:cs typeface="맑은 고딕"/>
-                        </a:rPr>
-                        <a:t>대용량 가능</a:t>
-                      </a:r>
-                    </a:p>
-                  </a:txBody>
-                  <a:tcPr anchor="ctr" marL="36000" marR="36000" marT="0" marB="0">
-                    <a:lnL w="9525" cap="flat">
-                      <a:solidFill>
-                        <a:srgbClr val="BFBFBF"/>
-                      </a:solidFill>
-                    </a:lnL>
-                    <a:lnR w="9525" cap="flat">
-                      <a:solidFill>
-                        <a:srgbClr val="BFBFBF"/>
-                      </a:solidFill>
-                    </a:lnR>
-                    <a:lnT w="9525" cap="flat">
-                      <a:solidFill>
-                        <a:srgbClr val="BFBFBF"/>
-                      </a:solidFill>
-                    </a:lnT>
-                    <a:lnB w="9525" cap="flat">
-                      <a:solidFill>
-                        <a:srgbClr val="BFBFBF"/>
-                      </a:solidFill>
-                    </a:lnB>
-                    <a:solidFill>
-                      <a:srgbClr val="FFFFFF"/>
-                    </a:solidFill>
-                  </a:tcPr>
-                </a:tc>
-              </a:tr>
-              <a:tr h="360000">
-                <a:tc>
-                  <a:txBody>
-                    <a:bodyPr wrap="square"/>
-                    <a:lstStyle/>
-                    <a:p>
-                      <a:pPr algn="ctr"/>
-                      <a:r>
-                        <a:rPr sz="1000" b="1">
-                          <a:solidFill>
-                            <a:srgbClr val="000000"/>
-                          </a:solidFill>
-                          <a:latin typeface="맑은 고딕"/>
-                          <a:ea typeface="맑은 고딕"/>
-                          <a:cs typeface="맑은 고딕"/>
-                        </a:rPr>
-                        <a:t>트레이더스배송</a:t>
-                      </a:r>
-                    </a:p>
-                  </a:txBody>
-                  <a:tcPr anchor="ctr" marL="36000" marR="36000" marT="0" marB="0">
-                    <a:lnL w="9525" cap="flat">
-                      <a:solidFill>
-                        <a:srgbClr val="BFBFBF"/>
-                      </a:solidFill>
-                    </a:lnL>
-                    <a:lnR w="9525" cap="flat">
-                      <a:solidFill>
-                        <a:srgbClr val="BFBFBF"/>
-                      </a:solidFill>
-                    </a:lnR>
-                    <a:lnT w="9525" cap="flat">
-                      <a:solidFill>
-                        <a:srgbClr val="BFBFBF"/>
-                      </a:solidFill>
-                    </a:lnT>
-                    <a:lnB w="9525" cap="flat">
-                      <a:solidFill>
-                        <a:srgbClr val="BFBFBF"/>
-                      </a:solidFill>
-                    </a:lnB>
-                    <a:solidFill>
-                      <a:srgbClr val="FFFFFF"/>
-                    </a:solidFill>
-                  </a:tcPr>
-                </a:tc>
-                <a:tc>
-                  <a:txBody>
-                    <a:bodyPr wrap="square"/>
-                    <a:lstStyle/>
-                    <a:p>
-                      <a:pPr algn="ctr"/>
-                      <a:r>
-                        <a:rPr sz="1000" b="0">
-                          <a:solidFill>
-                            <a:srgbClr val="000000"/>
-                          </a:solidFill>
-                          <a:latin typeface="맑은 고딕"/>
-                          <a:ea typeface="맑은 고딕"/>
-                          <a:cs typeface="맑은 고딕"/>
-                        </a:rPr>
-                        <a:t>예약</a:t>
-                      </a:r>
-                    </a:p>
-                  </a:txBody>
-                  <a:tcPr anchor="ctr" marL="36000" marR="36000" marT="0" marB="0">
-                    <a:lnL w="9525" cap="flat">
-                      <a:solidFill>
-                        <a:srgbClr val="BFBFBF"/>
-                      </a:solidFill>
-                    </a:lnL>
-                    <a:lnR w="9525" cap="flat">
-                      <a:solidFill>
-                        <a:srgbClr val="BFBFBF"/>
-                      </a:solidFill>
-                    </a:lnR>
-                    <a:lnT w="9525" cap="flat">
-                      <a:solidFill>
-                        <a:srgbClr val="BFBFBF"/>
-                      </a:solidFill>
-                    </a:lnT>
-                    <a:lnB w="9525" cap="flat">
-                      <a:solidFill>
-                        <a:srgbClr val="BFBFBF"/>
-                      </a:solidFill>
-                    </a:lnB>
-                    <a:solidFill>
-                      <a:srgbClr val="FFFFFF"/>
-                    </a:solidFill>
-                  </a:tcPr>
-                </a:tc>
-                <a:tc>
-                  <a:txBody>
-                    <a:bodyPr wrap="square"/>
-                    <a:lstStyle/>
-                    <a:p>
-                      <a:pPr algn="ctr"/>
-                      <a:r>
-                        <a:rPr sz="1000" b="0">
-                          <a:solidFill>
-                            <a:srgbClr val="000000"/>
-                          </a:solidFill>
-                          <a:latin typeface="맑은 고딕"/>
-                          <a:ea typeface="맑은 고딕"/>
-                          <a:cs typeface="맑은 고딕"/>
-                        </a:rPr>
-                        <a:t>트레이더스 점포</a:t>
-                      </a:r>
-                    </a:p>
-                  </a:txBody>
-                  <a:tcPr anchor="ctr" marL="36000" marR="36000" marT="0" marB="0">
-                    <a:lnL w="9525" cap="flat">
-                      <a:solidFill>
-                        <a:srgbClr val="BFBFBF"/>
-                      </a:solidFill>
-                    </a:lnL>
-                    <a:lnR w="9525" cap="flat">
-                      <a:solidFill>
-                        <a:srgbClr val="BFBFBF"/>
-                      </a:solidFill>
-                    </a:lnR>
-                    <a:lnT w="9525" cap="flat">
-                      <a:solidFill>
-                        <a:srgbClr val="BFBFBF"/>
-                      </a:solidFill>
-                    </a:lnT>
-                    <a:lnB w="9525" cap="flat">
-                      <a:solidFill>
-                        <a:srgbClr val="BFBFBF"/>
-                      </a:solidFill>
-                    </a:lnB>
-                    <a:solidFill>
-                      <a:srgbClr val="FFFFFF"/>
-                    </a:solidFill>
-                  </a:tcPr>
-                </a:tc>
-                <a:tc>
-                  <a:txBody>
-                    <a:bodyPr wrap="square"/>
-                    <a:lstStyle/>
-                    <a:p>
-                      <a:pPr algn="ctr"/>
-                      <a:r>
-                        <a:rPr sz="1000" b="0">
-                          <a:solidFill>
-                            <a:srgbClr val="000000"/>
-                          </a:solidFill>
-                          <a:latin typeface="맑은 고딕"/>
-                          <a:ea typeface="맑은 고딕"/>
-                          <a:cs typeface="맑은 고딕"/>
-                        </a:rPr>
-                        <a:t>사륜차</a:t>
-                      </a:r>
-                    </a:p>
-                  </a:txBody>
-                  <a:tcPr anchor="ctr" marL="36000" marR="36000" marT="0" marB="0">
-                    <a:lnL w="9525" cap="flat">
-                      <a:solidFill>
-                        <a:srgbClr val="BFBFBF"/>
-                      </a:solidFill>
-                    </a:lnL>
-                    <a:lnR w="9525" cap="flat">
-                      <a:solidFill>
-                        <a:srgbClr val="BFBFBF"/>
-                      </a:solidFill>
-                    </a:lnR>
-                    <a:lnT w="9525" cap="flat">
-                      <a:solidFill>
-                        <a:srgbClr val="BFBFBF"/>
-                      </a:solidFill>
-                    </a:lnT>
-                    <a:lnB w="9525" cap="flat">
-                      <a:solidFill>
-                        <a:srgbClr val="BFBFBF"/>
-                      </a:solidFill>
-                    </a:lnB>
-                    <a:solidFill>
-                      <a:srgbClr val="FFFFFF"/>
-                    </a:solidFill>
-                  </a:tcPr>
-                </a:tc>
-                <a:tc>
-                  <a:txBody>
-                    <a:bodyPr wrap="square"/>
-                    <a:lstStyle/>
-                    <a:p>
-                      <a:pPr algn="ctr"/>
-                      <a:r>
-                        <a:rPr sz="1000" b="0">
-                          <a:solidFill>
-                            <a:srgbClr val="000000"/>
-                          </a:solidFill>
-                          <a:latin typeface="맑은 고딕"/>
-                          <a:ea typeface="맑은 고딕"/>
-                          <a:cs typeface="맑은 고딕"/>
-                        </a:rPr>
-                        <a:t>대용량 가능</a:t>
-                      </a:r>
-                    </a:p>
-                  </a:txBody>
-                  <a:tcPr anchor="ctr" marL="36000" marR="36000" marT="0" marB="0">
-                    <a:lnL w="9525" cap="flat">
-                      <a:solidFill>
-                        <a:srgbClr val="BFBFBF"/>
-                      </a:solidFill>
-                    </a:lnL>
-                    <a:lnR w="9525" cap="flat">
-                      <a:solidFill>
-                        <a:srgbClr val="BFBFBF"/>
-                      </a:solidFill>
-                    </a:lnR>
-                    <a:lnT w="9525" cap="flat">
-                      <a:solidFill>
-                        <a:srgbClr val="BFBFBF"/>
-                      </a:solidFill>
-                    </a:lnT>
-                    <a:lnB w="9525" cap="flat">
-                      <a:solidFill>
-                        <a:srgbClr val="BFBFBF"/>
-                      </a:solidFill>
-                    </a:lnB>
-                    <a:solidFill>
-                      <a:srgbClr val="FFFFFF"/>
-                    </a:solidFill>
-                  </a:tcPr>
-                </a:tc>
-              </a:tr>
-              <a:tr h="360000">
-                <a:tc>
-                  <a:txBody>
-                    <a:bodyPr wrap="square"/>
-                    <a:lstStyle/>
-                    <a:p>
-                      <a:pPr algn="ctr"/>
-                      <a:r>
-                        <a:rPr sz="1000" b="1">
-                          <a:solidFill>
-                            <a:srgbClr val="000000"/>
-                          </a:solidFill>
-                          <a:latin typeface="맑은 고딕"/>
-                          <a:ea typeface="맑은 고딕"/>
-                          <a:cs typeface="맑은 고딕"/>
-                        </a:rPr>
-                        <a:t>바로퀵</a:t>
-                      </a:r>
-                    </a:p>
-                  </a:txBody>
-                  <a:tcPr anchor="ctr" marL="36000" marR="36000" marT="0" marB="0">
-                    <a:lnL w="9525" cap="flat">
-                      <a:solidFill>
-                        <a:srgbClr val="BFBFBF"/>
-                      </a:solidFill>
-                    </a:lnL>
-                    <a:lnR w="9525" cap="flat">
-                      <a:solidFill>
-                        <a:srgbClr val="BFBFBF"/>
-                      </a:solidFill>
-                    </a:lnR>
-                    <a:lnT w="9525" cap="flat">
-                      <a:solidFill>
-                        <a:srgbClr val="BFBFBF"/>
-                      </a:solidFill>
-                    </a:lnT>
-                    <a:lnB w="9525" cap="flat">
-                      <a:solidFill>
-                        <a:srgbClr val="BFBFBF"/>
-                      </a:solidFill>
-                    </a:lnB>
-                    <a:solidFill>
-                      <a:srgbClr val="FFFFFF"/>
-                    </a:solidFill>
-                  </a:tcPr>
-                </a:tc>
-                <a:tc>
-                  <a:txBody>
-                    <a:bodyPr wrap="square"/>
-                    <a:lstStyle/>
-                    <a:p>
-                      <a:pPr algn="ctr"/>
-                      <a:r>
-                        <a:rPr sz="1000" b="0">
-                          <a:solidFill>
-                            <a:srgbClr val="000000"/>
-                          </a:solidFill>
-                          <a:latin typeface="맑은 고딕"/>
-                          <a:ea typeface="맑은 고딕"/>
-                          <a:cs typeface="맑은 고딕"/>
-                        </a:rPr>
-                        <a:t>즉시</a:t>
-                      </a:r>
-                    </a:p>
-                    <a:p>
-                      <a:pPr algn="ctr"/>
-                      <a:r>
-                        <a:rPr sz="1000" b="0">
-                          <a:solidFill>
-                            <a:srgbClr val="000000"/>
-                          </a:solidFill>
-                          <a:latin typeface="맑은 고딕"/>
-                          <a:ea typeface="맑은 고딕"/>
-                          <a:cs typeface="맑은 고딕"/>
-                        </a:rPr>
-                        <a:t>(1시간)</a:t>
-                      </a:r>
-                    </a:p>
-                  </a:txBody>
-                  <a:tcPr anchor="ctr" marL="36000" marR="36000" marT="0" marB="0">
-                    <a:lnL w="9525" cap="flat">
-                      <a:solidFill>
-                        <a:srgbClr val="BFBFBF"/>
-                      </a:solidFill>
-                    </a:lnL>
-                    <a:lnR w="9525" cap="flat">
-                      <a:solidFill>
-                        <a:srgbClr val="BFBFBF"/>
-                      </a:solidFill>
-                    </a:lnR>
-                    <a:lnT w="9525" cap="flat">
-                      <a:solidFill>
-                        <a:srgbClr val="BFBFBF"/>
-                      </a:solidFill>
-                    </a:lnT>
-                    <a:lnB w="9525" cap="flat">
-                      <a:solidFill>
-                        <a:srgbClr val="BFBFBF"/>
-                      </a:solidFill>
-                    </a:lnB>
-                    <a:solidFill>
-                      <a:srgbClr val="FFFFFF"/>
-                    </a:solidFill>
-                  </a:tcPr>
-                </a:tc>
-                <a:tc>
-                  <a:txBody>
-                    <a:bodyPr wrap="square"/>
-                    <a:lstStyle/>
-                    <a:p>
-                      <a:pPr algn="ctr"/>
-                      <a:r>
-                        <a:rPr sz="1000" b="0">
-                          <a:solidFill>
-                            <a:srgbClr val="000000"/>
-                          </a:solidFill>
-                          <a:latin typeface="맑은 고딕"/>
-                          <a:ea typeface="맑은 고딕"/>
-                          <a:cs typeface="맑은 고딕"/>
-                        </a:rPr>
-                        <a:t>이마트 점포</a:t>
-                      </a:r>
-                    </a:p>
-                    <a:p>
-                      <a:pPr algn="ctr"/>
-                      <a:r>
-                        <a:rPr sz="1000" b="0">
-                          <a:solidFill>
-                            <a:srgbClr val="000000"/>
-                          </a:solidFill>
-                          <a:latin typeface="맑은 고딕"/>
-                          <a:ea typeface="맑은 고딕"/>
-                          <a:cs typeface="맑은 고딕"/>
-                        </a:rPr>
-                        <a:t>(반경 3km)</a:t>
+                        <a:t>점포 (반경 3km)</a:t>
                       </a:r>
                     </a:p>
                   </a:txBody>
@@ -4646,6 +4512,220 @@
                   </a:tcPr>
                 </a:tc>
               </a:tr>
+              <a:tr h="320400">
+                <a:tc vMerge="1">
+                  <a:txBody>
+                    <a:bodyPr wrap="square"/>
+                    <a:lstStyle/>
+                    <a:p/>
+                  </a:txBody>
+                  <a:tcPr anchor="ctr" marL="36000" marR="36000" marT="0" marB="0">
+                    <a:lnL w="9525" cap="flat">
+                      <a:solidFill>
+                        <a:srgbClr val="BFBFBF"/>
+                      </a:solidFill>
+                    </a:lnL>
+                    <a:lnR w="9525" cap="flat">
+                      <a:solidFill>
+                        <a:srgbClr val="BFBFBF"/>
+                      </a:solidFill>
+                    </a:lnR>
+                    <a:lnT w="9525" cap="flat">
+                      <a:solidFill>
+                        <a:srgbClr val="BFBFBF"/>
+                      </a:solidFill>
+                    </a:lnT>
+                    <a:lnB w="9525" cap="flat">
+                      <a:solidFill>
+                        <a:srgbClr val="BFBFBF"/>
+                      </a:solidFill>
+                    </a:lnB>
+                    <a:solidFill>
+                      <a:srgbClr val="DEEBF7"/>
+                    </a:solidFill>
+                  </a:tcPr>
+                </a:tc>
+                <a:tc>
+                  <a:txBody>
+                    <a:bodyPr wrap="square"/>
+                    <a:lstStyle/>
+                    <a:p>
+                      <a:pPr algn="ctr"/>
+                      <a:r>
+                        <a:rPr sz="1000" b="1">
+                          <a:solidFill>
+                            <a:srgbClr val="002060"/>
+                          </a:solidFill>
+                          <a:latin typeface="맑은 고딕"/>
+                          <a:ea typeface="맑은 고딕"/>
+                          <a:cs typeface="맑은 고딕"/>
+                        </a:rPr>
+                        <a:t>신규 (2시간)</a:t>
+                      </a:r>
+                    </a:p>
+                  </a:txBody>
+                  <a:tcPr anchor="ctr" marL="36000" marR="36000" marT="0" marB="0">
+                    <a:lnL w="9525" cap="flat">
+                      <a:solidFill>
+                        <a:srgbClr val="BFBFBF"/>
+                      </a:solidFill>
+                    </a:lnL>
+                    <a:lnR w="9525" cap="flat">
+                      <a:solidFill>
+                        <a:srgbClr val="BFBFBF"/>
+                      </a:solidFill>
+                    </a:lnR>
+                    <a:lnT w="9525" cap="flat">
+                      <a:solidFill>
+                        <a:srgbClr val="BFBFBF"/>
+                      </a:solidFill>
+                    </a:lnT>
+                    <a:lnB w="9525" cap="flat">
+                      <a:solidFill>
+                        <a:srgbClr val="BFBFBF"/>
+                      </a:solidFill>
+                    </a:lnB>
+                    <a:solidFill>
+                      <a:srgbClr val="DEEBF7"/>
+                    </a:solidFill>
+                  </a:tcPr>
+                </a:tc>
+                <a:tc>
+                  <a:txBody>
+                    <a:bodyPr wrap="square"/>
+                    <a:lstStyle/>
+                    <a:p>
+                      <a:pPr algn="ctr"/>
+                      <a:r>
+                        <a:rPr sz="1000" b="1">
+                          <a:solidFill>
+                            <a:srgbClr val="002060"/>
+                          </a:solidFill>
+                          <a:latin typeface="맑은 고딕"/>
+                          <a:ea typeface="맑은 고딕"/>
+                          <a:cs typeface="맑은 고딕"/>
+                        </a:rPr>
+                        <a:t>점포</a:t>
+                      </a:r>
+                    </a:p>
+                  </a:txBody>
+                  <a:tcPr anchor="ctr" marL="36000" marR="36000" marT="0" marB="0">
+                    <a:lnL w="9525" cap="flat">
+                      <a:solidFill>
+                        <a:srgbClr val="BFBFBF"/>
+                      </a:solidFill>
+                    </a:lnL>
+                    <a:lnR w="9525" cap="flat">
+                      <a:solidFill>
+                        <a:srgbClr val="BFBFBF"/>
+                      </a:solidFill>
+                    </a:lnR>
+                    <a:lnT w="9525" cap="flat">
+                      <a:solidFill>
+                        <a:srgbClr val="BFBFBF"/>
+                      </a:solidFill>
+                    </a:lnT>
+                    <a:lnB w="9525" cap="flat">
+                      <a:solidFill>
+                        <a:srgbClr val="BFBFBF"/>
+                      </a:solidFill>
+                    </a:lnB>
+                    <a:solidFill>
+                      <a:srgbClr val="DEEBF7"/>
+                    </a:solidFill>
+                  </a:tcPr>
+                </a:tc>
+                <a:tc>
+                  <a:txBody>
+                    <a:bodyPr wrap="square"/>
+                    <a:lstStyle/>
+                    <a:p>
+                      <a:pPr algn="ctr"/>
+                      <a:r>
+                        <a:rPr sz="1000" b="1">
+                          <a:solidFill>
+                            <a:srgbClr val="002060"/>
+                          </a:solidFill>
+                          <a:latin typeface="맑은 고딕"/>
+                          <a:ea typeface="맑은 고딕"/>
+                          <a:cs typeface="맑은 고딕"/>
+                        </a:rPr>
+                        <a:t>사륜차</a:t>
+                      </a:r>
+                    </a:p>
+                  </a:txBody>
+                  <a:tcPr anchor="ctr" marL="36000" marR="36000" marT="0" marB="0">
+                    <a:lnL w="9525" cap="flat">
+                      <a:solidFill>
+                        <a:srgbClr val="BFBFBF"/>
+                      </a:solidFill>
+                    </a:lnL>
+                    <a:lnR w="9525" cap="flat">
+                      <a:solidFill>
+                        <a:srgbClr val="BFBFBF"/>
+                      </a:solidFill>
+                    </a:lnR>
+                    <a:lnT w="9525" cap="flat">
+                      <a:solidFill>
+                        <a:srgbClr val="BFBFBF"/>
+                      </a:solidFill>
+                    </a:lnT>
+                    <a:lnB w="9525" cap="flat">
+                      <a:solidFill>
+                        <a:srgbClr val="BFBFBF"/>
+                      </a:solidFill>
+                    </a:lnB>
+                    <a:solidFill>
+                      <a:srgbClr val="DEEBF7"/>
+                    </a:solidFill>
+                  </a:tcPr>
+                </a:tc>
+                <a:tc>
+                  <a:txBody>
+                    <a:bodyPr wrap="square"/>
+                    <a:lstStyle/>
+                    <a:p>
+                      <a:pPr algn="ctr"/>
+                      <a:r>
+                        <a:rPr sz="1000" b="1">
+                          <a:solidFill>
+                            <a:srgbClr val="002060"/>
+                          </a:solidFill>
+                          <a:latin typeface="맑은 고딕"/>
+                          <a:ea typeface="맑은 고딕"/>
+                          <a:cs typeface="맑은 고딕"/>
+                        </a:rPr>
+                        <a:t>대용량</a:t>
+                      </a:r>
+                    </a:p>
+                  </a:txBody>
+                  <a:tcPr anchor="ctr" marL="36000" marR="36000" marT="0" marB="0">
+                    <a:lnL w="9525" cap="flat">
+                      <a:solidFill>
+                        <a:srgbClr val="BFBFBF"/>
+                      </a:solidFill>
+                    </a:lnL>
+                    <a:lnR w="9525" cap="flat">
+                      <a:solidFill>
+                        <a:srgbClr val="BFBFBF"/>
+                      </a:solidFill>
+                    </a:lnR>
+                    <a:lnT w="9525" cap="flat">
+                      <a:solidFill>
+                        <a:srgbClr val="BFBFBF"/>
+                      </a:solidFill>
+                    </a:lnT>
+                    <a:lnB w="9525" cap="flat">
+                      <a:solidFill>
+                        <a:srgbClr val="BFBFBF"/>
+                      </a:solidFill>
+                    </a:lnB>
+                    <a:solidFill>
+                      <a:srgbClr val="DEEBF7"/>
+                    </a:solidFill>
+                  </a:tcPr>
+                </a:tc>
+              </a:tr>
             </a:tbl>
           </a:graphicData>
         </a:graphic>
@@ -4658,8 +4738,8 @@
         </p:nvSpPr>
         <p:spPr>
           <a:xfrm>
-            <a:off x="496799" y="4798799"/>
-            <a:ext cx="4338000" cy="172800"/>
+            <a:off x="594000" y="5230800"/>
+            <a:ext cx="4240800" cy="172800"/>
           </a:xfrm>
           <a:prstGeom prst="rect">
             <a:avLst/>
@@ -4674,7 +4754,7 @@
           <a:p>
             <a:pPr algn="l"/>
             <a:r>
-              <a:rPr sz="1100" b="0">
+              <a:rPr sz="1100" b="1">
                 <a:solidFill>
                   <a:srgbClr val="000000"/>
                 </a:solidFill>
@@ -4695,7 +4775,7 @@
         </p:nvSpPr>
         <p:spPr>
           <a:xfrm>
-            <a:off x="424800" y="5129999"/>
+            <a:off x="424800" y="5626800"/>
             <a:ext cx="4410000" cy="223200"/>
           </a:xfrm>
           <a:prstGeom prst="rect">
@@ -4732,7 +4812,7 @@
         </p:nvSpPr>
         <p:spPr>
           <a:xfrm>
-            <a:off x="622800" y="5353199"/>
+            <a:off x="622800" y="5850000"/>
             <a:ext cx="4212000" cy="223200"/>
           </a:xfrm>
           <a:prstGeom prst="rect">
@@ -4769,8 +4849,8 @@
         </p:nvSpPr>
         <p:spPr>
           <a:xfrm>
-            <a:off x="5072400" y="1475999"/>
-            <a:ext cx="4410000" cy="198000"/>
+            <a:off x="5072400" y="1504800"/>
+            <a:ext cx="4410000" cy="216000"/>
           </a:xfrm>
           <a:prstGeom prst="rect">
             <a:avLst/>
@@ -4785,7 +4865,7 @@
           <a:p>
             <a:pPr algn="ctr"/>
             <a:r>
-              <a:rPr sz="1200" b="1">
+              <a:rPr sz="1400" b="1">
                 <a:solidFill>
                   <a:srgbClr val="000000"/>
                 </a:solidFill>
@@ -4806,7 +4886,7 @@
         </p:nvCxnSpPr>
         <p:spPr>
           <a:xfrm>
-            <a:off x="5072400" y="1699200"/>
+            <a:off x="5072400" y="1789200"/>
             <a:ext cx="4410000" cy="0"/>
           </a:xfrm>
           <a:prstGeom prst="bentConnector3">
@@ -4841,7 +4921,7 @@
         </p:nvSpPr>
         <p:spPr>
           <a:xfrm>
-            <a:off x="5072400" y="1890000"/>
+            <a:off x="5072400" y="1962000"/>
             <a:ext cx="4410000" cy="223200"/>
           </a:xfrm>
           <a:prstGeom prst="rect">
@@ -4878,7 +4958,7 @@
         </p:nvSpPr>
         <p:spPr>
           <a:xfrm>
-            <a:off x="5270400" y="2113200"/>
+            <a:off x="5270400" y="2185200"/>
             <a:ext cx="4212000" cy="223200"/>
           </a:xfrm>
           <a:prstGeom prst="rect">
@@ -4915,7 +4995,7 @@
         </p:nvSpPr>
         <p:spPr>
           <a:xfrm>
-            <a:off x="5270400" y="2336400"/>
+            <a:off x="5270400" y="2408400"/>
             <a:ext cx="4212000" cy="223200"/>
           </a:xfrm>
           <a:prstGeom prst="rect">
@@ -4952,7 +5032,7 @@
         </p:nvSpPr>
         <p:spPr>
           <a:xfrm>
-            <a:off x="5270400" y="2559600"/>
+            <a:off x="5270400" y="2631600"/>
             <a:ext cx="4212000" cy="223200"/>
           </a:xfrm>
           <a:prstGeom prst="rect">
@@ -4989,7 +5069,7 @@
         </p:nvSpPr>
         <p:spPr>
           <a:xfrm>
-            <a:off x="5072400" y="2908800"/>
+            <a:off x="5072400" y="3060000"/>
             <a:ext cx="4410000" cy="223200"/>
           </a:xfrm>
           <a:prstGeom prst="rect">
@@ -5026,7 +5106,7 @@
         </p:nvSpPr>
         <p:spPr>
           <a:xfrm>
-            <a:off x="5270400" y="3131999"/>
+            <a:off x="5270400" y="3283199"/>
             <a:ext cx="4212000" cy="223200"/>
           </a:xfrm>
           <a:prstGeom prst="rect">
@@ -5063,7 +5143,7 @@
         </p:nvSpPr>
         <p:spPr>
           <a:xfrm>
-            <a:off x="5270400" y="3355199"/>
+            <a:off x="5270400" y="3506399"/>
             <a:ext cx="4212000" cy="223200"/>
           </a:xfrm>
           <a:prstGeom prst="rect">
@@ -5100,7 +5180,7 @@
         </p:nvSpPr>
         <p:spPr>
           <a:xfrm>
-            <a:off x="5072400" y="3704399"/>
+            <a:off x="5072400" y="3906000"/>
             <a:ext cx="4410000" cy="223200"/>
           </a:xfrm>
           <a:prstGeom prst="rect">
@@ -5137,7 +5217,7 @@
         </p:nvSpPr>
         <p:spPr>
           <a:xfrm>
-            <a:off x="5270400" y="3927599"/>
+            <a:off x="5270400" y="4129199"/>
             <a:ext cx="4212000" cy="223200"/>
           </a:xfrm>
           <a:prstGeom prst="rect">
@@ -5174,7 +5254,7 @@
         </p:nvSpPr>
         <p:spPr>
           <a:xfrm>
-            <a:off x="5270400" y="4150799"/>
+            <a:off x="5270400" y="4352399"/>
             <a:ext cx="4212000" cy="223200"/>
           </a:xfrm>
           <a:prstGeom prst="rect">
@@ -5211,7 +5291,7 @@
         </p:nvSpPr>
         <p:spPr>
           <a:xfrm>
-            <a:off x="5270400" y="4373999"/>
+            <a:off x="5270400" y="4575599"/>
             <a:ext cx="4212000" cy="223200"/>
           </a:xfrm>
           <a:prstGeom prst="rect">
@@ -5248,7 +5328,7 @@
         </p:nvSpPr>
         <p:spPr>
           <a:xfrm>
-            <a:off x="5072400" y="4723199"/>
+            <a:off x="5072400" y="5047200"/>
             <a:ext cx="4410000" cy="223200"/>
           </a:xfrm>
           <a:prstGeom prst="rect">
@@ -5277,15 +5357,52 @@
           </a:p>
         </p:txBody>
       </p:sp>
+      <p:sp>
+        <p:nvSpPr>
+          <p:cNvPr id="29" name="TextBox 28"/>
+          <p:cNvSpPr txBox="1"/>
+          <p:nvPr/>
+        </p:nvSpPr>
+        <p:spPr>
+          <a:xfrm>
+            <a:off x="5270400" y="5270400"/>
+            <a:ext cx="4212000" cy="223200"/>
+          </a:xfrm>
+          <a:prstGeom prst="rect">
+            <a:avLst/>
+          </a:prstGeom>
+          <a:noFill/>
+        </p:spPr>
+        <p:txBody>
+          <a:bodyPr wrap="square" anchor="t" lIns="0" rIns="0" tIns="0" bIns="0">
+            <a:spAutoFit/>
+          </a:bodyPr>
+          <a:lstStyle/>
+          <a:p>
+            <a:pPr algn="l"/>
+            <a:r>
+              <a:rPr sz="1100" b="0">
+                <a:solidFill>
+                  <a:srgbClr val="000000"/>
+                </a:solidFill>
+                <a:latin typeface="맑은 고딕"/>
+                <a:ea typeface="맑은 고딕"/>
+                <a:cs typeface="맑은 고딕"/>
+              </a:rPr>
+              <a:t>- 연말 50여 개 점포, 전국 즉시배송 기반 구축</a:t>
+            </a:r>
+          </a:p>
+        </p:txBody>
+      </p:sp>
       <p:cxnSp>
         <p:nvCxnSpPr>
-          <p:cNvPr id="29" name="Connector 28"/>
+          <p:cNvPr id="30" name="Connector 29"/>
           <p:cNvCxnSpPr/>
           <p:nvPr/>
         </p:nvCxnSpPr>
         <p:spPr>
           <a:xfrm>
-            <a:off x="5072400" y="5162399"/>
+            <a:off x="5072400" y="5821199"/>
             <a:ext cx="4410000" cy="0"/>
           </a:xfrm>
           <a:prstGeom prst="bentConnector3">
@@ -5315,13 +5432,13 @@
       </p:cxnSp>
       <p:sp>
         <p:nvSpPr>
-          <p:cNvPr id="30" name="Oval 29"/>
+          <p:cNvPr id="31" name="Oval 30"/>
           <p:cNvSpPr/>
           <p:nvPr/>
         </p:nvSpPr>
         <p:spPr>
           <a:xfrm>
-            <a:off x="5576850" y="5115599"/>
+            <a:off x="5576850" y="5774400"/>
             <a:ext cx="93600" cy="93600"/>
           </a:xfrm>
           <a:prstGeom prst="ellipse">
@@ -5361,13 +5478,13 @@
       </p:sp>
       <p:sp>
         <p:nvSpPr>
-          <p:cNvPr id="31" name="TextBox 30"/>
+          <p:cNvPr id="32" name="TextBox 31"/>
           <p:cNvSpPr txBox="1"/>
           <p:nvPr/>
         </p:nvSpPr>
         <p:spPr>
           <a:xfrm>
-            <a:off x="5072400" y="4964399"/>
+            <a:off x="5072400" y="5623200"/>
             <a:ext cx="1102500" cy="162000"/>
           </a:xfrm>
           <a:prstGeom prst="rect">
@@ -5398,13 +5515,13 @@
       </p:sp>
       <p:sp>
         <p:nvSpPr>
-          <p:cNvPr id="32" name="TextBox 31"/>
+          <p:cNvPr id="33" name="TextBox 32"/>
           <p:cNvSpPr txBox="1"/>
           <p:nvPr/>
         </p:nvSpPr>
         <p:spPr>
           <a:xfrm>
-            <a:off x="5072400" y="5234399"/>
+            <a:off x="5072400" y="5893199"/>
             <a:ext cx="1102500" cy="198000"/>
           </a:xfrm>
           <a:prstGeom prst="rect">
@@ -5428,20 +5545,34 @@
                 <a:ea typeface="맑은 고딕"/>
                 <a:cs typeface="맑은 고딕"/>
               </a:rPr>
-              <a:t>양재·하남</a:t>
-            </a:r>
-          </a:p>
-        </p:txBody>
-      </p:sp>
-      <p:sp>
-        <p:nvSpPr>
-          <p:cNvPr id="33" name="Oval 32"/>
+              <a:t>양재·하남점</a:t>
+            </a:r>
+          </a:p>
+          <a:p>
+            <a:pPr algn="ctr"/>
+            <a:r>
+              <a:rPr sz="1100" b="1">
+                <a:solidFill>
+                  <a:srgbClr val="000000"/>
+                </a:solidFill>
+                <a:latin typeface="맑은 고딕"/>
+                <a:ea typeface="맑은 고딕"/>
+                <a:cs typeface="맑은 고딕"/>
+              </a:rPr>
+              <a:t>도입</a:t>
+            </a:r>
+          </a:p>
+        </p:txBody>
+      </p:sp>
+      <p:sp>
+        <p:nvSpPr>
+          <p:cNvPr id="34" name="Oval 33"/>
           <p:cNvSpPr/>
           <p:nvPr/>
         </p:nvSpPr>
         <p:spPr>
           <a:xfrm>
-            <a:off x="6679350" y="5115599"/>
+            <a:off x="6679350" y="5774400"/>
             <a:ext cx="93600" cy="93600"/>
           </a:xfrm>
           <a:prstGeom prst="ellipse">
@@ -5481,13 +5612,13 @@
       </p:sp>
       <p:sp>
         <p:nvSpPr>
-          <p:cNvPr id="34" name="TextBox 33"/>
+          <p:cNvPr id="35" name="TextBox 34"/>
           <p:cNvSpPr txBox="1"/>
           <p:nvPr/>
         </p:nvSpPr>
         <p:spPr>
           <a:xfrm>
-            <a:off x="6174900" y="4964399"/>
+            <a:off x="6174900" y="5623200"/>
             <a:ext cx="1102500" cy="162000"/>
           </a:xfrm>
           <a:prstGeom prst="rect">
@@ -5518,13 +5649,13 @@
       </p:sp>
       <p:sp>
         <p:nvSpPr>
-          <p:cNvPr id="35" name="TextBox 34"/>
+          <p:cNvPr id="36" name="TextBox 35"/>
           <p:cNvSpPr txBox="1"/>
           <p:nvPr/>
         </p:nvSpPr>
         <p:spPr>
           <a:xfrm>
-            <a:off x="6174900" y="5234399"/>
+            <a:off x="6174900" y="5893199"/>
             <a:ext cx="1102500" cy="198000"/>
           </a:xfrm>
           <a:prstGeom prst="rect">
@@ -5548,20 +5679,34 @@
                 <a:ea typeface="맑은 고딕"/>
                 <a:cs typeface="맑은 고딕"/>
               </a:rPr>
-              <a:t>서울 확대</a:t>
-            </a:r>
-          </a:p>
-        </p:txBody>
-      </p:sp>
-      <p:sp>
-        <p:nvSpPr>
-          <p:cNvPr id="36" name="Oval 35"/>
+              <a:t>서울 지역</a:t>
+            </a:r>
+          </a:p>
+          <a:p>
+            <a:pPr algn="ctr"/>
+            <a:r>
+              <a:rPr sz="1100" b="1">
+                <a:solidFill>
+                  <a:srgbClr val="000000"/>
+                </a:solidFill>
+                <a:latin typeface="맑은 고딕"/>
+                <a:ea typeface="맑은 고딕"/>
+                <a:cs typeface="맑은 고딕"/>
+              </a:rPr>
+              <a:t>확대</a:t>
+            </a:r>
+          </a:p>
+        </p:txBody>
+      </p:sp>
+      <p:sp>
+        <p:nvSpPr>
+          <p:cNvPr id="37" name="Oval 36"/>
           <p:cNvSpPr/>
           <p:nvPr/>
         </p:nvSpPr>
         <p:spPr>
           <a:xfrm>
-            <a:off x="7781850" y="5115599"/>
+            <a:off x="7781850" y="5774400"/>
             <a:ext cx="93600" cy="93600"/>
           </a:xfrm>
           <a:prstGeom prst="ellipse">
@@ -5601,13 +5746,13 @@
       </p:sp>
       <p:sp>
         <p:nvSpPr>
-          <p:cNvPr id="37" name="TextBox 36"/>
+          <p:cNvPr id="38" name="TextBox 37"/>
           <p:cNvSpPr txBox="1"/>
           <p:nvPr/>
         </p:nvSpPr>
         <p:spPr>
           <a:xfrm>
-            <a:off x="7277400" y="4964399"/>
+            <a:off x="7277400" y="5623200"/>
             <a:ext cx="1102500" cy="162000"/>
           </a:xfrm>
           <a:prstGeom prst="rect">
@@ -5638,13 +5783,13 @@
       </p:sp>
       <p:sp>
         <p:nvSpPr>
-          <p:cNvPr id="38" name="TextBox 37"/>
+          <p:cNvPr id="39" name="TextBox 38"/>
           <p:cNvSpPr txBox="1"/>
           <p:nvPr/>
         </p:nvSpPr>
         <p:spPr>
           <a:xfrm>
-            <a:off x="7277400" y="5234399"/>
+            <a:off x="7277400" y="5893199"/>
             <a:ext cx="1102500" cy="198000"/>
           </a:xfrm>
           <a:prstGeom prst="rect">
@@ -5675,13 +5820,13 @@
       </p:sp>
       <p:sp>
         <p:nvSpPr>
-          <p:cNvPr id="39" name="Oval 38"/>
+          <p:cNvPr id="40" name="Oval 39"/>
           <p:cNvSpPr/>
           <p:nvPr/>
         </p:nvSpPr>
         <p:spPr>
           <a:xfrm>
-            <a:off x="8884350" y="5115599"/>
+            <a:off x="8884350" y="5774400"/>
             <a:ext cx="93600" cy="93600"/>
           </a:xfrm>
           <a:prstGeom prst="ellipse">
@@ -5721,13 +5866,13 @@
       </p:sp>
       <p:sp>
         <p:nvSpPr>
-          <p:cNvPr id="40" name="TextBox 39"/>
+          <p:cNvPr id="41" name="TextBox 40"/>
           <p:cNvSpPr txBox="1"/>
           <p:nvPr/>
         </p:nvSpPr>
         <p:spPr>
           <a:xfrm>
-            <a:off x="8379900" y="4964399"/>
+            <a:off x="8379900" y="5623200"/>
             <a:ext cx="1102500" cy="162000"/>
           </a:xfrm>
           <a:prstGeom prst="rect">
@@ -5758,13 +5903,13 @@
       </p:sp>
       <p:sp>
         <p:nvSpPr>
-          <p:cNvPr id="41" name="TextBox 40"/>
+          <p:cNvPr id="42" name="TextBox 41"/>
           <p:cNvSpPr txBox="1"/>
           <p:nvPr/>
         </p:nvSpPr>
         <p:spPr>
           <a:xfrm>
-            <a:off x="8379900" y="5234399"/>
+            <a:off x="8379900" y="5893199"/>
             <a:ext cx="1102500" cy="198000"/>
           </a:xfrm>
           <a:prstGeom prst="rect">
@@ -5788,21 +5933,35 @@
                 <a:ea typeface="맑은 고딕"/>
                 <a:cs typeface="맑은 고딕"/>
               </a:rPr>
-              <a:t>50여 점포</a:t>
+              <a:t>약 50개 점포</a:t>
+            </a:r>
+          </a:p>
+          <a:p>
+            <a:pPr algn="ctr"/>
+            <a:r>
+              <a:rPr sz="1100" b="1">
+                <a:solidFill>
+                  <a:srgbClr val="000000"/>
+                </a:solidFill>
+                <a:latin typeface="맑은 고딕"/>
+                <a:ea typeface="맑은 고딕"/>
+                <a:cs typeface="맑은 고딕"/>
+              </a:rPr>
+              <a:t>운영</a:t>
             </a:r>
           </a:p>
         </p:txBody>
       </p:sp>
       <p:cxnSp>
         <p:nvCxnSpPr>
-          <p:cNvPr id="42" name="Connector 41"/>
+          <p:cNvPr id="43" name="Connector 42"/>
           <p:cNvCxnSpPr/>
           <p:nvPr/>
         </p:nvCxnSpPr>
         <p:spPr>
           <a:xfrm>
-            <a:off x="4953600" y="1475999"/>
-            <a:ext cx="0" cy="4140001"/>
+            <a:off x="4953600" y="1504800"/>
+            <a:ext cx="0" cy="4723200"/>
           </a:xfrm>
           <a:prstGeom prst="bentConnector3">
             <a:avLst/>
@@ -5828,87 +5987,6 @@
           </a:fontRef>
         </p:style>
       </p:cxnSp>
-      <p:sp>
-        <p:nvSpPr>
-          <p:cNvPr id="43" name="Rectangle 42"/>
-          <p:cNvSpPr/>
-          <p:nvPr/>
-        </p:nvSpPr>
-        <p:spPr>
-          <a:xfrm>
-            <a:off x="424800" y="5706000"/>
-            <a:ext cx="9057600" cy="360000"/>
-          </a:xfrm>
-          <a:prstGeom prst="rect">
-            <a:avLst/>
-          </a:prstGeom>
-          <a:solidFill>
-            <a:srgbClr val="000066"/>
-          </a:solidFill>
-          <a:ln>
-            <a:noFill/>
-          </a:ln>
-          <a:effectLst/>
-        </p:spPr>
-        <p:style>
-          <a:lnRef idx="1">
-            <a:schemeClr val="accent1"/>
-          </a:lnRef>
-          <a:fillRef idx="3">
-            <a:schemeClr val="accent1"/>
-          </a:fillRef>
-          <a:effectRef idx="2">
-            <a:schemeClr val="accent1"/>
-          </a:effectRef>
-          <a:fontRef idx="minor">
-            <a:schemeClr val="lt1"/>
-          </a:fontRef>
-        </p:style>
-        <p:txBody>
-          <a:bodyPr rtlCol="0" anchor="ctr"/>
-          <a:lstStyle/>
-          <a:p>
-            <a:pPr algn="ctr"/>
-          </a:p>
-        </p:txBody>
-      </p:sp>
-      <p:sp>
-        <p:nvSpPr>
-          <p:cNvPr id="44" name="TextBox 43"/>
-          <p:cNvSpPr txBox="1"/>
-          <p:nvPr/>
-        </p:nvSpPr>
-        <p:spPr>
-          <a:xfrm>
-            <a:off x="424800" y="5706000"/>
-            <a:ext cx="9057600" cy="360000"/>
-          </a:xfrm>
-          <a:prstGeom prst="rect">
-            <a:avLst/>
-          </a:prstGeom>
-          <a:noFill/>
-        </p:spPr>
-        <p:txBody>
-          <a:bodyPr wrap="square" anchor="ctr" lIns="0" rIns="0" tIns="0" bIns="0">
-            <a:spAutoFit/>
-          </a:bodyPr>
-          <a:lstStyle/>
-          <a:p>
-            <a:pPr algn="ctr"/>
-            <a:r>
-              <a:rPr sz="1100" b="1">
-                <a:solidFill>
-                  <a:srgbClr val="FFFFFF"/>
-                </a:solidFill>
-                <a:latin typeface="맑은 고딕"/>
-                <a:ea typeface="맑은 고딕"/>
-                <a:cs typeface="맑은 고딕"/>
-              </a:rPr>
-              <a:t>사륜차 대용량 즉시배송으로 퀵커머스 공백 흡수 — 연말 50여 개 점포, 전국 즉시배송 기반 구축</a:t>
-            </a:r>
-          </a:p>
-        </p:txBody>
-      </p:sp>
     </p:spTree>
   </p:cSld>
   <p:clrMapOvr>

--- a/reports/ssg-quickcommerce-onepager.pptx
+++ b/reports/ssg-quickcommerce-onepager.pptx
@@ -3120,7 +3120,7 @@
                 <a:ea typeface="맑은 고딕"/>
                 <a:cs typeface="맑은 고딕"/>
               </a:rPr>
-              <a:t>[이마트 퀵커머스] </a:t>
+              <a:t>■  </a:t>
             </a:r>
             <a:r>
               <a:rPr sz="2000" b="1">
@@ -3131,7 +3131,7 @@
                 <a:ea typeface="맑은 고딕"/>
                 <a:cs typeface="맑은 고딕"/>
               </a:rPr>
-              <a:t>SSG닷컴 '2시간 배송' 도입 전략</a:t>
+              <a:t>이마트 퀵커머스 '2시간 배송' 서비스 도입</a:t>
             </a:r>
           </a:p>
         </p:txBody>
@@ -3242,7 +3242,7 @@
                 <a:ea typeface="맑은 고딕"/>
                 <a:cs typeface="맑은 고딕"/>
               </a:rPr>
-              <a:t>현황 및 도입 배경</a:t>
+              <a:t>현황 및 배경</a:t>
             </a:r>
           </a:p>
         </p:txBody>
@@ -3401,7 +3401,118 @@
         </p:nvSpPr>
         <p:spPr>
           <a:xfrm>
-            <a:off x="424800" y="2818800"/>
+            <a:off x="424800" y="2786400"/>
+            <a:ext cx="4410000" cy="223200"/>
+          </a:xfrm>
+          <a:prstGeom prst="rect">
+            <a:avLst/>
+          </a:prstGeom>
+          <a:noFill/>
+        </p:spPr>
+        <p:txBody>
+          <a:bodyPr wrap="square" anchor="t" lIns="0" rIns="0" tIns="0" bIns="0">
+            <a:spAutoFit/>
+          </a:bodyPr>
+          <a:lstStyle/>
+          <a:p>
+            <a:pPr algn="l"/>
+            <a:r>
+              <a:rPr sz="1200" b="1">
+                <a:solidFill>
+                  <a:srgbClr val="000000"/>
+                </a:solidFill>
+                <a:latin typeface="맑은 고딕"/>
+                <a:ea typeface="맑은 고딕"/>
+                <a:cs typeface="맑은 고딕"/>
+              </a:rPr>
+              <a:t>• 퀵커머스 서비스 이원화</a:t>
+            </a:r>
+          </a:p>
+        </p:txBody>
+      </p:sp>
+      <p:sp>
+        <p:nvSpPr>
+          <p:cNvPr id="11" name="TextBox 10"/>
+          <p:cNvSpPr txBox="1"/>
+          <p:nvPr/>
+        </p:nvSpPr>
+        <p:spPr>
+          <a:xfrm>
+            <a:off x="622800" y="3009600"/>
+            <a:ext cx="4212000" cy="223200"/>
+          </a:xfrm>
+          <a:prstGeom prst="rect">
+            <a:avLst/>
+          </a:prstGeom>
+          <a:noFill/>
+        </p:spPr>
+        <p:txBody>
+          <a:bodyPr wrap="square" anchor="t" lIns="0" rIns="0" tIns="0" bIns="0">
+            <a:spAutoFit/>
+          </a:bodyPr>
+          <a:lstStyle/>
+          <a:p>
+            <a:pPr algn="l"/>
+            <a:r>
+              <a:rPr sz="1100" b="0">
+                <a:solidFill>
+                  <a:srgbClr val="000000"/>
+                </a:solidFill>
+                <a:latin typeface="맑은 고딕"/>
+                <a:ea typeface="맑은 고딕"/>
+                <a:cs typeface="맑은 고딕"/>
+              </a:rPr>
+              <a:t>- 1시간 배송(소량) + 2시간 배송(대용량) 이원화</a:t>
+            </a:r>
+          </a:p>
+        </p:txBody>
+      </p:sp>
+      <p:sp>
+        <p:nvSpPr>
+          <p:cNvPr id="12" name="TextBox 11"/>
+          <p:cNvSpPr txBox="1"/>
+          <p:nvPr/>
+        </p:nvSpPr>
+        <p:spPr>
+          <a:xfrm>
+            <a:off x="622800" y="3232799"/>
+            <a:ext cx="4212000" cy="223200"/>
+          </a:xfrm>
+          <a:prstGeom prst="rect">
+            <a:avLst/>
+          </a:prstGeom>
+          <a:noFill/>
+        </p:spPr>
+        <p:txBody>
+          <a:bodyPr wrap="square" anchor="t" lIns="0" rIns="0" tIns="0" bIns="0">
+            <a:spAutoFit/>
+          </a:bodyPr>
+          <a:lstStyle/>
+          <a:p>
+            <a:pPr algn="l"/>
+            <a:r>
+              <a:rPr sz="1100" b="0">
+                <a:solidFill>
+                  <a:srgbClr val="000000"/>
+                </a:solidFill>
+                <a:latin typeface="맑은 고딕"/>
+                <a:ea typeface="맑은 고딕"/>
+                <a:cs typeface="맑은 고딕"/>
+              </a:rPr>
+              <a:t>- 점포 15만 종 구색 기반 (바로퀵 1만 대비 15배)</a:t>
+            </a:r>
+          </a:p>
+        </p:txBody>
+      </p:sp>
+      <p:sp>
+        <p:nvSpPr>
+          <p:cNvPr id="13" name="TextBox 12"/>
+          <p:cNvSpPr txBox="1"/>
+          <p:nvPr/>
+        </p:nvSpPr>
+        <p:spPr>
+          <a:xfrm>
+            <a:off x="424800" y="3654000"/>
             <a:ext cx="4410000" cy="223200"/>
           </a:xfrm>
           <a:prstGeom prst="rect">
@@ -3432,14 +3543,14 @@
       </p:sp>
       <p:graphicFrame>
         <p:nvGraphicFramePr>
-          <p:cNvPr id="11" name="Table 10"/>
+          <p:cNvPr id="14" name="Table 13"/>
           <p:cNvGraphicFramePr>
             <a:graphicFrameLocks noGrp="1"/>
           </p:cNvGraphicFramePr>
           <p:nvPr/>
         </p:nvGraphicFramePr>
         <p:xfrm>
-          <a:off x="424800" y="3182400"/>
+          <a:off x="424800" y="4014000"/>
           <a:ext cx="4409999" cy="1922400"/>
         </p:xfrm>
         <a:graphic>
@@ -4346,7 +4457,21 @@
                           <a:ea typeface="맑은 고딕"/>
                           <a:cs typeface="맑은 고딕"/>
                         </a:rPr>
-                        <a:t>바로퀵 (1시간)</a:t>
+                        <a:t>1시간 배송</a:t>
+                      </a:r>
+                    </a:p>
+                    <a:p>
+                      <a:pPr algn="ctr"/>
+                      <a:r>
+                        <a:rPr sz="1000" b="1">
+                          <a:solidFill>
+                            <a:srgbClr val="000000"/>
+                          </a:solidFill>
+                          <a:latin typeface="맑은 고딕"/>
+                          <a:ea typeface="맑은 고딕"/>
+                          <a:cs typeface="맑은 고딕"/>
+                        </a:rPr>
+                        <a:t>(바로퀵)</a:t>
                       </a:r>
                     </a:p>
                   </a:txBody>
@@ -4560,7 +4685,7 @@
                           <a:ea typeface="맑은 고딕"/>
                           <a:cs typeface="맑은 고딕"/>
                         </a:rPr>
-                        <a:t>신규 (2시간)</a:t>
+                        <a:t>2시간 배송</a:t>
                       </a:r>
                     </a:p>
                   </a:txBody>
@@ -4732,117 +4857,6 @@
       </p:graphicFrame>
       <p:sp>
         <p:nvSpPr>
-          <p:cNvPr id="12" name="TextBox 11"/>
-          <p:cNvSpPr txBox="1"/>
-          <p:nvPr/>
-        </p:nvSpPr>
-        <p:spPr>
-          <a:xfrm>
-            <a:off x="594000" y="5230800"/>
-            <a:ext cx="4240800" cy="172800"/>
-          </a:xfrm>
-          <a:prstGeom prst="rect">
-            <a:avLst/>
-          </a:prstGeom>
-          <a:noFill/>
-        </p:spPr>
-        <p:txBody>
-          <a:bodyPr wrap="square" anchor="t" lIns="0" rIns="0" tIns="0" bIns="0">
-            <a:spAutoFit/>
-          </a:bodyPr>
-          <a:lstStyle/>
-          <a:p>
-            <a:pPr algn="l"/>
-            <a:r>
-              <a:rPr sz="1100" b="1">
-                <a:solidFill>
-                  <a:srgbClr val="000000"/>
-                </a:solidFill>
-                <a:latin typeface="맑은 고딕"/>
-                <a:ea typeface="맑은 고딕"/>
-                <a:cs typeface="맑은 고딕"/>
-              </a:rPr>
-              <a:t>→ 사륜 차량 2시간 배송 통한, 서비스 공백 해소 (대용량/즉시)</a:t>
-            </a:r>
-          </a:p>
-        </p:txBody>
-      </p:sp>
-      <p:sp>
-        <p:nvSpPr>
-          <p:cNvPr id="13" name="TextBox 12"/>
-          <p:cNvSpPr txBox="1"/>
-          <p:nvPr/>
-        </p:nvSpPr>
-        <p:spPr>
-          <a:xfrm>
-            <a:off x="424800" y="5626800"/>
-            <a:ext cx="4410000" cy="223200"/>
-          </a:xfrm>
-          <a:prstGeom prst="rect">
-            <a:avLst/>
-          </a:prstGeom>
-          <a:noFill/>
-        </p:spPr>
-        <p:txBody>
-          <a:bodyPr wrap="square" anchor="t" lIns="0" rIns="0" tIns="0" bIns="0">
-            <a:spAutoFit/>
-          </a:bodyPr>
-          <a:lstStyle/>
-          <a:p>
-            <a:pPr algn="l"/>
-            <a:r>
-              <a:rPr sz="1200" b="1">
-                <a:solidFill>
-                  <a:srgbClr val="000000"/>
-                </a:solidFill>
-                <a:latin typeface="맑은 고딕"/>
-                <a:ea typeface="맑은 고딕"/>
-                <a:cs typeface="맑은 고딕"/>
-              </a:rPr>
-              <a:t>• 규제 제약</a:t>
-            </a:r>
-          </a:p>
-        </p:txBody>
-      </p:sp>
-      <p:sp>
-        <p:nvSpPr>
-          <p:cNvPr id="14" name="TextBox 13"/>
-          <p:cNvSpPr txBox="1"/>
-          <p:nvPr/>
-        </p:nvSpPr>
-        <p:spPr>
-          <a:xfrm>
-            <a:off x="622800" y="5850000"/>
-            <a:ext cx="4212000" cy="223200"/>
-          </a:xfrm>
-          <a:prstGeom prst="rect">
-            <a:avLst/>
-          </a:prstGeom>
-          <a:noFill/>
-        </p:spPr>
-        <p:txBody>
-          <a:bodyPr wrap="square" anchor="t" lIns="0" rIns="0" tIns="0" bIns="0">
-            <a:spAutoFit/>
-          </a:bodyPr>
-          <a:lstStyle/>
-          <a:p>
-            <a:pPr algn="l"/>
-            <a:r>
-              <a:rPr sz="1100" b="0">
-                <a:solidFill>
-                  <a:srgbClr val="000000"/>
-                </a:solidFill>
-                <a:latin typeface="맑은 고딕"/>
-                <a:ea typeface="맑은 고딕"/>
-                <a:cs typeface="맑은 고딕"/>
-              </a:rPr>
-              <a:t>- 유통산업발전법 → 점포 물류거점(PP센터) 새벽 불가</a:t>
-            </a:r>
-          </a:p>
-        </p:txBody>
-      </p:sp>
-      <p:sp>
-        <p:nvSpPr>
           <p:cNvPr id="15" name="TextBox 14"/>
           <p:cNvSpPr txBox="1"/>
           <p:nvPr/>
@@ -4873,7 +4887,7 @@
                 <a:ea typeface="맑은 고딕"/>
                 <a:cs typeface="맑은 고딕"/>
               </a:rPr>
-              <a:t>추진 방안 : '2시간 배송'</a:t>
+              <a:t>서비스 세부 내용</a:t>
             </a:r>
           </a:p>
         </p:txBody>
@@ -4921,7 +4935,7 @@
         </p:nvSpPr>
         <p:spPr>
           <a:xfrm>
-            <a:off x="5072400" y="1962000"/>
+            <a:off x="5072400" y="1958400"/>
             <a:ext cx="4410000" cy="223200"/>
           </a:xfrm>
           <a:prstGeom prst="rect">
@@ -4945,7 +4959,7 @@
                 <a:ea typeface="맑은 고딕"/>
                 <a:cs typeface="맑은 고딕"/>
               </a:rPr>
-              <a:t>• 시범 운영 ('26. 7. 9.~)</a:t>
+              <a:t>• 확산 로드맵</a:t>
             </a:r>
           </a:p>
         </p:txBody>
@@ -4958,414 +4972,7 @@
         </p:nvSpPr>
         <p:spPr>
           <a:xfrm>
-            <a:off x="5270400" y="2185200"/>
-            <a:ext cx="4212000" cy="223200"/>
-          </a:xfrm>
-          <a:prstGeom prst="rect">
-            <a:avLst/>
-          </a:prstGeom>
-          <a:noFill/>
-        </p:spPr>
-        <p:txBody>
-          <a:bodyPr wrap="square" anchor="t" lIns="0" rIns="0" tIns="0" bIns="0">
-            <a:spAutoFit/>
-          </a:bodyPr>
-          <a:lstStyle/>
-          <a:p>
-            <a:pPr algn="l"/>
-            <a:r>
-              <a:rPr sz="1100" b="0">
-                <a:solidFill>
-                  <a:srgbClr val="000000"/>
-                </a:solidFill>
-                <a:latin typeface="맑은 고딕"/>
-                <a:ea typeface="맑은 고딕"/>
-                <a:cs typeface="맑은 고딕"/>
-              </a:rPr>
-              <a:t>- 20시까지 주문 접수 → 결제 후 2시간 내 배송 완료</a:t>
-            </a:r>
-          </a:p>
-        </p:txBody>
-      </p:sp>
-      <p:sp>
-        <p:nvSpPr>
-          <p:cNvPr id="19" name="TextBox 18"/>
-          <p:cNvSpPr txBox="1"/>
-          <p:nvPr/>
-        </p:nvSpPr>
-        <p:spPr>
-          <a:xfrm>
-            <a:off x="5270400" y="2408400"/>
-            <a:ext cx="4212000" cy="223200"/>
-          </a:xfrm>
-          <a:prstGeom prst="rect">
-            <a:avLst/>
-          </a:prstGeom>
-          <a:noFill/>
-        </p:spPr>
-        <p:txBody>
-          <a:bodyPr wrap="square" anchor="t" lIns="0" rIns="0" tIns="0" bIns="0">
-            <a:spAutoFit/>
-          </a:bodyPr>
-          <a:lstStyle/>
-          <a:p>
-            <a:pPr algn="l"/>
-            <a:r>
-              <a:rPr sz="1100" b="0">
-                <a:solidFill>
-                  <a:srgbClr val="000000"/>
-                </a:solidFill>
-                <a:latin typeface="맑은 고딕"/>
-                <a:ea typeface="맑은 고딕"/>
-                <a:cs typeface="맑은 고딕"/>
-              </a:rPr>
-              <a:t>- 기존 예약배송 병행 선택 가능</a:t>
-            </a:r>
-          </a:p>
-        </p:txBody>
-      </p:sp>
-      <p:sp>
-        <p:nvSpPr>
-          <p:cNvPr id="20" name="TextBox 19"/>
-          <p:cNvSpPr txBox="1"/>
-          <p:nvPr/>
-        </p:nvSpPr>
-        <p:spPr>
-          <a:xfrm>
-            <a:off x="5270400" y="2631600"/>
-            <a:ext cx="4212000" cy="223200"/>
-          </a:xfrm>
-          <a:prstGeom prst="rect">
-            <a:avLst/>
-          </a:prstGeom>
-          <a:noFill/>
-        </p:spPr>
-        <p:txBody>
-          <a:bodyPr wrap="square" anchor="t" lIns="0" rIns="0" tIns="0" bIns="0">
-            <a:spAutoFit/>
-          </a:bodyPr>
-          <a:lstStyle/>
-          <a:p>
-            <a:pPr algn="l"/>
-            <a:r>
-              <a:rPr sz="1100" b="0">
-                <a:solidFill>
-                  <a:srgbClr val="000000"/>
-                </a:solidFill>
-                <a:latin typeface="맑은 고딕"/>
-                <a:ea typeface="맑은 고딕"/>
-                <a:cs typeface="맑은 고딕"/>
-              </a:rPr>
-              <a:t>- 쓱배송 사륜차로 대용량·중량 상품 대응</a:t>
-            </a:r>
-          </a:p>
-        </p:txBody>
-      </p:sp>
-      <p:sp>
-        <p:nvSpPr>
-          <p:cNvPr id="21" name="TextBox 20"/>
-          <p:cNvSpPr txBox="1"/>
-          <p:nvPr/>
-        </p:nvSpPr>
-        <p:spPr>
-          <a:xfrm>
-            <a:off x="5072400" y="3060000"/>
-            <a:ext cx="4410000" cy="223200"/>
-          </a:xfrm>
-          <a:prstGeom prst="rect">
-            <a:avLst/>
-          </a:prstGeom>
-          <a:noFill/>
-        </p:spPr>
-        <p:txBody>
-          <a:bodyPr wrap="square" anchor="t" lIns="0" rIns="0" tIns="0" bIns="0">
-            <a:spAutoFit/>
-          </a:bodyPr>
-          <a:lstStyle/>
-          <a:p>
-            <a:pPr algn="l"/>
-            <a:r>
-              <a:rPr sz="1200" b="1">
-                <a:solidFill>
-                  <a:srgbClr val="000000"/>
-                </a:solidFill>
-                <a:latin typeface="맑은 고딕"/>
-                <a:ea typeface="맑은 고딕"/>
-                <a:cs typeface="맑은 고딕"/>
-              </a:rPr>
-              <a:t>• 서비스 세분화</a:t>
-            </a:r>
-          </a:p>
-        </p:txBody>
-      </p:sp>
-      <p:sp>
-        <p:nvSpPr>
-          <p:cNvPr id="22" name="TextBox 21"/>
-          <p:cNvSpPr txBox="1"/>
-          <p:nvPr/>
-        </p:nvSpPr>
-        <p:spPr>
-          <a:xfrm>
-            <a:off x="5270400" y="3283199"/>
-            <a:ext cx="4212000" cy="223200"/>
-          </a:xfrm>
-          <a:prstGeom prst="rect">
-            <a:avLst/>
-          </a:prstGeom>
-          <a:noFill/>
-        </p:spPr>
-        <p:txBody>
-          <a:bodyPr wrap="square" anchor="t" lIns="0" rIns="0" tIns="0" bIns="0">
-            <a:spAutoFit/>
-          </a:bodyPr>
-          <a:lstStyle/>
-          <a:p>
-            <a:pPr algn="l"/>
-            <a:r>
-              <a:rPr sz="1100" b="0">
-                <a:solidFill>
-                  <a:srgbClr val="000000"/>
-                </a:solidFill>
-                <a:latin typeface="맑은 고딕"/>
-                <a:ea typeface="맑은 고딕"/>
-                <a:cs typeface="맑은 고딕"/>
-              </a:rPr>
-              <a:t>- 1시간 바로퀵(소량) / 2시간(대용량) 이원화</a:t>
-            </a:r>
-          </a:p>
-        </p:txBody>
-      </p:sp>
-      <p:sp>
-        <p:nvSpPr>
-          <p:cNvPr id="23" name="TextBox 22"/>
-          <p:cNvSpPr txBox="1"/>
-          <p:nvPr/>
-        </p:nvSpPr>
-        <p:spPr>
-          <a:xfrm>
-            <a:off x="5270400" y="3506399"/>
-            <a:ext cx="4212000" cy="223200"/>
-          </a:xfrm>
-          <a:prstGeom prst="rect">
-            <a:avLst/>
-          </a:prstGeom>
-          <a:noFill/>
-        </p:spPr>
-        <p:txBody>
-          <a:bodyPr wrap="square" anchor="t" lIns="0" rIns="0" tIns="0" bIns="0">
-            <a:spAutoFit/>
-          </a:bodyPr>
-          <a:lstStyle/>
-          <a:p>
-            <a:pPr algn="l"/>
-            <a:r>
-              <a:rPr sz="1100" b="0">
-                <a:solidFill>
-                  <a:srgbClr val="000000"/>
-                </a:solidFill>
-                <a:latin typeface="맑은 고딕"/>
-                <a:ea typeface="맑은 고딕"/>
-                <a:cs typeface="맑은 고딕"/>
-              </a:rPr>
-              <a:t>- 점포 15만 종 구색 기반 (바로퀵의 15배)</a:t>
-            </a:r>
-          </a:p>
-        </p:txBody>
-      </p:sp>
-      <p:sp>
-        <p:nvSpPr>
-          <p:cNvPr id="24" name="TextBox 23"/>
-          <p:cNvSpPr txBox="1"/>
-          <p:nvPr/>
-        </p:nvSpPr>
-        <p:spPr>
-          <a:xfrm>
-            <a:off x="5072400" y="3906000"/>
-            <a:ext cx="4410000" cy="223200"/>
-          </a:xfrm>
-          <a:prstGeom prst="rect">
-            <a:avLst/>
-          </a:prstGeom>
-          <a:noFill/>
-        </p:spPr>
-        <p:txBody>
-          <a:bodyPr wrap="square" anchor="t" lIns="0" rIns="0" tIns="0" bIns="0">
-            <a:spAutoFit/>
-          </a:bodyPr>
-          <a:lstStyle/>
-          <a:p>
-            <a:pPr algn="l"/>
-            <a:r>
-              <a:rPr sz="1200" b="1">
-                <a:solidFill>
-                  <a:srgbClr val="000000"/>
-                </a:solidFill>
-                <a:latin typeface="맑은 고딕"/>
-                <a:ea typeface="맑은 고딕"/>
-                <a:cs typeface="맑은 고딕"/>
-              </a:rPr>
-              <a:t>• 기대 효과</a:t>
-            </a:r>
-          </a:p>
-        </p:txBody>
-      </p:sp>
-      <p:sp>
-        <p:nvSpPr>
-          <p:cNvPr id="25" name="TextBox 24"/>
-          <p:cNvSpPr txBox="1"/>
-          <p:nvPr/>
-        </p:nvSpPr>
-        <p:spPr>
-          <a:xfrm>
-            <a:off x="5270400" y="4129199"/>
-            <a:ext cx="4212000" cy="223200"/>
-          </a:xfrm>
-          <a:prstGeom prst="rect">
-            <a:avLst/>
-          </a:prstGeom>
-          <a:noFill/>
-        </p:spPr>
-        <p:txBody>
-          <a:bodyPr wrap="square" anchor="t" lIns="0" rIns="0" tIns="0" bIns="0">
-            <a:spAutoFit/>
-          </a:bodyPr>
-          <a:lstStyle/>
-          <a:p>
-            <a:pPr algn="l"/>
-            <a:r>
-              <a:rPr sz="1100" b="0">
-                <a:solidFill>
-                  <a:srgbClr val="000000"/>
-                </a:solidFill>
-                <a:latin typeface="맑은 고딕"/>
-                <a:ea typeface="맑은 고딕"/>
-                <a:cs typeface="맑은 고딕"/>
-              </a:rPr>
-              <a:t>- 대용량 즉시배송 서비스 공백 흡수</a:t>
-            </a:r>
-          </a:p>
-        </p:txBody>
-      </p:sp>
-      <p:sp>
-        <p:nvSpPr>
-          <p:cNvPr id="26" name="TextBox 25"/>
-          <p:cNvSpPr txBox="1"/>
-          <p:nvPr/>
-        </p:nvSpPr>
-        <p:spPr>
-          <a:xfrm>
-            <a:off x="5270400" y="4352399"/>
-            <a:ext cx="4212000" cy="223200"/>
-          </a:xfrm>
-          <a:prstGeom prst="rect">
-            <a:avLst/>
-          </a:prstGeom>
-          <a:noFill/>
-        </p:spPr>
-        <p:txBody>
-          <a:bodyPr wrap="square" anchor="t" lIns="0" rIns="0" tIns="0" bIns="0">
-            <a:spAutoFit/>
-          </a:bodyPr>
-          <a:lstStyle/>
-          <a:p>
-            <a:pPr algn="l"/>
-            <a:r>
-              <a:rPr sz="1100" b="0">
-                <a:solidFill>
-                  <a:srgbClr val="000000"/>
-                </a:solidFill>
-                <a:latin typeface="맑은 고딕"/>
-                <a:ea typeface="맑은 고딕"/>
-                <a:cs typeface="맑은 고딕"/>
-              </a:rPr>
-              <a:t>- 160여 PP센터 즉시배송 기지화·낮 가동률 제고</a:t>
-            </a:r>
-          </a:p>
-        </p:txBody>
-      </p:sp>
-      <p:sp>
-        <p:nvSpPr>
-          <p:cNvPr id="27" name="TextBox 26"/>
-          <p:cNvSpPr txBox="1"/>
-          <p:nvPr/>
-        </p:nvSpPr>
-        <p:spPr>
-          <a:xfrm>
-            <a:off x="5270400" y="4575599"/>
-            <a:ext cx="4212000" cy="223200"/>
-          </a:xfrm>
-          <a:prstGeom prst="rect">
-            <a:avLst/>
-          </a:prstGeom>
-          <a:noFill/>
-        </p:spPr>
-        <p:txBody>
-          <a:bodyPr wrap="square" anchor="t" lIns="0" rIns="0" tIns="0" bIns="0">
-            <a:spAutoFit/>
-          </a:bodyPr>
-          <a:lstStyle/>
-          <a:p>
-            <a:pPr algn="l"/>
-            <a:r>
-              <a:rPr sz="1100" b="0">
-                <a:solidFill>
-                  <a:srgbClr val="000000"/>
-                </a:solidFill>
-                <a:latin typeface="맑은 고딕"/>
-                <a:ea typeface="맑은 고딕"/>
-                <a:cs typeface="맑은 고딕"/>
-              </a:rPr>
-              <a:t>- 규제 완화 시 새벽배송 확장 여지</a:t>
-            </a:r>
-          </a:p>
-        </p:txBody>
-      </p:sp>
-      <p:sp>
-        <p:nvSpPr>
-          <p:cNvPr id="28" name="TextBox 27"/>
-          <p:cNvSpPr txBox="1"/>
-          <p:nvPr/>
-        </p:nvSpPr>
-        <p:spPr>
-          <a:xfrm>
-            <a:off x="5072400" y="5047200"/>
-            <a:ext cx="4410000" cy="223200"/>
-          </a:xfrm>
-          <a:prstGeom prst="rect">
-            <a:avLst/>
-          </a:prstGeom>
-          <a:noFill/>
-        </p:spPr>
-        <p:txBody>
-          <a:bodyPr wrap="square" anchor="t" lIns="0" rIns="0" tIns="0" bIns="0">
-            <a:spAutoFit/>
-          </a:bodyPr>
-          <a:lstStyle/>
-          <a:p>
-            <a:pPr algn="l"/>
-            <a:r>
-              <a:rPr sz="1200" b="1">
-                <a:solidFill>
-                  <a:srgbClr val="000000"/>
-                </a:solidFill>
-                <a:latin typeface="맑은 고딕"/>
-                <a:ea typeface="맑은 고딕"/>
-                <a:cs typeface="맑은 고딕"/>
-              </a:rPr>
-              <a:t>• 확대 로드맵</a:t>
-            </a:r>
-          </a:p>
-        </p:txBody>
-      </p:sp>
-      <p:sp>
-        <p:nvSpPr>
-          <p:cNvPr id="29" name="TextBox 28"/>
-          <p:cNvSpPr txBox="1"/>
-          <p:nvPr/>
-        </p:nvSpPr>
-        <p:spPr>
-          <a:xfrm>
-            <a:off x="5270400" y="5270400"/>
+            <a:off x="5270400" y="2181600"/>
             <a:ext cx="4212000" cy="223200"/>
           </a:xfrm>
           <a:prstGeom prst="rect">
@@ -5394,16 +5001,62 @@
           </a:p>
         </p:txBody>
       </p:sp>
+      <p:sp>
+        <p:nvSpPr>
+          <p:cNvPr id="19" name="Rectangle 18"/>
+          <p:cNvSpPr/>
+          <p:nvPr/>
+        </p:nvSpPr>
+        <p:spPr>
+          <a:xfrm>
+            <a:off x="5072400" y="2512800"/>
+            <a:ext cx="4410000" cy="871200"/>
+          </a:xfrm>
+          <a:prstGeom prst="rect">
+            <a:avLst/>
+          </a:prstGeom>
+          <a:solidFill>
+            <a:srgbClr val="FFFFFF"/>
+          </a:solidFill>
+          <a:ln w="12700">
+            <a:solidFill>
+              <a:srgbClr val="BFBFBF"/>
+            </a:solidFill>
+          </a:ln>
+          <a:effectLst/>
+        </p:spPr>
+        <p:style>
+          <a:lnRef idx="1">
+            <a:schemeClr val="accent1"/>
+          </a:lnRef>
+          <a:fillRef idx="3">
+            <a:schemeClr val="accent1"/>
+          </a:fillRef>
+          <a:effectRef idx="2">
+            <a:schemeClr val="accent1"/>
+          </a:effectRef>
+          <a:fontRef idx="minor">
+            <a:schemeClr val="lt1"/>
+          </a:fontRef>
+        </p:style>
+        <p:txBody>
+          <a:bodyPr rtlCol="0" anchor="ctr"/>
+          <a:lstStyle/>
+          <a:p>
+            <a:pPr algn="ctr"/>
+          </a:p>
+        </p:txBody>
+      </p:sp>
       <p:cxnSp>
         <p:nvCxnSpPr>
-          <p:cNvPr id="30" name="Connector 29"/>
+          <p:cNvPr id="20" name="Connector 19"/>
           <p:cNvCxnSpPr/>
           <p:nvPr/>
         </p:nvCxnSpPr>
         <p:spPr>
           <a:xfrm>
-            <a:off x="5072400" y="5821199"/>
-            <a:ext cx="4410000" cy="0"/>
+            <a:off x="5198400" y="2847600"/>
+            <a:ext cx="4158000" cy="0"/>
           </a:xfrm>
           <a:prstGeom prst="bentConnector3">
             <a:avLst/>
@@ -5432,13 +5085,13 @@
       </p:cxnSp>
       <p:sp>
         <p:nvSpPr>
-          <p:cNvPr id="31" name="Oval 30"/>
+          <p:cNvPr id="21" name="Oval 20"/>
           <p:cNvSpPr/>
           <p:nvPr/>
         </p:nvSpPr>
         <p:spPr>
           <a:xfrm>
-            <a:off x="5576850" y="5774400"/>
+            <a:off x="5671349" y="2800800"/>
             <a:ext cx="93600" cy="93600"/>
           </a:xfrm>
           <a:prstGeom prst="ellipse">
@@ -5478,14 +5131,14 @@
       </p:sp>
       <p:sp>
         <p:nvSpPr>
-          <p:cNvPr id="32" name="TextBox 31"/>
+          <p:cNvPr id="22" name="TextBox 21"/>
           <p:cNvSpPr txBox="1"/>
           <p:nvPr/>
         </p:nvSpPr>
         <p:spPr>
           <a:xfrm>
-            <a:off x="5072400" y="5623200"/>
-            <a:ext cx="1102500" cy="162000"/>
+            <a:off x="5198400" y="2649600"/>
+            <a:ext cx="1039500" cy="162000"/>
           </a:xfrm>
           <a:prstGeom prst="rect">
             <a:avLst/>
@@ -5515,14 +5168,14 @@
       </p:sp>
       <p:sp>
         <p:nvSpPr>
-          <p:cNvPr id="33" name="TextBox 32"/>
+          <p:cNvPr id="23" name="TextBox 22"/>
           <p:cNvSpPr txBox="1"/>
           <p:nvPr/>
         </p:nvSpPr>
         <p:spPr>
           <a:xfrm>
-            <a:off x="5072400" y="5893199"/>
-            <a:ext cx="1102500" cy="198000"/>
+            <a:off x="5198400" y="2919600"/>
+            <a:ext cx="1039500" cy="198000"/>
           </a:xfrm>
           <a:prstGeom prst="rect">
             <a:avLst/>
@@ -5566,13 +5219,13 @@
       </p:sp>
       <p:sp>
         <p:nvSpPr>
-          <p:cNvPr id="34" name="Oval 33"/>
+          <p:cNvPr id="24" name="Oval 23"/>
           <p:cNvSpPr/>
           <p:nvPr/>
         </p:nvSpPr>
         <p:spPr>
           <a:xfrm>
-            <a:off x="6679350" y="5774400"/>
+            <a:off x="6710850" y="2800800"/>
             <a:ext cx="93600" cy="93600"/>
           </a:xfrm>
           <a:prstGeom prst="ellipse">
@@ -5612,14 +5265,14 @@
       </p:sp>
       <p:sp>
         <p:nvSpPr>
-          <p:cNvPr id="35" name="TextBox 34"/>
+          <p:cNvPr id="25" name="TextBox 24"/>
           <p:cNvSpPr txBox="1"/>
           <p:nvPr/>
         </p:nvSpPr>
         <p:spPr>
           <a:xfrm>
-            <a:off x="6174900" y="5623200"/>
-            <a:ext cx="1102500" cy="162000"/>
+            <a:off x="6237900" y="2649600"/>
+            <a:ext cx="1039500" cy="162000"/>
           </a:xfrm>
           <a:prstGeom prst="rect">
             <a:avLst/>
@@ -5649,14 +5302,14 @@
       </p:sp>
       <p:sp>
         <p:nvSpPr>
-          <p:cNvPr id="36" name="TextBox 35"/>
+          <p:cNvPr id="26" name="TextBox 25"/>
           <p:cNvSpPr txBox="1"/>
           <p:nvPr/>
         </p:nvSpPr>
         <p:spPr>
           <a:xfrm>
-            <a:off x="6174900" y="5893199"/>
-            <a:ext cx="1102500" cy="198000"/>
+            <a:off x="6237900" y="2919600"/>
+            <a:ext cx="1039500" cy="198000"/>
           </a:xfrm>
           <a:prstGeom prst="rect">
             <a:avLst/>
@@ -5700,13 +5353,13 @@
       </p:sp>
       <p:sp>
         <p:nvSpPr>
-          <p:cNvPr id="37" name="Oval 36"/>
+          <p:cNvPr id="27" name="Oval 26"/>
           <p:cNvSpPr/>
           <p:nvPr/>
         </p:nvSpPr>
         <p:spPr>
           <a:xfrm>
-            <a:off x="7781850" y="5774400"/>
+            <a:off x="7750350" y="2800800"/>
             <a:ext cx="93600" cy="93600"/>
           </a:xfrm>
           <a:prstGeom prst="ellipse">
@@ -5746,14 +5399,14 @@
       </p:sp>
       <p:sp>
         <p:nvSpPr>
-          <p:cNvPr id="38" name="TextBox 37"/>
+          <p:cNvPr id="28" name="TextBox 27"/>
           <p:cNvSpPr txBox="1"/>
           <p:nvPr/>
         </p:nvSpPr>
         <p:spPr>
           <a:xfrm>
-            <a:off x="7277400" y="5623200"/>
-            <a:ext cx="1102500" cy="162000"/>
+            <a:off x="7277399" y="2649600"/>
+            <a:ext cx="1039500" cy="162000"/>
           </a:xfrm>
           <a:prstGeom prst="rect">
             <a:avLst/>
@@ -5783,14 +5436,14 @@
       </p:sp>
       <p:sp>
         <p:nvSpPr>
-          <p:cNvPr id="39" name="TextBox 38"/>
+          <p:cNvPr id="29" name="TextBox 28"/>
           <p:cNvSpPr txBox="1"/>
           <p:nvPr/>
         </p:nvSpPr>
         <p:spPr>
           <a:xfrm>
-            <a:off x="7277400" y="5893199"/>
-            <a:ext cx="1102500" cy="198000"/>
+            <a:off x="7277399" y="2919600"/>
+            <a:ext cx="1039500" cy="198000"/>
           </a:xfrm>
           <a:prstGeom prst="rect">
             <a:avLst/>
@@ -5820,13 +5473,13 @@
       </p:sp>
       <p:sp>
         <p:nvSpPr>
-          <p:cNvPr id="40" name="Oval 39"/>
+          <p:cNvPr id="30" name="Oval 29"/>
           <p:cNvSpPr/>
           <p:nvPr/>
         </p:nvSpPr>
         <p:spPr>
           <a:xfrm>
-            <a:off x="8884350" y="5774400"/>
+            <a:off x="8789850" y="2800800"/>
             <a:ext cx="93600" cy="93600"/>
           </a:xfrm>
           <a:prstGeom prst="ellipse">
@@ -5866,14 +5519,14 @@
       </p:sp>
       <p:sp>
         <p:nvSpPr>
-          <p:cNvPr id="41" name="TextBox 40"/>
+          <p:cNvPr id="31" name="TextBox 30"/>
           <p:cNvSpPr txBox="1"/>
           <p:nvPr/>
         </p:nvSpPr>
         <p:spPr>
           <a:xfrm>
-            <a:off x="8379900" y="5623200"/>
-            <a:ext cx="1102500" cy="162000"/>
+            <a:off x="8316900" y="2649600"/>
+            <a:ext cx="1039500" cy="162000"/>
           </a:xfrm>
           <a:prstGeom prst="rect">
             <a:avLst/>
@@ -5903,14 +5556,14 @@
       </p:sp>
       <p:sp>
         <p:nvSpPr>
-          <p:cNvPr id="42" name="TextBox 41"/>
+          <p:cNvPr id="32" name="TextBox 31"/>
           <p:cNvSpPr txBox="1"/>
           <p:nvPr/>
         </p:nvSpPr>
         <p:spPr>
           <a:xfrm>
-            <a:off x="8379900" y="5893199"/>
-            <a:ext cx="1102500" cy="198000"/>
+            <a:off x="8316900" y="2919600"/>
+            <a:ext cx="1039500" cy="198000"/>
           </a:xfrm>
           <a:prstGeom prst="rect">
             <a:avLst/>
@@ -5948,6 +5601,376 @@
                 <a:cs typeface="맑은 고딕"/>
               </a:rPr>
               <a:t>운영</a:t>
+            </a:r>
+          </a:p>
+        </p:txBody>
+      </p:sp>
+      <p:sp>
+        <p:nvSpPr>
+          <p:cNvPr id="33" name="TextBox 32"/>
+          <p:cNvSpPr txBox="1"/>
+          <p:nvPr/>
+        </p:nvSpPr>
+        <p:spPr>
+          <a:xfrm>
+            <a:off x="5072400" y="3564000"/>
+            <a:ext cx="4410000" cy="223200"/>
+          </a:xfrm>
+          <a:prstGeom prst="rect">
+            <a:avLst/>
+          </a:prstGeom>
+          <a:noFill/>
+        </p:spPr>
+        <p:txBody>
+          <a:bodyPr wrap="square" anchor="t" lIns="0" rIns="0" tIns="0" bIns="0">
+            <a:spAutoFit/>
+          </a:bodyPr>
+          <a:lstStyle/>
+          <a:p>
+            <a:pPr algn="l"/>
+            <a:r>
+              <a:rPr sz="1200" b="1">
+                <a:solidFill>
+                  <a:srgbClr val="000000"/>
+                </a:solidFill>
+                <a:latin typeface="맑은 고딕"/>
+                <a:ea typeface="맑은 고딕"/>
+                <a:cs typeface="맑은 고딕"/>
+              </a:rPr>
+              <a:t>• 운영 방침 ('26. 7. 9.~)</a:t>
+            </a:r>
+          </a:p>
+        </p:txBody>
+      </p:sp>
+      <p:sp>
+        <p:nvSpPr>
+          <p:cNvPr id="34" name="TextBox 33"/>
+          <p:cNvSpPr txBox="1"/>
+          <p:nvPr/>
+        </p:nvSpPr>
+        <p:spPr>
+          <a:xfrm>
+            <a:off x="5270400" y="3787200"/>
+            <a:ext cx="4212000" cy="223200"/>
+          </a:xfrm>
+          <a:prstGeom prst="rect">
+            <a:avLst/>
+          </a:prstGeom>
+          <a:noFill/>
+        </p:spPr>
+        <p:txBody>
+          <a:bodyPr wrap="square" anchor="t" lIns="0" rIns="0" tIns="0" bIns="0">
+            <a:spAutoFit/>
+          </a:bodyPr>
+          <a:lstStyle/>
+          <a:p>
+            <a:pPr algn="l"/>
+            <a:r>
+              <a:rPr sz="1100" b="0">
+                <a:solidFill>
+                  <a:srgbClr val="000000"/>
+                </a:solidFill>
+                <a:latin typeface="맑은 고딕"/>
+                <a:ea typeface="맑은 고딕"/>
+                <a:cs typeface="맑은 고딕"/>
+              </a:rPr>
+              <a:t>- 20시까지 주문 접수 → 결제 후 2시간 내 배송 완료</a:t>
+            </a:r>
+          </a:p>
+        </p:txBody>
+      </p:sp>
+      <p:sp>
+        <p:nvSpPr>
+          <p:cNvPr id="35" name="TextBox 34"/>
+          <p:cNvSpPr txBox="1"/>
+          <p:nvPr/>
+        </p:nvSpPr>
+        <p:spPr>
+          <a:xfrm>
+            <a:off x="5270400" y="4010399"/>
+            <a:ext cx="4212000" cy="223200"/>
+          </a:xfrm>
+          <a:prstGeom prst="rect">
+            <a:avLst/>
+          </a:prstGeom>
+          <a:noFill/>
+        </p:spPr>
+        <p:txBody>
+          <a:bodyPr wrap="square" anchor="t" lIns="0" rIns="0" tIns="0" bIns="0">
+            <a:spAutoFit/>
+          </a:bodyPr>
+          <a:lstStyle/>
+          <a:p>
+            <a:pPr algn="l"/>
+            <a:r>
+              <a:rPr sz="1100" b="0">
+                <a:solidFill>
+                  <a:srgbClr val="000000"/>
+                </a:solidFill>
+                <a:latin typeface="맑은 고딕"/>
+                <a:ea typeface="맑은 고딕"/>
+                <a:cs typeface="맑은 고딕"/>
+              </a:rPr>
+              <a:t>- 기존 예약배송 병행 선택 가능</a:t>
+            </a:r>
+          </a:p>
+        </p:txBody>
+      </p:sp>
+      <p:sp>
+        <p:nvSpPr>
+          <p:cNvPr id="36" name="TextBox 35"/>
+          <p:cNvSpPr txBox="1"/>
+          <p:nvPr/>
+        </p:nvSpPr>
+        <p:spPr>
+          <a:xfrm>
+            <a:off x="5270400" y="4233599"/>
+            <a:ext cx="4212000" cy="223200"/>
+          </a:xfrm>
+          <a:prstGeom prst="rect">
+            <a:avLst/>
+          </a:prstGeom>
+          <a:noFill/>
+        </p:spPr>
+        <p:txBody>
+          <a:bodyPr wrap="square" anchor="t" lIns="0" rIns="0" tIns="0" bIns="0">
+            <a:spAutoFit/>
+          </a:bodyPr>
+          <a:lstStyle/>
+          <a:p>
+            <a:pPr algn="l"/>
+            <a:r>
+              <a:rPr sz="1100" b="0">
+                <a:solidFill>
+                  <a:srgbClr val="000000"/>
+                </a:solidFill>
+                <a:latin typeface="맑은 고딕"/>
+                <a:ea typeface="맑은 고딕"/>
+                <a:cs typeface="맑은 고딕"/>
+              </a:rPr>
+              <a:t>- 쓱배송 사륜차로 대용량·중량 상품 대응</a:t>
+            </a:r>
+          </a:p>
+        </p:txBody>
+      </p:sp>
+      <p:sp>
+        <p:nvSpPr>
+          <p:cNvPr id="37" name="TextBox 36"/>
+          <p:cNvSpPr txBox="1"/>
+          <p:nvPr/>
+        </p:nvSpPr>
+        <p:spPr>
+          <a:xfrm>
+            <a:off x="5072400" y="4636800"/>
+            <a:ext cx="4410000" cy="223200"/>
+          </a:xfrm>
+          <a:prstGeom prst="rect">
+            <a:avLst/>
+          </a:prstGeom>
+          <a:noFill/>
+        </p:spPr>
+        <p:txBody>
+          <a:bodyPr wrap="square" anchor="t" lIns="0" rIns="0" tIns="0" bIns="0">
+            <a:spAutoFit/>
+          </a:bodyPr>
+          <a:lstStyle/>
+          <a:p>
+            <a:pPr algn="l"/>
+            <a:r>
+              <a:rPr sz="1200" b="1">
+                <a:solidFill>
+                  <a:srgbClr val="000000"/>
+                </a:solidFill>
+                <a:latin typeface="맑은 고딕"/>
+                <a:ea typeface="맑은 고딕"/>
+                <a:cs typeface="맑은 고딕"/>
+              </a:rPr>
+              <a:t>• 기대 효과</a:t>
+            </a:r>
+          </a:p>
+        </p:txBody>
+      </p:sp>
+      <p:sp>
+        <p:nvSpPr>
+          <p:cNvPr id="38" name="TextBox 37"/>
+          <p:cNvSpPr txBox="1"/>
+          <p:nvPr/>
+        </p:nvSpPr>
+        <p:spPr>
+          <a:xfrm>
+            <a:off x="5270400" y="4860000"/>
+            <a:ext cx="4212000" cy="223200"/>
+          </a:xfrm>
+          <a:prstGeom prst="rect">
+            <a:avLst/>
+          </a:prstGeom>
+          <a:noFill/>
+        </p:spPr>
+        <p:txBody>
+          <a:bodyPr wrap="square" anchor="t" lIns="0" rIns="0" tIns="0" bIns="0">
+            <a:spAutoFit/>
+          </a:bodyPr>
+          <a:lstStyle/>
+          <a:p>
+            <a:pPr algn="l"/>
+            <a:r>
+              <a:rPr sz="1100" b="0">
+                <a:solidFill>
+                  <a:srgbClr val="000000"/>
+                </a:solidFill>
+                <a:latin typeface="맑은 고딕"/>
+                <a:ea typeface="맑은 고딕"/>
+                <a:cs typeface="맑은 고딕"/>
+              </a:rPr>
+              <a:t>- 대용량 즉시배송 서비스 공백 흡수</a:t>
+            </a:r>
+          </a:p>
+        </p:txBody>
+      </p:sp>
+      <p:sp>
+        <p:nvSpPr>
+          <p:cNvPr id="39" name="TextBox 38"/>
+          <p:cNvSpPr txBox="1"/>
+          <p:nvPr/>
+        </p:nvSpPr>
+        <p:spPr>
+          <a:xfrm>
+            <a:off x="5270400" y="5083200"/>
+            <a:ext cx="4212000" cy="223200"/>
+          </a:xfrm>
+          <a:prstGeom prst="rect">
+            <a:avLst/>
+          </a:prstGeom>
+          <a:noFill/>
+        </p:spPr>
+        <p:txBody>
+          <a:bodyPr wrap="square" anchor="t" lIns="0" rIns="0" tIns="0" bIns="0">
+            <a:spAutoFit/>
+          </a:bodyPr>
+          <a:lstStyle/>
+          <a:p>
+            <a:pPr algn="l"/>
+            <a:r>
+              <a:rPr sz="1100" b="0">
+                <a:solidFill>
+                  <a:srgbClr val="000000"/>
+                </a:solidFill>
+                <a:latin typeface="맑은 고딕"/>
+                <a:ea typeface="맑은 고딕"/>
+                <a:cs typeface="맑은 고딕"/>
+              </a:rPr>
+              <a:t>- 160여 PP센터 즉시배송 기지화·낮 가동률 제고</a:t>
+            </a:r>
+          </a:p>
+        </p:txBody>
+      </p:sp>
+      <p:sp>
+        <p:nvSpPr>
+          <p:cNvPr id="40" name="TextBox 39"/>
+          <p:cNvSpPr txBox="1"/>
+          <p:nvPr/>
+        </p:nvSpPr>
+        <p:spPr>
+          <a:xfrm>
+            <a:off x="5072400" y="5486400"/>
+            <a:ext cx="4410000" cy="223200"/>
+          </a:xfrm>
+          <a:prstGeom prst="rect">
+            <a:avLst/>
+          </a:prstGeom>
+          <a:noFill/>
+        </p:spPr>
+        <p:txBody>
+          <a:bodyPr wrap="square" anchor="t" lIns="0" rIns="0" tIns="0" bIns="0">
+            <a:spAutoFit/>
+          </a:bodyPr>
+          <a:lstStyle/>
+          <a:p>
+            <a:pPr algn="l"/>
+            <a:r>
+              <a:rPr sz="1200" b="1">
+                <a:solidFill>
+                  <a:srgbClr val="000000"/>
+                </a:solidFill>
+                <a:latin typeface="맑은 고딕"/>
+                <a:ea typeface="맑은 고딕"/>
+                <a:cs typeface="맑은 고딕"/>
+              </a:rPr>
+              <a:t>• 규제 변수</a:t>
+            </a:r>
+          </a:p>
+        </p:txBody>
+      </p:sp>
+      <p:sp>
+        <p:nvSpPr>
+          <p:cNvPr id="41" name="TextBox 40"/>
+          <p:cNvSpPr txBox="1"/>
+          <p:nvPr/>
+        </p:nvSpPr>
+        <p:spPr>
+          <a:xfrm>
+            <a:off x="5270400" y="5709600"/>
+            <a:ext cx="4212000" cy="223200"/>
+          </a:xfrm>
+          <a:prstGeom prst="rect">
+            <a:avLst/>
+          </a:prstGeom>
+          <a:noFill/>
+        </p:spPr>
+        <p:txBody>
+          <a:bodyPr wrap="square" anchor="t" lIns="0" rIns="0" tIns="0" bIns="0">
+            <a:spAutoFit/>
+          </a:bodyPr>
+          <a:lstStyle/>
+          <a:p>
+            <a:pPr algn="l"/>
+            <a:r>
+              <a:rPr sz="1100" b="0">
+                <a:solidFill>
+                  <a:srgbClr val="000000"/>
+                </a:solidFill>
+                <a:latin typeface="맑은 고딕"/>
+                <a:ea typeface="맑은 고딕"/>
+                <a:cs typeface="맑은 고딕"/>
+              </a:rPr>
+              <a:t>- 유통산업발전법 → 점포 물류거점(PP센터) 새벽 불가</a:t>
+            </a:r>
+          </a:p>
+        </p:txBody>
+      </p:sp>
+      <p:sp>
+        <p:nvSpPr>
+          <p:cNvPr id="42" name="TextBox 41"/>
+          <p:cNvSpPr txBox="1"/>
+          <p:nvPr/>
+        </p:nvSpPr>
+        <p:spPr>
+          <a:xfrm>
+            <a:off x="5270400" y="5932800"/>
+            <a:ext cx="4212000" cy="223200"/>
+          </a:xfrm>
+          <a:prstGeom prst="rect">
+            <a:avLst/>
+          </a:prstGeom>
+          <a:noFill/>
+        </p:spPr>
+        <p:txBody>
+          <a:bodyPr wrap="square" anchor="t" lIns="0" rIns="0" tIns="0" bIns="0">
+            <a:spAutoFit/>
+          </a:bodyPr>
+          <a:lstStyle/>
+          <a:p>
+            <a:pPr algn="l"/>
+            <a:r>
+              <a:rPr sz="1100" b="0">
+                <a:solidFill>
+                  <a:srgbClr val="000000"/>
+                </a:solidFill>
+                <a:latin typeface="맑은 고딕"/>
+                <a:ea typeface="맑은 고딕"/>
+                <a:cs typeface="맑은 고딕"/>
+              </a:rPr>
+              <a:t>- 규제 완화 논의 중 → 개정 시 새벽배송 확장 여지</a:t>
             </a:r>
           </a:p>
         </p:txBody>

--- a/reports/ssg-quickcommerce-onepager.pptx
+++ b/reports/ssg-quickcommerce-onepager.pptx
@@ -3265,7 +3265,9 @@
             <a:solidFill>
               <a:srgbClr val="000000"/>
             </a:solidFill>
+            <a:prstDash val="solid"/>
           </a:ln>
+          <a:effectLst/>
         </p:spPr>
         <p:style>
           <a:lnRef idx="2">
@@ -3551,7 +3553,7 @@
         </p:nvGraphicFramePr>
         <p:xfrm>
           <a:off x="424800" y="4014000"/>
-          <a:ext cx="4409999" cy="1922400"/>
+          <a:ext cx="4409999" cy="2059200"/>
         </p:xfrm>
         <a:graphic>
           <a:graphicData uri="http://schemas.openxmlformats.org/drawingml/2006/table">
@@ -3566,7 +3568,7 @@
                 <a:gridCol w="676800"/>
                 <a:gridCol w="917999"/>
               </a:tblGrid>
-              <a:tr h="320400">
+              <a:tr h="343200">
                 <a:tc>
                   <a:txBody>
                     <a:bodyPr wrap="square"/>
@@ -3793,7 +3795,7 @@
                   </a:tcPr>
                 </a:tc>
               </a:tr>
-              <a:tr h="320400">
+              <a:tr h="343200">
                 <a:tc rowSpan="3">
                   <a:txBody>
                     <a:bodyPr wrap="square"/>
@@ -4020,7 +4022,7 @@
                   </a:tcPr>
                 </a:tc>
               </a:tr>
-              <a:tr h="320400">
+              <a:tr h="343200">
                 <a:tc vMerge="1">
                   <a:txBody>
                     <a:bodyPr wrap="square"/>
@@ -4208,7 +4210,7 @@
                   </a:tcPr>
                 </a:tc>
               </a:tr>
-              <a:tr h="320400">
+              <a:tr h="343200">
                 <a:tc vMerge="1">
                   <a:txBody>
                     <a:bodyPr wrap="square"/>
@@ -4396,7 +4398,7 @@
                   </a:tcPr>
                 </a:tc>
               </a:tr>
-              <a:tr h="320400">
+              <a:tr h="343200">
                 <a:tc rowSpan="2">
                   <a:txBody>
                     <a:bodyPr wrap="square"/>
@@ -4637,7 +4639,7 @@
                   </a:tcPr>
                 </a:tc>
               </a:tr>
-              <a:tr h="320400">
+              <a:tr h="343200">
                 <a:tc vMerge="1">
                   <a:txBody>
                     <a:bodyPr wrap="square"/>
@@ -4910,7 +4912,9 @@
             <a:solidFill>
               <a:srgbClr val="000000"/>
             </a:solidFill>
+            <a:prstDash val="solid"/>
           </a:ln>
+          <a:effectLst/>
         </p:spPr>
         <p:style>
           <a:lnRef idx="2">
@@ -5065,8 +5069,10 @@
             <a:solidFill>
               <a:srgbClr val="000000"/>
             </a:solidFill>
+            <a:prstDash val="solid"/>
             <a:tailEnd type="triangle" w="med" len="med"/>
           </a:ln>
+          <a:effectLst/>
         </p:spPr>
         <p:style>
           <a:lnRef idx="2">
@@ -5984,7 +5990,7 @@
         <p:spPr>
           <a:xfrm>
             <a:off x="4953600" y="1504800"/>
-            <a:ext cx="0" cy="4723200"/>
+            <a:ext cx="0" cy="4568400"/>
           </a:xfrm>
           <a:prstGeom prst="bentConnector3">
             <a:avLst/>
@@ -5993,7 +5999,9 @@
             <a:solidFill>
               <a:srgbClr val="BFBFBF"/>
             </a:solidFill>
+            <a:prstDash val="solid"/>
           </a:ln>
+          <a:effectLst/>
         </p:spPr>
         <p:style>
           <a:lnRef idx="2">

--- a/reports/ssg-quickcommerce-onepager.pptx
+++ b/reports/ssg-quickcommerce-onepager.pptx
@@ -3553,7 +3553,7 @@
         </p:nvGraphicFramePr>
         <p:xfrm>
           <a:off x="424800" y="4014000"/>
-          <a:ext cx="4409999" cy="2059200"/>
+          <a:ext cx="4265999" cy="2059200"/>
         </p:xfrm>
         <a:graphic>
           <a:graphicData uri="http://schemas.openxmlformats.org/drawingml/2006/table">
@@ -3562,10 +3562,10 @@
                 <a:tableStyleId>{5C22544A-7EE6-4342-B048-85BDC9FD1C3A}</a:tableStyleId>
               </a:tblPr>
               <a:tblGrid>
-                <a:gridCol w="691200"/>
-                <a:gridCol w="1126800"/>
-                <a:gridCol w="997200"/>
-                <a:gridCol w="676800"/>
+                <a:gridCol w="666000"/>
+                <a:gridCol w="1080000"/>
+                <a:gridCol w="954000"/>
+                <a:gridCol w="648000"/>
                 <a:gridCol w="917999"/>
               </a:tblGrid>
               <a:tr h="343200">

--- a/reports/ssg-quickcommerce-onepager.pptx
+++ b/reports/ssg-quickcommerce-onepager.pptx
@@ -3205,7 +3205,18 @@
                 <a:ea typeface="맑은 고딕"/>
                 <a:cs typeface="맑은 고딕"/>
               </a:rPr>
-              <a:t>※ 취급 품목 : 이마트 15만 · 바로퀵 1만 · B마트 2만 종      ※ 출처 : 비즈워치 ('26. 7. 10.)</a:t>
+              <a:t>※ 취급 품목 : 이마트 15만 · 바로퀵 1만 · B마트 2만 종      ※ 출처 : 비즈워치 </a:t>
+            </a:r>
+            <a:r>
+              <a:rPr sz="800" b="0">
+                <a:solidFill>
+                  <a:srgbClr val="000000"/>
+                </a:solidFill>
+                <a:latin typeface="맑은 고딕"/>
+                <a:ea typeface="맑은 고딕"/>
+                <a:cs typeface="맑은 고딕"/>
+              </a:rPr>
+              <a:t>('26. 7. 10.)</a:t>
             </a:r>
           </a:p>
         </p:txBody>
@@ -3353,7 +3364,40 @@
                 <a:ea typeface="맑은 고딕"/>
                 <a:cs typeface="맑은 고딕"/>
               </a:rPr>
-              <a:t>- 1시간 오토바이 배송(바로퀵) 매출 197%↑ ('26.6월)</a:t>
+              <a:t>- 1시간 오토바이 배송 </a:t>
+            </a:r>
+            <a:r>
+              <a:rPr sz="1000" b="0">
+                <a:solidFill>
+                  <a:srgbClr val="000000"/>
+                </a:solidFill>
+                <a:latin typeface="맑은 고딕"/>
+                <a:ea typeface="맑은 고딕"/>
+                <a:cs typeface="맑은 고딕"/>
+              </a:rPr>
+              <a:t>(바로퀵)</a:t>
+            </a:r>
+            <a:r>
+              <a:rPr sz="1100" b="0">
+                <a:solidFill>
+                  <a:srgbClr val="000000"/>
+                </a:solidFill>
+                <a:latin typeface="맑은 고딕"/>
+                <a:ea typeface="맑은 고딕"/>
+                <a:cs typeface="맑은 고딕"/>
+              </a:rPr>
+              <a:t> 매출 197%↑ </a:t>
+            </a:r>
+            <a:r>
+              <a:rPr sz="1000" b="0">
+                <a:solidFill>
+                  <a:srgbClr val="000000"/>
+                </a:solidFill>
+                <a:latin typeface="맑은 고딕"/>
+                <a:ea typeface="맑은 고딕"/>
+                <a:cs typeface="맑은 고딕"/>
+              </a:rPr>
+              <a:t>('26.6월)</a:t>
             </a:r>
           </a:p>
         </p:txBody>
@@ -3464,7 +3508,51 @@
                 <a:ea typeface="맑은 고딕"/>
                 <a:cs typeface="맑은 고딕"/>
               </a:rPr>
-              <a:t>- 1시간 배송(소량) + 2시간 배송(대용량) 이원화</a:t>
+              <a:t>- 1시간 배송 </a:t>
+            </a:r>
+            <a:r>
+              <a:rPr sz="1000" b="0">
+                <a:solidFill>
+                  <a:srgbClr val="000000"/>
+                </a:solidFill>
+                <a:latin typeface="맑은 고딕"/>
+                <a:ea typeface="맑은 고딕"/>
+                <a:cs typeface="맑은 고딕"/>
+              </a:rPr>
+              <a:t>(소량)</a:t>
+            </a:r>
+            <a:r>
+              <a:rPr sz="1100" b="0">
+                <a:solidFill>
+                  <a:srgbClr val="000000"/>
+                </a:solidFill>
+                <a:latin typeface="맑은 고딕"/>
+                <a:ea typeface="맑은 고딕"/>
+                <a:cs typeface="맑은 고딕"/>
+              </a:rPr>
+              <a:t> + 2시간 배송 </a:t>
+            </a:r>
+            <a:r>
+              <a:rPr sz="1000" b="0">
+                <a:solidFill>
+                  <a:srgbClr val="000000"/>
+                </a:solidFill>
+                <a:latin typeface="맑은 고딕"/>
+                <a:ea typeface="맑은 고딕"/>
+                <a:cs typeface="맑은 고딕"/>
+              </a:rPr>
+              <a:t>(대용량)</a:t>
+            </a:r>
+            <a:r>
+              <a:rPr sz="1100" b="0">
+                <a:solidFill>
+                  <a:srgbClr val="000000"/>
+                </a:solidFill>
+                <a:latin typeface="맑은 고딕"/>
+                <a:ea typeface="맑은 고딕"/>
+                <a:cs typeface="맑은 고딕"/>
+              </a:rPr>
+              <a:t> 이원화</a:t>
             </a:r>
           </a:p>
         </p:txBody>
@@ -3501,7 +3589,18 @@
                 <a:ea typeface="맑은 고딕"/>
                 <a:cs typeface="맑은 고딕"/>
               </a:rPr>
-              <a:t>- 점포 15만 종 구색 기반 (바로퀵 1만 대비 15배)</a:t>
+              <a:t>- 점포 15만 종 구색 기반 </a:t>
+            </a:r>
+            <a:r>
+              <a:rPr sz="1000" b="0">
+                <a:solidFill>
+                  <a:srgbClr val="000000"/>
+                </a:solidFill>
+                <a:latin typeface="맑은 고딕"/>
+                <a:ea typeface="맑은 고딕"/>
+                <a:cs typeface="맑은 고딕"/>
+              </a:rPr>
+              <a:t>(바로퀵 1만 대비 15배)</a:t>
             </a:r>
           </a:p>
         </p:txBody>
@@ -4465,7 +4564,7 @@
                     <a:p>
                       <a:pPr algn="ctr"/>
                       <a:r>
-                        <a:rPr sz="1000" b="1">
+                        <a:rPr sz="900" b="1">
                           <a:solidFill>
                             <a:srgbClr val="000000"/>
                           </a:solidFill>
@@ -4518,7 +4617,18 @@
                           <a:ea typeface="맑은 고딕"/>
                           <a:cs typeface="맑은 고딕"/>
                         </a:rPr>
-                        <a:t>점포 (반경 3km)</a:t>
+                        <a:t>점포 </a:t>
+                      </a:r>
+                      <a:r>
+                        <a:rPr sz="900" b="0">
+                          <a:solidFill>
+                            <a:srgbClr val="000000"/>
+                          </a:solidFill>
+                          <a:latin typeface="맑은 고딕"/>
+                          <a:ea typeface="맑은 고딕"/>
+                          <a:cs typeface="맑은 고딕"/>
+                        </a:rPr>
+                        <a:t>(반경 3km)</a:t>
                       </a:r>
                     </a:p>
                   </a:txBody>
@@ -4608,7 +4718,18 @@
                           <a:ea typeface="맑은 고딕"/>
                           <a:cs typeface="맑은 고딕"/>
                         </a:rPr>
-                        <a:t>소량 (1만 종)</a:t>
+                        <a:t>소량 </a:t>
+                      </a:r>
+                      <a:r>
+                        <a:rPr sz="900" b="0">
+                          <a:solidFill>
+                            <a:srgbClr val="000000"/>
+                          </a:solidFill>
+                          <a:latin typeface="맑은 고딕"/>
+                          <a:ea typeface="맑은 고딕"/>
+                          <a:cs typeface="맑은 고딕"/>
+                        </a:rPr>
+                        <a:t>(1만 종)</a:t>
                       </a:r>
                     </a:p>
                   </a:txBody>
@@ -5643,7 +5764,18 @@
                 <a:ea typeface="맑은 고딕"/>
                 <a:cs typeface="맑은 고딕"/>
               </a:rPr>
-              <a:t>• 운영 방침 ('26. 7. 9.~)</a:t>
+              <a:t>• 운영 방침 </a:t>
+            </a:r>
+            <a:r>
+              <a:rPr sz="1100" b="1">
+                <a:solidFill>
+                  <a:srgbClr val="000000"/>
+                </a:solidFill>
+                <a:latin typeface="맑은 고딕"/>
+                <a:ea typeface="맑은 고딕"/>
+                <a:cs typeface="맑은 고딕"/>
+              </a:rPr>
+              <a:t>('26. 7. 9.~)</a:t>
             </a:r>
           </a:p>
         </p:txBody>
@@ -5939,7 +6071,29 @@
                 <a:ea typeface="맑은 고딕"/>
                 <a:cs typeface="맑은 고딕"/>
               </a:rPr>
-              <a:t>- 유통산업발전법 → 점포 물류거점(PP센터) 새벽 불가</a:t>
+              <a:t>- 유통산업발전법 → 점포 물류거점 </a:t>
+            </a:r>
+            <a:r>
+              <a:rPr sz="1000" b="0">
+                <a:solidFill>
+                  <a:srgbClr val="000000"/>
+                </a:solidFill>
+                <a:latin typeface="맑은 고딕"/>
+                <a:ea typeface="맑은 고딕"/>
+                <a:cs typeface="맑은 고딕"/>
+              </a:rPr>
+              <a:t>(PP센터)</a:t>
+            </a:r>
+            <a:r>
+              <a:rPr sz="1100" b="0">
+                <a:solidFill>
+                  <a:srgbClr val="000000"/>
+                </a:solidFill>
+                <a:latin typeface="맑은 고딕"/>
+                <a:ea typeface="맑은 고딕"/>
+                <a:cs typeface="맑은 고딕"/>
+              </a:rPr>
+              <a:t> 새벽 불가</a:t>
             </a:r>
           </a:p>
         </p:txBody>

--- a/reports/ssg-quickcommerce-onepager.pptx
+++ b/reports/ssg-quickcommerce-onepager.pptx
@@ -3120,7 +3120,7 @@
                 <a:ea typeface="맑은 고딕"/>
                 <a:cs typeface="맑은 고딕"/>
               </a:rPr>
-              <a:t>■  </a:t>
+              <a:t>[동향] </a:t>
             </a:r>
             <a:r>
               <a:rPr sz="2000" b="1">
@@ -3168,7 +3168,7 @@
                 <a:ea typeface="맑은 고딕"/>
                 <a:cs typeface="맑은 고딕"/>
               </a:rPr>
-              <a:t>■ 양재·하남점 '2시간 배송' 시범 도입 — 대용량 장보기 공략·점포 물류기지 가동률 제고</a:t>
+              <a:t>■ 양재·하남점 시범 도입 — 점포 물류거점화로 대용량 즉시배송 공백 공략</a:t>
             </a:r>
           </a:p>
         </p:txBody>
@@ -3205,7 +3205,7 @@
                 <a:ea typeface="맑은 고딕"/>
                 <a:cs typeface="맑은 고딕"/>
               </a:rPr>
-              <a:t>※ 취급 품목 : 이마트 15만 · 바로퀵 1만 · B마트 2만 종      ※ 출처 : 비즈워치 </a:t>
+              <a:t>※ 취급 품목 : 이마트 15만 · 바로퀵 1만 종      ※ 출처 : 비즈워치 · 머니투데이 · 한국경제 </a:t>
             </a:r>
             <a:r>
               <a:rPr sz="800" b="0">
@@ -3216,7 +3216,7 @@
                 <a:ea typeface="맑은 고딕"/>
                 <a:cs typeface="맑은 고딕"/>
               </a:rPr>
-              <a:t>('26. 7. 10.)</a:t>
+              <a:t>('26. 7. 8~10)</a:t>
             </a:r>
           </a:p>
         </p:txBody>
@@ -3399,6 +3399,28 @@
               </a:rPr>
               <a:t>('26.6월)</a:t>
             </a:r>
+            <a:r>
+              <a:rPr sz="1100" b="0">
+                <a:solidFill>
+                  <a:srgbClr val="000000"/>
+                </a:solidFill>
+                <a:latin typeface="맑은 고딕"/>
+                <a:ea typeface="맑은 고딕"/>
+                <a:cs typeface="맑은 고딕"/>
+              </a:rPr>
+              <a:t> </a:t>
+            </a:r>
+            <a:r>
+              <a:rPr sz="1000" b="0">
+                <a:solidFill>
+                  <a:srgbClr val="000000"/>
+                </a:solidFill>
+                <a:latin typeface="맑은 고딕"/>
+                <a:ea typeface="맑은 고딕"/>
+                <a:cs typeface="맑은 고딕"/>
+              </a:rPr>
+              <a:t>(미검증)</a:t>
+            </a:r>
           </a:p>
         </p:txBody>
       </p:sp>
@@ -3434,7 +3456,29 @@
                 <a:ea typeface="맑은 고딕"/>
                 <a:cs typeface="맑은 고딕"/>
               </a:rPr>
-              <a:t>- B마트 등 경쟁사도 대용량 품목 확대 추세</a:t>
+              <a:t>- </a:t>
+            </a:r>
+            <a:r>
+              <a:rPr sz="1000" b="0">
+                <a:solidFill>
+                  <a:srgbClr val="000000"/>
+                </a:solidFill>
+                <a:latin typeface="맑은 고딕"/>
+                <a:ea typeface="맑은 고딕"/>
+                <a:cs typeface="맑은 고딕"/>
+              </a:rPr>
+              <a:t>(배경)</a:t>
+            </a:r>
+            <a:r>
+              <a:rPr sz="1100" b="0">
+                <a:solidFill>
+                  <a:srgbClr val="000000"/>
+                </a:solidFill>
+                <a:latin typeface="맑은 고딕"/>
+                <a:ea typeface="맑은 고딕"/>
+                <a:cs typeface="맑은 고딕"/>
+              </a:rPr>
+              <a:t> B마트 등 즉시배송 시장 전반 대용량 품목 확대 추세</a:t>
             </a:r>
           </a:p>
         </p:txBody>
@@ -3447,7 +3491,7 @@
         </p:nvSpPr>
         <p:spPr>
           <a:xfrm>
-            <a:off x="424800" y="2786400"/>
+            <a:off x="424800" y="2739600"/>
             <a:ext cx="4410000" cy="223200"/>
           </a:xfrm>
           <a:prstGeom prst="rect">
@@ -3484,7 +3528,7 @@
         </p:nvSpPr>
         <p:spPr>
           <a:xfrm>
-            <a:off x="622800" y="3009600"/>
+            <a:off x="622800" y="2962800"/>
             <a:ext cx="4212000" cy="223200"/>
           </a:xfrm>
           <a:prstGeom prst="rect">
@@ -3508,51 +3552,7 @@
                 <a:ea typeface="맑은 고딕"/>
                 <a:cs typeface="맑은 고딕"/>
               </a:rPr>
-              <a:t>- 1시간 배송 </a:t>
-            </a:r>
-            <a:r>
-              <a:rPr sz="1000" b="0">
-                <a:solidFill>
-                  <a:srgbClr val="000000"/>
-                </a:solidFill>
-                <a:latin typeface="맑은 고딕"/>
-                <a:ea typeface="맑은 고딕"/>
-                <a:cs typeface="맑은 고딕"/>
-              </a:rPr>
-              <a:t>(소량)</a:t>
-            </a:r>
-            <a:r>
-              <a:rPr sz="1100" b="0">
-                <a:solidFill>
-                  <a:srgbClr val="000000"/>
-                </a:solidFill>
-                <a:latin typeface="맑은 고딕"/>
-                <a:ea typeface="맑은 고딕"/>
-                <a:cs typeface="맑은 고딕"/>
-              </a:rPr>
-              <a:t> + 2시간 배송 </a:t>
-            </a:r>
-            <a:r>
-              <a:rPr sz="1000" b="0">
-                <a:solidFill>
-                  <a:srgbClr val="000000"/>
-                </a:solidFill>
-                <a:latin typeface="맑은 고딕"/>
-                <a:ea typeface="맑은 고딕"/>
-                <a:cs typeface="맑은 고딕"/>
-              </a:rPr>
-              <a:t>(대용량)</a:t>
-            </a:r>
-            <a:r>
-              <a:rPr sz="1100" b="0">
-                <a:solidFill>
-                  <a:srgbClr val="000000"/>
-                </a:solidFill>
-                <a:latin typeface="맑은 고딕"/>
-                <a:ea typeface="맑은 고딕"/>
-                <a:cs typeface="맑은 고딕"/>
-              </a:rPr>
-              <a:t> 이원화</a:t>
+              <a:t>- 기존 바로퀵, 소량·즉석식 한정 → 대용량 즉시배송 수요 미충족</a:t>
             </a:r>
           </a:p>
         </p:txBody>
@@ -3565,7 +3565,7 @@
         </p:nvSpPr>
         <p:spPr>
           <a:xfrm>
-            <a:off x="622800" y="3232799"/>
+            <a:off x="622800" y="3186000"/>
             <a:ext cx="4212000" cy="223200"/>
           </a:xfrm>
           <a:prstGeom prst="rect">
@@ -3589,7 +3589,7 @@
                 <a:ea typeface="맑은 고딕"/>
                 <a:cs typeface="맑은 고딕"/>
               </a:rPr>
-              <a:t>- 점포 15만 종 구색 기반 </a:t>
+              <a:t>- 1시간 배송 </a:t>
             </a:r>
             <a:r>
               <a:rPr sz="1000" b="0">
@@ -3600,7 +3600,40 @@
                 <a:ea typeface="맑은 고딕"/>
                 <a:cs typeface="맑은 고딕"/>
               </a:rPr>
-              <a:t>(바로퀵 1만 대비 15배)</a:t>
+              <a:t>(소량)</a:t>
+            </a:r>
+            <a:r>
+              <a:rPr sz="1100" b="0">
+                <a:solidFill>
+                  <a:srgbClr val="000000"/>
+                </a:solidFill>
+                <a:latin typeface="맑은 고딕"/>
+                <a:ea typeface="맑은 고딕"/>
+                <a:cs typeface="맑은 고딕"/>
+              </a:rPr>
+              <a:t> + 2시간 배송 </a:t>
+            </a:r>
+            <a:r>
+              <a:rPr sz="1000" b="0">
+                <a:solidFill>
+                  <a:srgbClr val="000000"/>
+                </a:solidFill>
+                <a:latin typeface="맑은 고딕"/>
+                <a:ea typeface="맑은 고딕"/>
+                <a:cs typeface="맑은 고딕"/>
+              </a:rPr>
+              <a:t>(대용량)</a:t>
+            </a:r>
+            <a:r>
+              <a:rPr sz="1100" b="0">
+                <a:solidFill>
+                  <a:srgbClr val="000000"/>
+                </a:solidFill>
+                <a:latin typeface="맑은 고딕"/>
+                <a:ea typeface="맑은 고딕"/>
+                <a:cs typeface="맑은 고딕"/>
+              </a:rPr>
+              <a:t> 이원화</a:t>
             </a:r>
           </a:p>
         </p:txBody>
@@ -3613,7 +3646,55 @@
         </p:nvSpPr>
         <p:spPr>
           <a:xfrm>
-            <a:off x="424800" y="3654000"/>
+            <a:off x="622800" y="3409199"/>
+            <a:ext cx="4212000" cy="223200"/>
+          </a:xfrm>
+          <a:prstGeom prst="rect">
+            <a:avLst/>
+          </a:prstGeom>
+          <a:noFill/>
+        </p:spPr>
+        <p:txBody>
+          <a:bodyPr wrap="square" anchor="t" lIns="0" rIns="0" tIns="0" bIns="0">
+            <a:spAutoFit/>
+          </a:bodyPr>
+          <a:lstStyle/>
+          <a:p>
+            <a:pPr algn="l"/>
+            <a:r>
+              <a:rPr sz="1100" b="0">
+                <a:solidFill>
+                  <a:srgbClr val="000000"/>
+                </a:solidFill>
+                <a:latin typeface="맑은 고딕"/>
+                <a:ea typeface="맑은 고딕"/>
+                <a:cs typeface="맑은 고딕"/>
+              </a:rPr>
+              <a:t>- 점포 15만 종 구색 기반 </a:t>
+            </a:r>
+            <a:r>
+              <a:rPr sz="1000" b="0">
+                <a:solidFill>
+                  <a:srgbClr val="000000"/>
+                </a:solidFill>
+                <a:latin typeface="맑은 고딕"/>
+                <a:ea typeface="맑은 고딕"/>
+                <a:cs typeface="맑은 고딕"/>
+              </a:rPr>
+              <a:t>(바로퀵 1만 종 대비 15배)</a:t>
+            </a:r>
+          </a:p>
+        </p:txBody>
+      </p:sp>
+      <p:sp>
+        <p:nvSpPr>
+          <p:cNvPr id="14" name="TextBox 13"/>
+          <p:cNvSpPr txBox="1"/>
+          <p:nvPr/>
+        </p:nvSpPr>
+        <p:spPr>
+          <a:xfrm>
+            <a:off x="424800" y="3740399"/>
             <a:ext cx="4410000" cy="223200"/>
           </a:xfrm>
           <a:prstGeom prst="rect">
@@ -3644,15 +3725,15 @@
       </p:sp>
       <p:graphicFrame>
         <p:nvGraphicFramePr>
-          <p:cNvPr id="14" name="Table 13"/>
+          <p:cNvPr id="15" name="Table 14"/>
           <p:cNvGraphicFramePr>
             <a:graphicFrameLocks noGrp="1"/>
           </p:cNvGraphicFramePr>
           <p:nvPr/>
         </p:nvGraphicFramePr>
         <p:xfrm>
-          <a:off x="424800" y="4014000"/>
-          <a:ext cx="4265999" cy="2059200"/>
+          <a:off x="424800" y="3981599"/>
+          <a:ext cx="4265999" cy="1976400"/>
         </p:xfrm>
         <a:graphic>
           <a:graphicData uri="http://schemas.openxmlformats.org/drawingml/2006/table">
@@ -3667,7 +3748,7 @@
                 <a:gridCol w="648000"/>
                 <a:gridCol w="917999"/>
               </a:tblGrid>
-              <a:tr h="343200">
+              <a:tr h="329400">
                 <a:tc>
                   <a:txBody>
                     <a:bodyPr wrap="square"/>
@@ -3894,7 +3975,7 @@
                   </a:tcPr>
                 </a:tc>
               </a:tr>
-              <a:tr h="343200">
+              <a:tr h="329400">
                 <a:tc rowSpan="3">
                   <a:txBody>
                     <a:bodyPr wrap="square"/>
@@ -4121,7 +4202,7 @@
                   </a:tcPr>
                 </a:tc>
               </a:tr>
-              <a:tr h="343200">
+              <a:tr h="329400">
                 <a:tc vMerge="1">
                   <a:txBody>
                     <a:bodyPr wrap="square"/>
@@ -4309,7 +4390,7 @@
                   </a:tcPr>
                 </a:tc>
               </a:tr>
-              <a:tr h="343200">
+              <a:tr h="329400">
                 <a:tc vMerge="1">
                   <a:txBody>
                     <a:bodyPr wrap="square"/>
@@ -4497,7 +4578,7 @@
                   </a:tcPr>
                 </a:tc>
               </a:tr>
-              <a:tr h="343200">
+              <a:tr h="329400">
                 <a:tc rowSpan="2">
                   <a:txBody>
                     <a:bodyPr wrap="square"/>
@@ -4558,11 +4639,8 @@
                           <a:ea typeface="맑은 고딕"/>
                           <a:cs typeface="맑은 고딕"/>
                         </a:rPr>
-                        <a:t>1시간 배송</a:t>
+                        <a:t>1시간 배송 </a:t>
                       </a:r>
-                    </a:p>
-                    <a:p>
-                      <a:pPr algn="ctr"/>
                       <a:r>
                         <a:rPr sz="900" b="1">
                           <a:solidFill>
@@ -4760,7 +4838,7 @@
                   </a:tcPr>
                 </a:tc>
               </a:tr>
-              <a:tr h="343200">
+              <a:tr h="329400">
                 <a:tc vMerge="1">
                   <a:txBody>
                     <a:bodyPr wrap="square"/>
@@ -4980,7 +5058,7 @@
       </p:graphicFrame>
       <p:sp>
         <p:nvSpPr>
-          <p:cNvPr id="15" name="TextBox 14"/>
+          <p:cNvPr id="16" name="TextBox 15"/>
           <p:cNvSpPr txBox="1"/>
           <p:nvPr/>
         </p:nvSpPr>
@@ -5017,7 +5095,7 @@
       </p:sp>
       <p:cxnSp>
         <p:nvCxnSpPr>
-          <p:cNvPr id="16" name="Connector 15"/>
+          <p:cNvPr id="17" name="Connector 16"/>
           <p:cNvCxnSpPr/>
           <p:nvPr/>
         </p:nvCxnSpPr>
@@ -5054,13 +5132,231 @@
       </p:cxnSp>
       <p:sp>
         <p:nvSpPr>
-          <p:cNvPr id="17" name="TextBox 16"/>
+          <p:cNvPr id="18" name="TextBox 17"/>
           <p:cNvSpPr txBox="1"/>
           <p:nvPr/>
         </p:nvSpPr>
         <p:spPr>
           <a:xfrm>
-            <a:off x="5072400" y="1958400"/>
+            <a:off x="5072400" y="1962000"/>
+            <a:ext cx="4410000" cy="324000"/>
+          </a:xfrm>
+          <a:prstGeom prst="rect">
+            <a:avLst/>
+          </a:prstGeom>
+          <a:noFill/>
+        </p:spPr>
+        <p:txBody>
+          <a:bodyPr wrap="square" anchor="t" lIns="0" rIns="0" tIns="0" bIns="0">
+            <a:spAutoFit/>
+          </a:bodyPr>
+          <a:lstStyle/>
+          <a:p>
+            <a:pPr algn="l"/>
+            <a:r>
+              <a:rPr sz="1200" b="1">
+                <a:solidFill>
+                  <a:srgbClr val="000000"/>
+                </a:solidFill>
+                <a:latin typeface="맑은 고딕"/>
+                <a:ea typeface="맑은 고딕"/>
+                <a:cs typeface="맑은 고딕"/>
+              </a:rPr>
+              <a:t>• 운영 방침 </a:t>
+            </a:r>
+            <a:r>
+              <a:rPr sz="1100" b="1">
+                <a:solidFill>
+                  <a:srgbClr val="000000"/>
+                </a:solidFill>
+                <a:latin typeface="맑은 고딕"/>
+                <a:ea typeface="맑은 고딕"/>
+                <a:cs typeface="맑은 고딕"/>
+              </a:rPr>
+              <a:t>('26. 7. 9.~)</a:t>
+            </a:r>
+          </a:p>
+        </p:txBody>
+      </p:sp>
+      <p:sp>
+        <p:nvSpPr>
+          <p:cNvPr id="19" name="TextBox 18"/>
+          <p:cNvSpPr txBox="1"/>
+          <p:nvPr/>
+        </p:nvSpPr>
+        <p:spPr>
+          <a:xfrm>
+            <a:off x="5270400" y="2286000"/>
+            <a:ext cx="4212000" cy="324000"/>
+          </a:xfrm>
+          <a:prstGeom prst="rect">
+            <a:avLst/>
+          </a:prstGeom>
+          <a:noFill/>
+        </p:spPr>
+        <p:txBody>
+          <a:bodyPr wrap="square" anchor="t" lIns="0" rIns="0" tIns="0" bIns="0">
+            <a:spAutoFit/>
+          </a:bodyPr>
+          <a:lstStyle/>
+          <a:p>
+            <a:pPr algn="l"/>
+            <a:r>
+              <a:rPr sz="1100" b="0">
+                <a:solidFill>
+                  <a:srgbClr val="000000"/>
+                </a:solidFill>
+                <a:latin typeface="맑은 고딕"/>
+                <a:ea typeface="맑은 고딕"/>
+                <a:cs typeface="맑은 고딕"/>
+              </a:rPr>
+              <a:t>- 20시까지 주문 접수 → 2시간 내 배송 완료</a:t>
+            </a:r>
+          </a:p>
+        </p:txBody>
+      </p:sp>
+      <p:sp>
+        <p:nvSpPr>
+          <p:cNvPr id="20" name="TextBox 19"/>
+          <p:cNvSpPr txBox="1"/>
+          <p:nvPr/>
+        </p:nvSpPr>
+        <p:spPr>
+          <a:xfrm>
+            <a:off x="5270400" y="2610000"/>
+            <a:ext cx="4212000" cy="324000"/>
+          </a:xfrm>
+          <a:prstGeom prst="rect">
+            <a:avLst/>
+          </a:prstGeom>
+          <a:noFill/>
+        </p:spPr>
+        <p:txBody>
+          <a:bodyPr wrap="square" anchor="t" lIns="0" rIns="0" tIns="0" bIns="0">
+            <a:spAutoFit/>
+          </a:bodyPr>
+          <a:lstStyle/>
+          <a:p>
+            <a:pPr algn="l"/>
+            <a:r>
+              <a:rPr sz="1100" b="0">
+                <a:solidFill>
+                  <a:srgbClr val="000000"/>
+                </a:solidFill>
+                <a:latin typeface="맑은 고딕"/>
+                <a:ea typeface="맑은 고딕"/>
+                <a:cs typeface="맑은 고딕"/>
+              </a:rPr>
+              <a:t>- 쓱배송 사륜차 활용 → 대용량·중량 상품 대응</a:t>
+            </a:r>
+          </a:p>
+        </p:txBody>
+      </p:sp>
+      <p:sp>
+        <p:nvSpPr>
+          <p:cNvPr id="21" name="TextBox 20"/>
+          <p:cNvSpPr txBox="1"/>
+          <p:nvPr/>
+        </p:nvSpPr>
+        <p:spPr>
+          <a:xfrm>
+            <a:off x="5270400" y="2934000"/>
+            <a:ext cx="4212000" cy="324000"/>
+          </a:xfrm>
+          <a:prstGeom prst="rect">
+            <a:avLst/>
+          </a:prstGeom>
+          <a:noFill/>
+        </p:spPr>
+        <p:txBody>
+          <a:bodyPr wrap="square" anchor="t" lIns="0" rIns="0" tIns="0" bIns="0">
+            <a:spAutoFit/>
+          </a:bodyPr>
+          <a:lstStyle/>
+          <a:p>
+            <a:pPr algn="l"/>
+            <a:r>
+              <a:rPr sz="1100" b="0">
+                <a:solidFill>
+                  <a:srgbClr val="000000"/>
+                </a:solidFill>
+                <a:latin typeface="맑은 고딕"/>
+                <a:ea typeface="맑은 고딕"/>
+                <a:cs typeface="맑은 고딕"/>
+              </a:rPr>
+              <a:t>- 기존 예약배송 병행 선택 가능</a:t>
+            </a:r>
+          </a:p>
+        </p:txBody>
+      </p:sp>
+      <p:sp>
+        <p:nvSpPr>
+          <p:cNvPr id="22" name="TextBox 21"/>
+          <p:cNvSpPr txBox="1"/>
+          <p:nvPr/>
+        </p:nvSpPr>
+        <p:spPr>
+          <a:xfrm>
+            <a:off x="5270400" y="3258000"/>
+            <a:ext cx="4212000" cy="324000"/>
+          </a:xfrm>
+          <a:prstGeom prst="rect">
+            <a:avLst/>
+          </a:prstGeom>
+          <a:noFill/>
+        </p:spPr>
+        <p:txBody>
+          <a:bodyPr wrap="square" anchor="t" lIns="0" rIns="0" tIns="0" bIns="0">
+            <a:spAutoFit/>
+          </a:bodyPr>
+          <a:lstStyle/>
+          <a:p>
+            <a:pPr algn="l"/>
+            <a:r>
+              <a:rPr sz="1100" b="0">
+                <a:solidFill>
+                  <a:srgbClr val="000000"/>
+                </a:solidFill>
+                <a:latin typeface="맑은 고딕"/>
+                <a:ea typeface="맑은 고딕"/>
+                <a:cs typeface="맑은 고딕"/>
+              </a:rPr>
+              <a:t>- </a:t>
+            </a:r>
+            <a:r>
+              <a:rPr sz="1000" b="0">
+                <a:solidFill>
+                  <a:srgbClr val="000000"/>
+                </a:solidFill>
+                <a:latin typeface="맑은 고딕"/>
+                <a:ea typeface="맑은 고딕"/>
+                <a:cs typeface="맑은 고딕"/>
+              </a:rPr>
+              <a:t>(리드)</a:t>
+            </a:r>
+            <a:r>
+              <a:rPr sz="1100" b="0">
+                <a:solidFill>
+                  <a:srgbClr val="000000"/>
+                </a:solidFill>
+                <a:latin typeface="맑은 고딕"/>
+                <a:ea typeface="맑은 고딕"/>
+                <a:cs typeface="맑은 고딕"/>
+              </a:rPr>
+              <a:t> 기존 점포·인력 재활용형 서비스 → 신규 자산 투자 최소</a:t>
+            </a:r>
+          </a:p>
+        </p:txBody>
+      </p:sp>
+      <p:sp>
+        <p:nvSpPr>
+          <p:cNvPr id="23" name="TextBox 22"/>
+          <p:cNvSpPr txBox="1"/>
+          <p:nvPr/>
+        </p:nvSpPr>
+        <p:spPr>
+          <a:xfrm>
+            <a:off x="5072400" y="3708000"/>
             <a:ext cx="4410000" cy="223200"/>
           </a:xfrm>
           <a:prstGeom prst="rect">
@@ -5091,51 +5387,14 @@
       </p:sp>
       <p:sp>
         <p:nvSpPr>
-          <p:cNvPr id="18" name="TextBox 17"/>
-          <p:cNvSpPr txBox="1"/>
+          <p:cNvPr id="24" name="Rectangle 23"/>
+          <p:cNvSpPr/>
           <p:nvPr/>
         </p:nvSpPr>
         <p:spPr>
           <a:xfrm>
-            <a:off x="5270400" y="2181600"/>
-            <a:ext cx="4212000" cy="223200"/>
-          </a:xfrm>
-          <a:prstGeom prst="rect">
-            <a:avLst/>
-          </a:prstGeom>
-          <a:noFill/>
-        </p:spPr>
-        <p:txBody>
-          <a:bodyPr wrap="square" anchor="t" lIns="0" rIns="0" tIns="0" bIns="0">
-            <a:spAutoFit/>
-          </a:bodyPr>
-          <a:lstStyle/>
-          <a:p>
-            <a:pPr algn="l"/>
-            <a:r>
-              <a:rPr sz="1100" b="0">
-                <a:solidFill>
-                  <a:srgbClr val="000000"/>
-                </a:solidFill>
-                <a:latin typeface="맑은 고딕"/>
-                <a:ea typeface="맑은 고딕"/>
-                <a:cs typeface="맑은 고딕"/>
-              </a:rPr>
-              <a:t>- 연말 50여 개 점포, 전국 즉시배송 기반 구축</a:t>
-            </a:r>
-          </a:p>
-        </p:txBody>
-      </p:sp>
-      <p:sp>
-        <p:nvSpPr>
-          <p:cNvPr id="19" name="Rectangle 18"/>
-          <p:cNvSpPr/>
-          <p:nvPr/>
-        </p:nvSpPr>
-        <p:spPr>
-          <a:xfrm>
-            <a:off x="5072400" y="2512800"/>
-            <a:ext cx="4410000" cy="871200"/>
+            <a:off x="5072400" y="3960000"/>
+            <a:ext cx="4410000" cy="1393200"/>
           </a:xfrm>
           <a:prstGeom prst="rect">
             <a:avLst/>
@@ -5174,13 +5433,13 @@
       </p:sp>
       <p:cxnSp>
         <p:nvCxnSpPr>
-          <p:cNvPr id="20" name="Connector 19"/>
+          <p:cNvPr id="25" name="Connector 24"/>
           <p:cNvCxnSpPr/>
           <p:nvPr/>
         </p:nvCxnSpPr>
         <p:spPr>
           <a:xfrm>
-            <a:off x="5198400" y="2847600"/>
+            <a:off x="5198400" y="4474800"/>
             <a:ext cx="4158000" cy="0"/>
           </a:xfrm>
           <a:prstGeom prst="bentConnector3">
@@ -5212,13 +5471,13 @@
       </p:cxnSp>
       <p:sp>
         <p:nvSpPr>
-          <p:cNvPr id="21" name="Oval 20"/>
+          <p:cNvPr id="26" name="Oval 25"/>
           <p:cNvSpPr/>
           <p:nvPr/>
         </p:nvSpPr>
         <p:spPr>
           <a:xfrm>
-            <a:off x="5671349" y="2800800"/>
+            <a:off x="5671349" y="4428000"/>
             <a:ext cx="93600" cy="93600"/>
           </a:xfrm>
           <a:prstGeom prst="ellipse">
@@ -5258,13 +5517,13 @@
       </p:sp>
       <p:sp>
         <p:nvSpPr>
-          <p:cNvPr id="22" name="TextBox 21"/>
+          <p:cNvPr id="27" name="TextBox 26"/>
           <p:cNvSpPr txBox="1"/>
           <p:nvPr/>
         </p:nvSpPr>
         <p:spPr>
           <a:xfrm>
-            <a:off x="5198400" y="2649600"/>
+            <a:off x="5198400" y="4276800"/>
             <a:ext cx="1039500" cy="162000"/>
           </a:xfrm>
           <a:prstGeom prst="rect">
@@ -5295,13 +5554,13 @@
       </p:sp>
       <p:sp>
         <p:nvSpPr>
-          <p:cNvPr id="23" name="TextBox 22"/>
+          <p:cNvPr id="28" name="TextBox 27"/>
           <p:cNvSpPr txBox="1"/>
           <p:nvPr/>
         </p:nvSpPr>
         <p:spPr>
           <a:xfrm>
-            <a:off x="5198400" y="2919600"/>
+            <a:off x="5198400" y="4546800"/>
             <a:ext cx="1039500" cy="198000"/>
           </a:xfrm>
           <a:prstGeom prst="rect">
@@ -5325,34 +5584,20 @@
                 <a:ea typeface="맑은 고딕"/>
                 <a:cs typeface="맑은 고딕"/>
               </a:rPr>
-              <a:t>양재·하남점</a:t>
-            </a:r>
-          </a:p>
-          <a:p>
-            <a:pPr algn="ctr"/>
-            <a:r>
-              <a:rPr sz="1100" b="1">
-                <a:solidFill>
-                  <a:srgbClr val="000000"/>
-                </a:solidFill>
-                <a:latin typeface="맑은 고딕"/>
-                <a:ea typeface="맑은 고딕"/>
-                <a:cs typeface="맑은 고딕"/>
-              </a:rPr>
-              <a:t>도입</a:t>
-            </a:r>
-          </a:p>
-        </p:txBody>
-      </p:sp>
-      <p:sp>
-        <p:nvSpPr>
-          <p:cNvPr id="24" name="Oval 23"/>
+              <a:t>양재·하남</a:t>
+            </a:r>
+          </a:p>
+        </p:txBody>
+      </p:sp>
+      <p:sp>
+        <p:nvSpPr>
+          <p:cNvPr id="29" name="Oval 28"/>
           <p:cNvSpPr/>
           <p:nvPr/>
         </p:nvSpPr>
         <p:spPr>
           <a:xfrm>
-            <a:off x="6710850" y="2800800"/>
+            <a:off x="6710850" y="4428000"/>
             <a:ext cx="93600" cy="93600"/>
           </a:xfrm>
           <a:prstGeom prst="ellipse">
@@ -5392,13 +5637,13 @@
       </p:sp>
       <p:sp>
         <p:nvSpPr>
-          <p:cNvPr id="25" name="TextBox 24"/>
+          <p:cNvPr id="30" name="TextBox 29"/>
           <p:cNvSpPr txBox="1"/>
           <p:nvPr/>
         </p:nvSpPr>
         <p:spPr>
           <a:xfrm>
-            <a:off x="6237900" y="2649600"/>
+            <a:off x="6237900" y="4276800"/>
             <a:ext cx="1039500" cy="162000"/>
           </a:xfrm>
           <a:prstGeom prst="rect">
@@ -5429,13 +5674,13 @@
       </p:sp>
       <p:sp>
         <p:nvSpPr>
-          <p:cNvPr id="26" name="TextBox 25"/>
+          <p:cNvPr id="31" name="TextBox 30"/>
           <p:cNvSpPr txBox="1"/>
           <p:nvPr/>
         </p:nvSpPr>
         <p:spPr>
           <a:xfrm>
-            <a:off x="6237900" y="2919600"/>
+            <a:off x="6237900" y="4546800"/>
             <a:ext cx="1039500" cy="198000"/>
           </a:xfrm>
           <a:prstGeom prst="rect">
@@ -5459,13 +5704,13 @@
                 <a:ea typeface="맑은 고딕"/>
                 <a:cs typeface="맑은 고딕"/>
               </a:rPr>
-              <a:t>서울 지역</a:t>
+              <a:t>서울</a:t>
             </a:r>
           </a:p>
           <a:p>
             <a:pPr algn="ctr"/>
             <a:r>
-              <a:rPr sz="1100" b="1">
+              <a:rPr sz="1000" b="1">
                 <a:solidFill>
                   <a:srgbClr val="000000"/>
                 </a:solidFill>
@@ -5473,20 +5718,20 @@
                 <a:ea typeface="맑은 고딕"/>
                 <a:cs typeface="맑은 고딕"/>
               </a:rPr>
-              <a:t>확대</a:t>
-            </a:r>
-          </a:p>
-        </p:txBody>
-      </p:sp>
-      <p:sp>
-        <p:nvSpPr>
-          <p:cNvPr id="27" name="Oval 26"/>
+              <a:t>(월계·가든5·신도림)</a:t>
+            </a:r>
+          </a:p>
+        </p:txBody>
+      </p:sp>
+      <p:sp>
+        <p:nvSpPr>
+          <p:cNvPr id="32" name="Oval 31"/>
           <p:cNvSpPr/>
           <p:nvPr/>
         </p:nvSpPr>
         <p:spPr>
           <a:xfrm>
-            <a:off x="7750350" y="2800800"/>
+            <a:off x="7750350" y="4428000"/>
             <a:ext cx="93600" cy="93600"/>
           </a:xfrm>
           <a:prstGeom prst="ellipse">
@@ -5526,13 +5771,13 @@
       </p:sp>
       <p:sp>
         <p:nvSpPr>
-          <p:cNvPr id="28" name="TextBox 27"/>
+          <p:cNvPr id="33" name="TextBox 32"/>
           <p:cNvSpPr txBox="1"/>
           <p:nvPr/>
         </p:nvSpPr>
         <p:spPr>
           <a:xfrm>
-            <a:off x="7277399" y="2649600"/>
+            <a:off x="7277399" y="4276800"/>
             <a:ext cx="1039500" cy="162000"/>
           </a:xfrm>
           <a:prstGeom prst="rect">
@@ -5563,13 +5808,13 @@
       </p:sp>
       <p:sp>
         <p:nvSpPr>
-          <p:cNvPr id="29" name="TextBox 28"/>
+          <p:cNvPr id="34" name="TextBox 33"/>
           <p:cNvSpPr txBox="1"/>
           <p:nvPr/>
         </p:nvSpPr>
         <p:spPr>
           <a:xfrm>
-            <a:off x="7277399" y="2919600"/>
+            <a:off x="7277399" y="4546800"/>
             <a:ext cx="1039500" cy="198000"/>
           </a:xfrm>
           <a:prstGeom prst="rect">
@@ -5593,20 +5838,20 @@
                 <a:ea typeface="맑은 고딕"/>
                 <a:cs typeface="맑은 고딕"/>
               </a:rPr>
-              <a:t>전국 확대</a:t>
-            </a:r>
-          </a:p>
-        </p:txBody>
-      </p:sp>
-      <p:sp>
-        <p:nvSpPr>
-          <p:cNvPr id="30" name="Oval 29"/>
+              <a:t>전국</a:t>
+            </a:r>
+          </a:p>
+        </p:txBody>
+      </p:sp>
+      <p:sp>
+        <p:nvSpPr>
+          <p:cNvPr id="35" name="Oval 34"/>
           <p:cNvSpPr/>
           <p:nvPr/>
         </p:nvSpPr>
         <p:spPr>
           <a:xfrm>
-            <a:off x="8789850" y="2800800"/>
+            <a:off x="8789850" y="4428000"/>
             <a:ext cx="93600" cy="93600"/>
           </a:xfrm>
           <a:prstGeom prst="ellipse">
@@ -5646,13 +5891,13 @@
       </p:sp>
       <p:sp>
         <p:nvSpPr>
-          <p:cNvPr id="31" name="TextBox 30"/>
+          <p:cNvPr id="36" name="TextBox 35"/>
           <p:cNvSpPr txBox="1"/>
           <p:nvPr/>
         </p:nvSpPr>
         <p:spPr>
           <a:xfrm>
-            <a:off x="8316900" y="2649600"/>
+            <a:off x="8316900" y="4276800"/>
             <a:ext cx="1039500" cy="162000"/>
           </a:xfrm>
           <a:prstGeom prst="rect">
@@ -5683,13 +5928,13 @@
       </p:sp>
       <p:sp>
         <p:nvSpPr>
-          <p:cNvPr id="32" name="TextBox 31"/>
+          <p:cNvPr id="37" name="TextBox 36"/>
           <p:cNvSpPr txBox="1"/>
           <p:nvPr/>
         </p:nvSpPr>
         <p:spPr>
           <a:xfrm>
-            <a:off x="8316900" y="2919600"/>
+            <a:off x="8316900" y="4546800"/>
             <a:ext cx="1039500" cy="198000"/>
           </a:xfrm>
           <a:prstGeom prst="rect">
@@ -5713,35 +5958,21 @@
                 <a:ea typeface="맑은 고딕"/>
                 <a:cs typeface="맑은 고딕"/>
               </a:rPr>
-              <a:t>약 50개 점포</a:t>
-            </a:r>
-          </a:p>
-          <a:p>
-            <a:pPr algn="ctr"/>
-            <a:r>
-              <a:rPr sz="1100" b="1">
-                <a:solidFill>
-                  <a:srgbClr val="000000"/>
-                </a:solidFill>
-                <a:latin typeface="맑은 고딕"/>
-                <a:ea typeface="맑은 고딕"/>
-                <a:cs typeface="맑은 고딕"/>
-              </a:rPr>
-              <a:t>운영</a:t>
-            </a:r>
-          </a:p>
-        </p:txBody>
-      </p:sp>
-      <p:sp>
-        <p:nvSpPr>
-          <p:cNvPr id="33" name="TextBox 32"/>
+              <a:t>50여 점포</a:t>
+            </a:r>
+          </a:p>
+        </p:txBody>
+      </p:sp>
+      <p:sp>
+        <p:nvSpPr>
+          <p:cNvPr id="38" name="TextBox 37"/>
           <p:cNvSpPr txBox="1"/>
           <p:nvPr/>
         </p:nvSpPr>
         <p:spPr>
           <a:xfrm>
-            <a:off x="5072400" y="3564000"/>
-            <a:ext cx="4410000" cy="223200"/>
+            <a:off x="5072400" y="5533200"/>
+            <a:ext cx="4410000" cy="280800"/>
           </a:xfrm>
           <a:prstGeom prst="rect">
             <a:avLst/>
@@ -5764,7 +5995,7 @@
                 <a:ea typeface="맑은 고딕"/>
                 <a:cs typeface="맑은 고딕"/>
               </a:rPr>
-              <a:t>• 운영 방침 </a:t>
+              <a:t>• </a:t>
             </a:r>
             <a:r>
               <a:rPr sz="1100" b="1">
@@ -5775,21 +6006,32 @@
                 <a:ea typeface="맑은 고딕"/>
                 <a:cs typeface="맑은 고딕"/>
               </a:rPr>
-              <a:t>('26. 7. 9.~)</a:t>
-            </a:r>
-          </a:p>
-        </p:txBody>
-      </p:sp>
-      <p:sp>
-        <p:nvSpPr>
-          <p:cNvPr id="34" name="TextBox 33"/>
+              <a:t>(리드)</a:t>
+            </a:r>
+            <a:r>
+              <a:rPr sz="1200" b="1">
+                <a:solidFill>
+                  <a:srgbClr val="000000"/>
+                </a:solidFill>
+                <a:latin typeface="맑은 고딕"/>
+                <a:ea typeface="맑은 고딕"/>
+                <a:cs typeface="맑은 고딕"/>
+              </a:rPr>
+              <a:t> 점포를 물류거점으로 재정의, 유휴 PP센터 가동률 활용</a:t>
+            </a:r>
+          </a:p>
+        </p:txBody>
+      </p:sp>
+      <p:sp>
+        <p:nvSpPr>
+          <p:cNvPr id="39" name="TextBox 38"/>
           <p:cNvSpPr txBox="1"/>
           <p:nvPr/>
         </p:nvSpPr>
         <p:spPr>
           <a:xfrm>
-            <a:off x="5270400" y="3787200"/>
-            <a:ext cx="4212000" cy="223200"/>
+            <a:off x="5270400" y="5813999"/>
+            <a:ext cx="4212000" cy="280800"/>
           </a:xfrm>
           <a:prstGeom prst="rect">
             <a:avLst/>
@@ -5812,36 +6054,10 @@
                 <a:ea typeface="맑은 고딕"/>
                 <a:cs typeface="맑은 고딕"/>
               </a:rPr>
-              <a:t>- 20시까지 주문 접수 → 결제 후 2시간 내 배송 완료</a:t>
-            </a:r>
-          </a:p>
-        </p:txBody>
-      </p:sp>
-      <p:sp>
-        <p:nvSpPr>
-          <p:cNvPr id="35" name="TextBox 34"/>
-          <p:cNvSpPr txBox="1"/>
-          <p:nvPr/>
-        </p:nvSpPr>
-        <p:spPr>
-          <a:xfrm>
-            <a:off x="5270400" y="4010399"/>
-            <a:ext cx="4212000" cy="223200"/>
-          </a:xfrm>
-          <a:prstGeom prst="rect">
-            <a:avLst/>
-          </a:prstGeom>
-          <a:noFill/>
-        </p:spPr>
-        <p:txBody>
-          <a:bodyPr wrap="square" anchor="t" lIns="0" rIns="0" tIns="0" bIns="0">
-            <a:spAutoFit/>
-          </a:bodyPr>
-          <a:lstStyle/>
-          <a:p>
-            <a:pPr algn="l"/>
-            <a:r>
-              <a:rPr sz="1100" b="0">
+              <a:t>- → 연말 50여 점 본격 확산 </a:t>
+            </a:r>
+            <a:r>
+              <a:rPr sz="1000" b="0">
                 <a:solidFill>
                   <a:srgbClr val="000000"/>
                 </a:solidFill>
@@ -5849,302 +6065,21 @@
                 <a:ea typeface="맑은 고딕"/>
                 <a:cs typeface="맑은 고딕"/>
               </a:rPr>
-              <a:t>- 기존 예약배송 병행 선택 가능</a:t>
-            </a:r>
-          </a:p>
-        </p:txBody>
-      </p:sp>
-      <p:sp>
-        <p:nvSpPr>
-          <p:cNvPr id="36" name="TextBox 35"/>
-          <p:cNvSpPr txBox="1"/>
-          <p:nvPr/>
-        </p:nvSpPr>
-        <p:spPr>
-          <a:xfrm>
-            <a:off x="5270400" y="4233599"/>
-            <a:ext cx="4212000" cy="223200"/>
-          </a:xfrm>
-          <a:prstGeom prst="rect">
-            <a:avLst/>
-          </a:prstGeom>
-          <a:noFill/>
-        </p:spPr>
-        <p:txBody>
-          <a:bodyPr wrap="square" anchor="t" lIns="0" rIns="0" tIns="0" bIns="0">
-            <a:spAutoFit/>
-          </a:bodyPr>
-          <a:lstStyle/>
-          <a:p>
-            <a:pPr algn="l"/>
-            <a:r>
-              <a:rPr sz="1100" b="0">
-                <a:solidFill>
-                  <a:srgbClr val="000000"/>
-                </a:solidFill>
-                <a:latin typeface="맑은 고딕"/>
-                <a:ea typeface="맑은 고딕"/>
-                <a:cs typeface="맑은 고딕"/>
-              </a:rPr>
-              <a:t>- 쓱배송 사륜차로 대용량·중량 상품 대응</a:t>
-            </a:r>
-          </a:p>
-        </p:txBody>
-      </p:sp>
-      <p:sp>
-        <p:nvSpPr>
-          <p:cNvPr id="37" name="TextBox 36"/>
-          <p:cNvSpPr txBox="1"/>
-          <p:nvPr/>
-        </p:nvSpPr>
-        <p:spPr>
-          <a:xfrm>
-            <a:off x="5072400" y="4636800"/>
-            <a:ext cx="4410000" cy="223200"/>
-          </a:xfrm>
-          <a:prstGeom prst="rect">
-            <a:avLst/>
-          </a:prstGeom>
-          <a:noFill/>
-        </p:spPr>
-        <p:txBody>
-          <a:bodyPr wrap="square" anchor="t" lIns="0" rIns="0" tIns="0" bIns="0">
-            <a:spAutoFit/>
-          </a:bodyPr>
-          <a:lstStyle/>
-          <a:p>
-            <a:pPr algn="l"/>
-            <a:r>
-              <a:rPr sz="1200" b="1">
-                <a:solidFill>
-                  <a:srgbClr val="000000"/>
-                </a:solidFill>
-                <a:latin typeface="맑은 고딕"/>
-                <a:ea typeface="맑은 고딕"/>
-                <a:cs typeface="맑은 고딕"/>
-              </a:rPr>
-              <a:t>• 기대 효과</a:t>
-            </a:r>
-          </a:p>
-        </p:txBody>
-      </p:sp>
-      <p:sp>
-        <p:nvSpPr>
-          <p:cNvPr id="38" name="TextBox 37"/>
-          <p:cNvSpPr txBox="1"/>
-          <p:nvPr/>
-        </p:nvSpPr>
-        <p:spPr>
-          <a:xfrm>
-            <a:off x="5270400" y="4860000"/>
-            <a:ext cx="4212000" cy="223200"/>
-          </a:xfrm>
-          <a:prstGeom prst="rect">
-            <a:avLst/>
-          </a:prstGeom>
-          <a:noFill/>
-        </p:spPr>
-        <p:txBody>
-          <a:bodyPr wrap="square" anchor="t" lIns="0" rIns="0" tIns="0" bIns="0">
-            <a:spAutoFit/>
-          </a:bodyPr>
-          <a:lstStyle/>
-          <a:p>
-            <a:pPr algn="l"/>
-            <a:r>
-              <a:rPr sz="1100" b="0">
-                <a:solidFill>
-                  <a:srgbClr val="000000"/>
-                </a:solidFill>
-                <a:latin typeface="맑은 고딕"/>
-                <a:ea typeface="맑은 고딕"/>
-                <a:cs typeface="맑은 고딕"/>
-              </a:rPr>
-              <a:t>- 대용량 즉시배송 서비스 공백 흡수</a:t>
-            </a:r>
-          </a:p>
-        </p:txBody>
-      </p:sp>
-      <p:sp>
-        <p:nvSpPr>
-          <p:cNvPr id="39" name="TextBox 38"/>
-          <p:cNvSpPr txBox="1"/>
-          <p:nvPr/>
-        </p:nvSpPr>
-        <p:spPr>
-          <a:xfrm>
-            <a:off x="5270400" y="5083200"/>
-            <a:ext cx="4212000" cy="223200"/>
-          </a:xfrm>
-          <a:prstGeom prst="rect">
-            <a:avLst/>
-          </a:prstGeom>
-          <a:noFill/>
-        </p:spPr>
-        <p:txBody>
-          <a:bodyPr wrap="square" anchor="t" lIns="0" rIns="0" tIns="0" bIns="0">
-            <a:spAutoFit/>
-          </a:bodyPr>
-          <a:lstStyle/>
-          <a:p>
-            <a:pPr algn="l"/>
-            <a:r>
-              <a:rPr sz="1100" b="0">
-                <a:solidFill>
-                  <a:srgbClr val="000000"/>
-                </a:solidFill>
-                <a:latin typeface="맑은 고딕"/>
-                <a:ea typeface="맑은 고딕"/>
-                <a:cs typeface="맑은 고딕"/>
-              </a:rPr>
-              <a:t>- 160여 PP센터 즉시배송 기지화·낮 가동률 제고</a:t>
-            </a:r>
-          </a:p>
-        </p:txBody>
-      </p:sp>
-      <p:sp>
-        <p:nvSpPr>
-          <p:cNvPr id="40" name="TextBox 39"/>
-          <p:cNvSpPr txBox="1"/>
-          <p:nvPr/>
-        </p:nvSpPr>
-        <p:spPr>
-          <a:xfrm>
-            <a:off x="5072400" y="5486400"/>
-            <a:ext cx="4410000" cy="223200"/>
-          </a:xfrm>
-          <a:prstGeom prst="rect">
-            <a:avLst/>
-          </a:prstGeom>
-          <a:noFill/>
-        </p:spPr>
-        <p:txBody>
-          <a:bodyPr wrap="square" anchor="t" lIns="0" rIns="0" tIns="0" bIns="0">
-            <a:spAutoFit/>
-          </a:bodyPr>
-          <a:lstStyle/>
-          <a:p>
-            <a:pPr algn="l"/>
-            <a:r>
-              <a:rPr sz="1200" b="1">
-                <a:solidFill>
-                  <a:srgbClr val="000000"/>
-                </a:solidFill>
-                <a:latin typeface="맑은 고딕"/>
-                <a:ea typeface="맑은 고딕"/>
-                <a:cs typeface="맑은 고딕"/>
-              </a:rPr>
-              <a:t>• 규제 변수</a:t>
-            </a:r>
-          </a:p>
-        </p:txBody>
-      </p:sp>
-      <p:sp>
-        <p:nvSpPr>
-          <p:cNvPr id="41" name="TextBox 40"/>
-          <p:cNvSpPr txBox="1"/>
-          <p:nvPr/>
-        </p:nvSpPr>
-        <p:spPr>
-          <a:xfrm>
-            <a:off x="5270400" y="5709600"/>
-            <a:ext cx="4212000" cy="223200"/>
-          </a:xfrm>
-          <a:prstGeom prst="rect">
-            <a:avLst/>
-          </a:prstGeom>
-          <a:noFill/>
-        </p:spPr>
-        <p:txBody>
-          <a:bodyPr wrap="square" anchor="t" lIns="0" rIns="0" tIns="0" bIns="0">
-            <a:spAutoFit/>
-          </a:bodyPr>
-          <a:lstStyle/>
-          <a:p>
-            <a:pPr algn="l"/>
-            <a:r>
-              <a:rPr sz="1100" b="0">
-                <a:solidFill>
-                  <a:srgbClr val="000000"/>
-                </a:solidFill>
-                <a:latin typeface="맑은 고딕"/>
-                <a:ea typeface="맑은 고딕"/>
-                <a:cs typeface="맑은 고딕"/>
-              </a:rPr>
-              <a:t>- 유통산업발전법 → 점포 물류거점 </a:t>
-            </a:r>
-            <a:r>
-              <a:rPr sz="1000" b="0">
-                <a:solidFill>
-                  <a:srgbClr val="000000"/>
-                </a:solidFill>
-                <a:latin typeface="맑은 고딕"/>
-                <a:ea typeface="맑은 고딕"/>
-                <a:cs typeface="맑은 고딕"/>
-              </a:rPr>
-              <a:t>(PP센터)</a:t>
-            </a:r>
-            <a:r>
-              <a:rPr sz="1100" b="0">
-                <a:solidFill>
-                  <a:srgbClr val="000000"/>
-                </a:solidFill>
-                <a:latin typeface="맑은 고딕"/>
-                <a:ea typeface="맑은 고딕"/>
-                <a:cs typeface="맑은 고딕"/>
-              </a:rPr>
-              <a:t> 새벽 불가</a:t>
-            </a:r>
-          </a:p>
-        </p:txBody>
-      </p:sp>
-      <p:sp>
-        <p:nvSpPr>
-          <p:cNvPr id="42" name="TextBox 41"/>
-          <p:cNvSpPr txBox="1"/>
-          <p:nvPr/>
-        </p:nvSpPr>
-        <p:spPr>
-          <a:xfrm>
-            <a:off x="5270400" y="5932800"/>
-            <a:ext cx="4212000" cy="223200"/>
-          </a:xfrm>
-          <a:prstGeom prst="rect">
-            <a:avLst/>
-          </a:prstGeom>
-          <a:noFill/>
-        </p:spPr>
-        <p:txBody>
-          <a:bodyPr wrap="square" anchor="t" lIns="0" rIns="0" tIns="0" bIns="0">
-            <a:spAutoFit/>
-          </a:bodyPr>
-          <a:lstStyle/>
-          <a:p>
-            <a:pPr algn="l"/>
-            <a:r>
-              <a:rPr sz="1100" b="0">
-                <a:solidFill>
-                  <a:srgbClr val="000000"/>
-                </a:solidFill>
-                <a:latin typeface="맑은 고딕"/>
-                <a:ea typeface="맑은 고딕"/>
-                <a:cs typeface="맑은 고딕"/>
-              </a:rPr>
-              <a:t>- 규제 완화 논의 중 → 개정 시 새벽배송 확장 여지</a:t>
+              <a:t>(전국 즉시배송 기반 구축)</a:t>
             </a:r>
           </a:p>
         </p:txBody>
       </p:sp>
       <p:cxnSp>
         <p:nvCxnSpPr>
-          <p:cNvPr id="43" name="Connector 42"/>
+          <p:cNvPr id="40" name="Connector 39"/>
           <p:cNvCxnSpPr/>
           <p:nvPr/>
         </p:nvCxnSpPr>
         <p:spPr>
           <a:xfrm>
             <a:off x="4953600" y="1504800"/>
-            <a:ext cx="0" cy="4568400"/>
+            <a:ext cx="0" cy="4453200"/>
           </a:xfrm>
           <a:prstGeom prst="bentConnector3">
             <a:avLst/>

--- a/reports/ssg-quickcommerce-onepager.pptx
+++ b/reports/ssg-quickcommerce-onepager.pptx
@@ -3230,7 +3230,7 @@
         <p:spPr>
           <a:xfrm>
             <a:off x="424800" y="1504800"/>
-            <a:ext cx="4410000" cy="216000"/>
+            <a:ext cx="5292000" cy="216000"/>
           </a:xfrm>
           <a:prstGeom prst="rect">
             <a:avLst/>
@@ -3253,7 +3253,7 @@
                 <a:ea typeface="맑은 고딕"/>
                 <a:cs typeface="맑은 고딕"/>
               </a:rPr>
-              <a:t>현황 및 배경</a:t>
+              <a:t>현황 및 구조</a:t>
             </a:r>
           </a:p>
         </p:txBody>
@@ -3267,7 +3267,7 @@
         <p:spPr>
           <a:xfrm>
             <a:off x="424800" y="1789200"/>
-            <a:ext cx="4410000" cy="0"/>
+            <a:ext cx="5292000" cy="0"/>
           </a:xfrm>
           <a:prstGeom prst="bentConnector3">
             <a:avLst/>
@@ -3304,7 +3304,7 @@
         <p:spPr>
           <a:xfrm>
             <a:off x="424800" y="1962000"/>
-            <a:ext cx="4410000" cy="223200"/>
+            <a:ext cx="5292000" cy="223200"/>
           </a:xfrm>
           <a:prstGeom prst="rect">
             <a:avLst/>
@@ -3341,7 +3341,7 @@
         <p:spPr>
           <a:xfrm>
             <a:off x="622800" y="2185200"/>
-            <a:ext cx="4212000" cy="223200"/>
+            <a:ext cx="5093999" cy="223200"/>
           </a:xfrm>
           <a:prstGeom prst="rect">
             <a:avLst/>
@@ -3433,7 +3433,7 @@
         <p:spPr>
           <a:xfrm>
             <a:off x="622800" y="2408400"/>
-            <a:ext cx="4212000" cy="223200"/>
+            <a:ext cx="5093999" cy="223200"/>
           </a:xfrm>
           <a:prstGeom prst="rect">
             <a:avLst/>
@@ -3491,8 +3491,8 @@
         </p:nvSpPr>
         <p:spPr>
           <a:xfrm>
-            <a:off x="424800" y="2739600"/>
-            <a:ext cx="4410000" cy="223200"/>
+            <a:off x="424800" y="2732400"/>
+            <a:ext cx="5292000" cy="223200"/>
           </a:xfrm>
           <a:prstGeom prst="rect">
             <a:avLst/>
@@ -3528,8 +3528,8 @@
         </p:nvSpPr>
         <p:spPr>
           <a:xfrm>
-            <a:off x="622800" y="2962800"/>
-            <a:ext cx="4212000" cy="223200"/>
+            <a:off x="622800" y="2955600"/>
+            <a:ext cx="5093999" cy="223200"/>
           </a:xfrm>
           <a:prstGeom prst="rect">
             <a:avLst/>
@@ -3552,92 +3552,608 @@
                 <a:ea typeface="맑은 고딕"/>
                 <a:cs typeface="맑은 고딕"/>
               </a:rPr>
-              <a:t>- 기존 바로퀵, 소량·즉석식 한정 → 대용량 즉시배송 수요 미충족</a:t>
-            </a:r>
-          </a:p>
-        </p:txBody>
-      </p:sp>
-      <p:sp>
-        <p:nvSpPr>
-          <p:cNvPr id="12" name="TextBox 11"/>
-          <p:cNvSpPr txBox="1"/>
+              <a:t>- 기존 바로퀵, 소량·즉석식 한정 → 대용량 즉시배송 공백</a:t>
+            </a:r>
+          </a:p>
+        </p:txBody>
+      </p:sp>
+      <p:graphicFrame>
+        <p:nvGraphicFramePr>
+          <p:cNvPr id="12" name="Table 11"/>
+          <p:cNvGraphicFramePr>
+            <a:graphicFrameLocks noGrp="1"/>
+          </p:cNvGraphicFramePr>
           <p:nvPr/>
-        </p:nvSpPr>
-        <p:spPr>
-          <a:xfrm>
-            <a:off x="622800" y="3186000"/>
-            <a:ext cx="4212000" cy="223200"/>
-          </a:xfrm>
-          <a:prstGeom prst="rect">
-            <a:avLst/>
-          </a:prstGeom>
-          <a:noFill/>
-        </p:spPr>
-        <p:txBody>
-          <a:bodyPr wrap="square" anchor="t" lIns="0" rIns="0" tIns="0" bIns="0">
-            <a:spAutoFit/>
-          </a:bodyPr>
-          <a:lstStyle/>
-          <a:p>
-            <a:pPr algn="l"/>
-            <a:r>
-              <a:rPr sz="1100" b="0">
-                <a:solidFill>
-                  <a:srgbClr val="000000"/>
-                </a:solidFill>
-                <a:latin typeface="맑은 고딕"/>
-                <a:ea typeface="맑은 고딕"/>
-                <a:cs typeface="맑은 고딕"/>
-              </a:rPr>
-              <a:t>- 1시간 배송 </a:t>
-            </a:r>
-            <a:r>
-              <a:rPr sz="1000" b="0">
-                <a:solidFill>
-                  <a:srgbClr val="000000"/>
-                </a:solidFill>
-                <a:latin typeface="맑은 고딕"/>
-                <a:ea typeface="맑은 고딕"/>
-                <a:cs typeface="맑은 고딕"/>
-              </a:rPr>
-              <a:t>(소량)</a:t>
-            </a:r>
-            <a:r>
-              <a:rPr sz="1100" b="0">
-                <a:solidFill>
-                  <a:srgbClr val="000000"/>
-                </a:solidFill>
-                <a:latin typeface="맑은 고딕"/>
-                <a:ea typeface="맑은 고딕"/>
-                <a:cs typeface="맑은 고딕"/>
-              </a:rPr>
-              <a:t> + 2시간 배송 </a:t>
-            </a:r>
-            <a:r>
-              <a:rPr sz="1000" b="0">
-                <a:solidFill>
-                  <a:srgbClr val="000000"/>
-                </a:solidFill>
-                <a:latin typeface="맑은 고딕"/>
-                <a:ea typeface="맑은 고딕"/>
-                <a:cs typeface="맑은 고딕"/>
-              </a:rPr>
-              <a:t>(대용량)</a:t>
-            </a:r>
-            <a:r>
-              <a:rPr sz="1100" b="0">
-                <a:solidFill>
-                  <a:srgbClr val="000000"/>
-                </a:solidFill>
-                <a:latin typeface="맑은 고딕"/>
-                <a:ea typeface="맑은 고딕"/>
-                <a:cs typeface="맑은 고딕"/>
-              </a:rPr>
-              <a:t> 이원화</a:t>
-            </a:r>
-          </a:p>
-        </p:txBody>
-      </p:sp>
+        </p:nvGraphicFramePr>
+        <p:xfrm>
+          <a:off x="424800" y="3214800"/>
+          <a:ext cx="5093999" cy="1098000"/>
+        </p:xfrm>
+        <a:graphic>
+          <a:graphicData uri="http://schemas.openxmlformats.org/drawingml/2006/table">
+            <a:tbl>
+              <a:tblPr>
+                <a:tableStyleId>{5C22544A-7EE6-4342-B048-85BDC9FD1C3A}</a:tableStyleId>
+              </a:tblPr>
+              <a:tblGrid>
+                <a:gridCol w="1098000"/>
+                <a:gridCol w="1998000"/>
+                <a:gridCol w="1997999"/>
+              </a:tblGrid>
+              <a:tr h="274500">
+                <a:tc>
+                  <a:txBody>
+                    <a:bodyPr wrap="square"/>
+                    <a:lstStyle/>
+                    <a:p>
+                      <a:pPr algn="ctr"/>
+                      <a:r>
+                        <a:rPr sz="1000" b="1">
+                          <a:solidFill>
+                            <a:srgbClr val="000000"/>
+                          </a:solidFill>
+                          <a:latin typeface="맑은 고딕"/>
+                          <a:ea typeface="맑은 고딕"/>
+                          <a:cs typeface="맑은 고딕"/>
+                        </a:rPr>
+                        <a:t>구분</a:t>
+                      </a:r>
+                    </a:p>
+                  </a:txBody>
+                  <a:tcPr anchor="ctr" marL="36000" marR="36000" marT="0" marB="0">
+                    <a:lnL w="9525" cap="flat">
+                      <a:solidFill>
+                        <a:srgbClr val="BFBFBF"/>
+                      </a:solidFill>
+                    </a:lnL>
+                    <a:lnR w="9525" cap="flat">
+                      <a:solidFill>
+                        <a:srgbClr val="BFBFBF"/>
+                      </a:solidFill>
+                    </a:lnR>
+                    <a:lnT w="9525" cap="flat">
+                      <a:solidFill>
+                        <a:srgbClr val="BFBFBF"/>
+                      </a:solidFill>
+                    </a:lnT>
+                    <a:lnB w="9525" cap="flat">
+                      <a:solidFill>
+                        <a:srgbClr val="BFBFBF"/>
+                      </a:solidFill>
+                    </a:lnB>
+                    <a:solidFill>
+                      <a:srgbClr val="EAEEF6"/>
+                    </a:solidFill>
+                  </a:tcPr>
+                </a:tc>
+                <a:tc>
+                  <a:txBody>
+                    <a:bodyPr wrap="square"/>
+                    <a:lstStyle/>
+                    <a:p>
+                      <a:pPr algn="ctr"/>
+                      <a:r>
+                        <a:rPr sz="1000" b="1">
+                          <a:solidFill>
+                            <a:srgbClr val="000000"/>
+                          </a:solidFill>
+                          <a:latin typeface="맑은 고딕"/>
+                          <a:ea typeface="맑은 고딕"/>
+                          <a:cs typeface="맑은 고딕"/>
+                        </a:rPr>
+                        <a:t>1시간 배송 </a:t>
+                      </a:r>
+                      <a:r>
+                        <a:rPr sz="900" b="1">
+                          <a:solidFill>
+                            <a:srgbClr val="000000"/>
+                          </a:solidFill>
+                          <a:latin typeface="맑은 고딕"/>
+                          <a:ea typeface="맑은 고딕"/>
+                          <a:cs typeface="맑은 고딕"/>
+                        </a:rPr>
+                        <a:t>(바로퀵)</a:t>
+                      </a:r>
+                    </a:p>
+                  </a:txBody>
+                  <a:tcPr anchor="ctr" marL="36000" marR="36000" marT="0" marB="0">
+                    <a:lnL w="9525" cap="flat">
+                      <a:solidFill>
+                        <a:srgbClr val="BFBFBF"/>
+                      </a:solidFill>
+                    </a:lnL>
+                    <a:lnR w="9525" cap="flat">
+                      <a:solidFill>
+                        <a:srgbClr val="BFBFBF"/>
+                      </a:solidFill>
+                    </a:lnR>
+                    <a:lnT w="9525" cap="flat">
+                      <a:solidFill>
+                        <a:srgbClr val="BFBFBF"/>
+                      </a:solidFill>
+                    </a:lnT>
+                    <a:lnB w="9525" cap="flat">
+                      <a:solidFill>
+                        <a:srgbClr val="BFBFBF"/>
+                      </a:solidFill>
+                    </a:lnB>
+                    <a:solidFill>
+                      <a:srgbClr val="EAEEF6"/>
+                    </a:solidFill>
+                  </a:tcPr>
+                </a:tc>
+                <a:tc>
+                  <a:txBody>
+                    <a:bodyPr wrap="square"/>
+                    <a:lstStyle/>
+                    <a:p>
+                      <a:pPr algn="ctr"/>
+                      <a:r>
+                        <a:rPr sz="1000" b="1">
+                          <a:solidFill>
+                            <a:srgbClr val="002060"/>
+                          </a:solidFill>
+                          <a:latin typeface="맑은 고딕"/>
+                          <a:ea typeface="맑은 고딕"/>
+                          <a:cs typeface="맑은 고딕"/>
+                        </a:rPr>
+                        <a:t>2시간 배송 </a:t>
+                      </a:r>
+                      <a:r>
+                        <a:rPr sz="900" b="1">
+                          <a:solidFill>
+                            <a:srgbClr val="002060"/>
+                          </a:solidFill>
+                          <a:latin typeface="맑은 고딕"/>
+                          <a:ea typeface="맑은 고딕"/>
+                          <a:cs typeface="맑은 고딕"/>
+                        </a:rPr>
+                        <a:t>(신규)</a:t>
+                      </a:r>
+                    </a:p>
+                  </a:txBody>
+                  <a:tcPr anchor="ctr" marL="36000" marR="36000" marT="0" marB="0">
+                    <a:lnL w="9525" cap="flat">
+                      <a:solidFill>
+                        <a:srgbClr val="BFBFBF"/>
+                      </a:solidFill>
+                    </a:lnL>
+                    <a:lnR w="9525" cap="flat">
+                      <a:solidFill>
+                        <a:srgbClr val="BFBFBF"/>
+                      </a:solidFill>
+                    </a:lnR>
+                    <a:lnT w="9525" cap="flat">
+                      <a:solidFill>
+                        <a:srgbClr val="BFBFBF"/>
+                      </a:solidFill>
+                    </a:lnT>
+                    <a:lnB w="9525" cap="flat">
+                      <a:solidFill>
+                        <a:srgbClr val="BFBFBF"/>
+                      </a:solidFill>
+                    </a:lnB>
+                    <a:solidFill>
+                      <a:srgbClr val="DEEBF7"/>
+                    </a:solidFill>
+                  </a:tcPr>
+                </a:tc>
+              </a:tr>
+              <a:tr h="274500">
+                <a:tc>
+                  <a:txBody>
+                    <a:bodyPr wrap="square"/>
+                    <a:lstStyle/>
+                    <a:p>
+                      <a:pPr algn="ctr"/>
+                      <a:r>
+                        <a:rPr sz="1000" b="1">
+                          <a:solidFill>
+                            <a:srgbClr val="000000"/>
+                          </a:solidFill>
+                          <a:latin typeface="맑은 고딕"/>
+                          <a:ea typeface="맑은 고딕"/>
+                          <a:cs typeface="맑은 고딕"/>
+                        </a:rPr>
+                        <a:t>운송 수단</a:t>
+                      </a:r>
+                    </a:p>
+                  </a:txBody>
+                  <a:tcPr anchor="ctr" marL="36000" marR="36000" marT="0" marB="0">
+                    <a:lnL w="9525" cap="flat">
+                      <a:solidFill>
+                        <a:srgbClr val="BFBFBF"/>
+                      </a:solidFill>
+                    </a:lnL>
+                    <a:lnR w="9525" cap="flat">
+                      <a:solidFill>
+                        <a:srgbClr val="BFBFBF"/>
+                      </a:solidFill>
+                    </a:lnR>
+                    <a:lnT w="9525" cap="flat">
+                      <a:solidFill>
+                        <a:srgbClr val="BFBFBF"/>
+                      </a:solidFill>
+                    </a:lnT>
+                    <a:lnB w="9525" cap="flat">
+                      <a:solidFill>
+                        <a:srgbClr val="BFBFBF"/>
+                      </a:solidFill>
+                    </a:lnB>
+                    <a:solidFill>
+                      <a:srgbClr val="FFFFFF"/>
+                    </a:solidFill>
+                  </a:tcPr>
+                </a:tc>
+                <a:tc>
+                  <a:txBody>
+                    <a:bodyPr wrap="square"/>
+                    <a:lstStyle/>
+                    <a:p>
+                      <a:pPr algn="ctr"/>
+                      <a:r>
+                        <a:rPr sz="1000" b="0">
+                          <a:solidFill>
+                            <a:srgbClr val="000000"/>
+                          </a:solidFill>
+                          <a:latin typeface="맑은 고딕"/>
+                          <a:ea typeface="맑은 고딕"/>
+                          <a:cs typeface="맑은 고딕"/>
+                        </a:rPr>
+                        <a:t>이륜차</a:t>
+                      </a:r>
+                    </a:p>
+                  </a:txBody>
+                  <a:tcPr anchor="ctr" marL="36000" marR="36000" marT="0" marB="0">
+                    <a:lnL w="9525" cap="flat">
+                      <a:solidFill>
+                        <a:srgbClr val="BFBFBF"/>
+                      </a:solidFill>
+                    </a:lnL>
+                    <a:lnR w="9525" cap="flat">
+                      <a:solidFill>
+                        <a:srgbClr val="BFBFBF"/>
+                      </a:solidFill>
+                    </a:lnR>
+                    <a:lnT w="9525" cap="flat">
+                      <a:solidFill>
+                        <a:srgbClr val="BFBFBF"/>
+                      </a:solidFill>
+                    </a:lnT>
+                    <a:lnB w="9525" cap="flat">
+                      <a:solidFill>
+                        <a:srgbClr val="BFBFBF"/>
+                      </a:solidFill>
+                    </a:lnB>
+                    <a:solidFill>
+                      <a:srgbClr val="FFFFFF"/>
+                    </a:solidFill>
+                  </a:tcPr>
+                </a:tc>
+                <a:tc>
+                  <a:txBody>
+                    <a:bodyPr wrap="square"/>
+                    <a:lstStyle/>
+                    <a:p>
+                      <a:pPr algn="ctr"/>
+                      <a:r>
+                        <a:rPr sz="1000" b="1">
+                          <a:solidFill>
+                            <a:srgbClr val="002060"/>
+                          </a:solidFill>
+                          <a:latin typeface="맑은 고딕"/>
+                          <a:ea typeface="맑은 고딕"/>
+                          <a:cs typeface="맑은 고딕"/>
+                        </a:rPr>
+                        <a:t>사륜차</a:t>
+                      </a:r>
+                    </a:p>
+                  </a:txBody>
+                  <a:tcPr anchor="ctr" marL="36000" marR="36000" marT="0" marB="0">
+                    <a:lnL w="9525" cap="flat">
+                      <a:solidFill>
+                        <a:srgbClr val="BFBFBF"/>
+                      </a:solidFill>
+                    </a:lnL>
+                    <a:lnR w="9525" cap="flat">
+                      <a:solidFill>
+                        <a:srgbClr val="BFBFBF"/>
+                      </a:solidFill>
+                    </a:lnR>
+                    <a:lnT w="9525" cap="flat">
+                      <a:solidFill>
+                        <a:srgbClr val="BFBFBF"/>
+                      </a:solidFill>
+                    </a:lnT>
+                    <a:lnB w="9525" cap="flat">
+                      <a:solidFill>
+                        <a:srgbClr val="BFBFBF"/>
+                      </a:solidFill>
+                    </a:lnB>
+                    <a:solidFill>
+                      <a:srgbClr val="DEEBF7"/>
+                    </a:solidFill>
+                  </a:tcPr>
+                </a:tc>
+              </a:tr>
+              <a:tr h="274500">
+                <a:tc>
+                  <a:txBody>
+                    <a:bodyPr wrap="square"/>
+                    <a:lstStyle/>
+                    <a:p>
+                      <a:pPr algn="ctr"/>
+                      <a:r>
+                        <a:rPr sz="1000" b="1">
+                          <a:solidFill>
+                            <a:srgbClr val="000000"/>
+                          </a:solidFill>
+                          <a:latin typeface="맑은 고딕"/>
+                          <a:ea typeface="맑은 고딕"/>
+                          <a:cs typeface="맑은 고딕"/>
+                        </a:rPr>
+                        <a:t>취급 품목</a:t>
+                      </a:r>
+                    </a:p>
+                  </a:txBody>
+                  <a:tcPr anchor="ctr" marL="36000" marR="36000" marT="0" marB="0">
+                    <a:lnL w="9525" cap="flat">
+                      <a:solidFill>
+                        <a:srgbClr val="BFBFBF"/>
+                      </a:solidFill>
+                    </a:lnL>
+                    <a:lnR w="9525" cap="flat">
+                      <a:solidFill>
+                        <a:srgbClr val="BFBFBF"/>
+                      </a:solidFill>
+                    </a:lnR>
+                    <a:lnT w="9525" cap="flat">
+                      <a:solidFill>
+                        <a:srgbClr val="BFBFBF"/>
+                      </a:solidFill>
+                    </a:lnT>
+                    <a:lnB w="9525" cap="flat">
+                      <a:solidFill>
+                        <a:srgbClr val="BFBFBF"/>
+                      </a:solidFill>
+                    </a:lnB>
+                    <a:solidFill>
+                      <a:srgbClr val="FFFFFF"/>
+                    </a:solidFill>
+                  </a:tcPr>
+                </a:tc>
+                <a:tc>
+                  <a:txBody>
+                    <a:bodyPr wrap="square"/>
+                    <a:lstStyle/>
+                    <a:p>
+                      <a:pPr algn="ctr"/>
+                      <a:r>
+                        <a:rPr sz="1000" b="0">
+                          <a:solidFill>
+                            <a:srgbClr val="000000"/>
+                          </a:solidFill>
+                          <a:latin typeface="맑은 고딕"/>
+                          <a:ea typeface="맑은 고딕"/>
+                          <a:cs typeface="맑은 고딕"/>
+                        </a:rPr>
+                        <a:t>약 1만 종</a:t>
+                      </a:r>
+                    </a:p>
+                  </a:txBody>
+                  <a:tcPr anchor="ctr" marL="36000" marR="36000" marT="0" marB="0">
+                    <a:lnL w="9525" cap="flat">
+                      <a:solidFill>
+                        <a:srgbClr val="BFBFBF"/>
+                      </a:solidFill>
+                    </a:lnL>
+                    <a:lnR w="9525" cap="flat">
+                      <a:solidFill>
+                        <a:srgbClr val="BFBFBF"/>
+                      </a:solidFill>
+                    </a:lnR>
+                    <a:lnT w="9525" cap="flat">
+                      <a:solidFill>
+                        <a:srgbClr val="BFBFBF"/>
+                      </a:solidFill>
+                    </a:lnT>
+                    <a:lnB w="9525" cap="flat">
+                      <a:solidFill>
+                        <a:srgbClr val="BFBFBF"/>
+                      </a:solidFill>
+                    </a:lnB>
+                    <a:solidFill>
+                      <a:srgbClr val="FFFFFF"/>
+                    </a:solidFill>
+                  </a:tcPr>
+                </a:tc>
+                <a:tc>
+                  <a:txBody>
+                    <a:bodyPr wrap="square"/>
+                    <a:lstStyle/>
+                    <a:p>
+                      <a:pPr algn="ctr"/>
+                      <a:r>
+                        <a:rPr sz="1000" b="1">
+                          <a:solidFill>
+                            <a:srgbClr val="002060"/>
+                          </a:solidFill>
+                          <a:latin typeface="맑은 고딕"/>
+                          <a:ea typeface="맑은 고딕"/>
+                          <a:cs typeface="맑은 고딕"/>
+                        </a:rPr>
+                        <a:t>약 15만 종</a:t>
+                      </a:r>
+                    </a:p>
+                  </a:txBody>
+                  <a:tcPr anchor="ctr" marL="36000" marR="36000" marT="0" marB="0">
+                    <a:lnL w="9525" cap="flat">
+                      <a:solidFill>
+                        <a:srgbClr val="BFBFBF"/>
+                      </a:solidFill>
+                    </a:lnL>
+                    <a:lnR w="9525" cap="flat">
+                      <a:solidFill>
+                        <a:srgbClr val="BFBFBF"/>
+                      </a:solidFill>
+                    </a:lnR>
+                    <a:lnT w="9525" cap="flat">
+                      <a:solidFill>
+                        <a:srgbClr val="BFBFBF"/>
+                      </a:solidFill>
+                    </a:lnT>
+                    <a:lnB w="9525" cap="flat">
+                      <a:solidFill>
+                        <a:srgbClr val="BFBFBF"/>
+                      </a:solidFill>
+                    </a:lnB>
+                    <a:solidFill>
+                      <a:srgbClr val="DEEBF7"/>
+                    </a:solidFill>
+                  </a:tcPr>
+                </a:tc>
+              </a:tr>
+              <a:tr h="274500">
+                <a:tc>
+                  <a:txBody>
+                    <a:bodyPr wrap="square"/>
+                    <a:lstStyle/>
+                    <a:p>
+                      <a:pPr algn="ctr"/>
+                      <a:r>
+                        <a:rPr sz="1000" b="1">
+                          <a:solidFill>
+                            <a:srgbClr val="000000"/>
+                          </a:solidFill>
+                          <a:latin typeface="맑은 고딕"/>
+                          <a:ea typeface="맑은 고딕"/>
+                          <a:cs typeface="맑은 고딕"/>
+                        </a:rPr>
+                        <a:t>주 용도</a:t>
+                      </a:r>
+                    </a:p>
+                  </a:txBody>
+                  <a:tcPr anchor="ctr" marL="36000" marR="36000" marT="0" marB="0">
+                    <a:lnL w="9525" cap="flat">
+                      <a:solidFill>
+                        <a:srgbClr val="BFBFBF"/>
+                      </a:solidFill>
+                    </a:lnL>
+                    <a:lnR w="9525" cap="flat">
+                      <a:solidFill>
+                        <a:srgbClr val="BFBFBF"/>
+                      </a:solidFill>
+                    </a:lnR>
+                    <a:lnT w="9525" cap="flat">
+                      <a:solidFill>
+                        <a:srgbClr val="BFBFBF"/>
+                      </a:solidFill>
+                    </a:lnT>
+                    <a:lnB w="9525" cap="flat">
+                      <a:solidFill>
+                        <a:srgbClr val="BFBFBF"/>
+                      </a:solidFill>
+                    </a:lnB>
+                    <a:solidFill>
+                      <a:srgbClr val="FFFFFF"/>
+                    </a:solidFill>
+                  </a:tcPr>
+                </a:tc>
+                <a:tc>
+                  <a:txBody>
+                    <a:bodyPr wrap="square"/>
+                    <a:lstStyle/>
+                    <a:p>
+                      <a:pPr algn="ctr"/>
+                      <a:r>
+                        <a:rPr sz="1000" b="0">
+                          <a:solidFill>
+                            <a:srgbClr val="000000"/>
+                          </a:solidFill>
+                          <a:latin typeface="맑은 고딕"/>
+                          <a:ea typeface="맑은 고딕"/>
+                          <a:cs typeface="맑은 고딕"/>
+                        </a:rPr>
+                        <a:t>소량·즉석식</a:t>
+                      </a:r>
+                    </a:p>
+                  </a:txBody>
+                  <a:tcPr anchor="ctr" marL="36000" marR="36000" marT="0" marB="0">
+                    <a:lnL w="9525" cap="flat">
+                      <a:solidFill>
+                        <a:srgbClr val="BFBFBF"/>
+                      </a:solidFill>
+                    </a:lnL>
+                    <a:lnR w="9525" cap="flat">
+                      <a:solidFill>
+                        <a:srgbClr val="BFBFBF"/>
+                      </a:solidFill>
+                    </a:lnR>
+                    <a:lnT w="9525" cap="flat">
+                      <a:solidFill>
+                        <a:srgbClr val="BFBFBF"/>
+                      </a:solidFill>
+                    </a:lnT>
+                    <a:lnB w="9525" cap="flat">
+                      <a:solidFill>
+                        <a:srgbClr val="BFBFBF"/>
+                      </a:solidFill>
+                    </a:lnB>
+                    <a:solidFill>
+                      <a:srgbClr val="FFFFFF"/>
+                    </a:solidFill>
+                  </a:tcPr>
+                </a:tc>
+                <a:tc>
+                  <a:txBody>
+                    <a:bodyPr wrap="square"/>
+                    <a:lstStyle/>
+                    <a:p>
+                      <a:pPr algn="ctr"/>
+                      <a:r>
+                        <a:rPr sz="1000" b="1">
+                          <a:solidFill>
+                            <a:srgbClr val="002060"/>
+                          </a:solidFill>
+                          <a:latin typeface="맑은 고딕"/>
+                          <a:ea typeface="맑은 고딕"/>
+                          <a:cs typeface="맑은 고딕"/>
+                        </a:rPr>
+                        <a:t>대용량 장보기</a:t>
+                      </a:r>
+                    </a:p>
+                  </a:txBody>
+                  <a:tcPr anchor="ctr" marL="36000" marR="36000" marT="0" marB="0">
+                    <a:lnL w="9525" cap="flat">
+                      <a:solidFill>
+                        <a:srgbClr val="BFBFBF"/>
+                      </a:solidFill>
+                    </a:lnL>
+                    <a:lnR w="9525" cap="flat">
+                      <a:solidFill>
+                        <a:srgbClr val="BFBFBF"/>
+                      </a:solidFill>
+                    </a:lnR>
+                    <a:lnT w="9525" cap="flat">
+                      <a:solidFill>
+                        <a:srgbClr val="BFBFBF"/>
+                      </a:solidFill>
+                    </a:lnT>
+                    <a:lnB w="9525" cap="flat">
+                      <a:solidFill>
+                        <a:srgbClr val="BFBFBF"/>
+                      </a:solidFill>
+                    </a:lnB>
+                    <a:solidFill>
+                      <a:srgbClr val="DEEBF7"/>
+                    </a:solidFill>
+                  </a:tcPr>
+                </a:tc>
+              </a:tr>
+            </a:tbl>
+          </a:graphicData>
+        </a:graphic>
+      </p:graphicFrame>
       <p:sp>
         <p:nvSpPr>
           <p:cNvPr id="13" name="TextBox 12"/>
@@ -3646,56 +4162,8 @@
         </p:nvSpPr>
         <p:spPr>
           <a:xfrm>
-            <a:off x="622800" y="3409199"/>
-            <a:ext cx="4212000" cy="223200"/>
-          </a:xfrm>
-          <a:prstGeom prst="rect">
-            <a:avLst/>
-          </a:prstGeom>
-          <a:noFill/>
-        </p:spPr>
-        <p:txBody>
-          <a:bodyPr wrap="square" anchor="t" lIns="0" rIns="0" tIns="0" bIns="0">
-            <a:spAutoFit/>
-          </a:bodyPr>
-          <a:lstStyle/>
-          <a:p>
-            <a:pPr algn="l"/>
-            <a:r>
-              <a:rPr sz="1100" b="0">
-                <a:solidFill>
-                  <a:srgbClr val="000000"/>
-                </a:solidFill>
-                <a:latin typeface="맑은 고딕"/>
-                <a:ea typeface="맑은 고딕"/>
-                <a:cs typeface="맑은 고딕"/>
-              </a:rPr>
-              <a:t>- 점포 15만 종 구색 기반 </a:t>
-            </a:r>
-            <a:r>
-              <a:rPr sz="1000" b="0">
-                <a:solidFill>
-                  <a:srgbClr val="000000"/>
-                </a:solidFill>
-                <a:latin typeface="맑은 고딕"/>
-                <a:ea typeface="맑은 고딕"/>
-                <a:cs typeface="맑은 고딕"/>
-              </a:rPr>
-              <a:t>(바로퀵 1만 종 대비 15배)</a:t>
-            </a:r>
-          </a:p>
-        </p:txBody>
-      </p:sp>
-      <p:sp>
-        <p:nvSpPr>
-          <p:cNvPr id="14" name="TextBox 13"/>
-          <p:cNvSpPr txBox="1"/>
-          <p:nvPr/>
-        </p:nvSpPr>
-        <p:spPr>
-          <a:xfrm>
-            <a:off x="424800" y="3740399"/>
-            <a:ext cx="4410000" cy="223200"/>
+            <a:off x="424800" y="4456800"/>
+            <a:ext cx="5292000" cy="223200"/>
           </a:xfrm>
           <a:prstGeom prst="rect">
             <a:avLst/>
@@ -3718,22 +4186,22 @@
                 <a:ea typeface="맑은 고딕"/>
                 <a:cs typeface="맑은 고딕"/>
               </a:rPr>
-              <a:t>• 이마트 배송 체계</a:t>
+              <a:t>• 이마트 배송 라인업</a:t>
             </a:r>
           </a:p>
         </p:txBody>
       </p:sp>
       <p:graphicFrame>
         <p:nvGraphicFramePr>
-          <p:cNvPr id="15" name="Table 14"/>
+          <p:cNvPr id="14" name="Table 13"/>
           <p:cNvGraphicFramePr>
             <a:graphicFrameLocks noGrp="1"/>
           </p:cNvGraphicFramePr>
           <p:nvPr/>
         </p:nvGraphicFramePr>
         <p:xfrm>
-          <a:off x="424800" y="3981599"/>
-          <a:ext cx="4265999" cy="1976400"/>
+          <a:off x="424800" y="4716000"/>
+          <a:ext cx="5093998" cy="1313999"/>
         </p:xfrm>
         <a:graphic>
           <a:graphicData uri="http://schemas.openxmlformats.org/drawingml/2006/table">
@@ -3742,13 +4210,12 @@
                 <a:tableStyleId>{5C22544A-7EE6-4342-B048-85BDC9FD1C3A}</a:tableStyleId>
               </a:tblPr>
               <a:tblGrid>
-                <a:gridCol w="666000"/>
-                <a:gridCol w="1080000"/>
-                <a:gridCol w="954000"/>
-                <a:gridCol w="648000"/>
-                <a:gridCol w="917999"/>
+                <a:gridCol w="756000"/>
+                <a:gridCol w="1655999"/>
+                <a:gridCol w="1548000"/>
+                <a:gridCol w="1133999"/>
               </a:tblGrid>
-              <a:tr h="329400">
+              <a:tr h="218999">
                 <a:tc>
                   <a:txBody>
                     <a:bodyPr wrap="square"/>
@@ -3899,51 +4366,6 @@
                           <a:ea typeface="맑은 고딕"/>
                           <a:cs typeface="맑은 고딕"/>
                         </a:rPr>
-                        <a:t>운송 수단</a:t>
-                      </a:r>
-                    </a:p>
-                  </a:txBody>
-                  <a:tcPr anchor="ctr" marL="36000" marR="36000" marT="0" marB="0">
-                    <a:lnL w="9525" cap="flat">
-                      <a:solidFill>
-                        <a:srgbClr val="BFBFBF"/>
-                      </a:solidFill>
-                    </a:lnL>
-                    <a:lnR w="9525" cap="flat">
-                      <a:solidFill>
-                        <a:srgbClr val="BFBFBF"/>
-                      </a:solidFill>
-                    </a:lnR>
-                    <a:lnT w="9525" cap="flat">
-                      <a:solidFill>
-                        <a:srgbClr val="BFBFBF"/>
-                      </a:solidFill>
-                    </a:lnT>
-                    <a:lnB w="9525" cap="flat">
-                      <a:solidFill>
-                        <a:srgbClr val="BFBFBF"/>
-                      </a:solidFill>
-                    </a:lnB>
-                    <a:solidFill>
-                      <a:srgbClr val="EAEEF6"/>
-                    </a:solidFill>
-                  </a:tcPr>
-                </a:tc>
-                <a:tc>
-                  <a:txBody>
-                    <a:bodyPr wrap="square"/>
-                    <a:lstStyle/>
-                    <a:p>
-                      <a:pPr algn="ctr"/>
-                      <a:r>
-                        <a:rPr sz="1000" b="1">
-                          <a:solidFill>
-                            <a:srgbClr val="000000"/>
-                          </a:solidFill>
-                          <a:latin typeface="맑은 고딕"/>
-                          <a:ea typeface="맑은 고딕"/>
-                          <a:cs typeface="맑은 고딕"/>
-                        </a:rPr>
                         <a:t>취급 규모</a:t>
                       </a:r>
                     </a:p>
@@ -3975,7 +4397,7 @@
                   </a:tcPr>
                 </a:tc>
               </a:tr>
-              <a:tr h="329400">
+              <a:tr h="218999">
                 <a:tc rowSpan="3">
                   <a:txBody>
                     <a:bodyPr wrap="square"/>
@@ -4126,51 +4548,6 @@
                           <a:ea typeface="맑은 고딕"/>
                           <a:cs typeface="맑은 고딕"/>
                         </a:rPr>
-                        <a:t>사륜차</a:t>
-                      </a:r>
-                    </a:p>
-                  </a:txBody>
-                  <a:tcPr anchor="ctr" marL="36000" marR="36000" marT="0" marB="0">
-                    <a:lnL w="9525" cap="flat">
-                      <a:solidFill>
-                        <a:srgbClr val="BFBFBF"/>
-                      </a:solidFill>
-                    </a:lnL>
-                    <a:lnR w="9525" cap="flat">
-                      <a:solidFill>
-                        <a:srgbClr val="BFBFBF"/>
-                      </a:solidFill>
-                    </a:lnR>
-                    <a:lnT w="9525" cap="flat">
-                      <a:solidFill>
-                        <a:srgbClr val="BFBFBF"/>
-                      </a:solidFill>
-                    </a:lnT>
-                    <a:lnB w="9525" cap="flat">
-                      <a:solidFill>
-                        <a:srgbClr val="BFBFBF"/>
-                      </a:solidFill>
-                    </a:lnB>
-                    <a:solidFill>
-                      <a:srgbClr val="FFFFFF"/>
-                    </a:solidFill>
-                  </a:tcPr>
-                </a:tc>
-                <a:tc rowSpan="3">
-                  <a:txBody>
-                    <a:bodyPr wrap="square"/>
-                    <a:lstStyle/>
-                    <a:p>
-                      <a:pPr algn="ctr"/>
-                      <a:r>
-                        <a:rPr sz="1000" b="0">
-                          <a:solidFill>
-                            <a:srgbClr val="000000"/>
-                          </a:solidFill>
-                          <a:latin typeface="맑은 고딕"/>
-                          <a:ea typeface="맑은 고딕"/>
-                          <a:cs typeface="맑은 고딕"/>
-                        </a:rPr>
                         <a:t>대용량</a:t>
                       </a:r>
                     </a:p>
@@ -4202,7 +4579,7 @@
                   </a:tcPr>
                 </a:tc>
               </a:tr>
-              <a:tr h="329400">
+              <a:tr h="218999">
                 <a:tc vMerge="1">
                   <a:txBody>
                     <a:bodyPr wrap="square"/>
@@ -4357,40 +4734,8 @@
                     </a:solidFill>
                   </a:tcPr>
                 </a:tc>
-                <a:tc vMerge="1">
-                  <a:txBody>
-                    <a:bodyPr wrap="square"/>
-                    <a:lstStyle/>
-                    <a:p/>
-                  </a:txBody>
-                  <a:tcPr anchor="ctr" marL="36000" marR="36000" marT="0" marB="0">
-                    <a:lnL w="9525" cap="flat">
-                      <a:solidFill>
-                        <a:srgbClr val="BFBFBF"/>
-                      </a:solidFill>
-                    </a:lnL>
-                    <a:lnR w="9525" cap="flat">
-                      <a:solidFill>
-                        <a:srgbClr val="BFBFBF"/>
-                      </a:solidFill>
-                    </a:lnR>
-                    <a:lnT w="9525" cap="flat">
-                      <a:solidFill>
-                        <a:srgbClr val="BFBFBF"/>
-                      </a:solidFill>
-                    </a:lnT>
-                    <a:lnB w="9525" cap="flat">
-                      <a:solidFill>
-                        <a:srgbClr val="BFBFBF"/>
-                      </a:solidFill>
-                    </a:lnB>
-                    <a:solidFill>
-                      <a:srgbClr val="FFFFFF"/>
-                    </a:solidFill>
-                  </a:tcPr>
-                </a:tc>
               </a:tr>
-              <a:tr h="329400">
+              <a:tr h="218999">
                 <a:tc vMerge="1">
                   <a:txBody>
                     <a:bodyPr wrap="square"/>
@@ -4545,40 +4890,8 @@
                     </a:solidFill>
                   </a:tcPr>
                 </a:tc>
-                <a:tc vMerge="1">
-                  <a:txBody>
-                    <a:bodyPr wrap="square"/>
-                    <a:lstStyle/>
-                    <a:p/>
-                  </a:txBody>
-                  <a:tcPr anchor="ctr" marL="36000" marR="36000" marT="0" marB="0">
-                    <a:lnL w="9525" cap="flat">
-                      <a:solidFill>
-                        <a:srgbClr val="BFBFBF"/>
-                      </a:solidFill>
-                    </a:lnL>
-                    <a:lnR w="9525" cap="flat">
-                      <a:solidFill>
-                        <a:srgbClr val="BFBFBF"/>
-                      </a:solidFill>
-                    </a:lnR>
-                    <a:lnT w="9525" cap="flat">
-                      <a:solidFill>
-                        <a:srgbClr val="BFBFBF"/>
-                      </a:solidFill>
-                    </a:lnT>
-                    <a:lnB w="9525" cap="flat">
-                      <a:solidFill>
-                        <a:srgbClr val="BFBFBF"/>
-                      </a:solidFill>
-                    </a:lnB>
-                    <a:solidFill>
-                      <a:srgbClr val="FFFFFF"/>
-                    </a:solidFill>
-                  </a:tcPr>
-                </a:tc>
               </a:tr>
-              <a:tr h="329400">
+              <a:tr h="218999">
                 <a:tc rowSpan="2">
                   <a:txBody>
                     <a:bodyPr wrap="square"/>
@@ -4751,63 +5064,7 @@
                           <a:ea typeface="맑은 고딕"/>
                           <a:cs typeface="맑은 고딕"/>
                         </a:rPr>
-                        <a:t>이륜차</a:t>
-                      </a:r>
-                    </a:p>
-                  </a:txBody>
-                  <a:tcPr anchor="ctr" marL="36000" marR="36000" marT="0" marB="0">
-                    <a:lnL w="9525" cap="flat">
-                      <a:solidFill>
-                        <a:srgbClr val="BFBFBF"/>
-                      </a:solidFill>
-                    </a:lnL>
-                    <a:lnR w="9525" cap="flat">
-                      <a:solidFill>
-                        <a:srgbClr val="BFBFBF"/>
-                      </a:solidFill>
-                    </a:lnR>
-                    <a:lnT w="9525" cap="flat">
-                      <a:solidFill>
-                        <a:srgbClr val="BFBFBF"/>
-                      </a:solidFill>
-                    </a:lnT>
-                    <a:lnB w="9525" cap="flat">
-                      <a:solidFill>
-                        <a:srgbClr val="BFBFBF"/>
-                      </a:solidFill>
-                    </a:lnB>
-                    <a:solidFill>
-                      <a:srgbClr val="FFFFFF"/>
-                    </a:solidFill>
-                  </a:tcPr>
-                </a:tc>
-                <a:tc>
-                  <a:txBody>
-                    <a:bodyPr wrap="square"/>
-                    <a:lstStyle/>
-                    <a:p>
-                      <a:pPr algn="ctr"/>
-                      <a:r>
-                        <a:rPr sz="1000" b="0">
-                          <a:solidFill>
-                            <a:srgbClr val="000000"/>
-                          </a:solidFill>
-                          <a:latin typeface="맑은 고딕"/>
-                          <a:ea typeface="맑은 고딕"/>
-                          <a:cs typeface="맑은 고딕"/>
-                        </a:rPr>
-                        <a:t>소량 </a:t>
-                      </a:r>
-                      <a:r>
-                        <a:rPr sz="900" b="0">
-                          <a:solidFill>
-                            <a:srgbClr val="000000"/>
-                          </a:solidFill>
-                          <a:latin typeface="맑은 고딕"/>
-                          <a:ea typeface="맑은 고딕"/>
-                          <a:cs typeface="맑은 고딕"/>
-                        </a:rPr>
-                        <a:t>(1만 종)</a:t>
+                        <a:t>소량</a:t>
                       </a:r>
                     </a:p>
                   </a:txBody>
@@ -4838,7 +5095,7 @@
                   </a:tcPr>
                 </a:tc>
               </a:tr>
-              <a:tr h="329400">
+              <a:tr h="219004">
                 <a:tc vMerge="1">
                   <a:txBody>
                     <a:bodyPr wrap="square"/>
@@ -4886,7 +5143,18 @@
                           <a:ea typeface="맑은 고딕"/>
                           <a:cs typeface="맑은 고딕"/>
                         </a:rPr>
-                        <a:t>2시간 배송</a:t>
+                        <a:t>2시간 배송 </a:t>
+                      </a:r>
+                      <a:r>
+                        <a:rPr sz="900" b="1">
+                          <a:solidFill>
+                            <a:srgbClr val="002060"/>
+                          </a:solidFill>
+                          <a:latin typeface="맑은 고딕"/>
+                          <a:ea typeface="맑은 고딕"/>
+                          <a:cs typeface="맑은 고딕"/>
+                        </a:rPr>
+                        <a:t>(신규)</a:t>
                       </a:r>
                     </a:p>
                   </a:txBody>
@@ -4976,51 +5244,6 @@
                           <a:ea typeface="맑은 고딕"/>
                           <a:cs typeface="맑은 고딕"/>
                         </a:rPr>
-                        <a:t>사륜차</a:t>
-                      </a:r>
-                    </a:p>
-                  </a:txBody>
-                  <a:tcPr anchor="ctr" marL="36000" marR="36000" marT="0" marB="0">
-                    <a:lnL w="9525" cap="flat">
-                      <a:solidFill>
-                        <a:srgbClr val="BFBFBF"/>
-                      </a:solidFill>
-                    </a:lnL>
-                    <a:lnR w="9525" cap="flat">
-                      <a:solidFill>
-                        <a:srgbClr val="BFBFBF"/>
-                      </a:solidFill>
-                    </a:lnR>
-                    <a:lnT w="9525" cap="flat">
-                      <a:solidFill>
-                        <a:srgbClr val="BFBFBF"/>
-                      </a:solidFill>
-                    </a:lnT>
-                    <a:lnB w="9525" cap="flat">
-                      <a:solidFill>
-                        <a:srgbClr val="BFBFBF"/>
-                      </a:solidFill>
-                    </a:lnB>
-                    <a:solidFill>
-                      <a:srgbClr val="DEEBF7"/>
-                    </a:solidFill>
-                  </a:tcPr>
-                </a:tc>
-                <a:tc>
-                  <a:txBody>
-                    <a:bodyPr wrap="square"/>
-                    <a:lstStyle/>
-                    <a:p>
-                      <a:pPr algn="ctr"/>
-                      <a:r>
-                        <a:rPr sz="1000" b="1">
-                          <a:solidFill>
-                            <a:srgbClr val="002060"/>
-                          </a:solidFill>
-                          <a:latin typeface="맑은 고딕"/>
-                          <a:ea typeface="맑은 고딕"/>
-                          <a:cs typeface="맑은 고딕"/>
-                        </a:rPr>
                         <a:t>대용량</a:t>
                       </a:r>
                     </a:p>
@@ -5058,14 +5281,14 @@
       </p:graphicFrame>
       <p:sp>
         <p:nvSpPr>
-          <p:cNvPr id="16" name="TextBox 15"/>
+          <p:cNvPr id="15" name="TextBox 14"/>
           <p:cNvSpPr txBox="1"/>
           <p:nvPr/>
         </p:nvSpPr>
         <p:spPr>
           <a:xfrm>
-            <a:off x="5072400" y="1504800"/>
-            <a:ext cx="4410000" cy="216000"/>
+            <a:off x="5954400" y="1504800"/>
+            <a:ext cx="3528000" cy="216000"/>
           </a:xfrm>
           <a:prstGeom prst="rect">
             <a:avLst/>
@@ -5088,21 +5311,21 @@
                 <a:ea typeface="맑은 고딕"/>
                 <a:cs typeface="맑은 고딕"/>
               </a:rPr>
-              <a:t>서비스 세부 내용</a:t>
+              <a:t>전개 방향</a:t>
             </a:r>
           </a:p>
         </p:txBody>
       </p:sp>
       <p:cxnSp>
         <p:nvCxnSpPr>
-          <p:cNvPr id="17" name="Connector 16"/>
+          <p:cNvPr id="16" name="Connector 15"/>
           <p:cNvCxnSpPr/>
           <p:nvPr/>
         </p:nvCxnSpPr>
         <p:spPr>
           <a:xfrm>
-            <a:off x="5072400" y="1789200"/>
-            <a:ext cx="4410000" cy="0"/>
+            <a:off x="5954400" y="1789200"/>
+            <a:ext cx="3528000" cy="0"/>
           </a:xfrm>
           <a:prstGeom prst="bentConnector3">
             <a:avLst/>
@@ -5132,14 +5355,14 @@
       </p:cxnSp>
       <p:sp>
         <p:nvSpPr>
-          <p:cNvPr id="18" name="TextBox 17"/>
+          <p:cNvPr id="17" name="TextBox 16"/>
           <p:cNvSpPr txBox="1"/>
           <p:nvPr/>
         </p:nvSpPr>
         <p:spPr>
           <a:xfrm>
-            <a:off x="5072400" y="1962000"/>
-            <a:ext cx="4410000" cy="324000"/>
+            <a:off x="5954400" y="1962000"/>
+            <a:ext cx="3528000" cy="251999"/>
           </a:xfrm>
           <a:prstGeom prst="rect">
             <a:avLst/>
@@ -5180,14 +5403,14 @@
       </p:sp>
       <p:sp>
         <p:nvSpPr>
-          <p:cNvPr id="19" name="TextBox 18"/>
+          <p:cNvPr id="18" name="TextBox 17"/>
           <p:cNvSpPr txBox="1"/>
           <p:nvPr/>
         </p:nvSpPr>
         <p:spPr>
           <a:xfrm>
-            <a:off x="5270400" y="2286000"/>
-            <a:ext cx="4212000" cy="324000"/>
+            <a:off x="6152400" y="2214000"/>
+            <a:ext cx="3330000" cy="251999"/>
           </a:xfrm>
           <a:prstGeom prst="rect">
             <a:avLst/>
@@ -5210,21 +5433,21 @@
                 <a:ea typeface="맑은 고딕"/>
                 <a:cs typeface="맑은 고딕"/>
               </a:rPr>
-              <a:t>- 20시까지 주문 접수 → 2시간 내 배송 완료</a:t>
-            </a:r>
-          </a:p>
-        </p:txBody>
-      </p:sp>
-      <p:sp>
-        <p:nvSpPr>
-          <p:cNvPr id="20" name="TextBox 19"/>
+              <a:t>- 20시 마감 → 2시간 내 배송 완료</a:t>
+            </a:r>
+          </a:p>
+        </p:txBody>
+      </p:sp>
+      <p:sp>
+        <p:nvSpPr>
+          <p:cNvPr id="19" name="TextBox 18"/>
           <p:cNvSpPr txBox="1"/>
           <p:nvPr/>
         </p:nvSpPr>
         <p:spPr>
           <a:xfrm>
-            <a:off x="5270400" y="2610000"/>
-            <a:ext cx="4212000" cy="324000"/>
+            <a:off x="6152400" y="2466000"/>
+            <a:ext cx="3330000" cy="251999"/>
           </a:xfrm>
           <a:prstGeom prst="rect">
             <a:avLst/>
@@ -5247,21 +5470,21 @@
                 <a:ea typeface="맑은 고딕"/>
                 <a:cs typeface="맑은 고딕"/>
               </a:rPr>
-              <a:t>- 쓱배송 사륜차 활용 → 대용량·중량 상품 대응</a:t>
-            </a:r>
-          </a:p>
-        </p:txBody>
-      </p:sp>
-      <p:sp>
-        <p:nvSpPr>
-          <p:cNvPr id="21" name="TextBox 20"/>
+              <a:t>- 쓱배송 사륜차 → 대용량·중량 대응</a:t>
+            </a:r>
+          </a:p>
+        </p:txBody>
+      </p:sp>
+      <p:sp>
+        <p:nvSpPr>
+          <p:cNvPr id="20" name="TextBox 19"/>
           <p:cNvSpPr txBox="1"/>
           <p:nvPr/>
         </p:nvSpPr>
         <p:spPr>
           <a:xfrm>
-            <a:off x="5270400" y="2934000"/>
-            <a:ext cx="4212000" cy="324000"/>
+            <a:off x="6152400" y="2718000"/>
+            <a:ext cx="3330000" cy="251999"/>
           </a:xfrm>
           <a:prstGeom prst="rect">
             <a:avLst/>
@@ -5291,14 +5514,14 @@
       </p:sp>
       <p:sp>
         <p:nvSpPr>
-          <p:cNvPr id="22" name="TextBox 21"/>
+          <p:cNvPr id="21" name="TextBox 20"/>
           <p:cNvSpPr txBox="1"/>
           <p:nvPr/>
         </p:nvSpPr>
         <p:spPr>
           <a:xfrm>
-            <a:off x="5270400" y="3258000"/>
-            <a:ext cx="4212000" cy="324000"/>
+            <a:off x="6152400" y="2970000"/>
+            <a:ext cx="3330000" cy="251999"/>
           </a:xfrm>
           <a:prstGeom prst="rect">
             <a:avLst/>
@@ -5321,43 +5544,21 @@
                 <a:ea typeface="맑은 고딕"/>
                 <a:cs typeface="맑은 고딕"/>
               </a:rPr>
-              <a:t>- </a:t>
-            </a:r>
-            <a:r>
-              <a:rPr sz="1000" b="0">
-                <a:solidFill>
-                  <a:srgbClr val="000000"/>
-                </a:solidFill>
-                <a:latin typeface="맑은 고딕"/>
-                <a:ea typeface="맑은 고딕"/>
-                <a:cs typeface="맑은 고딕"/>
-              </a:rPr>
-              <a:t>(리드)</a:t>
-            </a:r>
-            <a:r>
-              <a:rPr sz="1100" b="0">
-                <a:solidFill>
-                  <a:srgbClr val="000000"/>
-                </a:solidFill>
-                <a:latin typeface="맑은 고딕"/>
-                <a:ea typeface="맑은 고딕"/>
-                <a:cs typeface="맑은 고딕"/>
-              </a:rPr>
-              <a:t> 기존 점포·인력 재활용형 서비스 → 신규 자산 투자 최소</a:t>
-            </a:r>
-          </a:p>
-        </p:txBody>
-      </p:sp>
-      <p:sp>
-        <p:nvSpPr>
-          <p:cNvPr id="23" name="TextBox 22"/>
+              <a:t>- 점포·인력 재활용 → 신규 투자 최소</a:t>
+            </a:r>
+          </a:p>
+        </p:txBody>
+      </p:sp>
+      <p:sp>
+        <p:nvSpPr>
+          <p:cNvPr id="22" name="TextBox 21"/>
           <p:cNvSpPr txBox="1"/>
           <p:nvPr/>
         </p:nvSpPr>
         <p:spPr>
           <a:xfrm>
-            <a:off x="5072400" y="3708000"/>
-            <a:ext cx="4410000" cy="223200"/>
+            <a:off x="5954400" y="3348000"/>
+            <a:ext cx="3528000" cy="223200"/>
           </a:xfrm>
           <a:prstGeom prst="rect">
             <a:avLst/>
@@ -5385,72 +5586,25 @@
           </a:p>
         </p:txBody>
       </p:sp>
-      <p:sp>
-        <p:nvSpPr>
-          <p:cNvPr id="24" name="Rectangle 23"/>
-          <p:cNvSpPr/>
-          <p:nvPr/>
-        </p:nvSpPr>
-        <p:spPr>
-          <a:xfrm>
-            <a:off x="5072400" y="3960000"/>
-            <a:ext cx="4410000" cy="1393200"/>
-          </a:xfrm>
-          <a:prstGeom prst="rect">
-            <a:avLst/>
-          </a:prstGeom>
-          <a:solidFill>
-            <a:srgbClr val="FFFFFF"/>
-          </a:solidFill>
-          <a:ln w="12700">
-            <a:solidFill>
-              <a:srgbClr val="BFBFBF"/>
-            </a:solidFill>
-          </a:ln>
-          <a:effectLst/>
-        </p:spPr>
-        <p:style>
-          <a:lnRef idx="1">
-            <a:schemeClr val="accent1"/>
-          </a:lnRef>
-          <a:fillRef idx="3">
-            <a:schemeClr val="accent1"/>
-          </a:fillRef>
-          <a:effectRef idx="2">
-            <a:schemeClr val="accent1"/>
-          </a:effectRef>
-          <a:fontRef idx="minor">
-            <a:schemeClr val="lt1"/>
-          </a:fontRef>
-        </p:style>
-        <p:txBody>
-          <a:bodyPr rtlCol="0" anchor="ctr"/>
-          <a:lstStyle/>
-          <a:p>
-            <a:pPr algn="ctr"/>
-          </a:p>
-        </p:txBody>
-      </p:sp>
       <p:cxnSp>
         <p:nvCxnSpPr>
-          <p:cNvPr id="25" name="Connector 24"/>
+          <p:cNvPr id="23" name="Connector 22"/>
           <p:cNvCxnSpPr/>
           <p:nvPr/>
         </p:nvCxnSpPr>
         <p:spPr>
           <a:xfrm>
-            <a:off x="5198400" y="4474800"/>
-            <a:ext cx="4158000" cy="0"/>
+            <a:off x="6026399" y="3726000"/>
+            <a:ext cx="0" cy="1656000"/>
           </a:xfrm>
           <a:prstGeom prst="bentConnector3">
             <a:avLst/>
           </a:prstGeom>
-          <a:ln w="25400">
+          <a:ln w="22225">
             <a:solidFill>
               <a:srgbClr val="000000"/>
             </a:solidFill>
             <a:prstDash val="solid"/>
-            <a:tailEnd type="triangle" w="med" len="med"/>
           </a:ln>
           <a:effectLst/>
         </p:spPr>
@@ -5471,13 +5625,13 @@
       </p:cxnSp>
       <p:sp>
         <p:nvSpPr>
-          <p:cNvPr id="26" name="Oval 25"/>
+          <p:cNvPr id="24" name="Oval 23"/>
           <p:cNvSpPr/>
           <p:nvPr/>
         </p:nvSpPr>
         <p:spPr>
           <a:xfrm>
-            <a:off x="5671349" y="4428000"/>
+            <a:off x="5979600" y="3679200"/>
             <a:ext cx="93600" cy="93600"/>
           </a:xfrm>
           <a:prstGeom prst="ellipse">
@@ -5517,14 +5671,14 @@
       </p:sp>
       <p:sp>
         <p:nvSpPr>
-          <p:cNvPr id="27" name="TextBox 26"/>
+          <p:cNvPr id="25" name="TextBox 24"/>
           <p:cNvSpPr txBox="1"/>
           <p:nvPr/>
         </p:nvSpPr>
         <p:spPr>
           <a:xfrm>
-            <a:off x="5198400" y="4276800"/>
-            <a:ext cx="1039500" cy="162000"/>
+            <a:off x="6188399" y="3618000"/>
+            <a:ext cx="720000" cy="180000"/>
           </a:xfrm>
           <a:prstGeom prst="rect">
             <a:avLst/>
@@ -5532,49 +5686,12 @@
           <a:noFill/>
         </p:spPr>
         <p:txBody>
-          <a:bodyPr wrap="square" anchor="t" lIns="0" rIns="0" tIns="0" bIns="0">
+          <a:bodyPr wrap="square" anchor="ctr" lIns="0" rIns="0" tIns="0" bIns="0">
             <a:spAutoFit/>
           </a:bodyPr>
           <a:lstStyle/>
           <a:p>
-            <a:pPr algn="ctr"/>
-            <a:r>
-              <a:rPr sz="1000" b="1">
-                <a:solidFill>
-                  <a:srgbClr val="595959"/>
-                </a:solidFill>
-                <a:latin typeface="맑은 고딕"/>
-                <a:ea typeface="맑은 고딕"/>
-                <a:cs typeface="맑은 고딕"/>
-              </a:rPr>
-              <a:t>'26. 7월</a:t>
-            </a:r>
-          </a:p>
-        </p:txBody>
-      </p:sp>
-      <p:sp>
-        <p:nvSpPr>
-          <p:cNvPr id="28" name="TextBox 27"/>
-          <p:cNvSpPr txBox="1"/>
-          <p:nvPr/>
-        </p:nvSpPr>
-        <p:spPr>
-          <a:xfrm>
-            <a:off x="5198400" y="4546800"/>
-            <a:ext cx="1039500" cy="198000"/>
-          </a:xfrm>
-          <a:prstGeom prst="rect">
-            <a:avLst/>
-          </a:prstGeom>
-          <a:noFill/>
-        </p:spPr>
-        <p:txBody>
-          <a:bodyPr wrap="square" anchor="t" lIns="0" rIns="0" tIns="0" bIns="0">
-            <a:spAutoFit/>
-          </a:bodyPr>
-          <a:lstStyle/>
-          <a:p>
-            <a:pPr algn="ctr"/>
+            <a:pPr algn="l"/>
             <a:r>
               <a:rPr sz="1100" b="1">
                 <a:solidFill>
@@ -5584,20 +5701,57 @@
                 <a:ea typeface="맑은 고딕"/>
                 <a:cs typeface="맑은 고딕"/>
               </a:rPr>
-              <a:t>양재·하남</a:t>
-            </a:r>
-          </a:p>
-        </p:txBody>
-      </p:sp>
-      <p:sp>
-        <p:nvSpPr>
-          <p:cNvPr id="29" name="Oval 28"/>
+              <a:t>'26. 7월</a:t>
+            </a:r>
+          </a:p>
+        </p:txBody>
+      </p:sp>
+      <p:sp>
+        <p:nvSpPr>
+          <p:cNvPr id="26" name="TextBox 25"/>
+          <p:cNvSpPr txBox="1"/>
+          <p:nvPr/>
+        </p:nvSpPr>
+        <p:spPr>
+          <a:xfrm>
+            <a:off x="6944400" y="3618000"/>
+            <a:ext cx="2538000" cy="216000"/>
+          </a:xfrm>
+          <a:prstGeom prst="rect">
+            <a:avLst/>
+          </a:prstGeom>
+          <a:noFill/>
+        </p:spPr>
+        <p:txBody>
+          <a:bodyPr wrap="square" anchor="ctr" lIns="0" rIns="0" tIns="0" bIns="0">
+            <a:spAutoFit/>
+          </a:bodyPr>
+          <a:lstStyle/>
+          <a:p>
+            <a:pPr algn="l"/>
+            <a:r>
+              <a:rPr sz="1100" b="0">
+                <a:solidFill>
+                  <a:srgbClr val="000000"/>
+                </a:solidFill>
+                <a:latin typeface="맑은 고딕"/>
+                <a:ea typeface="맑은 고딕"/>
+                <a:cs typeface="맑은 고딕"/>
+              </a:rPr>
+              <a:t>양재·하남점 도입</a:t>
+            </a:r>
+          </a:p>
+        </p:txBody>
+      </p:sp>
+      <p:sp>
+        <p:nvSpPr>
+          <p:cNvPr id="27" name="Oval 26"/>
           <p:cNvSpPr/>
           <p:nvPr/>
         </p:nvSpPr>
         <p:spPr>
           <a:xfrm>
-            <a:off x="6710850" y="4428000"/>
+            <a:off x="5979600" y="4231200"/>
             <a:ext cx="93600" cy="93600"/>
           </a:xfrm>
           <a:prstGeom prst="ellipse">
@@ -5637,14 +5791,14 @@
       </p:sp>
       <p:sp>
         <p:nvSpPr>
-          <p:cNvPr id="30" name="TextBox 29"/>
+          <p:cNvPr id="28" name="TextBox 27"/>
           <p:cNvSpPr txBox="1"/>
           <p:nvPr/>
         </p:nvSpPr>
         <p:spPr>
           <a:xfrm>
-            <a:off x="6237900" y="4276800"/>
-            <a:ext cx="1039500" cy="162000"/>
+            <a:off x="6188399" y="4170000"/>
+            <a:ext cx="720000" cy="180000"/>
           </a:xfrm>
           <a:prstGeom prst="rect">
             <a:avLst/>
@@ -5652,49 +5806,12 @@
           <a:noFill/>
         </p:spPr>
         <p:txBody>
-          <a:bodyPr wrap="square" anchor="t" lIns="0" rIns="0" tIns="0" bIns="0">
+          <a:bodyPr wrap="square" anchor="ctr" lIns="0" rIns="0" tIns="0" bIns="0">
             <a:spAutoFit/>
           </a:bodyPr>
           <a:lstStyle/>
           <a:p>
-            <a:pPr algn="ctr"/>
-            <a:r>
-              <a:rPr sz="1000" b="1">
-                <a:solidFill>
-                  <a:srgbClr val="595959"/>
-                </a:solidFill>
-                <a:latin typeface="맑은 고딕"/>
-                <a:ea typeface="맑은 고딕"/>
-                <a:cs typeface="맑은 고딕"/>
-              </a:rPr>
-              <a:t>8월</a:t>
-            </a:r>
-          </a:p>
-        </p:txBody>
-      </p:sp>
-      <p:sp>
-        <p:nvSpPr>
-          <p:cNvPr id="31" name="TextBox 30"/>
-          <p:cNvSpPr txBox="1"/>
-          <p:nvPr/>
-        </p:nvSpPr>
-        <p:spPr>
-          <a:xfrm>
-            <a:off x="6237900" y="4546800"/>
-            <a:ext cx="1039500" cy="198000"/>
-          </a:xfrm>
-          <a:prstGeom prst="rect">
-            <a:avLst/>
-          </a:prstGeom>
-          <a:noFill/>
-        </p:spPr>
-        <p:txBody>
-          <a:bodyPr wrap="square" anchor="t" lIns="0" rIns="0" tIns="0" bIns="0">
-            <a:spAutoFit/>
-          </a:bodyPr>
-          <a:lstStyle/>
-          <a:p>
-            <a:pPr algn="ctr"/>
+            <a:pPr algn="l"/>
             <a:r>
               <a:rPr sz="1100" b="1">
                 <a:solidFill>
@@ -5704,13 +5821,50 @@
                 <a:ea typeface="맑은 고딕"/>
                 <a:cs typeface="맑은 고딕"/>
               </a:rPr>
-              <a:t>서울</a:t>
-            </a:r>
-          </a:p>
-          <a:p>
-            <a:pPr algn="ctr"/>
-            <a:r>
-              <a:rPr sz="1000" b="1">
+              <a:t>8월</a:t>
+            </a:r>
+          </a:p>
+        </p:txBody>
+      </p:sp>
+      <p:sp>
+        <p:nvSpPr>
+          <p:cNvPr id="29" name="TextBox 28"/>
+          <p:cNvSpPr txBox="1"/>
+          <p:nvPr/>
+        </p:nvSpPr>
+        <p:spPr>
+          <a:xfrm>
+            <a:off x="6944400" y="4170000"/>
+            <a:ext cx="2538000" cy="216000"/>
+          </a:xfrm>
+          <a:prstGeom prst="rect">
+            <a:avLst/>
+          </a:prstGeom>
+          <a:noFill/>
+        </p:spPr>
+        <p:txBody>
+          <a:bodyPr wrap="square" anchor="ctr" lIns="0" rIns="0" tIns="0" bIns="0">
+            <a:spAutoFit/>
+          </a:bodyPr>
+          <a:lstStyle/>
+          <a:p>
+            <a:pPr algn="l"/>
+            <a:r>
+              <a:rPr sz="1100" b="0">
+                <a:solidFill>
+                  <a:srgbClr val="000000"/>
+                </a:solidFill>
+                <a:latin typeface="맑은 고딕"/>
+                <a:ea typeface="맑은 고딕"/>
+                <a:cs typeface="맑은 고딕"/>
+              </a:rPr>
+              <a:t>서울 확대</a:t>
+            </a:r>
+          </a:p>
+          <a:p>
+            <a:pPr algn="l"/>
+            <a:r>
+              <a:rPr sz="1000" b="0">
                 <a:solidFill>
                   <a:srgbClr val="000000"/>
                 </a:solidFill>
@@ -5725,13 +5879,13 @@
       </p:sp>
       <p:sp>
         <p:nvSpPr>
-          <p:cNvPr id="32" name="Oval 31"/>
+          <p:cNvPr id="30" name="Oval 29"/>
           <p:cNvSpPr/>
           <p:nvPr/>
         </p:nvSpPr>
         <p:spPr>
           <a:xfrm>
-            <a:off x="7750350" y="4428000"/>
+            <a:off x="5979600" y="4783199"/>
             <a:ext cx="93600" cy="93600"/>
           </a:xfrm>
           <a:prstGeom prst="ellipse">
@@ -5771,14 +5925,14 @@
       </p:sp>
       <p:sp>
         <p:nvSpPr>
-          <p:cNvPr id="33" name="TextBox 32"/>
+          <p:cNvPr id="31" name="TextBox 30"/>
           <p:cNvSpPr txBox="1"/>
           <p:nvPr/>
         </p:nvSpPr>
         <p:spPr>
           <a:xfrm>
-            <a:off x="7277399" y="4276800"/>
-            <a:ext cx="1039500" cy="162000"/>
+            <a:off x="6188399" y="4721999"/>
+            <a:ext cx="720000" cy="180000"/>
           </a:xfrm>
           <a:prstGeom prst="rect">
             <a:avLst/>
@@ -5786,49 +5940,12 @@
           <a:noFill/>
         </p:spPr>
         <p:txBody>
-          <a:bodyPr wrap="square" anchor="t" lIns="0" rIns="0" tIns="0" bIns="0">
+          <a:bodyPr wrap="square" anchor="ctr" lIns="0" rIns="0" tIns="0" bIns="0">
             <a:spAutoFit/>
           </a:bodyPr>
           <a:lstStyle/>
           <a:p>
-            <a:pPr algn="ctr"/>
-            <a:r>
-              <a:rPr sz="1000" b="1">
-                <a:solidFill>
-                  <a:srgbClr val="595959"/>
-                </a:solidFill>
-                <a:latin typeface="맑은 고딕"/>
-                <a:ea typeface="맑은 고딕"/>
-                <a:cs typeface="맑은 고딕"/>
-              </a:rPr>
-              <a:t>9월</a:t>
-            </a:r>
-          </a:p>
-        </p:txBody>
-      </p:sp>
-      <p:sp>
-        <p:nvSpPr>
-          <p:cNvPr id="34" name="TextBox 33"/>
-          <p:cNvSpPr txBox="1"/>
-          <p:nvPr/>
-        </p:nvSpPr>
-        <p:spPr>
-          <a:xfrm>
-            <a:off x="7277399" y="4546800"/>
-            <a:ext cx="1039500" cy="198000"/>
-          </a:xfrm>
-          <a:prstGeom prst="rect">
-            <a:avLst/>
-          </a:prstGeom>
-          <a:noFill/>
-        </p:spPr>
-        <p:txBody>
-          <a:bodyPr wrap="square" anchor="t" lIns="0" rIns="0" tIns="0" bIns="0">
-            <a:spAutoFit/>
-          </a:bodyPr>
-          <a:lstStyle/>
-          <a:p>
-            <a:pPr algn="ctr"/>
+            <a:pPr algn="l"/>
             <a:r>
               <a:rPr sz="1100" b="1">
                 <a:solidFill>
@@ -5838,20 +5955,57 @@
                 <a:ea typeface="맑은 고딕"/>
                 <a:cs typeface="맑은 고딕"/>
               </a:rPr>
-              <a:t>전국</a:t>
-            </a:r>
-          </a:p>
-        </p:txBody>
-      </p:sp>
-      <p:sp>
-        <p:nvSpPr>
-          <p:cNvPr id="35" name="Oval 34"/>
+              <a:t>9월</a:t>
+            </a:r>
+          </a:p>
+        </p:txBody>
+      </p:sp>
+      <p:sp>
+        <p:nvSpPr>
+          <p:cNvPr id="32" name="TextBox 31"/>
+          <p:cNvSpPr txBox="1"/>
+          <p:nvPr/>
+        </p:nvSpPr>
+        <p:spPr>
+          <a:xfrm>
+            <a:off x="6944400" y="4721999"/>
+            <a:ext cx="2538000" cy="216000"/>
+          </a:xfrm>
+          <a:prstGeom prst="rect">
+            <a:avLst/>
+          </a:prstGeom>
+          <a:noFill/>
+        </p:spPr>
+        <p:txBody>
+          <a:bodyPr wrap="square" anchor="ctr" lIns="0" rIns="0" tIns="0" bIns="0">
+            <a:spAutoFit/>
+          </a:bodyPr>
+          <a:lstStyle/>
+          <a:p>
+            <a:pPr algn="l"/>
+            <a:r>
+              <a:rPr sz="1100" b="0">
+                <a:solidFill>
+                  <a:srgbClr val="000000"/>
+                </a:solidFill>
+                <a:latin typeface="맑은 고딕"/>
+                <a:ea typeface="맑은 고딕"/>
+                <a:cs typeface="맑은 고딕"/>
+              </a:rPr>
+              <a:t>전국 확대</a:t>
+            </a:r>
+          </a:p>
+        </p:txBody>
+      </p:sp>
+      <p:sp>
+        <p:nvSpPr>
+          <p:cNvPr id="33" name="Oval 32"/>
           <p:cNvSpPr/>
           <p:nvPr/>
         </p:nvSpPr>
         <p:spPr>
           <a:xfrm>
-            <a:off x="8789850" y="4428000"/>
+            <a:off x="5979600" y="5335199"/>
             <a:ext cx="93600" cy="93600"/>
           </a:xfrm>
           <a:prstGeom prst="ellipse">
@@ -5891,14 +6045,14 @@
       </p:sp>
       <p:sp>
         <p:nvSpPr>
-          <p:cNvPr id="36" name="TextBox 35"/>
+          <p:cNvPr id="34" name="TextBox 33"/>
           <p:cNvSpPr txBox="1"/>
           <p:nvPr/>
         </p:nvSpPr>
         <p:spPr>
           <a:xfrm>
-            <a:off x="8316900" y="4276800"/>
-            <a:ext cx="1039500" cy="162000"/>
+            <a:off x="6188399" y="5273999"/>
+            <a:ext cx="720000" cy="180000"/>
           </a:xfrm>
           <a:prstGeom prst="rect">
             <a:avLst/>
@@ -5906,49 +6060,12 @@
           <a:noFill/>
         </p:spPr>
         <p:txBody>
-          <a:bodyPr wrap="square" anchor="t" lIns="0" rIns="0" tIns="0" bIns="0">
+          <a:bodyPr wrap="square" anchor="ctr" lIns="0" rIns="0" tIns="0" bIns="0">
             <a:spAutoFit/>
           </a:bodyPr>
           <a:lstStyle/>
           <a:p>
-            <a:pPr algn="ctr"/>
-            <a:r>
-              <a:rPr sz="1000" b="1">
-                <a:solidFill>
-                  <a:srgbClr val="595959"/>
-                </a:solidFill>
-                <a:latin typeface="맑은 고딕"/>
-                <a:ea typeface="맑은 고딕"/>
-                <a:cs typeface="맑은 고딕"/>
-              </a:rPr>
-              <a:t>연말</a:t>
-            </a:r>
-          </a:p>
-        </p:txBody>
-      </p:sp>
-      <p:sp>
-        <p:nvSpPr>
-          <p:cNvPr id="37" name="TextBox 36"/>
-          <p:cNvSpPr txBox="1"/>
-          <p:nvPr/>
-        </p:nvSpPr>
-        <p:spPr>
-          <a:xfrm>
-            <a:off x="8316900" y="4546800"/>
-            <a:ext cx="1039500" cy="198000"/>
-          </a:xfrm>
-          <a:prstGeom prst="rect">
-            <a:avLst/>
-          </a:prstGeom>
-          <a:noFill/>
-        </p:spPr>
-        <p:txBody>
-          <a:bodyPr wrap="square" anchor="t" lIns="0" rIns="0" tIns="0" bIns="0">
-            <a:spAutoFit/>
-          </a:bodyPr>
-          <a:lstStyle/>
-          <a:p>
-            <a:pPr algn="ctr"/>
+            <a:pPr algn="l"/>
             <a:r>
               <a:rPr sz="1100" b="1">
                 <a:solidFill>
@@ -5958,21 +6075,58 @@
                 <a:ea typeface="맑은 고딕"/>
                 <a:cs typeface="맑은 고딕"/>
               </a:rPr>
-              <a:t>50여 점포</a:t>
-            </a:r>
-          </a:p>
-        </p:txBody>
-      </p:sp>
-      <p:sp>
-        <p:nvSpPr>
-          <p:cNvPr id="38" name="TextBox 37"/>
+              <a:t>연말</a:t>
+            </a:r>
+          </a:p>
+        </p:txBody>
+      </p:sp>
+      <p:sp>
+        <p:nvSpPr>
+          <p:cNvPr id="35" name="TextBox 34"/>
           <p:cNvSpPr txBox="1"/>
           <p:nvPr/>
         </p:nvSpPr>
         <p:spPr>
           <a:xfrm>
-            <a:off x="5072400" y="5533200"/>
-            <a:ext cx="4410000" cy="280800"/>
+            <a:off x="6944400" y="5273999"/>
+            <a:ext cx="2538000" cy="216000"/>
+          </a:xfrm>
+          <a:prstGeom prst="rect">
+            <a:avLst/>
+          </a:prstGeom>
+          <a:noFill/>
+        </p:spPr>
+        <p:txBody>
+          <a:bodyPr wrap="square" anchor="ctr" lIns="0" rIns="0" tIns="0" bIns="0">
+            <a:spAutoFit/>
+          </a:bodyPr>
+          <a:lstStyle/>
+          <a:p>
+            <a:pPr algn="l"/>
+            <a:r>
+              <a:rPr sz="1100" b="0">
+                <a:solidFill>
+                  <a:srgbClr val="000000"/>
+                </a:solidFill>
+                <a:latin typeface="맑은 고딕"/>
+                <a:ea typeface="맑은 고딕"/>
+                <a:cs typeface="맑은 고딕"/>
+              </a:rPr>
+              <a:t>50여 점포 운영</a:t>
+            </a:r>
+          </a:p>
+        </p:txBody>
+      </p:sp>
+      <p:sp>
+        <p:nvSpPr>
+          <p:cNvPr id="36" name="TextBox 35"/>
+          <p:cNvSpPr txBox="1"/>
+          <p:nvPr/>
+        </p:nvSpPr>
+        <p:spPr>
+          <a:xfrm>
+            <a:off x="5954400" y="5580000"/>
+            <a:ext cx="3528000" cy="251999"/>
           </a:xfrm>
           <a:prstGeom prst="rect">
             <a:avLst/>
@@ -6017,21 +6171,21 @@
                 <a:ea typeface="맑은 고딕"/>
                 <a:cs typeface="맑은 고딕"/>
               </a:rPr>
-              <a:t> 점포를 물류거점으로 재정의, 유휴 PP센터 가동률 활용</a:t>
-            </a:r>
-          </a:p>
-        </p:txBody>
-      </p:sp>
-      <p:sp>
-        <p:nvSpPr>
-          <p:cNvPr id="39" name="TextBox 38"/>
+              <a:t> 점포를 물류거점으로 재정의</a:t>
+            </a:r>
+          </a:p>
+        </p:txBody>
+      </p:sp>
+      <p:sp>
+        <p:nvSpPr>
+          <p:cNvPr id="37" name="TextBox 36"/>
           <p:cNvSpPr txBox="1"/>
           <p:nvPr/>
         </p:nvSpPr>
         <p:spPr>
           <a:xfrm>
-            <a:off x="5270400" y="5813999"/>
-            <a:ext cx="4212000" cy="280800"/>
+            <a:off x="6152400" y="5832000"/>
+            <a:ext cx="3330000" cy="251999"/>
           </a:xfrm>
           <a:prstGeom prst="rect">
             <a:avLst/>
@@ -6054,32 +6208,21 @@
                 <a:ea typeface="맑은 고딕"/>
                 <a:cs typeface="맑은 고딕"/>
               </a:rPr>
-              <a:t>- → 연말 50여 점 본격 확산 </a:t>
-            </a:r>
-            <a:r>
-              <a:rPr sz="1000" b="0">
-                <a:solidFill>
-                  <a:srgbClr val="000000"/>
-                </a:solidFill>
-                <a:latin typeface="맑은 고딕"/>
-                <a:ea typeface="맑은 고딕"/>
-                <a:cs typeface="맑은 고딕"/>
-              </a:rPr>
-              <a:t>(전국 즉시배송 기반 구축)</a:t>
+              <a:t>- → 유휴 PP센터 가동률 활용, 전국 즉시배송 기반 구축</a:t>
             </a:r>
           </a:p>
         </p:txBody>
       </p:sp>
       <p:cxnSp>
         <p:nvCxnSpPr>
-          <p:cNvPr id="40" name="Connector 39"/>
+          <p:cNvPr id="38" name="Connector 37"/>
           <p:cNvCxnSpPr/>
           <p:nvPr/>
         </p:nvCxnSpPr>
         <p:spPr>
           <a:xfrm>
-            <a:off x="4953600" y="1504800"/>
-            <a:ext cx="0" cy="4453200"/>
+            <a:off x="5835599" y="1504800"/>
+            <a:ext cx="0" cy="4525200"/>
           </a:xfrm>
           <a:prstGeom prst="bentConnector3">
             <a:avLst/>

--- a/reports/ssg-quickcommerce-onepager.pptx
+++ b/reports/ssg-quickcommerce-onepager.pptx
@@ -3131,7 +3131,7 @@
                 <a:ea typeface="맑은 고딕"/>
                 <a:cs typeface="맑은 고딕"/>
               </a:rPr>
-              <a:t>이마트 퀵커머스 '2시간 배송' 서비스 도입</a:t>
+              <a:t>이마트, 점포 물류거점化로 대용량 즉시배송 선점</a:t>
             </a:r>
           </a:p>
         </p:txBody>
@@ -3168,7 +3168,29 @@
                 <a:ea typeface="맑은 고딕"/>
                 <a:cs typeface="맑은 고딕"/>
               </a:rPr>
-              <a:t>■ 양재·하남점 시범 도입 — 점포 물류거점화로 대용량 즉시배송 공백 공략</a:t>
+              <a:t>■ '2시간 배송' 양재·하남 시범 </a:t>
+            </a:r>
+            <a:r>
+              <a:rPr sz="1300" b="1">
+                <a:solidFill>
+                  <a:srgbClr val="000000"/>
+                </a:solidFill>
+                <a:latin typeface="맑은 고딕"/>
+                <a:ea typeface="맑은 고딕"/>
+                <a:cs typeface="맑은 고딕"/>
+              </a:rPr>
+              <a:t>(7.9~)</a:t>
+            </a:r>
+            <a:r>
+              <a:rPr sz="1400" b="1">
+                <a:solidFill>
+                  <a:srgbClr val="000000"/>
+                </a:solidFill>
+                <a:latin typeface="맑은 고딕"/>
+                <a:ea typeface="맑은 고딕"/>
+                <a:cs typeface="맑은 고딕"/>
+              </a:rPr>
+              <a:t> → 연말 50여 점 · 유휴 PP센터 재활용 저비용 모델</a:t>
             </a:r>
           </a:p>
         </p:txBody>
@@ -3230,7 +3252,7 @@
         <p:spPr>
           <a:xfrm>
             <a:off x="424800" y="1504800"/>
-            <a:ext cx="5292000" cy="216000"/>
+            <a:ext cx="3528000" cy="230400"/>
           </a:xfrm>
           <a:prstGeom prst="rect">
             <a:avLst/>
@@ -3243,9 +3265,9 @@
           </a:bodyPr>
           <a:lstStyle/>
           <a:p>
-            <a:pPr algn="ctr"/>
-            <a:r>
-              <a:rPr sz="1400" b="1">
+            <a:pPr algn="l"/>
+            <a:r>
+              <a:rPr sz="1200" b="1">
                 <a:solidFill>
                   <a:srgbClr val="000000"/>
                 </a:solidFill>
@@ -3253,58 +3275,21 @@
                 <a:ea typeface="맑은 고딕"/>
                 <a:cs typeface="맑은 고딕"/>
               </a:rPr>
-              <a:t>현황 및 구조</a:t>
-            </a:r>
-          </a:p>
-        </p:txBody>
-      </p:sp>
-      <p:cxnSp>
-        <p:nvCxnSpPr>
-          <p:cNvPr id="6" name="Connector 5"/>
-          <p:cNvCxnSpPr/>
-          <p:nvPr/>
-        </p:nvCxnSpPr>
-        <p:spPr>
-          <a:xfrm>
-            <a:off x="424800" y="1789200"/>
-            <a:ext cx="5292000" cy="0"/>
-          </a:xfrm>
-          <a:prstGeom prst="bentConnector3">
-            <a:avLst/>
-          </a:prstGeom>
-          <a:ln w="19050">
-            <a:solidFill>
-              <a:srgbClr val="000000"/>
-            </a:solidFill>
-            <a:prstDash val="solid"/>
-          </a:ln>
-          <a:effectLst/>
-        </p:spPr>
-        <p:style>
-          <a:lnRef idx="2">
-            <a:schemeClr val="accent1"/>
-          </a:lnRef>
-          <a:fillRef idx="0">
-            <a:schemeClr val="accent1"/>
-          </a:fillRef>
-          <a:effectRef idx="1">
-            <a:schemeClr val="accent1"/>
-          </a:effectRef>
-          <a:fontRef idx="minor">
-            <a:schemeClr val="tx1"/>
-          </a:fontRef>
-        </p:style>
-      </p:cxnSp>
-      <p:sp>
-        <p:nvSpPr>
-          <p:cNvPr id="7" name="TextBox 6"/>
+              <a:t>• ① 도입 배경</a:t>
+            </a:r>
+          </a:p>
+        </p:txBody>
+      </p:sp>
+      <p:sp>
+        <p:nvSpPr>
+          <p:cNvPr id="6" name="TextBox 5"/>
           <p:cNvSpPr txBox="1"/>
           <p:nvPr/>
         </p:nvSpPr>
         <p:spPr>
           <a:xfrm>
-            <a:off x="424800" y="1962000"/>
-            <a:ext cx="5292000" cy="223200"/>
+            <a:off x="622800" y="1735199"/>
+            <a:ext cx="3330000" cy="230400"/>
           </a:xfrm>
           <a:prstGeom prst="rect">
             <a:avLst/>
@@ -3319,7 +3304,7 @@
           <a:p>
             <a:pPr algn="l"/>
             <a:r>
-              <a:rPr sz="1200" b="1">
+              <a:rPr sz="1100" b="0">
                 <a:solidFill>
                   <a:srgbClr val="000000"/>
                 </a:solidFill>
@@ -3327,66 +3312,7 @@
                 <a:ea typeface="맑은 고딕"/>
                 <a:cs typeface="맑은 고딕"/>
               </a:rPr>
-              <a:t>• 퀵커머스 수요 급증</a:t>
-            </a:r>
-          </a:p>
-        </p:txBody>
-      </p:sp>
-      <p:sp>
-        <p:nvSpPr>
-          <p:cNvPr id="8" name="TextBox 7"/>
-          <p:cNvSpPr txBox="1"/>
-          <p:nvPr/>
-        </p:nvSpPr>
-        <p:spPr>
-          <a:xfrm>
-            <a:off x="622800" y="2185200"/>
-            <a:ext cx="5093999" cy="223200"/>
-          </a:xfrm>
-          <a:prstGeom prst="rect">
-            <a:avLst/>
-          </a:prstGeom>
-          <a:noFill/>
-        </p:spPr>
-        <p:txBody>
-          <a:bodyPr wrap="square" anchor="t" lIns="0" rIns="0" tIns="0" bIns="0">
-            <a:spAutoFit/>
-          </a:bodyPr>
-          <a:lstStyle/>
-          <a:p>
-            <a:pPr algn="l"/>
-            <a:r>
-              <a:rPr sz="1100" b="0">
-                <a:solidFill>
-                  <a:srgbClr val="000000"/>
-                </a:solidFill>
-                <a:latin typeface="맑은 고딕"/>
-                <a:ea typeface="맑은 고딕"/>
-                <a:cs typeface="맑은 고딕"/>
-              </a:rPr>
-              <a:t>- 1시간 오토바이 배송 </a:t>
-            </a:r>
-            <a:r>
-              <a:rPr sz="1000" b="0">
-                <a:solidFill>
-                  <a:srgbClr val="000000"/>
-                </a:solidFill>
-                <a:latin typeface="맑은 고딕"/>
-                <a:ea typeface="맑은 고딕"/>
-                <a:cs typeface="맑은 고딕"/>
-              </a:rPr>
-              <a:t>(바로퀵)</a:t>
-            </a:r>
-            <a:r>
-              <a:rPr sz="1100" b="0">
-                <a:solidFill>
-                  <a:srgbClr val="000000"/>
-                </a:solidFill>
-                <a:latin typeface="맑은 고딕"/>
-                <a:ea typeface="맑은 고딕"/>
-                <a:cs typeface="맑은 고딕"/>
-              </a:rPr>
-              <a:t> 매출 197%↑ </a:t>
+              <a:t>- 바로퀵 매출 197%↑ </a:t>
             </a:r>
             <a:r>
               <a:rPr sz="1000" b="0">
@@ -3426,14 +3352,14 @@
       </p:sp>
       <p:sp>
         <p:nvSpPr>
-          <p:cNvPr id="9" name="TextBox 8"/>
+          <p:cNvPr id="7" name="TextBox 6"/>
           <p:cNvSpPr txBox="1"/>
           <p:nvPr/>
         </p:nvSpPr>
         <p:spPr>
           <a:xfrm>
-            <a:off x="622800" y="2408400"/>
-            <a:ext cx="5093999" cy="223200"/>
+            <a:off x="622800" y="1965599"/>
+            <a:ext cx="3330000" cy="230400"/>
           </a:xfrm>
           <a:prstGeom prst="rect">
             <a:avLst/>
@@ -3478,21 +3404,21 @@
                 <a:ea typeface="맑은 고딕"/>
                 <a:cs typeface="맑은 고딕"/>
               </a:rPr>
-              <a:t> B마트 등 즉시배송 시장 전반 대용량 품목 확대 추세</a:t>
-            </a:r>
-          </a:p>
-        </p:txBody>
-      </p:sp>
-      <p:sp>
-        <p:nvSpPr>
-          <p:cNvPr id="10" name="TextBox 9"/>
+              <a:t> B마트 등 대용량 품목 확대</a:t>
+            </a:r>
+          </a:p>
+        </p:txBody>
+      </p:sp>
+      <p:sp>
+        <p:nvSpPr>
+          <p:cNvPr id="8" name="TextBox 7"/>
           <p:cNvSpPr txBox="1"/>
           <p:nvPr/>
         </p:nvSpPr>
         <p:spPr>
           <a:xfrm>
-            <a:off x="424800" y="2732400"/>
-            <a:ext cx="5292000" cy="223200"/>
+            <a:off x="622800" y="2195999"/>
+            <a:ext cx="3330000" cy="230400"/>
           </a:xfrm>
           <a:prstGeom prst="rect">
             <a:avLst/>
@@ -3507,7 +3433,7 @@
           <a:p>
             <a:pPr algn="l"/>
             <a:r>
-              <a:rPr sz="1200" b="1">
+              <a:rPr sz="1100" b="0">
                 <a:solidFill>
                   <a:srgbClr val="000000"/>
                 </a:solidFill>
@@ -3515,59 +3441,22 @@
                 <a:ea typeface="맑은 고딕"/>
                 <a:cs typeface="맑은 고딕"/>
               </a:rPr>
-              <a:t>• 퀵커머스 서비스 이원화</a:t>
-            </a:r>
-          </a:p>
-        </p:txBody>
-      </p:sp>
-      <p:sp>
-        <p:nvSpPr>
-          <p:cNvPr id="11" name="TextBox 10"/>
-          <p:cNvSpPr txBox="1"/>
-          <p:nvPr/>
-        </p:nvSpPr>
-        <p:spPr>
-          <a:xfrm>
-            <a:off x="622800" y="2955600"/>
-            <a:ext cx="5093999" cy="223200"/>
-          </a:xfrm>
-          <a:prstGeom prst="rect">
-            <a:avLst/>
-          </a:prstGeom>
-          <a:noFill/>
-        </p:spPr>
-        <p:txBody>
-          <a:bodyPr wrap="square" anchor="t" lIns="0" rIns="0" tIns="0" bIns="0">
-            <a:spAutoFit/>
-          </a:bodyPr>
-          <a:lstStyle/>
-          <a:p>
-            <a:pPr algn="l"/>
-            <a:r>
-              <a:rPr sz="1100" b="0">
-                <a:solidFill>
-                  <a:srgbClr val="000000"/>
-                </a:solidFill>
-                <a:latin typeface="맑은 고딕"/>
-                <a:ea typeface="맑은 고딕"/>
-                <a:cs typeface="맑은 고딕"/>
-              </a:rPr>
-              <a:t>- 기존 바로퀵, 소량·즉석식 한정 → 대용량 즉시배송 공백</a:t>
+              <a:t>- 기존 라인업 '빠름 × 대용량' 부재</a:t>
             </a:r>
           </a:p>
         </p:txBody>
       </p:sp>
       <p:graphicFrame>
         <p:nvGraphicFramePr>
-          <p:cNvPr id="12" name="Table 11"/>
+          <p:cNvPr id="9" name="Table 8"/>
           <p:cNvGraphicFramePr>
             <a:graphicFrameLocks noGrp="1"/>
           </p:cNvGraphicFramePr>
           <p:nvPr/>
         </p:nvGraphicFramePr>
         <p:xfrm>
-          <a:off x="424800" y="3214800"/>
-          <a:ext cx="5093999" cy="1098000"/>
+          <a:off x="424800" y="2552399"/>
+          <a:ext cx="3528000" cy="3369600"/>
         </p:xfrm>
         <a:graphic>
           <a:graphicData uri="http://schemas.openxmlformats.org/drawingml/2006/table">
@@ -3576,11 +3465,11 @@
                 <a:tableStyleId>{5C22544A-7EE6-4342-B048-85BDC9FD1C3A}</a:tableStyleId>
               </a:tblPr>
               <a:tblGrid>
-                <a:gridCol w="1098000"/>
-                <a:gridCol w="1998000"/>
-                <a:gridCol w="1997999"/>
+                <a:gridCol w="1188000"/>
+                <a:gridCol w="1152000"/>
+                <a:gridCol w="1188000"/>
               </a:tblGrid>
-              <a:tr h="274500">
+              <a:tr h="561600">
                 <a:tc>
                   <a:txBody>
                     <a:bodyPr wrap="square"/>
@@ -3596,7 +3485,7 @@
                           <a:ea typeface="맑은 고딕"/>
                           <a:cs typeface="맑은 고딕"/>
                         </a:rPr>
-                        <a:t>구분</a:t>
+                        <a:t>서비스명</a:t>
                       </a:r>
                     </a:p>
                   </a:txBody>
@@ -3641,18 +3530,7 @@
                           <a:ea typeface="맑은 고딕"/>
                           <a:cs typeface="맑은 고딕"/>
                         </a:rPr>
-                        <a:t>1시간 배송 </a:t>
-                      </a:r>
-                      <a:r>
-                        <a:rPr sz="900" b="1">
-                          <a:solidFill>
-                            <a:srgbClr val="000000"/>
-                          </a:solidFill>
-                          <a:latin typeface="맑은 고딕"/>
-                          <a:ea typeface="맑은 고딕"/>
-                          <a:cs typeface="맑은 고딕"/>
-                        </a:rPr>
-                        <a:t>(바로퀵)</a:t>
+                        <a:t>속도</a:t>
                       </a:r>
                     </a:p>
                   </a:txBody>
@@ -3691,24 +3569,13 @@
                       <a:r>
                         <a:rPr sz="1000" b="1">
                           <a:solidFill>
-                            <a:srgbClr val="002060"/>
+                            <a:srgbClr val="000000"/>
                           </a:solidFill>
                           <a:latin typeface="맑은 고딕"/>
                           <a:ea typeface="맑은 고딕"/>
                           <a:cs typeface="맑은 고딕"/>
                         </a:rPr>
-                        <a:t>2시간 배송 </a:t>
-                      </a:r>
-                      <a:r>
-                        <a:rPr sz="900" b="1">
-                          <a:solidFill>
-                            <a:srgbClr val="002060"/>
-                          </a:solidFill>
-                          <a:latin typeface="맑은 고딕"/>
-                          <a:ea typeface="맑은 고딕"/>
-                          <a:cs typeface="맑은 고딕"/>
-                        </a:rPr>
-                        <a:t>(신규)</a:t>
+                        <a:t>물량</a:t>
                       </a:r>
                     </a:p>
                   </a:txBody>
@@ -3734,12 +3601,12 @@
                       </a:solidFill>
                     </a:lnB>
                     <a:solidFill>
-                      <a:srgbClr val="DEEBF7"/>
+                      <a:srgbClr val="EAEEF6"/>
                     </a:solidFill>
                   </a:tcPr>
                 </a:tc>
               </a:tr>
-              <a:tr h="274500">
+              <a:tr h="561600">
                 <a:tc>
                   <a:txBody>
                     <a:bodyPr wrap="square"/>
@@ -3755,7 +3622,7 @@
                           <a:ea typeface="맑은 고딕"/>
                           <a:cs typeface="맑은 고딕"/>
                         </a:rPr>
-                        <a:t>운송 수단</a:t>
+                        <a:t>주간배송</a:t>
                       </a:r>
                     </a:p>
                   </a:txBody>
@@ -3800,99 +3667,7 @@
                           <a:ea typeface="맑은 고딕"/>
                           <a:cs typeface="맑은 고딕"/>
                         </a:rPr>
-                        <a:t>이륜차</a:t>
-                      </a:r>
-                    </a:p>
-                  </a:txBody>
-                  <a:tcPr anchor="ctr" marL="36000" marR="36000" marT="0" marB="0">
-                    <a:lnL w="9525" cap="flat">
-                      <a:solidFill>
-                        <a:srgbClr val="BFBFBF"/>
-                      </a:solidFill>
-                    </a:lnL>
-                    <a:lnR w="9525" cap="flat">
-                      <a:solidFill>
-                        <a:srgbClr val="BFBFBF"/>
-                      </a:solidFill>
-                    </a:lnR>
-                    <a:lnT w="9525" cap="flat">
-                      <a:solidFill>
-                        <a:srgbClr val="BFBFBF"/>
-                      </a:solidFill>
-                    </a:lnT>
-                    <a:lnB w="9525" cap="flat">
-                      <a:solidFill>
-                        <a:srgbClr val="BFBFBF"/>
-                      </a:solidFill>
-                    </a:lnB>
-                    <a:solidFill>
-                      <a:srgbClr val="FFFFFF"/>
-                    </a:solidFill>
-                  </a:tcPr>
-                </a:tc>
-                <a:tc>
-                  <a:txBody>
-                    <a:bodyPr wrap="square"/>
-                    <a:lstStyle/>
-                    <a:p>
-                      <a:pPr algn="ctr"/>
-                      <a:r>
-                        <a:rPr sz="1000" b="1">
-                          <a:solidFill>
-                            <a:srgbClr val="002060"/>
-                          </a:solidFill>
-                          <a:latin typeface="맑은 고딕"/>
-                          <a:ea typeface="맑은 고딕"/>
-                          <a:cs typeface="맑은 고딕"/>
-                        </a:rPr>
-                        <a:t>사륜차</a:t>
-                      </a:r>
-                    </a:p>
-                  </a:txBody>
-                  <a:tcPr anchor="ctr" marL="36000" marR="36000" marT="0" marB="0">
-                    <a:lnL w="9525" cap="flat">
-                      <a:solidFill>
-                        <a:srgbClr val="BFBFBF"/>
-                      </a:solidFill>
-                    </a:lnL>
-                    <a:lnR w="9525" cap="flat">
-                      <a:solidFill>
-                        <a:srgbClr val="BFBFBF"/>
-                      </a:solidFill>
-                    </a:lnR>
-                    <a:lnT w="9525" cap="flat">
-                      <a:solidFill>
-                        <a:srgbClr val="BFBFBF"/>
-                      </a:solidFill>
-                    </a:lnT>
-                    <a:lnB w="9525" cap="flat">
-                      <a:solidFill>
-                        <a:srgbClr val="BFBFBF"/>
-                      </a:solidFill>
-                    </a:lnB>
-                    <a:solidFill>
-                      <a:srgbClr val="DEEBF7"/>
-                    </a:solidFill>
-                  </a:tcPr>
-                </a:tc>
-              </a:tr>
-              <a:tr h="274500">
-                <a:tc>
-                  <a:txBody>
-                    <a:bodyPr wrap="square"/>
-                    <a:lstStyle/>
-                    <a:p>
-                      <a:pPr algn="ctr"/>
-                      <a:r>
-                        <a:rPr sz="1000" b="1">
-                          <a:solidFill>
-                            <a:srgbClr val="000000"/>
-                          </a:solidFill>
-                          <a:latin typeface="맑은 고딕"/>
-                          <a:ea typeface="맑은 고딕"/>
-                          <a:cs typeface="맑은 고딕"/>
-                        </a:rPr>
-                        <a:t>취급 품목</a:t>
+                        <a:t>예약</a:t>
                       </a:r>
                     </a:p>
                   </a:txBody>
@@ -3937,7 +3712,7 @@
                           <a:ea typeface="맑은 고딕"/>
                           <a:cs typeface="맑은 고딕"/>
                         </a:rPr>
-                        <a:t>약 1만 종</a:t>
+                        <a:t>대용량</a:t>
                       </a:r>
                     </a:p>
                   </a:txBody>
@@ -3967,53 +3742,8 @@
                     </a:solidFill>
                   </a:tcPr>
                 </a:tc>
-                <a:tc>
-                  <a:txBody>
-                    <a:bodyPr wrap="square"/>
-                    <a:lstStyle/>
-                    <a:p>
-                      <a:pPr algn="ctr"/>
-                      <a:r>
-                        <a:rPr sz="1000" b="1">
-                          <a:solidFill>
-                            <a:srgbClr val="002060"/>
-                          </a:solidFill>
-                          <a:latin typeface="맑은 고딕"/>
-                          <a:ea typeface="맑은 고딕"/>
-                          <a:cs typeface="맑은 고딕"/>
-                        </a:rPr>
-                        <a:t>약 15만 종</a:t>
-                      </a:r>
-                    </a:p>
-                  </a:txBody>
-                  <a:tcPr anchor="ctr" marL="36000" marR="36000" marT="0" marB="0">
-                    <a:lnL w="9525" cap="flat">
-                      <a:solidFill>
-                        <a:srgbClr val="BFBFBF"/>
-                      </a:solidFill>
-                    </a:lnL>
-                    <a:lnR w="9525" cap="flat">
-                      <a:solidFill>
-                        <a:srgbClr val="BFBFBF"/>
-                      </a:solidFill>
-                    </a:lnR>
-                    <a:lnT w="9525" cap="flat">
-                      <a:solidFill>
-                        <a:srgbClr val="BFBFBF"/>
-                      </a:solidFill>
-                    </a:lnT>
-                    <a:lnB w="9525" cap="flat">
-                      <a:solidFill>
-                        <a:srgbClr val="BFBFBF"/>
-                      </a:solidFill>
-                    </a:lnB>
-                    <a:solidFill>
-                      <a:srgbClr val="DEEBF7"/>
-                    </a:solidFill>
-                  </a:tcPr>
-                </a:tc>
               </a:tr>
-              <a:tr h="274500">
+              <a:tr h="561600">
                 <a:tc>
                   <a:txBody>
                     <a:bodyPr wrap="square"/>
@@ -4029,7 +3759,7 @@
                           <a:ea typeface="맑은 고딕"/>
                           <a:cs typeface="맑은 고딕"/>
                         </a:rPr>
-                        <a:t>주 용도</a:t>
+                        <a:t>새벽배송</a:t>
                       </a:r>
                     </a:p>
                   </a:txBody>
@@ -4074,156 +3804,10 @@
                           <a:ea typeface="맑은 고딕"/>
                           <a:cs typeface="맑은 고딕"/>
                         </a:rPr>
-                        <a:t>소량·즉석식</a:t>
+                        <a:t>예약 </a:t>
                       </a:r>
-                    </a:p>
-                  </a:txBody>
-                  <a:tcPr anchor="ctr" marL="36000" marR="36000" marT="0" marB="0">
-                    <a:lnL w="9525" cap="flat">
-                      <a:solidFill>
-                        <a:srgbClr val="BFBFBF"/>
-                      </a:solidFill>
-                    </a:lnL>
-                    <a:lnR w="9525" cap="flat">
-                      <a:solidFill>
-                        <a:srgbClr val="BFBFBF"/>
-                      </a:solidFill>
-                    </a:lnR>
-                    <a:lnT w="9525" cap="flat">
-                      <a:solidFill>
-                        <a:srgbClr val="BFBFBF"/>
-                      </a:solidFill>
-                    </a:lnT>
-                    <a:lnB w="9525" cap="flat">
-                      <a:solidFill>
-                        <a:srgbClr val="BFBFBF"/>
-                      </a:solidFill>
-                    </a:lnB>
-                    <a:solidFill>
-                      <a:srgbClr val="FFFFFF"/>
-                    </a:solidFill>
-                  </a:tcPr>
-                </a:tc>
-                <a:tc>
-                  <a:txBody>
-                    <a:bodyPr wrap="square"/>
-                    <a:lstStyle/>
-                    <a:p>
-                      <a:pPr algn="ctr"/>
                       <a:r>
-                        <a:rPr sz="1000" b="1">
-                          <a:solidFill>
-                            <a:srgbClr val="002060"/>
-                          </a:solidFill>
-                          <a:latin typeface="맑은 고딕"/>
-                          <a:ea typeface="맑은 고딕"/>
-                          <a:cs typeface="맑은 고딕"/>
-                        </a:rPr>
-                        <a:t>대용량 장보기</a:t>
-                      </a:r>
-                    </a:p>
-                  </a:txBody>
-                  <a:tcPr anchor="ctr" marL="36000" marR="36000" marT="0" marB="0">
-                    <a:lnL w="9525" cap="flat">
-                      <a:solidFill>
-                        <a:srgbClr val="BFBFBF"/>
-                      </a:solidFill>
-                    </a:lnL>
-                    <a:lnR w="9525" cap="flat">
-                      <a:solidFill>
-                        <a:srgbClr val="BFBFBF"/>
-                      </a:solidFill>
-                    </a:lnR>
-                    <a:lnT w="9525" cap="flat">
-                      <a:solidFill>
-                        <a:srgbClr val="BFBFBF"/>
-                      </a:solidFill>
-                    </a:lnT>
-                    <a:lnB w="9525" cap="flat">
-                      <a:solidFill>
-                        <a:srgbClr val="BFBFBF"/>
-                      </a:solidFill>
-                    </a:lnB>
-                    <a:solidFill>
-                      <a:srgbClr val="DEEBF7"/>
-                    </a:solidFill>
-                  </a:tcPr>
-                </a:tc>
-              </a:tr>
-            </a:tbl>
-          </a:graphicData>
-        </a:graphic>
-      </p:graphicFrame>
-      <p:sp>
-        <p:nvSpPr>
-          <p:cNvPr id="13" name="TextBox 12"/>
-          <p:cNvSpPr txBox="1"/>
-          <p:nvPr/>
-        </p:nvSpPr>
-        <p:spPr>
-          <a:xfrm>
-            <a:off x="424800" y="4456800"/>
-            <a:ext cx="5292000" cy="223200"/>
-          </a:xfrm>
-          <a:prstGeom prst="rect">
-            <a:avLst/>
-          </a:prstGeom>
-          <a:noFill/>
-        </p:spPr>
-        <p:txBody>
-          <a:bodyPr wrap="square" anchor="t" lIns="0" rIns="0" tIns="0" bIns="0">
-            <a:spAutoFit/>
-          </a:bodyPr>
-          <a:lstStyle/>
-          <a:p>
-            <a:pPr algn="l"/>
-            <a:r>
-              <a:rPr sz="1200" b="1">
-                <a:solidFill>
-                  <a:srgbClr val="000000"/>
-                </a:solidFill>
-                <a:latin typeface="맑은 고딕"/>
-                <a:ea typeface="맑은 고딕"/>
-                <a:cs typeface="맑은 고딕"/>
-              </a:rPr>
-              <a:t>• 이마트 배송 라인업</a:t>
-            </a:r>
-          </a:p>
-        </p:txBody>
-      </p:sp>
-      <p:graphicFrame>
-        <p:nvGraphicFramePr>
-          <p:cNvPr id="14" name="Table 13"/>
-          <p:cNvGraphicFramePr>
-            <a:graphicFrameLocks noGrp="1"/>
-          </p:cNvGraphicFramePr>
-          <p:nvPr/>
-        </p:nvGraphicFramePr>
-        <p:xfrm>
-          <a:off x="424800" y="4716000"/>
-          <a:ext cx="5093998" cy="1313999"/>
-        </p:xfrm>
-        <a:graphic>
-          <a:graphicData uri="http://schemas.openxmlformats.org/drawingml/2006/table">
-            <a:tbl>
-              <a:tblPr>
-                <a:tableStyleId>{5C22544A-7EE6-4342-B048-85BDC9FD1C3A}</a:tableStyleId>
-              </a:tblPr>
-              <a:tblGrid>
-                <a:gridCol w="756000"/>
-                <a:gridCol w="1655999"/>
-                <a:gridCol w="1548000"/>
-                <a:gridCol w="1133999"/>
-              </a:tblGrid>
-              <a:tr h="218999">
-                <a:tc>
-                  <a:txBody>
-                    <a:bodyPr wrap="square"/>
-                    <a:lstStyle/>
-                    <a:p>
-                      <a:pPr algn="ctr"/>
-                      <a:r>
-                        <a:rPr sz="1000" b="1">
+                        <a:rPr sz="900" b="0">
                           <a:solidFill>
                             <a:srgbClr val="000000"/>
                           </a:solidFill>
@@ -4231,234 +3815,7 @@
                           <a:ea typeface="맑은 고딕"/>
                           <a:cs typeface="맑은 고딕"/>
                         </a:rPr>
-                        <a:t>구분</a:t>
-                      </a:r>
-                    </a:p>
-                  </a:txBody>
-                  <a:tcPr anchor="ctr" marL="36000" marR="36000" marT="0" marB="0">
-                    <a:lnL w="9525" cap="flat">
-                      <a:solidFill>
-                        <a:srgbClr val="BFBFBF"/>
-                      </a:solidFill>
-                    </a:lnL>
-                    <a:lnR w="9525" cap="flat">
-                      <a:solidFill>
-                        <a:srgbClr val="BFBFBF"/>
-                      </a:solidFill>
-                    </a:lnR>
-                    <a:lnT w="9525" cap="flat">
-                      <a:solidFill>
-                        <a:srgbClr val="BFBFBF"/>
-                      </a:solidFill>
-                    </a:lnT>
-                    <a:lnB w="9525" cap="flat">
-                      <a:solidFill>
-                        <a:srgbClr val="BFBFBF"/>
-                      </a:solidFill>
-                    </a:lnB>
-                    <a:solidFill>
-                      <a:srgbClr val="EAEEF6"/>
-                    </a:solidFill>
-                  </a:tcPr>
-                </a:tc>
-                <a:tc>
-                  <a:txBody>
-                    <a:bodyPr wrap="square"/>
-                    <a:lstStyle/>
-                    <a:p>
-                      <a:pPr algn="ctr"/>
-                      <a:r>
-                        <a:rPr sz="1000" b="1">
-                          <a:solidFill>
-                            <a:srgbClr val="000000"/>
-                          </a:solidFill>
-                          <a:latin typeface="맑은 고딕"/>
-                          <a:ea typeface="맑은 고딕"/>
-                          <a:cs typeface="맑은 고딕"/>
-                        </a:rPr>
-                        <a:t>서비스명</a:t>
-                      </a:r>
-                    </a:p>
-                  </a:txBody>
-                  <a:tcPr anchor="ctr" marL="36000" marR="36000" marT="0" marB="0">
-                    <a:lnL w="9525" cap="flat">
-                      <a:solidFill>
-                        <a:srgbClr val="BFBFBF"/>
-                      </a:solidFill>
-                    </a:lnL>
-                    <a:lnR w="9525" cap="flat">
-                      <a:solidFill>
-                        <a:srgbClr val="BFBFBF"/>
-                      </a:solidFill>
-                    </a:lnR>
-                    <a:lnT w="9525" cap="flat">
-                      <a:solidFill>
-                        <a:srgbClr val="BFBFBF"/>
-                      </a:solidFill>
-                    </a:lnT>
-                    <a:lnB w="9525" cap="flat">
-                      <a:solidFill>
-                        <a:srgbClr val="BFBFBF"/>
-                      </a:solidFill>
-                    </a:lnB>
-                    <a:solidFill>
-                      <a:srgbClr val="EAEEF6"/>
-                    </a:solidFill>
-                  </a:tcPr>
-                </a:tc>
-                <a:tc>
-                  <a:txBody>
-                    <a:bodyPr wrap="square"/>
-                    <a:lstStyle/>
-                    <a:p>
-                      <a:pPr algn="ctr"/>
-                      <a:r>
-                        <a:rPr sz="1000" b="1">
-                          <a:solidFill>
-                            <a:srgbClr val="000000"/>
-                          </a:solidFill>
-                          <a:latin typeface="맑은 고딕"/>
-                          <a:ea typeface="맑은 고딕"/>
-                          <a:cs typeface="맑은 고딕"/>
-                        </a:rPr>
-                        <a:t>피킹·패킹 거점</a:t>
-                      </a:r>
-                    </a:p>
-                  </a:txBody>
-                  <a:tcPr anchor="ctr" marL="36000" marR="36000" marT="0" marB="0">
-                    <a:lnL w="9525" cap="flat">
-                      <a:solidFill>
-                        <a:srgbClr val="BFBFBF"/>
-                      </a:solidFill>
-                    </a:lnL>
-                    <a:lnR w="9525" cap="flat">
-                      <a:solidFill>
-                        <a:srgbClr val="BFBFBF"/>
-                      </a:solidFill>
-                    </a:lnR>
-                    <a:lnT w="9525" cap="flat">
-                      <a:solidFill>
-                        <a:srgbClr val="BFBFBF"/>
-                      </a:solidFill>
-                    </a:lnT>
-                    <a:lnB w="9525" cap="flat">
-                      <a:solidFill>
-                        <a:srgbClr val="BFBFBF"/>
-                      </a:solidFill>
-                    </a:lnB>
-                    <a:solidFill>
-                      <a:srgbClr val="EAEEF6"/>
-                    </a:solidFill>
-                  </a:tcPr>
-                </a:tc>
-                <a:tc>
-                  <a:txBody>
-                    <a:bodyPr wrap="square"/>
-                    <a:lstStyle/>
-                    <a:p>
-                      <a:pPr algn="ctr"/>
-                      <a:r>
-                        <a:rPr sz="1000" b="1">
-                          <a:solidFill>
-                            <a:srgbClr val="000000"/>
-                          </a:solidFill>
-                          <a:latin typeface="맑은 고딕"/>
-                          <a:ea typeface="맑은 고딕"/>
-                          <a:cs typeface="맑은 고딕"/>
-                        </a:rPr>
-                        <a:t>취급 규모</a:t>
-                      </a:r>
-                    </a:p>
-                  </a:txBody>
-                  <a:tcPr anchor="ctr" marL="36000" marR="36000" marT="0" marB="0">
-                    <a:lnL w="9525" cap="flat">
-                      <a:solidFill>
-                        <a:srgbClr val="BFBFBF"/>
-                      </a:solidFill>
-                    </a:lnL>
-                    <a:lnR w="9525" cap="flat">
-                      <a:solidFill>
-                        <a:srgbClr val="BFBFBF"/>
-                      </a:solidFill>
-                    </a:lnR>
-                    <a:lnT w="9525" cap="flat">
-                      <a:solidFill>
-                        <a:srgbClr val="BFBFBF"/>
-                      </a:solidFill>
-                    </a:lnT>
-                    <a:lnB w="9525" cap="flat">
-                      <a:solidFill>
-                        <a:srgbClr val="BFBFBF"/>
-                      </a:solidFill>
-                    </a:lnB>
-                    <a:solidFill>
-                      <a:srgbClr val="EAEEF6"/>
-                    </a:solidFill>
-                  </a:tcPr>
-                </a:tc>
-              </a:tr>
-              <a:tr h="218999">
-                <a:tc rowSpan="3">
-                  <a:txBody>
-                    <a:bodyPr wrap="square"/>
-                    <a:lstStyle/>
-                    <a:p>
-                      <a:pPr algn="ctr"/>
-                      <a:r>
-                        <a:rPr sz="1000" b="1">
-                          <a:solidFill>
-                            <a:srgbClr val="000000"/>
-                          </a:solidFill>
-                          <a:latin typeface="맑은 고딕"/>
-                          <a:ea typeface="맑은 고딕"/>
-                          <a:cs typeface="맑은 고딕"/>
-                        </a:rPr>
-                        <a:t>예약배송</a:t>
-                      </a:r>
-                    </a:p>
-                  </a:txBody>
-                  <a:tcPr anchor="ctr" marL="36000" marR="36000" marT="0" marB="0">
-                    <a:lnL w="9525" cap="flat">
-                      <a:solidFill>
-                        <a:srgbClr val="BFBFBF"/>
-                      </a:solidFill>
-                    </a:lnL>
-                    <a:lnR w="9525" cap="flat">
-                      <a:solidFill>
-                        <a:srgbClr val="BFBFBF"/>
-                      </a:solidFill>
-                    </a:lnR>
-                    <a:lnT w="9525" cap="flat">
-                      <a:solidFill>
-                        <a:srgbClr val="BFBFBF"/>
-                      </a:solidFill>
-                    </a:lnT>
-                    <a:lnB w="9525" cap="flat">
-                      <a:solidFill>
-                        <a:srgbClr val="BFBFBF"/>
-                      </a:solidFill>
-                    </a:lnB>
-                    <a:solidFill>
-                      <a:srgbClr val="FFFFFF"/>
-                    </a:solidFill>
-                  </a:tcPr>
-                </a:tc>
-                <a:tc>
-                  <a:txBody>
-                    <a:bodyPr wrap="square"/>
-                    <a:lstStyle/>
-                    <a:p>
-                      <a:pPr algn="ctr"/>
-                      <a:r>
-                        <a:rPr sz="1000" b="1">
-                          <a:solidFill>
-                            <a:srgbClr val="000000"/>
-                          </a:solidFill>
-                          <a:latin typeface="맑은 고딕"/>
-                          <a:ea typeface="맑은 고딕"/>
-                          <a:cs typeface="맑은 고딕"/>
-                        </a:rPr>
-                        <a:t>주간배송</a:t>
+                        <a:t>(새벽)</a:t>
                       </a:r>
                     </a:p>
                   </a:txBody>
@@ -4503,51 +3860,6 @@
                           <a:ea typeface="맑은 고딕"/>
                           <a:cs typeface="맑은 고딕"/>
                         </a:rPr>
-                        <a:t>센터+점포</a:t>
-                      </a:r>
-                    </a:p>
-                  </a:txBody>
-                  <a:tcPr anchor="ctr" marL="36000" marR="36000" marT="0" marB="0">
-                    <a:lnL w="9525" cap="flat">
-                      <a:solidFill>
-                        <a:srgbClr val="BFBFBF"/>
-                      </a:solidFill>
-                    </a:lnL>
-                    <a:lnR w="9525" cap="flat">
-                      <a:solidFill>
-                        <a:srgbClr val="BFBFBF"/>
-                      </a:solidFill>
-                    </a:lnR>
-                    <a:lnT w="9525" cap="flat">
-                      <a:solidFill>
-                        <a:srgbClr val="BFBFBF"/>
-                      </a:solidFill>
-                    </a:lnT>
-                    <a:lnB w="9525" cap="flat">
-                      <a:solidFill>
-                        <a:srgbClr val="BFBFBF"/>
-                      </a:solidFill>
-                    </a:lnB>
-                    <a:solidFill>
-                      <a:srgbClr val="FFFFFF"/>
-                    </a:solidFill>
-                  </a:tcPr>
-                </a:tc>
-                <a:tc rowSpan="3">
-                  <a:txBody>
-                    <a:bodyPr wrap="square"/>
-                    <a:lstStyle/>
-                    <a:p>
-                      <a:pPr algn="ctr"/>
-                      <a:r>
-                        <a:rPr sz="1000" b="0">
-                          <a:solidFill>
-                            <a:srgbClr val="000000"/>
-                          </a:solidFill>
-                          <a:latin typeface="맑은 고딕"/>
-                          <a:ea typeface="맑은 고딕"/>
-                          <a:cs typeface="맑은 고딕"/>
-                        </a:rPr>
                         <a:t>대용량</a:t>
                       </a:r>
                     </a:p>
@@ -4579,39 +3891,7 @@
                   </a:tcPr>
                 </a:tc>
               </a:tr>
-              <a:tr h="218999">
-                <a:tc vMerge="1">
-                  <a:txBody>
-                    <a:bodyPr wrap="square"/>
-                    <a:lstStyle/>
-                    <a:p/>
-                  </a:txBody>
-                  <a:tcPr anchor="ctr" marL="36000" marR="36000" marT="0" marB="0">
-                    <a:lnL w="9525" cap="flat">
-                      <a:solidFill>
-                        <a:srgbClr val="BFBFBF"/>
-                      </a:solidFill>
-                    </a:lnL>
-                    <a:lnR w="9525" cap="flat">
-                      <a:solidFill>
-                        <a:srgbClr val="BFBFBF"/>
-                      </a:solidFill>
-                    </a:lnR>
-                    <a:lnT w="9525" cap="flat">
-                      <a:solidFill>
-                        <a:srgbClr val="BFBFBF"/>
-                      </a:solidFill>
-                    </a:lnT>
-                    <a:lnB w="9525" cap="flat">
-                      <a:solidFill>
-                        <a:srgbClr val="BFBFBF"/>
-                      </a:solidFill>
-                    </a:lnB>
-                    <a:solidFill>
-                      <a:srgbClr val="FFFFFF"/>
-                    </a:solidFill>
-                  </a:tcPr>
-                </a:tc>
+              <a:tr h="561600">
                 <a:tc>
                   <a:txBody>
                     <a:bodyPr wrap="square"/>
@@ -4627,7 +3907,7 @@
                           <a:ea typeface="맑은 고딕"/>
                           <a:cs typeface="맑은 고딕"/>
                         </a:rPr>
-                        <a:t>새벽배송</a:t>
+                        <a:t>트레이더스</a:t>
                       </a:r>
                     </a:p>
                   </a:txBody>
@@ -4672,118 +3952,7 @@
                           <a:ea typeface="맑은 고딕"/>
                           <a:cs typeface="맑은 고딕"/>
                         </a:rPr>
-                        <a:t>센터</a:t>
-                      </a:r>
-                    </a:p>
-                  </a:txBody>
-                  <a:tcPr anchor="ctr" marL="36000" marR="36000" marT="0" marB="0">
-                    <a:lnL w="9525" cap="flat">
-                      <a:solidFill>
-                        <a:srgbClr val="BFBFBF"/>
-                      </a:solidFill>
-                    </a:lnL>
-                    <a:lnR w="9525" cap="flat">
-                      <a:solidFill>
-                        <a:srgbClr val="BFBFBF"/>
-                      </a:solidFill>
-                    </a:lnR>
-                    <a:lnT w="9525" cap="flat">
-                      <a:solidFill>
-                        <a:srgbClr val="BFBFBF"/>
-                      </a:solidFill>
-                    </a:lnT>
-                    <a:lnB w="9525" cap="flat">
-                      <a:solidFill>
-                        <a:srgbClr val="BFBFBF"/>
-                      </a:solidFill>
-                    </a:lnB>
-                    <a:solidFill>
-                      <a:srgbClr val="FFFFFF"/>
-                    </a:solidFill>
-                  </a:tcPr>
-                </a:tc>
-                <a:tc vMerge="1">
-                  <a:txBody>
-                    <a:bodyPr wrap="square"/>
-                    <a:lstStyle/>
-                    <a:p/>
-                  </a:txBody>
-                  <a:tcPr anchor="ctr" marL="36000" marR="36000" marT="0" marB="0">
-                    <a:lnL w="9525" cap="flat">
-                      <a:solidFill>
-                        <a:srgbClr val="BFBFBF"/>
-                      </a:solidFill>
-                    </a:lnL>
-                    <a:lnR w="9525" cap="flat">
-                      <a:solidFill>
-                        <a:srgbClr val="BFBFBF"/>
-                      </a:solidFill>
-                    </a:lnR>
-                    <a:lnT w="9525" cap="flat">
-                      <a:solidFill>
-                        <a:srgbClr val="BFBFBF"/>
-                      </a:solidFill>
-                    </a:lnT>
-                    <a:lnB w="9525" cap="flat">
-                      <a:solidFill>
-                        <a:srgbClr val="BFBFBF"/>
-                      </a:solidFill>
-                    </a:lnB>
-                    <a:solidFill>
-                      <a:srgbClr val="FFFFFF"/>
-                    </a:solidFill>
-                  </a:tcPr>
-                </a:tc>
-              </a:tr>
-              <a:tr h="218999">
-                <a:tc vMerge="1">
-                  <a:txBody>
-                    <a:bodyPr wrap="square"/>
-                    <a:lstStyle/>
-                    <a:p/>
-                  </a:txBody>
-                  <a:tcPr anchor="ctr" marL="36000" marR="36000" marT="0" marB="0">
-                    <a:lnL w="9525" cap="flat">
-                      <a:solidFill>
-                        <a:srgbClr val="BFBFBF"/>
-                      </a:solidFill>
-                    </a:lnL>
-                    <a:lnR w="9525" cap="flat">
-                      <a:solidFill>
-                        <a:srgbClr val="BFBFBF"/>
-                      </a:solidFill>
-                    </a:lnR>
-                    <a:lnT w="9525" cap="flat">
-                      <a:solidFill>
-                        <a:srgbClr val="BFBFBF"/>
-                      </a:solidFill>
-                    </a:lnT>
-                    <a:lnB w="9525" cap="flat">
-                      <a:solidFill>
-                        <a:srgbClr val="BFBFBF"/>
-                      </a:solidFill>
-                    </a:lnB>
-                    <a:solidFill>
-                      <a:srgbClr val="FFFFFF"/>
-                    </a:solidFill>
-                  </a:tcPr>
-                </a:tc>
-                <a:tc>
-                  <a:txBody>
-                    <a:bodyPr wrap="square"/>
-                    <a:lstStyle/>
-                    <a:p>
-                      <a:pPr algn="ctr"/>
-                      <a:r>
-                        <a:rPr sz="1000" b="1">
-                          <a:solidFill>
-                            <a:srgbClr val="000000"/>
-                          </a:solidFill>
-                          <a:latin typeface="맑은 고딕"/>
-                          <a:ea typeface="맑은 고딕"/>
-                          <a:cs typeface="맑은 고딕"/>
-                        </a:rPr>
-                        <a:t>트레이더스 배송</a:t>
+                        <a:t>예약</a:t>
                       </a:r>
                     </a:p>
                   </a:txBody>
@@ -4828,41 +3997,9 @@
                           <a:ea typeface="맑은 고딕"/>
                           <a:cs typeface="맑은 고딕"/>
                         </a:rPr>
-                        <a:t>점포</a:t>
+                        <a:t>대용량</a:t>
                       </a:r>
                     </a:p>
-                  </a:txBody>
-                  <a:tcPr anchor="ctr" marL="36000" marR="36000" marT="0" marB="0">
-                    <a:lnL w="9525" cap="flat">
-                      <a:solidFill>
-                        <a:srgbClr val="BFBFBF"/>
-                      </a:solidFill>
-                    </a:lnL>
-                    <a:lnR w="9525" cap="flat">
-                      <a:solidFill>
-                        <a:srgbClr val="BFBFBF"/>
-                      </a:solidFill>
-                    </a:lnR>
-                    <a:lnT w="9525" cap="flat">
-                      <a:solidFill>
-                        <a:srgbClr val="BFBFBF"/>
-                      </a:solidFill>
-                    </a:lnT>
-                    <a:lnB w="9525" cap="flat">
-                      <a:solidFill>
-                        <a:srgbClr val="BFBFBF"/>
-                      </a:solidFill>
-                    </a:lnB>
-                    <a:solidFill>
-                      <a:srgbClr val="FFFFFF"/>
-                    </a:solidFill>
-                  </a:tcPr>
-                </a:tc>
-                <a:tc vMerge="1">
-                  <a:txBody>
-                    <a:bodyPr wrap="square"/>
-                    <a:lstStyle/>
-                    <a:p/>
                   </a:txBody>
                   <a:tcPr anchor="ctr" marL="36000" marR="36000" marT="0" marB="0">
                     <a:lnL w="9525" cap="flat">
@@ -4891,52 +4028,7 @@
                   </a:tcPr>
                 </a:tc>
               </a:tr>
-              <a:tr h="218999">
-                <a:tc rowSpan="2">
-                  <a:txBody>
-                    <a:bodyPr wrap="square"/>
-                    <a:lstStyle/>
-                    <a:p>
-                      <a:pPr algn="ctr"/>
-                      <a:r>
-                        <a:rPr sz="1000" b="1">
-                          <a:solidFill>
-                            <a:srgbClr val="000000"/>
-                          </a:solidFill>
-                          <a:latin typeface="맑은 고딕"/>
-                          <a:ea typeface="맑은 고딕"/>
-                          <a:cs typeface="맑은 고딕"/>
-                        </a:rPr>
-                        <a:t>퀵커머스</a:t>
-                      </a:r>
-                    </a:p>
-                  </a:txBody>
-                  <a:tcPr anchor="ctr" marL="36000" marR="36000" marT="0" marB="0">
-                    <a:lnL w="9525" cap="flat">
-                      <a:solidFill>
-                        <a:srgbClr val="BFBFBF"/>
-                      </a:solidFill>
-                    </a:lnL>
-                    <a:lnR w="9525" cap="flat">
-                      <a:solidFill>
-                        <a:srgbClr val="BFBFBF"/>
-                      </a:solidFill>
-                    </a:lnR>
-                    <a:lnT w="9525" cap="flat">
-                      <a:solidFill>
-                        <a:srgbClr val="BFBFBF"/>
-                      </a:solidFill>
-                    </a:lnT>
-                    <a:lnB w="9525" cap="flat">
-                      <a:solidFill>
-                        <a:srgbClr val="BFBFBF"/>
-                      </a:solidFill>
-                    </a:lnB>
-                    <a:solidFill>
-                      <a:srgbClr val="FFFFFF"/>
-                    </a:solidFill>
-                  </a:tcPr>
-                </a:tc>
+              <a:tr h="561600">
                 <a:tc>
                   <a:txBody>
                     <a:bodyPr wrap="square"/>
@@ -4952,18 +4044,7 @@
                           <a:ea typeface="맑은 고딕"/>
                           <a:cs typeface="맑은 고딕"/>
                         </a:rPr>
-                        <a:t>1시간 배송 </a:t>
-                      </a:r>
-                      <a:r>
-                        <a:rPr sz="900" b="1">
-                          <a:solidFill>
-                            <a:srgbClr val="000000"/>
-                          </a:solidFill>
-                          <a:latin typeface="맑은 고딕"/>
-                          <a:ea typeface="맑은 고딕"/>
-                          <a:cs typeface="맑은 고딕"/>
-                        </a:rPr>
-                        <a:t>(바로퀵)</a:t>
+                        <a:t>바로퀵</a:t>
                       </a:r>
                     </a:p>
                   </a:txBody>
@@ -5008,7 +4089,7 @@
                           <a:ea typeface="맑은 고딕"/>
                           <a:cs typeface="맑은 고딕"/>
                         </a:rPr>
-                        <a:t>점포 </a:t>
+                        <a:t>빠름 </a:t>
                       </a:r>
                       <a:r>
                         <a:rPr sz="900" b="0">
@@ -5019,7 +4100,7 @@
                           <a:ea typeface="맑은 고딕"/>
                           <a:cs typeface="맑은 고딕"/>
                         </a:rPr>
-                        <a:t>(반경 3km)</a:t>
+                        <a:t>(1H)</a:t>
                       </a:r>
                     </a:p>
                   </a:txBody>
@@ -5095,12 +4176,25 @@
                   </a:tcPr>
                 </a:tc>
               </a:tr>
-              <a:tr h="219004">
-                <a:tc vMerge="1">
+              <a:tr h="561600">
+                <a:tc>
                   <a:txBody>
                     <a:bodyPr wrap="square"/>
                     <a:lstStyle/>
-                    <a:p/>
+                    <a:p>
+                      <a:pPr algn="ctr"/>
+                      <a:r>
+                        <a:rPr sz="1000" b="1">
+                          <a:solidFill>
+                            <a:srgbClr val="002060"/>
+                          </a:solidFill>
+                          <a:latin typeface="맑은 고딕"/>
+                          <a:ea typeface="맑은 고딕"/>
+                          <a:cs typeface="맑은 고딕"/>
+                        </a:rPr>
+                        <a:t>✗ 공백</a:t>
+                      </a:r>
+                    </a:p>
                   </a:txBody>
                   <a:tcPr anchor="ctr" marL="36000" marR="36000" marT="0" marB="0">
                     <a:lnL w="9525" cap="flat">
@@ -5143,63 +4237,7 @@
                           <a:ea typeface="맑은 고딕"/>
                           <a:cs typeface="맑은 고딕"/>
                         </a:rPr>
-                        <a:t>2시간 배송 </a:t>
-                      </a:r>
-                      <a:r>
-                        <a:rPr sz="900" b="1">
-                          <a:solidFill>
-                            <a:srgbClr val="002060"/>
-                          </a:solidFill>
-                          <a:latin typeface="맑은 고딕"/>
-                          <a:ea typeface="맑은 고딕"/>
-                          <a:cs typeface="맑은 고딕"/>
-                        </a:rPr>
-                        <a:t>(신규)</a:t>
-                      </a:r>
-                    </a:p>
-                  </a:txBody>
-                  <a:tcPr anchor="ctr" marL="36000" marR="36000" marT="0" marB="0">
-                    <a:lnL w="9525" cap="flat">
-                      <a:solidFill>
-                        <a:srgbClr val="BFBFBF"/>
-                      </a:solidFill>
-                    </a:lnL>
-                    <a:lnR w="9525" cap="flat">
-                      <a:solidFill>
-                        <a:srgbClr val="BFBFBF"/>
-                      </a:solidFill>
-                    </a:lnR>
-                    <a:lnT w="9525" cap="flat">
-                      <a:solidFill>
-                        <a:srgbClr val="BFBFBF"/>
-                      </a:solidFill>
-                    </a:lnT>
-                    <a:lnB w="9525" cap="flat">
-                      <a:solidFill>
-                        <a:srgbClr val="BFBFBF"/>
-                      </a:solidFill>
-                    </a:lnB>
-                    <a:solidFill>
-                      <a:srgbClr val="DEEBF7"/>
-                    </a:solidFill>
-                  </a:tcPr>
-                </a:tc>
-                <a:tc>
-                  <a:txBody>
-                    <a:bodyPr wrap="square"/>
-                    <a:lstStyle/>
-                    <a:p>
-                      <a:pPr algn="ctr"/>
-                      <a:r>
-                        <a:rPr sz="1000" b="1">
-                          <a:solidFill>
-                            <a:srgbClr val="002060"/>
-                          </a:solidFill>
-                          <a:latin typeface="맑은 고딕"/>
-                          <a:ea typeface="맑은 고딕"/>
-                          <a:cs typeface="맑은 고딕"/>
-                        </a:rPr>
-                        <a:t>점포</a:t>
+                        <a:t>빠름</a:t>
                       </a:r>
                     </a:p>
                   </a:txBody>
@@ -5281,14 +4319,14 @@
       </p:graphicFrame>
       <p:sp>
         <p:nvSpPr>
-          <p:cNvPr id="15" name="TextBox 14"/>
+          <p:cNvPr id="10" name="TextBox 9"/>
           <p:cNvSpPr txBox="1"/>
           <p:nvPr/>
         </p:nvSpPr>
         <p:spPr>
           <a:xfrm>
-            <a:off x="5954400" y="1504800"/>
-            <a:ext cx="3528000" cy="216000"/>
+            <a:off x="4190400" y="1504800"/>
+            <a:ext cx="5292000" cy="230400"/>
           </a:xfrm>
           <a:prstGeom prst="rect">
             <a:avLst/>
@@ -5301,9 +4339,9 @@
           </a:bodyPr>
           <a:lstStyle/>
           <a:p>
-            <a:pPr algn="ctr"/>
-            <a:r>
-              <a:rPr sz="1400" b="1">
+            <a:pPr algn="l"/>
+            <a:r>
+              <a:rPr sz="1200" b="1">
                 <a:solidFill>
                   <a:srgbClr val="000000"/>
                 </a:solidFill>
@@ -5311,26 +4349,667 @@
                 <a:ea typeface="맑은 고딕"/>
                 <a:cs typeface="맑은 고딕"/>
               </a:rPr>
-              <a:t>전개 방향</a:t>
+              <a:t>• ② 서비스 개요</a:t>
+            </a:r>
+          </a:p>
+        </p:txBody>
+      </p:sp>
+      <p:sp>
+        <p:nvSpPr>
+          <p:cNvPr id="11" name="TextBox 10"/>
+          <p:cNvSpPr txBox="1"/>
+          <p:nvPr/>
+        </p:nvSpPr>
+        <p:spPr>
+          <a:xfrm>
+            <a:off x="4190400" y="1789200"/>
+            <a:ext cx="737999" cy="223200"/>
+          </a:xfrm>
+          <a:prstGeom prst="rect">
+            <a:avLst/>
+          </a:prstGeom>
+          <a:noFill/>
+        </p:spPr>
+        <p:txBody>
+          <a:bodyPr wrap="square" anchor="ctr" lIns="0" rIns="0" tIns="0" bIns="0">
+            <a:spAutoFit/>
+          </a:bodyPr>
+          <a:lstStyle/>
+          <a:p>
+            <a:pPr algn="ctr"/>
+            <a:r>
+              <a:rPr sz="900" b="1">
+                <a:solidFill>
+                  <a:srgbClr val="595959"/>
+                </a:solidFill>
+                <a:latin typeface="맑은 고딕"/>
+                <a:ea typeface="맑은 고딕"/>
+                <a:cs typeface="맑은 고딕"/>
+              </a:rPr>
+              <a:t>속도 ↓ / 물량 →</a:t>
+            </a:r>
+          </a:p>
+        </p:txBody>
+      </p:sp>
+      <p:sp>
+        <p:nvSpPr>
+          <p:cNvPr id="12" name="TextBox 11"/>
+          <p:cNvSpPr txBox="1"/>
+          <p:nvPr/>
+        </p:nvSpPr>
+        <p:spPr>
+          <a:xfrm>
+            <a:off x="4928400" y="1789200"/>
+            <a:ext cx="2276999" cy="223200"/>
+          </a:xfrm>
+          <a:prstGeom prst="rect">
+            <a:avLst/>
+          </a:prstGeom>
+          <a:noFill/>
+        </p:spPr>
+        <p:txBody>
+          <a:bodyPr wrap="square" anchor="ctr" lIns="0" rIns="0" tIns="0" bIns="0">
+            <a:spAutoFit/>
+          </a:bodyPr>
+          <a:lstStyle/>
+          <a:p>
+            <a:pPr algn="ctr"/>
+            <a:r>
+              <a:rPr sz="1100" b="1">
+                <a:solidFill>
+                  <a:srgbClr val="000000"/>
+                </a:solidFill>
+                <a:latin typeface="맑은 고딕"/>
+                <a:ea typeface="맑은 고딕"/>
+                <a:cs typeface="맑은 고딕"/>
+              </a:rPr>
+              <a:t>소량</a:t>
+            </a:r>
+          </a:p>
+        </p:txBody>
+      </p:sp>
+      <p:sp>
+        <p:nvSpPr>
+          <p:cNvPr id="13" name="TextBox 12"/>
+          <p:cNvSpPr txBox="1"/>
+          <p:nvPr/>
+        </p:nvSpPr>
+        <p:spPr>
+          <a:xfrm>
+            <a:off x="7205400" y="1789200"/>
+            <a:ext cx="2276999" cy="223200"/>
+          </a:xfrm>
+          <a:prstGeom prst="rect">
+            <a:avLst/>
+          </a:prstGeom>
+          <a:noFill/>
+        </p:spPr>
+        <p:txBody>
+          <a:bodyPr wrap="square" anchor="ctr" lIns="0" rIns="0" tIns="0" bIns="0">
+            <a:spAutoFit/>
+          </a:bodyPr>
+          <a:lstStyle/>
+          <a:p>
+            <a:pPr algn="ctr"/>
+            <a:r>
+              <a:rPr sz="1100" b="1">
+                <a:solidFill>
+                  <a:srgbClr val="000000"/>
+                </a:solidFill>
+                <a:latin typeface="맑은 고딕"/>
+                <a:ea typeface="맑은 고딕"/>
+                <a:cs typeface="맑은 고딕"/>
+              </a:rPr>
+              <a:t>대용량</a:t>
+            </a:r>
+          </a:p>
+        </p:txBody>
+      </p:sp>
+      <p:sp>
+        <p:nvSpPr>
+          <p:cNvPr id="14" name="TextBox 13"/>
+          <p:cNvSpPr txBox="1"/>
+          <p:nvPr/>
+        </p:nvSpPr>
+        <p:spPr>
+          <a:xfrm>
+            <a:off x="4190400" y="2012400"/>
+            <a:ext cx="737999" cy="716399"/>
+          </a:xfrm>
+          <a:prstGeom prst="rect">
+            <a:avLst/>
+          </a:prstGeom>
+          <a:noFill/>
+        </p:spPr>
+        <p:txBody>
+          <a:bodyPr wrap="square" anchor="ctr" lIns="0" rIns="0" tIns="0" bIns="0">
+            <a:spAutoFit/>
+          </a:bodyPr>
+          <a:lstStyle/>
+          <a:p>
+            <a:pPr algn="ctr"/>
+            <a:r>
+              <a:rPr sz="1100" b="1">
+                <a:solidFill>
+                  <a:srgbClr val="000000"/>
+                </a:solidFill>
+                <a:latin typeface="맑은 고딕"/>
+                <a:ea typeface="맑은 고딕"/>
+                <a:cs typeface="맑은 고딕"/>
+              </a:rPr>
+              <a:t>빠름</a:t>
+            </a:r>
+          </a:p>
+          <a:p>
+            <a:pPr algn="ctr"/>
+            <a:r>
+              <a:rPr sz="1000" b="1">
+                <a:solidFill>
+                  <a:srgbClr val="000000"/>
+                </a:solidFill>
+                <a:latin typeface="맑은 고딕"/>
+                <a:ea typeface="맑은 고딕"/>
+                <a:cs typeface="맑은 고딕"/>
+              </a:rPr>
+              <a:t>(당일 1~2H)</a:t>
+            </a:r>
+          </a:p>
+        </p:txBody>
+      </p:sp>
+      <p:sp>
+        <p:nvSpPr>
+          <p:cNvPr id="15" name="TextBox 14"/>
+          <p:cNvSpPr txBox="1"/>
+          <p:nvPr/>
+        </p:nvSpPr>
+        <p:spPr>
+          <a:xfrm>
+            <a:off x="4190400" y="2728800"/>
+            <a:ext cx="737999" cy="716399"/>
+          </a:xfrm>
+          <a:prstGeom prst="rect">
+            <a:avLst/>
+          </a:prstGeom>
+          <a:noFill/>
+        </p:spPr>
+        <p:txBody>
+          <a:bodyPr wrap="square" anchor="ctr" lIns="0" rIns="0" tIns="0" bIns="0">
+            <a:spAutoFit/>
+          </a:bodyPr>
+          <a:lstStyle/>
+          <a:p>
+            <a:pPr algn="ctr"/>
+            <a:r>
+              <a:rPr sz="1100" b="1">
+                <a:solidFill>
+                  <a:srgbClr val="000000"/>
+                </a:solidFill>
+                <a:latin typeface="맑은 고딕"/>
+                <a:ea typeface="맑은 고딕"/>
+                <a:cs typeface="맑은 고딕"/>
+              </a:rPr>
+              <a:t>예약</a:t>
+            </a:r>
+          </a:p>
+          <a:p>
+            <a:pPr algn="ctr"/>
+            <a:r>
+              <a:rPr sz="1000" b="1">
+                <a:solidFill>
+                  <a:srgbClr val="000000"/>
+                </a:solidFill>
+                <a:latin typeface="맑은 고딕"/>
+                <a:ea typeface="맑은 고딕"/>
+                <a:cs typeface="맑은 고딕"/>
+              </a:rPr>
+              <a:t>(익일~)</a:t>
+            </a:r>
+          </a:p>
+        </p:txBody>
+      </p:sp>
+      <p:sp>
+        <p:nvSpPr>
+          <p:cNvPr id="16" name="Rectangle 15"/>
+          <p:cNvSpPr/>
+          <p:nvPr/>
+        </p:nvSpPr>
+        <p:spPr>
+          <a:xfrm>
+            <a:off x="4928400" y="2012400"/>
+            <a:ext cx="2276999" cy="716399"/>
+          </a:xfrm>
+          <a:prstGeom prst="rect">
+            <a:avLst/>
+          </a:prstGeom>
+          <a:solidFill>
+            <a:srgbClr val="FFFFFF"/>
+          </a:solidFill>
+          <a:ln w="12700">
+            <a:solidFill>
+              <a:srgbClr val="BFBFBF"/>
+            </a:solidFill>
+          </a:ln>
+          <a:effectLst/>
+        </p:spPr>
+        <p:style>
+          <a:lnRef idx="1">
+            <a:schemeClr val="accent1"/>
+          </a:lnRef>
+          <a:fillRef idx="3">
+            <a:schemeClr val="accent1"/>
+          </a:fillRef>
+          <a:effectRef idx="2">
+            <a:schemeClr val="accent1"/>
+          </a:effectRef>
+          <a:fontRef idx="minor">
+            <a:schemeClr val="lt1"/>
+          </a:fontRef>
+        </p:style>
+        <p:txBody>
+          <a:bodyPr rtlCol="0" anchor="ctr"/>
+          <a:lstStyle/>
+          <a:p>
+            <a:pPr algn="ctr"/>
+          </a:p>
+        </p:txBody>
+      </p:sp>
+      <p:sp>
+        <p:nvSpPr>
+          <p:cNvPr id="17" name="TextBox 16"/>
+          <p:cNvSpPr txBox="1"/>
+          <p:nvPr/>
+        </p:nvSpPr>
+        <p:spPr>
+          <a:xfrm>
+            <a:off x="4928400" y="2012400"/>
+            <a:ext cx="2276999" cy="716399"/>
+          </a:xfrm>
+          <a:prstGeom prst="rect">
+            <a:avLst/>
+          </a:prstGeom>
+          <a:noFill/>
+        </p:spPr>
+        <p:txBody>
+          <a:bodyPr wrap="square" anchor="ctr" lIns="0" rIns="0" tIns="0" bIns="0">
+            <a:spAutoFit/>
+          </a:bodyPr>
+          <a:lstStyle/>
+          <a:p>
+            <a:pPr algn="ctr"/>
+            <a:r>
+              <a:rPr sz="1100" b="0">
+                <a:solidFill>
+                  <a:srgbClr val="000000"/>
+                </a:solidFill>
+                <a:latin typeface="맑은 고딕"/>
+                <a:ea typeface="맑은 고딕"/>
+                <a:cs typeface="맑은 고딕"/>
+              </a:rPr>
+              <a:t>바로퀵 </a:t>
+            </a:r>
+            <a:r>
+              <a:rPr sz="1000" b="0">
+                <a:solidFill>
+                  <a:srgbClr val="000000"/>
+                </a:solidFill>
+                <a:latin typeface="맑은 고딕"/>
+                <a:ea typeface="맑은 고딕"/>
+                <a:cs typeface="맑은 고딕"/>
+              </a:rPr>
+              <a:t>(1H)</a:t>
+            </a:r>
+          </a:p>
+        </p:txBody>
+      </p:sp>
+      <p:sp>
+        <p:nvSpPr>
+          <p:cNvPr id="18" name="Rectangle 17"/>
+          <p:cNvSpPr/>
+          <p:nvPr/>
+        </p:nvSpPr>
+        <p:spPr>
+          <a:xfrm>
+            <a:off x="7205400" y="2012400"/>
+            <a:ext cx="2276999" cy="716399"/>
+          </a:xfrm>
+          <a:prstGeom prst="rect">
+            <a:avLst/>
+          </a:prstGeom>
+          <a:solidFill>
+            <a:srgbClr val="DEEBF7"/>
+          </a:solidFill>
+          <a:ln w="12700">
+            <a:solidFill>
+              <a:srgbClr val="BFBFBF"/>
+            </a:solidFill>
+          </a:ln>
+          <a:effectLst/>
+        </p:spPr>
+        <p:style>
+          <a:lnRef idx="1">
+            <a:schemeClr val="accent1"/>
+          </a:lnRef>
+          <a:fillRef idx="3">
+            <a:schemeClr val="accent1"/>
+          </a:fillRef>
+          <a:effectRef idx="2">
+            <a:schemeClr val="accent1"/>
+          </a:effectRef>
+          <a:fontRef idx="minor">
+            <a:schemeClr val="lt1"/>
+          </a:fontRef>
+        </p:style>
+        <p:txBody>
+          <a:bodyPr rtlCol="0" anchor="ctr"/>
+          <a:lstStyle/>
+          <a:p>
+            <a:pPr algn="ctr"/>
+          </a:p>
+        </p:txBody>
+      </p:sp>
+      <p:sp>
+        <p:nvSpPr>
+          <p:cNvPr id="19" name="TextBox 18"/>
+          <p:cNvSpPr txBox="1"/>
+          <p:nvPr/>
+        </p:nvSpPr>
+        <p:spPr>
+          <a:xfrm>
+            <a:off x="7205400" y="2012400"/>
+            <a:ext cx="2276999" cy="716399"/>
+          </a:xfrm>
+          <a:prstGeom prst="rect">
+            <a:avLst/>
+          </a:prstGeom>
+          <a:noFill/>
+        </p:spPr>
+        <p:txBody>
+          <a:bodyPr wrap="square" anchor="ctr" lIns="0" rIns="0" tIns="0" bIns="0">
+            <a:spAutoFit/>
+          </a:bodyPr>
+          <a:lstStyle/>
+          <a:p>
+            <a:pPr algn="ctr"/>
+            <a:r>
+              <a:rPr sz="1100" b="1">
+                <a:solidFill>
+                  <a:srgbClr val="002060"/>
+                </a:solidFill>
+                <a:latin typeface="맑은 고딕"/>
+                <a:ea typeface="맑은 고딕"/>
+                <a:cs typeface="맑은 고딕"/>
+              </a:rPr>
+              <a:t>★ 2시간 배송 </a:t>
+            </a:r>
+            <a:r>
+              <a:rPr sz="1000" b="1">
+                <a:solidFill>
+                  <a:srgbClr val="002060"/>
+                </a:solidFill>
+                <a:latin typeface="맑은 고딕"/>
+                <a:ea typeface="맑은 고딕"/>
+                <a:cs typeface="맑은 고딕"/>
+              </a:rPr>
+              <a:t>(신규)</a:t>
+            </a:r>
+          </a:p>
+        </p:txBody>
+      </p:sp>
+      <p:sp>
+        <p:nvSpPr>
+          <p:cNvPr id="20" name="Rectangle 19"/>
+          <p:cNvSpPr/>
+          <p:nvPr/>
+        </p:nvSpPr>
+        <p:spPr>
+          <a:xfrm>
+            <a:off x="4928400" y="2728800"/>
+            <a:ext cx="2276999" cy="716399"/>
+          </a:xfrm>
+          <a:prstGeom prst="rect">
+            <a:avLst/>
+          </a:prstGeom>
+          <a:solidFill>
+            <a:srgbClr val="FFFFFF"/>
+          </a:solidFill>
+          <a:ln w="12700">
+            <a:solidFill>
+              <a:srgbClr val="BFBFBF"/>
+            </a:solidFill>
+          </a:ln>
+          <a:effectLst/>
+        </p:spPr>
+        <p:style>
+          <a:lnRef idx="1">
+            <a:schemeClr val="accent1"/>
+          </a:lnRef>
+          <a:fillRef idx="3">
+            <a:schemeClr val="accent1"/>
+          </a:fillRef>
+          <a:effectRef idx="2">
+            <a:schemeClr val="accent1"/>
+          </a:effectRef>
+          <a:fontRef idx="minor">
+            <a:schemeClr val="lt1"/>
+          </a:fontRef>
+        </p:style>
+        <p:txBody>
+          <a:bodyPr rtlCol="0" anchor="ctr"/>
+          <a:lstStyle/>
+          <a:p>
+            <a:pPr algn="ctr"/>
+          </a:p>
+        </p:txBody>
+      </p:sp>
+      <p:sp>
+        <p:nvSpPr>
+          <p:cNvPr id="21" name="TextBox 20"/>
+          <p:cNvSpPr txBox="1"/>
+          <p:nvPr/>
+        </p:nvSpPr>
+        <p:spPr>
+          <a:xfrm>
+            <a:off x="4928400" y="2728800"/>
+            <a:ext cx="2276999" cy="716399"/>
+          </a:xfrm>
+          <a:prstGeom prst="rect">
+            <a:avLst/>
+          </a:prstGeom>
+          <a:noFill/>
+        </p:spPr>
+        <p:txBody>
+          <a:bodyPr wrap="square" anchor="ctr" lIns="0" rIns="0" tIns="0" bIns="0">
+            <a:spAutoFit/>
+          </a:bodyPr>
+          <a:lstStyle/>
+          <a:p>
+            <a:pPr algn="ctr"/>
+            <a:r>
+              <a:rPr sz="1100" b="0">
+                <a:solidFill>
+                  <a:srgbClr val="000000"/>
+                </a:solidFill>
+                <a:latin typeface="맑은 고딕"/>
+                <a:ea typeface="맑은 고딕"/>
+                <a:cs typeface="맑은 고딕"/>
+              </a:rPr>
+              <a:t>—</a:t>
+            </a:r>
+          </a:p>
+        </p:txBody>
+      </p:sp>
+      <p:sp>
+        <p:nvSpPr>
+          <p:cNvPr id="22" name="Rectangle 21"/>
+          <p:cNvSpPr/>
+          <p:nvPr/>
+        </p:nvSpPr>
+        <p:spPr>
+          <a:xfrm>
+            <a:off x="7205400" y="2728800"/>
+            <a:ext cx="2276999" cy="716399"/>
+          </a:xfrm>
+          <a:prstGeom prst="rect">
+            <a:avLst/>
+          </a:prstGeom>
+          <a:solidFill>
+            <a:srgbClr val="FFFFFF"/>
+          </a:solidFill>
+          <a:ln w="12700">
+            <a:solidFill>
+              <a:srgbClr val="BFBFBF"/>
+            </a:solidFill>
+          </a:ln>
+          <a:effectLst/>
+        </p:spPr>
+        <p:style>
+          <a:lnRef idx="1">
+            <a:schemeClr val="accent1"/>
+          </a:lnRef>
+          <a:fillRef idx="3">
+            <a:schemeClr val="accent1"/>
+          </a:fillRef>
+          <a:effectRef idx="2">
+            <a:schemeClr val="accent1"/>
+          </a:effectRef>
+          <a:fontRef idx="minor">
+            <a:schemeClr val="lt1"/>
+          </a:fontRef>
+        </p:style>
+        <p:txBody>
+          <a:bodyPr rtlCol="0" anchor="ctr"/>
+          <a:lstStyle/>
+          <a:p>
+            <a:pPr algn="ctr"/>
+          </a:p>
+        </p:txBody>
+      </p:sp>
+      <p:sp>
+        <p:nvSpPr>
+          <p:cNvPr id="23" name="TextBox 22"/>
+          <p:cNvSpPr txBox="1"/>
+          <p:nvPr/>
+        </p:nvSpPr>
+        <p:spPr>
+          <a:xfrm>
+            <a:off x="7205400" y="2728800"/>
+            <a:ext cx="2276999" cy="716399"/>
+          </a:xfrm>
+          <a:prstGeom prst="rect">
+            <a:avLst/>
+          </a:prstGeom>
+          <a:noFill/>
+        </p:spPr>
+        <p:txBody>
+          <a:bodyPr wrap="square" anchor="ctr" lIns="0" rIns="0" tIns="0" bIns="0">
+            <a:spAutoFit/>
+          </a:bodyPr>
+          <a:lstStyle/>
+          <a:p>
+            <a:pPr algn="ctr"/>
+            <a:r>
+              <a:rPr sz="1100" b="0">
+                <a:solidFill>
+                  <a:srgbClr val="000000"/>
+                </a:solidFill>
+                <a:latin typeface="맑은 고딕"/>
+                <a:ea typeface="맑은 고딕"/>
+                <a:cs typeface="맑은 고딕"/>
+              </a:rPr>
+              <a:t>주간·새벽·트레이더스</a:t>
+            </a:r>
+          </a:p>
+        </p:txBody>
+      </p:sp>
+      <p:sp>
+        <p:nvSpPr>
+          <p:cNvPr id="24" name="TextBox 23"/>
+          <p:cNvSpPr txBox="1"/>
+          <p:nvPr/>
+        </p:nvSpPr>
+        <p:spPr>
+          <a:xfrm>
+            <a:off x="4388400" y="3499200"/>
+            <a:ext cx="5093999" cy="223200"/>
+          </a:xfrm>
+          <a:prstGeom prst="rect">
+            <a:avLst/>
+          </a:prstGeom>
+          <a:noFill/>
+        </p:spPr>
+        <p:txBody>
+          <a:bodyPr wrap="square" anchor="t" lIns="0" rIns="0" tIns="0" bIns="0">
+            <a:spAutoFit/>
+          </a:bodyPr>
+          <a:lstStyle/>
+          <a:p>
+            <a:pPr algn="l"/>
+            <a:r>
+              <a:rPr sz="1100" b="0">
+                <a:solidFill>
+                  <a:srgbClr val="000000"/>
+                </a:solidFill>
+                <a:latin typeface="맑은 고딕"/>
+                <a:ea typeface="맑은 고딕"/>
+                <a:cs typeface="맑은 고딕"/>
+              </a:rPr>
+              <a:t>- 거점 유휴 점포 · 운송 사륜차 · 운영 20시 마감 2시간 · 규모 15만 종</a:t>
+            </a:r>
+          </a:p>
+        </p:txBody>
+      </p:sp>
+      <p:sp>
+        <p:nvSpPr>
+          <p:cNvPr id="25" name="TextBox 24"/>
+          <p:cNvSpPr txBox="1"/>
+          <p:nvPr/>
+        </p:nvSpPr>
+        <p:spPr>
+          <a:xfrm>
+            <a:off x="4190400" y="3823199"/>
+            <a:ext cx="5292000" cy="230400"/>
+          </a:xfrm>
+          <a:prstGeom prst="rect">
+            <a:avLst/>
+          </a:prstGeom>
+          <a:noFill/>
+        </p:spPr>
+        <p:txBody>
+          <a:bodyPr wrap="square" anchor="t" lIns="0" rIns="0" tIns="0" bIns="0">
+            <a:spAutoFit/>
+          </a:bodyPr>
+          <a:lstStyle/>
+          <a:p>
+            <a:pPr algn="l"/>
+            <a:r>
+              <a:rPr sz="1200" b="1">
+                <a:solidFill>
+                  <a:srgbClr val="000000"/>
+                </a:solidFill>
+                <a:latin typeface="맑은 고딕"/>
+                <a:ea typeface="맑은 고딕"/>
+                <a:cs typeface="맑은 고딕"/>
+              </a:rPr>
+              <a:t>• ③ 확산 계획</a:t>
             </a:r>
           </a:p>
         </p:txBody>
       </p:sp>
       <p:cxnSp>
         <p:nvCxnSpPr>
-          <p:cNvPr id="16" name="Connector 15"/>
+          <p:cNvPr id="26" name="Connector 25"/>
           <p:cNvCxnSpPr/>
           <p:nvPr/>
         </p:nvCxnSpPr>
         <p:spPr>
           <a:xfrm>
-            <a:off x="5954400" y="1789200"/>
-            <a:ext cx="3528000" cy="0"/>
+            <a:off x="4262400" y="4197600"/>
+            <a:ext cx="0" cy="1349999"/>
           </a:xfrm>
           <a:prstGeom prst="bentConnector3">
             <a:avLst/>
           </a:prstGeom>
-          <a:ln w="19050">
+          <a:ln w="22225">
             <a:solidFill>
               <a:srgbClr val="000000"/>
             </a:solidFill>
@@ -5355,283 +5034,13 @@
       </p:cxnSp>
       <p:sp>
         <p:nvSpPr>
-          <p:cNvPr id="17" name="TextBox 16"/>
-          <p:cNvSpPr txBox="1"/>
-          <p:nvPr/>
-        </p:nvSpPr>
-        <p:spPr>
-          <a:xfrm>
-            <a:off x="5954400" y="1962000"/>
-            <a:ext cx="3528000" cy="251999"/>
-          </a:xfrm>
-          <a:prstGeom prst="rect">
-            <a:avLst/>
-          </a:prstGeom>
-          <a:noFill/>
-        </p:spPr>
-        <p:txBody>
-          <a:bodyPr wrap="square" anchor="t" lIns="0" rIns="0" tIns="0" bIns="0">
-            <a:spAutoFit/>
-          </a:bodyPr>
-          <a:lstStyle/>
-          <a:p>
-            <a:pPr algn="l"/>
-            <a:r>
-              <a:rPr sz="1200" b="1">
-                <a:solidFill>
-                  <a:srgbClr val="000000"/>
-                </a:solidFill>
-                <a:latin typeface="맑은 고딕"/>
-                <a:ea typeface="맑은 고딕"/>
-                <a:cs typeface="맑은 고딕"/>
-              </a:rPr>
-              <a:t>• 운영 방침 </a:t>
-            </a:r>
-            <a:r>
-              <a:rPr sz="1100" b="1">
-                <a:solidFill>
-                  <a:srgbClr val="000000"/>
-                </a:solidFill>
-                <a:latin typeface="맑은 고딕"/>
-                <a:ea typeface="맑은 고딕"/>
-                <a:cs typeface="맑은 고딕"/>
-              </a:rPr>
-              <a:t>('26. 7. 9.~)</a:t>
-            </a:r>
-          </a:p>
-        </p:txBody>
-      </p:sp>
-      <p:sp>
-        <p:nvSpPr>
-          <p:cNvPr id="18" name="TextBox 17"/>
-          <p:cNvSpPr txBox="1"/>
-          <p:nvPr/>
-        </p:nvSpPr>
-        <p:spPr>
-          <a:xfrm>
-            <a:off x="6152400" y="2214000"/>
-            <a:ext cx="3330000" cy="251999"/>
-          </a:xfrm>
-          <a:prstGeom prst="rect">
-            <a:avLst/>
-          </a:prstGeom>
-          <a:noFill/>
-        </p:spPr>
-        <p:txBody>
-          <a:bodyPr wrap="square" anchor="t" lIns="0" rIns="0" tIns="0" bIns="0">
-            <a:spAutoFit/>
-          </a:bodyPr>
-          <a:lstStyle/>
-          <a:p>
-            <a:pPr algn="l"/>
-            <a:r>
-              <a:rPr sz="1100" b="0">
-                <a:solidFill>
-                  <a:srgbClr val="000000"/>
-                </a:solidFill>
-                <a:latin typeface="맑은 고딕"/>
-                <a:ea typeface="맑은 고딕"/>
-                <a:cs typeface="맑은 고딕"/>
-              </a:rPr>
-              <a:t>- 20시 마감 → 2시간 내 배송 완료</a:t>
-            </a:r>
-          </a:p>
-        </p:txBody>
-      </p:sp>
-      <p:sp>
-        <p:nvSpPr>
-          <p:cNvPr id="19" name="TextBox 18"/>
-          <p:cNvSpPr txBox="1"/>
-          <p:nvPr/>
-        </p:nvSpPr>
-        <p:spPr>
-          <a:xfrm>
-            <a:off x="6152400" y="2466000"/>
-            <a:ext cx="3330000" cy="251999"/>
-          </a:xfrm>
-          <a:prstGeom prst="rect">
-            <a:avLst/>
-          </a:prstGeom>
-          <a:noFill/>
-        </p:spPr>
-        <p:txBody>
-          <a:bodyPr wrap="square" anchor="t" lIns="0" rIns="0" tIns="0" bIns="0">
-            <a:spAutoFit/>
-          </a:bodyPr>
-          <a:lstStyle/>
-          <a:p>
-            <a:pPr algn="l"/>
-            <a:r>
-              <a:rPr sz="1100" b="0">
-                <a:solidFill>
-                  <a:srgbClr val="000000"/>
-                </a:solidFill>
-                <a:latin typeface="맑은 고딕"/>
-                <a:ea typeface="맑은 고딕"/>
-                <a:cs typeface="맑은 고딕"/>
-              </a:rPr>
-              <a:t>- 쓱배송 사륜차 → 대용량·중량 대응</a:t>
-            </a:r>
-          </a:p>
-        </p:txBody>
-      </p:sp>
-      <p:sp>
-        <p:nvSpPr>
-          <p:cNvPr id="20" name="TextBox 19"/>
-          <p:cNvSpPr txBox="1"/>
-          <p:nvPr/>
-        </p:nvSpPr>
-        <p:spPr>
-          <a:xfrm>
-            <a:off x="6152400" y="2718000"/>
-            <a:ext cx="3330000" cy="251999"/>
-          </a:xfrm>
-          <a:prstGeom prst="rect">
-            <a:avLst/>
-          </a:prstGeom>
-          <a:noFill/>
-        </p:spPr>
-        <p:txBody>
-          <a:bodyPr wrap="square" anchor="t" lIns="0" rIns="0" tIns="0" bIns="0">
-            <a:spAutoFit/>
-          </a:bodyPr>
-          <a:lstStyle/>
-          <a:p>
-            <a:pPr algn="l"/>
-            <a:r>
-              <a:rPr sz="1100" b="0">
-                <a:solidFill>
-                  <a:srgbClr val="000000"/>
-                </a:solidFill>
-                <a:latin typeface="맑은 고딕"/>
-                <a:ea typeface="맑은 고딕"/>
-                <a:cs typeface="맑은 고딕"/>
-              </a:rPr>
-              <a:t>- 기존 예약배송 병행 선택 가능</a:t>
-            </a:r>
-          </a:p>
-        </p:txBody>
-      </p:sp>
-      <p:sp>
-        <p:nvSpPr>
-          <p:cNvPr id="21" name="TextBox 20"/>
-          <p:cNvSpPr txBox="1"/>
-          <p:nvPr/>
-        </p:nvSpPr>
-        <p:spPr>
-          <a:xfrm>
-            <a:off x="6152400" y="2970000"/>
-            <a:ext cx="3330000" cy="251999"/>
-          </a:xfrm>
-          <a:prstGeom prst="rect">
-            <a:avLst/>
-          </a:prstGeom>
-          <a:noFill/>
-        </p:spPr>
-        <p:txBody>
-          <a:bodyPr wrap="square" anchor="t" lIns="0" rIns="0" tIns="0" bIns="0">
-            <a:spAutoFit/>
-          </a:bodyPr>
-          <a:lstStyle/>
-          <a:p>
-            <a:pPr algn="l"/>
-            <a:r>
-              <a:rPr sz="1100" b="0">
-                <a:solidFill>
-                  <a:srgbClr val="000000"/>
-                </a:solidFill>
-                <a:latin typeface="맑은 고딕"/>
-                <a:ea typeface="맑은 고딕"/>
-                <a:cs typeface="맑은 고딕"/>
-              </a:rPr>
-              <a:t>- 점포·인력 재활용 → 신규 투자 최소</a:t>
-            </a:r>
-          </a:p>
-        </p:txBody>
-      </p:sp>
-      <p:sp>
-        <p:nvSpPr>
-          <p:cNvPr id="22" name="TextBox 21"/>
-          <p:cNvSpPr txBox="1"/>
-          <p:nvPr/>
-        </p:nvSpPr>
-        <p:spPr>
-          <a:xfrm>
-            <a:off x="5954400" y="3348000"/>
-            <a:ext cx="3528000" cy="223200"/>
-          </a:xfrm>
-          <a:prstGeom prst="rect">
-            <a:avLst/>
-          </a:prstGeom>
-          <a:noFill/>
-        </p:spPr>
-        <p:txBody>
-          <a:bodyPr wrap="square" anchor="t" lIns="0" rIns="0" tIns="0" bIns="0">
-            <a:spAutoFit/>
-          </a:bodyPr>
-          <a:lstStyle/>
-          <a:p>
-            <a:pPr algn="l"/>
-            <a:r>
-              <a:rPr sz="1200" b="1">
-                <a:solidFill>
-                  <a:srgbClr val="000000"/>
-                </a:solidFill>
-                <a:latin typeface="맑은 고딕"/>
-                <a:ea typeface="맑은 고딕"/>
-                <a:cs typeface="맑은 고딕"/>
-              </a:rPr>
-              <a:t>• 확산 로드맵</a:t>
-            </a:r>
-          </a:p>
-        </p:txBody>
-      </p:sp>
-      <p:cxnSp>
-        <p:nvCxnSpPr>
-          <p:cNvPr id="23" name="Connector 22"/>
-          <p:cNvCxnSpPr/>
-          <p:nvPr/>
-        </p:nvCxnSpPr>
-        <p:spPr>
-          <a:xfrm>
-            <a:off x="6026399" y="3726000"/>
-            <a:ext cx="0" cy="1656000"/>
-          </a:xfrm>
-          <a:prstGeom prst="bentConnector3">
-            <a:avLst/>
-          </a:prstGeom>
-          <a:ln w="22225">
-            <a:solidFill>
-              <a:srgbClr val="000000"/>
-            </a:solidFill>
-            <a:prstDash val="solid"/>
-          </a:ln>
-          <a:effectLst/>
-        </p:spPr>
-        <p:style>
-          <a:lnRef idx="2">
-            <a:schemeClr val="accent1"/>
-          </a:lnRef>
-          <a:fillRef idx="0">
-            <a:schemeClr val="accent1"/>
-          </a:fillRef>
-          <a:effectRef idx="1">
-            <a:schemeClr val="accent1"/>
-          </a:effectRef>
-          <a:fontRef idx="minor">
-            <a:schemeClr val="tx1"/>
-          </a:fontRef>
-        </p:style>
-      </p:cxnSp>
-      <p:sp>
-        <p:nvSpPr>
-          <p:cNvPr id="24" name="Oval 23"/>
+          <p:cNvPr id="27" name="Oval 26"/>
           <p:cNvSpPr/>
           <p:nvPr/>
         </p:nvSpPr>
         <p:spPr>
           <a:xfrm>
-            <a:off x="5979600" y="3679200"/>
+            <a:off x="4215600" y="4150800"/>
             <a:ext cx="93600" cy="93600"/>
           </a:xfrm>
           <a:prstGeom prst="ellipse">
@@ -5671,13 +5080,13 @@
       </p:sp>
       <p:sp>
         <p:nvSpPr>
-          <p:cNvPr id="25" name="TextBox 24"/>
+          <p:cNvPr id="28" name="TextBox 27"/>
           <p:cNvSpPr txBox="1"/>
           <p:nvPr/>
         </p:nvSpPr>
         <p:spPr>
           <a:xfrm>
-            <a:off x="6188399" y="3618000"/>
+            <a:off x="4424400" y="4089600"/>
             <a:ext cx="720000" cy="180000"/>
           </a:xfrm>
           <a:prstGeom prst="rect">
@@ -5708,14 +5117,14 @@
       </p:sp>
       <p:sp>
         <p:nvSpPr>
-          <p:cNvPr id="26" name="TextBox 25"/>
+          <p:cNvPr id="29" name="TextBox 28"/>
           <p:cNvSpPr txBox="1"/>
           <p:nvPr/>
         </p:nvSpPr>
         <p:spPr>
           <a:xfrm>
-            <a:off x="6944400" y="3618000"/>
-            <a:ext cx="2538000" cy="216000"/>
+            <a:off x="5180400" y="4089600"/>
+            <a:ext cx="4302000" cy="216000"/>
           </a:xfrm>
           <a:prstGeom prst="rect">
             <a:avLst/>
@@ -5745,13 +5154,13 @@
       </p:sp>
       <p:sp>
         <p:nvSpPr>
-          <p:cNvPr id="27" name="Oval 26"/>
+          <p:cNvPr id="30" name="Oval 29"/>
           <p:cNvSpPr/>
           <p:nvPr/>
         </p:nvSpPr>
         <p:spPr>
           <a:xfrm>
-            <a:off x="5979600" y="4231200"/>
+            <a:off x="4215600" y="4600800"/>
             <a:ext cx="93600" cy="93600"/>
           </a:xfrm>
           <a:prstGeom prst="ellipse">
@@ -5791,13 +5200,13 @@
       </p:sp>
       <p:sp>
         <p:nvSpPr>
-          <p:cNvPr id="28" name="TextBox 27"/>
+          <p:cNvPr id="31" name="TextBox 30"/>
           <p:cNvSpPr txBox="1"/>
           <p:nvPr/>
         </p:nvSpPr>
         <p:spPr>
           <a:xfrm>
-            <a:off x="6188399" y="4170000"/>
+            <a:off x="4424400" y="4539600"/>
             <a:ext cx="720000" cy="180000"/>
           </a:xfrm>
           <a:prstGeom prst="rect">
@@ -5828,14 +5237,14 @@
       </p:sp>
       <p:sp>
         <p:nvSpPr>
-          <p:cNvPr id="29" name="TextBox 28"/>
+          <p:cNvPr id="32" name="TextBox 31"/>
           <p:cNvSpPr txBox="1"/>
           <p:nvPr/>
         </p:nvSpPr>
         <p:spPr>
           <a:xfrm>
-            <a:off x="6944400" y="4170000"/>
-            <a:ext cx="2538000" cy="216000"/>
+            <a:off x="5180400" y="4539600"/>
+            <a:ext cx="4302000" cy="216000"/>
           </a:xfrm>
           <a:prstGeom prst="rect">
             <a:avLst/>
@@ -5858,11 +5267,8 @@
                 <a:ea typeface="맑은 고딕"/>
                 <a:cs typeface="맑은 고딕"/>
               </a:rPr>
-              <a:t>서울 확대</a:t>
-            </a:r>
-          </a:p>
-          <a:p>
-            <a:pPr algn="l"/>
+              <a:t>서울 확대 </a:t>
+            </a:r>
             <a:r>
               <a:rPr sz="1000" b="0">
                 <a:solidFill>
@@ -5879,13 +5285,13 @@
       </p:sp>
       <p:sp>
         <p:nvSpPr>
-          <p:cNvPr id="30" name="Oval 29"/>
+          <p:cNvPr id="33" name="Oval 32"/>
           <p:cNvSpPr/>
           <p:nvPr/>
         </p:nvSpPr>
         <p:spPr>
           <a:xfrm>
-            <a:off x="5979600" y="4783199"/>
+            <a:off x="4215600" y="5050799"/>
             <a:ext cx="93600" cy="93600"/>
           </a:xfrm>
           <a:prstGeom prst="ellipse">
@@ -5925,13 +5331,13 @@
       </p:sp>
       <p:sp>
         <p:nvSpPr>
-          <p:cNvPr id="31" name="TextBox 30"/>
+          <p:cNvPr id="34" name="TextBox 33"/>
           <p:cNvSpPr txBox="1"/>
           <p:nvPr/>
         </p:nvSpPr>
         <p:spPr>
           <a:xfrm>
-            <a:off x="6188399" y="4721999"/>
+            <a:off x="4424400" y="4989599"/>
             <a:ext cx="720000" cy="180000"/>
           </a:xfrm>
           <a:prstGeom prst="rect">
@@ -5962,14 +5368,14 @@
       </p:sp>
       <p:sp>
         <p:nvSpPr>
-          <p:cNvPr id="32" name="TextBox 31"/>
+          <p:cNvPr id="35" name="TextBox 34"/>
           <p:cNvSpPr txBox="1"/>
           <p:nvPr/>
         </p:nvSpPr>
         <p:spPr>
           <a:xfrm>
-            <a:off x="6944400" y="4721999"/>
-            <a:ext cx="2538000" cy="216000"/>
+            <a:off x="5180400" y="4989599"/>
+            <a:ext cx="4302000" cy="216000"/>
           </a:xfrm>
           <a:prstGeom prst="rect">
             <a:avLst/>
@@ -5999,13 +5405,13 @@
       </p:sp>
       <p:sp>
         <p:nvSpPr>
-          <p:cNvPr id="33" name="Oval 32"/>
+          <p:cNvPr id="36" name="Oval 35"/>
           <p:cNvSpPr/>
           <p:nvPr/>
         </p:nvSpPr>
         <p:spPr>
           <a:xfrm>
-            <a:off x="5979600" y="5335199"/>
+            <a:off x="4215600" y="5500799"/>
             <a:ext cx="93600" cy="93600"/>
           </a:xfrm>
           <a:prstGeom prst="ellipse">
@@ -6045,13 +5451,13 @@
       </p:sp>
       <p:sp>
         <p:nvSpPr>
-          <p:cNvPr id="34" name="TextBox 33"/>
+          <p:cNvPr id="37" name="TextBox 36"/>
           <p:cNvSpPr txBox="1"/>
           <p:nvPr/>
         </p:nvSpPr>
         <p:spPr>
           <a:xfrm>
-            <a:off x="6188399" y="5273999"/>
+            <a:off x="4424400" y="5439599"/>
             <a:ext cx="720000" cy="180000"/>
           </a:xfrm>
           <a:prstGeom prst="rect">
@@ -6082,14 +5488,14 @@
       </p:sp>
       <p:sp>
         <p:nvSpPr>
-          <p:cNvPr id="35" name="TextBox 34"/>
+          <p:cNvPr id="38" name="TextBox 37"/>
           <p:cNvSpPr txBox="1"/>
           <p:nvPr/>
         </p:nvSpPr>
         <p:spPr>
           <a:xfrm>
-            <a:off x="6944400" y="5273999"/>
-            <a:ext cx="2538000" cy="216000"/>
+            <a:off x="5180400" y="5439599"/>
+            <a:ext cx="4302000" cy="216000"/>
           </a:xfrm>
           <a:prstGeom prst="rect">
             <a:avLst/>
@@ -6119,14 +5525,14 @@
       </p:sp>
       <p:sp>
         <p:nvSpPr>
-          <p:cNvPr id="36" name="TextBox 35"/>
+          <p:cNvPr id="39" name="TextBox 38"/>
           <p:cNvSpPr txBox="1"/>
           <p:nvPr/>
         </p:nvSpPr>
         <p:spPr>
           <a:xfrm>
-            <a:off x="5954400" y="5580000"/>
-            <a:ext cx="3528000" cy="251999"/>
+            <a:off x="4190400" y="5709600"/>
+            <a:ext cx="5292000" cy="230400"/>
           </a:xfrm>
           <a:prstGeom prst="rect">
             <a:avLst/>
@@ -6171,58 +5577,21 @@
                 <a:ea typeface="맑은 고딕"/>
                 <a:cs typeface="맑은 고딕"/>
               </a:rPr>
-              <a:t> 점포를 물류거점으로 재정의</a:t>
-            </a:r>
-          </a:p>
-        </p:txBody>
-      </p:sp>
-      <p:sp>
-        <p:nvSpPr>
-          <p:cNvPr id="37" name="TextBox 36"/>
-          <p:cNvSpPr txBox="1"/>
-          <p:nvPr/>
-        </p:nvSpPr>
-        <p:spPr>
-          <a:xfrm>
-            <a:off x="6152400" y="5832000"/>
-            <a:ext cx="3330000" cy="251999"/>
-          </a:xfrm>
-          <a:prstGeom prst="rect">
-            <a:avLst/>
-          </a:prstGeom>
-          <a:noFill/>
-        </p:spPr>
-        <p:txBody>
-          <a:bodyPr wrap="square" anchor="t" lIns="0" rIns="0" tIns="0" bIns="0">
-            <a:spAutoFit/>
-          </a:bodyPr>
-          <a:lstStyle/>
-          <a:p>
-            <a:pPr algn="l"/>
-            <a:r>
-              <a:rPr sz="1100" b="0">
-                <a:solidFill>
-                  <a:srgbClr val="000000"/>
-                </a:solidFill>
-                <a:latin typeface="맑은 고딕"/>
-                <a:ea typeface="맑은 고딕"/>
-                <a:cs typeface="맑은 고딕"/>
-              </a:rPr>
-              <a:t>- → 유휴 PP센터 가동률 활용, 전국 즉시배송 기반 구축</a:t>
+              <a:t> 유휴 PP센터 재활용 → 신규 투자 최소 · 저비용 급속 확산</a:t>
             </a:r>
           </a:p>
         </p:txBody>
       </p:sp>
       <p:cxnSp>
         <p:nvCxnSpPr>
-          <p:cNvPr id="38" name="Connector 37"/>
+          <p:cNvPr id="40" name="Connector 39"/>
           <p:cNvCxnSpPr/>
           <p:nvPr/>
         </p:nvCxnSpPr>
         <p:spPr>
           <a:xfrm>
-            <a:off x="5835599" y="1504800"/>
-            <a:ext cx="0" cy="4525200"/>
+            <a:off x="4071600" y="1504800"/>
+            <a:ext cx="0" cy="4417200"/>
           </a:xfrm>
           <a:prstGeom prst="bentConnector3">
             <a:avLst/>

--- a/reports/ssg-quickcommerce-onepager.pptx
+++ b/reports/ssg-quickcommerce-onepager.pptx
@@ -3131,7 +3131,7 @@
                 <a:ea typeface="맑은 고딕"/>
                 <a:cs typeface="맑은 고딕"/>
               </a:rPr>
-              <a:t>이마트, 점포 물류거점化로 대용량 즉시배송 선점</a:t>
+              <a:t>이마트, 점포 물류거점화로 대용량 즉시배송 선점</a:t>
             </a:r>
           </a:p>
         </p:txBody>
@@ -3238,7 +3238,7 @@
                 <a:ea typeface="맑은 고딕"/>
                 <a:cs typeface="맑은 고딕"/>
               </a:rPr>
-              <a:t>('26. 7. 8~10)</a:t>
+              <a:t>('26.7.8~10)</a:t>
             </a:r>
           </a:p>
         </p:txBody>
@@ -3252,7 +3252,7 @@
         <p:spPr>
           <a:xfrm>
             <a:off x="424800" y="1504800"/>
-            <a:ext cx="3528000" cy="230400"/>
+            <a:ext cx="3969000" cy="230400"/>
           </a:xfrm>
           <a:prstGeom prst="rect">
             <a:avLst/>
@@ -3289,7 +3289,7 @@
         <p:spPr>
           <a:xfrm>
             <a:off x="622800" y="1735199"/>
-            <a:ext cx="3330000" cy="230400"/>
+            <a:ext cx="3771000" cy="230400"/>
           </a:xfrm>
           <a:prstGeom prst="rect">
             <a:avLst/>
@@ -3359,7 +3359,7 @@
         <p:spPr>
           <a:xfrm>
             <a:off x="622800" y="1965599"/>
-            <a:ext cx="3330000" cy="230400"/>
+            <a:ext cx="3771000" cy="230400"/>
           </a:xfrm>
           <a:prstGeom prst="rect">
             <a:avLst/>
@@ -3404,7 +3404,7 @@
                 <a:ea typeface="맑은 고딕"/>
                 <a:cs typeface="맑은 고딕"/>
               </a:rPr>
-              <a:t> B마트 등 대용량 품목 확대</a:t>
+              <a:t> B마트 등 즉시배송 시장 대용량 품목 확대</a:t>
             </a:r>
           </a:p>
         </p:txBody>
@@ -3418,7 +3418,7 @@
         <p:spPr>
           <a:xfrm>
             <a:off x="622800" y="2195999"/>
-            <a:ext cx="3330000" cy="230400"/>
+            <a:ext cx="3771000" cy="230400"/>
           </a:xfrm>
           <a:prstGeom prst="rect">
             <a:avLst/>
@@ -3456,7 +3456,7 @@
         </p:nvGraphicFramePr>
         <p:xfrm>
           <a:off x="424800" y="2552399"/>
-          <a:ext cx="3528000" cy="3369600"/>
+          <a:ext cx="3969000" cy="3333600"/>
         </p:xfrm>
         <a:graphic>
           <a:graphicData uri="http://schemas.openxmlformats.org/drawingml/2006/table">
@@ -3465,11 +3465,11 @@
                 <a:tableStyleId>{5C22544A-7EE6-4342-B048-85BDC9FD1C3A}</a:tableStyleId>
               </a:tblPr>
               <a:tblGrid>
-                <a:gridCol w="1188000"/>
-                <a:gridCol w="1152000"/>
-                <a:gridCol w="1188000"/>
+                <a:gridCol w="1190700"/>
+                <a:gridCol w="1389150"/>
+                <a:gridCol w="1389150"/>
               </a:tblGrid>
-              <a:tr h="561600">
+              <a:tr h="342000">
                 <a:tc>
                   <a:txBody>
                     <a:bodyPr wrap="square"/>
@@ -3485,7 +3485,7 @@
                           <a:ea typeface="맑은 고딕"/>
                           <a:cs typeface="맑은 고딕"/>
                         </a:rPr>
-                        <a:t>서비스명</a:t>
+                        <a:t>속도＼물량</a:t>
                       </a:r>
                     </a:p>
                   </a:txBody>
@@ -3530,7 +3530,7 @@
                           <a:ea typeface="맑은 고딕"/>
                           <a:cs typeface="맑은 고딕"/>
                         </a:rPr>
-                        <a:t>속도</a:t>
+                        <a:t>소량</a:t>
                       </a:r>
                     </a:p>
                   </a:txBody>
@@ -3575,7 +3575,7 @@
                           <a:ea typeface="맑은 고딕"/>
                           <a:cs typeface="맑은 고딕"/>
                         </a:rPr>
-                        <a:t>물량</a:t>
+                        <a:t>대용량</a:t>
                       </a:r>
                     </a:p>
                   </a:txBody>
@@ -3606,7 +3606,7 @@
                   </a:tcPr>
                 </a:tc>
               </a:tr>
-              <a:tr h="561600">
+              <a:tr h="1495800">
                 <a:tc>
                   <a:txBody>
                     <a:bodyPr wrap="square"/>
@@ -3622,7 +3622,21 @@
                           <a:ea typeface="맑은 고딕"/>
                           <a:cs typeface="맑은 고딕"/>
                         </a:rPr>
-                        <a:t>주간배송</a:t>
+                        <a:t>빠름</a:t>
+                      </a:r>
+                    </a:p>
+                    <a:p>
+                      <a:pPr algn="ctr"/>
+                      <a:r>
+                        <a:rPr sz="900" b="1">
+                          <a:solidFill>
+                            <a:srgbClr val="000000"/>
+                          </a:solidFill>
+                          <a:latin typeface="맑은 고딕"/>
+                          <a:ea typeface="맑은 고딕"/>
+                          <a:cs typeface="맑은 고딕"/>
+                        </a:rPr>
+                        <a:t>(당일 1~2H)</a:t>
                       </a:r>
                     </a:p>
                   </a:txBody>
@@ -3648,7 +3662,7 @@
                       </a:solidFill>
                     </a:lnB>
                     <a:solidFill>
-                      <a:srgbClr val="FFFFFF"/>
+                      <a:srgbClr val="EAEEF6"/>
                     </a:solidFill>
                   </a:tcPr>
                 </a:tc>
@@ -3667,429 +3681,7 @@
                           <a:ea typeface="맑은 고딕"/>
                           <a:cs typeface="맑은 고딕"/>
                         </a:rPr>
-                        <a:t>예약</a:t>
-                      </a:r>
-                    </a:p>
-                  </a:txBody>
-                  <a:tcPr anchor="ctr" marL="36000" marR="36000" marT="0" marB="0">
-                    <a:lnL w="9525" cap="flat">
-                      <a:solidFill>
-                        <a:srgbClr val="BFBFBF"/>
-                      </a:solidFill>
-                    </a:lnL>
-                    <a:lnR w="9525" cap="flat">
-                      <a:solidFill>
-                        <a:srgbClr val="BFBFBF"/>
-                      </a:solidFill>
-                    </a:lnR>
-                    <a:lnT w="9525" cap="flat">
-                      <a:solidFill>
-                        <a:srgbClr val="BFBFBF"/>
-                      </a:solidFill>
-                    </a:lnT>
-                    <a:lnB w="9525" cap="flat">
-                      <a:solidFill>
-                        <a:srgbClr val="BFBFBF"/>
-                      </a:solidFill>
-                    </a:lnB>
-                    <a:solidFill>
-                      <a:srgbClr val="FFFFFF"/>
-                    </a:solidFill>
-                  </a:tcPr>
-                </a:tc>
-                <a:tc>
-                  <a:txBody>
-                    <a:bodyPr wrap="square"/>
-                    <a:lstStyle/>
-                    <a:p>
-                      <a:pPr algn="ctr"/>
-                      <a:r>
-                        <a:rPr sz="1000" b="0">
-                          <a:solidFill>
-                            <a:srgbClr val="000000"/>
-                          </a:solidFill>
-                          <a:latin typeface="맑은 고딕"/>
-                          <a:ea typeface="맑은 고딕"/>
-                          <a:cs typeface="맑은 고딕"/>
-                        </a:rPr>
-                        <a:t>대용량</a:t>
-                      </a:r>
-                    </a:p>
-                  </a:txBody>
-                  <a:tcPr anchor="ctr" marL="36000" marR="36000" marT="0" marB="0">
-                    <a:lnL w="9525" cap="flat">
-                      <a:solidFill>
-                        <a:srgbClr val="BFBFBF"/>
-                      </a:solidFill>
-                    </a:lnL>
-                    <a:lnR w="9525" cap="flat">
-                      <a:solidFill>
-                        <a:srgbClr val="BFBFBF"/>
-                      </a:solidFill>
-                    </a:lnR>
-                    <a:lnT w="9525" cap="flat">
-                      <a:solidFill>
-                        <a:srgbClr val="BFBFBF"/>
-                      </a:solidFill>
-                    </a:lnT>
-                    <a:lnB w="9525" cap="flat">
-                      <a:solidFill>
-                        <a:srgbClr val="BFBFBF"/>
-                      </a:solidFill>
-                    </a:lnB>
-                    <a:solidFill>
-                      <a:srgbClr val="FFFFFF"/>
-                    </a:solidFill>
-                  </a:tcPr>
-                </a:tc>
-              </a:tr>
-              <a:tr h="561600">
-                <a:tc>
-                  <a:txBody>
-                    <a:bodyPr wrap="square"/>
-                    <a:lstStyle/>
-                    <a:p>
-                      <a:pPr algn="ctr"/>
-                      <a:r>
-                        <a:rPr sz="1000" b="1">
-                          <a:solidFill>
-                            <a:srgbClr val="000000"/>
-                          </a:solidFill>
-                          <a:latin typeface="맑은 고딕"/>
-                          <a:ea typeface="맑은 고딕"/>
-                          <a:cs typeface="맑은 고딕"/>
-                        </a:rPr>
-                        <a:t>새벽배송</a:t>
-                      </a:r>
-                    </a:p>
-                  </a:txBody>
-                  <a:tcPr anchor="ctr" marL="36000" marR="36000" marT="0" marB="0">
-                    <a:lnL w="9525" cap="flat">
-                      <a:solidFill>
-                        <a:srgbClr val="BFBFBF"/>
-                      </a:solidFill>
-                    </a:lnL>
-                    <a:lnR w="9525" cap="flat">
-                      <a:solidFill>
-                        <a:srgbClr val="BFBFBF"/>
-                      </a:solidFill>
-                    </a:lnR>
-                    <a:lnT w="9525" cap="flat">
-                      <a:solidFill>
-                        <a:srgbClr val="BFBFBF"/>
-                      </a:solidFill>
-                    </a:lnT>
-                    <a:lnB w="9525" cap="flat">
-                      <a:solidFill>
-                        <a:srgbClr val="BFBFBF"/>
-                      </a:solidFill>
-                    </a:lnB>
-                    <a:solidFill>
-                      <a:srgbClr val="FFFFFF"/>
-                    </a:solidFill>
-                  </a:tcPr>
-                </a:tc>
-                <a:tc>
-                  <a:txBody>
-                    <a:bodyPr wrap="square"/>
-                    <a:lstStyle/>
-                    <a:p>
-                      <a:pPr algn="ctr"/>
-                      <a:r>
-                        <a:rPr sz="1000" b="0">
-                          <a:solidFill>
-                            <a:srgbClr val="000000"/>
-                          </a:solidFill>
-                          <a:latin typeface="맑은 고딕"/>
-                          <a:ea typeface="맑은 고딕"/>
-                          <a:cs typeface="맑은 고딕"/>
-                        </a:rPr>
-                        <a:t>예약 </a:t>
-                      </a:r>
-                      <a:r>
-                        <a:rPr sz="900" b="0">
-                          <a:solidFill>
-                            <a:srgbClr val="000000"/>
-                          </a:solidFill>
-                          <a:latin typeface="맑은 고딕"/>
-                          <a:ea typeface="맑은 고딕"/>
-                          <a:cs typeface="맑은 고딕"/>
-                        </a:rPr>
-                        <a:t>(새벽)</a:t>
-                      </a:r>
-                    </a:p>
-                  </a:txBody>
-                  <a:tcPr anchor="ctr" marL="36000" marR="36000" marT="0" marB="0">
-                    <a:lnL w="9525" cap="flat">
-                      <a:solidFill>
-                        <a:srgbClr val="BFBFBF"/>
-                      </a:solidFill>
-                    </a:lnL>
-                    <a:lnR w="9525" cap="flat">
-                      <a:solidFill>
-                        <a:srgbClr val="BFBFBF"/>
-                      </a:solidFill>
-                    </a:lnR>
-                    <a:lnT w="9525" cap="flat">
-                      <a:solidFill>
-                        <a:srgbClr val="BFBFBF"/>
-                      </a:solidFill>
-                    </a:lnT>
-                    <a:lnB w="9525" cap="flat">
-                      <a:solidFill>
-                        <a:srgbClr val="BFBFBF"/>
-                      </a:solidFill>
-                    </a:lnB>
-                    <a:solidFill>
-                      <a:srgbClr val="FFFFFF"/>
-                    </a:solidFill>
-                  </a:tcPr>
-                </a:tc>
-                <a:tc>
-                  <a:txBody>
-                    <a:bodyPr wrap="square"/>
-                    <a:lstStyle/>
-                    <a:p>
-                      <a:pPr algn="ctr"/>
-                      <a:r>
-                        <a:rPr sz="1000" b="0">
-                          <a:solidFill>
-                            <a:srgbClr val="000000"/>
-                          </a:solidFill>
-                          <a:latin typeface="맑은 고딕"/>
-                          <a:ea typeface="맑은 고딕"/>
-                          <a:cs typeface="맑은 고딕"/>
-                        </a:rPr>
-                        <a:t>대용량</a:t>
-                      </a:r>
-                    </a:p>
-                  </a:txBody>
-                  <a:tcPr anchor="ctr" marL="36000" marR="36000" marT="0" marB="0">
-                    <a:lnL w="9525" cap="flat">
-                      <a:solidFill>
-                        <a:srgbClr val="BFBFBF"/>
-                      </a:solidFill>
-                    </a:lnL>
-                    <a:lnR w="9525" cap="flat">
-                      <a:solidFill>
-                        <a:srgbClr val="BFBFBF"/>
-                      </a:solidFill>
-                    </a:lnR>
-                    <a:lnT w="9525" cap="flat">
-                      <a:solidFill>
-                        <a:srgbClr val="BFBFBF"/>
-                      </a:solidFill>
-                    </a:lnT>
-                    <a:lnB w="9525" cap="flat">
-                      <a:solidFill>
-                        <a:srgbClr val="BFBFBF"/>
-                      </a:solidFill>
-                    </a:lnB>
-                    <a:solidFill>
-                      <a:srgbClr val="FFFFFF"/>
-                    </a:solidFill>
-                  </a:tcPr>
-                </a:tc>
-              </a:tr>
-              <a:tr h="561600">
-                <a:tc>
-                  <a:txBody>
-                    <a:bodyPr wrap="square"/>
-                    <a:lstStyle/>
-                    <a:p>
-                      <a:pPr algn="ctr"/>
-                      <a:r>
-                        <a:rPr sz="1000" b="1">
-                          <a:solidFill>
-                            <a:srgbClr val="000000"/>
-                          </a:solidFill>
-                          <a:latin typeface="맑은 고딕"/>
-                          <a:ea typeface="맑은 고딕"/>
-                          <a:cs typeface="맑은 고딕"/>
-                        </a:rPr>
-                        <a:t>트레이더스</a:t>
-                      </a:r>
-                    </a:p>
-                  </a:txBody>
-                  <a:tcPr anchor="ctr" marL="36000" marR="36000" marT="0" marB="0">
-                    <a:lnL w="9525" cap="flat">
-                      <a:solidFill>
-                        <a:srgbClr val="BFBFBF"/>
-                      </a:solidFill>
-                    </a:lnL>
-                    <a:lnR w="9525" cap="flat">
-                      <a:solidFill>
-                        <a:srgbClr val="BFBFBF"/>
-                      </a:solidFill>
-                    </a:lnR>
-                    <a:lnT w="9525" cap="flat">
-                      <a:solidFill>
-                        <a:srgbClr val="BFBFBF"/>
-                      </a:solidFill>
-                    </a:lnT>
-                    <a:lnB w="9525" cap="flat">
-                      <a:solidFill>
-                        <a:srgbClr val="BFBFBF"/>
-                      </a:solidFill>
-                    </a:lnB>
-                    <a:solidFill>
-                      <a:srgbClr val="FFFFFF"/>
-                    </a:solidFill>
-                  </a:tcPr>
-                </a:tc>
-                <a:tc>
-                  <a:txBody>
-                    <a:bodyPr wrap="square"/>
-                    <a:lstStyle/>
-                    <a:p>
-                      <a:pPr algn="ctr"/>
-                      <a:r>
-                        <a:rPr sz="1000" b="0">
-                          <a:solidFill>
-                            <a:srgbClr val="000000"/>
-                          </a:solidFill>
-                          <a:latin typeface="맑은 고딕"/>
-                          <a:ea typeface="맑은 고딕"/>
-                          <a:cs typeface="맑은 고딕"/>
-                        </a:rPr>
-                        <a:t>예약</a:t>
-                      </a:r>
-                    </a:p>
-                  </a:txBody>
-                  <a:tcPr anchor="ctr" marL="36000" marR="36000" marT="0" marB="0">
-                    <a:lnL w="9525" cap="flat">
-                      <a:solidFill>
-                        <a:srgbClr val="BFBFBF"/>
-                      </a:solidFill>
-                    </a:lnL>
-                    <a:lnR w="9525" cap="flat">
-                      <a:solidFill>
-                        <a:srgbClr val="BFBFBF"/>
-                      </a:solidFill>
-                    </a:lnR>
-                    <a:lnT w="9525" cap="flat">
-                      <a:solidFill>
-                        <a:srgbClr val="BFBFBF"/>
-                      </a:solidFill>
-                    </a:lnT>
-                    <a:lnB w="9525" cap="flat">
-                      <a:solidFill>
-                        <a:srgbClr val="BFBFBF"/>
-                      </a:solidFill>
-                    </a:lnB>
-                    <a:solidFill>
-                      <a:srgbClr val="FFFFFF"/>
-                    </a:solidFill>
-                  </a:tcPr>
-                </a:tc>
-                <a:tc>
-                  <a:txBody>
-                    <a:bodyPr wrap="square"/>
-                    <a:lstStyle/>
-                    <a:p>
-                      <a:pPr algn="ctr"/>
-                      <a:r>
-                        <a:rPr sz="1000" b="0">
-                          <a:solidFill>
-                            <a:srgbClr val="000000"/>
-                          </a:solidFill>
-                          <a:latin typeface="맑은 고딕"/>
-                          <a:ea typeface="맑은 고딕"/>
-                          <a:cs typeface="맑은 고딕"/>
-                        </a:rPr>
-                        <a:t>대용량</a:t>
-                      </a:r>
-                    </a:p>
-                  </a:txBody>
-                  <a:tcPr anchor="ctr" marL="36000" marR="36000" marT="0" marB="0">
-                    <a:lnL w="9525" cap="flat">
-                      <a:solidFill>
-                        <a:srgbClr val="BFBFBF"/>
-                      </a:solidFill>
-                    </a:lnL>
-                    <a:lnR w="9525" cap="flat">
-                      <a:solidFill>
-                        <a:srgbClr val="BFBFBF"/>
-                      </a:solidFill>
-                    </a:lnR>
-                    <a:lnT w="9525" cap="flat">
-                      <a:solidFill>
-                        <a:srgbClr val="BFBFBF"/>
-                      </a:solidFill>
-                    </a:lnT>
-                    <a:lnB w="9525" cap="flat">
-                      <a:solidFill>
-                        <a:srgbClr val="BFBFBF"/>
-                      </a:solidFill>
-                    </a:lnB>
-                    <a:solidFill>
-                      <a:srgbClr val="FFFFFF"/>
-                    </a:solidFill>
-                  </a:tcPr>
-                </a:tc>
-              </a:tr>
-              <a:tr h="561600">
-                <a:tc>
-                  <a:txBody>
-                    <a:bodyPr wrap="square"/>
-                    <a:lstStyle/>
-                    <a:p>
-                      <a:pPr algn="ctr"/>
-                      <a:r>
-                        <a:rPr sz="1000" b="1">
-                          <a:solidFill>
-                            <a:srgbClr val="000000"/>
-                          </a:solidFill>
-                          <a:latin typeface="맑은 고딕"/>
-                          <a:ea typeface="맑은 고딕"/>
-                          <a:cs typeface="맑은 고딕"/>
-                        </a:rPr>
-                        <a:t>바로퀵</a:t>
-                      </a:r>
-                    </a:p>
-                  </a:txBody>
-                  <a:tcPr anchor="ctr" marL="36000" marR="36000" marT="0" marB="0">
-                    <a:lnL w="9525" cap="flat">
-                      <a:solidFill>
-                        <a:srgbClr val="BFBFBF"/>
-                      </a:solidFill>
-                    </a:lnL>
-                    <a:lnR w="9525" cap="flat">
-                      <a:solidFill>
-                        <a:srgbClr val="BFBFBF"/>
-                      </a:solidFill>
-                    </a:lnR>
-                    <a:lnT w="9525" cap="flat">
-                      <a:solidFill>
-                        <a:srgbClr val="BFBFBF"/>
-                      </a:solidFill>
-                    </a:lnT>
-                    <a:lnB w="9525" cap="flat">
-                      <a:solidFill>
-                        <a:srgbClr val="BFBFBF"/>
-                      </a:solidFill>
-                    </a:lnB>
-                    <a:solidFill>
-                      <a:srgbClr val="FFFFFF"/>
-                    </a:solidFill>
-                  </a:tcPr>
-                </a:tc>
-                <a:tc>
-                  <a:txBody>
-                    <a:bodyPr wrap="square"/>
-                    <a:lstStyle/>
-                    <a:p>
-                      <a:pPr algn="ctr"/>
-                      <a:r>
-                        <a:rPr sz="1000" b="0">
-                          <a:solidFill>
-                            <a:srgbClr val="000000"/>
-                          </a:solidFill>
-                          <a:latin typeface="맑은 고딕"/>
-                          <a:ea typeface="맑은 고딕"/>
-                          <a:cs typeface="맑은 고딕"/>
-                        </a:rPr>
-                        <a:t>빠름 </a:t>
+                        <a:t>바로퀵 </a:t>
                       </a:r>
                       <a:r>
                         <a:rPr sz="900" b="0">
@@ -4137,6 +3729,123 @@
                     <a:p>
                       <a:pPr algn="ctr"/>
                       <a:r>
+                        <a:rPr sz="1000" b="1">
+                          <a:solidFill>
+                            <a:srgbClr val="002060"/>
+                          </a:solidFill>
+                          <a:latin typeface="맑은 고딕"/>
+                          <a:ea typeface="맑은 고딕"/>
+                          <a:cs typeface="맑은 고딕"/>
+                        </a:rPr>
+                        <a:t>★ 2시간 배송 </a:t>
+                      </a:r>
+                      <a:r>
+                        <a:rPr sz="900" b="1">
+                          <a:solidFill>
+                            <a:srgbClr val="002060"/>
+                          </a:solidFill>
+                          <a:latin typeface="맑은 고딕"/>
+                          <a:ea typeface="맑은 고딕"/>
+                          <a:cs typeface="맑은 고딕"/>
+                        </a:rPr>
+                        <a:t>(신규)</a:t>
+                      </a:r>
+                    </a:p>
+                  </a:txBody>
+                  <a:tcPr anchor="ctr" marL="36000" marR="36000" marT="0" marB="0">
+                    <a:lnL w="9525" cap="flat">
+                      <a:solidFill>
+                        <a:srgbClr val="BFBFBF"/>
+                      </a:solidFill>
+                    </a:lnL>
+                    <a:lnR w="9525" cap="flat">
+                      <a:solidFill>
+                        <a:srgbClr val="BFBFBF"/>
+                      </a:solidFill>
+                    </a:lnR>
+                    <a:lnT w="9525" cap="flat">
+                      <a:solidFill>
+                        <a:srgbClr val="BFBFBF"/>
+                      </a:solidFill>
+                    </a:lnT>
+                    <a:lnB w="9525" cap="flat">
+                      <a:solidFill>
+                        <a:srgbClr val="BFBFBF"/>
+                      </a:solidFill>
+                    </a:lnB>
+                    <a:solidFill>
+                      <a:srgbClr val="DEEBF7"/>
+                    </a:solidFill>
+                  </a:tcPr>
+                </a:tc>
+              </a:tr>
+              <a:tr h="1495800">
+                <a:tc>
+                  <a:txBody>
+                    <a:bodyPr wrap="square"/>
+                    <a:lstStyle/>
+                    <a:p>
+                      <a:pPr algn="ctr"/>
+                      <a:r>
+                        <a:rPr sz="1000" b="1">
+                          <a:solidFill>
+                            <a:srgbClr val="000000"/>
+                          </a:solidFill>
+                          <a:latin typeface="맑은 고딕"/>
+                          <a:ea typeface="맑은 고딕"/>
+                          <a:cs typeface="맑은 고딕"/>
+                        </a:rPr>
+                        <a:t>예약</a:t>
+                      </a:r>
+                    </a:p>
+                    <a:p>
+                      <a:pPr algn="ctr"/>
+                      <a:r>
+                        <a:rPr sz="900" b="1">
+                          <a:solidFill>
+                            <a:srgbClr val="000000"/>
+                          </a:solidFill>
+                          <a:latin typeface="맑은 고딕"/>
+                          <a:ea typeface="맑은 고딕"/>
+                          <a:cs typeface="맑은 고딕"/>
+                        </a:rPr>
+                        <a:t>(익일~)</a:t>
+                      </a:r>
+                    </a:p>
+                  </a:txBody>
+                  <a:tcPr anchor="ctr" marL="36000" marR="36000" marT="0" marB="0">
+                    <a:lnL w="9525" cap="flat">
+                      <a:solidFill>
+                        <a:srgbClr val="BFBFBF"/>
+                      </a:solidFill>
+                    </a:lnL>
+                    <a:lnR w="9525" cap="flat">
+                      <a:solidFill>
+                        <a:srgbClr val="BFBFBF"/>
+                      </a:solidFill>
+                    </a:lnR>
+                    <a:lnT w="9525" cap="flat">
+                      <a:solidFill>
+                        <a:srgbClr val="BFBFBF"/>
+                      </a:solidFill>
+                    </a:lnT>
+                    <a:lnB w="9525" cap="flat">
+                      <a:solidFill>
+                        <a:srgbClr val="BFBFBF"/>
+                      </a:solidFill>
+                    </a:lnB>
+                    <a:solidFill>
+                      <a:srgbClr val="EAEEF6"/>
+                    </a:solidFill>
+                  </a:tcPr>
+                </a:tc>
+                <a:tc>
+                  <a:txBody>
+                    <a:bodyPr wrap="square"/>
+                    <a:lstStyle/>
+                    <a:p>
+                      <a:pPr algn="ctr"/>
+                      <a:r>
                         <a:rPr sz="1000" b="0">
                           <a:solidFill>
                             <a:srgbClr val="000000"/>
@@ -4145,7 +3854,52 @@
                           <a:ea typeface="맑은 고딕"/>
                           <a:cs typeface="맑은 고딕"/>
                         </a:rPr>
-                        <a:t>소량</a:t>
+                        <a:t>—</a:t>
+                      </a:r>
+                    </a:p>
+                  </a:txBody>
+                  <a:tcPr anchor="ctr" marL="36000" marR="36000" marT="0" marB="0">
+                    <a:lnL w="9525" cap="flat">
+                      <a:solidFill>
+                        <a:srgbClr val="BFBFBF"/>
+                      </a:solidFill>
+                    </a:lnL>
+                    <a:lnR w="9525" cap="flat">
+                      <a:solidFill>
+                        <a:srgbClr val="BFBFBF"/>
+                      </a:solidFill>
+                    </a:lnR>
+                    <a:lnT w="9525" cap="flat">
+                      <a:solidFill>
+                        <a:srgbClr val="BFBFBF"/>
+                      </a:solidFill>
+                    </a:lnT>
+                    <a:lnB w="9525" cap="flat">
+                      <a:solidFill>
+                        <a:srgbClr val="BFBFBF"/>
+                      </a:solidFill>
+                    </a:lnB>
+                    <a:solidFill>
+                      <a:srgbClr val="FFFFFF"/>
+                    </a:solidFill>
+                  </a:tcPr>
+                </a:tc>
+                <a:tc>
+                  <a:txBody>
+                    <a:bodyPr wrap="square"/>
+                    <a:lstStyle/>
+                    <a:p>
+                      <a:pPr algn="ctr"/>
+                      <a:r>
+                        <a:rPr sz="1000" b="0">
+                          <a:solidFill>
+                            <a:srgbClr val="000000"/>
+                          </a:solidFill>
+                          <a:latin typeface="맑은 고딕"/>
+                          <a:ea typeface="맑은 고딕"/>
+                          <a:cs typeface="맑은 고딕"/>
+                        </a:rPr>
+                        <a:t>주간·새벽·트레이더스</a:t>
                       </a:r>
                     </a:p>
                   </a:txBody>
@@ -4176,143 +3930,6 @@
                   </a:tcPr>
                 </a:tc>
               </a:tr>
-              <a:tr h="561600">
-                <a:tc>
-                  <a:txBody>
-                    <a:bodyPr wrap="square"/>
-                    <a:lstStyle/>
-                    <a:p>
-                      <a:pPr algn="ctr"/>
-                      <a:r>
-                        <a:rPr sz="1000" b="1">
-                          <a:solidFill>
-                            <a:srgbClr val="002060"/>
-                          </a:solidFill>
-                          <a:latin typeface="맑은 고딕"/>
-                          <a:ea typeface="맑은 고딕"/>
-                          <a:cs typeface="맑은 고딕"/>
-                        </a:rPr>
-                        <a:t>✗ 공백</a:t>
-                      </a:r>
-                    </a:p>
-                  </a:txBody>
-                  <a:tcPr anchor="ctr" marL="36000" marR="36000" marT="0" marB="0">
-                    <a:lnL w="9525" cap="flat">
-                      <a:solidFill>
-                        <a:srgbClr val="BFBFBF"/>
-                      </a:solidFill>
-                    </a:lnL>
-                    <a:lnR w="9525" cap="flat">
-                      <a:solidFill>
-                        <a:srgbClr val="BFBFBF"/>
-                      </a:solidFill>
-                    </a:lnR>
-                    <a:lnT w="9525" cap="flat">
-                      <a:solidFill>
-                        <a:srgbClr val="BFBFBF"/>
-                      </a:solidFill>
-                    </a:lnT>
-                    <a:lnB w="9525" cap="flat">
-                      <a:solidFill>
-                        <a:srgbClr val="BFBFBF"/>
-                      </a:solidFill>
-                    </a:lnB>
-                    <a:solidFill>
-                      <a:srgbClr val="DEEBF7"/>
-                    </a:solidFill>
-                  </a:tcPr>
-                </a:tc>
-                <a:tc>
-                  <a:txBody>
-                    <a:bodyPr wrap="square"/>
-                    <a:lstStyle/>
-                    <a:p>
-                      <a:pPr algn="ctr"/>
-                      <a:r>
-                        <a:rPr sz="1000" b="1">
-                          <a:solidFill>
-                            <a:srgbClr val="002060"/>
-                          </a:solidFill>
-                          <a:latin typeface="맑은 고딕"/>
-                          <a:ea typeface="맑은 고딕"/>
-                          <a:cs typeface="맑은 고딕"/>
-                        </a:rPr>
-                        <a:t>빠름</a:t>
-                      </a:r>
-                    </a:p>
-                  </a:txBody>
-                  <a:tcPr anchor="ctr" marL="36000" marR="36000" marT="0" marB="0">
-                    <a:lnL w="9525" cap="flat">
-                      <a:solidFill>
-                        <a:srgbClr val="BFBFBF"/>
-                      </a:solidFill>
-                    </a:lnL>
-                    <a:lnR w="9525" cap="flat">
-                      <a:solidFill>
-                        <a:srgbClr val="BFBFBF"/>
-                      </a:solidFill>
-                    </a:lnR>
-                    <a:lnT w="9525" cap="flat">
-                      <a:solidFill>
-                        <a:srgbClr val="BFBFBF"/>
-                      </a:solidFill>
-                    </a:lnT>
-                    <a:lnB w="9525" cap="flat">
-                      <a:solidFill>
-                        <a:srgbClr val="BFBFBF"/>
-                      </a:solidFill>
-                    </a:lnB>
-                    <a:solidFill>
-                      <a:srgbClr val="DEEBF7"/>
-                    </a:solidFill>
-                  </a:tcPr>
-                </a:tc>
-                <a:tc>
-                  <a:txBody>
-                    <a:bodyPr wrap="square"/>
-                    <a:lstStyle/>
-                    <a:p>
-                      <a:pPr algn="ctr"/>
-                      <a:r>
-                        <a:rPr sz="1000" b="1">
-                          <a:solidFill>
-                            <a:srgbClr val="002060"/>
-                          </a:solidFill>
-                          <a:latin typeface="맑은 고딕"/>
-                          <a:ea typeface="맑은 고딕"/>
-                          <a:cs typeface="맑은 고딕"/>
-                        </a:rPr>
-                        <a:t>대용량</a:t>
-                      </a:r>
-                    </a:p>
-                  </a:txBody>
-                  <a:tcPr anchor="ctr" marL="36000" marR="36000" marT="0" marB="0">
-                    <a:lnL w="9525" cap="flat">
-                      <a:solidFill>
-                        <a:srgbClr val="BFBFBF"/>
-                      </a:solidFill>
-                    </a:lnL>
-                    <a:lnR w="9525" cap="flat">
-                      <a:solidFill>
-                        <a:srgbClr val="BFBFBF"/>
-                      </a:solidFill>
-                    </a:lnR>
-                    <a:lnT w="9525" cap="flat">
-                      <a:solidFill>
-                        <a:srgbClr val="BFBFBF"/>
-                      </a:solidFill>
-                    </a:lnT>
-                    <a:lnB w="9525" cap="flat">
-                      <a:solidFill>
-                        <a:srgbClr val="BFBFBF"/>
-                      </a:solidFill>
-                    </a:lnB>
-                    <a:solidFill>
-                      <a:srgbClr val="DEEBF7"/>
-                    </a:solidFill>
-                  </a:tcPr>
-                </a:tc>
-              </a:tr>
             </a:tbl>
           </a:graphicData>
         </a:graphic>
@@ -4325,8 +3942,8 @@
         </p:nvSpPr>
         <p:spPr>
           <a:xfrm>
-            <a:off x="4190400" y="1504800"/>
-            <a:ext cx="5292000" cy="230400"/>
+            <a:off x="4631400" y="1504800"/>
+            <a:ext cx="4851000" cy="237600"/>
           </a:xfrm>
           <a:prstGeom prst="rect">
             <a:avLst/>
@@ -4362,8 +3979,8 @@
         </p:nvSpPr>
         <p:spPr>
           <a:xfrm>
-            <a:off x="4190400" y="1789200"/>
-            <a:ext cx="737999" cy="223200"/>
+            <a:off x="4829400" y="1742400"/>
+            <a:ext cx="4653000" cy="237600"/>
           </a:xfrm>
           <a:prstGeom prst="rect">
             <a:avLst/>
@@ -4371,22 +3988,33 @@
           <a:noFill/>
         </p:spPr>
         <p:txBody>
-          <a:bodyPr wrap="square" anchor="ctr" lIns="0" rIns="0" tIns="0" bIns="0">
+          <a:bodyPr wrap="square" anchor="t" lIns="0" rIns="0" tIns="0" bIns="0">
             <a:spAutoFit/>
           </a:bodyPr>
           <a:lstStyle/>
           <a:p>
-            <a:pPr algn="ctr"/>
-            <a:r>
-              <a:rPr sz="900" b="1">
-                <a:solidFill>
-                  <a:srgbClr val="595959"/>
+            <a:pPr algn="l"/>
+            <a:r>
+              <a:rPr sz="1100" b="0">
+                <a:solidFill>
+                  <a:srgbClr val="000000"/>
                 </a:solidFill>
                 <a:latin typeface="맑은 고딕"/>
                 <a:ea typeface="맑은 고딕"/>
                 <a:cs typeface="맑은 고딕"/>
               </a:rPr>
-              <a:t>속도 ↓ / 물량 →</a:t>
+              <a:t>- 거점 : 유휴 점포 PP센터 </a:t>
+            </a:r>
+            <a:r>
+              <a:rPr sz="1000" b="0">
+                <a:solidFill>
+                  <a:srgbClr val="000000"/>
+                </a:solidFill>
+                <a:latin typeface="맑은 고딕"/>
+                <a:ea typeface="맑은 고딕"/>
+                <a:cs typeface="맑은 고딕"/>
+              </a:rPr>
+              <a:t>(반경 내 즉시 출고)</a:t>
             </a:r>
           </a:p>
         </p:txBody>
@@ -4399,8 +4027,8 @@
         </p:nvSpPr>
         <p:spPr>
           <a:xfrm>
-            <a:off x="4928400" y="1789200"/>
-            <a:ext cx="2276999" cy="223200"/>
+            <a:off x="4829400" y="1980000"/>
+            <a:ext cx="4653000" cy="237600"/>
           </a:xfrm>
           <a:prstGeom prst="rect">
             <a:avLst/>
@@ -4408,14 +4036,14 @@
           <a:noFill/>
         </p:spPr>
         <p:txBody>
-          <a:bodyPr wrap="square" anchor="ctr" lIns="0" rIns="0" tIns="0" bIns="0">
+          <a:bodyPr wrap="square" anchor="t" lIns="0" rIns="0" tIns="0" bIns="0">
             <a:spAutoFit/>
           </a:bodyPr>
           <a:lstStyle/>
           <a:p>
-            <a:pPr algn="ctr"/>
-            <a:r>
-              <a:rPr sz="1100" b="1">
+            <a:pPr algn="l"/>
+            <a:r>
+              <a:rPr sz="1100" b="0">
                 <a:solidFill>
                   <a:srgbClr val="000000"/>
                 </a:solidFill>
@@ -4423,7 +4051,7 @@
                 <a:ea typeface="맑은 고딕"/>
                 <a:cs typeface="맑은 고딕"/>
               </a:rPr>
-              <a:t>소량</a:t>
+              <a:t>- 운송 : 쓱배송 사륜차 → 대용량·중량 대응</a:t>
             </a:r>
           </a:p>
         </p:txBody>
@@ -4436,8 +4064,8 @@
         </p:nvSpPr>
         <p:spPr>
           <a:xfrm>
-            <a:off x="7205400" y="1789200"/>
-            <a:ext cx="2276999" cy="223200"/>
+            <a:off x="4829400" y="2217600"/>
+            <a:ext cx="4653000" cy="237600"/>
           </a:xfrm>
           <a:prstGeom prst="rect">
             <a:avLst/>
@@ -4445,14 +4073,14 @@
           <a:noFill/>
         </p:spPr>
         <p:txBody>
-          <a:bodyPr wrap="square" anchor="ctr" lIns="0" rIns="0" tIns="0" bIns="0">
+          <a:bodyPr wrap="square" anchor="t" lIns="0" rIns="0" tIns="0" bIns="0">
             <a:spAutoFit/>
           </a:bodyPr>
           <a:lstStyle/>
           <a:p>
-            <a:pPr algn="ctr"/>
-            <a:r>
-              <a:rPr sz="1100" b="1">
+            <a:pPr algn="l"/>
+            <a:r>
+              <a:rPr sz="1100" b="0">
                 <a:solidFill>
                   <a:srgbClr val="000000"/>
                 </a:solidFill>
@@ -4460,7 +4088,18 @@
                 <a:ea typeface="맑은 고딕"/>
                 <a:cs typeface="맑은 고딕"/>
               </a:rPr>
-              <a:t>대용량</a:t>
+              <a:t>- 운영 : 20시 마감 → 2시간 내 배송 완료 </a:t>
+            </a:r>
+            <a:r>
+              <a:rPr sz="1000" b="0">
+                <a:solidFill>
+                  <a:srgbClr val="000000"/>
+                </a:solidFill>
+                <a:latin typeface="맑은 고딕"/>
+                <a:ea typeface="맑은 고딕"/>
+                <a:cs typeface="맑은 고딕"/>
+              </a:rPr>
+              <a:t>(예약배송 병행)</a:t>
             </a:r>
           </a:p>
         </p:txBody>
@@ -4473,8 +4112,8 @@
         </p:nvSpPr>
         <p:spPr>
           <a:xfrm>
-            <a:off x="4190400" y="2012400"/>
-            <a:ext cx="737999" cy="716399"/>
+            <a:off x="4829400" y="2455200"/>
+            <a:ext cx="4653000" cy="237600"/>
           </a:xfrm>
           <a:prstGeom prst="rect">
             <a:avLst/>
@@ -4482,14 +4121,14 @@
           <a:noFill/>
         </p:spPr>
         <p:txBody>
-          <a:bodyPr wrap="square" anchor="ctr" lIns="0" rIns="0" tIns="0" bIns="0">
+          <a:bodyPr wrap="square" anchor="t" lIns="0" rIns="0" tIns="0" bIns="0">
             <a:spAutoFit/>
           </a:bodyPr>
           <a:lstStyle/>
           <a:p>
-            <a:pPr algn="ctr"/>
-            <a:r>
-              <a:rPr sz="1100" b="1">
+            <a:pPr algn="l"/>
+            <a:r>
+              <a:rPr sz="1100" b="0">
                 <a:solidFill>
                   <a:srgbClr val="000000"/>
                 </a:solidFill>
@@ -4497,13 +4136,10 @@
                 <a:ea typeface="맑은 고딕"/>
                 <a:cs typeface="맑은 고딕"/>
               </a:rPr>
-              <a:t>빠름</a:t>
-            </a:r>
-          </a:p>
-          <a:p>
-            <a:pPr algn="ctr"/>
-            <a:r>
-              <a:rPr sz="1000" b="1">
+              <a:t>- 규모 : 약 15만 종 </a:t>
+            </a:r>
+            <a:r>
+              <a:rPr sz="1000" b="0">
                 <a:solidFill>
                   <a:srgbClr val="000000"/>
                 </a:solidFill>
@@ -4511,7 +4147,7 @@
                 <a:ea typeface="맑은 고딕"/>
                 <a:cs typeface="맑은 고딕"/>
               </a:rPr>
-              <a:t>(당일 1~2H)</a:t>
+              <a:t>(바로퀵 1만 종 대비 15배)</a:t>
             </a:r>
           </a:p>
         </p:txBody>
@@ -4524,8 +4160,8 @@
         </p:nvSpPr>
         <p:spPr>
           <a:xfrm>
-            <a:off x="4190400" y="2728800"/>
-            <a:ext cx="737999" cy="716399"/>
+            <a:off x="4631400" y="2800800"/>
+            <a:ext cx="4851000" cy="230400"/>
           </a:xfrm>
           <a:prstGeom prst="rect">
             <a:avLst/>
@@ -4533,448 +4169,6 @@
           <a:noFill/>
         </p:spPr>
         <p:txBody>
-          <a:bodyPr wrap="square" anchor="ctr" lIns="0" rIns="0" tIns="0" bIns="0">
-            <a:spAutoFit/>
-          </a:bodyPr>
-          <a:lstStyle/>
-          <a:p>
-            <a:pPr algn="ctr"/>
-            <a:r>
-              <a:rPr sz="1100" b="1">
-                <a:solidFill>
-                  <a:srgbClr val="000000"/>
-                </a:solidFill>
-                <a:latin typeface="맑은 고딕"/>
-                <a:ea typeface="맑은 고딕"/>
-                <a:cs typeface="맑은 고딕"/>
-              </a:rPr>
-              <a:t>예약</a:t>
-            </a:r>
-          </a:p>
-          <a:p>
-            <a:pPr algn="ctr"/>
-            <a:r>
-              <a:rPr sz="1000" b="1">
-                <a:solidFill>
-                  <a:srgbClr val="000000"/>
-                </a:solidFill>
-                <a:latin typeface="맑은 고딕"/>
-                <a:ea typeface="맑은 고딕"/>
-                <a:cs typeface="맑은 고딕"/>
-              </a:rPr>
-              <a:t>(익일~)</a:t>
-            </a:r>
-          </a:p>
-        </p:txBody>
-      </p:sp>
-      <p:sp>
-        <p:nvSpPr>
-          <p:cNvPr id="16" name="Rectangle 15"/>
-          <p:cNvSpPr/>
-          <p:nvPr/>
-        </p:nvSpPr>
-        <p:spPr>
-          <a:xfrm>
-            <a:off x="4928400" y="2012400"/>
-            <a:ext cx="2276999" cy="716399"/>
-          </a:xfrm>
-          <a:prstGeom prst="rect">
-            <a:avLst/>
-          </a:prstGeom>
-          <a:solidFill>
-            <a:srgbClr val="FFFFFF"/>
-          </a:solidFill>
-          <a:ln w="12700">
-            <a:solidFill>
-              <a:srgbClr val="BFBFBF"/>
-            </a:solidFill>
-          </a:ln>
-          <a:effectLst/>
-        </p:spPr>
-        <p:style>
-          <a:lnRef idx="1">
-            <a:schemeClr val="accent1"/>
-          </a:lnRef>
-          <a:fillRef idx="3">
-            <a:schemeClr val="accent1"/>
-          </a:fillRef>
-          <a:effectRef idx="2">
-            <a:schemeClr val="accent1"/>
-          </a:effectRef>
-          <a:fontRef idx="minor">
-            <a:schemeClr val="lt1"/>
-          </a:fontRef>
-        </p:style>
-        <p:txBody>
-          <a:bodyPr rtlCol="0" anchor="ctr"/>
-          <a:lstStyle/>
-          <a:p>
-            <a:pPr algn="ctr"/>
-          </a:p>
-        </p:txBody>
-      </p:sp>
-      <p:sp>
-        <p:nvSpPr>
-          <p:cNvPr id="17" name="TextBox 16"/>
-          <p:cNvSpPr txBox="1"/>
-          <p:nvPr/>
-        </p:nvSpPr>
-        <p:spPr>
-          <a:xfrm>
-            <a:off x="4928400" y="2012400"/>
-            <a:ext cx="2276999" cy="716399"/>
-          </a:xfrm>
-          <a:prstGeom prst="rect">
-            <a:avLst/>
-          </a:prstGeom>
-          <a:noFill/>
-        </p:spPr>
-        <p:txBody>
-          <a:bodyPr wrap="square" anchor="ctr" lIns="0" rIns="0" tIns="0" bIns="0">
-            <a:spAutoFit/>
-          </a:bodyPr>
-          <a:lstStyle/>
-          <a:p>
-            <a:pPr algn="ctr"/>
-            <a:r>
-              <a:rPr sz="1100" b="0">
-                <a:solidFill>
-                  <a:srgbClr val="000000"/>
-                </a:solidFill>
-                <a:latin typeface="맑은 고딕"/>
-                <a:ea typeface="맑은 고딕"/>
-                <a:cs typeface="맑은 고딕"/>
-              </a:rPr>
-              <a:t>바로퀵 </a:t>
-            </a:r>
-            <a:r>
-              <a:rPr sz="1000" b="0">
-                <a:solidFill>
-                  <a:srgbClr val="000000"/>
-                </a:solidFill>
-                <a:latin typeface="맑은 고딕"/>
-                <a:ea typeface="맑은 고딕"/>
-                <a:cs typeface="맑은 고딕"/>
-              </a:rPr>
-              <a:t>(1H)</a:t>
-            </a:r>
-          </a:p>
-        </p:txBody>
-      </p:sp>
-      <p:sp>
-        <p:nvSpPr>
-          <p:cNvPr id="18" name="Rectangle 17"/>
-          <p:cNvSpPr/>
-          <p:nvPr/>
-        </p:nvSpPr>
-        <p:spPr>
-          <a:xfrm>
-            <a:off x="7205400" y="2012400"/>
-            <a:ext cx="2276999" cy="716399"/>
-          </a:xfrm>
-          <a:prstGeom prst="rect">
-            <a:avLst/>
-          </a:prstGeom>
-          <a:solidFill>
-            <a:srgbClr val="DEEBF7"/>
-          </a:solidFill>
-          <a:ln w="12700">
-            <a:solidFill>
-              <a:srgbClr val="BFBFBF"/>
-            </a:solidFill>
-          </a:ln>
-          <a:effectLst/>
-        </p:spPr>
-        <p:style>
-          <a:lnRef idx="1">
-            <a:schemeClr val="accent1"/>
-          </a:lnRef>
-          <a:fillRef idx="3">
-            <a:schemeClr val="accent1"/>
-          </a:fillRef>
-          <a:effectRef idx="2">
-            <a:schemeClr val="accent1"/>
-          </a:effectRef>
-          <a:fontRef idx="minor">
-            <a:schemeClr val="lt1"/>
-          </a:fontRef>
-        </p:style>
-        <p:txBody>
-          <a:bodyPr rtlCol="0" anchor="ctr"/>
-          <a:lstStyle/>
-          <a:p>
-            <a:pPr algn="ctr"/>
-          </a:p>
-        </p:txBody>
-      </p:sp>
-      <p:sp>
-        <p:nvSpPr>
-          <p:cNvPr id="19" name="TextBox 18"/>
-          <p:cNvSpPr txBox="1"/>
-          <p:nvPr/>
-        </p:nvSpPr>
-        <p:spPr>
-          <a:xfrm>
-            <a:off x="7205400" y="2012400"/>
-            <a:ext cx="2276999" cy="716399"/>
-          </a:xfrm>
-          <a:prstGeom prst="rect">
-            <a:avLst/>
-          </a:prstGeom>
-          <a:noFill/>
-        </p:spPr>
-        <p:txBody>
-          <a:bodyPr wrap="square" anchor="ctr" lIns="0" rIns="0" tIns="0" bIns="0">
-            <a:spAutoFit/>
-          </a:bodyPr>
-          <a:lstStyle/>
-          <a:p>
-            <a:pPr algn="ctr"/>
-            <a:r>
-              <a:rPr sz="1100" b="1">
-                <a:solidFill>
-                  <a:srgbClr val="002060"/>
-                </a:solidFill>
-                <a:latin typeface="맑은 고딕"/>
-                <a:ea typeface="맑은 고딕"/>
-                <a:cs typeface="맑은 고딕"/>
-              </a:rPr>
-              <a:t>★ 2시간 배송 </a:t>
-            </a:r>
-            <a:r>
-              <a:rPr sz="1000" b="1">
-                <a:solidFill>
-                  <a:srgbClr val="002060"/>
-                </a:solidFill>
-                <a:latin typeface="맑은 고딕"/>
-                <a:ea typeface="맑은 고딕"/>
-                <a:cs typeface="맑은 고딕"/>
-              </a:rPr>
-              <a:t>(신규)</a:t>
-            </a:r>
-          </a:p>
-        </p:txBody>
-      </p:sp>
-      <p:sp>
-        <p:nvSpPr>
-          <p:cNvPr id="20" name="Rectangle 19"/>
-          <p:cNvSpPr/>
-          <p:nvPr/>
-        </p:nvSpPr>
-        <p:spPr>
-          <a:xfrm>
-            <a:off x="4928400" y="2728800"/>
-            <a:ext cx="2276999" cy="716399"/>
-          </a:xfrm>
-          <a:prstGeom prst="rect">
-            <a:avLst/>
-          </a:prstGeom>
-          <a:solidFill>
-            <a:srgbClr val="FFFFFF"/>
-          </a:solidFill>
-          <a:ln w="12700">
-            <a:solidFill>
-              <a:srgbClr val="BFBFBF"/>
-            </a:solidFill>
-          </a:ln>
-          <a:effectLst/>
-        </p:spPr>
-        <p:style>
-          <a:lnRef idx="1">
-            <a:schemeClr val="accent1"/>
-          </a:lnRef>
-          <a:fillRef idx="3">
-            <a:schemeClr val="accent1"/>
-          </a:fillRef>
-          <a:effectRef idx="2">
-            <a:schemeClr val="accent1"/>
-          </a:effectRef>
-          <a:fontRef idx="minor">
-            <a:schemeClr val="lt1"/>
-          </a:fontRef>
-        </p:style>
-        <p:txBody>
-          <a:bodyPr rtlCol="0" anchor="ctr"/>
-          <a:lstStyle/>
-          <a:p>
-            <a:pPr algn="ctr"/>
-          </a:p>
-        </p:txBody>
-      </p:sp>
-      <p:sp>
-        <p:nvSpPr>
-          <p:cNvPr id="21" name="TextBox 20"/>
-          <p:cNvSpPr txBox="1"/>
-          <p:nvPr/>
-        </p:nvSpPr>
-        <p:spPr>
-          <a:xfrm>
-            <a:off x="4928400" y="2728800"/>
-            <a:ext cx="2276999" cy="716399"/>
-          </a:xfrm>
-          <a:prstGeom prst="rect">
-            <a:avLst/>
-          </a:prstGeom>
-          <a:noFill/>
-        </p:spPr>
-        <p:txBody>
-          <a:bodyPr wrap="square" anchor="ctr" lIns="0" rIns="0" tIns="0" bIns="0">
-            <a:spAutoFit/>
-          </a:bodyPr>
-          <a:lstStyle/>
-          <a:p>
-            <a:pPr algn="ctr"/>
-            <a:r>
-              <a:rPr sz="1100" b="0">
-                <a:solidFill>
-                  <a:srgbClr val="000000"/>
-                </a:solidFill>
-                <a:latin typeface="맑은 고딕"/>
-                <a:ea typeface="맑은 고딕"/>
-                <a:cs typeface="맑은 고딕"/>
-              </a:rPr>
-              <a:t>—</a:t>
-            </a:r>
-          </a:p>
-        </p:txBody>
-      </p:sp>
-      <p:sp>
-        <p:nvSpPr>
-          <p:cNvPr id="22" name="Rectangle 21"/>
-          <p:cNvSpPr/>
-          <p:nvPr/>
-        </p:nvSpPr>
-        <p:spPr>
-          <a:xfrm>
-            <a:off x="7205400" y="2728800"/>
-            <a:ext cx="2276999" cy="716399"/>
-          </a:xfrm>
-          <a:prstGeom prst="rect">
-            <a:avLst/>
-          </a:prstGeom>
-          <a:solidFill>
-            <a:srgbClr val="FFFFFF"/>
-          </a:solidFill>
-          <a:ln w="12700">
-            <a:solidFill>
-              <a:srgbClr val="BFBFBF"/>
-            </a:solidFill>
-          </a:ln>
-          <a:effectLst/>
-        </p:spPr>
-        <p:style>
-          <a:lnRef idx="1">
-            <a:schemeClr val="accent1"/>
-          </a:lnRef>
-          <a:fillRef idx="3">
-            <a:schemeClr val="accent1"/>
-          </a:fillRef>
-          <a:effectRef idx="2">
-            <a:schemeClr val="accent1"/>
-          </a:effectRef>
-          <a:fontRef idx="minor">
-            <a:schemeClr val="lt1"/>
-          </a:fontRef>
-        </p:style>
-        <p:txBody>
-          <a:bodyPr rtlCol="0" anchor="ctr"/>
-          <a:lstStyle/>
-          <a:p>
-            <a:pPr algn="ctr"/>
-          </a:p>
-        </p:txBody>
-      </p:sp>
-      <p:sp>
-        <p:nvSpPr>
-          <p:cNvPr id="23" name="TextBox 22"/>
-          <p:cNvSpPr txBox="1"/>
-          <p:nvPr/>
-        </p:nvSpPr>
-        <p:spPr>
-          <a:xfrm>
-            <a:off x="7205400" y="2728800"/>
-            <a:ext cx="2276999" cy="716399"/>
-          </a:xfrm>
-          <a:prstGeom prst="rect">
-            <a:avLst/>
-          </a:prstGeom>
-          <a:noFill/>
-        </p:spPr>
-        <p:txBody>
-          <a:bodyPr wrap="square" anchor="ctr" lIns="0" rIns="0" tIns="0" bIns="0">
-            <a:spAutoFit/>
-          </a:bodyPr>
-          <a:lstStyle/>
-          <a:p>
-            <a:pPr algn="ctr"/>
-            <a:r>
-              <a:rPr sz="1100" b="0">
-                <a:solidFill>
-                  <a:srgbClr val="000000"/>
-                </a:solidFill>
-                <a:latin typeface="맑은 고딕"/>
-                <a:ea typeface="맑은 고딕"/>
-                <a:cs typeface="맑은 고딕"/>
-              </a:rPr>
-              <a:t>주간·새벽·트레이더스</a:t>
-            </a:r>
-          </a:p>
-        </p:txBody>
-      </p:sp>
-      <p:sp>
-        <p:nvSpPr>
-          <p:cNvPr id="24" name="TextBox 23"/>
-          <p:cNvSpPr txBox="1"/>
-          <p:nvPr/>
-        </p:nvSpPr>
-        <p:spPr>
-          <a:xfrm>
-            <a:off x="4388400" y="3499200"/>
-            <a:ext cx="5093999" cy="223200"/>
-          </a:xfrm>
-          <a:prstGeom prst="rect">
-            <a:avLst/>
-          </a:prstGeom>
-          <a:noFill/>
-        </p:spPr>
-        <p:txBody>
-          <a:bodyPr wrap="square" anchor="t" lIns="0" rIns="0" tIns="0" bIns="0">
-            <a:spAutoFit/>
-          </a:bodyPr>
-          <a:lstStyle/>
-          <a:p>
-            <a:pPr algn="l"/>
-            <a:r>
-              <a:rPr sz="1100" b="0">
-                <a:solidFill>
-                  <a:srgbClr val="000000"/>
-                </a:solidFill>
-                <a:latin typeface="맑은 고딕"/>
-                <a:ea typeface="맑은 고딕"/>
-                <a:cs typeface="맑은 고딕"/>
-              </a:rPr>
-              <a:t>- 거점 유휴 점포 · 운송 사륜차 · 운영 20시 마감 2시간 · 규모 15만 종</a:t>
-            </a:r>
-          </a:p>
-        </p:txBody>
-      </p:sp>
-      <p:sp>
-        <p:nvSpPr>
-          <p:cNvPr id="25" name="TextBox 24"/>
-          <p:cNvSpPr txBox="1"/>
-          <p:nvPr/>
-        </p:nvSpPr>
-        <p:spPr>
-          <a:xfrm>
-            <a:off x="4190400" y="3823199"/>
-            <a:ext cx="5292000" cy="230400"/>
-          </a:xfrm>
-          <a:prstGeom prst="rect">
-            <a:avLst/>
-          </a:prstGeom>
-          <a:noFill/>
-        </p:spPr>
-        <p:txBody>
           <a:bodyPr wrap="square" anchor="t" lIns="0" rIns="0" tIns="0" bIns="0">
             <a:spAutoFit/>
           </a:bodyPr>
@@ -4997,14 +4191,14 @@
       </p:sp>
       <p:cxnSp>
         <p:nvCxnSpPr>
-          <p:cNvPr id="26" name="Connector 25"/>
+          <p:cNvPr id="16" name="Connector 15"/>
           <p:cNvCxnSpPr/>
           <p:nvPr/>
         </p:nvCxnSpPr>
         <p:spPr>
           <a:xfrm>
-            <a:off x="4262400" y="4197600"/>
-            <a:ext cx="0" cy="1349999"/>
+            <a:off x="4703400" y="3175200"/>
+            <a:ext cx="0" cy="2404799"/>
           </a:xfrm>
           <a:prstGeom prst="bentConnector3">
             <a:avLst/>
@@ -5034,13 +4228,13 @@
       </p:cxnSp>
       <p:sp>
         <p:nvSpPr>
-          <p:cNvPr id="27" name="Oval 26"/>
+          <p:cNvPr id="17" name="Oval 16"/>
           <p:cNvSpPr/>
           <p:nvPr/>
         </p:nvSpPr>
         <p:spPr>
           <a:xfrm>
-            <a:off x="4215600" y="4150800"/>
+            <a:off x="4656600" y="3128400"/>
             <a:ext cx="93600" cy="93600"/>
           </a:xfrm>
           <a:prstGeom prst="ellipse">
@@ -5080,13 +4274,13 @@
       </p:sp>
       <p:sp>
         <p:nvSpPr>
-          <p:cNvPr id="28" name="TextBox 27"/>
+          <p:cNvPr id="18" name="TextBox 17"/>
           <p:cNvSpPr txBox="1"/>
           <p:nvPr/>
         </p:nvSpPr>
         <p:spPr>
           <a:xfrm>
-            <a:off x="4424400" y="4089600"/>
+            <a:off x="4865400" y="3067200"/>
             <a:ext cx="720000" cy="180000"/>
           </a:xfrm>
           <a:prstGeom prst="rect">
@@ -5110,21 +4304,21 @@
                 <a:ea typeface="맑은 고딕"/>
                 <a:cs typeface="맑은 고딕"/>
               </a:rPr>
-              <a:t>'26. 7월</a:t>
-            </a:r>
-          </a:p>
-        </p:txBody>
-      </p:sp>
-      <p:sp>
-        <p:nvSpPr>
-          <p:cNvPr id="29" name="TextBox 28"/>
+              <a:t>'26.7월</a:t>
+            </a:r>
+          </a:p>
+        </p:txBody>
+      </p:sp>
+      <p:sp>
+        <p:nvSpPr>
+          <p:cNvPr id="19" name="TextBox 18"/>
           <p:cNvSpPr txBox="1"/>
           <p:nvPr/>
         </p:nvSpPr>
         <p:spPr>
           <a:xfrm>
-            <a:off x="5180400" y="4089600"/>
-            <a:ext cx="4302000" cy="216000"/>
+            <a:off x="5621399" y="3067200"/>
+            <a:ext cx="3861000" cy="216000"/>
           </a:xfrm>
           <a:prstGeom prst="rect">
             <a:avLst/>
@@ -5154,13 +4348,13 @@
       </p:sp>
       <p:sp>
         <p:nvSpPr>
-          <p:cNvPr id="30" name="Oval 29"/>
+          <p:cNvPr id="20" name="Oval 19"/>
           <p:cNvSpPr/>
           <p:nvPr/>
         </p:nvSpPr>
         <p:spPr>
           <a:xfrm>
-            <a:off x="4215600" y="4600800"/>
+            <a:off x="4656600" y="3930000"/>
             <a:ext cx="93600" cy="93600"/>
           </a:xfrm>
           <a:prstGeom prst="ellipse">
@@ -5200,13 +4394,13 @@
       </p:sp>
       <p:sp>
         <p:nvSpPr>
-          <p:cNvPr id="31" name="TextBox 30"/>
+          <p:cNvPr id="21" name="TextBox 20"/>
           <p:cNvSpPr txBox="1"/>
           <p:nvPr/>
         </p:nvSpPr>
         <p:spPr>
           <a:xfrm>
-            <a:off x="4424400" y="4539600"/>
+            <a:off x="4865400" y="3868800"/>
             <a:ext cx="720000" cy="180000"/>
           </a:xfrm>
           <a:prstGeom prst="rect">
@@ -5237,14 +4431,14 @@
       </p:sp>
       <p:sp>
         <p:nvSpPr>
-          <p:cNvPr id="32" name="TextBox 31"/>
+          <p:cNvPr id="22" name="TextBox 21"/>
           <p:cNvSpPr txBox="1"/>
           <p:nvPr/>
         </p:nvSpPr>
         <p:spPr>
           <a:xfrm>
-            <a:off x="5180400" y="4539600"/>
-            <a:ext cx="4302000" cy="216000"/>
+            <a:off x="5621399" y="3868800"/>
+            <a:ext cx="3861000" cy="216000"/>
           </a:xfrm>
           <a:prstGeom prst="rect">
             <a:avLst/>
@@ -5285,13 +4479,13 @@
       </p:sp>
       <p:sp>
         <p:nvSpPr>
-          <p:cNvPr id="33" name="Oval 32"/>
+          <p:cNvPr id="23" name="Oval 22"/>
           <p:cNvSpPr/>
           <p:nvPr/>
         </p:nvSpPr>
         <p:spPr>
           <a:xfrm>
-            <a:off x="4215600" y="5050799"/>
+            <a:off x="4656600" y="4731600"/>
             <a:ext cx="93600" cy="93600"/>
           </a:xfrm>
           <a:prstGeom prst="ellipse">
@@ -5331,13 +4525,13 @@
       </p:sp>
       <p:sp>
         <p:nvSpPr>
-          <p:cNvPr id="34" name="TextBox 33"/>
+          <p:cNvPr id="24" name="TextBox 23"/>
           <p:cNvSpPr txBox="1"/>
           <p:nvPr/>
         </p:nvSpPr>
         <p:spPr>
           <a:xfrm>
-            <a:off x="4424400" y="4989599"/>
+            <a:off x="4865400" y="4670400"/>
             <a:ext cx="720000" cy="180000"/>
           </a:xfrm>
           <a:prstGeom prst="rect">
@@ -5368,14 +4562,14 @@
       </p:sp>
       <p:sp>
         <p:nvSpPr>
-          <p:cNvPr id="35" name="TextBox 34"/>
+          <p:cNvPr id="25" name="TextBox 24"/>
           <p:cNvSpPr txBox="1"/>
           <p:nvPr/>
         </p:nvSpPr>
         <p:spPr>
           <a:xfrm>
-            <a:off x="5180400" y="4989599"/>
-            <a:ext cx="4302000" cy="216000"/>
+            <a:off x="5621399" y="4670400"/>
+            <a:ext cx="3861000" cy="216000"/>
           </a:xfrm>
           <a:prstGeom prst="rect">
             <a:avLst/>
@@ -5405,13 +4599,13 @@
       </p:sp>
       <p:sp>
         <p:nvSpPr>
-          <p:cNvPr id="36" name="Oval 35"/>
+          <p:cNvPr id="26" name="Oval 25"/>
           <p:cNvSpPr/>
           <p:nvPr/>
         </p:nvSpPr>
         <p:spPr>
           <a:xfrm>
-            <a:off x="4215600" y="5500799"/>
+            <a:off x="4656600" y="5533199"/>
             <a:ext cx="93600" cy="93600"/>
           </a:xfrm>
           <a:prstGeom prst="ellipse">
@@ -5451,13 +4645,13 @@
       </p:sp>
       <p:sp>
         <p:nvSpPr>
-          <p:cNvPr id="37" name="TextBox 36"/>
+          <p:cNvPr id="27" name="TextBox 26"/>
           <p:cNvSpPr txBox="1"/>
           <p:nvPr/>
         </p:nvSpPr>
         <p:spPr>
           <a:xfrm>
-            <a:off x="4424400" y="5439599"/>
+            <a:off x="4865400" y="5471999"/>
             <a:ext cx="720000" cy="180000"/>
           </a:xfrm>
           <a:prstGeom prst="rect">
@@ -5488,14 +4682,14 @@
       </p:sp>
       <p:sp>
         <p:nvSpPr>
-          <p:cNvPr id="38" name="TextBox 37"/>
+          <p:cNvPr id="28" name="TextBox 27"/>
           <p:cNvSpPr txBox="1"/>
           <p:nvPr/>
         </p:nvSpPr>
         <p:spPr>
           <a:xfrm>
-            <a:off x="5180400" y="5439599"/>
-            <a:ext cx="4302000" cy="216000"/>
+            <a:off x="5621399" y="5471999"/>
+            <a:ext cx="3861000" cy="216000"/>
           </a:xfrm>
           <a:prstGeom prst="rect">
             <a:avLst/>
@@ -5525,14 +4719,14 @@
       </p:sp>
       <p:sp>
         <p:nvSpPr>
-          <p:cNvPr id="39" name="TextBox 38"/>
+          <p:cNvPr id="29" name="TextBox 28"/>
           <p:cNvSpPr txBox="1"/>
           <p:nvPr/>
         </p:nvSpPr>
         <p:spPr>
           <a:xfrm>
-            <a:off x="4190400" y="5709600"/>
-            <a:ext cx="5292000" cy="230400"/>
+            <a:off x="4631400" y="5742000"/>
+            <a:ext cx="4851000" cy="230400"/>
           </a:xfrm>
           <a:prstGeom prst="rect">
             <a:avLst/>
@@ -5584,14 +4778,14 @@
       </p:sp>
       <p:cxnSp>
         <p:nvCxnSpPr>
-          <p:cNvPr id="40" name="Connector 39"/>
+          <p:cNvPr id="30" name="Connector 29"/>
           <p:cNvCxnSpPr/>
           <p:nvPr/>
         </p:nvCxnSpPr>
         <p:spPr>
           <a:xfrm>
-            <a:off x="4071600" y="1504800"/>
-            <a:ext cx="0" cy="4417200"/>
+            <a:off x="4512600" y="1504800"/>
+            <a:ext cx="0" cy="4381200"/>
           </a:xfrm>
           <a:prstGeom prst="bentConnector3">
             <a:avLst/>

--- a/reports/ssg-quickcommerce-onepager.pptx
+++ b/reports/ssg-quickcommerce-onepager.pptx
@@ -3227,7 +3227,7 @@
                 <a:ea typeface="맑은 고딕"/>
                 <a:cs typeface="맑은 고딕"/>
               </a:rPr>
-              <a:t>※ 취급 품목 : 이마트 15만 · 바로퀵 1만 종      ※ 출처 : 비즈워치 · 머니투데이 · 한국경제 </a:t>
+              <a:t>※ 취급 품목 : 이마트 15만 종 · 바로퀵 1만 종      ※ 출처 : 비즈워치 · 머니투데이 · 한국경제 </a:t>
             </a:r>
             <a:r>
               <a:rPr sz="800" b="0">
@@ -3246,6 +3246,848 @@
       <p:sp>
         <p:nvSpPr>
           <p:cNvPr id="5" name="TextBox 4"/>
+          <p:cNvSpPr txBox="1"/>
+          <p:nvPr/>
+        </p:nvSpPr>
+        <p:spPr>
+          <a:xfrm>
+            <a:off x="4631400" y="1504800"/>
+            <a:ext cx="4851000" cy="237600"/>
+          </a:xfrm>
+          <a:prstGeom prst="rect">
+            <a:avLst/>
+          </a:prstGeom>
+          <a:noFill/>
+        </p:spPr>
+        <p:txBody>
+          <a:bodyPr wrap="square" anchor="t" lIns="0" rIns="0" tIns="0" bIns="0">
+            <a:spAutoFit/>
+          </a:bodyPr>
+          <a:lstStyle/>
+          <a:p>
+            <a:pPr algn="l"/>
+            <a:r>
+              <a:rPr sz="1200" b="1">
+                <a:solidFill>
+                  <a:srgbClr val="000000"/>
+                </a:solidFill>
+                <a:latin typeface="맑은 고딕"/>
+                <a:ea typeface="맑은 고딕"/>
+                <a:cs typeface="맑은 고딕"/>
+              </a:rPr>
+              <a:t>• ② 서비스 개요</a:t>
+            </a:r>
+          </a:p>
+        </p:txBody>
+      </p:sp>
+      <p:sp>
+        <p:nvSpPr>
+          <p:cNvPr id="6" name="TextBox 5"/>
+          <p:cNvSpPr txBox="1"/>
+          <p:nvPr/>
+        </p:nvSpPr>
+        <p:spPr>
+          <a:xfrm>
+            <a:off x="4829400" y="1742400"/>
+            <a:ext cx="4653000" cy="237600"/>
+          </a:xfrm>
+          <a:prstGeom prst="rect">
+            <a:avLst/>
+          </a:prstGeom>
+          <a:noFill/>
+        </p:spPr>
+        <p:txBody>
+          <a:bodyPr wrap="square" anchor="t" lIns="0" rIns="0" tIns="0" bIns="0">
+            <a:spAutoFit/>
+          </a:bodyPr>
+          <a:lstStyle/>
+          <a:p>
+            <a:pPr algn="l"/>
+            <a:r>
+              <a:rPr sz="1100" b="0">
+                <a:solidFill>
+                  <a:srgbClr val="000000"/>
+                </a:solidFill>
+                <a:latin typeface="맑은 고딕"/>
+                <a:ea typeface="맑은 고딕"/>
+                <a:cs typeface="맑은 고딕"/>
+              </a:rPr>
+              <a:t>- 거점 : 유휴 점포 PP센터 </a:t>
+            </a:r>
+            <a:r>
+              <a:rPr sz="1000" b="0">
+                <a:solidFill>
+                  <a:srgbClr val="000000"/>
+                </a:solidFill>
+                <a:latin typeface="맑은 고딕"/>
+                <a:ea typeface="맑은 고딕"/>
+                <a:cs typeface="맑은 고딕"/>
+              </a:rPr>
+              <a:t>(반경 내 즉시 출고)</a:t>
+            </a:r>
+          </a:p>
+        </p:txBody>
+      </p:sp>
+      <p:sp>
+        <p:nvSpPr>
+          <p:cNvPr id="7" name="TextBox 6"/>
+          <p:cNvSpPr txBox="1"/>
+          <p:nvPr/>
+        </p:nvSpPr>
+        <p:spPr>
+          <a:xfrm>
+            <a:off x="4829400" y="1980000"/>
+            <a:ext cx="4653000" cy="237600"/>
+          </a:xfrm>
+          <a:prstGeom prst="rect">
+            <a:avLst/>
+          </a:prstGeom>
+          <a:noFill/>
+        </p:spPr>
+        <p:txBody>
+          <a:bodyPr wrap="square" anchor="t" lIns="0" rIns="0" tIns="0" bIns="0">
+            <a:spAutoFit/>
+          </a:bodyPr>
+          <a:lstStyle/>
+          <a:p>
+            <a:pPr algn="l"/>
+            <a:r>
+              <a:rPr sz="1100" b="0">
+                <a:solidFill>
+                  <a:srgbClr val="000000"/>
+                </a:solidFill>
+                <a:latin typeface="맑은 고딕"/>
+                <a:ea typeface="맑은 고딕"/>
+                <a:cs typeface="맑은 고딕"/>
+              </a:rPr>
+              <a:t>- 운송 : 쓱배송 사륜차 → 대용량·중량 대응</a:t>
+            </a:r>
+          </a:p>
+        </p:txBody>
+      </p:sp>
+      <p:sp>
+        <p:nvSpPr>
+          <p:cNvPr id="8" name="TextBox 7"/>
+          <p:cNvSpPr txBox="1"/>
+          <p:nvPr/>
+        </p:nvSpPr>
+        <p:spPr>
+          <a:xfrm>
+            <a:off x="4829400" y="2217600"/>
+            <a:ext cx="4653000" cy="237600"/>
+          </a:xfrm>
+          <a:prstGeom prst="rect">
+            <a:avLst/>
+          </a:prstGeom>
+          <a:noFill/>
+        </p:spPr>
+        <p:txBody>
+          <a:bodyPr wrap="square" anchor="t" lIns="0" rIns="0" tIns="0" bIns="0">
+            <a:spAutoFit/>
+          </a:bodyPr>
+          <a:lstStyle/>
+          <a:p>
+            <a:pPr algn="l"/>
+            <a:r>
+              <a:rPr sz="1100" b="0">
+                <a:solidFill>
+                  <a:srgbClr val="000000"/>
+                </a:solidFill>
+                <a:latin typeface="맑은 고딕"/>
+                <a:ea typeface="맑은 고딕"/>
+                <a:cs typeface="맑은 고딕"/>
+              </a:rPr>
+              <a:t>- 운영 : 20시 마감 → 2시간 내 배송 완료 </a:t>
+            </a:r>
+            <a:r>
+              <a:rPr sz="1000" b="0">
+                <a:solidFill>
+                  <a:srgbClr val="000000"/>
+                </a:solidFill>
+                <a:latin typeface="맑은 고딕"/>
+                <a:ea typeface="맑은 고딕"/>
+                <a:cs typeface="맑은 고딕"/>
+              </a:rPr>
+              <a:t>(예약배송 병행)</a:t>
+            </a:r>
+          </a:p>
+        </p:txBody>
+      </p:sp>
+      <p:sp>
+        <p:nvSpPr>
+          <p:cNvPr id="9" name="TextBox 8"/>
+          <p:cNvSpPr txBox="1"/>
+          <p:nvPr/>
+        </p:nvSpPr>
+        <p:spPr>
+          <a:xfrm>
+            <a:off x="4829400" y="2455200"/>
+            <a:ext cx="4653000" cy="237600"/>
+          </a:xfrm>
+          <a:prstGeom prst="rect">
+            <a:avLst/>
+          </a:prstGeom>
+          <a:noFill/>
+        </p:spPr>
+        <p:txBody>
+          <a:bodyPr wrap="square" anchor="t" lIns="0" rIns="0" tIns="0" bIns="0">
+            <a:spAutoFit/>
+          </a:bodyPr>
+          <a:lstStyle/>
+          <a:p>
+            <a:pPr algn="l"/>
+            <a:r>
+              <a:rPr sz="1100" b="0">
+                <a:solidFill>
+                  <a:srgbClr val="000000"/>
+                </a:solidFill>
+                <a:latin typeface="맑은 고딕"/>
+                <a:ea typeface="맑은 고딕"/>
+                <a:cs typeface="맑은 고딕"/>
+              </a:rPr>
+              <a:t>- 규모 : 약 15만 종 </a:t>
+            </a:r>
+            <a:r>
+              <a:rPr sz="1000" b="0">
+                <a:solidFill>
+                  <a:srgbClr val="000000"/>
+                </a:solidFill>
+                <a:latin typeface="맑은 고딕"/>
+                <a:ea typeface="맑은 고딕"/>
+                <a:cs typeface="맑은 고딕"/>
+              </a:rPr>
+              <a:t>(바로퀵 1만 종 대비 15배)</a:t>
+            </a:r>
+          </a:p>
+        </p:txBody>
+      </p:sp>
+      <p:sp>
+        <p:nvSpPr>
+          <p:cNvPr id="10" name="TextBox 9"/>
+          <p:cNvSpPr txBox="1"/>
+          <p:nvPr/>
+        </p:nvSpPr>
+        <p:spPr>
+          <a:xfrm>
+            <a:off x="4631400" y="2800800"/>
+            <a:ext cx="4851000" cy="230400"/>
+          </a:xfrm>
+          <a:prstGeom prst="rect">
+            <a:avLst/>
+          </a:prstGeom>
+          <a:noFill/>
+        </p:spPr>
+        <p:txBody>
+          <a:bodyPr wrap="square" anchor="t" lIns="0" rIns="0" tIns="0" bIns="0">
+            <a:spAutoFit/>
+          </a:bodyPr>
+          <a:lstStyle/>
+          <a:p>
+            <a:pPr algn="l"/>
+            <a:r>
+              <a:rPr sz="1200" b="1">
+                <a:solidFill>
+                  <a:srgbClr val="000000"/>
+                </a:solidFill>
+                <a:latin typeface="맑은 고딕"/>
+                <a:ea typeface="맑은 고딕"/>
+                <a:cs typeface="맑은 고딕"/>
+              </a:rPr>
+              <a:t>• ③ 확산 계획</a:t>
+            </a:r>
+          </a:p>
+        </p:txBody>
+      </p:sp>
+      <p:cxnSp>
+        <p:nvCxnSpPr>
+          <p:cNvPr id="11" name="Connector 10"/>
+          <p:cNvCxnSpPr/>
+          <p:nvPr/>
+        </p:nvCxnSpPr>
+        <p:spPr>
+          <a:xfrm>
+            <a:off x="4703400" y="3175200"/>
+            <a:ext cx="0" cy="1674000"/>
+          </a:xfrm>
+          <a:prstGeom prst="bentConnector3">
+            <a:avLst/>
+          </a:prstGeom>
+          <a:ln w="22225">
+            <a:solidFill>
+              <a:srgbClr val="000000"/>
+            </a:solidFill>
+            <a:prstDash val="solid"/>
+          </a:ln>
+          <a:effectLst/>
+        </p:spPr>
+        <p:style>
+          <a:lnRef idx="2">
+            <a:schemeClr val="accent1"/>
+          </a:lnRef>
+          <a:fillRef idx="0">
+            <a:schemeClr val="accent1"/>
+          </a:fillRef>
+          <a:effectRef idx="1">
+            <a:schemeClr val="accent1"/>
+          </a:effectRef>
+          <a:fontRef idx="minor">
+            <a:schemeClr val="tx1"/>
+          </a:fontRef>
+        </p:style>
+      </p:cxnSp>
+      <p:sp>
+        <p:nvSpPr>
+          <p:cNvPr id="12" name="Oval 11"/>
+          <p:cNvSpPr/>
+          <p:nvPr/>
+        </p:nvSpPr>
+        <p:spPr>
+          <a:xfrm>
+            <a:off x="4656600" y="3128400"/>
+            <a:ext cx="93600" cy="93600"/>
+          </a:xfrm>
+          <a:prstGeom prst="ellipse">
+            <a:avLst/>
+          </a:prstGeom>
+          <a:solidFill>
+            <a:srgbClr val="FFFFFF"/>
+          </a:solidFill>
+          <a:ln w="12700">
+            <a:solidFill>
+              <a:srgbClr val="000000"/>
+            </a:solidFill>
+          </a:ln>
+          <a:effectLst/>
+        </p:spPr>
+        <p:style>
+          <a:lnRef idx="1">
+            <a:schemeClr val="accent1"/>
+          </a:lnRef>
+          <a:fillRef idx="3">
+            <a:schemeClr val="accent1"/>
+          </a:fillRef>
+          <a:effectRef idx="2">
+            <a:schemeClr val="accent1"/>
+          </a:effectRef>
+          <a:fontRef idx="minor">
+            <a:schemeClr val="lt1"/>
+          </a:fontRef>
+        </p:style>
+        <p:txBody>
+          <a:bodyPr rtlCol="0" anchor="ctr"/>
+          <a:lstStyle/>
+          <a:p>
+            <a:pPr algn="ctr"/>
+          </a:p>
+        </p:txBody>
+      </p:sp>
+      <p:sp>
+        <p:nvSpPr>
+          <p:cNvPr id="13" name="TextBox 12"/>
+          <p:cNvSpPr txBox="1"/>
+          <p:nvPr/>
+        </p:nvSpPr>
+        <p:spPr>
+          <a:xfrm>
+            <a:off x="4865400" y="3067200"/>
+            <a:ext cx="720000" cy="180000"/>
+          </a:xfrm>
+          <a:prstGeom prst="rect">
+            <a:avLst/>
+          </a:prstGeom>
+          <a:noFill/>
+        </p:spPr>
+        <p:txBody>
+          <a:bodyPr wrap="square" anchor="ctr" lIns="0" rIns="0" tIns="0" bIns="0">
+            <a:spAutoFit/>
+          </a:bodyPr>
+          <a:lstStyle/>
+          <a:p>
+            <a:pPr algn="l"/>
+            <a:r>
+              <a:rPr sz="1100" b="1">
+                <a:solidFill>
+                  <a:srgbClr val="000000"/>
+                </a:solidFill>
+                <a:latin typeface="맑은 고딕"/>
+                <a:ea typeface="맑은 고딕"/>
+                <a:cs typeface="맑은 고딕"/>
+              </a:rPr>
+              <a:t>'26.7월</a:t>
+            </a:r>
+          </a:p>
+        </p:txBody>
+      </p:sp>
+      <p:sp>
+        <p:nvSpPr>
+          <p:cNvPr id="14" name="TextBox 13"/>
+          <p:cNvSpPr txBox="1"/>
+          <p:nvPr/>
+        </p:nvSpPr>
+        <p:spPr>
+          <a:xfrm>
+            <a:off x="5621399" y="3067200"/>
+            <a:ext cx="3861000" cy="216000"/>
+          </a:xfrm>
+          <a:prstGeom prst="rect">
+            <a:avLst/>
+          </a:prstGeom>
+          <a:noFill/>
+        </p:spPr>
+        <p:txBody>
+          <a:bodyPr wrap="square" anchor="ctr" lIns="0" rIns="0" tIns="0" bIns="0">
+            <a:spAutoFit/>
+          </a:bodyPr>
+          <a:lstStyle/>
+          <a:p>
+            <a:pPr algn="l"/>
+            <a:r>
+              <a:rPr sz="1100" b="0">
+                <a:solidFill>
+                  <a:srgbClr val="000000"/>
+                </a:solidFill>
+                <a:latin typeface="맑은 고딕"/>
+                <a:ea typeface="맑은 고딕"/>
+                <a:cs typeface="맑은 고딕"/>
+              </a:rPr>
+              <a:t>양재·하남점 도입</a:t>
+            </a:r>
+          </a:p>
+        </p:txBody>
+      </p:sp>
+      <p:sp>
+        <p:nvSpPr>
+          <p:cNvPr id="15" name="Oval 14"/>
+          <p:cNvSpPr/>
+          <p:nvPr/>
+        </p:nvSpPr>
+        <p:spPr>
+          <a:xfrm>
+            <a:off x="4656600" y="3686400"/>
+            <a:ext cx="93600" cy="93600"/>
+          </a:xfrm>
+          <a:prstGeom prst="ellipse">
+            <a:avLst/>
+          </a:prstGeom>
+          <a:solidFill>
+            <a:srgbClr val="FFFFFF"/>
+          </a:solidFill>
+          <a:ln w="12700">
+            <a:solidFill>
+              <a:srgbClr val="000000"/>
+            </a:solidFill>
+          </a:ln>
+          <a:effectLst/>
+        </p:spPr>
+        <p:style>
+          <a:lnRef idx="1">
+            <a:schemeClr val="accent1"/>
+          </a:lnRef>
+          <a:fillRef idx="3">
+            <a:schemeClr val="accent1"/>
+          </a:fillRef>
+          <a:effectRef idx="2">
+            <a:schemeClr val="accent1"/>
+          </a:effectRef>
+          <a:fontRef idx="minor">
+            <a:schemeClr val="lt1"/>
+          </a:fontRef>
+        </p:style>
+        <p:txBody>
+          <a:bodyPr rtlCol="0" anchor="ctr"/>
+          <a:lstStyle/>
+          <a:p>
+            <a:pPr algn="ctr"/>
+          </a:p>
+        </p:txBody>
+      </p:sp>
+      <p:sp>
+        <p:nvSpPr>
+          <p:cNvPr id="16" name="TextBox 15"/>
+          <p:cNvSpPr txBox="1"/>
+          <p:nvPr/>
+        </p:nvSpPr>
+        <p:spPr>
+          <a:xfrm>
+            <a:off x="4865400" y="3625200"/>
+            <a:ext cx="720000" cy="180000"/>
+          </a:xfrm>
+          <a:prstGeom prst="rect">
+            <a:avLst/>
+          </a:prstGeom>
+          <a:noFill/>
+        </p:spPr>
+        <p:txBody>
+          <a:bodyPr wrap="square" anchor="ctr" lIns="0" rIns="0" tIns="0" bIns="0">
+            <a:spAutoFit/>
+          </a:bodyPr>
+          <a:lstStyle/>
+          <a:p>
+            <a:pPr algn="l"/>
+            <a:r>
+              <a:rPr sz="1100" b="1">
+                <a:solidFill>
+                  <a:srgbClr val="000000"/>
+                </a:solidFill>
+                <a:latin typeface="맑은 고딕"/>
+                <a:ea typeface="맑은 고딕"/>
+                <a:cs typeface="맑은 고딕"/>
+              </a:rPr>
+              <a:t>8월</a:t>
+            </a:r>
+          </a:p>
+        </p:txBody>
+      </p:sp>
+      <p:sp>
+        <p:nvSpPr>
+          <p:cNvPr id="17" name="TextBox 16"/>
+          <p:cNvSpPr txBox="1"/>
+          <p:nvPr/>
+        </p:nvSpPr>
+        <p:spPr>
+          <a:xfrm>
+            <a:off x="5621399" y="3625200"/>
+            <a:ext cx="3861000" cy="216000"/>
+          </a:xfrm>
+          <a:prstGeom prst="rect">
+            <a:avLst/>
+          </a:prstGeom>
+          <a:noFill/>
+        </p:spPr>
+        <p:txBody>
+          <a:bodyPr wrap="square" anchor="ctr" lIns="0" rIns="0" tIns="0" bIns="0">
+            <a:spAutoFit/>
+          </a:bodyPr>
+          <a:lstStyle/>
+          <a:p>
+            <a:pPr algn="l"/>
+            <a:r>
+              <a:rPr sz="1100" b="0">
+                <a:solidFill>
+                  <a:srgbClr val="000000"/>
+                </a:solidFill>
+                <a:latin typeface="맑은 고딕"/>
+                <a:ea typeface="맑은 고딕"/>
+                <a:cs typeface="맑은 고딕"/>
+              </a:rPr>
+              <a:t>서울 확대 </a:t>
+            </a:r>
+            <a:r>
+              <a:rPr sz="1000" b="0">
+                <a:solidFill>
+                  <a:srgbClr val="000000"/>
+                </a:solidFill>
+                <a:latin typeface="맑은 고딕"/>
+                <a:ea typeface="맑은 고딕"/>
+                <a:cs typeface="맑은 고딕"/>
+              </a:rPr>
+              <a:t>(월계·가든5·신도림)</a:t>
+            </a:r>
+          </a:p>
+        </p:txBody>
+      </p:sp>
+      <p:sp>
+        <p:nvSpPr>
+          <p:cNvPr id="18" name="Oval 17"/>
+          <p:cNvSpPr/>
+          <p:nvPr/>
+        </p:nvSpPr>
+        <p:spPr>
+          <a:xfrm>
+            <a:off x="4656600" y="4244400"/>
+            <a:ext cx="93600" cy="93600"/>
+          </a:xfrm>
+          <a:prstGeom prst="ellipse">
+            <a:avLst/>
+          </a:prstGeom>
+          <a:solidFill>
+            <a:srgbClr val="FFFFFF"/>
+          </a:solidFill>
+          <a:ln w="12700">
+            <a:solidFill>
+              <a:srgbClr val="000000"/>
+            </a:solidFill>
+          </a:ln>
+          <a:effectLst/>
+        </p:spPr>
+        <p:style>
+          <a:lnRef idx="1">
+            <a:schemeClr val="accent1"/>
+          </a:lnRef>
+          <a:fillRef idx="3">
+            <a:schemeClr val="accent1"/>
+          </a:fillRef>
+          <a:effectRef idx="2">
+            <a:schemeClr val="accent1"/>
+          </a:effectRef>
+          <a:fontRef idx="minor">
+            <a:schemeClr val="lt1"/>
+          </a:fontRef>
+        </p:style>
+        <p:txBody>
+          <a:bodyPr rtlCol="0" anchor="ctr"/>
+          <a:lstStyle/>
+          <a:p>
+            <a:pPr algn="ctr"/>
+          </a:p>
+        </p:txBody>
+      </p:sp>
+      <p:sp>
+        <p:nvSpPr>
+          <p:cNvPr id="19" name="TextBox 18"/>
+          <p:cNvSpPr txBox="1"/>
+          <p:nvPr/>
+        </p:nvSpPr>
+        <p:spPr>
+          <a:xfrm>
+            <a:off x="4865400" y="4183199"/>
+            <a:ext cx="720000" cy="180000"/>
+          </a:xfrm>
+          <a:prstGeom prst="rect">
+            <a:avLst/>
+          </a:prstGeom>
+          <a:noFill/>
+        </p:spPr>
+        <p:txBody>
+          <a:bodyPr wrap="square" anchor="ctr" lIns="0" rIns="0" tIns="0" bIns="0">
+            <a:spAutoFit/>
+          </a:bodyPr>
+          <a:lstStyle/>
+          <a:p>
+            <a:pPr algn="l"/>
+            <a:r>
+              <a:rPr sz="1100" b="1">
+                <a:solidFill>
+                  <a:srgbClr val="000000"/>
+                </a:solidFill>
+                <a:latin typeface="맑은 고딕"/>
+                <a:ea typeface="맑은 고딕"/>
+                <a:cs typeface="맑은 고딕"/>
+              </a:rPr>
+              <a:t>9월</a:t>
+            </a:r>
+          </a:p>
+        </p:txBody>
+      </p:sp>
+      <p:sp>
+        <p:nvSpPr>
+          <p:cNvPr id="20" name="TextBox 19"/>
+          <p:cNvSpPr txBox="1"/>
+          <p:nvPr/>
+        </p:nvSpPr>
+        <p:spPr>
+          <a:xfrm>
+            <a:off x="5621399" y="4183199"/>
+            <a:ext cx="3861000" cy="216000"/>
+          </a:xfrm>
+          <a:prstGeom prst="rect">
+            <a:avLst/>
+          </a:prstGeom>
+          <a:noFill/>
+        </p:spPr>
+        <p:txBody>
+          <a:bodyPr wrap="square" anchor="ctr" lIns="0" rIns="0" tIns="0" bIns="0">
+            <a:spAutoFit/>
+          </a:bodyPr>
+          <a:lstStyle/>
+          <a:p>
+            <a:pPr algn="l"/>
+            <a:r>
+              <a:rPr sz="1100" b="0">
+                <a:solidFill>
+                  <a:srgbClr val="000000"/>
+                </a:solidFill>
+                <a:latin typeface="맑은 고딕"/>
+                <a:ea typeface="맑은 고딕"/>
+                <a:cs typeface="맑은 고딕"/>
+              </a:rPr>
+              <a:t>전국 확대</a:t>
+            </a:r>
+          </a:p>
+        </p:txBody>
+      </p:sp>
+      <p:sp>
+        <p:nvSpPr>
+          <p:cNvPr id="21" name="Oval 20"/>
+          <p:cNvSpPr/>
+          <p:nvPr/>
+        </p:nvSpPr>
+        <p:spPr>
+          <a:xfrm>
+            <a:off x="4656600" y="4802400"/>
+            <a:ext cx="93600" cy="93600"/>
+          </a:xfrm>
+          <a:prstGeom prst="ellipse">
+            <a:avLst/>
+          </a:prstGeom>
+          <a:solidFill>
+            <a:srgbClr val="FFFFFF"/>
+          </a:solidFill>
+          <a:ln w="12700">
+            <a:solidFill>
+              <a:srgbClr val="000000"/>
+            </a:solidFill>
+          </a:ln>
+          <a:effectLst/>
+        </p:spPr>
+        <p:style>
+          <a:lnRef idx="1">
+            <a:schemeClr val="accent1"/>
+          </a:lnRef>
+          <a:fillRef idx="3">
+            <a:schemeClr val="accent1"/>
+          </a:fillRef>
+          <a:effectRef idx="2">
+            <a:schemeClr val="accent1"/>
+          </a:effectRef>
+          <a:fontRef idx="minor">
+            <a:schemeClr val="lt1"/>
+          </a:fontRef>
+        </p:style>
+        <p:txBody>
+          <a:bodyPr rtlCol="0" anchor="ctr"/>
+          <a:lstStyle/>
+          <a:p>
+            <a:pPr algn="ctr"/>
+          </a:p>
+        </p:txBody>
+      </p:sp>
+      <p:sp>
+        <p:nvSpPr>
+          <p:cNvPr id="22" name="TextBox 21"/>
+          <p:cNvSpPr txBox="1"/>
+          <p:nvPr/>
+        </p:nvSpPr>
+        <p:spPr>
+          <a:xfrm>
+            <a:off x="4865400" y="4741200"/>
+            <a:ext cx="720000" cy="180000"/>
+          </a:xfrm>
+          <a:prstGeom prst="rect">
+            <a:avLst/>
+          </a:prstGeom>
+          <a:noFill/>
+        </p:spPr>
+        <p:txBody>
+          <a:bodyPr wrap="square" anchor="ctr" lIns="0" rIns="0" tIns="0" bIns="0">
+            <a:spAutoFit/>
+          </a:bodyPr>
+          <a:lstStyle/>
+          <a:p>
+            <a:pPr algn="l"/>
+            <a:r>
+              <a:rPr sz="1100" b="1">
+                <a:solidFill>
+                  <a:srgbClr val="000000"/>
+                </a:solidFill>
+                <a:latin typeface="맑은 고딕"/>
+                <a:ea typeface="맑은 고딕"/>
+                <a:cs typeface="맑은 고딕"/>
+              </a:rPr>
+              <a:t>연말</a:t>
+            </a:r>
+          </a:p>
+        </p:txBody>
+      </p:sp>
+      <p:sp>
+        <p:nvSpPr>
+          <p:cNvPr id="23" name="TextBox 22"/>
+          <p:cNvSpPr txBox="1"/>
+          <p:nvPr/>
+        </p:nvSpPr>
+        <p:spPr>
+          <a:xfrm>
+            <a:off x="5621399" y="4741200"/>
+            <a:ext cx="3861000" cy="216000"/>
+          </a:xfrm>
+          <a:prstGeom prst="rect">
+            <a:avLst/>
+          </a:prstGeom>
+          <a:noFill/>
+        </p:spPr>
+        <p:txBody>
+          <a:bodyPr wrap="square" anchor="ctr" lIns="0" rIns="0" tIns="0" bIns="0">
+            <a:spAutoFit/>
+          </a:bodyPr>
+          <a:lstStyle/>
+          <a:p>
+            <a:pPr algn="l"/>
+            <a:r>
+              <a:rPr sz="1100" b="0">
+                <a:solidFill>
+                  <a:srgbClr val="000000"/>
+                </a:solidFill>
+                <a:latin typeface="맑은 고딕"/>
+                <a:ea typeface="맑은 고딕"/>
+                <a:cs typeface="맑은 고딕"/>
+              </a:rPr>
+              <a:t>50여 점포 운영</a:t>
+            </a:r>
+          </a:p>
+        </p:txBody>
+      </p:sp>
+      <p:sp>
+        <p:nvSpPr>
+          <p:cNvPr id="24" name="TextBox 23"/>
+          <p:cNvSpPr txBox="1"/>
+          <p:nvPr/>
+        </p:nvSpPr>
+        <p:spPr>
+          <a:xfrm>
+            <a:off x="4631400" y="5000400"/>
+            <a:ext cx="4851000" cy="230400"/>
+          </a:xfrm>
+          <a:prstGeom prst="rect">
+            <a:avLst/>
+          </a:prstGeom>
+          <a:noFill/>
+        </p:spPr>
+        <p:txBody>
+          <a:bodyPr wrap="square" anchor="t" lIns="0" rIns="0" tIns="0" bIns="0">
+            <a:spAutoFit/>
+          </a:bodyPr>
+          <a:lstStyle/>
+          <a:p>
+            <a:pPr algn="l"/>
+            <a:r>
+              <a:rPr sz="1200" b="1">
+                <a:solidFill>
+                  <a:srgbClr val="000000"/>
+                </a:solidFill>
+                <a:latin typeface="맑은 고딕"/>
+                <a:ea typeface="맑은 고딕"/>
+                <a:cs typeface="맑은 고딕"/>
+              </a:rPr>
+              <a:t>• </a:t>
+            </a:r>
+            <a:r>
+              <a:rPr sz="1100" b="1">
+                <a:solidFill>
+                  <a:srgbClr val="000000"/>
+                </a:solidFill>
+                <a:latin typeface="맑은 고딕"/>
+                <a:ea typeface="맑은 고딕"/>
+                <a:cs typeface="맑은 고딕"/>
+              </a:rPr>
+              <a:t>(리드)</a:t>
+            </a:r>
+            <a:r>
+              <a:rPr sz="1200" b="1">
+                <a:solidFill>
+                  <a:srgbClr val="000000"/>
+                </a:solidFill>
+                <a:latin typeface="맑은 고딕"/>
+                <a:ea typeface="맑은 고딕"/>
+                <a:cs typeface="맑은 고딕"/>
+              </a:rPr>
+              <a:t> 유휴 PP센터 재활용 → 신규 투자 최소 · 저비용 급속 확산</a:t>
+            </a:r>
+          </a:p>
+        </p:txBody>
+      </p:sp>
+      <p:sp>
+        <p:nvSpPr>
+          <p:cNvPr id="25" name="TextBox 24"/>
           <p:cNvSpPr txBox="1"/>
           <p:nvPr/>
         </p:nvSpPr>
@@ -3282,7 +4124,7 @@
       </p:sp>
       <p:sp>
         <p:nvSpPr>
-          <p:cNvPr id="6" name="TextBox 5"/>
+          <p:cNvPr id="26" name="TextBox 25"/>
           <p:cNvSpPr txBox="1"/>
           <p:nvPr/>
         </p:nvSpPr>
@@ -3352,7 +4194,7 @@
       </p:sp>
       <p:sp>
         <p:nvSpPr>
-          <p:cNvPr id="7" name="TextBox 6"/>
+          <p:cNvPr id="27" name="TextBox 26"/>
           <p:cNvSpPr txBox="1"/>
           <p:nvPr/>
         </p:nvSpPr>
@@ -3382,36 +4224,14 @@
                 <a:ea typeface="맑은 고딕"/>
                 <a:cs typeface="맑은 고딕"/>
               </a:rPr>
-              <a:t>- </a:t>
-            </a:r>
-            <a:r>
-              <a:rPr sz="1000" b="0">
-                <a:solidFill>
-                  <a:srgbClr val="000000"/>
-                </a:solidFill>
-                <a:latin typeface="맑은 고딕"/>
-                <a:ea typeface="맑은 고딕"/>
-                <a:cs typeface="맑은 고딕"/>
-              </a:rPr>
-              <a:t>(배경)</a:t>
-            </a:r>
-            <a:r>
-              <a:rPr sz="1100" b="0">
-                <a:solidFill>
-                  <a:srgbClr val="000000"/>
-                </a:solidFill>
-                <a:latin typeface="맑은 고딕"/>
-                <a:ea typeface="맑은 고딕"/>
-                <a:cs typeface="맑은 고딕"/>
-              </a:rPr>
-              <a:t> B마트 등 즉시배송 시장 대용량 품목 확대</a:t>
-            </a:r>
-          </a:p>
-        </p:txBody>
-      </p:sp>
-      <p:sp>
-        <p:nvSpPr>
-          <p:cNvPr id="8" name="TextBox 7"/>
+              <a:t>- B마트 등 즉시배송 시장 대용량 품목 확대</a:t>
+            </a:r>
+          </a:p>
+        </p:txBody>
+      </p:sp>
+      <p:sp>
+        <p:nvSpPr>
+          <p:cNvPr id="28" name="TextBox 27"/>
           <p:cNvSpPr txBox="1"/>
           <p:nvPr/>
         </p:nvSpPr>
@@ -3448,7 +4268,7 @@
       </p:sp>
       <p:graphicFrame>
         <p:nvGraphicFramePr>
-          <p:cNvPr id="9" name="Table 8"/>
+          <p:cNvPr id="29" name="Table 28"/>
           <p:cNvGraphicFramePr>
             <a:graphicFrameLocks noGrp="1"/>
           </p:cNvGraphicFramePr>
@@ -3848,13 +4668,13 @@
                       <a:r>
                         <a:rPr sz="1000" b="0">
                           <a:solidFill>
-                            <a:srgbClr val="000000"/>
+                            <a:srgbClr val="595959"/>
                           </a:solidFill>
                           <a:latin typeface="맑은 고딕"/>
                           <a:ea typeface="맑은 고딕"/>
                           <a:cs typeface="맑은 고딕"/>
                         </a:rPr>
-                        <a:t>—</a:t>
+                        <a:t>해당 없음</a:t>
                       </a:r>
                     </a:p>
                   </a:txBody>
@@ -3934,848 +4754,6 @@
           </a:graphicData>
         </a:graphic>
       </p:graphicFrame>
-      <p:sp>
-        <p:nvSpPr>
-          <p:cNvPr id="10" name="TextBox 9"/>
-          <p:cNvSpPr txBox="1"/>
-          <p:nvPr/>
-        </p:nvSpPr>
-        <p:spPr>
-          <a:xfrm>
-            <a:off x="4631400" y="1504800"/>
-            <a:ext cx="4851000" cy="237600"/>
-          </a:xfrm>
-          <a:prstGeom prst="rect">
-            <a:avLst/>
-          </a:prstGeom>
-          <a:noFill/>
-        </p:spPr>
-        <p:txBody>
-          <a:bodyPr wrap="square" anchor="t" lIns="0" rIns="0" tIns="0" bIns="0">
-            <a:spAutoFit/>
-          </a:bodyPr>
-          <a:lstStyle/>
-          <a:p>
-            <a:pPr algn="l"/>
-            <a:r>
-              <a:rPr sz="1200" b="1">
-                <a:solidFill>
-                  <a:srgbClr val="000000"/>
-                </a:solidFill>
-                <a:latin typeface="맑은 고딕"/>
-                <a:ea typeface="맑은 고딕"/>
-                <a:cs typeface="맑은 고딕"/>
-              </a:rPr>
-              <a:t>• ② 서비스 개요</a:t>
-            </a:r>
-          </a:p>
-        </p:txBody>
-      </p:sp>
-      <p:sp>
-        <p:nvSpPr>
-          <p:cNvPr id="11" name="TextBox 10"/>
-          <p:cNvSpPr txBox="1"/>
-          <p:nvPr/>
-        </p:nvSpPr>
-        <p:spPr>
-          <a:xfrm>
-            <a:off x="4829400" y="1742400"/>
-            <a:ext cx="4653000" cy="237600"/>
-          </a:xfrm>
-          <a:prstGeom prst="rect">
-            <a:avLst/>
-          </a:prstGeom>
-          <a:noFill/>
-        </p:spPr>
-        <p:txBody>
-          <a:bodyPr wrap="square" anchor="t" lIns="0" rIns="0" tIns="0" bIns="0">
-            <a:spAutoFit/>
-          </a:bodyPr>
-          <a:lstStyle/>
-          <a:p>
-            <a:pPr algn="l"/>
-            <a:r>
-              <a:rPr sz="1100" b="0">
-                <a:solidFill>
-                  <a:srgbClr val="000000"/>
-                </a:solidFill>
-                <a:latin typeface="맑은 고딕"/>
-                <a:ea typeface="맑은 고딕"/>
-                <a:cs typeface="맑은 고딕"/>
-              </a:rPr>
-              <a:t>- 거점 : 유휴 점포 PP센터 </a:t>
-            </a:r>
-            <a:r>
-              <a:rPr sz="1000" b="0">
-                <a:solidFill>
-                  <a:srgbClr val="000000"/>
-                </a:solidFill>
-                <a:latin typeface="맑은 고딕"/>
-                <a:ea typeface="맑은 고딕"/>
-                <a:cs typeface="맑은 고딕"/>
-              </a:rPr>
-              <a:t>(반경 내 즉시 출고)</a:t>
-            </a:r>
-          </a:p>
-        </p:txBody>
-      </p:sp>
-      <p:sp>
-        <p:nvSpPr>
-          <p:cNvPr id="12" name="TextBox 11"/>
-          <p:cNvSpPr txBox="1"/>
-          <p:nvPr/>
-        </p:nvSpPr>
-        <p:spPr>
-          <a:xfrm>
-            <a:off x="4829400" y="1980000"/>
-            <a:ext cx="4653000" cy="237600"/>
-          </a:xfrm>
-          <a:prstGeom prst="rect">
-            <a:avLst/>
-          </a:prstGeom>
-          <a:noFill/>
-        </p:spPr>
-        <p:txBody>
-          <a:bodyPr wrap="square" anchor="t" lIns="0" rIns="0" tIns="0" bIns="0">
-            <a:spAutoFit/>
-          </a:bodyPr>
-          <a:lstStyle/>
-          <a:p>
-            <a:pPr algn="l"/>
-            <a:r>
-              <a:rPr sz="1100" b="0">
-                <a:solidFill>
-                  <a:srgbClr val="000000"/>
-                </a:solidFill>
-                <a:latin typeface="맑은 고딕"/>
-                <a:ea typeface="맑은 고딕"/>
-                <a:cs typeface="맑은 고딕"/>
-              </a:rPr>
-              <a:t>- 운송 : 쓱배송 사륜차 → 대용량·중량 대응</a:t>
-            </a:r>
-          </a:p>
-        </p:txBody>
-      </p:sp>
-      <p:sp>
-        <p:nvSpPr>
-          <p:cNvPr id="13" name="TextBox 12"/>
-          <p:cNvSpPr txBox="1"/>
-          <p:nvPr/>
-        </p:nvSpPr>
-        <p:spPr>
-          <a:xfrm>
-            <a:off x="4829400" y="2217600"/>
-            <a:ext cx="4653000" cy="237600"/>
-          </a:xfrm>
-          <a:prstGeom prst="rect">
-            <a:avLst/>
-          </a:prstGeom>
-          <a:noFill/>
-        </p:spPr>
-        <p:txBody>
-          <a:bodyPr wrap="square" anchor="t" lIns="0" rIns="0" tIns="0" bIns="0">
-            <a:spAutoFit/>
-          </a:bodyPr>
-          <a:lstStyle/>
-          <a:p>
-            <a:pPr algn="l"/>
-            <a:r>
-              <a:rPr sz="1100" b="0">
-                <a:solidFill>
-                  <a:srgbClr val="000000"/>
-                </a:solidFill>
-                <a:latin typeface="맑은 고딕"/>
-                <a:ea typeface="맑은 고딕"/>
-                <a:cs typeface="맑은 고딕"/>
-              </a:rPr>
-              <a:t>- 운영 : 20시 마감 → 2시간 내 배송 완료 </a:t>
-            </a:r>
-            <a:r>
-              <a:rPr sz="1000" b="0">
-                <a:solidFill>
-                  <a:srgbClr val="000000"/>
-                </a:solidFill>
-                <a:latin typeface="맑은 고딕"/>
-                <a:ea typeface="맑은 고딕"/>
-                <a:cs typeface="맑은 고딕"/>
-              </a:rPr>
-              <a:t>(예약배송 병행)</a:t>
-            </a:r>
-          </a:p>
-        </p:txBody>
-      </p:sp>
-      <p:sp>
-        <p:nvSpPr>
-          <p:cNvPr id="14" name="TextBox 13"/>
-          <p:cNvSpPr txBox="1"/>
-          <p:nvPr/>
-        </p:nvSpPr>
-        <p:spPr>
-          <a:xfrm>
-            <a:off x="4829400" y="2455200"/>
-            <a:ext cx="4653000" cy="237600"/>
-          </a:xfrm>
-          <a:prstGeom prst="rect">
-            <a:avLst/>
-          </a:prstGeom>
-          <a:noFill/>
-        </p:spPr>
-        <p:txBody>
-          <a:bodyPr wrap="square" anchor="t" lIns="0" rIns="0" tIns="0" bIns="0">
-            <a:spAutoFit/>
-          </a:bodyPr>
-          <a:lstStyle/>
-          <a:p>
-            <a:pPr algn="l"/>
-            <a:r>
-              <a:rPr sz="1100" b="0">
-                <a:solidFill>
-                  <a:srgbClr val="000000"/>
-                </a:solidFill>
-                <a:latin typeface="맑은 고딕"/>
-                <a:ea typeface="맑은 고딕"/>
-                <a:cs typeface="맑은 고딕"/>
-              </a:rPr>
-              <a:t>- 규모 : 약 15만 종 </a:t>
-            </a:r>
-            <a:r>
-              <a:rPr sz="1000" b="0">
-                <a:solidFill>
-                  <a:srgbClr val="000000"/>
-                </a:solidFill>
-                <a:latin typeface="맑은 고딕"/>
-                <a:ea typeface="맑은 고딕"/>
-                <a:cs typeface="맑은 고딕"/>
-              </a:rPr>
-              <a:t>(바로퀵 1만 종 대비 15배)</a:t>
-            </a:r>
-          </a:p>
-        </p:txBody>
-      </p:sp>
-      <p:sp>
-        <p:nvSpPr>
-          <p:cNvPr id="15" name="TextBox 14"/>
-          <p:cNvSpPr txBox="1"/>
-          <p:nvPr/>
-        </p:nvSpPr>
-        <p:spPr>
-          <a:xfrm>
-            <a:off x="4631400" y="2800800"/>
-            <a:ext cx="4851000" cy="230400"/>
-          </a:xfrm>
-          <a:prstGeom prst="rect">
-            <a:avLst/>
-          </a:prstGeom>
-          <a:noFill/>
-        </p:spPr>
-        <p:txBody>
-          <a:bodyPr wrap="square" anchor="t" lIns="0" rIns="0" tIns="0" bIns="0">
-            <a:spAutoFit/>
-          </a:bodyPr>
-          <a:lstStyle/>
-          <a:p>
-            <a:pPr algn="l"/>
-            <a:r>
-              <a:rPr sz="1200" b="1">
-                <a:solidFill>
-                  <a:srgbClr val="000000"/>
-                </a:solidFill>
-                <a:latin typeface="맑은 고딕"/>
-                <a:ea typeface="맑은 고딕"/>
-                <a:cs typeface="맑은 고딕"/>
-              </a:rPr>
-              <a:t>• ③ 확산 계획</a:t>
-            </a:r>
-          </a:p>
-        </p:txBody>
-      </p:sp>
-      <p:cxnSp>
-        <p:nvCxnSpPr>
-          <p:cNvPr id="16" name="Connector 15"/>
-          <p:cNvCxnSpPr/>
-          <p:nvPr/>
-        </p:nvCxnSpPr>
-        <p:spPr>
-          <a:xfrm>
-            <a:off x="4703400" y="3175200"/>
-            <a:ext cx="0" cy="2404799"/>
-          </a:xfrm>
-          <a:prstGeom prst="bentConnector3">
-            <a:avLst/>
-          </a:prstGeom>
-          <a:ln w="22225">
-            <a:solidFill>
-              <a:srgbClr val="000000"/>
-            </a:solidFill>
-            <a:prstDash val="solid"/>
-          </a:ln>
-          <a:effectLst/>
-        </p:spPr>
-        <p:style>
-          <a:lnRef idx="2">
-            <a:schemeClr val="accent1"/>
-          </a:lnRef>
-          <a:fillRef idx="0">
-            <a:schemeClr val="accent1"/>
-          </a:fillRef>
-          <a:effectRef idx="1">
-            <a:schemeClr val="accent1"/>
-          </a:effectRef>
-          <a:fontRef idx="minor">
-            <a:schemeClr val="tx1"/>
-          </a:fontRef>
-        </p:style>
-      </p:cxnSp>
-      <p:sp>
-        <p:nvSpPr>
-          <p:cNvPr id="17" name="Oval 16"/>
-          <p:cNvSpPr/>
-          <p:nvPr/>
-        </p:nvSpPr>
-        <p:spPr>
-          <a:xfrm>
-            <a:off x="4656600" y="3128400"/>
-            <a:ext cx="93600" cy="93600"/>
-          </a:xfrm>
-          <a:prstGeom prst="ellipse">
-            <a:avLst/>
-          </a:prstGeom>
-          <a:solidFill>
-            <a:srgbClr val="FFFFFF"/>
-          </a:solidFill>
-          <a:ln w="12700">
-            <a:solidFill>
-              <a:srgbClr val="000000"/>
-            </a:solidFill>
-          </a:ln>
-          <a:effectLst/>
-        </p:spPr>
-        <p:style>
-          <a:lnRef idx="1">
-            <a:schemeClr val="accent1"/>
-          </a:lnRef>
-          <a:fillRef idx="3">
-            <a:schemeClr val="accent1"/>
-          </a:fillRef>
-          <a:effectRef idx="2">
-            <a:schemeClr val="accent1"/>
-          </a:effectRef>
-          <a:fontRef idx="minor">
-            <a:schemeClr val="lt1"/>
-          </a:fontRef>
-        </p:style>
-        <p:txBody>
-          <a:bodyPr rtlCol="0" anchor="ctr"/>
-          <a:lstStyle/>
-          <a:p>
-            <a:pPr algn="ctr"/>
-          </a:p>
-        </p:txBody>
-      </p:sp>
-      <p:sp>
-        <p:nvSpPr>
-          <p:cNvPr id="18" name="TextBox 17"/>
-          <p:cNvSpPr txBox="1"/>
-          <p:nvPr/>
-        </p:nvSpPr>
-        <p:spPr>
-          <a:xfrm>
-            <a:off x="4865400" y="3067200"/>
-            <a:ext cx="720000" cy="180000"/>
-          </a:xfrm>
-          <a:prstGeom prst="rect">
-            <a:avLst/>
-          </a:prstGeom>
-          <a:noFill/>
-        </p:spPr>
-        <p:txBody>
-          <a:bodyPr wrap="square" anchor="ctr" lIns="0" rIns="0" tIns="0" bIns="0">
-            <a:spAutoFit/>
-          </a:bodyPr>
-          <a:lstStyle/>
-          <a:p>
-            <a:pPr algn="l"/>
-            <a:r>
-              <a:rPr sz="1100" b="1">
-                <a:solidFill>
-                  <a:srgbClr val="000000"/>
-                </a:solidFill>
-                <a:latin typeface="맑은 고딕"/>
-                <a:ea typeface="맑은 고딕"/>
-                <a:cs typeface="맑은 고딕"/>
-              </a:rPr>
-              <a:t>'26.7월</a:t>
-            </a:r>
-          </a:p>
-        </p:txBody>
-      </p:sp>
-      <p:sp>
-        <p:nvSpPr>
-          <p:cNvPr id="19" name="TextBox 18"/>
-          <p:cNvSpPr txBox="1"/>
-          <p:nvPr/>
-        </p:nvSpPr>
-        <p:spPr>
-          <a:xfrm>
-            <a:off x="5621399" y="3067200"/>
-            <a:ext cx="3861000" cy="216000"/>
-          </a:xfrm>
-          <a:prstGeom prst="rect">
-            <a:avLst/>
-          </a:prstGeom>
-          <a:noFill/>
-        </p:spPr>
-        <p:txBody>
-          <a:bodyPr wrap="square" anchor="ctr" lIns="0" rIns="0" tIns="0" bIns="0">
-            <a:spAutoFit/>
-          </a:bodyPr>
-          <a:lstStyle/>
-          <a:p>
-            <a:pPr algn="l"/>
-            <a:r>
-              <a:rPr sz="1100" b="0">
-                <a:solidFill>
-                  <a:srgbClr val="000000"/>
-                </a:solidFill>
-                <a:latin typeface="맑은 고딕"/>
-                <a:ea typeface="맑은 고딕"/>
-                <a:cs typeface="맑은 고딕"/>
-              </a:rPr>
-              <a:t>양재·하남점 도입</a:t>
-            </a:r>
-          </a:p>
-        </p:txBody>
-      </p:sp>
-      <p:sp>
-        <p:nvSpPr>
-          <p:cNvPr id="20" name="Oval 19"/>
-          <p:cNvSpPr/>
-          <p:nvPr/>
-        </p:nvSpPr>
-        <p:spPr>
-          <a:xfrm>
-            <a:off x="4656600" y="3930000"/>
-            <a:ext cx="93600" cy="93600"/>
-          </a:xfrm>
-          <a:prstGeom prst="ellipse">
-            <a:avLst/>
-          </a:prstGeom>
-          <a:solidFill>
-            <a:srgbClr val="FFFFFF"/>
-          </a:solidFill>
-          <a:ln w="12700">
-            <a:solidFill>
-              <a:srgbClr val="000000"/>
-            </a:solidFill>
-          </a:ln>
-          <a:effectLst/>
-        </p:spPr>
-        <p:style>
-          <a:lnRef idx="1">
-            <a:schemeClr val="accent1"/>
-          </a:lnRef>
-          <a:fillRef idx="3">
-            <a:schemeClr val="accent1"/>
-          </a:fillRef>
-          <a:effectRef idx="2">
-            <a:schemeClr val="accent1"/>
-          </a:effectRef>
-          <a:fontRef idx="minor">
-            <a:schemeClr val="lt1"/>
-          </a:fontRef>
-        </p:style>
-        <p:txBody>
-          <a:bodyPr rtlCol="0" anchor="ctr"/>
-          <a:lstStyle/>
-          <a:p>
-            <a:pPr algn="ctr"/>
-          </a:p>
-        </p:txBody>
-      </p:sp>
-      <p:sp>
-        <p:nvSpPr>
-          <p:cNvPr id="21" name="TextBox 20"/>
-          <p:cNvSpPr txBox="1"/>
-          <p:nvPr/>
-        </p:nvSpPr>
-        <p:spPr>
-          <a:xfrm>
-            <a:off x="4865400" y="3868800"/>
-            <a:ext cx="720000" cy="180000"/>
-          </a:xfrm>
-          <a:prstGeom prst="rect">
-            <a:avLst/>
-          </a:prstGeom>
-          <a:noFill/>
-        </p:spPr>
-        <p:txBody>
-          <a:bodyPr wrap="square" anchor="ctr" lIns="0" rIns="0" tIns="0" bIns="0">
-            <a:spAutoFit/>
-          </a:bodyPr>
-          <a:lstStyle/>
-          <a:p>
-            <a:pPr algn="l"/>
-            <a:r>
-              <a:rPr sz="1100" b="1">
-                <a:solidFill>
-                  <a:srgbClr val="000000"/>
-                </a:solidFill>
-                <a:latin typeface="맑은 고딕"/>
-                <a:ea typeface="맑은 고딕"/>
-                <a:cs typeface="맑은 고딕"/>
-              </a:rPr>
-              <a:t>8월</a:t>
-            </a:r>
-          </a:p>
-        </p:txBody>
-      </p:sp>
-      <p:sp>
-        <p:nvSpPr>
-          <p:cNvPr id="22" name="TextBox 21"/>
-          <p:cNvSpPr txBox="1"/>
-          <p:nvPr/>
-        </p:nvSpPr>
-        <p:spPr>
-          <a:xfrm>
-            <a:off x="5621399" y="3868800"/>
-            <a:ext cx="3861000" cy="216000"/>
-          </a:xfrm>
-          <a:prstGeom prst="rect">
-            <a:avLst/>
-          </a:prstGeom>
-          <a:noFill/>
-        </p:spPr>
-        <p:txBody>
-          <a:bodyPr wrap="square" anchor="ctr" lIns="0" rIns="0" tIns="0" bIns="0">
-            <a:spAutoFit/>
-          </a:bodyPr>
-          <a:lstStyle/>
-          <a:p>
-            <a:pPr algn="l"/>
-            <a:r>
-              <a:rPr sz="1100" b="0">
-                <a:solidFill>
-                  <a:srgbClr val="000000"/>
-                </a:solidFill>
-                <a:latin typeface="맑은 고딕"/>
-                <a:ea typeface="맑은 고딕"/>
-                <a:cs typeface="맑은 고딕"/>
-              </a:rPr>
-              <a:t>서울 확대 </a:t>
-            </a:r>
-            <a:r>
-              <a:rPr sz="1000" b="0">
-                <a:solidFill>
-                  <a:srgbClr val="000000"/>
-                </a:solidFill>
-                <a:latin typeface="맑은 고딕"/>
-                <a:ea typeface="맑은 고딕"/>
-                <a:cs typeface="맑은 고딕"/>
-              </a:rPr>
-              <a:t>(월계·가든5·신도림)</a:t>
-            </a:r>
-          </a:p>
-        </p:txBody>
-      </p:sp>
-      <p:sp>
-        <p:nvSpPr>
-          <p:cNvPr id="23" name="Oval 22"/>
-          <p:cNvSpPr/>
-          <p:nvPr/>
-        </p:nvSpPr>
-        <p:spPr>
-          <a:xfrm>
-            <a:off x="4656600" y="4731600"/>
-            <a:ext cx="93600" cy="93600"/>
-          </a:xfrm>
-          <a:prstGeom prst="ellipse">
-            <a:avLst/>
-          </a:prstGeom>
-          <a:solidFill>
-            <a:srgbClr val="FFFFFF"/>
-          </a:solidFill>
-          <a:ln w="12700">
-            <a:solidFill>
-              <a:srgbClr val="000000"/>
-            </a:solidFill>
-          </a:ln>
-          <a:effectLst/>
-        </p:spPr>
-        <p:style>
-          <a:lnRef idx="1">
-            <a:schemeClr val="accent1"/>
-          </a:lnRef>
-          <a:fillRef idx="3">
-            <a:schemeClr val="accent1"/>
-          </a:fillRef>
-          <a:effectRef idx="2">
-            <a:schemeClr val="accent1"/>
-          </a:effectRef>
-          <a:fontRef idx="minor">
-            <a:schemeClr val="lt1"/>
-          </a:fontRef>
-        </p:style>
-        <p:txBody>
-          <a:bodyPr rtlCol="0" anchor="ctr"/>
-          <a:lstStyle/>
-          <a:p>
-            <a:pPr algn="ctr"/>
-          </a:p>
-        </p:txBody>
-      </p:sp>
-      <p:sp>
-        <p:nvSpPr>
-          <p:cNvPr id="24" name="TextBox 23"/>
-          <p:cNvSpPr txBox="1"/>
-          <p:nvPr/>
-        </p:nvSpPr>
-        <p:spPr>
-          <a:xfrm>
-            <a:off x="4865400" y="4670400"/>
-            <a:ext cx="720000" cy="180000"/>
-          </a:xfrm>
-          <a:prstGeom prst="rect">
-            <a:avLst/>
-          </a:prstGeom>
-          <a:noFill/>
-        </p:spPr>
-        <p:txBody>
-          <a:bodyPr wrap="square" anchor="ctr" lIns="0" rIns="0" tIns="0" bIns="0">
-            <a:spAutoFit/>
-          </a:bodyPr>
-          <a:lstStyle/>
-          <a:p>
-            <a:pPr algn="l"/>
-            <a:r>
-              <a:rPr sz="1100" b="1">
-                <a:solidFill>
-                  <a:srgbClr val="000000"/>
-                </a:solidFill>
-                <a:latin typeface="맑은 고딕"/>
-                <a:ea typeface="맑은 고딕"/>
-                <a:cs typeface="맑은 고딕"/>
-              </a:rPr>
-              <a:t>9월</a:t>
-            </a:r>
-          </a:p>
-        </p:txBody>
-      </p:sp>
-      <p:sp>
-        <p:nvSpPr>
-          <p:cNvPr id="25" name="TextBox 24"/>
-          <p:cNvSpPr txBox="1"/>
-          <p:nvPr/>
-        </p:nvSpPr>
-        <p:spPr>
-          <a:xfrm>
-            <a:off x="5621399" y="4670400"/>
-            <a:ext cx="3861000" cy="216000"/>
-          </a:xfrm>
-          <a:prstGeom prst="rect">
-            <a:avLst/>
-          </a:prstGeom>
-          <a:noFill/>
-        </p:spPr>
-        <p:txBody>
-          <a:bodyPr wrap="square" anchor="ctr" lIns="0" rIns="0" tIns="0" bIns="0">
-            <a:spAutoFit/>
-          </a:bodyPr>
-          <a:lstStyle/>
-          <a:p>
-            <a:pPr algn="l"/>
-            <a:r>
-              <a:rPr sz="1100" b="0">
-                <a:solidFill>
-                  <a:srgbClr val="000000"/>
-                </a:solidFill>
-                <a:latin typeface="맑은 고딕"/>
-                <a:ea typeface="맑은 고딕"/>
-                <a:cs typeface="맑은 고딕"/>
-              </a:rPr>
-              <a:t>전국 확대</a:t>
-            </a:r>
-          </a:p>
-        </p:txBody>
-      </p:sp>
-      <p:sp>
-        <p:nvSpPr>
-          <p:cNvPr id="26" name="Oval 25"/>
-          <p:cNvSpPr/>
-          <p:nvPr/>
-        </p:nvSpPr>
-        <p:spPr>
-          <a:xfrm>
-            <a:off x="4656600" y="5533199"/>
-            <a:ext cx="93600" cy="93600"/>
-          </a:xfrm>
-          <a:prstGeom prst="ellipse">
-            <a:avLst/>
-          </a:prstGeom>
-          <a:solidFill>
-            <a:srgbClr val="FFFFFF"/>
-          </a:solidFill>
-          <a:ln w="12700">
-            <a:solidFill>
-              <a:srgbClr val="000000"/>
-            </a:solidFill>
-          </a:ln>
-          <a:effectLst/>
-        </p:spPr>
-        <p:style>
-          <a:lnRef idx="1">
-            <a:schemeClr val="accent1"/>
-          </a:lnRef>
-          <a:fillRef idx="3">
-            <a:schemeClr val="accent1"/>
-          </a:fillRef>
-          <a:effectRef idx="2">
-            <a:schemeClr val="accent1"/>
-          </a:effectRef>
-          <a:fontRef idx="minor">
-            <a:schemeClr val="lt1"/>
-          </a:fontRef>
-        </p:style>
-        <p:txBody>
-          <a:bodyPr rtlCol="0" anchor="ctr"/>
-          <a:lstStyle/>
-          <a:p>
-            <a:pPr algn="ctr"/>
-          </a:p>
-        </p:txBody>
-      </p:sp>
-      <p:sp>
-        <p:nvSpPr>
-          <p:cNvPr id="27" name="TextBox 26"/>
-          <p:cNvSpPr txBox="1"/>
-          <p:nvPr/>
-        </p:nvSpPr>
-        <p:spPr>
-          <a:xfrm>
-            <a:off x="4865400" y="5471999"/>
-            <a:ext cx="720000" cy="180000"/>
-          </a:xfrm>
-          <a:prstGeom prst="rect">
-            <a:avLst/>
-          </a:prstGeom>
-          <a:noFill/>
-        </p:spPr>
-        <p:txBody>
-          <a:bodyPr wrap="square" anchor="ctr" lIns="0" rIns="0" tIns="0" bIns="0">
-            <a:spAutoFit/>
-          </a:bodyPr>
-          <a:lstStyle/>
-          <a:p>
-            <a:pPr algn="l"/>
-            <a:r>
-              <a:rPr sz="1100" b="1">
-                <a:solidFill>
-                  <a:srgbClr val="000000"/>
-                </a:solidFill>
-                <a:latin typeface="맑은 고딕"/>
-                <a:ea typeface="맑은 고딕"/>
-                <a:cs typeface="맑은 고딕"/>
-              </a:rPr>
-              <a:t>연말</a:t>
-            </a:r>
-          </a:p>
-        </p:txBody>
-      </p:sp>
-      <p:sp>
-        <p:nvSpPr>
-          <p:cNvPr id="28" name="TextBox 27"/>
-          <p:cNvSpPr txBox="1"/>
-          <p:nvPr/>
-        </p:nvSpPr>
-        <p:spPr>
-          <a:xfrm>
-            <a:off x="5621399" y="5471999"/>
-            <a:ext cx="3861000" cy="216000"/>
-          </a:xfrm>
-          <a:prstGeom prst="rect">
-            <a:avLst/>
-          </a:prstGeom>
-          <a:noFill/>
-        </p:spPr>
-        <p:txBody>
-          <a:bodyPr wrap="square" anchor="ctr" lIns="0" rIns="0" tIns="0" bIns="0">
-            <a:spAutoFit/>
-          </a:bodyPr>
-          <a:lstStyle/>
-          <a:p>
-            <a:pPr algn="l"/>
-            <a:r>
-              <a:rPr sz="1100" b="0">
-                <a:solidFill>
-                  <a:srgbClr val="000000"/>
-                </a:solidFill>
-                <a:latin typeface="맑은 고딕"/>
-                <a:ea typeface="맑은 고딕"/>
-                <a:cs typeface="맑은 고딕"/>
-              </a:rPr>
-              <a:t>50여 점포 운영</a:t>
-            </a:r>
-          </a:p>
-        </p:txBody>
-      </p:sp>
-      <p:sp>
-        <p:nvSpPr>
-          <p:cNvPr id="29" name="TextBox 28"/>
-          <p:cNvSpPr txBox="1"/>
-          <p:nvPr/>
-        </p:nvSpPr>
-        <p:spPr>
-          <a:xfrm>
-            <a:off x="4631400" y="5742000"/>
-            <a:ext cx="4851000" cy="230400"/>
-          </a:xfrm>
-          <a:prstGeom prst="rect">
-            <a:avLst/>
-          </a:prstGeom>
-          <a:noFill/>
-        </p:spPr>
-        <p:txBody>
-          <a:bodyPr wrap="square" anchor="t" lIns="0" rIns="0" tIns="0" bIns="0">
-            <a:spAutoFit/>
-          </a:bodyPr>
-          <a:lstStyle/>
-          <a:p>
-            <a:pPr algn="l"/>
-            <a:r>
-              <a:rPr sz="1200" b="1">
-                <a:solidFill>
-                  <a:srgbClr val="000000"/>
-                </a:solidFill>
-                <a:latin typeface="맑은 고딕"/>
-                <a:ea typeface="맑은 고딕"/>
-                <a:cs typeface="맑은 고딕"/>
-              </a:rPr>
-              <a:t>• </a:t>
-            </a:r>
-            <a:r>
-              <a:rPr sz="1100" b="1">
-                <a:solidFill>
-                  <a:srgbClr val="000000"/>
-                </a:solidFill>
-                <a:latin typeface="맑은 고딕"/>
-                <a:ea typeface="맑은 고딕"/>
-                <a:cs typeface="맑은 고딕"/>
-              </a:rPr>
-              <a:t>(리드)</a:t>
-            </a:r>
-            <a:r>
-              <a:rPr sz="1200" b="1">
-                <a:solidFill>
-                  <a:srgbClr val="000000"/>
-                </a:solidFill>
-                <a:latin typeface="맑은 고딕"/>
-                <a:ea typeface="맑은 고딕"/>
-                <a:cs typeface="맑은 고딕"/>
-              </a:rPr>
-              <a:t> 유휴 PP센터 재활용 → 신규 투자 최소 · 저비용 급속 확산</a:t>
-            </a:r>
-          </a:p>
-        </p:txBody>
-      </p:sp>
       <p:cxnSp>
         <p:nvCxnSpPr>
           <p:cNvPr id="30" name="Connector 29"/>

--- a/reports/ssg-quickcommerce-onepager.pptx
+++ b/reports/ssg-quickcommerce-onepager.pptx
@@ -3507,7 +3507,7 @@
         <p:spPr>
           <a:xfrm>
             <a:off x="4703400" y="3175200"/>
-            <a:ext cx="0" cy="1674000"/>
+            <a:ext cx="0" cy="2386800"/>
           </a:xfrm>
           <a:prstGeom prst="bentConnector3">
             <a:avLst/>
@@ -3663,7 +3663,7 @@
         </p:nvSpPr>
         <p:spPr>
           <a:xfrm>
-            <a:off x="4656600" y="3686400"/>
+            <a:off x="4656600" y="3923999"/>
             <a:ext cx="93600" cy="93600"/>
           </a:xfrm>
           <a:prstGeom prst="ellipse">
@@ -3709,7 +3709,7 @@
         </p:nvSpPr>
         <p:spPr>
           <a:xfrm>
-            <a:off x="4865400" y="3625200"/>
+            <a:off x="4865400" y="3862799"/>
             <a:ext cx="720000" cy="180000"/>
           </a:xfrm>
           <a:prstGeom prst="rect">
@@ -3746,7 +3746,7 @@
         </p:nvSpPr>
         <p:spPr>
           <a:xfrm>
-            <a:off x="5621399" y="3625200"/>
+            <a:off x="5621399" y="3862799"/>
             <a:ext cx="3861000" cy="216000"/>
           </a:xfrm>
           <a:prstGeom prst="rect">
@@ -3794,7 +3794,7 @@
         </p:nvSpPr>
         <p:spPr>
           <a:xfrm>
-            <a:off x="4656600" y="4244400"/>
+            <a:off x="4656600" y="4719599"/>
             <a:ext cx="93600" cy="93600"/>
           </a:xfrm>
           <a:prstGeom prst="ellipse">
@@ -3840,7 +3840,7 @@
         </p:nvSpPr>
         <p:spPr>
           <a:xfrm>
-            <a:off x="4865400" y="4183199"/>
+            <a:off x="4865400" y="4658399"/>
             <a:ext cx="720000" cy="180000"/>
           </a:xfrm>
           <a:prstGeom prst="rect">
@@ -3877,7 +3877,7 @@
         </p:nvSpPr>
         <p:spPr>
           <a:xfrm>
-            <a:off x="5621399" y="4183199"/>
+            <a:off x="5621399" y="4658399"/>
             <a:ext cx="3861000" cy="216000"/>
           </a:xfrm>
           <a:prstGeom prst="rect">
@@ -3914,7 +3914,7 @@
         </p:nvSpPr>
         <p:spPr>
           <a:xfrm>
-            <a:off x="4656600" y="4802400"/>
+            <a:off x="4656600" y="5515199"/>
             <a:ext cx="93600" cy="93600"/>
           </a:xfrm>
           <a:prstGeom prst="ellipse">
@@ -3960,7 +3960,7 @@
         </p:nvSpPr>
         <p:spPr>
           <a:xfrm>
-            <a:off x="4865400" y="4741200"/>
+            <a:off x="4865400" y="5453999"/>
             <a:ext cx="720000" cy="180000"/>
           </a:xfrm>
           <a:prstGeom prst="rect">
@@ -3997,7 +3997,7 @@
         </p:nvSpPr>
         <p:spPr>
           <a:xfrm>
-            <a:off x="5621399" y="4741200"/>
+            <a:off x="5621399" y="5453999"/>
             <a:ext cx="3861000" cy="216000"/>
           </a:xfrm>
           <a:prstGeom prst="rect">
@@ -4034,7 +4034,7 @@
         </p:nvSpPr>
         <p:spPr>
           <a:xfrm>
-            <a:off x="4631400" y="5000400"/>
+            <a:off x="4631400" y="5742000"/>
             <a:ext cx="4851000" cy="230400"/>
           </a:xfrm>
           <a:prstGeom prst="rect">

--- a/reports/ssg-quickcommerce-onepager.pptx
+++ b/reports/ssg-quickcommerce-onepager.pptx
@@ -3227,7 +3227,7 @@
                 <a:ea typeface="맑은 고딕"/>
                 <a:cs typeface="맑은 고딕"/>
               </a:rPr>
-              <a:t>※ 취급 품목 : 이마트 15만 종 · 바로퀵 1만 종      ※ 출처 : 비즈워치 · 머니투데이 · 한국경제 </a:t>
+              <a:t>※ 취급 품목: 이마트 15만 · 바로퀵 1만 종      ※ 출처: 비즈워치 · 머니투데이 · 한국경제 </a:t>
             </a:r>
             <a:r>
               <a:rPr sz="800" b="0">
@@ -3251,8 +3251,8 @@
         </p:nvSpPr>
         <p:spPr>
           <a:xfrm>
-            <a:off x="4631400" y="1504800"/>
-            <a:ext cx="4851000" cy="237600"/>
+            <a:off x="424800" y="1494000"/>
+            <a:ext cx="9057600" cy="180000"/>
           </a:xfrm>
           <a:prstGeom prst="rect">
             <a:avLst/>
@@ -3275,287 +3275,30 @@
                 <a:ea typeface="맑은 고딕"/>
                 <a:cs typeface="맑은 고딕"/>
               </a:rPr>
-              <a:t>• ② 서비스 개요</a:t>
-            </a:r>
-          </a:p>
-        </p:txBody>
-      </p:sp>
-      <p:sp>
-        <p:nvSpPr>
-          <p:cNvPr id="6" name="TextBox 5"/>
-          <p:cNvSpPr txBox="1"/>
+              <a:t>• ① 도입 배경</a:t>
+            </a:r>
+          </a:p>
+        </p:txBody>
+      </p:sp>
+      <p:sp>
+        <p:nvSpPr>
+          <p:cNvPr id="6" name="Rectangle 5"/>
+          <p:cNvSpPr/>
           <p:nvPr/>
         </p:nvSpPr>
         <p:spPr>
           <a:xfrm>
-            <a:off x="4829400" y="1742400"/>
-            <a:ext cx="4653000" cy="237600"/>
+            <a:off x="424800" y="1699200"/>
+            <a:ext cx="2803200" cy="522000"/>
           </a:xfrm>
           <a:prstGeom prst="rect">
             <a:avLst/>
           </a:prstGeom>
-          <a:noFill/>
-        </p:spPr>
-        <p:txBody>
-          <a:bodyPr wrap="square" anchor="t" lIns="0" rIns="0" tIns="0" bIns="0">
-            <a:spAutoFit/>
-          </a:bodyPr>
-          <a:lstStyle/>
-          <a:p>
-            <a:pPr algn="l"/>
-            <a:r>
-              <a:rPr sz="1100" b="0">
-                <a:solidFill>
-                  <a:srgbClr val="000000"/>
-                </a:solidFill>
-                <a:latin typeface="맑은 고딕"/>
-                <a:ea typeface="맑은 고딕"/>
-                <a:cs typeface="맑은 고딕"/>
-              </a:rPr>
-              <a:t>- 거점 : 유휴 점포 PP센터 </a:t>
-            </a:r>
-            <a:r>
-              <a:rPr sz="1000" b="0">
-                <a:solidFill>
-                  <a:srgbClr val="000000"/>
-                </a:solidFill>
-                <a:latin typeface="맑은 고딕"/>
-                <a:ea typeface="맑은 고딕"/>
-                <a:cs typeface="맑은 고딕"/>
-              </a:rPr>
-              <a:t>(반경 내 즉시 출고)</a:t>
-            </a:r>
-          </a:p>
-        </p:txBody>
-      </p:sp>
-      <p:sp>
-        <p:nvSpPr>
-          <p:cNvPr id="7" name="TextBox 6"/>
-          <p:cNvSpPr txBox="1"/>
-          <p:nvPr/>
-        </p:nvSpPr>
-        <p:spPr>
-          <a:xfrm>
-            <a:off x="4829400" y="1980000"/>
-            <a:ext cx="4653000" cy="237600"/>
-          </a:xfrm>
-          <a:prstGeom prst="rect">
-            <a:avLst/>
-          </a:prstGeom>
-          <a:noFill/>
-        </p:spPr>
-        <p:txBody>
-          <a:bodyPr wrap="square" anchor="t" lIns="0" rIns="0" tIns="0" bIns="0">
-            <a:spAutoFit/>
-          </a:bodyPr>
-          <a:lstStyle/>
-          <a:p>
-            <a:pPr algn="l"/>
-            <a:r>
-              <a:rPr sz="1100" b="0">
-                <a:solidFill>
-                  <a:srgbClr val="000000"/>
-                </a:solidFill>
-                <a:latin typeface="맑은 고딕"/>
-                <a:ea typeface="맑은 고딕"/>
-                <a:cs typeface="맑은 고딕"/>
-              </a:rPr>
-              <a:t>- 운송 : 쓱배송 사륜차 → 대용량·중량 대응</a:t>
-            </a:r>
-          </a:p>
-        </p:txBody>
-      </p:sp>
-      <p:sp>
-        <p:nvSpPr>
-          <p:cNvPr id="8" name="TextBox 7"/>
-          <p:cNvSpPr txBox="1"/>
-          <p:nvPr/>
-        </p:nvSpPr>
-        <p:spPr>
-          <a:xfrm>
-            <a:off x="4829400" y="2217600"/>
-            <a:ext cx="4653000" cy="237600"/>
-          </a:xfrm>
-          <a:prstGeom prst="rect">
-            <a:avLst/>
-          </a:prstGeom>
-          <a:noFill/>
-        </p:spPr>
-        <p:txBody>
-          <a:bodyPr wrap="square" anchor="t" lIns="0" rIns="0" tIns="0" bIns="0">
-            <a:spAutoFit/>
-          </a:bodyPr>
-          <a:lstStyle/>
-          <a:p>
-            <a:pPr algn="l"/>
-            <a:r>
-              <a:rPr sz="1100" b="0">
-                <a:solidFill>
-                  <a:srgbClr val="000000"/>
-                </a:solidFill>
-                <a:latin typeface="맑은 고딕"/>
-                <a:ea typeface="맑은 고딕"/>
-                <a:cs typeface="맑은 고딕"/>
-              </a:rPr>
-              <a:t>- 운영 : 20시 마감 → 2시간 내 배송 완료 </a:t>
-            </a:r>
-            <a:r>
-              <a:rPr sz="1000" b="0">
-                <a:solidFill>
-                  <a:srgbClr val="000000"/>
-                </a:solidFill>
-                <a:latin typeface="맑은 고딕"/>
-                <a:ea typeface="맑은 고딕"/>
-                <a:cs typeface="맑은 고딕"/>
-              </a:rPr>
-              <a:t>(예약배송 병행)</a:t>
-            </a:r>
-          </a:p>
-        </p:txBody>
-      </p:sp>
-      <p:sp>
-        <p:nvSpPr>
-          <p:cNvPr id="9" name="TextBox 8"/>
-          <p:cNvSpPr txBox="1"/>
-          <p:nvPr/>
-        </p:nvSpPr>
-        <p:spPr>
-          <a:xfrm>
-            <a:off x="4829400" y="2455200"/>
-            <a:ext cx="4653000" cy="237600"/>
-          </a:xfrm>
-          <a:prstGeom prst="rect">
-            <a:avLst/>
-          </a:prstGeom>
-          <a:noFill/>
-        </p:spPr>
-        <p:txBody>
-          <a:bodyPr wrap="square" anchor="t" lIns="0" rIns="0" tIns="0" bIns="0">
-            <a:spAutoFit/>
-          </a:bodyPr>
-          <a:lstStyle/>
-          <a:p>
-            <a:pPr algn="l"/>
-            <a:r>
-              <a:rPr sz="1100" b="0">
-                <a:solidFill>
-                  <a:srgbClr val="000000"/>
-                </a:solidFill>
-                <a:latin typeface="맑은 고딕"/>
-                <a:ea typeface="맑은 고딕"/>
-                <a:cs typeface="맑은 고딕"/>
-              </a:rPr>
-              <a:t>- 규모 : 약 15만 종 </a:t>
-            </a:r>
-            <a:r>
-              <a:rPr sz="1000" b="0">
-                <a:solidFill>
-                  <a:srgbClr val="000000"/>
-                </a:solidFill>
-                <a:latin typeface="맑은 고딕"/>
-                <a:ea typeface="맑은 고딕"/>
-                <a:cs typeface="맑은 고딕"/>
-              </a:rPr>
-              <a:t>(바로퀵 1만 종 대비 15배)</a:t>
-            </a:r>
-          </a:p>
-        </p:txBody>
-      </p:sp>
-      <p:sp>
-        <p:nvSpPr>
-          <p:cNvPr id="10" name="TextBox 9"/>
-          <p:cNvSpPr txBox="1"/>
-          <p:nvPr/>
-        </p:nvSpPr>
-        <p:spPr>
-          <a:xfrm>
-            <a:off x="4631400" y="2800800"/>
-            <a:ext cx="4851000" cy="230400"/>
-          </a:xfrm>
-          <a:prstGeom prst="rect">
-            <a:avLst/>
-          </a:prstGeom>
-          <a:noFill/>
-        </p:spPr>
-        <p:txBody>
-          <a:bodyPr wrap="square" anchor="t" lIns="0" rIns="0" tIns="0" bIns="0">
-            <a:spAutoFit/>
-          </a:bodyPr>
-          <a:lstStyle/>
-          <a:p>
-            <a:pPr algn="l"/>
-            <a:r>
-              <a:rPr sz="1200" b="1">
-                <a:solidFill>
-                  <a:srgbClr val="000000"/>
-                </a:solidFill>
-                <a:latin typeface="맑은 고딕"/>
-                <a:ea typeface="맑은 고딕"/>
-                <a:cs typeface="맑은 고딕"/>
-              </a:rPr>
-              <a:t>• ③ 확산 계획</a:t>
-            </a:r>
-          </a:p>
-        </p:txBody>
-      </p:sp>
-      <p:cxnSp>
-        <p:nvCxnSpPr>
-          <p:cNvPr id="11" name="Connector 10"/>
-          <p:cNvCxnSpPr/>
-          <p:nvPr/>
-        </p:nvCxnSpPr>
-        <p:spPr>
-          <a:xfrm>
-            <a:off x="4703400" y="3175200"/>
-            <a:ext cx="0" cy="2386800"/>
-          </a:xfrm>
-          <a:prstGeom prst="bentConnector3">
-            <a:avLst/>
-          </a:prstGeom>
-          <a:ln w="22225">
-            <a:solidFill>
-              <a:srgbClr val="000000"/>
-            </a:solidFill>
-            <a:prstDash val="solid"/>
-          </a:ln>
-          <a:effectLst/>
-        </p:spPr>
-        <p:style>
-          <a:lnRef idx="2">
-            <a:schemeClr val="accent1"/>
-          </a:lnRef>
-          <a:fillRef idx="0">
-            <a:schemeClr val="accent1"/>
-          </a:fillRef>
-          <a:effectRef idx="1">
-            <a:schemeClr val="accent1"/>
-          </a:effectRef>
-          <a:fontRef idx="minor">
-            <a:schemeClr val="tx1"/>
-          </a:fontRef>
-        </p:style>
-      </p:cxnSp>
-      <p:sp>
-        <p:nvSpPr>
-          <p:cNvPr id="12" name="Oval 11"/>
-          <p:cNvSpPr/>
-          <p:nvPr/>
-        </p:nvSpPr>
-        <p:spPr>
-          <a:xfrm>
-            <a:off x="4656600" y="3128400"/>
-            <a:ext cx="93600" cy="93600"/>
-          </a:xfrm>
-          <a:prstGeom prst="ellipse">
-            <a:avLst/>
-          </a:prstGeom>
           <a:solidFill>
-            <a:srgbClr val="FFFFFF"/>
+            <a:srgbClr val="EAEEF6"/>
           </a:solidFill>
-          <a:ln w="12700">
-            <a:solidFill>
-              <a:srgbClr val="000000"/>
-            </a:solidFill>
+          <a:ln>
+            <a:noFill/>
           </a:ln>
           <a:effectLst/>
         </p:spPr>
@@ -3583,14 +3326,14 @@
       </p:sp>
       <p:sp>
         <p:nvSpPr>
-          <p:cNvPr id="13" name="TextBox 12"/>
+          <p:cNvPr id="7" name="TextBox 6"/>
           <p:cNvSpPr txBox="1"/>
           <p:nvPr/>
         </p:nvSpPr>
         <p:spPr>
           <a:xfrm>
-            <a:off x="4865400" y="3067200"/>
-            <a:ext cx="720000" cy="180000"/>
+            <a:off x="514800" y="1699200"/>
+            <a:ext cx="2623200" cy="522000"/>
           </a:xfrm>
           <a:prstGeom prst="rect">
             <a:avLst/>
@@ -3603,9 +3346,9 @@
           </a:bodyPr>
           <a:lstStyle/>
           <a:p>
-            <a:pPr algn="l"/>
-            <a:r>
-              <a:rPr sz="1100" b="1">
+            <a:pPr algn="ctr"/>
+            <a:r>
+              <a:rPr sz="1100" b="0">
                 <a:solidFill>
                   <a:srgbClr val="000000"/>
                 </a:solidFill>
@@ -3613,21 +3356,54 @@
                 <a:ea typeface="맑은 고딕"/>
                 <a:cs typeface="맑은 고딕"/>
               </a:rPr>
-              <a:t>'26.7월</a:t>
-            </a:r>
-          </a:p>
-        </p:txBody>
-      </p:sp>
-      <p:sp>
-        <p:nvSpPr>
-          <p:cNvPr id="14" name="TextBox 13"/>
+              <a:t>바로퀵 매출 197%↑ </a:t>
+            </a:r>
+            <a:r>
+              <a:rPr sz="1000" b="0">
+                <a:solidFill>
+                  <a:srgbClr val="000000"/>
+                </a:solidFill>
+                <a:latin typeface="맑은 고딕"/>
+                <a:ea typeface="맑은 고딕"/>
+                <a:cs typeface="맑은 고딕"/>
+              </a:rPr>
+              <a:t>('26.6월)</a:t>
+            </a:r>
+            <a:r>
+              <a:rPr sz="1100" b="0">
+                <a:solidFill>
+                  <a:srgbClr val="000000"/>
+                </a:solidFill>
+                <a:latin typeface="맑은 고딕"/>
+                <a:ea typeface="맑은 고딕"/>
+                <a:cs typeface="맑은 고딕"/>
+              </a:rPr>
+              <a:t> </a:t>
+            </a:r>
+            <a:r>
+              <a:rPr sz="1000" b="0">
+                <a:solidFill>
+                  <a:srgbClr val="000000"/>
+                </a:solidFill>
+                <a:latin typeface="맑은 고딕"/>
+                <a:ea typeface="맑은 고딕"/>
+                <a:cs typeface="맑은 고딕"/>
+              </a:rPr>
+              <a:t>(미검증)</a:t>
+            </a:r>
+          </a:p>
+        </p:txBody>
+      </p:sp>
+      <p:sp>
+        <p:nvSpPr>
+          <p:cNvPr id="8" name="TextBox 7"/>
           <p:cNvSpPr txBox="1"/>
           <p:nvPr/>
         </p:nvSpPr>
         <p:spPr>
           <a:xfrm>
-            <a:off x="5621399" y="3067200"/>
-            <a:ext cx="3861000" cy="216000"/>
+            <a:off x="3228000" y="1699200"/>
+            <a:ext cx="324000" cy="522000"/>
           </a:xfrm>
           <a:prstGeom prst="rect">
             <a:avLst/>
@@ -3640,42 +3416,40 @@
           </a:bodyPr>
           <a:lstStyle/>
           <a:p>
-            <a:pPr algn="l"/>
-            <a:r>
-              <a:rPr sz="1100" b="0">
-                <a:solidFill>
-                  <a:srgbClr val="000000"/>
+            <a:pPr algn="ctr"/>
+            <a:r>
+              <a:rPr sz="1400" b="1">
+                <a:solidFill>
+                  <a:srgbClr val="595959"/>
                 </a:solidFill>
                 <a:latin typeface="맑은 고딕"/>
                 <a:ea typeface="맑은 고딕"/>
                 <a:cs typeface="맑은 고딕"/>
               </a:rPr>
-              <a:t>양재·하남점 도입</a:t>
-            </a:r>
-          </a:p>
-        </p:txBody>
-      </p:sp>
-      <p:sp>
-        <p:nvSpPr>
-          <p:cNvPr id="15" name="Oval 14"/>
+              <a:t>→</a:t>
+            </a:r>
+          </a:p>
+        </p:txBody>
+      </p:sp>
+      <p:sp>
+        <p:nvSpPr>
+          <p:cNvPr id="9" name="Rectangle 8"/>
           <p:cNvSpPr/>
           <p:nvPr/>
         </p:nvSpPr>
         <p:spPr>
           <a:xfrm>
-            <a:off x="4656600" y="3923999"/>
-            <a:ext cx="93600" cy="93600"/>
-          </a:xfrm>
-          <a:prstGeom prst="ellipse">
+            <a:off x="3551999" y="1699200"/>
+            <a:ext cx="2803200" cy="522000"/>
+          </a:xfrm>
+          <a:prstGeom prst="rect">
             <a:avLst/>
           </a:prstGeom>
           <a:solidFill>
-            <a:srgbClr val="FFFFFF"/>
+            <a:srgbClr val="EAEEF6"/>
           </a:solidFill>
-          <a:ln w="12700">
-            <a:solidFill>
-              <a:srgbClr val="000000"/>
-            </a:solidFill>
+          <a:ln>
+            <a:noFill/>
           </a:ln>
           <a:effectLst/>
         </p:spPr>
@@ -3703,14 +3477,14 @@
       </p:sp>
       <p:sp>
         <p:nvSpPr>
-          <p:cNvPr id="16" name="TextBox 15"/>
+          <p:cNvPr id="10" name="TextBox 9"/>
           <p:cNvSpPr txBox="1"/>
           <p:nvPr/>
         </p:nvSpPr>
         <p:spPr>
           <a:xfrm>
-            <a:off x="4865400" y="3862799"/>
-            <a:ext cx="720000" cy="180000"/>
+            <a:off x="3641999" y="1699200"/>
+            <a:ext cx="2623200" cy="522000"/>
           </a:xfrm>
           <a:prstGeom prst="rect">
             <a:avLst/>
@@ -3723,9 +3497,9 @@
           </a:bodyPr>
           <a:lstStyle/>
           <a:p>
-            <a:pPr algn="l"/>
-            <a:r>
-              <a:rPr sz="1100" b="1">
+            <a:pPr algn="ctr"/>
+            <a:r>
+              <a:rPr sz="1000" b="0">
                 <a:solidFill>
                   <a:srgbClr val="000000"/>
                 </a:solidFill>
@@ -3733,21 +3507,32 @@
                 <a:ea typeface="맑은 고딕"/>
                 <a:cs typeface="맑은 고딕"/>
               </a:rPr>
-              <a:t>8월</a:t>
-            </a:r>
-          </a:p>
-        </p:txBody>
-      </p:sp>
-      <p:sp>
-        <p:nvSpPr>
-          <p:cNvPr id="17" name="TextBox 16"/>
+              <a:t>(배경)</a:t>
+            </a:r>
+            <a:r>
+              <a:rPr sz="1100" b="0">
+                <a:solidFill>
+                  <a:srgbClr val="000000"/>
+                </a:solidFill>
+                <a:latin typeface="맑은 고딕"/>
+                <a:ea typeface="맑은 고딕"/>
+                <a:cs typeface="맑은 고딕"/>
+              </a:rPr>
+              <a:t> B마트 등 즉시배송 시장 대용량 품목 확대</a:t>
+            </a:r>
+          </a:p>
+        </p:txBody>
+      </p:sp>
+      <p:sp>
+        <p:nvSpPr>
+          <p:cNvPr id="11" name="TextBox 10"/>
           <p:cNvSpPr txBox="1"/>
           <p:nvPr/>
         </p:nvSpPr>
         <p:spPr>
           <a:xfrm>
-            <a:off x="5621399" y="3862799"/>
-            <a:ext cx="3861000" cy="216000"/>
+            <a:off x="6355200" y="1699200"/>
+            <a:ext cx="324000" cy="522000"/>
           </a:xfrm>
           <a:prstGeom prst="rect">
             <a:avLst/>
@@ -3760,53 +3545,40 @@
           </a:bodyPr>
           <a:lstStyle/>
           <a:p>
-            <a:pPr algn="l"/>
-            <a:r>
-              <a:rPr sz="1100" b="0">
-                <a:solidFill>
-                  <a:srgbClr val="000000"/>
+            <a:pPr algn="ctr"/>
+            <a:r>
+              <a:rPr sz="1400" b="1">
+                <a:solidFill>
+                  <a:srgbClr val="595959"/>
                 </a:solidFill>
                 <a:latin typeface="맑은 고딕"/>
                 <a:ea typeface="맑은 고딕"/>
                 <a:cs typeface="맑은 고딕"/>
               </a:rPr>
-              <a:t>서울 확대 </a:t>
-            </a:r>
-            <a:r>
-              <a:rPr sz="1000" b="0">
-                <a:solidFill>
-                  <a:srgbClr val="000000"/>
-                </a:solidFill>
-                <a:latin typeface="맑은 고딕"/>
-                <a:ea typeface="맑은 고딕"/>
-                <a:cs typeface="맑은 고딕"/>
-              </a:rPr>
-              <a:t>(월계·가든5·신도림)</a:t>
-            </a:r>
-          </a:p>
-        </p:txBody>
-      </p:sp>
-      <p:sp>
-        <p:nvSpPr>
-          <p:cNvPr id="18" name="Oval 17"/>
+              <a:t>→</a:t>
+            </a:r>
+          </a:p>
+        </p:txBody>
+      </p:sp>
+      <p:sp>
+        <p:nvSpPr>
+          <p:cNvPr id="12" name="Rectangle 11"/>
           <p:cNvSpPr/>
           <p:nvPr/>
         </p:nvSpPr>
         <p:spPr>
           <a:xfrm>
-            <a:off x="4656600" y="4719599"/>
-            <a:ext cx="93600" cy="93600"/>
-          </a:xfrm>
-          <a:prstGeom prst="ellipse">
+            <a:off x="6679199" y="1699200"/>
+            <a:ext cx="2803200" cy="522000"/>
+          </a:xfrm>
+          <a:prstGeom prst="rect">
             <a:avLst/>
           </a:prstGeom>
           <a:solidFill>
-            <a:srgbClr val="FFFFFF"/>
+            <a:srgbClr val="EAEEF6"/>
           </a:solidFill>
-          <a:ln w="12700">
-            <a:solidFill>
-              <a:srgbClr val="000000"/>
-            </a:solidFill>
+          <a:ln>
+            <a:noFill/>
           </a:ln>
           <a:effectLst/>
         </p:spPr>
@@ -3834,14 +3606,14 @@
       </p:sp>
       <p:sp>
         <p:nvSpPr>
-          <p:cNvPr id="19" name="TextBox 18"/>
+          <p:cNvPr id="13" name="TextBox 12"/>
           <p:cNvSpPr txBox="1"/>
           <p:nvPr/>
         </p:nvSpPr>
         <p:spPr>
           <a:xfrm>
-            <a:off x="4865400" y="4658399"/>
-            <a:ext cx="720000" cy="180000"/>
+            <a:off x="6769199" y="1699200"/>
+            <a:ext cx="2623200" cy="522000"/>
           </a:xfrm>
           <a:prstGeom prst="rect">
             <a:avLst/>
@@ -3854,9 +3626,9 @@
           </a:bodyPr>
           <a:lstStyle/>
           <a:p>
-            <a:pPr algn="l"/>
-            <a:r>
-              <a:rPr sz="1100" b="1">
+            <a:pPr algn="ctr"/>
+            <a:r>
+              <a:rPr sz="1100" b="0">
                 <a:solidFill>
                   <a:srgbClr val="000000"/>
                 </a:solidFill>
@@ -3864,21 +3636,21 @@
                 <a:ea typeface="맑은 고딕"/>
                 <a:cs typeface="맑은 고딕"/>
               </a:rPr>
-              <a:t>9월</a:t>
-            </a:r>
-          </a:p>
-        </p:txBody>
-      </p:sp>
-      <p:sp>
-        <p:nvSpPr>
-          <p:cNvPr id="20" name="TextBox 19"/>
+              <a:t>기존 라인업, '빠름 × 대용량' 부재</a:t>
+            </a:r>
+          </a:p>
+        </p:txBody>
+      </p:sp>
+      <p:sp>
+        <p:nvSpPr>
+          <p:cNvPr id="14" name="TextBox 13"/>
           <p:cNvSpPr txBox="1"/>
           <p:nvPr/>
         </p:nvSpPr>
         <p:spPr>
           <a:xfrm>
-            <a:off x="5621399" y="4658399"/>
-            <a:ext cx="3861000" cy="216000"/>
+            <a:off x="424800" y="2412000"/>
+            <a:ext cx="9057600" cy="180000"/>
           </a:xfrm>
           <a:prstGeom prst="rect">
             <a:avLst/>
@@ -3886,14 +3658,14 @@
           <a:noFill/>
         </p:spPr>
         <p:txBody>
-          <a:bodyPr wrap="square" anchor="ctr" lIns="0" rIns="0" tIns="0" bIns="0">
+          <a:bodyPr wrap="square" anchor="t" lIns="0" rIns="0" tIns="0" bIns="0">
             <a:spAutoFit/>
           </a:bodyPr>
           <a:lstStyle/>
           <a:p>
             <a:pPr algn="l"/>
             <a:r>
-              <a:rPr sz="1100" b="0">
+              <a:rPr sz="1200" b="1">
                 <a:solidFill>
                   <a:srgbClr val="000000"/>
                 </a:solidFill>
@@ -3901,67 +3673,21 @@
                 <a:ea typeface="맑은 고딕"/>
                 <a:cs typeface="맑은 고딕"/>
               </a:rPr>
-              <a:t>전국 확대</a:t>
-            </a:r>
-          </a:p>
-        </p:txBody>
-      </p:sp>
-      <p:sp>
-        <p:nvSpPr>
-          <p:cNvPr id="21" name="Oval 20"/>
-          <p:cNvSpPr/>
-          <p:nvPr/>
-        </p:nvSpPr>
-        <p:spPr>
-          <a:xfrm>
-            <a:off x="4656600" y="5515199"/>
-            <a:ext cx="93600" cy="93600"/>
-          </a:xfrm>
-          <a:prstGeom prst="ellipse">
-            <a:avLst/>
-          </a:prstGeom>
-          <a:solidFill>
-            <a:srgbClr val="FFFFFF"/>
-          </a:solidFill>
-          <a:ln w="12700">
-            <a:solidFill>
-              <a:srgbClr val="000000"/>
-            </a:solidFill>
-          </a:ln>
-          <a:effectLst/>
-        </p:spPr>
-        <p:style>
-          <a:lnRef idx="1">
-            <a:schemeClr val="accent1"/>
-          </a:lnRef>
-          <a:fillRef idx="3">
-            <a:schemeClr val="accent1"/>
-          </a:fillRef>
-          <a:effectRef idx="2">
-            <a:schemeClr val="accent1"/>
-          </a:effectRef>
-          <a:fontRef idx="minor">
-            <a:schemeClr val="lt1"/>
-          </a:fontRef>
-        </p:style>
-        <p:txBody>
-          <a:bodyPr rtlCol="0" anchor="ctr"/>
-          <a:lstStyle/>
-          <a:p>
-            <a:pPr algn="ctr"/>
-          </a:p>
-        </p:txBody>
-      </p:sp>
-      <p:sp>
-        <p:nvSpPr>
-          <p:cNvPr id="22" name="TextBox 21"/>
+              <a:t>• ② 서비스 개요</a:t>
+            </a:r>
+          </a:p>
+        </p:txBody>
+      </p:sp>
+      <p:sp>
+        <p:nvSpPr>
+          <p:cNvPr id="15" name="TextBox 14"/>
           <p:cNvSpPr txBox="1"/>
           <p:nvPr/>
         </p:nvSpPr>
         <p:spPr>
           <a:xfrm>
-            <a:off x="4865400" y="5453999"/>
-            <a:ext cx="720000" cy="180000"/>
+            <a:off x="622800" y="2664000"/>
+            <a:ext cx="4684680" cy="342000"/>
           </a:xfrm>
           <a:prstGeom prst="rect">
             <a:avLst/>
@@ -3969,14 +3695,14 @@
           <a:noFill/>
         </p:spPr>
         <p:txBody>
-          <a:bodyPr wrap="square" anchor="ctr" lIns="0" rIns="0" tIns="0" bIns="0">
+          <a:bodyPr wrap="square" anchor="t" lIns="0" rIns="0" tIns="0" bIns="0">
             <a:spAutoFit/>
           </a:bodyPr>
           <a:lstStyle/>
           <a:p>
             <a:pPr algn="l"/>
             <a:r>
-              <a:rPr sz="1100" b="1">
+              <a:rPr sz="1100" b="0">
                 <a:solidFill>
                   <a:srgbClr val="000000"/>
                 </a:solidFill>
@@ -3984,21 +3710,32 @@
                 <a:ea typeface="맑은 고딕"/>
                 <a:cs typeface="맑은 고딕"/>
               </a:rPr>
-              <a:t>연말</a:t>
-            </a:r>
-          </a:p>
-        </p:txBody>
-      </p:sp>
-      <p:sp>
-        <p:nvSpPr>
-          <p:cNvPr id="23" name="TextBox 22"/>
+              <a:t>- 거점: 유휴 점포 PP센터 </a:t>
+            </a:r>
+            <a:r>
+              <a:rPr sz="1000" b="0">
+                <a:solidFill>
+                  <a:srgbClr val="000000"/>
+                </a:solidFill>
+                <a:latin typeface="맑은 고딕"/>
+                <a:ea typeface="맑은 고딕"/>
+                <a:cs typeface="맑은 고딕"/>
+              </a:rPr>
+              <a:t>(반경 내 즉시 출고)</a:t>
+            </a:r>
+          </a:p>
+        </p:txBody>
+      </p:sp>
+      <p:sp>
+        <p:nvSpPr>
+          <p:cNvPr id="16" name="TextBox 15"/>
           <p:cNvSpPr txBox="1"/>
           <p:nvPr/>
         </p:nvSpPr>
         <p:spPr>
           <a:xfrm>
-            <a:off x="5621399" y="5453999"/>
-            <a:ext cx="3861000" cy="216000"/>
+            <a:off x="622800" y="3006000"/>
+            <a:ext cx="4684680" cy="342000"/>
           </a:xfrm>
           <a:prstGeom prst="rect">
             <a:avLst/>
@@ -4006,7 +3743,7 @@
           <a:noFill/>
         </p:spPr>
         <p:txBody>
-          <a:bodyPr wrap="square" anchor="ctr" lIns="0" rIns="0" tIns="0" bIns="0">
+          <a:bodyPr wrap="square" anchor="t" lIns="0" rIns="0" tIns="0" bIns="0">
             <a:spAutoFit/>
           </a:bodyPr>
           <a:lstStyle/>
@@ -4021,21 +3758,21 @@
                 <a:ea typeface="맑은 고딕"/>
                 <a:cs typeface="맑은 고딕"/>
               </a:rPr>
-              <a:t>50여 점포 운영</a:t>
-            </a:r>
-          </a:p>
-        </p:txBody>
-      </p:sp>
-      <p:sp>
-        <p:nvSpPr>
-          <p:cNvPr id="24" name="TextBox 23"/>
+              <a:t>- 운송: 쓱배송 사륜차 → 대용량·중량 대응</a:t>
+            </a:r>
+          </a:p>
+        </p:txBody>
+      </p:sp>
+      <p:sp>
+        <p:nvSpPr>
+          <p:cNvPr id="17" name="TextBox 16"/>
           <p:cNvSpPr txBox="1"/>
           <p:nvPr/>
         </p:nvSpPr>
         <p:spPr>
           <a:xfrm>
-            <a:off x="4631400" y="5742000"/>
-            <a:ext cx="4851000" cy="230400"/>
+            <a:off x="622800" y="3347999"/>
+            <a:ext cx="4684680" cy="342000"/>
           </a:xfrm>
           <a:prstGeom prst="rect">
             <a:avLst/>
@@ -4050,7 +3787,7 @@
           <a:p>
             <a:pPr algn="l"/>
             <a:r>
-              <a:rPr sz="1200" b="1">
+              <a:rPr sz="1100" b="0">
                 <a:solidFill>
                   <a:srgbClr val="000000"/>
                 </a:solidFill>
@@ -4058,10 +3795,10 @@
                 <a:ea typeface="맑은 고딕"/>
                 <a:cs typeface="맑은 고딕"/>
               </a:rPr>
-              <a:t>• </a:t>
-            </a:r>
-            <a:r>
-              <a:rPr sz="1100" b="1">
+              <a:t>- 운영: 20시 마감 → 2시간 내 배송 완료 </a:t>
+            </a:r>
+            <a:r>
+              <a:rPr sz="1000" b="0">
                 <a:solidFill>
                   <a:srgbClr val="000000"/>
                 </a:solidFill>
@@ -4069,10 +3806,36 @@
                 <a:ea typeface="맑은 고딕"/>
                 <a:cs typeface="맑은 고딕"/>
               </a:rPr>
-              <a:t>(리드)</a:t>
-            </a:r>
-            <a:r>
-              <a:rPr sz="1200" b="1">
+              <a:t>(기존 예약배송 병행)</a:t>
+            </a:r>
+          </a:p>
+        </p:txBody>
+      </p:sp>
+      <p:sp>
+        <p:nvSpPr>
+          <p:cNvPr id="18" name="TextBox 17"/>
+          <p:cNvSpPr txBox="1"/>
+          <p:nvPr/>
+        </p:nvSpPr>
+        <p:spPr>
+          <a:xfrm>
+            <a:off x="622800" y="3689999"/>
+            <a:ext cx="4684680" cy="342000"/>
+          </a:xfrm>
+          <a:prstGeom prst="rect">
+            <a:avLst/>
+          </a:prstGeom>
+          <a:noFill/>
+        </p:spPr>
+        <p:txBody>
+          <a:bodyPr wrap="square" anchor="t" lIns="0" rIns="0" tIns="0" bIns="0">
+            <a:spAutoFit/>
+          </a:bodyPr>
+          <a:lstStyle/>
+          <a:p>
+            <a:pPr algn="l"/>
+            <a:r>
+              <a:rPr sz="1100" b="0">
                 <a:solidFill>
                   <a:srgbClr val="000000"/>
                 </a:solidFill>
@@ -4080,36 +3843,10 @@
                 <a:ea typeface="맑은 고딕"/>
                 <a:cs typeface="맑은 고딕"/>
               </a:rPr>
-              <a:t> 유휴 PP센터 재활용 → 신규 투자 최소 · 저비용 급속 확산</a:t>
-            </a:r>
-          </a:p>
-        </p:txBody>
-      </p:sp>
-      <p:sp>
-        <p:nvSpPr>
-          <p:cNvPr id="25" name="TextBox 24"/>
-          <p:cNvSpPr txBox="1"/>
-          <p:nvPr/>
-        </p:nvSpPr>
-        <p:spPr>
-          <a:xfrm>
-            <a:off x="424800" y="1504800"/>
-            <a:ext cx="3969000" cy="230400"/>
-          </a:xfrm>
-          <a:prstGeom prst="rect">
-            <a:avLst/>
-          </a:prstGeom>
-          <a:noFill/>
-        </p:spPr>
-        <p:txBody>
-          <a:bodyPr wrap="square" anchor="t" lIns="0" rIns="0" tIns="0" bIns="0">
-            <a:spAutoFit/>
-          </a:bodyPr>
-          <a:lstStyle/>
-          <a:p>
-            <a:pPr algn="l"/>
-            <a:r>
-              <a:rPr sz="1200" b="1">
+              <a:t>- 규모: 약 15만 종 </a:t>
+            </a:r>
+            <a:r>
+              <a:rPr sz="1000" b="0">
                 <a:solidFill>
                   <a:srgbClr val="000000"/>
                 </a:solidFill>
@@ -4117,166 +3854,22 @@
                 <a:ea typeface="맑은 고딕"/>
                 <a:cs typeface="맑은 고딕"/>
               </a:rPr>
-              <a:t>• ① 도입 배경</a:t>
-            </a:r>
-          </a:p>
-        </p:txBody>
-      </p:sp>
-      <p:sp>
-        <p:nvSpPr>
-          <p:cNvPr id="26" name="TextBox 25"/>
-          <p:cNvSpPr txBox="1"/>
-          <p:nvPr/>
-        </p:nvSpPr>
-        <p:spPr>
-          <a:xfrm>
-            <a:off x="622800" y="1735199"/>
-            <a:ext cx="3771000" cy="230400"/>
-          </a:xfrm>
-          <a:prstGeom prst="rect">
-            <a:avLst/>
-          </a:prstGeom>
-          <a:noFill/>
-        </p:spPr>
-        <p:txBody>
-          <a:bodyPr wrap="square" anchor="t" lIns="0" rIns="0" tIns="0" bIns="0">
-            <a:spAutoFit/>
-          </a:bodyPr>
-          <a:lstStyle/>
-          <a:p>
-            <a:pPr algn="l"/>
-            <a:r>
-              <a:rPr sz="1100" b="0">
-                <a:solidFill>
-                  <a:srgbClr val="000000"/>
-                </a:solidFill>
-                <a:latin typeface="맑은 고딕"/>
-                <a:ea typeface="맑은 고딕"/>
-                <a:cs typeface="맑은 고딕"/>
-              </a:rPr>
-              <a:t>- 바로퀵 매출 197%↑ </a:t>
-            </a:r>
-            <a:r>
-              <a:rPr sz="1000" b="0">
-                <a:solidFill>
-                  <a:srgbClr val="000000"/>
-                </a:solidFill>
-                <a:latin typeface="맑은 고딕"/>
-                <a:ea typeface="맑은 고딕"/>
-                <a:cs typeface="맑은 고딕"/>
-              </a:rPr>
-              <a:t>('26.6월)</a:t>
-            </a:r>
-            <a:r>
-              <a:rPr sz="1100" b="0">
-                <a:solidFill>
-                  <a:srgbClr val="000000"/>
-                </a:solidFill>
-                <a:latin typeface="맑은 고딕"/>
-                <a:ea typeface="맑은 고딕"/>
-                <a:cs typeface="맑은 고딕"/>
-              </a:rPr>
-              <a:t> </a:t>
-            </a:r>
-            <a:r>
-              <a:rPr sz="1000" b="0">
-                <a:solidFill>
-                  <a:srgbClr val="000000"/>
-                </a:solidFill>
-                <a:latin typeface="맑은 고딕"/>
-                <a:ea typeface="맑은 고딕"/>
-                <a:cs typeface="맑은 고딕"/>
-              </a:rPr>
-              <a:t>(미검증)</a:t>
-            </a:r>
-          </a:p>
-        </p:txBody>
-      </p:sp>
-      <p:sp>
-        <p:nvSpPr>
-          <p:cNvPr id="27" name="TextBox 26"/>
-          <p:cNvSpPr txBox="1"/>
-          <p:nvPr/>
-        </p:nvSpPr>
-        <p:spPr>
-          <a:xfrm>
-            <a:off x="622800" y="1965599"/>
-            <a:ext cx="3771000" cy="230400"/>
-          </a:xfrm>
-          <a:prstGeom prst="rect">
-            <a:avLst/>
-          </a:prstGeom>
-          <a:noFill/>
-        </p:spPr>
-        <p:txBody>
-          <a:bodyPr wrap="square" anchor="t" lIns="0" rIns="0" tIns="0" bIns="0">
-            <a:spAutoFit/>
-          </a:bodyPr>
-          <a:lstStyle/>
-          <a:p>
-            <a:pPr algn="l"/>
-            <a:r>
-              <a:rPr sz="1100" b="0">
-                <a:solidFill>
-                  <a:srgbClr val="000000"/>
-                </a:solidFill>
-                <a:latin typeface="맑은 고딕"/>
-                <a:ea typeface="맑은 고딕"/>
-                <a:cs typeface="맑은 고딕"/>
-              </a:rPr>
-              <a:t>- B마트 등 즉시배송 시장 대용량 품목 확대</a:t>
-            </a:r>
-          </a:p>
-        </p:txBody>
-      </p:sp>
-      <p:sp>
-        <p:nvSpPr>
-          <p:cNvPr id="28" name="TextBox 27"/>
-          <p:cNvSpPr txBox="1"/>
-          <p:nvPr/>
-        </p:nvSpPr>
-        <p:spPr>
-          <a:xfrm>
-            <a:off x="622800" y="2195999"/>
-            <a:ext cx="3771000" cy="230400"/>
-          </a:xfrm>
-          <a:prstGeom prst="rect">
-            <a:avLst/>
-          </a:prstGeom>
-          <a:noFill/>
-        </p:spPr>
-        <p:txBody>
-          <a:bodyPr wrap="square" anchor="t" lIns="0" rIns="0" tIns="0" bIns="0">
-            <a:spAutoFit/>
-          </a:bodyPr>
-          <a:lstStyle/>
-          <a:p>
-            <a:pPr algn="l"/>
-            <a:r>
-              <a:rPr sz="1100" b="0">
-                <a:solidFill>
-                  <a:srgbClr val="000000"/>
-                </a:solidFill>
-                <a:latin typeface="맑은 고딕"/>
-                <a:ea typeface="맑은 고딕"/>
-                <a:cs typeface="맑은 고딕"/>
-              </a:rPr>
-              <a:t>- 기존 라인업 '빠름 × 대용량' 부재</a:t>
+              <a:t>(바로퀵 1만 종 대비 15배)</a:t>
             </a:r>
           </a:p>
         </p:txBody>
       </p:sp>
       <p:graphicFrame>
         <p:nvGraphicFramePr>
-          <p:cNvPr id="29" name="Table 28"/>
+          <p:cNvPr id="19" name="Table 18"/>
           <p:cNvGraphicFramePr>
             <a:graphicFrameLocks noGrp="1"/>
           </p:cNvGraphicFramePr>
           <p:nvPr/>
         </p:nvGraphicFramePr>
         <p:xfrm>
-          <a:off x="424800" y="2552399"/>
-          <a:ext cx="3969000" cy="3333600"/>
+          <a:off x="5487480" y="2628000"/>
+          <a:ext cx="3994918" cy="1926000"/>
         </p:xfrm>
         <a:graphic>
           <a:graphicData uri="http://schemas.openxmlformats.org/drawingml/2006/table">
@@ -4285,9 +3878,9 @@
                 <a:tableStyleId>{5C22544A-7EE6-4342-B048-85BDC9FD1C3A}</a:tableStyleId>
               </a:tblPr>
               <a:tblGrid>
-                <a:gridCol w="1190700"/>
-                <a:gridCol w="1389150"/>
-                <a:gridCol w="1389150"/>
+                <a:gridCol w="1198476"/>
+                <a:gridCol w="1398221"/>
+                <a:gridCol w="1398221"/>
               </a:tblGrid>
               <a:tr h="342000">
                 <a:tc>
@@ -4426,7 +4019,7 @@
                   </a:tcPr>
                 </a:tc>
               </a:tr>
-              <a:tr h="1495800">
+              <a:tr h="792000">
                 <a:tc>
                   <a:txBody>
                     <a:bodyPr wrap="square"/>
@@ -4599,7 +4192,7 @@
                   </a:tcPr>
                 </a:tc>
               </a:tr>
-              <a:tr h="1495800">
+              <a:tr h="792000">
                 <a:tc>
                   <a:txBody>
                     <a:bodyPr wrap="square"/>
@@ -4756,14 +4349,14 @@
       </p:graphicFrame>
       <p:cxnSp>
         <p:nvCxnSpPr>
-          <p:cNvPr id="30" name="Connector 29"/>
+          <p:cNvPr id="20" name="Connector 19"/>
           <p:cNvCxnSpPr/>
           <p:nvPr/>
         </p:nvCxnSpPr>
         <p:spPr>
           <a:xfrm>
-            <a:off x="4512600" y="1504800"/>
-            <a:ext cx="0" cy="4381200"/>
+            <a:off x="5397480" y="2628000"/>
+            <a:ext cx="0" cy="1926000"/>
           </a:xfrm>
           <a:prstGeom prst="bentConnector3">
             <a:avLst/>
@@ -4791,6 +4384,662 @@
           </a:fontRef>
         </p:style>
       </p:cxnSp>
+      <p:sp>
+        <p:nvSpPr>
+          <p:cNvPr id="21" name="TextBox 20"/>
+          <p:cNvSpPr txBox="1"/>
+          <p:nvPr/>
+        </p:nvSpPr>
+        <p:spPr>
+          <a:xfrm>
+            <a:off x="424800" y="4698000"/>
+            <a:ext cx="9057600" cy="180000"/>
+          </a:xfrm>
+          <a:prstGeom prst="rect">
+            <a:avLst/>
+          </a:prstGeom>
+          <a:noFill/>
+        </p:spPr>
+        <p:txBody>
+          <a:bodyPr wrap="square" anchor="t" lIns="0" rIns="0" tIns="0" bIns="0">
+            <a:spAutoFit/>
+          </a:bodyPr>
+          <a:lstStyle/>
+          <a:p>
+            <a:pPr algn="l"/>
+            <a:r>
+              <a:rPr sz="1200" b="1">
+                <a:solidFill>
+                  <a:srgbClr val="000000"/>
+                </a:solidFill>
+                <a:latin typeface="맑은 고딕"/>
+                <a:ea typeface="맑은 고딕"/>
+                <a:cs typeface="맑은 고딕"/>
+              </a:rPr>
+              <a:t>• ③ 확산 계획</a:t>
+            </a:r>
+          </a:p>
+        </p:txBody>
+      </p:sp>
+      <p:cxnSp>
+        <p:nvCxnSpPr>
+          <p:cNvPr id="22" name="Connector 21"/>
+          <p:cNvCxnSpPr/>
+          <p:nvPr/>
+        </p:nvCxnSpPr>
+        <p:spPr>
+          <a:xfrm>
+            <a:off x="424800" y="5119200"/>
+            <a:ext cx="9057600" cy="0"/>
+          </a:xfrm>
+          <a:prstGeom prst="bentConnector3">
+            <a:avLst/>
+          </a:prstGeom>
+          <a:ln w="25400">
+            <a:solidFill>
+              <a:srgbClr val="000000"/>
+            </a:solidFill>
+            <a:prstDash val="solid"/>
+            <a:tailEnd type="triangle" w="med" len="med"/>
+          </a:ln>
+          <a:effectLst/>
+        </p:spPr>
+        <p:style>
+          <a:lnRef idx="2">
+            <a:schemeClr val="accent1"/>
+          </a:lnRef>
+          <a:fillRef idx="0">
+            <a:schemeClr val="accent1"/>
+          </a:fillRef>
+          <a:effectRef idx="1">
+            <a:schemeClr val="accent1"/>
+          </a:effectRef>
+          <a:fontRef idx="minor">
+            <a:schemeClr val="tx1"/>
+          </a:fontRef>
+        </p:style>
+      </p:cxnSp>
+      <p:sp>
+        <p:nvSpPr>
+          <p:cNvPr id="23" name="Oval 22"/>
+          <p:cNvSpPr/>
+          <p:nvPr/>
+        </p:nvSpPr>
+        <p:spPr>
+          <a:xfrm>
+            <a:off x="1506600" y="5068799"/>
+            <a:ext cx="100800" cy="100800"/>
+          </a:xfrm>
+          <a:prstGeom prst="ellipse">
+            <a:avLst/>
+          </a:prstGeom>
+          <a:solidFill>
+            <a:srgbClr val="FFFFFF"/>
+          </a:solidFill>
+          <a:ln w="15875">
+            <a:solidFill>
+              <a:srgbClr val="000000"/>
+            </a:solidFill>
+          </a:ln>
+          <a:effectLst/>
+        </p:spPr>
+        <p:style>
+          <a:lnRef idx="1">
+            <a:schemeClr val="accent1"/>
+          </a:lnRef>
+          <a:fillRef idx="3">
+            <a:schemeClr val="accent1"/>
+          </a:fillRef>
+          <a:effectRef idx="2">
+            <a:schemeClr val="accent1"/>
+          </a:effectRef>
+          <a:fontRef idx="minor">
+            <a:schemeClr val="lt1"/>
+          </a:fontRef>
+        </p:style>
+        <p:txBody>
+          <a:bodyPr rtlCol="0" anchor="ctr"/>
+          <a:lstStyle/>
+          <a:p>
+            <a:pPr algn="ctr"/>
+          </a:p>
+        </p:txBody>
+      </p:sp>
+      <p:sp>
+        <p:nvSpPr>
+          <p:cNvPr id="24" name="TextBox 23"/>
+          <p:cNvSpPr txBox="1"/>
+          <p:nvPr/>
+        </p:nvSpPr>
+        <p:spPr>
+          <a:xfrm>
+            <a:off x="424800" y="4914000"/>
+            <a:ext cx="2264400" cy="162000"/>
+          </a:xfrm>
+          <a:prstGeom prst="rect">
+            <a:avLst/>
+          </a:prstGeom>
+          <a:noFill/>
+        </p:spPr>
+        <p:txBody>
+          <a:bodyPr wrap="square" anchor="b" lIns="0" rIns="0" tIns="0" bIns="0">
+            <a:spAutoFit/>
+          </a:bodyPr>
+          <a:lstStyle/>
+          <a:p>
+            <a:pPr algn="ctr"/>
+            <a:r>
+              <a:rPr sz="1100" b="1">
+                <a:solidFill>
+                  <a:srgbClr val="000000"/>
+                </a:solidFill>
+                <a:latin typeface="맑은 고딕"/>
+                <a:ea typeface="맑은 고딕"/>
+                <a:cs typeface="맑은 고딕"/>
+              </a:rPr>
+              <a:t>'26.7월</a:t>
+            </a:r>
+          </a:p>
+        </p:txBody>
+      </p:sp>
+      <p:sp>
+        <p:nvSpPr>
+          <p:cNvPr id="25" name="TextBox 24"/>
+          <p:cNvSpPr txBox="1"/>
+          <p:nvPr/>
+        </p:nvSpPr>
+        <p:spPr>
+          <a:xfrm>
+            <a:off x="424800" y="5183999"/>
+            <a:ext cx="2264400" cy="413999"/>
+          </a:xfrm>
+          <a:prstGeom prst="rect">
+            <a:avLst/>
+          </a:prstGeom>
+          <a:noFill/>
+        </p:spPr>
+        <p:txBody>
+          <a:bodyPr wrap="square" anchor="t" lIns="0" rIns="0" tIns="0" bIns="0">
+            <a:spAutoFit/>
+          </a:bodyPr>
+          <a:lstStyle/>
+          <a:p>
+            <a:pPr algn="ctr"/>
+            <a:r>
+              <a:rPr sz="1100" b="0">
+                <a:solidFill>
+                  <a:srgbClr val="000000"/>
+                </a:solidFill>
+                <a:latin typeface="맑은 고딕"/>
+                <a:ea typeface="맑은 고딕"/>
+                <a:cs typeface="맑은 고딕"/>
+              </a:rPr>
+              <a:t>양재·하남점</a:t>
+            </a:r>
+          </a:p>
+          <a:p>
+            <a:pPr algn="ctr"/>
+            <a:r>
+              <a:rPr sz="1100" b="0">
+                <a:solidFill>
+                  <a:srgbClr val="000000"/>
+                </a:solidFill>
+                <a:latin typeface="맑은 고딕"/>
+                <a:ea typeface="맑은 고딕"/>
+                <a:cs typeface="맑은 고딕"/>
+              </a:rPr>
+              <a:t>도입</a:t>
+            </a:r>
+          </a:p>
+        </p:txBody>
+      </p:sp>
+      <p:sp>
+        <p:nvSpPr>
+          <p:cNvPr id="26" name="Oval 25"/>
+          <p:cNvSpPr/>
+          <p:nvPr/>
+        </p:nvSpPr>
+        <p:spPr>
+          <a:xfrm>
+            <a:off x="3771000" y="5068799"/>
+            <a:ext cx="100800" cy="100800"/>
+          </a:xfrm>
+          <a:prstGeom prst="ellipse">
+            <a:avLst/>
+          </a:prstGeom>
+          <a:solidFill>
+            <a:srgbClr val="FFFFFF"/>
+          </a:solidFill>
+          <a:ln w="15875">
+            <a:solidFill>
+              <a:srgbClr val="000000"/>
+            </a:solidFill>
+          </a:ln>
+          <a:effectLst/>
+        </p:spPr>
+        <p:style>
+          <a:lnRef idx="1">
+            <a:schemeClr val="accent1"/>
+          </a:lnRef>
+          <a:fillRef idx="3">
+            <a:schemeClr val="accent1"/>
+          </a:fillRef>
+          <a:effectRef idx="2">
+            <a:schemeClr val="accent1"/>
+          </a:effectRef>
+          <a:fontRef idx="minor">
+            <a:schemeClr val="lt1"/>
+          </a:fontRef>
+        </p:style>
+        <p:txBody>
+          <a:bodyPr rtlCol="0" anchor="ctr"/>
+          <a:lstStyle/>
+          <a:p>
+            <a:pPr algn="ctr"/>
+          </a:p>
+        </p:txBody>
+      </p:sp>
+      <p:sp>
+        <p:nvSpPr>
+          <p:cNvPr id="27" name="TextBox 26"/>
+          <p:cNvSpPr txBox="1"/>
+          <p:nvPr/>
+        </p:nvSpPr>
+        <p:spPr>
+          <a:xfrm>
+            <a:off x="2689200" y="4914000"/>
+            <a:ext cx="2264400" cy="162000"/>
+          </a:xfrm>
+          <a:prstGeom prst="rect">
+            <a:avLst/>
+          </a:prstGeom>
+          <a:noFill/>
+        </p:spPr>
+        <p:txBody>
+          <a:bodyPr wrap="square" anchor="b" lIns="0" rIns="0" tIns="0" bIns="0">
+            <a:spAutoFit/>
+          </a:bodyPr>
+          <a:lstStyle/>
+          <a:p>
+            <a:pPr algn="ctr"/>
+            <a:r>
+              <a:rPr sz="1100" b="1">
+                <a:solidFill>
+                  <a:srgbClr val="000000"/>
+                </a:solidFill>
+                <a:latin typeface="맑은 고딕"/>
+                <a:ea typeface="맑은 고딕"/>
+                <a:cs typeface="맑은 고딕"/>
+              </a:rPr>
+              <a:t>8월</a:t>
+            </a:r>
+          </a:p>
+        </p:txBody>
+      </p:sp>
+      <p:sp>
+        <p:nvSpPr>
+          <p:cNvPr id="28" name="TextBox 27"/>
+          <p:cNvSpPr txBox="1"/>
+          <p:nvPr/>
+        </p:nvSpPr>
+        <p:spPr>
+          <a:xfrm>
+            <a:off x="2689200" y="5183999"/>
+            <a:ext cx="2264400" cy="413999"/>
+          </a:xfrm>
+          <a:prstGeom prst="rect">
+            <a:avLst/>
+          </a:prstGeom>
+          <a:noFill/>
+        </p:spPr>
+        <p:txBody>
+          <a:bodyPr wrap="square" anchor="t" lIns="0" rIns="0" tIns="0" bIns="0">
+            <a:spAutoFit/>
+          </a:bodyPr>
+          <a:lstStyle/>
+          <a:p>
+            <a:pPr algn="ctr"/>
+            <a:r>
+              <a:rPr sz="1100" b="0">
+                <a:solidFill>
+                  <a:srgbClr val="000000"/>
+                </a:solidFill>
+                <a:latin typeface="맑은 고딕"/>
+                <a:ea typeface="맑은 고딕"/>
+                <a:cs typeface="맑은 고딕"/>
+              </a:rPr>
+              <a:t>서울 확대</a:t>
+            </a:r>
+          </a:p>
+          <a:p>
+            <a:pPr algn="ctr"/>
+            <a:r>
+              <a:rPr sz="1000" b="0">
+                <a:solidFill>
+                  <a:srgbClr val="000000"/>
+                </a:solidFill>
+                <a:latin typeface="맑은 고딕"/>
+                <a:ea typeface="맑은 고딕"/>
+                <a:cs typeface="맑은 고딕"/>
+              </a:rPr>
+              <a:t>(월계·가든5·신도림)</a:t>
+            </a:r>
+          </a:p>
+        </p:txBody>
+      </p:sp>
+      <p:sp>
+        <p:nvSpPr>
+          <p:cNvPr id="29" name="Oval 28"/>
+          <p:cNvSpPr/>
+          <p:nvPr/>
+        </p:nvSpPr>
+        <p:spPr>
+          <a:xfrm>
+            <a:off x="6035400" y="5068799"/>
+            <a:ext cx="100800" cy="100800"/>
+          </a:xfrm>
+          <a:prstGeom prst="ellipse">
+            <a:avLst/>
+          </a:prstGeom>
+          <a:solidFill>
+            <a:srgbClr val="FFFFFF"/>
+          </a:solidFill>
+          <a:ln w="15875">
+            <a:solidFill>
+              <a:srgbClr val="000000"/>
+            </a:solidFill>
+          </a:ln>
+          <a:effectLst/>
+        </p:spPr>
+        <p:style>
+          <a:lnRef idx="1">
+            <a:schemeClr val="accent1"/>
+          </a:lnRef>
+          <a:fillRef idx="3">
+            <a:schemeClr val="accent1"/>
+          </a:fillRef>
+          <a:effectRef idx="2">
+            <a:schemeClr val="accent1"/>
+          </a:effectRef>
+          <a:fontRef idx="minor">
+            <a:schemeClr val="lt1"/>
+          </a:fontRef>
+        </p:style>
+        <p:txBody>
+          <a:bodyPr rtlCol="0" anchor="ctr"/>
+          <a:lstStyle/>
+          <a:p>
+            <a:pPr algn="ctr"/>
+          </a:p>
+        </p:txBody>
+      </p:sp>
+      <p:sp>
+        <p:nvSpPr>
+          <p:cNvPr id="30" name="TextBox 29"/>
+          <p:cNvSpPr txBox="1"/>
+          <p:nvPr/>
+        </p:nvSpPr>
+        <p:spPr>
+          <a:xfrm>
+            <a:off x="4953600" y="4914000"/>
+            <a:ext cx="2264400" cy="162000"/>
+          </a:xfrm>
+          <a:prstGeom prst="rect">
+            <a:avLst/>
+          </a:prstGeom>
+          <a:noFill/>
+        </p:spPr>
+        <p:txBody>
+          <a:bodyPr wrap="square" anchor="b" lIns="0" rIns="0" tIns="0" bIns="0">
+            <a:spAutoFit/>
+          </a:bodyPr>
+          <a:lstStyle/>
+          <a:p>
+            <a:pPr algn="ctr"/>
+            <a:r>
+              <a:rPr sz="1100" b="1">
+                <a:solidFill>
+                  <a:srgbClr val="000000"/>
+                </a:solidFill>
+                <a:latin typeface="맑은 고딕"/>
+                <a:ea typeface="맑은 고딕"/>
+                <a:cs typeface="맑은 고딕"/>
+              </a:rPr>
+              <a:t>9월</a:t>
+            </a:r>
+          </a:p>
+        </p:txBody>
+      </p:sp>
+      <p:sp>
+        <p:nvSpPr>
+          <p:cNvPr id="31" name="TextBox 30"/>
+          <p:cNvSpPr txBox="1"/>
+          <p:nvPr/>
+        </p:nvSpPr>
+        <p:spPr>
+          <a:xfrm>
+            <a:off x="4953600" y="5183999"/>
+            <a:ext cx="2264400" cy="413999"/>
+          </a:xfrm>
+          <a:prstGeom prst="rect">
+            <a:avLst/>
+          </a:prstGeom>
+          <a:noFill/>
+        </p:spPr>
+        <p:txBody>
+          <a:bodyPr wrap="square" anchor="t" lIns="0" rIns="0" tIns="0" bIns="0">
+            <a:spAutoFit/>
+          </a:bodyPr>
+          <a:lstStyle/>
+          <a:p>
+            <a:pPr algn="ctr"/>
+            <a:r>
+              <a:rPr sz="1100" b="0">
+                <a:solidFill>
+                  <a:srgbClr val="000000"/>
+                </a:solidFill>
+                <a:latin typeface="맑은 고딕"/>
+                <a:ea typeface="맑은 고딕"/>
+                <a:cs typeface="맑은 고딕"/>
+              </a:rPr>
+              <a:t>전국 확대</a:t>
+            </a:r>
+          </a:p>
+        </p:txBody>
+      </p:sp>
+      <p:sp>
+        <p:nvSpPr>
+          <p:cNvPr id="32" name="Oval 31"/>
+          <p:cNvSpPr/>
+          <p:nvPr/>
+        </p:nvSpPr>
+        <p:spPr>
+          <a:xfrm>
+            <a:off x="8299800" y="5068799"/>
+            <a:ext cx="100800" cy="100800"/>
+          </a:xfrm>
+          <a:prstGeom prst="ellipse">
+            <a:avLst/>
+          </a:prstGeom>
+          <a:solidFill>
+            <a:srgbClr val="FFFFFF"/>
+          </a:solidFill>
+          <a:ln w="15875">
+            <a:solidFill>
+              <a:srgbClr val="000000"/>
+            </a:solidFill>
+          </a:ln>
+          <a:effectLst/>
+        </p:spPr>
+        <p:style>
+          <a:lnRef idx="1">
+            <a:schemeClr val="accent1"/>
+          </a:lnRef>
+          <a:fillRef idx="3">
+            <a:schemeClr val="accent1"/>
+          </a:fillRef>
+          <a:effectRef idx="2">
+            <a:schemeClr val="accent1"/>
+          </a:effectRef>
+          <a:fontRef idx="minor">
+            <a:schemeClr val="lt1"/>
+          </a:fontRef>
+        </p:style>
+        <p:txBody>
+          <a:bodyPr rtlCol="0" anchor="ctr"/>
+          <a:lstStyle/>
+          <a:p>
+            <a:pPr algn="ctr"/>
+          </a:p>
+        </p:txBody>
+      </p:sp>
+      <p:sp>
+        <p:nvSpPr>
+          <p:cNvPr id="33" name="TextBox 32"/>
+          <p:cNvSpPr txBox="1"/>
+          <p:nvPr/>
+        </p:nvSpPr>
+        <p:spPr>
+          <a:xfrm>
+            <a:off x="7218000" y="4914000"/>
+            <a:ext cx="2264400" cy="162000"/>
+          </a:xfrm>
+          <a:prstGeom prst="rect">
+            <a:avLst/>
+          </a:prstGeom>
+          <a:noFill/>
+        </p:spPr>
+        <p:txBody>
+          <a:bodyPr wrap="square" anchor="b" lIns="0" rIns="0" tIns="0" bIns="0">
+            <a:spAutoFit/>
+          </a:bodyPr>
+          <a:lstStyle/>
+          <a:p>
+            <a:pPr algn="ctr"/>
+            <a:r>
+              <a:rPr sz="1100" b="1">
+                <a:solidFill>
+                  <a:srgbClr val="000000"/>
+                </a:solidFill>
+                <a:latin typeface="맑은 고딕"/>
+                <a:ea typeface="맑은 고딕"/>
+                <a:cs typeface="맑은 고딕"/>
+              </a:rPr>
+              <a:t>연말</a:t>
+            </a:r>
+          </a:p>
+        </p:txBody>
+      </p:sp>
+      <p:sp>
+        <p:nvSpPr>
+          <p:cNvPr id="34" name="TextBox 33"/>
+          <p:cNvSpPr txBox="1"/>
+          <p:nvPr/>
+        </p:nvSpPr>
+        <p:spPr>
+          <a:xfrm>
+            <a:off x="7218000" y="5183999"/>
+            <a:ext cx="2264400" cy="413999"/>
+          </a:xfrm>
+          <a:prstGeom prst="rect">
+            <a:avLst/>
+          </a:prstGeom>
+          <a:noFill/>
+        </p:spPr>
+        <p:txBody>
+          <a:bodyPr wrap="square" anchor="t" lIns="0" rIns="0" tIns="0" bIns="0">
+            <a:spAutoFit/>
+          </a:bodyPr>
+          <a:lstStyle/>
+          <a:p>
+            <a:pPr algn="ctr"/>
+            <a:r>
+              <a:rPr sz="1100" b="0">
+                <a:solidFill>
+                  <a:srgbClr val="000000"/>
+                </a:solidFill>
+                <a:latin typeface="맑은 고딕"/>
+                <a:ea typeface="맑은 고딕"/>
+                <a:cs typeface="맑은 고딕"/>
+              </a:rPr>
+              <a:t>50여 점포</a:t>
+            </a:r>
+          </a:p>
+          <a:p>
+            <a:pPr algn="ctr"/>
+            <a:r>
+              <a:rPr sz="1100" b="0">
+                <a:solidFill>
+                  <a:srgbClr val="000000"/>
+                </a:solidFill>
+                <a:latin typeface="맑은 고딕"/>
+                <a:ea typeface="맑은 고딕"/>
+                <a:cs typeface="맑은 고딕"/>
+              </a:rPr>
+              <a:t>운영</a:t>
+            </a:r>
+          </a:p>
+        </p:txBody>
+      </p:sp>
+      <p:sp>
+        <p:nvSpPr>
+          <p:cNvPr id="35" name="TextBox 34"/>
+          <p:cNvSpPr txBox="1"/>
+          <p:nvPr/>
+        </p:nvSpPr>
+        <p:spPr>
+          <a:xfrm>
+            <a:off x="424800" y="5669999"/>
+            <a:ext cx="9057600" cy="216000"/>
+          </a:xfrm>
+          <a:prstGeom prst="rect">
+            <a:avLst/>
+          </a:prstGeom>
+          <a:noFill/>
+        </p:spPr>
+        <p:txBody>
+          <a:bodyPr wrap="square" anchor="t" lIns="0" rIns="0" tIns="0" bIns="0">
+            <a:spAutoFit/>
+          </a:bodyPr>
+          <a:lstStyle/>
+          <a:p>
+            <a:pPr algn="l"/>
+            <a:r>
+              <a:rPr sz="1200" b="1">
+                <a:solidFill>
+                  <a:srgbClr val="000000"/>
+                </a:solidFill>
+                <a:latin typeface="맑은 고딕"/>
+                <a:ea typeface="맑은 고딕"/>
+                <a:cs typeface="맑은 고딕"/>
+              </a:rPr>
+              <a:t>• </a:t>
+            </a:r>
+            <a:r>
+              <a:rPr sz="1100" b="1">
+                <a:solidFill>
+                  <a:srgbClr val="000000"/>
+                </a:solidFill>
+                <a:latin typeface="맑은 고딕"/>
+                <a:ea typeface="맑은 고딕"/>
+                <a:cs typeface="맑은 고딕"/>
+              </a:rPr>
+              <a:t>(리드)</a:t>
+            </a:r>
+            <a:r>
+              <a:rPr sz="1200" b="1">
+                <a:solidFill>
+                  <a:srgbClr val="000000"/>
+                </a:solidFill>
+                <a:latin typeface="맑은 고딕"/>
+                <a:ea typeface="맑은 고딕"/>
+                <a:cs typeface="맑은 고딕"/>
+              </a:rPr>
+              <a:t> 유휴 PP센터 재활용 → 신규 투자 최소 · 저비용 급속 확산</a:t>
+            </a:r>
+          </a:p>
+        </p:txBody>
+      </p:sp>
     </p:spTree>
   </p:cSld>
   <p:clrMapOvr>

--- a/reports/ssg-quickcommerce-onepager.pptx
+++ b/reports/ssg-quickcommerce-onepager.pptx
@@ -3288,8 +3288,8 @@
         </p:nvSpPr>
         <p:spPr>
           <a:xfrm>
-            <a:off x="424800" y="1699200"/>
-            <a:ext cx="2803200" cy="522000"/>
+            <a:off x="424800" y="1684800"/>
+            <a:ext cx="2803200" cy="403200"/>
           </a:xfrm>
           <a:prstGeom prst="rect">
             <a:avLst/>
@@ -3332,8 +3332,8 @@
         </p:nvSpPr>
         <p:spPr>
           <a:xfrm>
-            <a:off x="514800" y="1699200"/>
-            <a:ext cx="2623200" cy="522000"/>
+            <a:off x="514800" y="1684800"/>
+            <a:ext cx="2623200" cy="403200"/>
           </a:xfrm>
           <a:prstGeom prst="rect">
             <a:avLst/>
@@ -3402,8 +3402,8 @@
         </p:nvSpPr>
         <p:spPr>
           <a:xfrm>
-            <a:off x="3228000" y="1699200"/>
-            <a:ext cx="324000" cy="522000"/>
+            <a:off x="3228000" y="1684800"/>
+            <a:ext cx="324000" cy="403200"/>
           </a:xfrm>
           <a:prstGeom prst="rect">
             <a:avLst/>
@@ -3439,8 +3439,8 @@
         </p:nvSpPr>
         <p:spPr>
           <a:xfrm>
-            <a:off x="3551999" y="1699200"/>
-            <a:ext cx="2803200" cy="522000"/>
+            <a:off x="3551999" y="1684800"/>
+            <a:ext cx="2803200" cy="403200"/>
           </a:xfrm>
           <a:prstGeom prst="rect">
             <a:avLst/>
@@ -3483,8 +3483,8 @@
         </p:nvSpPr>
         <p:spPr>
           <a:xfrm>
-            <a:off x="3641999" y="1699200"/>
-            <a:ext cx="2623200" cy="522000"/>
+            <a:off x="3641999" y="1684800"/>
+            <a:ext cx="2623200" cy="403200"/>
           </a:xfrm>
           <a:prstGeom prst="rect">
             <a:avLst/>
@@ -3531,8 +3531,8 @@
         </p:nvSpPr>
         <p:spPr>
           <a:xfrm>
-            <a:off x="6355200" y="1699200"/>
-            <a:ext cx="324000" cy="522000"/>
+            <a:off x="6355200" y="1684800"/>
+            <a:ext cx="324000" cy="403200"/>
           </a:xfrm>
           <a:prstGeom prst="rect">
             <a:avLst/>
@@ -3568,8 +3568,8 @@
         </p:nvSpPr>
         <p:spPr>
           <a:xfrm>
-            <a:off x="6679199" y="1699200"/>
-            <a:ext cx="2803200" cy="522000"/>
+            <a:off x="6679199" y="1684800"/>
+            <a:ext cx="2803200" cy="403200"/>
           </a:xfrm>
           <a:prstGeom prst="rect">
             <a:avLst/>
@@ -3612,8 +3612,8 @@
         </p:nvSpPr>
         <p:spPr>
           <a:xfrm>
-            <a:off x="6769199" y="1699200"/>
-            <a:ext cx="2623200" cy="522000"/>
+            <a:off x="6769199" y="1684800"/>
+            <a:ext cx="2623200" cy="403200"/>
           </a:xfrm>
           <a:prstGeom prst="rect">
             <a:avLst/>
@@ -3649,7 +3649,7 @@
         </p:nvSpPr>
         <p:spPr>
           <a:xfrm>
-            <a:off x="424800" y="2412000"/>
+            <a:off x="424800" y="2232000"/>
             <a:ext cx="9057600" cy="180000"/>
           </a:xfrm>
           <a:prstGeom prst="rect">
@@ -3680,14 +3680,104 @@
       </p:sp>
       <p:sp>
         <p:nvSpPr>
-          <p:cNvPr id="15" name="TextBox 14"/>
+          <p:cNvPr id="15" name="Rectangle 14"/>
+          <p:cNvSpPr/>
+          <p:nvPr/>
+        </p:nvSpPr>
+        <p:spPr>
+          <a:xfrm>
+            <a:off x="424800" y="2430000"/>
+            <a:ext cx="4882680" cy="1980000"/>
+          </a:xfrm>
+          <a:prstGeom prst="rect">
+            <a:avLst/>
+          </a:prstGeom>
+          <a:solidFill>
+            <a:srgbClr val="FFFFFF"/>
+          </a:solidFill>
+          <a:ln w="9525">
+            <a:solidFill>
+              <a:srgbClr val="BFBFBF"/>
+            </a:solidFill>
+          </a:ln>
+          <a:effectLst/>
+        </p:spPr>
+        <p:style>
+          <a:lnRef idx="1">
+            <a:schemeClr val="accent1"/>
+          </a:lnRef>
+          <a:fillRef idx="3">
+            <a:schemeClr val="accent1"/>
+          </a:fillRef>
+          <a:effectRef idx="2">
+            <a:schemeClr val="accent1"/>
+          </a:effectRef>
+          <a:fontRef idx="minor">
+            <a:schemeClr val="lt1"/>
+          </a:fontRef>
+        </p:style>
+        <p:txBody>
+          <a:bodyPr rtlCol="0" anchor="ctr"/>
+          <a:lstStyle/>
+          <a:p>
+            <a:pPr algn="ctr"/>
+          </a:p>
+        </p:txBody>
+      </p:sp>
+      <p:sp>
+        <p:nvSpPr>
+          <p:cNvPr id="16" name="Rectangle 15"/>
+          <p:cNvSpPr/>
+          <p:nvPr/>
+        </p:nvSpPr>
+        <p:spPr>
+          <a:xfrm>
+            <a:off x="424800" y="2430000"/>
+            <a:ext cx="4882680" cy="342000"/>
+          </a:xfrm>
+          <a:prstGeom prst="rect">
+            <a:avLst/>
+          </a:prstGeom>
+          <a:solidFill>
+            <a:srgbClr val="EAEEF6"/>
+          </a:solidFill>
+          <a:ln>
+            <a:noFill/>
+          </a:ln>
+          <a:effectLst/>
+        </p:spPr>
+        <p:style>
+          <a:lnRef idx="1">
+            <a:schemeClr val="accent1"/>
+          </a:lnRef>
+          <a:fillRef idx="3">
+            <a:schemeClr val="accent1"/>
+          </a:fillRef>
+          <a:effectRef idx="2">
+            <a:schemeClr val="accent1"/>
+          </a:effectRef>
+          <a:fontRef idx="minor">
+            <a:schemeClr val="lt1"/>
+          </a:fontRef>
+        </p:style>
+        <p:txBody>
+          <a:bodyPr rtlCol="0" anchor="ctr"/>
+          <a:lstStyle/>
+          <a:p>
+            <a:pPr algn="ctr"/>
+          </a:p>
+        </p:txBody>
+      </p:sp>
+      <p:sp>
+        <p:nvSpPr>
+          <p:cNvPr id="17" name="TextBox 16"/>
           <p:cNvSpPr txBox="1"/>
           <p:nvPr/>
         </p:nvSpPr>
         <p:spPr>
           <a:xfrm>
-            <a:off x="622800" y="2664000"/>
-            <a:ext cx="4684680" cy="342000"/>
+            <a:off x="424800" y="2430000"/>
+            <a:ext cx="4882680" cy="342000"/>
           </a:xfrm>
           <a:prstGeom prst="rect">
             <a:avLst/>
@@ -3695,14 +3785,14 @@
           <a:noFill/>
         </p:spPr>
         <p:txBody>
-          <a:bodyPr wrap="square" anchor="t" lIns="0" rIns="0" tIns="0" bIns="0">
+          <a:bodyPr wrap="square" anchor="ctr" lIns="0" rIns="0" tIns="0" bIns="0">
             <a:spAutoFit/>
           </a:bodyPr>
           <a:lstStyle/>
           <a:p>
-            <a:pPr algn="l"/>
-            <a:r>
-              <a:rPr sz="1100" b="0">
+            <a:pPr algn="ctr"/>
+            <a:r>
+              <a:rPr sz="1000" b="1">
                 <a:solidFill>
                   <a:srgbClr val="000000"/>
                 </a:solidFill>
@@ -3710,7 +3800,118 @@
                 <a:ea typeface="맑은 고딕"/>
                 <a:cs typeface="맑은 고딕"/>
               </a:rPr>
-              <a:t>- 거점: 유휴 점포 PP센터 </a:t>
+              <a:t>서비스 운영</a:t>
+            </a:r>
+          </a:p>
+        </p:txBody>
+      </p:sp>
+      <p:cxnSp>
+        <p:nvCxnSpPr>
+          <p:cNvPr id="18" name="Connector 17"/>
+          <p:cNvCxnSpPr/>
+          <p:nvPr/>
+        </p:nvCxnSpPr>
+        <p:spPr>
+          <a:xfrm>
+            <a:off x="424800" y="2772000"/>
+            <a:ext cx="4882680" cy="0"/>
+          </a:xfrm>
+          <a:prstGeom prst="bentConnector3">
+            <a:avLst/>
+          </a:prstGeom>
+          <a:ln w="9525">
+            <a:solidFill>
+              <a:srgbClr val="BFBFBF"/>
+            </a:solidFill>
+            <a:prstDash val="solid"/>
+          </a:ln>
+          <a:effectLst/>
+        </p:spPr>
+        <p:style>
+          <a:lnRef idx="2">
+            <a:schemeClr val="accent1"/>
+          </a:lnRef>
+          <a:fillRef idx="0">
+            <a:schemeClr val="accent1"/>
+          </a:fillRef>
+          <a:effectRef idx="1">
+            <a:schemeClr val="accent1"/>
+          </a:effectRef>
+          <a:fontRef idx="minor">
+            <a:schemeClr val="tx1"/>
+          </a:fontRef>
+        </p:style>
+      </p:cxnSp>
+      <p:sp>
+        <p:nvSpPr>
+          <p:cNvPr id="19" name="TextBox 18"/>
+          <p:cNvSpPr txBox="1"/>
+          <p:nvPr/>
+        </p:nvSpPr>
+        <p:spPr>
+          <a:xfrm>
+            <a:off x="532800" y="2772000"/>
+            <a:ext cx="900000" cy="409500"/>
+          </a:xfrm>
+          <a:prstGeom prst="rect">
+            <a:avLst/>
+          </a:prstGeom>
+          <a:noFill/>
+        </p:spPr>
+        <p:txBody>
+          <a:bodyPr wrap="square" anchor="ctr" lIns="0" rIns="0" tIns="0" bIns="0">
+            <a:spAutoFit/>
+          </a:bodyPr>
+          <a:lstStyle/>
+          <a:p>
+            <a:pPr algn="l"/>
+            <a:r>
+              <a:rPr sz="1100" b="1">
+                <a:solidFill>
+                  <a:srgbClr val="000000"/>
+                </a:solidFill>
+                <a:latin typeface="맑은 고딕"/>
+                <a:ea typeface="맑은 고딕"/>
+                <a:cs typeface="맑은 고딕"/>
+              </a:rPr>
+              <a:t>거점</a:t>
+            </a:r>
+          </a:p>
+        </p:txBody>
+      </p:sp>
+      <p:sp>
+        <p:nvSpPr>
+          <p:cNvPr id="20" name="TextBox 19"/>
+          <p:cNvSpPr txBox="1"/>
+          <p:nvPr/>
+        </p:nvSpPr>
+        <p:spPr>
+          <a:xfrm>
+            <a:off x="1432800" y="2772000"/>
+            <a:ext cx="3766680" cy="409500"/>
+          </a:xfrm>
+          <a:prstGeom prst="rect">
+            <a:avLst/>
+          </a:prstGeom>
+          <a:noFill/>
+        </p:spPr>
+        <p:txBody>
+          <a:bodyPr wrap="square" anchor="ctr" lIns="0" rIns="0" tIns="0" bIns="0">
+            <a:spAutoFit/>
+          </a:bodyPr>
+          <a:lstStyle/>
+          <a:p>
+            <a:pPr algn="l"/>
+            <a:r>
+              <a:rPr sz="1100" b="0">
+                <a:solidFill>
+                  <a:srgbClr val="000000"/>
+                </a:solidFill>
+                <a:latin typeface="맑은 고딕"/>
+                <a:ea typeface="맑은 고딕"/>
+                <a:cs typeface="맑은 고딕"/>
+              </a:rPr>
+              <a:t>유휴 점포 PP센터 </a:t>
             </a:r>
             <a:r>
               <a:rPr sz="1000" b="0">
@@ -3726,16 +3927,53 @@
           </a:p>
         </p:txBody>
       </p:sp>
-      <p:sp>
-        <p:nvSpPr>
-          <p:cNvPr id="16" name="TextBox 15"/>
+      <p:cxnSp>
+        <p:nvCxnSpPr>
+          <p:cNvPr id="21" name="Connector 20"/>
+          <p:cNvCxnSpPr/>
+          <p:nvPr/>
+        </p:nvCxnSpPr>
+        <p:spPr>
+          <a:xfrm>
+            <a:off x="478799" y="3181500"/>
+            <a:ext cx="4774681" cy="0"/>
+          </a:xfrm>
+          <a:prstGeom prst="bentConnector3">
+            <a:avLst/>
+          </a:prstGeom>
+          <a:ln w="6350">
+            <a:solidFill>
+              <a:srgbClr val="BFBFBF"/>
+            </a:solidFill>
+            <a:prstDash val="solid"/>
+          </a:ln>
+          <a:effectLst/>
+        </p:spPr>
+        <p:style>
+          <a:lnRef idx="2">
+            <a:schemeClr val="accent1"/>
+          </a:lnRef>
+          <a:fillRef idx="0">
+            <a:schemeClr val="accent1"/>
+          </a:fillRef>
+          <a:effectRef idx="1">
+            <a:schemeClr val="accent1"/>
+          </a:effectRef>
+          <a:fontRef idx="minor">
+            <a:schemeClr val="tx1"/>
+          </a:fontRef>
+        </p:style>
+      </p:cxnSp>
+      <p:sp>
+        <p:nvSpPr>
+          <p:cNvPr id="22" name="TextBox 21"/>
           <p:cNvSpPr txBox="1"/>
           <p:nvPr/>
         </p:nvSpPr>
         <p:spPr>
           <a:xfrm>
-            <a:off x="622800" y="3006000"/>
-            <a:ext cx="4684680" cy="342000"/>
+            <a:off x="532800" y="3181500"/>
+            <a:ext cx="900000" cy="409500"/>
           </a:xfrm>
           <a:prstGeom prst="rect">
             <a:avLst/>
@@ -3743,14 +3981,14 @@
           <a:noFill/>
         </p:spPr>
         <p:txBody>
-          <a:bodyPr wrap="square" anchor="t" lIns="0" rIns="0" tIns="0" bIns="0">
+          <a:bodyPr wrap="square" anchor="ctr" lIns="0" rIns="0" tIns="0" bIns="0">
             <a:spAutoFit/>
           </a:bodyPr>
           <a:lstStyle/>
           <a:p>
             <a:pPr algn="l"/>
             <a:r>
-              <a:rPr sz="1100" b="0">
+              <a:rPr sz="1100" b="1">
                 <a:solidFill>
                   <a:srgbClr val="000000"/>
                 </a:solidFill>
@@ -3758,21 +3996,21 @@
                 <a:ea typeface="맑은 고딕"/>
                 <a:cs typeface="맑은 고딕"/>
               </a:rPr>
-              <a:t>- 운송: 쓱배송 사륜차 → 대용량·중량 대응</a:t>
-            </a:r>
-          </a:p>
-        </p:txBody>
-      </p:sp>
-      <p:sp>
-        <p:nvSpPr>
-          <p:cNvPr id="17" name="TextBox 16"/>
+              <a:t>운송</a:t>
+            </a:r>
+          </a:p>
+        </p:txBody>
+      </p:sp>
+      <p:sp>
+        <p:nvSpPr>
+          <p:cNvPr id="23" name="TextBox 22"/>
           <p:cNvSpPr txBox="1"/>
           <p:nvPr/>
         </p:nvSpPr>
         <p:spPr>
           <a:xfrm>
-            <a:off x="622800" y="3347999"/>
-            <a:ext cx="4684680" cy="342000"/>
+            <a:off x="1432800" y="3181500"/>
+            <a:ext cx="3766680" cy="409500"/>
           </a:xfrm>
           <a:prstGeom prst="rect">
             <a:avLst/>
@@ -3780,7 +4018,7 @@
           <a:noFill/>
         </p:spPr>
         <p:txBody>
-          <a:bodyPr wrap="square" anchor="t" lIns="0" rIns="0" tIns="0" bIns="0">
+          <a:bodyPr wrap="square" anchor="ctr" lIns="0" rIns="0" tIns="0" bIns="0">
             <a:spAutoFit/>
           </a:bodyPr>
           <a:lstStyle/>
@@ -3795,7 +4033,118 @@
                 <a:ea typeface="맑은 고딕"/>
                 <a:cs typeface="맑은 고딕"/>
               </a:rPr>
-              <a:t>- 운영: 20시 마감 → 2시간 내 배송 완료 </a:t>
+              <a:t>쓱배송 사륜차 → 대용량·중량 대응</a:t>
+            </a:r>
+          </a:p>
+        </p:txBody>
+      </p:sp>
+      <p:cxnSp>
+        <p:nvCxnSpPr>
+          <p:cNvPr id="24" name="Connector 23"/>
+          <p:cNvCxnSpPr/>
+          <p:nvPr/>
+        </p:nvCxnSpPr>
+        <p:spPr>
+          <a:xfrm>
+            <a:off x="478799" y="3591000"/>
+            <a:ext cx="4774681" cy="0"/>
+          </a:xfrm>
+          <a:prstGeom prst="bentConnector3">
+            <a:avLst/>
+          </a:prstGeom>
+          <a:ln w="6350">
+            <a:solidFill>
+              <a:srgbClr val="BFBFBF"/>
+            </a:solidFill>
+            <a:prstDash val="solid"/>
+          </a:ln>
+          <a:effectLst/>
+        </p:spPr>
+        <p:style>
+          <a:lnRef idx="2">
+            <a:schemeClr val="accent1"/>
+          </a:lnRef>
+          <a:fillRef idx="0">
+            <a:schemeClr val="accent1"/>
+          </a:fillRef>
+          <a:effectRef idx="1">
+            <a:schemeClr val="accent1"/>
+          </a:effectRef>
+          <a:fontRef idx="minor">
+            <a:schemeClr val="tx1"/>
+          </a:fontRef>
+        </p:style>
+      </p:cxnSp>
+      <p:sp>
+        <p:nvSpPr>
+          <p:cNvPr id="25" name="TextBox 24"/>
+          <p:cNvSpPr txBox="1"/>
+          <p:nvPr/>
+        </p:nvSpPr>
+        <p:spPr>
+          <a:xfrm>
+            <a:off x="532800" y="3591000"/>
+            <a:ext cx="900000" cy="409500"/>
+          </a:xfrm>
+          <a:prstGeom prst="rect">
+            <a:avLst/>
+          </a:prstGeom>
+          <a:noFill/>
+        </p:spPr>
+        <p:txBody>
+          <a:bodyPr wrap="square" anchor="ctr" lIns="0" rIns="0" tIns="0" bIns="0">
+            <a:spAutoFit/>
+          </a:bodyPr>
+          <a:lstStyle/>
+          <a:p>
+            <a:pPr algn="l"/>
+            <a:r>
+              <a:rPr sz="1100" b="1">
+                <a:solidFill>
+                  <a:srgbClr val="000000"/>
+                </a:solidFill>
+                <a:latin typeface="맑은 고딕"/>
+                <a:ea typeface="맑은 고딕"/>
+                <a:cs typeface="맑은 고딕"/>
+              </a:rPr>
+              <a:t>운영</a:t>
+            </a:r>
+          </a:p>
+        </p:txBody>
+      </p:sp>
+      <p:sp>
+        <p:nvSpPr>
+          <p:cNvPr id="26" name="TextBox 25"/>
+          <p:cNvSpPr txBox="1"/>
+          <p:nvPr/>
+        </p:nvSpPr>
+        <p:spPr>
+          <a:xfrm>
+            <a:off x="1432800" y="3591000"/>
+            <a:ext cx="3766680" cy="409500"/>
+          </a:xfrm>
+          <a:prstGeom prst="rect">
+            <a:avLst/>
+          </a:prstGeom>
+          <a:noFill/>
+        </p:spPr>
+        <p:txBody>
+          <a:bodyPr wrap="square" anchor="ctr" lIns="0" rIns="0" tIns="0" bIns="0">
+            <a:spAutoFit/>
+          </a:bodyPr>
+          <a:lstStyle/>
+          <a:p>
+            <a:pPr algn="l"/>
+            <a:r>
+              <a:rPr sz="1100" b="0">
+                <a:solidFill>
+                  <a:srgbClr val="000000"/>
+                </a:solidFill>
+                <a:latin typeface="맑은 고딕"/>
+                <a:ea typeface="맑은 고딕"/>
+                <a:cs typeface="맑은 고딕"/>
+              </a:rPr>
+              <a:t>20시 마감 → 2시간 내 배송 완료 </a:t>
             </a:r>
             <a:r>
               <a:rPr sz="1000" b="0">
@@ -3811,16 +4160,53 @@
           </a:p>
         </p:txBody>
       </p:sp>
-      <p:sp>
-        <p:nvSpPr>
-          <p:cNvPr id="18" name="TextBox 17"/>
+      <p:cxnSp>
+        <p:nvCxnSpPr>
+          <p:cNvPr id="27" name="Connector 26"/>
+          <p:cNvCxnSpPr/>
+          <p:nvPr/>
+        </p:nvCxnSpPr>
+        <p:spPr>
+          <a:xfrm>
+            <a:off x="478799" y="4000500"/>
+            <a:ext cx="4774681" cy="0"/>
+          </a:xfrm>
+          <a:prstGeom prst="bentConnector3">
+            <a:avLst/>
+          </a:prstGeom>
+          <a:ln w="6350">
+            <a:solidFill>
+              <a:srgbClr val="BFBFBF"/>
+            </a:solidFill>
+            <a:prstDash val="solid"/>
+          </a:ln>
+          <a:effectLst/>
+        </p:spPr>
+        <p:style>
+          <a:lnRef idx="2">
+            <a:schemeClr val="accent1"/>
+          </a:lnRef>
+          <a:fillRef idx="0">
+            <a:schemeClr val="accent1"/>
+          </a:fillRef>
+          <a:effectRef idx="1">
+            <a:schemeClr val="accent1"/>
+          </a:effectRef>
+          <a:fontRef idx="minor">
+            <a:schemeClr val="tx1"/>
+          </a:fontRef>
+        </p:style>
+      </p:cxnSp>
+      <p:sp>
+        <p:nvSpPr>
+          <p:cNvPr id="28" name="TextBox 27"/>
           <p:cNvSpPr txBox="1"/>
           <p:nvPr/>
         </p:nvSpPr>
         <p:spPr>
           <a:xfrm>
-            <a:off x="622800" y="3689999"/>
-            <a:ext cx="4684680" cy="342000"/>
+            <a:off x="532800" y="4000500"/>
+            <a:ext cx="900000" cy="409500"/>
           </a:xfrm>
           <a:prstGeom prst="rect">
             <a:avLst/>
@@ -3828,14 +4214,14 @@
           <a:noFill/>
         </p:spPr>
         <p:txBody>
-          <a:bodyPr wrap="square" anchor="t" lIns="0" rIns="0" tIns="0" bIns="0">
+          <a:bodyPr wrap="square" anchor="ctr" lIns="0" rIns="0" tIns="0" bIns="0">
             <a:spAutoFit/>
           </a:bodyPr>
           <a:lstStyle/>
           <a:p>
             <a:pPr algn="l"/>
             <a:r>
-              <a:rPr sz="1100" b="0">
+              <a:rPr sz="1100" b="1">
                 <a:solidFill>
                   <a:srgbClr val="000000"/>
                 </a:solidFill>
@@ -3843,7 +4229,44 @@
                 <a:ea typeface="맑은 고딕"/>
                 <a:cs typeface="맑은 고딕"/>
               </a:rPr>
-              <a:t>- 규모: 약 15만 종 </a:t>
+              <a:t>규모</a:t>
+            </a:r>
+          </a:p>
+        </p:txBody>
+      </p:sp>
+      <p:sp>
+        <p:nvSpPr>
+          <p:cNvPr id="29" name="TextBox 28"/>
+          <p:cNvSpPr txBox="1"/>
+          <p:nvPr/>
+        </p:nvSpPr>
+        <p:spPr>
+          <a:xfrm>
+            <a:off x="1432800" y="4000500"/>
+            <a:ext cx="3766680" cy="409500"/>
+          </a:xfrm>
+          <a:prstGeom prst="rect">
+            <a:avLst/>
+          </a:prstGeom>
+          <a:noFill/>
+        </p:spPr>
+        <p:txBody>
+          <a:bodyPr wrap="square" anchor="ctr" lIns="0" rIns="0" tIns="0" bIns="0">
+            <a:spAutoFit/>
+          </a:bodyPr>
+          <a:lstStyle/>
+          <a:p>
+            <a:pPr algn="l"/>
+            <a:r>
+              <a:rPr sz="1100" b="0">
+                <a:solidFill>
+                  <a:srgbClr val="000000"/>
+                </a:solidFill>
+                <a:latin typeface="맑은 고딕"/>
+                <a:ea typeface="맑은 고딕"/>
+                <a:cs typeface="맑은 고딕"/>
+              </a:rPr>
+              <a:t>약 15만 종 </a:t>
             </a:r>
             <a:r>
               <a:rPr sz="1000" b="0">
@@ -3861,15 +4284,15 @@
       </p:sp>
       <p:graphicFrame>
         <p:nvGraphicFramePr>
-          <p:cNvPr id="19" name="Table 18"/>
+          <p:cNvPr id="30" name="Table 29"/>
           <p:cNvGraphicFramePr>
             <a:graphicFrameLocks noGrp="1"/>
           </p:cNvGraphicFramePr>
           <p:nvPr/>
         </p:nvGraphicFramePr>
         <p:xfrm>
-          <a:off x="5487480" y="2628000"/>
-          <a:ext cx="3994918" cy="1926000"/>
+          <a:off x="5487480" y="2430000"/>
+          <a:ext cx="3994918" cy="1980000"/>
         </p:xfrm>
         <a:graphic>
           <a:graphicData uri="http://schemas.openxmlformats.org/drawingml/2006/table">
@@ -4019,7 +4442,7 @@
                   </a:tcPr>
                 </a:tc>
               </a:tr>
-              <a:tr h="792000">
+              <a:tr h="819000">
                 <a:tc>
                   <a:txBody>
                     <a:bodyPr wrap="square"/>
@@ -4192,7 +4615,7 @@
                   </a:tcPr>
                 </a:tc>
               </a:tr>
-              <a:tr h="792000">
+              <a:tr h="819000">
                 <a:tc>
                   <a:txBody>
                     <a:bodyPr wrap="square"/>
@@ -4347,25 +4770,109 @@
           </a:graphicData>
         </a:graphic>
       </p:graphicFrame>
-      <p:cxnSp>
-        <p:nvCxnSpPr>
-          <p:cNvPr id="20" name="Connector 19"/>
-          <p:cNvCxnSpPr/>
+      <p:sp>
+        <p:nvSpPr>
+          <p:cNvPr id="31" name="TextBox 30"/>
+          <p:cNvSpPr txBox="1"/>
           <p:nvPr/>
-        </p:nvCxnSpPr>
-        <p:spPr>
-          <a:xfrm>
-            <a:off x="5397480" y="2628000"/>
-            <a:ext cx="0" cy="1926000"/>
-          </a:xfrm>
-          <a:prstGeom prst="bentConnector3">
+        </p:nvSpPr>
+        <p:spPr>
+          <a:xfrm>
+            <a:off x="424800" y="4546800"/>
+            <a:ext cx="9057600" cy="180000"/>
+          </a:xfrm>
+          <a:prstGeom prst="rect">
             <a:avLst/>
           </a:prstGeom>
+          <a:noFill/>
+        </p:spPr>
+        <p:txBody>
+          <a:bodyPr wrap="square" anchor="t" lIns="0" rIns="0" tIns="0" bIns="0">
+            <a:spAutoFit/>
+          </a:bodyPr>
+          <a:lstStyle/>
+          <a:p>
+            <a:pPr algn="l"/>
+            <a:r>
+              <a:rPr sz="1200" b="1">
+                <a:solidFill>
+                  <a:srgbClr val="000000"/>
+                </a:solidFill>
+                <a:latin typeface="맑은 고딕"/>
+                <a:ea typeface="맑은 고딕"/>
+                <a:cs typeface="맑은 고딕"/>
+              </a:rPr>
+              <a:t>• ③ 확산 계획</a:t>
+            </a:r>
+          </a:p>
+        </p:txBody>
+      </p:sp>
+      <p:sp>
+        <p:nvSpPr>
+          <p:cNvPr id="32" name="Rectangle 31"/>
+          <p:cNvSpPr/>
+          <p:nvPr/>
+        </p:nvSpPr>
+        <p:spPr>
+          <a:xfrm>
+            <a:off x="424800" y="4744800"/>
+            <a:ext cx="9057600" cy="918000"/>
+          </a:xfrm>
+          <a:prstGeom prst="rect">
+            <a:avLst/>
+          </a:prstGeom>
+          <a:solidFill>
+            <a:srgbClr val="FFFFFF"/>
+          </a:solidFill>
           <a:ln w="9525">
             <a:solidFill>
               <a:srgbClr val="BFBFBF"/>
             </a:solidFill>
+          </a:ln>
+          <a:effectLst/>
+        </p:spPr>
+        <p:style>
+          <a:lnRef idx="1">
+            <a:schemeClr val="accent1"/>
+          </a:lnRef>
+          <a:fillRef idx="3">
+            <a:schemeClr val="accent1"/>
+          </a:fillRef>
+          <a:effectRef idx="2">
+            <a:schemeClr val="accent1"/>
+          </a:effectRef>
+          <a:fontRef idx="minor">
+            <a:schemeClr val="lt1"/>
+          </a:fontRef>
+        </p:style>
+        <p:txBody>
+          <a:bodyPr rtlCol="0" anchor="ctr"/>
+          <a:lstStyle/>
+          <a:p>
+            <a:pPr algn="ctr"/>
+          </a:p>
+        </p:txBody>
+      </p:sp>
+      <p:cxnSp>
+        <p:nvCxnSpPr>
+          <p:cNvPr id="33" name="Connector 32"/>
+          <p:cNvCxnSpPr/>
+          <p:nvPr/>
+        </p:nvCxnSpPr>
+        <p:spPr>
+          <a:xfrm>
+            <a:off x="658800" y="5067000"/>
+            <a:ext cx="8589600" cy="0"/>
+          </a:xfrm>
+          <a:prstGeom prst="bentConnector3">
+            <a:avLst/>
+          </a:prstGeom>
+          <a:ln w="25400">
+            <a:solidFill>
+              <a:srgbClr val="000000"/>
+            </a:solidFill>
             <a:prstDash val="solid"/>
+            <a:tailEnd type="triangle" w="med" len="med"/>
           </a:ln>
           <a:effectLst/>
         </p:spPr>
@@ -4386,88 +4893,13 @@
       </p:cxnSp>
       <p:sp>
         <p:nvSpPr>
-          <p:cNvPr id="21" name="TextBox 20"/>
-          <p:cNvSpPr txBox="1"/>
-          <p:nvPr/>
-        </p:nvSpPr>
-        <p:spPr>
-          <a:xfrm>
-            <a:off x="424800" y="4698000"/>
-            <a:ext cx="9057600" cy="180000"/>
-          </a:xfrm>
-          <a:prstGeom prst="rect">
-            <a:avLst/>
-          </a:prstGeom>
-          <a:noFill/>
-        </p:spPr>
-        <p:txBody>
-          <a:bodyPr wrap="square" anchor="t" lIns="0" rIns="0" tIns="0" bIns="0">
-            <a:spAutoFit/>
-          </a:bodyPr>
-          <a:lstStyle/>
-          <a:p>
-            <a:pPr algn="l"/>
-            <a:r>
-              <a:rPr sz="1200" b="1">
-                <a:solidFill>
-                  <a:srgbClr val="000000"/>
-                </a:solidFill>
-                <a:latin typeface="맑은 고딕"/>
-                <a:ea typeface="맑은 고딕"/>
-                <a:cs typeface="맑은 고딕"/>
-              </a:rPr>
-              <a:t>• ③ 확산 계획</a:t>
-            </a:r>
-          </a:p>
-        </p:txBody>
-      </p:sp>
-      <p:cxnSp>
-        <p:nvCxnSpPr>
-          <p:cNvPr id="22" name="Connector 21"/>
-          <p:cNvCxnSpPr/>
-          <p:nvPr/>
-        </p:nvCxnSpPr>
-        <p:spPr>
-          <a:xfrm>
-            <a:off x="424800" y="5119200"/>
-            <a:ext cx="9057600" cy="0"/>
-          </a:xfrm>
-          <a:prstGeom prst="bentConnector3">
-            <a:avLst/>
-          </a:prstGeom>
-          <a:ln w="25400">
-            <a:solidFill>
-              <a:srgbClr val="000000"/>
-            </a:solidFill>
-            <a:prstDash val="solid"/>
-            <a:tailEnd type="triangle" w="med" len="med"/>
-          </a:ln>
-          <a:effectLst/>
-        </p:spPr>
-        <p:style>
-          <a:lnRef idx="2">
-            <a:schemeClr val="accent1"/>
-          </a:lnRef>
-          <a:fillRef idx="0">
-            <a:schemeClr val="accent1"/>
-          </a:fillRef>
-          <a:effectRef idx="1">
-            <a:schemeClr val="accent1"/>
-          </a:effectRef>
-          <a:fontRef idx="minor">
-            <a:schemeClr val="tx1"/>
-          </a:fontRef>
-        </p:style>
-      </p:cxnSp>
-      <p:sp>
-        <p:nvSpPr>
-          <p:cNvPr id="23" name="Oval 22"/>
+          <p:cNvPr id="34" name="Oval 33"/>
           <p:cNvSpPr/>
           <p:nvPr/>
         </p:nvSpPr>
         <p:spPr>
           <a:xfrm>
-            <a:off x="1506600" y="5068799"/>
+            <a:off x="1682100" y="5016600"/>
             <a:ext cx="100800" cy="100800"/>
           </a:xfrm>
           <a:prstGeom prst="ellipse">
@@ -4507,14 +4939,14 @@
       </p:sp>
       <p:sp>
         <p:nvSpPr>
-          <p:cNvPr id="24" name="TextBox 23"/>
+          <p:cNvPr id="35" name="TextBox 34"/>
           <p:cNvSpPr txBox="1"/>
           <p:nvPr/>
         </p:nvSpPr>
         <p:spPr>
           <a:xfrm>
-            <a:off x="424800" y="4914000"/>
-            <a:ext cx="2264400" cy="162000"/>
+            <a:off x="658800" y="4861800"/>
+            <a:ext cx="2147400" cy="162000"/>
           </a:xfrm>
           <a:prstGeom prst="rect">
             <a:avLst/>
@@ -4544,14 +4976,14 @@
       </p:sp>
       <p:sp>
         <p:nvSpPr>
-          <p:cNvPr id="25" name="TextBox 24"/>
+          <p:cNvPr id="36" name="TextBox 35"/>
           <p:cNvSpPr txBox="1"/>
           <p:nvPr/>
         </p:nvSpPr>
         <p:spPr>
           <a:xfrm>
-            <a:off x="424800" y="5183999"/>
-            <a:ext cx="2264400" cy="413999"/>
+            <a:off x="658800" y="5131800"/>
+            <a:ext cx="2147400" cy="413999"/>
           </a:xfrm>
           <a:prstGeom prst="rect">
             <a:avLst/>
@@ -4595,13 +5027,13 @@
       </p:sp>
       <p:sp>
         <p:nvSpPr>
-          <p:cNvPr id="26" name="Oval 25"/>
+          <p:cNvPr id="37" name="Oval 36"/>
           <p:cNvSpPr/>
           <p:nvPr/>
         </p:nvSpPr>
         <p:spPr>
           <a:xfrm>
-            <a:off x="3771000" y="5068799"/>
+            <a:off x="3829499" y="5016600"/>
             <a:ext cx="100800" cy="100800"/>
           </a:xfrm>
           <a:prstGeom prst="ellipse">
@@ -4641,14 +5073,14 @@
       </p:sp>
       <p:sp>
         <p:nvSpPr>
-          <p:cNvPr id="27" name="TextBox 26"/>
+          <p:cNvPr id="38" name="TextBox 37"/>
           <p:cNvSpPr txBox="1"/>
           <p:nvPr/>
         </p:nvSpPr>
         <p:spPr>
           <a:xfrm>
-            <a:off x="2689200" y="4914000"/>
-            <a:ext cx="2264400" cy="162000"/>
+            <a:off x="2806200" y="4861800"/>
+            <a:ext cx="2147400" cy="162000"/>
           </a:xfrm>
           <a:prstGeom prst="rect">
             <a:avLst/>
@@ -4678,14 +5110,14 @@
       </p:sp>
       <p:sp>
         <p:nvSpPr>
-          <p:cNvPr id="28" name="TextBox 27"/>
+          <p:cNvPr id="39" name="TextBox 38"/>
           <p:cNvSpPr txBox="1"/>
           <p:nvPr/>
         </p:nvSpPr>
         <p:spPr>
           <a:xfrm>
-            <a:off x="2689200" y="5183999"/>
-            <a:ext cx="2264400" cy="413999"/>
+            <a:off x="2806200" y="5131800"/>
+            <a:ext cx="2147400" cy="413999"/>
           </a:xfrm>
           <a:prstGeom prst="rect">
             <a:avLst/>
@@ -4729,13 +5161,13 @@
       </p:sp>
       <p:sp>
         <p:nvSpPr>
-          <p:cNvPr id="29" name="Oval 28"/>
+          <p:cNvPr id="40" name="Oval 39"/>
           <p:cNvSpPr/>
           <p:nvPr/>
         </p:nvSpPr>
         <p:spPr>
           <a:xfrm>
-            <a:off x="6035400" y="5068799"/>
+            <a:off x="5976900" y="5016600"/>
             <a:ext cx="100800" cy="100800"/>
           </a:xfrm>
           <a:prstGeom prst="ellipse">
@@ -4775,14 +5207,14 @@
       </p:sp>
       <p:sp>
         <p:nvSpPr>
-          <p:cNvPr id="30" name="TextBox 29"/>
+          <p:cNvPr id="41" name="TextBox 40"/>
           <p:cNvSpPr txBox="1"/>
           <p:nvPr/>
         </p:nvSpPr>
         <p:spPr>
           <a:xfrm>
-            <a:off x="4953600" y="4914000"/>
-            <a:ext cx="2264400" cy="162000"/>
+            <a:off x="4953600" y="4861800"/>
+            <a:ext cx="2147400" cy="162000"/>
           </a:xfrm>
           <a:prstGeom prst="rect">
             <a:avLst/>
@@ -4812,14 +5244,14 @@
       </p:sp>
       <p:sp>
         <p:nvSpPr>
-          <p:cNvPr id="31" name="TextBox 30"/>
+          <p:cNvPr id="42" name="TextBox 41"/>
           <p:cNvSpPr txBox="1"/>
           <p:nvPr/>
         </p:nvSpPr>
         <p:spPr>
           <a:xfrm>
-            <a:off x="4953600" y="5183999"/>
-            <a:ext cx="2264400" cy="413999"/>
+            <a:off x="4953600" y="5131800"/>
+            <a:ext cx="2147400" cy="413999"/>
           </a:xfrm>
           <a:prstGeom prst="rect">
             <a:avLst/>
@@ -4849,13 +5281,13 @@
       </p:sp>
       <p:sp>
         <p:nvSpPr>
-          <p:cNvPr id="32" name="Oval 31"/>
+          <p:cNvPr id="43" name="Oval 42"/>
           <p:cNvSpPr/>
           <p:nvPr/>
         </p:nvSpPr>
         <p:spPr>
           <a:xfrm>
-            <a:off x="8299800" y="5068799"/>
+            <a:off x="8124299" y="5016600"/>
             <a:ext cx="100800" cy="100800"/>
           </a:xfrm>
           <a:prstGeom prst="ellipse">
@@ -4895,14 +5327,14 @@
       </p:sp>
       <p:sp>
         <p:nvSpPr>
-          <p:cNvPr id="33" name="TextBox 32"/>
+          <p:cNvPr id="44" name="TextBox 43"/>
           <p:cNvSpPr txBox="1"/>
           <p:nvPr/>
         </p:nvSpPr>
         <p:spPr>
           <a:xfrm>
-            <a:off x="7218000" y="4914000"/>
-            <a:ext cx="2264400" cy="162000"/>
+            <a:off x="7100999" y="4861800"/>
+            <a:ext cx="2147400" cy="162000"/>
           </a:xfrm>
           <a:prstGeom prst="rect">
             <a:avLst/>
@@ -4932,14 +5364,14 @@
       </p:sp>
       <p:sp>
         <p:nvSpPr>
-          <p:cNvPr id="34" name="TextBox 33"/>
+          <p:cNvPr id="45" name="TextBox 44"/>
           <p:cNvSpPr txBox="1"/>
           <p:nvPr/>
         </p:nvSpPr>
         <p:spPr>
           <a:xfrm>
-            <a:off x="7218000" y="5183999"/>
-            <a:ext cx="2264400" cy="413999"/>
+            <a:off x="7100999" y="5131800"/>
+            <a:ext cx="2147400" cy="413999"/>
           </a:xfrm>
           <a:prstGeom prst="rect">
             <a:avLst/>
@@ -4983,13 +5415,13 @@
       </p:sp>
       <p:sp>
         <p:nvSpPr>
-          <p:cNvPr id="35" name="TextBox 34"/>
+          <p:cNvPr id="46" name="TextBox 45"/>
           <p:cNvSpPr txBox="1"/>
           <p:nvPr/>
         </p:nvSpPr>
         <p:spPr>
           <a:xfrm>
-            <a:off x="424800" y="5669999"/>
+            <a:off x="424800" y="5727600"/>
             <a:ext cx="9057600" cy="216000"/>
           </a:xfrm>
           <a:prstGeom prst="rect">

--- a/reports/ssg-quickcommerce-onepager.pptx
+++ b/reports/ssg-quickcommerce-onepager.pptx
@@ -3245,51 +3245,14 @@
       </p:sp>
       <p:sp>
         <p:nvSpPr>
-          <p:cNvPr id="5" name="TextBox 4"/>
-          <p:cNvSpPr txBox="1"/>
+          <p:cNvPr id="5" name="Rectangle 4"/>
+          <p:cNvSpPr/>
           <p:nvPr/>
         </p:nvSpPr>
         <p:spPr>
           <a:xfrm>
             <a:off x="424800" y="1494000"/>
-            <a:ext cx="9057600" cy="180000"/>
-          </a:xfrm>
-          <a:prstGeom prst="rect">
-            <a:avLst/>
-          </a:prstGeom>
-          <a:noFill/>
-        </p:spPr>
-        <p:txBody>
-          <a:bodyPr wrap="square" anchor="t" lIns="0" rIns="0" tIns="0" bIns="0">
-            <a:spAutoFit/>
-          </a:bodyPr>
-          <a:lstStyle/>
-          <a:p>
-            <a:pPr algn="l"/>
-            <a:r>
-              <a:rPr sz="1200" b="1">
-                <a:solidFill>
-                  <a:srgbClr val="000000"/>
-                </a:solidFill>
-                <a:latin typeface="맑은 고딕"/>
-                <a:ea typeface="맑은 고딕"/>
-                <a:cs typeface="맑은 고딕"/>
-              </a:rPr>
-              <a:t>• ① 도입 배경</a:t>
-            </a:r>
-          </a:p>
-        </p:txBody>
-      </p:sp>
-      <p:sp>
-        <p:nvSpPr>
-          <p:cNvPr id="6" name="Rectangle 5"/>
-          <p:cNvSpPr/>
-          <p:nvPr/>
-        </p:nvSpPr>
-        <p:spPr>
-          <a:xfrm>
-            <a:off x="424800" y="1684800"/>
-            <a:ext cx="2803200" cy="403200"/>
+            <a:ext cx="5292000" cy="270000"/>
           </a:xfrm>
           <a:prstGeom prst="rect">
             <a:avLst/>
@@ -3326,14 +3289,14 @@
       </p:sp>
       <p:sp>
         <p:nvSpPr>
-          <p:cNvPr id="7" name="TextBox 6"/>
+          <p:cNvPr id="6" name="TextBox 5"/>
           <p:cNvSpPr txBox="1"/>
           <p:nvPr/>
         </p:nvSpPr>
         <p:spPr>
           <a:xfrm>
-            <a:off x="514800" y="1684800"/>
-            <a:ext cx="2623200" cy="403200"/>
+            <a:off x="424800" y="1494000"/>
+            <a:ext cx="5292000" cy="270000"/>
           </a:xfrm>
           <a:prstGeom prst="rect">
             <a:avLst/>
@@ -3347,6 +3310,80 @@
           <a:lstStyle/>
           <a:p>
             <a:pPr algn="ctr"/>
+            <a:r>
+              <a:rPr sz="1200" b="1">
+                <a:solidFill>
+                  <a:srgbClr val="000000"/>
+                </a:solidFill>
+                <a:latin typeface="맑은 고딕"/>
+                <a:ea typeface="맑은 고딕"/>
+                <a:cs typeface="맑은 고딕"/>
+              </a:rPr>
+              <a:t>현황 및 배경</a:t>
+            </a:r>
+          </a:p>
+        </p:txBody>
+      </p:sp>
+      <p:sp>
+        <p:nvSpPr>
+          <p:cNvPr id="7" name="TextBox 6"/>
+          <p:cNvSpPr txBox="1"/>
+          <p:nvPr/>
+        </p:nvSpPr>
+        <p:spPr>
+          <a:xfrm>
+            <a:off x="424800" y="1864800"/>
+            <a:ext cx="5292000" cy="187200"/>
+          </a:xfrm>
+          <a:prstGeom prst="rect">
+            <a:avLst/>
+          </a:prstGeom>
+          <a:noFill/>
+        </p:spPr>
+        <p:txBody>
+          <a:bodyPr wrap="square" anchor="t" lIns="0" rIns="0" tIns="0" bIns="0">
+            <a:spAutoFit/>
+          </a:bodyPr>
+          <a:lstStyle/>
+          <a:p>
+            <a:pPr algn="l"/>
+            <a:r>
+              <a:rPr sz="1200" b="1">
+                <a:solidFill>
+                  <a:srgbClr val="000000"/>
+                </a:solidFill>
+                <a:latin typeface="맑은 고딕"/>
+                <a:ea typeface="맑은 고딕"/>
+                <a:cs typeface="맑은 고딕"/>
+              </a:rPr>
+              <a:t>• ① 수요 급증</a:t>
+            </a:r>
+          </a:p>
+        </p:txBody>
+      </p:sp>
+      <p:sp>
+        <p:nvSpPr>
+          <p:cNvPr id="8" name="TextBox 7"/>
+          <p:cNvSpPr txBox="1"/>
+          <p:nvPr/>
+        </p:nvSpPr>
+        <p:spPr>
+          <a:xfrm>
+            <a:off x="622800" y="2052000"/>
+            <a:ext cx="5093999" cy="187200"/>
+          </a:xfrm>
+          <a:prstGeom prst="rect">
+            <a:avLst/>
+          </a:prstGeom>
+          <a:noFill/>
+        </p:spPr>
+        <p:txBody>
+          <a:bodyPr wrap="square" anchor="t" lIns="0" rIns="0" tIns="0" bIns="0">
+            <a:spAutoFit/>
+          </a:bodyPr>
+          <a:lstStyle/>
+          <a:p>
+            <a:pPr algn="l"/>
             <a:r>
               <a:rPr sz="1100" b="0">
                 <a:solidFill>
@@ -3356,7 +3393,7 @@
                 <a:ea typeface="맑은 고딕"/>
                 <a:cs typeface="맑은 고딕"/>
               </a:rPr>
-              <a:t>바로퀵 매출 197%↑ </a:t>
+              <a:t>- 바로퀵 매출 197%↑ </a:t>
             </a:r>
             <a:r>
               <a:rPr sz="1000" b="0">
@@ -3396,14 +3433,14 @@
       </p:sp>
       <p:sp>
         <p:nvSpPr>
-          <p:cNvPr id="8" name="TextBox 7"/>
+          <p:cNvPr id="9" name="TextBox 8"/>
           <p:cNvSpPr txBox="1"/>
           <p:nvPr/>
         </p:nvSpPr>
         <p:spPr>
           <a:xfrm>
-            <a:off x="3228000" y="1684800"/>
-            <a:ext cx="324000" cy="403200"/>
+            <a:off x="622800" y="2239200"/>
+            <a:ext cx="5093999" cy="187200"/>
           </a:xfrm>
           <a:prstGeom prst="rect">
             <a:avLst/>
@@ -3411,36 +3448,1624 @@
           <a:noFill/>
         </p:spPr>
         <p:txBody>
-          <a:bodyPr wrap="square" anchor="ctr" lIns="0" rIns="0" tIns="0" bIns="0">
+          <a:bodyPr wrap="square" anchor="t" lIns="0" rIns="0" tIns="0" bIns="0">
             <a:spAutoFit/>
           </a:bodyPr>
           <a:lstStyle/>
           <a:p>
-            <a:pPr algn="ctr"/>
-            <a:r>
-              <a:rPr sz="1400" b="1">
+            <a:pPr algn="l"/>
+            <a:r>
+              <a:rPr sz="1100" b="0">
                 <a:solidFill>
-                  <a:srgbClr val="595959"/>
+                  <a:srgbClr val="000000"/>
                 </a:solidFill>
                 <a:latin typeface="맑은 고딕"/>
                 <a:ea typeface="맑은 고딕"/>
                 <a:cs typeface="맑은 고딕"/>
               </a:rPr>
-              <a:t>→</a:t>
-            </a:r>
-          </a:p>
-        </p:txBody>
-      </p:sp>
-      <p:sp>
-        <p:nvSpPr>
-          <p:cNvPr id="9" name="Rectangle 8"/>
+              <a:t>- B마트 등 즉시배송 시장, 대용량 품목 확대</a:t>
+            </a:r>
+          </a:p>
+        </p:txBody>
+      </p:sp>
+      <p:sp>
+        <p:nvSpPr>
+          <p:cNvPr id="10" name="TextBox 9"/>
+          <p:cNvSpPr txBox="1"/>
+          <p:nvPr/>
+        </p:nvSpPr>
+        <p:spPr>
+          <a:xfrm>
+            <a:off x="424800" y="2505600"/>
+            <a:ext cx="5292000" cy="187200"/>
+          </a:xfrm>
+          <a:prstGeom prst="rect">
+            <a:avLst/>
+          </a:prstGeom>
+          <a:noFill/>
+        </p:spPr>
+        <p:txBody>
+          <a:bodyPr wrap="square" anchor="t" lIns="0" rIns="0" tIns="0" bIns="0">
+            <a:spAutoFit/>
+          </a:bodyPr>
+          <a:lstStyle/>
+          <a:p>
+            <a:pPr algn="l"/>
+            <a:r>
+              <a:rPr sz="1200" b="1">
+                <a:solidFill>
+                  <a:srgbClr val="000000"/>
+                </a:solidFill>
+                <a:latin typeface="맑은 고딕"/>
+                <a:ea typeface="맑은 고딕"/>
+                <a:cs typeface="맑은 고딕"/>
+              </a:rPr>
+              <a:t>• ② 서비스 이원화</a:t>
+            </a:r>
+          </a:p>
+        </p:txBody>
+      </p:sp>
+      <p:sp>
+        <p:nvSpPr>
+          <p:cNvPr id="11" name="TextBox 10"/>
+          <p:cNvSpPr txBox="1"/>
+          <p:nvPr/>
+        </p:nvSpPr>
+        <p:spPr>
+          <a:xfrm>
+            <a:off x="622800" y="2692800"/>
+            <a:ext cx="5093999" cy="187200"/>
+          </a:xfrm>
+          <a:prstGeom prst="rect">
+            <a:avLst/>
+          </a:prstGeom>
+          <a:noFill/>
+        </p:spPr>
+        <p:txBody>
+          <a:bodyPr wrap="square" anchor="t" lIns="0" rIns="0" tIns="0" bIns="0">
+            <a:spAutoFit/>
+          </a:bodyPr>
+          <a:lstStyle/>
+          <a:p>
+            <a:pPr algn="l"/>
+            <a:r>
+              <a:rPr sz="1100" b="0">
+                <a:solidFill>
+                  <a:srgbClr val="000000"/>
+                </a:solidFill>
+                <a:latin typeface="맑은 고딕"/>
+                <a:ea typeface="맑은 고딕"/>
+                <a:cs typeface="맑은 고딕"/>
+              </a:rPr>
+              <a:t>- 바로퀵은 소량·즉석식 한정 → 대용량 미충족</a:t>
+            </a:r>
+          </a:p>
+        </p:txBody>
+      </p:sp>
+      <p:sp>
+        <p:nvSpPr>
+          <p:cNvPr id="12" name="TextBox 11"/>
+          <p:cNvSpPr txBox="1"/>
+          <p:nvPr/>
+        </p:nvSpPr>
+        <p:spPr>
+          <a:xfrm>
+            <a:off x="622800" y="2880000"/>
+            <a:ext cx="5093999" cy="187200"/>
+          </a:xfrm>
+          <a:prstGeom prst="rect">
+            <a:avLst/>
+          </a:prstGeom>
+          <a:noFill/>
+        </p:spPr>
+        <p:txBody>
+          <a:bodyPr wrap="square" anchor="t" lIns="0" rIns="0" tIns="0" bIns="0">
+            <a:spAutoFit/>
+          </a:bodyPr>
+          <a:lstStyle/>
+          <a:p>
+            <a:pPr algn="l"/>
+            <a:r>
+              <a:rPr sz="1100" b="0">
+                <a:solidFill>
+                  <a:srgbClr val="000000"/>
+                </a:solidFill>
+                <a:latin typeface="맑은 고딕"/>
+                <a:ea typeface="맑은 고딕"/>
+                <a:cs typeface="맑은 고딕"/>
+              </a:rPr>
+              <a:t>- 1시간 </a:t>
+            </a:r>
+            <a:r>
+              <a:rPr sz="1000" b="0">
+                <a:solidFill>
+                  <a:srgbClr val="000000"/>
+                </a:solidFill>
+                <a:latin typeface="맑은 고딕"/>
+                <a:ea typeface="맑은 고딕"/>
+                <a:cs typeface="맑은 고딕"/>
+              </a:rPr>
+              <a:t>(소량)</a:t>
+            </a:r>
+            <a:r>
+              <a:rPr sz="1100" b="0">
+                <a:solidFill>
+                  <a:srgbClr val="000000"/>
+                </a:solidFill>
+                <a:latin typeface="맑은 고딕"/>
+                <a:ea typeface="맑은 고딕"/>
+                <a:cs typeface="맑은 고딕"/>
+              </a:rPr>
+              <a:t> / 2시간 </a:t>
+            </a:r>
+            <a:r>
+              <a:rPr sz="1000" b="0">
+                <a:solidFill>
+                  <a:srgbClr val="000000"/>
+                </a:solidFill>
+                <a:latin typeface="맑은 고딕"/>
+                <a:ea typeface="맑은 고딕"/>
+                <a:cs typeface="맑은 고딕"/>
+              </a:rPr>
+              <a:t>(대용량)</a:t>
+            </a:r>
+            <a:r>
+              <a:rPr sz="1100" b="0">
+                <a:solidFill>
+                  <a:srgbClr val="000000"/>
+                </a:solidFill>
+                <a:latin typeface="맑은 고딕"/>
+                <a:ea typeface="맑은 고딕"/>
+                <a:cs typeface="맑은 고딕"/>
+              </a:rPr>
+              <a:t> 이원화, 15만 종 구색</a:t>
+            </a:r>
+          </a:p>
+        </p:txBody>
+      </p:sp>
+      <p:sp>
+        <p:nvSpPr>
+          <p:cNvPr id="13" name="TextBox 12"/>
+          <p:cNvSpPr txBox="1"/>
+          <p:nvPr/>
+        </p:nvSpPr>
+        <p:spPr>
+          <a:xfrm>
+            <a:off x="424800" y="3146400"/>
+            <a:ext cx="5292000" cy="180000"/>
+          </a:xfrm>
+          <a:prstGeom prst="rect">
+            <a:avLst/>
+          </a:prstGeom>
+          <a:noFill/>
+        </p:spPr>
+        <p:txBody>
+          <a:bodyPr wrap="square" anchor="t" lIns="0" rIns="0" tIns="0" bIns="0">
+            <a:spAutoFit/>
+          </a:bodyPr>
+          <a:lstStyle/>
+          <a:p>
+            <a:pPr algn="l"/>
+            <a:r>
+              <a:rPr sz="1200" b="1">
+                <a:solidFill>
+                  <a:srgbClr val="000000"/>
+                </a:solidFill>
+                <a:latin typeface="맑은 고딕"/>
+                <a:ea typeface="맑은 고딕"/>
+                <a:cs typeface="맑은 고딕"/>
+              </a:rPr>
+              <a:t>• ③ 이마트 배송 체계</a:t>
+            </a:r>
+          </a:p>
+        </p:txBody>
+      </p:sp>
+      <p:graphicFrame>
+        <p:nvGraphicFramePr>
+          <p:cNvPr id="14" name="Table 13"/>
+          <p:cNvGraphicFramePr>
+            <a:graphicFrameLocks noGrp="1"/>
+          </p:cNvGraphicFramePr>
+          <p:nvPr/>
+        </p:nvGraphicFramePr>
+        <p:xfrm>
+          <a:off x="424800" y="3344400"/>
+          <a:ext cx="5292000" cy="2613600"/>
+        </p:xfrm>
+        <a:graphic>
+          <a:graphicData uri="http://schemas.openxmlformats.org/drawingml/2006/table">
+            <a:tbl>
+              <a:tblPr>
+                <a:tableStyleId>{5C22544A-7EE6-4342-B048-85BDC9FD1C3A}</a:tableStyleId>
+              </a:tblPr>
+              <a:tblGrid>
+                <a:gridCol w="684000"/>
+                <a:gridCol w="1188000"/>
+                <a:gridCol w="1260000"/>
+                <a:gridCol w="540000"/>
+                <a:gridCol w="1620000"/>
+              </a:tblGrid>
+              <a:tr h="435600">
+                <a:tc>
+                  <a:txBody>
+                    <a:bodyPr wrap="square"/>
+                    <a:lstStyle/>
+                    <a:p>
+                      <a:pPr algn="ctr"/>
+                      <a:r>
+                        <a:rPr sz="900" b="1">
+                          <a:solidFill>
+                            <a:srgbClr val="000000"/>
+                          </a:solidFill>
+                          <a:latin typeface="맑은 고딕"/>
+                          <a:ea typeface="맑은 고딕"/>
+                          <a:cs typeface="맑은 고딕"/>
+                        </a:rPr>
+                        <a:t>구분</a:t>
+                      </a:r>
+                    </a:p>
+                  </a:txBody>
+                  <a:tcPr anchor="ctr" marL="36000" marR="36000" marT="0" marB="0">
+                    <a:lnL w="9525" cap="flat">
+                      <a:solidFill>
+                        <a:srgbClr val="BFBFBF"/>
+                      </a:solidFill>
+                    </a:lnL>
+                    <a:lnR w="9525" cap="flat">
+                      <a:solidFill>
+                        <a:srgbClr val="BFBFBF"/>
+                      </a:solidFill>
+                    </a:lnR>
+                    <a:lnT w="9525" cap="flat">
+                      <a:solidFill>
+                        <a:srgbClr val="BFBFBF"/>
+                      </a:solidFill>
+                    </a:lnT>
+                    <a:lnB w="9525" cap="flat">
+                      <a:solidFill>
+                        <a:srgbClr val="BFBFBF"/>
+                      </a:solidFill>
+                    </a:lnB>
+                    <a:solidFill>
+                      <a:srgbClr val="EAEEF6"/>
+                    </a:solidFill>
+                  </a:tcPr>
+                </a:tc>
+                <a:tc>
+                  <a:txBody>
+                    <a:bodyPr wrap="square"/>
+                    <a:lstStyle/>
+                    <a:p>
+                      <a:pPr algn="ctr"/>
+                      <a:r>
+                        <a:rPr sz="900" b="1">
+                          <a:solidFill>
+                            <a:srgbClr val="000000"/>
+                          </a:solidFill>
+                          <a:latin typeface="맑은 고딕"/>
+                          <a:ea typeface="맑은 고딕"/>
+                          <a:cs typeface="맑은 고딕"/>
+                        </a:rPr>
+                        <a:t>서비스</a:t>
+                      </a:r>
+                    </a:p>
+                  </a:txBody>
+                  <a:tcPr anchor="ctr" marL="36000" marR="36000" marT="0" marB="0">
+                    <a:lnL w="9525" cap="flat">
+                      <a:solidFill>
+                        <a:srgbClr val="BFBFBF"/>
+                      </a:solidFill>
+                    </a:lnL>
+                    <a:lnR w="9525" cap="flat">
+                      <a:solidFill>
+                        <a:srgbClr val="BFBFBF"/>
+                      </a:solidFill>
+                    </a:lnR>
+                    <a:lnT w="9525" cap="flat">
+                      <a:solidFill>
+                        <a:srgbClr val="BFBFBF"/>
+                      </a:solidFill>
+                    </a:lnT>
+                    <a:lnB w="9525" cap="flat">
+                      <a:solidFill>
+                        <a:srgbClr val="BFBFBF"/>
+                      </a:solidFill>
+                    </a:lnB>
+                    <a:solidFill>
+                      <a:srgbClr val="EAEEF6"/>
+                    </a:solidFill>
+                  </a:tcPr>
+                </a:tc>
+                <a:tc>
+                  <a:txBody>
+                    <a:bodyPr wrap="square"/>
+                    <a:lstStyle/>
+                    <a:p>
+                      <a:pPr algn="ctr"/>
+                      <a:r>
+                        <a:rPr sz="900" b="1">
+                          <a:solidFill>
+                            <a:srgbClr val="000000"/>
+                          </a:solidFill>
+                          <a:latin typeface="맑은 고딕"/>
+                          <a:ea typeface="맑은 고딕"/>
+                          <a:cs typeface="맑은 고딕"/>
+                        </a:rPr>
+                        <a:t>시간 · 형태</a:t>
+                      </a:r>
+                    </a:p>
+                  </a:txBody>
+                  <a:tcPr anchor="ctr" marL="36000" marR="36000" marT="0" marB="0">
+                    <a:lnL w="9525" cap="flat">
+                      <a:solidFill>
+                        <a:srgbClr val="BFBFBF"/>
+                      </a:solidFill>
+                    </a:lnL>
+                    <a:lnR w="9525" cap="flat">
+                      <a:solidFill>
+                        <a:srgbClr val="BFBFBF"/>
+                      </a:solidFill>
+                    </a:lnR>
+                    <a:lnT w="9525" cap="flat">
+                      <a:solidFill>
+                        <a:srgbClr val="BFBFBF"/>
+                      </a:solidFill>
+                    </a:lnT>
+                    <a:lnB w="9525" cap="flat">
+                      <a:solidFill>
+                        <a:srgbClr val="BFBFBF"/>
+                      </a:solidFill>
+                    </a:lnB>
+                    <a:solidFill>
+                      <a:srgbClr val="EAEEF6"/>
+                    </a:solidFill>
+                  </a:tcPr>
+                </a:tc>
+                <a:tc>
+                  <a:txBody>
+                    <a:bodyPr wrap="square"/>
+                    <a:lstStyle/>
+                    <a:p>
+                      <a:pPr algn="ctr"/>
+                      <a:r>
+                        <a:rPr sz="900" b="1">
+                          <a:solidFill>
+                            <a:srgbClr val="000000"/>
+                          </a:solidFill>
+                          <a:latin typeface="맑은 고딕"/>
+                          <a:ea typeface="맑은 고딕"/>
+                          <a:cs typeface="맑은 고딕"/>
+                        </a:rPr>
+                        <a:t>운송</a:t>
+                      </a:r>
+                    </a:p>
+                  </a:txBody>
+                  <a:tcPr anchor="ctr" marL="36000" marR="36000" marT="0" marB="0">
+                    <a:lnL w="9525" cap="flat">
+                      <a:solidFill>
+                        <a:srgbClr val="BFBFBF"/>
+                      </a:solidFill>
+                    </a:lnL>
+                    <a:lnR w="9525" cap="flat">
+                      <a:solidFill>
+                        <a:srgbClr val="BFBFBF"/>
+                      </a:solidFill>
+                    </a:lnR>
+                    <a:lnT w="9525" cap="flat">
+                      <a:solidFill>
+                        <a:srgbClr val="BFBFBF"/>
+                      </a:solidFill>
+                    </a:lnT>
+                    <a:lnB w="9525" cap="flat">
+                      <a:solidFill>
+                        <a:srgbClr val="BFBFBF"/>
+                      </a:solidFill>
+                    </a:lnB>
+                    <a:solidFill>
+                      <a:srgbClr val="EAEEF6"/>
+                    </a:solidFill>
+                  </a:tcPr>
+                </a:tc>
+                <a:tc>
+                  <a:txBody>
+                    <a:bodyPr wrap="square"/>
+                    <a:lstStyle/>
+                    <a:p>
+                      <a:pPr algn="ctr"/>
+                      <a:r>
+                        <a:rPr sz="900" b="1">
+                          <a:solidFill>
+                            <a:srgbClr val="000000"/>
+                          </a:solidFill>
+                          <a:latin typeface="맑은 고딕"/>
+                          <a:ea typeface="맑은 고딕"/>
+                          <a:cs typeface="맑은 고딕"/>
+                        </a:rPr>
+                        <a:t>취급</a:t>
+                      </a:r>
+                    </a:p>
+                  </a:txBody>
+                  <a:tcPr anchor="ctr" marL="36000" marR="36000" marT="0" marB="0">
+                    <a:lnL w="9525" cap="flat">
+                      <a:solidFill>
+                        <a:srgbClr val="BFBFBF"/>
+                      </a:solidFill>
+                    </a:lnL>
+                    <a:lnR w="9525" cap="flat">
+                      <a:solidFill>
+                        <a:srgbClr val="BFBFBF"/>
+                      </a:solidFill>
+                    </a:lnR>
+                    <a:lnT w="9525" cap="flat">
+                      <a:solidFill>
+                        <a:srgbClr val="BFBFBF"/>
+                      </a:solidFill>
+                    </a:lnT>
+                    <a:lnB w="9525" cap="flat">
+                      <a:solidFill>
+                        <a:srgbClr val="BFBFBF"/>
+                      </a:solidFill>
+                    </a:lnB>
+                    <a:solidFill>
+                      <a:srgbClr val="EAEEF6"/>
+                    </a:solidFill>
+                  </a:tcPr>
+                </a:tc>
+              </a:tr>
+              <a:tr h="435600">
+                <a:tc rowSpan="3">
+                  <a:txBody>
+                    <a:bodyPr wrap="square"/>
+                    <a:lstStyle/>
+                    <a:p>
+                      <a:pPr algn="ctr"/>
+                      <a:r>
+                        <a:rPr sz="900" b="1">
+                          <a:solidFill>
+                            <a:srgbClr val="000000"/>
+                          </a:solidFill>
+                          <a:latin typeface="맑은 고딕"/>
+                          <a:ea typeface="맑은 고딕"/>
+                          <a:cs typeface="맑은 고딕"/>
+                        </a:rPr>
+                        <a:t>예약배송</a:t>
+                      </a:r>
+                    </a:p>
+                  </a:txBody>
+                  <a:tcPr anchor="ctr" marL="36000" marR="36000" marT="0" marB="0">
+                    <a:lnL w="9525" cap="flat">
+                      <a:solidFill>
+                        <a:srgbClr val="BFBFBF"/>
+                      </a:solidFill>
+                    </a:lnL>
+                    <a:lnR w="9525" cap="flat">
+                      <a:solidFill>
+                        <a:srgbClr val="BFBFBF"/>
+                      </a:solidFill>
+                    </a:lnR>
+                    <a:lnT w="9525" cap="flat">
+                      <a:solidFill>
+                        <a:srgbClr val="BFBFBF"/>
+                      </a:solidFill>
+                    </a:lnT>
+                    <a:lnB w="9525" cap="flat">
+                      <a:solidFill>
+                        <a:srgbClr val="BFBFBF"/>
+                      </a:solidFill>
+                    </a:lnB>
+                    <a:solidFill>
+                      <a:srgbClr val="FFFFFF"/>
+                    </a:solidFill>
+                  </a:tcPr>
+                </a:tc>
+                <a:tc>
+                  <a:txBody>
+                    <a:bodyPr wrap="square"/>
+                    <a:lstStyle/>
+                    <a:p>
+                      <a:pPr algn="ctr"/>
+                      <a:r>
+                        <a:rPr sz="900" b="0">
+                          <a:solidFill>
+                            <a:srgbClr val="000000"/>
+                          </a:solidFill>
+                          <a:latin typeface="맑은 고딕"/>
+                          <a:ea typeface="맑은 고딕"/>
+                          <a:cs typeface="맑은 고딕"/>
+                        </a:rPr>
+                        <a:t>주간배송</a:t>
+                      </a:r>
+                    </a:p>
+                  </a:txBody>
+                  <a:tcPr anchor="ctr" marL="36000" marR="36000" marT="0" marB="0">
+                    <a:lnL w="9525" cap="flat">
+                      <a:solidFill>
+                        <a:srgbClr val="BFBFBF"/>
+                      </a:solidFill>
+                    </a:lnL>
+                    <a:lnR w="9525" cap="flat">
+                      <a:solidFill>
+                        <a:srgbClr val="BFBFBF"/>
+                      </a:solidFill>
+                    </a:lnR>
+                    <a:lnT w="9525" cap="flat">
+                      <a:solidFill>
+                        <a:srgbClr val="BFBFBF"/>
+                      </a:solidFill>
+                    </a:lnT>
+                    <a:lnB w="9525" cap="flat">
+                      <a:solidFill>
+                        <a:srgbClr val="BFBFBF"/>
+                      </a:solidFill>
+                    </a:lnB>
+                    <a:solidFill>
+                      <a:srgbClr val="FFFFFF"/>
+                    </a:solidFill>
+                  </a:tcPr>
+                </a:tc>
+                <a:tc>
+                  <a:txBody>
+                    <a:bodyPr wrap="square"/>
+                    <a:lstStyle/>
+                    <a:p>
+                      <a:pPr algn="ctr"/>
+                      <a:r>
+                        <a:rPr sz="900" b="0">
+                          <a:solidFill>
+                            <a:srgbClr val="000000"/>
+                          </a:solidFill>
+                          <a:latin typeface="맑은 고딕"/>
+                          <a:ea typeface="맑은 고딕"/>
+                          <a:cs typeface="맑은 고딕"/>
+                        </a:rPr>
+                        <a:t>구간당 4~5H</a:t>
+                      </a:r>
+                    </a:p>
+                  </a:txBody>
+                  <a:tcPr anchor="ctr" marL="36000" marR="36000" marT="0" marB="0">
+                    <a:lnL w="9525" cap="flat">
+                      <a:solidFill>
+                        <a:srgbClr val="BFBFBF"/>
+                      </a:solidFill>
+                    </a:lnL>
+                    <a:lnR w="9525" cap="flat">
+                      <a:solidFill>
+                        <a:srgbClr val="BFBFBF"/>
+                      </a:solidFill>
+                    </a:lnR>
+                    <a:lnT w="9525" cap="flat">
+                      <a:solidFill>
+                        <a:srgbClr val="BFBFBF"/>
+                      </a:solidFill>
+                    </a:lnT>
+                    <a:lnB w="9525" cap="flat">
+                      <a:solidFill>
+                        <a:srgbClr val="BFBFBF"/>
+                      </a:solidFill>
+                    </a:lnB>
+                    <a:solidFill>
+                      <a:srgbClr val="FFFFFF"/>
+                    </a:solidFill>
+                  </a:tcPr>
+                </a:tc>
+                <a:tc>
+                  <a:txBody>
+                    <a:bodyPr wrap="square"/>
+                    <a:lstStyle/>
+                    <a:p>
+                      <a:pPr algn="ctr"/>
+                      <a:r>
+                        <a:rPr sz="900" b="0">
+                          <a:solidFill>
+                            <a:srgbClr val="000000"/>
+                          </a:solidFill>
+                          <a:latin typeface="맑은 고딕"/>
+                          <a:ea typeface="맑은 고딕"/>
+                          <a:cs typeface="맑은 고딕"/>
+                        </a:rPr>
+                        <a:t>사륜차</a:t>
+                      </a:r>
+                    </a:p>
+                  </a:txBody>
+                  <a:tcPr anchor="ctr" marL="36000" marR="36000" marT="0" marB="0">
+                    <a:lnL w="9525" cap="flat">
+                      <a:solidFill>
+                        <a:srgbClr val="BFBFBF"/>
+                      </a:solidFill>
+                    </a:lnL>
+                    <a:lnR w="9525" cap="flat">
+                      <a:solidFill>
+                        <a:srgbClr val="BFBFBF"/>
+                      </a:solidFill>
+                    </a:lnR>
+                    <a:lnT w="9525" cap="flat">
+                      <a:solidFill>
+                        <a:srgbClr val="BFBFBF"/>
+                      </a:solidFill>
+                    </a:lnT>
+                    <a:lnB w="9525" cap="flat">
+                      <a:solidFill>
+                        <a:srgbClr val="BFBFBF"/>
+                      </a:solidFill>
+                    </a:lnB>
+                    <a:solidFill>
+                      <a:srgbClr val="FFFFFF"/>
+                    </a:solidFill>
+                  </a:tcPr>
+                </a:tc>
+                <a:tc>
+                  <a:txBody>
+                    <a:bodyPr wrap="square"/>
+                    <a:lstStyle/>
+                    <a:p>
+                      <a:pPr algn="ctr"/>
+                      <a:r>
+                        <a:rPr sz="900" b="0">
+                          <a:solidFill>
+                            <a:srgbClr val="000000"/>
+                          </a:solidFill>
+                          <a:latin typeface="맑은 고딕"/>
+                          <a:ea typeface="맑은 고딕"/>
+                          <a:cs typeface="맑은 고딕"/>
+                        </a:rPr>
+                        <a:t>점포 상품</a:t>
+                      </a:r>
+                    </a:p>
+                  </a:txBody>
+                  <a:tcPr anchor="ctr" marL="36000" marR="36000" marT="0" marB="0">
+                    <a:lnL w="9525" cap="flat">
+                      <a:solidFill>
+                        <a:srgbClr val="BFBFBF"/>
+                      </a:solidFill>
+                    </a:lnL>
+                    <a:lnR w="9525" cap="flat">
+                      <a:solidFill>
+                        <a:srgbClr val="BFBFBF"/>
+                      </a:solidFill>
+                    </a:lnR>
+                    <a:lnT w="9525" cap="flat">
+                      <a:solidFill>
+                        <a:srgbClr val="BFBFBF"/>
+                      </a:solidFill>
+                    </a:lnT>
+                    <a:lnB w="9525" cap="flat">
+                      <a:solidFill>
+                        <a:srgbClr val="BFBFBF"/>
+                      </a:solidFill>
+                    </a:lnB>
+                    <a:solidFill>
+                      <a:srgbClr val="FFFFFF"/>
+                    </a:solidFill>
+                  </a:tcPr>
+                </a:tc>
+              </a:tr>
+              <a:tr h="435600">
+                <a:tc vMerge="1">
+                  <a:txBody>
+                    <a:bodyPr wrap="square"/>
+                    <a:lstStyle/>
+                    <a:p/>
+                  </a:txBody>
+                  <a:tcPr anchor="ctr" marL="36000" marR="36000" marT="0" marB="0">
+                    <a:lnL w="9525" cap="flat">
+                      <a:solidFill>
+                        <a:srgbClr val="BFBFBF"/>
+                      </a:solidFill>
+                    </a:lnL>
+                    <a:lnR w="9525" cap="flat">
+                      <a:solidFill>
+                        <a:srgbClr val="BFBFBF"/>
+                      </a:solidFill>
+                    </a:lnR>
+                    <a:lnT w="9525" cap="flat">
+                      <a:solidFill>
+                        <a:srgbClr val="BFBFBF"/>
+                      </a:solidFill>
+                    </a:lnT>
+                    <a:lnB w="9525" cap="flat">
+                      <a:solidFill>
+                        <a:srgbClr val="BFBFBF"/>
+                      </a:solidFill>
+                    </a:lnB>
+                    <a:solidFill>
+                      <a:srgbClr val="FFFFFF"/>
+                    </a:solidFill>
+                  </a:tcPr>
+                </a:tc>
+                <a:tc>
+                  <a:txBody>
+                    <a:bodyPr wrap="square"/>
+                    <a:lstStyle/>
+                    <a:p>
+                      <a:pPr algn="ctr"/>
+                      <a:r>
+                        <a:rPr sz="900" b="0">
+                          <a:solidFill>
+                            <a:srgbClr val="000000"/>
+                          </a:solidFill>
+                          <a:latin typeface="맑은 고딕"/>
+                          <a:ea typeface="맑은 고딕"/>
+                          <a:cs typeface="맑은 고딕"/>
+                        </a:rPr>
+                        <a:t>새벽배송</a:t>
+                      </a:r>
+                    </a:p>
+                  </a:txBody>
+                  <a:tcPr anchor="ctr" marL="36000" marR="36000" marT="0" marB="0">
+                    <a:lnL w="9525" cap="flat">
+                      <a:solidFill>
+                        <a:srgbClr val="BFBFBF"/>
+                      </a:solidFill>
+                    </a:lnL>
+                    <a:lnR w="9525" cap="flat">
+                      <a:solidFill>
+                        <a:srgbClr val="BFBFBF"/>
+                      </a:solidFill>
+                    </a:lnR>
+                    <a:lnT w="9525" cap="flat">
+                      <a:solidFill>
+                        <a:srgbClr val="BFBFBF"/>
+                      </a:solidFill>
+                    </a:lnT>
+                    <a:lnB w="9525" cap="flat">
+                      <a:solidFill>
+                        <a:srgbClr val="BFBFBF"/>
+                      </a:solidFill>
+                    </a:lnB>
+                    <a:solidFill>
+                      <a:srgbClr val="FFFFFF"/>
+                    </a:solidFill>
+                  </a:tcPr>
+                </a:tc>
+                <a:tc>
+                  <a:txBody>
+                    <a:bodyPr wrap="square"/>
+                    <a:lstStyle/>
+                    <a:p>
+                      <a:pPr algn="ctr"/>
+                      <a:r>
+                        <a:rPr sz="900" b="0">
+                          <a:solidFill>
+                            <a:srgbClr val="000000"/>
+                          </a:solidFill>
+                          <a:latin typeface="맑은 고딕"/>
+                          <a:ea typeface="맑은 고딕"/>
+                          <a:cs typeface="맑은 고딕"/>
+                        </a:rPr>
+                        <a:t>새벽 </a:t>
+                      </a:r>
+                      <a:r>
+                        <a:rPr sz="800" b="0">
+                          <a:solidFill>
+                            <a:srgbClr val="000000"/>
+                          </a:solidFill>
+                          <a:latin typeface="맑은 고딕"/>
+                          <a:ea typeface="맑은 고딕"/>
+                          <a:cs typeface="맑은 고딕"/>
+                        </a:rPr>
+                        <a:t>(PP센터 불가)</a:t>
+                      </a:r>
+                    </a:p>
+                  </a:txBody>
+                  <a:tcPr anchor="ctr" marL="36000" marR="36000" marT="0" marB="0">
+                    <a:lnL w="9525" cap="flat">
+                      <a:solidFill>
+                        <a:srgbClr val="BFBFBF"/>
+                      </a:solidFill>
+                    </a:lnL>
+                    <a:lnR w="9525" cap="flat">
+                      <a:solidFill>
+                        <a:srgbClr val="BFBFBF"/>
+                      </a:solidFill>
+                    </a:lnR>
+                    <a:lnT w="9525" cap="flat">
+                      <a:solidFill>
+                        <a:srgbClr val="BFBFBF"/>
+                      </a:solidFill>
+                    </a:lnT>
+                    <a:lnB w="9525" cap="flat">
+                      <a:solidFill>
+                        <a:srgbClr val="BFBFBF"/>
+                      </a:solidFill>
+                    </a:lnB>
+                    <a:solidFill>
+                      <a:srgbClr val="FFFFFF"/>
+                    </a:solidFill>
+                  </a:tcPr>
+                </a:tc>
+                <a:tc>
+                  <a:txBody>
+                    <a:bodyPr wrap="square"/>
+                    <a:lstStyle/>
+                    <a:p>
+                      <a:pPr algn="ctr"/>
+                      <a:r>
+                        <a:rPr sz="900" b="0">
+                          <a:solidFill>
+                            <a:srgbClr val="000000"/>
+                          </a:solidFill>
+                          <a:latin typeface="맑은 고딕"/>
+                          <a:ea typeface="맑은 고딕"/>
+                          <a:cs typeface="맑은 고딕"/>
+                        </a:rPr>
+                        <a:t>사륜차</a:t>
+                      </a:r>
+                    </a:p>
+                  </a:txBody>
+                  <a:tcPr anchor="ctr" marL="36000" marR="36000" marT="0" marB="0">
+                    <a:lnL w="9525" cap="flat">
+                      <a:solidFill>
+                        <a:srgbClr val="BFBFBF"/>
+                      </a:solidFill>
+                    </a:lnL>
+                    <a:lnR w="9525" cap="flat">
+                      <a:solidFill>
+                        <a:srgbClr val="BFBFBF"/>
+                      </a:solidFill>
+                    </a:lnR>
+                    <a:lnT w="9525" cap="flat">
+                      <a:solidFill>
+                        <a:srgbClr val="BFBFBF"/>
+                      </a:solidFill>
+                    </a:lnT>
+                    <a:lnB w="9525" cap="flat">
+                      <a:solidFill>
+                        <a:srgbClr val="BFBFBF"/>
+                      </a:solidFill>
+                    </a:lnB>
+                    <a:solidFill>
+                      <a:srgbClr val="FFFFFF"/>
+                    </a:solidFill>
+                  </a:tcPr>
+                </a:tc>
+                <a:tc>
+                  <a:txBody>
+                    <a:bodyPr wrap="square"/>
+                    <a:lstStyle/>
+                    <a:p>
+                      <a:pPr algn="ctr"/>
+                      <a:r>
+                        <a:rPr sz="900" b="0">
+                          <a:solidFill>
+                            <a:srgbClr val="000000"/>
+                          </a:solidFill>
+                          <a:latin typeface="맑은 고딕"/>
+                          <a:ea typeface="맑은 고딕"/>
+                          <a:cs typeface="맑은 고딕"/>
+                        </a:rPr>
+                        <a:t>네오 상품</a:t>
+                      </a:r>
+                    </a:p>
+                  </a:txBody>
+                  <a:tcPr anchor="ctr" marL="36000" marR="36000" marT="0" marB="0">
+                    <a:lnL w="9525" cap="flat">
+                      <a:solidFill>
+                        <a:srgbClr val="BFBFBF"/>
+                      </a:solidFill>
+                    </a:lnL>
+                    <a:lnR w="9525" cap="flat">
+                      <a:solidFill>
+                        <a:srgbClr val="BFBFBF"/>
+                      </a:solidFill>
+                    </a:lnR>
+                    <a:lnT w="9525" cap="flat">
+                      <a:solidFill>
+                        <a:srgbClr val="BFBFBF"/>
+                      </a:solidFill>
+                    </a:lnT>
+                    <a:lnB w="9525" cap="flat">
+                      <a:solidFill>
+                        <a:srgbClr val="BFBFBF"/>
+                      </a:solidFill>
+                    </a:lnB>
+                    <a:solidFill>
+                      <a:srgbClr val="FFFFFF"/>
+                    </a:solidFill>
+                  </a:tcPr>
+                </a:tc>
+              </a:tr>
+              <a:tr h="435600">
+                <a:tc vMerge="1">
+                  <a:txBody>
+                    <a:bodyPr wrap="square"/>
+                    <a:lstStyle/>
+                    <a:p/>
+                  </a:txBody>
+                  <a:tcPr anchor="ctr" marL="36000" marR="36000" marT="0" marB="0">
+                    <a:lnL w="9525" cap="flat">
+                      <a:solidFill>
+                        <a:srgbClr val="BFBFBF"/>
+                      </a:solidFill>
+                    </a:lnL>
+                    <a:lnR w="9525" cap="flat">
+                      <a:solidFill>
+                        <a:srgbClr val="BFBFBF"/>
+                      </a:solidFill>
+                    </a:lnR>
+                    <a:lnT w="9525" cap="flat">
+                      <a:solidFill>
+                        <a:srgbClr val="BFBFBF"/>
+                      </a:solidFill>
+                    </a:lnT>
+                    <a:lnB w="9525" cap="flat">
+                      <a:solidFill>
+                        <a:srgbClr val="BFBFBF"/>
+                      </a:solidFill>
+                    </a:lnB>
+                    <a:solidFill>
+                      <a:srgbClr val="FFFFFF"/>
+                    </a:solidFill>
+                  </a:tcPr>
+                </a:tc>
+                <a:tc>
+                  <a:txBody>
+                    <a:bodyPr wrap="square"/>
+                    <a:lstStyle/>
+                    <a:p>
+                      <a:pPr algn="ctr"/>
+                      <a:r>
+                        <a:rPr sz="900" b="0">
+                          <a:solidFill>
+                            <a:srgbClr val="000000"/>
+                          </a:solidFill>
+                          <a:latin typeface="맑은 고딕"/>
+                          <a:ea typeface="맑은 고딕"/>
+                          <a:cs typeface="맑은 고딕"/>
+                        </a:rPr>
+                        <a:t>트레이더스배송</a:t>
+                      </a:r>
+                    </a:p>
+                  </a:txBody>
+                  <a:tcPr anchor="ctr" marL="36000" marR="36000" marT="0" marB="0">
+                    <a:lnL w="9525" cap="flat">
+                      <a:solidFill>
+                        <a:srgbClr val="BFBFBF"/>
+                      </a:solidFill>
+                    </a:lnL>
+                    <a:lnR w="9525" cap="flat">
+                      <a:solidFill>
+                        <a:srgbClr val="BFBFBF"/>
+                      </a:solidFill>
+                    </a:lnR>
+                    <a:lnT w="9525" cap="flat">
+                      <a:solidFill>
+                        <a:srgbClr val="BFBFBF"/>
+                      </a:solidFill>
+                    </a:lnT>
+                    <a:lnB w="9525" cap="flat">
+                      <a:solidFill>
+                        <a:srgbClr val="BFBFBF"/>
+                      </a:solidFill>
+                    </a:lnB>
+                    <a:solidFill>
+                      <a:srgbClr val="FFFFFF"/>
+                    </a:solidFill>
+                  </a:tcPr>
+                </a:tc>
+                <a:tc>
+                  <a:txBody>
+                    <a:bodyPr wrap="square"/>
+                    <a:lstStyle/>
+                    <a:p>
+                      <a:pPr algn="ctr"/>
+                      <a:r>
+                        <a:rPr sz="900" b="0">
+                          <a:solidFill>
+                            <a:srgbClr val="000000"/>
+                          </a:solidFill>
+                          <a:latin typeface="맑은 고딕"/>
+                          <a:ea typeface="맑은 고딕"/>
+                          <a:cs typeface="맑은 고딕"/>
+                        </a:rPr>
+                        <a:t>예약</a:t>
+                      </a:r>
+                    </a:p>
+                  </a:txBody>
+                  <a:tcPr anchor="ctr" marL="36000" marR="36000" marT="0" marB="0">
+                    <a:lnL w="9525" cap="flat">
+                      <a:solidFill>
+                        <a:srgbClr val="BFBFBF"/>
+                      </a:solidFill>
+                    </a:lnL>
+                    <a:lnR w="9525" cap="flat">
+                      <a:solidFill>
+                        <a:srgbClr val="BFBFBF"/>
+                      </a:solidFill>
+                    </a:lnR>
+                    <a:lnT w="9525" cap="flat">
+                      <a:solidFill>
+                        <a:srgbClr val="BFBFBF"/>
+                      </a:solidFill>
+                    </a:lnT>
+                    <a:lnB w="9525" cap="flat">
+                      <a:solidFill>
+                        <a:srgbClr val="BFBFBF"/>
+                      </a:solidFill>
+                    </a:lnB>
+                    <a:solidFill>
+                      <a:srgbClr val="FFFFFF"/>
+                    </a:solidFill>
+                  </a:tcPr>
+                </a:tc>
+                <a:tc>
+                  <a:txBody>
+                    <a:bodyPr wrap="square"/>
+                    <a:lstStyle/>
+                    <a:p>
+                      <a:pPr algn="ctr"/>
+                      <a:r>
+                        <a:rPr sz="900" b="0">
+                          <a:solidFill>
+                            <a:srgbClr val="000000"/>
+                          </a:solidFill>
+                          <a:latin typeface="맑은 고딕"/>
+                          <a:ea typeface="맑은 고딕"/>
+                          <a:cs typeface="맑은 고딕"/>
+                        </a:rPr>
+                        <a:t>사륜차</a:t>
+                      </a:r>
+                    </a:p>
+                  </a:txBody>
+                  <a:tcPr anchor="ctr" marL="36000" marR="36000" marT="0" marB="0">
+                    <a:lnL w="9525" cap="flat">
+                      <a:solidFill>
+                        <a:srgbClr val="BFBFBF"/>
+                      </a:solidFill>
+                    </a:lnL>
+                    <a:lnR w="9525" cap="flat">
+                      <a:solidFill>
+                        <a:srgbClr val="BFBFBF"/>
+                      </a:solidFill>
+                    </a:lnR>
+                    <a:lnT w="9525" cap="flat">
+                      <a:solidFill>
+                        <a:srgbClr val="BFBFBF"/>
+                      </a:solidFill>
+                    </a:lnT>
+                    <a:lnB w="9525" cap="flat">
+                      <a:solidFill>
+                        <a:srgbClr val="BFBFBF"/>
+                      </a:solidFill>
+                    </a:lnB>
+                    <a:solidFill>
+                      <a:srgbClr val="FFFFFF"/>
+                    </a:solidFill>
+                  </a:tcPr>
+                </a:tc>
+                <a:tc>
+                  <a:txBody>
+                    <a:bodyPr wrap="square"/>
+                    <a:lstStyle/>
+                    <a:p>
+                      <a:pPr algn="ctr"/>
+                      <a:r>
+                        <a:rPr sz="900" b="0">
+                          <a:solidFill>
+                            <a:srgbClr val="000000"/>
+                          </a:solidFill>
+                          <a:latin typeface="맑은 고딕"/>
+                          <a:ea typeface="맑은 고딕"/>
+                          <a:cs typeface="맑은 고딕"/>
+                        </a:rPr>
+                        <a:t>트레이더스</a:t>
+                      </a:r>
+                    </a:p>
+                  </a:txBody>
+                  <a:tcPr anchor="ctr" marL="36000" marR="36000" marT="0" marB="0">
+                    <a:lnL w="9525" cap="flat">
+                      <a:solidFill>
+                        <a:srgbClr val="BFBFBF"/>
+                      </a:solidFill>
+                    </a:lnL>
+                    <a:lnR w="9525" cap="flat">
+                      <a:solidFill>
+                        <a:srgbClr val="BFBFBF"/>
+                      </a:solidFill>
+                    </a:lnR>
+                    <a:lnT w="9525" cap="flat">
+                      <a:solidFill>
+                        <a:srgbClr val="BFBFBF"/>
+                      </a:solidFill>
+                    </a:lnT>
+                    <a:lnB w="9525" cap="flat">
+                      <a:solidFill>
+                        <a:srgbClr val="BFBFBF"/>
+                      </a:solidFill>
+                    </a:lnB>
+                    <a:solidFill>
+                      <a:srgbClr val="FFFFFF"/>
+                    </a:solidFill>
+                  </a:tcPr>
+                </a:tc>
+              </a:tr>
+              <a:tr h="435600">
+                <a:tc rowSpan="2">
+                  <a:txBody>
+                    <a:bodyPr wrap="square"/>
+                    <a:lstStyle/>
+                    <a:p>
+                      <a:pPr algn="ctr"/>
+                      <a:r>
+                        <a:rPr sz="900" b="1">
+                          <a:solidFill>
+                            <a:srgbClr val="000000"/>
+                          </a:solidFill>
+                          <a:latin typeface="맑은 고딕"/>
+                          <a:ea typeface="맑은 고딕"/>
+                          <a:cs typeface="맑은 고딕"/>
+                        </a:rPr>
+                        <a:t>퀵커머스</a:t>
+                      </a:r>
+                    </a:p>
+                  </a:txBody>
+                  <a:tcPr anchor="ctr" marL="36000" marR="36000" marT="0" marB="0">
+                    <a:lnL w="9525" cap="flat">
+                      <a:solidFill>
+                        <a:srgbClr val="BFBFBF"/>
+                      </a:solidFill>
+                    </a:lnL>
+                    <a:lnR w="9525" cap="flat">
+                      <a:solidFill>
+                        <a:srgbClr val="BFBFBF"/>
+                      </a:solidFill>
+                    </a:lnR>
+                    <a:lnT w="9525" cap="flat">
+                      <a:solidFill>
+                        <a:srgbClr val="BFBFBF"/>
+                      </a:solidFill>
+                    </a:lnT>
+                    <a:lnB w="9525" cap="flat">
+                      <a:solidFill>
+                        <a:srgbClr val="BFBFBF"/>
+                      </a:solidFill>
+                    </a:lnB>
+                    <a:solidFill>
+                      <a:srgbClr val="FFFFFF"/>
+                    </a:solidFill>
+                  </a:tcPr>
+                </a:tc>
+                <a:tc>
+                  <a:txBody>
+                    <a:bodyPr wrap="square"/>
+                    <a:lstStyle/>
+                    <a:p>
+                      <a:pPr algn="ctr"/>
+                      <a:r>
+                        <a:rPr sz="900" b="0">
+                          <a:solidFill>
+                            <a:srgbClr val="000000"/>
+                          </a:solidFill>
+                          <a:latin typeface="맑은 고딕"/>
+                          <a:ea typeface="맑은 고딕"/>
+                          <a:cs typeface="맑은 고딕"/>
+                        </a:rPr>
+                        <a:t>바로퀵</a:t>
+                      </a:r>
+                    </a:p>
+                  </a:txBody>
+                  <a:tcPr anchor="ctr" marL="36000" marR="36000" marT="0" marB="0">
+                    <a:lnL w="9525" cap="flat">
+                      <a:solidFill>
+                        <a:srgbClr val="BFBFBF"/>
+                      </a:solidFill>
+                    </a:lnL>
+                    <a:lnR w="9525" cap="flat">
+                      <a:solidFill>
+                        <a:srgbClr val="BFBFBF"/>
+                      </a:solidFill>
+                    </a:lnR>
+                    <a:lnT w="9525" cap="flat">
+                      <a:solidFill>
+                        <a:srgbClr val="BFBFBF"/>
+                      </a:solidFill>
+                    </a:lnT>
+                    <a:lnB w="9525" cap="flat">
+                      <a:solidFill>
+                        <a:srgbClr val="BFBFBF"/>
+                      </a:solidFill>
+                    </a:lnB>
+                    <a:solidFill>
+                      <a:srgbClr val="FFFFFF"/>
+                    </a:solidFill>
+                  </a:tcPr>
+                </a:tc>
+                <a:tc>
+                  <a:txBody>
+                    <a:bodyPr wrap="square"/>
+                    <a:lstStyle/>
+                    <a:p>
+                      <a:pPr algn="ctr"/>
+                      <a:r>
+                        <a:rPr sz="900" b="0">
+                          <a:solidFill>
+                            <a:srgbClr val="000000"/>
+                          </a:solidFill>
+                          <a:latin typeface="맑은 고딕"/>
+                          <a:ea typeface="맑은 고딕"/>
+                          <a:cs typeface="맑은 고딕"/>
+                        </a:rPr>
+                        <a:t>1H </a:t>
+                      </a:r>
+                      <a:r>
+                        <a:rPr sz="800" b="0">
+                          <a:solidFill>
+                            <a:srgbClr val="000000"/>
+                          </a:solidFill>
+                          <a:latin typeface="맑은 고딕"/>
+                          <a:ea typeface="맑은 고딕"/>
+                          <a:cs typeface="맑은 고딕"/>
+                        </a:rPr>
+                        <a:t>(반경 3km)</a:t>
+                      </a:r>
+                    </a:p>
+                  </a:txBody>
+                  <a:tcPr anchor="ctr" marL="36000" marR="36000" marT="0" marB="0">
+                    <a:lnL w="9525" cap="flat">
+                      <a:solidFill>
+                        <a:srgbClr val="BFBFBF"/>
+                      </a:solidFill>
+                    </a:lnL>
+                    <a:lnR w="9525" cap="flat">
+                      <a:solidFill>
+                        <a:srgbClr val="BFBFBF"/>
+                      </a:solidFill>
+                    </a:lnR>
+                    <a:lnT w="9525" cap="flat">
+                      <a:solidFill>
+                        <a:srgbClr val="BFBFBF"/>
+                      </a:solidFill>
+                    </a:lnT>
+                    <a:lnB w="9525" cap="flat">
+                      <a:solidFill>
+                        <a:srgbClr val="BFBFBF"/>
+                      </a:solidFill>
+                    </a:lnB>
+                    <a:solidFill>
+                      <a:srgbClr val="FFFFFF"/>
+                    </a:solidFill>
+                  </a:tcPr>
+                </a:tc>
+                <a:tc>
+                  <a:txBody>
+                    <a:bodyPr wrap="square"/>
+                    <a:lstStyle/>
+                    <a:p>
+                      <a:pPr algn="ctr"/>
+                      <a:r>
+                        <a:rPr sz="900" b="0">
+                          <a:solidFill>
+                            <a:srgbClr val="000000"/>
+                          </a:solidFill>
+                          <a:latin typeface="맑은 고딕"/>
+                          <a:ea typeface="맑은 고딕"/>
+                          <a:cs typeface="맑은 고딕"/>
+                        </a:rPr>
+                        <a:t>이륜차</a:t>
+                      </a:r>
+                    </a:p>
+                  </a:txBody>
+                  <a:tcPr anchor="ctr" marL="36000" marR="36000" marT="0" marB="0">
+                    <a:lnL w="9525" cap="flat">
+                      <a:solidFill>
+                        <a:srgbClr val="BFBFBF"/>
+                      </a:solidFill>
+                    </a:lnL>
+                    <a:lnR w="9525" cap="flat">
+                      <a:solidFill>
+                        <a:srgbClr val="BFBFBF"/>
+                      </a:solidFill>
+                    </a:lnR>
+                    <a:lnT w="9525" cap="flat">
+                      <a:solidFill>
+                        <a:srgbClr val="BFBFBF"/>
+                      </a:solidFill>
+                    </a:lnT>
+                    <a:lnB w="9525" cap="flat">
+                      <a:solidFill>
+                        <a:srgbClr val="BFBFBF"/>
+                      </a:solidFill>
+                    </a:lnB>
+                    <a:solidFill>
+                      <a:srgbClr val="FFFFFF"/>
+                    </a:solidFill>
+                  </a:tcPr>
+                </a:tc>
+                <a:tc>
+                  <a:txBody>
+                    <a:bodyPr wrap="square"/>
+                    <a:lstStyle/>
+                    <a:p>
+                      <a:pPr algn="ctr"/>
+                      <a:r>
+                        <a:rPr sz="900" b="0">
+                          <a:solidFill>
+                            <a:srgbClr val="000000"/>
+                          </a:solidFill>
+                          <a:latin typeface="맑은 고딕"/>
+                          <a:ea typeface="맑은 고딕"/>
+                          <a:cs typeface="맑은 고딕"/>
+                        </a:rPr>
+                        <a:t>약 1만 종</a:t>
+                      </a:r>
+                    </a:p>
+                  </a:txBody>
+                  <a:tcPr anchor="ctr" marL="36000" marR="36000" marT="0" marB="0">
+                    <a:lnL w="9525" cap="flat">
+                      <a:solidFill>
+                        <a:srgbClr val="BFBFBF"/>
+                      </a:solidFill>
+                    </a:lnL>
+                    <a:lnR w="9525" cap="flat">
+                      <a:solidFill>
+                        <a:srgbClr val="BFBFBF"/>
+                      </a:solidFill>
+                    </a:lnR>
+                    <a:lnT w="9525" cap="flat">
+                      <a:solidFill>
+                        <a:srgbClr val="BFBFBF"/>
+                      </a:solidFill>
+                    </a:lnT>
+                    <a:lnB w="9525" cap="flat">
+                      <a:solidFill>
+                        <a:srgbClr val="BFBFBF"/>
+                      </a:solidFill>
+                    </a:lnB>
+                    <a:solidFill>
+                      <a:srgbClr val="FFFFFF"/>
+                    </a:solidFill>
+                  </a:tcPr>
+                </a:tc>
+              </a:tr>
+              <a:tr h="435600">
+                <a:tc vMerge="1">
+                  <a:txBody>
+                    <a:bodyPr wrap="square"/>
+                    <a:lstStyle/>
+                    <a:p/>
+                  </a:txBody>
+                  <a:tcPr anchor="ctr" marL="36000" marR="36000" marT="0" marB="0">
+                    <a:lnL w="9525" cap="flat">
+                      <a:solidFill>
+                        <a:srgbClr val="BFBFBF"/>
+                      </a:solidFill>
+                    </a:lnL>
+                    <a:lnR w="9525" cap="flat">
+                      <a:solidFill>
+                        <a:srgbClr val="BFBFBF"/>
+                      </a:solidFill>
+                    </a:lnR>
+                    <a:lnT w="9525" cap="flat">
+                      <a:solidFill>
+                        <a:srgbClr val="BFBFBF"/>
+                      </a:solidFill>
+                    </a:lnT>
+                    <a:lnB w="9525" cap="flat">
+                      <a:solidFill>
+                        <a:srgbClr val="BFBFBF"/>
+                      </a:solidFill>
+                    </a:lnB>
+                    <a:solidFill>
+                      <a:srgbClr val="DEEBF7"/>
+                    </a:solidFill>
+                  </a:tcPr>
+                </a:tc>
+                <a:tc>
+                  <a:txBody>
+                    <a:bodyPr wrap="square"/>
+                    <a:lstStyle/>
+                    <a:p>
+                      <a:pPr algn="ctr"/>
+                      <a:r>
+                        <a:rPr sz="900" b="1">
+                          <a:solidFill>
+                            <a:srgbClr val="002060"/>
+                          </a:solidFill>
+                          <a:latin typeface="맑은 고딕"/>
+                          <a:ea typeface="맑은 고딕"/>
+                          <a:cs typeface="맑은 고딕"/>
+                        </a:rPr>
+                        <a:t>★ 2시간 배송 </a:t>
+                      </a:r>
+                      <a:r>
+                        <a:rPr sz="800" b="1">
+                          <a:solidFill>
+                            <a:srgbClr val="002060"/>
+                          </a:solidFill>
+                          <a:latin typeface="맑은 고딕"/>
+                          <a:ea typeface="맑은 고딕"/>
+                          <a:cs typeface="맑은 고딕"/>
+                        </a:rPr>
+                        <a:t>(신규)</a:t>
+                      </a:r>
+                    </a:p>
+                  </a:txBody>
+                  <a:tcPr anchor="ctr" marL="36000" marR="36000" marT="0" marB="0">
+                    <a:lnL w="9525" cap="flat">
+                      <a:solidFill>
+                        <a:srgbClr val="BFBFBF"/>
+                      </a:solidFill>
+                    </a:lnL>
+                    <a:lnR w="9525" cap="flat">
+                      <a:solidFill>
+                        <a:srgbClr val="BFBFBF"/>
+                      </a:solidFill>
+                    </a:lnR>
+                    <a:lnT w="9525" cap="flat">
+                      <a:solidFill>
+                        <a:srgbClr val="BFBFBF"/>
+                      </a:solidFill>
+                    </a:lnT>
+                    <a:lnB w="9525" cap="flat">
+                      <a:solidFill>
+                        <a:srgbClr val="BFBFBF"/>
+                      </a:solidFill>
+                    </a:lnB>
+                    <a:solidFill>
+                      <a:srgbClr val="DEEBF7"/>
+                    </a:solidFill>
+                  </a:tcPr>
+                </a:tc>
+                <a:tc>
+                  <a:txBody>
+                    <a:bodyPr wrap="square"/>
+                    <a:lstStyle/>
+                    <a:p>
+                      <a:pPr algn="ctr"/>
+                      <a:r>
+                        <a:rPr sz="900" b="1">
+                          <a:solidFill>
+                            <a:srgbClr val="002060"/>
+                          </a:solidFill>
+                          <a:latin typeface="맑은 고딕"/>
+                          <a:ea typeface="맑은 고딕"/>
+                          <a:cs typeface="맑은 고딕"/>
+                        </a:rPr>
+                        <a:t>2H </a:t>
+                      </a:r>
+                      <a:r>
+                        <a:rPr sz="800" b="1">
+                          <a:solidFill>
+                            <a:srgbClr val="002060"/>
+                          </a:solidFill>
+                          <a:latin typeface="맑은 고딕"/>
+                          <a:ea typeface="맑은 고딕"/>
+                          <a:cs typeface="맑은 고딕"/>
+                        </a:rPr>
+                        <a:t>(20시 마감)</a:t>
+                      </a:r>
+                    </a:p>
+                  </a:txBody>
+                  <a:tcPr anchor="ctr" marL="36000" marR="36000" marT="0" marB="0">
+                    <a:lnL w="9525" cap="flat">
+                      <a:solidFill>
+                        <a:srgbClr val="BFBFBF"/>
+                      </a:solidFill>
+                    </a:lnL>
+                    <a:lnR w="9525" cap="flat">
+                      <a:solidFill>
+                        <a:srgbClr val="BFBFBF"/>
+                      </a:solidFill>
+                    </a:lnR>
+                    <a:lnT w="9525" cap="flat">
+                      <a:solidFill>
+                        <a:srgbClr val="BFBFBF"/>
+                      </a:solidFill>
+                    </a:lnT>
+                    <a:lnB w="9525" cap="flat">
+                      <a:solidFill>
+                        <a:srgbClr val="BFBFBF"/>
+                      </a:solidFill>
+                    </a:lnB>
+                    <a:solidFill>
+                      <a:srgbClr val="DEEBF7"/>
+                    </a:solidFill>
+                  </a:tcPr>
+                </a:tc>
+                <a:tc>
+                  <a:txBody>
+                    <a:bodyPr wrap="square"/>
+                    <a:lstStyle/>
+                    <a:p>
+                      <a:pPr algn="ctr"/>
+                      <a:r>
+                        <a:rPr sz="900" b="1">
+                          <a:solidFill>
+                            <a:srgbClr val="002060"/>
+                          </a:solidFill>
+                          <a:latin typeface="맑은 고딕"/>
+                          <a:ea typeface="맑은 고딕"/>
+                          <a:cs typeface="맑은 고딕"/>
+                        </a:rPr>
+                        <a:t>사륜차</a:t>
+                      </a:r>
+                    </a:p>
+                  </a:txBody>
+                  <a:tcPr anchor="ctr" marL="36000" marR="36000" marT="0" marB="0">
+                    <a:lnL w="9525" cap="flat">
+                      <a:solidFill>
+                        <a:srgbClr val="BFBFBF"/>
+                      </a:solidFill>
+                    </a:lnL>
+                    <a:lnR w="9525" cap="flat">
+                      <a:solidFill>
+                        <a:srgbClr val="BFBFBF"/>
+                      </a:solidFill>
+                    </a:lnR>
+                    <a:lnT w="9525" cap="flat">
+                      <a:solidFill>
+                        <a:srgbClr val="BFBFBF"/>
+                      </a:solidFill>
+                    </a:lnT>
+                    <a:lnB w="9525" cap="flat">
+                      <a:solidFill>
+                        <a:srgbClr val="BFBFBF"/>
+                      </a:solidFill>
+                    </a:lnB>
+                    <a:solidFill>
+                      <a:srgbClr val="DEEBF7"/>
+                    </a:solidFill>
+                  </a:tcPr>
+                </a:tc>
+                <a:tc>
+                  <a:txBody>
+                    <a:bodyPr wrap="square"/>
+                    <a:lstStyle/>
+                    <a:p>
+                      <a:pPr algn="ctr"/>
+                      <a:r>
+                        <a:rPr sz="900" b="1">
+                          <a:solidFill>
+                            <a:srgbClr val="002060"/>
+                          </a:solidFill>
+                          <a:latin typeface="맑은 고딕"/>
+                          <a:ea typeface="맑은 고딕"/>
+                          <a:cs typeface="맑은 고딕"/>
+                        </a:rPr>
+                        <a:t>약 15만 종</a:t>
+                      </a:r>
+                    </a:p>
+                  </a:txBody>
+                  <a:tcPr anchor="ctr" marL="36000" marR="36000" marT="0" marB="0">
+                    <a:lnL w="9525" cap="flat">
+                      <a:solidFill>
+                        <a:srgbClr val="BFBFBF"/>
+                      </a:solidFill>
+                    </a:lnL>
+                    <a:lnR w="9525" cap="flat">
+                      <a:solidFill>
+                        <a:srgbClr val="BFBFBF"/>
+                      </a:solidFill>
+                    </a:lnR>
+                    <a:lnT w="9525" cap="flat">
+                      <a:solidFill>
+                        <a:srgbClr val="BFBFBF"/>
+                      </a:solidFill>
+                    </a:lnT>
+                    <a:lnB w="9525" cap="flat">
+                      <a:solidFill>
+                        <a:srgbClr val="BFBFBF"/>
+                      </a:solidFill>
+                    </a:lnB>
+                    <a:solidFill>
+                      <a:srgbClr val="DEEBF7"/>
+                    </a:solidFill>
+                  </a:tcPr>
+                </a:tc>
+              </a:tr>
+            </a:tbl>
+          </a:graphicData>
+        </a:graphic>
+      </p:graphicFrame>
+      <p:sp>
+        <p:nvSpPr>
+          <p:cNvPr id="15" name="Rectangle 14"/>
           <p:cNvSpPr/>
           <p:nvPr/>
         </p:nvSpPr>
         <p:spPr>
           <a:xfrm>
-            <a:off x="3551999" y="1684800"/>
-            <a:ext cx="2803200" cy="403200"/>
+            <a:off x="5954400" y="1494000"/>
+            <a:ext cx="3528000" cy="270000"/>
           </a:xfrm>
           <a:prstGeom prst="rect">
             <a:avLst/>
@@ -3477,14 +5102,14 @@
       </p:sp>
       <p:sp>
         <p:nvSpPr>
-          <p:cNvPr id="10" name="TextBox 9"/>
+          <p:cNvPr id="16" name="TextBox 15"/>
           <p:cNvSpPr txBox="1"/>
           <p:nvPr/>
         </p:nvSpPr>
         <p:spPr>
           <a:xfrm>
-            <a:off x="3641999" y="1684800"/>
-            <a:ext cx="2623200" cy="403200"/>
+            <a:off x="5954400" y="1494000"/>
+            <a:ext cx="3528000" cy="270000"/>
           </a:xfrm>
           <a:prstGeom prst="rect">
             <a:avLst/>
@@ -3498,6 +5123,128 @@
           <a:lstStyle/>
           <a:p>
             <a:pPr algn="ctr"/>
+            <a:r>
+              <a:rPr sz="1200" b="1">
+                <a:solidFill>
+                  <a:srgbClr val="000000"/>
+                </a:solidFill>
+                <a:latin typeface="맑은 고딕"/>
+                <a:ea typeface="맑은 고딕"/>
+                <a:cs typeface="맑은 고딕"/>
+              </a:rPr>
+              <a:t>서비스 세부 내용</a:t>
+            </a:r>
+          </a:p>
+        </p:txBody>
+      </p:sp>
+      <p:sp>
+        <p:nvSpPr>
+          <p:cNvPr id="17" name="TextBox 16"/>
+          <p:cNvSpPr txBox="1"/>
+          <p:nvPr/>
+        </p:nvSpPr>
+        <p:spPr>
+          <a:xfrm>
+            <a:off x="5954400" y="1864800"/>
+            <a:ext cx="3528000" cy="198000"/>
+          </a:xfrm>
+          <a:prstGeom prst="rect">
+            <a:avLst/>
+          </a:prstGeom>
+          <a:noFill/>
+        </p:spPr>
+        <p:txBody>
+          <a:bodyPr wrap="square" anchor="t" lIns="0" rIns="0" tIns="0" bIns="0">
+            <a:spAutoFit/>
+          </a:bodyPr>
+          <a:lstStyle/>
+          <a:p>
+            <a:pPr algn="l"/>
+            <a:r>
+              <a:rPr sz="1200" b="1">
+                <a:solidFill>
+                  <a:srgbClr val="000000"/>
+                </a:solidFill>
+                <a:latin typeface="맑은 고딕"/>
+                <a:ea typeface="맑은 고딕"/>
+                <a:cs typeface="맑은 고딕"/>
+              </a:rPr>
+              <a:t>• ① 운영 방침</a:t>
+            </a:r>
+          </a:p>
+        </p:txBody>
+      </p:sp>
+      <p:sp>
+        <p:nvSpPr>
+          <p:cNvPr id="18" name="TextBox 17"/>
+          <p:cNvSpPr txBox="1"/>
+          <p:nvPr/>
+        </p:nvSpPr>
+        <p:spPr>
+          <a:xfrm>
+            <a:off x="6152400" y="2062800"/>
+            <a:ext cx="3330000" cy="198000"/>
+          </a:xfrm>
+          <a:prstGeom prst="rect">
+            <a:avLst/>
+          </a:prstGeom>
+          <a:noFill/>
+        </p:spPr>
+        <p:txBody>
+          <a:bodyPr wrap="square" anchor="t" lIns="0" rIns="0" tIns="0" bIns="0">
+            <a:spAutoFit/>
+          </a:bodyPr>
+          <a:lstStyle/>
+          <a:p>
+            <a:pPr algn="l"/>
+            <a:r>
+              <a:rPr sz="1100" b="0">
+                <a:solidFill>
+                  <a:srgbClr val="000000"/>
+                </a:solidFill>
+                <a:latin typeface="맑은 고딕"/>
+                <a:ea typeface="맑은 고딕"/>
+                <a:cs typeface="맑은 고딕"/>
+              </a:rPr>
+              <a:t>- 20시 마감 → 2시간 내 배송 완료</a:t>
+            </a:r>
+          </a:p>
+        </p:txBody>
+      </p:sp>
+      <p:sp>
+        <p:nvSpPr>
+          <p:cNvPr id="19" name="TextBox 18"/>
+          <p:cNvSpPr txBox="1"/>
+          <p:nvPr/>
+        </p:nvSpPr>
+        <p:spPr>
+          <a:xfrm>
+            <a:off x="6152400" y="2260800"/>
+            <a:ext cx="3330000" cy="198000"/>
+          </a:xfrm>
+          <a:prstGeom prst="rect">
+            <a:avLst/>
+          </a:prstGeom>
+          <a:noFill/>
+        </p:spPr>
+        <p:txBody>
+          <a:bodyPr wrap="square" anchor="t" lIns="0" rIns="0" tIns="0" bIns="0">
+            <a:spAutoFit/>
+          </a:bodyPr>
+          <a:lstStyle/>
+          <a:p>
+            <a:pPr algn="l"/>
+            <a:r>
+              <a:rPr sz="1100" b="0">
+                <a:solidFill>
+                  <a:srgbClr val="000000"/>
+                </a:solidFill>
+                <a:latin typeface="맑은 고딕"/>
+                <a:ea typeface="맑은 고딕"/>
+                <a:cs typeface="맑은 고딕"/>
+              </a:rPr>
+              <a:t>- 쓱배송 사륜차 </a:t>
+            </a:r>
             <a:r>
               <a:rPr sz="1000" b="0">
                 <a:solidFill>
@@ -3507,8 +5254,34 @@
                 <a:ea typeface="맑은 고딕"/>
                 <a:cs typeface="맑은 고딕"/>
               </a:rPr>
-              <a:t>(배경)</a:t>
-            </a:r>
+              <a:t>(대용량·중량 대응)</a:t>
+            </a:r>
+          </a:p>
+        </p:txBody>
+      </p:sp>
+      <p:sp>
+        <p:nvSpPr>
+          <p:cNvPr id="20" name="TextBox 19"/>
+          <p:cNvSpPr txBox="1"/>
+          <p:nvPr/>
+        </p:nvSpPr>
+        <p:spPr>
+          <a:xfrm>
+            <a:off x="6152400" y="2458800"/>
+            <a:ext cx="3330000" cy="198000"/>
+          </a:xfrm>
+          <a:prstGeom prst="rect">
+            <a:avLst/>
+          </a:prstGeom>
+          <a:noFill/>
+        </p:spPr>
+        <p:txBody>
+          <a:bodyPr wrap="square" anchor="t" lIns="0" rIns="0" tIns="0" bIns="0">
+            <a:spAutoFit/>
+          </a:bodyPr>
+          <a:lstStyle/>
+          <a:p>
+            <a:pPr algn="l"/>
             <a:r>
               <a:rPr sz="1100" b="0">
                 <a:solidFill>
@@ -3518,21 +5291,21 @@
                 <a:ea typeface="맑은 고딕"/>
                 <a:cs typeface="맑은 고딕"/>
               </a:rPr>
-              <a:t> B마트 등 즉시배송 시장 대용량 품목 확대</a:t>
-            </a:r>
-          </a:p>
-        </p:txBody>
-      </p:sp>
-      <p:sp>
-        <p:nvSpPr>
-          <p:cNvPr id="11" name="TextBox 10"/>
+              <a:t>- 기존 예약배송 병행</a:t>
+            </a:r>
+          </a:p>
+        </p:txBody>
+      </p:sp>
+      <p:sp>
+        <p:nvSpPr>
+          <p:cNvPr id="21" name="TextBox 20"/>
           <p:cNvSpPr txBox="1"/>
           <p:nvPr/>
         </p:nvSpPr>
         <p:spPr>
           <a:xfrm>
-            <a:off x="6355200" y="1684800"/>
-            <a:ext cx="324000" cy="403200"/>
+            <a:off x="6152400" y="2656800"/>
+            <a:ext cx="3330000" cy="198000"/>
           </a:xfrm>
           <a:prstGeom prst="rect">
             <a:avLst/>
@@ -3540,93 +5313,12 @@
           <a:noFill/>
         </p:spPr>
         <p:txBody>
-          <a:bodyPr wrap="square" anchor="ctr" lIns="0" rIns="0" tIns="0" bIns="0">
+          <a:bodyPr wrap="square" anchor="t" lIns="0" rIns="0" tIns="0" bIns="0">
             <a:spAutoFit/>
           </a:bodyPr>
           <a:lstStyle/>
           <a:p>
-            <a:pPr algn="ctr"/>
-            <a:r>
-              <a:rPr sz="1400" b="1">
-                <a:solidFill>
-                  <a:srgbClr val="595959"/>
-                </a:solidFill>
-                <a:latin typeface="맑은 고딕"/>
-                <a:ea typeface="맑은 고딕"/>
-                <a:cs typeface="맑은 고딕"/>
-              </a:rPr>
-              <a:t>→</a:t>
-            </a:r>
-          </a:p>
-        </p:txBody>
-      </p:sp>
-      <p:sp>
-        <p:nvSpPr>
-          <p:cNvPr id="12" name="Rectangle 11"/>
-          <p:cNvSpPr/>
-          <p:nvPr/>
-        </p:nvSpPr>
-        <p:spPr>
-          <a:xfrm>
-            <a:off x="6679199" y="1684800"/>
-            <a:ext cx="2803200" cy="403200"/>
-          </a:xfrm>
-          <a:prstGeom prst="rect">
-            <a:avLst/>
-          </a:prstGeom>
-          <a:solidFill>
-            <a:srgbClr val="EAEEF6"/>
-          </a:solidFill>
-          <a:ln>
-            <a:noFill/>
-          </a:ln>
-          <a:effectLst/>
-        </p:spPr>
-        <p:style>
-          <a:lnRef idx="1">
-            <a:schemeClr val="accent1"/>
-          </a:lnRef>
-          <a:fillRef idx="3">
-            <a:schemeClr val="accent1"/>
-          </a:fillRef>
-          <a:effectRef idx="2">
-            <a:schemeClr val="accent1"/>
-          </a:effectRef>
-          <a:fontRef idx="minor">
-            <a:schemeClr val="lt1"/>
-          </a:fontRef>
-        </p:style>
-        <p:txBody>
-          <a:bodyPr rtlCol="0" anchor="ctr"/>
-          <a:lstStyle/>
-          <a:p>
-            <a:pPr algn="ctr"/>
-          </a:p>
-        </p:txBody>
-      </p:sp>
-      <p:sp>
-        <p:nvSpPr>
-          <p:cNvPr id="13" name="TextBox 12"/>
-          <p:cNvSpPr txBox="1"/>
-          <p:nvPr/>
-        </p:nvSpPr>
-        <p:spPr>
-          <a:xfrm>
-            <a:off x="6769199" y="1684800"/>
-            <a:ext cx="2623200" cy="403200"/>
-          </a:xfrm>
-          <a:prstGeom prst="rect">
-            <a:avLst/>
-          </a:prstGeom>
-          <a:noFill/>
-        </p:spPr>
-        <p:txBody>
-          <a:bodyPr wrap="square" anchor="ctr" lIns="0" rIns="0" tIns="0" bIns="0">
-            <a:spAutoFit/>
-          </a:bodyPr>
-          <a:lstStyle/>
-          <a:p>
-            <a:pPr algn="ctr"/>
+            <a:pPr algn="l"/>
             <a:r>
               <a:rPr sz="1100" b="0">
                 <a:solidFill>
@@ -3636,21 +5328,21 @@
                 <a:ea typeface="맑은 고딕"/>
                 <a:cs typeface="맑은 고딕"/>
               </a:rPr>
-              <a:t>기존 라인업, '빠름 × 대용량' 부재</a:t>
-            </a:r>
-          </a:p>
-        </p:txBody>
-      </p:sp>
-      <p:sp>
-        <p:nvSpPr>
-          <p:cNvPr id="14" name="TextBox 13"/>
+              <a:t>- 유휴 PP센터 재활용형 서비스</a:t>
+            </a:r>
+          </a:p>
+        </p:txBody>
+      </p:sp>
+      <p:sp>
+        <p:nvSpPr>
+          <p:cNvPr id="22" name="TextBox 21"/>
           <p:cNvSpPr txBox="1"/>
           <p:nvPr/>
         </p:nvSpPr>
         <p:spPr>
           <a:xfrm>
-            <a:off x="424800" y="2232000"/>
-            <a:ext cx="9057600" cy="180000"/>
+            <a:off x="5954400" y="2934000"/>
+            <a:ext cx="3528000" cy="180000"/>
           </a:xfrm>
           <a:prstGeom prst="rect">
             <a:avLst/>
@@ -3673,31 +5365,68 @@
                 <a:ea typeface="맑은 고딕"/>
                 <a:cs typeface="맑은 고딕"/>
               </a:rPr>
-              <a:t>• ② 서비스 개요</a:t>
-            </a:r>
-          </a:p>
-        </p:txBody>
-      </p:sp>
-      <p:sp>
-        <p:nvSpPr>
-          <p:cNvPr id="15" name="Rectangle 14"/>
+              <a:t>• ② 확산 로드맵</a:t>
+            </a:r>
+          </a:p>
+        </p:txBody>
+      </p:sp>
+      <p:cxnSp>
+        <p:nvCxnSpPr>
+          <p:cNvPr id="23" name="Connector 22"/>
+          <p:cNvCxnSpPr/>
+          <p:nvPr/>
+        </p:nvCxnSpPr>
+        <p:spPr>
+          <a:xfrm>
+            <a:off x="6026399" y="3222000"/>
+            <a:ext cx="0" cy="1961999"/>
+          </a:xfrm>
+          <a:prstGeom prst="bentConnector3">
+            <a:avLst/>
+          </a:prstGeom>
+          <a:ln w="22225">
+            <a:solidFill>
+              <a:srgbClr val="000000"/>
+            </a:solidFill>
+            <a:prstDash val="solid"/>
+          </a:ln>
+          <a:effectLst/>
+        </p:spPr>
+        <p:style>
+          <a:lnRef idx="2">
+            <a:schemeClr val="accent1"/>
+          </a:lnRef>
+          <a:fillRef idx="0">
+            <a:schemeClr val="accent1"/>
+          </a:fillRef>
+          <a:effectRef idx="1">
+            <a:schemeClr val="accent1"/>
+          </a:effectRef>
+          <a:fontRef idx="minor">
+            <a:schemeClr val="tx1"/>
+          </a:fontRef>
+        </p:style>
+      </p:cxnSp>
+      <p:sp>
+        <p:nvSpPr>
+          <p:cNvPr id="24" name="Oval 23"/>
           <p:cNvSpPr/>
           <p:nvPr/>
         </p:nvSpPr>
         <p:spPr>
           <a:xfrm>
-            <a:off x="424800" y="2430000"/>
-            <a:ext cx="4882680" cy="1980000"/>
+            <a:off x="5979600" y="3175200"/>
+            <a:ext cx="93600" cy="93600"/>
           </a:xfrm>
-          <a:prstGeom prst="rect">
+          <a:prstGeom prst="ellipse">
             <a:avLst/>
           </a:prstGeom>
           <a:solidFill>
             <a:srgbClr val="FFFFFF"/>
           </a:solidFill>
-          <a:ln w="9525">
+          <a:ln w="12700">
             <a:solidFill>
-              <a:srgbClr val="BFBFBF"/>
+              <a:srgbClr val="000000"/>
             </a:solidFill>
           </a:ln>
           <a:effectLst/>
@@ -3726,23 +5455,99 @@
       </p:sp>
       <p:sp>
         <p:nvSpPr>
-          <p:cNvPr id="16" name="Rectangle 15"/>
-          <p:cNvSpPr/>
+          <p:cNvPr id="25" name="TextBox 24"/>
+          <p:cNvSpPr txBox="1"/>
           <p:nvPr/>
         </p:nvSpPr>
         <p:spPr>
           <a:xfrm>
-            <a:off x="424800" y="2430000"/>
-            <a:ext cx="4882680" cy="342000"/>
+            <a:off x="6188399" y="3060000"/>
+            <a:ext cx="684000" cy="324000"/>
           </a:xfrm>
           <a:prstGeom prst="rect">
             <a:avLst/>
           </a:prstGeom>
+          <a:noFill/>
+        </p:spPr>
+        <p:txBody>
+          <a:bodyPr wrap="square" anchor="ctr" lIns="0" rIns="0" tIns="0" bIns="0">
+            <a:spAutoFit/>
+          </a:bodyPr>
+          <a:lstStyle/>
+          <a:p>
+            <a:pPr algn="l"/>
+            <a:r>
+              <a:rPr sz="1100" b="1">
+                <a:solidFill>
+                  <a:srgbClr val="000000"/>
+                </a:solidFill>
+                <a:latin typeface="맑은 고딕"/>
+                <a:ea typeface="맑은 고딕"/>
+                <a:cs typeface="맑은 고딕"/>
+              </a:rPr>
+              <a:t>'26.7월</a:t>
+            </a:r>
+          </a:p>
+        </p:txBody>
+      </p:sp>
+      <p:sp>
+        <p:nvSpPr>
+          <p:cNvPr id="26" name="TextBox 25"/>
+          <p:cNvSpPr txBox="1"/>
+          <p:nvPr/>
+        </p:nvSpPr>
+        <p:spPr>
+          <a:xfrm>
+            <a:off x="6908399" y="3060000"/>
+            <a:ext cx="2574000" cy="324000"/>
+          </a:xfrm>
+          <a:prstGeom prst="rect">
+            <a:avLst/>
+          </a:prstGeom>
+          <a:noFill/>
+        </p:spPr>
+        <p:txBody>
+          <a:bodyPr wrap="square" anchor="ctr" lIns="0" rIns="0" tIns="0" bIns="0">
+            <a:spAutoFit/>
+          </a:bodyPr>
+          <a:lstStyle/>
+          <a:p>
+            <a:pPr algn="l"/>
+            <a:r>
+              <a:rPr sz="1100" b="0">
+                <a:solidFill>
+                  <a:srgbClr val="000000"/>
+                </a:solidFill>
+                <a:latin typeface="맑은 고딕"/>
+                <a:ea typeface="맑은 고딕"/>
+                <a:cs typeface="맑은 고딕"/>
+              </a:rPr>
+              <a:t>양재·하남점 도입</a:t>
+            </a:r>
+          </a:p>
+        </p:txBody>
+      </p:sp>
+      <p:sp>
+        <p:nvSpPr>
+          <p:cNvPr id="27" name="Oval 26"/>
+          <p:cNvSpPr/>
+          <p:nvPr/>
+        </p:nvSpPr>
+        <p:spPr>
+          <a:xfrm>
+            <a:off x="5979600" y="3829200"/>
+            <a:ext cx="93600" cy="93600"/>
+          </a:xfrm>
+          <a:prstGeom prst="ellipse">
+            <a:avLst/>
+          </a:prstGeom>
           <a:solidFill>
-            <a:srgbClr val="EAEEF6"/>
+            <a:srgbClr val="FFFFFF"/>
           </a:solidFill>
-          <a:ln>
-            <a:noFill/>
+          <a:ln w="12700">
+            <a:solidFill>
+              <a:srgbClr val="000000"/>
+            </a:solidFill>
           </a:ln>
           <a:effectLst/>
         </p:spPr>
@@ -3770,14 +5575,14 @@
       </p:sp>
       <p:sp>
         <p:nvSpPr>
-          <p:cNvPr id="17" name="TextBox 16"/>
+          <p:cNvPr id="28" name="TextBox 27"/>
           <p:cNvSpPr txBox="1"/>
           <p:nvPr/>
         </p:nvSpPr>
         <p:spPr>
           <a:xfrm>
-            <a:off x="424800" y="2430000"/>
-            <a:ext cx="4882680" cy="342000"/>
+            <a:off x="6188399" y="3714000"/>
+            <a:ext cx="684000" cy="324000"/>
           </a:xfrm>
           <a:prstGeom prst="rect">
             <a:avLst/>
@@ -3790,9 +5595,9 @@
           </a:bodyPr>
           <a:lstStyle/>
           <a:p>
-            <a:pPr algn="ctr"/>
-            <a:r>
-              <a:rPr sz="1000" b="1">
+            <a:pPr algn="l"/>
+            <a:r>
+              <a:rPr sz="1100" b="1">
                 <a:solidFill>
                   <a:srgbClr val="000000"/>
                 </a:solidFill>
@@ -3800,21 +5605,349 @@
                 <a:ea typeface="맑은 고딕"/>
                 <a:cs typeface="맑은 고딕"/>
               </a:rPr>
-              <a:t>서비스 운영</a:t>
+              <a:t>8월</a:t>
+            </a:r>
+          </a:p>
+        </p:txBody>
+      </p:sp>
+      <p:sp>
+        <p:nvSpPr>
+          <p:cNvPr id="29" name="TextBox 28"/>
+          <p:cNvSpPr txBox="1"/>
+          <p:nvPr/>
+        </p:nvSpPr>
+        <p:spPr>
+          <a:xfrm>
+            <a:off x="6908399" y="3714000"/>
+            <a:ext cx="2574000" cy="324000"/>
+          </a:xfrm>
+          <a:prstGeom prst="rect">
+            <a:avLst/>
+          </a:prstGeom>
+          <a:noFill/>
+        </p:spPr>
+        <p:txBody>
+          <a:bodyPr wrap="square" anchor="ctr" lIns="0" rIns="0" tIns="0" bIns="0">
+            <a:spAutoFit/>
+          </a:bodyPr>
+          <a:lstStyle/>
+          <a:p>
+            <a:pPr algn="l"/>
+            <a:r>
+              <a:rPr sz="1100" b="0">
+                <a:solidFill>
+                  <a:srgbClr val="000000"/>
+                </a:solidFill>
+                <a:latin typeface="맑은 고딕"/>
+                <a:ea typeface="맑은 고딕"/>
+                <a:cs typeface="맑은 고딕"/>
+              </a:rPr>
+              <a:t>서울 확대</a:t>
+            </a:r>
+          </a:p>
+          <a:p>
+            <a:pPr algn="l"/>
+            <a:r>
+              <a:rPr sz="1000" b="0">
+                <a:solidFill>
+                  <a:srgbClr val="000000"/>
+                </a:solidFill>
+                <a:latin typeface="맑은 고딕"/>
+                <a:ea typeface="맑은 고딕"/>
+                <a:cs typeface="맑은 고딕"/>
+              </a:rPr>
+              <a:t>(월계·가든5·신도림)</a:t>
+            </a:r>
+          </a:p>
+        </p:txBody>
+      </p:sp>
+      <p:sp>
+        <p:nvSpPr>
+          <p:cNvPr id="30" name="Oval 29"/>
+          <p:cNvSpPr/>
+          <p:nvPr/>
+        </p:nvSpPr>
+        <p:spPr>
+          <a:xfrm>
+            <a:off x="5979600" y="4483199"/>
+            <a:ext cx="93600" cy="93600"/>
+          </a:xfrm>
+          <a:prstGeom prst="ellipse">
+            <a:avLst/>
+          </a:prstGeom>
+          <a:solidFill>
+            <a:srgbClr val="FFFFFF"/>
+          </a:solidFill>
+          <a:ln w="12700">
+            <a:solidFill>
+              <a:srgbClr val="000000"/>
+            </a:solidFill>
+          </a:ln>
+          <a:effectLst/>
+        </p:spPr>
+        <p:style>
+          <a:lnRef idx="1">
+            <a:schemeClr val="accent1"/>
+          </a:lnRef>
+          <a:fillRef idx="3">
+            <a:schemeClr val="accent1"/>
+          </a:fillRef>
+          <a:effectRef idx="2">
+            <a:schemeClr val="accent1"/>
+          </a:effectRef>
+          <a:fontRef idx="minor">
+            <a:schemeClr val="lt1"/>
+          </a:fontRef>
+        </p:style>
+        <p:txBody>
+          <a:bodyPr rtlCol="0" anchor="ctr"/>
+          <a:lstStyle/>
+          <a:p>
+            <a:pPr algn="ctr"/>
+          </a:p>
+        </p:txBody>
+      </p:sp>
+      <p:sp>
+        <p:nvSpPr>
+          <p:cNvPr id="31" name="TextBox 30"/>
+          <p:cNvSpPr txBox="1"/>
+          <p:nvPr/>
+        </p:nvSpPr>
+        <p:spPr>
+          <a:xfrm>
+            <a:off x="6188399" y="4368000"/>
+            <a:ext cx="684000" cy="324000"/>
+          </a:xfrm>
+          <a:prstGeom prst="rect">
+            <a:avLst/>
+          </a:prstGeom>
+          <a:noFill/>
+        </p:spPr>
+        <p:txBody>
+          <a:bodyPr wrap="square" anchor="ctr" lIns="0" rIns="0" tIns="0" bIns="0">
+            <a:spAutoFit/>
+          </a:bodyPr>
+          <a:lstStyle/>
+          <a:p>
+            <a:pPr algn="l"/>
+            <a:r>
+              <a:rPr sz="1100" b="1">
+                <a:solidFill>
+                  <a:srgbClr val="000000"/>
+                </a:solidFill>
+                <a:latin typeface="맑은 고딕"/>
+                <a:ea typeface="맑은 고딕"/>
+                <a:cs typeface="맑은 고딕"/>
+              </a:rPr>
+              <a:t>9월</a:t>
+            </a:r>
+          </a:p>
+        </p:txBody>
+      </p:sp>
+      <p:sp>
+        <p:nvSpPr>
+          <p:cNvPr id="32" name="TextBox 31"/>
+          <p:cNvSpPr txBox="1"/>
+          <p:nvPr/>
+        </p:nvSpPr>
+        <p:spPr>
+          <a:xfrm>
+            <a:off x="6908399" y="4368000"/>
+            <a:ext cx="2574000" cy="324000"/>
+          </a:xfrm>
+          <a:prstGeom prst="rect">
+            <a:avLst/>
+          </a:prstGeom>
+          <a:noFill/>
+        </p:spPr>
+        <p:txBody>
+          <a:bodyPr wrap="square" anchor="ctr" lIns="0" rIns="0" tIns="0" bIns="0">
+            <a:spAutoFit/>
+          </a:bodyPr>
+          <a:lstStyle/>
+          <a:p>
+            <a:pPr algn="l"/>
+            <a:r>
+              <a:rPr sz="1100" b="0">
+                <a:solidFill>
+                  <a:srgbClr val="000000"/>
+                </a:solidFill>
+                <a:latin typeface="맑은 고딕"/>
+                <a:ea typeface="맑은 고딕"/>
+                <a:cs typeface="맑은 고딕"/>
+              </a:rPr>
+              <a:t>전국 확대</a:t>
+            </a:r>
+          </a:p>
+        </p:txBody>
+      </p:sp>
+      <p:sp>
+        <p:nvSpPr>
+          <p:cNvPr id="33" name="Oval 32"/>
+          <p:cNvSpPr/>
+          <p:nvPr/>
+        </p:nvSpPr>
+        <p:spPr>
+          <a:xfrm>
+            <a:off x="5979600" y="5137199"/>
+            <a:ext cx="93600" cy="93600"/>
+          </a:xfrm>
+          <a:prstGeom prst="ellipse">
+            <a:avLst/>
+          </a:prstGeom>
+          <a:solidFill>
+            <a:srgbClr val="FFFFFF"/>
+          </a:solidFill>
+          <a:ln w="12700">
+            <a:solidFill>
+              <a:srgbClr val="000000"/>
+            </a:solidFill>
+          </a:ln>
+          <a:effectLst/>
+        </p:spPr>
+        <p:style>
+          <a:lnRef idx="1">
+            <a:schemeClr val="accent1"/>
+          </a:lnRef>
+          <a:fillRef idx="3">
+            <a:schemeClr val="accent1"/>
+          </a:fillRef>
+          <a:effectRef idx="2">
+            <a:schemeClr val="accent1"/>
+          </a:effectRef>
+          <a:fontRef idx="minor">
+            <a:schemeClr val="lt1"/>
+          </a:fontRef>
+        </p:style>
+        <p:txBody>
+          <a:bodyPr rtlCol="0" anchor="ctr"/>
+          <a:lstStyle/>
+          <a:p>
+            <a:pPr algn="ctr"/>
+          </a:p>
+        </p:txBody>
+      </p:sp>
+      <p:sp>
+        <p:nvSpPr>
+          <p:cNvPr id="34" name="TextBox 33"/>
+          <p:cNvSpPr txBox="1"/>
+          <p:nvPr/>
+        </p:nvSpPr>
+        <p:spPr>
+          <a:xfrm>
+            <a:off x="6188399" y="5022000"/>
+            <a:ext cx="684000" cy="324000"/>
+          </a:xfrm>
+          <a:prstGeom prst="rect">
+            <a:avLst/>
+          </a:prstGeom>
+          <a:noFill/>
+        </p:spPr>
+        <p:txBody>
+          <a:bodyPr wrap="square" anchor="ctr" lIns="0" rIns="0" tIns="0" bIns="0">
+            <a:spAutoFit/>
+          </a:bodyPr>
+          <a:lstStyle/>
+          <a:p>
+            <a:pPr algn="l"/>
+            <a:r>
+              <a:rPr sz="1100" b="1">
+                <a:solidFill>
+                  <a:srgbClr val="000000"/>
+                </a:solidFill>
+                <a:latin typeface="맑은 고딕"/>
+                <a:ea typeface="맑은 고딕"/>
+                <a:cs typeface="맑은 고딕"/>
+              </a:rPr>
+              <a:t>연말</a:t>
+            </a:r>
+          </a:p>
+        </p:txBody>
+      </p:sp>
+      <p:sp>
+        <p:nvSpPr>
+          <p:cNvPr id="35" name="TextBox 34"/>
+          <p:cNvSpPr txBox="1"/>
+          <p:nvPr/>
+        </p:nvSpPr>
+        <p:spPr>
+          <a:xfrm>
+            <a:off x="6908399" y="5022000"/>
+            <a:ext cx="2574000" cy="324000"/>
+          </a:xfrm>
+          <a:prstGeom prst="rect">
+            <a:avLst/>
+          </a:prstGeom>
+          <a:noFill/>
+        </p:spPr>
+        <p:txBody>
+          <a:bodyPr wrap="square" anchor="ctr" lIns="0" rIns="0" tIns="0" bIns="0">
+            <a:spAutoFit/>
+          </a:bodyPr>
+          <a:lstStyle/>
+          <a:p>
+            <a:pPr algn="l"/>
+            <a:r>
+              <a:rPr sz="1100" b="0">
+                <a:solidFill>
+                  <a:srgbClr val="000000"/>
+                </a:solidFill>
+                <a:latin typeface="맑은 고딕"/>
+                <a:ea typeface="맑은 고딕"/>
+                <a:cs typeface="맑은 고딕"/>
+              </a:rPr>
+              <a:t>50여 점포 운영</a:t>
+            </a:r>
+          </a:p>
+        </p:txBody>
+      </p:sp>
+      <p:sp>
+        <p:nvSpPr>
+          <p:cNvPr id="36" name="TextBox 35"/>
+          <p:cNvSpPr txBox="1"/>
+          <p:nvPr/>
+        </p:nvSpPr>
+        <p:spPr>
+          <a:xfrm>
+            <a:off x="5954400" y="5562000"/>
+            <a:ext cx="3528000" cy="396000"/>
+          </a:xfrm>
+          <a:prstGeom prst="rect">
+            <a:avLst/>
+          </a:prstGeom>
+          <a:noFill/>
+        </p:spPr>
+        <p:txBody>
+          <a:bodyPr wrap="square" anchor="b" lIns="0" rIns="0" tIns="0" bIns="0">
+            <a:spAutoFit/>
+          </a:bodyPr>
+          <a:lstStyle/>
+          <a:p>
+            <a:pPr algn="l"/>
+            <a:r>
+              <a:rPr sz="1200" b="1">
+                <a:solidFill>
+                  <a:srgbClr val="000000"/>
+                </a:solidFill>
+                <a:latin typeface="맑은 고딕"/>
+                <a:ea typeface="맑은 고딕"/>
+                <a:cs typeface="맑은 고딕"/>
+              </a:rPr>
+              <a:t>• 유휴 PP센터 재활용 → 신규 투자 최소 · 저비용 급속 확산</a:t>
             </a:r>
           </a:p>
         </p:txBody>
       </p:sp>
       <p:cxnSp>
         <p:nvCxnSpPr>
-          <p:cNvPr id="18" name="Connector 17"/>
+          <p:cNvPr id="37" name="Connector 36"/>
           <p:cNvCxnSpPr/>
           <p:nvPr/>
         </p:nvCxnSpPr>
         <p:spPr>
           <a:xfrm>
-            <a:off x="424800" y="2772000"/>
-            <a:ext cx="4882680" cy="0"/>
+            <a:off x="5835599" y="1494000"/>
+            <a:ext cx="0" cy="4464000"/>
           </a:xfrm>
           <a:prstGeom prst="bentConnector3">
             <a:avLst/>
@@ -3842,1636 +5975,6 @@
           </a:fontRef>
         </p:style>
       </p:cxnSp>
-      <p:sp>
-        <p:nvSpPr>
-          <p:cNvPr id="19" name="TextBox 18"/>
-          <p:cNvSpPr txBox="1"/>
-          <p:nvPr/>
-        </p:nvSpPr>
-        <p:spPr>
-          <a:xfrm>
-            <a:off x="532800" y="2772000"/>
-            <a:ext cx="900000" cy="409500"/>
-          </a:xfrm>
-          <a:prstGeom prst="rect">
-            <a:avLst/>
-          </a:prstGeom>
-          <a:noFill/>
-        </p:spPr>
-        <p:txBody>
-          <a:bodyPr wrap="square" anchor="ctr" lIns="0" rIns="0" tIns="0" bIns="0">
-            <a:spAutoFit/>
-          </a:bodyPr>
-          <a:lstStyle/>
-          <a:p>
-            <a:pPr algn="l"/>
-            <a:r>
-              <a:rPr sz="1100" b="1">
-                <a:solidFill>
-                  <a:srgbClr val="000000"/>
-                </a:solidFill>
-                <a:latin typeface="맑은 고딕"/>
-                <a:ea typeface="맑은 고딕"/>
-                <a:cs typeface="맑은 고딕"/>
-              </a:rPr>
-              <a:t>거점</a:t>
-            </a:r>
-          </a:p>
-        </p:txBody>
-      </p:sp>
-      <p:sp>
-        <p:nvSpPr>
-          <p:cNvPr id="20" name="TextBox 19"/>
-          <p:cNvSpPr txBox="1"/>
-          <p:nvPr/>
-        </p:nvSpPr>
-        <p:spPr>
-          <a:xfrm>
-            <a:off x="1432800" y="2772000"/>
-            <a:ext cx="3766680" cy="409500"/>
-          </a:xfrm>
-          <a:prstGeom prst="rect">
-            <a:avLst/>
-          </a:prstGeom>
-          <a:noFill/>
-        </p:spPr>
-        <p:txBody>
-          <a:bodyPr wrap="square" anchor="ctr" lIns="0" rIns="0" tIns="0" bIns="0">
-            <a:spAutoFit/>
-          </a:bodyPr>
-          <a:lstStyle/>
-          <a:p>
-            <a:pPr algn="l"/>
-            <a:r>
-              <a:rPr sz="1100" b="0">
-                <a:solidFill>
-                  <a:srgbClr val="000000"/>
-                </a:solidFill>
-                <a:latin typeface="맑은 고딕"/>
-                <a:ea typeface="맑은 고딕"/>
-                <a:cs typeface="맑은 고딕"/>
-              </a:rPr>
-              <a:t>유휴 점포 PP센터 </a:t>
-            </a:r>
-            <a:r>
-              <a:rPr sz="1000" b="0">
-                <a:solidFill>
-                  <a:srgbClr val="000000"/>
-                </a:solidFill>
-                <a:latin typeface="맑은 고딕"/>
-                <a:ea typeface="맑은 고딕"/>
-                <a:cs typeface="맑은 고딕"/>
-              </a:rPr>
-              <a:t>(반경 내 즉시 출고)</a:t>
-            </a:r>
-          </a:p>
-        </p:txBody>
-      </p:sp>
-      <p:cxnSp>
-        <p:nvCxnSpPr>
-          <p:cNvPr id="21" name="Connector 20"/>
-          <p:cNvCxnSpPr/>
-          <p:nvPr/>
-        </p:nvCxnSpPr>
-        <p:spPr>
-          <a:xfrm>
-            <a:off x="478799" y="3181500"/>
-            <a:ext cx="4774681" cy="0"/>
-          </a:xfrm>
-          <a:prstGeom prst="bentConnector3">
-            <a:avLst/>
-          </a:prstGeom>
-          <a:ln w="6350">
-            <a:solidFill>
-              <a:srgbClr val="BFBFBF"/>
-            </a:solidFill>
-            <a:prstDash val="solid"/>
-          </a:ln>
-          <a:effectLst/>
-        </p:spPr>
-        <p:style>
-          <a:lnRef idx="2">
-            <a:schemeClr val="accent1"/>
-          </a:lnRef>
-          <a:fillRef idx="0">
-            <a:schemeClr val="accent1"/>
-          </a:fillRef>
-          <a:effectRef idx="1">
-            <a:schemeClr val="accent1"/>
-          </a:effectRef>
-          <a:fontRef idx="minor">
-            <a:schemeClr val="tx1"/>
-          </a:fontRef>
-        </p:style>
-      </p:cxnSp>
-      <p:sp>
-        <p:nvSpPr>
-          <p:cNvPr id="22" name="TextBox 21"/>
-          <p:cNvSpPr txBox="1"/>
-          <p:nvPr/>
-        </p:nvSpPr>
-        <p:spPr>
-          <a:xfrm>
-            <a:off x="532800" y="3181500"/>
-            <a:ext cx="900000" cy="409500"/>
-          </a:xfrm>
-          <a:prstGeom prst="rect">
-            <a:avLst/>
-          </a:prstGeom>
-          <a:noFill/>
-        </p:spPr>
-        <p:txBody>
-          <a:bodyPr wrap="square" anchor="ctr" lIns="0" rIns="0" tIns="0" bIns="0">
-            <a:spAutoFit/>
-          </a:bodyPr>
-          <a:lstStyle/>
-          <a:p>
-            <a:pPr algn="l"/>
-            <a:r>
-              <a:rPr sz="1100" b="1">
-                <a:solidFill>
-                  <a:srgbClr val="000000"/>
-                </a:solidFill>
-                <a:latin typeface="맑은 고딕"/>
-                <a:ea typeface="맑은 고딕"/>
-                <a:cs typeface="맑은 고딕"/>
-              </a:rPr>
-              <a:t>운송</a:t>
-            </a:r>
-          </a:p>
-        </p:txBody>
-      </p:sp>
-      <p:sp>
-        <p:nvSpPr>
-          <p:cNvPr id="23" name="TextBox 22"/>
-          <p:cNvSpPr txBox="1"/>
-          <p:nvPr/>
-        </p:nvSpPr>
-        <p:spPr>
-          <a:xfrm>
-            <a:off x="1432800" y="3181500"/>
-            <a:ext cx="3766680" cy="409500"/>
-          </a:xfrm>
-          <a:prstGeom prst="rect">
-            <a:avLst/>
-          </a:prstGeom>
-          <a:noFill/>
-        </p:spPr>
-        <p:txBody>
-          <a:bodyPr wrap="square" anchor="ctr" lIns="0" rIns="0" tIns="0" bIns="0">
-            <a:spAutoFit/>
-          </a:bodyPr>
-          <a:lstStyle/>
-          <a:p>
-            <a:pPr algn="l"/>
-            <a:r>
-              <a:rPr sz="1100" b="0">
-                <a:solidFill>
-                  <a:srgbClr val="000000"/>
-                </a:solidFill>
-                <a:latin typeface="맑은 고딕"/>
-                <a:ea typeface="맑은 고딕"/>
-                <a:cs typeface="맑은 고딕"/>
-              </a:rPr>
-              <a:t>쓱배송 사륜차 → 대용량·중량 대응</a:t>
-            </a:r>
-          </a:p>
-        </p:txBody>
-      </p:sp>
-      <p:cxnSp>
-        <p:nvCxnSpPr>
-          <p:cNvPr id="24" name="Connector 23"/>
-          <p:cNvCxnSpPr/>
-          <p:nvPr/>
-        </p:nvCxnSpPr>
-        <p:spPr>
-          <a:xfrm>
-            <a:off x="478799" y="3591000"/>
-            <a:ext cx="4774681" cy="0"/>
-          </a:xfrm>
-          <a:prstGeom prst="bentConnector3">
-            <a:avLst/>
-          </a:prstGeom>
-          <a:ln w="6350">
-            <a:solidFill>
-              <a:srgbClr val="BFBFBF"/>
-            </a:solidFill>
-            <a:prstDash val="solid"/>
-          </a:ln>
-          <a:effectLst/>
-        </p:spPr>
-        <p:style>
-          <a:lnRef idx="2">
-            <a:schemeClr val="accent1"/>
-          </a:lnRef>
-          <a:fillRef idx="0">
-            <a:schemeClr val="accent1"/>
-          </a:fillRef>
-          <a:effectRef idx="1">
-            <a:schemeClr val="accent1"/>
-          </a:effectRef>
-          <a:fontRef idx="minor">
-            <a:schemeClr val="tx1"/>
-          </a:fontRef>
-        </p:style>
-      </p:cxnSp>
-      <p:sp>
-        <p:nvSpPr>
-          <p:cNvPr id="25" name="TextBox 24"/>
-          <p:cNvSpPr txBox="1"/>
-          <p:nvPr/>
-        </p:nvSpPr>
-        <p:spPr>
-          <a:xfrm>
-            <a:off x="532800" y="3591000"/>
-            <a:ext cx="900000" cy="409500"/>
-          </a:xfrm>
-          <a:prstGeom prst="rect">
-            <a:avLst/>
-          </a:prstGeom>
-          <a:noFill/>
-        </p:spPr>
-        <p:txBody>
-          <a:bodyPr wrap="square" anchor="ctr" lIns="0" rIns="0" tIns="0" bIns="0">
-            <a:spAutoFit/>
-          </a:bodyPr>
-          <a:lstStyle/>
-          <a:p>
-            <a:pPr algn="l"/>
-            <a:r>
-              <a:rPr sz="1100" b="1">
-                <a:solidFill>
-                  <a:srgbClr val="000000"/>
-                </a:solidFill>
-                <a:latin typeface="맑은 고딕"/>
-                <a:ea typeface="맑은 고딕"/>
-                <a:cs typeface="맑은 고딕"/>
-              </a:rPr>
-              <a:t>운영</a:t>
-            </a:r>
-          </a:p>
-        </p:txBody>
-      </p:sp>
-      <p:sp>
-        <p:nvSpPr>
-          <p:cNvPr id="26" name="TextBox 25"/>
-          <p:cNvSpPr txBox="1"/>
-          <p:nvPr/>
-        </p:nvSpPr>
-        <p:spPr>
-          <a:xfrm>
-            <a:off x="1432800" y="3591000"/>
-            <a:ext cx="3766680" cy="409500"/>
-          </a:xfrm>
-          <a:prstGeom prst="rect">
-            <a:avLst/>
-          </a:prstGeom>
-          <a:noFill/>
-        </p:spPr>
-        <p:txBody>
-          <a:bodyPr wrap="square" anchor="ctr" lIns="0" rIns="0" tIns="0" bIns="0">
-            <a:spAutoFit/>
-          </a:bodyPr>
-          <a:lstStyle/>
-          <a:p>
-            <a:pPr algn="l"/>
-            <a:r>
-              <a:rPr sz="1100" b="0">
-                <a:solidFill>
-                  <a:srgbClr val="000000"/>
-                </a:solidFill>
-                <a:latin typeface="맑은 고딕"/>
-                <a:ea typeface="맑은 고딕"/>
-                <a:cs typeface="맑은 고딕"/>
-              </a:rPr>
-              <a:t>20시 마감 → 2시간 내 배송 완료 </a:t>
-            </a:r>
-            <a:r>
-              <a:rPr sz="1000" b="0">
-                <a:solidFill>
-                  <a:srgbClr val="000000"/>
-                </a:solidFill>
-                <a:latin typeface="맑은 고딕"/>
-                <a:ea typeface="맑은 고딕"/>
-                <a:cs typeface="맑은 고딕"/>
-              </a:rPr>
-              <a:t>(기존 예약배송 병행)</a:t>
-            </a:r>
-          </a:p>
-        </p:txBody>
-      </p:sp>
-      <p:cxnSp>
-        <p:nvCxnSpPr>
-          <p:cNvPr id="27" name="Connector 26"/>
-          <p:cNvCxnSpPr/>
-          <p:nvPr/>
-        </p:nvCxnSpPr>
-        <p:spPr>
-          <a:xfrm>
-            <a:off x="478799" y="4000500"/>
-            <a:ext cx="4774681" cy="0"/>
-          </a:xfrm>
-          <a:prstGeom prst="bentConnector3">
-            <a:avLst/>
-          </a:prstGeom>
-          <a:ln w="6350">
-            <a:solidFill>
-              <a:srgbClr val="BFBFBF"/>
-            </a:solidFill>
-            <a:prstDash val="solid"/>
-          </a:ln>
-          <a:effectLst/>
-        </p:spPr>
-        <p:style>
-          <a:lnRef idx="2">
-            <a:schemeClr val="accent1"/>
-          </a:lnRef>
-          <a:fillRef idx="0">
-            <a:schemeClr val="accent1"/>
-          </a:fillRef>
-          <a:effectRef idx="1">
-            <a:schemeClr val="accent1"/>
-          </a:effectRef>
-          <a:fontRef idx="minor">
-            <a:schemeClr val="tx1"/>
-          </a:fontRef>
-        </p:style>
-      </p:cxnSp>
-      <p:sp>
-        <p:nvSpPr>
-          <p:cNvPr id="28" name="TextBox 27"/>
-          <p:cNvSpPr txBox="1"/>
-          <p:nvPr/>
-        </p:nvSpPr>
-        <p:spPr>
-          <a:xfrm>
-            <a:off x="532800" y="4000500"/>
-            <a:ext cx="900000" cy="409500"/>
-          </a:xfrm>
-          <a:prstGeom prst="rect">
-            <a:avLst/>
-          </a:prstGeom>
-          <a:noFill/>
-        </p:spPr>
-        <p:txBody>
-          <a:bodyPr wrap="square" anchor="ctr" lIns="0" rIns="0" tIns="0" bIns="0">
-            <a:spAutoFit/>
-          </a:bodyPr>
-          <a:lstStyle/>
-          <a:p>
-            <a:pPr algn="l"/>
-            <a:r>
-              <a:rPr sz="1100" b="1">
-                <a:solidFill>
-                  <a:srgbClr val="000000"/>
-                </a:solidFill>
-                <a:latin typeface="맑은 고딕"/>
-                <a:ea typeface="맑은 고딕"/>
-                <a:cs typeface="맑은 고딕"/>
-              </a:rPr>
-              <a:t>규모</a:t>
-            </a:r>
-          </a:p>
-        </p:txBody>
-      </p:sp>
-      <p:sp>
-        <p:nvSpPr>
-          <p:cNvPr id="29" name="TextBox 28"/>
-          <p:cNvSpPr txBox="1"/>
-          <p:nvPr/>
-        </p:nvSpPr>
-        <p:spPr>
-          <a:xfrm>
-            <a:off x="1432800" y="4000500"/>
-            <a:ext cx="3766680" cy="409500"/>
-          </a:xfrm>
-          <a:prstGeom prst="rect">
-            <a:avLst/>
-          </a:prstGeom>
-          <a:noFill/>
-        </p:spPr>
-        <p:txBody>
-          <a:bodyPr wrap="square" anchor="ctr" lIns="0" rIns="0" tIns="0" bIns="0">
-            <a:spAutoFit/>
-          </a:bodyPr>
-          <a:lstStyle/>
-          <a:p>
-            <a:pPr algn="l"/>
-            <a:r>
-              <a:rPr sz="1100" b="0">
-                <a:solidFill>
-                  <a:srgbClr val="000000"/>
-                </a:solidFill>
-                <a:latin typeface="맑은 고딕"/>
-                <a:ea typeface="맑은 고딕"/>
-                <a:cs typeface="맑은 고딕"/>
-              </a:rPr>
-              <a:t>약 15만 종 </a:t>
-            </a:r>
-            <a:r>
-              <a:rPr sz="1000" b="0">
-                <a:solidFill>
-                  <a:srgbClr val="000000"/>
-                </a:solidFill>
-                <a:latin typeface="맑은 고딕"/>
-                <a:ea typeface="맑은 고딕"/>
-                <a:cs typeface="맑은 고딕"/>
-              </a:rPr>
-              <a:t>(바로퀵 1만 종 대비 15배)</a:t>
-            </a:r>
-          </a:p>
-        </p:txBody>
-      </p:sp>
-      <p:graphicFrame>
-        <p:nvGraphicFramePr>
-          <p:cNvPr id="30" name="Table 29"/>
-          <p:cNvGraphicFramePr>
-            <a:graphicFrameLocks noGrp="1"/>
-          </p:cNvGraphicFramePr>
-          <p:nvPr/>
-        </p:nvGraphicFramePr>
-        <p:xfrm>
-          <a:off x="5487480" y="2430000"/>
-          <a:ext cx="3994918" cy="1980000"/>
-        </p:xfrm>
-        <a:graphic>
-          <a:graphicData uri="http://schemas.openxmlformats.org/drawingml/2006/table">
-            <a:tbl>
-              <a:tblPr>
-                <a:tableStyleId>{5C22544A-7EE6-4342-B048-85BDC9FD1C3A}</a:tableStyleId>
-              </a:tblPr>
-              <a:tblGrid>
-                <a:gridCol w="1198476"/>
-                <a:gridCol w="1398221"/>
-                <a:gridCol w="1398221"/>
-              </a:tblGrid>
-              <a:tr h="342000">
-                <a:tc>
-                  <a:txBody>
-                    <a:bodyPr wrap="square"/>
-                    <a:lstStyle/>
-                    <a:p>
-                      <a:pPr algn="ctr"/>
-                      <a:r>
-                        <a:rPr sz="1000" b="1">
-                          <a:solidFill>
-                            <a:srgbClr val="000000"/>
-                          </a:solidFill>
-                          <a:latin typeface="맑은 고딕"/>
-                          <a:ea typeface="맑은 고딕"/>
-                          <a:cs typeface="맑은 고딕"/>
-                        </a:rPr>
-                        <a:t>속도＼물량</a:t>
-                      </a:r>
-                    </a:p>
-                  </a:txBody>
-                  <a:tcPr anchor="ctr" marL="36000" marR="36000" marT="0" marB="0">
-                    <a:lnL w="9525" cap="flat">
-                      <a:solidFill>
-                        <a:srgbClr val="BFBFBF"/>
-                      </a:solidFill>
-                    </a:lnL>
-                    <a:lnR w="9525" cap="flat">
-                      <a:solidFill>
-                        <a:srgbClr val="BFBFBF"/>
-                      </a:solidFill>
-                    </a:lnR>
-                    <a:lnT w="9525" cap="flat">
-                      <a:solidFill>
-                        <a:srgbClr val="BFBFBF"/>
-                      </a:solidFill>
-                    </a:lnT>
-                    <a:lnB w="9525" cap="flat">
-                      <a:solidFill>
-                        <a:srgbClr val="BFBFBF"/>
-                      </a:solidFill>
-                    </a:lnB>
-                    <a:solidFill>
-                      <a:srgbClr val="EAEEF6"/>
-                    </a:solidFill>
-                  </a:tcPr>
-                </a:tc>
-                <a:tc>
-                  <a:txBody>
-                    <a:bodyPr wrap="square"/>
-                    <a:lstStyle/>
-                    <a:p>
-                      <a:pPr algn="ctr"/>
-                      <a:r>
-                        <a:rPr sz="1000" b="1">
-                          <a:solidFill>
-                            <a:srgbClr val="000000"/>
-                          </a:solidFill>
-                          <a:latin typeface="맑은 고딕"/>
-                          <a:ea typeface="맑은 고딕"/>
-                          <a:cs typeface="맑은 고딕"/>
-                        </a:rPr>
-                        <a:t>소량</a:t>
-                      </a:r>
-                    </a:p>
-                  </a:txBody>
-                  <a:tcPr anchor="ctr" marL="36000" marR="36000" marT="0" marB="0">
-                    <a:lnL w="9525" cap="flat">
-                      <a:solidFill>
-                        <a:srgbClr val="BFBFBF"/>
-                      </a:solidFill>
-                    </a:lnL>
-                    <a:lnR w="9525" cap="flat">
-                      <a:solidFill>
-                        <a:srgbClr val="BFBFBF"/>
-                      </a:solidFill>
-                    </a:lnR>
-                    <a:lnT w="9525" cap="flat">
-                      <a:solidFill>
-                        <a:srgbClr val="BFBFBF"/>
-                      </a:solidFill>
-                    </a:lnT>
-                    <a:lnB w="9525" cap="flat">
-                      <a:solidFill>
-                        <a:srgbClr val="BFBFBF"/>
-                      </a:solidFill>
-                    </a:lnB>
-                    <a:solidFill>
-                      <a:srgbClr val="EAEEF6"/>
-                    </a:solidFill>
-                  </a:tcPr>
-                </a:tc>
-                <a:tc>
-                  <a:txBody>
-                    <a:bodyPr wrap="square"/>
-                    <a:lstStyle/>
-                    <a:p>
-                      <a:pPr algn="ctr"/>
-                      <a:r>
-                        <a:rPr sz="1000" b="1">
-                          <a:solidFill>
-                            <a:srgbClr val="000000"/>
-                          </a:solidFill>
-                          <a:latin typeface="맑은 고딕"/>
-                          <a:ea typeface="맑은 고딕"/>
-                          <a:cs typeface="맑은 고딕"/>
-                        </a:rPr>
-                        <a:t>대용량</a:t>
-                      </a:r>
-                    </a:p>
-                  </a:txBody>
-                  <a:tcPr anchor="ctr" marL="36000" marR="36000" marT="0" marB="0">
-                    <a:lnL w="9525" cap="flat">
-                      <a:solidFill>
-                        <a:srgbClr val="BFBFBF"/>
-                      </a:solidFill>
-                    </a:lnL>
-                    <a:lnR w="9525" cap="flat">
-                      <a:solidFill>
-                        <a:srgbClr val="BFBFBF"/>
-                      </a:solidFill>
-                    </a:lnR>
-                    <a:lnT w="9525" cap="flat">
-                      <a:solidFill>
-                        <a:srgbClr val="BFBFBF"/>
-                      </a:solidFill>
-                    </a:lnT>
-                    <a:lnB w="9525" cap="flat">
-                      <a:solidFill>
-                        <a:srgbClr val="BFBFBF"/>
-                      </a:solidFill>
-                    </a:lnB>
-                    <a:solidFill>
-                      <a:srgbClr val="EAEEF6"/>
-                    </a:solidFill>
-                  </a:tcPr>
-                </a:tc>
-              </a:tr>
-              <a:tr h="819000">
-                <a:tc>
-                  <a:txBody>
-                    <a:bodyPr wrap="square"/>
-                    <a:lstStyle/>
-                    <a:p>
-                      <a:pPr algn="ctr"/>
-                      <a:r>
-                        <a:rPr sz="1000" b="1">
-                          <a:solidFill>
-                            <a:srgbClr val="000000"/>
-                          </a:solidFill>
-                          <a:latin typeface="맑은 고딕"/>
-                          <a:ea typeface="맑은 고딕"/>
-                          <a:cs typeface="맑은 고딕"/>
-                        </a:rPr>
-                        <a:t>빠름</a:t>
-                      </a:r>
-                    </a:p>
-                    <a:p>
-                      <a:pPr algn="ctr"/>
-                      <a:r>
-                        <a:rPr sz="900" b="1">
-                          <a:solidFill>
-                            <a:srgbClr val="000000"/>
-                          </a:solidFill>
-                          <a:latin typeface="맑은 고딕"/>
-                          <a:ea typeface="맑은 고딕"/>
-                          <a:cs typeface="맑은 고딕"/>
-                        </a:rPr>
-                        <a:t>(당일 1~2H)</a:t>
-                      </a:r>
-                    </a:p>
-                  </a:txBody>
-                  <a:tcPr anchor="ctr" marL="36000" marR="36000" marT="0" marB="0">
-                    <a:lnL w="9525" cap="flat">
-                      <a:solidFill>
-                        <a:srgbClr val="BFBFBF"/>
-                      </a:solidFill>
-                    </a:lnL>
-                    <a:lnR w="9525" cap="flat">
-                      <a:solidFill>
-                        <a:srgbClr val="BFBFBF"/>
-                      </a:solidFill>
-                    </a:lnR>
-                    <a:lnT w="9525" cap="flat">
-                      <a:solidFill>
-                        <a:srgbClr val="BFBFBF"/>
-                      </a:solidFill>
-                    </a:lnT>
-                    <a:lnB w="9525" cap="flat">
-                      <a:solidFill>
-                        <a:srgbClr val="BFBFBF"/>
-                      </a:solidFill>
-                    </a:lnB>
-                    <a:solidFill>
-                      <a:srgbClr val="EAEEF6"/>
-                    </a:solidFill>
-                  </a:tcPr>
-                </a:tc>
-                <a:tc>
-                  <a:txBody>
-                    <a:bodyPr wrap="square"/>
-                    <a:lstStyle/>
-                    <a:p>
-                      <a:pPr algn="ctr"/>
-                      <a:r>
-                        <a:rPr sz="1000" b="0">
-                          <a:solidFill>
-                            <a:srgbClr val="000000"/>
-                          </a:solidFill>
-                          <a:latin typeface="맑은 고딕"/>
-                          <a:ea typeface="맑은 고딕"/>
-                          <a:cs typeface="맑은 고딕"/>
-                        </a:rPr>
-                        <a:t>바로퀵 </a:t>
-                      </a:r>
-                      <a:r>
-                        <a:rPr sz="900" b="0">
-                          <a:solidFill>
-                            <a:srgbClr val="000000"/>
-                          </a:solidFill>
-                          <a:latin typeface="맑은 고딕"/>
-                          <a:ea typeface="맑은 고딕"/>
-                          <a:cs typeface="맑은 고딕"/>
-                        </a:rPr>
-                        <a:t>(1H)</a:t>
-                      </a:r>
-                    </a:p>
-                  </a:txBody>
-                  <a:tcPr anchor="ctr" marL="36000" marR="36000" marT="0" marB="0">
-                    <a:lnL w="9525" cap="flat">
-                      <a:solidFill>
-                        <a:srgbClr val="BFBFBF"/>
-                      </a:solidFill>
-                    </a:lnL>
-                    <a:lnR w="9525" cap="flat">
-                      <a:solidFill>
-                        <a:srgbClr val="BFBFBF"/>
-                      </a:solidFill>
-                    </a:lnR>
-                    <a:lnT w="9525" cap="flat">
-                      <a:solidFill>
-                        <a:srgbClr val="BFBFBF"/>
-                      </a:solidFill>
-                    </a:lnT>
-                    <a:lnB w="9525" cap="flat">
-                      <a:solidFill>
-                        <a:srgbClr val="BFBFBF"/>
-                      </a:solidFill>
-                    </a:lnB>
-                    <a:solidFill>
-                      <a:srgbClr val="FFFFFF"/>
-                    </a:solidFill>
-                  </a:tcPr>
-                </a:tc>
-                <a:tc>
-                  <a:txBody>
-                    <a:bodyPr wrap="square"/>
-                    <a:lstStyle/>
-                    <a:p>
-                      <a:pPr algn="ctr"/>
-                      <a:r>
-                        <a:rPr sz="1000" b="1">
-                          <a:solidFill>
-                            <a:srgbClr val="002060"/>
-                          </a:solidFill>
-                          <a:latin typeface="맑은 고딕"/>
-                          <a:ea typeface="맑은 고딕"/>
-                          <a:cs typeface="맑은 고딕"/>
-                        </a:rPr>
-                        <a:t>★ 2시간 배송 </a:t>
-                      </a:r>
-                      <a:r>
-                        <a:rPr sz="900" b="1">
-                          <a:solidFill>
-                            <a:srgbClr val="002060"/>
-                          </a:solidFill>
-                          <a:latin typeface="맑은 고딕"/>
-                          <a:ea typeface="맑은 고딕"/>
-                          <a:cs typeface="맑은 고딕"/>
-                        </a:rPr>
-                        <a:t>(신규)</a:t>
-                      </a:r>
-                    </a:p>
-                  </a:txBody>
-                  <a:tcPr anchor="ctr" marL="36000" marR="36000" marT="0" marB="0">
-                    <a:lnL w="9525" cap="flat">
-                      <a:solidFill>
-                        <a:srgbClr val="BFBFBF"/>
-                      </a:solidFill>
-                    </a:lnL>
-                    <a:lnR w="9525" cap="flat">
-                      <a:solidFill>
-                        <a:srgbClr val="BFBFBF"/>
-                      </a:solidFill>
-                    </a:lnR>
-                    <a:lnT w="9525" cap="flat">
-                      <a:solidFill>
-                        <a:srgbClr val="BFBFBF"/>
-                      </a:solidFill>
-                    </a:lnT>
-                    <a:lnB w="9525" cap="flat">
-                      <a:solidFill>
-                        <a:srgbClr val="BFBFBF"/>
-                      </a:solidFill>
-                    </a:lnB>
-                    <a:solidFill>
-                      <a:srgbClr val="DEEBF7"/>
-                    </a:solidFill>
-                  </a:tcPr>
-                </a:tc>
-              </a:tr>
-              <a:tr h="819000">
-                <a:tc>
-                  <a:txBody>
-                    <a:bodyPr wrap="square"/>
-                    <a:lstStyle/>
-                    <a:p>
-                      <a:pPr algn="ctr"/>
-                      <a:r>
-                        <a:rPr sz="1000" b="1">
-                          <a:solidFill>
-                            <a:srgbClr val="000000"/>
-                          </a:solidFill>
-                          <a:latin typeface="맑은 고딕"/>
-                          <a:ea typeface="맑은 고딕"/>
-                          <a:cs typeface="맑은 고딕"/>
-                        </a:rPr>
-                        <a:t>예약</a:t>
-                      </a:r>
-                    </a:p>
-                    <a:p>
-                      <a:pPr algn="ctr"/>
-                      <a:r>
-                        <a:rPr sz="900" b="1">
-                          <a:solidFill>
-                            <a:srgbClr val="000000"/>
-                          </a:solidFill>
-                          <a:latin typeface="맑은 고딕"/>
-                          <a:ea typeface="맑은 고딕"/>
-                          <a:cs typeface="맑은 고딕"/>
-                        </a:rPr>
-                        <a:t>(익일~)</a:t>
-                      </a:r>
-                    </a:p>
-                  </a:txBody>
-                  <a:tcPr anchor="ctr" marL="36000" marR="36000" marT="0" marB="0">
-                    <a:lnL w="9525" cap="flat">
-                      <a:solidFill>
-                        <a:srgbClr val="BFBFBF"/>
-                      </a:solidFill>
-                    </a:lnL>
-                    <a:lnR w="9525" cap="flat">
-                      <a:solidFill>
-                        <a:srgbClr val="BFBFBF"/>
-                      </a:solidFill>
-                    </a:lnR>
-                    <a:lnT w="9525" cap="flat">
-                      <a:solidFill>
-                        <a:srgbClr val="BFBFBF"/>
-                      </a:solidFill>
-                    </a:lnT>
-                    <a:lnB w="9525" cap="flat">
-                      <a:solidFill>
-                        <a:srgbClr val="BFBFBF"/>
-                      </a:solidFill>
-                    </a:lnB>
-                    <a:solidFill>
-                      <a:srgbClr val="EAEEF6"/>
-                    </a:solidFill>
-                  </a:tcPr>
-                </a:tc>
-                <a:tc>
-                  <a:txBody>
-                    <a:bodyPr wrap="square"/>
-                    <a:lstStyle/>
-                    <a:p>
-                      <a:pPr algn="ctr"/>
-                      <a:r>
-                        <a:rPr sz="1000" b="0">
-                          <a:solidFill>
-                            <a:srgbClr val="595959"/>
-                          </a:solidFill>
-                          <a:latin typeface="맑은 고딕"/>
-                          <a:ea typeface="맑은 고딕"/>
-                          <a:cs typeface="맑은 고딕"/>
-                        </a:rPr>
-                        <a:t>해당 없음</a:t>
-                      </a:r>
-                    </a:p>
-                  </a:txBody>
-                  <a:tcPr anchor="ctr" marL="36000" marR="36000" marT="0" marB="0">
-                    <a:lnL w="9525" cap="flat">
-                      <a:solidFill>
-                        <a:srgbClr val="BFBFBF"/>
-                      </a:solidFill>
-                    </a:lnL>
-                    <a:lnR w="9525" cap="flat">
-                      <a:solidFill>
-                        <a:srgbClr val="BFBFBF"/>
-                      </a:solidFill>
-                    </a:lnR>
-                    <a:lnT w="9525" cap="flat">
-                      <a:solidFill>
-                        <a:srgbClr val="BFBFBF"/>
-                      </a:solidFill>
-                    </a:lnT>
-                    <a:lnB w="9525" cap="flat">
-                      <a:solidFill>
-                        <a:srgbClr val="BFBFBF"/>
-                      </a:solidFill>
-                    </a:lnB>
-                    <a:solidFill>
-                      <a:srgbClr val="FFFFFF"/>
-                    </a:solidFill>
-                  </a:tcPr>
-                </a:tc>
-                <a:tc>
-                  <a:txBody>
-                    <a:bodyPr wrap="square"/>
-                    <a:lstStyle/>
-                    <a:p>
-                      <a:pPr algn="ctr"/>
-                      <a:r>
-                        <a:rPr sz="1000" b="0">
-                          <a:solidFill>
-                            <a:srgbClr val="000000"/>
-                          </a:solidFill>
-                          <a:latin typeface="맑은 고딕"/>
-                          <a:ea typeface="맑은 고딕"/>
-                          <a:cs typeface="맑은 고딕"/>
-                        </a:rPr>
-                        <a:t>주간·새벽·트레이더스</a:t>
-                      </a:r>
-                    </a:p>
-                  </a:txBody>
-                  <a:tcPr anchor="ctr" marL="36000" marR="36000" marT="0" marB="0">
-                    <a:lnL w="9525" cap="flat">
-                      <a:solidFill>
-                        <a:srgbClr val="BFBFBF"/>
-                      </a:solidFill>
-                    </a:lnL>
-                    <a:lnR w="9525" cap="flat">
-                      <a:solidFill>
-                        <a:srgbClr val="BFBFBF"/>
-                      </a:solidFill>
-                    </a:lnR>
-                    <a:lnT w="9525" cap="flat">
-                      <a:solidFill>
-                        <a:srgbClr val="BFBFBF"/>
-                      </a:solidFill>
-                    </a:lnT>
-                    <a:lnB w="9525" cap="flat">
-                      <a:solidFill>
-                        <a:srgbClr val="BFBFBF"/>
-                      </a:solidFill>
-                    </a:lnB>
-                    <a:solidFill>
-                      <a:srgbClr val="FFFFFF"/>
-                    </a:solidFill>
-                  </a:tcPr>
-                </a:tc>
-              </a:tr>
-            </a:tbl>
-          </a:graphicData>
-        </a:graphic>
-      </p:graphicFrame>
-      <p:sp>
-        <p:nvSpPr>
-          <p:cNvPr id="31" name="TextBox 30"/>
-          <p:cNvSpPr txBox="1"/>
-          <p:nvPr/>
-        </p:nvSpPr>
-        <p:spPr>
-          <a:xfrm>
-            <a:off x="424800" y="4546800"/>
-            <a:ext cx="9057600" cy="180000"/>
-          </a:xfrm>
-          <a:prstGeom prst="rect">
-            <a:avLst/>
-          </a:prstGeom>
-          <a:noFill/>
-        </p:spPr>
-        <p:txBody>
-          <a:bodyPr wrap="square" anchor="t" lIns="0" rIns="0" tIns="0" bIns="0">
-            <a:spAutoFit/>
-          </a:bodyPr>
-          <a:lstStyle/>
-          <a:p>
-            <a:pPr algn="l"/>
-            <a:r>
-              <a:rPr sz="1200" b="1">
-                <a:solidFill>
-                  <a:srgbClr val="000000"/>
-                </a:solidFill>
-                <a:latin typeface="맑은 고딕"/>
-                <a:ea typeface="맑은 고딕"/>
-                <a:cs typeface="맑은 고딕"/>
-              </a:rPr>
-              <a:t>• ③ 확산 계획</a:t>
-            </a:r>
-          </a:p>
-        </p:txBody>
-      </p:sp>
-      <p:sp>
-        <p:nvSpPr>
-          <p:cNvPr id="32" name="Rectangle 31"/>
-          <p:cNvSpPr/>
-          <p:nvPr/>
-        </p:nvSpPr>
-        <p:spPr>
-          <a:xfrm>
-            <a:off x="424800" y="4744800"/>
-            <a:ext cx="9057600" cy="918000"/>
-          </a:xfrm>
-          <a:prstGeom prst="rect">
-            <a:avLst/>
-          </a:prstGeom>
-          <a:solidFill>
-            <a:srgbClr val="FFFFFF"/>
-          </a:solidFill>
-          <a:ln w="9525">
-            <a:solidFill>
-              <a:srgbClr val="BFBFBF"/>
-            </a:solidFill>
-          </a:ln>
-          <a:effectLst/>
-        </p:spPr>
-        <p:style>
-          <a:lnRef idx="1">
-            <a:schemeClr val="accent1"/>
-          </a:lnRef>
-          <a:fillRef idx="3">
-            <a:schemeClr val="accent1"/>
-          </a:fillRef>
-          <a:effectRef idx="2">
-            <a:schemeClr val="accent1"/>
-          </a:effectRef>
-          <a:fontRef idx="minor">
-            <a:schemeClr val="lt1"/>
-          </a:fontRef>
-        </p:style>
-        <p:txBody>
-          <a:bodyPr rtlCol="0" anchor="ctr"/>
-          <a:lstStyle/>
-          <a:p>
-            <a:pPr algn="ctr"/>
-          </a:p>
-        </p:txBody>
-      </p:sp>
-      <p:cxnSp>
-        <p:nvCxnSpPr>
-          <p:cNvPr id="33" name="Connector 32"/>
-          <p:cNvCxnSpPr/>
-          <p:nvPr/>
-        </p:nvCxnSpPr>
-        <p:spPr>
-          <a:xfrm>
-            <a:off x="658800" y="5067000"/>
-            <a:ext cx="8589600" cy="0"/>
-          </a:xfrm>
-          <a:prstGeom prst="bentConnector3">
-            <a:avLst/>
-          </a:prstGeom>
-          <a:ln w="25400">
-            <a:solidFill>
-              <a:srgbClr val="000000"/>
-            </a:solidFill>
-            <a:prstDash val="solid"/>
-            <a:tailEnd type="triangle" w="med" len="med"/>
-          </a:ln>
-          <a:effectLst/>
-        </p:spPr>
-        <p:style>
-          <a:lnRef idx="2">
-            <a:schemeClr val="accent1"/>
-          </a:lnRef>
-          <a:fillRef idx="0">
-            <a:schemeClr val="accent1"/>
-          </a:fillRef>
-          <a:effectRef idx="1">
-            <a:schemeClr val="accent1"/>
-          </a:effectRef>
-          <a:fontRef idx="minor">
-            <a:schemeClr val="tx1"/>
-          </a:fontRef>
-        </p:style>
-      </p:cxnSp>
-      <p:sp>
-        <p:nvSpPr>
-          <p:cNvPr id="34" name="Oval 33"/>
-          <p:cNvSpPr/>
-          <p:nvPr/>
-        </p:nvSpPr>
-        <p:spPr>
-          <a:xfrm>
-            <a:off x="1682100" y="5016600"/>
-            <a:ext cx="100800" cy="100800"/>
-          </a:xfrm>
-          <a:prstGeom prst="ellipse">
-            <a:avLst/>
-          </a:prstGeom>
-          <a:solidFill>
-            <a:srgbClr val="FFFFFF"/>
-          </a:solidFill>
-          <a:ln w="15875">
-            <a:solidFill>
-              <a:srgbClr val="000000"/>
-            </a:solidFill>
-          </a:ln>
-          <a:effectLst/>
-        </p:spPr>
-        <p:style>
-          <a:lnRef idx="1">
-            <a:schemeClr val="accent1"/>
-          </a:lnRef>
-          <a:fillRef idx="3">
-            <a:schemeClr val="accent1"/>
-          </a:fillRef>
-          <a:effectRef idx="2">
-            <a:schemeClr val="accent1"/>
-          </a:effectRef>
-          <a:fontRef idx="minor">
-            <a:schemeClr val="lt1"/>
-          </a:fontRef>
-        </p:style>
-        <p:txBody>
-          <a:bodyPr rtlCol="0" anchor="ctr"/>
-          <a:lstStyle/>
-          <a:p>
-            <a:pPr algn="ctr"/>
-          </a:p>
-        </p:txBody>
-      </p:sp>
-      <p:sp>
-        <p:nvSpPr>
-          <p:cNvPr id="35" name="TextBox 34"/>
-          <p:cNvSpPr txBox="1"/>
-          <p:nvPr/>
-        </p:nvSpPr>
-        <p:spPr>
-          <a:xfrm>
-            <a:off x="658800" y="4861800"/>
-            <a:ext cx="2147400" cy="162000"/>
-          </a:xfrm>
-          <a:prstGeom prst="rect">
-            <a:avLst/>
-          </a:prstGeom>
-          <a:noFill/>
-        </p:spPr>
-        <p:txBody>
-          <a:bodyPr wrap="square" anchor="b" lIns="0" rIns="0" tIns="0" bIns="0">
-            <a:spAutoFit/>
-          </a:bodyPr>
-          <a:lstStyle/>
-          <a:p>
-            <a:pPr algn="ctr"/>
-            <a:r>
-              <a:rPr sz="1100" b="1">
-                <a:solidFill>
-                  <a:srgbClr val="000000"/>
-                </a:solidFill>
-                <a:latin typeface="맑은 고딕"/>
-                <a:ea typeface="맑은 고딕"/>
-                <a:cs typeface="맑은 고딕"/>
-              </a:rPr>
-              <a:t>'26.7월</a:t>
-            </a:r>
-          </a:p>
-        </p:txBody>
-      </p:sp>
-      <p:sp>
-        <p:nvSpPr>
-          <p:cNvPr id="36" name="TextBox 35"/>
-          <p:cNvSpPr txBox="1"/>
-          <p:nvPr/>
-        </p:nvSpPr>
-        <p:spPr>
-          <a:xfrm>
-            <a:off x="658800" y="5131800"/>
-            <a:ext cx="2147400" cy="413999"/>
-          </a:xfrm>
-          <a:prstGeom prst="rect">
-            <a:avLst/>
-          </a:prstGeom>
-          <a:noFill/>
-        </p:spPr>
-        <p:txBody>
-          <a:bodyPr wrap="square" anchor="t" lIns="0" rIns="0" tIns="0" bIns="0">
-            <a:spAutoFit/>
-          </a:bodyPr>
-          <a:lstStyle/>
-          <a:p>
-            <a:pPr algn="ctr"/>
-            <a:r>
-              <a:rPr sz="1100" b="0">
-                <a:solidFill>
-                  <a:srgbClr val="000000"/>
-                </a:solidFill>
-                <a:latin typeface="맑은 고딕"/>
-                <a:ea typeface="맑은 고딕"/>
-                <a:cs typeface="맑은 고딕"/>
-              </a:rPr>
-              <a:t>양재·하남점</a:t>
-            </a:r>
-          </a:p>
-          <a:p>
-            <a:pPr algn="ctr"/>
-            <a:r>
-              <a:rPr sz="1100" b="0">
-                <a:solidFill>
-                  <a:srgbClr val="000000"/>
-                </a:solidFill>
-                <a:latin typeface="맑은 고딕"/>
-                <a:ea typeface="맑은 고딕"/>
-                <a:cs typeface="맑은 고딕"/>
-              </a:rPr>
-              <a:t>도입</a:t>
-            </a:r>
-          </a:p>
-        </p:txBody>
-      </p:sp>
-      <p:sp>
-        <p:nvSpPr>
-          <p:cNvPr id="37" name="Oval 36"/>
-          <p:cNvSpPr/>
-          <p:nvPr/>
-        </p:nvSpPr>
-        <p:spPr>
-          <a:xfrm>
-            <a:off x="3829499" y="5016600"/>
-            <a:ext cx="100800" cy="100800"/>
-          </a:xfrm>
-          <a:prstGeom prst="ellipse">
-            <a:avLst/>
-          </a:prstGeom>
-          <a:solidFill>
-            <a:srgbClr val="FFFFFF"/>
-          </a:solidFill>
-          <a:ln w="15875">
-            <a:solidFill>
-              <a:srgbClr val="000000"/>
-            </a:solidFill>
-          </a:ln>
-          <a:effectLst/>
-        </p:spPr>
-        <p:style>
-          <a:lnRef idx="1">
-            <a:schemeClr val="accent1"/>
-          </a:lnRef>
-          <a:fillRef idx="3">
-            <a:schemeClr val="accent1"/>
-          </a:fillRef>
-          <a:effectRef idx="2">
-            <a:schemeClr val="accent1"/>
-          </a:effectRef>
-          <a:fontRef idx="minor">
-            <a:schemeClr val="lt1"/>
-          </a:fontRef>
-        </p:style>
-        <p:txBody>
-          <a:bodyPr rtlCol="0" anchor="ctr"/>
-          <a:lstStyle/>
-          <a:p>
-            <a:pPr algn="ctr"/>
-          </a:p>
-        </p:txBody>
-      </p:sp>
-      <p:sp>
-        <p:nvSpPr>
-          <p:cNvPr id="38" name="TextBox 37"/>
-          <p:cNvSpPr txBox="1"/>
-          <p:nvPr/>
-        </p:nvSpPr>
-        <p:spPr>
-          <a:xfrm>
-            <a:off x="2806200" y="4861800"/>
-            <a:ext cx="2147400" cy="162000"/>
-          </a:xfrm>
-          <a:prstGeom prst="rect">
-            <a:avLst/>
-          </a:prstGeom>
-          <a:noFill/>
-        </p:spPr>
-        <p:txBody>
-          <a:bodyPr wrap="square" anchor="b" lIns="0" rIns="0" tIns="0" bIns="0">
-            <a:spAutoFit/>
-          </a:bodyPr>
-          <a:lstStyle/>
-          <a:p>
-            <a:pPr algn="ctr"/>
-            <a:r>
-              <a:rPr sz="1100" b="1">
-                <a:solidFill>
-                  <a:srgbClr val="000000"/>
-                </a:solidFill>
-                <a:latin typeface="맑은 고딕"/>
-                <a:ea typeface="맑은 고딕"/>
-                <a:cs typeface="맑은 고딕"/>
-              </a:rPr>
-              <a:t>8월</a:t>
-            </a:r>
-          </a:p>
-        </p:txBody>
-      </p:sp>
-      <p:sp>
-        <p:nvSpPr>
-          <p:cNvPr id="39" name="TextBox 38"/>
-          <p:cNvSpPr txBox="1"/>
-          <p:nvPr/>
-        </p:nvSpPr>
-        <p:spPr>
-          <a:xfrm>
-            <a:off x="2806200" y="5131800"/>
-            <a:ext cx="2147400" cy="413999"/>
-          </a:xfrm>
-          <a:prstGeom prst="rect">
-            <a:avLst/>
-          </a:prstGeom>
-          <a:noFill/>
-        </p:spPr>
-        <p:txBody>
-          <a:bodyPr wrap="square" anchor="t" lIns="0" rIns="0" tIns="0" bIns="0">
-            <a:spAutoFit/>
-          </a:bodyPr>
-          <a:lstStyle/>
-          <a:p>
-            <a:pPr algn="ctr"/>
-            <a:r>
-              <a:rPr sz="1100" b="0">
-                <a:solidFill>
-                  <a:srgbClr val="000000"/>
-                </a:solidFill>
-                <a:latin typeface="맑은 고딕"/>
-                <a:ea typeface="맑은 고딕"/>
-                <a:cs typeface="맑은 고딕"/>
-              </a:rPr>
-              <a:t>서울 확대</a:t>
-            </a:r>
-          </a:p>
-          <a:p>
-            <a:pPr algn="ctr"/>
-            <a:r>
-              <a:rPr sz="1000" b="0">
-                <a:solidFill>
-                  <a:srgbClr val="000000"/>
-                </a:solidFill>
-                <a:latin typeface="맑은 고딕"/>
-                <a:ea typeface="맑은 고딕"/>
-                <a:cs typeface="맑은 고딕"/>
-              </a:rPr>
-              <a:t>(월계·가든5·신도림)</a:t>
-            </a:r>
-          </a:p>
-        </p:txBody>
-      </p:sp>
-      <p:sp>
-        <p:nvSpPr>
-          <p:cNvPr id="40" name="Oval 39"/>
-          <p:cNvSpPr/>
-          <p:nvPr/>
-        </p:nvSpPr>
-        <p:spPr>
-          <a:xfrm>
-            <a:off x="5976900" y="5016600"/>
-            <a:ext cx="100800" cy="100800"/>
-          </a:xfrm>
-          <a:prstGeom prst="ellipse">
-            <a:avLst/>
-          </a:prstGeom>
-          <a:solidFill>
-            <a:srgbClr val="FFFFFF"/>
-          </a:solidFill>
-          <a:ln w="15875">
-            <a:solidFill>
-              <a:srgbClr val="000000"/>
-            </a:solidFill>
-          </a:ln>
-          <a:effectLst/>
-        </p:spPr>
-        <p:style>
-          <a:lnRef idx="1">
-            <a:schemeClr val="accent1"/>
-          </a:lnRef>
-          <a:fillRef idx="3">
-            <a:schemeClr val="accent1"/>
-          </a:fillRef>
-          <a:effectRef idx="2">
-            <a:schemeClr val="accent1"/>
-          </a:effectRef>
-          <a:fontRef idx="minor">
-            <a:schemeClr val="lt1"/>
-          </a:fontRef>
-        </p:style>
-        <p:txBody>
-          <a:bodyPr rtlCol="0" anchor="ctr"/>
-          <a:lstStyle/>
-          <a:p>
-            <a:pPr algn="ctr"/>
-          </a:p>
-        </p:txBody>
-      </p:sp>
-      <p:sp>
-        <p:nvSpPr>
-          <p:cNvPr id="41" name="TextBox 40"/>
-          <p:cNvSpPr txBox="1"/>
-          <p:nvPr/>
-        </p:nvSpPr>
-        <p:spPr>
-          <a:xfrm>
-            <a:off x="4953600" y="4861800"/>
-            <a:ext cx="2147400" cy="162000"/>
-          </a:xfrm>
-          <a:prstGeom prst="rect">
-            <a:avLst/>
-          </a:prstGeom>
-          <a:noFill/>
-        </p:spPr>
-        <p:txBody>
-          <a:bodyPr wrap="square" anchor="b" lIns="0" rIns="0" tIns="0" bIns="0">
-            <a:spAutoFit/>
-          </a:bodyPr>
-          <a:lstStyle/>
-          <a:p>
-            <a:pPr algn="ctr"/>
-            <a:r>
-              <a:rPr sz="1100" b="1">
-                <a:solidFill>
-                  <a:srgbClr val="000000"/>
-                </a:solidFill>
-                <a:latin typeface="맑은 고딕"/>
-                <a:ea typeface="맑은 고딕"/>
-                <a:cs typeface="맑은 고딕"/>
-              </a:rPr>
-              <a:t>9월</a:t>
-            </a:r>
-          </a:p>
-        </p:txBody>
-      </p:sp>
-      <p:sp>
-        <p:nvSpPr>
-          <p:cNvPr id="42" name="TextBox 41"/>
-          <p:cNvSpPr txBox="1"/>
-          <p:nvPr/>
-        </p:nvSpPr>
-        <p:spPr>
-          <a:xfrm>
-            <a:off x="4953600" y="5131800"/>
-            <a:ext cx="2147400" cy="413999"/>
-          </a:xfrm>
-          <a:prstGeom prst="rect">
-            <a:avLst/>
-          </a:prstGeom>
-          <a:noFill/>
-        </p:spPr>
-        <p:txBody>
-          <a:bodyPr wrap="square" anchor="t" lIns="0" rIns="0" tIns="0" bIns="0">
-            <a:spAutoFit/>
-          </a:bodyPr>
-          <a:lstStyle/>
-          <a:p>
-            <a:pPr algn="ctr"/>
-            <a:r>
-              <a:rPr sz="1100" b="0">
-                <a:solidFill>
-                  <a:srgbClr val="000000"/>
-                </a:solidFill>
-                <a:latin typeface="맑은 고딕"/>
-                <a:ea typeface="맑은 고딕"/>
-                <a:cs typeface="맑은 고딕"/>
-              </a:rPr>
-              <a:t>전국 확대</a:t>
-            </a:r>
-          </a:p>
-        </p:txBody>
-      </p:sp>
-      <p:sp>
-        <p:nvSpPr>
-          <p:cNvPr id="43" name="Oval 42"/>
-          <p:cNvSpPr/>
-          <p:nvPr/>
-        </p:nvSpPr>
-        <p:spPr>
-          <a:xfrm>
-            <a:off x="8124299" y="5016600"/>
-            <a:ext cx="100800" cy="100800"/>
-          </a:xfrm>
-          <a:prstGeom prst="ellipse">
-            <a:avLst/>
-          </a:prstGeom>
-          <a:solidFill>
-            <a:srgbClr val="FFFFFF"/>
-          </a:solidFill>
-          <a:ln w="15875">
-            <a:solidFill>
-              <a:srgbClr val="000000"/>
-            </a:solidFill>
-          </a:ln>
-          <a:effectLst/>
-        </p:spPr>
-        <p:style>
-          <a:lnRef idx="1">
-            <a:schemeClr val="accent1"/>
-          </a:lnRef>
-          <a:fillRef idx="3">
-            <a:schemeClr val="accent1"/>
-          </a:fillRef>
-          <a:effectRef idx="2">
-            <a:schemeClr val="accent1"/>
-          </a:effectRef>
-          <a:fontRef idx="minor">
-            <a:schemeClr val="lt1"/>
-          </a:fontRef>
-        </p:style>
-        <p:txBody>
-          <a:bodyPr rtlCol="0" anchor="ctr"/>
-          <a:lstStyle/>
-          <a:p>
-            <a:pPr algn="ctr"/>
-          </a:p>
-        </p:txBody>
-      </p:sp>
-      <p:sp>
-        <p:nvSpPr>
-          <p:cNvPr id="44" name="TextBox 43"/>
-          <p:cNvSpPr txBox="1"/>
-          <p:nvPr/>
-        </p:nvSpPr>
-        <p:spPr>
-          <a:xfrm>
-            <a:off x="7100999" y="4861800"/>
-            <a:ext cx="2147400" cy="162000"/>
-          </a:xfrm>
-          <a:prstGeom prst="rect">
-            <a:avLst/>
-          </a:prstGeom>
-          <a:noFill/>
-        </p:spPr>
-        <p:txBody>
-          <a:bodyPr wrap="square" anchor="b" lIns="0" rIns="0" tIns="0" bIns="0">
-            <a:spAutoFit/>
-          </a:bodyPr>
-          <a:lstStyle/>
-          <a:p>
-            <a:pPr algn="ctr"/>
-            <a:r>
-              <a:rPr sz="1100" b="1">
-                <a:solidFill>
-                  <a:srgbClr val="000000"/>
-                </a:solidFill>
-                <a:latin typeface="맑은 고딕"/>
-                <a:ea typeface="맑은 고딕"/>
-                <a:cs typeface="맑은 고딕"/>
-              </a:rPr>
-              <a:t>연말</a:t>
-            </a:r>
-          </a:p>
-        </p:txBody>
-      </p:sp>
-      <p:sp>
-        <p:nvSpPr>
-          <p:cNvPr id="45" name="TextBox 44"/>
-          <p:cNvSpPr txBox="1"/>
-          <p:nvPr/>
-        </p:nvSpPr>
-        <p:spPr>
-          <a:xfrm>
-            <a:off x="7100999" y="5131800"/>
-            <a:ext cx="2147400" cy="413999"/>
-          </a:xfrm>
-          <a:prstGeom prst="rect">
-            <a:avLst/>
-          </a:prstGeom>
-          <a:noFill/>
-        </p:spPr>
-        <p:txBody>
-          <a:bodyPr wrap="square" anchor="t" lIns="0" rIns="0" tIns="0" bIns="0">
-            <a:spAutoFit/>
-          </a:bodyPr>
-          <a:lstStyle/>
-          <a:p>
-            <a:pPr algn="ctr"/>
-            <a:r>
-              <a:rPr sz="1100" b="0">
-                <a:solidFill>
-                  <a:srgbClr val="000000"/>
-                </a:solidFill>
-                <a:latin typeface="맑은 고딕"/>
-                <a:ea typeface="맑은 고딕"/>
-                <a:cs typeface="맑은 고딕"/>
-              </a:rPr>
-              <a:t>50여 점포</a:t>
-            </a:r>
-          </a:p>
-          <a:p>
-            <a:pPr algn="ctr"/>
-            <a:r>
-              <a:rPr sz="1100" b="0">
-                <a:solidFill>
-                  <a:srgbClr val="000000"/>
-                </a:solidFill>
-                <a:latin typeface="맑은 고딕"/>
-                <a:ea typeface="맑은 고딕"/>
-                <a:cs typeface="맑은 고딕"/>
-              </a:rPr>
-              <a:t>운영</a:t>
-            </a:r>
-          </a:p>
-        </p:txBody>
-      </p:sp>
-      <p:sp>
-        <p:nvSpPr>
-          <p:cNvPr id="46" name="TextBox 45"/>
-          <p:cNvSpPr txBox="1"/>
-          <p:nvPr/>
-        </p:nvSpPr>
-        <p:spPr>
-          <a:xfrm>
-            <a:off x="424800" y="5727600"/>
-            <a:ext cx="9057600" cy="216000"/>
-          </a:xfrm>
-          <a:prstGeom prst="rect">
-            <a:avLst/>
-          </a:prstGeom>
-          <a:noFill/>
-        </p:spPr>
-        <p:txBody>
-          <a:bodyPr wrap="square" anchor="t" lIns="0" rIns="0" tIns="0" bIns="0">
-            <a:spAutoFit/>
-          </a:bodyPr>
-          <a:lstStyle/>
-          <a:p>
-            <a:pPr algn="l"/>
-            <a:r>
-              <a:rPr sz="1200" b="1">
-                <a:solidFill>
-                  <a:srgbClr val="000000"/>
-                </a:solidFill>
-                <a:latin typeface="맑은 고딕"/>
-                <a:ea typeface="맑은 고딕"/>
-                <a:cs typeface="맑은 고딕"/>
-              </a:rPr>
-              <a:t>• </a:t>
-            </a:r>
-            <a:r>
-              <a:rPr sz="1100" b="1">
-                <a:solidFill>
-                  <a:srgbClr val="000000"/>
-                </a:solidFill>
-                <a:latin typeface="맑은 고딕"/>
-                <a:ea typeface="맑은 고딕"/>
-                <a:cs typeface="맑은 고딕"/>
-              </a:rPr>
-              <a:t>(리드)</a:t>
-            </a:r>
-            <a:r>
-              <a:rPr sz="1200" b="1">
-                <a:solidFill>
-                  <a:srgbClr val="000000"/>
-                </a:solidFill>
-                <a:latin typeface="맑은 고딕"/>
-                <a:ea typeface="맑은 고딕"/>
-                <a:cs typeface="맑은 고딕"/>
-              </a:rPr>
-              <a:t> 유휴 PP센터 재활용 → 신규 투자 최소 · 저비용 급속 확산</a:t>
-            </a:r>
-          </a:p>
-        </p:txBody>
-      </p:sp>
     </p:spTree>
   </p:cSld>
   <p:clrMapOvr>

--- a/reports/ssg-quickcommerce-onepager.pptx
+++ b/reports/ssg-quickcommerce-onepager.pptx
@@ -5379,7 +5379,7 @@
         <p:spPr>
           <a:xfrm>
             <a:off x="6026399" y="3222000"/>
-            <a:ext cx="0" cy="1961999"/>
+            <a:ext cx="0" cy="2141999"/>
           </a:xfrm>
           <a:prstGeom prst="bentConnector3">
             <a:avLst/>
@@ -5535,7 +5535,7 @@
         </p:nvSpPr>
         <p:spPr>
           <a:xfrm>
-            <a:off x="5979600" y="3829200"/>
+            <a:off x="5979600" y="3889200"/>
             <a:ext cx="93600" cy="93600"/>
           </a:xfrm>
           <a:prstGeom prst="ellipse">
@@ -5581,7 +5581,7 @@
         </p:nvSpPr>
         <p:spPr>
           <a:xfrm>
-            <a:off x="6188399" y="3714000"/>
+            <a:off x="6188399" y="3774000"/>
             <a:ext cx="684000" cy="324000"/>
           </a:xfrm>
           <a:prstGeom prst="rect">
@@ -5618,7 +5618,7 @@
         </p:nvSpPr>
         <p:spPr>
           <a:xfrm>
-            <a:off x="6908399" y="3714000"/>
+            <a:off x="6908399" y="3774000"/>
             <a:ext cx="2574000" cy="324000"/>
           </a:xfrm>
           <a:prstGeom prst="rect">
@@ -5669,7 +5669,7 @@
         </p:nvSpPr>
         <p:spPr>
           <a:xfrm>
-            <a:off x="5979600" y="4483199"/>
+            <a:off x="5979600" y="4603199"/>
             <a:ext cx="93600" cy="93600"/>
           </a:xfrm>
           <a:prstGeom prst="ellipse">
@@ -5715,7 +5715,7 @@
         </p:nvSpPr>
         <p:spPr>
           <a:xfrm>
-            <a:off x="6188399" y="4368000"/>
+            <a:off x="6188399" y="4488000"/>
             <a:ext cx="684000" cy="324000"/>
           </a:xfrm>
           <a:prstGeom prst="rect">
@@ -5752,7 +5752,7 @@
         </p:nvSpPr>
         <p:spPr>
           <a:xfrm>
-            <a:off x="6908399" y="4368000"/>
+            <a:off x="6908399" y="4488000"/>
             <a:ext cx="2574000" cy="324000"/>
           </a:xfrm>
           <a:prstGeom prst="rect">
@@ -5789,7 +5789,7 @@
         </p:nvSpPr>
         <p:spPr>
           <a:xfrm>
-            <a:off x="5979600" y="5137199"/>
+            <a:off x="5979600" y="5317199"/>
             <a:ext cx="93600" cy="93600"/>
           </a:xfrm>
           <a:prstGeom prst="ellipse">
@@ -5835,7 +5835,7 @@
         </p:nvSpPr>
         <p:spPr>
           <a:xfrm>
-            <a:off x="6188399" y="5022000"/>
+            <a:off x="6188399" y="5202000"/>
             <a:ext cx="684000" cy="324000"/>
           </a:xfrm>
           <a:prstGeom prst="rect">
@@ -5872,7 +5872,7 @@
         </p:nvSpPr>
         <p:spPr>
           <a:xfrm>
-            <a:off x="6908399" y="5022000"/>
+            <a:off x="6908399" y="5202000"/>
             <a:ext cx="2574000" cy="324000"/>
           </a:xfrm>
           <a:prstGeom prst="rect">
@@ -5903,14 +5903,58 @@
       </p:sp>
       <p:sp>
         <p:nvSpPr>
-          <p:cNvPr id="36" name="TextBox 35"/>
+          <p:cNvPr id="36" name="Rectangle 35"/>
+          <p:cNvSpPr/>
+          <p:nvPr/>
+        </p:nvSpPr>
+        <p:spPr>
+          <a:xfrm>
+            <a:off x="5954400" y="5472000"/>
+            <a:ext cx="3528000" cy="486000"/>
+          </a:xfrm>
+          <a:prstGeom prst="rect">
+            <a:avLst/>
+          </a:prstGeom>
+          <a:solidFill>
+            <a:srgbClr val="000066"/>
+          </a:solidFill>
+          <a:ln>
+            <a:noFill/>
+          </a:ln>
+          <a:effectLst/>
+        </p:spPr>
+        <p:style>
+          <a:lnRef idx="1">
+            <a:schemeClr val="accent1"/>
+          </a:lnRef>
+          <a:fillRef idx="3">
+            <a:schemeClr val="accent1"/>
+          </a:fillRef>
+          <a:effectRef idx="2">
+            <a:schemeClr val="accent1"/>
+          </a:effectRef>
+          <a:fontRef idx="minor">
+            <a:schemeClr val="lt1"/>
+          </a:fontRef>
+        </p:style>
+        <p:txBody>
+          <a:bodyPr rtlCol="0" anchor="ctr"/>
+          <a:lstStyle/>
+          <a:p>
+            <a:pPr algn="ctr"/>
+          </a:p>
+        </p:txBody>
+      </p:sp>
+      <p:sp>
+        <p:nvSpPr>
+          <p:cNvPr id="37" name="TextBox 36"/>
           <p:cNvSpPr txBox="1"/>
           <p:nvPr/>
         </p:nvSpPr>
         <p:spPr>
           <a:xfrm>
-            <a:off x="5954400" y="5562000"/>
-            <a:ext cx="3528000" cy="396000"/>
+            <a:off x="5954400" y="5472000"/>
+            <a:ext cx="3528000" cy="486000"/>
           </a:xfrm>
           <a:prstGeom prst="rect">
             <a:avLst/>
@@ -5918,29 +5962,29 @@
           <a:noFill/>
         </p:spPr>
         <p:txBody>
-          <a:bodyPr wrap="square" anchor="b" lIns="0" rIns="0" tIns="0" bIns="0">
+          <a:bodyPr wrap="square" anchor="ctr" lIns="0" rIns="0" tIns="0" bIns="0">
             <a:spAutoFit/>
           </a:bodyPr>
           <a:lstStyle/>
           <a:p>
-            <a:pPr algn="l"/>
-            <a:r>
-              <a:rPr sz="1200" b="1">
+            <a:pPr algn="ctr"/>
+            <a:r>
+              <a:rPr sz="1100" b="1">
                 <a:solidFill>
-                  <a:srgbClr val="000000"/>
+                  <a:srgbClr val="FFFFFF"/>
                 </a:solidFill>
                 <a:latin typeface="맑은 고딕"/>
                 <a:ea typeface="맑은 고딕"/>
                 <a:cs typeface="맑은 고딕"/>
               </a:rPr>
-              <a:t>• 유휴 PP센터 재활용 → 신규 투자 최소 · 저비용 급속 확산</a:t>
+              <a:t>유휴 PP센터 재활용 → 신규 투자 최소 · 저비용 급속 확산</a:t>
             </a:r>
           </a:p>
         </p:txBody>
       </p:sp>
       <p:cxnSp>
         <p:nvCxnSpPr>
-          <p:cNvPr id="37" name="Connector 36"/>
+          <p:cNvPr id="38" name="Connector 37"/>
           <p:cNvCxnSpPr/>
           <p:nvPr/>
         </p:nvCxnSpPr>

--- a/reports/ssg-quickcommerce-onepager.pptx
+++ b/reports/ssg-quickcommerce-onepager.pptx
@@ -3252,7 +3252,7 @@
         <p:spPr>
           <a:xfrm>
             <a:off x="424800" y="1494000"/>
-            <a:ext cx="5292000" cy="270000"/>
+            <a:ext cx="5196959" cy="270000"/>
           </a:xfrm>
           <a:prstGeom prst="rect">
             <a:avLst/>
@@ -3296,7 +3296,7 @@
         <p:spPr>
           <a:xfrm>
             <a:off x="424800" y="1494000"/>
-            <a:ext cx="5292000" cy="270000"/>
+            <a:ext cx="5196959" cy="270000"/>
           </a:xfrm>
           <a:prstGeom prst="rect">
             <a:avLst/>
@@ -3332,8 +3332,8 @@
         </p:nvSpPr>
         <p:spPr>
           <a:xfrm>
-            <a:off x="424800" y="1864800"/>
-            <a:ext cx="5292000" cy="187200"/>
+            <a:off x="424800" y="1872000"/>
+            <a:ext cx="5196959" cy="180000"/>
           </a:xfrm>
           <a:prstGeom prst="rect">
             <a:avLst/>
@@ -3370,7 +3370,7 @@
         <p:spPr>
           <a:xfrm>
             <a:off x="622800" y="2052000"/>
-            <a:ext cx="5093999" cy="187200"/>
+            <a:ext cx="4998959" cy="180000"/>
           </a:xfrm>
           <a:prstGeom prst="rect">
             <a:avLst/>
@@ -3439,8 +3439,8 @@
         </p:nvSpPr>
         <p:spPr>
           <a:xfrm>
-            <a:off x="622800" y="2239200"/>
-            <a:ext cx="5093999" cy="187200"/>
+            <a:off x="622800" y="2232000"/>
+            <a:ext cx="4998959" cy="180000"/>
           </a:xfrm>
           <a:prstGeom prst="rect">
             <a:avLst/>
@@ -3476,8 +3476,8 @@
         </p:nvSpPr>
         <p:spPr>
           <a:xfrm>
-            <a:off x="424800" y="2505600"/>
-            <a:ext cx="5292000" cy="187200"/>
+            <a:off x="424800" y="2512800"/>
+            <a:ext cx="5196959" cy="180000"/>
           </a:xfrm>
           <a:prstGeom prst="rect">
             <a:avLst/>
@@ -3514,7 +3514,7 @@
         <p:spPr>
           <a:xfrm>
             <a:off x="622800" y="2692800"/>
-            <a:ext cx="5093999" cy="187200"/>
+            <a:ext cx="4998959" cy="180000"/>
           </a:xfrm>
           <a:prstGeom prst="rect">
             <a:avLst/>
@@ -3550,8 +3550,8 @@
         </p:nvSpPr>
         <p:spPr>
           <a:xfrm>
-            <a:off x="622800" y="2880000"/>
-            <a:ext cx="5093999" cy="187200"/>
+            <a:off x="622800" y="2872800"/>
+            <a:ext cx="4998959" cy="180000"/>
           </a:xfrm>
           <a:prstGeom prst="rect">
             <a:avLst/>
@@ -3631,8 +3631,8 @@
         </p:nvSpPr>
         <p:spPr>
           <a:xfrm>
-            <a:off x="424800" y="3146400"/>
-            <a:ext cx="5292000" cy="180000"/>
+            <a:off x="424800" y="3153600"/>
+            <a:ext cx="5196959" cy="187200"/>
           </a:xfrm>
           <a:prstGeom prst="rect">
             <a:avLst/>
@@ -3669,8 +3669,8 @@
           <p:nvPr/>
         </p:nvGraphicFramePr>
         <p:xfrm>
-          <a:off x="424800" y="3344400"/>
-          <a:ext cx="5292000" cy="2613600"/>
+          <a:off x="424800" y="3369600"/>
+          <a:ext cx="5196958" cy="2084400"/>
         </p:xfrm>
         <a:graphic>
           <a:graphicData uri="http://schemas.openxmlformats.org/drawingml/2006/table">
@@ -3679,13 +3679,13 @@
                 <a:tableStyleId>{5C22544A-7EE6-4342-B048-85BDC9FD1C3A}</a:tableStyleId>
               </a:tblPr>
               <a:tblGrid>
-                <a:gridCol w="684000"/>
-                <a:gridCol w="1188000"/>
-                <a:gridCol w="1260000"/>
-                <a:gridCol w="540000"/>
-                <a:gridCol w="1620000"/>
+                <a:gridCol w="576000"/>
+                <a:gridCol w="1440000"/>
+                <a:gridCol w="1116000"/>
+                <a:gridCol w="503999"/>
+                <a:gridCol w="1560959"/>
               </a:tblGrid>
-              <a:tr h="435600">
+              <a:tr h="347400">
                 <a:tc>
                   <a:txBody>
                     <a:bodyPr wrap="square"/>
@@ -3912,7 +3912,7 @@
                   </a:tcPr>
                 </a:tc>
               </a:tr>
-              <a:tr h="435600">
+              <a:tr h="347400">
                 <a:tc rowSpan="3">
                   <a:txBody>
                     <a:bodyPr wrap="square"/>
@@ -4139,7 +4139,7 @@
                   </a:tcPr>
                 </a:tc>
               </a:tr>
-              <a:tr h="435600">
+              <a:tr h="347400">
                 <a:tc vMerge="1">
                   <a:txBody>
                     <a:bodyPr wrap="square"/>
@@ -4243,7 +4243,7 @@
                           <a:ea typeface="맑은 고딕"/>
                           <a:cs typeface="맑은 고딕"/>
                         </a:rPr>
-                        <a:t>(PP센터 불가)</a:t>
+                        <a:t>(PP 불가)</a:t>
                       </a:r>
                     </a:p>
                   </a:txBody>
@@ -4364,7 +4364,7 @@
                   </a:tcPr>
                 </a:tc>
               </a:tr>
-              <a:tr h="435600">
+              <a:tr h="347400">
                 <a:tc vMerge="1">
                   <a:txBody>
                     <a:bodyPr wrap="square"/>
@@ -4578,7 +4578,7 @@
                   </a:tcPr>
                 </a:tc>
               </a:tr>
-              <a:tr h="435600">
+              <a:tr h="347400">
                 <a:tc rowSpan="2">
                   <a:txBody>
                     <a:bodyPr wrap="square"/>
@@ -4816,7 +4816,7 @@
                   </a:tcPr>
                 </a:tc>
               </a:tr>
-              <a:tr h="435600">
+              <a:tr h="347400">
                 <a:tc vMerge="1">
                   <a:txBody>
                     <a:bodyPr wrap="square"/>
@@ -5064,8 +5064,8 @@
         </p:nvSpPr>
         <p:spPr>
           <a:xfrm>
-            <a:off x="5954400" y="1494000"/>
-            <a:ext cx="3528000" cy="270000"/>
+            <a:off x="6017759" y="1494000"/>
+            <a:ext cx="3464640" cy="270000"/>
           </a:xfrm>
           <a:prstGeom prst="rect">
             <a:avLst/>
@@ -5108,8 +5108,8 @@
         </p:nvSpPr>
         <p:spPr>
           <a:xfrm>
-            <a:off x="5954400" y="1494000"/>
-            <a:ext cx="3528000" cy="270000"/>
+            <a:off x="6017759" y="1494000"/>
+            <a:ext cx="3464640" cy="270000"/>
           </a:xfrm>
           <a:prstGeom prst="rect">
             <a:avLst/>
@@ -5145,8 +5145,8 @@
         </p:nvSpPr>
         <p:spPr>
           <a:xfrm>
-            <a:off x="5954400" y="1864800"/>
-            <a:ext cx="3528000" cy="198000"/>
+            <a:off x="6017759" y="1872000"/>
+            <a:ext cx="3464640" cy="187200"/>
           </a:xfrm>
           <a:prstGeom prst="rect">
             <a:avLst/>
@@ -5182,8 +5182,8 @@
         </p:nvSpPr>
         <p:spPr>
           <a:xfrm>
-            <a:off x="6152400" y="2062800"/>
-            <a:ext cx="3330000" cy="198000"/>
+            <a:off x="6215759" y="2059200"/>
+            <a:ext cx="3266640" cy="187200"/>
           </a:xfrm>
           <a:prstGeom prst="rect">
             <a:avLst/>
@@ -5219,8 +5219,8 @@
         </p:nvSpPr>
         <p:spPr>
           <a:xfrm>
-            <a:off x="6152400" y="2260800"/>
-            <a:ext cx="3330000" cy="198000"/>
+            <a:off x="6215759" y="2246400"/>
+            <a:ext cx="3266640" cy="187200"/>
           </a:xfrm>
           <a:prstGeom prst="rect">
             <a:avLst/>
@@ -5267,8 +5267,8 @@
         </p:nvSpPr>
         <p:spPr>
           <a:xfrm>
-            <a:off x="6152400" y="2458800"/>
-            <a:ext cx="3330000" cy="198000"/>
+            <a:off x="6215759" y="2433600"/>
+            <a:ext cx="3266640" cy="187200"/>
           </a:xfrm>
           <a:prstGeom prst="rect">
             <a:avLst/>
@@ -5304,8 +5304,8 @@
         </p:nvSpPr>
         <p:spPr>
           <a:xfrm>
-            <a:off x="6152400" y="2656800"/>
-            <a:ext cx="3330000" cy="198000"/>
+            <a:off x="6215759" y="2620800"/>
+            <a:ext cx="3266640" cy="187200"/>
           </a:xfrm>
           <a:prstGeom prst="rect">
             <a:avLst/>
@@ -5341,8 +5341,8 @@
         </p:nvSpPr>
         <p:spPr>
           <a:xfrm>
-            <a:off x="5954400" y="2934000"/>
-            <a:ext cx="3528000" cy="180000"/>
+            <a:off x="6017759" y="2908799"/>
+            <a:ext cx="3464640" cy="187200"/>
           </a:xfrm>
           <a:prstGeom prst="rect">
             <a:avLst/>
@@ -5378,8 +5378,8 @@
         </p:nvCxnSpPr>
         <p:spPr>
           <a:xfrm>
-            <a:off x="6026399" y="3222000"/>
-            <a:ext cx="0" cy="2141999"/>
+            <a:off x="6089759" y="3232799"/>
+            <a:ext cx="0" cy="1735201"/>
           </a:xfrm>
           <a:prstGeom prst="bentConnector3">
             <a:avLst/>
@@ -5415,7 +5415,7 @@
         </p:nvSpPr>
         <p:spPr>
           <a:xfrm>
-            <a:off x="5979600" y="3175200"/>
+            <a:off x="6042959" y="3185999"/>
             <a:ext cx="93600" cy="93600"/>
           </a:xfrm>
           <a:prstGeom prst="ellipse">
@@ -5461,7 +5461,7 @@
         </p:nvSpPr>
         <p:spPr>
           <a:xfrm>
-            <a:off x="6188399" y="3060000"/>
+            <a:off x="6251759" y="3070800"/>
             <a:ext cx="684000" cy="324000"/>
           </a:xfrm>
           <a:prstGeom prst="rect">
@@ -5498,8 +5498,8 @@
         </p:nvSpPr>
         <p:spPr>
           <a:xfrm>
-            <a:off x="6908399" y="3060000"/>
-            <a:ext cx="2574000" cy="324000"/>
+            <a:off x="6971759" y="3070800"/>
+            <a:ext cx="2510640" cy="324000"/>
           </a:xfrm>
           <a:prstGeom prst="rect">
             <a:avLst/>
@@ -5535,7 +5535,7 @@
         </p:nvSpPr>
         <p:spPr>
           <a:xfrm>
-            <a:off x="5979600" y="3889200"/>
+            <a:off x="6042959" y="3764399"/>
             <a:ext cx="93600" cy="93600"/>
           </a:xfrm>
           <a:prstGeom prst="ellipse">
@@ -5581,7 +5581,7 @@
         </p:nvSpPr>
         <p:spPr>
           <a:xfrm>
-            <a:off x="6188399" y="3774000"/>
+            <a:off x="6251759" y="3649200"/>
             <a:ext cx="684000" cy="324000"/>
           </a:xfrm>
           <a:prstGeom prst="rect">
@@ -5618,8 +5618,8 @@
         </p:nvSpPr>
         <p:spPr>
           <a:xfrm>
-            <a:off x="6908399" y="3774000"/>
-            <a:ext cx="2574000" cy="324000"/>
+            <a:off x="6971759" y="3649200"/>
+            <a:ext cx="2510640" cy="324000"/>
           </a:xfrm>
           <a:prstGeom prst="rect">
             <a:avLst/>
@@ -5669,7 +5669,7 @@
         </p:nvSpPr>
         <p:spPr>
           <a:xfrm>
-            <a:off x="5979600" y="4603199"/>
+            <a:off x="6042959" y="4342800"/>
             <a:ext cx="93600" cy="93600"/>
           </a:xfrm>
           <a:prstGeom prst="ellipse">
@@ -5715,7 +5715,7 @@
         </p:nvSpPr>
         <p:spPr>
           <a:xfrm>
-            <a:off x="6188399" y="4488000"/>
+            <a:off x="6251759" y="4227600"/>
             <a:ext cx="684000" cy="324000"/>
           </a:xfrm>
           <a:prstGeom prst="rect">
@@ -5752,8 +5752,8 @@
         </p:nvSpPr>
         <p:spPr>
           <a:xfrm>
-            <a:off x="6908399" y="4488000"/>
-            <a:ext cx="2574000" cy="324000"/>
+            <a:off x="6971759" y="4227600"/>
+            <a:ext cx="2510640" cy="324000"/>
           </a:xfrm>
           <a:prstGeom prst="rect">
             <a:avLst/>
@@ -5789,7 +5789,7 @@
         </p:nvSpPr>
         <p:spPr>
           <a:xfrm>
-            <a:off x="5979600" y="5317199"/>
+            <a:off x="6042959" y="4921200"/>
             <a:ext cx="93600" cy="93600"/>
           </a:xfrm>
           <a:prstGeom prst="ellipse">
@@ -5835,7 +5835,7 @@
         </p:nvSpPr>
         <p:spPr>
           <a:xfrm>
-            <a:off x="6188399" y="5202000"/>
+            <a:off x="6251759" y="4806000"/>
             <a:ext cx="684000" cy="324000"/>
           </a:xfrm>
           <a:prstGeom prst="rect">
@@ -5872,8 +5872,8 @@
         </p:nvSpPr>
         <p:spPr>
           <a:xfrm>
-            <a:off x="6908399" y="5202000"/>
-            <a:ext cx="2574000" cy="324000"/>
+            <a:off x="6971759" y="4806000"/>
+            <a:ext cx="2510640" cy="324000"/>
           </a:xfrm>
           <a:prstGeom prst="rect">
             <a:avLst/>
@@ -5909,8 +5909,8 @@
         </p:nvSpPr>
         <p:spPr>
           <a:xfrm>
-            <a:off x="5954400" y="5472000"/>
-            <a:ext cx="3528000" cy="486000"/>
+            <a:off x="6017759" y="5040000"/>
+            <a:ext cx="3464640" cy="413999"/>
           </a:xfrm>
           <a:prstGeom prst="rect">
             <a:avLst/>
@@ -5953,8 +5953,8 @@
         </p:nvSpPr>
         <p:spPr>
           <a:xfrm>
-            <a:off x="5954400" y="5472000"/>
-            <a:ext cx="3528000" cy="486000"/>
+            <a:off x="6017759" y="5040000"/>
+            <a:ext cx="3464640" cy="413999"/>
           </a:xfrm>
           <a:prstGeom prst="rect">
             <a:avLst/>
@@ -5990,8 +5990,8 @@
         </p:nvCxnSpPr>
         <p:spPr>
           <a:xfrm>
-            <a:off x="5835599" y="1494000"/>
-            <a:ext cx="0" cy="4464000"/>
+            <a:off x="5819759" y="1494000"/>
+            <a:ext cx="0" cy="3960000"/>
           </a:xfrm>
           <a:prstGeom prst="bentConnector3">
             <a:avLst/>

--- a/reports/ssg-quickcommerce-onepager.pptx
+++ b/reports/ssg-quickcommerce-onepager.pptx
@@ -3197,55 +3197,7 @@
       </p:sp>
       <p:sp>
         <p:nvSpPr>
-          <p:cNvPr id="4" name="TextBox 3"/>
-          <p:cNvSpPr txBox="1"/>
-          <p:nvPr/>
-        </p:nvSpPr>
-        <p:spPr>
-          <a:xfrm>
-            <a:off x="392400" y="6443999"/>
-            <a:ext cx="6480000" cy="198000"/>
-          </a:xfrm>
-          <a:prstGeom prst="rect">
-            <a:avLst/>
-          </a:prstGeom>
-          <a:noFill/>
-        </p:spPr>
-        <p:txBody>
-          <a:bodyPr wrap="square" anchor="t" lIns="0" rIns="0" tIns="0" bIns="0">
-            <a:spAutoFit/>
-          </a:bodyPr>
-          <a:lstStyle/>
-          <a:p>
-            <a:pPr algn="l"/>
-            <a:r>
-              <a:rPr sz="900" b="0">
-                <a:solidFill>
-                  <a:srgbClr val="000000"/>
-                </a:solidFill>
-                <a:latin typeface="맑은 고딕"/>
-                <a:ea typeface="맑은 고딕"/>
-                <a:cs typeface="맑은 고딕"/>
-              </a:rPr>
-              <a:t>※ 취급 품목: 이마트 15만 · 바로퀵 1만 종      ※ 출처: 비즈워치 · 머니투데이 · 한국경제 </a:t>
-            </a:r>
-            <a:r>
-              <a:rPr sz="800" b="0">
-                <a:solidFill>
-                  <a:srgbClr val="000000"/>
-                </a:solidFill>
-                <a:latin typeface="맑은 고딕"/>
-                <a:ea typeface="맑은 고딕"/>
-                <a:cs typeface="맑은 고딕"/>
-              </a:rPr>
-              <a:t>('26.7.8~10)</a:t>
-            </a:r>
-          </a:p>
-        </p:txBody>
-      </p:sp>
-      <p:sp>
-        <p:nvSpPr>
-          <p:cNvPr id="5" name="Rectangle 4"/>
+          <p:cNvPr id="4" name="Rectangle 3"/>
           <p:cNvSpPr/>
           <p:nvPr/>
         </p:nvSpPr>
@@ -3289,7 +3241,7 @@
       </p:sp>
       <p:sp>
         <p:nvSpPr>
-          <p:cNvPr id="6" name="TextBox 5"/>
+          <p:cNvPr id="5" name="TextBox 4"/>
           <p:cNvSpPr txBox="1"/>
           <p:nvPr/>
         </p:nvSpPr>
@@ -3326,13 +3278,13 @@
       </p:sp>
       <p:sp>
         <p:nvSpPr>
-          <p:cNvPr id="7" name="TextBox 6"/>
+          <p:cNvPr id="6" name="TextBox 5"/>
           <p:cNvSpPr txBox="1"/>
           <p:nvPr/>
         </p:nvSpPr>
         <p:spPr>
           <a:xfrm>
-            <a:off x="424800" y="1872000"/>
+            <a:off x="424800" y="1864800"/>
             <a:ext cx="5196959" cy="180000"/>
           </a:xfrm>
           <a:prstGeom prst="rect">
@@ -3363,13 +3315,13 @@
       </p:sp>
       <p:sp>
         <p:nvSpPr>
-          <p:cNvPr id="8" name="TextBox 7"/>
+          <p:cNvPr id="7" name="TextBox 6"/>
           <p:cNvSpPr txBox="1"/>
           <p:nvPr/>
         </p:nvSpPr>
         <p:spPr>
           <a:xfrm>
-            <a:off x="622800" y="2052000"/>
+            <a:off x="622800" y="2044800"/>
             <a:ext cx="4998959" cy="180000"/>
           </a:xfrm>
           <a:prstGeom prst="rect">
@@ -3433,13 +3385,13 @@
       </p:sp>
       <p:sp>
         <p:nvSpPr>
-          <p:cNvPr id="9" name="TextBox 8"/>
+          <p:cNvPr id="8" name="TextBox 7"/>
           <p:cNvSpPr txBox="1"/>
           <p:nvPr/>
         </p:nvSpPr>
         <p:spPr>
           <a:xfrm>
-            <a:off x="622800" y="2232000"/>
+            <a:off x="622800" y="2224800"/>
             <a:ext cx="4998959" cy="180000"/>
           </a:xfrm>
           <a:prstGeom prst="rect">
@@ -3470,13 +3422,50 @@
       </p:sp>
       <p:sp>
         <p:nvSpPr>
+          <p:cNvPr id="9" name="TextBox 8"/>
+          <p:cNvSpPr txBox="1"/>
+          <p:nvPr/>
+        </p:nvSpPr>
+        <p:spPr>
+          <a:xfrm>
+            <a:off x="622800" y="2404800"/>
+            <a:ext cx="4998959" cy="180000"/>
+          </a:xfrm>
+          <a:prstGeom prst="rect">
+            <a:avLst/>
+          </a:prstGeom>
+          <a:noFill/>
+        </p:spPr>
+        <p:txBody>
+          <a:bodyPr wrap="square" anchor="t" lIns="0" rIns="0" tIns="0" bIns="0">
+            <a:spAutoFit/>
+          </a:bodyPr>
+          <a:lstStyle/>
+          <a:p>
+            <a:pPr algn="l"/>
+            <a:r>
+              <a:rPr sz="1100" b="0">
+                <a:solidFill>
+                  <a:srgbClr val="000000"/>
+                </a:solidFill>
+                <a:latin typeface="맑은 고딕"/>
+                <a:ea typeface="맑은 고딕"/>
+                <a:cs typeface="맑은 고딕"/>
+              </a:rPr>
+              <a:t>- 온디맨드 대용량 장보기 수요 대두</a:t>
+            </a:r>
+          </a:p>
+        </p:txBody>
+      </p:sp>
+      <p:sp>
+        <p:nvSpPr>
           <p:cNvPr id="10" name="TextBox 9"/>
           <p:cNvSpPr txBox="1"/>
           <p:nvPr/>
         </p:nvSpPr>
         <p:spPr>
           <a:xfrm>
-            <a:off x="424800" y="2512800"/>
+            <a:off x="424800" y="2671200"/>
             <a:ext cx="5196959" cy="180000"/>
           </a:xfrm>
           <a:prstGeom prst="rect">
@@ -3513,7 +3502,7 @@
         </p:nvSpPr>
         <p:spPr>
           <a:xfrm>
-            <a:off x="622800" y="2692800"/>
+            <a:off x="622800" y="2851200"/>
             <a:ext cx="4998959" cy="180000"/>
           </a:xfrm>
           <a:prstGeom prst="rect">
@@ -3550,7 +3539,7 @@
         </p:nvSpPr>
         <p:spPr>
           <a:xfrm>
-            <a:off x="622800" y="2872800"/>
+            <a:off x="622800" y="3031200"/>
             <a:ext cx="4998959" cy="180000"/>
           </a:xfrm>
           <a:prstGeom prst="rect">
@@ -3618,7 +3607,7 @@
                 <a:ea typeface="맑은 고딕"/>
                 <a:cs typeface="맑은 고딕"/>
               </a:rPr>
-              <a:t> 이원화, 15만 종 구색</a:t>
+              <a:t> 이원화</a:t>
             </a:r>
           </a:p>
         </p:txBody>
@@ -3631,8 +3620,45 @@
         </p:nvSpPr>
         <p:spPr>
           <a:xfrm>
-            <a:off x="424800" y="3153600"/>
-            <a:ext cx="5196959" cy="187200"/>
+            <a:off x="622800" y="3211200"/>
+            <a:ext cx="4998959" cy="180000"/>
+          </a:xfrm>
+          <a:prstGeom prst="rect">
+            <a:avLst/>
+          </a:prstGeom>
+          <a:noFill/>
+        </p:spPr>
+        <p:txBody>
+          <a:bodyPr wrap="square" anchor="t" lIns="0" rIns="0" tIns="0" bIns="0">
+            <a:spAutoFit/>
+          </a:bodyPr>
+          <a:lstStyle/>
+          <a:p>
+            <a:pPr algn="l"/>
+            <a:r>
+              <a:rPr sz="1100" b="0">
+                <a:solidFill>
+                  <a:srgbClr val="000000"/>
+                </a:solidFill>
+                <a:latin typeface="맑은 고딕"/>
+                <a:ea typeface="맑은 고딕"/>
+                <a:cs typeface="맑은 고딕"/>
+              </a:rPr>
+              <a:t>- 약 15만 종 구색으로 대용량 대응</a:t>
+            </a:r>
+          </a:p>
+        </p:txBody>
+      </p:sp>
+      <p:sp>
+        <p:nvSpPr>
+          <p:cNvPr id="14" name="TextBox 13"/>
+          <p:cNvSpPr txBox="1"/>
+          <p:nvPr/>
+        </p:nvSpPr>
+        <p:spPr>
+          <a:xfrm>
+            <a:off x="424800" y="3477600"/>
+            <a:ext cx="5196959" cy="180000"/>
           </a:xfrm>
           <a:prstGeom prst="rect">
             <a:avLst/>
@@ -3662,15 +3688,15 @@
       </p:sp>
       <p:graphicFrame>
         <p:nvGraphicFramePr>
-          <p:cNvPr id="14" name="Table 13"/>
+          <p:cNvPr id="15" name="Table 14"/>
           <p:cNvGraphicFramePr>
             <a:graphicFrameLocks noGrp="1"/>
           </p:cNvGraphicFramePr>
           <p:nvPr/>
         </p:nvGraphicFramePr>
         <p:xfrm>
-          <a:off x="424800" y="3369600"/>
-          <a:ext cx="5196958" cy="2084400"/>
+          <a:off x="424800" y="3672000"/>
+          <a:ext cx="5196958" cy="1925999"/>
         </p:xfrm>
         <a:graphic>
           <a:graphicData uri="http://schemas.openxmlformats.org/drawingml/2006/table">
@@ -3685,7 +3711,7 @@
                 <a:gridCol w="503999"/>
                 <a:gridCol w="1560959"/>
               </a:tblGrid>
-              <a:tr h="347400">
+              <a:tr h="320999">
                 <a:tc>
                   <a:txBody>
                     <a:bodyPr wrap="square"/>
@@ -3912,7 +3938,7 @@
                   </a:tcPr>
                 </a:tc>
               </a:tr>
-              <a:tr h="347400">
+              <a:tr h="320999">
                 <a:tc rowSpan="3">
                   <a:txBody>
                     <a:bodyPr wrap="square"/>
@@ -4139,7 +4165,7 @@
                   </a:tcPr>
                 </a:tc>
               </a:tr>
-              <a:tr h="347400">
+              <a:tr h="320999">
                 <a:tc vMerge="1">
                   <a:txBody>
                     <a:bodyPr wrap="square"/>
@@ -4364,7 +4390,7 @@
                   </a:tcPr>
                 </a:tc>
               </a:tr>
-              <a:tr h="347400">
+              <a:tr h="320999">
                 <a:tc vMerge="1">
                   <a:txBody>
                     <a:bodyPr wrap="square"/>
@@ -4578,7 +4604,7 @@
                   </a:tcPr>
                 </a:tc>
               </a:tr>
-              <a:tr h="347400">
+              <a:tr h="320999">
                 <a:tc rowSpan="2">
                   <a:txBody>
                     <a:bodyPr wrap="square"/>
@@ -4816,7 +4842,7 @@
                   </a:tcPr>
                 </a:tc>
               </a:tr>
-              <a:tr h="347400">
+              <a:tr h="321004">
                 <a:tc vMerge="1">
                   <a:txBody>
                     <a:bodyPr wrap="square"/>
@@ -5058,7 +5084,7 @@
       </p:graphicFrame>
       <p:sp>
         <p:nvSpPr>
-          <p:cNvPr id="15" name="Rectangle 14"/>
+          <p:cNvPr id="16" name="Rectangle 15"/>
           <p:cNvSpPr/>
           <p:nvPr/>
         </p:nvSpPr>
@@ -5102,7 +5128,7 @@
       </p:sp>
       <p:sp>
         <p:nvSpPr>
-          <p:cNvPr id="16" name="TextBox 15"/>
+          <p:cNvPr id="17" name="TextBox 16"/>
           <p:cNvSpPr txBox="1"/>
           <p:nvPr/>
         </p:nvSpPr>
@@ -5139,13 +5165,13 @@
       </p:sp>
       <p:sp>
         <p:nvSpPr>
-          <p:cNvPr id="17" name="TextBox 16"/>
+          <p:cNvPr id="18" name="TextBox 17"/>
           <p:cNvSpPr txBox="1"/>
           <p:nvPr/>
         </p:nvSpPr>
         <p:spPr>
           <a:xfrm>
-            <a:off x="6017759" y="1872000"/>
+            <a:off x="6017759" y="1864800"/>
             <a:ext cx="3464640" cy="187200"/>
           </a:xfrm>
           <a:prstGeom prst="rect">
@@ -5176,13 +5202,13 @@
       </p:sp>
       <p:sp>
         <p:nvSpPr>
-          <p:cNvPr id="18" name="TextBox 17"/>
+          <p:cNvPr id="19" name="TextBox 18"/>
           <p:cNvSpPr txBox="1"/>
           <p:nvPr/>
         </p:nvSpPr>
         <p:spPr>
           <a:xfrm>
-            <a:off x="6215759" y="2059200"/>
+            <a:off x="6215759" y="2052000"/>
             <a:ext cx="3266640" cy="187200"/>
           </a:xfrm>
           <a:prstGeom prst="rect">
@@ -5213,13 +5239,13 @@
       </p:sp>
       <p:sp>
         <p:nvSpPr>
-          <p:cNvPr id="19" name="TextBox 18"/>
+          <p:cNvPr id="20" name="TextBox 19"/>
           <p:cNvSpPr txBox="1"/>
           <p:nvPr/>
         </p:nvSpPr>
         <p:spPr>
           <a:xfrm>
-            <a:off x="6215759" y="2246400"/>
+            <a:off x="6215759" y="2239200"/>
             <a:ext cx="3266640" cy="187200"/>
           </a:xfrm>
           <a:prstGeom prst="rect">
@@ -5261,13 +5287,13 @@
       </p:sp>
       <p:sp>
         <p:nvSpPr>
-          <p:cNvPr id="20" name="TextBox 19"/>
+          <p:cNvPr id="21" name="TextBox 20"/>
           <p:cNvSpPr txBox="1"/>
           <p:nvPr/>
         </p:nvSpPr>
         <p:spPr>
           <a:xfrm>
-            <a:off x="6215759" y="2433600"/>
+            <a:off x="6215759" y="2426400"/>
             <a:ext cx="3266640" cy="187200"/>
           </a:xfrm>
           <a:prstGeom prst="rect">
@@ -5298,13 +5324,13 @@
       </p:sp>
       <p:sp>
         <p:nvSpPr>
-          <p:cNvPr id="21" name="TextBox 20"/>
+          <p:cNvPr id="22" name="TextBox 21"/>
           <p:cNvSpPr txBox="1"/>
           <p:nvPr/>
         </p:nvSpPr>
         <p:spPr>
           <a:xfrm>
-            <a:off x="6215759" y="2620800"/>
+            <a:off x="6215759" y="2613600"/>
             <a:ext cx="3266640" cy="187200"/>
           </a:xfrm>
           <a:prstGeom prst="rect">
@@ -5335,14 +5361,14 @@
       </p:sp>
       <p:sp>
         <p:nvSpPr>
-          <p:cNvPr id="22" name="TextBox 21"/>
+          <p:cNvPr id="23" name="TextBox 22"/>
           <p:cNvSpPr txBox="1"/>
           <p:nvPr/>
         </p:nvSpPr>
         <p:spPr>
           <a:xfrm>
-            <a:off x="6017759" y="2908799"/>
-            <a:ext cx="3464640" cy="187200"/>
+            <a:off x="6017759" y="2887200"/>
+            <a:ext cx="3464640" cy="180000"/>
           </a:xfrm>
           <a:prstGeom prst="rect">
             <a:avLst/>
@@ -5372,14 +5398,14 @@
       </p:sp>
       <p:cxnSp>
         <p:nvCxnSpPr>
-          <p:cNvPr id="23" name="Connector 22"/>
+          <p:cNvPr id="24" name="Connector 23"/>
           <p:cNvCxnSpPr/>
           <p:nvPr/>
         </p:nvCxnSpPr>
         <p:spPr>
           <a:xfrm>
-            <a:off x="6089759" y="3232799"/>
-            <a:ext cx="0" cy="1735201"/>
+            <a:off x="6089759" y="3189600"/>
+            <a:ext cx="0" cy="1890000"/>
           </a:xfrm>
           <a:prstGeom prst="bentConnector3">
             <a:avLst/>
@@ -5409,13 +5435,13 @@
       </p:cxnSp>
       <p:sp>
         <p:nvSpPr>
-          <p:cNvPr id="24" name="Oval 23"/>
+          <p:cNvPr id="25" name="Oval 24"/>
           <p:cNvSpPr/>
           <p:nvPr/>
         </p:nvSpPr>
         <p:spPr>
           <a:xfrm>
-            <a:off x="6042959" y="3185999"/>
+            <a:off x="6042959" y="3142799"/>
             <a:ext cx="93600" cy="93600"/>
           </a:xfrm>
           <a:prstGeom prst="ellipse">
@@ -5455,13 +5481,13 @@
       </p:sp>
       <p:sp>
         <p:nvSpPr>
-          <p:cNvPr id="25" name="TextBox 24"/>
+          <p:cNvPr id="26" name="TextBox 25"/>
           <p:cNvSpPr txBox="1"/>
           <p:nvPr/>
         </p:nvSpPr>
         <p:spPr>
           <a:xfrm>
-            <a:off x="6251759" y="3070800"/>
+            <a:off x="6251759" y="3027600"/>
             <a:ext cx="684000" cy="324000"/>
           </a:xfrm>
           <a:prstGeom prst="rect">
@@ -5492,13 +5518,13 @@
       </p:sp>
       <p:sp>
         <p:nvSpPr>
-          <p:cNvPr id="26" name="TextBox 25"/>
+          <p:cNvPr id="27" name="TextBox 26"/>
           <p:cNvSpPr txBox="1"/>
           <p:nvPr/>
         </p:nvSpPr>
         <p:spPr>
           <a:xfrm>
-            <a:off x="6971759" y="3070800"/>
+            <a:off x="6971759" y="3027600"/>
             <a:ext cx="2510640" cy="324000"/>
           </a:xfrm>
           <a:prstGeom prst="rect">
@@ -5529,13 +5555,13 @@
       </p:sp>
       <p:sp>
         <p:nvSpPr>
-          <p:cNvPr id="27" name="Oval 26"/>
+          <p:cNvPr id="28" name="Oval 27"/>
           <p:cNvSpPr/>
           <p:nvPr/>
         </p:nvSpPr>
         <p:spPr>
           <a:xfrm>
-            <a:off x="6042959" y="3764399"/>
+            <a:off x="6042959" y="3772799"/>
             <a:ext cx="93600" cy="93600"/>
           </a:xfrm>
           <a:prstGeom prst="ellipse">
@@ -5575,13 +5601,13 @@
       </p:sp>
       <p:sp>
         <p:nvSpPr>
-          <p:cNvPr id="28" name="TextBox 27"/>
+          <p:cNvPr id="29" name="TextBox 28"/>
           <p:cNvSpPr txBox="1"/>
           <p:nvPr/>
         </p:nvSpPr>
         <p:spPr>
           <a:xfrm>
-            <a:off x="6251759" y="3649200"/>
+            <a:off x="6251759" y="3657600"/>
             <a:ext cx="684000" cy="324000"/>
           </a:xfrm>
           <a:prstGeom prst="rect">
@@ -5612,13 +5638,13 @@
       </p:sp>
       <p:sp>
         <p:nvSpPr>
-          <p:cNvPr id="29" name="TextBox 28"/>
+          <p:cNvPr id="30" name="TextBox 29"/>
           <p:cNvSpPr txBox="1"/>
           <p:nvPr/>
         </p:nvSpPr>
         <p:spPr>
           <a:xfrm>
-            <a:off x="6971759" y="3649200"/>
+            <a:off x="6971759" y="3657600"/>
             <a:ext cx="2510640" cy="324000"/>
           </a:xfrm>
           <a:prstGeom prst="rect">
@@ -5663,13 +5689,13 @@
       </p:sp>
       <p:sp>
         <p:nvSpPr>
-          <p:cNvPr id="30" name="Oval 29"/>
+          <p:cNvPr id="31" name="Oval 30"/>
           <p:cNvSpPr/>
           <p:nvPr/>
         </p:nvSpPr>
         <p:spPr>
           <a:xfrm>
-            <a:off x="6042959" y="4342800"/>
+            <a:off x="6042959" y="4402799"/>
             <a:ext cx="93600" cy="93600"/>
           </a:xfrm>
           <a:prstGeom prst="ellipse">
@@ -5709,13 +5735,13 @@
       </p:sp>
       <p:sp>
         <p:nvSpPr>
-          <p:cNvPr id="31" name="TextBox 30"/>
+          <p:cNvPr id="32" name="TextBox 31"/>
           <p:cNvSpPr txBox="1"/>
           <p:nvPr/>
         </p:nvSpPr>
         <p:spPr>
           <a:xfrm>
-            <a:off x="6251759" y="4227600"/>
+            <a:off x="6251759" y="4287600"/>
             <a:ext cx="684000" cy="324000"/>
           </a:xfrm>
           <a:prstGeom prst="rect">
@@ -5746,13 +5772,13 @@
       </p:sp>
       <p:sp>
         <p:nvSpPr>
-          <p:cNvPr id="32" name="TextBox 31"/>
+          <p:cNvPr id="33" name="TextBox 32"/>
           <p:cNvSpPr txBox="1"/>
           <p:nvPr/>
         </p:nvSpPr>
         <p:spPr>
           <a:xfrm>
-            <a:off x="6971759" y="4227600"/>
+            <a:off x="6971759" y="4287600"/>
             <a:ext cx="2510640" cy="324000"/>
           </a:xfrm>
           <a:prstGeom prst="rect">
@@ -5783,13 +5809,13 @@
       </p:sp>
       <p:sp>
         <p:nvSpPr>
-          <p:cNvPr id="33" name="Oval 32"/>
+          <p:cNvPr id="34" name="Oval 33"/>
           <p:cNvSpPr/>
           <p:nvPr/>
         </p:nvSpPr>
         <p:spPr>
           <a:xfrm>
-            <a:off x="6042959" y="4921200"/>
+            <a:off x="6042959" y="5032799"/>
             <a:ext cx="93600" cy="93600"/>
           </a:xfrm>
           <a:prstGeom prst="ellipse">
@@ -5829,13 +5855,13 @@
       </p:sp>
       <p:sp>
         <p:nvSpPr>
-          <p:cNvPr id="34" name="TextBox 33"/>
+          <p:cNvPr id="35" name="TextBox 34"/>
           <p:cNvSpPr txBox="1"/>
           <p:nvPr/>
         </p:nvSpPr>
         <p:spPr>
           <a:xfrm>
-            <a:off x="6251759" y="4806000"/>
+            <a:off x="6251759" y="4917600"/>
             <a:ext cx="684000" cy="324000"/>
           </a:xfrm>
           <a:prstGeom prst="rect">
@@ -5866,13 +5892,13 @@
       </p:sp>
       <p:sp>
         <p:nvSpPr>
-          <p:cNvPr id="35" name="TextBox 34"/>
+          <p:cNvPr id="36" name="TextBox 35"/>
           <p:cNvSpPr txBox="1"/>
           <p:nvPr/>
         </p:nvSpPr>
         <p:spPr>
           <a:xfrm>
-            <a:off x="6971759" y="4806000"/>
+            <a:off x="6971759" y="4917600"/>
             <a:ext cx="2510640" cy="324000"/>
           </a:xfrm>
           <a:prstGeom prst="rect">
@@ -5903,14 +5929,14 @@
       </p:sp>
       <p:sp>
         <p:nvSpPr>
-          <p:cNvPr id="36" name="Rectangle 35"/>
+          <p:cNvPr id="37" name="Rectangle 36"/>
           <p:cNvSpPr/>
           <p:nvPr/>
         </p:nvSpPr>
         <p:spPr>
           <a:xfrm>
-            <a:off x="6017759" y="5040000"/>
-            <a:ext cx="3464640" cy="413999"/>
+            <a:off x="6017759" y="5220000"/>
+            <a:ext cx="3464640" cy="378000"/>
           </a:xfrm>
           <a:prstGeom prst="rect">
             <a:avLst/>
@@ -5947,14 +5973,14 @@
       </p:sp>
       <p:sp>
         <p:nvSpPr>
-          <p:cNvPr id="37" name="TextBox 36"/>
+          <p:cNvPr id="38" name="TextBox 37"/>
           <p:cNvSpPr txBox="1"/>
           <p:nvPr/>
         </p:nvSpPr>
         <p:spPr>
           <a:xfrm>
-            <a:off x="6017759" y="5040000"/>
-            <a:ext cx="3464640" cy="413999"/>
+            <a:off x="6017759" y="5220000"/>
+            <a:ext cx="3464640" cy="378000"/>
           </a:xfrm>
           <a:prstGeom prst="rect">
             <a:avLst/>
@@ -5984,14 +6010,14 @@
       </p:sp>
       <p:cxnSp>
         <p:nvCxnSpPr>
-          <p:cNvPr id="38" name="Connector 37"/>
+          <p:cNvPr id="39" name="Connector 38"/>
           <p:cNvCxnSpPr/>
           <p:nvPr/>
         </p:nvCxnSpPr>
         <p:spPr>
           <a:xfrm>
             <a:off x="5819759" y="1494000"/>
-            <a:ext cx="0" cy="3960000"/>
+            <a:ext cx="0" cy="4104000"/>
           </a:xfrm>
           <a:prstGeom prst="bentConnector3">
             <a:avLst/>
@@ -6019,6 +6045,54 @@
           </a:fontRef>
         </p:style>
       </p:cxnSp>
+      <p:sp>
+        <p:nvSpPr>
+          <p:cNvPr id="40" name="TextBox 39"/>
+          <p:cNvSpPr txBox="1"/>
+          <p:nvPr/>
+        </p:nvSpPr>
+        <p:spPr>
+          <a:xfrm>
+            <a:off x="424800" y="5760000"/>
+            <a:ext cx="9057600" cy="198000"/>
+          </a:xfrm>
+          <a:prstGeom prst="rect">
+            <a:avLst/>
+          </a:prstGeom>
+          <a:noFill/>
+        </p:spPr>
+        <p:txBody>
+          <a:bodyPr wrap="square" anchor="t" lIns="0" rIns="0" tIns="0" bIns="0">
+            <a:spAutoFit/>
+          </a:bodyPr>
+          <a:lstStyle/>
+          <a:p>
+            <a:pPr algn="l"/>
+            <a:r>
+              <a:rPr sz="900" b="0">
+                <a:solidFill>
+                  <a:srgbClr val="000000"/>
+                </a:solidFill>
+                <a:latin typeface="맑은 고딕"/>
+                <a:ea typeface="맑은 고딕"/>
+                <a:cs typeface="맑은 고딕"/>
+              </a:rPr>
+              <a:t>※ 취급 품목: 이마트 15만 · 바로퀵 1만 종      ※ 출처: 비즈워치 · 머니투데이 · 한국경제 </a:t>
+            </a:r>
+            <a:r>
+              <a:rPr sz="800" b="0">
+                <a:solidFill>
+                  <a:srgbClr val="000000"/>
+                </a:solidFill>
+                <a:latin typeface="맑은 고딕"/>
+                <a:ea typeface="맑은 고딕"/>
+                <a:cs typeface="맑은 고딕"/>
+              </a:rPr>
+              <a:t>('26.7.8~10)</a:t>
+            </a:r>
+          </a:p>
+        </p:txBody>
+      </p:sp>
     </p:spTree>
   </p:cSld>
   <p:clrMapOvr>

--- a/reports/ssg-quickcommerce-onepager.pptx
+++ b/reports/ssg-quickcommerce-onepager.pptx
@@ -3284,8 +3284,8 @@
         </p:nvSpPr>
         <p:spPr>
           <a:xfrm>
-            <a:off x="424800" y="1864800"/>
-            <a:ext cx="5196959" cy="180000"/>
+            <a:off x="424800" y="1879200"/>
+            <a:ext cx="5196959" cy="208800"/>
           </a:xfrm>
           <a:prstGeom prst="rect">
             <a:avLst/>
@@ -3321,8 +3321,8 @@
         </p:nvSpPr>
         <p:spPr>
           <a:xfrm>
-            <a:off x="622800" y="2044800"/>
-            <a:ext cx="4998959" cy="180000"/>
+            <a:off x="622800" y="2088000"/>
+            <a:ext cx="4998959" cy="208800"/>
           </a:xfrm>
           <a:prstGeom prst="rect">
             <a:avLst/>
@@ -3391,8 +3391,8 @@
         </p:nvSpPr>
         <p:spPr>
           <a:xfrm>
-            <a:off x="622800" y="2224800"/>
-            <a:ext cx="4998959" cy="180000"/>
+            <a:off x="622800" y="2296800"/>
+            <a:ext cx="4998959" cy="208800"/>
           </a:xfrm>
           <a:prstGeom prst="rect">
             <a:avLst/>
@@ -3428,8 +3428,8 @@
         </p:nvSpPr>
         <p:spPr>
           <a:xfrm>
-            <a:off x="622800" y="2404800"/>
-            <a:ext cx="4998959" cy="180000"/>
+            <a:off x="622800" y="2505600"/>
+            <a:ext cx="4998959" cy="208800"/>
           </a:xfrm>
           <a:prstGeom prst="rect">
             <a:avLst/>
@@ -3465,8 +3465,8 @@
         </p:nvSpPr>
         <p:spPr>
           <a:xfrm>
-            <a:off x="424800" y="2671200"/>
-            <a:ext cx="5196959" cy="180000"/>
+            <a:off x="424800" y="2829600"/>
+            <a:ext cx="5196959" cy="208800"/>
           </a:xfrm>
           <a:prstGeom prst="rect">
             <a:avLst/>
@@ -3502,8 +3502,8 @@
         </p:nvSpPr>
         <p:spPr>
           <a:xfrm>
-            <a:off x="622800" y="2851200"/>
-            <a:ext cx="4998959" cy="180000"/>
+            <a:off x="622800" y="3038400"/>
+            <a:ext cx="4998959" cy="208800"/>
           </a:xfrm>
           <a:prstGeom prst="rect">
             <a:avLst/>
@@ -3539,8 +3539,8 @@
         </p:nvSpPr>
         <p:spPr>
           <a:xfrm>
-            <a:off x="622800" y="3031200"/>
-            <a:ext cx="4998959" cy="180000"/>
+            <a:off x="622800" y="3247200"/>
+            <a:ext cx="4998959" cy="208800"/>
           </a:xfrm>
           <a:prstGeom prst="rect">
             <a:avLst/>
@@ -3620,8 +3620,8 @@
         </p:nvSpPr>
         <p:spPr>
           <a:xfrm>
-            <a:off x="622800" y="3211200"/>
-            <a:ext cx="4998959" cy="180000"/>
+            <a:off x="622800" y="3456000"/>
+            <a:ext cx="4998959" cy="208800"/>
           </a:xfrm>
           <a:prstGeom prst="rect">
             <a:avLst/>
@@ -3657,8 +3657,8 @@
         </p:nvSpPr>
         <p:spPr>
           <a:xfrm>
-            <a:off x="424800" y="3477600"/>
-            <a:ext cx="5196959" cy="180000"/>
+            <a:off x="424800" y="3780000"/>
+            <a:ext cx="5196959" cy="198000"/>
           </a:xfrm>
           <a:prstGeom prst="rect">
             <a:avLst/>
@@ -3695,8 +3695,8 @@
           <p:nvPr/>
         </p:nvGraphicFramePr>
         <p:xfrm>
-          <a:off x="424800" y="3672000"/>
-          <a:ext cx="5196958" cy="1925999"/>
+          <a:off x="424800" y="3999600"/>
+          <a:ext cx="5196958" cy="2120399"/>
         </p:xfrm>
         <a:graphic>
           <a:graphicData uri="http://schemas.openxmlformats.org/drawingml/2006/table">
@@ -3711,7 +3711,7 @@
                 <a:gridCol w="503999"/>
                 <a:gridCol w="1560959"/>
               </a:tblGrid>
-              <a:tr h="320999">
+              <a:tr h="353399">
                 <a:tc>
                   <a:txBody>
                     <a:bodyPr wrap="square"/>
@@ -3938,7 +3938,7 @@
                   </a:tcPr>
                 </a:tc>
               </a:tr>
-              <a:tr h="320999">
+              <a:tr h="353399">
                 <a:tc rowSpan="3">
                   <a:txBody>
                     <a:bodyPr wrap="square"/>
@@ -4165,7 +4165,7 @@
                   </a:tcPr>
                 </a:tc>
               </a:tr>
-              <a:tr h="320999">
+              <a:tr h="353399">
                 <a:tc vMerge="1">
                   <a:txBody>
                     <a:bodyPr wrap="square"/>
@@ -4390,7 +4390,7 @@
                   </a:tcPr>
                 </a:tc>
               </a:tr>
-              <a:tr h="320999">
+              <a:tr h="353399">
                 <a:tc vMerge="1">
                   <a:txBody>
                     <a:bodyPr wrap="square"/>
@@ -4604,7 +4604,7 @@
                   </a:tcPr>
                 </a:tc>
               </a:tr>
-              <a:tr h="320999">
+              <a:tr h="353399">
                 <a:tc rowSpan="2">
                   <a:txBody>
                     <a:bodyPr wrap="square"/>
@@ -4842,7 +4842,7 @@
                   </a:tcPr>
                 </a:tc>
               </a:tr>
-              <a:tr h="321004">
+              <a:tr h="353404">
                 <a:tc vMerge="1">
                   <a:txBody>
                     <a:bodyPr wrap="square"/>
@@ -5171,8 +5171,8 @@
         </p:nvSpPr>
         <p:spPr>
           <a:xfrm>
-            <a:off x="6017759" y="1864800"/>
-            <a:ext cx="3464640" cy="187200"/>
+            <a:off x="6017759" y="1879200"/>
+            <a:ext cx="3464640" cy="208800"/>
           </a:xfrm>
           <a:prstGeom prst="rect">
             <a:avLst/>
@@ -5208,8 +5208,8 @@
         </p:nvSpPr>
         <p:spPr>
           <a:xfrm>
-            <a:off x="6215759" y="2052000"/>
-            <a:ext cx="3266640" cy="187200"/>
+            <a:off x="6215759" y="2088000"/>
+            <a:ext cx="3266640" cy="208800"/>
           </a:xfrm>
           <a:prstGeom prst="rect">
             <a:avLst/>
@@ -5245,8 +5245,8 @@
         </p:nvSpPr>
         <p:spPr>
           <a:xfrm>
-            <a:off x="6215759" y="2239200"/>
-            <a:ext cx="3266640" cy="187200"/>
+            <a:off x="6215759" y="2296800"/>
+            <a:ext cx="3266640" cy="208800"/>
           </a:xfrm>
           <a:prstGeom prst="rect">
             <a:avLst/>
@@ -5293,8 +5293,8 @@
         </p:nvSpPr>
         <p:spPr>
           <a:xfrm>
-            <a:off x="6215759" y="2426400"/>
-            <a:ext cx="3266640" cy="187200"/>
+            <a:off x="6215759" y="2505600"/>
+            <a:ext cx="3266640" cy="208800"/>
           </a:xfrm>
           <a:prstGeom prst="rect">
             <a:avLst/>
@@ -5330,8 +5330,8 @@
         </p:nvSpPr>
         <p:spPr>
           <a:xfrm>
-            <a:off x="6215759" y="2613600"/>
-            <a:ext cx="3266640" cy="187200"/>
+            <a:off x="6215759" y="2714400"/>
+            <a:ext cx="3266640" cy="208800"/>
           </a:xfrm>
           <a:prstGeom prst="rect">
             <a:avLst/>
@@ -5367,8 +5367,8 @@
         </p:nvSpPr>
         <p:spPr>
           <a:xfrm>
-            <a:off x="6017759" y="2887200"/>
-            <a:ext cx="3464640" cy="180000"/>
+            <a:off x="6017759" y="3038400"/>
+            <a:ext cx="3464640" cy="198000"/>
           </a:xfrm>
           <a:prstGeom prst="rect">
             <a:avLst/>
@@ -5404,8 +5404,8 @@
         </p:nvCxnSpPr>
         <p:spPr>
           <a:xfrm>
-            <a:off x="6089759" y="3189600"/>
-            <a:ext cx="0" cy="1890000"/>
+            <a:off x="6089759" y="3366000"/>
+            <a:ext cx="0" cy="2260800"/>
           </a:xfrm>
           <a:prstGeom prst="bentConnector3">
             <a:avLst/>
@@ -5441,7 +5441,7 @@
         </p:nvSpPr>
         <p:spPr>
           <a:xfrm>
-            <a:off x="6042959" y="3142799"/>
+            <a:off x="6042959" y="3319200"/>
             <a:ext cx="93600" cy="93600"/>
           </a:xfrm>
           <a:prstGeom prst="ellipse">
@@ -5487,7 +5487,7 @@
         </p:nvSpPr>
         <p:spPr>
           <a:xfrm>
-            <a:off x="6251759" y="3027600"/>
+            <a:off x="6251759" y="3204000"/>
             <a:ext cx="684000" cy="324000"/>
           </a:xfrm>
           <a:prstGeom prst="rect">
@@ -5524,7 +5524,7 @@
         </p:nvSpPr>
         <p:spPr>
           <a:xfrm>
-            <a:off x="6971759" y="3027600"/>
+            <a:off x="6971759" y="3204000"/>
             <a:ext cx="2510640" cy="324000"/>
           </a:xfrm>
           <a:prstGeom prst="rect">
@@ -5561,7 +5561,7 @@
         </p:nvSpPr>
         <p:spPr>
           <a:xfrm>
-            <a:off x="6042959" y="3772799"/>
+            <a:off x="6042959" y="4072800"/>
             <a:ext cx="93600" cy="93600"/>
           </a:xfrm>
           <a:prstGeom prst="ellipse">
@@ -5607,7 +5607,7 @@
         </p:nvSpPr>
         <p:spPr>
           <a:xfrm>
-            <a:off x="6251759" y="3657600"/>
+            <a:off x="6251759" y="3957600"/>
             <a:ext cx="684000" cy="324000"/>
           </a:xfrm>
           <a:prstGeom prst="rect">
@@ -5644,7 +5644,7 @@
         </p:nvSpPr>
         <p:spPr>
           <a:xfrm>
-            <a:off x="6971759" y="3657600"/>
+            <a:off x="6971759" y="3957600"/>
             <a:ext cx="2510640" cy="324000"/>
           </a:xfrm>
           <a:prstGeom prst="rect">
@@ -5695,7 +5695,7 @@
         </p:nvSpPr>
         <p:spPr>
           <a:xfrm>
-            <a:off x="6042959" y="4402799"/>
+            <a:off x="6042959" y="4826400"/>
             <a:ext cx="93600" cy="93600"/>
           </a:xfrm>
           <a:prstGeom prst="ellipse">
@@ -5741,7 +5741,7 @@
         </p:nvSpPr>
         <p:spPr>
           <a:xfrm>
-            <a:off x="6251759" y="4287600"/>
+            <a:off x="6251759" y="4711200"/>
             <a:ext cx="684000" cy="324000"/>
           </a:xfrm>
           <a:prstGeom prst="rect">
@@ -5778,7 +5778,7 @@
         </p:nvSpPr>
         <p:spPr>
           <a:xfrm>
-            <a:off x="6971759" y="4287600"/>
+            <a:off x="6971759" y="4711200"/>
             <a:ext cx="2510640" cy="324000"/>
           </a:xfrm>
           <a:prstGeom prst="rect">
@@ -5815,7 +5815,7 @@
         </p:nvSpPr>
         <p:spPr>
           <a:xfrm>
-            <a:off x="6042959" y="5032799"/>
+            <a:off x="6042959" y="5579999"/>
             <a:ext cx="93600" cy="93600"/>
           </a:xfrm>
           <a:prstGeom prst="ellipse">
@@ -5861,7 +5861,7 @@
         </p:nvSpPr>
         <p:spPr>
           <a:xfrm>
-            <a:off x="6251759" y="4917600"/>
+            <a:off x="6251759" y="5464800"/>
             <a:ext cx="684000" cy="324000"/>
           </a:xfrm>
           <a:prstGeom prst="rect">
@@ -5898,7 +5898,7 @@
         </p:nvSpPr>
         <p:spPr>
           <a:xfrm>
-            <a:off x="6971759" y="4917600"/>
+            <a:off x="6971759" y="5464800"/>
             <a:ext cx="2510640" cy="324000"/>
           </a:xfrm>
           <a:prstGeom prst="rect">
@@ -5935,8 +5935,8 @@
         </p:nvSpPr>
         <p:spPr>
           <a:xfrm>
-            <a:off x="6017759" y="5220000"/>
-            <a:ext cx="3464640" cy="378000"/>
+            <a:off x="6017759" y="5706000"/>
+            <a:ext cx="3464640" cy="413999"/>
           </a:xfrm>
           <a:prstGeom prst="rect">
             <a:avLst/>
@@ -5979,8 +5979,8 @@
         </p:nvSpPr>
         <p:spPr>
           <a:xfrm>
-            <a:off x="6017759" y="5220000"/>
-            <a:ext cx="3464640" cy="378000"/>
+            <a:off x="6017759" y="5706000"/>
+            <a:ext cx="3464640" cy="413999"/>
           </a:xfrm>
           <a:prstGeom prst="rect">
             <a:avLst/>
@@ -6017,7 +6017,7 @@
         <p:spPr>
           <a:xfrm>
             <a:off x="5819759" y="1494000"/>
-            <a:ext cx="0" cy="4104000"/>
+            <a:ext cx="0" cy="4626000"/>
           </a:xfrm>
           <a:prstGeom prst="bentConnector3">
             <a:avLst/>
@@ -6053,7 +6053,7 @@
         </p:nvSpPr>
         <p:spPr>
           <a:xfrm>
-            <a:off x="424800" y="5760000"/>
+            <a:off x="424800" y="6292800"/>
             <a:ext cx="9057600" cy="198000"/>
           </a:xfrm>
           <a:prstGeom prst="rect">

--- a/reports/ssg-quickcommerce-onepager.pptx
+++ b/reports/ssg-quickcommerce-onepager.pptx
@@ -3197,58 +3197,14 @@
       </p:sp>
       <p:sp>
         <p:nvSpPr>
-          <p:cNvPr id="4" name="Rectangle 3"/>
-          <p:cNvSpPr/>
+          <p:cNvPr id="4" name="TextBox 3"/>
+          <p:cNvSpPr txBox="1"/>
           <p:nvPr/>
         </p:nvSpPr>
         <p:spPr>
           <a:xfrm>
             <a:off x="424800" y="1494000"/>
-            <a:ext cx="5196959" cy="270000"/>
-          </a:xfrm>
-          <a:prstGeom prst="rect">
-            <a:avLst/>
-          </a:prstGeom>
-          <a:solidFill>
-            <a:srgbClr val="EAEEF6"/>
-          </a:solidFill>
-          <a:ln>
-            <a:noFill/>
-          </a:ln>
-          <a:effectLst/>
-        </p:spPr>
-        <p:style>
-          <a:lnRef idx="1">
-            <a:schemeClr val="accent1"/>
-          </a:lnRef>
-          <a:fillRef idx="3">
-            <a:schemeClr val="accent1"/>
-          </a:fillRef>
-          <a:effectRef idx="2">
-            <a:schemeClr val="accent1"/>
-          </a:effectRef>
-          <a:fontRef idx="minor">
-            <a:schemeClr val="lt1"/>
-          </a:fontRef>
-        </p:style>
-        <p:txBody>
-          <a:bodyPr rtlCol="0" anchor="ctr"/>
-          <a:lstStyle/>
-          <a:p>
-            <a:pPr algn="ctr"/>
-          </a:p>
-        </p:txBody>
-      </p:sp>
-      <p:sp>
-        <p:nvSpPr>
-          <p:cNvPr id="5" name="TextBox 4"/>
-          <p:cNvSpPr txBox="1"/>
-          <p:nvPr/>
-        </p:nvSpPr>
-        <p:spPr>
-          <a:xfrm>
-            <a:off x="424800" y="1494000"/>
-            <a:ext cx="5196959" cy="270000"/>
+            <a:ext cx="9057600" cy="194400"/>
           </a:xfrm>
           <a:prstGeom prst="rect">
             <a:avLst/>
@@ -3256,12 +3212,12 @@
           <a:noFill/>
         </p:spPr>
         <p:txBody>
-          <a:bodyPr wrap="square" anchor="ctr" lIns="0" rIns="0" tIns="0" bIns="0">
+          <a:bodyPr wrap="square" anchor="t" lIns="0" rIns="0" tIns="0" bIns="0">
             <a:spAutoFit/>
           </a:bodyPr>
           <a:lstStyle/>
           <a:p>
-            <a:pPr algn="ctr"/>
+            <a:pPr algn="l"/>
             <a:r>
               <a:rPr sz="1200" b="1">
                 <a:solidFill>
@@ -3271,58 +3227,21 @@
                 <a:ea typeface="맑은 고딕"/>
                 <a:cs typeface="맑은 고딕"/>
               </a:rPr>
-              <a:t>현황 및 배경</a:t>
-            </a:r>
-          </a:p>
-        </p:txBody>
-      </p:sp>
-      <p:sp>
-        <p:nvSpPr>
-          <p:cNvPr id="6" name="TextBox 5"/>
+              <a:t>• ① 도입 배경</a:t>
+            </a:r>
+          </a:p>
+        </p:txBody>
+      </p:sp>
+      <p:sp>
+        <p:nvSpPr>
+          <p:cNvPr id="5" name="TextBox 4"/>
           <p:cNvSpPr txBox="1"/>
           <p:nvPr/>
         </p:nvSpPr>
         <p:spPr>
           <a:xfrm>
-            <a:off x="424800" y="1879200"/>
-            <a:ext cx="5196959" cy="208800"/>
-          </a:xfrm>
-          <a:prstGeom prst="rect">
-            <a:avLst/>
-          </a:prstGeom>
-          <a:noFill/>
-        </p:spPr>
-        <p:txBody>
-          <a:bodyPr wrap="square" anchor="t" lIns="0" rIns="0" tIns="0" bIns="0">
-            <a:spAutoFit/>
-          </a:bodyPr>
-          <a:lstStyle/>
-          <a:p>
-            <a:pPr algn="l"/>
-            <a:r>
-              <a:rPr sz="1200" b="1">
-                <a:solidFill>
-                  <a:srgbClr val="000000"/>
-                </a:solidFill>
-                <a:latin typeface="맑은 고딕"/>
-                <a:ea typeface="맑은 고딕"/>
-                <a:cs typeface="맑은 고딕"/>
-              </a:rPr>
-              <a:t>• ① 수요 급증</a:t>
-            </a:r>
-          </a:p>
-        </p:txBody>
-      </p:sp>
-      <p:sp>
-        <p:nvSpPr>
-          <p:cNvPr id="7" name="TextBox 6"/>
-          <p:cNvSpPr txBox="1"/>
-          <p:nvPr/>
-        </p:nvSpPr>
-        <p:spPr>
-          <a:xfrm>
-            <a:off x="622800" y="2088000"/>
-            <a:ext cx="4998959" cy="208800"/>
+            <a:off x="622800" y="1688400"/>
+            <a:ext cx="8859600" cy="194400"/>
           </a:xfrm>
           <a:prstGeom prst="rect">
             <a:avLst/>
@@ -3380,32 +3299,6 @@
               </a:rPr>
               <a:t>(미검증)</a:t>
             </a:r>
-          </a:p>
-        </p:txBody>
-      </p:sp>
-      <p:sp>
-        <p:nvSpPr>
-          <p:cNvPr id="8" name="TextBox 7"/>
-          <p:cNvSpPr txBox="1"/>
-          <p:nvPr/>
-        </p:nvSpPr>
-        <p:spPr>
-          <a:xfrm>
-            <a:off x="622800" y="2296800"/>
-            <a:ext cx="4998959" cy="208800"/>
-          </a:xfrm>
-          <a:prstGeom prst="rect">
-            <a:avLst/>
-          </a:prstGeom>
-          <a:noFill/>
-        </p:spPr>
-        <p:txBody>
-          <a:bodyPr wrap="square" anchor="t" lIns="0" rIns="0" tIns="0" bIns="0">
-            <a:spAutoFit/>
-          </a:bodyPr>
-          <a:lstStyle/>
-          <a:p>
-            <a:pPr algn="l"/>
             <a:r>
               <a:rPr sz="1100" b="0">
                 <a:solidFill>
@@ -3415,21 +3308,21 @@
                 <a:ea typeface="맑은 고딕"/>
                 <a:cs typeface="맑은 고딕"/>
               </a:rPr>
-              <a:t>- B마트 등 즉시배송 시장, 대용량 품목 확대</a:t>
-            </a:r>
-          </a:p>
-        </p:txBody>
-      </p:sp>
-      <p:sp>
-        <p:nvSpPr>
-          <p:cNvPr id="9" name="TextBox 8"/>
+              <a:t> → 온디맨드 대용량 수요 실증</a:t>
+            </a:r>
+          </a:p>
+        </p:txBody>
+      </p:sp>
+      <p:sp>
+        <p:nvSpPr>
+          <p:cNvPr id="6" name="TextBox 5"/>
           <p:cNvSpPr txBox="1"/>
           <p:nvPr/>
         </p:nvSpPr>
         <p:spPr>
           <a:xfrm>
-            <a:off x="622800" y="2505600"/>
-            <a:ext cx="4998959" cy="208800"/>
+            <a:off x="622800" y="1882800"/>
+            <a:ext cx="8859600" cy="194400"/>
           </a:xfrm>
           <a:prstGeom prst="rect">
             <a:avLst/>
@@ -3452,95 +3345,21 @@
                 <a:ea typeface="맑은 고딕"/>
                 <a:cs typeface="맑은 고딕"/>
               </a:rPr>
-              <a:t>- 온디맨드 대용량 장보기 수요 대두</a:t>
-            </a:r>
-          </a:p>
-        </p:txBody>
-      </p:sp>
-      <p:sp>
-        <p:nvSpPr>
-          <p:cNvPr id="10" name="TextBox 9"/>
+              <a:t>- B마트 등 즉시배송 시장, 대용량 품목 확대 → 소량 한정의 공백</a:t>
+            </a:r>
+          </a:p>
+        </p:txBody>
+      </p:sp>
+      <p:sp>
+        <p:nvSpPr>
+          <p:cNvPr id="7" name="TextBox 6"/>
           <p:cNvSpPr txBox="1"/>
           <p:nvPr/>
         </p:nvSpPr>
         <p:spPr>
           <a:xfrm>
-            <a:off x="424800" y="2829600"/>
-            <a:ext cx="5196959" cy="208800"/>
-          </a:xfrm>
-          <a:prstGeom prst="rect">
-            <a:avLst/>
-          </a:prstGeom>
-          <a:noFill/>
-        </p:spPr>
-        <p:txBody>
-          <a:bodyPr wrap="square" anchor="t" lIns="0" rIns="0" tIns="0" bIns="0">
-            <a:spAutoFit/>
-          </a:bodyPr>
-          <a:lstStyle/>
-          <a:p>
-            <a:pPr algn="l"/>
-            <a:r>
-              <a:rPr sz="1200" b="1">
-                <a:solidFill>
-                  <a:srgbClr val="000000"/>
-                </a:solidFill>
-                <a:latin typeface="맑은 고딕"/>
-                <a:ea typeface="맑은 고딕"/>
-                <a:cs typeface="맑은 고딕"/>
-              </a:rPr>
-              <a:t>• ② 서비스 이원화</a:t>
-            </a:r>
-          </a:p>
-        </p:txBody>
-      </p:sp>
-      <p:sp>
-        <p:nvSpPr>
-          <p:cNvPr id="11" name="TextBox 10"/>
-          <p:cNvSpPr txBox="1"/>
-          <p:nvPr/>
-        </p:nvSpPr>
-        <p:spPr>
-          <a:xfrm>
-            <a:off x="622800" y="3038400"/>
-            <a:ext cx="4998959" cy="208800"/>
-          </a:xfrm>
-          <a:prstGeom prst="rect">
-            <a:avLst/>
-          </a:prstGeom>
-          <a:noFill/>
-        </p:spPr>
-        <p:txBody>
-          <a:bodyPr wrap="square" anchor="t" lIns="0" rIns="0" tIns="0" bIns="0">
-            <a:spAutoFit/>
-          </a:bodyPr>
-          <a:lstStyle/>
-          <a:p>
-            <a:pPr algn="l"/>
-            <a:r>
-              <a:rPr sz="1100" b="0">
-                <a:solidFill>
-                  <a:srgbClr val="000000"/>
-                </a:solidFill>
-                <a:latin typeface="맑은 고딕"/>
-                <a:ea typeface="맑은 고딕"/>
-                <a:cs typeface="맑은 고딕"/>
-              </a:rPr>
-              <a:t>- 바로퀵은 소량·즉석식 한정 → 대용량 미충족</a:t>
-            </a:r>
-          </a:p>
-        </p:txBody>
-      </p:sp>
-      <p:sp>
-        <p:nvSpPr>
-          <p:cNvPr id="12" name="TextBox 11"/>
-          <p:cNvSpPr txBox="1"/>
-          <p:nvPr/>
-        </p:nvSpPr>
-        <p:spPr>
-          <a:xfrm>
-            <a:off x="622800" y="3247200"/>
-            <a:ext cx="4998959" cy="208800"/>
+            <a:off x="622800" y="2077200"/>
+            <a:ext cx="8859600" cy="194400"/>
           </a:xfrm>
           <a:prstGeom prst="rect">
             <a:avLst/>
@@ -3574,7 +3393,7 @@
                 <a:ea typeface="맑은 고딕"/>
                 <a:cs typeface="맑은 고딕"/>
               </a:rPr>
-              <a:t>(소량)</a:t>
+              <a:t>(소량·이륜차)</a:t>
             </a:r>
             <a:r>
               <a:rPr sz="1100" b="0">
@@ -3596,7 +3415,7 @@
                 <a:ea typeface="맑은 고딕"/>
                 <a:cs typeface="맑은 고딕"/>
               </a:rPr>
-              <a:t>(대용량)</a:t>
+              <a:t>(대용량·사륜차)</a:t>
             </a:r>
             <a:r>
               <a:rPr sz="1100" b="0">
@@ -3607,58 +3426,21 @@
                 <a:ea typeface="맑은 고딕"/>
                 <a:cs typeface="맑은 고딕"/>
               </a:rPr>
-              <a:t> 이원화</a:t>
-            </a:r>
-          </a:p>
-        </p:txBody>
-      </p:sp>
-      <p:sp>
-        <p:nvSpPr>
-          <p:cNvPr id="13" name="TextBox 12"/>
+              <a:t> 이원화로 대응</a:t>
+            </a:r>
+          </a:p>
+        </p:txBody>
+      </p:sp>
+      <p:sp>
+        <p:nvSpPr>
+          <p:cNvPr id="8" name="TextBox 7"/>
           <p:cNvSpPr txBox="1"/>
           <p:nvPr/>
         </p:nvSpPr>
         <p:spPr>
           <a:xfrm>
-            <a:off x="622800" y="3456000"/>
-            <a:ext cx="4998959" cy="208800"/>
-          </a:xfrm>
-          <a:prstGeom prst="rect">
-            <a:avLst/>
-          </a:prstGeom>
-          <a:noFill/>
-        </p:spPr>
-        <p:txBody>
-          <a:bodyPr wrap="square" anchor="t" lIns="0" rIns="0" tIns="0" bIns="0">
-            <a:spAutoFit/>
-          </a:bodyPr>
-          <a:lstStyle/>
-          <a:p>
-            <a:pPr algn="l"/>
-            <a:r>
-              <a:rPr sz="1100" b="0">
-                <a:solidFill>
-                  <a:srgbClr val="000000"/>
-                </a:solidFill>
-                <a:latin typeface="맑은 고딕"/>
-                <a:ea typeface="맑은 고딕"/>
-                <a:cs typeface="맑은 고딕"/>
-              </a:rPr>
-              <a:t>- 약 15만 종 구색으로 대용량 대응</a:t>
-            </a:r>
-          </a:p>
-        </p:txBody>
-      </p:sp>
-      <p:sp>
-        <p:nvSpPr>
-          <p:cNvPr id="14" name="TextBox 13"/>
-          <p:cNvSpPr txBox="1"/>
-          <p:nvPr/>
-        </p:nvSpPr>
-        <p:spPr>
-          <a:xfrm>
-            <a:off x="424800" y="3780000"/>
-            <a:ext cx="5196959" cy="198000"/>
+            <a:off x="424800" y="2379600"/>
+            <a:ext cx="9057600" cy="198000"/>
           </a:xfrm>
           <a:prstGeom prst="rect">
             <a:avLst/>
@@ -3681,22 +3463,22 @@
                 <a:ea typeface="맑은 고딕"/>
                 <a:cs typeface="맑은 고딕"/>
               </a:rPr>
-              <a:t>• ③ 이마트 배송 체계</a:t>
+              <a:t>• ② 이마트 배송 체계</a:t>
             </a:r>
           </a:p>
         </p:txBody>
       </p:sp>
       <p:graphicFrame>
         <p:nvGraphicFramePr>
-          <p:cNvPr id="15" name="Table 14"/>
+          <p:cNvPr id="9" name="Table 8"/>
           <p:cNvGraphicFramePr>
             <a:graphicFrameLocks noGrp="1"/>
           </p:cNvGraphicFramePr>
           <p:nvPr/>
         </p:nvGraphicFramePr>
         <p:xfrm>
-          <a:off x="424800" y="3999600"/>
-          <a:ext cx="5196958" cy="2120399"/>
+          <a:off x="424800" y="2599200"/>
+          <a:ext cx="9057600" cy="2206800"/>
         </p:xfrm>
         <a:graphic>
           <a:graphicData uri="http://schemas.openxmlformats.org/drawingml/2006/table">
@@ -3705,13 +3487,14 @@
                 <a:tableStyleId>{5C22544A-7EE6-4342-B048-85BDC9FD1C3A}</a:tableStyleId>
               </a:tblPr>
               <a:tblGrid>
-                <a:gridCol w="576000"/>
-                <a:gridCol w="1440000"/>
-                <a:gridCol w="1116000"/>
-                <a:gridCol w="503999"/>
-                <a:gridCol w="1560959"/>
+                <a:gridCol w="936000"/>
+                <a:gridCol w="1944000"/>
+                <a:gridCol w="792000"/>
+                <a:gridCol w="1872000"/>
+                <a:gridCol w="864000"/>
+                <a:gridCol w="2649600"/>
               </a:tblGrid>
-              <a:tr h="353399">
+              <a:tr h="367800">
                 <a:tc>
                   <a:txBody>
                     <a:bodyPr wrap="square"/>
@@ -3719,7 +3502,7 @@
                     <a:p>
                       <a:pPr algn="ctr"/>
                       <a:r>
-                        <a:rPr sz="900" b="1">
+                        <a:rPr sz="1000" b="1">
                           <a:solidFill>
                             <a:srgbClr val="000000"/>
                           </a:solidFill>
@@ -3764,7 +3547,7 @@
                     <a:p>
                       <a:pPr algn="ctr"/>
                       <a:r>
-                        <a:rPr sz="900" b="1">
+                        <a:rPr sz="1000" b="1">
                           <a:solidFill>
                             <a:srgbClr val="000000"/>
                           </a:solidFill>
@@ -3809,7 +3592,7 @@
                     <a:p>
                       <a:pPr algn="ctr"/>
                       <a:r>
-                        <a:rPr sz="900" b="1">
+                        <a:rPr sz="1000" b="1">
                           <a:solidFill>
                             <a:srgbClr val="000000"/>
                           </a:solidFill>
@@ -3817,7 +3600,7 @@
                           <a:ea typeface="맑은 고딕"/>
                           <a:cs typeface="맑은 고딕"/>
                         </a:rPr>
-                        <a:t>시간 · 형태</a:t>
+                        <a:t>형태</a:t>
                       </a:r>
                     </a:p>
                   </a:txBody>
@@ -3854,7 +3637,52 @@
                     <a:p>
                       <a:pPr algn="ctr"/>
                       <a:r>
-                        <a:rPr sz="900" b="1">
+                        <a:rPr sz="1000" b="1">
+                          <a:solidFill>
+                            <a:srgbClr val="000000"/>
+                          </a:solidFill>
+                          <a:latin typeface="맑은 고딕"/>
+                          <a:ea typeface="맑은 고딕"/>
+                          <a:cs typeface="맑은 고딕"/>
+                        </a:rPr>
+                        <a:t>시간</a:t>
+                      </a:r>
+                    </a:p>
+                  </a:txBody>
+                  <a:tcPr anchor="ctr" marL="36000" marR="36000" marT="0" marB="0">
+                    <a:lnL w="9525" cap="flat">
+                      <a:solidFill>
+                        <a:srgbClr val="BFBFBF"/>
+                      </a:solidFill>
+                    </a:lnL>
+                    <a:lnR w="9525" cap="flat">
+                      <a:solidFill>
+                        <a:srgbClr val="BFBFBF"/>
+                      </a:solidFill>
+                    </a:lnR>
+                    <a:lnT w="9525" cap="flat">
+                      <a:solidFill>
+                        <a:srgbClr val="BFBFBF"/>
+                      </a:solidFill>
+                    </a:lnT>
+                    <a:lnB w="9525" cap="flat">
+                      <a:solidFill>
+                        <a:srgbClr val="BFBFBF"/>
+                      </a:solidFill>
+                    </a:lnB>
+                    <a:solidFill>
+                      <a:srgbClr val="EAEEF6"/>
+                    </a:solidFill>
+                  </a:tcPr>
+                </a:tc>
+                <a:tc>
+                  <a:txBody>
+                    <a:bodyPr wrap="square"/>
+                    <a:lstStyle/>
+                    <a:p>
+                      <a:pPr algn="ctr"/>
+                      <a:r>
+                        <a:rPr sz="1000" b="1">
                           <a:solidFill>
                             <a:srgbClr val="000000"/>
                           </a:solidFill>
@@ -3899,7 +3727,7 @@
                     <a:p>
                       <a:pPr algn="ctr"/>
                       <a:r>
-                        <a:rPr sz="900" b="1">
+                        <a:rPr sz="1000" b="1">
                           <a:solidFill>
                             <a:srgbClr val="000000"/>
                           </a:solidFill>
@@ -3938,7 +3766,7 @@
                   </a:tcPr>
                 </a:tc>
               </a:tr>
-              <a:tr h="353399">
+              <a:tr h="367800">
                 <a:tc rowSpan="3">
                   <a:txBody>
                     <a:bodyPr wrap="square"/>
@@ -3946,7 +3774,7 @@
                     <a:p>
                       <a:pPr algn="ctr"/>
                       <a:r>
-                        <a:rPr sz="900" b="1">
+                        <a:rPr sz="1000" b="1">
                           <a:solidFill>
                             <a:srgbClr val="000000"/>
                           </a:solidFill>
@@ -3991,7 +3819,7 @@
                     <a:p>
                       <a:pPr algn="ctr"/>
                       <a:r>
-                        <a:rPr sz="900" b="0">
+                        <a:rPr sz="1000" b="1">
                           <a:solidFill>
                             <a:srgbClr val="000000"/>
                           </a:solidFill>
@@ -4036,7 +3864,52 @@
                     <a:p>
                       <a:pPr algn="ctr"/>
                       <a:r>
-                        <a:rPr sz="900" b="0">
+                        <a:rPr sz="1000" b="0">
+                          <a:solidFill>
+                            <a:srgbClr val="000000"/>
+                          </a:solidFill>
+                          <a:latin typeface="맑은 고딕"/>
+                          <a:ea typeface="맑은 고딕"/>
+                          <a:cs typeface="맑은 고딕"/>
+                        </a:rPr>
+                        <a:t>예약</a:t>
+                      </a:r>
+                    </a:p>
+                  </a:txBody>
+                  <a:tcPr anchor="ctr" marL="36000" marR="36000" marT="0" marB="0">
+                    <a:lnL w="9525" cap="flat">
+                      <a:solidFill>
+                        <a:srgbClr val="BFBFBF"/>
+                      </a:solidFill>
+                    </a:lnL>
+                    <a:lnR w="9525" cap="flat">
+                      <a:solidFill>
+                        <a:srgbClr val="BFBFBF"/>
+                      </a:solidFill>
+                    </a:lnR>
+                    <a:lnT w="9525" cap="flat">
+                      <a:solidFill>
+                        <a:srgbClr val="BFBFBF"/>
+                      </a:solidFill>
+                    </a:lnT>
+                    <a:lnB w="9525" cap="flat">
+                      <a:solidFill>
+                        <a:srgbClr val="BFBFBF"/>
+                      </a:solidFill>
+                    </a:lnB>
+                    <a:solidFill>
+                      <a:srgbClr val="FFFFFF"/>
+                    </a:solidFill>
+                  </a:tcPr>
+                </a:tc>
+                <a:tc>
+                  <a:txBody>
+                    <a:bodyPr wrap="square"/>
+                    <a:lstStyle/>
+                    <a:p>
+                      <a:pPr algn="ctr"/>
+                      <a:r>
+                        <a:rPr sz="1000" b="0">
                           <a:solidFill>
                             <a:srgbClr val="000000"/>
                           </a:solidFill>
@@ -4081,7 +3954,7 @@
                     <a:p>
                       <a:pPr algn="ctr"/>
                       <a:r>
-                        <a:rPr sz="900" b="0">
+                        <a:rPr sz="1000" b="0">
                           <a:solidFill>
                             <a:srgbClr val="000000"/>
                           </a:solidFill>
@@ -4126,7 +3999,7 @@
                     <a:p>
                       <a:pPr algn="ctr"/>
                       <a:r>
-                        <a:rPr sz="900" b="0">
+                        <a:rPr sz="1000" b="0">
                           <a:solidFill>
                             <a:srgbClr val="000000"/>
                           </a:solidFill>
@@ -4165,7 +4038,7 @@
                   </a:tcPr>
                 </a:tc>
               </a:tr>
-              <a:tr h="353399">
+              <a:tr h="367800">
                 <a:tc vMerge="1">
                   <a:txBody>
                     <a:bodyPr wrap="square"/>
@@ -4205,7 +4078,7 @@
                     <a:p>
                       <a:pPr algn="ctr"/>
                       <a:r>
-                        <a:rPr sz="900" b="0">
+                        <a:rPr sz="1000" b="1">
                           <a:solidFill>
                             <a:srgbClr val="000000"/>
                           </a:solidFill>
@@ -4250,7 +4123,52 @@
                     <a:p>
                       <a:pPr algn="ctr"/>
                       <a:r>
-                        <a:rPr sz="900" b="0">
+                        <a:rPr sz="1000" b="0">
+                          <a:solidFill>
+                            <a:srgbClr val="000000"/>
+                          </a:solidFill>
+                          <a:latin typeface="맑은 고딕"/>
+                          <a:ea typeface="맑은 고딕"/>
+                          <a:cs typeface="맑은 고딕"/>
+                        </a:rPr>
+                        <a:t>예약</a:t>
+                      </a:r>
+                    </a:p>
+                  </a:txBody>
+                  <a:tcPr anchor="ctr" marL="36000" marR="36000" marT="0" marB="0">
+                    <a:lnL w="9525" cap="flat">
+                      <a:solidFill>
+                        <a:srgbClr val="BFBFBF"/>
+                      </a:solidFill>
+                    </a:lnL>
+                    <a:lnR w="9525" cap="flat">
+                      <a:solidFill>
+                        <a:srgbClr val="BFBFBF"/>
+                      </a:solidFill>
+                    </a:lnR>
+                    <a:lnT w="9525" cap="flat">
+                      <a:solidFill>
+                        <a:srgbClr val="BFBFBF"/>
+                      </a:solidFill>
+                    </a:lnT>
+                    <a:lnB w="9525" cap="flat">
+                      <a:solidFill>
+                        <a:srgbClr val="BFBFBF"/>
+                      </a:solidFill>
+                    </a:lnB>
+                    <a:solidFill>
+                      <a:srgbClr val="FFFFFF"/>
+                    </a:solidFill>
+                  </a:tcPr>
+                </a:tc>
+                <a:tc>
+                  <a:txBody>
+                    <a:bodyPr wrap="square"/>
+                    <a:lstStyle/>
+                    <a:p>
+                      <a:pPr algn="ctr"/>
+                      <a:r>
+                        <a:rPr sz="1000" b="0">
                           <a:solidFill>
                             <a:srgbClr val="000000"/>
                           </a:solidFill>
@@ -4261,7 +4179,7 @@
                         <a:t>새벽 </a:t>
                       </a:r>
                       <a:r>
-                        <a:rPr sz="800" b="0">
+                        <a:rPr sz="900" b="0">
                           <a:solidFill>
                             <a:srgbClr val="000000"/>
                           </a:solidFill>
@@ -4306,7 +4224,7 @@
                     <a:p>
                       <a:pPr algn="ctr"/>
                       <a:r>
-                        <a:rPr sz="900" b="0">
+                        <a:rPr sz="1000" b="0">
                           <a:solidFill>
                             <a:srgbClr val="000000"/>
                           </a:solidFill>
@@ -4351,7 +4269,7 @@
                     <a:p>
                       <a:pPr algn="ctr"/>
                       <a:r>
-                        <a:rPr sz="900" b="0">
+                        <a:rPr sz="1000" b="0">
                           <a:solidFill>
                             <a:srgbClr val="000000"/>
                           </a:solidFill>
@@ -4390,7 +4308,7 @@
                   </a:tcPr>
                 </a:tc>
               </a:tr>
-              <a:tr h="353399">
+              <a:tr h="367800">
                 <a:tc vMerge="1">
                   <a:txBody>
                     <a:bodyPr wrap="square"/>
@@ -4430,7 +4348,7 @@
                     <a:p>
                       <a:pPr algn="ctr"/>
                       <a:r>
-                        <a:rPr sz="900" b="0">
+                        <a:rPr sz="1000" b="1">
                           <a:solidFill>
                             <a:srgbClr val="000000"/>
                           </a:solidFill>
@@ -4475,7 +4393,7 @@
                     <a:p>
                       <a:pPr algn="ctr"/>
                       <a:r>
-                        <a:rPr sz="900" b="0">
+                        <a:rPr sz="1000" b="0">
                           <a:solidFill>
                             <a:srgbClr val="000000"/>
                           </a:solidFill>
@@ -4520,7 +4438,52 @@
                     <a:p>
                       <a:pPr algn="ctr"/>
                       <a:r>
-                        <a:rPr sz="900" b="0">
+                        <a:rPr sz="1000" b="0">
+                          <a:solidFill>
+                            <a:srgbClr val="000000"/>
+                          </a:solidFill>
+                          <a:latin typeface="맑은 고딕"/>
+                          <a:ea typeface="맑은 고딕"/>
+                          <a:cs typeface="맑은 고딕"/>
+                        </a:rPr>
+                        <a:t>익일</a:t>
+                      </a:r>
+                    </a:p>
+                  </a:txBody>
+                  <a:tcPr anchor="ctr" marL="36000" marR="36000" marT="0" marB="0">
+                    <a:lnL w="9525" cap="flat">
+                      <a:solidFill>
+                        <a:srgbClr val="BFBFBF"/>
+                      </a:solidFill>
+                    </a:lnL>
+                    <a:lnR w="9525" cap="flat">
+                      <a:solidFill>
+                        <a:srgbClr val="BFBFBF"/>
+                      </a:solidFill>
+                    </a:lnR>
+                    <a:lnT w="9525" cap="flat">
+                      <a:solidFill>
+                        <a:srgbClr val="BFBFBF"/>
+                      </a:solidFill>
+                    </a:lnT>
+                    <a:lnB w="9525" cap="flat">
+                      <a:solidFill>
+                        <a:srgbClr val="BFBFBF"/>
+                      </a:solidFill>
+                    </a:lnB>
+                    <a:solidFill>
+                      <a:srgbClr val="FFFFFF"/>
+                    </a:solidFill>
+                  </a:tcPr>
+                </a:tc>
+                <a:tc>
+                  <a:txBody>
+                    <a:bodyPr wrap="square"/>
+                    <a:lstStyle/>
+                    <a:p>
+                      <a:pPr algn="ctr"/>
+                      <a:r>
+                        <a:rPr sz="1000" b="0">
                           <a:solidFill>
                             <a:srgbClr val="000000"/>
                           </a:solidFill>
@@ -4565,7 +4528,7 @@
                     <a:p>
                       <a:pPr algn="ctr"/>
                       <a:r>
-                        <a:rPr sz="900" b="0">
+                        <a:rPr sz="1000" b="0">
                           <a:solidFill>
                             <a:srgbClr val="000000"/>
                           </a:solidFill>
@@ -4604,7 +4567,7 @@
                   </a:tcPr>
                 </a:tc>
               </a:tr>
-              <a:tr h="353399">
+              <a:tr h="367800">
                 <a:tc rowSpan="2">
                   <a:txBody>
                     <a:bodyPr wrap="square"/>
@@ -4612,7 +4575,7 @@
                     <a:p>
                       <a:pPr algn="ctr"/>
                       <a:r>
-                        <a:rPr sz="900" b="1">
+                        <a:rPr sz="1000" b="1">
                           <a:solidFill>
                             <a:srgbClr val="000000"/>
                           </a:solidFill>
@@ -4657,7 +4620,7 @@
                     <a:p>
                       <a:pPr algn="ctr"/>
                       <a:r>
-                        <a:rPr sz="900" b="0">
+                        <a:rPr sz="1000" b="1">
                           <a:solidFill>
                             <a:srgbClr val="000000"/>
                           </a:solidFill>
@@ -4702,7 +4665,52 @@
                     <a:p>
                       <a:pPr algn="ctr"/>
                       <a:r>
-                        <a:rPr sz="900" b="0">
+                        <a:rPr sz="1000" b="0">
+                          <a:solidFill>
+                            <a:srgbClr val="000000"/>
+                          </a:solidFill>
+                          <a:latin typeface="맑은 고딕"/>
+                          <a:ea typeface="맑은 고딕"/>
+                          <a:cs typeface="맑은 고딕"/>
+                        </a:rPr>
+                        <a:t>즉시</a:t>
+                      </a:r>
+                    </a:p>
+                  </a:txBody>
+                  <a:tcPr anchor="ctr" marL="36000" marR="36000" marT="0" marB="0">
+                    <a:lnL w="9525" cap="flat">
+                      <a:solidFill>
+                        <a:srgbClr val="BFBFBF"/>
+                      </a:solidFill>
+                    </a:lnL>
+                    <a:lnR w="9525" cap="flat">
+                      <a:solidFill>
+                        <a:srgbClr val="BFBFBF"/>
+                      </a:solidFill>
+                    </a:lnR>
+                    <a:lnT w="9525" cap="flat">
+                      <a:solidFill>
+                        <a:srgbClr val="BFBFBF"/>
+                      </a:solidFill>
+                    </a:lnT>
+                    <a:lnB w="9525" cap="flat">
+                      <a:solidFill>
+                        <a:srgbClr val="BFBFBF"/>
+                      </a:solidFill>
+                    </a:lnB>
+                    <a:solidFill>
+                      <a:srgbClr val="FFFFFF"/>
+                    </a:solidFill>
+                  </a:tcPr>
+                </a:tc>
+                <a:tc>
+                  <a:txBody>
+                    <a:bodyPr wrap="square"/>
+                    <a:lstStyle/>
+                    <a:p>
+                      <a:pPr algn="ctr"/>
+                      <a:r>
+                        <a:rPr sz="1000" b="0">
                           <a:solidFill>
                             <a:srgbClr val="000000"/>
                           </a:solidFill>
@@ -4713,7 +4721,7 @@
                         <a:t>1H </a:t>
                       </a:r>
                       <a:r>
-                        <a:rPr sz="800" b="0">
+                        <a:rPr sz="900" b="0">
                           <a:solidFill>
                             <a:srgbClr val="000000"/>
                           </a:solidFill>
@@ -4758,7 +4766,7 @@
                     <a:p>
                       <a:pPr algn="ctr"/>
                       <a:r>
-                        <a:rPr sz="900" b="0">
+                        <a:rPr sz="1000" b="0">
                           <a:solidFill>
                             <a:srgbClr val="000000"/>
                           </a:solidFill>
@@ -4803,7 +4811,7 @@
                     <a:p>
                       <a:pPr algn="ctr"/>
                       <a:r>
-                        <a:rPr sz="900" b="0">
+                        <a:rPr sz="1000" b="0">
                           <a:solidFill>
                             <a:srgbClr val="000000"/>
                           </a:solidFill>
@@ -4842,7 +4850,7 @@
                   </a:tcPr>
                 </a:tc>
               </a:tr>
-              <a:tr h="353404">
+              <a:tr h="367800">
                 <a:tc vMerge="1">
                   <a:txBody>
                     <a:bodyPr wrap="square"/>
@@ -4882,7 +4890,7 @@
                     <a:p>
                       <a:pPr algn="ctr"/>
                       <a:r>
-                        <a:rPr sz="900" b="1">
+                        <a:rPr sz="1000" b="1">
                           <a:solidFill>
                             <a:srgbClr val="002060"/>
                           </a:solidFill>
@@ -4893,7 +4901,7 @@
                         <a:t>★ 2시간 배송 </a:t>
                       </a:r>
                       <a:r>
-                        <a:rPr sz="800" b="1">
+                        <a:rPr sz="900" b="1">
                           <a:solidFill>
                             <a:srgbClr val="002060"/>
                           </a:solidFill>
@@ -4938,7 +4946,52 @@
                     <a:p>
                       <a:pPr algn="ctr"/>
                       <a:r>
-                        <a:rPr sz="900" b="1">
+                        <a:rPr sz="1000" b="1">
+                          <a:solidFill>
+                            <a:srgbClr val="002060"/>
+                          </a:solidFill>
+                          <a:latin typeface="맑은 고딕"/>
+                          <a:ea typeface="맑은 고딕"/>
+                          <a:cs typeface="맑은 고딕"/>
+                        </a:rPr>
+                        <a:t>즉시</a:t>
+                      </a:r>
+                    </a:p>
+                  </a:txBody>
+                  <a:tcPr anchor="ctr" marL="36000" marR="36000" marT="0" marB="0">
+                    <a:lnL w="9525" cap="flat">
+                      <a:solidFill>
+                        <a:srgbClr val="BFBFBF"/>
+                      </a:solidFill>
+                    </a:lnL>
+                    <a:lnR w="9525" cap="flat">
+                      <a:solidFill>
+                        <a:srgbClr val="BFBFBF"/>
+                      </a:solidFill>
+                    </a:lnR>
+                    <a:lnT w="9525" cap="flat">
+                      <a:solidFill>
+                        <a:srgbClr val="BFBFBF"/>
+                      </a:solidFill>
+                    </a:lnT>
+                    <a:lnB w="9525" cap="flat">
+                      <a:solidFill>
+                        <a:srgbClr val="BFBFBF"/>
+                      </a:solidFill>
+                    </a:lnB>
+                    <a:solidFill>
+                      <a:srgbClr val="DEEBF7"/>
+                    </a:solidFill>
+                  </a:tcPr>
+                </a:tc>
+                <a:tc>
+                  <a:txBody>
+                    <a:bodyPr wrap="square"/>
+                    <a:lstStyle/>
+                    <a:p>
+                      <a:pPr algn="ctr"/>
+                      <a:r>
+                        <a:rPr sz="1000" b="1">
                           <a:solidFill>
                             <a:srgbClr val="002060"/>
                           </a:solidFill>
@@ -4949,7 +5002,7 @@
                         <a:t>2H </a:t>
                       </a:r>
                       <a:r>
-                        <a:rPr sz="800" b="1">
+                        <a:rPr sz="900" b="1">
                           <a:solidFill>
                             <a:srgbClr val="002060"/>
                           </a:solidFill>
@@ -4994,7 +5047,7 @@
                     <a:p>
                       <a:pPr algn="ctr"/>
                       <a:r>
-                        <a:rPr sz="900" b="1">
+                        <a:rPr sz="1000" b="1">
                           <a:solidFill>
                             <a:srgbClr val="002060"/>
                           </a:solidFill>
@@ -5039,7 +5092,7 @@
                     <a:p>
                       <a:pPr algn="ctr"/>
                       <a:r>
-                        <a:rPr sz="900" b="1">
+                        <a:rPr sz="1000" b="1">
                           <a:solidFill>
                             <a:srgbClr val="002060"/>
                           </a:solidFill>
@@ -5084,58 +5137,14 @@
       </p:graphicFrame>
       <p:sp>
         <p:nvSpPr>
-          <p:cNvPr id="16" name="Rectangle 15"/>
-          <p:cNvSpPr/>
+          <p:cNvPr id="10" name="TextBox 9"/>
+          <p:cNvSpPr txBox="1"/>
           <p:nvPr/>
         </p:nvSpPr>
         <p:spPr>
           <a:xfrm>
-            <a:off x="6017759" y="1494000"/>
-            <a:ext cx="3464640" cy="270000"/>
-          </a:xfrm>
-          <a:prstGeom prst="rect">
-            <a:avLst/>
-          </a:prstGeom>
-          <a:solidFill>
-            <a:srgbClr val="EAEEF6"/>
-          </a:solidFill>
-          <a:ln>
-            <a:noFill/>
-          </a:ln>
-          <a:effectLst/>
-        </p:spPr>
-        <p:style>
-          <a:lnRef idx="1">
-            <a:schemeClr val="accent1"/>
-          </a:lnRef>
-          <a:fillRef idx="3">
-            <a:schemeClr val="accent1"/>
-          </a:fillRef>
-          <a:effectRef idx="2">
-            <a:schemeClr val="accent1"/>
-          </a:effectRef>
-          <a:fontRef idx="minor">
-            <a:schemeClr val="lt1"/>
-          </a:fontRef>
-        </p:style>
-        <p:txBody>
-          <a:bodyPr rtlCol="0" anchor="ctr"/>
-          <a:lstStyle/>
-          <a:p>
-            <a:pPr algn="ctr"/>
-          </a:p>
-        </p:txBody>
-      </p:sp>
-      <p:sp>
-        <p:nvSpPr>
-          <p:cNvPr id="17" name="TextBox 16"/>
-          <p:cNvSpPr txBox="1"/>
-          <p:nvPr/>
-        </p:nvSpPr>
-        <p:spPr>
-          <a:xfrm>
-            <a:off x="6017759" y="1494000"/>
-            <a:ext cx="3464640" cy="270000"/>
+            <a:off x="424800" y="4914000"/>
+            <a:ext cx="9057600" cy="198000"/>
           </a:xfrm>
           <a:prstGeom prst="rect">
             <a:avLst/>
@@ -5143,12 +5152,12 @@
           <a:noFill/>
         </p:spPr>
         <p:txBody>
-          <a:bodyPr wrap="square" anchor="ctr" lIns="0" rIns="0" tIns="0" bIns="0">
+          <a:bodyPr wrap="square" anchor="t" lIns="0" rIns="0" tIns="0" bIns="0">
             <a:spAutoFit/>
           </a:bodyPr>
           <a:lstStyle/>
           <a:p>
-            <a:pPr algn="ctr"/>
+            <a:pPr algn="l"/>
             <a:r>
               <a:rPr sz="1200" b="1">
                 <a:solidFill>
@@ -5158,263 +5167,31 @@
                 <a:ea typeface="맑은 고딕"/>
                 <a:cs typeface="맑은 고딕"/>
               </a:rPr>
-              <a:t>서비스 세부 내용</a:t>
-            </a:r>
-          </a:p>
-        </p:txBody>
-      </p:sp>
-      <p:sp>
-        <p:nvSpPr>
-          <p:cNvPr id="18" name="TextBox 17"/>
-          <p:cNvSpPr txBox="1"/>
-          <p:nvPr/>
-        </p:nvSpPr>
-        <p:spPr>
-          <a:xfrm>
-            <a:off x="6017759" y="1879200"/>
-            <a:ext cx="3464640" cy="208800"/>
-          </a:xfrm>
-          <a:prstGeom prst="rect">
-            <a:avLst/>
-          </a:prstGeom>
-          <a:noFill/>
-        </p:spPr>
-        <p:txBody>
-          <a:bodyPr wrap="square" anchor="t" lIns="0" rIns="0" tIns="0" bIns="0">
-            <a:spAutoFit/>
-          </a:bodyPr>
-          <a:lstStyle/>
-          <a:p>
-            <a:pPr algn="l"/>
-            <a:r>
-              <a:rPr sz="1200" b="1">
-                <a:solidFill>
-                  <a:srgbClr val="000000"/>
-                </a:solidFill>
-                <a:latin typeface="맑은 고딕"/>
-                <a:ea typeface="맑은 고딕"/>
-                <a:cs typeface="맑은 고딕"/>
-              </a:rPr>
-              <a:t>• ① 운영 방침</a:t>
-            </a:r>
-          </a:p>
-        </p:txBody>
-      </p:sp>
-      <p:sp>
-        <p:nvSpPr>
-          <p:cNvPr id="19" name="TextBox 18"/>
-          <p:cNvSpPr txBox="1"/>
-          <p:nvPr/>
-        </p:nvSpPr>
-        <p:spPr>
-          <a:xfrm>
-            <a:off x="6215759" y="2088000"/>
-            <a:ext cx="3266640" cy="208800"/>
-          </a:xfrm>
-          <a:prstGeom prst="rect">
-            <a:avLst/>
-          </a:prstGeom>
-          <a:noFill/>
-        </p:spPr>
-        <p:txBody>
-          <a:bodyPr wrap="square" anchor="t" lIns="0" rIns="0" tIns="0" bIns="0">
-            <a:spAutoFit/>
-          </a:bodyPr>
-          <a:lstStyle/>
-          <a:p>
-            <a:pPr algn="l"/>
-            <a:r>
-              <a:rPr sz="1100" b="0">
-                <a:solidFill>
-                  <a:srgbClr val="000000"/>
-                </a:solidFill>
-                <a:latin typeface="맑은 고딕"/>
-                <a:ea typeface="맑은 고딕"/>
-                <a:cs typeface="맑은 고딕"/>
-              </a:rPr>
-              <a:t>- 20시 마감 → 2시간 내 배송 완료</a:t>
-            </a:r>
-          </a:p>
-        </p:txBody>
-      </p:sp>
-      <p:sp>
-        <p:nvSpPr>
-          <p:cNvPr id="20" name="TextBox 19"/>
-          <p:cNvSpPr txBox="1"/>
-          <p:nvPr/>
-        </p:nvSpPr>
-        <p:spPr>
-          <a:xfrm>
-            <a:off x="6215759" y="2296800"/>
-            <a:ext cx="3266640" cy="208800"/>
-          </a:xfrm>
-          <a:prstGeom prst="rect">
-            <a:avLst/>
-          </a:prstGeom>
-          <a:noFill/>
-        </p:spPr>
-        <p:txBody>
-          <a:bodyPr wrap="square" anchor="t" lIns="0" rIns="0" tIns="0" bIns="0">
-            <a:spAutoFit/>
-          </a:bodyPr>
-          <a:lstStyle/>
-          <a:p>
-            <a:pPr algn="l"/>
-            <a:r>
-              <a:rPr sz="1100" b="0">
-                <a:solidFill>
-                  <a:srgbClr val="000000"/>
-                </a:solidFill>
-                <a:latin typeface="맑은 고딕"/>
-                <a:ea typeface="맑은 고딕"/>
-                <a:cs typeface="맑은 고딕"/>
-              </a:rPr>
-              <a:t>- 쓱배송 사륜차 </a:t>
-            </a:r>
-            <a:r>
-              <a:rPr sz="1000" b="0">
-                <a:solidFill>
-                  <a:srgbClr val="000000"/>
-                </a:solidFill>
-                <a:latin typeface="맑은 고딕"/>
-                <a:ea typeface="맑은 고딕"/>
-                <a:cs typeface="맑은 고딕"/>
-              </a:rPr>
-              <a:t>(대용량·중량 대응)</a:t>
-            </a:r>
-          </a:p>
-        </p:txBody>
-      </p:sp>
-      <p:sp>
-        <p:nvSpPr>
-          <p:cNvPr id="21" name="TextBox 20"/>
-          <p:cNvSpPr txBox="1"/>
-          <p:nvPr/>
-        </p:nvSpPr>
-        <p:spPr>
-          <a:xfrm>
-            <a:off x="6215759" y="2505600"/>
-            <a:ext cx="3266640" cy="208800"/>
-          </a:xfrm>
-          <a:prstGeom prst="rect">
-            <a:avLst/>
-          </a:prstGeom>
-          <a:noFill/>
-        </p:spPr>
-        <p:txBody>
-          <a:bodyPr wrap="square" anchor="t" lIns="0" rIns="0" tIns="0" bIns="0">
-            <a:spAutoFit/>
-          </a:bodyPr>
-          <a:lstStyle/>
-          <a:p>
-            <a:pPr algn="l"/>
-            <a:r>
-              <a:rPr sz="1100" b="0">
-                <a:solidFill>
-                  <a:srgbClr val="000000"/>
-                </a:solidFill>
-                <a:latin typeface="맑은 고딕"/>
-                <a:ea typeface="맑은 고딕"/>
-                <a:cs typeface="맑은 고딕"/>
-              </a:rPr>
-              <a:t>- 기존 예약배송 병행</a:t>
-            </a:r>
-          </a:p>
-        </p:txBody>
-      </p:sp>
-      <p:sp>
-        <p:nvSpPr>
-          <p:cNvPr id="22" name="TextBox 21"/>
-          <p:cNvSpPr txBox="1"/>
-          <p:nvPr/>
-        </p:nvSpPr>
-        <p:spPr>
-          <a:xfrm>
-            <a:off x="6215759" y="2714400"/>
-            <a:ext cx="3266640" cy="208800"/>
-          </a:xfrm>
-          <a:prstGeom prst="rect">
-            <a:avLst/>
-          </a:prstGeom>
-          <a:noFill/>
-        </p:spPr>
-        <p:txBody>
-          <a:bodyPr wrap="square" anchor="t" lIns="0" rIns="0" tIns="0" bIns="0">
-            <a:spAutoFit/>
-          </a:bodyPr>
-          <a:lstStyle/>
-          <a:p>
-            <a:pPr algn="l"/>
-            <a:r>
-              <a:rPr sz="1100" b="0">
-                <a:solidFill>
-                  <a:srgbClr val="000000"/>
-                </a:solidFill>
-                <a:latin typeface="맑은 고딕"/>
-                <a:ea typeface="맑은 고딕"/>
-                <a:cs typeface="맑은 고딕"/>
-              </a:rPr>
-              <a:t>- 유휴 PP센터 재활용형 서비스</a:t>
-            </a:r>
-          </a:p>
-        </p:txBody>
-      </p:sp>
-      <p:sp>
-        <p:nvSpPr>
-          <p:cNvPr id="23" name="TextBox 22"/>
-          <p:cNvSpPr txBox="1"/>
-          <p:nvPr/>
-        </p:nvSpPr>
-        <p:spPr>
-          <a:xfrm>
-            <a:off x="6017759" y="3038400"/>
-            <a:ext cx="3464640" cy="198000"/>
-          </a:xfrm>
-          <a:prstGeom prst="rect">
-            <a:avLst/>
-          </a:prstGeom>
-          <a:noFill/>
-        </p:spPr>
-        <p:txBody>
-          <a:bodyPr wrap="square" anchor="t" lIns="0" rIns="0" tIns="0" bIns="0">
-            <a:spAutoFit/>
-          </a:bodyPr>
-          <a:lstStyle/>
-          <a:p>
-            <a:pPr algn="l"/>
-            <a:r>
-              <a:rPr sz="1200" b="1">
-                <a:solidFill>
-                  <a:srgbClr val="000000"/>
-                </a:solidFill>
-                <a:latin typeface="맑은 고딕"/>
-                <a:ea typeface="맑은 고딕"/>
-                <a:cs typeface="맑은 고딕"/>
-              </a:rPr>
-              <a:t>• ② 확산 로드맵</a:t>
+              <a:t>• ③ 확산 로드맵</a:t>
             </a:r>
           </a:p>
         </p:txBody>
       </p:sp>
       <p:cxnSp>
         <p:nvCxnSpPr>
-          <p:cNvPr id="24" name="Connector 23"/>
+          <p:cNvPr id="11" name="Connector 10"/>
           <p:cNvCxnSpPr/>
           <p:nvPr/>
         </p:nvCxnSpPr>
         <p:spPr>
           <a:xfrm>
-            <a:off x="6089759" y="3366000"/>
-            <a:ext cx="0" cy="2260800"/>
+            <a:off x="424800" y="5335200"/>
+            <a:ext cx="9057600" cy="0"/>
           </a:xfrm>
           <a:prstGeom prst="bentConnector3">
             <a:avLst/>
           </a:prstGeom>
-          <a:ln w="22225">
+          <a:ln w="25400">
             <a:solidFill>
               <a:srgbClr val="000000"/>
             </a:solidFill>
             <a:prstDash val="solid"/>
+            <a:tailEnd type="triangle" w="med" len="med"/>
           </a:ln>
           <a:effectLst/>
         </p:spPr>
@@ -5435,14 +5212,14 @@
       </p:cxnSp>
       <p:sp>
         <p:nvSpPr>
-          <p:cNvPr id="25" name="Oval 24"/>
+          <p:cNvPr id="12" name="Oval 11"/>
           <p:cNvSpPr/>
           <p:nvPr/>
         </p:nvSpPr>
         <p:spPr>
           <a:xfrm>
-            <a:off x="6042959" y="3319200"/>
-            <a:ext cx="93600" cy="93600"/>
+            <a:off x="1506600" y="5284800"/>
+            <a:ext cx="100800" cy="100800"/>
           </a:xfrm>
           <a:prstGeom prst="ellipse">
             <a:avLst/>
@@ -5450,7 +5227,7 @@
           <a:solidFill>
             <a:srgbClr val="FFFFFF"/>
           </a:solidFill>
-          <a:ln w="12700">
+          <a:ln w="15875">
             <a:solidFill>
               <a:srgbClr val="000000"/>
             </a:solidFill>
@@ -5481,14 +5258,14 @@
       </p:sp>
       <p:sp>
         <p:nvSpPr>
-          <p:cNvPr id="26" name="TextBox 25"/>
+          <p:cNvPr id="13" name="TextBox 12"/>
           <p:cNvSpPr txBox="1"/>
           <p:nvPr/>
         </p:nvSpPr>
         <p:spPr>
           <a:xfrm>
-            <a:off x="6251759" y="3204000"/>
-            <a:ext cx="684000" cy="324000"/>
+            <a:off x="424800" y="5130000"/>
+            <a:ext cx="2264400" cy="162000"/>
           </a:xfrm>
           <a:prstGeom prst="rect">
             <a:avLst/>
@@ -5496,12 +5273,12 @@
           <a:noFill/>
         </p:spPr>
         <p:txBody>
-          <a:bodyPr wrap="square" anchor="ctr" lIns="0" rIns="0" tIns="0" bIns="0">
+          <a:bodyPr wrap="square" anchor="b" lIns="0" rIns="0" tIns="0" bIns="0">
             <a:spAutoFit/>
           </a:bodyPr>
           <a:lstStyle/>
           <a:p>
-            <a:pPr algn="l"/>
+            <a:pPr algn="ctr"/>
             <a:r>
               <a:rPr sz="1100" b="1">
                 <a:solidFill>
@@ -5518,14 +5295,14 @@
       </p:sp>
       <p:sp>
         <p:nvSpPr>
-          <p:cNvPr id="27" name="TextBox 26"/>
+          <p:cNvPr id="14" name="TextBox 13"/>
           <p:cNvSpPr txBox="1"/>
           <p:nvPr/>
         </p:nvSpPr>
         <p:spPr>
           <a:xfrm>
-            <a:off x="6971759" y="3204000"/>
-            <a:ext cx="2510640" cy="324000"/>
+            <a:off x="424800" y="5400000"/>
+            <a:ext cx="2264400" cy="413999"/>
           </a:xfrm>
           <a:prstGeom prst="rect">
             <a:avLst/>
@@ -5533,12 +5310,12 @@
           <a:noFill/>
         </p:spPr>
         <p:txBody>
-          <a:bodyPr wrap="square" anchor="ctr" lIns="0" rIns="0" tIns="0" bIns="0">
+          <a:bodyPr wrap="square" anchor="t" lIns="0" rIns="0" tIns="0" bIns="0">
             <a:spAutoFit/>
           </a:bodyPr>
           <a:lstStyle/>
           <a:p>
-            <a:pPr algn="l"/>
+            <a:pPr algn="ctr"/>
             <a:r>
               <a:rPr sz="1100" b="0">
                 <a:solidFill>
@@ -5548,21 +5325,35 @@
                 <a:ea typeface="맑은 고딕"/>
                 <a:cs typeface="맑은 고딕"/>
               </a:rPr>
-              <a:t>양재·하남점 도입</a:t>
-            </a:r>
-          </a:p>
-        </p:txBody>
-      </p:sp>
-      <p:sp>
-        <p:nvSpPr>
-          <p:cNvPr id="28" name="Oval 27"/>
+              <a:t>양재·하남점</a:t>
+            </a:r>
+          </a:p>
+          <a:p>
+            <a:pPr algn="ctr"/>
+            <a:r>
+              <a:rPr sz="1100" b="0">
+                <a:solidFill>
+                  <a:srgbClr val="000000"/>
+                </a:solidFill>
+                <a:latin typeface="맑은 고딕"/>
+                <a:ea typeface="맑은 고딕"/>
+                <a:cs typeface="맑은 고딕"/>
+              </a:rPr>
+              <a:t>도입</a:t>
+            </a:r>
+          </a:p>
+        </p:txBody>
+      </p:sp>
+      <p:sp>
+        <p:nvSpPr>
+          <p:cNvPr id="15" name="Oval 14"/>
           <p:cNvSpPr/>
           <p:nvPr/>
         </p:nvSpPr>
         <p:spPr>
           <a:xfrm>
-            <a:off x="6042959" y="4072800"/>
-            <a:ext cx="93600" cy="93600"/>
+            <a:off x="3771000" y="5284800"/>
+            <a:ext cx="100800" cy="100800"/>
           </a:xfrm>
           <a:prstGeom prst="ellipse">
             <a:avLst/>
@@ -5570,7 +5361,7 @@
           <a:solidFill>
             <a:srgbClr val="FFFFFF"/>
           </a:solidFill>
-          <a:ln w="12700">
+          <a:ln w="15875">
             <a:solidFill>
               <a:srgbClr val="000000"/>
             </a:solidFill>
@@ -5601,14 +5392,14 @@
       </p:sp>
       <p:sp>
         <p:nvSpPr>
-          <p:cNvPr id="29" name="TextBox 28"/>
+          <p:cNvPr id="16" name="TextBox 15"/>
           <p:cNvSpPr txBox="1"/>
           <p:nvPr/>
         </p:nvSpPr>
         <p:spPr>
           <a:xfrm>
-            <a:off x="6251759" y="3957600"/>
-            <a:ext cx="684000" cy="324000"/>
+            <a:off x="2689200" y="5130000"/>
+            <a:ext cx="2264400" cy="162000"/>
           </a:xfrm>
           <a:prstGeom prst="rect">
             <a:avLst/>
@@ -5616,12 +5407,12 @@
           <a:noFill/>
         </p:spPr>
         <p:txBody>
-          <a:bodyPr wrap="square" anchor="ctr" lIns="0" rIns="0" tIns="0" bIns="0">
+          <a:bodyPr wrap="square" anchor="b" lIns="0" rIns="0" tIns="0" bIns="0">
             <a:spAutoFit/>
           </a:bodyPr>
           <a:lstStyle/>
           <a:p>
-            <a:pPr algn="l"/>
+            <a:pPr algn="ctr"/>
             <a:r>
               <a:rPr sz="1100" b="1">
                 <a:solidFill>
@@ -5638,14 +5429,14 @@
       </p:sp>
       <p:sp>
         <p:nvSpPr>
-          <p:cNvPr id="30" name="TextBox 29"/>
+          <p:cNvPr id="17" name="TextBox 16"/>
           <p:cNvSpPr txBox="1"/>
           <p:nvPr/>
         </p:nvSpPr>
         <p:spPr>
           <a:xfrm>
-            <a:off x="6971759" y="3957600"/>
-            <a:ext cx="2510640" cy="324000"/>
+            <a:off x="2689200" y="5400000"/>
+            <a:ext cx="2264400" cy="413999"/>
           </a:xfrm>
           <a:prstGeom prst="rect">
             <a:avLst/>
@@ -5653,12 +5444,12 @@
           <a:noFill/>
         </p:spPr>
         <p:txBody>
-          <a:bodyPr wrap="square" anchor="ctr" lIns="0" rIns="0" tIns="0" bIns="0">
+          <a:bodyPr wrap="square" anchor="t" lIns="0" rIns="0" tIns="0" bIns="0">
             <a:spAutoFit/>
           </a:bodyPr>
           <a:lstStyle/>
           <a:p>
-            <a:pPr algn="l"/>
+            <a:pPr algn="ctr"/>
             <a:r>
               <a:rPr sz="1100" b="0">
                 <a:solidFill>
@@ -5672,7 +5463,7 @@
             </a:r>
           </a:p>
           <a:p>
-            <a:pPr algn="l"/>
+            <a:pPr algn="ctr"/>
             <a:r>
               <a:rPr sz="1000" b="0">
                 <a:solidFill>
@@ -5689,14 +5480,14 @@
       </p:sp>
       <p:sp>
         <p:nvSpPr>
-          <p:cNvPr id="31" name="Oval 30"/>
+          <p:cNvPr id="18" name="Oval 17"/>
           <p:cNvSpPr/>
           <p:nvPr/>
         </p:nvSpPr>
         <p:spPr>
           <a:xfrm>
-            <a:off x="6042959" y="4826400"/>
-            <a:ext cx="93600" cy="93600"/>
+            <a:off x="6035400" y="5284800"/>
+            <a:ext cx="100800" cy="100800"/>
           </a:xfrm>
           <a:prstGeom prst="ellipse">
             <a:avLst/>
@@ -5704,7 +5495,7 @@
           <a:solidFill>
             <a:srgbClr val="FFFFFF"/>
           </a:solidFill>
-          <a:ln w="12700">
+          <a:ln w="15875">
             <a:solidFill>
               <a:srgbClr val="000000"/>
             </a:solidFill>
@@ -5735,14 +5526,14 @@
       </p:sp>
       <p:sp>
         <p:nvSpPr>
-          <p:cNvPr id="32" name="TextBox 31"/>
+          <p:cNvPr id="19" name="TextBox 18"/>
           <p:cNvSpPr txBox="1"/>
           <p:nvPr/>
         </p:nvSpPr>
         <p:spPr>
           <a:xfrm>
-            <a:off x="6251759" y="4711200"/>
-            <a:ext cx="684000" cy="324000"/>
+            <a:off x="4953600" y="5130000"/>
+            <a:ext cx="2264400" cy="162000"/>
           </a:xfrm>
           <a:prstGeom prst="rect">
             <a:avLst/>
@@ -5750,12 +5541,12 @@
           <a:noFill/>
         </p:spPr>
         <p:txBody>
-          <a:bodyPr wrap="square" anchor="ctr" lIns="0" rIns="0" tIns="0" bIns="0">
+          <a:bodyPr wrap="square" anchor="b" lIns="0" rIns="0" tIns="0" bIns="0">
             <a:spAutoFit/>
           </a:bodyPr>
           <a:lstStyle/>
           <a:p>
-            <a:pPr algn="l"/>
+            <a:pPr algn="ctr"/>
             <a:r>
               <a:rPr sz="1100" b="1">
                 <a:solidFill>
@@ -5772,14 +5563,14 @@
       </p:sp>
       <p:sp>
         <p:nvSpPr>
-          <p:cNvPr id="33" name="TextBox 32"/>
+          <p:cNvPr id="20" name="TextBox 19"/>
           <p:cNvSpPr txBox="1"/>
           <p:nvPr/>
         </p:nvSpPr>
         <p:spPr>
           <a:xfrm>
-            <a:off x="6971759" y="4711200"/>
-            <a:ext cx="2510640" cy="324000"/>
+            <a:off x="4953600" y="5400000"/>
+            <a:ext cx="2264400" cy="413999"/>
           </a:xfrm>
           <a:prstGeom prst="rect">
             <a:avLst/>
@@ -5787,12 +5578,12 @@
           <a:noFill/>
         </p:spPr>
         <p:txBody>
-          <a:bodyPr wrap="square" anchor="ctr" lIns="0" rIns="0" tIns="0" bIns="0">
+          <a:bodyPr wrap="square" anchor="t" lIns="0" rIns="0" tIns="0" bIns="0">
             <a:spAutoFit/>
           </a:bodyPr>
           <a:lstStyle/>
           <a:p>
-            <a:pPr algn="l"/>
+            <a:pPr algn="ctr"/>
             <a:r>
               <a:rPr sz="1100" b="0">
                 <a:solidFill>
@@ -5809,14 +5600,14 @@
       </p:sp>
       <p:sp>
         <p:nvSpPr>
-          <p:cNvPr id="34" name="Oval 33"/>
+          <p:cNvPr id="21" name="Oval 20"/>
           <p:cNvSpPr/>
           <p:nvPr/>
         </p:nvSpPr>
         <p:spPr>
           <a:xfrm>
-            <a:off x="6042959" y="5579999"/>
-            <a:ext cx="93600" cy="93600"/>
+            <a:off x="8299800" y="5284800"/>
+            <a:ext cx="100800" cy="100800"/>
           </a:xfrm>
           <a:prstGeom prst="ellipse">
             <a:avLst/>
@@ -5824,7 +5615,7 @@
           <a:solidFill>
             <a:srgbClr val="FFFFFF"/>
           </a:solidFill>
-          <a:ln w="12700">
+          <a:ln w="15875">
             <a:solidFill>
               <a:srgbClr val="000000"/>
             </a:solidFill>
@@ -5855,14 +5646,14 @@
       </p:sp>
       <p:sp>
         <p:nvSpPr>
-          <p:cNvPr id="35" name="TextBox 34"/>
+          <p:cNvPr id="22" name="TextBox 21"/>
           <p:cNvSpPr txBox="1"/>
           <p:nvPr/>
         </p:nvSpPr>
         <p:spPr>
           <a:xfrm>
-            <a:off x="6251759" y="5464800"/>
-            <a:ext cx="684000" cy="324000"/>
+            <a:off x="7218000" y="5130000"/>
+            <a:ext cx="2264400" cy="162000"/>
           </a:xfrm>
           <a:prstGeom prst="rect">
             <a:avLst/>
@@ -5870,12 +5661,12 @@
           <a:noFill/>
         </p:spPr>
         <p:txBody>
-          <a:bodyPr wrap="square" anchor="ctr" lIns="0" rIns="0" tIns="0" bIns="0">
+          <a:bodyPr wrap="square" anchor="b" lIns="0" rIns="0" tIns="0" bIns="0">
             <a:spAutoFit/>
           </a:bodyPr>
           <a:lstStyle/>
           <a:p>
-            <a:pPr algn="l"/>
+            <a:pPr algn="ctr"/>
             <a:r>
               <a:rPr sz="1100" b="1">
                 <a:solidFill>
@@ -5892,14 +5683,14 @@
       </p:sp>
       <p:sp>
         <p:nvSpPr>
-          <p:cNvPr id="36" name="TextBox 35"/>
+          <p:cNvPr id="23" name="TextBox 22"/>
           <p:cNvSpPr txBox="1"/>
           <p:nvPr/>
         </p:nvSpPr>
         <p:spPr>
           <a:xfrm>
-            <a:off x="6971759" y="5464800"/>
-            <a:ext cx="2510640" cy="324000"/>
+            <a:off x="7218000" y="5400000"/>
+            <a:ext cx="2264400" cy="413999"/>
           </a:xfrm>
           <a:prstGeom prst="rect">
             <a:avLst/>
@@ -5907,12 +5698,12 @@
           <a:noFill/>
         </p:spPr>
         <p:txBody>
-          <a:bodyPr wrap="square" anchor="ctr" lIns="0" rIns="0" tIns="0" bIns="0">
+          <a:bodyPr wrap="square" anchor="t" lIns="0" rIns="0" tIns="0" bIns="0">
             <a:spAutoFit/>
           </a:bodyPr>
           <a:lstStyle/>
           <a:p>
-            <a:pPr algn="l"/>
+            <a:pPr algn="ctr"/>
             <a:r>
               <a:rPr sz="1100" b="0">
                 <a:solidFill>
@@ -5922,21 +5713,35 @@
                 <a:ea typeface="맑은 고딕"/>
                 <a:cs typeface="맑은 고딕"/>
               </a:rPr>
-              <a:t>50여 점포 운영</a:t>
-            </a:r>
-          </a:p>
-        </p:txBody>
-      </p:sp>
-      <p:sp>
-        <p:nvSpPr>
-          <p:cNvPr id="37" name="Rectangle 36"/>
+              <a:t>50여 점포</a:t>
+            </a:r>
+          </a:p>
+          <a:p>
+            <a:pPr algn="ctr"/>
+            <a:r>
+              <a:rPr sz="1100" b="0">
+                <a:solidFill>
+                  <a:srgbClr val="000000"/>
+                </a:solidFill>
+                <a:latin typeface="맑은 고딕"/>
+                <a:ea typeface="맑은 고딕"/>
+                <a:cs typeface="맑은 고딕"/>
+              </a:rPr>
+              <a:t>운영</a:t>
+            </a:r>
+          </a:p>
+        </p:txBody>
+      </p:sp>
+      <p:sp>
+        <p:nvSpPr>
+          <p:cNvPr id="24" name="Rectangle 23"/>
           <p:cNvSpPr/>
           <p:nvPr/>
         </p:nvSpPr>
         <p:spPr>
           <a:xfrm>
-            <a:off x="6017759" y="5706000"/>
-            <a:ext cx="3464640" cy="413999"/>
+            <a:off x="424800" y="5760000"/>
+            <a:ext cx="9057600" cy="342000"/>
           </a:xfrm>
           <a:prstGeom prst="rect">
             <a:avLst/>
@@ -5973,14 +5778,14 @@
       </p:sp>
       <p:sp>
         <p:nvSpPr>
-          <p:cNvPr id="38" name="TextBox 37"/>
+          <p:cNvPr id="25" name="TextBox 24"/>
           <p:cNvSpPr txBox="1"/>
           <p:nvPr/>
         </p:nvSpPr>
         <p:spPr>
           <a:xfrm>
-            <a:off x="6017759" y="5706000"/>
-            <a:ext cx="3464640" cy="413999"/>
+            <a:off x="424800" y="5760000"/>
+            <a:ext cx="9057600" cy="342000"/>
           </a:xfrm>
           <a:prstGeom prst="rect">
             <a:avLst/>
@@ -6003,57 +5808,20 @@
                 <a:ea typeface="맑은 고딕"/>
                 <a:cs typeface="맑은 고딕"/>
               </a:rPr>
-              <a:t>유휴 PP센터 재활용 → 신규 투자 최소 · 저비용 급속 확산</a:t>
-            </a:r>
-          </a:p>
-        </p:txBody>
-      </p:sp>
-      <p:cxnSp>
-        <p:nvCxnSpPr>
-          <p:cNvPr id="39" name="Connector 38"/>
-          <p:cNvCxnSpPr/>
+              <a:t>유휴 PP센터 재활용 → 신규 투자 최소 · 저비용으로 대용량 즉시배송 급속 확산</a:t>
+            </a:r>
+          </a:p>
+        </p:txBody>
+      </p:sp>
+      <p:sp>
+        <p:nvSpPr>
+          <p:cNvPr id="26" name="TextBox 25"/>
+          <p:cNvSpPr txBox="1"/>
           <p:nvPr/>
-        </p:nvCxnSpPr>
+        </p:nvSpPr>
         <p:spPr>
           <a:xfrm>
-            <a:off x="5819759" y="1494000"/>
-            <a:ext cx="0" cy="4626000"/>
-          </a:xfrm>
-          <a:prstGeom prst="bentConnector3">
-            <a:avLst/>
-          </a:prstGeom>
-          <a:ln w="9525">
-            <a:solidFill>
-              <a:srgbClr val="BFBFBF"/>
-            </a:solidFill>
-            <a:prstDash val="solid"/>
-          </a:ln>
-          <a:effectLst/>
-        </p:spPr>
-        <p:style>
-          <a:lnRef idx="2">
-            <a:schemeClr val="accent1"/>
-          </a:lnRef>
-          <a:fillRef idx="0">
-            <a:schemeClr val="accent1"/>
-          </a:fillRef>
-          <a:effectRef idx="1">
-            <a:schemeClr val="accent1"/>
-          </a:effectRef>
-          <a:fontRef idx="minor">
-            <a:schemeClr val="tx1"/>
-          </a:fontRef>
-        </p:style>
-      </p:cxnSp>
-      <p:sp>
-        <p:nvSpPr>
-          <p:cNvPr id="40" name="TextBox 39"/>
-          <p:cNvSpPr txBox="1"/>
-          <p:nvPr/>
-        </p:nvSpPr>
-        <p:spPr>
-          <a:xfrm>
-            <a:off x="424800" y="6292800"/>
+            <a:off x="424800" y="6210000"/>
             <a:ext cx="9057600" cy="198000"/>
           </a:xfrm>
           <a:prstGeom prst="rect">

--- a/reports/ssg-quickcommerce-onepager.pptx
+++ b/reports/ssg-quickcommerce-onepager.pptx
@@ -3120,7 +3120,7 @@
                 <a:ea typeface="맑은 고딕"/>
                 <a:cs typeface="맑은 고딕"/>
               </a:rPr>
-              <a:t>[동향] </a:t>
+              <a:t>■  </a:t>
             </a:r>
             <a:r>
               <a:rPr sz="2000" b="1">
@@ -3131,7 +3131,7 @@
                 <a:ea typeface="맑은 고딕"/>
                 <a:cs typeface="맑은 고딕"/>
               </a:rPr>
-              <a:t>이마트, 점포 물류거점화로 대용량 즉시배송 선점</a:t>
+              <a:t>이마트, 점포 기반 '2시간 배송' 도입 — 퀵커머스의 장보기 채널화</a:t>
             </a:r>
           </a:p>
         </p:txBody>
@@ -3168,29 +3168,7 @@
                 <a:ea typeface="맑은 고딕"/>
                 <a:cs typeface="맑은 고딕"/>
               </a:rPr>
-              <a:t>■ '2시간 배송' 양재·하남 시범 </a:t>
-            </a:r>
-            <a:r>
-              <a:rPr sz="1300" b="1">
-                <a:solidFill>
-                  <a:srgbClr val="000000"/>
-                </a:solidFill>
-                <a:latin typeface="맑은 고딕"/>
-                <a:ea typeface="맑은 고딕"/>
-                <a:cs typeface="맑은 고딕"/>
-              </a:rPr>
-              <a:t>(7.9~)</a:t>
-            </a:r>
-            <a:r>
-              <a:rPr sz="1400" b="1">
-                <a:solidFill>
-                  <a:srgbClr val="000000"/>
-                </a:solidFill>
-                <a:latin typeface="맑은 고딕"/>
-                <a:ea typeface="맑은 고딕"/>
-                <a:cs typeface="맑은 고딕"/>
-              </a:rPr>
-              <a:t> → 연말 50여 점 · 유휴 PP센터 재활용 저비용 모델</a:t>
+              <a:t>■ 취급 상품 소량 1만 종 → 마트 전 상품 15만 종 확대, 연말 50여 개 점포 전개</a:t>
             </a:r>
           </a:p>
         </p:txBody>
@@ -3203,8 +3181,8 @@
         </p:nvSpPr>
         <p:spPr>
           <a:xfrm>
-            <a:off x="424800" y="1494000"/>
-            <a:ext cx="9057600" cy="194400"/>
+            <a:off x="424800" y="1458000"/>
+            <a:ext cx="9057600" cy="201600"/>
           </a:xfrm>
           <a:prstGeom prst="rect">
             <a:avLst/>
@@ -3240,8 +3218,8 @@
         </p:nvSpPr>
         <p:spPr>
           <a:xfrm>
-            <a:off x="622800" y="1688400"/>
-            <a:ext cx="8859600" cy="194400"/>
+            <a:off x="622800" y="1659599"/>
+            <a:ext cx="8859600" cy="201600"/>
           </a:xfrm>
           <a:prstGeom prst="rect">
             <a:avLst/>
@@ -3264,7 +3242,29 @@
                 <a:ea typeface="맑은 고딕"/>
                 <a:cs typeface="맑은 고딕"/>
               </a:rPr>
-              <a:t>- 바로퀵 매출 197%↑ </a:t>
+              <a:t>- '바로퀵' </a:t>
+            </a:r>
+            <a:r>
+              <a:rPr sz="1000" b="0">
+                <a:solidFill>
+                  <a:srgbClr val="000000"/>
+                </a:solidFill>
+                <a:latin typeface="맑은 고딕"/>
+                <a:ea typeface="맑은 고딕"/>
+                <a:cs typeface="맑은 고딕"/>
+              </a:rPr>
+              <a:t>(1시간 배송)</a:t>
+            </a:r>
+            <a:r>
+              <a:rPr sz="1100" b="0">
+                <a:solidFill>
+                  <a:srgbClr val="000000"/>
+                </a:solidFill>
+                <a:latin typeface="맑은 고딕"/>
+                <a:ea typeface="맑은 고딕"/>
+                <a:cs typeface="맑은 고딕"/>
+              </a:rPr>
+              <a:t> 매출 197% 증가 </a:t>
             </a:r>
             <a:r>
               <a:rPr sz="1000" b="0">
@@ -3286,29 +3286,7 @@
                 <a:ea typeface="맑은 고딕"/>
                 <a:cs typeface="맑은 고딕"/>
               </a:rPr>
-              <a:t> </a:t>
-            </a:r>
-            <a:r>
-              <a:rPr sz="1000" b="0">
-                <a:solidFill>
-                  <a:srgbClr val="000000"/>
-                </a:solidFill>
-                <a:latin typeface="맑은 고딕"/>
-                <a:ea typeface="맑은 고딕"/>
-                <a:cs typeface="맑은 고딕"/>
-              </a:rPr>
-              <a:t>(미검증)</a:t>
-            </a:r>
-            <a:r>
-              <a:rPr sz="1100" b="0">
-                <a:solidFill>
-                  <a:srgbClr val="000000"/>
-                </a:solidFill>
-                <a:latin typeface="맑은 고딕"/>
-                <a:ea typeface="맑은 고딕"/>
-                <a:cs typeface="맑은 고딕"/>
-              </a:rPr>
-              <a:t> → 온디맨드 대용량 수요 실증</a:t>
+              <a:t> → 퀵커머스 대용량 상품 수요 확대</a:t>
             </a:r>
           </a:p>
         </p:txBody>
@@ -3321,8 +3299,8 @@
         </p:nvSpPr>
         <p:spPr>
           <a:xfrm>
-            <a:off x="622800" y="1882800"/>
-            <a:ext cx="8859600" cy="194400"/>
+            <a:off x="622800" y="1861200"/>
+            <a:ext cx="8859600" cy="201600"/>
           </a:xfrm>
           <a:prstGeom prst="rect">
             <a:avLst/>
@@ -3345,7 +3323,51 @@
                 <a:ea typeface="맑은 고딕"/>
                 <a:cs typeface="맑은 고딕"/>
               </a:rPr>
-              <a:t>- B마트 등 즉시배송 시장, 대용량 품목 확대 → 소량 한정의 공백</a:t>
+              <a:t>- B마트 등 업계 대용량 품목 취급 확대 → 소량 1시간 </a:t>
+            </a:r>
+            <a:r>
+              <a:rPr sz="1000" b="0">
+                <a:solidFill>
+                  <a:srgbClr val="000000"/>
+                </a:solidFill>
+                <a:latin typeface="맑은 고딕"/>
+                <a:ea typeface="맑은 고딕"/>
+                <a:cs typeface="맑은 고딕"/>
+              </a:rPr>
+              <a:t>(이륜차)</a:t>
+            </a:r>
+            <a:r>
+              <a:rPr sz="1100" b="0">
+                <a:solidFill>
+                  <a:srgbClr val="000000"/>
+                </a:solidFill>
+                <a:latin typeface="맑은 고딕"/>
+                <a:ea typeface="맑은 고딕"/>
+                <a:cs typeface="맑은 고딕"/>
+              </a:rPr>
+              <a:t>·대용량 2시간 </a:t>
+            </a:r>
+            <a:r>
+              <a:rPr sz="1000" b="0">
+                <a:solidFill>
+                  <a:srgbClr val="000000"/>
+                </a:solidFill>
+                <a:latin typeface="맑은 고딕"/>
+                <a:ea typeface="맑은 고딕"/>
+                <a:cs typeface="맑은 고딕"/>
+              </a:rPr>
+              <a:t>(사륜차)</a:t>
+            </a:r>
+            <a:r>
+              <a:rPr sz="1100" b="0">
+                <a:solidFill>
+                  <a:srgbClr val="000000"/>
+                </a:solidFill>
+                <a:latin typeface="맑은 고딕"/>
+                <a:ea typeface="맑은 고딕"/>
+                <a:cs typeface="맑은 고딕"/>
+              </a:rPr>
+              <a:t> 이원화 대응</a:t>
             </a:r>
           </a:p>
         </p:txBody>
@@ -3358,8 +3380,8 @@
         </p:nvSpPr>
         <p:spPr>
           <a:xfrm>
-            <a:off x="622800" y="2077200"/>
-            <a:ext cx="8859600" cy="194400"/>
+            <a:off x="424800" y="2113200"/>
+            <a:ext cx="9057600" cy="180000"/>
           </a:xfrm>
           <a:prstGeom prst="rect">
             <a:avLst/>
@@ -3374,7 +3396,7 @@
           <a:p>
             <a:pPr algn="l"/>
             <a:r>
-              <a:rPr sz="1100" b="0">
+              <a:rPr sz="1200" b="1">
                 <a:solidFill>
                   <a:srgbClr val="000000"/>
                 </a:solidFill>
@@ -3382,103 +3404,22 @@
                 <a:ea typeface="맑은 고딕"/>
                 <a:cs typeface="맑은 고딕"/>
               </a:rPr>
-              <a:t>- 1시간 </a:t>
-            </a:r>
-            <a:r>
-              <a:rPr sz="1000" b="0">
-                <a:solidFill>
-                  <a:srgbClr val="000000"/>
-                </a:solidFill>
-                <a:latin typeface="맑은 고딕"/>
-                <a:ea typeface="맑은 고딕"/>
-                <a:cs typeface="맑은 고딕"/>
-              </a:rPr>
-              <a:t>(소량·이륜차)</a:t>
-            </a:r>
-            <a:r>
-              <a:rPr sz="1100" b="0">
-                <a:solidFill>
-                  <a:srgbClr val="000000"/>
-                </a:solidFill>
-                <a:latin typeface="맑은 고딕"/>
-                <a:ea typeface="맑은 고딕"/>
-                <a:cs typeface="맑은 고딕"/>
-              </a:rPr>
-              <a:t> / 2시간 </a:t>
-            </a:r>
-            <a:r>
-              <a:rPr sz="1000" b="0">
-                <a:solidFill>
-                  <a:srgbClr val="000000"/>
-                </a:solidFill>
-                <a:latin typeface="맑은 고딕"/>
-                <a:ea typeface="맑은 고딕"/>
-                <a:cs typeface="맑은 고딕"/>
-              </a:rPr>
-              <a:t>(대용량·사륜차)</a:t>
-            </a:r>
-            <a:r>
-              <a:rPr sz="1100" b="0">
-                <a:solidFill>
-                  <a:srgbClr val="000000"/>
-                </a:solidFill>
-                <a:latin typeface="맑은 고딕"/>
-                <a:ea typeface="맑은 고딕"/>
-                <a:cs typeface="맑은 고딕"/>
-              </a:rPr>
-              <a:t> 이원화로 대응</a:t>
-            </a:r>
-          </a:p>
-        </p:txBody>
-      </p:sp>
-      <p:sp>
-        <p:nvSpPr>
-          <p:cNvPr id="8" name="TextBox 7"/>
-          <p:cNvSpPr txBox="1"/>
-          <p:nvPr/>
-        </p:nvSpPr>
-        <p:spPr>
-          <a:xfrm>
-            <a:off x="424800" y="2379600"/>
-            <a:ext cx="9057600" cy="198000"/>
-          </a:xfrm>
-          <a:prstGeom prst="rect">
-            <a:avLst/>
-          </a:prstGeom>
-          <a:noFill/>
-        </p:spPr>
-        <p:txBody>
-          <a:bodyPr wrap="square" anchor="t" lIns="0" rIns="0" tIns="0" bIns="0">
-            <a:spAutoFit/>
-          </a:bodyPr>
-          <a:lstStyle/>
-          <a:p>
-            <a:pPr algn="l"/>
-            <a:r>
-              <a:rPr sz="1200" b="1">
-                <a:solidFill>
-                  <a:srgbClr val="000000"/>
-                </a:solidFill>
-                <a:latin typeface="맑은 고딕"/>
-                <a:ea typeface="맑은 고딕"/>
-                <a:cs typeface="맑은 고딕"/>
-              </a:rPr>
-              <a:t>• ② 이마트 배송 체계</a:t>
+              <a:t>• ② 서비스 개요</a:t>
             </a:r>
           </a:p>
         </p:txBody>
       </p:sp>
       <p:graphicFrame>
         <p:nvGraphicFramePr>
-          <p:cNvPr id="9" name="Table 8"/>
+          <p:cNvPr id="8" name="Table 7"/>
           <p:cNvGraphicFramePr>
             <a:graphicFrameLocks noGrp="1"/>
           </p:cNvGraphicFramePr>
           <p:nvPr/>
         </p:nvGraphicFramePr>
         <p:xfrm>
-          <a:off x="424800" y="2599200"/>
-          <a:ext cx="9057600" cy="2206800"/>
+          <a:off x="424800" y="2300400"/>
+          <a:ext cx="9057600" cy="1242000"/>
         </p:xfrm>
         <a:graphic>
           <a:graphicData uri="http://schemas.openxmlformats.org/drawingml/2006/table">
@@ -3487,14 +3428,11 @@
                 <a:tableStyleId>{5C22544A-7EE6-4342-B048-85BDC9FD1C3A}</a:tableStyleId>
               </a:tblPr>
               <a:tblGrid>
-                <a:gridCol w="936000"/>
-                <a:gridCol w="1944000"/>
-                <a:gridCol w="792000"/>
-                <a:gridCol w="1872000"/>
-                <a:gridCol w="864000"/>
-                <a:gridCol w="2649600"/>
+                <a:gridCol w="1152000"/>
+                <a:gridCol w="3816000"/>
+                <a:gridCol w="4089600"/>
               </a:tblGrid>
-              <a:tr h="367800">
+              <a:tr h="248400">
                 <a:tc>
                   <a:txBody>
                     <a:bodyPr wrap="square"/>
@@ -3555,44 +3493,10 @@
                           <a:ea typeface="맑은 고딕"/>
                           <a:cs typeface="맑은 고딕"/>
                         </a:rPr>
-                        <a:t>서비스</a:t>
+                        <a:t>'바로퀵' </a:t>
                       </a:r>
-                    </a:p>
-                  </a:txBody>
-                  <a:tcPr anchor="ctr" marL="36000" marR="36000" marT="0" marB="0">
-                    <a:lnL w="9525" cap="flat">
-                      <a:solidFill>
-                        <a:srgbClr val="BFBFBF"/>
-                      </a:solidFill>
-                    </a:lnL>
-                    <a:lnR w="9525" cap="flat">
-                      <a:solidFill>
-                        <a:srgbClr val="BFBFBF"/>
-                      </a:solidFill>
-                    </a:lnR>
-                    <a:lnT w="9525" cap="flat">
-                      <a:solidFill>
-                        <a:srgbClr val="BFBFBF"/>
-                      </a:solidFill>
-                    </a:lnT>
-                    <a:lnB w="9525" cap="flat">
-                      <a:solidFill>
-                        <a:srgbClr val="BFBFBF"/>
-                      </a:solidFill>
-                    </a:lnB>
-                    <a:solidFill>
-                      <a:srgbClr val="EAEEF6"/>
-                    </a:solidFill>
-                  </a:tcPr>
-                </a:tc>
-                <a:tc>
-                  <a:txBody>
-                    <a:bodyPr wrap="square"/>
-                    <a:lstStyle/>
-                    <a:p>
-                      <a:pPr algn="ctr"/>
                       <a:r>
-                        <a:rPr sz="1000" b="1">
+                        <a:rPr sz="900" b="1">
                           <a:solidFill>
                             <a:srgbClr val="000000"/>
                           </a:solidFill>
@@ -3600,7 +3504,7 @@
                           <a:ea typeface="맑은 고딕"/>
                           <a:cs typeface="맑은 고딕"/>
                         </a:rPr>
-                        <a:t>형태</a:t>
+                        <a:t>(기존)</a:t>
                       </a:r>
                     </a:p>
                   </a:txBody>
@@ -3627,1259 +3531,6 @@
                     </a:lnB>
                     <a:solidFill>
                       <a:srgbClr val="EAEEF6"/>
-                    </a:solidFill>
-                  </a:tcPr>
-                </a:tc>
-                <a:tc>
-                  <a:txBody>
-                    <a:bodyPr wrap="square"/>
-                    <a:lstStyle/>
-                    <a:p>
-                      <a:pPr algn="ctr"/>
-                      <a:r>
-                        <a:rPr sz="1000" b="1">
-                          <a:solidFill>
-                            <a:srgbClr val="000000"/>
-                          </a:solidFill>
-                          <a:latin typeface="맑은 고딕"/>
-                          <a:ea typeface="맑은 고딕"/>
-                          <a:cs typeface="맑은 고딕"/>
-                        </a:rPr>
-                        <a:t>시간</a:t>
-                      </a:r>
-                    </a:p>
-                  </a:txBody>
-                  <a:tcPr anchor="ctr" marL="36000" marR="36000" marT="0" marB="0">
-                    <a:lnL w="9525" cap="flat">
-                      <a:solidFill>
-                        <a:srgbClr val="BFBFBF"/>
-                      </a:solidFill>
-                    </a:lnL>
-                    <a:lnR w="9525" cap="flat">
-                      <a:solidFill>
-                        <a:srgbClr val="BFBFBF"/>
-                      </a:solidFill>
-                    </a:lnR>
-                    <a:lnT w="9525" cap="flat">
-                      <a:solidFill>
-                        <a:srgbClr val="BFBFBF"/>
-                      </a:solidFill>
-                    </a:lnT>
-                    <a:lnB w="9525" cap="flat">
-                      <a:solidFill>
-                        <a:srgbClr val="BFBFBF"/>
-                      </a:solidFill>
-                    </a:lnB>
-                    <a:solidFill>
-                      <a:srgbClr val="EAEEF6"/>
-                    </a:solidFill>
-                  </a:tcPr>
-                </a:tc>
-                <a:tc>
-                  <a:txBody>
-                    <a:bodyPr wrap="square"/>
-                    <a:lstStyle/>
-                    <a:p>
-                      <a:pPr algn="ctr"/>
-                      <a:r>
-                        <a:rPr sz="1000" b="1">
-                          <a:solidFill>
-                            <a:srgbClr val="000000"/>
-                          </a:solidFill>
-                          <a:latin typeface="맑은 고딕"/>
-                          <a:ea typeface="맑은 고딕"/>
-                          <a:cs typeface="맑은 고딕"/>
-                        </a:rPr>
-                        <a:t>운송</a:t>
-                      </a:r>
-                    </a:p>
-                  </a:txBody>
-                  <a:tcPr anchor="ctr" marL="36000" marR="36000" marT="0" marB="0">
-                    <a:lnL w="9525" cap="flat">
-                      <a:solidFill>
-                        <a:srgbClr val="BFBFBF"/>
-                      </a:solidFill>
-                    </a:lnL>
-                    <a:lnR w="9525" cap="flat">
-                      <a:solidFill>
-                        <a:srgbClr val="BFBFBF"/>
-                      </a:solidFill>
-                    </a:lnR>
-                    <a:lnT w="9525" cap="flat">
-                      <a:solidFill>
-                        <a:srgbClr val="BFBFBF"/>
-                      </a:solidFill>
-                    </a:lnT>
-                    <a:lnB w="9525" cap="flat">
-                      <a:solidFill>
-                        <a:srgbClr val="BFBFBF"/>
-                      </a:solidFill>
-                    </a:lnB>
-                    <a:solidFill>
-                      <a:srgbClr val="EAEEF6"/>
-                    </a:solidFill>
-                  </a:tcPr>
-                </a:tc>
-                <a:tc>
-                  <a:txBody>
-                    <a:bodyPr wrap="square"/>
-                    <a:lstStyle/>
-                    <a:p>
-                      <a:pPr algn="ctr"/>
-                      <a:r>
-                        <a:rPr sz="1000" b="1">
-                          <a:solidFill>
-                            <a:srgbClr val="000000"/>
-                          </a:solidFill>
-                          <a:latin typeface="맑은 고딕"/>
-                          <a:ea typeface="맑은 고딕"/>
-                          <a:cs typeface="맑은 고딕"/>
-                        </a:rPr>
-                        <a:t>취급</a:t>
-                      </a:r>
-                    </a:p>
-                  </a:txBody>
-                  <a:tcPr anchor="ctr" marL="36000" marR="36000" marT="0" marB="0">
-                    <a:lnL w="9525" cap="flat">
-                      <a:solidFill>
-                        <a:srgbClr val="BFBFBF"/>
-                      </a:solidFill>
-                    </a:lnL>
-                    <a:lnR w="9525" cap="flat">
-                      <a:solidFill>
-                        <a:srgbClr val="BFBFBF"/>
-                      </a:solidFill>
-                    </a:lnR>
-                    <a:lnT w="9525" cap="flat">
-                      <a:solidFill>
-                        <a:srgbClr val="BFBFBF"/>
-                      </a:solidFill>
-                    </a:lnT>
-                    <a:lnB w="9525" cap="flat">
-                      <a:solidFill>
-                        <a:srgbClr val="BFBFBF"/>
-                      </a:solidFill>
-                    </a:lnB>
-                    <a:solidFill>
-                      <a:srgbClr val="EAEEF6"/>
-                    </a:solidFill>
-                  </a:tcPr>
-                </a:tc>
-              </a:tr>
-              <a:tr h="367800">
-                <a:tc rowSpan="3">
-                  <a:txBody>
-                    <a:bodyPr wrap="square"/>
-                    <a:lstStyle/>
-                    <a:p>
-                      <a:pPr algn="ctr"/>
-                      <a:r>
-                        <a:rPr sz="1000" b="1">
-                          <a:solidFill>
-                            <a:srgbClr val="000000"/>
-                          </a:solidFill>
-                          <a:latin typeface="맑은 고딕"/>
-                          <a:ea typeface="맑은 고딕"/>
-                          <a:cs typeface="맑은 고딕"/>
-                        </a:rPr>
-                        <a:t>예약배송</a:t>
-                      </a:r>
-                    </a:p>
-                  </a:txBody>
-                  <a:tcPr anchor="ctr" marL="36000" marR="36000" marT="0" marB="0">
-                    <a:lnL w="9525" cap="flat">
-                      <a:solidFill>
-                        <a:srgbClr val="BFBFBF"/>
-                      </a:solidFill>
-                    </a:lnL>
-                    <a:lnR w="9525" cap="flat">
-                      <a:solidFill>
-                        <a:srgbClr val="BFBFBF"/>
-                      </a:solidFill>
-                    </a:lnR>
-                    <a:lnT w="9525" cap="flat">
-                      <a:solidFill>
-                        <a:srgbClr val="BFBFBF"/>
-                      </a:solidFill>
-                    </a:lnT>
-                    <a:lnB w="9525" cap="flat">
-                      <a:solidFill>
-                        <a:srgbClr val="BFBFBF"/>
-                      </a:solidFill>
-                    </a:lnB>
-                    <a:solidFill>
-                      <a:srgbClr val="FFFFFF"/>
-                    </a:solidFill>
-                  </a:tcPr>
-                </a:tc>
-                <a:tc>
-                  <a:txBody>
-                    <a:bodyPr wrap="square"/>
-                    <a:lstStyle/>
-                    <a:p>
-                      <a:pPr algn="ctr"/>
-                      <a:r>
-                        <a:rPr sz="1000" b="1">
-                          <a:solidFill>
-                            <a:srgbClr val="000000"/>
-                          </a:solidFill>
-                          <a:latin typeface="맑은 고딕"/>
-                          <a:ea typeface="맑은 고딕"/>
-                          <a:cs typeface="맑은 고딕"/>
-                        </a:rPr>
-                        <a:t>주간배송</a:t>
-                      </a:r>
-                    </a:p>
-                  </a:txBody>
-                  <a:tcPr anchor="ctr" marL="36000" marR="36000" marT="0" marB="0">
-                    <a:lnL w="9525" cap="flat">
-                      <a:solidFill>
-                        <a:srgbClr val="BFBFBF"/>
-                      </a:solidFill>
-                    </a:lnL>
-                    <a:lnR w="9525" cap="flat">
-                      <a:solidFill>
-                        <a:srgbClr val="BFBFBF"/>
-                      </a:solidFill>
-                    </a:lnR>
-                    <a:lnT w="9525" cap="flat">
-                      <a:solidFill>
-                        <a:srgbClr val="BFBFBF"/>
-                      </a:solidFill>
-                    </a:lnT>
-                    <a:lnB w="9525" cap="flat">
-                      <a:solidFill>
-                        <a:srgbClr val="BFBFBF"/>
-                      </a:solidFill>
-                    </a:lnB>
-                    <a:solidFill>
-                      <a:srgbClr val="FFFFFF"/>
-                    </a:solidFill>
-                  </a:tcPr>
-                </a:tc>
-                <a:tc>
-                  <a:txBody>
-                    <a:bodyPr wrap="square"/>
-                    <a:lstStyle/>
-                    <a:p>
-                      <a:pPr algn="ctr"/>
-                      <a:r>
-                        <a:rPr sz="1000" b="0">
-                          <a:solidFill>
-                            <a:srgbClr val="000000"/>
-                          </a:solidFill>
-                          <a:latin typeface="맑은 고딕"/>
-                          <a:ea typeface="맑은 고딕"/>
-                          <a:cs typeface="맑은 고딕"/>
-                        </a:rPr>
-                        <a:t>예약</a:t>
-                      </a:r>
-                    </a:p>
-                  </a:txBody>
-                  <a:tcPr anchor="ctr" marL="36000" marR="36000" marT="0" marB="0">
-                    <a:lnL w="9525" cap="flat">
-                      <a:solidFill>
-                        <a:srgbClr val="BFBFBF"/>
-                      </a:solidFill>
-                    </a:lnL>
-                    <a:lnR w="9525" cap="flat">
-                      <a:solidFill>
-                        <a:srgbClr val="BFBFBF"/>
-                      </a:solidFill>
-                    </a:lnR>
-                    <a:lnT w="9525" cap="flat">
-                      <a:solidFill>
-                        <a:srgbClr val="BFBFBF"/>
-                      </a:solidFill>
-                    </a:lnT>
-                    <a:lnB w="9525" cap="flat">
-                      <a:solidFill>
-                        <a:srgbClr val="BFBFBF"/>
-                      </a:solidFill>
-                    </a:lnB>
-                    <a:solidFill>
-                      <a:srgbClr val="FFFFFF"/>
-                    </a:solidFill>
-                  </a:tcPr>
-                </a:tc>
-                <a:tc>
-                  <a:txBody>
-                    <a:bodyPr wrap="square"/>
-                    <a:lstStyle/>
-                    <a:p>
-                      <a:pPr algn="ctr"/>
-                      <a:r>
-                        <a:rPr sz="1000" b="0">
-                          <a:solidFill>
-                            <a:srgbClr val="000000"/>
-                          </a:solidFill>
-                          <a:latin typeface="맑은 고딕"/>
-                          <a:ea typeface="맑은 고딕"/>
-                          <a:cs typeface="맑은 고딕"/>
-                        </a:rPr>
-                        <a:t>구간당 4~5H</a:t>
-                      </a:r>
-                    </a:p>
-                  </a:txBody>
-                  <a:tcPr anchor="ctr" marL="36000" marR="36000" marT="0" marB="0">
-                    <a:lnL w="9525" cap="flat">
-                      <a:solidFill>
-                        <a:srgbClr val="BFBFBF"/>
-                      </a:solidFill>
-                    </a:lnL>
-                    <a:lnR w="9525" cap="flat">
-                      <a:solidFill>
-                        <a:srgbClr val="BFBFBF"/>
-                      </a:solidFill>
-                    </a:lnR>
-                    <a:lnT w="9525" cap="flat">
-                      <a:solidFill>
-                        <a:srgbClr val="BFBFBF"/>
-                      </a:solidFill>
-                    </a:lnT>
-                    <a:lnB w="9525" cap="flat">
-                      <a:solidFill>
-                        <a:srgbClr val="BFBFBF"/>
-                      </a:solidFill>
-                    </a:lnB>
-                    <a:solidFill>
-                      <a:srgbClr val="FFFFFF"/>
-                    </a:solidFill>
-                  </a:tcPr>
-                </a:tc>
-                <a:tc>
-                  <a:txBody>
-                    <a:bodyPr wrap="square"/>
-                    <a:lstStyle/>
-                    <a:p>
-                      <a:pPr algn="ctr"/>
-                      <a:r>
-                        <a:rPr sz="1000" b="0">
-                          <a:solidFill>
-                            <a:srgbClr val="000000"/>
-                          </a:solidFill>
-                          <a:latin typeface="맑은 고딕"/>
-                          <a:ea typeface="맑은 고딕"/>
-                          <a:cs typeface="맑은 고딕"/>
-                        </a:rPr>
-                        <a:t>사륜차</a:t>
-                      </a:r>
-                    </a:p>
-                  </a:txBody>
-                  <a:tcPr anchor="ctr" marL="36000" marR="36000" marT="0" marB="0">
-                    <a:lnL w="9525" cap="flat">
-                      <a:solidFill>
-                        <a:srgbClr val="BFBFBF"/>
-                      </a:solidFill>
-                    </a:lnL>
-                    <a:lnR w="9525" cap="flat">
-                      <a:solidFill>
-                        <a:srgbClr val="BFBFBF"/>
-                      </a:solidFill>
-                    </a:lnR>
-                    <a:lnT w="9525" cap="flat">
-                      <a:solidFill>
-                        <a:srgbClr val="BFBFBF"/>
-                      </a:solidFill>
-                    </a:lnT>
-                    <a:lnB w="9525" cap="flat">
-                      <a:solidFill>
-                        <a:srgbClr val="BFBFBF"/>
-                      </a:solidFill>
-                    </a:lnB>
-                    <a:solidFill>
-                      <a:srgbClr val="FFFFFF"/>
-                    </a:solidFill>
-                  </a:tcPr>
-                </a:tc>
-                <a:tc>
-                  <a:txBody>
-                    <a:bodyPr wrap="square"/>
-                    <a:lstStyle/>
-                    <a:p>
-                      <a:pPr algn="ctr"/>
-                      <a:r>
-                        <a:rPr sz="1000" b="0">
-                          <a:solidFill>
-                            <a:srgbClr val="000000"/>
-                          </a:solidFill>
-                          <a:latin typeface="맑은 고딕"/>
-                          <a:ea typeface="맑은 고딕"/>
-                          <a:cs typeface="맑은 고딕"/>
-                        </a:rPr>
-                        <a:t>점포 상품</a:t>
-                      </a:r>
-                    </a:p>
-                  </a:txBody>
-                  <a:tcPr anchor="ctr" marL="36000" marR="36000" marT="0" marB="0">
-                    <a:lnL w="9525" cap="flat">
-                      <a:solidFill>
-                        <a:srgbClr val="BFBFBF"/>
-                      </a:solidFill>
-                    </a:lnL>
-                    <a:lnR w="9525" cap="flat">
-                      <a:solidFill>
-                        <a:srgbClr val="BFBFBF"/>
-                      </a:solidFill>
-                    </a:lnR>
-                    <a:lnT w="9525" cap="flat">
-                      <a:solidFill>
-                        <a:srgbClr val="BFBFBF"/>
-                      </a:solidFill>
-                    </a:lnT>
-                    <a:lnB w="9525" cap="flat">
-                      <a:solidFill>
-                        <a:srgbClr val="BFBFBF"/>
-                      </a:solidFill>
-                    </a:lnB>
-                    <a:solidFill>
-                      <a:srgbClr val="FFFFFF"/>
-                    </a:solidFill>
-                  </a:tcPr>
-                </a:tc>
-              </a:tr>
-              <a:tr h="367800">
-                <a:tc vMerge="1">
-                  <a:txBody>
-                    <a:bodyPr wrap="square"/>
-                    <a:lstStyle/>
-                    <a:p/>
-                  </a:txBody>
-                  <a:tcPr anchor="ctr" marL="36000" marR="36000" marT="0" marB="0">
-                    <a:lnL w="9525" cap="flat">
-                      <a:solidFill>
-                        <a:srgbClr val="BFBFBF"/>
-                      </a:solidFill>
-                    </a:lnL>
-                    <a:lnR w="9525" cap="flat">
-                      <a:solidFill>
-                        <a:srgbClr val="BFBFBF"/>
-                      </a:solidFill>
-                    </a:lnR>
-                    <a:lnT w="9525" cap="flat">
-                      <a:solidFill>
-                        <a:srgbClr val="BFBFBF"/>
-                      </a:solidFill>
-                    </a:lnT>
-                    <a:lnB w="9525" cap="flat">
-                      <a:solidFill>
-                        <a:srgbClr val="BFBFBF"/>
-                      </a:solidFill>
-                    </a:lnB>
-                    <a:solidFill>
-                      <a:srgbClr val="FFFFFF"/>
-                    </a:solidFill>
-                  </a:tcPr>
-                </a:tc>
-                <a:tc>
-                  <a:txBody>
-                    <a:bodyPr wrap="square"/>
-                    <a:lstStyle/>
-                    <a:p>
-                      <a:pPr algn="ctr"/>
-                      <a:r>
-                        <a:rPr sz="1000" b="1">
-                          <a:solidFill>
-                            <a:srgbClr val="000000"/>
-                          </a:solidFill>
-                          <a:latin typeface="맑은 고딕"/>
-                          <a:ea typeface="맑은 고딕"/>
-                          <a:cs typeface="맑은 고딕"/>
-                        </a:rPr>
-                        <a:t>새벽배송</a:t>
-                      </a:r>
-                    </a:p>
-                  </a:txBody>
-                  <a:tcPr anchor="ctr" marL="36000" marR="36000" marT="0" marB="0">
-                    <a:lnL w="9525" cap="flat">
-                      <a:solidFill>
-                        <a:srgbClr val="BFBFBF"/>
-                      </a:solidFill>
-                    </a:lnL>
-                    <a:lnR w="9525" cap="flat">
-                      <a:solidFill>
-                        <a:srgbClr val="BFBFBF"/>
-                      </a:solidFill>
-                    </a:lnR>
-                    <a:lnT w="9525" cap="flat">
-                      <a:solidFill>
-                        <a:srgbClr val="BFBFBF"/>
-                      </a:solidFill>
-                    </a:lnT>
-                    <a:lnB w="9525" cap="flat">
-                      <a:solidFill>
-                        <a:srgbClr val="BFBFBF"/>
-                      </a:solidFill>
-                    </a:lnB>
-                    <a:solidFill>
-                      <a:srgbClr val="FFFFFF"/>
-                    </a:solidFill>
-                  </a:tcPr>
-                </a:tc>
-                <a:tc>
-                  <a:txBody>
-                    <a:bodyPr wrap="square"/>
-                    <a:lstStyle/>
-                    <a:p>
-                      <a:pPr algn="ctr"/>
-                      <a:r>
-                        <a:rPr sz="1000" b="0">
-                          <a:solidFill>
-                            <a:srgbClr val="000000"/>
-                          </a:solidFill>
-                          <a:latin typeface="맑은 고딕"/>
-                          <a:ea typeface="맑은 고딕"/>
-                          <a:cs typeface="맑은 고딕"/>
-                        </a:rPr>
-                        <a:t>예약</a:t>
-                      </a:r>
-                    </a:p>
-                  </a:txBody>
-                  <a:tcPr anchor="ctr" marL="36000" marR="36000" marT="0" marB="0">
-                    <a:lnL w="9525" cap="flat">
-                      <a:solidFill>
-                        <a:srgbClr val="BFBFBF"/>
-                      </a:solidFill>
-                    </a:lnL>
-                    <a:lnR w="9525" cap="flat">
-                      <a:solidFill>
-                        <a:srgbClr val="BFBFBF"/>
-                      </a:solidFill>
-                    </a:lnR>
-                    <a:lnT w="9525" cap="flat">
-                      <a:solidFill>
-                        <a:srgbClr val="BFBFBF"/>
-                      </a:solidFill>
-                    </a:lnT>
-                    <a:lnB w="9525" cap="flat">
-                      <a:solidFill>
-                        <a:srgbClr val="BFBFBF"/>
-                      </a:solidFill>
-                    </a:lnB>
-                    <a:solidFill>
-                      <a:srgbClr val="FFFFFF"/>
-                    </a:solidFill>
-                  </a:tcPr>
-                </a:tc>
-                <a:tc>
-                  <a:txBody>
-                    <a:bodyPr wrap="square"/>
-                    <a:lstStyle/>
-                    <a:p>
-                      <a:pPr algn="ctr"/>
-                      <a:r>
-                        <a:rPr sz="1000" b="0">
-                          <a:solidFill>
-                            <a:srgbClr val="000000"/>
-                          </a:solidFill>
-                          <a:latin typeface="맑은 고딕"/>
-                          <a:ea typeface="맑은 고딕"/>
-                          <a:cs typeface="맑은 고딕"/>
-                        </a:rPr>
-                        <a:t>새벽 </a:t>
-                      </a:r>
-                      <a:r>
-                        <a:rPr sz="900" b="0">
-                          <a:solidFill>
-                            <a:srgbClr val="000000"/>
-                          </a:solidFill>
-                          <a:latin typeface="맑은 고딕"/>
-                          <a:ea typeface="맑은 고딕"/>
-                          <a:cs typeface="맑은 고딕"/>
-                        </a:rPr>
-                        <a:t>(PP 불가)</a:t>
-                      </a:r>
-                    </a:p>
-                  </a:txBody>
-                  <a:tcPr anchor="ctr" marL="36000" marR="36000" marT="0" marB="0">
-                    <a:lnL w="9525" cap="flat">
-                      <a:solidFill>
-                        <a:srgbClr val="BFBFBF"/>
-                      </a:solidFill>
-                    </a:lnL>
-                    <a:lnR w="9525" cap="flat">
-                      <a:solidFill>
-                        <a:srgbClr val="BFBFBF"/>
-                      </a:solidFill>
-                    </a:lnR>
-                    <a:lnT w="9525" cap="flat">
-                      <a:solidFill>
-                        <a:srgbClr val="BFBFBF"/>
-                      </a:solidFill>
-                    </a:lnT>
-                    <a:lnB w="9525" cap="flat">
-                      <a:solidFill>
-                        <a:srgbClr val="BFBFBF"/>
-                      </a:solidFill>
-                    </a:lnB>
-                    <a:solidFill>
-                      <a:srgbClr val="FFFFFF"/>
-                    </a:solidFill>
-                  </a:tcPr>
-                </a:tc>
-                <a:tc>
-                  <a:txBody>
-                    <a:bodyPr wrap="square"/>
-                    <a:lstStyle/>
-                    <a:p>
-                      <a:pPr algn="ctr"/>
-                      <a:r>
-                        <a:rPr sz="1000" b="0">
-                          <a:solidFill>
-                            <a:srgbClr val="000000"/>
-                          </a:solidFill>
-                          <a:latin typeface="맑은 고딕"/>
-                          <a:ea typeface="맑은 고딕"/>
-                          <a:cs typeface="맑은 고딕"/>
-                        </a:rPr>
-                        <a:t>사륜차</a:t>
-                      </a:r>
-                    </a:p>
-                  </a:txBody>
-                  <a:tcPr anchor="ctr" marL="36000" marR="36000" marT="0" marB="0">
-                    <a:lnL w="9525" cap="flat">
-                      <a:solidFill>
-                        <a:srgbClr val="BFBFBF"/>
-                      </a:solidFill>
-                    </a:lnL>
-                    <a:lnR w="9525" cap="flat">
-                      <a:solidFill>
-                        <a:srgbClr val="BFBFBF"/>
-                      </a:solidFill>
-                    </a:lnR>
-                    <a:lnT w="9525" cap="flat">
-                      <a:solidFill>
-                        <a:srgbClr val="BFBFBF"/>
-                      </a:solidFill>
-                    </a:lnT>
-                    <a:lnB w="9525" cap="flat">
-                      <a:solidFill>
-                        <a:srgbClr val="BFBFBF"/>
-                      </a:solidFill>
-                    </a:lnB>
-                    <a:solidFill>
-                      <a:srgbClr val="FFFFFF"/>
-                    </a:solidFill>
-                  </a:tcPr>
-                </a:tc>
-                <a:tc>
-                  <a:txBody>
-                    <a:bodyPr wrap="square"/>
-                    <a:lstStyle/>
-                    <a:p>
-                      <a:pPr algn="ctr"/>
-                      <a:r>
-                        <a:rPr sz="1000" b="0">
-                          <a:solidFill>
-                            <a:srgbClr val="000000"/>
-                          </a:solidFill>
-                          <a:latin typeface="맑은 고딕"/>
-                          <a:ea typeface="맑은 고딕"/>
-                          <a:cs typeface="맑은 고딕"/>
-                        </a:rPr>
-                        <a:t>네오 상품</a:t>
-                      </a:r>
-                    </a:p>
-                  </a:txBody>
-                  <a:tcPr anchor="ctr" marL="36000" marR="36000" marT="0" marB="0">
-                    <a:lnL w="9525" cap="flat">
-                      <a:solidFill>
-                        <a:srgbClr val="BFBFBF"/>
-                      </a:solidFill>
-                    </a:lnL>
-                    <a:lnR w="9525" cap="flat">
-                      <a:solidFill>
-                        <a:srgbClr val="BFBFBF"/>
-                      </a:solidFill>
-                    </a:lnR>
-                    <a:lnT w="9525" cap="flat">
-                      <a:solidFill>
-                        <a:srgbClr val="BFBFBF"/>
-                      </a:solidFill>
-                    </a:lnT>
-                    <a:lnB w="9525" cap="flat">
-                      <a:solidFill>
-                        <a:srgbClr val="BFBFBF"/>
-                      </a:solidFill>
-                    </a:lnB>
-                    <a:solidFill>
-                      <a:srgbClr val="FFFFFF"/>
-                    </a:solidFill>
-                  </a:tcPr>
-                </a:tc>
-              </a:tr>
-              <a:tr h="367800">
-                <a:tc vMerge="1">
-                  <a:txBody>
-                    <a:bodyPr wrap="square"/>
-                    <a:lstStyle/>
-                    <a:p/>
-                  </a:txBody>
-                  <a:tcPr anchor="ctr" marL="36000" marR="36000" marT="0" marB="0">
-                    <a:lnL w="9525" cap="flat">
-                      <a:solidFill>
-                        <a:srgbClr val="BFBFBF"/>
-                      </a:solidFill>
-                    </a:lnL>
-                    <a:lnR w="9525" cap="flat">
-                      <a:solidFill>
-                        <a:srgbClr val="BFBFBF"/>
-                      </a:solidFill>
-                    </a:lnR>
-                    <a:lnT w="9525" cap="flat">
-                      <a:solidFill>
-                        <a:srgbClr val="BFBFBF"/>
-                      </a:solidFill>
-                    </a:lnT>
-                    <a:lnB w="9525" cap="flat">
-                      <a:solidFill>
-                        <a:srgbClr val="BFBFBF"/>
-                      </a:solidFill>
-                    </a:lnB>
-                    <a:solidFill>
-                      <a:srgbClr val="FFFFFF"/>
-                    </a:solidFill>
-                  </a:tcPr>
-                </a:tc>
-                <a:tc>
-                  <a:txBody>
-                    <a:bodyPr wrap="square"/>
-                    <a:lstStyle/>
-                    <a:p>
-                      <a:pPr algn="ctr"/>
-                      <a:r>
-                        <a:rPr sz="1000" b="1">
-                          <a:solidFill>
-                            <a:srgbClr val="000000"/>
-                          </a:solidFill>
-                          <a:latin typeface="맑은 고딕"/>
-                          <a:ea typeface="맑은 고딕"/>
-                          <a:cs typeface="맑은 고딕"/>
-                        </a:rPr>
-                        <a:t>트레이더스배송</a:t>
-                      </a:r>
-                    </a:p>
-                  </a:txBody>
-                  <a:tcPr anchor="ctr" marL="36000" marR="36000" marT="0" marB="0">
-                    <a:lnL w="9525" cap="flat">
-                      <a:solidFill>
-                        <a:srgbClr val="BFBFBF"/>
-                      </a:solidFill>
-                    </a:lnL>
-                    <a:lnR w="9525" cap="flat">
-                      <a:solidFill>
-                        <a:srgbClr val="BFBFBF"/>
-                      </a:solidFill>
-                    </a:lnR>
-                    <a:lnT w="9525" cap="flat">
-                      <a:solidFill>
-                        <a:srgbClr val="BFBFBF"/>
-                      </a:solidFill>
-                    </a:lnT>
-                    <a:lnB w="9525" cap="flat">
-                      <a:solidFill>
-                        <a:srgbClr val="BFBFBF"/>
-                      </a:solidFill>
-                    </a:lnB>
-                    <a:solidFill>
-                      <a:srgbClr val="FFFFFF"/>
-                    </a:solidFill>
-                  </a:tcPr>
-                </a:tc>
-                <a:tc>
-                  <a:txBody>
-                    <a:bodyPr wrap="square"/>
-                    <a:lstStyle/>
-                    <a:p>
-                      <a:pPr algn="ctr"/>
-                      <a:r>
-                        <a:rPr sz="1000" b="0">
-                          <a:solidFill>
-                            <a:srgbClr val="000000"/>
-                          </a:solidFill>
-                          <a:latin typeface="맑은 고딕"/>
-                          <a:ea typeface="맑은 고딕"/>
-                          <a:cs typeface="맑은 고딕"/>
-                        </a:rPr>
-                        <a:t>예약</a:t>
-                      </a:r>
-                    </a:p>
-                  </a:txBody>
-                  <a:tcPr anchor="ctr" marL="36000" marR="36000" marT="0" marB="0">
-                    <a:lnL w="9525" cap="flat">
-                      <a:solidFill>
-                        <a:srgbClr val="BFBFBF"/>
-                      </a:solidFill>
-                    </a:lnL>
-                    <a:lnR w="9525" cap="flat">
-                      <a:solidFill>
-                        <a:srgbClr val="BFBFBF"/>
-                      </a:solidFill>
-                    </a:lnR>
-                    <a:lnT w="9525" cap="flat">
-                      <a:solidFill>
-                        <a:srgbClr val="BFBFBF"/>
-                      </a:solidFill>
-                    </a:lnT>
-                    <a:lnB w="9525" cap="flat">
-                      <a:solidFill>
-                        <a:srgbClr val="BFBFBF"/>
-                      </a:solidFill>
-                    </a:lnB>
-                    <a:solidFill>
-                      <a:srgbClr val="FFFFFF"/>
-                    </a:solidFill>
-                  </a:tcPr>
-                </a:tc>
-                <a:tc>
-                  <a:txBody>
-                    <a:bodyPr wrap="square"/>
-                    <a:lstStyle/>
-                    <a:p>
-                      <a:pPr algn="ctr"/>
-                      <a:r>
-                        <a:rPr sz="1000" b="0">
-                          <a:solidFill>
-                            <a:srgbClr val="000000"/>
-                          </a:solidFill>
-                          <a:latin typeface="맑은 고딕"/>
-                          <a:ea typeface="맑은 고딕"/>
-                          <a:cs typeface="맑은 고딕"/>
-                        </a:rPr>
-                        <a:t>익일</a:t>
-                      </a:r>
-                    </a:p>
-                  </a:txBody>
-                  <a:tcPr anchor="ctr" marL="36000" marR="36000" marT="0" marB="0">
-                    <a:lnL w="9525" cap="flat">
-                      <a:solidFill>
-                        <a:srgbClr val="BFBFBF"/>
-                      </a:solidFill>
-                    </a:lnL>
-                    <a:lnR w="9525" cap="flat">
-                      <a:solidFill>
-                        <a:srgbClr val="BFBFBF"/>
-                      </a:solidFill>
-                    </a:lnR>
-                    <a:lnT w="9525" cap="flat">
-                      <a:solidFill>
-                        <a:srgbClr val="BFBFBF"/>
-                      </a:solidFill>
-                    </a:lnT>
-                    <a:lnB w="9525" cap="flat">
-                      <a:solidFill>
-                        <a:srgbClr val="BFBFBF"/>
-                      </a:solidFill>
-                    </a:lnB>
-                    <a:solidFill>
-                      <a:srgbClr val="FFFFFF"/>
-                    </a:solidFill>
-                  </a:tcPr>
-                </a:tc>
-                <a:tc>
-                  <a:txBody>
-                    <a:bodyPr wrap="square"/>
-                    <a:lstStyle/>
-                    <a:p>
-                      <a:pPr algn="ctr"/>
-                      <a:r>
-                        <a:rPr sz="1000" b="0">
-                          <a:solidFill>
-                            <a:srgbClr val="000000"/>
-                          </a:solidFill>
-                          <a:latin typeface="맑은 고딕"/>
-                          <a:ea typeface="맑은 고딕"/>
-                          <a:cs typeface="맑은 고딕"/>
-                        </a:rPr>
-                        <a:t>사륜차</a:t>
-                      </a:r>
-                    </a:p>
-                  </a:txBody>
-                  <a:tcPr anchor="ctr" marL="36000" marR="36000" marT="0" marB="0">
-                    <a:lnL w="9525" cap="flat">
-                      <a:solidFill>
-                        <a:srgbClr val="BFBFBF"/>
-                      </a:solidFill>
-                    </a:lnL>
-                    <a:lnR w="9525" cap="flat">
-                      <a:solidFill>
-                        <a:srgbClr val="BFBFBF"/>
-                      </a:solidFill>
-                    </a:lnR>
-                    <a:lnT w="9525" cap="flat">
-                      <a:solidFill>
-                        <a:srgbClr val="BFBFBF"/>
-                      </a:solidFill>
-                    </a:lnT>
-                    <a:lnB w="9525" cap="flat">
-                      <a:solidFill>
-                        <a:srgbClr val="BFBFBF"/>
-                      </a:solidFill>
-                    </a:lnB>
-                    <a:solidFill>
-                      <a:srgbClr val="FFFFFF"/>
-                    </a:solidFill>
-                  </a:tcPr>
-                </a:tc>
-                <a:tc>
-                  <a:txBody>
-                    <a:bodyPr wrap="square"/>
-                    <a:lstStyle/>
-                    <a:p>
-                      <a:pPr algn="ctr"/>
-                      <a:r>
-                        <a:rPr sz="1000" b="0">
-                          <a:solidFill>
-                            <a:srgbClr val="000000"/>
-                          </a:solidFill>
-                          <a:latin typeface="맑은 고딕"/>
-                          <a:ea typeface="맑은 고딕"/>
-                          <a:cs typeface="맑은 고딕"/>
-                        </a:rPr>
-                        <a:t>트레이더스</a:t>
-                      </a:r>
-                    </a:p>
-                  </a:txBody>
-                  <a:tcPr anchor="ctr" marL="36000" marR="36000" marT="0" marB="0">
-                    <a:lnL w="9525" cap="flat">
-                      <a:solidFill>
-                        <a:srgbClr val="BFBFBF"/>
-                      </a:solidFill>
-                    </a:lnL>
-                    <a:lnR w="9525" cap="flat">
-                      <a:solidFill>
-                        <a:srgbClr val="BFBFBF"/>
-                      </a:solidFill>
-                    </a:lnR>
-                    <a:lnT w="9525" cap="flat">
-                      <a:solidFill>
-                        <a:srgbClr val="BFBFBF"/>
-                      </a:solidFill>
-                    </a:lnT>
-                    <a:lnB w="9525" cap="flat">
-                      <a:solidFill>
-                        <a:srgbClr val="BFBFBF"/>
-                      </a:solidFill>
-                    </a:lnB>
-                    <a:solidFill>
-                      <a:srgbClr val="FFFFFF"/>
-                    </a:solidFill>
-                  </a:tcPr>
-                </a:tc>
-              </a:tr>
-              <a:tr h="367800">
-                <a:tc rowSpan="2">
-                  <a:txBody>
-                    <a:bodyPr wrap="square"/>
-                    <a:lstStyle/>
-                    <a:p>
-                      <a:pPr algn="ctr"/>
-                      <a:r>
-                        <a:rPr sz="1000" b="1">
-                          <a:solidFill>
-                            <a:srgbClr val="000000"/>
-                          </a:solidFill>
-                          <a:latin typeface="맑은 고딕"/>
-                          <a:ea typeface="맑은 고딕"/>
-                          <a:cs typeface="맑은 고딕"/>
-                        </a:rPr>
-                        <a:t>퀵커머스</a:t>
-                      </a:r>
-                    </a:p>
-                  </a:txBody>
-                  <a:tcPr anchor="ctr" marL="36000" marR="36000" marT="0" marB="0">
-                    <a:lnL w="9525" cap="flat">
-                      <a:solidFill>
-                        <a:srgbClr val="BFBFBF"/>
-                      </a:solidFill>
-                    </a:lnL>
-                    <a:lnR w="9525" cap="flat">
-                      <a:solidFill>
-                        <a:srgbClr val="BFBFBF"/>
-                      </a:solidFill>
-                    </a:lnR>
-                    <a:lnT w="9525" cap="flat">
-                      <a:solidFill>
-                        <a:srgbClr val="BFBFBF"/>
-                      </a:solidFill>
-                    </a:lnT>
-                    <a:lnB w="9525" cap="flat">
-                      <a:solidFill>
-                        <a:srgbClr val="BFBFBF"/>
-                      </a:solidFill>
-                    </a:lnB>
-                    <a:solidFill>
-                      <a:srgbClr val="FFFFFF"/>
-                    </a:solidFill>
-                  </a:tcPr>
-                </a:tc>
-                <a:tc>
-                  <a:txBody>
-                    <a:bodyPr wrap="square"/>
-                    <a:lstStyle/>
-                    <a:p>
-                      <a:pPr algn="ctr"/>
-                      <a:r>
-                        <a:rPr sz="1000" b="1">
-                          <a:solidFill>
-                            <a:srgbClr val="000000"/>
-                          </a:solidFill>
-                          <a:latin typeface="맑은 고딕"/>
-                          <a:ea typeface="맑은 고딕"/>
-                          <a:cs typeface="맑은 고딕"/>
-                        </a:rPr>
-                        <a:t>바로퀵</a:t>
-                      </a:r>
-                    </a:p>
-                  </a:txBody>
-                  <a:tcPr anchor="ctr" marL="36000" marR="36000" marT="0" marB="0">
-                    <a:lnL w="9525" cap="flat">
-                      <a:solidFill>
-                        <a:srgbClr val="BFBFBF"/>
-                      </a:solidFill>
-                    </a:lnL>
-                    <a:lnR w="9525" cap="flat">
-                      <a:solidFill>
-                        <a:srgbClr val="BFBFBF"/>
-                      </a:solidFill>
-                    </a:lnR>
-                    <a:lnT w="9525" cap="flat">
-                      <a:solidFill>
-                        <a:srgbClr val="BFBFBF"/>
-                      </a:solidFill>
-                    </a:lnT>
-                    <a:lnB w="9525" cap="flat">
-                      <a:solidFill>
-                        <a:srgbClr val="BFBFBF"/>
-                      </a:solidFill>
-                    </a:lnB>
-                    <a:solidFill>
-                      <a:srgbClr val="FFFFFF"/>
-                    </a:solidFill>
-                  </a:tcPr>
-                </a:tc>
-                <a:tc>
-                  <a:txBody>
-                    <a:bodyPr wrap="square"/>
-                    <a:lstStyle/>
-                    <a:p>
-                      <a:pPr algn="ctr"/>
-                      <a:r>
-                        <a:rPr sz="1000" b="0">
-                          <a:solidFill>
-                            <a:srgbClr val="000000"/>
-                          </a:solidFill>
-                          <a:latin typeface="맑은 고딕"/>
-                          <a:ea typeface="맑은 고딕"/>
-                          <a:cs typeface="맑은 고딕"/>
-                        </a:rPr>
-                        <a:t>즉시</a:t>
-                      </a:r>
-                    </a:p>
-                  </a:txBody>
-                  <a:tcPr anchor="ctr" marL="36000" marR="36000" marT="0" marB="0">
-                    <a:lnL w="9525" cap="flat">
-                      <a:solidFill>
-                        <a:srgbClr val="BFBFBF"/>
-                      </a:solidFill>
-                    </a:lnL>
-                    <a:lnR w="9525" cap="flat">
-                      <a:solidFill>
-                        <a:srgbClr val="BFBFBF"/>
-                      </a:solidFill>
-                    </a:lnR>
-                    <a:lnT w="9525" cap="flat">
-                      <a:solidFill>
-                        <a:srgbClr val="BFBFBF"/>
-                      </a:solidFill>
-                    </a:lnT>
-                    <a:lnB w="9525" cap="flat">
-                      <a:solidFill>
-                        <a:srgbClr val="BFBFBF"/>
-                      </a:solidFill>
-                    </a:lnB>
-                    <a:solidFill>
-                      <a:srgbClr val="FFFFFF"/>
-                    </a:solidFill>
-                  </a:tcPr>
-                </a:tc>
-                <a:tc>
-                  <a:txBody>
-                    <a:bodyPr wrap="square"/>
-                    <a:lstStyle/>
-                    <a:p>
-                      <a:pPr algn="ctr"/>
-                      <a:r>
-                        <a:rPr sz="1000" b="0">
-                          <a:solidFill>
-                            <a:srgbClr val="000000"/>
-                          </a:solidFill>
-                          <a:latin typeface="맑은 고딕"/>
-                          <a:ea typeface="맑은 고딕"/>
-                          <a:cs typeface="맑은 고딕"/>
-                        </a:rPr>
-                        <a:t>1H </a:t>
-                      </a:r>
-                      <a:r>
-                        <a:rPr sz="900" b="0">
-                          <a:solidFill>
-                            <a:srgbClr val="000000"/>
-                          </a:solidFill>
-                          <a:latin typeface="맑은 고딕"/>
-                          <a:ea typeface="맑은 고딕"/>
-                          <a:cs typeface="맑은 고딕"/>
-                        </a:rPr>
-                        <a:t>(반경 3km)</a:t>
-                      </a:r>
-                    </a:p>
-                  </a:txBody>
-                  <a:tcPr anchor="ctr" marL="36000" marR="36000" marT="0" marB="0">
-                    <a:lnL w="9525" cap="flat">
-                      <a:solidFill>
-                        <a:srgbClr val="BFBFBF"/>
-                      </a:solidFill>
-                    </a:lnL>
-                    <a:lnR w="9525" cap="flat">
-                      <a:solidFill>
-                        <a:srgbClr val="BFBFBF"/>
-                      </a:solidFill>
-                    </a:lnR>
-                    <a:lnT w="9525" cap="flat">
-                      <a:solidFill>
-                        <a:srgbClr val="BFBFBF"/>
-                      </a:solidFill>
-                    </a:lnT>
-                    <a:lnB w="9525" cap="flat">
-                      <a:solidFill>
-                        <a:srgbClr val="BFBFBF"/>
-                      </a:solidFill>
-                    </a:lnB>
-                    <a:solidFill>
-                      <a:srgbClr val="FFFFFF"/>
-                    </a:solidFill>
-                  </a:tcPr>
-                </a:tc>
-                <a:tc>
-                  <a:txBody>
-                    <a:bodyPr wrap="square"/>
-                    <a:lstStyle/>
-                    <a:p>
-                      <a:pPr algn="ctr"/>
-                      <a:r>
-                        <a:rPr sz="1000" b="0">
-                          <a:solidFill>
-                            <a:srgbClr val="000000"/>
-                          </a:solidFill>
-                          <a:latin typeface="맑은 고딕"/>
-                          <a:ea typeface="맑은 고딕"/>
-                          <a:cs typeface="맑은 고딕"/>
-                        </a:rPr>
-                        <a:t>이륜차</a:t>
-                      </a:r>
-                    </a:p>
-                  </a:txBody>
-                  <a:tcPr anchor="ctr" marL="36000" marR="36000" marT="0" marB="0">
-                    <a:lnL w="9525" cap="flat">
-                      <a:solidFill>
-                        <a:srgbClr val="BFBFBF"/>
-                      </a:solidFill>
-                    </a:lnL>
-                    <a:lnR w="9525" cap="flat">
-                      <a:solidFill>
-                        <a:srgbClr val="BFBFBF"/>
-                      </a:solidFill>
-                    </a:lnR>
-                    <a:lnT w="9525" cap="flat">
-                      <a:solidFill>
-                        <a:srgbClr val="BFBFBF"/>
-                      </a:solidFill>
-                    </a:lnT>
-                    <a:lnB w="9525" cap="flat">
-                      <a:solidFill>
-                        <a:srgbClr val="BFBFBF"/>
-                      </a:solidFill>
-                    </a:lnB>
-                    <a:solidFill>
-                      <a:srgbClr val="FFFFFF"/>
-                    </a:solidFill>
-                  </a:tcPr>
-                </a:tc>
-                <a:tc>
-                  <a:txBody>
-                    <a:bodyPr wrap="square"/>
-                    <a:lstStyle/>
-                    <a:p>
-                      <a:pPr algn="ctr"/>
-                      <a:r>
-                        <a:rPr sz="1000" b="0">
-                          <a:solidFill>
-                            <a:srgbClr val="000000"/>
-                          </a:solidFill>
-                          <a:latin typeface="맑은 고딕"/>
-                          <a:ea typeface="맑은 고딕"/>
-                          <a:cs typeface="맑은 고딕"/>
-                        </a:rPr>
-                        <a:t>약 1만 종</a:t>
-                      </a:r>
-                    </a:p>
-                  </a:txBody>
-                  <a:tcPr anchor="ctr" marL="36000" marR="36000" marT="0" marB="0">
-                    <a:lnL w="9525" cap="flat">
-                      <a:solidFill>
-                        <a:srgbClr val="BFBFBF"/>
-                      </a:solidFill>
-                    </a:lnL>
-                    <a:lnR w="9525" cap="flat">
-                      <a:solidFill>
-                        <a:srgbClr val="BFBFBF"/>
-                      </a:solidFill>
-                    </a:lnR>
-                    <a:lnT w="9525" cap="flat">
-                      <a:solidFill>
-                        <a:srgbClr val="BFBFBF"/>
-                      </a:solidFill>
-                    </a:lnT>
-                    <a:lnB w="9525" cap="flat">
-                      <a:solidFill>
-                        <a:srgbClr val="BFBFBF"/>
-                      </a:solidFill>
-                    </a:lnB>
-                    <a:solidFill>
-                      <a:srgbClr val="FFFFFF"/>
-                    </a:solidFill>
-                  </a:tcPr>
-                </a:tc>
-              </a:tr>
-              <a:tr h="367800">
-                <a:tc vMerge="1">
-                  <a:txBody>
-                    <a:bodyPr wrap="square"/>
-                    <a:lstStyle/>
-                    <a:p/>
-                  </a:txBody>
-                  <a:tcPr anchor="ctr" marL="36000" marR="36000" marT="0" marB="0">
-                    <a:lnL w="9525" cap="flat">
-                      <a:solidFill>
-                        <a:srgbClr val="BFBFBF"/>
-                      </a:solidFill>
-                    </a:lnL>
-                    <a:lnR w="9525" cap="flat">
-                      <a:solidFill>
-                        <a:srgbClr val="BFBFBF"/>
-                      </a:solidFill>
-                    </a:lnR>
-                    <a:lnT w="9525" cap="flat">
-                      <a:solidFill>
-                        <a:srgbClr val="BFBFBF"/>
-                      </a:solidFill>
-                    </a:lnT>
-                    <a:lnB w="9525" cap="flat">
-                      <a:solidFill>
-                        <a:srgbClr val="BFBFBF"/>
-                      </a:solidFill>
-                    </a:lnB>
-                    <a:solidFill>
-                      <a:srgbClr val="DEEBF7"/>
                     </a:solidFill>
                   </a:tcPr>
                 </a:tc>
@@ -4898,7 +3549,7 @@
                           <a:ea typeface="맑은 고딕"/>
                           <a:cs typeface="맑은 고딕"/>
                         </a:rPr>
-                        <a:t>★ 2시간 배송 </a:t>
+                        <a:t>★ '2시간 배송' </a:t>
                       </a:r>
                       <a:r>
                         <a:rPr sz="900" b="1">
@@ -4939,6 +3590,167 @@
                     </a:solidFill>
                   </a:tcPr>
                 </a:tc>
+              </a:tr>
+              <a:tr h="248400">
+                <a:tc>
+                  <a:txBody>
+                    <a:bodyPr wrap="square"/>
+                    <a:lstStyle/>
+                    <a:p>
+                      <a:pPr algn="ctr"/>
+                      <a:r>
+                        <a:rPr sz="1000" b="1">
+                          <a:solidFill>
+                            <a:srgbClr val="000000"/>
+                          </a:solidFill>
+                          <a:latin typeface="맑은 고딕"/>
+                          <a:ea typeface="맑은 고딕"/>
+                          <a:cs typeface="맑은 고딕"/>
+                        </a:rPr>
+                        <a:t>배송</a:t>
+                      </a:r>
+                    </a:p>
+                  </a:txBody>
+                  <a:tcPr anchor="ctr" marL="36000" marR="36000" marT="0" marB="0">
+                    <a:lnL w="9525" cap="flat">
+                      <a:solidFill>
+                        <a:srgbClr val="BFBFBF"/>
+                      </a:solidFill>
+                    </a:lnL>
+                    <a:lnR w="9525" cap="flat">
+                      <a:solidFill>
+                        <a:srgbClr val="BFBFBF"/>
+                      </a:solidFill>
+                    </a:lnR>
+                    <a:lnT w="9525" cap="flat">
+                      <a:solidFill>
+                        <a:srgbClr val="BFBFBF"/>
+                      </a:solidFill>
+                    </a:lnT>
+                    <a:lnB w="9525" cap="flat">
+                      <a:solidFill>
+                        <a:srgbClr val="BFBFBF"/>
+                      </a:solidFill>
+                    </a:lnB>
+                    <a:solidFill>
+                      <a:srgbClr val="FFFFFF"/>
+                    </a:solidFill>
+                  </a:tcPr>
+                </a:tc>
+                <a:tc>
+                  <a:txBody>
+                    <a:bodyPr wrap="square"/>
+                    <a:lstStyle/>
+                    <a:p>
+                      <a:pPr algn="l"/>
+                      <a:r>
+                        <a:rPr sz="1000" b="0">
+                          <a:solidFill>
+                            <a:srgbClr val="000000"/>
+                          </a:solidFill>
+                          <a:latin typeface="맑은 고딕"/>
+                          <a:ea typeface="맑은 고딕"/>
+                          <a:cs typeface="맑은 고딕"/>
+                        </a:rPr>
+                        <a:t>1H 이내 </a:t>
+                      </a:r>
+                      <a:r>
+                        <a:rPr sz="900" b="0">
+                          <a:solidFill>
+                            <a:srgbClr val="000000"/>
+                          </a:solidFill>
+                          <a:latin typeface="맑은 고딕"/>
+                          <a:ea typeface="맑은 고딕"/>
+                          <a:cs typeface="맑은 고딕"/>
+                        </a:rPr>
+                        <a:t>(반경 3km)</a:t>
+                      </a:r>
+                      <a:r>
+                        <a:rPr sz="1000" b="0">
+                          <a:solidFill>
+                            <a:srgbClr val="000000"/>
+                          </a:solidFill>
+                          <a:latin typeface="맑은 고딕"/>
+                          <a:ea typeface="맑은 고딕"/>
+                          <a:cs typeface="맑은 고딕"/>
+                        </a:rPr>
+                        <a:t> · 이륜차</a:t>
+                      </a:r>
+                    </a:p>
+                  </a:txBody>
+                  <a:tcPr anchor="ctr" marL="36000" marR="36000" marT="0" marB="0">
+                    <a:lnL w="9525" cap="flat">
+                      <a:solidFill>
+                        <a:srgbClr val="BFBFBF"/>
+                      </a:solidFill>
+                    </a:lnL>
+                    <a:lnR w="9525" cap="flat">
+                      <a:solidFill>
+                        <a:srgbClr val="BFBFBF"/>
+                      </a:solidFill>
+                    </a:lnR>
+                    <a:lnT w="9525" cap="flat">
+                      <a:solidFill>
+                        <a:srgbClr val="BFBFBF"/>
+                      </a:solidFill>
+                    </a:lnT>
+                    <a:lnB w="9525" cap="flat">
+                      <a:solidFill>
+                        <a:srgbClr val="BFBFBF"/>
+                      </a:solidFill>
+                    </a:lnB>
+                    <a:solidFill>
+                      <a:srgbClr val="FFFFFF"/>
+                    </a:solidFill>
+                  </a:tcPr>
+                </a:tc>
+                <a:tc>
+                  <a:txBody>
+                    <a:bodyPr wrap="square"/>
+                    <a:lstStyle/>
+                    <a:p>
+                      <a:pPr algn="l"/>
+                      <a:r>
+                        <a:rPr sz="1000" b="1">
+                          <a:solidFill>
+                            <a:srgbClr val="002060"/>
+                          </a:solidFill>
+                          <a:latin typeface="맑은 고딕"/>
+                          <a:ea typeface="맑은 고딕"/>
+                          <a:cs typeface="맑은 고딕"/>
+                        </a:rPr>
+                        <a:t>2H 이내 · 사륜차 · 20시 주문 마감</a:t>
+                      </a:r>
+                    </a:p>
+                  </a:txBody>
+                  <a:tcPr anchor="ctr" marL="36000" marR="36000" marT="0" marB="0">
+                    <a:lnL w="9525" cap="flat">
+                      <a:solidFill>
+                        <a:srgbClr val="BFBFBF"/>
+                      </a:solidFill>
+                    </a:lnL>
+                    <a:lnR w="9525" cap="flat">
+                      <a:solidFill>
+                        <a:srgbClr val="BFBFBF"/>
+                      </a:solidFill>
+                    </a:lnR>
+                    <a:lnT w="9525" cap="flat">
+                      <a:solidFill>
+                        <a:srgbClr val="BFBFBF"/>
+                      </a:solidFill>
+                    </a:lnT>
+                    <a:lnB w="9525" cap="flat">
+                      <a:solidFill>
+                        <a:srgbClr val="BFBFBF"/>
+                      </a:solidFill>
+                    </a:lnB>
+                    <a:solidFill>
+                      <a:srgbClr val="DEEBF7"/>
+                    </a:solidFill>
+                  </a:tcPr>
+                </a:tc>
+              </a:tr>
+              <a:tr h="248400">
                 <a:tc>
                   <a:txBody>
                     <a:bodyPr wrap="square"/>
@@ -4954,7 +3766,7 @@
                           <a:ea typeface="맑은 고딕"/>
                           <a:cs typeface="맑은 고딕"/>
                         </a:rPr>
-                        <a:t>즉시</a:t>
+                        <a:t>취급</a:t>
                       </a:r>
                     </a:p>
                   </a:txBody>
@@ -4989,7 +3801,7 @@
                     <a:bodyPr wrap="square"/>
                     <a:lstStyle/>
                     <a:p>
-                      <a:pPr algn="ctr"/>
+                      <a:pPr algn="l"/>
                       <a:r>
                         <a:rPr sz="1000" b="1">
                           <a:solidFill>
@@ -4999,7 +3811,7 @@
                           <a:ea typeface="맑은 고딕"/>
                           <a:cs typeface="맑은 고딕"/>
                         </a:rPr>
-                        <a:t>2H </a:t>
+                        <a:t>약 1만 종 </a:t>
                       </a:r>
                       <a:r>
                         <a:rPr sz="900" b="1">
@@ -5010,7 +3822,7 @@
                           <a:ea typeface="맑은 고딕"/>
                           <a:cs typeface="맑은 고딕"/>
                         </a:rPr>
-                        <a:t>(20시 마감)</a:t>
+                        <a:t>(소포장·즉석식품 중심)</a:t>
                       </a:r>
                     </a:p>
                   </a:txBody>
@@ -5045,7 +3857,7 @@
                     <a:bodyPr wrap="square"/>
                     <a:lstStyle/>
                     <a:p>
-                      <a:pPr algn="ctr"/>
+                      <a:pPr algn="l"/>
                       <a:r>
                         <a:rPr sz="1000" b="1">
                           <a:solidFill>
@@ -5055,7 +3867,18 @@
                           <a:ea typeface="맑은 고딕"/>
                           <a:cs typeface="맑은 고딕"/>
                         </a:rPr>
-                        <a:t>사륜차</a:t>
+                        <a:t>약 15만 종 </a:t>
+                      </a:r>
+                      <a:r>
+                        <a:rPr sz="900" b="1">
+                          <a:solidFill>
+                            <a:srgbClr val="002060"/>
+                          </a:solidFill>
+                          <a:latin typeface="맑은 고딕"/>
+                          <a:ea typeface="맑은 고딕"/>
+                          <a:cs typeface="맑은 고딕"/>
+                        </a:rPr>
+                        <a:t>(이마트 전 상품)</a:t>
                       </a:r>
                     </a:p>
                   </a:txBody>
@@ -5085,6 +3908,8 @@
                     </a:solidFill>
                   </a:tcPr>
                 </a:tc>
+              </a:tr>
+              <a:tr h="248400">
                 <a:tc>
                   <a:txBody>
                     <a:bodyPr wrap="square"/>
@@ -5094,13 +3919,251 @@
                       <a:r>
                         <a:rPr sz="1000" b="1">
                           <a:solidFill>
+                            <a:srgbClr val="000000"/>
+                          </a:solidFill>
+                          <a:latin typeface="맑은 고딕"/>
+                          <a:ea typeface="맑은 고딕"/>
+                          <a:cs typeface="맑은 고딕"/>
+                        </a:rPr>
+                        <a:t>출고</a:t>
+                      </a:r>
+                    </a:p>
+                  </a:txBody>
+                  <a:tcPr anchor="ctr" marL="36000" marR="36000" marT="0" marB="0">
+                    <a:lnL w="9525" cap="flat">
+                      <a:solidFill>
+                        <a:srgbClr val="BFBFBF"/>
+                      </a:solidFill>
+                    </a:lnL>
+                    <a:lnR w="9525" cap="flat">
+                      <a:solidFill>
+                        <a:srgbClr val="BFBFBF"/>
+                      </a:solidFill>
+                    </a:lnR>
+                    <a:lnT w="9525" cap="flat">
+                      <a:solidFill>
+                        <a:srgbClr val="BFBFBF"/>
+                      </a:solidFill>
+                    </a:lnT>
+                    <a:lnB w="9525" cap="flat">
+                      <a:solidFill>
+                        <a:srgbClr val="BFBFBF"/>
+                      </a:solidFill>
+                    </a:lnB>
+                    <a:solidFill>
+                      <a:srgbClr val="FFFFFF"/>
+                    </a:solidFill>
+                  </a:tcPr>
+                </a:tc>
+                <a:tc>
+                  <a:txBody>
+                    <a:bodyPr wrap="square"/>
+                    <a:lstStyle/>
+                    <a:p>
+                      <a:pPr algn="l"/>
+                      <a:r>
+                        <a:rPr sz="1000" b="0">
+                          <a:solidFill>
+                            <a:srgbClr val="000000"/>
+                          </a:solidFill>
+                          <a:latin typeface="맑은 고딕"/>
+                          <a:ea typeface="맑은 고딕"/>
+                          <a:cs typeface="맑은 고딕"/>
+                        </a:rPr>
+                        <a:t>매장 일부 품목</a:t>
+                      </a:r>
+                    </a:p>
+                  </a:txBody>
+                  <a:tcPr anchor="ctr" marL="36000" marR="36000" marT="0" marB="0">
+                    <a:lnL w="9525" cap="flat">
+                      <a:solidFill>
+                        <a:srgbClr val="BFBFBF"/>
+                      </a:solidFill>
+                    </a:lnL>
+                    <a:lnR w="9525" cap="flat">
+                      <a:solidFill>
+                        <a:srgbClr val="BFBFBF"/>
+                      </a:solidFill>
+                    </a:lnR>
+                    <a:lnT w="9525" cap="flat">
+                      <a:solidFill>
+                        <a:srgbClr val="BFBFBF"/>
+                      </a:solidFill>
+                    </a:lnT>
+                    <a:lnB w="9525" cap="flat">
+                      <a:solidFill>
+                        <a:srgbClr val="BFBFBF"/>
+                      </a:solidFill>
+                    </a:lnB>
+                    <a:solidFill>
+                      <a:srgbClr val="FFFFFF"/>
+                    </a:solidFill>
+                  </a:tcPr>
+                </a:tc>
+                <a:tc>
+                  <a:txBody>
+                    <a:bodyPr wrap="square"/>
+                    <a:lstStyle/>
+                    <a:p>
+                      <a:pPr algn="l"/>
+                      <a:r>
+                        <a:rPr sz="1000" b="1">
+                          <a:solidFill>
                             <a:srgbClr val="002060"/>
                           </a:solidFill>
                           <a:latin typeface="맑은 고딕"/>
                           <a:ea typeface="맑은 고딕"/>
                           <a:cs typeface="맑은 고딕"/>
                         </a:rPr>
-                        <a:t>약 15만 종</a:t>
+                        <a:t>PP센터 집품·포장 → 즉시 출고</a:t>
+                      </a:r>
+                    </a:p>
+                  </a:txBody>
+                  <a:tcPr anchor="ctr" marL="36000" marR="36000" marT="0" marB="0">
+                    <a:lnL w="9525" cap="flat">
+                      <a:solidFill>
+                        <a:srgbClr val="BFBFBF"/>
+                      </a:solidFill>
+                    </a:lnL>
+                    <a:lnR w="9525" cap="flat">
+                      <a:solidFill>
+                        <a:srgbClr val="BFBFBF"/>
+                      </a:solidFill>
+                    </a:lnR>
+                    <a:lnT w="9525" cap="flat">
+                      <a:solidFill>
+                        <a:srgbClr val="BFBFBF"/>
+                      </a:solidFill>
+                    </a:lnT>
+                    <a:lnB w="9525" cap="flat">
+                      <a:solidFill>
+                        <a:srgbClr val="BFBFBF"/>
+                      </a:solidFill>
+                    </a:lnB>
+                    <a:solidFill>
+                      <a:srgbClr val="DEEBF7"/>
+                    </a:solidFill>
+                  </a:tcPr>
+                </a:tc>
+              </a:tr>
+              <a:tr h="248400">
+                <a:tc>
+                  <a:txBody>
+                    <a:bodyPr wrap="square"/>
+                    <a:lstStyle/>
+                    <a:p>
+                      <a:pPr algn="ctr"/>
+                      <a:r>
+                        <a:rPr sz="1000" b="1">
+                          <a:solidFill>
+                            <a:srgbClr val="000000"/>
+                          </a:solidFill>
+                          <a:latin typeface="맑은 고딕"/>
+                          <a:ea typeface="맑은 고딕"/>
+                          <a:cs typeface="맑은 고딕"/>
+                        </a:rPr>
+                        <a:t>조건</a:t>
+                      </a:r>
+                    </a:p>
+                  </a:txBody>
+                  <a:tcPr anchor="ctr" marL="36000" marR="36000" marT="0" marB="0">
+                    <a:lnL w="9525" cap="flat">
+                      <a:solidFill>
+                        <a:srgbClr val="BFBFBF"/>
+                      </a:solidFill>
+                    </a:lnL>
+                    <a:lnR w="9525" cap="flat">
+                      <a:solidFill>
+                        <a:srgbClr val="BFBFBF"/>
+                      </a:solidFill>
+                    </a:lnR>
+                    <a:lnT w="9525" cap="flat">
+                      <a:solidFill>
+                        <a:srgbClr val="BFBFBF"/>
+                      </a:solidFill>
+                    </a:lnT>
+                    <a:lnB w="9525" cap="flat">
+                      <a:solidFill>
+                        <a:srgbClr val="BFBFBF"/>
+                      </a:solidFill>
+                    </a:lnB>
+                    <a:solidFill>
+                      <a:srgbClr val="FFFFFF"/>
+                    </a:solidFill>
+                  </a:tcPr>
+                </a:tc>
+                <a:tc>
+                  <a:txBody>
+                    <a:bodyPr wrap="square"/>
+                    <a:lstStyle/>
+                    <a:p>
+                      <a:pPr algn="l"/>
+                      <a:r>
+                        <a:rPr sz="1000" b="0">
+                          <a:solidFill>
+                            <a:srgbClr val="000000"/>
+                          </a:solidFill>
+                          <a:latin typeface="맑은 고딕"/>
+                          <a:ea typeface="맑은 고딕"/>
+                          <a:cs typeface="맑은 고딕"/>
+                        </a:rPr>
+                        <a:t>별도 배송비 체계</a:t>
+                      </a:r>
+                    </a:p>
+                  </a:txBody>
+                  <a:tcPr anchor="ctr" marL="36000" marR="36000" marT="0" marB="0">
+                    <a:lnL w="9525" cap="flat">
+                      <a:solidFill>
+                        <a:srgbClr val="BFBFBF"/>
+                      </a:solidFill>
+                    </a:lnL>
+                    <a:lnR w="9525" cap="flat">
+                      <a:solidFill>
+                        <a:srgbClr val="BFBFBF"/>
+                      </a:solidFill>
+                    </a:lnR>
+                    <a:lnT w="9525" cap="flat">
+                      <a:solidFill>
+                        <a:srgbClr val="BFBFBF"/>
+                      </a:solidFill>
+                    </a:lnT>
+                    <a:lnB w="9525" cap="flat">
+                      <a:solidFill>
+                        <a:srgbClr val="BFBFBF"/>
+                      </a:solidFill>
+                    </a:lnB>
+                    <a:solidFill>
+                      <a:srgbClr val="FFFFFF"/>
+                    </a:solidFill>
+                  </a:tcPr>
+                </a:tc>
+                <a:tc>
+                  <a:txBody>
+                    <a:bodyPr wrap="square"/>
+                    <a:lstStyle/>
+                    <a:p>
+                      <a:pPr algn="l"/>
+                      <a:r>
+                        <a:rPr sz="1000" b="1">
+                          <a:solidFill>
+                            <a:srgbClr val="002060"/>
+                          </a:solidFill>
+                          <a:latin typeface="맑은 고딕"/>
+                          <a:ea typeface="맑은 고딕"/>
+                          <a:cs typeface="맑은 고딕"/>
+                        </a:rPr>
+                        <a:t>무료배송 4만 원 이상 </a:t>
+                      </a:r>
+                      <a:r>
+                        <a:rPr sz="900" b="1">
+                          <a:solidFill>
+                            <a:srgbClr val="002060"/>
+                          </a:solidFill>
+                          <a:latin typeface="맑은 고딕"/>
+                          <a:ea typeface="맑은 고딕"/>
+                          <a:cs typeface="맑은 고딕"/>
+                        </a:rPr>
+                        <a:t>(쓱배송 동일)</a:t>
                       </a:r>
                     </a:p>
                   </a:txBody>
@@ -5137,14 +4200,14 @@
       </p:graphicFrame>
       <p:sp>
         <p:nvSpPr>
-          <p:cNvPr id="10" name="TextBox 9"/>
+          <p:cNvPr id="9" name="TextBox 8"/>
           <p:cNvSpPr txBox="1"/>
           <p:nvPr/>
         </p:nvSpPr>
         <p:spPr>
           <a:xfrm>
-            <a:off x="424800" y="4914000"/>
-            <a:ext cx="9057600" cy="198000"/>
+            <a:off x="424800" y="3567600"/>
+            <a:ext cx="9057600" cy="162000"/>
           </a:xfrm>
           <a:prstGeom prst="rect">
             <a:avLst/>
@@ -5159,28 +4222,360 @@
           <a:p>
             <a:pPr algn="l"/>
             <a:r>
-              <a:rPr sz="1200" b="1">
-                <a:solidFill>
-                  <a:srgbClr val="000000"/>
+              <a:rPr sz="900" b="0">
+                <a:solidFill>
+                  <a:srgbClr val="595959"/>
                 </a:solidFill>
                 <a:latin typeface="맑은 고딕"/>
                 <a:ea typeface="맑은 고딕"/>
                 <a:cs typeface="맑은 고딕"/>
               </a:rPr>
-              <a:t>• ③ 확산 로드맵</a:t>
+              <a:t>※ 예약배송 </a:t>
+            </a:r>
+            <a:r>
+              <a:rPr sz="800" b="0">
+                <a:solidFill>
+                  <a:srgbClr val="595959"/>
+                </a:solidFill>
+                <a:latin typeface="맑은 고딕"/>
+                <a:ea typeface="맑은 고딕"/>
+                <a:cs typeface="맑은 고딕"/>
+              </a:rPr>
+              <a:t>(주간·새벽·트레이더스)</a:t>
+            </a:r>
+            <a:r>
+              <a:rPr sz="900" b="0">
+                <a:solidFill>
+                  <a:srgbClr val="595959"/>
+                </a:solidFill>
+                <a:latin typeface="맑은 고딕"/>
+                <a:ea typeface="맑은 고딕"/>
+                <a:cs typeface="맑은 고딕"/>
+              </a:rPr>
+              <a:t> 기존 운영 유지, 병행 이용 가능</a:t>
+            </a:r>
+          </a:p>
+        </p:txBody>
+      </p:sp>
+      <p:sp>
+        <p:nvSpPr>
+          <p:cNvPr id="10" name="Rectangle 9"/>
+          <p:cNvSpPr/>
+          <p:nvPr/>
+        </p:nvSpPr>
+        <p:spPr>
+          <a:xfrm>
+            <a:off x="424800" y="3794400"/>
+            <a:ext cx="9057600" cy="270000"/>
+          </a:xfrm>
+          <a:prstGeom prst="rect">
+            <a:avLst/>
+          </a:prstGeom>
+          <a:solidFill>
+            <a:srgbClr val="EAEEF6"/>
+          </a:solidFill>
+          <a:ln>
+            <a:noFill/>
+          </a:ln>
+          <a:effectLst/>
+        </p:spPr>
+        <p:style>
+          <a:lnRef idx="1">
+            <a:schemeClr val="accent1"/>
+          </a:lnRef>
+          <a:fillRef idx="3">
+            <a:schemeClr val="accent1"/>
+          </a:fillRef>
+          <a:effectRef idx="2">
+            <a:schemeClr val="accent1"/>
+          </a:effectRef>
+          <a:fontRef idx="minor">
+            <a:schemeClr val="lt1"/>
+          </a:fontRef>
+        </p:style>
+        <p:txBody>
+          <a:bodyPr rtlCol="0" anchor="ctr"/>
+          <a:lstStyle/>
+          <a:p>
+            <a:pPr algn="ctr"/>
+          </a:p>
+        </p:txBody>
+      </p:sp>
+      <p:sp>
+        <p:nvSpPr>
+          <p:cNvPr id="11" name="TextBox 10"/>
+          <p:cNvSpPr txBox="1"/>
+          <p:nvPr/>
+        </p:nvSpPr>
+        <p:spPr>
+          <a:xfrm>
+            <a:off x="424800" y="3794400"/>
+            <a:ext cx="9057600" cy="270000"/>
+          </a:xfrm>
+          <a:prstGeom prst="rect">
+            <a:avLst/>
+          </a:prstGeom>
+          <a:noFill/>
+        </p:spPr>
+        <p:txBody>
+          <a:bodyPr wrap="square" anchor="ctr" lIns="0" rIns="0" tIns="0" bIns="0">
+            <a:spAutoFit/>
+          </a:bodyPr>
+          <a:lstStyle/>
+          <a:p>
+            <a:pPr algn="ctr"/>
+            <a:r>
+              <a:rPr sz="1200" b="1">
+                <a:solidFill>
+                  <a:srgbClr val="000000"/>
+                </a:solidFill>
+                <a:latin typeface="맑은 고딕"/>
+                <a:ea typeface="맑은 고딕"/>
+                <a:cs typeface="맑은 고딕"/>
+              </a:rPr>
+              <a:t>③ 취급 상품 차별점 — 소량 퀵커머스에서 전 상품 장보기로</a:t>
+            </a:r>
+          </a:p>
+        </p:txBody>
+      </p:sp>
+      <p:sp>
+        <p:nvSpPr>
+          <p:cNvPr id="12" name="TextBox 11"/>
+          <p:cNvSpPr txBox="1"/>
+          <p:nvPr/>
+        </p:nvSpPr>
+        <p:spPr>
+          <a:xfrm>
+            <a:off x="622800" y="4129200"/>
+            <a:ext cx="8859600" cy="223200"/>
+          </a:xfrm>
+          <a:prstGeom prst="rect">
+            <a:avLst/>
+          </a:prstGeom>
+          <a:noFill/>
+        </p:spPr>
+        <p:txBody>
+          <a:bodyPr wrap="square" anchor="t" lIns="0" rIns="0" tIns="0" bIns="0">
+            <a:spAutoFit/>
+          </a:bodyPr>
+          <a:lstStyle/>
+          <a:p>
+            <a:pPr algn="l"/>
+            <a:r>
+              <a:rPr sz="1100" b="0">
+                <a:solidFill>
+                  <a:srgbClr val="000000"/>
+                </a:solidFill>
+                <a:latin typeface="맑은 고딕"/>
+                <a:ea typeface="맑은 고딕"/>
+                <a:cs typeface="맑은 고딕"/>
+              </a:rPr>
+              <a:t>- 마트 전 상품 대상 : 기존 퀵커머스 미취급 대용량·신선 카테고리 전면 개방</a:t>
+            </a:r>
+          </a:p>
+        </p:txBody>
+      </p:sp>
+      <p:sp>
+        <p:nvSpPr>
+          <p:cNvPr id="13" name="TextBox 12"/>
+          <p:cNvSpPr txBox="1"/>
+          <p:nvPr/>
+        </p:nvSpPr>
+        <p:spPr>
+          <a:xfrm>
+            <a:off x="622800" y="4352400"/>
+            <a:ext cx="8859600" cy="223200"/>
+          </a:xfrm>
+          <a:prstGeom prst="rect">
+            <a:avLst/>
+          </a:prstGeom>
+          <a:noFill/>
+        </p:spPr>
+        <p:txBody>
+          <a:bodyPr wrap="square" anchor="t" lIns="0" rIns="0" tIns="0" bIns="0">
+            <a:spAutoFit/>
+          </a:bodyPr>
+          <a:lstStyle/>
+          <a:p>
+            <a:pPr algn="l"/>
+            <a:r>
+              <a:rPr sz="1100" b="0">
+                <a:solidFill>
+                  <a:srgbClr val="000000"/>
+                </a:solidFill>
+                <a:latin typeface="맑은 고딕"/>
+                <a:ea typeface="맑은 고딕"/>
+                <a:cs typeface="맑은 고딕"/>
+              </a:rPr>
+              <a:t>- 신선식품 </a:t>
+            </a:r>
+            <a:r>
+              <a:rPr sz="1000" b="0">
+                <a:solidFill>
+                  <a:srgbClr val="000000"/>
+                </a:solidFill>
+                <a:latin typeface="맑은 고딕"/>
+                <a:ea typeface="맑은 고딕"/>
+                <a:cs typeface="맑은 고딕"/>
+              </a:rPr>
+              <a:t>(육류·생선·과일)</a:t>
+            </a:r>
+            <a:r>
+              <a:rPr sz="1100" b="0">
+                <a:solidFill>
+                  <a:srgbClr val="000000"/>
+                </a:solidFill>
+                <a:latin typeface="맑은 고딕"/>
+                <a:ea typeface="맑은 고딕"/>
+                <a:cs typeface="맑은 고딕"/>
+              </a:rPr>
+              <a:t> 중심 소구 — 매장 재고 직접 집품으로 선도 유지</a:t>
+            </a:r>
+          </a:p>
+        </p:txBody>
+      </p:sp>
+      <p:sp>
+        <p:nvSpPr>
+          <p:cNvPr id="14" name="TextBox 13"/>
+          <p:cNvSpPr txBox="1"/>
+          <p:nvPr/>
+        </p:nvSpPr>
+        <p:spPr>
+          <a:xfrm>
+            <a:off x="622800" y="4575600"/>
+            <a:ext cx="8859600" cy="223200"/>
+          </a:xfrm>
+          <a:prstGeom prst="rect">
+            <a:avLst/>
+          </a:prstGeom>
+          <a:noFill/>
+        </p:spPr>
+        <p:txBody>
+          <a:bodyPr wrap="square" anchor="t" lIns="0" rIns="0" tIns="0" bIns="0">
+            <a:spAutoFit/>
+          </a:bodyPr>
+          <a:lstStyle/>
+          <a:p>
+            <a:pPr algn="l"/>
+            <a:r>
+              <a:rPr sz="1100" b="0">
+                <a:solidFill>
+                  <a:srgbClr val="000000"/>
+                </a:solidFill>
+                <a:latin typeface="맑은 고딕"/>
+                <a:ea typeface="맑은 고딕"/>
+                <a:cs typeface="맑은 고딕"/>
+              </a:rPr>
+              <a:t>- 냉장·냉동 전용 보냉 파우치 포장 후 매장 즉시 출고 — 콜드체인 체계 적용</a:t>
+            </a:r>
+          </a:p>
+        </p:txBody>
+      </p:sp>
+      <p:sp>
+        <p:nvSpPr>
+          <p:cNvPr id="15" name="TextBox 14"/>
+          <p:cNvSpPr txBox="1"/>
+          <p:nvPr/>
+        </p:nvSpPr>
+        <p:spPr>
+          <a:xfrm>
+            <a:off x="622800" y="4798799"/>
+            <a:ext cx="8859600" cy="223200"/>
+          </a:xfrm>
+          <a:prstGeom prst="rect">
+            <a:avLst/>
+          </a:prstGeom>
+          <a:noFill/>
+        </p:spPr>
+        <p:txBody>
+          <a:bodyPr wrap="square" anchor="t" lIns="0" rIns="0" tIns="0" bIns="0">
+            <a:spAutoFit/>
+          </a:bodyPr>
+          <a:lstStyle/>
+          <a:p>
+            <a:pPr algn="l"/>
+            <a:r>
+              <a:rPr sz="1100" b="0">
+                <a:solidFill>
+                  <a:srgbClr val="000000"/>
+                </a:solidFill>
+                <a:latin typeface="맑은 고딕"/>
+                <a:ea typeface="맑은 고딕"/>
+                <a:cs typeface="맑은 고딕"/>
+              </a:rPr>
+              <a:t>- 기존 '바로퀵' 고객층 </a:t>
+            </a:r>
+            <a:r>
+              <a:rPr sz="1000" b="0">
+                <a:solidFill>
+                  <a:srgbClr val="000000"/>
+                </a:solidFill>
+                <a:latin typeface="맑은 고딕"/>
+                <a:ea typeface="맑은 고딕"/>
+                <a:cs typeface="맑은 고딕"/>
+              </a:rPr>
+              <a:t>(2030·소용량·그로서리 90%)</a:t>
+            </a:r>
+            <a:r>
+              <a:rPr sz="1100" b="0">
+                <a:solidFill>
+                  <a:srgbClr val="000000"/>
+                </a:solidFill>
+                <a:latin typeface="맑은 고딕"/>
+                <a:ea typeface="맑은 고딕"/>
+                <a:cs typeface="맑은 고딕"/>
+              </a:rPr>
+              <a:t>과 구분되는 본 장보기 수요 겨냥</a:t>
+            </a:r>
+          </a:p>
+        </p:txBody>
+      </p:sp>
+      <p:sp>
+        <p:nvSpPr>
+          <p:cNvPr id="16" name="TextBox 15"/>
+          <p:cNvSpPr txBox="1"/>
+          <p:nvPr/>
+        </p:nvSpPr>
+        <p:spPr>
+          <a:xfrm>
+            <a:off x="424800" y="5072400"/>
+            <a:ext cx="9057600" cy="180000"/>
+          </a:xfrm>
+          <a:prstGeom prst="rect">
+            <a:avLst/>
+          </a:prstGeom>
+          <a:noFill/>
+        </p:spPr>
+        <p:txBody>
+          <a:bodyPr wrap="square" anchor="t" lIns="0" rIns="0" tIns="0" bIns="0">
+            <a:spAutoFit/>
+          </a:bodyPr>
+          <a:lstStyle/>
+          <a:p>
+            <a:pPr algn="l"/>
+            <a:r>
+              <a:rPr sz="1200" b="1">
+                <a:solidFill>
+                  <a:srgbClr val="000000"/>
+                </a:solidFill>
+                <a:latin typeface="맑은 고딕"/>
+                <a:ea typeface="맑은 고딕"/>
+                <a:cs typeface="맑은 고딕"/>
+              </a:rPr>
+              <a:t>• ④ 확산 로드맵</a:t>
             </a:r>
           </a:p>
         </p:txBody>
       </p:sp>
       <p:cxnSp>
         <p:nvCxnSpPr>
-          <p:cNvPr id="11" name="Connector 10"/>
+          <p:cNvPr id="17" name="Connector 16"/>
           <p:cNvCxnSpPr/>
           <p:nvPr/>
         </p:nvCxnSpPr>
         <p:spPr>
           <a:xfrm>
-            <a:off x="424800" y="5335200"/>
+            <a:off x="424800" y="5454000"/>
             <a:ext cx="9057600" cy="0"/>
           </a:xfrm>
           <a:prstGeom prst="bentConnector3">
@@ -5212,13 +4607,13 @@
       </p:cxnSp>
       <p:sp>
         <p:nvSpPr>
-          <p:cNvPr id="12" name="Oval 11"/>
+          <p:cNvPr id="18" name="Oval 17"/>
           <p:cNvSpPr/>
           <p:nvPr/>
         </p:nvSpPr>
         <p:spPr>
           <a:xfrm>
-            <a:off x="1506600" y="5284800"/>
+            <a:off x="1506600" y="5403600"/>
             <a:ext cx="100800" cy="100800"/>
           </a:xfrm>
           <a:prstGeom prst="ellipse">
@@ -5258,14 +4653,14 @@
       </p:sp>
       <p:sp>
         <p:nvSpPr>
-          <p:cNvPr id="13" name="TextBox 12"/>
+          <p:cNvPr id="19" name="TextBox 18"/>
           <p:cNvSpPr txBox="1"/>
           <p:nvPr/>
         </p:nvSpPr>
         <p:spPr>
           <a:xfrm>
-            <a:off x="424800" y="5130000"/>
-            <a:ext cx="2264400" cy="162000"/>
+            <a:off x="424800" y="5259600"/>
+            <a:ext cx="2264400" cy="151200"/>
           </a:xfrm>
           <a:prstGeom prst="rect">
             <a:avLst/>
@@ -5295,14 +4690,14 @@
       </p:sp>
       <p:sp>
         <p:nvSpPr>
-          <p:cNvPr id="14" name="TextBox 13"/>
+          <p:cNvPr id="20" name="TextBox 19"/>
           <p:cNvSpPr txBox="1"/>
           <p:nvPr/>
         </p:nvSpPr>
         <p:spPr>
           <a:xfrm>
-            <a:off x="424800" y="5400000"/>
-            <a:ext cx="2264400" cy="413999"/>
+            <a:off x="424800" y="5518800"/>
+            <a:ext cx="2264400" cy="342000"/>
           </a:xfrm>
           <a:prstGeom prst="rect">
             <a:avLst/>
@@ -5339,20 +4734,20 @@
                 <a:ea typeface="맑은 고딕"/>
                 <a:cs typeface="맑은 고딕"/>
               </a:rPr>
-              <a:t>도입</a:t>
-            </a:r>
-          </a:p>
-        </p:txBody>
-      </p:sp>
-      <p:sp>
-        <p:nvSpPr>
-          <p:cNvPr id="15" name="Oval 14"/>
+              <a:t>시범 도입</a:t>
+            </a:r>
+          </a:p>
+        </p:txBody>
+      </p:sp>
+      <p:sp>
+        <p:nvSpPr>
+          <p:cNvPr id="21" name="Oval 20"/>
           <p:cNvSpPr/>
           <p:nvPr/>
         </p:nvSpPr>
         <p:spPr>
           <a:xfrm>
-            <a:off x="3771000" y="5284800"/>
+            <a:off x="3771000" y="5403600"/>
             <a:ext cx="100800" cy="100800"/>
           </a:xfrm>
           <a:prstGeom prst="ellipse">
@@ -5392,14 +4787,14 @@
       </p:sp>
       <p:sp>
         <p:nvSpPr>
-          <p:cNvPr id="16" name="TextBox 15"/>
+          <p:cNvPr id="22" name="TextBox 21"/>
           <p:cNvSpPr txBox="1"/>
           <p:nvPr/>
         </p:nvSpPr>
         <p:spPr>
           <a:xfrm>
-            <a:off x="2689200" y="5130000"/>
-            <a:ext cx="2264400" cy="162000"/>
+            <a:off x="2689200" y="5259600"/>
+            <a:ext cx="2264400" cy="151200"/>
           </a:xfrm>
           <a:prstGeom prst="rect">
             <a:avLst/>
@@ -5429,14 +4824,14 @@
       </p:sp>
       <p:sp>
         <p:nvSpPr>
-          <p:cNvPr id="17" name="TextBox 16"/>
+          <p:cNvPr id="23" name="TextBox 22"/>
           <p:cNvSpPr txBox="1"/>
           <p:nvPr/>
         </p:nvSpPr>
         <p:spPr>
           <a:xfrm>
-            <a:off x="2689200" y="5400000"/>
-            <a:ext cx="2264400" cy="413999"/>
+            <a:off x="2689200" y="5518800"/>
+            <a:ext cx="2264400" cy="342000"/>
           </a:xfrm>
           <a:prstGeom prst="rect">
             <a:avLst/>
@@ -5459,7 +4854,7 @@
                 <a:ea typeface="맑은 고딕"/>
                 <a:cs typeface="맑은 고딕"/>
               </a:rPr>
-              <a:t>서울 확대</a:t>
+              <a:t>서울권 확대</a:t>
             </a:r>
           </a:p>
           <a:p>
@@ -5480,13 +4875,13 @@
       </p:sp>
       <p:sp>
         <p:nvSpPr>
-          <p:cNvPr id="18" name="Oval 17"/>
+          <p:cNvPr id="24" name="Oval 23"/>
           <p:cNvSpPr/>
           <p:nvPr/>
         </p:nvSpPr>
         <p:spPr>
           <a:xfrm>
-            <a:off x="6035400" y="5284800"/>
+            <a:off x="6035400" y="5403600"/>
             <a:ext cx="100800" cy="100800"/>
           </a:xfrm>
           <a:prstGeom prst="ellipse">
@@ -5526,14 +4921,14 @@
       </p:sp>
       <p:sp>
         <p:nvSpPr>
-          <p:cNvPr id="19" name="TextBox 18"/>
+          <p:cNvPr id="25" name="TextBox 24"/>
           <p:cNvSpPr txBox="1"/>
           <p:nvPr/>
         </p:nvSpPr>
         <p:spPr>
           <a:xfrm>
-            <a:off x="4953600" y="5130000"/>
-            <a:ext cx="2264400" cy="162000"/>
+            <a:off x="4953600" y="5259600"/>
+            <a:ext cx="2264400" cy="151200"/>
           </a:xfrm>
           <a:prstGeom prst="rect">
             <a:avLst/>
@@ -5563,14 +4958,14 @@
       </p:sp>
       <p:sp>
         <p:nvSpPr>
-          <p:cNvPr id="20" name="TextBox 19"/>
+          <p:cNvPr id="26" name="TextBox 25"/>
           <p:cNvSpPr txBox="1"/>
           <p:nvPr/>
         </p:nvSpPr>
         <p:spPr>
           <a:xfrm>
-            <a:off x="4953600" y="5400000"/>
-            <a:ext cx="2264400" cy="413999"/>
+            <a:off x="4953600" y="5518800"/>
+            <a:ext cx="2264400" cy="342000"/>
           </a:xfrm>
           <a:prstGeom prst="rect">
             <a:avLst/>
@@ -5600,13 +4995,13 @@
       </p:sp>
       <p:sp>
         <p:nvSpPr>
-          <p:cNvPr id="21" name="Oval 20"/>
+          <p:cNvPr id="27" name="Oval 26"/>
           <p:cNvSpPr/>
           <p:nvPr/>
         </p:nvSpPr>
         <p:spPr>
           <a:xfrm>
-            <a:off x="8299800" y="5284800"/>
+            <a:off x="8299800" y="5403600"/>
             <a:ext cx="100800" cy="100800"/>
           </a:xfrm>
           <a:prstGeom prst="ellipse">
@@ -5646,14 +5041,14 @@
       </p:sp>
       <p:sp>
         <p:nvSpPr>
-          <p:cNvPr id="22" name="TextBox 21"/>
+          <p:cNvPr id="28" name="TextBox 27"/>
           <p:cNvSpPr txBox="1"/>
           <p:nvPr/>
         </p:nvSpPr>
         <p:spPr>
           <a:xfrm>
-            <a:off x="7218000" y="5130000"/>
-            <a:ext cx="2264400" cy="162000"/>
+            <a:off x="7218000" y="5259600"/>
+            <a:ext cx="2264400" cy="151200"/>
           </a:xfrm>
           <a:prstGeom prst="rect">
             <a:avLst/>
@@ -5683,14 +5078,14 @@
       </p:sp>
       <p:sp>
         <p:nvSpPr>
-          <p:cNvPr id="23" name="TextBox 22"/>
+          <p:cNvPr id="29" name="TextBox 28"/>
           <p:cNvSpPr txBox="1"/>
           <p:nvPr/>
         </p:nvSpPr>
         <p:spPr>
           <a:xfrm>
-            <a:off x="7218000" y="5400000"/>
-            <a:ext cx="2264400" cy="413999"/>
+            <a:off x="7218000" y="5518800"/>
+            <a:ext cx="2264400" cy="342000"/>
           </a:xfrm>
           <a:prstGeom prst="rect">
             <a:avLst/>
@@ -5713,7 +5108,7 @@
                 <a:ea typeface="맑은 고딕"/>
                 <a:cs typeface="맑은 고딕"/>
               </a:rPr>
-              <a:t>50여 점포</a:t>
+              <a:t>50여 개</a:t>
             </a:r>
           </a:p>
           <a:p>
@@ -5727,20 +5122,20 @@
                 <a:ea typeface="맑은 고딕"/>
                 <a:cs typeface="맑은 고딕"/>
               </a:rPr>
-              <a:t>운영</a:t>
-            </a:r>
-          </a:p>
-        </p:txBody>
-      </p:sp>
-      <p:sp>
-        <p:nvSpPr>
-          <p:cNvPr id="24" name="Rectangle 23"/>
+              <a:t>점포 운영</a:t>
+            </a:r>
+          </a:p>
+        </p:txBody>
+      </p:sp>
+      <p:sp>
+        <p:nvSpPr>
+          <p:cNvPr id="30" name="Rectangle 29"/>
           <p:cNvSpPr/>
           <p:nvPr/>
         </p:nvSpPr>
         <p:spPr>
           <a:xfrm>
-            <a:off x="424800" y="5760000"/>
+            <a:off x="424800" y="5813999"/>
             <a:ext cx="9057600" cy="342000"/>
           </a:xfrm>
           <a:prstGeom prst="rect">
@@ -5778,13 +5173,13 @@
       </p:sp>
       <p:sp>
         <p:nvSpPr>
-          <p:cNvPr id="25" name="TextBox 24"/>
+          <p:cNvPr id="31" name="TextBox 30"/>
           <p:cNvSpPr txBox="1"/>
           <p:nvPr/>
         </p:nvSpPr>
         <p:spPr>
           <a:xfrm>
-            <a:off x="424800" y="5760000"/>
+            <a:off x="424800" y="5813999"/>
             <a:ext cx="9057600" cy="342000"/>
           </a:xfrm>
           <a:prstGeom prst="rect">
@@ -5808,21 +5203,43 @@
                 <a:ea typeface="맑은 고딕"/>
                 <a:cs typeface="맑은 고딕"/>
               </a:rPr>
-              <a:t>유휴 PP센터 재활용 → 신규 투자 최소 · 저비용으로 대용량 즉시배송 급속 확산</a:t>
-            </a:r>
-          </a:p>
-        </p:txBody>
-      </p:sp>
-      <p:sp>
-        <p:nvSpPr>
-          <p:cNvPr id="26" name="TextBox 25"/>
+              <a:t>소량 즉시배송 → 전 상품 장보기 배송 전환, 점포 </a:t>
+            </a:r>
+            <a:r>
+              <a:rPr sz="1000" b="1">
+                <a:solidFill>
+                  <a:srgbClr val="FFFFFF"/>
+                </a:solidFill>
+                <a:latin typeface="맑은 고딕"/>
+                <a:ea typeface="맑은 고딕"/>
+                <a:cs typeface="맑은 고딕"/>
+              </a:rPr>
+              <a:t>(PP센터)</a:t>
+            </a:r>
+            <a:r>
+              <a:rPr sz="1100" b="1">
+                <a:solidFill>
+                  <a:srgbClr val="FFFFFF"/>
+                </a:solidFill>
+                <a:latin typeface="맑은 고딕"/>
+                <a:ea typeface="맑은 고딕"/>
+                <a:cs typeface="맑은 고딕"/>
+              </a:rPr>
+              <a:t> 온라인 가동률 제고</a:t>
+            </a:r>
+          </a:p>
+        </p:txBody>
+      </p:sp>
+      <p:sp>
+        <p:nvSpPr>
+          <p:cNvPr id="32" name="TextBox 31"/>
           <p:cNvSpPr txBox="1"/>
           <p:nvPr/>
         </p:nvSpPr>
         <p:spPr>
           <a:xfrm>
-            <a:off x="424800" y="6210000"/>
-            <a:ext cx="9057600" cy="198000"/>
+            <a:off x="424800" y="6235199"/>
+            <a:ext cx="9057600" cy="180000"/>
           </a:xfrm>
           <a:prstGeom prst="rect">
             <a:avLst/>
@@ -5845,7 +5262,7 @@
                 <a:ea typeface="맑은 고딕"/>
                 <a:cs typeface="맑은 고딕"/>
               </a:rPr>
-              <a:t>※ 취급 품목: 이마트 15만 · 바로퀵 1만 종      ※ 출처: 비즈워치 · 머니투데이 · 한국경제 </a:t>
+              <a:t>※ 출처 : 비즈워치 · 머니투데이 · 한국경제 · 뉴스핌 · 비즈니스포스트 </a:t>
             </a:r>
             <a:r>
               <a:rPr sz="800" b="0">

--- a/reports/ssg-quickcommerce-onepager.pptx
+++ b/reports/ssg-quickcommerce-onepager.pptx
@@ -3131,7 +3131,7 @@
                 <a:ea typeface="맑은 고딕"/>
                 <a:cs typeface="맑은 고딕"/>
               </a:rPr>
-              <a:t>이마트, 점포 기반 '2시간 배송' 도입 — 퀵커머스의 장보기 채널화</a:t>
+              <a:t>이마트, 점포 기반 '2시간 배송' 도입 — 퀵커머스의 장보기 채널化</a:t>
             </a:r>
           </a:p>
         </p:txBody>
@@ -3145,7 +3145,7 @@
         <p:spPr>
           <a:xfrm>
             <a:off x="435600" y="1044000"/>
-            <a:ext cx="7830000" cy="234000"/>
+            <a:ext cx="8856000" cy="234000"/>
           </a:xfrm>
           <a:prstGeom prst="rect">
             <a:avLst/>
@@ -3168,7 +3168,7 @@
                 <a:ea typeface="맑은 고딕"/>
                 <a:cs typeface="맑은 고딕"/>
               </a:rPr>
-              <a:t>■ 취급 상품 소량 1만 종 → 마트 전 상품 15만 종 확대, 연말 50여 개 점포 전개</a:t>
+              <a:t>취급 상품 소량 1만 종 → 마트 全 상품 15만 종 확대, 연말 50여 개 점포 전개</a:t>
             </a:r>
           </a:p>
         </p:txBody>
@@ -3380,7 +3380,7 @@
         </p:nvSpPr>
         <p:spPr>
           <a:xfrm>
-            <a:off x="424800" y="2113200"/>
+            <a:off x="424800" y="2106000"/>
             <a:ext cx="9057600" cy="180000"/>
           </a:xfrm>
           <a:prstGeom prst="rect">
@@ -3418,8 +3418,8 @@
           <p:nvPr/>
         </p:nvGraphicFramePr>
         <p:xfrm>
-          <a:off x="424800" y="2300400"/>
-          <a:ext cx="9057600" cy="1242000"/>
+          <a:off x="424800" y="2293200"/>
+          <a:ext cx="9057600" cy="1224000"/>
         </p:xfrm>
         <a:graphic>
           <a:graphicData uri="http://schemas.openxmlformats.org/drawingml/2006/table">
@@ -3432,7 +3432,7 @@
                 <a:gridCol w="3816000"/>
                 <a:gridCol w="4089600"/>
               </a:tblGrid>
-              <a:tr h="248400">
+              <a:tr h="244800">
                 <a:tc>
                   <a:txBody>
                     <a:bodyPr wrap="square"/>
@@ -3591,7 +3591,7 @@
                   </a:tcPr>
                 </a:tc>
               </a:tr>
-              <a:tr h="248400">
+              <a:tr h="244800">
                 <a:tc>
                   <a:txBody>
                     <a:bodyPr wrap="square"/>
@@ -3750,7 +3750,7 @@
                   </a:tcPr>
                 </a:tc>
               </a:tr>
-              <a:tr h="248400">
+              <a:tr h="244800">
                 <a:tc>
                   <a:txBody>
                     <a:bodyPr wrap="square"/>
@@ -3760,7 +3760,7 @@
                       <a:r>
                         <a:rPr sz="1000" b="1">
                           <a:solidFill>
-                            <a:srgbClr val="002060"/>
+                            <a:srgbClr val="000000"/>
                           </a:solidFill>
                           <a:latin typeface="맑은 고딕"/>
                           <a:ea typeface="맑은 고딕"/>
@@ -3792,7 +3792,7 @@
                       </a:solidFill>
                     </a:lnB>
                     <a:solidFill>
-                      <a:srgbClr val="DEEBF7"/>
+                      <a:srgbClr val="FFFFFF"/>
                     </a:solidFill>
                   </a:tcPr>
                 </a:tc>
@@ -3805,7 +3805,7 @@
                       <a:r>
                         <a:rPr sz="1000" b="1">
                           <a:solidFill>
-                            <a:srgbClr val="002060"/>
+                            <a:srgbClr val="000000"/>
                           </a:solidFill>
                           <a:latin typeface="맑은 고딕"/>
                           <a:ea typeface="맑은 고딕"/>
@@ -3816,7 +3816,7 @@
                       <a:r>
                         <a:rPr sz="900" b="1">
                           <a:solidFill>
-                            <a:srgbClr val="002060"/>
+                            <a:srgbClr val="000000"/>
                           </a:solidFill>
                           <a:latin typeface="맑은 고딕"/>
                           <a:ea typeface="맑은 고딕"/>
@@ -3848,7 +3848,7 @@
                       </a:solidFill>
                     </a:lnB>
                     <a:solidFill>
-                      <a:srgbClr val="DEEBF7"/>
+                      <a:srgbClr val="FFFFFF"/>
                     </a:solidFill>
                   </a:tcPr>
                 </a:tc>
@@ -3878,7 +3878,7 @@
                           <a:ea typeface="맑은 고딕"/>
                           <a:cs typeface="맑은 고딕"/>
                         </a:rPr>
-                        <a:t>(이마트 전 상품)</a:t>
+                        <a:t>(이마트 全 상품)</a:t>
                       </a:r>
                     </a:p>
                   </a:txBody>
@@ -3909,7 +3909,7 @@
                   </a:tcPr>
                 </a:tc>
               </a:tr>
-              <a:tr h="248400">
+              <a:tr h="244800">
                 <a:tc>
                   <a:txBody>
                     <a:bodyPr wrap="square"/>
@@ -4046,7 +4046,7 @@
                   </a:tcPr>
                 </a:tc>
               </a:tr>
-              <a:tr h="248400">
+              <a:tr h="244800">
                 <a:tc>
                   <a:txBody>
                     <a:bodyPr wrap="square"/>
@@ -4206,8 +4206,8 @@
         </p:nvSpPr>
         <p:spPr>
           <a:xfrm>
-            <a:off x="424800" y="3567600"/>
-            <a:ext cx="9057600" cy="162000"/>
+            <a:off x="424800" y="3531599"/>
+            <a:ext cx="9057600" cy="144000"/>
           </a:xfrm>
           <a:prstGeom prst="rect">
             <a:avLst/>
@@ -4259,286 +4259,13 @@
       </p:sp>
       <p:sp>
         <p:nvSpPr>
-          <p:cNvPr id="10" name="Rectangle 9"/>
-          <p:cNvSpPr/>
+          <p:cNvPr id="10" name="TextBox 9"/>
+          <p:cNvSpPr txBox="1"/>
           <p:nvPr/>
         </p:nvSpPr>
         <p:spPr>
           <a:xfrm>
-            <a:off x="424800" y="3794400"/>
-            <a:ext cx="9057600" cy="270000"/>
-          </a:xfrm>
-          <a:prstGeom prst="rect">
-            <a:avLst/>
-          </a:prstGeom>
-          <a:solidFill>
-            <a:srgbClr val="EAEEF6"/>
-          </a:solidFill>
-          <a:ln>
-            <a:noFill/>
-          </a:ln>
-          <a:effectLst/>
-        </p:spPr>
-        <p:style>
-          <a:lnRef idx="1">
-            <a:schemeClr val="accent1"/>
-          </a:lnRef>
-          <a:fillRef idx="3">
-            <a:schemeClr val="accent1"/>
-          </a:fillRef>
-          <a:effectRef idx="2">
-            <a:schemeClr val="accent1"/>
-          </a:effectRef>
-          <a:fontRef idx="minor">
-            <a:schemeClr val="lt1"/>
-          </a:fontRef>
-        </p:style>
-        <p:txBody>
-          <a:bodyPr rtlCol="0" anchor="ctr"/>
-          <a:lstStyle/>
-          <a:p>
-            <a:pPr algn="ctr"/>
-          </a:p>
-        </p:txBody>
-      </p:sp>
-      <p:sp>
-        <p:nvSpPr>
-          <p:cNvPr id="11" name="TextBox 10"/>
-          <p:cNvSpPr txBox="1"/>
-          <p:nvPr/>
-        </p:nvSpPr>
-        <p:spPr>
-          <a:xfrm>
-            <a:off x="424800" y="3794400"/>
-            <a:ext cx="9057600" cy="270000"/>
-          </a:xfrm>
-          <a:prstGeom prst="rect">
-            <a:avLst/>
-          </a:prstGeom>
-          <a:noFill/>
-        </p:spPr>
-        <p:txBody>
-          <a:bodyPr wrap="square" anchor="ctr" lIns="0" rIns="0" tIns="0" bIns="0">
-            <a:spAutoFit/>
-          </a:bodyPr>
-          <a:lstStyle/>
-          <a:p>
-            <a:pPr algn="ctr"/>
-            <a:r>
-              <a:rPr sz="1200" b="1">
-                <a:solidFill>
-                  <a:srgbClr val="000000"/>
-                </a:solidFill>
-                <a:latin typeface="맑은 고딕"/>
-                <a:ea typeface="맑은 고딕"/>
-                <a:cs typeface="맑은 고딕"/>
-              </a:rPr>
-              <a:t>③ 취급 상품 차별점 — 소량 퀵커머스에서 전 상품 장보기로</a:t>
-            </a:r>
-          </a:p>
-        </p:txBody>
-      </p:sp>
-      <p:sp>
-        <p:nvSpPr>
-          <p:cNvPr id="12" name="TextBox 11"/>
-          <p:cNvSpPr txBox="1"/>
-          <p:nvPr/>
-        </p:nvSpPr>
-        <p:spPr>
-          <a:xfrm>
-            <a:off x="622800" y="4129200"/>
-            <a:ext cx="8859600" cy="223200"/>
-          </a:xfrm>
-          <a:prstGeom prst="rect">
-            <a:avLst/>
-          </a:prstGeom>
-          <a:noFill/>
-        </p:spPr>
-        <p:txBody>
-          <a:bodyPr wrap="square" anchor="t" lIns="0" rIns="0" tIns="0" bIns="0">
-            <a:spAutoFit/>
-          </a:bodyPr>
-          <a:lstStyle/>
-          <a:p>
-            <a:pPr algn="l"/>
-            <a:r>
-              <a:rPr sz="1100" b="0">
-                <a:solidFill>
-                  <a:srgbClr val="000000"/>
-                </a:solidFill>
-                <a:latin typeface="맑은 고딕"/>
-                <a:ea typeface="맑은 고딕"/>
-                <a:cs typeface="맑은 고딕"/>
-              </a:rPr>
-              <a:t>- 마트 전 상품 대상 : 기존 퀵커머스 미취급 대용량·신선 카테고리 전면 개방</a:t>
-            </a:r>
-          </a:p>
-        </p:txBody>
-      </p:sp>
-      <p:sp>
-        <p:nvSpPr>
-          <p:cNvPr id="13" name="TextBox 12"/>
-          <p:cNvSpPr txBox="1"/>
-          <p:nvPr/>
-        </p:nvSpPr>
-        <p:spPr>
-          <a:xfrm>
-            <a:off x="622800" y="4352400"/>
-            <a:ext cx="8859600" cy="223200"/>
-          </a:xfrm>
-          <a:prstGeom prst="rect">
-            <a:avLst/>
-          </a:prstGeom>
-          <a:noFill/>
-        </p:spPr>
-        <p:txBody>
-          <a:bodyPr wrap="square" anchor="t" lIns="0" rIns="0" tIns="0" bIns="0">
-            <a:spAutoFit/>
-          </a:bodyPr>
-          <a:lstStyle/>
-          <a:p>
-            <a:pPr algn="l"/>
-            <a:r>
-              <a:rPr sz="1100" b="0">
-                <a:solidFill>
-                  <a:srgbClr val="000000"/>
-                </a:solidFill>
-                <a:latin typeface="맑은 고딕"/>
-                <a:ea typeface="맑은 고딕"/>
-                <a:cs typeface="맑은 고딕"/>
-              </a:rPr>
-              <a:t>- 신선식품 </a:t>
-            </a:r>
-            <a:r>
-              <a:rPr sz="1000" b="0">
-                <a:solidFill>
-                  <a:srgbClr val="000000"/>
-                </a:solidFill>
-                <a:latin typeface="맑은 고딕"/>
-                <a:ea typeface="맑은 고딕"/>
-                <a:cs typeface="맑은 고딕"/>
-              </a:rPr>
-              <a:t>(육류·생선·과일)</a:t>
-            </a:r>
-            <a:r>
-              <a:rPr sz="1100" b="0">
-                <a:solidFill>
-                  <a:srgbClr val="000000"/>
-                </a:solidFill>
-                <a:latin typeface="맑은 고딕"/>
-                <a:ea typeface="맑은 고딕"/>
-                <a:cs typeface="맑은 고딕"/>
-              </a:rPr>
-              <a:t> 중심 소구 — 매장 재고 직접 집품으로 선도 유지</a:t>
-            </a:r>
-          </a:p>
-        </p:txBody>
-      </p:sp>
-      <p:sp>
-        <p:nvSpPr>
-          <p:cNvPr id="14" name="TextBox 13"/>
-          <p:cNvSpPr txBox="1"/>
-          <p:nvPr/>
-        </p:nvSpPr>
-        <p:spPr>
-          <a:xfrm>
-            <a:off x="622800" y="4575600"/>
-            <a:ext cx="8859600" cy="223200"/>
-          </a:xfrm>
-          <a:prstGeom prst="rect">
-            <a:avLst/>
-          </a:prstGeom>
-          <a:noFill/>
-        </p:spPr>
-        <p:txBody>
-          <a:bodyPr wrap="square" anchor="t" lIns="0" rIns="0" tIns="0" bIns="0">
-            <a:spAutoFit/>
-          </a:bodyPr>
-          <a:lstStyle/>
-          <a:p>
-            <a:pPr algn="l"/>
-            <a:r>
-              <a:rPr sz="1100" b="0">
-                <a:solidFill>
-                  <a:srgbClr val="000000"/>
-                </a:solidFill>
-                <a:latin typeface="맑은 고딕"/>
-                <a:ea typeface="맑은 고딕"/>
-                <a:cs typeface="맑은 고딕"/>
-              </a:rPr>
-              <a:t>- 냉장·냉동 전용 보냉 파우치 포장 후 매장 즉시 출고 — 콜드체인 체계 적용</a:t>
-            </a:r>
-          </a:p>
-        </p:txBody>
-      </p:sp>
-      <p:sp>
-        <p:nvSpPr>
-          <p:cNvPr id="15" name="TextBox 14"/>
-          <p:cNvSpPr txBox="1"/>
-          <p:nvPr/>
-        </p:nvSpPr>
-        <p:spPr>
-          <a:xfrm>
-            <a:off x="622800" y="4798799"/>
-            <a:ext cx="8859600" cy="223200"/>
-          </a:xfrm>
-          <a:prstGeom prst="rect">
-            <a:avLst/>
-          </a:prstGeom>
-          <a:noFill/>
-        </p:spPr>
-        <p:txBody>
-          <a:bodyPr wrap="square" anchor="t" lIns="0" rIns="0" tIns="0" bIns="0">
-            <a:spAutoFit/>
-          </a:bodyPr>
-          <a:lstStyle/>
-          <a:p>
-            <a:pPr algn="l"/>
-            <a:r>
-              <a:rPr sz="1100" b="0">
-                <a:solidFill>
-                  <a:srgbClr val="000000"/>
-                </a:solidFill>
-                <a:latin typeface="맑은 고딕"/>
-                <a:ea typeface="맑은 고딕"/>
-                <a:cs typeface="맑은 고딕"/>
-              </a:rPr>
-              <a:t>- 기존 '바로퀵' 고객층 </a:t>
-            </a:r>
-            <a:r>
-              <a:rPr sz="1000" b="0">
-                <a:solidFill>
-                  <a:srgbClr val="000000"/>
-                </a:solidFill>
-                <a:latin typeface="맑은 고딕"/>
-                <a:ea typeface="맑은 고딕"/>
-                <a:cs typeface="맑은 고딕"/>
-              </a:rPr>
-              <a:t>(2030·소용량·그로서리 90%)</a:t>
-            </a:r>
-            <a:r>
-              <a:rPr sz="1100" b="0">
-                <a:solidFill>
-                  <a:srgbClr val="000000"/>
-                </a:solidFill>
-                <a:latin typeface="맑은 고딕"/>
-                <a:ea typeface="맑은 고딕"/>
-                <a:cs typeface="맑은 고딕"/>
-              </a:rPr>
-              <a:t>과 구분되는 본 장보기 수요 겨냥</a:t>
-            </a:r>
-          </a:p>
-        </p:txBody>
-      </p:sp>
-      <p:sp>
-        <p:nvSpPr>
-          <p:cNvPr id="16" name="TextBox 15"/>
-          <p:cNvSpPr txBox="1"/>
-          <p:nvPr/>
-        </p:nvSpPr>
-        <p:spPr>
-          <a:xfrm>
-            <a:off x="424800" y="5072400"/>
+            <a:off x="424800" y="3704399"/>
             <a:ext cx="9057600" cy="180000"/>
           </a:xfrm>
           <a:prstGeom prst="rect">
@@ -4562,6 +4289,235 @@
                 <a:ea typeface="맑은 고딕"/>
                 <a:cs typeface="맑은 고딕"/>
               </a:rPr>
+              <a:t>• ③ 취급 상품 차별점 — 소량 퀵커머스에서 全 상품 장보기로</a:t>
+            </a:r>
+          </a:p>
+        </p:txBody>
+      </p:sp>
+      <p:sp>
+        <p:nvSpPr>
+          <p:cNvPr id="11" name="TextBox 10"/>
+          <p:cNvSpPr txBox="1"/>
+          <p:nvPr/>
+        </p:nvSpPr>
+        <p:spPr>
+          <a:xfrm>
+            <a:off x="622800" y="3898799"/>
+            <a:ext cx="8859600" cy="201600"/>
+          </a:xfrm>
+          <a:prstGeom prst="rect">
+            <a:avLst/>
+          </a:prstGeom>
+          <a:noFill/>
+        </p:spPr>
+        <p:txBody>
+          <a:bodyPr wrap="square" anchor="t" lIns="0" rIns="0" tIns="0" bIns="0">
+            <a:spAutoFit/>
+          </a:bodyPr>
+          <a:lstStyle/>
+          <a:p>
+            <a:pPr algn="l"/>
+            <a:r>
+              <a:rPr sz="1100" b="0">
+                <a:solidFill>
+                  <a:srgbClr val="000000"/>
+                </a:solidFill>
+                <a:latin typeface="맑은 고딕"/>
+                <a:ea typeface="맑은 고딕"/>
+                <a:cs typeface="맑은 고딕"/>
+              </a:rPr>
+              <a:t>- 마트 全 상품 대상 : 기존 퀵커머스 미취급 대용량·신선 카테고리 전면 개방</a:t>
+            </a:r>
+          </a:p>
+        </p:txBody>
+      </p:sp>
+      <p:sp>
+        <p:nvSpPr>
+          <p:cNvPr id="12" name="TextBox 11"/>
+          <p:cNvSpPr txBox="1"/>
+          <p:nvPr/>
+        </p:nvSpPr>
+        <p:spPr>
+          <a:xfrm>
+            <a:off x="622800" y="4100399"/>
+            <a:ext cx="8859600" cy="201600"/>
+          </a:xfrm>
+          <a:prstGeom prst="rect">
+            <a:avLst/>
+          </a:prstGeom>
+          <a:noFill/>
+        </p:spPr>
+        <p:txBody>
+          <a:bodyPr wrap="square" anchor="t" lIns="0" rIns="0" tIns="0" bIns="0">
+            <a:spAutoFit/>
+          </a:bodyPr>
+          <a:lstStyle/>
+          <a:p>
+            <a:pPr algn="l"/>
+            <a:r>
+              <a:rPr sz="1100" b="0">
+                <a:solidFill>
+                  <a:srgbClr val="000000"/>
+                </a:solidFill>
+                <a:latin typeface="맑은 고딕"/>
+                <a:ea typeface="맑은 고딕"/>
+                <a:cs typeface="맑은 고딕"/>
+              </a:rPr>
+              <a:t>- 신선식품 </a:t>
+            </a:r>
+            <a:r>
+              <a:rPr sz="1000" b="0">
+                <a:solidFill>
+                  <a:srgbClr val="000000"/>
+                </a:solidFill>
+                <a:latin typeface="맑은 고딕"/>
+                <a:ea typeface="맑은 고딕"/>
+                <a:cs typeface="맑은 고딕"/>
+              </a:rPr>
+              <a:t>(육류·생선·과일)</a:t>
+            </a:r>
+            <a:r>
+              <a:rPr sz="1100" b="0">
+                <a:solidFill>
+                  <a:srgbClr val="000000"/>
+                </a:solidFill>
+                <a:latin typeface="맑은 고딕"/>
+                <a:ea typeface="맑은 고딕"/>
+                <a:cs typeface="맑은 고딕"/>
+              </a:rPr>
+              <a:t> 중심 소구 — 매장 재고 직접 집품으로 선도 유지</a:t>
+            </a:r>
+          </a:p>
+        </p:txBody>
+      </p:sp>
+      <p:sp>
+        <p:nvSpPr>
+          <p:cNvPr id="13" name="TextBox 12"/>
+          <p:cNvSpPr txBox="1"/>
+          <p:nvPr/>
+        </p:nvSpPr>
+        <p:spPr>
+          <a:xfrm>
+            <a:off x="622800" y="4302000"/>
+            <a:ext cx="8859600" cy="201600"/>
+          </a:xfrm>
+          <a:prstGeom prst="rect">
+            <a:avLst/>
+          </a:prstGeom>
+          <a:noFill/>
+        </p:spPr>
+        <p:txBody>
+          <a:bodyPr wrap="square" anchor="t" lIns="0" rIns="0" tIns="0" bIns="0">
+            <a:spAutoFit/>
+          </a:bodyPr>
+          <a:lstStyle/>
+          <a:p>
+            <a:pPr algn="l"/>
+            <a:r>
+              <a:rPr sz="1100" b="0">
+                <a:solidFill>
+                  <a:srgbClr val="000000"/>
+                </a:solidFill>
+                <a:latin typeface="맑은 고딕"/>
+                <a:ea typeface="맑은 고딕"/>
+                <a:cs typeface="맑은 고딕"/>
+              </a:rPr>
+              <a:t>- 냉장·냉동 전용 보냉 파우치 포장 후 매장 즉시 출고 — 콜드체인 체계 적용</a:t>
+            </a:r>
+          </a:p>
+        </p:txBody>
+      </p:sp>
+      <p:sp>
+        <p:nvSpPr>
+          <p:cNvPr id="14" name="TextBox 13"/>
+          <p:cNvSpPr txBox="1"/>
+          <p:nvPr/>
+        </p:nvSpPr>
+        <p:spPr>
+          <a:xfrm>
+            <a:off x="622800" y="4503600"/>
+            <a:ext cx="8859600" cy="201600"/>
+          </a:xfrm>
+          <a:prstGeom prst="rect">
+            <a:avLst/>
+          </a:prstGeom>
+          <a:noFill/>
+        </p:spPr>
+        <p:txBody>
+          <a:bodyPr wrap="square" anchor="t" lIns="0" rIns="0" tIns="0" bIns="0">
+            <a:spAutoFit/>
+          </a:bodyPr>
+          <a:lstStyle/>
+          <a:p>
+            <a:pPr algn="l"/>
+            <a:r>
+              <a:rPr sz="1100" b="0">
+                <a:solidFill>
+                  <a:srgbClr val="000000"/>
+                </a:solidFill>
+                <a:latin typeface="맑은 고딕"/>
+                <a:ea typeface="맑은 고딕"/>
+                <a:cs typeface="맑은 고딕"/>
+              </a:rPr>
+              <a:t>- 기존 '바로퀵' 고객층 </a:t>
+            </a:r>
+            <a:r>
+              <a:rPr sz="1000" b="0">
+                <a:solidFill>
+                  <a:srgbClr val="000000"/>
+                </a:solidFill>
+                <a:latin typeface="맑은 고딕"/>
+                <a:ea typeface="맑은 고딕"/>
+                <a:cs typeface="맑은 고딕"/>
+              </a:rPr>
+              <a:t>(2030·소용량·그로서리 90%)</a:t>
+            </a:r>
+            <a:r>
+              <a:rPr sz="1100" b="0">
+                <a:solidFill>
+                  <a:srgbClr val="000000"/>
+                </a:solidFill>
+                <a:latin typeface="맑은 고딕"/>
+                <a:ea typeface="맑은 고딕"/>
+                <a:cs typeface="맑은 고딕"/>
+              </a:rPr>
+              <a:t>과 구분되는 본 장보기 수요 겨냥</a:t>
+            </a:r>
+          </a:p>
+        </p:txBody>
+      </p:sp>
+      <p:sp>
+        <p:nvSpPr>
+          <p:cNvPr id="15" name="TextBox 14"/>
+          <p:cNvSpPr txBox="1"/>
+          <p:nvPr/>
+        </p:nvSpPr>
+        <p:spPr>
+          <a:xfrm>
+            <a:off x="424800" y="4741200"/>
+            <a:ext cx="9057600" cy="180000"/>
+          </a:xfrm>
+          <a:prstGeom prst="rect">
+            <a:avLst/>
+          </a:prstGeom>
+          <a:noFill/>
+        </p:spPr>
+        <p:txBody>
+          <a:bodyPr wrap="square" anchor="t" lIns="0" rIns="0" tIns="0" bIns="0">
+            <a:spAutoFit/>
+          </a:bodyPr>
+          <a:lstStyle/>
+          <a:p>
+            <a:pPr algn="l"/>
+            <a:r>
+              <a:rPr sz="1200" b="1">
+                <a:solidFill>
+                  <a:srgbClr val="000000"/>
+                </a:solidFill>
+                <a:latin typeface="맑은 고딕"/>
+                <a:ea typeface="맑은 고딕"/>
+                <a:cs typeface="맑은 고딕"/>
+              </a:rPr>
               <a:t>• ④ 확산 로드맵</a:t>
             </a:r>
           </a:p>
@@ -4569,13 +4525,13 @@
       </p:sp>
       <p:cxnSp>
         <p:nvCxnSpPr>
-          <p:cNvPr id="17" name="Connector 16"/>
+          <p:cNvPr id="16" name="Connector 15"/>
           <p:cNvCxnSpPr/>
           <p:nvPr/>
         </p:nvCxnSpPr>
         <p:spPr>
           <a:xfrm>
-            <a:off x="424800" y="5454000"/>
+            <a:off x="424800" y="5122799"/>
             <a:ext cx="9057600" cy="0"/>
           </a:xfrm>
           <a:prstGeom prst="bentConnector3">
@@ -4607,13 +4563,13 @@
       </p:cxnSp>
       <p:sp>
         <p:nvSpPr>
-          <p:cNvPr id="18" name="Oval 17"/>
+          <p:cNvPr id="17" name="Oval 16"/>
           <p:cNvSpPr/>
           <p:nvPr/>
         </p:nvSpPr>
         <p:spPr>
           <a:xfrm>
-            <a:off x="1506600" y="5403600"/>
+            <a:off x="1506600" y="5072399"/>
             <a:ext cx="100800" cy="100800"/>
           </a:xfrm>
           <a:prstGeom prst="ellipse">
@@ -4653,14 +4609,14 @@
       </p:sp>
       <p:sp>
         <p:nvSpPr>
-          <p:cNvPr id="19" name="TextBox 18"/>
+          <p:cNvPr id="18" name="TextBox 17"/>
           <p:cNvSpPr txBox="1"/>
           <p:nvPr/>
         </p:nvSpPr>
         <p:spPr>
           <a:xfrm>
-            <a:off x="424800" y="5259600"/>
-            <a:ext cx="2264400" cy="151200"/>
+            <a:off x="424800" y="4935600"/>
+            <a:ext cx="2264400" cy="144000"/>
           </a:xfrm>
           <a:prstGeom prst="rect">
             <a:avLst/>
@@ -4675,7 +4631,7 @@
           <a:p>
             <a:pPr algn="ctr"/>
             <a:r>
-              <a:rPr sz="1100" b="1">
+              <a:rPr sz="1000" b="1">
                 <a:solidFill>
                   <a:srgbClr val="000000"/>
                 </a:solidFill>
@@ -4690,14 +4646,14 @@
       </p:sp>
       <p:sp>
         <p:nvSpPr>
-          <p:cNvPr id="20" name="TextBox 19"/>
+          <p:cNvPr id="19" name="TextBox 18"/>
           <p:cNvSpPr txBox="1"/>
           <p:nvPr/>
         </p:nvSpPr>
         <p:spPr>
           <a:xfrm>
-            <a:off x="424800" y="5518800"/>
-            <a:ext cx="2264400" cy="342000"/>
+            <a:off x="424800" y="5187599"/>
+            <a:ext cx="2264400" cy="187200"/>
           </a:xfrm>
           <a:prstGeom prst="rect">
             <a:avLst/>
@@ -4712,7 +4668,7 @@
           <a:p>
             <a:pPr algn="ctr"/>
             <a:r>
-              <a:rPr sz="1100" b="0">
+              <a:rPr sz="1000" b="0">
                 <a:solidFill>
                   <a:srgbClr val="000000"/>
                 </a:solidFill>
@@ -4720,34 +4676,20 @@
                 <a:ea typeface="맑은 고딕"/>
                 <a:cs typeface="맑은 고딕"/>
               </a:rPr>
-              <a:t>양재·하남점</a:t>
-            </a:r>
-          </a:p>
-          <a:p>
-            <a:pPr algn="ctr"/>
-            <a:r>
-              <a:rPr sz="1100" b="0">
-                <a:solidFill>
-                  <a:srgbClr val="000000"/>
-                </a:solidFill>
-                <a:latin typeface="맑은 고딕"/>
-                <a:ea typeface="맑은 고딕"/>
-                <a:cs typeface="맑은 고딕"/>
-              </a:rPr>
-              <a:t>시범 도입</a:t>
-            </a:r>
-          </a:p>
-        </p:txBody>
-      </p:sp>
-      <p:sp>
-        <p:nvSpPr>
-          <p:cNvPr id="21" name="Oval 20"/>
+              <a:t>양재·하남점 시범</a:t>
+            </a:r>
+          </a:p>
+        </p:txBody>
+      </p:sp>
+      <p:sp>
+        <p:nvSpPr>
+          <p:cNvPr id="20" name="Oval 19"/>
           <p:cNvSpPr/>
           <p:nvPr/>
         </p:nvSpPr>
         <p:spPr>
           <a:xfrm>
-            <a:off x="3771000" y="5403600"/>
+            <a:off x="3771000" y="5072399"/>
             <a:ext cx="100800" cy="100800"/>
           </a:xfrm>
           <a:prstGeom prst="ellipse">
@@ -4787,14 +4729,14 @@
       </p:sp>
       <p:sp>
         <p:nvSpPr>
-          <p:cNvPr id="22" name="TextBox 21"/>
+          <p:cNvPr id="21" name="TextBox 20"/>
           <p:cNvSpPr txBox="1"/>
           <p:nvPr/>
         </p:nvSpPr>
         <p:spPr>
           <a:xfrm>
-            <a:off x="2689200" y="5259600"/>
-            <a:ext cx="2264400" cy="151200"/>
+            <a:off x="2689200" y="4935600"/>
+            <a:ext cx="2264400" cy="144000"/>
           </a:xfrm>
           <a:prstGeom prst="rect">
             <a:avLst/>
@@ -4809,7 +4751,7 @@
           <a:p>
             <a:pPr algn="ctr"/>
             <a:r>
-              <a:rPr sz="1100" b="1">
+              <a:rPr sz="1000" b="1">
                 <a:solidFill>
                   <a:srgbClr val="000000"/>
                 </a:solidFill>
@@ -4824,14 +4766,14 @@
       </p:sp>
       <p:sp>
         <p:nvSpPr>
-          <p:cNvPr id="23" name="TextBox 22"/>
+          <p:cNvPr id="22" name="TextBox 21"/>
           <p:cNvSpPr txBox="1"/>
           <p:nvPr/>
         </p:nvSpPr>
         <p:spPr>
           <a:xfrm>
-            <a:off x="2689200" y="5518800"/>
-            <a:ext cx="2264400" cy="342000"/>
+            <a:off x="2689200" y="5187599"/>
+            <a:ext cx="2264400" cy="187200"/>
           </a:xfrm>
           <a:prstGeom prst="rect">
             <a:avLst/>
@@ -4846,7 +4788,7 @@
           <a:p>
             <a:pPr algn="ctr"/>
             <a:r>
-              <a:rPr sz="1100" b="0">
+              <a:rPr sz="1000" b="0">
                 <a:solidFill>
                   <a:srgbClr val="000000"/>
                 </a:solidFill>
@@ -4854,13 +4796,10 @@
                 <a:ea typeface="맑은 고딕"/>
                 <a:cs typeface="맑은 고딕"/>
               </a:rPr>
-              <a:t>서울권 확대</a:t>
-            </a:r>
-          </a:p>
-          <a:p>
-            <a:pPr algn="ctr"/>
-            <a:r>
-              <a:rPr sz="1000" b="0">
+              <a:t>서울권 확대 </a:t>
+            </a:r>
+            <a:r>
+              <a:rPr sz="900" b="0">
                 <a:solidFill>
                   <a:srgbClr val="000000"/>
                 </a:solidFill>
@@ -4875,13 +4814,13 @@
       </p:sp>
       <p:sp>
         <p:nvSpPr>
-          <p:cNvPr id="24" name="Oval 23"/>
+          <p:cNvPr id="23" name="Oval 22"/>
           <p:cNvSpPr/>
           <p:nvPr/>
         </p:nvSpPr>
         <p:spPr>
           <a:xfrm>
-            <a:off x="6035400" y="5403600"/>
+            <a:off x="6035400" y="5072399"/>
             <a:ext cx="100800" cy="100800"/>
           </a:xfrm>
           <a:prstGeom prst="ellipse">
@@ -4921,14 +4860,14 @@
       </p:sp>
       <p:sp>
         <p:nvSpPr>
-          <p:cNvPr id="25" name="TextBox 24"/>
+          <p:cNvPr id="24" name="TextBox 23"/>
           <p:cNvSpPr txBox="1"/>
           <p:nvPr/>
         </p:nvSpPr>
         <p:spPr>
           <a:xfrm>
-            <a:off x="4953600" y="5259600"/>
-            <a:ext cx="2264400" cy="151200"/>
+            <a:off x="4953600" y="4935600"/>
+            <a:ext cx="2264400" cy="144000"/>
           </a:xfrm>
           <a:prstGeom prst="rect">
             <a:avLst/>
@@ -4943,7 +4882,7 @@
           <a:p>
             <a:pPr algn="ctr"/>
             <a:r>
-              <a:rPr sz="1100" b="1">
+              <a:rPr sz="1000" b="1">
                 <a:solidFill>
                   <a:srgbClr val="000000"/>
                 </a:solidFill>
@@ -4958,14 +4897,14 @@
       </p:sp>
       <p:sp>
         <p:nvSpPr>
-          <p:cNvPr id="26" name="TextBox 25"/>
+          <p:cNvPr id="25" name="TextBox 24"/>
           <p:cNvSpPr txBox="1"/>
           <p:nvPr/>
         </p:nvSpPr>
         <p:spPr>
           <a:xfrm>
-            <a:off x="4953600" y="5518800"/>
-            <a:ext cx="2264400" cy="342000"/>
+            <a:off x="4953600" y="5187599"/>
+            <a:ext cx="2264400" cy="187200"/>
           </a:xfrm>
           <a:prstGeom prst="rect">
             <a:avLst/>
@@ -4980,7 +4919,7 @@
           <a:p>
             <a:pPr algn="ctr"/>
             <a:r>
-              <a:rPr sz="1100" b="0">
+              <a:rPr sz="1000" b="0">
                 <a:solidFill>
                   <a:srgbClr val="000000"/>
                 </a:solidFill>
@@ -4995,13 +4934,13 @@
       </p:sp>
       <p:sp>
         <p:nvSpPr>
-          <p:cNvPr id="27" name="Oval 26"/>
+          <p:cNvPr id="26" name="Oval 25"/>
           <p:cNvSpPr/>
           <p:nvPr/>
         </p:nvSpPr>
         <p:spPr>
           <a:xfrm>
-            <a:off x="8299800" y="5403600"/>
+            <a:off x="8299800" y="5072399"/>
             <a:ext cx="100800" cy="100800"/>
           </a:xfrm>
           <a:prstGeom prst="ellipse">
@@ -5041,14 +4980,14 @@
       </p:sp>
       <p:sp>
         <p:nvSpPr>
-          <p:cNvPr id="28" name="TextBox 27"/>
+          <p:cNvPr id="27" name="TextBox 26"/>
           <p:cNvSpPr txBox="1"/>
           <p:nvPr/>
         </p:nvSpPr>
         <p:spPr>
           <a:xfrm>
-            <a:off x="7218000" y="5259600"/>
-            <a:ext cx="2264400" cy="151200"/>
+            <a:off x="7218000" y="4935600"/>
+            <a:ext cx="2264400" cy="144000"/>
           </a:xfrm>
           <a:prstGeom prst="rect">
             <a:avLst/>
@@ -5063,7 +5002,7 @@
           <a:p>
             <a:pPr algn="ctr"/>
             <a:r>
-              <a:rPr sz="1100" b="1">
+              <a:rPr sz="1000" b="1">
                 <a:solidFill>
                   <a:srgbClr val="000000"/>
                 </a:solidFill>
@@ -5078,14 +5017,14 @@
       </p:sp>
       <p:sp>
         <p:nvSpPr>
-          <p:cNvPr id="29" name="TextBox 28"/>
+          <p:cNvPr id="28" name="TextBox 27"/>
           <p:cNvSpPr txBox="1"/>
           <p:nvPr/>
         </p:nvSpPr>
         <p:spPr>
           <a:xfrm>
-            <a:off x="7218000" y="5518800"/>
-            <a:ext cx="2264400" cy="342000"/>
+            <a:off x="7218000" y="5187599"/>
+            <a:ext cx="2264400" cy="187200"/>
           </a:xfrm>
           <a:prstGeom prst="rect">
             <a:avLst/>
@@ -5100,7 +5039,7 @@
           <a:p>
             <a:pPr algn="ctr"/>
             <a:r>
-              <a:rPr sz="1100" b="0">
+              <a:rPr sz="1000" b="0">
                 <a:solidFill>
                   <a:srgbClr val="000000"/>
                 </a:solidFill>
@@ -5108,35 +5047,21 @@
                 <a:ea typeface="맑은 고딕"/>
                 <a:cs typeface="맑은 고딕"/>
               </a:rPr>
-              <a:t>50여 개</a:t>
-            </a:r>
-          </a:p>
-          <a:p>
-            <a:pPr algn="ctr"/>
-            <a:r>
-              <a:rPr sz="1100" b="0">
-                <a:solidFill>
-                  <a:srgbClr val="000000"/>
-                </a:solidFill>
-                <a:latin typeface="맑은 고딕"/>
-                <a:ea typeface="맑은 고딕"/>
-                <a:cs typeface="맑은 고딕"/>
-              </a:rPr>
-              <a:t>점포 운영</a:t>
-            </a:r>
-          </a:p>
-        </p:txBody>
-      </p:sp>
-      <p:sp>
-        <p:nvSpPr>
-          <p:cNvPr id="30" name="Rectangle 29"/>
+              <a:t>50여 점포 운영</a:t>
+            </a:r>
+          </a:p>
+        </p:txBody>
+      </p:sp>
+      <p:sp>
+        <p:nvSpPr>
+          <p:cNvPr id="29" name="Rectangle 28"/>
           <p:cNvSpPr/>
           <p:nvPr/>
         </p:nvSpPr>
         <p:spPr>
           <a:xfrm>
-            <a:off x="424800" y="5813999"/>
-            <a:ext cx="9057600" cy="342000"/>
+            <a:off x="424800" y="5453999"/>
+            <a:ext cx="9057600" cy="306000"/>
           </a:xfrm>
           <a:prstGeom prst="rect">
             <a:avLst/>
@@ -5173,14 +5098,14 @@
       </p:sp>
       <p:sp>
         <p:nvSpPr>
-          <p:cNvPr id="31" name="TextBox 30"/>
+          <p:cNvPr id="30" name="TextBox 29"/>
           <p:cNvSpPr txBox="1"/>
           <p:nvPr/>
         </p:nvSpPr>
         <p:spPr>
           <a:xfrm>
-            <a:off x="424800" y="5813999"/>
-            <a:ext cx="9057600" cy="342000"/>
+            <a:off x="424800" y="5453999"/>
+            <a:ext cx="9057600" cy="306000"/>
           </a:xfrm>
           <a:prstGeom prst="rect">
             <a:avLst/>
@@ -5203,7 +5128,7 @@
                 <a:ea typeface="맑은 고딕"/>
                 <a:cs typeface="맑은 고딕"/>
               </a:rPr>
-              <a:t>소량 즉시배송 → 전 상품 장보기 배송 전환, 점포 </a:t>
+              <a:t>소량 즉시배송 → 全 상품 장보기 배송 전환, 점포 </a:t>
             </a:r>
             <a:r>
               <a:rPr sz="1000" b="1">
@@ -5232,13 +5157,13 @@
       </p:sp>
       <p:sp>
         <p:nvSpPr>
-          <p:cNvPr id="32" name="TextBox 31"/>
+          <p:cNvPr id="31" name="TextBox 30"/>
           <p:cNvSpPr txBox="1"/>
           <p:nvPr/>
         </p:nvSpPr>
         <p:spPr>
           <a:xfrm>
-            <a:off x="424800" y="6235199"/>
+            <a:off x="424800" y="5832000"/>
             <a:ext cx="9057600" cy="180000"/>
           </a:xfrm>
           <a:prstGeom prst="rect">

--- a/reports/ssg-quickcommerce-onepager.pptx
+++ b/reports/ssg-quickcommerce-onepager.pptx
@@ -3168,7 +3168,29 @@
                 <a:ea typeface="맑은 고딕"/>
                 <a:cs typeface="맑은 고딕"/>
               </a:rPr>
-              <a:t>취급 상품 소량 1만 종 → 마트 全 상품 15만 종 확대, 연말 50여 개 점포 전개</a:t>
+              <a:t>취급 상품 소량 1만 종 → 마트 全 상품 15만 종 확대 — 점포 </a:t>
+            </a:r>
+            <a:r>
+              <a:rPr sz="1300" b="1">
+                <a:solidFill>
+                  <a:srgbClr val="000000"/>
+                </a:solidFill>
+                <a:latin typeface="맑은 고딕"/>
+                <a:ea typeface="맑은 고딕"/>
+                <a:cs typeface="맑은 고딕"/>
+              </a:rPr>
+              <a:t>(PP센터)</a:t>
+            </a:r>
+            <a:r>
+              <a:rPr sz="1400" b="1">
+                <a:solidFill>
+                  <a:srgbClr val="000000"/>
+                </a:solidFill>
+                <a:latin typeface="맑은 고딕"/>
+                <a:ea typeface="맑은 고딕"/>
+                <a:cs typeface="맑은 고딕"/>
+              </a:rPr>
+              <a:t> 온라인 가동률 제고 목적</a:t>
             </a:r>
           </a:p>
         </p:txBody>
@@ -4265,8 +4287,8 @@
         </p:nvSpPr>
         <p:spPr>
           <a:xfrm>
-            <a:off x="424800" y="3704399"/>
-            <a:ext cx="9057600" cy="180000"/>
+            <a:off x="424800" y="3729600"/>
+            <a:ext cx="9057600" cy="194400"/>
           </a:xfrm>
           <a:prstGeom prst="rect">
             <a:avLst/>
@@ -4302,8 +4324,8 @@
         </p:nvSpPr>
         <p:spPr>
           <a:xfrm>
-            <a:off x="622800" y="3898799"/>
-            <a:ext cx="8859600" cy="201600"/>
+            <a:off x="622800" y="3959999"/>
+            <a:ext cx="8859600" cy="251999"/>
           </a:xfrm>
           <a:prstGeom prst="rect">
             <a:avLst/>
@@ -4339,8 +4361,8 @@
         </p:nvSpPr>
         <p:spPr>
           <a:xfrm>
-            <a:off x="622800" y="4100399"/>
-            <a:ext cx="8859600" cy="201600"/>
+            <a:off x="622800" y="4211999"/>
+            <a:ext cx="8859600" cy="251999"/>
           </a:xfrm>
           <a:prstGeom prst="rect">
             <a:avLst/>
@@ -4398,8 +4420,8 @@
         </p:nvSpPr>
         <p:spPr>
           <a:xfrm>
-            <a:off x="622800" y="4302000"/>
-            <a:ext cx="8859600" cy="201600"/>
+            <a:off x="622800" y="4463999"/>
+            <a:ext cx="8859600" cy="251999"/>
           </a:xfrm>
           <a:prstGeom prst="rect">
             <a:avLst/>
@@ -4435,8 +4457,8 @@
         </p:nvSpPr>
         <p:spPr>
           <a:xfrm>
-            <a:off x="622800" y="4503600"/>
-            <a:ext cx="8859600" cy="201600"/>
+            <a:off x="622800" y="4715999"/>
+            <a:ext cx="8859600" cy="251999"/>
           </a:xfrm>
           <a:prstGeom prst="rect">
             <a:avLst/>
@@ -4494,8 +4516,8 @@
         </p:nvSpPr>
         <p:spPr>
           <a:xfrm>
-            <a:off x="424800" y="4741200"/>
-            <a:ext cx="9057600" cy="180000"/>
+            <a:off x="424800" y="5054399"/>
+            <a:ext cx="9057600" cy="194400"/>
           </a:xfrm>
           <a:prstGeom prst="rect">
             <a:avLst/>
@@ -4531,7 +4553,7 @@
         </p:nvCxnSpPr>
         <p:spPr>
           <a:xfrm>
-            <a:off x="424800" y="5122799"/>
+            <a:off x="424800" y="5511599"/>
             <a:ext cx="9057600" cy="0"/>
           </a:xfrm>
           <a:prstGeom prst="bentConnector3">
@@ -4569,7 +4591,7 @@
         </p:nvSpPr>
         <p:spPr>
           <a:xfrm>
-            <a:off x="1506600" y="5072399"/>
+            <a:off x="1506600" y="5461199"/>
             <a:ext cx="100800" cy="100800"/>
           </a:xfrm>
           <a:prstGeom prst="ellipse">
@@ -4615,8 +4637,8 @@
         </p:nvSpPr>
         <p:spPr>
           <a:xfrm>
-            <a:off x="424800" y="4935600"/>
-            <a:ext cx="2264400" cy="144000"/>
+            <a:off x="424800" y="5306399"/>
+            <a:ext cx="2264400" cy="162000"/>
           </a:xfrm>
           <a:prstGeom prst="rect">
             <a:avLst/>
@@ -4652,8 +4674,8 @@
         </p:nvSpPr>
         <p:spPr>
           <a:xfrm>
-            <a:off x="424800" y="5187599"/>
-            <a:ext cx="2264400" cy="187200"/>
+            <a:off x="424800" y="5576399"/>
+            <a:ext cx="2264400" cy="198000"/>
           </a:xfrm>
           <a:prstGeom prst="rect">
             <a:avLst/>
@@ -4689,7 +4711,7 @@
         </p:nvSpPr>
         <p:spPr>
           <a:xfrm>
-            <a:off x="3771000" y="5072399"/>
+            <a:off x="3771000" y="5461199"/>
             <a:ext cx="100800" cy="100800"/>
           </a:xfrm>
           <a:prstGeom prst="ellipse">
@@ -4735,8 +4757,8 @@
         </p:nvSpPr>
         <p:spPr>
           <a:xfrm>
-            <a:off x="2689200" y="4935600"/>
-            <a:ext cx="2264400" cy="144000"/>
+            <a:off x="2689200" y="5306399"/>
+            <a:ext cx="2264400" cy="162000"/>
           </a:xfrm>
           <a:prstGeom prst="rect">
             <a:avLst/>
@@ -4772,8 +4794,8 @@
         </p:nvSpPr>
         <p:spPr>
           <a:xfrm>
-            <a:off x="2689200" y="5187599"/>
-            <a:ext cx="2264400" cy="187200"/>
+            <a:off x="2689200" y="5576399"/>
+            <a:ext cx="2264400" cy="198000"/>
           </a:xfrm>
           <a:prstGeom prst="rect">
             <a:avLst/>
@@ -4820,7 +4842,7 @@
         </p:nvSpPr>
         <p:spPr>
           <a:xfrm>
-            <a:off x="6035400" y="5072399"/>
+            <a:off x="6035400" y="5461199"/>
             <a:ext cx="100800" cy="100800"/>
           </a:xfrm>
           <a:prstGeom prst="ellipse">
@@ -4866,8 +4888,8 @@
         </p:nvSpPr>
         <p:spPr>
           <a:xfrm>
-            <a:off x="4953600" y="4935600"/>
-            <a:ext cx="2264400" cy="144000"/>
+            <a:off x="4953600" y="5306399"/>
+            <a:ext cx="2264400" cy="162000"/>
           </a:xfrm>
           <a:prstGeom prst="rect">
             <a:avLst/>
@@ -4903,8 +4925,8 @@
         </p:nvSpPr>
         <p:spPr>
           <a:xfrm>
-            <a:off x="4953600" y="5187599"/>
-            <a:ext cx="2264400" cy="187200"/>
+            <a:off x="4953600" y="5576399"/>
+            <a:ext cx="2264400" cy="198000"/>
           </a:xfrm>
           <a:prstGeom prst="rect">
             <a:avLst/>
@@ -4940,7 +4962,7 @@
         </p:nvSpPr>
         <p:spPr>
           <a:xfrm>
-            <a:off x="8299800" y="5072399"/>
+            <a:off x="8299800" y="5461199"/>
             <a:ext cx="100800" cy="100800"/>
           </a:xfrm>
           <a:prstGeom prst="ellipse">
@@ -4986,8 +5008,8 @@
         </p:nvSpPr>
         <p:spPr>
           <a:xfrm>
-            <a:off x="7218000" y="4935600"/>
-            <a:ext cx="2264400" cy="144000"/>
+            <a:off x="7218000" y="5306399"/>
+            <a:ext cx="2264400" cy="162000"/>
           </a:xfrm>
           <a:prstGeom prst="rect">
             <a:avLst/>
@@ -5023,8 +5045,8 @@
         </p:nvSpPr>
         <p:spPr>
           <a:xfrm>
-            <a:off x="7218000" y="5187599"/>
-            <a:ext cx="2264400" cy="187200"/>
+            <a:off x="7218000" y="5576399"/>
+            <a:ext cx="2264400" cy="198000"/>
           </a:xfrm>
           <a:prstGeom prst="rect">
             <a:avLst/>
@@ -5054,116 +5076,13 @@
       </p:sp>
       <p:sp>
         <p:nvSpPr>
-          <p:cNvPr id="29" name="Rectangle 28"/>
-          <p:cNvSpPr/>
+          <p:cNvPr id="29" name="TextBox 28"/>
+          <p:cNvSpPr txBox="1"/>
           <p:nvPr/>
         </p:nvSpPr>
         <p:spPr>
           <a:xfrm>
-            <a:off x="424800" y="5453999"/>
-            <a:ext cx="9057600" cy="306000"/>
-          </a:xfrm>
-          <a:prstGeom prst="rect">
-            <a:avLst/>
-          </a:prstGeom>
-          <a:solidFill>
-            <a:srgbClr val="000066"/>
-          </a:solidFill>
-          <a:ln>
-            <a:noFill/>
-          </a:ln>
-          <a:effectLst/>
-        </p:spPr>
-        <p:style>
-          <a:lnRef idx="1">
-            <a:schemeClr val="accent1"/>
-          </a:lnRef>
-          <a:fillRef idx="3">
-            <a:schemeClr val="accent1"/>
-          </a:fillRef>
-          <a:effectRef idx="2">
-            <a:schemeClr val="accent1"/>
-          </a:effectRef>
-          <a:fontRef idx="minor">
-            <a:schemeClr val="lt1"/>
-          </a:fontRef>
-        </p:style>
-        <p:txBody>
-          <a:bodyPr rtlCol="0" anchor="ctr"/>
-          <a:lstStyle/>
-          <a:p>
-            <a:pPr algn="ctr"/>
-          </a:p>
-        </p:txBody>
-      </p:sp>
-      <p:sp>
-        <p:nvSpPr>
-          <p:cNvPr id="30" name="TextBox 29"/>
-          <p:cNvSpPr txBox="1"/>
-          <p:nvPr/>
-        </p:nvSpPr>
-        <p:spPr>
-          <a:xfrm>
-            <a:off x="424800" y="5453999"/>
-            <a:ext cx="9057600" cy="306000"/>
-          </a:xfrm>
-          <a:prstGeom prst="rect">
-            <a:avLst/>
-          </a:prstGeom>
-          <a:noFill/>
-        </p:spPr>
-        <p:txBody>
-          <a:bodyPr wrap="square" anchor="ctr" lIns="0" rIns="0" tIns="0" bIns="0">
-            <a:spAutoFit/>
-          </a:bodyPr>
-          <a:lstStyle/>
-          <a:p>
-            <a:pPr algn="ctr"/>
-            <a:r>
-              <a:rPr sz="1100" b="1">
-                <a:solidFill>
-                  <a:srgbClr val="FFFFFF"/>
-                </a:solidFill>
-                <a:latin typeface="맑은 고딕"/>
-                <a:ea typeface="맑은 고딕"/>
-                <a:cs typeface="맑은 고딕"/>
-              </a:rPr>
-              <a:t>소량 즉시배송 → 全 상품 장보기 배송 전환, 점포 </a:t>
-            </a:r>
-            <a:r>
-              <a:rPr sz="1000" b="1">
-                <a:solidFill>
-                  <a:srgbClr val="FFFFFF"/>
-                </a:solidFill>
-                <a:latin typeface="맑은 고딕"/>
-                <a:ea typeface="맑은 고딕"/>
-                <a:cs typeface="맑은 고딕"/>
-              </a:rPr>
-              <a:t>(PP센터)</a:t>
-            </a:r>
-            <a:r>
-              <a:rPr sz="1100" b="1">
-                <a:solidFill>
-                  <a:srgbClr val="FFFFFF"/>
-                </a:solidFill>
-                <a:latin typeface="맑은 고딕"/>
-                <a:ea typeface="맑은 고딕"/>
-                <a:cs typeface="맑은 고딕"/>
-              </a:rPr>
-              <a:t> 온라인 가동률 제고</a:t>
-            </a:r>
-          </a:p>
-        </p:txBody>
-      </p:sp>
-      <p:sp>
-        <p:nvSpPr>
-          <p:cNvPr id="31" name="TextBox 30"/>
-          <p:cNvSpPr txBox="1"/>
-          <p:nvPr/>
-        </p:nvSpPr>
-        <p:spPr>
-          <a:xfrm>
-            <a:off x="424800" y="5832000"/>
+            <a:off x="424800" y="5882399"/>
             <a:ext cx="9057600" cy="180000"/>
           </a:xfrm>
           <a:prstGeom prst="rect">

--- a/reports/ssg-quickcommerce-onepager.pptx
+++ b/reports/ssg-quickcommerce-onepager.pptx
@@ -3131,7 +3131,7 @@
                 <a:ea typeface="맑은 고딕"/>
                 <a:cs typeface="맑은 고딕"/>
               </a:rPr>
-              <a:t>이마트, 점포 기반 '2시간 배송' 도입 — 퀵커머스의 장보기 채널化</a:t>
+              <a:t>이마트, 점포 기반 '2시간 배송' 도입</a:t>
             </a:r>
           </a:p>
         </p:txBody>
@@ -3145,7 +3145,7 @@
         <p:spPr>
           <a:xfrm>
             <a:off x="435600" y="1044000"/>
-            <a:ext cx="8856000" cy="234000"/>
+            <a:ext cx="8928000" cy="234000"/>
           </a:xfrm>
           <a:prstGeom prst="rect">
             <a:avLst/>
@@ -3153,7 +3153,7 @@
           <a:noFill/>
         </p:spPr>
         <p:txBody>
-          <a:bodyPr wrap="square" anchor="t" lIns="0" rIns="0" tIns="0" bIns="0">
+          <a:bodyPr wrap="square" lIns="0" rIns="0" tIns="0" bIns="0">
             <a:spAutoFit/>
           </a:bodyPr>
           <a:lstStyle/>
@@ -3168,18 +3168,18 @@
                 <a:ea typeface="맑은 고딕"/>
                 <a:cs typeface="맑은 고딕"/>
               </a:rPr>
-              <a:t>취급 상품 소량 1만 종 → 마트 全 상품 15만 종 확대 — 점포 </a:t>
-            </a:r>
-            <a:r>
-              <a:rPr sz="1300" b="1">
+              <a:t>취급 상품 </a:t>
+            </a:r>
+            <a:r>
+              <a:rPr sz="1400" b="1">
                 <a:solidFill>
-                  <a:srgbClr val="000000"/>
+                  <a:srgbClr val="C30C3E"/>
                 </a:solidFill>
                 <a:latin typeface="맑은 고딕"/>
                 <a:ea typeface="맑은 고딕"/>
                 <a:cs typeface="맑은 고딕"/>
               </a:rPr>
-              <a:t>(PP센터)</a:t>
+              <a:t>소량 1만 종 → 마트 全 상품 15만 종 확대</a:t>
             </a:r>
             <a:r>
               <a:rPr sz="1400" b="1">
@@ -3190,7 +3190,7 @@
                 <a:ea typeface="맑은 고딕"/>
                 <a:cs typeface="맑은 고딕"/>
               </a:rPr>
-              <a:t> 온라인 가동률 제고 목적</a:t>
+              <a:t> — 점포(PP센터) 온라인 가동률 제고 목적</a:t>
             </a:r>
           </a:p>
         </p:txBody>
@@ -3203,7 +3203,7 @@
         </p:nvSpPr>
         <p:spPr>
           <a:xfrm>
-            <a:off x="424800" y="1458000"/>
+            <a:off x="424800" y="1447199"/>
             <a:ext cx="9057600" cy="201600"/>
           </a:xfrm>
           <a:prstGeom prst="rect">
@@ -3240,7 +3240,7 @@
         </p:nvSpPr>
         <p:spPr>
           <a:xfrm>
-            <a:off x="622800" y="1659599"/>
+            <a:off x="622800" y="1648800"/>
             <a:ext cx="8859600" cy="201600"/>
           </a:xfrm>
           <a:prstGeom prst="rect">
@@ -3321,7 +3321,7 @@
         </p:nvSpPr>
         <p:spPr>
           <a:xfrm>
-            <a:off x="622800" y="1861200"/>
+            <a:off x="622800" y="1850400"/>
             <a:ext cx="8859600" cy="201600"/>
           </a:xfrm>
           <a:prstGeom prst="rect">
@@ -3402,8 +3402,8 @@
         </p:nvSpPr>
         <p:spPr>
           <a:xfrm>
-            <a:off x="424800" y="2106000"/>
-            <a:ext cx="9057600" cy="180000"/>
+            <a:off x="424800" y="2109600"/>
+            <a:ext cx="9057600" cy="194400"/>
           </a:xfrm>
           <a:prstGeom prst="rect">
             <a:avLst/>
@@ -3426,7 +3426,7 @@
                 <a:ea typeface="맑은 고딕"/>
                 <a:cs typeface="맑은 고딕"/>
               </a:rPr>
-              <a:t>• ② 서비스 개요</a:t>
+              <a:t>• ② 서비스 개요 및 상품 차별점 — 소량 퀵커머스에서 全 상품 장보기로</a:t>
             </a:r>
           </a:p>
         </p:txBody>
@@ -3440,8 +3440,8 @@
           <p:nvPr/>
         </p:nvGraphicFramePr>
         <p:xfrm>
-          <a:off x="424800" y="2293200"/>
-          <a:ext cx="9057600" cy="1224000"/>
+          <a:off x="424800" y="2325600"/>
+          <a:ext cx="9057600" cy="2484000"/>
         </p:xfrm>
         <a:graphic>
           <a:graphicData uri="http://schemas.openxmlformats.org/drawingml/2006/table">
@@ -3450,11 +3450,11 @@
                 <a:tableStyleId>{5C22544A-7EE6-4342-B048-85BDC9FD1C3A}</a:tableStyleId>
               </a:tblPr>
               <a:tblGrid>
-                <a:gridCol w="1152000"/>
-                <a:gridCol w="3816000"/>
-                <a:gridCol w="4089600"/>
+                <a:gridCol w="1224000"/>
+                <a:gridCol w="3384000"/>
+                <a:gridCol w="4449600"/>
               </a:tblGrid>
-              <a:tr h="244800">
+              <a:tr h="354857">
                 <a:tc>
                   <a:txBody>
                     <a:bodyPr wrap="square"/>
@@ -3613,7 +3613,7 @@
                   </a:tcPr>
                 </a:tc>
               </a:tr>
-              <a:tr h="244800">
+              <a:tr h="354857">
                 <a:tc>
                   <a:txBody>
                     <a:bodyPr wrap="square"/>
@@ -3772,7 +3772,7 @@
                   </a:tcPr>
                 </a:tc>
               </a:tr>
-              <a:tr h="244800">
+              <a:tr h="354857">
                 <a:tc>
                   <a:txBody>
                     <a:bodyPr wrap="square"/>
@@ -3900,7 +3900,18 @@
                           <a:ea typeface="맑은 고딕"/>
                           <a:cs typeface="맑은 고딕"/>
                         </a:rPr>
-                        <a:t>(이마트 全 상품)</a:t>
+                        <a:t>(마트 全 상품)</a:t>
+                      </a:r>
+                      <a:r>
+                        <a:rPr sz="1000" b="1">
+                          <a:solidFill>
+                            <a:srgbClr val="002060"/>
+                          </a:solidFill>
+                          <a:latin typeface="맑은 고딕"/>
+                          <a:ea typeface="맑은 고딕"/>
+                          <a:cs typeface="맑은 고딕"/>
+                        </a:rPr>
+                        <a:t> — 대용량·신선 전면 개방</a:t>
                       </a:r>
                     </a:p>
                   </a:txBody>
@@ -3931,7 +3942,144 @@
                   </a:tcPr>
                 </a:tc>
               </a:tr>
-              <a:tr h="244800">
+              <a:tr h="354857">
+                <a:tc>
+                  <a:txBody>
+                    <a:bodyPr wrap="square"/>
+                    <a:lstStyle/>
+                    <a:p>
+                      <a:pPr algn="ctr"/>
+                      <a:r>
+                        <a:rPr sz="1000" b="1">
+                          <a:solidFill>
+                            <a:srgbClr val="000000"/>
+                          </a:solidFill>
+                          <a:latin typeface="맑은 고딕"/>
+                          <a:ea typeface="맑은 고딕"/>
+                          <a:cs typeface="맑은 고딕"/>
+                        </a:rPr>
+                        <a:t>신선·포장</a:t>
+                      </a:r>
+                    </a:p>
+                  </a:txBody>
+                  <a:tcPr anchor="ctr" marL="36000" marR="36000" marT="0" marB="0">
+                    <a:lnL w="9525" cap="flat">
+                      <a:solidFill>
+                        <a:srgbClr val="BFBFBF"/>
+                      </a:solidFill>
+                    </a:lnL>
+                    <a:lnR w="9525" cap="flat">
+                      <a:solidFill>
+                        <a:srgbClr val="BFBFBF"/>
+                      </a:solidFill>
+                    </a:lnR>
+                    <a:lnT w="9525" cap="flat">
+                      <a:solidFill>
+                        <a:srgbClr val="BFBFBF"/>
+                      </a:solidFill>
+                    </a:lnT>
+                    <a:lnB w="9525" cap="flat">
+                      <a:solidFill>
+                        <a:srgbClr val="BFBFBF"/>
+                      </a:solidFill>
+                    </a:lnB>
+                    <a:solidFill>
+                      <a:srgbClr val="FFFFFF"/>
+                    </a:solidFill>
+                  </a:tcPr>
+                </a:tc>
+                <a:tc>
+                  <a:txBody>
+                    <a:bodyPr wrap="square"/>
+                    <a:lstStyle/>
+                    <a:p>
+                      <a:pPr algn="l"/>
+                      <a:r>
+                        <a:rPr sz="1000" b="0">
+                          <a:solidFill>
+                            <a:srgbClr val="000000"/>
+                          </a:solidFill>
+                          <a:latin typeface="맑은 고딕"/>
+                          <a:ea typeface="맑은 고딕"/>
+                          <a:cs typeface="맑은 고딕"/>
+                        </a:rPr>
+                        <a:t>일반 포장</a:t>
+                      </a:r>
+                    </a:p>
+                  </a:txBody>
+                  <a:tcPr anchor="ctr" marL="36000" marR="36000" marT="0" marB="0">
+                    <a:lnL w="9525" cap="flat">
+                      <a:solidFill>
+                        <a:srgbClr val="BFBFBF"/>
+                      </a:solidFill>
+                    </a:lnL>
+                    <a:lnR w="9525" cap="flat">
+                      <a:solidFill>
+                        <a:srgbClr val="BFBFBF"/>
+                      </a:solidFill>
+                    </a:lnR>
+                    <a:lnT w="9525" cap="flat">
+                      <a:solidFill>
+                        <a:srgbClr val="BFBFBF"/>
+                      </a:solidFill>
+                    </a:lnT>
+                    <a:lnB w="9525" cap="flat">
+                      <a:solidFill>
+                        <a:srgbClr val="BFBFBF"/>
+                      </a:solidFill>
+                    </a:lnB>
+                    <a:solidFill>
+                      <a:srgbClr val="FFFFFF"/>
+                    </a:solidFill>
+                  </a:tcPr>
+                </a:tc>
+                <a:tc>
+                  <a:txBody>
+                    <a:bodyPr wrap="square"/>
+                    <a:lstStyle/>
+                    <a:p>
+                      <a:pPr algn="l"/>
+                      <a:r>
+                        <a:rPr sz="1000" b="1">
+                          <a:solidFill>
+                            <a:srgbClr val="002060"/>
+                          </a:solidFill>
+                          <a:latin typeface="맑은 고딕"/>
+                          <a:ea typeface="맑은 고딕"/>
+                          <a:cs typeface="맑은 고딕"/>
+                        </a:rPr>
+                        <a:t>육류·생선·과일 매장 직접 집품 · 전용 보냉 파우치 콜드체인</a:t>
+                      </a:r>
+                    </a:p>
+                  </a:txBody>
+                  <a:tcPr anchor="ctr" marL="36000" marR="36000" marT="0" marB="0">
+                    <a:lnL w="9525" cap="flat">
+                      <a:solidFill>
+                        <a:srgbClr val="BFBFBF"/>
+                      </a:solidFill>
+                    </a:lnL>
+                    <a:lnR w="9525" cap="flat">
+                      <a:solidFill>
+                        <a:srgbClr val="BFBFBF"/>
+                      </a:solidFill>
+                    </a:lnR>
+                    <a:lnT w="9525" cap="flat">
+                      <a:solidFill>
+                        <a:srgbClr val="BFBFBF"/>
+                      </a:solidFill>
+                    </a:lnT>
+                    <a:lnB w="9525" cap="flat">
+                      <a:solidFill>
+                        <a:srgbClr val="BFBFBF"/>
+                      </a:solidFill>
+                    </a:lnB>
+                    <a:solidFill>
+                      <a:srgbClr val="DEEBF7"/>
+                    </a:solidFill>
+                  </a:tcPr>
+                </a:tc>
+              </a:tr>
+              <a:tr h="354857">
                 <a:tc>
                   <a:txBody>
                     <a:bodyPr wrap="square"/>
@@ -4068,7 +4216,155 @@
                   </a:tcPr>
                 </a:tc>
               </a:tr>
-              <a:tr h="244800">
+              <a:tr h="354857">
+                <a:tc>
+                  <a:txBody>
+                    <a:bodyPr wrap="square"/>
+                    <a:lstStyle/>
+                    <a:p>
+                      <a:pPr algn="ctr"/>
+                      <a:r>
+                        <a:rPr sz="1000" b="1">
+                          <a:solidFill>
+                            <a:srgbClr val="000000"/>
+                          </a:solidFill>
+                          <a:latin typeface="맑은 고딕"/>
+                          <a:ea typeface="맑은 고딕"/>
+                          <a:cs typeface="맑은 고딕"/>
+                        </a:rPr>
+                        <a:t>고객·용도</a:t>
+                      </a:r>
+                    </a:p>
+                  </a:txBody>
+                  <a:tcPr anchor="ctr" marL="36000" marR="36000" marT="0" marB="0">
+                    <a:lnL w="9525" cap="flat">
+                      <a:solidFill>
+                        <a:srgbClr val="BFBFBF"/>
+                      </a:solidFill>
+                    </a:lnL>
+                    <a:lnR w="9525" cap="flat">
+                      <a:solidFill>
+                        <a:srgbClr val="BFBFBF"/>
+                      </a:solidFill>
+                    </a:lnR>
+                    <a:lnT w="9525" cap="flat">
+                      <a:solidFill>
+                        <a:srgbClr val="BFBFBF"/>
+                      </a:solidFill>
+                    </a:lnT>
+                    <a:lnB w="9525" cap="flat">
+                      <a:solidFill>
+                        <a:srgbClr val="BFBFBF"/>
+                      </a:solidFill>
+                    </a:lnB>
+                    <a:solidFill>
+                      <a:srgbClr val="FFFFFF"/>
+                    </a:solidFill>
+                  </a:tcPr>
+                </a:tc>
+                <a:tc>
+                  <a:txBody>
+                    <a:bodyPr wrap="square"/>
+                    <a:lstStyle/>
+                    <a:p>
+                      <a:pPr algn="l"/>
+                      <a:r>
+                        <a:rPr sz="1000" b="0">
+                          <a:solidFill>
+                            <a:srgbClr val="000000"/>
+                          </a:solidFill>
+                          <a:latin typeface="맑은 고딕"/>
+                          <a:ea typeface="맑은 고딕"/>
+                          <a:cs typeface="맑은 고딕"/>
+                        </a:rPr>
+                        <a:t>2030 · 소용량 </a:t>
+                      </a:r>
+                      <a:r>
+                        <a:rPr sz="900" b="0">
+                          <a:solidFill>
+                            <a:srgbClr val="000000"/>
+                          </a:solidFill>
+                          <a:latin typeface="맑은 고딕"/>
+                          <a:ea typeface="맑은 고딕"/>
+                          <a:cs typeface="맑은 고딕"/>
+                        </a:rPr>
+                        <a:t>(그로서리 90%)</a:t>
+                      </a:r>
+                    </a:p>
+                  </a:txBody>
+                  <a:tcPr anchor="ctr" marL="36000" marR="36000" marT="0" marB="0">
+                    <a:lnL w="9525" cap="flat">
+                      <a:solidFill>
+                        <a:srgbClr val="BFBFBF"/>
+                      </a:solidFill>
+                    </a:lnL>
+                    <a:lnR w="9525" cap="flat">
+                      <a:solidFill>
+                        <a:srgbClr val="BFBFBF"/>
+                      </a:solidFill>
+                    </a:lnR>
+                    <a:lnT w="9525" cap="flat">
+                      <a:solidFill>
+                        <a:srgbClr val="BFBFBF"/>
+                      </a:solidFill>
+                    </a:lnT>
+                    <a:lnB w="9525" cap="flat">
+                      <a:solidFill>
+                        <a:srgbClr val="BFBFBF"/>
+                      </a:solidFill>
+                    </a:lnB>
+                    <a:solidFill>
+                      <a:srgbClr val="FFFFFF"/>
+                    </a:solidFill>
+                  </a:tcPr>
+                </a:tc>
+                <a:tc>
+                  <a:txBody>
+                    <a:bodyPr wrap="square"/>
+                    <a:lstStyle/>
+                    <a:p>
+                      <a:pPr algn="l"/>
+                      <a:r>
+                        <a:rPr sz="1000" b="1">
+                          <a:solidFill>
+                            <a:srgbClr val="002060"/>
+                          </a:solidFill>
+                          <a:latin typeface="맑은 고딕"/>
+                          <a:ea typeface="맑은 고딕"/>
+                          <a:cs typeface="맑은 고딕"/>
+                        </a:rPr>
+                        <a:t>본 장보기 수요 겨냥</a:t>
+                      </a:r>
+                    </a:p>
+                  </a:txBody>
+                  <a:tcPr anchor="ctr" marL="36000" marR="36000" marT="0" marB="0">
+                    <a:lnL w="9525" cap="flat">
+                      <a:solidFill>
+                        <a:srgbClr val="BFBFBF"/>
+                      </a:solidFill>
+                    </a:lnL>
+                    <a:lnR w="9525" cap="flat">
+                      <a:solidFill>
+                        <a:srgbClr val="BFBFBF"/>
+                      </a:solidFill>
+                    </a:lnR>
+                    <a:lnT w="9525" cap="flat">
+                      <a:solidFill>
+                        <a:srgbClr val="BFBFBF"/>
+                      </a:solidFill>
+                    </a:lnT>
+                    <a:lnB w="9525" cap="flat">
+                      <a:solidFill>
+                        <a:srgbClr val="BFBFBF"/>
+                      </a:solidFill>
+                    </a:lnB>
+                    <a:solidFill>
+                      <a:srgbClr val="DEEBF7"/>
+                    </a:solidFill>
+                  </a:tcPr>
+                </a:tc>
+              </a:tr>
+              <a:tr h="354858">
                 <a:tc>
                   <a:txBody>
                     <a:bodyPr wrap="square"/>
@@ -4228,7 +4524,7 @@
         </p:nvSpPr>
         <p:spPr>
           <a:xfrm>
-            <a:off x="424800" y="3531599"/>
+            <a:off x="424800" y="4827600"/>
             <a:ext cx="9057600" cy="144000"/>
           </a:xfrm>
           <a:prstGeom prst="rect">
@@ -4287,7 +4583,7 @@
         </p:nvSpPr>
         <p:spPr>
           <a:xfrm>
-            <a:off x="424800" y="3729600"/>
+            <a:off x="424800" y="4986000"/>
             <a:ext cx="9057600" cy="194400"/>
           </a:xfrm>
           <a:prstGeom prst="rect">
@@ -4311,249 +4607,20 @@
                 <a:ea typeface="맑은 고딕"/>
                 <a:cs typeface="맑은 고딕"/>
               </a:rPr>
-              <a:t>• ③ 취급 상품 차별점 — 소량 퀵커머스에서 全 상품 장보기로</a:t>
-            </a:r>
-          </a:p>
-        </p:txBody>
-      </p:sp>
-      <p:sp>
-        <p:nvSpPr>
-          <p:cNvPr id="11" name="TextBox 10"/>
-          <p:cNvSpPr txBox="1"/>
-          <p:nvPr/>
-        </p:nvSpPr>
-        <p:spPr>
-          <a:xfrm>
-            <a:off x="622800" y="3959999"/>
-            <a:ext cx="8859600" cy="251999"/>
-          </a:xfrm>
-          <a:prstGeom prst="rect">
-            <a:avLst/>
-          </a:prstGeom>
-          <a:noFill/>
-        </p:spPr>
-        <p:txBody>
-          <a:bodyPr wrap="square" anchor="t" lIns="0" rIns="0" tIns="0" bIns="0">
-            <a:spAutoFit/>
-          </a:bodyPr>
-          <a:lstStyle/>
-          <a:p>
-            <a:pPr algn="l"/>
-            <a:r>
-              <a:rPr sz="1100" b="0">
-                <a:solidFill>
-                  <a:srgbClr val="000000"/>
-                </a:solidFill>
-                <a:latin typeface="맑은 고딕"/>
-                <a:ea typeface="맑은 고딕"/>
-                <a:cs typeface="맑은 고딕"/>
-              </a:rPr>
-              <a:t>- 마트 全 상품 대상 : 기존 퀵커머스 미취급 대용량·신선 카테고리 전면 개방</a:t>
-            </a:r>
-          </a:p>
-        </p:txBody>
-      </p:sp>
-      <p:sp>
-        <p:nvSpPr>
-          <p:cNvPr id="12" name="TextBox 11"/>
-          <p:cNvSpPr txBox="1"/>
-          <p:nvPr/>
-        </p:nvSpPr>
-        <p:spPr>
-          <a:xfrm>
-            <a:off x="622800" y="4211999"/>
-            <a:ext cx="8859600" cy="251999"/>
-          </a:xfrm>
-          <a:prstGeom prst="rect">
-            <a:avLst/>
-          </a:prstGeom>
-          <a:noFill/>
-        </p:spPr>
-        <p:txBody>
-          <a:bodyPr wrap="square" anchor="t" lIns="0" rIns="0" tIns="0" bIns="0">
-            <a:spAutoFit/>
-          </a:bodyPr>
-          <a:lstStyle/>
-          <a:p>
-            <a:pPr algn="l"/>
-            <a:r>
-              <a:rPr sz="1100" b="0">
-                <a:solidFill>
-                  <a:srgbClr val="000000"/>
-                </a:solidFill>
-                <a:latin typeface="맑은 고딕"/>
-                <a:ea typeface="맑은 고딕"/>
-                <a:cs typeface="맑은 고딕"/>
-              </a:rPr>
-              <a:t>- 신선식품 </a:t>
-            </a:r>
-            <a:r>
-              <a:rPr sz="1000" b="0">
-                <a:solidFill>
-                  <a:srgbClr val="000000"/>
-                </a:solidFill>
-                <a:latin typeface="맑은 고딕"/>
-                <a:ea typeface="맑은 고딕"/>
-                <a:cs typeface="맑은 고딕"/>
-              </a:rPr>
-              <a:t>(육류·생선·과일)</a:t>
-            </a:r>
-            <a:r>
-              <a:rPr sz="1100" b="0">
-                <a:solidFill>
-                  <a:srgbClr val="000000"/>
-                </a:solidFill>
-                <a:latin typeface="맑은 고딕"/>
-                <a:ea typeface="맑은 고딕"/>
-                <a:cs typeface="맑은 고딕"/>
-              </a:rPr>
-              <a:t> 중심 소구 — 매장 재고 직접 집품으로 선도 유지</a:t>
-            </a:r>
-          </a:p>
-        </p:txBody>
-      </p:sp>
-      <p:sp>
-        <p:nvSpPr>
-          <p:cNvPr id="13" name="TextBox 12"/>
-          <p:cNvSpPr txBox="1"/>
-          <p:nvPr/>
-        </p:nvSpPr>
-        <p:spPr>
-          <a:xfrm>
-            <a:off x="622800" y="4463999"/>
-            <a:ext cx="8859600" cy="251999"/>
-          </a:xfrm>
-          <a:prstGeom prst="rect">
-            <a:avLst/>
-          </a:prstGeom>
-          <a:noFill/>
-        </p:spPr>
-        <p:txBody>
-          <a:bodyPr wrap="square" anchor="t" lIns="0" rIns="0" tIns="0" bIns="0">
-            <a:spAutoFit/>
-          </a:bodyPr>
-          <a:lstStyle/>
-          <a:p>
-            <a:pPr algn="l"/>
-            <a:r>
-              <a:rPr sz="1100" b="0">
-                <a:solidFill>
-                  <a:srgbClr val="000000"/>
-                </a:solidFill>
-                <a:latin typeface="맑은 고딕"/>
-                <a:ea typeface="맑은 고딕"/>
-                <a:cs typeface="맑은 고딕"/>
-              </a:rPr>
-              <a:t>- 냉장·냉동 전용 보냉 파우치 포장 후 매장 즉시 출고 — 콜드체인 체계 적용</a:t>
-            </a:r>
-          </a:p>
-        </p:txBody>
-      </p:sp>
-      <p:sp>
-        <p:nvSpPr>
-          <p:cNvPr id="14" name="TextBox 13"/>
-          <p:cNvSpPr txBox="1"/>
-          <p:nvPr/>
-        </p:nvSpPr>
-        <p:spPr>
-          <a:xfrm>
-            <a:off x="622800" y="4715999"/>
-            <a:ext cx="8859600" cy="251999"/>
-          </a:xfrm>
-          <a:prstGeom prst="rect">
-            <a:avLst/>
-          </a:prstGeom>
-          <a:noFill/>
-        </p:spPr>
-        <p:txBody>
-          <a:bodyPr wrap="square" anchor="t" lIns="0" rIns="0" tIns="0" bIns="0">
-            <a:spAutoFit/>
-          </a:bodyPr>
-          <a:lstStyle/>
-          <a:p>
-            <a:pPr algn="l"/>
-            <a:r>
-              <a:rPr sz="1100" b="0">
-                <a:solidFill>
-                  <a:srgbClr val="000000"/>
-                </a:solidFill>
-                <a:latin typeface="맑은 고딕"/>
-                <a:ea typeface="맑은 고딕"/>
-                <a:cs typeface="맑은 고딕"/>
-              </a:rPr>
-              <a:t>- 기존 '바로퀵' 고객층 </a:t>
-            </a:r>
-            <a:r>
-              <a:rPr sz="1000" b="0">
-                <a:solidFill>
-                  <a:srgbClr val="000000"/>
-                </a:solidFill>
-                <a:latin typeface="맑은 고딕"/>
-                <a:ea typeface="맑은 고딕"/>
-                <a:cs typeface="맑은 고딕"/>
-              </a:rPr>
-              <a:t>(2030·소용량·그로서리 90%)</a:t>
-            </a:r>
-            <a:r>
-              <a:rPr sz="1100" b="0">
-                <a:solidFill>
-                  <a:srgbClr val="000000"/>
-                </a:solidFill>
-                <a:latin typeface="맑은 고딕"/>
-                <a:ea typeface="맑은 고딕"/>
-                <a:cs typeface="맑은 고딕"/>
-              </a:rPr>
-              <a:t>과 구분되는 본 장보기 수요 겨냥</a:t>
-            </a:r>
-          </a:p>
-        </p:txBody>
-      </p:sp>
-      <p:sp>
-        <p:nvSpPr>
-          <p:cNvPr id="15" name="TextBox 14"/>
-          <p:cNvSpPr txBox="1"/>
-          <p:nvPr/>
-        </p:nvSpPr>
-        <p:spPr>
-          <a:xfrm>
-            <a:off x="424800" y="5054399"/>
-            <a:ext cx="9057600" cy="194400"/>
-          </a:xfrm>
-          <a:prstGeom prst="rect">
-            <a:avLst/>
-          </a:prstGeom>
-          <a:noFill/>
-        </p:spPr>
-        <p:txBody>
-          <a:bodyPr wrap="square" anchor="t" lIns="0" rIns="0" tIns="0" bIns="0">
-            <a:spAutoFit/>
-          </a:bodyPr>
-          <a:lstStyle/>
-          <a:p>
-            <a:pPr algn="l"/>
-            <a:r>
-              <a:rPr sz="1200" b="1">
-                <a:solidFill>
-                  <a:srgbClr val="000000"/>
-                </a:solidFill>
-                <a:latin typeface="맑은 고딕"/>
-                <a:ea typeface="맑은 고딕"/>
-                <a:cs typeface="맑은 고딕"/>
-              </a:rPr>
-              <a:t>• ④ 확산 로드맵</a:t>
+              <a:t>• ③ 확산 로드맵</a:t>
             </a:r>
           </a:p>
         </p:txBody>
       </p:sp>
       <p:cxnSp>
         <p:nvCxnSpPr>
-          <p:cNvPr id="16" name="Connector 15"/>
+          <p:cNvPr id="11" name="Connector 10"/>
           <p:cNvCxnSpPr/>
           <p:nvPr/>
         </p:nvCxnSpPr>
         <p:spPr>
           <a:xfrm>
-            <a:off x="424800" y="5511599"/>
+            <a:off x="424800" y="5407200"/>
             <a:ext cx="9057600" cy="0"/>
           </a:xfrm>
           <a:prstGeom prst="bentConnector3">
@@ -4585,13 +4652,13 @@
       </p:cxnSp>
       <p:sp>
         <p:nvSpPr>
-          <p:cNvPr id="17" name="Oval 16"/>
+          <p:cNvPr id="12" name="Oval 11"/>
           <p:cNvSpPr/>
           <p:nvPr/>
         </p:nvSpPr>
         <p:spPr>
           <a:xfrm>
-            <a:off x="1506600" y="5461199"/>
+            <a:off x="1506600" y="5356800"/>
             <a:ext cx="100800" cy="100800"/>
           </a:xfrm>
           <a:prstGeom prst="ellipse">
@@ -4631,13 +4698,13 @@
       </p:sp>
       <p:sp>
         <p:nvSpPr>
-          <p:cNvPr id="18" name="TextBox 17"/>
+          <p:cNvPr id="13" name="TextBox 12"/>
           <p:cNvSpPr txBox="1"/>
           <p:nvPr/>
         </p:nvSpPr>
         <p:spPr>
           <a:xfrm>
-            <a:off x="424800" y="5306399"/>
+            <a:off x="424800" y="5202000"/>
             <a:ext cx="2264400" cy="162000"/>
           </a:xfrm>
           <a:prstGeom prst="rect">
@@ -4668,14 +4735,14 @@
       </p:sp>
       <p:sp>
         <p:nvSpPr>
-          <p:cNvPr id="19" name="TextBox 18"/>
+          <p:cNvPr id="14" name="TextBox 13"/>
           <p:cNvSpPr txBox="1"/>
           <p:nvPr/>
         </p:nvSpPr>
         <p:spPr>
           <a:xfrm>
-            <a:off x="424800" y="5576399"/>
-            <a:ext cx="2264400" cy="198000"/>
+            <a:off x="424800" y="5472000"/>
+            <a:ext cx="2264400" cy="208800"/>
           </a:xfrm>
           <a:prstGeom prst="rect">
             <a:avLst/>
@@ -4705,13 +4772,13 @@
       </p:sp>
       <p:sp>
         <p:nvSpPr>
-          <p:cNvPr id="20" name="Oval 19"/>
+          <p:cNvPr id="15" name="Oval 14"/>
           <p:cNvSpPr/>
           <p:nvPr/>
         </p:nvSpPr>
         <p:spPr>
           <a:xfrm>
-            <a:off x="3771000" y="5461199"/>
+            <a:off x="3771000" y="5356800"/>
             <a:ext cx="100800" cy="100800"/>
           </a:xfrm>
           <a:prstGeom prst="ellipse">
@@ -4751,13 +4818,13 @@
       </p:sp>
       <p:sp>
         <p:nvSpPr>
-          <p:cNvPr id="21" name="TextBox 20"/>
+          <p:cNvPr id="16" name="TextBox 15"/>
           <p:cNvSpPr txBox="1"/>
           <p:nvPr/>
         </p:nvSpPr>
         <p:spPr>
           <a:xfrm>
-            <a:off x="2689200" y="5306399"/>
+            <a:off x="2689200" y="5202000"/>
             <a:ext cx="2264400" cy="162000"/>
           </a:xfrm>
           <a:prstGeom prst="rect">
@@ -4788,14 +4855,14 @@
       </p:sp>
       <p:sp>
         <p:nvSpPr>
-          <p:cNvPr id="22" name="TextBox 21"/>
+          <p:cNvPr id="17" name="TextBox 16"/>
           <p:cNvSpPr txBox="1"/>
           <p:nvPr/>
         </p:nvSpPr>
         <p:spPr>
           <a:xfrm>
-            <a:off x="2689200" y="5576399"/>
-            <a:ext cx="2264400" cy="198000"/>
+            <a:off x="2689200" y="5472000"/>
+            <a:ext cx="2264400" cy="208800"/>
           </a:xfrm>
           <a:prstGeom prst="rect">
             <a:avLst/>
@@ -4836,13 +4903,13 @@
       </p:sp>
       <p:sp>
         <p:nvSpPr>
-          <p:cNvPr id="23" name="Oval 22"/>
+          <p:cNvPr id="18" name="Oval 17"/>
           <p:cNvSpPr/>
           <p:nvPr/>
         </p:nvSpPr>
         <p:spPr>
           <a:xfrm>
-            <a:off x="6035400" y="5461199"/>
+            <a:off x="6035400" y="5356800"/>
             <a:ext cx="100800" cy="100800"/>
           </a:xfrm>
           <a:prstGeom prst="ellipse">
@@ -4882,13 +4949,13 @@
       </p:sp>
       <p:sp>
         <p:nvSpPr>
-          <p:cNvPr id="24" name="TextBox 23"/>
+          <p:cNvPr id="19" name="TextBox 18"/>
           <p:cNvSpPr txBox="1"/>
           <p:nvPr/>
         </p:nvSpPr>
         <p:spPr>
           <a:xfrm>
-            <a:off x="4953600" y="5306399"/>
+            <a:off x="4953600" y="5202000"/>
             <a:ext cx="2264400" cy="162000"/>
           </a:xfrm>
           <a:prstGeom prst="rect">
@@ -4919,14 +4986,14 @@
       </p:sp>
       <p:sp>
         <p:nvSpPr>
-          <p:cNvPr id="25" name="TextBox 24"/>
+          <p:cNvPr id="20" name="TextBox 19"/>
           <p:cNvSpPr txBox="1"/>
           <p:nvPr/>
         </p:nvSpPr>
         <p:spPr>
           <a:xfrm>
-            <a:off x="4953600" y="5576399"/>
-            <a:ext cx="2264400" cy="198000"/>
+            <a:off x="4953600" y="5472000"/>
+            <a:ext cx="2264400" cy="208800"/>
           </a:xfrm>
           <a:prstGeom prst="rect">
             <a:avLst/>
@@ -4956,13 +5023,13 @@
       </p:sp>
       <p:sp>
         <p:nvSpPr>
-          <p:cNvPr id="26" name="Oval 25"/>
+          <p:cNvPr id="21" name="Oval 20"/>
           <p:cNvSpPr/>
           <p:nvPr/>
         </p:nvSpPr>
         <p:spPr>
           <a:xfrm>
-            <a:off x="8299800" y="5461199"/>
+            <a:off x="8299800" y="5356800"/>
             <a:ext cx="100800" cy="100800"/>
           </a:xfrm>
           <a:prstGeom prst="ellipse">
@@ -5002,13 +5069,13 @@
       </p:sp>
       <p:sp>
         <p:nvSpPr>
-          <p:cNvPr id="27" name="TextBox 26"/>
+          <p:cNvPr id="22" name="TextBox 21"/>
           <p:cNvSpPr txBox="1"/>
           <p:nvPr/>
         </p:nvSpPr>
         <p:spPr>
           <a:xfrm>
-            <a:off x="7218000" y="5306399"/>
+            <a:off x="7218000" y="5202000"/>
             <a:ext cx="2264400" cy="162000"/>
           </a:xfrm>
           <a:prstGeom prst="rect">
@@ -5039,14 +5106,14 @@
       </p:sp>
       <p:sp>
         <p:nvSpPr>
-          <p:cNvPr id="28" name="TextBox 27"/>
+          <p:cNvPr id="23" name="TextBox 22"/>
           <p:cNvSpPr txBox="1"/>
           <p:nvPr/>
         </p:nvSpPr>
         <p:spPr>
           <a:xfrm>
-            <a:off x="7218000" y="5576399"/>
-            <a:ext cx="2264400" cy="198000"/>
+            <a:off x="7218000" y="5472000"/>
+            <a:ext cx="2264400" cy="208800"/>
           </a:xfrm>
           <a:prstGeom prst="rect">
             <a:avLst/>
@@ -5076,13 +5143,59 @@
       </p:sp>
       <p:sp>
         <p:nvSpPr>
-          <p:cNvPr id="29" name="TextBox 28"/>
+          <p:cNvPr id="24" name="Oval 23"/>
+          <p:cNvSpPr/>
+          <p:nvPr/>
+        </p:nvSpPr>
+        <p:spPr>
+          <a:xfrm>
+            <a:off x="8288999" y="5346000"/>
+            <a:ext cx="122400" cy="122400"/>
+          </a:xfrm>
+          <a:prstGeom prst="ellipse">
+            <a:avLst/>
+          </a:prstGeom>
+          <a:solidFill>
+            <a:srgbClr val="C30C3E"/>
+          </a:solidFill>
+          <a:ln>
+            <a:solidFill>
+              <a:srgbClr val="C30C3E"/>
+            </a:solidFill>
+          </a:ln>
+          <a:effectLst/>
+        </p:spPr>
+        <p:style>
+          <a:lnRef idx="1">
+            <a:schemeClr val="accent1"/>
+          </a:lnRef>
+          <a:fillRef idx="3">
+            <a:schemeClr val="accent1"/>
+          </a:fillRef>
+          <a:effectRef idx="2">
+            <a:schemeClr val="accent1"/>
+          </a:effectRef>
+          <a:fontRef idx="minor">
+            <a:schemeClr val="lt1"/>
+          </a:fontRef>
+        </p:style>
+        <p:txBody>
+          <a:bodyPr rtlCol="0" anchor="ctr"/>
+          <a:lstStyle/>
+          <a:p>
+            <a:pPr algn="ctr"/>
+          </a:p>
+        </p:txBody>
+      </p:sp>
+      <p:sp>
+        <p:nvSpPr>
+          <p:cNvPr id="25" name="TextBox 24"/>
           <p:cNvSpPr txBox="1"/>
           <p:nvPr/>
         </p:nvSpPr>
         <p:spPr>
           <a:xfrm>
-            <a:off x="424800" y="5882399"/>
+            <a:off x="424800" y="5781600"/>
             <a:ext cx="9057600" cy="180000"/>
           </a:xfrm>
           <a:prstGeom prst="rect">

--- a/reports/ssg-quickcommerce-onepager.pptx
+++ b/reports/ssg-quickcommerce-onepager.pptx
@@ -3203,8 +3203,8 @@
         </p:nvSpPr>
         <p:spPr>
           <a:xfrm>
-            <a:off x="424800" y="1447199"/>
-            <a:ext cx="9057600" cy="201600"/>
+            <a:off x="1000800" y="1447199"/>
+            <a:ext cx="7905600" cy="201600"/>
           </a:xfrm>
           <a:prstGeom prst="rect">
             <a:avLst/>
@@ -3240,8 +3240,8 @@
         </p:nvSpPr>
         <p:spPr>
           <a:xfrm>
-            <a:off x="622800" y="1648800"/>
-            <a:ext cx="8859600" cy="201600"/>
+            <a:off x="1198800" y="1648800"/>
+            <a:ext cx="7707600" cy="201600"/>
           </a:xfrm>
           <a:prstGeom prst="rect">
             <a:avLst/>
@@ -3321,8 +3321,8 @@
         </p:nvSpPr>
         <p:spPr>
           <a:xfrm>
-            <a:off x="622800" y="1850400"/>
-            <a:ext cx="8859600" cy="201600"/>
+            <a:off x="1198800" y="1850400"/>
+            <a:ext cx="7707600" cy="201600"/>
           </a:xfrm>
           <a:prstGeom prst="rect">
             <a:avLst/>
@@ -3402,8 +3402,8 @@
         </p:nvSpPr>
         <p:spPr>
           <a:xfrm>
-            <a:off x="424800" y="2109600"/>
-            <a:ext cx="9057600" cy="194400"/>
+            <a:off x="1000800" y="2109600"/>
+            <a:ext cx="7905600" cy="194400"/>
           </a:xfrm>
           <a:prstGeom prst="rect">
             <a:avLst/>
@@ -3440,8 +3440,8 @@
           <p:nvPr/>
         </p:nvGraphicFramePr>
         <p:xfrm>
-          <a:off x="424800" y="2325600"/>
-          <a:ext cx="9057600" cy="2484000"/>
+          <a:off x="1000800" y="2325600"/>
+          <a:ext cx="7905599" cy="2484000"/>
         </p:xfrm>
         <a:graphic>
           <a:graphicData uri="http://schemas.openxmlformats.org/drawingml/2006/table">
@@ -3450,9 +3450,9 @@
                 <a:tableStyleId>{5C22544A-7EE6-4342-B048-85BDC9FD1C3A}</a:tableStyleId>
               </a:tblPr>
               <a:tblGrid>
-                <a:gridCol w="1224000"/>
-                <a:gridCol w="3384000"/>
-                <a:gridCol w="4449600"/>
+                <a:gridCol w="1007999"/>
+                <a:gridCol w="2988000"/>
+                <a:gridCol w="3909600"/>
               </a:tblGrid>
               <a:tr h="354857">
                 <a:tc>
@@ -4524,8 +4524,8 @@
         </p:nvSpPr>
         <p:spPr>
           <a:xfrm>
-            <a:off x="424800" y="4827600"/>
-            <a:ext cx="9057600" cy="144000"/>
+            <a:off x="1000800" y="4827600"/>
+            <a:ext cx="7905600" cy="144000"/>
           </a:xfrm>
           <a:prstGeom prst="rect">
             <a:avLst/>
@@ -4583,8 +4583,8 @@
         </p:nvSpPr>
         <p:spPr>
           <a:xfrm>
-            <a:off x="424800" y="4986000"/>
-            <a:ext cx="9057600" cy="194400"/>
+            <a:off x="1000800" y="4986000"/>
+            <a:ext cx="7905600" cy="194400"/>
           </a:xfrm>
           <a:prstGeom prst="rect">
             <a:avLst/>
@@ -4620,8 +4620,8 @@
         </p:nvCxnSpPr>
         <p:spPr>
           <a:xfrm>
-            <a:off x="424800" y="5407200"/>
-            <a:ext cx="9057600" cy="0"/>
+            <a:off x="1000800" y="5407200"/>
+            <a:ext cx="7905600" cy="0"/>
           </a:xfrm>
           <a:prstGeom prst="bentConnector3">
             <a:avLst/>
@@ -4658,7 +4658,7 @@
         </p:nvSpPr>
         <p:spPr>
           <a:xfrm>
-            <a:off x="1506600" y="5356800"/>
+            <a:off x="1938600" y="5356800"/>
             <a:ext cx="100800" cy="100800"/>
           </a:xfrm>
           <a:prstGeom prst="ellipse">
@@ -4704,8 +4704,8 @@
         </p:nvSpPr>
         <p:spPr>
           <a:xfrm>
-            <a:off x="424800" y="5202000"/>
-            <a:ext cx="2264400" cy="162000"/>
+            <a:off x="1000800" y="5202000"/>
+            <a:ext cx="1976400" cy="162000"/>
           </a:xfrm>
           <a:prstGeom prst="rect">
             <a:avLst/>
@@ -4741,8 +4741,8 @@
         </p:nvSpPr>
         <p:spPr>
           <a:xfrm>
-            <a:off x="424800" y="5472000"/>
-            <a:ext cx="2264400" cy="208800"/>
+            <a:off x="1000800" y="5472000"/>
+            <a:ext cx="1976400" cy="208800"/>
           </a:xfrm>
           <a:prstGeom prst="rect">
             <a:avLst/>
@@ -4778,7 +4778,7 @@
         </p:nvSpPr>
         <p:spPr>
           <a:xfrm>
-            <a:off x="3771000" y="5356800"/>
+            <a:off x="3915000" y="5356800"/>
             <a:ext cx="100800" cy="100800"/>
           </a:xfrm>
           <a:prstGeom prst="ellipse">
@@ -4824,8 +4824,8 @@
         </p:nvSpPr>
         <p:spPr>
           <a:xfrm>
-            <a:off x="2689200" y="5202000"/>
-            <a:ext cx="2264400" cy="162000"/>
+            <a:off x="2977200" y="5202000"/>
+            <a:ext cx="1976400" cy="162000"/>
           </a:xfrm>
           <a:prstGeom prst="rect">
             <a:avLst/>
@@ -4861,8 +4861,8 @@
         </p:nvSpPr>
         <p:spPr>
           <a:xfrm>
-            <a:off x="2689200" y="5472000"/>
-            <a:ext cx="2264400" cy="208800"/>
+            <a:off x="2977200" y="5472000"/>
+            <a:ext cx="1976400" cy="208800"/>
           </a:xfrm>
           <a:prstGeom prst="rect">
             <a:avLst/>
@@ -4909,7 +4909,7 @@
         </p:nvSpPr>
         <p:spPr>
           <a:xfrm>
-            <a:off x="6035400" y="5356800"/>
+            <a:off x="5891400" y="5356800"/>
             <a:ext cx="100800" cy="100800"/>
           </a:xfrm>
           <a:prstGeom prst="ellipse">
@@ -4956,7 +4956,7 @@
         <p:spPr>
           <a:xfrm>
             <a:off x="4953600" y="5202000"/>
-            <a:ext cx="2264400" cy="162000"/>
+            <a:ext cx="1976400" cy="162000"/>
           </a:xfrm>
           <a:prstGeom prst="rect">
             <a:avLst/>
@@ -4993,7 +4993,7 @@
         <p:spPr>
           <a:xfrm>
             <a:off x="4953600" y="5472000"/>
-            <a:ext cx="2264400" cy="208800"/>
+            <a:ext cx="1976400" cy="208800"/>
           </a:xfrm>
           <a:prstGeom prst="rect">
             <a:avLst/>
@@ -5029,7 +5029,7 @@
         </p:nvSpPr>
         <p:spPr>
           <a:xfrm>
-            <a:off x="8299800" y="5356800"/>
+            <a:off x="7867800" y="5356800"/>
             <a:ext cx="100800" cy="100800"/>
           </a:xfrm>
           <a:prstGeom prst="ellipse">
@@ -5075,8 +5075,8 @@
         </p:nvSpPr>
         <p:spPr>
           <a:xfrm>
-            <a:off x="7218000" y="5202000"/>
-            <a:ext cx="2264400" cy="162000"/>
+            <a:off x="6930000" y="5202000"/>
+            <a:ext cx="1976400" cy="162000"/>
           </a:xfrm>
           <a:prstGeom prst="rect">
             <a:avLst/>
@@ -5112,8 +5112,8 @@
         </p:nvSpPr>
         <p:spPr>
           <a:xfrm>
-            <a:off x="7218000" y="5472000"/>
-            <a:ext cx="2264400" cy="208800"/>
+            <a:off x="6930000" y="5472000"/>
+            <a:ext cx="1976400" cy="208800"/>
           </a:xfrm>
           <a:prstGeom prst="rect">
             <a:avLst/>
@@ -5149,7 +5149,7 @@
         </p:nvSpPr>
         <p:spPr>
           <a:xfrm>
-            <a:off x="8288999" y="5346000"/>
+            <a:off x="7857000" y="5346000"/>
             <a:ext cx="122400" cy="122400"/>
           </a:xfrm>
           <a:prstGeom prst="ellipse">
@@ -5195,8 +5195,8 @@
         </p:nvSpPr>
         <p:spPr>
           <a:xfrm>
-            <a:off x="424800" y="5781600"/>
-            <a:ext cx="9057600" cy="180000"/>
+            <a:off x="1000800" y="5781600"/>
+            <a:ext cx="7905600" cy="180000"/>
           </a:xfrm>
           <a:prstGeom prst="rect">
             <a:avLst/>
